--- a/docs/CrossMEP_CIBW78_talk.pptx
+++ b/docs/CrossMEP_CIBW78_talk.pptx
@@ -18,9 +18,12 @@
     <p:sldId id="266" r:id="rId12"/>
     <p:sldId id="267" r:id="rId13"/>
     <p:sldId id="268" r:id="rId14"/>
+    <p:sldId id="269" r:id="rId15"/>
+    <p:sldId id="270" r:id="rId16"/>
+    <p:sldId id="271" r:id="rId17"/>
   </p:sldIdLst>
   <p:notesMasterIdLst>
-    <p:notesMasterId r:id="rId15"/>
+    <p:notesMasterId r:id="rId18"/>
   </p:notesMasterIdLst>
   <p:sldSz cx="12192000" cy="6858000"/>
   <p:notesSz cx="6858000" cy="12192000"/>
@@ -119,41 +122,44 @@
   <p:extLst>
     <p:ext uri="{521415D9-36F7-43E2-AB2F-B90AF26B5E84}">
       <p14:sectionLst xmlns:p14="http://schemas.microsoft.com/office/powerpoint/2010/main">
-        <p14:section name="Opening" id="{e2f94bb5-04e5-2b55-1999-25446b61cf3f}">
+        <p14:section name="Opening" id="{3fa24993-b7be-168b-341f-823c9afa1797}">
           <p14:sldIdLst>
             <p14:sldId id="256"/>
           </p14:sldIdLst>
         </p14:section>
-        <p14:section name="The problem" id="{1aa4e5e4-c8f4-1365-d2fd-bbc72b140f80}">
+        <p14:section name="Motivation" id="{500c02aa-0e3c-d6fe-fb65-f3f158989fe2}">
           <p14:sldIdLst>
             <p14:sldId id="257"/>
             <p14:sldId id="258"/>
           </p14:sldIdLst>
         </p14:section>
-        <p14:section name="The dataset" id="{25af51c0-7fee-88d8-4f4a-6df54a3f5ea4}">
+        <p14:section name="The dataset" id="{558c0af5-6ebe-534f-3253-48219def04d5}">
           <p14:sldIdLst>
             <p14:sldId id="259"/>
             <p14:sldId id="260"/>
             <p14:sldId id="261"/>
+            <p14:sldId id="262"/>
+            <p14:sldId id="263"/>
           </p14:sldIdLst>
         </p14:section>
-        <p14:section name="Evidence" id="{d0345ed6-917a-e127-2a8a-b0aacede3b4d}">
+        <p14:section name="Experiments" id="{40898567-82b1-6663-a05c-8a2e1da4965f}">
           <p14:sldIdLst>
-            <p14:sldId id="262"/>
-            <p14:sldId id="263"/>
             <p14:sldId id="264"/>
-          </p14:sldIdLst>
-        </p14:section>
-        <p14:section name="Closing" id="{54c536a1-842f-462c-a2fa-d66c53e7ec58}">
-          <p14:sldIdLst>
             <p14:sldId id="265"/>
             <p14:sldId id="266"/>
           </p14:sldIdLst>
         </p14:section>
-        <p14:section name="Appendix" id="{4f8074b7-e94d-34ec-3121-52d930b806d6}">
+        <p14:section name="Use" id="{c7d2feb0-fcf7-e8f4-841d-d58bdb1f5dd2}">
           <p14:sldIdLst>
             <p14:sldId id="267"/>
             <p14:sldId id="268"/>
+            <p14:sldId id="269"/>
+          </p14:sldIdLst>
+        </p14:section>
+        <p14:section name="Appendix" id="{5eafb434-9fce-90fb-5d31-d6b14ce7f3e4}">
+          <p14:sldIdLst>
+            <p14:sldId id="270"/>
+            <p14:sldId id="271"/>
           </p14:sldIdLst>
         </p14:section>
       </p14:sectionLst>
@@ -166,6 +172,578 @@
 </file>
 
 <file path=ppt/charts/chart1.xml><?xml version="1.0" encoding="utf-8"?>
+<c:chartSpace xmlns:c="http://schemas.openxmlformats.org/drawingml/2006/chart" xmlns:a="http://schemas.openxmlformats.org/drawingml/2006/main" xmlns:r="http://schemas.openxmlformats.org/officeDocument/2006/relationships">
+  <c:date1904 val="0"/>
+  <c:roundedCorners val="1"/>
+  <c:chart>
+    <c:title>
+      <c:tx>
+        <c:rich>
+          <a:bodyPr/>
+          <a:lstStyle/>
+          <a:p>
+            <a:pPr>
+              <a:defRPr sz="1200" b="0" i="0" u="none" strike="noStrike">
+                <a:solidFill>
+                  <a:srgbClr val="0B0B0B"/>
+                </a:solidFill>
+                <a:latin typeface="+mn-lt"/>
+              </a:defRPr>
+            </a:pPr>
+            <a:r>
+              <a:rPr sz="1200" b="0" i="0" u="none" strike="noStrike">
+                <a:solidFill>
+                  <a:srgbClr val="0B0B0B"/>
+                </a:solidFill>
+                <a:latin typeface="+mn-lt"/>
+              </a:rPr>
+              <a:t>Elements by kind, all splits</a:t>
+            </a:r>
+          </a:p>
+        </c:rich>
+      </c:tx>
+      <c:layout/>
+      <c:overlay val="0"/>
+    </c:title>
+    <c:autoTitleDeleted val="0"/>
+    <c:plotArea>
+      <c:layout/>
+      <c:barChart>
+        <c:barDir val="bar"/>
+        <c:grouping val="clustered"/>
+        <c:varyColors val="0"/>
+        <c:ser>
+          <c:idx val="0"/>
+          <c:order val="0"/>
+          <c:tx>
+            <c:strRef>
+              <c:f>Sheet1!$B$1</c:f>
+              <c:strCache>
+                <c:ptCount val="1"/>
+                <c:pt idx="0">
+                  <c:v>elements</c:v>
+                </c:pt>
+              </c:strCache>
+            </c:strRef>
+          </c:tx>
+          <c:spPr>
+            <a:solidFill>
+              <a:srgbClr val="2A78D6"/>
+            </a:solidFill>
+            <a:effectLst/>
+          </c:spPr>
+          <c:invertIfNegative val="0"/>
+          <c:dLbls>
+            <c:numFmt formatCode="#,##0" sourceLinked="0"/>
+            <c:txPr>
+              <a:bodyPr/>
+              <a:lstStyle/>
+              <a:p>
+                <a:pPr>
+                  <a:defRPr b="0" i="0" strike="noStrike" sz="1000" u="none">
+                    <a:solidFill>
+                      <a:srgbClr val="0B0B0B"/>
+                    </a:solidFill>
+                    <a:latin typeface="+mn-lt"/>
+                  </a:defRPr>
+                </a:pPr>
+              </a:p>
+            </c:txPr>
+            <c:showLegendKey val="0"/>
+            <c:showVal val="1"/>
+            <c:showCatName val="0"/>
+            <c:showSerName val="0"/>
+            <c:showPercent val="0"/>
+            <c:showBubbleSize val="0"/>
+            <c:showLeaderLines val="0"/>
+          </c:dLbls>
+          <c:cat>
+            <c:multiLvlStrRef>
+              <c:f>Sheet1!$A$2:$A$5</c:f>
+              <c:multiLvlStrCache>
+                <c:ptCount val="4"/>
+                <c:lvl>
+                  <c:pt idx="0">
+                    <c:v>pipes</c:v>
+                  </c:pt>
+                  <c:pt idx="1">
+                    <c:v>conduits</c:v>
+                  </c:pt>
+                  <c:pt idx="2">
+                    <c:v>cable trays</c:v>
+                  </c:pt>
+                  <c:pt idx="3">
+                    <c:v>ducts</c:v>
+                  </c:pt>
+                </c:lvl>
+              </c:multiLvlStrCache>
+            </c:multiLvlStrRef>
+          </c:cat>
+          <c:val>
+            <c:numRef>
+              <c:f>Sheet1!$B$2:$B$5</c:f>
+              <c:numCache>
+                <c:formatCode>General</c:formatCode>
+                <c:ptCount val="4"/>
+                <c:pt idx="0">
+                  <c:v>17984</c:v>
+                </c:pt>
+                <c:pt idx="1">
+                  <c:v>7617</c:v>
+                </c:pt>
+                <c:pt idx="2">
+                  <c:v>3975</c:v>
+                </c:pt>
+                <c:pt idx="3">
+                  <c:v>1908</c:v>
+                </c:pt>
+              </c:numCache>
+            </c:numRef>
+          </c:val>
+        </c:ser>
+        <c:dLbls>
+          <c:numFmt formatCode="#,##0" sourceLinked="0"/>
+          <c:txPr>
+            <a:bodyPr/>
+            <a:lstStyle/>
+            <a:p>
+              <a:pPr>
+                <a:defRPr b="0" i="0" strike="noStrike" sz="1000" u="none">
+                  <a:solidFill>
+                    <a:srgbClr val="0B0B0B"/>
+                  </a:solidFill>
+                  <a:latin typeface="+mn-lt"/>
+                </a:defRPr>
+              </a:pPr>
+            </a:p>
+          </c:txPr>
+          <c:showLegendKey val="0"/>
+          <c:showVal val="1"/>
+          <c:showCatName val="0"/>
+          <c:showSerName val="0"/>
+          <c:showPercent val="0"/>
+          <c:showBubbleSize val="0"/>
+          <c:showLeaderLines val="0"/>
+        </c:dLbls>
+        <c:gapWidth val="70"/>
+        <c:overlap val="0"/>
+        <c:axId val="2094734554"/>
+        <c:axId val="2094734552"/>
+        <c:axId val="2094734556"/>
+      </c:barChart>
+      <c:catAx>
+        <c:axId val="2094734554"/>
+        <c:scaling>
+          <c:orientation val="maxMin"/>
+        </c:scaling>
+        <c:delete val="0"/>
+        <c:axPos val="l"/>
+        <c:numFmt formatCode="General" sourceLinked="1"/>
+        <c:majorTickMark val="out"/>
+        <c:minorTickMark val="none"/>
+        <c:tickLblPos val="nextTo"/>
+        <c:spPr>
+          <a:ln w="12700" cap="flat">
+            <a:solidFill>
+              <a:srgbClr val="888888"/>
+            </a:solidFill>
+            <a:prstDash val="solid"/>
+            <a:round/>
+          </a:ln>
+        </c:spPr>
+        <c:txPr>
+          <a:bodyPr/>
+          <a:lstStyle/>
+          <a:p>
+            <a:pPr>
+              <a:defRPr sz="1100" b="0" i="0" u="none" strike="noStrike">
+                <a:solidFill>
+                  <a:srgbClr val="52514E"/>
+                </a:solidFill>
+                <a:latin typeface="+mn-lt"/>
+              </a:defRPr>
+            </a:pPr>
+            <a:endParaRPr lang="en-US"/>
+          </a:p>
+        </c:txPr>
+        <c:crossAx val="2094734552"/>
+        <c:crosses val="autoZero"/>
+        <c:auto val="1"/>
+        <c:lblAlgn val="ctr"/>
+        <c:noMultiLvlLbl val="1"/>
+      </c:catAx>
+      <c:valAx>
+        <c:axId val="2094734552"/>
+        <c:scaling>
+          <c:orientation val="minMax"/>
+        </c:scaling>
+        <c:delete val="1"/>
+        <c:axPos val="b"/>
+        <c:numFmt formatCode="General" sourceLinked="0"/>
+        <c:majorTickMark val="out"/>
+        <c:minorTickMark val="none"/>
+        <c:tickLblPos val="low"/>
+        <c:spPr>
+          <a:ln w="12700" cap="flat">
+            <a:solidFill>
+              <a:srgbClr val="888888"/>
+            </a:solidFill>
+            <a:prstDash val="solid"/>
+            <a:round/>
+          </a:ln>
+        </c:spPr>
+        <c:txPr>
+          <a:bodyPr/>
+          <a:lstStyle/>
+          <a:p>
+            <a:pPr>
+              <a:defRPr sz="1000" b="0" i="0" u="none" strike="noStrike">
+                <a:solidFill>
+                  <a:srgbClr val="52514E"/>
+                </a:solidFill>
+                <a:latin typeface="+mn-lt"/>
+              </a:defRPr>
+            </a:pPr>
+            <a:endParaRPr lang="en-US"/>
+          </a:p>
+        </c:txPr>
+        <c:crossAx val="2094734554"/>
+        <c:crosses val="autoZero"/>
+        <c:crossBetween val="between"/>
+      </c:valAx>
+      <c:spPr>
+        <a:noFill/>
+        <a:ln>
+          <a:noFill/>
+        </a:ln>
+        <a:effectLst/>
+      </c:spPr>
+    </c:plotArea>
+    <c:plotVisOnly val="1"/>
+    <c:dispBlanksAs val="span"/>
+  </c:chart>
+  <c:spPr>
+    <a:noFill/>
+    <a:ln>
+      <a:noFill/>
+    </a:ln>
+    <a:effectLst/>
+  </c:spPr>
+  <c:externalData r:id="rId1">
+    <c:autoUpdate val="0"/>
+  </c:externalData>
+</c:chartSpace>
+</file>
+
+<file path=ppt/charts/chart2.xml><?xml version="1.0" encoding="utf-8"?>
+<c:chartSpace xmlns:c="http://schemas.openxmlformats.org/drawingml/2006/chart" xmlns:a="http://schemas.openxmlformats.org/drawingml/2006/main" xmlns:r="http://schemas.openxmlformats.org/officeDocument/2006/relationships">
+  <c:date1904 val="0"/>
+  <c:roundedCorners val="1"/>
+  <c:chart>
+    <c:title>
+      <c:tx>
+        <c:rich>
+          <a:bodyPr/>
+          <a:lstStyle/>
+          <a:p>
+            <a:pPr>
+              <a:defRPr sz="1200" b="0" i="0" u="none" strike="noStrike">
+                <a:solidFill>
+                  <a:srgbClr val="0B0B0B"/>
+                </a:solidFill>
+                <a:latin typeface="+mn-lt"/>
+              </a:defRPr>
+            </a:pPr>
+            <a:r>
+              <a:rPr sz="1200" b="0" i="0" u="none" strike="noStrike">
+                <a:solidFill>
+                  <a:srgbClr val="0B0B0B"/>
+                </a:solidFill>
+                <a:latin typeface="+mn-lt"/>
+              </a:rPr>
+              <a:t>Pipes by nominal size, all splits</a:t>
+            </a:r>
+          </a:p>
+        </c:rich>
+      </c:tx>
+      <c:layout/>
+      <c:overlay val="0"/>
+    </c:title>
+    <c:autoTitleDeleted val="0"/>
+    <c:plotArea>
+      <c:layout/>
+      <c:barChart>
+        <c:barDir val="col"/>
+        <c:grouping val="clustered"/>
+        <c:varyColors val="0"/>
+        <c:ser>
+          <c:idx val="0"/>
+          <c:order val="0"/>
+          <c:tx>
+            <c:strRef>
+              <c:f>Sheet1!$B$1</c:f>
+              <c:strCache>
+                <c:ptCount val="1"/>
+                <c:pt idx="0">
+                  <c:v>pipes</c:v>
+                </c:pt>
+              </c:strCache>
+            </c:strRef>
+          </c:tx>
+          <c:spPr>
+            <a:solidFill>
+              <a:srgbClr val="2A78D6"/>
+            </a:solidFill>
+            <a:effectLst/>
+          </c:spPr>
+          <c:invertIfNegative val="0"/>
+          <c:dLbls>
+            <c:numFmt formatCode="#,##0" sourceLinked="0"/>
+            <c:txPr>
+              <a:bodyPr/>
+              <a:lstStyle/>
+              <a:p>
+                <a:pPr>
+                  <a:defRPr b="0" i="0" strike="noStrike" sz="900" u="none">
+                    <a:solidFill>
+                      <a:srgbClr val="0B0B0B"/>
+                    </a:solidFill>
+                    <a:latin typeface="+mn-lt"/>
+                  </a:defRPr>
+                </a:pPr>
+              </a:p>
+            </c:txPr>
+            <c:showLegendKey val="0"/>
+            <c:showVal val="1"/>
+            <c:showCatName val="0"/>
+            <c:showSerName val="0"/>
+            <c:showPercent val="0"/>
+            <c:showBubbleSize val="0"/>
+            <c:showLeaderLines val="0"/>
+          </c:dLbls>
+          <c:cat>
+            <c:multiLvlStrRef>
+              <c:f>Sheet1!$A$2:$A$10</c:f>
+              <c:multiLvlStrCache>
+                <c:ptCount val="9"/>
+                <c:lvl>
+                  <c:pt idx="0">
+                    <c:v>DN15</c:v>
+                  </c:pt>
+                  <c:pt idx="1">
+                    <c:v>DN20</c:v>
+                  </c:pt>
+                  <c:pt idx="2">
+                    <c:v>DN25</c:v>
+                  </c:pt>
+                  <c:pt idx="3">
+                    <c:v>DN32</c:v>
+                  </c:pt>
+                  <c:pt idx="4">
+                    <c:v>DN40</c:v>
+                  </c:pt>
+                  <c:pt idx="5">
+                    <c:v>DN50</c:v>
+                  </c:pt>
+                  <c:pt idx="6">
+                    <c:v>DN65</c:v>
+                  </c:pt>
+                  <c:pt idx="7">
+                    <c:v>DN80</c:v>
+                  </c:pt>
+                  <c:pt idx="8">
+                    <c:v>DN100</c:v>
+                  </c:pt>
+                </c:lvl>
+              </c:multiLvlStrCache>
+            </c:multiLvlStrRef>
+          </c:cat>
+          <c:val>
+            <c:numRef>
+              <c:f>Sheet1!$B$2:$B$10</c:f>
+              <c:numCache>
+                <c:formatCode>General</c:formatCode>
+                <c:ptCount val="9"/>
+                <c:pt idx="0">
+                  <c:v>1495</c:v>
+                </c:pt>
+                <c:pt idx="1">
+                  <c:v>2415</c:v>
+                </c:pt>
+                <c:pt idx="2">
+                  <c:v>3399</c:v>
+                </c:pt>
+                <c:pt idx="3">
+                  <c:v>3431</c:v>
+                </c:pt>
+                <c:pt idx="4">
+                  <c:v>1924</c:v>
+                </c:pt>
+                <c:pt idx="5">
+                  <c:v>1777</c:v>
+                </c:pt>
+                <c:pt idx="6">
+                  <c:v>1804</c:v>
+                </c:pt>
+                <c:pt idx="7">
+                  <c:v>865</c:v>
+                </c:pt>
+                <c:pt idx="8">
+                  <c:v>874</c:v>
+                </c:pt>
+              </c:numCache>
+            </c:numRef>
+          </c:val>
+        </c:ser>
+        <c:dLbls>
+          <c:numFmt formatCode="#,##0" sourceLinked="0"/>
+          <c:txPr>
+            <a:bodyPr/>
+            <a:lstStyle/>
+            <a:p>
+              <a:pPr>
+                <a:defRPr b="0" i="0" strike="noStrike" sz="900" u="none">
+                  <a:solidFill>
+                    <a:srgbClr val="0B0B0B"/>
+                  </a:solidFill>
+                  <a:latin typeface="+mn-lt"/>
+                </a:defRPr>
+              </a:pPr>
+            </a:p>
+          </c:txPr>
+          <c:showLegendKey val="0"/>
+          <c:showVal val="1"/>
+          <c:showCatName val="0"/>
+          <c:showSerName val="0"/>
+          <c:showPercent val="0"/>
+          <c:showBubbleSize val="0"/>
+          <c:showLeaderLines val="0"/>
+        </c:dLbls>
+        <c:gapWidth val="80"/>
+        <c:overlap val="0"/>
+        <c:axId val="2094734554"/>
+        <c:axId val="2094734552"/>
+        <c:axId val="2094734556"/>
+      </c:barChart>
+      <c:catAx>
+        <c:axId val="2094734554"/>
+        <c:scaling>
+          <c:orientation val="minMax"/>
+        </c:scaling>
+        <c:delete val="0"/>
+        <c:axPos val="b"/>
+        <c:numFmt formatCode="General" sourceLinked="1"/>
+        <c:majorTickMark val="out"/>
+        <c:minorTickMark val="none"/>
+        <c:tickLblPos val="low"/>
+        <c:spPr>
+          <a:ln w="12700" cap="flat">
+            <a:solidFill>
+              <a:srgbClr val="888888"/>
+            </a:solidFill>
+            <a:prstDash val="solid"/>
+            <a:round/>
+          </a:ln>
+        </c:spPr>
+        <c:txPr>
+          <a:bodyPr/>
+          <a:lstStyle/>
+          <a:p>
+            <a:pPr>
+              <a:defRPr sz="1100" b="0" i="0" u="none" strike="noStrike">
+                <a:solidFill>
+                  <a:srgbClr val="52514E"/>
+                </a:solidFill>
+                <a:latin typeface="+mn-lt"/>
+              </a:defRPr>
+            </a:pPr>
+            <a:endParaRPr lang="en-US"/>
+          </a:p>
+        </c:txPr>
+        <c:crossAx val="2094734552"/>
+        <c:crosses val="autoZero"/>
+        <c:auto val="1"/>
+        <c:lblAlgn val="ctr"/>
+        <c:noMultiLvlLbl val="1"/>
+      </c:catAx>
+      <c:valAx>
+        <c:axId val="2094734552"/>
+        <c:scaling>
+          <c:orientation val="minMax"/>
+          <c:max val="4000"/>
+          <c:min val="0"/>
+        </c:scaling>
+        <c:delete val="0"/>
+        <c:axPos val="l"/>
+        <c:majorGridlines>
+          <c:spPr>
+            <a:ln w="9525" cap="flat">
+              <a:solidFill>
+                <a:srgbClr val="E1E0D9"/>
+              </a:solidFill>
+              <a:prstDash val="solid"/>
+              <a:round/>
+            </a:ln>
+          </c:spPr>
+        </c:majorGridlines>
+        <c:numFmt formatCode="#,##0" sourceLinked="0"/>
+        <c:majorTickMark val="out"/>
+        <c:minorTickMark val="none"/>
+        <c:tickLblPos val="nextTo"/>
+        <c:spPr>
+          <a:ln w="12700" cap="flat">
+            <a:solidFill>
+              <a:srgbClr val="888888"/>
+            </a:solidFill>
+            <a:prstDash val="solid"/>
+            <a:round/>
+          </a:ln>
+        </c:spPr>
+        <c:txPr>
+          <a:bodyPr/>
+          <a:lstStyle/>
+          <a:p>
+            <a:pPr>
+              <a:defRPr sz="1000" b="0" i="0" u="none" strike="noStrike">
+                <a:solidFill>
+                  <a:srgbClr val="52514E"/>
+                </a:solidFill>
+                <a:latin typeface="+mn-lt"/>
+              </a:defRPr>
+            </a:pPr>
+            <a:endParaRPr lang="en-US"/>
+          </a:p>
+        </c:txPr>
+        <c:crossAx val="2094734554"/>
+        <c:crosses val="autoZero"/>
+        <c:crossBetween val="between"/>
+        <c:majorUnit val="1000"/>
+      </c:valAx>
+      <c:spPr>
+        <a:noFill/>
+        <a:ln>
+          <a:noFill/>
+        </a:ln>
+        <a:effectLst/>
+      </c:spPr>
+    </c:plotArea>
+    <c:plotVisOnly val="1"/>
+    <c:dispBlanksAs val="span"/>
+  </c:chart>
+  <c:spPr>
+    <a:noFill/>
+    <a:ln>
+      <a:noFill/>
+    </a:ln>
+    <a:effectLst/>
+  </c:spPr>
+  <c:externalData r:id="rId1">
+    <c:autoUpdate val="0"/>
+  </c:externalData>
+</c:chartSpace>
+</file>
+
+<file path=ppt/charts/chart3.xml><?xml version="1.0" encoding="utf-8"?>
 <c:chartSpace xmlns:c="http://schemas.openxmlformats.org/drawingml/2006/chart" xmlns:a="http://schemas.openxmlformats.org/drawingml/2006/main" xmlns:r="http://schemas.openxmlformats.org/officeDocument/2006/relationships">
   <c:date1904 val="0"/>
   <c:roundedCorners val="1"/>
@@ -862,7 +1440,7 @@
           <a:p>
             <a:r>
               <a:rPr lang="en-US" dirty="0"/>
-              <a:t>Every pipe, duct and tray in a building hangs from something. I am going to talk about the piece of information a support designer starts from - and why we turned it into a public dataset. (0:00)</a:t>
+              <a:t>Hello, I'm Lavinia Pedrollo from Stanford's Center for Integrated Facility Engineering. This is CrossMEP, joint work with David Gvadzabia, Torben Graeber and Martin Fischer: a dataset of the problems a support designer solves, made for training and testing methods that design MEP supports. (0:00)</a:t>
             </a:r>
             <a:endParaRPr lang="en-US" dirty="0"/>
           </a:p>
@@ -950,7 +1528,7 @@
           <a:p>
             <a:r>
               <a:rPr lang="en-US" dirty="0"/>
-              <a:t>One section only: routing, slope, branches, support spacing are outside it - span is recorded per element, so a method can vary it. DN up to 100, concrete substrates, no anchor capacity, no duct insulation. Stagger is drawn per element: a bank on one trapeze would be co-planar - we know, and it is next. Verified on one residential project: small-bore statistics are checked, congested racks rest on practice and standards. The ask: the thing we cannot compute is plausibility. If you coordinate or design supports, open the gallery and tell us what looks wrong. (7:50)</a:t>
+              <a:t>Second experiment: is the spacing realistic? We parsed two discipline models of the open buildingSMART Duplex Apartment with IfcOpenShell and measured the gaps between parallel runs. They are irregular, not modular - the median is about 108 mm. The generator samples a lognormal fitted to those gaps. The distance between generated and measured distributions is 41 mm between insulation surfaces and 68 mm between pipe surfaces; the building's own two discipline models are 50 mm apart, and a fixed modular gap would be 139 mm away. So the generated spacing sits in the range of the variation between two real models of one building. (6:15)</a:t>
             </a:r>
             <a:endParaRPr lang="en-US" dirty="0"/>
           </a:p>
@@ -1038,7 +1616,7 @@
           <a:p>
             <a:r>
               <a:rPr lang="en-US" dirty="0"/>
-              <a:t>CrossMEP is the brief, not the answer: 7,000 sections, every number traced, verified against a built project, reproducible to the byte, and public. Thank you. (9:00)</a:t>
+              <a:t>The third experiment connects the dataset to the task it serves. We take a released two-bin clamp catalog and ask which elements it can attach. 11.6 per cent of pipes, roughly uniform across tiers, and none of the trays, ducts and conduits. Load never binds; diameter and kind do. So the dataset turns 'generalise the catalog' into a measured requirement: small-bore clamps first, then tray, duct and conduit attachments. (7:05)</a:t>
             </a:r>
             <a:endParaRPr lang="en-US" dirty="0"/>
           </a:p>
@@ -1126,7 +1704,7 @@
           <a:p>
             <a:r>
               <a:rPr lang="en-US" dirty="0"/>
-              <a:t>Backup: per-tier distributions on the benchmark split.</a:t>
+              <a:t>Using it takes a few lines. Load a split - the loader needs only the Python standard library - filter by composition, test your own catalog against the benchmark, or generate your own mix with the same rules. There is an interactive gallery for inspection. And because there are no labels, the same files serve reinforcement learning, constraint-programming baselines and human benchmarking: a curriculum over the tiers, per-tier evaluation, and held-out seeds and custom compositions as probes. (7:50)</a:t>
             </a:r>
             <a:endParaRPr lang="en-US" dirty="0"/>
           </a:p>
@@ -1214,7 +1792,7 @@
           <a:p>
             <a:r>
               <a:rPr lang="en-US" dirty="0"/>
-              <a:t>Backup: the authoritative numbers for the public files.</a:t>
+              <a:t>Its scope: one section at one support - routing, branches and spacing are outside it, although the span is recorded so a method can vary it. Realism is checked on one open residential project; congested racks rest on practice and standards. The trade mix is a design choice, and the data is not for structural design. Next: measuring per-tier feasibility collapse in a multi-element synthesis environment, verification on commercial corridor models, and an expert plausibility review - which is where we would value your eye. (8:40)</a:t>
             </a:r>
             <a:endParaRPr lang="en-US" dirty="0"/>
           </a:p>
@@ -1238,6 +1816,270 @@
             <a:fld id="{F7021451-1387-4CA6-816F-3879F97B5CBC}" type="slidenum">
               <a:rPr lang="en-US"/>
               <a:t>13</a:t>
+            </a:fld>
+            <a:endParaRPr lang="en-US"/>
+          </a:p>
+        </p:txBody>
+      </p:sp>
+    </p:spTree>
+    <p:extLst>
+      <p:ext uri="{BB962C8B-B14F-4D97-AF65-F5344CB8AC3E}">
+        <p14:creationId xmlns:p14="http://schemas.microsoft.com/office/powerpoint/2010/main" val="1024086991"/>
+      </p:ext>
+    </p:extLst>
+  </p:cSld>
+  <p:clrMapOvr>
+    <a:masterClrMapping/>
+  </p:clrMapOvr>
+</p:notes>
+</file>
+
+<file path=ppt/notesSlides/notesSlide14.xml><?xml version="1.0" encoding="utf-8"?>
+<p:notes xmlns:a="http://schemas.openxmlformats.org/drawingml/2006/main" xmlns:r="http://schemas.openxmlformats.org/officeDocument/2006/relationships" xmlns:p="http://schemas.openxmlformats.org/presentationml/2006/main">
+  <p:cSld>
+    <p:spTree>
+      <p:nvGrpSpPr>
+        <p:cNvPr id="1" name=""/>
+        <p:cNvGrpSpPr/>
+        <p:nvPr/>
+      </p:nvGrpSpPr>
+      <p:grpSpPr>
+        <a:xfrm>
+          <a:off x="0" y="0"/>
+          <a:ext cx="0" cy="0"/>
+          <a:chOff x="0" y="0"/>
+          <a:chExt cx="0" cy="0"/>
+        </a:xfrm>
+      </p:grpSpPr>
+      <p:sp>
+        <p:nvSpPr>
+          <p:cNvPr id="2" name="Slide Image Placeholder 1"/>
+          <p:cNvSpPr>
+            <a:spLocks noGrp="1" noRot="1" noChangeAspect="1"/>
+          </p:cNvSpPr>
+          <p:nvPr>
+            <p:ph type="sldImg"/>
+          </p:nvPr>
+        </p:nvSpPr>
+        <p:spPr/>
+      </p:sp>
+      <p:sp>
+        <p:nvSpPr>
+          <p:cNvPr id="3" name="Notes Placeholder 2"/>
+          <p:cNvSpPr>
+            <a:spLocks noGrp="1"/>
+          </p:cNvSpPr>
+          <p:nvPr>
+            <p:ph type="body" idx="1"/>
+          </p:nvPr>
+        </p:nvSpPr>
+        <p:spPr/>
+        <p:txBody>
+          <a:bodyPr/>
+          <a:lstStyle/>
+          <a:p>
+            <a:r>
+              <a:rPr lang="en-US" dirty="0"/>
+              <a:t>CrossMEP is the brief, not the answer: 7,000 support-design problems, every number traced to its source, checked against a built project, and open. The QR code takes you to the data, the code and the gallery. Thank you. (9:10)</a:t>
+            </a:r>
+            <a:endParaRPr lang="en-US" dirty="0"/>
+          </a:p>
+        </p:txBody>
+      </p:sp>
+      <p:sp>
+        <p:nvSpPr>
+          <p:cNvPr id="4" name="Slide Number Placeholder 3"/>
+          <p:cNvSpPr>
+            <a:spLocks noGrp="1"/>
+          </p:cNvSpPr>
+          <p:nvPr>
+            <p:ph type="sldNum" sz="quarter" idx="10"/>
+          </p:nvPr>
+        </p:nvSpPr>
+        <p:spPr/>
+        <p:txBody>
+          <a:bodyPr/>
+          <a:lstStyle/>
+          <a:p>
+            <a:fld id="{F7021451-1387-4CA6-816F-3879F97B5CBC}" type="slidenum">
+              <a:rPr lang="en-US"/>
+              <a:t>14</a:t>
+            </a:fld>
+            <a:endParaRPr lang="en-US"/>
+          </a:p>
+        </p:txBody>
+      </p:sp>
+    </p:spTree>
+    <p:extLst>
+      <p:ext uri="{BB962C8B-B14F-4D97-AF65-F5344CB8AC3E}">
+        <p14:creationId xmlns:p14="http://schemas.microsoft.com/office/powerpoint/2010/main" val="1024086991"/>
+      </p:ext>
+    </p:extLst>
+  </p:cSld>
+  <p:clrMapOvr>
+    <a:masterClrMapping/>
+  </p:clrMapOvr>
+</p:notes>
+</file>
+
+<file path=ppt/notesSlides/notesSlide15.xml><?xml version="1.0" encoding="utf-8"?>
+<p:notes xmlns:a="http://schemas.openxmlformats.org/drawingml/2006/main" xmlns:r="http://schemas.openxmlformats.org/officeDocument/2006/relationships" xmlns:p="http://schemas.openxmlformats.org/presentationml/2006/main">
+  <p:cSld>
+    <p:spTree>
+      <p:nvGrpSpPr>
+        <p:cNvPr id="1" name=""/>
+        <p:cNvGrpSpPr/>
+        <p:nvPr/>
+      </p:nvGrpSpPr>
+      <p:grpSpPr>
+        <a:xfrm>
+          <a:off x="0" y="0"/>
+          <a:ext cx="0" cy="0"/>
+          <a:chOff x="0" y="0"/>
+          <a:chExt cx="0" cy="0"/>
+        </a:xfrm>
+      </p:grpSpPr>
+      <p:sp>
+        <p:nvSpPr>
+          <p:cNvPr id="2" name="Slide Image Placeholder 1"/>
+          <p:cNvSpPr>
+            <a:spLocks noGrp="1" noRot="1" noChangeAspect="1"/>
+          </p:cNvSpPr>
+          <p:nvPr>
+            <p:ph type="sldImg"/>
+          </p:nvPr>
+        </p:nvSpPr>
+        <p:spPr/>
+      </p:sp>
+      <p:sp>
+        <p:nvSpPr>
+          <p:cNvPr id="3" name="Notes Placeholder 2"/>
+          <p:cNvSpPr>
+            <a:spLocks noGrp="1"/>
+          </p:cNvSpPr>
+          <p:nvPr>
+            <p:ph type="body" idx="1"/>
+          </p:nvPr>
+        </p:nvSpPr>
+        <p:spPr/>
+        <p:txBody>
+          <a:bodyPr/>
+          <a:lstStyle/>
+          <a:p>
+            <a:r>
+              <a:rPr lang="en-US" dirty="0"/>
+              <a:t>Backup: per-tier medians on the benchmark split, and the fit statistics behind experiment 2.</a:t>
+            </a:r>
+            <a:endParaRPr lang="en-US" dirty="0"/>
+          </a:p>
+        </p:txBody>
+      </p:sp>
+      <p:sp>
+        <p:nvSpPr>
+          <p:cNvPr id="4" name="Slide Number Placeholder 3"/>
+          <p:cNvSpPr>
+            <a:spLocks noGrp="1"/>
+          </p:cNvSpPr>
+          <p:nvPr>
+            <p:ph type="sldNum" sz="quarter" idx="10"/>
+          </p:nvPr>
+        </p:nvSpPr>
+        <p:spPr/>
+        <p:txBody>
+          <a:bodyPr/>
+          <a:lstStyle/>
+          <a:p>
+            <a:fld id="{F7021451-1387-4CA6-816F-3879F97B5CBC}" type="slidenum">
+              <a:rPr lang="en-US"/>
+              <a:t>15</a:t>
+            </a:fld>
+            <a:endParaRPr lang="en-US"/>
+          </a:p>
+        </p:txBody>
+      </p:sp>
+    </p:spTree>
+    <p:extLst>
+      <p:ext uri="{BB962C8B-B14F-4D97-AF65-F5344CB8AC3E}">
+        <p14:creationId xmlns:p14="http://schemas.microsoft.com/office/powerpoint/2010/main" val="1024086991"/>
+      </p:ext>
+    </p:extLst>
+  </p:cSld>
+  <p:clrMapOvr>
+    <a:masterClrMapping/>
+  </p:clrMapOvr>
+</p:notes>
+</file>
+
+<file path=ppt/notesSlides/notesSlide16.xml><?xml version="1.0" encoding="utf-8"?>
+<p:notes xmlns:a="http://schemas.openxmlformats.org/drawingml/2006/main" xmlns:r="http://schemas.openxmlformats.org/officeDocument/2006/relationships" xmlns:p="http://schemas.openxmlformats.org/presentationml/2006/main">
+  <p:cSld>
+    <p:spTree>
+      <p:nvGrpSpPr>
+        <p:cNvPr id="1" name=""/>
+        <p:cNvGrpSpPr/>
+        <p:nvPr/>
+      </p:nvGrpSpPr>
+      <p:grpSpPr>
+        <a:xfrm>
+          <a:off x="0" y="0"/>
+          <a:ext cx="0" cy="0"/>
+          <a:chOff x="0" y="0"/>
+          <a:chExt cx="0" cy="0"/>
+        </a:xfrm>
+      </p:grpSpPr>
+      <p:sp>
+        <p:nvSpPr>
+          <p:cNvPr id="2" name="Slide Image Placeholder 1"/>
+          <p:cNvSpPr>
+            <a:spLocks noGrp="1" noRot="1" noChangeAspect="1"/>
+          </p:cNvSpPr>
+          <p:nvPr>
+            <p:ph type="sldImg"/>
+          </p:nvPr>
+        </p:nvSpPr>
+        <p:spPr/>
+      </p:sp>
+      <p:sp>
+        <p:nvSpPr>
+          <p:cNvPr id="3" name="Notes Placeholder 2"/>
+          <p:cNvSpPr>
+            <a:spLocks noGrp="1"/>
+          </p:cNvSpPr>
+          <p:nvPr>
+            <p:ph type="body" idx="1"/>
+          </p:nvPr>
+        </p:nvSpPr>
+        <p:spPr/>
+        <p:txBody>
+          <a:bodyPr/>
+          <a:lstStyle/>
+          <a:p>
+            <a:r>
+              <a:rPr lang="en-US" dirty="0"/>
+              <a:t>Backup: what one stored context looks like - plain JSON, one object per context.</a:t>
+            </a:r>
+            <a:endParaRPr lang="en-US" dirty="0"/>
+          </a:p>
+        </p:txBody>
+      </p:sp>
+      <p:sp>
+        <p:nvSpPr>
+          <p:cNvPr id="4" name="Slide Number Placeholder 3"/>
+          <p:cNvSpPr>
+            <a:spLocks noGrp="1"/>
+          </p:cNvSpPr>
+          <p:nvPr>
+            <p:ph type="sldNum" sz="quarter" idx="10"/>
+          </p:nvPr>
+        </p:nvSpPr>
+        <p:spPr/>
+        <p:txBody>
+          <a:bodyPr/>
+          <a:lstStyle/>
+          <a:p>
+            <a:fld id="{F7021451-1387-4CA6-816F-3879F97B5CBC}" type="slidenum">
+              <a:rPr lang="en-US"/>
+              <a:t>16</a:t>
             </a:fld>
             <a:endParaRPr lang="en-US"/>
           </a:p>
@@ -1302,7 +2144,7 @@
           <a:p>
             <a:r>
               <a:rPr lang="en-US" dirty="0"/>
-              <a:t>A 200,000 sq ft hospital: on the order of 10,000 support assemblies, each 20 minutes to 2 hours by hand; roughly a quarter of MEP design effort. Support design starts AFTER coordination: the designer receives the coordinated model and works hanger by hanger. At each hanger the brief is a cross-section. Nobody designs a support from the whole model - you design it from the section at that hanger. That section is the unit of work, and the unit of our dataset. (0:50)</a:t>
+              <a:t>Every pipe, duct and tray in a building hangs from a support assembly: anchors, rods, channel, clamps. On a 200,000 square-foot hospital that is on the order of 10,000 assemblies, each taking 20 minutes to two hours by hand - together roughly a quarter of the MEP design effort. These are practitioner estimates. The work starts after coordination: at every hanger location the designer takes the section across the run and designs a support for exactly what passes through it. That section is the unit of work, and it is the unit of our dataset. (0:15)</a:t>
             </a:r>
             <a:endParaRPr lang="en-US" dirty="0"/>
           </a:p>
@@ -1390,7 +2232,7 @@
           <a:p>
             <a:r>
               <a:rPr lang="en-US" dirty="0"/>
-              <a:t>Automating support design with learning needs MANY of those sections - the full spread of what shows up in buildings, not one project. Project models are proprietary; the few open ones are not organised around supports and often export no sizes. One project is one narrow slice. So: a rule-based generator, no learned model, no free randomness, that encodes the conventions you already use, verified against a built project, and public. We are not claiming a building. We are claiming the rules, and we show where each rule comes from. (1:40)</a:t>
+              <a:t>Learning-based methods for this task need many such sections, and none were public. Project models are proprietary, the open ones are not organised around supports, and any one project covers one narrow slice. So we built CrossMEP: 7,000 contexts with about 31,500 elements, stratified into eight tiers, deliberately unlabeled, with every constant traced to its source, checked against an open IFC project, and released openly with the generator. (1:00)</a:t>
             </a:r>
             <a:endParaRPr lang="en-US" dirty="0"/>
           </a:p>
@@ -1478,7 +2320,7 @@
           <a:p>
             <a:r>
               <a:rPr lang="en-US" dirty="0"/>
-              <a:t>One 2-D section perpendicular to the run at one support location. Each element: kind, service and trade; bare size; insulation per side; load per metre and the span it was sized at, so load per support = kN/m x span; position along the surface and standoff from it. The surface: slab or wall, substrate, thickness. Deliberately absent: channel, rods, clamps, anchors. The context is the brief; the assembly is the answer. There are no 'correct' answers in the files because a feasible support depends on the catalog you build from. If you have ever been handed a section and a catalog and asked to make it hang - that is exactly what is in each record, in millimetres and kN. (2:30)</a:t>
+              <a:t>Here is one context. It is a 2-D section at one support location. Each element carries its kind, service and trade, its bare size, its insulation, its load per metre and the span it was sized at - so the load at this support - and its position along and out from the surface. Plus the surface itself: slab or wall, substrate, thickness. What is not in it is the support: no channel, no rods, no anchors, and no 'correct answer', because a feasible support depends on the catalog you build from. The context is the brief; the assembly is the answer. (1:40)</a:t>
             </a:r>
             <a:endParaRPr lang="en-US" dirty="0"/>
           </a:p>
@@ -1566,7 +2408,7 @@
           <a:p>
             <a:r>
               <a:rPr lang="en-US" dirty="0"/>
-              <a:t>Sizes from the standards you use; loads computed from them: EN 10255 steel plus water times B31.1 spans; the published full-tray datum; verbatim manufacturer duct weights; IEC fill for conduits. Layout conventions: ducts nearest the slab, then containment, then pipes; trades run in banks; electrical above wet on walls; clear gaps drawn from a distribution measured on a built project. Every constant has a source and a status in the repo; the loads are computed from those sources in the code, and the tests pin them. If you disagree with a number, there is one line to change and one test that will tell you what moved. (3:20)</a:t>
+              <a:t>How is a context made? Not by free randomness: by rules you would recognise. The tier fixes the number of elements. We pick the surface. We fill the count with services the way trades actually run - hot and cold together, flow and return together, conduits in groups. Bulky services go nearest the slab: ducts, then containment, then pipes. Gaps between neighbours are drawn from gaps measured on a built project, with a 25 millimetre minimum, plus a small stagger within rows; on walls, electrical stays above water. Finally every context is checked - every pair at least 25 millimetres clear - and it is seeded: the same seed gives the same file, byte for byte. (2:30)</a:t>
             </a:r>
             <a:endParaRPr lang="en-US" dirty="0"/>
           </a:p>
@@ -1654,7 +2496,7 @@
           <a:p>
             <a:r>
               <a:rPr lang="en-US" dirty="0"/>
-              <a:t>Tier Cn = exactly n elements, C1 to C8; everything else varies within the tier. C1 is the most common support in any building: one pipe, one tray, one duct. C8 is the congested rack. As the count rises the median clear gap falls from 120 mm to 62 mm and the median load at the support rises from 0.10 kN to 1.7 kN. Difficulty here means a tighter, heavier scene - not that the support is harder to calculate. Whether it is harder to SOLVE is for the method to show. (4:10)</a:t>
+              <a:t>Every number in a context has a source. Pipe sizes and walls from EN 10220 and 10255, filled with water, at ASME B31.1 water-service spans. Insulation from the German GEG for heated lines and a condensation-control schedule for chilled water. Trays at IEC 61537 widths, loaded full. Ducts at the EN preferred sizes with a manufacturer weight table. Conduits at IEC 61386 sizes with 40 per cent cable fill. The loads are computed from these sources in the code, and every constant is documented with its source and status. Things that are choices - the trade mix, the tier composition - are labelled as design choices, not presented as measurements. (3:20)</a:t>
             </a:r>
             <a:endParaRPr lang="en-US" dirty="0"/>
           </a:p>
@@ -1742,7 +2584,7 @@
           <a:p>
             <a:r>
               <a:rPr lang="en-US" dirty="0"/>
-              <a:t>buildingSMART Duplex Apartment, MEP and Plumbing discipline models, parsed with IfcOpenShell: 427 and 231 segments; sizes, parallel-run counts, elevation spread and clear gaps measured. Gaps are irregular, not modular: median 108 mm, quartiles 24 to 238. We fit a lognormal to the measurement and sample from it. Distance between generated and measured gap distributions: 41 mm - the two real discipline models of the SAME building are 50 mm apart; a fixed modular gap would be 139 mm away. The generator sits inside the variation you get between two disciplines' models of one building. That is the realism claim, no more. (5:00)</a:t>
+              <a:t>The release has four splits on disjoint seeds: 5,000 contexts for training, 500 for validation, 500 for test, and a 1,000-context benchmark with 125 per tier. 31,484 elements in total - mostly pipes, then conduits, trays and ducts; pipe sizes from DN15 to DN100, mostly small bore, as in the measured project. Four in five contexts hang from a ceiling, one in five from a wall, and electrical containment is the largest trade by count. Everything is plain JSON with a schema, metadata and a datasheet. (4:05)</a:t>
             </a:r>
             <a:endParaRPr lang="en-US" dirty="0"/>
           </a:p>
@@ -1830,7 +2672,7 @@
           <a:p>
             <a:r>
               <a:rPr lang="en-US" dirty="0"/>
-              <a:t>Rebuilding the release for publication we found the generator added a 25 mm routing envelope on each element ON TOP OF the 25 mm minimum gap: every neighbour sat 50 mm further apart than the sampled gap, and nothing was ever closer than 75 mm - while 42 % of the measured gaps are. The 41 mm in the paper was computed on the sampled gap, not the physical one; measured physically, the paper's files were 89 mm from the project. Revision 4.0 removes the offset. Same elements, same loads, same rows - the spacing moved. The physical gaps are now the sampled ones, and the 41 mm holds for the geometry you can measure in the files. Everything is reproducible: all eight files regenerate byte-for-byte on every CI run; every number in the paper that reproduces is a test, and the ones that do not - the paper's composition figures came from an internal build - are listed with the public values. I would rather tell you this than have you find it. (5:50)</a:t>
+              <a:t>This is what the data looks like: one benchmark context per tier. C1 is a single element - the most common support in any building. By C8 you have eight services on three rows. Within a tier everything else varies - kinds, trades, surfaces and stacking - so the element count is the one controlled difficulty axis. Note the walls: the section rotates, and electrical sits above water. (4:45)</a:t>
             </a:r>
             <a:endParaRPr lang="en-US" dirty="0"/>
           </a:p>
@@ -1918,7 +2760,7 @@
           <a:p>
             <a:r>
               <a:rPr lang="en-US" dirty="0"/>
-              <a:t>Take a released two-bin clamp catalog: 48 to 54 mm at 2.5 kN, 108 to 114 mm at 4.0 kN. Which of the 4,500 benchmark elements can it attach? 11.6 % of pipes; none of the 1,971 trays, ducts and conduits. Loads are never the limit; diameter and kind are. So 'generalise the catalog' is a measurable requirement: small-bore clamps first, then tray, duct and conduit attachments. This is the dataset telling the catalog what it is missing. (7:00)</a:t>
+              <a:t>First experiment: are the tiers actually ordered? The element count is exact by construction, so we look at congestion. The median closest gap between elements falls from 120 mm at C2 to about 60 mm at C8, and the median load at the support rises from 0.1 to 1.7 kilonewtons. The trend is near-monotone - with 125 contexts per tier, neighbouring tiers can swap - so difficulty is carried jointly by count, congestion and load, with count as the controlled axis. (5:20)</a:t>
             </a:r>
             <a:endParaRPr lang="en-US" dirty="0"/>
           </a:p>
@@ -2024,8 +2866,8 @@
         </p:nvSpPr>
         <p:spPr>
           <a:xfrm>
-            <a:off x="640080" y="1143000"/>
-            <a:ext cx="6675120" cy="2103120"/>
+            <a:off x="640080" y="960120"/>
+            <a:ext cx="6949440" cy="2286000"/>
           </a:xfrm>
           <a:prstGeom prst="rect">
             <a:avLst/>
@@ -2038,7 +2880,7 @@
           <a:lstStyle>
             <a:lvl1pPr algn="l" indent="0" marL="0">
               <a:buNone/>
-              <a:defRPr lang="en-US" sz="3800" b="1" dirty="0">
+              <a:defRPr lang="en-US" sz="3400" b="1" dirty="0">
                 <a:solidFill>
                   <a:schemeClr val="bg1"/>
                 </a:solidFill>
@@ -2049,7 +2891,7 @@
             <a:pPr algn="l" indent="0" marL="0">
               <a:buNone/>
             </a:pPr>
-            <a:endParaRPr lang="en-US" sz="3800" dirty="0"/>
+            <a:endParaRPr lang="en-US" sz="3400" dirty="0"/>
           </a:p>
         </p:txBody>
       </p:sp>
@@ -2064,7 +2906,7 @@
         <p:spPr>
           <a:xfrm>
             <a:off x="640080" y="3429000"/>
-            <a:ext cx="6675120" cy="1005840"/>
+            <a:ext cx="6766560" cy="1005840"/>
           </a:xfrm>
           <a:prstGeom prst="rect">
             <a:avLst/>
@@ -2753,8 +3595,8 @@
         </p:nvSpPr>
         <p:spPr>
           <a:xfrm>
-            <a:off x="640080" y="1143000"/>
-            <a:ext cx="6675120" cy="2103120"/>
+            <a:off x="640080" y="960120"/>
+            <a:ext cx="6949440" cy="2286000"/>
           </a:xfrm>
           <a:prstGeom prst="rect">
             <a:avLst/>
@@ -2770,14 +3612,42 @@
               <a:buNone/>
             </a:pPr>
             <a:r>
-              <a:rPr lang="en-US" sz="3800" b="1" dirty="0">
+              <a:rPr lang="en-US" sz="3400" b="1" dirty="0">
                 <a:solidFill>
                   <a:schemeClr val="bg1"/>
                 </a:solidFill>
               </a:rPr>
-              <a:t>CrossMEP: the support designer’s brief, as a dataset</a:t>
-            </a:r>
-            <a:endParaRPr lang="en-US" sz="3800" dirty="0"/>
+              <a:t>CrossMEP: A Tiered Synthetic</a:t>
+            </a:r>
+            <a:endParaRPr lang="en-US" sz="3400" dirty="0"/>
+          </a:p>
+          <a:p>
+            <a:pPr algn="l" indent="0" marL="0">
+              <a:buNone/>
+            </a:pPr>
+            <a:r>
+              <a:rPr lang="en-US" sz="3400" b="1" dirty="0">
+                <a:solidFill>
+                  <a:schemeClr val="bg1"/>
+                </a:solidFill>
+              </a:rPr>
+              <a:t>Dataset of Multi-Trade MEP</a:t>
+            </a:r>
+            <a:endParaRPr lang="en-US" sz="3400" dirty="0"/>
+          </a:p>
+          <a:p>
+            <a:pPr algn="l" indent="0" marL="0">
+              <a:buNone/>
+            </a:pPr>
+            <a:r>
+              <a:rPr lang="en-US" sz="3400" b="1" dirty="0">
+                <a:solidFill>
+                  <a:schemeClr val="bg1"/>
+                </a:solidFill>
+              </a:rPr>
+              <a:t>Cross-Sections</a:t>
+            </a:r>
+            <a:endParaRPr lang="en-US" sz="3400" dirty="0"/>
           </a:p>
         </p:txBody>
       </p:sp>
@@ -2792,7 +3662,7 @@
         <p:spPr>
           <a:xfrm>
             <a:off x="640080" y="3429000"/>
-            <a:ext cx="6675120" cy="1005840"/>
+            <a:ext cx="6766560" cy="1005840"/>
           </a:xfrm>
           <a:prstGeom prst="rect">
             <a:avLst/>
@@ -2813,7 +3683,7 @@
                   <a:srgbClr val="CADCFC"/>
                 </a:solidFill>
               </a:rPr>
-              <a:t>A tiered synthetic dataset of multi-trade MEP cross-sections for learning-based structural support assembly synthesis</a:t>
+              <a:t>A support-design problem distribution for learning-based structural support assembly synthesis</a:t>
             </a:r>
             <a:endParaRPr lang="en-US" sz="1600" dirty="0"/>
           </a:p>
@@ -2901,7 +3771,7 @@
       </p:sp>
       <p:pic>
         <p:nvPicPr>
-          <p:cNvPr id="5" name="section art" descr="/home/user/crossmep_dataset/docs/figures/title_art.png">    </p:cNvPr>
+          <p:cNvPr id="5" name="title art" descr="/home/user/crossmep_dataset/docs/figures/title_art.png">    </p:cNvPr>
           <p:cNvPicPr>
             <a:picLocks noChangeAspect="1"/>
           </p:cNvPicPr>
@@ -2915,8 +3785,8 @@
         </p:blipFill>
         <p:spPr>
           <a:xfrm>
-            <a:off x="7589520" y="1463040"/>
-            <a:ext cx="4206240" cy="2628900"/>
+            <a:off x="7772400" y="1463040"/>
+            <a:ext cx="4023360" cy="2514600"/>
           </a:xfrm>
           <a:prstGeom prst="rect">
             <a:avLst/>
@@ -2931,8 +3801,8 @@
         </p:nvSpPr>
         <p:spPr>
           <a:xfrm>
-            <a:off x="7589520" y="4160520"/>
-            <a:ext cx="4206240" cy="274320"/>
+            <a:off x="7772400" y="4069080"/>
+            <a:ext cx="4023360" cy="274320"/>
           </a:xfrm>
           <a:prstGeom prst="rect">
             <a:avLst/>
@@ -2953,7 +3823,7 @@
                   <a:srgbClr val="CADCFC"/>
                 </a:solidFill>
               </a:rPr>
-              <a:t>a generated C8 context: eight services, three rows</a:t>
+              <a:t>a generated C8 context: eight services on three rows</a:t>
             </a:r>
             <a:endParaRPr lang="en-US" sz="1000" dirty="0"/>
           </a:p>
@@ -3016,369 +3886,15 @@
                   <a:schemeClr val="tx1"/>
                 </a:solidFill>
               </a:rPr>
-              <a:t>What it is not, and what we need from you</a:t>
+              <a:t>Experiment 2: generated spacing follows a built project</a:t>
             </a:r>
             <a:endParaRPr lang="en-US" sz="2600" dirty="0"/>
-          </a:p>
-        </p:txBody>
-      </p:sp>
-      <p:sp>
-        <p:nvSpPr>
-          <p:cNvPr id="3" name="scope heading"/>
-          <p:cNvSpPr txBox="1"/>
-          <p:nvPr/>
-        </p:nvSpPr>
-        <p:spPr>
-          <a:xfrm>
-            <a:off x="548640" y="1417320"/>
-            <a:ext cx="6766560" cy="411480"/>
-          </a:xfrm>
-          <a:prstGeom prst="rect">
-            <a:avLst/>
-          </a:prstGeom>
-          <a:noFill/>
-          <a:ln/>
-        </p:spPr>
-        <p:txBody>
-          <a:bodyPr wrap="square" lIns="0" tIns="0" rIns="0" bIns="0" rtlCol="0" anchor="ctr"/>
-          <a:lstStyle/>
-          <a:p>
-            <a:pPr indent="0" marL="0">
-              <a:buNone/>
-            </a:pPr>
-            <a:r>
-              <a:rPr lang="en-US" sz="1800" b="1" dirty="0">
-                <a:solidFill>
-                  <a:schemeClr val="tx1"/>
-                </a:solidFill>
-              </a:rPr>
-              <a:t>Scope of this revision</a:t>
-            </a:r>
-            <a:endParaRPr lang="en-US" sz="1800" dirty="0"/>
-          </a:p>
-        </p:txBody>
-      </p:sp>
-      <p:sp>
-        <p:nvSpPr>
-          <p:cNvPr id="4" name="scope bullets"/>
-          <p:cNvSpPr txBox="1"/>
-          <p:nvPr/>
-        </p:nvSpPr>
-        <p:spPr>
-          <a:xfrm>
-            <a:off x="548640" y="1920240"/>
-            <a:ext cx="6766560" cy="2377440"/>
-          </a:xfrm>
-          <a:prstGeom prst="rect">
-            <a:avLst/>
-          </a:prstGeom>
-          <a:noFill/>
-          <a:ln/>
-        </p:spPr>
-        <p:txBody>
-          <a:bodyPr wrap="square" lIns="0" tIns="0" rIns="0" bIns="0" rtlCol="0" anchor="t"/>
-          <a:lstStyle/>
-          <a:p>
-            <a:pPr marL="342900" indent="-342900">
-              <a:spcAft>
-                <a:spcPts val="600"/>
-              </a:spcAft>
-              <a:buSzPct val="100000"/>
-              <a:buChar char="•"/>
-            </a:pPr>
-            <a:r>
-              <a:rPr lang="en-US" sz="1400" dirty="0">
-                <a:solidFill>
-                  <a:schemeClr val="tx1"/>
-                </a:solidFill>
-              </a:rPr>
-              <a:t>One section only: routing, slope, branches and support spacing are outside it (the span is recorded per element, so a method can vary it)</a:t>
-            </a:r>
-            <a:endParaRPr lang="en-US" sz="1400" dirty="0"/>
-          </a:p>
-          <a:p>
-            <a:pPr marL="342900" indent="-342900">
-              <a:spcAft>
-                <a:spcPts val="600"/>
-              </a:spcAft>
-              <a:buSzPct val="100000"/>
-              <a:buChar char="•"/>
-            </a:pPr>
-            <a:r>
-              <a:rPr lang="en-US" sz="1400" dirty="0">
-                <a:solidFill>
-                  <a:schemeClr val="tx1"/>
-                </a:solidFill>
-              </a:rPr>
-              <a:t>Pipes up to DN100, concrete substrates, no anchor capacity, no duct insulation</a:t>
-            </a:r>
-            <a:endParaRPr lang="en-US" sz="1400" dirty="0"/>
-          </a:p>
-          <a:p>
-            <a:pPr marL="342900" indent="-342900">
-              <a:spcAft>
-                <a:spcPts val="600"/>
-              </a:spcAft>
-              <a:buSzPct val="100000"/>
-              <a:buChar char="•"/>
-            </a:pPr>
-            <a:r>
-              <a:rPr lang="en-US" sz="1400" dirty="0">
-                <a:solidFill>
-                  <a:schemeClr val="tx1"/>
-                </a:solidFill>
-              </a:rPr>
-              <a:t>Stagger is drawn per element: a bank on one trapeze would be co-planar — next revision, with re-calibration</a:t>
-            </a:r>
-            <a:endParaRPr lang="en-US" sz="1400" dirty="0"/>
-          </a:p>
-          <a:p>
-            <a:pPr marL="342900" indent="-342900">
-              <a:spcAft>
-                <a:spcPts val="600"/>
-              </a:spcAft>
-              <a:buSzPct val="100000"/>
-              <a:buChar char="•"/>
-            </a:pPr>
-            <a:r>
-              <a:rPr lang="en-US" sz="1400" dirty="0">
-                <a:solidFill>
-                  <a:schemeClr val="tx1"/>
-                </a:solidFill>
-              </a:rPr>
-              <a:t>Row spacing is a fixed 120 mm clear plus stagger, not a trapeze depth</a:t>
-            </a:r>
-            <a:endParaRPr lang="en-US" sz="1400" dirty="0"/>
-          </a:p>
-          <a:p>
-            <a:pPr marL="342900" indent="-342900">
-              <a:spcAft>
-                <a:spcPts val="600"/>
-              </a:spcAft>
-              <a:buSzPct val="100000"/>
-              <a:buChar char="•"/>
-            </a:pPr>
-            <a:r>
-              <a:rPr lang="en-US" sz="1400" dirty="0">
-                <a:solidFill>
-                  <a:schemeClr val="tx1"/>
-                </a:solidFill>
-              </a:rPr>
-              <a:t>Verified on one residential project: small-bore statistics are checked; congested racks rest on practice and standards</a:t>
-            </a:r>
-            <a:endParaRPr lang="en-US" sz="1400" dirty="0"/>
-          </a:p>
-        </p:txBody>
-      </p:sp>
-      <p:sp>
-        <p:nvSpPr>
-          <p:cNvPr id="5" name="next heading"/>
-          <p:cNvSpPr txBox="1"/>
-          <p:nvPr/>
-        </p:nvSpPr>
-        <p:spPr>
-          <a:xfrm>
-            <a:off x="548640" y="4343400"/>
-            <a:ext cx="6766560" cy="411480"/>
-          </a:xfrm>
-          <a:prstGeom prst="rect">
-            <a:avLst/>
-          </a:prstGeom>
-          <a:noFill/>
-          <a:ln/>
-        </p:spPr>
-        <p:txBody>
-          <a:bodyPr wrap="square" lIns="0" tIns="0" rIns="0" bIns="0" rtlCol="0" anchor="ctr"/>
-          <a:lstStyle/>
-          <a:p>
-            <a:pPr indent="0" marL="0">
-              <a:buNone/>
-            </a:pPr>
-            <a:r>
-              <a:rPr lang="en-US" sz="1800" b="1" dirty="0">
-                <a:solidFill>
-                  <a:schemeClr val="tx1"/>
-                </a:solidFill>
-              </a:rPr>
-              <a:t>Next</a:t>
-            </a:r>
-            <a:endParaRPr lang="en-US" sz="1800" dirty="0"/>
-          </a:p>
-        </p:txBody>
-      </p:sp>
-      <p:sp>
-        <p:nvSpPr>
-          <p:cNvPr id="6" name="next bullets"/>
-          <p:cNvSpPr txBox="1"/>
-          <p:nvPr/>
-        </p:nvSpPr>
-        <p:spPr>
-          <a:xfrm>
-            <a:off x="548640" y="4800600"/>
-            <a:ext cx="6766560" cy="1371600"/>
-          </a:xfrm>
-          <a:prstGeom prst="rect">
-            <a:avLst/>
-          </a:prstGeom>
-          <a:noFill/>
-          <a:ln/>
-        </p:spPr>
-        <p:txBody>
-          <a:bodyPr wrap="square" lIns="0" tIns="0" rIns="0" bIns="0" rtlCol="0" anchor="t"/>
-          <a:lstStyle/>
-          <a:p>
-            <a:pPr marL="342900" indent="-342900">
-              <a:spcAft>
-                <a:spcPts val="600"/>
-              </a:spcAft>
-              <a:buSzPct val="100000"/>
-              <a:buChar char="•"/>
-            </a:pPr>
-            <a:r>
-              <a:rPr lang="en-US" sz="1400" dirty="0">
-                <a:solidFill>
-                  <a:schemeClr val="tx1"/>
-                </a:solidFill>
-              </a:rPr>
-              <a:t>Per-bank stagger (co-planar trapeze banks), re-calibrated against the measured elevation spread</a:t>
-            </a:r>
-            <a:endParaRPr lang="en-US" sz="1400" dirty="0"/>
-          </a:p>
-          <a:p>
-            <a:pPr marL="342900" indent="-342900">
-              <a:spcAft>
-                <a:spcPts val="600"/>
-              </a:spcAft>
-              <a:buSzPct val="100000"/>
-              <a:buChar char="•"/>
-            </a:pPr>
-            <a:r>
-              <a:rPr lang="en-US" sz="1400" dirty="0">
-                <a:solidFill>
-                  <a:schemeClr val="tx1"/>
-                </a:solidFill>
-              </a:rPr>
-              <a:t>Pipe materials and more substrates from public standards (EN 1057 copper, EN 10312 stainless, EN 1329 plastics)</a:t>
-            </a:r>
-            <a:endParaRPr lang="en-US" sz="1400" dirty="0"/>
-          </a:p>
-          <a:p>
-            <a:pPr marL="342900" indent="-342900">
-              <a:spcAft>
-                <a:spcPts val="600"/>
-              </a:spcAft>
-              <a:buSzPct val="100000"/>
-              <a:buChar char="•"/>
-            </a:pPr>
-            <a:r>
-              <a:rPr lang="en-US" sz="1400" dirty="0">
-                <a:solidFill>
-                  <a:schemeClr val="tx1"/>
-                </a:solidFill>
-              </a:rPr>
-              <a:t>The same measurement on a commercial corridor model, and an expert plausibility review of generated scenes</a:t>
-            </a:r>
-            <a:endParaRPr lang="en-US" sz="1400" dirty="0"/>
-          </a:p>
-        </p:txBody>
-      </p:sp>
-      <p:sp>
-        <p:nvSpPr>
-          <p:cNvPr id="7" name="ask card"/>
-          <p:cNvSpPr/>
-          <p:nvPr/>
-        </p:nvSpPr>
-        <p:spPr>
-          <a:xfrm>
-            <a:off x="7680960" y="1417320"/>
-            <a:ext cx="3959352" cy="4617720"/>
-          </a:xfrm>
-          <a:prstGeom prst="roundRect">
-            <a:avLst>
-              <a:gd name="adj" fmla="val 1617"/>
-            </a:avLst>
-          </a:prstGeom>
-          <a:solidFill>
-            <a:schemeClr val="bg2"/>
-          </a:solidFill>
-          <a:ln/>
-        </p:spPr>
-      </p:sp>
-      <p:sp>
-        <p:nvSpPr>
-          <p:cNvPr id="8" name="ask heading"/>
-          <p:cNvSpPr txBox="1"/>
-          <p:nvPr/>
-        </p:nvSpPr>
-        <p:spPr>
-          <a:xfrm>
-            <a:off x="7955280" y="1554480"/>
-            <a:ext cx="3429000" cy="731520"/>
-          </a:xfrm>
-          <a:prstGeom prst="rect">
-            <a:avLst/>
-          </a:prstGeom>
-          <a:noFill/>
-          <a:ln/>
-        </p:spPr>
-        <p:txBody>
-          <a:bodyPr wrap="square" lIns="0" tIns="0" rIns="0" bIns="0" rtlCol="0" anchor="t"/>
-          <a:lstStyle/>
-          <a:p>
-            <a:pPr indent="0" marL="0">
-              <a:buNone/>
-            </a:pPr>
-            <a:r>
-              <a:rPr lang="en-US" sz="1700" b="1" dirty="0">
-                <a:solidFill>
-                  <a:schemeClr val="tx1"/>
-                </a:solidFill>
-              </a:rPr>
-              <a:t>The thing we cannot compute is plausibility</a:t>
-            </a:r>
-            <a:endParaRPr lang="en-US" sz="1700" dirty="0"/>
-          </a:p>
-        </p:txBody>
-      </p:sp>
-      <p:sp>
-        <p:nvSpPr>
-          <p:cNvPr id="9" name="ask body"/>
-          <p:cNvSpPr txBox="1"/>
-          <p:nvPr/>
-        </p:nvSpPr>
-        <p:spPr>
-          <a:xfrm>
-            <a:off x="7955280" y="2331720"/>
-            <a:ext cx="3429000" cy="1417320"/>
-          </a:xfrm>
-          <a:prstGeom prst="rect">
-            <a:avLst/>
-          </a:prstGeom>
-          <a:noFill/>
-          <a:ln/>
-        </p:spPr>
-        <p:txBody>
-          <a:bodyPr wrap="square" lIns="0" tIns="0" rIns="0" bIns="0" rtlCol="0" anchor="t"/>
-          <a:lstStyle/>
-          <a:p>
-            <a:pPr indent="0" marL="0">
-              <a:buNone/>
-            </a:pPr>
-            <a:r>
-              <a:rPr lang="en-US" sz="1300" dirty="0">
-                <a:solidFill>
-                  <a:schemeClr val="tx1"/>
-                </a:solidFill>
-              </a:rPr>
-              <a:t>If you coordinate services or design supports: open the gallery, filter for the scenes you know, and tell us what looks wrong. Every rule is one constant and one test away from being changed.</a:t>
-            </a:r>
-            <a:endParaRPr lang="en-US" sz="1300" dirty="0"/>
           </a:p>
         </p:txBody>
       </p:sp>
       <p:pic>
         <p:nvPicPr>
-          <p:cNvPr id="10" name="qr" descr="/home/user/crossmep_dataset/docs/figures/qr_repo.png">    </p:cNvPr>
+          <p:cNvPr id="3" name="gap distributions" descr="/home/user/crossmep_dataset/docs/figures/04_gaps_vs_measured.png">    </p:cNvPr>
           <p:cNvPicPr>
             <a:picLocks noChangeAspect="1"/>
           </p:cNvPicPr>
@@ -3392,8 +3908,8 @@
         </p:blipFill>
         <p:spPr>
           <a:xfrm>
-            <a:off x="7955280" y="4160520"/>
-            <a:ext cx="1463040" cy="1463040"/>
+            <a:off x="1158794" y="1325880"/>
+            <a:ext cx="9871364" cy="4343400"/>
           </a:xfrm>
           <a:prstGeom prst="rect">
             <a:avLst/>
@@ -3402,14 +3918,14 @@
       </p:pic>
       <p:sp>
         <p:nvSpPr>
-          <p:cNvPr id="11" name="repo link"/>
+          <p:cNvPr id="4" name="experiment 2 caption"/>
           <p:cNvSpPr txBox="1"/>
           <p:nvPr/>
         </p:nvSpPr>
         <p:spPr>
           <a:xfrm>
-            <a:off x="9555480" y="4160520"/>
-            <a:ext cx="2011680" cy="1463040"/>
+            <a:off x="548640" y="5760720"/>
+            <a:ext cx="11091672" cy="548640"/>
           </a:xfrm>
           <a:prstGeom prst="rect">
             <a:avLst/>
@@ -3418,33 +3934,19 @@
           <a:ln/>
         </p:spPr>
         <p:txBody>
-          <a:bodyPr wrap="square" lIns="0" tIns="0" rIns="0" bIns="0" rtlCol="0" anchor="ctr"/>
+          <a:bodyPr wrap="square" lIns="0" tIns="0" rIns="0" bIns="0" rtlCol="0" anchor="t"/>
           <a:lstStyle/>
           <a:p>
             <a:pPr indent="0" marL="0">
               <a:buNone/>
             </a:pPr>
             <a:r>
-              <a:rPr lang="en-US" sz="1100" b="1" dirty="0">
-                <a:solidFill>
-                  <a:schemeClr val="tx1"/>
+              <a:rPr lang="en-US" sz="1100" dirty="0">
+                <a:solidFill>
+                  <a:srgbClr val="52514E"/>
                 </a:solidFill>
               </a:rPr>
-              <a:t>github.com/lavinia-ped/CrossMEP_Dataset</a:t>
-            </a:r>
-            <a:endParaRPr lang="en-US" sz="1100" dirty="0"/>
-          </a:p>
-          <a:p>
-            <a:pPr indent="0" marL="0">
-              <a:buNone/>
-            </a:pPr>
-            <a:r>
-              <a:rPr lang="en-US" sz="1100" dirty="0">
-                <a:solidFill>
-                  <a:schemeClr val="tx1"/>
-                </a:solidFill>
-              </a:rPr>
-              <a:t>laviniap@stanford.edu</a:t>
+              <a:t>buildingSMART Duplex Apartment (open IFC): MEP and Plumbing discipline models parsed with IfcOpenShell, 427 and 231 segments. Measured gaps are irregular, not modular. The two discipline models of the same building are 50 mm apart; the generated gaps are 41 mm from the measured ones between insulation surfaces (68 mm between pipe surfaces); a fixed modular gap would be 139 mm away.</a:t>
             </a:r>
             <a:endParaRPr lang="en-US" sz="1100" dirty="0"/>
           </a:p>
@@ -3530,8 +4032,8 @@
         </p:nvSpPr>
         <p:spPr>
           <a:xfrm>
-            <a:off x="640080" y="1828800"/>
-            <a:ext cx="7498080" cy="1737360"/>
+            <a:off x="548640" y="274320"/>
+            <a:ext cx="11091672" cy="960120"/>
           </a:xfrm>
           <a:prstGeom prst="rect">
             <a:avLst/>
@@ -3540,36 +4042,108 @@
           <a:ln/>
         </p:spPr>
         <p:txBody>
-          <a:bodyPr wrap="square" lIns="0" tIns="0" rIns="0" bIns="0" rtlCol="0" anchor="b"/>
+          <a:bodyPr wrap="square" lIns="0" tIns="0" rIns="0" bIns="0" rtlCol="0" anchor="ctr"/>
           <a:lstStyle/>
           <a:p>
             <a:pPr algn="l" indent="0" marL="0">
               <a:buNone/>
             </a:pPr>
             <a:r>
-              <a:rPr lang="en-US" sz="3600" b="1" dirty="0">
-                <a:solidFill>
-                  <a:schemeClr val="bg1"/>
+              <a:rPr lang="en-US" sz="2600" b="1" dirty="0">
+                <a:solidFill>
+                  <a:schemeClr val="tx1"/>
                 </a:solidFill>
               </a:rPr>
-              <a:t>CrossMEP is the brief, not the answer.</a:t>
-            </a:r>
-            <a:endParaRPr lang="en-US" sz="3600" dirty="0"/>
+              <a:t>Experiment 3: a two-bin clamp catalog covers 1 pipe in 9</a:t>
+            </a:r>
+            <a:endParaRPr lang="en-US" sz="2600" dirty="0"/>
           </a:p>
         </p:txBody>
       </p:sp>
-      <p:sp>
-        <p:nvSpPr>
-          <p:cNvPr id="3" name="Text 0"/>
+      <p:graphicFrame>
+        <p:nvGraphicFramePr>
+          <p:cNvPr id="3" name="coverage chart" descr=""/>
+          <p:cNvGraphicFramePr/>
+          <p:nvPr/>
+        </p:nvGraphicFramePr>
+        <p:xfrm>
+          <a:off x="548640" y="1371600"/>
+          <a:ext cx="6949440" cy="4663440"/>
+        </p:xfrm>
+        <a:graphic xmlns:a="http://schemas.openxmlformats.org/drawingml/2006/main">
+          <a:graphicData uri="http://schemas.openxmlformats.org/drawingml/2006/chart">
+            <c:chart xmlns:c="http://schemas.openxmlformats.org/drawingml/2006/chart" r:id="rId1"/>
+          </a:graphicData>
+        </a:graphic>
+      </p:graphicFrame>
+      <p:sp>
+        <p:nvSpPr>
+          <p:cNvPr id="4" name="tile of the benchmark’s pipes can be attached with two clamp bins (48–54 mm at 2.5 kN; 108–114 mm at 4.0 kN)"/>
           <p:cNvSpPr/>
-          <p:nvPr>
-            <p:ph idx="101" type="body" hasCustomPrompt="1"/>
-          </p:nvPr>
-        </p:nvSpPr>
-        <p:spPr>
-          <a:xfrm>
-            <a:off x="640080" y="3794760"/>
-            <a:ext cx="7498080" cy="2011680"/>
+          <p:nvPr/>
+        </p:nvSpPr>
+        <p:spPr>
+          <a:xfrm>
+            <a:off x="7772400" y="1417320"/>
+            <a:ext cx="3867912" cy="1417320"/>
+          </a:xfrm>
+          <a:prstGeom prst="roundRect">
+            <a:avLst>
+              <a:gd name="adj" fmla="val 4516"/>
+            </a:avLst>
+          </a:prstGeom>
+          <a:solidFill>
+            <a:schemeClr val="bg2"/>
+          </a:solidFill>
+          <a:ln/>
+        </p:spPr>
+      </p:sp>
+      <p:sp>
+        <p:nvSpPr>
+          <p:cNvPr id="5" name="value of the benchmark’s pipes can be attached with two clamp bins (48–54 mm at 2.5 kN; 108–114 mm at 4.0 kN)"/>
+          <p:cNvSpPr txBox="1"/>
+          <p:nvPr/>
+        </p:nvSpPr>
+        <p:spPr>
+          <a:xfrm>
+            <a:off x="7973568" y="1508760"/>
+            <a:ext cx="3465576" cy="708660"/>
+          </a:xfrm>
+          <a:prstGeom prst="rect">
+            <a:avLst/>
+          </a:prstGeom>
+          <a:noFill/>
+          <a:ln/>
+        </p:spPr>
+        <p:txBody>
+          <a:bodyPr wrap="square" lIns="0" tIns="0" rIns="0" bIns="0" rtlCol="0" anchor="ctr"/>
+          <a:lstStyle/>
+          <a:p>
+            <a:pPr indent="0" marL="0">
+              <a:buNone/>
+            </a:pPr>
+            <a:r>
+              <a:rPr lang="en-US" sz="3200" b="1" dirty="0">
+                <a:solidFill>
+                  <a:schemeClr val="accent1"/>
+                </a:solidFill>
+              </a:rPr>
+              <a:t>11.6 %</a:t>
+            </a:r>
+            <a:endParaRPr lang="en-US" sz="3200" dirty="0"/>
+          </a:p>
+        </p:txBody>
+      </p:sp>
+      <p:sp>
+        <p:nvSpPr>
+          <p:cNvPr id="6" name="label of the benchmark’s pipes can be attached with two clamp bins (48–54 mm at 2.5 kN; 108–114 mm at 4.0 kN)"/>
+          <p:cNvSpPr txBox="1"/>
+          <p:nvPr/>
+        </p:nvSpPr>
+        <p:spPr>
+          <a:xfrm>
+            <a:off x="7973568" y="2239366"/>
+            <a:ext cx="3465576" cy="538582"/>
           </a:xfrm>
           <a:prstGeom prst="rect">
             <a:avLst/>
@@ -3585,79 +4159,85 @@
               <a:buNone/>
             </a:pPr>
             <a:r>
-              <a:rPr lang="en-US" sz="1600" dirty="0">
-                <a:solidFill>
-                  <a:srgbClr val="CADCFC"/>
+              <a:rPr lang="en-US" sz="1100" dirty="0">
+                <a:solidFill>
+                  <a:srgbClr val="52514E"/>
                 </a:solidFill>
               </a:rPr>
-              <a:t>7,000 sections  ·  every number traced  ·  verified against a built project  ·  reproducible to the byte  ·  public</a:t>
-            </a:r>
-            <a:endParaRPr lang="en-US" sz="1600" dirty="0"/>
-          </a:p>
+              <a:t>of the benchmark’s pipes can be attached with two clamp bins (48–54 mm at 2.5 kN; 108–114 mm at 4.0 kN)</a:t>
+            </a:r>
+            <a:endParaRPr lang="en-US" sz="1100" dirty="0"/>
+          </a:p>
+        </p:txBody>
+      </p:sp>
+      <p:sp>
+        <p:nvSpPr>
+          <p:cNvPr id="7" name="tile trays, ducts and conduits: a clamp catalog defines no attachment for them"/>
+          <p:cNvSpPr/>
+          <p:nvPr/>
+        </p:nvSpPr>
+        <p:spPr>
+          <a:xfrm>
+            <a:off x="7772400" y="3017520"/>
+            <a:ext cx="3867912" cy="1417320"/>
+          </a:xfrm>
+          <a:prstGeom prst="roundRect">
+            <a:avLst>
+              <a:gd name="adj" fmla="val 4516"/>
+            </a:avLst>
+          </a:prstGeom>
+          <a:solidFill>
+            <a:schemeClr val="bg2"/>
+          </a:solidFill>
+          <a:ln/>
+        </p:spPr>
+      </p:sp>
+      <p:sp>
+        <p:nvSpPr>
+          <p:cNvPr id="8" name="value trays, ducts and conduits: a clamp catalog defines no attachment for them"/>
+          <p:cNvSpPr txBox="1"/>
+          <p:nvPr/>
+        </p:nvSpPr>
+        <p:spPr>
+          <a:xfrm>
+            <a:off x="7973568" y="3108960"/>
+            <a:ext cx="3465576" cy="708660"/>
+          </a:xfrm>
+          <a:prstGeom prst="rect">
+            <a:avLst/>
+          </a:prstGeom>
+          <a:noFill/>
+          <a:ln/>
+        </p:spPr>
+        <p:txBody>
+          <a:bodyPr wrap="square" lIns="0" tIns="0" rIns="0" bIns="0" rtlCol="0" anchor="ctr"/>
+          <a:lstStyle/>
           <a:p>
             <a:pPr indent="0" marL="0">
               <a:buNone/>
             </a:pPr>
             <a:r>
-              <a:rPr lang="en-US" sz="800" dirty="0">
-                <a:solidFill>
-                  <a:srgbClr val="CADCFC"/>
+              <a:rPr lang="en-US" sz="3200" b="1" dirty="0">
+                <a:solidFill>
+                  <a:schemeClr val="accent1"/>
                 </a:solidFill>
               </a:rPr>
-              <a:t> </a:t>
-            </a:r>
-            <a:endParaRPr lang="en-US" sz="1600" dirty="0"/>
-          </a:p>
-          <a:p>
-            <a:pPr indent="0" marL="0">
-              <a:buNone/>
-            </a:pPr>
-            <a:r>
-              <a:rPr lang="en-US" sz="1300" dirty="0">
-                <a:solidFill>
-                  <a:srgbClr val="CADCFC"/>
-                </a:solidFill>
-              </a:rPr>
-              <a:t>Data CC BY 4.0, code MIT.  Not for the structural design of real installations.</a:t>
-            </a:r>
-            <a:endParaRPr lang="en-US" sz="1600" dirty="0"/>
+              <a:t>0 of 1,971</a:t>
+            </a:r>
+            <a:endParaRPr lang="en-US" sz="3200" dirty="0"/>
           </a:p>
         </p:txBody>
       </p:sp>
-      <p:pic>
-        <p:nvPicPr>
-          <p:cNvPr id="4" name="qr closing" descr="/home/user/crossmep_dataset/docs/figures/qr_repo.png">    </p:cNvPr>
-          <p:cNvPicPr>
-            <a:picLocks noChangeAspect="1"/>
-          </p:cNvPicPr>
-          <p:nvPr/>
-        </p:nvPicPr>
-        <p:blipFill>
-          <a:blip r:embed="rId1"/>
-          <a:stretch>
-            <a:fillRect/>
-          </a:stretch>
-        </p:blipFill>
-        <p:spPr>
-          <a:xfrm>
-            <a:off x="8778240" y="2286000"/>
-            <a:ext cx="2103120" cy="2103120"/>
-          </a:xfrm>
-          <a:prstGeom prst="rect">
-            <a:avLst/>
-          </a:prstGeom>
-        </p:spPr>
-      </p:pic>
-      <p:sp>
-        <p:nvSpPr>
-          <p:cNvPr id="5" name="closing link"/>
+      <p:sp>
+        <p:nvSpPr>
+          <p:cNvPr id="9" name="label trays, ducts and conduits: a clamp catalog defines no attachment for them"/>
           <p:cNvSpPr txBox="1"/>
           <p:nvPr/>
         </p:nvSpPr>
         <p:spPr>
           <a:xfrm>
-            <a:off x="8503920" y="4480560"/>
-            <a:ext cx="3108960" cy="731520"/>
+            <a:off x="7973568" y="3839566"/>
+            <a:ext cx="3465576" cy="538582"/>
           </a:xfrm>
           <a:prstGeom prst="rect">
             <a:avLst/>
@@ -3669,32 +4249,132 @@
           <a:bodyPr wrap="square" lIns="0" tIns="0" rIns="0" bIns="0" rtlCol="0" anchor="t"/>
           <a:lstStyle/>
           <a:p>
-            <a:pPr algn="ctr" indent="0" marL="0">
+            <a:pPr indent="0" marL="0">
               <a:buNone/>
             </a:pPr>
             <a:r>
-              <a:rPr lang="en-US" sz="1200" b="1" dirty="0">
-                <a:solidFill>
-                  <a:schemeClr val="bg1"/>
+              <a:rPr lang="en-US" sz="1100" dirty="0">
+                <a:solidFill>
+                  <a:srgbClr val="52514E"/>
                 </a:solidFill>
               </a:rPr>
-              <a:t>github.com/lavinia-ped/CrossMEP_Dataset</a:t>
-            </a:r>
-            <a:endParaRPr lang="en-US" sz="1200" dirty="0"/>
-          </a:p>
-          <a:p>
-            <a:pPr algn="ctr" indent="0" marL="0">
+              <a:t>trays, ducts and conduits: a clamp catalog defines no attachment for them</a:t>
+            </a:r>
+            <a:endParaRPr lang="en-US" sz="1100" dirty="0"/>
+          </a:p>
+        </p:txBody>
+      </p:sp>
+      <p:sp>
+        <p:nvSpPr>
+          <p:cNvPr id="10" name="catalog note card"/>
+          <p:cNvSpPr/>
+          <p:nvPr/>
+        </p:nvSpPr>
+        <p:spPr>
+          <a:xfrm>
+            <a:off x="7772400" y="4617720"/>
+            <a:ext cx="3867912" cy="1417320"/>
+          </a:xfrm>
+          <a:prstGeom prst="roundRect">
+            <a:avLst>
+              <a:gd name="adj" fmla="val 4516"/>
+            </a:avLst>
+          </a:prstGeom>
+          <a:solidFill>
+            <a:schemeClr val="bg2"/>
+          </a:solidFill>
+          <a:ln/>
+        </p:spPr>
+      </p:sp>
+      <p:sp>
+        <p:nvSpPr>
+          <p:cNvPr id="11" name="catalog note"/>
+          <p:cNvSpPr txBox="1"/>
+          <p:nvPr/>
+        </p:nvSpPr>
+        <p:spPr>
+          <a:xfrm>
+            <a:off x="8001000" y="4709160"/>
+            <a:ext cx="3429000" cy="1234440"/>
+          </a:xfrm>
+          <a:prstGeom prst="rect">
+            <a:avLst/>
+          </a:prstGeom>
+          <a:noFill/>
+          <a:ln/>
+        </p:spPr>
+        <p:txBody>
+          <a:bodyPr wrap="square" lIns="0" tIns="0" rIns="0" bIns="0" rtlCol="0" anchor="ctr"/>
+          <a:lstStyle/>
+          <a:p>
+            <a:pPr indent="0" marL="0">
               <a:buNone/>
             </a:pPr>
             <a:r>
-              <a:rPr lang="en-US" sz="1200" dirty="0">
-                <a:solidFill>
-                  <a:schemeClr val="bg1"/>
+              <a:rPr lang="en-US" sz="1250" b="1" dirty="0">
+                <a:solidFill>
+                  <a:schemeClr val="tx1"/>
                 </a:solidFill>
               </a:rPr>
-              <a:t>laviniap@stanford.edu</a:t>
-            </a:r>
-            <a:endParaRPr lang="en-US" sz="1200" dirty="0"/>
+              <a:t>Loads never bind; diameter and kind do. </a:t>
+            </a:r>
+            <a:pPr indent="0" marL="0">
+              <a:buNone/>
+            </a:pPr>
+            <a:r>
+              <a:rPr lang="en-US" sz="1250" dirty="0">
+                <a:solidFill>
+                  <a:schemeClr val="tx1"/>
+                </a:solidFill>
+              </a:rPr>
+              <a:t>“Generalise the catalog” becomes a measured requirement: small-bore clamps first, then tray, duct and conduit attachments.</a:t>
+            </a:r>
+            <a:endParaRPr lang="en-US" sz="1250" dirty="0"/>
+          </a:p>
+        </p:txBody>
+      </p:sp>
+      <p:sp>
+        <p:nvSpPr>
+          <p:cNvPr id="25" name="Slide Number Placeholder 0"/>
+          <p:cNvSpPr>
+            <a:spLocks noGrp="1"/>
+          </p:cNvSpPr>
+          <p:nvPr>
+            <p:ph type="sldNum" sz="quarter" idx="4294967295"/>
+          </p:nvPr>
+        </p:nvSpPr>
+        <p:spPr>
+          <a:xfrm>
+            <a:off x="11064240" y="6419088"/>
+            <a:ext cx="594360" cy="274320"/>
+          </a:xfrm>
+          <a:prstGeom prst="rect">
+            <a:avLst/>
+          </a:prstGeom>
+          <a:extLst>
+            <a:ext uri="{C572A759-6A51-4108-AA02-DFA0A04FC94B}">
+              <ma14:wrappingTextBoxFlag xmlns:ma14="http://schemas.microsoft.com/office/mac/drawingml/2011/main" val="0"/>
+            </a:ext>
+          </a:extLst>
+        </p:spPr>
+        <p:txBody>
+          <a:bodyPr/>
+          <a:lstStyle>
+            <a:lvl1pPr>
+              <a:defRPr sz="900">
+                <a:solidFill>
+                  <a:srgbClr val="898781"/>
+                </a:solidFill>
+              </a:defRPr>
+            </a:lvl1pPr>
+          </a:lstStyle>
+          <a:p>
+            <a:pPr algn="r"/>
+            <a:fld id="{F7021451-1387-4CA6-816F-3879F97B5CBC}" type="slidenum">
+              <a:rPr b="0" lang="en-US"/>
+              <a:t>11</a:t>
+            </a:fld>
+            <a:endParaRPr lang="en-US"/>
           </a:p>
         </p:txBody>
       </p:sp>
@@ -3755,15 +4435,228 @@
                   <a:schemeClr val="tx1"/>
                 </a:solidFill>
               </a:rPr>
-              <a:t>Appendix A — are the tiers actually ordered?</a:t>
+              <a:t>Using CrossMEP: load, filter, generate, inspect</a:t>
             </a:r>
             <a:endParaRPr lang="en-US" sz="2600" dirty="0"/>
+          </a:p>
+        </p:txBody>
+      </p:sp>
+      <p:sp>
+        <p:nvSpPr>
+          <p:cNvPr id="3" name="code card"/>
+          <p:cNvSpPr/>
+          <p:nvPr/>
+        </p:nvSpPr>
+        <p:spPr>
+          <a:xfrm>
+            <a:off x="548640" y="1417320"/>
+            <a:ext cx="5486400" cy="1874520"/>
+          </a:xfrm>
+          <a:prstGeom prst="roundRect">
+            <a:avLst>
+              <a:gd name="adj" fmla="val 3415"/>
+            </a:avLst>
+          </a:prstGeom>
+          <a:solidFill>
+            <a:schemeClr val="tx2"/>
+          </a:solidFill>
+          <a:ln/>
+        </p:spPr>
+      </p:sp>
+      <p:sp>
+        <p:nvSpPr>
+          <p:cNvPr id="4" name="code"/>
+          <p:cNvSpPr txBox="1"/>
+          <p:nvPr/>
+        </p:nvSpPr>
+        <p:spPr>
+          <a:xfrm>
+            <a:off x="777240" y="1600200"/>
+            <a:ext cx="5029200" cy="1508760"/>
+          </a:xfrm>
+          <a:prstGeom prst="rect">
+            <a:avLst/>
+          </a:prstGeom>
+          <a:noFill/>
+          <a:ln/>
+        </p:spPr>
+        <p:txBody>
+          <a:bodyPr wrap="square" lIns="0" tIns="0" rIns="0" bIns="0" rtlCol="0" anchor="t"/>
+          <a:lstStyle/>
+          <a:p>
+            <a:pPr indent="0" marL="0">
+              <a:buNone/>
+            </a:pPr>
+            <a:r>
+              <a:rPr lang="en-US" sz="1300" dirty="0">
+                <a:solidFill>
+                  <a:srgbClr val="FFFFFF"/>
+                </a:solidFill>
+                <a:latin typeface="Courier New" pitchFamily="34" charset="0"/>
+                <a:ea typeface="Courier New" pitchFamily="34" charset="-122"/>
+                <a:cs typeface="Courier New" pitchFamily="34" charset="-120"/>
+              </a:rPr>
+              <a:t>import crossmep.tasks as cm</a:t>
+            </a:r>
+            <a:endParaRPr lang="en-US" sz="1300" dirty="0"/>
+          </a:p>
+          <a:p>
+            <a:pPr indent="0" marL="0">
+              <a:buNone/>
+            </a:pPr>
+            <a:r>
+              <a:rPr lang="en-US" sz="1300" dirty="0">
+                <a:solidFill>
+                  <a:srgbClr val="FFFFFF"/>
+                </a:solidFill>
+                <a:latin typeface="Courier New" pitchFamily="34" charset="0"/>
+                <a:ea typeface="Courier New" pitchFamily="34" charset="-122"/>
+                <a:cs typeface="Courier New" pitchFamily="34" charset="-120"/>
+              </a:rPr>
+              <a:t>data = cm.load("benchmark")</a:t>
+            </a:r>
+            <a:pPr indent="0" marL="0">
+              <a:buNone/>
+            </a:pPr>
+            <a:r>
+              <a:rPr lang="en-US" sz="1300" dirty="0">
+                <a:solidFill>
+                  <a:srgbClr val="CADCFC"/>
+                </a:solidFill>
+                <a:latin typeface="Courier New" pitchFamily="34" charset="0"/>
+                <a:ea typeface="Courier New" pitchFamily="34" charset="-122"/>
+                <a:cs typeface="Courier New" pitchFamily="34" charset="-120"/>
+              </a:rPr>
+              <a:t>  # 1,000 contexts</a:t>
+            </a:r>
+            <a:endParaRPr lang="en-US" sz="1300" dirty="0"/>
+          </a:p>
+          <a:p>
+            <a:pPr indent="0" marL="0">
+              <a:buNone/>
+            </a:pPr>
+            <a:r>
+              <a:rPr lang="en-US" sz="1300" dirty="0">
+                <a:solidFill>
+                  <a:srgbClr val="FFFFFF"/>
+                </a:solidFill>
+                <a:latin typeface="Courier New" pitchFamily="34" charset="0"/>
+                <a:ea typeface="Courier New" pitchFamily="34" charset="-122"/>
+                <a:cs typeface="Courier New" pitchFamily="34" charset="-120"/>
+              </a:rPr>
+              <a:t>cm.filter_contexts(data, pipes=2, trays=1)</a:t>
+            </a:r>
+            <a:endParaRPr lang="en-US" sz="1300" dirty="0"/>
+          </a:p>
+          <a:p>
+            <a:pPr indent="0" marL="0">
+              <a:buNone/>
+            </a:pPr>
+            <a:r>
+              <a:rPr lang="en-US" sz="1300" dirty="0">
+                <a:solidFill>
+                  <a:srgbClr val="FFFFFF"/>
+                </a:solidFill>
+                <a:latin typeface="Courier New" pitchFamily="34" charset="0"/>
+                <a:ea typeface="Courier New" pitchFamily="34" charset="-122"/>
+                <a:cs typeface="Courier New" pitchFamily="34" charset="-120"/>
+              </a:rPr>
+              <a:t>cm.catalog_coverage(data, my_catalog)</a:t>
+            </a:r>
+            <a:endParaRPr lang="en-US" sz="1300" dirty="0"/>
+          </a:p>
+          <a:p>
+            <a:pPr indent="0" marL="0">
+              <a:buNone/>
+            </a:pPr>
+            <a:r>
+              <a:rPr lang="en-US" sz="1300" dirty="0">
+                <a:solidFill>
+                  <a:srgbClr val="FFFFFF"/>
+                </a:solidFill>
+                <a:latin typeface="Courier New" pitchFamily="34" charset="0"/>
+                <a:ea typeface="Courier New" pitchFamily="34" charset="-122"/>
+                <a:cs typeface="Courier New" pitchFamily="34" charset="-120"/>
+              </a:rPr>
+              <a:t> </a:t>
+            </a:r>
+            <a:endParaRPr lang="en-US" sz="1300" dirty="0"/>
+          </a:p>
+          <a:p>
+            <a:pPr indent="0" marL="0">
+              <a:buNone/>
+            </a:pPr>
+            <a:r>
+              <a:rPr lang="en-US" sz="1300" dirty="0">
+                <a:solidFill>
+                  <a:srgbClr val="FFFFFF"/>
+                </a:solidFill>
+                <a:latin typeface="Courier New" pitchFamily="34" charset="0"/>
+                <a:ea typeface="Courier New" pitchFamily="34" charset="-122"/>
+                <a:cs typeface="Courier New" pitchFamily="34" charset="-120"/>
+              </a:rPr>
+              <a:t>from crossmep import generate_custom</a:t>
+            </a:r>
+            <a:endParaRPr lang="en-US" sz="1300" dirty="0"/>
+          </a:p>
+          <a:p>
+            <a:pPr indent="0" marL="0">
+              <a:buNone/>
+            </a:pPr>
+            <a:r>
+              <a:rPr lang="en-US" sz="1300" dirty="0">
+                <a:solidFill>
+                  <a:srgbClr val="FFFFFF"/>
+                </a:solidFill>
+                <a:latin typeface="Courier New" pitchFamily="34" charset="0"/>
+                <a:ea typeface="Courier New" pitchFamily="34" charset="-122"/>
+                <a:cs typeface="Courier New" pitchFamily="34" charset="-120"/>
+              </a:rPr>
+              <a:t>generate_custom(100, pipes=(2, 4), trays=1)</a:t>
+            </a:r>
+            <a:endParaRPr lang="en-US" sz="1300" dirty="0"/>
+          </a:p>
+        </p:txBody>
+      </p:sp>
+      <p:sp>
+        <p:nvSpPr>
+          <p:cNvPr id="5" name="code caption"/>
+          <p:cNvSpPr txBox="1"/>
+          <p:nvPr/>
+        </p:nvSpPr>
+        <p:spPr>
+          <a:xfrm>
+            <a:off x="548640" y="3429000"/>
+            <a:ext cx="5486400" cy="548640"/>
+          </a:xfrm>
+          <a:prstGeom prst="rect">
+            <a:avLst/>
+          </a:prstGeom>
+          <a:noFill/>
+          <a:ln/>
+        </p:spPr>
+        <p:txBody>
+          <a:bodyPr wrap="square" lIns="0" tIns="0" rIns="0" bIns="0" rtlCol="0" anchor="t"/>
+          <a:lstStyle/>
+          <a:p>
+            <a:pPr indent="0" marL="0">
+              <a:buNone/>
+            </a:pPr>
+            <a:r>
+              <a:rPr lang="en-US" sz="1100" dirty="0">
+                <a:solidFill>
+                  <a:srgbClr val="52514E"/>
+                </a:solidFill>
+              </a:rPr>
+              <a:t>The loader and metrics need only the Python standard library; the generator needs NumPy. Command line: python -m crossmep.</a:t>
+            </a:r>
+            <a:endParaRPr lang="en-US" sz="1100" dirty="0"/>
           </a:p>
         </p:txBody>
       </p:sp>
       <p:pic>
         <p:nvPicPr>
-          <p:cNvPr id="3" name="tier statistics" descr="/home/user/crossmep_dataset/docs/figures/03_tiers_stats.png">    </p:cNvPr>
+          <p:cNvPr id="6" name="gallery screenshot" descr="/home/user/crossmep_dataset/docs/figures/07_gallery_screenshot.png">    </p:cNvPr>
           <p:cNvPicPr>
             <a:picLocks noChangeAspect="1"/>
           </p:cNvPicPr>
@@ -3777,8 +4670,8 @@
         </p:blipFill>
         <p:spPr>
           <a:xfrm>
-            <a:off x="548640" y="1390162"/>
-            <a:ext cx="11091672" cy="4214835"/>
+            <a:off x="6812259" y="1417320"/>
+            <a:ext cx="4370873" cy="2834640"/>
           </a:xfrm>
           <a:prstGeom prst="rect">
             <a:avLst/>
@@ -3787,14 +4680,14 @@
       </p:pic>
       <p:sp>
         <p:nvSpPr>
-          <p:cNvPr id="4" name="appendix a caption"/>
+          <p:cNvPr id="7" name="gallery screenshot caption"/>
           <p:cNvSpPr txBox="1"/>
           <p:nvPr/>
         </p:nvSpPr>
         <p:spPr>
           <a:xfrm>
-            <a:off x="548640" y="5696438"/>
-            <a:ext cx="11091672" cy="457200"/>
+            <a:off x="6355080" y="4325112"/>
+            <a:ext cx="5285232" cy="274320"/>
           </a:xfrm>
           <a:prstGeom prst="rect">
             <a:avLst/>
@@ -3815,9 +4708,291 @@
                   <a:srgbClr val="52514E"/>
                 </a:solidFill>
               </a:rPr>
-              <a:t>Element count is exact by construction; the medians of clear gap and load are near-monotone (C5/C6 and C7/C8 swap at 125 contexts per tier). Difficulty is carried jointly by count, congestion, load and stacking, with count as the controlled axis.</a:t>
+              <a:t>Interactive gallery: filter the benchmark by tier, kind, trade and surface.</a:t>
             </a:r>
             <a:endParaRPr lang="en-US" sz="1100" dirty="0"/>
+          </a:p>
+        </p:txBody>
+      </p:sp>
+      <p:sp>
+        <p:nvSpPr>
+          <p:cNvPr id="8" name="use Curriculum"/>
+          <p:cNvSpPr/>
+          <p:nvPr/>
+        </p:nvSpPr>
+        <p:spPr>
+          <a:xfrm>
+            <a:off x="548640" y="4754880"/>
+            <a:ext cx="3575304" cy="1280160"/>
+          </a:xfrm>
+          <a:prstGeom prst="roundRect">
+            <a:avLst>
+              <a:gd name="adj" fmla="val 5000"/>
+            </a:avLst>
+          </a:prstGeom>
+          <a:solidFill>
+            <a:schemeClr val="bg2"/>
+          </a:solidFill>
+          <a:ln/>
+        </p:spPr>
+      </p:sp>
+      <p:sp>
+        <p:nvSpPr>
+          <p:cNvPr id="9" name="use head Curriculum"/>
+          <p:cNvSpPr txBox="1"/>
+          <p:nvPr/>
+        </p:nvSpPr>
+        <p:spPr>
+          <a:xfrm>
+            <a:off x="777240" y="4864608"/>
+            <a:ext cx="3118104" cy="365760"/>
+          </a:xfrm>
+          <a:prstGeom prst="rect">
+            <a:avLst/>
+          </a:prstGeom>
+          <a:noFill/>
+          <a:ln/>
+        </p:spPr>
+        <p:txBody>
+          <a:bodyPr wrap="square" lIns="0" tIns="0" rIns="0" bIns="0" rtlCol="0" anchor="ctr"/>
+          <a:lstStyle/>
+          <a:p>
+            <a:pPr indent="0" marL="0">
+              <a:buNone/>
+            </a:pPr>
+            <a:r>
+              <a:rPr lang="en-US" sz="1500" b="1" dirty="0">
+                <a:solidFill>
+                  <a:schemeClr val="tx1"/>
+                </a:solidFill>
+              </a:rPr>
+              <a:t>Curriculum</a:t>
+            </a:r>
+            <a:endParaRPr lang="en-US" sz="1500" dirty="0"/>
+          </a:p>
+        </p:txBody>
+      </p:sp>
+      <p:sp>
+        <p:nvSpPr>
+          <p:cNvPr id="10" name="use text Curriculum"/>
+          <p:cNvSpPr txBox="1"/>
+          <p:nvPr/>
+        </p:nvSpPr>
+        <p:spPr>
+          <a:xfrm>
+            <a:off x="777240" y="5257800"/>
+            <a:ext cx="3118104" cy="640080"/>
+          </a:xfrm>
+          <a:prstGeom prst="rect">
+            <a:avLst/>
+          </a:prstGeom>
+          <a:noFill/>
+          <a:ln/>
+        </p:spPr>
+        <p:txBody>
+          <a:bodyPr wrap="square" lIns="0" tIns="0" rIns="0" bIns="0" rtlCol="0" anchor="t"/>
+          <a:lstStyle/>
+          <a:p>
+            <a:pPr indent="0" marL="0">
+              <a:buNone/>
+            </a:pPr>
+            <a:r>
+              <a:rPr lang="en-US" sz="1250" dirty="0">
+                <a:solidFill>
+                  <a:schemeClr val="tx1"/>
+                </a:solidFill>
+              </a:rPr>
+              <a:t>train from C1 to C8, one element at a time</a:t>
+            </a:r>
+            <a:endParaRPr lang="en-US" sz="1250" dirty="0"/>
+          </a:p>
+        </p:txBody>
+      </p:sp>
+      <p:sp>
+        <p:nvSpPr>
+          <p:cNvPr id="11" name="use Stratified evaluation"/>
+          <p:cNvSpPr/>
+          <p:nvPr/>
+        </p:nvSpPr>
+        <p:spPr>
+          <a:xfrm>
+            <a:off x="4306824" y="4754880"/>
+            <a:ext cx="3575304" cy="1280160"/>
+          </a:xfrm>
+          <a:prstGeom prst="roundRect">
+            <a:avLst>
+              <a:gd name="adj" fmla="val 5000"/>
+            </a:avLst>
+          </a:prstGeom>
+          <a:solidFill>
+            <a:schemeClr val="bg2"/>
+          </a:solidFill>
+          <a:ln/>
+        </p:spPr>
+      </p:sp>
+      <p:sp>
+        <p:nvSpPr>
+          <p:cNvPr id="12" name="use head Stratified evaluation"/>
+          <p:cNvSpPr txBox="1"/>
+          <p:nvPr/>
+        </p:nvSpPr>
+        <p:spPr>
+          <a:xfrm>
+            <a:off x="4535424" y="4864608"/>
+            <a:ext cx="3118104" cy="365760"/>
+          </a:xfrm>
+          <a:prstGeom prst="rect">
+            <a:avLst/>
+          </a:prstGeom>
+          <a:noFill/>
+          <a:ln/>
+        </p:spPr>
+        <p:txBody>
+          <a:bodyPr wrap="square" lIns="0" tIns="0" rIns="0" bIns="0" rtlCol="0" anchor="ctr"/>
+          <a:lstStyle/>
+          <a:p>
+            <a:pPr indent="0" marL="0">
+              <a:buNone/>
+            </a:pPr>
+            <a:r>
+              <a:rPr lang="en-US" sz="1500" b="1" dirty="0">
+                <a:solidFill>
+                  <a:schemeClr val="tx1"/>
+                </a:solidFill>
+              </a:rPr>
+              <a:t>Stratified evaluation</a:t>
+            </a:r>
+            <a:endParaRPr lang="en-US" sz="1500" dirty="0"/>
+          </a:p>
+        </p:txBody>
+      </p:sp>
+      <p:sp>
+        <p:nvSpPr>
+          <p:cNvPr id="13" name="use text Stratified evaluation"/>
+          <p:cNvSpPr txBox="1"/>
+          <p:nvPr/>
+        </p:nvSpPr>
+        <p:spPr>
+          <a:xfrm>
+            <a:off x="4535424" y="5257800"/>
+            <a:ext cx="3118104" cy="640080"/>
+          </a:xfrm>
+          <a:prstGeom prst="rect">
+            <a:avLst/>
+          </a:prstGeom>
+          <a:noFill/>
+          <a:ln/>
+        </p:spPr>
+        <p:txBody>
+          <a:bodyPr wrap="square" lIns="0" tIns="0" rIns="0" bIns="0" rtlCol="0" anchor="t"/>
+          <a:lstStyle/>
+          <a:p>
+            <a:pPr indent="0" marL="0">
+              <a:buNone/>
+            </a:pPr>
+            <a:r>
+              <a:rPr lang="en-US" sz="1250" dirty="0">
+                <a:solidFill>
+                  <a:schemeClr val="tx1"/>
+                </a:solidFill>
+              </a:rPr>
+              <a:t>success and feasibility-collapse rate per tier</a:t>
+            </a:r>
+            <a:endParaRPr lang="en-US" sz="1250" dirty="0"/>
+          </a:p>
+        </p:txBody>
+      </p:sp>
+      <p:sp>
+        <p:nvSpPr>
+          <p:cNvPr id="14" name="use Probes"/>
+          <p:cNvSpPr/>
+          <p:nvPr/>
+        </p:nvSpPr>
+        <p:spPr>
+          <a:xfrm>
+            <a:off x="8065008" y="4754880"/>
+            <a:ext cx="3575304" cy="1280160"/>
+          </a:xfrm>
+          <a:prstGeom prst="roundRect">
+            <a:avLst>
+              <a:gd name="adj" fmla="val 5000"/>
+            </a:avLst>
+          </a:prstGeom>
+          <a:solidFill>
+            <a:schemeClr val="bg2"/>
+          </a:solidFill>
+          <a:ln/>
+        </p:spPr>
+      </p:sp>
+      <p:sp>
+        <p:nvSpPr>
+          <p:cNvPr id="15" name="use head Probes"/>
+          <p:cNvSpPr txBox="1"/>
+          <p:nvPr/>
+        </p:nvSpPr>
+        <p:spPr>
+          <a:xfrm>
+            <a:off x="8293608" y="4864608"/>
+            <a:ext cx="3118104" cy="365760"/>
+          </a:xfrm>
+          <a:prstGeom prst="rect">
+            <a:avLst/>
+          </a:prstGeom>
+          <a:noFill/>
+          <a:ln/>
+        </p:spPr>
+        <p:txBody>
+          <a:bodyPr wrap="square" lIns="0" tIns="0" rIns="0" bIns="0" rtlCol="0" anchor="ctr"/>
+          <a:lstStyle/>
+          <a:p>
+            <a:pPr indent="0" marL="0">
+              <a:buNone/>
+            </a:pPr>
+            <a:r>
+              <a:rPr lang="en-US" sz="1500" b="1" dirty="0">
+                <a:solidFill>
+                  <a:schemeClr val="tx1"/>
+                </a:solidFill>
+              </a:rPr>
+              <a:t>Probes</a:t>
+            </a:r>
+            <a:endParaRPr lang="en-US" sz="1500" dirty="0"/>
+          </a:p>
+        </p:txBody>
+      </p:sp>
+      <p:sp>
+        <p:nvSpPr>
+          <p:cNvPr id="16" name="use text Probes"/>
+          <p:cNvSpPr txBox="1"/>
+          <p:nvPr/>
+        </p:nvSpPr>
+        <p:spPr>
+          <a:xfrm>
+            <a:off x="8293608" y="5257800"/>
+            <a:ext cx="3118104" cy="640080"/>
+          </a:xfrm>
+          <a:prstGeom prst="rect">
+            <a:avLst/>
+          </a:prstGeom>
+          <a:noFill/>
+          <a:ln/>
+        </p:spPr>
+        <p:txBody>
+          <a:bodyPr wrap="square" lIns="0" tIns="0" rIns="0" bIns="0" rtlCol="0" anchor="t"/>
+          <a:lstStyle/>
+          <a:p>
+            <a:pPr indent="0" marL="0">
+              <a:buNone/>
+            </a:pPr>
+            <a:r>
+              <a:rPr lang="en-US" sz="1250" dirty="0">
+                <a:solidFill>
+                  <a:schemeClr val="tx1"/>
+                </a:solidFill>
+              </a:rPr>
+              <a:t>held-out seeds and custom compositions</a:t>
+            </a:r>
+            <a:endParaRPr lang="en-US" sz="1250" dirty="0"/>
           </a:p>
         </p:txBody>
       </p:sp>
@@ -3923,7 +5098,697 @@
                   <a:schemeClr val="tx1"/>
                 </a:solidFill>
               </a:rPr>
-              <a:t>Appendix B — the public files in numbers (benchmark split, revision 4.0)</a:t>
+              <a:t>Scope, and what comes next</a:t>
+            </a:r>
+            <a:endParaRPr lang="en-US" sz="2600" dirty="0"/>
+          </a:p>
+        </p:txBody>
+      </p:sp>
+      <p:sp>
+        <p:nvSpPr>
+          <p:cNvPr id="3" name="scope card"/>
+          <p:cNvSpPr/>
+          <p:nvPr/>
+        </p:nvSpPr>
+        <p:spPr>
+          <a:xfrm>
+            <a:off x="548640" y="1371600"/>
+            <a:ext cx="5431536" cy="3246120"/>
+          </a:xfrm>
+          <a:prstGeom prst="roundRect">
+            <a:avLst>
+              <a:gd name="adj" fmla="val 1972"/>
+            </a:avLst>
+          </a:prstGeom>
+          <a:solidFill>
+            <a:schemeClr val="bg2"/>
+          </a:solidFill>
+          <a:ln/>
+        </p:spPr>
+      </p:sp>
+      <p:sp>
+        <p:nvSpPr>
+          <p:cNvPr id="4" name="scope heading"/>
+          <p:cNvSpPr txBox="1"/>
+          <p:nvPr/>
+        </p:nvSpPr>
+        <p:spPr>
+          <a:xfrm>
+            <a:off x="822960" y="1508760"/>
+            <a:ext cx="4882896" cy="411480"/>
+          </a:xfrm>
+          <a:prstGeom prst="rect">
+            <a:avLst/>
+          </a:prstGeom>
+          <a:noFill/>
+          <a:ln/>
+        </p:spPr>
+        <p:txBody>
+          <a:bodyPr wrap="square" lIns="0" tIns="0" rIns="0" bIns="0" rtlCol="0" anchor="ctr"/>
+          <a:lstStyle/>
+          <a:p>
+            <a:pPr indent="0" marL="0">
+              <a:buNone/>
+            </a:pPr>
+            <a:r>
+              <a:rPr lang="en-US" sz="1800" b="1" dirty="0">
+                <a:solidFill>
+                  <a:schemeClr val="tx1"/>
+                </a:solidFill>
+              </a:rPr>
+              <a:t>Scope</a:t>
+            </a:r>
+            <a:endParaRPr lang="en-US" sz="1800" dirty="0"/>
+          </a:p>
+        </p:txBody>
+      </p:sp>
+      <p:sp>
+        <p:nvSpPr>
+          <p:cNvPr id="5" name="scope bullets"/>
+          <p:cNvSpPr txBox="1"/>
+          <p:nvPr/>
+        </p:nvSpPr>
+        <p:spPr>
+          <a:xfrm>
+            <a:off x="822960" y="2011680"/>
+            <a:ext cx="4882896" cy="2514600"/>
+          </a:xfrm>
+          <a:prstGeom prst="rect">
+            <a:avLst/>
+          </a:prstGeom>
+          <a:noFill/>
+          <a:ln/>
+        </p:spPr>
+        <p:txBody>
+          <a:bodyPr wrap="square" lIns="0" tIns="0" rIns="0" bIns="0" rtlCol="0" anchor="t"/>
+          <a:lstStyle/>
+          <a:p>
+            <a:pPr marL="342900" indent="-342900">
+              <a:spcAft>
+                <a:spcPts val="600"/>
+              </a:spcAft>
+              <a:buSzPct val="100000"/>
+              <a:buChar char="•"/>
+            </a:pPr>
+            <a:r>
+              <a:rPr lang="en-US" sz="1400" dirty="0">
+                <a:solidFill>
+                  <a:schemeClr val="tx1"/>
+                </a:solidFill>
+              </a:rPr>
+              <a:t>One cross-section at one support: routing, branches and elevation changes are outside it; so is support spacing — the span is recorded per element, so a method can vary it</a:t>
+            </a:r>
+            <a:endParaRPr lang="en-US" sz="1400" dirty="0"/>
+          </a:p>
+          <a:p>
+            <a:pPr marL="342900" indent="-342900">
+              <a:spcAft>
+                <a:spcPts val="600"/>
+              </a:spcAft>
+              <a:buSzPct val="100000"/>
+              <a:buChar char="•"/>
+            </a:pPr>
+            <a:r>
+              <a:rPr lang="en-US" sz="1400" dirty="0">
+                <a:solidFill>
+                  <a:schemeClr val="tx1"/>
+                </a:solidFill>
+              </a:rPr>
+              <a:t>Realism checked on two discipline models of one open residential project; congested racks rest on coordination practice and standards</a:t>
+            </a:r>
+            <a:endParaRPr lang="en-US" sz="1400" dirty="0"/>
+          </a:p>
+          <a:p>
+            <a:pPr marL="342900" indent="-342900">
+              <a:spcAft>
+                <a:spcPts val="600"/>
+              </a:spcAft>
+              <a:buSzPct val="100000"/>
+              <a:buChar char="•"/>
+            </a:pPr>
+            <a:r>
+              <a:rPr lang="en-US" sz="1400" dirty="0">
+                <a:solidFill>
+                  <a:schemeClr val="tx1"/>
+                </a:solidFill>
+              </a:rPr>
+              <a:t>Trade mix and tier composition are design choices, not survey results</a:t>
+            </a:r>
+            <a:endParaRPr lang="en-US" sz="1400" dirty="0"/>
+          </a:p>
+          <a:p>
+            <a:pPr marL="342900" indent="-342900">
+              <a:spcAft>
+                <a:spcPts val="600"/>
+              </a:spcAft>
+              <a:buSzPct val="100000"/>
+              <a:buChar char="•"/>
+            </a:pPr>
+            <a:r>
+              <a:rPr lang="en-US" sz="1400" dirty="0">
+                <a:solidFill>
+                  <a:schemeClr val="tx1"/>
+                </a:solidFill>
+              </a:rPr>
+              <a:t>Synthetic: not for the structural design of real installations</a:t>
+            </a:r>
+            <a:endParaRPr lang="en-US" sz="1400" dirty="0"/>
+          </a:p>
+        </p:txBody>
+      </p:sp>
+      <p:sp>
+        <p:nvSpPr>
+          <p:cNvPr id="6" name="next card"/>
+          <p:cNvSpPr/>
+          <p:nvPr/>
+        </p:nvSpPr>
+        <p:spPr>
+          <a:xfrm>
+            <a:off x="6208776" y="1371600"/>
+            <a:ext cx="5431536" cy="3246120"/>
+          </a:xfrm>
+          <a:prstGeom prst="roundRect">
+            <a:avLst>
+              <a:gd name="adj" fmla="val 1972"/>
+            </a:avLst>
+          </a:prstGeom>
+          <a:solidFill>
+            <a:schemeClr val="bg2"/>
+          </a:solidFill>
+          <a:ln/>
+        </p:spPr>
+      </p:sp>
+      <p:sp>
+        <p:nvSpPr>
+          <p:cNvPr id="7" name="next heading"/>
+          <p:cNvSpPr txBox="1"/>
+          <p:nvPr/>
+        </p:nvSpPr>
+        <p:spPr>
+          <a:xfrm>
+            <a:off x="6483096" y="1508760"/>
+            <a:ext cx="4882896" cy="411480"/>
+          </a:xfrm>
+          <a:prstGeom prst="rect">
+            <a:avLst/>
+          </a:prstGeom>
+          <a:noFill/>
+          <a:ln/>
+        </p:spPr>
+        <p:txBody>
+          <a:bodyPr wrap="square" lIns="0" tIns="0" rIns="0" bIns="0" rtlCol="0" anchor="ctr"/>
+          <a:lstStyle/>
+          <a:p>
+            <a:pPr indent="0" marL="0">
+              <a:buNone/>
+            </a:pPr>
+            <a:r>
+              <a:rPr lang="en-US" sz="1800" b="1" dirty="0">
+                <a:solidFill>
+                  <a:schemeClr val="tx1"/>
+                </a:solidFill>
+              </a:rPr>
+              <a:t>Next</a:t>
+            </a:r>
+            <a:endParaRPr lang="en-US" sz="1800" dirty="0"/>
+          </a:p>
+        </p:txBody>
+      </p:sp>
+      <p:sp>
+        <p:nvSpPr>
+          <p:cNvPr id="8" name="next bullets"/>
+          <p:cNvSpPr txBox="1"/>
+          <p:nvPr/>
+        </p:nvSpPr>
+        <p:spPr>
+          <a:xfrm>
+            <a:off x="6483096" y="2011680"/>
+            <a:ext cx="4882896" cy="2514600"/>
+          </a:xfrm>
+          <a:prstGeom prst="rect">
+            <a:avLst/>
+          </a:prstGeom>
+          <a:noFill/>
+          <a:ln/>
+        </p:spPr>
+        <p:txBody>
+          <a:bodyPr wrap="square" lIns="0" tIns="0" rIns="0" bIns="0" rtlCol="0" anchor="t"/>
+          <a:lstStyle/>
+          <a:p>
+            <a:pPr marL="342900" indent="-342900">
+              <a:spcAft>
+                <a:spcPts val="600"/>
+              </a:spcAft>
+              <a:buSzPct val="100000"/>
+              <a:buChar char="•"/>
+            </a:pPr>
+            <a:r>
+              <a:rPr lang="en-US" sz="1400" dirty="0">
+                <a:solidFill>
+                  <a:schemeClr val="tx1"/>
+                </a:solidFill>
+              </a:rPr>
+              <a:t>Per-tier feasibility-collapse measurement in a multi-element synthesis environment</a:t>
+            </a:r>
+            <a:endParaRPr lang="en-US" sz="1400" dirty="0"/>
+          </a:p>
+          <a:p>
+            <a:pPr marL="342900" indent="-342900">
+              <a:spcAft>
+                <a:spcPts val="600"/>
+              </a:spcAft>
+              <a:buSzPct val="100000"/>
+              <a:buChar char="•"/>
+            </a:pPr>
+            <a:r>
+              <a:rPr lang="en-US" sz="1400" dirty="0">
+                <a:solidFill>
+                  <a:schemeClr val="tx1"/>
+                </a:solidFill>
+              </a:rPr>
+              <a:t>Verification against commercial corridor models</a:t>
+            </a:r>
+            <a:endParaRPr lang="en-US" sz="1400" dirty="0"/>
+          </a:p>
+          <a:p>
+            <a:pPr marL="342900" indent="-342900">
+              <a:spcAft>
+                <a:spcPts val="600"/>
+              </a:spcAft>
+              <a:buSzPct val="100000"/>
+              <a:buChar char="•"/>
+            </a:pPr>
+            <a:r>
+              <a:rPr lang="en-US" sz="1400" dirty="0">
+                <a:solidFill>
+                  <a:schemeClr val="tx1"/>
+                </a:solidFill>
+              </a:rPr>
+              <a:t>An expert plausibility review of generated scenes, and a curated expert reference set for evaluation</a:t>
+            </a:r>
+            <a:endParaRPr lang="en-US" sz="1400" dirty="0"/>
+          </a:p>
+        </p:txBody>
+      </p:sp>
+      <p:sp>
+        <p:nvSpPr>
+          <p:cNvPr id="9" name="ask band"/>
+          <p:cNvSpPr/>
+          <p:nvPr/>
+        </p:nvSpPr>
+        <p:spPr>
+          <a:xfrm>
+            <a:off x="548640" y="4846320"/>
+            <a:ext cx="11091672" cy="1234440"/>
+          </a:xfrm>
+          <a:prstGeom prst="roundRect">
+            <a:avLst>
+              <a:gd name="adj" fmla="val 5185"/>
+            </a:avLst>
+          </a:prstGeom>
+          <a:solidFill>
+            <a:schemeClr val="tx2"/>
+          </a:solidFill>
+          <a:ln/>
+        </p:spPr>
+      </p:sp>
+      <p:sp>
+        <p:nvSpPr>
+          <p:cNvPr id="10" name="ask"/>
+          <p:cNvSpPr txBox="1"/>
+          <p:nvPr/>
+        </p:nvSpPr>
+        <p:spPr>
+          <a:xfrm>
+            <a:off x="868680" y="4937760"/>
+            <a:ext cx="9144000" cy="1051560"/>
+          </a:xfrm>
+          <a:prstGeom prst="rect">
+            <a:avLst/>
+          </a:prstGeom>
+          <a:noFill/>
+          <a:ln/>
+        </p:spPr>
+        <p:txBody>
+          <a:bodyPr wrap="square" lIns="0" tIns="0" rIns="0" bIns="0" rtlCol="0" anchor="ctr"/>
+          <a:lstStyle/>
+          <a:p>
+            <a:pPr indent="0" marL="0">
+              <a:buNone/>
+            </a:pPr>
+            <a:r>
+              <a:rPr lang="en-US" sz="1500" b="1" dirty="0">
+                <a:solidFill>
+                  <a:schemeClr val="bg1"/>
+                </a:solidFill>
+              </a:rPr>
+              <a:t>If you coordinate services or design supports, </a:t>
+            </a:r>
+            <a:pPr indent="0" marL="0">
+              <a:buNone/>
+            </a:pPr>
+            <a:r>
+              <a:rPr lang="en-US" sz="1500" dirty="0">
+                <a:solidFill>
+                  <a:schemeClr val="bg1"/>
+                </a:solidFill>
+              </a:rPr>
+              <a:t>open the gallery, filter for the scenes you know, and tell us what looks wrong. Every rule is one documented constant away from being changed.</a:t>
+            </a:r>
+            <a:endParaRPr lang="en-US" sz="1500" dirty="0"/>
+          </a:p>
+        </p:txBody>
+      </p:sp>
+      <p:pic>
+        <p:nvPicPr>
+          <p:cNvPr id="11" name="qr ask" descr="/home/user/crossmep_dataset/docs/figures/qr_repo.png">    </p:cNvPr>
+          <p:cNvPicPr>
+            <a:picLocks noChangeAspect="1"/>
+          </p:cNvPicPr>
+          <p:nvPr/>
+        </p:nvPicPr>
+        <p:blipFill>
+          <a:blip r:embed="rId1"/>
+          <a:stretch>
+            <a:fillRect/>
+          </a:stretch>
+        </p:blipFill>
+        <p:spPr>
+          <a:xfrm>
+            <a:off x="10561320" y="4956048"/>
+            <a:ext cx="1005840" cy="1005840"/>
+          </a:xfrm>
+          <a:prstGeom prst="rect">
+            <a:avLst/>
+          </a:prstGeom>
+        </p:spPr>
+      </p:pic>
+      <p:sp>
+        <p:nvSpPr>
+          <p:cNvPr id="25" name="Slide Number Placeholder 0"/>
+          <p:cNvSpPr>
+            <a:spLocks noGrp="1"/>
+          </p:cNvSpPr>
+          <p:nvPr>
+            <p:ph type="sldNum" sz="quarter" idx="4294967295"/>
+          </p:nvPr>
+        </p:nvSpPr>
+        <p:spPr>
+          <a:xfrm>
+            <a:off x="11064240" y="6419088"/>
+            <a:ext cx="594360" cy="274320"/>
+          </a:xfrm>
+          <a:prstGeom prst="rect">
+            <a:avLst/>
+          </a:prstGeom>
+          <a:extLst>
+            <a:ext uri="{C572A759-6A51-4108-AA02-DFA0A04FC94B}">
+              <ma14:wrappingTextBoxFlag xmlns:ma14="http://schemas.microsoft.com/office/mac/drawingml/2011/main" val="0"/>
+            </a:ext>
+          </a:extLst>
+        </p:spPr>
+        <p:txBody>
+          <a:bodyPr/>
+          <a:lstStyle>
+            <a:lvl1pPr>
+              <a:defRPr sz="900">
+                <a:solidFill>
+                  <a:srgbClr val="898781"/>
+                </a:solidFill>
+              </a:defRPr>
+            </a:lvl1pPr>
+          </a:lstStyle>
+          <a:p>
+            <a:pPr algn="r"/>
+            <a:fld id="{F7021451-1387-4CA6-816F-3879F97B5CBC}" type="slidenum">
+              <a:rPr b="0" lang="en-US"/>
+              <a:t>13</a:t>
+            </a:fld>
+            <a:endParaRPr lang="en-US"/>
+          </a:p>
+        </p:txBody>
+      </p:sp>
+    </p:spTree>
+  </p:cSld>
+  <p:clrMapOvr>
+    <a:masterClrMapping/>
+  </p:clrMapOvr>
+</p:sld>
+</file>
+
+<file path=ppt/slides/slide14.xml><?xml version="1.0" encoding="utf-8"?>
+<p:sld xmlns:a="http://schemas.openxmlformats.org/drawingml/2006/main" xmlns:r="http://schemas.openxmlformats.org/officeDocument/2006/relationships" xmlns:p="http://schemas.openxmlformats.org/presentationml/2006/main">
+  <p:cSld name="Slide 14">
+    <p:spTree>
+      <p:nvGrpSpPr>
+        <p:cNvPr id="1" name=""/>
+        <p:cNvGrpSpPr/>
+        <p:nvPr/>
+      </p:nvGrpSpPr>
+      <p:grpSpPr>
+        <a:xfrm>
+          <a:off x="0" y="0"/>
+          <a:ext cx="0" cy="0"/>
+          <a:chOff x="0" y="0"/>
+          <a:chExt cx="0" cy="0"/>
+        </a:xfrm>
+      </p:grpSpPr>
+      <p:sp>
+        <p:nvSpPr>
+          <p:cNvPr id="2" name="Text 0"/>
+          <p:cNvSpPr/>
+          <p:nvPr>
+            <p:ph idx="100" type="title" hasCustomPrompt="1"/>
+          </p:nvPr>
+        </p:nvSpPr>
+        <p:spPr>
+          <a:xfrm>
+            <a:off x="640080" y="1828800"/>
+            <a:ext cx="7498080" cy="1737360"/>
+          </a:xfrm>
+          <a:prstGeom prst="rect">
+            <a:avLst/>
+          </a:prstGeom>
+          <a:noFill/>
+          <a:ln/>
+        </p:spPr>
+        <p:txBody>
+          <a:bodyPr wrap="square" lIns="0" tIns="0" rIns="0" bIns="0" rtlCol="0" anchor="b"/>
+          <a:lstStyle/>
+          <a:p>
+            <a:pPr algn="l" indent="0" marL="0">
+              <a:buNone/>
+            </a:pPr>
+            <a:r>
+              <a:rPr lang="en-US" sz="3600" b="1" dirty="0">
+                <a:solidFill>
+                  <a:schemeClr val="bg1"/>
+                </a:solidFill>
+              </a:rPr>
+              <a:t>CrossMEP: the brief, not the answer</a:t>
+            </a:r>
+            <a:endParaRPr lang="en-US" sz="3600" dirty="0"/>
+          </a:p>
+        </p:txBody>
+      </p:sp>
+      <p:sp>
+        <p:nvSpPr>
+          <p:cNvPr id="3" name="Text 0"/>
+          <p:cNvSpPr/>
+          <p:nvPr>
+            <p:ph idx="101" type="body" hasCustomPrompt="1"/>
+          </p:nvPr>
+        </p:nvSpPr>
+        <p:spPr>
+          <a:xfrm>
+            <a:off x="640080" y="3794760"/>
+            <a:ext cx="7498080" cy="2011680"/>
+          </a:xfrm>
+          <a:prstGeom prst="rect">
+            <a:avLst/>
+          </a:prstGeom>
+          <a:noFill/>
+          <a:ln/>
+        </p:spPr>
+        <p:txBody>
+          <a:bodyPr wrap="square" lIns="0" tIns="0" rIns="0" bIns="0" rtlCol="0" anchor="t"/>
+          <a:lstStyle/>
+          <a:p>
+            <a:pPr indent="0" marL="0">
+              <a:buNone/>
+            </a:pPr>
+            <a:r>
+              <a:rPr lang="en-US" sz="1600" dirty="0">
+                <a:solidFill>
+                  <a:srgbClr val="CADCFC"/>
+                </a:solidFill>
+              </a:rPr>
+              <a:t>7,000 support-design problems  ·  every number traced  ·  checked against a built project  ·  open data and code</a:t>
+            </a:r>
+            <a:endParaRPr lang="en-US" sz="1600" dirty="0"/>
+          </a:p>
+          <a:p>
+            <a:pPr indent="0" marL="0">
+              <a:buNone/>
+            </a:pPr>
+            <a:r>
+              <a:rPr lang="en-US" sz="800" dirty="0">
+                <a:solidFill>
+                  <a:srgbClr val="CADCFC"/>
+                </a:solidFill>
+              </a:rPr>
+              <a:t> </a:t>
+            </a:r>
+            <a:endParaRPr lang="en-US" sz="1600" dirty="0"/>
+          </a:p>
+          <a:p>
+            <a:pPr indent="0" marL="0">
+              <a:buNone/>
+            </a:pPr>
+            <a:r>
+              <a:rPr lang="en-US" sz="1300" dirty="0">
+                <a:solidFill>
+                  <a:srgbClr val="CADCFC"/>
+                </a:solidFill>
+              </a:rPr>
+              <a:t>Data CC BY 4.0, code MIT.  Not for the structural design of real installations.</a:t>
+            </a:r>
+            <a:endParaRPr lang="en-US" sz="1600" dirty="0"/>
+          </a:p>
+        </p:txBody>
+      </p:sp>
+      <p:pic>
+        <p:nvPicPr>
+          <p:cNvPr id="4" name="qr closing" descr="/home/user/crossmep_dataset/docs/figures/qr_repo.png">    </p:cNvPr>
+          <p:cNvPicPr>
+            <a:picLocks noChangeAspect="1"/>
+          </p:cNvPicPr>
+          <p:nvPr/>
+        </p:nvPicPr>
+        <p:blipFill>
+          <a:blip r:embed="rId1"/>
+          <a:stretch>
+            <a:fillRect/>
+          </a:stretch>
+        </p:blipFill>
+        <p:spPr>
+          <a:xfrm>
+            <a:off x="8778240" y="2286000"/>
+            <a:ext cx="2103120" cy="2103120"/>
+          </a:xfrm>
+          <a:prstGeom prst="rect">
+            <a:avLst/>
+          </a:prstGeom>
+        </p:spPr>
+      </p:pic>
+      <p:sp>
+        <p:nvSpPr>
+          <p:cNvPr id="5" name="closing link"/>
+          <p:cNvSpPr txBox="1"/>
+          <p:nvPr/>
+        </p:nvSpPr>
+        <p:spPr>
+          <a:xfrm>
+            <a:off x="8503920" y="4480560"/>
+            <a:ext cx="3108960" cy="731520"/>
+          </a:xfrm>
+          <a:prstGeom prst="rect">
+            <a:avLst/>
+          </a:prstGeom>
+          <a:noFill/>
+          <a:ln/>
+        </p:spPr>
+        <p:txBody>
+          <a:bodyPr wrap="square" lIns="0" tIns="0" rIns="0" bIns="0" rtlCol="0" anchor="t"/>
+          <a:lstStyle/>
+          <a:p>
+            <a:pPr algn="ctr" indent="0" marL="0">
+              <a:buNone/>
+            </a:pPr>
+            <a:r>
+              <a:rPr lang="en-US" sz="1200" b="1" dirty="0">
+                <a:solidFill>
+                  <a:schemeClr val="bg1"/>
+                </a:solidFill>
+              </a:rPr>
+              <a:t>github.com/lavinia-ped/CrossMEP_Dataset</a:t>
+            </a:r>
+            <a:endParaRPr lang="en-US" sz="1200" dirty="0"/>
+          </a:p>
+          <a:p>
+            <a:pPr algn="ctr" indent="0" marL="0">
+              <a:buNone/>
+            </a:pPr>
+            <a:r>
+              <a:rPr lang="en-US" sz="1200" dirty="0">
+                <a:solidFill>
+                  <a:schemeClr val="bg1"/>
+                </a:solidFill>
+              </a:rPr>
+              <a:t>laviniap@stanford.edu</a:t>
+            </a:r>
+            <a:endParaRPr lang="en-US" sz="1200" dirty="0"/>
+          </a:p>
+        </p:txBody>
+      </p:sp>
+    </p:spTree>
+  </p:cSld>
+  <p:clrMapOvr>
+    <a:masterClrMapping/>
+  </p:clrMapOvr>
+</p:sld>
+</file>
+
+<file path=ppt/slides/slide15.xml><?xml version="1.0" encoding="utf-8"?>
+<p:sld xmlns:a="http://schemas.openxmlformats.org/drawingml/2006/main" xmlns:r="http://schemas.openxmlformats.org/officeDocument/2006/relationships" xmlns:p="http://schemas.openxmlformats.org/presentationml/2006/main">
+  <p:cSld name="Slide 15">
+    <p:spTree>
+      <p:nvGrpSpPr>
+        <p:cNvPr id="1" name=""/>
+        <p:cNvGrpSpPr/>
+        <p:nvPr/>
+      </p:nvGrpSpPr>
+      <p:grpSpPr>
+        <a:xfrm>
+          <a:off x="0" y="0"/>
+          <a:ext cx="0" cy="0"/>
+          <a:chOff x="0" y="0"/>
+          <a:chExt cx="0" cy="0"/>
+        </a:xfrm>
+      </p:grpSpPr>
+      <p:sp>
+        <p:nvSpPr>
+          <p:cNvPr id="2" name="Text 0"/>
+          <p:cNvSpPr/>
+          <p:nvPr>
+            <p:ph idx="100" type="title" hasCustomPrompt="1"/>
+          </p:nvPr>
+        </p:nvSpPr>
+        <p:spPr>
+          <a:xfrm>
+            <a:off x="548640" y="274320"/>
+            <a:ext cx="11091672" cy="960120"/>
+          </a:xfrm>
+          <a:prstGeom prst="rect">
+            <a:avLst/>
+          </a:prstGeom>
+          <a:noFill/>
+          <a:ln/>
+        </p:spPr>
+        <p:txBody>
+          <a:bodyPr wrap="square" lIns="0" tIns="0" rIns="0" bIns="0" rtlCol="0" anchor="ctr"/>
+          <a:lstStyle/>
+          <a:p>
+            <a:pPr algn="l" indent="0" marL="0">
+              <a:buNone/>
+            </a:pPr>
+            <a:r>
+              <a:rPr lang="en-US" sz="2600" b="1" dirty="0">
+                <a:solidFill>
+                  <a:schemeClr val="tx1"/>
+                </a:solidFill>
+              </a:rPr>
+              <a:t>Appendix: per-tier statistics, benchmark split</a:t>
             </a:r>
             <a:endParaRPr lang="en-US" sz="2600" dirty="0"/>
           </a:p>
@@ -3931,7 +5796,7 @@
       </p:sp>
       <p:graphicFrame>
         <p:nvGraphicFramePr>
-          <p:cNvPr id="14" name="tier table"/>
+          <p:cNvPr id="16" name="tier table"/>
           <p:cNvGraphicFramePr>
             <a:graphicFrameLocks noGrp="1"/>
           </p:cNvGraphicFramePr>
@@ -3953,9 +5818,9 @@
               <a:tblPr/>
               <a:tblGrid>
                 <a:gridCol w="822960"/>
-                <a:gridCol w="1188720"/>
+                <a:gridCol w="1097280"/>
                 <a:gridCol w="1828800"/>
-                <a:gridCol w="1463040"/>
+                <a:gridCol w="1554480"/>
                 <a:gridCol w="1645920"/>
               </a:tblGrid>
               <a:tr h="384048">
@@ -4248,7 +6113,7 @@
                           <a:ea typeface="Calibri" pitchFamily="34" charset="-122"/>
                           <a:cs typeface="Calibri" pitchFamily="34" charset="-120"/>
                         </a:rPr>
-                        <a:t>median bundle width (mm)</a:t>
+                        <a:t>median width (mm)</a:t>
                       </a:r>
                       <a:endParaRPr lang="en-US" sz="1200" dirty="0">
                         <a:latin typeface="Calibri" charset="0"/>
@@ -6950,8 +8815,8 @@
         </p:nvSpPr>
         <p:spPr>
           <a:xfrm>
-            <a:off x="8001000" y="1508760"/>
-            <a:ext cx="3410712" cy="614477"/>
+            <a:off x="7973568" y="1508760"/>
+            <a:ext cx="3465576" cy="548640"/>
           </a:xfrm>
           <a:prstGeom prst="rect">
             <a:avLst/>
@@ -6986,8 +8851,8 @@
         </p:nvSpPr>
         <p:spPr>
           <a:xfrm>
-            <a:off x="8001000" y="2119579"/>
-            <a:ext cx="3410712" cy="362102"/>
+            <a:off x="7973568" y="2053742"/>
+            <a:ext cx="3465576" cy="416966"/>
           </a:xfrm>
           <a:prstGeom prst="rect">
             <a:avLst/>
@@ -7016,7 +8881,7 @@
       </p:sp>
       <p:sp>
         <p:nvSpPr>
-          <p:cNvPr id="7" name="tile train 5,000 · val 500 · test 500 · benchmark 1,000 (125 per tier), disjoint seeds"/>
+          <p:cNvPr id="7" name="tile Wasserstein-1, generated to measured gaps: insulation / pipe surfaces"/>
           <p:cNvSpPr/>
           <p:nvPr/>
         </p:nvSpPr>
@@ -7038,14 +8903,14 @@
       </p:sp>
       <p:sp>
         <p:nvSpPr>
-          <p:cNvPr id="8" name="value train 5,000 · val 500 · test 500 · benchmark 1,000 (125 per tier), disjoint seeds"/>
+          <p:cNvPr id="8" name="value Wasserstein-1, generated to measured gaps: insulation / pipe surfaces"/>
           <p:cNvSpPr txBox="1"/>
           <p:nvPr/>
         </p:nvSpPr>
         <p:spPr>
           <a:xfrm>
-            <a:off x="8001000" y="2788920"/>
-            <a:ext cx="3410712" cy="614477"/>
+            <a:off x="7973568" y="2788920"/>
+            <a:ext cx="3465576" cy="548640"/>
           </a:xfrm>
           <a:prstGeom prst="rect">
             <a:avLst/>
@@ -7066,7 +8931,7 @@
                   <a:schemeClr val="accent1"/>
                 </a:solidFill>
               </a:rPr>
-              <a:t>7,000 contexts</a:t>
+              <a:t>41 / 68 mm</a:t>
             </a:r>
             <a:endParaRPr lang="en-US" sz="2400" dirty="0"/>
           </a:p>
@@ -7074,14 +8939,14 @@
       </p:sp>
       <p:sp>
         <p:nvSpPr>
-          <p:cNvPr id="9" name="label train 5,000 · val 500 · test 500 · benchmark 1,000 (125 per tier), disjoint seeds"/>
+          <p:cNvPr id="9" name="label Wasserstein-1, generated to measured gaps: insulation / pipe surfaces"/>
           <p:cNvSpPr txBox="1"/>
           <p:nvPr/>
         </p:nvSpPr>
         <p:spPr>
           <a:xfrm>
-            <a:off x="8001000" y="3399739"/>
-            <a:ext cx="3410712" cy="362102"/>
+            <a:off x="7973568" y="3333902"/>
+            <a:ext cx="3465576" cy="416966"/>
           </a:xfrm>
           <a:prstGeom prst="rect">
             <a:avLst/>
@@ -7102,7 +8967,7 @@
                   <a:srgbClr val="52514E"/>
                 </a:solidFill>
               </a:rPr>
-              <a:t>train 5,000 · val 500 · test 500 · benchmark 1,000 (125 per tier), disjoint seeds</a:t>
+              <a:t>Wasserstein-1, generated to measured gaps: insulation / pipe surfaces</a:t>
             </a:r>
             <a:endParaRPr lang="en-US" sz="1100" dirty="0"/>
           </a:p>
@@ -7110,7 +8975,7 @@
       </p:sp>
       <p:sp>
         <p:nvSpPr>
-          <p:cNvPr id="10" name="tile Wasserstein-1 to the measured MEP model: insulation surface / bare surface (the measured quantity)"/>
+          <p:cNvPr id="10" name="tile lognormal fit to the measured gaps above 25 mm (n = 73)"/>
           <p:cNvSpPr/>
           <p:nvPr/>
         </p:nvSpPr>
@@ -7132,14 +8997,14 @@
       </p:sp>
       <p:sp>
         <p:nvSpPr>
-          <p:cNvPr id="11" name="value Wasserstein-1 to the measured MEP model: insulation surface / bare surface (the measured quantity)"/>
+          <p:cNvPr id="11" name="value lognormal fit to the measured gaps above 25 mm (n = 73)"/>
           <p:cNvSpPr txBox="1"/>
           <p:nvPr/>
         </p:nvSpPr>
         <p:spPr>
           <a:xfrm>
-            <a:off x="8001000" y="4069080"/>
-            <a:ext cx="3410712" cy="614477"/>
+            <a:off x="7973568" y="4069080"/>
+            <a:ext cx="3465576" cy="548640"/>
           </a:xfrm>
           <a:prstGeom prst="rect">
             <a:avLst/>
@@ -7160,7 +9025,7 @@
                   <a:schemeClr val="accent1"/>
                 </a:solidFill>
               </a:rPr>
-              <a:t>40.7 / 67.7 mm</a:t>
+              <a:t>KS p = 0.53</a:t>
             </a:r>
             <a:endParaRPr lang="en-US" sz="2400" dirty="0"/>
           </a:p>
@@ -7168,14 +9033,14 @@
       </p:sp>
       <p:sp>
         <p:nvSpPr>
-          <p:cNvPr id="12" name="label Wasserstein-1 to the measured MEP model: insulation surface / bare surface (the measured quantity)"/>
+          <p:cNvPr id="12" name="label lognormal fit to the measured gaps above 25 mm (n = 73)"/>
           <p:cNvSpPr txBox="1"/>
           <p:nvPr/>
         </p:nvSpPr>
         <p:spPr>
           <a:xfrm>
-            <a:off x="8001000" y="4679899"/>
-            <a:ext cx="3410712" cy="362102"/>
+            <a:off x="7973568" y="4614062"/>
+            <a:ext cx="3465576" cy="416966"/>
           </a:xfrm>
           <a:prstGeom prst="rect">
             <a:avLst/>
@@ -7196,43 +9061,7 @@
                   <a:srgbClr val="52514E"/>
                 </a:solidFill>
               </a:rPr>
-              <a:t>Wasserstein-1 to the measured MEP model: insulation surface / bare surface (the measured quantity)</a:t>
-            </a:r>
-            <a:endParaRPr lang="en-US" sz="1100" dirty="0"/>
-          </a:p>
-        </p:txBody>
-      </p:sp>
-      <p:sp>
-        <p:nvSpPr>
-          <p:cNvPr id="13" name="appendix b note"/>
-          <p:cNvSpPr txBox="1"/>
-          <p:nvPr/>
-        </p:nvSpPr>
-        <p:spPr>
-          <a:xfrm>
-            <a:off x="548640" y="5120640"/>
-            <a:ext cx="11091672" cy="548640"/>
-          </a:xfrm>
-          <a:prstGeom prst="rect">
-            <a:avLst/>
-          </a:prstGeom>
-          <a:noFill/>
-          <a:ln/>
-        </p:spPr>
-        <p:txBody>
-          <a:bodyPr wrap="square" lIns="0" tIns="0" rIns="0" bIns="0" rtlCol="0" anchor="t"/>
-          <a:lstStyle/>
-          <a:p>
-            <a:pPr indent="0" marL="0">
-              <a:buNone/>
-            </a:pPr>
-            <a:r>
-              <a:rPr lang="en-US" sz="1100" dirty="0">
-                <a:solidFill>
-                  <a:srgbClr val="52514E"/>
-                </a:solidFill>
-              </a:rPr>
-              <a:t>The paper’s Table 1, Figure 3, Figure 4b and section 5.3 were computed on an internal build with a different pipe library; these are the values of the public files (RESULTS.md in the repository).</a:t>
+              <a:t>lognormal fit to the measured gaps above 25 mm (n = 73)</a:t>
             </a:r>
             <a:endParaRPr lang="en-US" sz="1100" dirty="0"/>
           </a:p>
@@ -7277,7 +9106,492 @@
             <a:pPr algn="r"/>
             <a:fld id="{F7021451-1387-4CA6-816F-3879F97B5CBC}" type="slidenum">
               <a:rPr b="0" lang="en-US"/>
-              <a:t>13</a:t>
+              <a:t>15</a:t>
+            </a:fld>
+            <a:endParaRPr lang="en-US"/>
+          </a:p>
+        </p:txBody>
+      </p:sp>
+    </p:spTree>
+  </p:cSld>
+  <p:clrMapOvr>
+    <a:masterClrMapping/>
+  </p:clrMapOvr>
+</p:sld>
+</file>
+
+<file path=ppt/slides/slide16.xml><?xml version="1.0" encoding="utf-8"?>
+<p:sld xmlns:a="http://schemas.openxmlformats.org/drawingml/2006/main" xmlns:r="http://schemas.openxmlformats.org/officeDocument/2006/relationships" xmlns:p="http://schemas.openxmlformats.org/presentationml/2006/main">
+  <p:cSld name="Slide 16">
+    <p:spTree>
+      <p:nvGrpSpPr>
+        <p:cNvPr id="1" name=""/>
+        <p:cNvGrpSpPr/>
+        <p:nvPr/>
+      </p:nvGrpSpPr>
+      <p:grpSpPr>
+        <a:xfrm>
+          <a:off x="0" y="0"/>
+          <a:ext cx="0" cy="0"/>
+          <a:chOff x="0" y="0"/>
+          <a:chExt cx="0" cy="0"/>
+        </a:xfrm>
+      </p:grpSpPr>
+      <p:sp>
+        <p:nvSpPr>
+          <p:cNvPr id="2" name="Text 0"/>
+          <p:cNvSpPr/>
+          <p:nvPr>
+            <p:ph idx="100" type="title" hasCustomPrompt="1"/>
+          </p:nvPr>
+        </p:nvSpPr>
+        <p:spPr>
+          <a:xfrm>
+            <a:off x="548640" y="274320"/>
+            <a:ext cx="11091672" cy="960120"/>
+          </a:xfrm>
+          <a:prstGeom prst="rect">
+            <a:avLst/>
+          </a:prstGeom>
+          <a:noFill/>
+          <a:ln/>
+        </p:spPr>
+        <p:txBody>
+          <a:bodyPr wrap="square" lIns="0" tIns="0" rIns="0" bIns="0" rtlCol="0" anchor="ctr"/>
+          <a:lstStyle/>
+          <a:p>
+            <a:pPr algn="l" indent="0" marL="0">
+              <a:buNone/>
+            </a:pPr>
+            <a:r>
+              <a:rPr lang="en-US" sz="2600" b="1" dirty="0">
+                <a:solidFill>
+                  <a:schemeClr val="tx1"/>
+                </a:solidFill>
+              </a:rPr>
+              <a:t>Appendix: one record, as stored</a:t>
+            </a:r>
+            <a:endParaRPr lang="en-US" sz="2600" dirty="0"/>
+          </a:p>
+        </p:txBody>
+      </p:sp>
+      <p:sp>
+        <p:nvSpPr>
+          <p:cNvPr id="3" name="record card"/>
+          <p:cNvSpPr/>
+          <p:nvPr/>
+        </p:nvSpPr>
+        <p:spPr>
+          <a:xfrm>
+            <a:off x="548640" y="1417320"/>
+            <a:ext cx="7818120" cy="2560320"/>
+          </a:xfrm>
+          <a:prstGeom prst="roundRect">
+            <a:avLst>
+              <a:gd name="adj" fmla="val 2500"/>
+            </a:avLst>
+          </a:prstGeom>
+          <a:solidFill>
+            <a:schemeClr val="tx2"/>
+          </a:solidFill>
+          <a:ln/>
+        </p:spPr>
+      </p:sp>
+      <p:sp>
+        <p:nvSpPr>
+          <p:cNvPr id="4" name="record"/>
+          <p:cNvSpPr txBox="1"/>
+          <p:nvPr/>
+        </p:nvSpPr>
+        <p:spPr>
+          <a:xfrm>
+            <a:off x="777240" y="1600200"/>
+            <a:ext cx="7360920" cy="2194560"/>
+          </a:xfrm>
+          <a:prstGeom prst="rect">
+            <a:avLst/>
+          </a:prstGeom>
+          <a:noFill/>
+          <a:ln/>
+        </p:spPr>
+        <p:txBody>
+          <a:bodyPr wrap="square" lIns="0" tIns="0" rIns="0" bIns="0" rtlCol="0" anchor="t"/>
+          <a:lstStyle/>
+          <a:p>
+            <a:pPr indent="0" marL="0">
+              <a:buNone/>
+            </a:pPr>
+            <a:r>
+              <a:rPr lang="en-US" sz="1050" dirty="0">
+                <a:solidFill>
+                  <a:srgbClr val="FFFFFF"/>
+                </a:solidFill>
+                <a:latin typeface="Courier New" pitchFamily="34" charset="0"/>
+                <a:ea typeface="Courier New" pitchFamily="34" charset="-122"/>
+                <a:cs typeface="Courier New" pitchFamily="34" charset="-120"/>
+              </a:rPr>
+              <a:t>{"context_id": "mep_57", "tier": "C2",</a:t>
+            </a:r>
+            <a:endParaRPr lang="en-US" sz="1050" dirty="0"/>
+          </a:p>
+          <a:p>
+            <a:pPr indent="0" marL="0">
+              <a:buNone/>
+            </a:pPr>
+            <a:r>
+              <a:rPr lang="en-US" sz="1050" dirty="0">
+                <a:solidFill>
+                  <a:srgbClr val="FFFFFF"/>
+                </a:solidFill>
+                <a:latin typeface="Courier New" pitchFamily="34" charset="0"/>
+                <a:ea typeface="Courier New" pitchFamily="34" charset="-122"/>
+                <a:cs typeface="Courier New" pitchFamily="34" charset="-120"/>
+              </a:rPr>
+              <a:t> "surface": {"kind": "ceiling", "substrate": "concrete_C25", "thickness_mm": 200.0},</a:t>
+            </a:r>
+            <a:endParaRPr lang="en-US" sz="1050" dirty="0"/>
+          </a:p>
+          <a:p>
+            <a:pPr indent="0" marL="0">
+              <a:buNone/>
+            </a:pPr>
+            <a:r>
+              <a:rPr lang="en-US" sz="1050" dirty="0">
+                <a:solidFill>
+                  <a:srgbClr val="FFFFFF"/>
+                </a:solidFill>
+                <a:latin typeface="Courier New" pitchFamily="34" charset="0"/>
+                <a:ea typeface="Courier New" pitchFamily="34" charset="-122"/>
+                <a:cs typeface="Courier New" pitchFamily="34" charset="-120"/>
+              </a:rPr>
+              <a:t> "n_elements": 2, "n_levels": 1, "total_load_kN": 1.12, "bundle_width_mm": 588.0,</a:t>
+            </a:r>
+            <a:endParaRPr lang="en-US" sz="1050" dirty="0"/>
+          </a:p>
+          <a:p>
+            <a:pPr indent="0" marL="0">
+              <a:buNone/>
+            </a:pPr>
+            <a:r>
+              <a:rPr lang="en-US" sz="1050" dirty="0">
+                <a:solidFill>
+                  <a:srgbClr val="FFFFFF"/>
+                </a:solidFill>
+                <a:latin typeface="Courier New" pitchFamily="34" charset="0"/>
+                <a:ea typeface="Courier New" pitchFamily="34" charset="-122"/>
+                <a:cs typeface="Courier New" pitchFamily="34" charset="-120"/>
+              </a:rPr>
+              <a:t> "elements": [</a:t>
+            </a:r>
+            <a:endParaRPr lang="en-US" sz="1050" dirty="0"/>
+          </a:p>
+          <a:p>
+            <a:pPr indent="0" marL="0">
+              <a:buNone/>
+            </a:pPr>
+            <a:r>
+              <a:rPr lang="en-US" sz="1050" dirty="0">
+                <a:solidFill>
+                  <a:srgbClr val="FFFFFF"/>
+                </a:solidFill>
+                <a:latin typeface="Courier New" pitchFamily="34" charset="0"/>
+                <a:ea typeface="Courier New" pitchFamily="34" charset="-122"/>
+                <a:cs typeface="Courier New" pitchFamily="34" charset="-120"/>
+              </a:rPr>
+              <a:t>  {"kind": "cable_tray", "service": "tray", "trade": "electrical", "shape": "rect",</a:t>
+            </a:r>
+            <a:endParaRPr lang="en-US" sz="1050" dirty="0"/>
+          </a:p>
+          <a:p>
+            <a:pPr indent="0" marL="0">
+              <a:buNone/>
+            </a:pPr>
+            <a:r>
+              <a:rPr lang="en-US" sz="1050" dirty="0">
+                <a:solidFill>
+                  <a:srgbClr val="FFFFFF"/>
+                </a:solidFill>
+                <a:latin typeface="Courier New" pitchFamily="34" charset="0"/>
+                <a:ea typeface="Courier New" pitchFamily="34" charset="-122"/>
+                <a:cs typeface="Courier New" pitchFamily="34" charset="-120"/>
+              </a:rPr>
+              <a:t>   "label": "300 tray", "width_mm": 300.0, "height_mm": 60.0, "insulation_mm": 0.0,</a:t>
+            </a:r>
+            <a:endParaRPr lang="en-US" sz="1050" dirty="0"/>
+          </a:p>
+          <a:p>
+            <a:pPr indent="0" marL="0">
+              <a:buNone/>
+            </a:pPr>
+            <a:r>
+              <a:rPr lang="en-US" sz="1050" dirty="0">
+                <a:solidFill>
+                  <a:srgbClr val="FFFFFF"/>
+                </a:solidFill>
+                <a:latin typeface="Courier New" pitchFamily="34" charset="0"/>
+                <a:ea typeface="Courier New" pitchFamily="34" charset="-122"/>
+                <a:cs typeface="Courier New" pitchFamily="34" charset="-120"/>
+              </a:rPr>
+              <a:t>   "load_kN": 1.08, "span_m": 2.0, "load_kN_per_m": 0.5396,</a:t>
+            </a:r>
+            <a:endParaRPr lang="en-US" sz="1050" dirty="0"/>
+          </a:p>
+          <a:p>
+            <a:pPr indent="0" marL="0">
+              <a:buNone/>
+            </a:pPr>
+            <a:r>
+              <a:rPr lang="en-US" sz="1050" dirty="0">
+                <a:solidFill>
+                  <a:srgbClr val="FFFFFF"/>
+                </a:solidFill>
+                <a:latin typeface="Courier New" pitchFamily="34" charset="0"/>
+                <a:ea typeface="Courier New" pitchFamily="34" charset="-122"/>
+                <a:cs typeface="Courier New" pitchFamily="34" charset="-120"/>
+              </a:rPr>
+              <a:t>   "level": 0, "along_mm": -144.0, "out_mm": 120.0},</a:t>
+            </a:r>
+            <a:endParaRPr lang="en-US" sz="1050" dirty="0"/>
+          </a:p>
+          <a:p>
+            <a:pPr indent="0" marL="0">
+              <a:buNone/>
+            </a:pPr>
+            <a:r>
+              <a:rPr lang="en-US" sz="1050" dirty="0">
+                <a:solidFill>
+                  <a:srgbClr val="FFFFFF"/>
+                </a:solidFill>
+                <a:latin typeface="Courier New" pitchFamily="34" charset="0"/>
+                <a:ea typeface="Courier New" pitchFamily="34" charset="-122"/>
+                <a:cs typeface="Courier New" pitchFamily="34" charset="-120"/>
+              </a:rPr>
+              <a:t>  {"kind": "pipe", "service": "heating", "trade": "heating", "shape": "round",</a:t>
+            </a:r>
+            <a:endParaRPr lang="en-US" sz="1050" dirty="0"/>
+          </a:p>
+          <a:p>
+            <a:pPr indent="0" marL="0">
+              <a:buNone/>
+            </a:pPr>
+            <a:r>
+              <a:rPr lang="en-US" sz="1050" dirty="0">
+                <a:solidFill>
+                  <a:srgbClr val="FFFFFF"/>
+                </a:solidFill>
+                <a:latin typeface="Courier New" pitchFamily="34" charset="0"/>
+                <a:ea typeface="Courier New" pitchFamily="34" charset="-122"/>
+                <a:cs typeface="Courier New" pitchFamily="34" charset="-120"/>
+              </a:rPr>
+              <a:t>   "label": "DN20", "width_mm": 26.9, "height_mm": 26.9, "insulation_mm": 20.0,</a:t>
+            </a:r>
+            <a:endParaRPr lang="en-US" sz="1050" dirty="0"/>
+          </a:p>
+          <a:p>
+            <a:pPr indent="0" marL="0">
+              <a:buNone/>
+            </a:pPr>
+            <a:r>
+              <a:rPr lang="en-US" sz="1050" dirty="0">
+                <a:solidFill>
+                  <a:srgbClr val="FFFFFF"/>
+                </a:solidFill>
+                <a:latin typeface="Courier New" pitchFamily="34" charset="0"/>
+                <a:ea typeface="Courier New" pitchFamily="34" charset="-122"/>
+                <a:cs typeface="Courier New" pitchFamily="34" charset="-120"/>
+              </a:rPr>
+              <a:t>   "load_kN": 0.04, "span_m": 2.1, "load_kN_per_m": 0.0189,</a:t>
+            </a:r>
+            <a:endParaRPr lang="en-US" sz="1050" dirty="0"/>
+          </a:p>
+          <a:p>
+            <a:pPr indent="0" marL="0">
+              <a:buNone/>
+            </a:pPr>
+            <a:r>
+              <a:rPr lang="en-US" sz="1050" dirty="0">
+                <a:solidFill>
+                  <a:srgbClr val="FFFFFF"/>
+                </a:solidFill>
+                <a:latin typeface="Courier New" pitchFamily="34" charset="0"/>
+                <a:ea typeface="Courier New" pitchFamily="34" charset="-122"/>
+                <a:cs typeface="Courier New" pitchFamily="34" charset="-120"/>
+              </a:rPr>
+              <a:t>   "level": 0, "along_mm": 260.5, "out_mm": 156.2}</a:t>
+            </a:r>
+            <a:endParaRPr lang="en-US" sz="1050" dirty="0"/>
+          </a:p>
+          <a:p>
+            <a:pPr indent="0" marL="0">
+              <a:buNone/>
+            </a:pPr>
+            <a:r>
+              <a:rPr lang="en-US" sz="1050" dirty="0">
+                <a:solidFill>
+                  <a:srgbClr val="FFFFFF"/>
+                </a:solidFill>
+                <a:latin typeface="Courier New" pitchFamily="34" charset="0"/>
+                <a:ea typeface="Courier New" pitchFamily="34" charset="-122"/>
+                <a:cs typeface="Courier New" pitchFamily="34" charset="-120"/>
+              </a:rPr>
+              <a:t> ]}</a:t>
+            </a:r>
+            <a:endParaRPr lang="en-US" sz="1050" dirty="0"/>
+          </a:p>
+        </p:txBody>
+      </p:sp>
+      <p:sp>
+        <p:nvSpPr>
+          <p:cNvPr id="5" name="record notes"/>
+          <p:cNvSpPr txBox="1"/>
+          <p:nvPr/>
+        </p:nvSpPr>
+        <p:spPr>
+          <a:xfrm>
+            <a:off x="8641080" y="1463040"/>
+            <a:ext cx="2999232" cy="3749040"/>
+          </a:xfrm>
+          <a:prstGeom prst="rect">
+            <a:avLst/>
+          </a:prstGeom>
+          <a:noFill/>
+          <a:ln/>
+        </p:spPr>
+        <p:txBody>
+          <a:bodyPr wrap="square" lIns="0" tIns="0" rIns="0" bIns="0" rtlCol="0" anchor="t"/>
+          <a:lstStyle/>
+          <a:p>
+            <a:pPr marL="342900" indent="-342900">
+              <a:spcAft>
+                <a:spcPts val="600"/>
+              </a:spcAft>
+              <a:buSzPct val="100000"/>
+              <a:buChar char="•"/>
+            </a:pPr>
+            <a:r>
+              <a:rPr lang="en-US" sz="1300" dirty="0">
+                <a:solidFill>
+                  <a:schemeClr val="tx1"/>
+                </a:solidFill>
+              </a:rPr>
+              <a:t>Units: millimetres, kilonewtons, metres (span)</a:t>
+            </a:r>
+            <a:endParaRPr lang="en-US" sz="1300" dirty="0"/>
+          </a:p>
+          <a:p>
+            <a:pPr marL="342900" indent="-342900">
+              <a:spcAft>
+                <a:spcPts val="600"/>
+              </a:spcAft>
+              <a:buSzPct val="100000"/>
+              <a:buChar char="•"/>
+            </a:pPr>
+            <a:r>
+              <a:rPr lang="en-US" sz="1300" dirty="0">
+                <a:solidFill>
+                  <a:schemeClr val="tx1"/>
+                </a:solidFill>
+              </a:rPr>
+              <a:t>Widths are bare; insulation_mm is per side</a:t>
+            </a:r>
+            <a:endParaRPr lang="en-US" sz="1300" dirty="0"/>
+          </a:p>
+          <a:p>
+            <a:pPr marL="342900" indent="-342900">
+              <a:spcAft>
+                <a:spcPts val="600"/>
+              </a:spcAft>
+              <a:buSzPct val="100000"/>
+              <a:buChar char="•"/>
+            </a:pPr>
+            <a:r>
+              <a:rPr lang="en-US" sz="1300" dirty="0">
+                <a:solidFill>
+                  <a:schemeClr val="tx1"/>
+                </a:solidFill>
+              </a:rPr>
+              <a:t>load_kN = load_kN_per_m × span_m</a:t>
+            </a:r>
+            <a:endParaRPr lang="en-US" sz="1300" dirty="0"/>
+          </a:p>
+          <a:p>
+            <a:pPr marL="342900" indent="-342900">
+              <a:spcAft>
+                <a:spcPts val="600"/>
+              </a:spcAft>
+              <a:buSzPct val="100000"/>
+              <a:buChar char="•"/>
+            </a:pPr>
+            <a:r>
+              <a:rPr lang="en-US" sz="1300" dirty="0">
+                <a:solidFill>
+                  <a:schemeClr val="tx1"/>
+                </a:solidFill>
+              </a:rPr>
+              <a:t>along_mm, out_mm: position along and out from the surface</a:t>
+            </a:r>
+            <a:endParaRPr lang="en-US" sz="1300" dirty="0"/>
+          </a:p>
+          <a:p>
+            <a:pPr marL="342900" indent="-342900">
+              <a:spcAft>
+                <a:spcPts val="600"/>
+              </a:spcAft>
+              <a:buSzPct val="100000"/>
+              <a:buChar char="•"/>
+            </a:pPr>
+            <a:r>
+              <a:rPr lang="en-US" sz="1300" dirty="0">
+                <a:solidFill>
+                  <a:schemeClr val="tx1"/>
+                </a:solidFill>
+              </a:rPr>
+              <a:t>level: the generative row (metadata)</a:t>
+            </a:r>
+            <a:endParaRPr lang="en-US" sz="1300" dirty="0"/>
+          </a:p>
+        </p:txBody>
+      </p:sp>
+      <p:sp>
+        <p:nvSpPr>
+          <p:cNvPr id="25" name="Slide Number Placeholder 0"/>
+          <p:cNvSpPr>
+            <a:spLocks noGrp="1"/>
+          </p:cNvSpPr>
+          <p:nvPr>
+            <p:ph type="sldNum" sz="quarter" idx="4294967295"/>
+          </p:nvPr>
+        </p:nvSpPr>
+        <p:spPr>
+          <a:xfrm>
+            <a:off x="11064240" y="6419088"/>
+            <a:ext cx="594360" cy="274320"/>
+          </a:xfrm>
+          <a:prstGeom prst="rect">
+            <a:avLst/>
+          </a:prstGeom>
+          <a:extLst>
+            <a:ext uri="{C572A759-6A51-4108-AA02-DFA0A04FC94B}">
+              <ma14:wrappingTextBoxFlag xmlns:ma14="http://schemas.microsoft.com/office/mac/drawingml/2011/main" val="0"/>
+            </a:ext>
+          </a:extLst>
+        </p:spPr>
+        <p:txBody>
+          <a:bodyPr/>
+          <a:lstStyle>
+            <a:lvl1pPr>
+              <a:defRPr sz="900">
+                <a:solidFill>
+                  <a:srgbClr val="898781"/>
+                </a:solidFill>
+              </a:defRPr>
+            </a:lvl1pPr>
+          </a:lstStyle>
+          <a:p>
+            <a:pPr algn="r"/>
+            <a:fld id="{F7021451-1387-4CA6-816F-3879F97B5CBC}" type="slidenum">
+              <a:rPr b="0" lang="en-US"/>
+              <a:t>16</a:t>
             </a:fld>
             <a:endParaRPr lang="en-US"/>
           </a:p>
@@ -7354,7 +9668,7 @@
         </p:nvSpPr>
         <p:spPr>
           <a:xfrm>
-            <a:off x="548640" y="1463040"/>
+            <a:off x="548640" y="1417320"/>
             <a:ext cx="3566160" cy="1371600"/>
           </a:xfrm>
           <a:prstGeom prst="roundRect">
@@ -7376,8 +9690,8 @@
         </p:nvSpPr>
         <p:spPr>
           <a:xfrm>
-            <a:off x="777240" y="1554480"/>
-            <a:ext cx="3108960" cy="768096"/>
+            <a:off x="749808" y="1508760"/>
+            <a:ext cx="3163824" cy="685800"/>
           </a:xfrm>
           <a:prstGeom prst="rect">
             <a:avLst/>
@@ -7393,14 +9707,14 @@
               <a:buNone/>
             </a:pPr>
             <a:r>
-              <a:rPr lang="en-US" sz="3400" b="1" dirty="0">
+              <a:rPr lang="en-US" sz="3200" b="1" dirty="0">
                 <a:solidFill>
                   <a:schemeClr val="accent1"/>
                 </a:solidFill>
               </a:rPr>
               <a:t>≈ 10,000</a:t>
             </a:r>
-            <a:endParaRPr lang="en-US" sz="3400" dirty="0"/>
+            <a:endParaRPr lang="en-US" sz="3200" dirty="0"/>
           </a:p>
         </p:txBody>
       </p:sp>
@@ -7412,8 +9726,8 @@
         </p:nvSpPr>
         <p:spPr>
           <a:xfrm>
-            <a:off x="777240" y="2340864"/>
-            <a:ext cx="3108960" cy="452628"/>
+            <a:off x="749808" y="2212848"/>
+            <a:ext cx="3163824" cy="521208"/>
           </a:xfrm>
           <a:prstGeom prst="rect">
             <a:avLst/>
@@ -7448,7 +9762,7 @@
         </p:nvSpPr>
         <p:spPr>
           <a:xfrm>
-            <a:off x="548640" y="3017520"/>
+            <a:off x="548640" y="2926080"/>
             <a:ext cx="3566160" cy="1371600"/>
           </a:xfrm>
           <a:prstGeom prst="roundRect">
@@ -7470,8 +9784,8 @@
         </p:nvSpPr>
         <p:spPr>
           <a:xfrm>
-            <a:off x="777240" y="3108960"/>
-            <a:ext cx="3108960" cy="768096"/>
+            <a:off x="749808" y="3017520"/>
+            <a:ext cx="3163824" cy="685800"/>
           </a:xfrm>
           <a:prstGeom prst="rect">
             <a:avLst/>
@@ -7487,14 +9801,14 @@
               <a:buNone/>
             </a:pPr>
             <a:r>
-              <a:rPr lang="en-US" sz="3400" b="1" dirty="0">
+              <a:rPr lang="en-US" sz="3200" b="1" dirty="0">
                 <a:solidFill>
                   <a:schemeClr val="accent1"/>
                 </a:solidFill>
               </a:rPr>
               <a:t>20 min – 2 h</a:t>
             </a:r>
-            <a:endParaRPr lang="en-US" sz="3400" dirty="0"/>
+            <a:endParaRPr lang="en-US" sz="3200" dirty="0"/>
           </a:p>
         </p:txBody>
       </p:sp>
@@ -7506,8 +9820,8 @@
         </p:nvSpPr>
         <p:spPr>
           <a:xfrm>
-            <a:off x="777240" y="3895344"/>
-            <a:ext cx="3108960" cy="452628"/>
+            <a:off x="749808" y="3721608"/>
+            <a:ext cx="3163824" cy="521208"/>
           </a:xfrm>
           <a:prstGeom prst="rect">
             <a:avLst/>
@@ -7536,13 +9850,13 @@
       </p:sp>
       <p:sp>
         <p:nvSpPr>
-          <p:cNvPr id="9" name="tile of MEP design effort; on the order of $600K of engineering per project"/>
+          <p:cNvPr id="9" name="tile of all MEP design effort; on the order of $600K of engineering per project"/>
           <p:cNvSpPr/>
           <p:nvPr/>
         </p:nvSpPr>
         <p:spPr>
           <a:xfrm>
-            <a:off x="548640" y="4572000"/>
+            <a:off x="548640" y="4434840"/>
             <a:ext cx="3566160" cy="1371600"/>
           </a:xfrm>
           <a:prstGeom prst="roundRect">
@@ -7558,14 +9872,14 @@
       </p:sp>
       <p:sp>
         <p:nvSpPr>
-          <p:cNvPr id="10" name="value of MEP design effort; on the order of $600K of engineering per project"/>
+          <p:cNvPr id="10" name="value of all MEP design effort; on the order of $600K of engineering per project"/>
           <p:cNvSpPr txBox="1"/>
           <p:nvPr/>
         </p:nvSpPr>
         <p:spPr>
           <a:xfrm>
-            <a:off x="777240" y="4663440"/>
-            <a:ext cx="3108960" cy="768096"/>
+            <a:off x="749808" y="4526280"/>
+            <a:ext cx="3163824" cy="685800"/>
           </a:xfrm>
           <a:prstGeom prst="rect">
             <a:avLst/>
@@ -7581,27 +9895,27 @@
               <a:buNone/>
             </a:pPr>
             <a:r>
-              <a:rPr lang="en-US" sz="3400" b="1" dirty="0">
+              <a:rPr lang="en-US" sz="3200" b="1" dirty="0">
                 <a:solidFill>
                   <a:schemeClr val="accent1"/>
                 </a:solidFill>
               </a:rPr>
               <a:t>≈ ¼</a:t>
             </a:r>
-            <a:endParaRPr lang="en-US" sz="3400" dirty="0"/>
+            <a:endParaRPr lang="en-US" sz="3200" dirty="0"/>
           </a:p>
         </p:txBody>
       </p:sp>
       <p:sp>
         <p:nvSpPr>
-          <p:cNvPr id="11" name="label of MEP design effort; on the order of $600K of engineering per project"/>
+          <p:cNvPr id="11" name="label of all MEP design effort; on the order of $600K of engineering per project"/>
           <p:cNvSpPr txBox="1"/>
           <p:nvPr/>
         </p:nvSpPr>
         <p:spPr>
           <a:xfrm>
-            <a:off x="777240" y="5449824"/>
-            <a:ext cx="3108960" cy="452628"/>
+            <a:off x="749808" y="5230368"/>
+            <a:ext cx="3163824" cy="521208"/>
           </a:xfrm>
           <a:prstGeom prst="rect">
             <a:avLst/>
@@ -7622,15 +9936,51 @@
                   <a:srgbClr val="52514E"/>
                 </a:solidFill>
               </a:rPr>
-              <a:t>of MEP design effort; on the order of $600K of engineering per project</a:t>
+              <a:t>of all MEP design effort; on the order of $600K of engineering per project</a:t>
             </a:r>
             <a:endParaRPr lang="en-US" sz="1200" dirty="0"/>
+          </a:p>
+        </p:txBody>
+      </p:sp>
+      <p:sp>
+        <p:nvSpPr>
+          <p:cNvPr id="12" name="estimates note"/>
+          <p:cNvSpPr txBox="1"/>
+          <p:nvPr/>
+        </p:nvSpPr>
+        <p:spPr>
+          <a:xfrm>
+            <a:off x="548640" y="5897880"/>
+            <a:ext cx="3566160" cy="274320"/>
+          </a:xfrm>
+          <a:prstGeom prst="rect">
+            <a:avLst/>
+          </a:prstGeom>
+          <a:noFill/>
+          <a:ln/>
+        </p:spPr>
+        <p:txBody>
+          <a:bodyPr wrap="square" lIns="0" tIns="0" rIns="0" bIns="0" rtlCol="0" anchor="t"/>
+          <a:lstStyle/>
+          <a:p>
+            <a:pPr indent="0" marL="0">
+              <a:buNone/>
+            </a:pPr>
+            <a:r>
+              <a:rPr lang="en-US" sz="1100" dirty="0">
+                <a:solidFill>
+                  <a:srgbClr val="52514E"/>
+                </a:solidFill>
+              </a:rPr>
+              <a:t>Approximate practitioner estimates.</a:t>
+            </a:r>
+            <a:endParaRPr lang="en-US" sz="1100" dirty="0"/>
           </a:p>
         </p:txBody>
       </p:sp>
       <p:pic>
         <p:nvPicPr>
-          <p:cNvPr id="12" name="route to section" descr="/home/user/crossmep_dataset/docs/figures/paper_fig1_route_to_section.png">    </p:cNvPr>
+          <p:cNvPr id="13" name="route to section" descr="/home/user/crossmep_dataset/docs/figures/paper_fig1_route_to_section.png">    </p:cNvPr>
           <p:cNvPicPr>
             <a:picLocks noChangeAspect="1"/>
           </p:cNvPicPr>
@@ -7644,8 +9994,8 @@
         </p:blipFill>
         <p:spPr>
           <a:xfrm>
-            <a:off x="4480560" y="1568483"/>
-            <a:ext cx="7178040" cy="1983675"/>
+            <a:off x="4480560" y="1525290"/>
+            <a:ext cx="7159752" cy="1978621"/>
           </a:xfrm>
           <a:prstGeom prst="rect">
             <a:avLst/>
@@ -7654,14 +10004,14 @@
       </p:pic>
       <p:sp>
         <p:nvSpPr>
-          <p:cNvPr id="13" name="fig1 caption"/>
+          <p:cNvPr id="14" name="fig1 caption"/>
           <p:cNvSpPr txBox="1"/>
           <p:nvPr/>
         </p:nvSpPr>
         <p:spPr>
           <a:xfrm>
-            <a:off x="4480560" y="3689317"/>
-            <a:ext cx="7178040" cy="685800"/>
+            <a:off x="4480560" y="3641070"/>
+            <a:ext cx="7159752" cy="685800"/>
           </a:xfrm>
           <a:prstGeom prst="rect">
             <a:avLst/>
@@ -7682,7 +10032,7 @@
                   <a:srgbClr val="52514E"/>
                 </a:solidFill>
               </a:rPr>
-              <a:t>Support design starts after coordination. At each hanger the brief is a cross-section: what passes, how big, how heavy, how far apart, what it hangs from. (Paper, Figure 1.)</a:t>
+              <a:t>Support design starts after coordination. At each hanger location the designer works from the section across the run: what passes, how big, how heavy, how far apart, what it hangs from.</a:t>
             </a:r>
             <a:endParaRPr lang="en-US" sz="1100" dirty="0"/>
           </a:p>
@@ -7690,14 +10040,14 @@
       </p:sp>
       <p:sp>
         <p:nvSpPr>
-          <p:cNvPr id="14" name="quote card"/>
+          <p:cNvPr id="15" name="quote card"/>
           <p:cNvSpPr/>
           <p:nvPr/>
         </p:nvSpPr>
         <p:spPr>
           <a:xfrm>
-            <a:off x="4480560" y="4572000"/>
-            <a:ext cx="7178040" cy="1371600"/>
+            <a:off x="4480560" y="4434840"/>
+            <a:ext cx="7159752" cy="1371600"/>
           </a:xfrm>
           <a:prstGeom prst="roundRect">
             <a:avLst>
@@ -7712,14 +10062,14 @@
       </p:sp>
       <p:sp>
         <p:nvSpPr>
-          <p:cNvPr id="15" name="quote"/>
+          <p:cNvPr id="16" name="quote"/>
           <p:cNvSpPr txBox="1"/>
           <p:nvPr/>
         </p:nvSpPr>
         <p:spPr>
           <a:xfrm>
-            <a:off x="4754880" y="4709160"/>
-            <a:ext cx="6629400" cy="1097280"/>
+            <a:off x="4754880" y="4572000"/>
+            <a:ext cx="6611112" cy="1097280"/>
           </a:xfrm>
           <a:prstGeom prst="rect">
             <a:avLst/>
@@ -7740,7 +10090,7 @@
                   <a:schemeClr val="tx1"/>
                 </a:solidFill>
               </a:rPr>
-              <a:t>“Nobody designs a support from the whole model. You design it from the section at that hanger.”</a:t>
+              <a:t>Nobody designs a support from the whole model; it is designed from the section at that hanger.</a:t>
             </a:r>
             <a:endParaRPr lang="en-US" sz="1500" dirty="0"/>
           </a:p>
@@ -7754,7 +10104,7 @@
                   <a:schemeClr val="tx1"/>
                 </a:solidFill>
               </a:rPr>
-              <a:t>That section is the unit of work — and the unit of this dataset.</a:t>
+              <a:t>That section is the unit of work — and the unit of CrossMEP.</a:t>
             </a:r>
             <a:endParaRPr lang="en-US" sz="1500" dirty="0"/>
           </a:p>
@@ -7862,7 +10212,7 @@
                   <a:schemeClr val="tx1"/>
                 </a:solidFill>
               </a:rPr>
-              <a:t>Learning to design supports needs the full spread of sections — not one project</a:t>
+              <a:t>There was no public dataset of support-design problems</a:t>
             </a:r>
             <a:endParaRPr lang="en-US" sz="2600" dirty="0"/>
           </a:p>
@@ -7870,25 +10220,39 @@
       </p:sp>
       <p:sp>
         <p:nvSpPr>
-          <p:cNvPr id="3" name="card Scarcity"/>
-          <p:cNvSpPr/>
+          <p:cNvPr id="3" name="why heading"/>
+          <p:cNvSpPr txBox="1"/>
           <p:nvPr/>
         </p:nvSpPr>
         <p:spPr>
           <a:xfrm>
-            <a:off x="548640" y="1463040"/>
-            <a:ext cx="3566160" cy="2697480"/>
-          </a:xfrm>
-          <a:prstGeom prst="roundRect">
-            <a:avLst>
-              <a:gd name="adj" fmla="val 2373"/>
-            </a:avLst>
-          </a:prstGeom>
-          <a:solidFill>
-            <a:schemeClr val="bg2"/>
-          </a:solidFill>
+            <a:off x="548640" y="1371600"/>
+            <a:ext cx="4937760" cy="365760"/>
+          </a:xfrm>
+          <a:prstGeom prst="rect">
+            <a:avLst/>
+          </a:prstGeom>
+          <a:noFill/>
           <a:ln/>
         </p:spPr>
+        <p:txBody>
+          <a:bodyPr wrap="square" lIns="0" tIns="0" rIns="0" bIns="0" rtlCol="0" anchor="ctr"/>
+          <a:lstStyle/>
+          <a:p>
+            <a:pPr indent="0" marL="0">
+              <a:buNone/>
+            </a:pPr>
+            <a:r>
+              <a:rPr lang="en-US" sz="1600" b="1" dirty="0">
+                <a:solidFill>
+                  <a:schemeClr val="tx1"/>
+                </a:solidFill>
+              </a:rPr>
+              <a:t>Why it has to be synthetic</a:t>
+            </a:r>
+            <a:endParaRPr lang="en-US" sz="1600" dirty="0"/>
+          </a:p>
+        </p:txBody>
       </p:sp>
       <p:sp>
         <p:nvSpPr>
@@ -7898,8 +10262,8 @@
         </p:nvSpPr>
         <p:spPr>
           <a:xfrm>
-            <a:off x="822960" y="1737360"/>
-            <a:ext cx="566928" cy="566928"/>
+            <a:off x="548640" y="1874520"/>
+            <a:ext cx="530352" cy="530352"/>
           </a:xfrm>
           <a:prstGeom prst="ellipse">
             <a:avLst/>
@@ -7926,8 +10290,8 @@
         </p:blipFill>
         <p:spPr>
           <a:xfrm>
-            <a:off x="941832" y="1856232"/>
-            <a:ext cx="329184" cy="329184"/>
+            <a:off x="660014" y="1985894"/>
+            <a:ext cx="307604" cy="307604"/>
           </a:xfrm>
           <a:prstGeom prst="rect">
             <a:avLst/>
@@ -7936,14 +10300,14 @@
       </p:pic>
       <p:sp>
         <p:nvSpPr>
-          <p:cNvPr id="6" name="heading Scarcity"/>
+          <p:cNvPr id="6" name="reason Scarcity"/>
           <p:cNvSpPr txBox="1"/>
           <p:nvPr/>
         </p:nvSpPr>
         <p:spPr>
           <a:xfrm>
-            <a:off x="1554480" y="1719072"/>
-            <a:ext cx="2286000" cy="603504"/>
+            <a:off x="1280160" y="1856232"/>
+            <a:ext cx="4206240" cy="329184"/>
           </a:xfrm>
           <a:prstGeom prst="rect">
             <a:avLst/>
@@ -7959,27 +10323,27 @@
               <a:buNone/>
             </a:pPr>
             <a:r>
-              <a:rPr lang="en-US" sz="1800" b="1" dirty="0">
+              <a:rPr lang="en-US" sz="1500" b="1" dirty="0">
                 <a:solidFill>
                   <a:schemeClr val="tx1"/>
                 </a:solidFill>
               </a:rPr>
               <a:t>Scarcity</a:t>
             </a:r>
-            <a:endParaRPr lang="en-US" sz="1800" dirty="0"/>
+            <a:endParaRPr lang="en-US" sz="1500" dirty="0"/>
           </a:p>
         </p:txBody>
       </p:sp>
       <p:sp>
         <p:nvSpPr>
-          <p:cNvPr id="7" name="body Scarcity"/>
+          <p:cNvPr id="7" name="reason text Scarcity"/>
           <p:cNvSpPr txBox="1"/>
           <p:nvPr/>
         </p:nvSpPr>
         <p:spPr>
           <a:xfrm>
-            <a:off x="822960" y="2514600"/>
-            <a:ext cx="3017520" cy="1417320"/>
+            <a:off x="1280160" y="2221992"/>
+            <a:ext cx="4206240" cy="868680"/>
           </a:xfrm>
           <a:prstGeom prst="rect">
             <a:avLst/>
@@ -7995,49 +10359,27 @@
               <a:buNone/>
             </a:pPr>
             <a:r>
-              <a:rPr lang="en-US" sz="1300" dirty="0">
+              <a:rPr lang="en-US" sz="1250" dirty="0">
                 <a:solidFill>
                   <a:schemeClr val="tx1"/>
                 </a:solidFill>
               </a:rPr>
-              <a:t>Project models are proprietary. The few open ones are not organised around supports and often export no element sizes.</a:t>
-            </a:r>
-            <a:endParaRPr lang="en-US" sz="1300" dirty="0"/>
+              <a:t>Project models are proprietary; the few open ones are not organised around supports and often export no element sizes.</a:t>
+            </a:r>
+            <a:endParaRPr lang="en-US" sz="1250" dirty="0"/>
           </a:p>
         </p:txBody>
       </p:sp>
       <p:sp>
         <p:nvSpPr>
-          <p:cNvPr id="8" name="card Coverage"/>
+          <p:cNvPr id="8" name="icon ring Coverage"/>
           <p:cNvSpPr/>
           <p:nvPr/>
         </p:nvSpPr>
         <p:spPr>
           <a:xfrm>
-            <a:off x="4311396" y="1463040"/>
-            <a:ext cx="3566160" cy="2697480"/>
-          </a:xfrm>
-          <a:prstGeom prst="roundRect">
-            <a:avLst>
-              <a:gd name="adj" fmla="val 2373"/>
-            </a:avLst>
-          </a:prstGeom>
-          <a:solidFill>
-            <a:schemeClr val="bg2"/>
-          </a:solidFill>
-          <a:ln/>
-        </p:spPr>
-      </p:sp>
-      <p:sp>
-        <p:nvSpPr>
-          <p:cNvPr id="9" name="icon ring Coverage"/>
-          <p:cNvSpPr/>
-          <p:nvPr/>
-        </p:nvSpPr>
-        <p:spPr>
-          <a:xfrm>
-            <a:off x="4585716" y="1737360"/>
-            <a:ext cx="566928" cy="566928"/>
+            <a:off x="548640" y="3246120"/>
+            <a:ext cx="530352" cy="530352"/>
           </a:xfrm>
           <a:prstGeom prst="ellipse">
             <a:avLst/>
@@ -8050,7 +10392,7 @@
       </p:sp>
       <p:pic>
         <p:nvPicPr>
-          <p:cNvPr id="10" name="icon Coverage" descr="preencoded.png">    </p:cNvPr>
+          <p:cNvPr id="9" name="icon Coverage" descr="preencoded.png">    </p:cNvPr>
           <p:cNvPicPr>
             <a:picLocks noChangeAspect="1"/>
           </p:cNvPicPr>
@@ -8064,8 +10406,8 @@
         </p:blipFill>
         <p:spPr>
           <a:xfrm>
-            <a:off x="4704588" y="1856232"/>
-            <a:ext cx="329184" cy="329184"/>
+            <a:off x="660014" y="3357494"/>
+            <a:ext cx="307604" cy="307604"/>
           </a:xfrm>
           <a:prstGeom prst="rect">
             <a:avLst/>
@@ -8074,14 +10416,14 @@
       </p:pic>
       <p:sp>
         <p:nvSpPr>
-          <p:cNvPr id="11" name="heading Coverage"/>
+          <p:cNvPr id="10" name="reason Coverage"/>
           <p:cNvSpPr txBox="1"/>
           <p:nvPr/>
         </p:nvSpPr>
         <p:spPr>
           <a:xfrm>
-            <a:off x="5317236" y="1719072"/>
-            <a:ext cx="2286000" cy="603504"/>
+            <a:off x="1280160" y="3227832"/>
+            <a:ext cx="4206240" cy="329184"/>
           </a:xfrm>
           <a:prstGeom prst="rect">
             <a:avLst/>
@@ -8097,27 +10439,27 @@
               <a:buNone/>
             </a:pPr>
             <a:r>
-              <a:rPr lang="en-US" sz="1800" b="1" dirty="0">
+              <a:rPr lang="en-US" sz="1500" b="1" dirty="0">
                 <a:solidFill>
                   <a:schemeClr val="tx1"/>
                 </a:solidFill>
               </a:rPr>
               <a:t>Coverage</a:t>
             </a:r>
-            <a:endParaRPr lang="en-US" sz="1800" dirty="0"/>
+            <a:endParaRPr lang="en-US" sz="1500" dirty="0"/>
           </a:p>
         </p:txBody>
       </p:sp>
       <p:sp>
         <p:nvSpPr>
-          <p:cNvPr id="12" name="body Coverage"/>
+          <p:cNvPr id="11" name="reason text Coverage"/>
           <p:cNvSpPr txBox="1"/>
           <p:nvPr/>
         </p:nvSpPr>
         <p:spPr>
           <a:xfrm>
-            <a:off x="4585716" y="2514600"/>
-            <a:ext cx="3017520" cy="1417320"/>
+            <a:off x="1280160" y="3593592"/>
+            <a:ext cx="4206240" cy="868680"/>
           </a:xfrm>
           <a:prstGeom prst="rect">
             <a:avLst/>
@@ -8133,49 +10475,27 @@
               <a:buNone/>
             </a:pPr>
             <a:r>
-              <a:rPr lang="en-US" sz="1300" dirty="0">
+              <a:rPr lang="en-US" sz="1250" dirty="0">
                 <a:solidFill>
                   <a:schemeClr val="tx1"/>
                 </a:solidFill>
               </a:rPr>
-              <a:t>One accessible project is one narrow slice: one building type, one trade mix. A method tuned to it measures fit to that project, not competence on the problem.</a:t>
-            </a:r>
-            <a:endParaRPr lang="en-US" sz="1300" dirty="0"/>
+              <a:t>One project is one narrow slice: one building type, one trade mix. A method tuned to it measures fit to that project.</a:t>
+            </a:r>
+            <a:endParaRPr lang="en-US" sz="1250" dirty="0"/>
           </a:p>
         </p:txBody>
       </p:sp>
       <p:sp>
         <p:nvSpPr>
-          <p:cNvPr id="13" name="card Control"/>
+          <p:cNvPr id="12" name="icon ring Control"/>
           <p:cNvSpPr/>
           <p:nvPr/>
         </p:nvSpPr>
         <p:spPr>
           <a:xfrm>
-            <a:off x="8074152" y="1463040"/>
-            <a:ext cx="3566160" cy="2697480"/>
-          </a:xfrm>
-          <a:prstGeom prst="roundRect">
-            <a:avLst>
-              <a:gd name="adj" fmla="val 2373"/>
-            </a:avLst>
-          </a:prstGeom>
-          <a:solidFill>
-            <a:schemeClr val="bg2"/>
-          </a:solidFill>
-          <a:ln/>
-        </p:spPr>
-      </p:sp>
-      <p:sp>
-        <p:nvSpPr>
-          <p:cNvPr id="14" name="icon ring Control"/>
-          <p:cNvSpPr/>
-          <p:nvPr/>
-        </p:nvSpPr>
-        <p:spPr>
-          <a:xfrm>
-            <a:off x="8348472" y="1737360"/>
-            <a:ext cx="566928" cy="566928"/>
+            <a:off x="548640" y="4617720"/>
+            <a:ext cx="530352" cy="530352"/>
           </a:xfrm>
           <a:prstGeom prst="ellipse">
             <a:avLst/>
@@ -8188,7 +10508,7 @@
       </p:sp>
       <p:pic>
         <p:nvPicPr>
-          <p:cNvPr id="15" name="icon Control" descr="preencoded.png">    </p:cNvPr>
+          <p:cNvPr id="13" name="icon Control" descr="preencoded.png">    </p:cNvPr>
           <p:cNvPicPr>
             <a:picLocks noChangeAspect="1"/>
           </p:cNvPicPr>
@@ -8202,8 +10522,8 @@
         </p:blipFill>
         <p:spPr>
           <a:xfrm>
-            <a:off x="8467344" y="1856232"/>
-            <a:ext cx="329184" cy="329184"/>
+            <a:off x="660014" y="4729094"/>
+            <a:ext cx="307604" cy="307604"/>
           </a:xfrm>
           <a:prstGeom prst="rect">
             <a:avLst/>
@@ -8212,14 +10532,14 @@
       </p:pic>
       <p:sp>
         <p:nvSpPr>
-          <p:cNvPr id="16" name="heading Control"/>
+          <p:cNvPr id="14" name="reason Control"/>
           <p:cNvSpPr txBox="1"/>
           <p:nvPr/>
         </p:nvSpPr>
         <p:spPr>
           <a:xfrm>
-            <a:off x="9079992" y="1719072"/>
-            <a:ext cx="2286000" cy="603504"/>
+            <a:off x="1280160" y="4599432"/>
+            <a:ext cx="4206240" cy="329184"/>
           </a:xfrm>
           <a:prstGeom prst="rect">
             <a:avLst/>
@@ -8235,27 +10555,27 @@
               <a:buNone/>
             </a:pPr>
             <a:r>
-              <a:rPr lang="en-US" sz="1800" b="1" dirty="0">
+              <a:rPr lang="en-US" sz="1500" b="1" dirty="0">
                 <a:solidFill>
                   <a:schemeClr val="tx1"/>
                 </a:solidFill>
               </a:rPr>
               <a:t>Control</a:t>
             </a:r>
-            <a:endParaRPr lang="en-US" sz="1800" dirty="0"/>
+            <a:endParaRPr lang="en-US" sz="1500" dirty="0"/>
           </a:p>
         </p:txBody>
       </p:sp>
       <p:sp>
         <p:nvSpPr>
-          <p:cNvPr id="17" name="body Control"/>
+          <p:cNvPr id="15" name="reason text Control"/>
           <p:cNvSpPr txBox="1"/>
           <p:nvPr/>
         </p:nvSpPr>
         <p:spPr>
           <a:xfrm>
-            <a:off x="8348472" y="2514600"/>
-            <a:ext cx="3017520" cy="1417320"/>
+            <a:off x="1280160" y="4965192"/>
+            <a:ext cx="4206240" cy="868680"/>
           </a:xfrm>
           <a:prstGeom prst="rect">
             <a:avLst/>
@@ -8271,31 +10591,67 @@
               <a:buNone/>
             </a:pPr>
             <a:r>
-              <a:rPr lang="en-US" sz="1300" dirty="0">
+              <a:rPr lang="en-US" sz="1250" dirty="0">
                 <a:solidFill>
                   <a:schemeClr val="tx1"/>
                 </a:solidFill>
               </a:rPr>
-              <a:t>A seeded generator yields unlimited sections with a known distribution: difficulty by construction, rare congested racks on demand, held-out seeds for testing.</a:t>
-            </a:r>
-            <a:endParaRPr lang="en-US" sz="1300" dirty="0"/>
+              <a:t>A seeded generator gives unlimited problems with a known distribution, difficulty by construction and held-out seeds.</a:t>
+            </a:r>
+            <a:endParaRPr lang="en-US" sz="1250" dirty="0"/>
           </a:p>
         </p:txBody>
       </p:sp>
       <p:sp>
         <p:nvSpPr>
-          <p:cNvPr id="18" name="so card"/>
+          <p:cNvPr id="16" name="glance heading"/>
+          <p:cNvSpPr txBox="1"/>
+          <p:nvPr/>
+        </p:nvSpPr>
+        <p:spPr>
+          <a:xfrm>
+            <a:off x="5806440" y="1371600"/>
+            <a:ext cx="5833872" cy="365760"/>
+          </a:xfrm>
+          <a:prstGeom prst="rect">
+            <a:avLst/>
+          </a:prstGeom>
+          <a:noFill/>
+          <a:ln/>
+        </p:spPr>
+        <p:txBody>
+          <a:bodyPr wrap="square" lIns="0" tIns="0" rIns="0" bIns="0" rtlCol="0" anchor="ctr"/>
+          <a:lstStyle/>
+          <a:p>
+            <a:pPr indent="0" marL="0">
+              <a:buNone/>
+            </a:pPr>
+            <a:r>
+              <a:rPr lang="en-US" sz="1600" b="1" dirty="0">
+                <a:solidFill>
+                  <a:schemeClr val="tx1"/>
+                </a:solidFill>
+              </a:rPr>
+              <a:t>CrossMEP at a glance</a:t>
+            </a:r>
+            <a:endParaRPr lang="en-US" sz="1600" dirty="0"/>
+          </a:p>
+        </p:txBody>
+      </p:sp>
+      <p:sp>
+        <p:nvSpPr>
+          <p:cNvPr id="17" name="tile contexts in four splits on disjoint seeds"/>
           <p:cNvSpPr/>
           <p:nvPr/>
         </p:nvSpPr>
         <p:spPr>
           <a:xfrm>
-            <a:off x="548640" y="4434840"/>
-            <a:ext cx="11091672" cy="1188720"/>
+            <a:off x="5806440" y="1874520"/>
+            <a:ext cx="1822704" cy="1965960"/>
           </a:xfrm>
           <a:prstGeom prst="roundRect">
             <a:avLst>
-              <a:gd name="adj" fmla="val 5385"/>
+              <a:gd name="adj" fmla="val 3512"/>
             </a:avLst>
           </a:prstGeom>
           <a:solidFill>
@@ -8306,14 +10662,14 @@
       </p:sp>
       <p:sp>
         <p:nvSpPr>
-          <p:cNvPr id="19" name="so text"/>
+          <p:cNvPr id="18" name="value contexts in four splits on disjoint seeds"/>
           <p:cNvSpPr txBox="1"/>
           <p:nvPr/>
         </p:nvSpPr>
         <p:spPr>
           <a:xfrm>
-            <a:off x="822960" y="4526280"/>
-            <a:ext cx="10515600" cy="1005840"/>
+            <a:off x="6007608" y="1965960"/>
+            <a:ext cx="1420368" cy="982980"/>
           </a:xfrm>
           <a:prstGeom prst="rect">
             <a:avLst/>
@@ -8329,25 +10685,520 @@
               <a:buNone/>
             </a:pPr>
             <a:r>
-              <a:rPr lang="en-US" sz="1500" b="1" dirty="0">
-                <a:solidFill>
-                  <a:schemeClr val="tx1"/>
+              <a:rPr lang="en-US" sz="2600" b="1" dirty="0">
+                <a:solidFill>
+                  <a:schemeClr val="accent1"/>
                 </a:solidFill>
               </a:rPr>
-              <a:t>So: </a:t>
-            </a:r>
+              <a:t>7,000</a:t>
+            </a:r>
+            <a:endParaRPr lang="en-US" sz="2600" dirty="0"/>
+          </a:p>
+        </p:txBody>
+      </p:sp>
+      <p:sp>
+        <p:nvSpPr>
+          <p:cNvPr id="19" name="label contexts in four splits on disjoint seeds"/>
+          <p:cNvSpPr txBox="1"/>
+          <p:nvPr/>
+        </p:nvSpPr>
+        <p:spPr>
+          <a:xfrm>
+            <a:off x="6007608" y="3014777"/>
+            <a:ext cx="1420368" cy="747065"/>
+          </a:xfrm>
+          <a:prstGeom prst="rect">
+            <a:avLst/>
+          </a:prstGeom>
+          <a:noFill/>
+          <a:ln/>
+        </p:spPr>
+        <p:txBody>
+          <a:bodyPr wrap="square" lIns="0" tIns="0" rIns="0" bIns="0" rtlCol="0" anchor="t"/>
+          <a:lstStyle/>
+          <a:p>
             <a:pPr indent="0" marL="0">
               <a:buNone/>
             </a:pPr>
             <a:r>
-              <a:rPr lang="en-US" sz="1500" dirty="0">
-                <a:solidFill>
-                  <a:schemeClr val="tx1"/>
+              <a:rPr lang="en-US" sz="1150" dirty="0">
+                <a:solidFill>
+                  <a:srgbClr val="52514E"/>
                 </a:solidFill>
               </a:rPr>
-              <a:t>a rule-based generator — no learned model, no free randomness — that encodes the conventions you already use, is verified against a built project, and is public. We are not claiming a building; we are claiming the rules, and we show where each rule comes from.</a:t>
-            </a:r>
-            <a:endParaRPr lang="en-US" sz="1500" dirty="0"/>
+              <a:t>contexts in four splits on disjoint seeds</a:t>
+            </a:r>
+            <a:endParaRPr lang="en-US" sz="1150" dirty="0"/>
+          </a:p>
+        </p:txBody>
+      </p:sp>
+      <p:sp>
+        <p:nvSpPr>
+          <p:cNvPr id="20" name="tile elements: pipes, cable trays, ducts and conduits; six trades"/>
+          <p:cNvSpPr/>
+          <p:nvPr/>
+        </p:nvSpPr>
+        <p:spPr>
+          <a:xfrm>
+            <a:off x="7812024" y="1874520"/>
+            <a:ext cx="1822704" cy="1965960"/>
+          </a:xfrm>
+          <a:prstGeom prst="roundRect">
+            <a:avLst>
+              <a:gd name="adj" fmla="val 3512"/>
+            </a:avLst>
+          </a:prstGeom>
+          <a:solidFill>
+            <a:schemeClr val="bg2"/>
+          </a:solidFill>
+          <a:ln/>
+        </p:spPr>
+      </p:sp>
+      <p:sp>
+        <p:nvSpPr>
+          <p:cNvPr id="21" name="value elements: pipes, cable trays, ducts and conduits; six trades"/>
+          <p:cNvSpPr txBox="1"/>
+          <p:nvPr/>
+        </p:nvSpPr>
+        <p:spPr>
+          <a:xfrm>
+            <a:off x="8013192" y="1965960"/>
+            <a:ext cx="1420368" cy="982980"/>
+          </a:xfrm>
+          <a:prstGeom prst="rect">
+            <a:avLst/>
+          </a:prstGeom>
+          <a:noFill/>
+          <a:ln/>
+        </p:spPr>
+        <p:txBody>
+          <a:bodyPr wrap="square" lIns="0" tIns="0" rIns="0" bIns="0" rtlCol="0" anchor="ctr"/>
+          <a:lstStyle/>
+          <a:p>
+            <a:pPr indent="0" marL="0">
+              <a:buNone/>
+            </a:pPr>
+            <a:r>
+              <a:rPr lang="en-US" sz="2600" b="1" dirty="0">
+                <a:solidFill>
+                  <a:schemeClr val="accent1"/>
+                </a:solidFill>
+              </a:rPr>
+              <a:t>31,484</a:t>
+            </a:r>
+            <a:endParaRPr lang="en-US" sz="2600" dirty="0"/>
+          </a:p>
+        </p:txBody>
+      </p:sp>
+      <p:sp>
+        <p:nvSpPr>
+          <p:cNvPr id="22" name="label elements: pipes, cable trays, ducts and conduits; six trades"/>
+          <p:cNvSpPr txBox="1"/>
+          <p:nvPr/>
+        </p:nvSpPr>
+        <p:spPr>
+          <a:xfrm>
+            <a:off x="8013192" y="3014777"/>
+            <a:ext cx="1420368" cy="747065"/>
+          </a:xfrm>
+          <a:prstGeom prst="rect">
+            <a:avLst/>
+          </a:prstGeom>
+          <a:noFill/>
+          <a:ln/>
+        </p:spPr>
+        <p:txBody>
+          <a:bodyPr wrap="square" lIns="0" tIns="0" rIns="0" bIns="0" rtlCol="0" anchor="t"/>
+          <a:lstStyle/>
+          <a:p>
+            <a:pPr indent="0" marL="0">
+              <a:buNone/>
+            </a:pPr>
+            <a:r>
+              <a:rPr lang="en-US" sz="1150" dirty="0">
+                <a:solidFill>
+                  <a:srgbClr val="52514E"/>
+                </a:solidFill>
+              </a:rPr>
+              <a:t>elements: pipes, cable trays, ducts and conduits; six trades</a:t>
+            </a:r>
+            <a:endParaRPr lang="en-US" sz="1150" dirty="0"/>
+          </a:p>
+        </p:txBody>
+      </p:sp>
+      <p:sp>
+        <p:nvSpPr>
+          <p:cNvPr id="23" name="tile eight difficulty tiers by exact element count"/>
+          <p:cNvSpPr/>
+          <p:nvPr/>
+        </p:nvSpPr>
+        <p:spPr>
+          <a:xfrm>
+            <a:off x="9817608" y="1874520"/>
+            <a:ext cx="1822704" cy="1965960"/>
+          </a:xfrm>
+          <a:prstGeom prst="roundRect">
+            <a:avLst>
+              <a:gd name="adj" fmla="val 3512"/>
+            </a:avLst>
+          </a:prstGeom>
+          <a:solidFill>
+            <a:schemeClr val="bg2"/>
+          </a:solidFill>
+          <a:ln/>
+        </p:spPr>
+      </p:sp>
+      <p:sp>
+        <p:nvSpPr>
+          <p:cNvPr id="24" name="value eight difficulty tiers by exact element count"/>
+          <p:cNvSpPr txBox="1"/>
+          <p:nvPr/>
+        </p:nvSpPr>
+        <p:spPr>
+          <a:xfrm>
+            <a:off x="10018776" y="1965960"/>
+            <a:ext cx="1420368" cy="982980"/>
+          </a:xfrm>
+          <a:prstGeom prst="rect">
+            <a:avLst/>
+          </a:prstGeom>
+          <a:noFill/>
+          <a:ln/>
+        </p:spPr>
+        <p:txBody>
+          <a:bodyPr wrap="square" lIns="0" tIns="0" rIns="0" bIns="0" rtlCol="0" anchor="ctr"/>
+          <a:lstStyle/>
+          <a:p>
+            <a:pPr indent="0" marL="0">
+              <a:buNone/>
+            </a:pPr>
+            <a:r>
+              <a:rPr lang="en-US" sz="2600" b="1" dirty="0">
+                <a:solidFill>
+                  <a:schemeClr val="accent1"/>
+                </a:solidFill>
+              </a:rPr>
+              <a:t>C1–C8</a:t>
+            </a:r>
+            <a:endParaRPr lang="en-US" sz="2600" dirty="0"/>
+          </a:p>
+        </p:txBody>
+      </p:sp>
+      <p:sp>
+        <p:nvSpPr>
+          <p:cNvPr id="25" name="label eight difficulty tiers by exact element count"/>
+          <p:cNvSpPr txBox="1"/>
+          <p:nvPr/>
+        </p:nvSpPr>
+        <p:spPr>
+          <a:xfrm>
+            <a:off x="10018776" y="3014777"/>
+            <a:ext cx="1420368" cy="747065"/>
+          </a:xfrm>
+          <a:prstGeom prst="rect">
+            <a:avLst/>
+          </a:prstGeom>
+          <a:noFill/>
+          <a:ln/>
+        </p:spPr>
+        <p:txBody>
+          <a:bodyPr wrap="square" lIns="0" tIns="0" rIns="0" bIns="0" rtlCol="0" anchor="t"/>
+          <a:lstStyle/>
+          <a:p>
+            <a:pPr indent="0" marL="0">
+              <a:buNone/>
+            </a:pPr>
+            <a:r>
+              <a:rPr lang="en-US" sz="1150" dirty="0">
+                <a:solidFill>
+                  <a:srgbClr val="52514E"/>
+                </a:solidFill>
+              </a:rPr>
+              <a:t>eight difficulty tiers by exact element count</a:t>
+            </a:r>
+            <a:endParaRPr lang="en-US" sz="1150" dirty="0"/>
+          </a:p>
+        </p:txBody>
+      </p:sp>
+      <p:sp>
+        <p:nvSpPr>
+          <p:cNvPr id="26" name="tile the brief, not the answer: no support-assembly information"/>
+          <p:cNvSpPr/>
+          <p:nvPr/>
+        </p:nvSpPr>
+        <p:spPr>
+          <a:xfrm>
+            <a:off x="5806440" y="4023360"/>
+            <a:ext cx="1822704" cy="1965960"/>
+          </a:xfrm>
+          <a:prstGeom prst="roundRect">
+            <a:avLst>
+              <a:gd name="adj" fmla="val 3512"/>
+            </a:avLst>
+          </a:prstGeom>
+          <a:solidFill>
+            <a:schemeClr val="bg2"/>
+          </a:solidFill>
+          <a:ln/>
+        </p:spPr>
+      </p:sp>
+      <p:sp>
+        <p:nvSpPr>
+          <p:cNvPr id="27" name="value the brief, not the answer: no support-assembly information"/>
+          <p:cNvSpPr txBox="1"/>
+          <p:nvPr/>
+        </p:nvSpPr>
+        <p:spPr>
+          <a:xfrm>
+            <a:off x="6007608" y="4114800"/>
+            <a:ext cx="1420368" cy="982980"/>
+          </a:xfrm>
+          <a:prstGeom prst="rect">
+            <a:avLst/>
+          </a:prstGeom>
+          <a:noFill/>
+          <a:ln/>
+        </p:spPr>
+        <p:txBody>
+          <a:bodyPr wrap="square" lIns="0" tIns="0" rIns="0" bIns="0" rtlCol="0" anchor="ctr"/>
+          <a:lstStyle/>
+          <a:p>
+            <a:pPr indent="0" marL="0">
+              <a:buNone/>
+            </a:pPr>
+            <a:r>
+              <a:rPr lang="en-US" sz="2600" b="1" dirty="0">
+                <a:solidFill>
+                  <a:schemeClr val="accent1"/>
+                </a:solidFill>
+              </a:rPr>
+              <a:t>0 labels</a:t>
+            </a:r>
+            <a:endParaRPr lang="en-US" sz="2600" dirty="0"/>
+          </a:p>
+        </p:txBody>
+      </p:sp>
+      <p:sp>
+        <p:nvSpPr>
+          <p:cNvPr id="28" name="label the brief, not the answer: no support-assembly information"/>
+          <p:cNvSpPr txBox="1"/>
+          <p:nvPr/>
+        </p:nvSpPr>
+        <p:spPr>
+          <a:xfrm>
+            <a:off x="6007608" y="5163617"/>
+            <a:ext cx="1420368" cy="747065"/>
+          </a:xfrm>
+          <a:prstGeom prst="rect">
+            <a:avLst/>
+          </a:prstGeom>
+          <a:noFill/>
+          <a:ln/>
+        </p:spPr>
+        <p:txBody>
+          <a:bodyPr wrap="square" lIns="0" tIns="0" rIns="0" bIns="0" rtlCol="0" anchor="t"/>
+          <a:lstStyle/>
+          <a:p>
+            <a:pPr indent="0" marL="0">
+              <a:buNone/>
+            </a:pPr>
+            <a:r>
+              <a:rPr lang="en-US" sz="1150" dirty="0">
+                <a:solidFill>
+                  <a:srgbClr val="52514E"/>
+                </a:solidFill>
+              </a:rPr>
+              <a:t>the brief, not the answer: no support-assembly information</a:t>
+            </a:r>
+            <a:endParaRPr lang="en-US" sz="1150" dirty="0"/>
+          </a:p>
+        </p:txBody>
+      </p:sp>
+      <p:sp>
+        <p:nvSpPr>
+          <p:cNvPr id="29" name="tile every constant from a standard, a manufacturer table or a measurement"/>
+          <p:cNvSpPr/>
+          <p:nvPr/>
+        </p:nvSpPr>
+        <p:spPr>
+          <a:xfrm>
+            <a:off x="7812024" y="4023360"/>
+            <a:ext cx="1822704" cy="1965960"/>
+          </a:xfrm>
+          <a:prstGeom prst="roundRect">
+            <a:avLst>
+              <a:gd name="adj" fmla="val 3512"/>
+            </a:avLst>
+          </a:prstGeom>
+          <a:solidFill>
+            <a:schemeClr val="bg2"/>
+          </a:solidFill>
+          <a:ln/>
+        </p:spPr>
+      </p:sp>
+      <p:sp>
+        <p:nvSpPr>
+          <p:cNvPr id="30" name="value every constant from a standard, a manufacturer table or a measurement"/>
+          <p:cNvSpPr txBox="1"/>
+          <p:nvPr/>
+        </p:nvSpPr>
+        <p:spPr>
+          <a:xfrm>
+            <a:off x="8013192" y="4114800"/>
+            <a:ext cx="1420368" cy="982980"/>
+          </a:xfrm>
+          <a:prstGeom prst="rect">
+            <a:avLst/>
+          </a:prstGeom>
+          <a:noFill/>
+          <a:ln/>
+        </p:spPr>
+        <p:txBody>
+          <a:bodyPr wrap="square" lIns="0" tIns="0" rIns="0" bIns="0" rtlCol="0" anchor="ctr"/>
+          <a:lstStyle/>
+          <a:p>
+            <a:pPr indent="0" marL="0">
+              <a:buNone/>
+            </a:pPr>
+            <a:r>
+              <a:rPr lang="en-US" sz="2600" b="1" dirty="0">
+                <a:solidFill>
+                  <a:schemeClr val="accent1"/>
+                </a:solidFill>
+              </a:rPr>
+              <a:t>Traced</a:t>
+            </a:r>
+            <a:endParaRPr lang="en-US" sz="2600" dirty="0"/>
+          </a:p>
+        </p:txBody>
+      </p:sp>
+      <p:sp>
+        <p:nvSpPr>
+          <p:cNvPr id="31" name="label every constant from a standard, a manufacturer table or a measurement"/>
+          <p:cNvSpPr txBox="1"/>
+          <p:nvPr/>
+        </p:nvSpPr>
+        <p:spPr>
+          <a:xfrm>
+            <a:off x="8013192" y="5163617"/>
+            <a:ext cx="1420368" cy="747065"/>
+          </a:xfrm>
+          <a:prstGeom prst="rect">
+            <a:avLst/>
+          </a:prstGeom>
+          <a:noFill/>
+          <a:ln/>
+        </p:spPr>
+        <p:txBody>
+          <a:bodyPr wrap="square" lIns="0" tIns="0" rIns="0" bIns="0" rtlCol="0" anchor="t"/>
+          <a:lstStyle/>
+          <a:p>
+            <a:pPr indent="0" marL="0">
+              <a:buNone/>
+            </a:pPr>
+            <a:r>
+              <a:rPr lang="en-US" sz="1150" dirty="0">
+                <a:solidFill>
+                  <a:srgbClr val="52514E"/>
+                </a:solidFill>
+              </a:rPr>
+              <a:t>every constant from a standard, a manufacturer table or a measurement</a:t>
+            </a:r>
+            <a:endParaRPr lang="en-US" sz="1150" dirty="0"/>
+          </a:p>
+        </p:txBody>
+      </p:sp>
+      <p:sp>
+        <p:nvSpPr>
+          <p:cNvPr id="32" name="tile data CC BY 4.0, code MIT; a seeded, deterministic generator"/>
+          <p:cNvSpPr/>
+          <p:nvPr/>
+        </p:nvSpPr>
+        <p:spPr>
+          <a:xfrm>
+            <a:off x="9817608" y="4023360"/>
+            <a:ext cx="1822704" cy="1965960"/>
+          </a:xfrm>
+          <a:prstGeom prst="roundRect">
+            <a:avLst>
+              <a:gd name="adj" fmla="val 3512"/>
+            </a:avLst>
+          </a:prstGeom>
+          <a:solidFill>
+            <a:schemeClr val="bg2"/>
+          </a:solidFill>
+          <a:ln/>
+        </p:spPr>
+      </p:sp>
+      <p:sp>
+        <p:nvSpPr>
+          <p:cNvPr id="33" name="value data CC BY 4.0, code MIT; a seeded, deterministic generator"/>
+          <p:cNvSpPr txBox="1"/>
+          <p:nvPr/>
+        </p:nvSpPr>
+        <p:spPr>
+          <a:xfrm>
+            <a:off x="10018776" y="4114800"/>
+            <a:ext cx="1420368" cy="982980"/>
+          </a:xfrm>
+          <a:prstGeom prst="rect">
+            <a:avLst/>
+          </a:prstGeom>
+          <a:noFill/>
+          <a:ln/>
+        </p:spPr>
+        <p:txBody>
+          <a:bodyPr wrap="square" lIns="0" tIns="0" rIns="0" bIns="0" rtlCol="0" anchor="ctr"/>
+          <a:lstStyle/>
+          <a:p>
+            <a:pPr indent="0" marL="0">
+              <a:buNone/>
+            </a:pPr>
+            <a:r>
+              <a:rPr lang="en-US" sz="2600" b="1" dirty="0">
+                <a:solidFill>
+                  <a:schemeClr val="accent1"/>
+                </a:solidFill>
+              </a:rPr>
+              <a:t>Open</a:t>
+            </a:r>
+            <a:endParaRPr lang="en-US" sz="2600" dirty="0"/>
+          </a:p>
+        </p:txBody>
+      </p:sp>
+      <p:sp>
+        <p:nvSpPr>
+          <p:cNvPr id="34" name="label data CC BY 4.0, code MIT; a seeded, deterministic generator"/>
+          <p:cNvSpPr txBox="1"/>
+          <p:nvPr/>
+        </p:nvSpPr>
+        <p:spPr>
+          <a:xfrm>
+            <a:off x="10018776" y="5163617"/>
+            <a:ext cx="1420368" cy="747065"/>
+          </a:xfrm>
+          <a:prstGeom prst="rect">
+            <a:avLst/>
+          </a:prstGeom>
+          <a:noFill/>
+          <a:ln/>
+        </p:spPr>
+        <p:txBody>
+          <a:bodyPr wrap="square" lIns="0" tIns="0" rIns="0" bIns="0" rtlCol="0" anchor="t"/>
+          <a:lstStyle/>
+          <a:p>
+            <a:pPr indent="0" marL="0">
+              <a:buNone/>
+            </a:pPr>
+            <a:r>
+              <a:rPr lang="en-US" sz="1150" dirty="0">
+                <a:solidFill>
+                  <a:srgbClr val="52514E"/>
+                </a:solidFill>
+              </a:rPr>
+              <a:t>data CC BY 4.0, code MIT; a seeded, deterministic generator</a:t>
+            </a:r>
+            <a:endParaRPr lang="en-US" sz="1150" dirty="0"/>
           </a:p>
         </p:txBody>
       </p:sp>
@@ -8453,7 +11304,7 @@
                   <a:schemeClr val="tx1"/>
                 </a:solidFill>
               </a:rPr>
-              <a:t>A context is the section at one hanger — the brief, not the answer</a:t>
+              <a:t>A context is the section at one hanger: the brief, not the answer</a:t>
             </a:r>
             <a:endParaRPr lang="en-US" sz="2600" dirty="0"/>
           </a:p>
@@ -8475,8 +11326,8 @@
         </p:blipFill>
         <p:spPr>
           <a:xfrm>
-            <a:off x="1124911" y="1325880"/>
-            <a:ext cx="9939130" cy="4572000"/>
+            <a:off x="1174606" y="1325880"/>
+            <a:ext cx="9839739" cy="4526280"/>
           </a:xfrm>
           <a:prstGeom prst="rect">
             <a:avLst/>
@@ -8491,8 +11342,8 @@
         </p:nvSpPr>
         <p:spPr>
           <a:xfrm>
-            <a:off x="548640" y="5989320"/>
-            <a:ext cx="11091672" cy="457200"/>
+            <a:off x="548640" y="5943600"/>
+            <a:ext cx="11091672" cy="502920"/>
           </a:xfrm>
           <a:prstGeom prst="rect">
             <a:avLst/>
@@ -8513,7 +11364,7 @@
                   <a:srgbClr val="52514E"/>
                 </a:solidFill>
               </a:rPr>
-              <a:t>Per element: kind, service and trade · bare size · insulation per side · load per metre × the span it was sized at = load per support · position. Per context: slab or wall, substrate, thickness. Absent by design: channel, rods, clamps, anchors — and any “correct” answer, because a feasible support depends on the catalog you build from.</a:t>
+              <a:t>Per element: kind, service and trade · bare size · insulation per side · load per metre × the span it was sized at = load at the support · position along and out from the surface. Per context: slab or wall, substrate, thickness. Absent by design: channel, rods, clamps, anchors — and any “correct” answer, since a feasible support depends on the catalog you build from.</a:t>
             </a:r>
             <a:endParaRPr lang="en-US" sz="1100" dirty="0"/>
           </a:p>
@@ -8621,6 +11472,792 @@
                   <a:schemeClr val="tx1"/>
                 </a:solidFill>
               </a:rPr>
+              <a:t>How a context is generated: rules, not free randomness</a:t>
+            </a:r>
+            <a:endParaRPr lang="en-US" sz="2600" dirty="0"/>
+          </a:p>
+        </p:txBody>
+      </p:sp>
+      <p:sp>
+        <p:nvSpPr>
+          <p:cNvPr id="3" name="step circle 1"/>
+          <p:cNvSpPr/>
+          <p:nvPr/>
+        </p:nvSpPr>
+        <p:spPr>
+          <a:xfrm>
+            <a:off x="548640" y="1453896"/>
+            <a:ext cx="402336" cy="402336"/>
+          </a:xfrm>
+          <a:prstGeom prst="ellipse">
+            <a:avLst/>
+          </a:prstGeom>
+          <a:solidFill>
+            <a:schemeClr val="accent1"/>
+          </a:solidFill>
+          <a:ln/>
+        </p:spPr>
+      </p:sp>
+      <p:sp>
+        <p:nvSpPr>
+          <p:cNvPr id="4" name="step number 1"/>
+          <p:cNvSpPr txBox="1"/>
+          <p:nvPr/>
+        </p:nvSpPr>
+        <p:spPr>
+          <a:xfrm>
+            <a:off x="548640" y="1453896"/>
+            <a:ext cx="402336" cy="402336"/>
+          </a:xfrm>
+          <a:prstGeom prst="rect">
+            <a:avLst/>
+          </a:prstGeom>
+          <a:noFill/>
+          <a:ln/>
+        </p:spPr>
+        <p:txBody>
+          <a:bodyPr wrap="square" lIns="0" tIns="0" rIns="0" bIns="0" rtlCol="0" anchor="ctr"/>
+          <a:lstStyle/>
+          <a:p>
+            <a:pPr algn="ctr" indent="0" marL="0">
+              <a:buNone/>
+            </a:pPr>
+            <a:r>
+              <a:rPr lang="en-US" sz="1400" b="1" dirty="0">
+                <a:solidFill>
+                  <a:schemeClr val="bg1"/>
+                </a:solidFill>
+              </a:rPr>
+              <a:t>1</a:t>
+            </a:r>
+            <a:endParaRPr lang="en-US" sz="1400" dirty="0"/>
+          </a:p>
+        </p:txBody>
+      </p:sp>
+      <p:sp>
+        <p:nvSpPr>
+          <p:cNvPr id="5" name="step 1"/>
+          <p:cNvSpPr txBox="1"/>
+          <p:nvPr/>
+        </p:nvSpPr>
+        <p:spPr>
+          <a:xfrm>
+            <a:off x="1143000" y="1325880"/>
+            <a:ext cx="4983480" cy="658368"/>
+          </a:xfrm>
+          <a:prstGeom prst="rect">
+            <a:avLst/>
+          </a:prstGeom>
+          <a:noFill/>
+          <a:ln/>
+        </p:spPr>
+        <p:txBody>
+          <a:bodyPr wrap="square" lIns="0" tIns="0" rIns="0" bIns="0" rtlCol="0" anchor="ctr"/>
+          <a:lstStyle/>
+          <a:p>
+            <a:pPr indent="0" marL="0">
+              <a:buNone/>
+            </a:pPr>
+            <a:r>
+              <a:rPr lang="en-US" sz="1300" b="1" dirty="0">
+                <a:solidFill>
+                  <a:schemeClr val="tx1"/>
+                </a:solidFill>
+              </a:rPr>
+              <a:t>Tier. </a:t>
+            </a:r>
+            <a:pPr indent="0" marL="0">
+              <a:buNone/>
+            </a:pPr>
+            <a:r>
+              <a:rPr lang="en-US" sz="1300" dirty="0">
+                <a:solidFill>
+                  <a:schemeClr val="tx1"/>
+                </a:solidFill>
+              </a:rPr>
+              <a:t>Cn fixes the exact element count, n = 1 … 8.</a:t>
+            </a:r>
+            <a:endParaRPr lang="en-US" sz="1300" dirty="0"/>
+          </a:p>
+        </p:txBody>
+      </p:sp>
+      <p:sp>
+        <p:nvSpPr>
+          <p:cNvPr id="6" name="step circle 2"/>
+          <p:cNvSpPr/>
+          <p:nvPr/>
+        </p:nvSpPr>
+        <p:spPr>
+          <a:xfrm>
+            <a:off x="548640" y="2240280"/>
+            <a:ext cx="402336" cy="402336"/>
+          </a:xfrm>
+          <a:prstGeom prst="ellipse">
+            <a:avLst/>
+          </a:prstGeom>
+          <a:solidFill>
+            <a:schemeClr val="accent1"/>
+          </a:solidFill>
+          <a:ln/>
+        </p:spPr>
+      </p:sp>
+      <p:sp>
+        <p:nvSpPr>
+          <p:cNvPr id="7" name="step number 2"/>
+          <p:cNvSpPr txBox="1"/>
+          <p:nvPr/>
+        </p:nvSpPr>
+        <p:spPr>
+          <a:xfrm>
+            <a:off x="548640" y="2240280"/>
+            <a:ext cx="402336" cy="402336"/>
+          </a:xfrm>
+          <a:prstGeom prst="rect">
+            <a:avLst/>
+          </a:prstGeom>
+          <a:noFill/>
+          <a:ln/>
+        </p:spPr>
+        <p:txBody>
+          <a:bodyPr wrap="square" lIns="0" tIns="0" rIns="0" bIns="0" rtlCol="0" anchor="ctr"/>
+          <a:lstStyle/>
+          <a:p>
+            <a:pPr algn="ctr" indent="0" marL="0">
+              <a:buNone/>
+            </a:pPr>
+            <a:r>
+              <a:rPr lang="en-US" sz="1400" b="1" dirty="0">
+                <a:solidFill>
+                  <a:schemeClr val="bg1"/>
+                </a:solidFill>
+              </a:rPr>
+              <a:t>2</a:t>
+            </a:r>
+            <a:endParaRPr lang="en-US" sz="1400" dirty="0"/>
+          </a:p>
+        </p:txBody>
+      </p:sp>
+      <p:sp>
+        <p:nvSpPr>
+          <p:cNvPr id="8" name="step 2"/>
+          <p:cNvSpPr txBox="1"/>
+          <p:nvPr/>
+        </p:nvSpPr>
+        <p:spPr>
+          <a:xfrm>
+            <a:off x="1143000" y="2112264"/>
+            <a:ext cx="4983480" cy="658368"/>
+          </a:xfrm>
+          <a:prstGeom prst="rect">
+            <a:avLst/>
+          </a:prstGeom>
+          <a:noFill/>
+          <a:ln/>
+        </p:spPr>
+        <p:txBody>
+          <a:bodyPr wrap="square" lIns="0" tIns="0" rIns="0" bIns="0" rtlCol="0" anchor="ctr"/>
+          <a:lstStyle/>
+          <a:p>
+            <a:pPr indent="0" marL="0">
+              <a:buNone/>
+            </a:pPr>
+            <a:r>
+              <a:rPr lang="en-US" sz="1300" b="1" dirty="0">
+                <a:solidFill>
+                  <a:schemeClr val="tx1"/>
+                </a:solidFill>
+              </a:rPr>
+              <a:t>Surface. </a:t>
+            </a:r>
+            <a:pPr indent="0" marL="0">
+              <a:buNone/>
+            </a:pPr>
+            <a:r>
+              <a:rPr lang="en-US" sz="1300" dirty="0">
+                <a:solidFill>
+                  <a:schemeClr val="tx1"/>
+                </a:solidFill>
+              </a:rPr>
+              <a:t>Ceiling or wall (78 / 22 %); concrete slab or wall, 150–300 mm thick.</a:t>
+            </a:r>
+            <a:endParaRPr lang="en-US" sz="1300" dirty="0"/>
+          </a:p>
+        </p:txBody>
+      </p:sp>
+      <p:sp>
+        <p:nvSpPr>
+          <p:cNvPr id="9" name="step circle 3"/>
+          <p:cNvSpPr/>
+          <p:nvPr/>
+        </p:nvSpPr>
+        <p:spPr>
+          <a:xfrm>
+            <a:off x="548640" y="3026664"/>
+            <a:ext cx="402336" cy="402336"/>
+          </a:xfrm>
+          <a:prstGeom prst="ellipse">
+            <a:avLst/>
+          </a:prstGeom>
+          <a:solidFill>
+            <a:schemeClr val="accent1"/>
+          </a:solidFill>
+          <a:ln/>
+        </p:spPr>
+      </p:sp>
+      <p:sp>
+        <p:nvSpPr>
+          <p:cNvPr id="10" name="step number 3"/>
+          <p:cNvSpPr txBox="1"/>
+          <p:nvPr/>
+        </p:nvSpPr>
+        <p:spPr>
+          <a:xfrm>
+            <a:off x="548640" y="3026664"/>
+            <a:ext cx="402336" cy="402336"/>
+          </a:xfrm>
+          <a:prstGeom prst="rect">
+            <a:avLst/>
+          </a:prstGeom>
+          <a:noFill/>
+          <a:ln/>
+        </p:spPr>
+        <p:txBody>
+          <a:bodyPr wrap="square" lIns="0" tIns="0" rIns="0" bIns="0" rtlCol="0" anchor="ctr"/>
+          <a:lstStyle/>
+          <a:p>
+            <a:pPr algn="ctr" indent="0" marL="0">
+              <a:buNone/>
+            </a:pPr>
+            <a:r>
+              <a:rPr lang="en-US" sz="1400" b="1" dirty="0">
+                <a:solidFill>
+                  <a:schemeClr val="bg1"/>
+                </a:solidFill>
+              </a:rPr>
+              <a:t>3</a:t>
+            </a:r>
+            <a:endParaRPr lang="en-US" sz="1400" dirty="0"/>
+          </a:p>
+        </p:txBody>
+      </p:sp>
+      <p:sp>
+        <p:nvSpPr>
+          <p:cNvPr id="11" name="step 3"/>
+          <p:cNvSpPr txBox="1"/>
+          <p:nvPr/>
+        </p:nvSpPr>
+        <p:spPr>
+          <a:xfrm>
+            <a:off x="1143000" y="2898648"/>
+            <a:ext cx="4983480" cy="658368"/>
+          </a:xfrm>
+          <a:prstGeom prst="rect">
+            <a:avLst/>
+          </a:prstGeom>
+          <a:noFill/>
+          <a:ln/>
+        </p:spPr>
+        <p:txBody>
+          <a:bodyPr wrap="square" lIns="0" tIns="0" rIns="0" bIns="0" rtlCol="0" anchor="ctr"/>
+          <a:lstStyle/>
+          <a:p>
+            <a:pPr indent="0" marL="0">
+              <a:buNone/>
+            </a:pPr>
+            <a:r>
+              <a:rPr lang="en-US" sz="1300" b="1" dirty="0">
+                <a:solidFill>
+                  <a:schemeClr val="tx1"/>
+                </a:solidFill>
+              </a:rPr>
+              <a:t>Services. </a:t>
+            </a:r>
+            <a:pPr indent="0" marL="0">
+              <a:buNone/>
+            </a:pPr>
+            <a:r>
+              <a:rPr lang="en-US" sz="1300" dirty="0">
+                <a:solidFill>
+                  <a:schemeClr val="tx1"/>
+                </a:solidFill>
+              </a:rPr>
+              <a:t>Grouped as trades run: hot + cold pairs, flow + return, chilled banks, sprinkler mains, 1–2 trays, ducts, conduit groups of 2–6.</a:t>
+            </a:r>
+            <a:endParaRPr lang="en-US" sz="1300" dirty="0"/>
+          </a:p>
+        </p:txBody>
+      </p:sp>
+      <p:sp>
+        <p:nvSpPr>
+          <p:cNvPr id="12" name="step circle 4"/>
+          <p:cNvSpPr/>
+          <p:nvPr/>
+        </p:nvSpPr>
+        <p:spPr>
+          <a:xfrm>
+            <a:off x="548640" y="3813048"/>
+            <a:ext cx="402336" cy="402336"/>
+          </a:xfrm>
+          <a:prstGeom prst="ellipse">
+            <a:avLst/>
+          </a:prstGeom>
+          <a:solidFill>
+            <a:schemeClr val="accent1"/>
+          </a:solidFill>
+          <a:ln/>
+        </p:spPr>
+      </p:sp>
+      <p:sp>
+        <p:nvSpPr>
+          <p:cNvPr id="13" name="step number 4"/>
+          <p:cNvSpPr txBox="1"/>
+          <p:nvPr/>
+        </p:nvSpPr>
+        <p:spPr>
+          <a:xfrm>
+            <a:off x="548640" y="3813048"/>
+            <a:ext cx="402336" cy="402336"/>
+          </a:xfrm>
+          <a:prstGeom prst="rect">
+            <a:avLst/>
+          </a:prstGeom>
+          <a:noFill/>
+          <a:ln/>
+        </p:spPr>
+        <p:txBody>
+          <a:bodyPr wrap="square" lIns="0" tIns="0" rIns="0" bIns="0" rtlCol="0" anchor="ctr"/>
+          <a:lstStyle/>
+          <a:p>
+            <a:pPr algn="ctr" indent="0" marL="0">
+              <a:buNone/>
+            </a:pPr>
+            <a:r>
+              <a:rPr lang="en-US" sz="1400" b="1" dirty="0">
+                <a:solidFill>
+                  <a:schemeClr val="bg1"/>
+                </a:solidFill>
+              </a:rPr>
+              <a:t>4</a:t>
+            </a:r>
+            <a:endParaRPr lang="en-US" sz="1400" dirty="0"/>
+          </a:p>
+        </p:txBody>
+      </p:sp>
+      <p:sp>
+        <p:nvSpPr>
+          <p:cNvPr id="14" name="step 4"/>
+          <p:cNvSpPr txBox="1"/>
+          <p:nvPr/>
+        </p:nvSpPr>
+        <p:spPr>
+          <a:xfrm>
+            <a:off x="1143000" y="3685032"/>
+            <a:ext cx="4983480" cy="658368"/>
+          </a:xfrm>
+          <a:prstGeom prst="rect">
+            <a:avLst/>
+          </a:prstGeom>
+          <a:noFill/>
+          <a:ln/>
+        </p:spPr>
+        <p:txBody>
+          <a:bodyPr wrap="square" lIns="0" tIns="0" rIns="0" bIns="0" rtlCol="0" anchor="ctr"/>
+          <a:lstStyle/>
+          <a:p>
+            <a:pPr indent="0" marL="0">
+              <a:buNone/>
+            </a:pPr>
+            <a:r>
+              <a:rPr lang="en-US" sz="1300" b="1" dirty="0">
+                <a:solidFill>
+                  <a:schemeClr val="tx1"/>
+                </a:solidFill>
+              </a:rPr>
+              <a:t>Rows. </a:t>
+            </a:r>
+            <a:pPr indent="0" marL="0">
+              <a:buNone/>
+            </a:pPr>
+            <a:r>
+              <a:rPr lang="en-US" sz="1300" dirty="0">
+                <a:solidFill>
+                  <a:schemeClr val="tx1"/>
+                </a:solidFill>
+              </a:rPr>
+              <a:t>Bulky first: ducts nearest the surface, then trays and conduits, then pipes.</a:t>
+            </a:r>
+            <a:endParaRPr lang="en-US" sz="1300" dirty="0"/>
+          </a:p>
+        </p:txBody>
+      </p:sp>
+      <p:sp>
+        <p:nvSpPr>
+          <p:cNvPr id="15" name="step circle 5"/>
+          <p:cNvSpPr/>
+          <p:nvPr/>
+        </p:nvSpPr>
+        <p:spPr>
+          <a:xfrm>
+            <a:off x="548640" y="4599432"/>
+            <a:ext cx="402336" cy="402336"/>
+          </a:xfrm>
+          <a:prstGeom prst="ellipse">
+            <a:avLst/>
+          </a:prstGeom>
+          <a:solidFill>
+            <a:schemeClr val="accent1"/>
+          </a:solidFill>
+          <a:ln/>
+        </p:spPr>
+      </p:sp>
+      <p:sp>
+        <p:nvSpPr>
+          <p:cNvPr id="16" name="step number 5"/>
+          <p:cNvSpPr txBox="1"/>
+          <p:nvPr/>
+        </p:nvSpPr>
+        <p:spPr>
+          <a:xfrm>
+            <a:off x="548640" y="4599432"/>
+            <a:ext cx="402336" cy="402336"/>
+          </a:xfrm>
+          <a:prstGeom prst="rect">
+            <a:avLst/>
+          </a:prstGeom>
+          <a:noFill/>
+          <a:ln/>
+        </p:spPr>
+        <p:txBody>
+          <a:bodyPr wrap="square" lIns="0" tIns="0" rIns="0" bIns="0" rtlCol="0" anchor="ctr"/>
+          <a:lstStyle/>
+          <a:p>
+            <a:pPr algn="ctr" indent="0" marL="0">
+              <a:buNone/>
+            </a:pPr>
+            <a:r>
+              <a:rPr lang="en-US" sz="1400" b="1" dirty="0">
+                <a:solidFill>
+                  <a:schemeClr val="bg1"/>
+                </a:solidFill>
+              </a:rPr>
+              <a:t>5</a:t>
+            </a:r>
+            <a:endParaRPr lang="en-US" sz="1400" dirty="0"/>
+          </a:p>
+        </p:txBody>
+      </p:sp>
+      <p:sp>
+        <p:nvSpPr>
+          <p:cNvPr id="17" name="step 5"/>
+          <p:cNvSpPr txBox="1"/>
+          <p:nvPr/>
+        </p:nvSpPr>
+        <p:spPr>
+          <a:xfrm>
+            <a:off x="1143000" y="4471416"/>
+            <a:ext cx="4983480" cy="658368"/>
+          </a:xfrm>
+          <a:prstGeom prst="rect">
+            <a:avLst/>
+          </a:prstGeom>
+          <a:noFill/>
+          <a:ln/>
+        </p:spPr>
+        <p:txBody>
+          <a:bodyPr wrap="square" lIns="0" tIns="0" rIns="0" bIns="0" rtlCol="0" anchor="ctr"/>
+          <a:lstStyle/>
+          <a:p>
+            <a:pPr indent="0" marL="0">
+              <a:buNone/>
+            </a:pPr>
+            <a:r>
+              <a:rPr lang="en-US" sz="1300" b="1" dirty="0">
+                <a:solidFill>
+                  <a:schemeClr val="tx1"/>
+                </a:solidFill>
+              </a:rPr>
+              <a:t>Spacing. </a:t>
+            </a:r>
+            <a:pPr indent="0" marL="0">
+              <a:buNone/>
+            </a:pPr>
+            <a:r>
+              <a:rPr lang="en-US" sz="1300" dirty="0">
+                <a:solidFill>
+                  <a:schemeClr val="tx1"/>
+                </a:solidFill>
+              </a:rPr>
+              <a:t>Gaps drawn from gaps measured on a built project (at least 25 mm); stagger within rows; electrical above wet on walls.</a:t>
+            </a:r>
+            <a:endParaRPr lang="en-US" sz="1300" dirty="0"/>
+          </a:p>
+        </p:txBody>
+      </p:sp>
+      <p:sp>
+        <p:nvSpPr>
+          <p:cNvPr id="18" name="step circle 6"/>
+          <p:cNvSpPr/>
+          <p:nvPr/>
+        </p:nvSpPr>
+        <p:spPr>
+          <a:xfrm>
+            <a:off x="548640" y="5385816"/>
+            <a:ext cx="402336" cy="402336"/>
+          </a:xfrm>
+          <a:prstGeom prst="ellipse">
+            <a:avLst/>
+          </a:prstGeom>
+          <a:solidFill>
+            <a:schemeClr val="accent1"/>
+          </a:solidFill>
+          <a:ln/>
+        </p:spPr>
+      </p:sp>
+      <p:sp>
+        <p:nvSpPr>
+          <p:cNvPr id="19" name="step number 6"/>
+          <p:cNvSpPr txBox="1"/>
+          <p:nvPr/>
+        </p:nvSpPr>
+        <p:spPr>
+          <a:xfrm>
+            <a:off x="548640" y="5385816"/>
+            <a:ext cx="402336" cy="402336"/>
+          </a:xfrm>
+          <a:prstGeom prst="rect">
+            <a:avLst/>
+          </a:prstGeom>
+          <a:noFill/>
+          <a:ln/>
+        </p:spPr>
+        <p:txBody>
+          <a:bodyPr wrap="square" lIns="0" tIns="0" rIns="0" bIns="0" rtlCol="0" anchor="ctr"/>
+          <a:lstStyle/>
+          <a:p>
+            <a:pPr algn="ctr" indent="0" marL="0">
+              <a:buNone/>
+            </a:pPr>
+            <a:r>
+              <a:rPr lang="en-US" sz="1400" b="1" dirty="0">
+                <a:solidFill>
+                  <a:schemeClr val="bg1"/>
+                </a:solidFill>
+              </a:rPr>
+              <a:t>6</a:t>
+            </a:r>
+            <a:endParaRPr lang="en-US" sz="1400" dirty="0"/>
+          </a:p>
+        </p:txBody>
+      </p:sp>
+      <p:sp>
+        <p:nvSpPr>
+          <p:cNvPr id="20" name="step 6"/>
+          <p:cNvSpPr txBox="1"/>
+          <p:nvPr/>
+        </p:nvSpPr>
+        <p:spPr>
+          <a:xfrm>
+            <a:off x="1143000" y="5257800"/>
+            <a:ext cx="4983480" cy="658368"/>
+          </a:xfrm>
+          <a:prstGeom prst="rect">
+            <a:avLst/>
+          </a:prstGeom>
+          <a:noFill/>
+          <a:ln/>
+        </p:spPr>
+        <p:txBody>
+          <a:bodyPr wrap="square" lIns="0" tIns="0" rIns="0" bIns="0" rtlCol="0" anchor="ctr"/>
+          <a:lstStyle/>
+          <a:p>
+            <a:pPr indent="0" marL="0">
+              <a:buNone/>
+            </a:pPr>
+            <a:r>
+              <a:rPr lang="en-US" sz="1300" b="1" dirty="0">
+                <a:solidFill>
+                  <a:schemeClr val="tx1"/>
+                </a:solidFill>
+              </a:rPr>
+              <a:t>Check. </a:t>
+            </a:r>
+            <a:pPr indent="0" marL="0">
+              <a:buNone/>
+            </a:pPr>
+            <a:r>
+              <a:rPr lang="en-US" sz="1300" dirty="0">
+                <a:solidFill>
+                  <a:schemeClr val="tx1"/>
+                </a:solidFill>
+              </a:rPr>
+              <a:t>Every pair at least 25 mm clear; rows centred; sizes, insulation, loads and positions recorded.</a:t>
+            </a:r>
+            <a:endParaRPr lang="en-US" sz="1300" dirty="0"/>
+          </a:p>
+        </p:txBody>
+      </p:sp>
+      <p:pic>
+        <p:nvPicPr>
+          <p:cNvPr id="21" name="generation example" descr="/home/user/crossmep_dataset/docs/figures/05_generation_example.png">    </p:cNvPr>
+          <p:cNvPicPr>
+            <a:picLocks noChangeAspect="1"/>
+          </p:cNvPicPr>
+          <p:nvPr/>
+        </p:nvPicPr>
+        <p:blipFill>
+          <a:blip r:embed="rId1"/>
+          <a:stretch>
+            <a:fillRect/>
+          </a:stretch>
+        </p:blipFill>
+        <p:spPr>
+          <a:xfrm>
+            <a:off x="6309360" y="1582022"/>
+            <a:ext cx="5330952" cy="3511075"/>
+          </a:xfrm>
+          <a:prstGeom prst="rect">
+            <a:avLst/>
+          </a:prstGeom>
+        </p:spPr>
+      </p:pic>
+      <p:sp>
+        <p:nvSpPr>
+          <p:cNvPr id="22" name="generation caption"/>
+          <p:cNvSpPr txBox="1"/>
+          <p:nvPr/>
+        </p:nvSpPr>
+        <p:spPr>
+          <a:xfrm>
+            <a:off x="6309360" y="5202826"/>
+            <a:ext cx="5330952" cy="685800"/>
+          </a:xfrm>
+          <a:prstGeom prst="rect">
+            <a:avLst/>
+          </a:prstGeom>
+          <a:noFill/>
+          <a:ln/>
+        </p:spPr>
+        <p:txBody>
+          <a:bodyPr wrap="square" lIns="0" tIns="0" rIns="0" bIns="0" rtlCol="0" anchor="t"/>
+          <a:lstStyle/>
+          <a:p>
+            <a:pPr indent="0" marL="0">
+              <a:buNone/>
+            </a:pPr>
+            <a:r>
+              <a:rPr lang="en-US" sz="1100" dirty="0">
+                <a:solidFill>
+                  <a:srgbClr val="52514E"/>
+                </a:solidFill>
+              </a:rPr>
+              <a:t>One generated benchmark context, three rows by priority; the gap marked is one draw from the measured distribution. Every context is seeded: the same seed gives the same file, byte for byte.</a:t>
+            </a:r>
+            <a:endParaRPr lang="en-US" sz="1100" dirty="0"/>
+          </a:p>
+        </p:txBody>
+      </p:sp>
+      <p:sp>
+        <p:nvSpPr>
+          <p:cNvPr id="25" name="Slide Number Placeholder 0"/>
+          <p:cNvSpPr>
+            <a:spLocks noGrp="1"/>
+          </p:cNvSpPr>
+          <p:nvPr>
+            <p:ph type="sldNum" sz="quarter" idx="4294967295"/>
+          </p:nvPr>
+        </p:nvSpPr>
+        <p:spPr>
+          <a:xfrm>
+            <a:off x="11064240" y="6419088"/>
+            <a:ext cx="594360" cy="274320"/>
+          </a:xfrm>
+          <a:prstGeom prst="rect">
+            <a:avLst/>
+          </a:prstGeom>
+          <a:extLst>
+            <a:ext uri="{C572A759-6A51-4108-AA02-DFA0A04FC94B}">
+              <ma14:wrappingTextBoxFlag xmlns:ma14="http://schemas.microsoft.com/office/mac/drawingml/2011/main" val="0"/>
+            </a:ext>
+          </a:extLst>
+        </p:spPr>
+        <p:txBody>
+          <a:bodyPr/>
+          <a:lstStyle>
+            <a:lvl1pPr>
+              <a:defRPr sz="900">
+                <a:solidFill>
+                  <a:srgbClr val="898781"/>
+                </a:solidFill>
+              </a:defRPr>
+            </a:lvl1pPr>
+          </a:lstStyle>
+          <a:p>
+            <a:pPr algn="r"/>
+            <a:fld id="{F7021451-1387-4CA6-816F-3879F97B5CBC}" type="slidenum">
+              <a:rPr b="0" lang="en-US"/>
+              <a:t>5</a:t>
+            </a:fld>
+            <a:endParaRPr lang="en-US"/>
+          </a:p>
+        </p:txBody>
+      </p:sp>
+    </p:spTree>
+  </p:cSld>
+  <p:clrMapOvr>
+    <a:masterClrMapping/>
+  </p:clrMapOvr>
+</p:sld>
+</file>
+
+<file path=ppt/slides/slide6.xml><?xml version="1.0" encoding="utf-8"?>
+<p:sld xmlns:a="http://schemas.openxmlformats.org/drawingml/2006/main" xmlns:r="http://schemas.openxmlformats.org/officeDocument/2006/relationships" xmlns:p="http://schemas.openxmlformats.org/presentationml/2006/main">
+  <p:cSld name="Slide 6">
+    <p:spTree>
+      <p:nvGrpSpPr>
+        <p:cNvPr id="1" name=""/>
+        <p:cNvGrpSpPr/>
+        <p:nvPr/>
+      </p:nvGrpSpPr>
+      <p:grpSpPr>
+        <a:xfrm>
+          <a:off x="0" y="0"/>
+          <a:ext cx="0" cy="0"/>
+          <a:chOff x="0" y="0"/>
+          <a:chExt cx="0" cy="0"/>
+        </a:xfrm>
+      </p:grpSpPr>
+      <p:sp>
+        <p:nvSpPr>
+          <p:cNvPr id="2" name="Text 0"/>
+          <p:cNvSpPr/>
+          <p:nvPr>
+            <p:ph idx="100" type="title" hasCustomPrompt="1"/>
+          </p:nvPr>
+        </p:nvSpPr>
+        <p:spPr>
+          <a:xfrm>
+            <a:off x="548640" y="274320"/>
+            <a:ext cx="11091672" cy="960120"/>
+          </a:xfrm>
+          <a:prstGeom prst="rect">
+            <a:avLst/>
+          </a:prstGeom>
+          <a:noFill/>
+          <a:ln/>
+        </p:spPr>
+        <p:txBody>
+          <a:bodyPr wrap="square" lIns="0" tIns="0" rIns="0" bIns="0" rtlCol="0" anchor="ctr"/>
+          <a:lstStyle/>
+          <a:p>
+            <a:pPr algn="l" indent="0" marL="0">
+              <a:buNone/>
+            </a:pPr>
+            <a:r>
+              <a:rPr lang="en-US" sz="2600" b="1" dirty="0">
+                <a:solidFill>
+                  <a:schemeClr val="tx1"/>
+                </a:solidFill>
+              </a:rPr>
               <a:t>Every number has a source, and every load is computed from it</a:t>
             </a:r>
             <a:endParaRPr lang="en-US" sz="2600" dirty="0"/>
@@ -8629,7 +12266,7 @@
       </p:sp>
       <p:graphicFrame>
         <p:nvGraphicFramePr>
-          <p:cNvPr id="6" name="sources table"/>
+          <p:cNvPr id="7" name="sources table"/>
           <p:cNvGraphicFramePr>
             <a:graphicFrameLocks noGrp="1"/>
           </p:cNvGraphicFramePr>
@@ -10049,423 +13686,9 @@
                   <a:schemeClr val="tx1"/>
                 </a:solidFill>
               </a:rPr>
-              <a:t>Every constant carries a source and a status (VERIFIED / PRACTICE-CITED / DEFAULT) in the repository. Loads are derived in code from those sources and pinned by tests: disagree with a number, change one line, and one test tells you what moved.</a:t>
+              <a:t>Every constant carries a source and a status (verified, practice-cited, or a declared design choice) in the repository. Loads are derived in code from those sources, so each number can be traced and checked.</a:t>
             </a:r>
             <a:endParaRPr lang="en-US" sz="1300" dirty="0"/>
-          </a:p>
-        </p:txBody>
-      </p:sp>
-      <p:sp>
-        <p:nvSpPr>
-          <p:cNvPr id="25" name="Slide Number Placeholder 0"/>
-          <p:cNvSpPr>
-            <a:spLocks noGrp="1"/>
-          </p:cNvSpPr>
-          <p:nvPr>
-            <p:ph type="sldNum" sz="quarter" idx="4294967295"/>
-          </p:nvPr>
-        </p:nvSpPr>
-        <p:spPr>
-          <a:xfrm>
-            <a:off x="11064240" y="6419088"/>
-            <a:ext cx="594360" cy="274320"/>
-          </a:xfrm>
-          <a:prstGeom prst="rect">
-            <a:avLst/>
-          </a:prstGeom>
-          <a:extLst>
-            <a:ext uri="{C572A759-6A51-4108-AA02-DFA0A04FC94B}">
-              <ma14:wrappingTextBoxFlag xmlns:ma14="http://schemas.microsoft.com/office/mac/drawingml/2011/main" val="0"/>
-            </a:ext>
-          </a:extLst>
-        </p:spPr>
-        <p:txBody>
-          <a:bodyPr/>
-          <a:lstStyle>
-            <a:lvl1pPr>
-              <a:defRPr sz="900">
-                <a:solidFill>
-                  <a:srgbClr val="898781"/>
-                </a:solidFill>
-              </a:defRPr>
-            </a:lvl1pPr>
-          </a:lstStyle>
-          <a:p>
-            <a:pPr algn="r"/>
-            <a:fld id="{F7021451-1387-4CA6-816F-3879F97B5CBC}" type="slidenum">
-              <a:rPr b="0" lang="en-US"/>
-              <a:t>5</a:t>
-            </a:fld>
-            <a:endParaRPr lang="en-US"/>
-          </a:p>
-        </p:txBody>
-      </p:sp>
-    </p:spTree>
-  </p:cSld>
-  <p:clrMapOvr>
-    <a:masterClrMapping/>
-  </p:clrMapOvr>
-</p:sld>
-</file>
-
-<file path=ppt/slides/slide6.xml><?xml version="1.0" encoding="utf-8"?>
-<p:sld xmlns:a="http://schemas.openxmlformats.org/drawingml/2006/main" xmlns:r="http://schemas.openxmlformats.org/officeDocument/2006/relationships" xmlns:p="http://schemas.openxmlformats.org/presentationml/2006/main">
-  <p:cSld name="Slide 6">
-    <p:spTree>
-      <p:nvGrpSpPr>
-        <p:cNvPr id="1" name=""/>
-        <p:cNvGrpSpPr/>
-        <p:nvPr/>
-      </p:nvGrpSpPr>
-      <p:grpSpPr>
-        <a:xfrm>
-          <a:off x="0" y="0"/>
-          <a:ext cx="0" cy="0"/>
-          <a:chOff x="0" y="0"/>
-          <a:chExt cx="0" cy="0"/>
-        </a:xfrm>
-      </p:grpSpPr>
-      <p:sp>
-        <p:nvSpPr>
-          <p:cNvPr id="2" name="Text 0"/>
-          <p:cNvSpPr/>
-          <p:nvPr>
-            <p:ph idx="100" type="title" hasCustomPrompt="1"/>
-          </p:nvPr>
-        </p:nvSpPr>
-        <p:spPr>
-          <a:xfrm>
-            <a:off x="548640" y="274320"/>
-            <a:ext cx="11091672" cy="960120"/>
-          </a:xfrm>
-          <a:prstGeom prst="rect">
-            <a:avLst/>
-          </a:prstGeom>
-          <a:noFill/>
-          <a:ln/>
-        </p:spPr>
-        <p:txBody>
-          <a:bodyPr wrap="square" lIns="0" tIns="0" rIns="0" bIns="0" rtlCol="0" anchor="ctr"/>
-          <a:lstStyle/>
-          <a:p>
-            <a:pPr algn="l" indent="0" marL="0">
-              <a:buNone/>
-            </a:pPr>
-            <a:r>
-              <a:rPr lang="en-US" sz="2600" b="1" dirty="0">
-                <a:solidFill>
-                  <a:schemeClr val="tx1"/>
-                </a:solidFill>
-              </a:rPr>
-              <a:t>Eight tiers by element count: from a lone pipe to a congested rack</a:t>
-            </a:r>
-            <a:endParaRPr lang="en-US" sz="2600" dirty="0"/>
-          </a:p>
-        </p:txBody>
-      </p:sp>
-      <p:pic>
-        <p:nvPicPr>
-          <p:cNvPr id="3" name="tier examples" descr="/home/user/crossmep_dataset/docs/figures/02_tiers_examples.png">    </p:cNvPr>
-          <p:cNvPicPr>
-            <a:picLocks noChangeAspect="1"/>
-          </p:cNvPicPr>
-          <p:nvPr/>
-        </p:nvPicPr>
-        <p:blipFill>
-          <a:blip r:embed="rId1"/>
-          <a:stretch>
-            <a:fillRect/>
-          </a:stretch>
-        </p:blipFill>
-        <p:spPr>
-          <a:xfrm>
-            <a:off x="1005405" y="1280160"/>
-            <a:ext cx="10178143" cy="3886200"/>
-          </a:xfrm>
-          <a:prstGeom prst="rect">
-            <a:avLst/>
-          </a:prstGeom>
-        </p:spPr>
-      </p:pic>
-      <p:sp>
-        <p:nvSpPr>
-          <p:cNvPr id="4" name="tile exactly n elements per tier; trades, kinds, surfaces and stacking vary within it"/>
-          <p:cNvSpPr/>
-          <p:nvPr/>
-        </p:nvSpPr>
-        <p:spPr>
-          <a:xfrm>
-            <a:off x="548640" y="5257800"/>
-            <a:ext cx="3566160" cy="914400"/>
-          </a:xfrm>
-          <a:prstGeom prst="roundRect">
-            <a:avLst>
-              <a:gd name="adj" fmla="val 7000"/>
-            </a:avLst>
-          </a:prstGeom>
-          <a:solidFill>
-            <a:schemeClr val="bg2"/>
-          </a:solidFill>
-          <a:ln/>
-        </p:spPr>
-      </p:sp>
-      <p:sp>
-        <p:nvSpPr>
-          <p:cNvPr id="5" name="value exactly n elements per tier; trades, kinds, surfaces and stacking vary within it"/>
-          <p:cNvSpPr txBox="1"/>
-          <p:nvPr/>
-        </p:nvSpPr>
-        <p:spPr>
-          <a:xfrm>
-            <a:off x="777240" y="5349240"/>
-            <a:ext cx="3108960" cy="512064"/>
-          </a:xfrm>
-          <a:prstGeom prst="rect">
-            <a:avLst/>
-          </a:prstGeom>
-          <a:noFill/>
-          <a:ln/>
-        </p:spPr>
-        <p:txBody>
-          <a:bodyPr wrap="square" lIns="0" tIns="0" rIns="0" bIns="0" rtlCol="0" anchor="ctr"/>
-          <a:lstStyle/>
-          <a:p>
-            <a:pPr indent="0" marL="0">
-              <a:buNone/>
-            </a:pPr>
-            <a:r>
-              <a:rPr lang="en-US" sz="2600" b="1" dirty="0">
-                <a:solidFill>
-                  <a:schemeClr val="accent1"/>
-                </a:solidFill>
-              </a:rPr>
-              <a:t>C1 → C8</a:t>
-            </a:r>
-            <a:endParaRPr lang="en-US" sz="2600" dirty="0"/>
-          </a:p>
-        </p:txBody>
-      </p:sp>
-      <p:sp>
-        <p:nvSpPr>
-          <p:cNvPr id="6" name="label exactly n elements per tier; trades, kinds, surfaces and stacking vary within it"/>
-          <p:cNvSpPr txBox="1"/>
-          <p:nvPr/>
-        </p:nvSpPr>
-        <p:spPr>
-          <a:xfrm>
-            <a:off x="777240" y="5843016"/>
-            <a:ext cx="3108960" cy="301752"/>
-          </a:xfrm>
-          <a:prstGeom prst="rect">
-            <a:avLst/>
-          </a:prstGeom>
-          <a:noFill/>
-          <a:ln/>
-        </p:spPr>
-        <p:txBody>
-          <a:bodyPr wrap="square" lIns="0" tIns="0" rIns="0" bIns="0" rtlCol="0" anchor="t"/>
-          <a:lstStyle/>
-          <a:p>
-            <a:pPr indent="0" marL="0">
-              <a:buNone/>
-            </a:pPr>
-            <a:r>
-              <a:rPr lang="en-US" sz="1100" dirty="0">
-                <a:solidFill>
-                  <a:srgbClr val="52514E"/>
-                </a:solidFill>
-              </a:rPr>
-              <a:t>exactly n elements per tier; trades, kinds, surfaces and stacking vary within it</a:t>
-            </a:r>
-            <a:endParaRPr lang="en-US" sz="1100" dirty="0"/>
-          </a:p>
-        </p:txBody>
-      </p:sp>
-      <p:sp>
-        <p:nvSpPr>
-          <p:cNvPr id="7" name="tile median clear gap between elements, C2 to C8 (benchmark split)"/>
-          <p:cNvSpPr/>
-          <p:nvPr/>
-        </p:nvSpPr>
-        <p:spPr>
-          <a:xfrm>
-            <a:off x="4311396" y="5257800"/>
-            <a:ext cx="3566160" cy="914400"/>
-          </a:xfrm>
-          <a:prstGeom prst="roundRect">
-            <a:avLst>
-              <a:gd name="adj" fmla="val 7000"/>
-            </a:avLst>
-          </a:prstGeom>
-          <a:solidFill>
-            <a:schemeClr val="bg2"/>
-          </a:solidFill>
-          <a:ln/>
-        </p:spPr>
-      </p:sp>
-      <p:sp>
-        <p:nvSpPr>
-          <p:cNvPr id="8" name="value median clear gap between elements, C2 to C8 (benchmark split)"/>
-          <p:cNvSpPr txBox="1"/>
-          <p:nvPr/>
-        </p:nvSpPr>
-        <p:spPr>
-          <a:xfrm>
-            <a:off x="4539996" y="5349240"/>
-            <a:ext cx="3108960" cy="512064"/>
-          </a:xfrm>
-          <a:prstGeom prst="rect">
-            <a:avLst/>
-          </a:prstGeom>
-          <a:noFill/>
-          <a:ln/>
-        </p:spPr>
-        <p:txBody>
-          <a:bodyPr wrap="square" lIns="0" tIns="0" rIns="0" bIns="0" rtlCol="0" anchor="ctr"/>
-          <a:lstStyle/>
-          <a:p>
-            <a:pPr indent="0" marL="0">
-              <a:buNone/>
-            </a:pPr>
-            <a:r>
-              <a:rPr lang="en-US" sz="2600" b="1" dirty="0">
-                <a:solidFill>
-                  <a:schemeClr val="accent1"/>
-                </a:solidFill>
-              </a:rPr>
-              <a:t>120 → 62 mm</a:t>
-            </a:r>
-            <a:endParaRPr lang="en-US" sz="2600" dirty="0"/>
-          </a:p>
-        </p:txBody>
-      </p:sp>
-      <p:sp>
-        <p:nvSpPr>
-          <p:cNvPr id="9" name="label median clear gap between elements, C2 to C8 (benchmark split)"/>
-          <p:cNvSpPr txBox="1"/>
-          <p:nvPr/>
-        </p:nvSpPr>
-        <p:spPr>
-          <a:xfrm>
-            <a:off x="4539996" y="5843016"/>
-            <a:ext cx="3108960" cy="301752"/>
-          </a:xfrm>
-          <a:prstGeom prst="rect">
-            <a:avLst/>
-          </a:prstGeom>
-          <a:noFill/>
-          <a:ln/>
-        </p:spPr>
-        <p:txBody>
-          <a:bodyPr wrap="square" lIns="0" tIns="0" rIns="0" bIns="0" rtlCol="0" anchor="t"/>
-          <a:lstStyle/>
-          <a:p>
-            <a:pPr indent="0" marL="0">
-              <a:buNone/>
-            </a:pPr>
-            <a:r>
-              <a:rPr lang="en-US" sz="1100" dirty="0">
-                <a:solidFill>
-                  <a:srgbClr val="52514E"/>
-                </a:solidFill>
-              </a:rPr>
-              <a:t>median clear gap between elements, C2 to C8 (benchmark split)</a:t>
-            </a:r>
-            <a:endParaRPr lang="en-US" sz="1100" dirty="0"/>
-          </a:p>
-        </p:txBody>
-      </p:sp>
-      <p:sp>
-        <p:nvSpPr>
-          <p:cNvPr id="10" name="tile median load at the support, C1 to C8"/>
-          <p:cNvSpPr/>
-          <p:nvPr/>
-        </p:nvSpPr>
-        <p:spPr>
-          <a:xfrm>
-            <a:off x="8074152" y="5257800"/>
-            <a:ext cx="3566160" cy="914400"/>
-          </a:xfrm>
-          <a:prstGeom prst="roundRect">
-            <a:avLst>
-              <a:gd name="adj" fmla="val 7000"/>
-            </a:avLst>
-          </a:prstGeom>
-          <a:solidFill>
-            <a:schemeClr val="bg2"/>
-          </a:solidFill>
-          <a:ln/>
-        </p:spPr>
-      </p:sp>
-      <p:sp>
-        <p:nvSpPr>
-          <p:cNvPr id="11" name="value median load at the support, C1 to C8"/>
-          <p:cNvSpPr txBox="1"/>
-          <p:nvPr/>
-        </p:nvSpPr>
-        <p:spPr>
-          <a:xfrm>
-            <a:off x="8302752" y="5349240"/>
-            <a:ext cx="3108960" cy="512064"/>
-          </a:xfrm>
-          <a:prstGeom prst="rect">
-            <a:avLst/>
-          </a:prstGeom>
-          <a:noFill/>
-          <a:ln/>
-        </p:spPr>
-        <p:txBody>
-          <a:bodyPr wrap="square" lIns="0" tIns="0" rIns="0" bIns="0" rtlCol="0" anchor="ctr"/>
-          <a:lstStyle/>
-          <a:p>
-            <a:pPr indent="0" marL="0">
-              <a:buNone/>
-            </a:pPr>
-            <a:r>
-              <a:rPr lang="en-US" sz="2600" b="1" dirty="0">
-                <a:solidFill>
-                  <a:schemeClr val="accent1"/>
-                </a:solidFill>
-              </a:rPr>
-              <a:t>0.10 → 1.71 kN</a:t>
-            </a:r>
-            <a:endParaRPr lang="en-US" sz="2600" dirty="0"/>
-          </a:p>
-        </p:txBody>
-      </p:sp>
-      <p:sp>
-        <p:nvSpPr>
-          <p:cNvPr id="12" name="label median load at the support, C1 to C8"/>
-          <p:cNvSpPr txBox="1"/>
-          <p:nvPr/>
-        </p:nvSpPr>
-        <p:spPr>
-          <a:xfrm>
-            <a:off x="8302752" y="5843016"/>
-            <a:ext cx="3108960" cy="301752"/>
-          </a:xfrm>
-          <a:prstGeom prst="rect">
-            <a:avLst/>
-          </a:prstGeom>
-          <a:noFill/>
-          <a:ln/>
-        </p:spPr>
-        <p:txBody>
-          <a:bodyPr wrap="square" lIns="0" tIns="0" rIns="0" bIns="0" rtlCol="0" anchor="t"/>
-          <a:lstStyle/>
-          <a:p>
-            <a:pPr indent="0" marL="0">
-              <a:buNone/>
-            </a:pPr>
-            <a:r>
-              <a:rPr lang="en-US" sz="1100" dirty="0">
-                <a:solidFill>
-                  <a:srgbClr val="52514E"/>
-                </a:solidFill>
-              </a:rPr>
-              <a:t>median load at the support, C1 to C8</a:t>
-            </a:r>
-            <a:endParaRPr lang="en-US" sz="1100" dirty="0"/>
           </a:p>
         </p:txBody>
       </p:sp>
@@ -10571,46 +13794,1627 @@
                   <a:schemeClr val="tx1"/>
                 </a:solidFill>
               </a:rPr>
-              <a:t>Spacing checked against a built project: 41 mm from the measured model</a:t>
+              <a:t>The release: 7,000 contexts in four splits on disjoint seeds</a:t>
             </a:r>
             <a:endParaRPr lang="en-US" sz="2600" dirty="0"/>
           </a:p>
         </p:txBody>
       </p:sp>
-      <p:pic>
-        <p:nvPicPr>
-          <p:cNvPr id="3" name="gap distributions" descr="/home/user/crossmep_dataset/docs/figures/04_gaps_vs_measured.png">    </p:cNvPr>
-          <p:cNvPicPr>
-            <a:picLocks noChangeAspect="1"/>
-          </p:cNvPicPr>
-          <p:nvPr/>
-        </p:nvPicPr>
-        <p:blipFill>
-          <a:blip r:embed="rId1"/>
-          <a:stretch>
-            <a:fillRect/>
-          </a:stretch>
-        </p:blipFill>
-        <p:spPr>
-          <a:xfrm>
-            <a:off x="847067" y="1325880"/>
-            <a:ext cx="10494818" cy="4617720"/>
-          </a:xfrm>
-          <a:prstGeom prst="rect">
-            <a:avLst/>
-          </a:prstGeom>
-        </p:spPr>
-      </p:pic>
-      <p:sp>
-        <p:nvSpPr>
-          <p:cNvPr id="4" name="verification caption"/>
+      <p:graphicFrame>
+        <p:nvGraphicFramePr>
+          <p:cNvPr id="8" name="splits table"/>
+          <p:cNvGraphicFramePr>
+            <a:graphicFrameLocks noGrp="1"/>
+          </p:cNvGraphicFramePr>
+          <p:nvPr>
+            <p:extLst>
+              <p:ext uri="{D42A27DB-BD31-4B8C-83A1-F6EECF244321}">
+                <p14:modId xmlns:p14="http://schemas.microsoft.com/office/powerpoint/2010/main" val="1579011935"/>
+              </p:ext>
+            </p:extLst>
+          </p:nvPr>
+        </p:nvGraphicFramePr>
+        <p:xfrm>
+          <a:off x="548640" y="1417320"/>
+          <a:ext cx="5120640" cy="914400"/>
+        </p:xfrm>
+        <a:graphic>
+          <a:graphicData uri="http://schemas.openxmlformats.org/drawingml/2006/table">
+            <a:tbl>
+              <a:tblPr/>
+              <a:tblGrid>
+                <a:gridCol w="1554480"/>
+                <a:gridCol w="1188720"/>
+                <a:gridCol w="1280160"/>
+                <a:gridCol w="1097280"/>
+              </a:tblGrid>
+              <a:tr h="384048">
+                <a:tc>
+                  <a:txBody>
+                    <a:bodyPr/>
+                    <a:lstStyle/>
+                    <a:p>
+                      <a:pPr algn="l" indent="0" marL="0">
+                        <a:buNone/>
+                      </a:pPr>
+                      <a:r>
+                        <a:rPr lang="en-US" sz="1200" b="1" dirty="0">
+                          <a:solidFill>
+                            <a:srgbClr val="FFFFFF"/>
+                          </a:solidFill>
+                          <a:latin typeface="Calibri" pitchFamily="34" charset="0"/>
+                          <a:ea typeface="Calibri" pitchFamily="34" charset="-122"/>
+                          <a:cs typeface="Calibri" pitchFamily="34" charset="-120"/>
+                        </a:rPr>
+                        <a:t>split</a:t>
+                      </a:r>
+                      <a:endParaRPr lang="en-US" sz="1200" dirty="0">
+                        <a:latin typeface="Calibri" charset="0"/>
+                        <a:ea typeface="Calibri" charset="0"/>
+                        <a:cs typeface="Calibri" charset="0"/>
+                      </a:endParaRPr>
+                    </a:p>
+                  </a:txBody>
+                  <a:tcPr marL="73152" marR="73152" marT="73152" marB="73152" anchor="ctr">
+                    <a:lnL w="9525" cap="flat" cmpd="sng" algn="ctr">
+                      <a:solidFill>
+                        <a:srgbClr val="E1E0D9"/>
+                      </a:solidFill>
+                      <a:prstDash val="solid"/>
+                      <a:round/>
+                      <a:headEnd type="none" w="med" len="med"/>
+                      <a:tailEnd type="none" w="med" len="med"/>
+                    </a:lnL>
+                    <a:lnR w="9525" cap="flat" cmpd="sng" algn="ctr">
+                      <a:solidFill>
+                        <a:srgbClr val="E1E0D9"/>
+                      </a:solidFill>
+                      <a:prstDash val="solid"/>
+                      <a:round/>
+                      <a:headEnd type="none" w="med" len="med"/>
+                      <a:tailEnd type="none" w="med" len="med"/>
+                    </a:lnR>
+                    <a:lnT w="9525" cap="flat" cmpd="sng" algn="ctr">
+                      <a:solidFill>
+                        <a:srgbClr val="E1E0D9"/>
+                      </a:solidFill>
+                      <a:prstDash val="solid"/>
+                      <a:round/>
+                      <a:headEnd type="none" w="med" len="med"/>
+                      <a:tailEnd type="none" w="med" len="med"/>
+                    </a:lnT>
+                    <a:lnB w="9525" cap="flat" cmpd="sng" algn="ctr">
+                      <a:solidFill>
+                        <a:srgbClr val="E1E0D9"/>
+                      </a:solidFill>
+                      <a:prstDash val="solid"/>
+                      <a:round/>
+                      <a:headEnd type="none" w="med" len="med"/>
+                      <a:tailEnd type="none" w="med" len="med"/>
+                    </a:lnB>
+                    <a:solidFill>
+                      <a:srgbClr val="1F2933"/>
+                    </a:solidFill>
+                  </a:tcPr>
+                </a:tc>
+                <a:tc>
+                  <a:txBody>
+                    <a:bodyPr/>
+                    <a:lstStyle/>
+                    <a:p>
+                      <a:pPr algn="r" indent="0" marL="0">
+                        <a:buNone/>
+                      </a:pPr>
+                      <a:r>
+                        <a:rPr lang="en-US" sz="1200" b="1" dirty="0">
+                          <a:solidFill>
+                            <a:srgbClr val="FFFFFF"/>
+                          </a:solidFill>
+                          <a:latin typeface="Calibri" pitchFamily="34" charset="0"/>
+                          <a:ea typeface="Calibri" pitchFamily="34" charset="-122"/>
+                          <a:cs typeface="Calibri" pitchFamily="34" charset="-120"/>
+                        </a:rPr>
+                        <a:t>contexts</a:t>
+                      </a:r>
+                      <a:endParaRPr lang="en-US" sz="1200" dirty="0">
+                        <a:latin typeface="Calibri" charset="0"/>
+                        <a:ea typeface="Calibri" charset="0"/>
+                        <a:cs typeface="Calibri" charset="0"/>
+                      </a:endParaRPr>
+                    </a:p>
+                  </a:txBody>
+                  <a:tcPr marL="73152" marR="73152" marT="73152" marB="73152" anchor="ctr">
+                    <a:lnL w="9525" cap="flat" cmpd="sng" algn="ctr">
+                      <a:solidFill>
+                        <a:srgbClr val="E1E0D9"/>
+                      </a:solidFill>
+                      <a:prstDash val="solid"/>
+                      <a:round/>
+                      <a:headEnd type="none" w="med" len="med"/>
+                      <a:tailEnd type="none" w="med" len="med"/>
+                    </a:lnL>
+                    <a:lnR w="9525" cap="flat" cmpd="sng" algn="ctr">
+                      <a:solidFill>
+                        <a:srgbClr val="E1E0D9"/>
+                      </a:solidFill>
+                      <a:prstDash val="solid"/>
+                      <a:round/>
+                      <a:headEnd type="none" w="med" len="med"/>
+                      <a:tailEnd type="none" w="med" len="med"/>
+                    </a:lnR>
+                    <a:lnT w="9525" cap="flat" cmpd="sng" algn="ctr">
+                      <a:solidFill>
+                        <a:srgbClr val="E1E0D9"/>
+                      </a:solidFill>
+                      <a:prstDash val="solid"/>
+                      <a:round/>
+                      <a:headEnd type="none" w="med" len="med"/>
+                      <a:tailEnd type="none" w="med" len="med"/>
+                    </a:lnT>
+                    <a:lnB w="9525" cap="flat" cmpd="sng" algn="ctr">
+                      <a:solidFill>
+                        <a:srgbClr val="E1E0D9"/>
+                      </a:solidFill>
+                      <a:prstDash val="solid"/>
+                      <a:round/>
+                      <a:headEnd type="none" w="med" len="med"/>
+                      <a:tailEnd type="none" w="med" len="med"/>
+                    </a:lnB>
+                    <a:solidFill>
+                      <a:srgbClr val="1F2933"/>
+                    </a:solidFill>
+                  </a:tcPr>
+                </a:tc>
+                <a:tc>
+                  <a:txBody>
+                    <a:bodyPr/>
+                    <a:lstStyle/>
+                    <a:p>
+                      <a:pPr algn="r" indent="0" marL="0">
+                        <a:buNone/>
+                      </a:pPr>
+                      <a:r>
+                        <a:rPr lang="en-US" sz="1200" b="1" dirty="0">
+                          <a:solidFill>
+                            <a:srgbClr val="FFFFFF"/>
+                          </a:solidFill>
+                          <a:latin typeface="Calibri" pitchFamily="34" charset="0"/>
+                          <a:ea typeface="Calibri" pitchFamily="34" charset="-122"/>
+                          <a:cs typeface="Calibri" pitchFamily="34" charset="-120"/>
+                        </a:rPr>
+                        <a:t>elements</a:t>
+                      </a:r>
+                      <a:endParaRPr lang="en-US" sz="1200" dirty="0">
+                        <a:latin typeface="Calibri" charset="0"/>
+                        <a:ea typeface="Calibri" charset="0"/>
+                        <a:cs typeface="Calibri" charset="0"/>
+                      </a:endParaRPr>
+                    </a:p>
+                  </a:txBody>
+                  <a:tcPr marL="73152" marR="73152" marT="73152" marB="73152" anchor="ctr">
+                    <a:lnL w="9525" cap="flat" cmpd="sng" algn="ctr">
+                      <a:solidFill>
+                        <a:srgbClr val="E1E0D9"/>
+                      </a:solidFill>
+                      <a:prstDash val="solid"/>
+                      <a:round/>
+                      <a:headEnd type="none" w="med" len="med"/>
+                      <a:tailEnd type="none" w="med" len="med"/>
+                    </a:lnL>
+                    <a:lnR w="9525" cap="flat" cmpd="sng" algn="ctr">
+                      <a:solidFill>
+                        <a:srgbClr val="E1E0D9"/>
+                      </a:solidFill>
+                      <a:prstDash val="solid"/>
+                      <a:round/>
+                      <a:headEnd type="none" w="med" len="med"/>
+                      <a:tailEnd type="none" w="med" len="med"/>
+                    </a:lnR>
+                    <a:lnT w="9525" cap="flat" cmpd="sng" algn="ctr">
+                      <a:solidFill>
+                        <a:srgbClr val="E1E0D9"/>
+                      </a:solidFill>
+                      <a:prstDash val="solid"/>
+                      <a:round/>
+                      <a:headEnd type="none" w="med" len="med"/>
+                      <a:tailEnd type="none" w="med" len="med"/>
+                    </a:lnT>
+                    <a:lnB w="9525" cap="flat" cmpd="sng" algn="ctr">
+                      <a:solidFill>
+                        <a:srgbClr val="E1E0D9"/>
+                      </a:solidFill>
+                      <a:prstDash val="solid"/>
+                      <a:round/>
+                      <a:headEnd type="none" w="med" len="med"/>
+                      <a:tailEnd type="none" w="med" len="med"/>
+                    </a:lnB>
+                    <a:solidFill>
+                      <a:srgbClr val="1F2933"/>
+                    </a:solidFill>
+                  </a:tcPr>
+                </a:tc>
+                <a:tc>
+                  <a:txBody>
+                    <a:bodyPr/>
+                    <a:lstStyle/>
+                    <a:p>
+                      <a:pPr algn="r" indent="0" marL="0">
+                        <a:buNone/>
+                      </a:pPr>
+                      <a:r>
+                        <a:rPr lang="en-US" sz="1200" b="1" dirty="0">
+                          <a:solidFill>
+                            <a:srgbClr val="FFFFFF"/>
+                          </a:solidFill>
+                          <a:latin typeface="Calibri" pitchFamily="34" charset="0"/>
+                          <a:ea typeface="Calibri" pitchFamily="34" charset="-122"/>
+                          <a:cs typeface="Calibri" pitchFamily="34" charset="-120"/>
+                        </a:rPr>
+                        <a:t>seed</a:t>
+                      </a:r>
+                      <a:endParaRPr lang="en-US" sz="1200" dirty="0">
+                        <a:latin typeface="Calibri" charset="0"/>
+                        <a:ea typeface="Calibri" charset="0"/>
+                        <a:cs typeface="Calibri" charset="0"/>
+                      </a:endParaRPr>
+                    </a:p>
+                  </a:txBody>
+                  <a:tcPr marL="73152" marR="73152" marT="73152" marB="73152" anchor="ctr">
+                    <a:lnL w="9525" cap="flat" cmpd="sng" algn="ctr">
+                      <a:solidFill>
+                        <a:srgbClr val="E1E0D9"/>
+                      </a:solidFill>
+                      <a:prstDash val="solid"/>
+                      <a:round/>
+                      <a:headEnd type="none" w="med" len="med"/>
+                      <a:tailEnd type="none" w="med" len="med"/>
+                    </a:lnL>
+                    <a:lnR w="9525" cap="flat" cmpd="sng" algn="ctr">
+                      <a:solidFill>
+                        <a:srgbClr val="E1E0D9"/>
+                      </a:solidFill>
+                      <a:prstDash val="solid"/>
+                      <a:round/>
+                      <a:headEnd type="none" w="med" len="med"/>
+                      <a:tailEnd type="none" w="med" len="med"/>
+                    </a:lnR>
+                    <a:lnT w="9525" cap="flat" cmpd="sng" algn="ctr">
+                      <a:solidFill>
+                        <a:srgbClr val="E1E0D9"/>
+                      </a:solidFill>
+                      <a:prstDash val="solid"/>
+                      <a:round/>
+                      <a:headEnd type="none" w="med" len="med"/>
+                      <a:tailEnd type="none" w="med" len="med"/>
+                    </a:lnT>
+                    <a:lnB w="9525" cap="flat" cmpd="sng" algn="ctr">
+                      <a:solidFill>
+                        <a:srgbClr val="E1E0D9"/>
+                      </a:solidFill>
+                      <a:prstDash val="solid"/>
+                      <a:round/>
+                      <a:headEnd type="none" w="med" len="med"/>
+                      <a:tailEnd type="none" w="med" len="med"/>
+                    </a:lnB>
+                    <a:solidFill>
+                      <a:srgbClr val="1F2933"/>
+                    </a:solidFill>
+                  </a:tcPr>
+                </a:tc>
+              </a:tr>
+              <a:tr h="384048">
+                <a:tc>
+                  <a:txBody>
+                    <a:bodyPr/>
+                    <a:lstStyle/>
+                    <a:p>
+                      <a:pPr algn="l" indent="0" marL="0">
+                        <a:buNone/>
+                      </a:pPr>
+                      <a:r>
+                        <a:rPr lang="en-US" sz="1200" dirty="0">
+                          <a:solidFill>
+                            <a:srgbClr val="0B0B0B"/>
+                          </a:solidFill>
+                          <a:latin typeface="Calibri" pitchFamily="34" charset="0"/>
+                          <a:ea typeface="Calibri" pitchFamily="34" charset="-122"/>
+                          <a:cs typeface="Calibri" pitchFamily="34" charset="-120"/>
+                        </a:rPr>
+                        <a:t>train</a:t>
+                      </a:r>
+                      <a:endParaRPr lang="en-US" sz="1200" dirty="0">
+                        <a:latin typeface="Calibri" charset="0"/>
+                        <a:ea typeface="Calibri" charset="0"/>
+                        <a:cs typeface="Calibri" charset="0"/>
+                      </a:endParaRPr>
+                    </a:p>
+                  </a:txBody>
+                  <a:tcPr marL="73152" marR="73152" marT="73152" marB="73152" anchor="ctr">
+                    <a:lnL w="9525" cap="flat" cmpd="sng" algn="ctr">
+                      <a:solidFill>
+                        <a:srgbClr val="E1E0D9"/>
+                      </a:solidFill>
+                      <a:prstDash val="solid"/>
+                      <a:round/>
+                      <a:headEnd type="none" w="med" len="med"/>
+                      <a:tailEnd type="none" w="med" len="med"/>
+                    </a:lnL>
+                    <a:lnR w="9525" cap="flat" cmpd="sng" algn="ctr">
+                      <a:solidFill>
+                        <a:srgbClr val="E1E0D9"/>
+                      </a:solidFill>
+                      <a:prstDash val="solid"/>
+                      <a:round/>
+                      <a:headEnd type="none" w="med" len="med"/>
+                      <a:tailEnd type="none" w="med" len="med"/>
+                    </a:lnR>
+                    <a:lnT w="9525" cap="flat" cmpd="sng" algn="ctr">
+                      <a:solidFill>
+                        <a:srgbClr val="E1E0D9"/>
+                      </a:solidFill>
+                      <a:prstDash val="solid"/>
+                      <a:round/>
+                      <a:headEnd type="none" w="med" len="med"/>
+                      <a:tailEnd type="none" w="med" len="med"/>
+                    </a:lnT>
+                    <a:lnB w="9525" cap="flat" cmpd="sng" algn="ctr">
+                      <a:solidFill>
+                        <a:srgbClr val="E1E0D9"/>
+                      </a:solidFill>
+                      <a:prstDash val="solid"/>
+                      <a:round/>
+                      <a:headEnd type="none" w="med" len="med"/>
+                      <a:tailEnd type="none" w="med" len="med"/>
+                    </a:lnB>
+                  </a:tcPr>
+                </a:tc>
+                <a:tc>
+                  <a:txBody>
+                    <a:bodyPr/>
+                    <a:lstStyle/>
+                    <a:p>
+                      <a:pPr algn="r" indent="0" marL="0">
+                        <a:buNone/>
+                      </a:pPr>
+                      <a:r>
+                        <a:rPr lang="en-US" sz="1200" dirty="0">
+                          <a:solidFill>
+                            <a:srgbClr val="0B0B0B"/>
+                          </a:solidFill>
+                          <a:latin typeface="Calibri" pitchFamily="34" charset="0"/>
+                          <a:ea typeface="Calibri" pitchFamily="34" charset="-122"/>
+                          <a:cs typeface="Calibri" pitchFamily="34" charset="-120"/>
+                        </a:rPr>
+                        <a:t>5,000</a:t>
+                      </a:r>
+                      <a:endParaRPr lang="en-US" sz="1200" dirty="0">
+                        <a:latin typeface="Calibri" charset="0"/>
+                        <a:ea typeface="Calibri" charset="0"/>
+                        <a:cs typeface="Calibri" charset="0"/>
+                      </a:endParaRPr>
+                    </a:p>
+                  </a:txBody>
+                  <a:tcPr marL="73152" marR="73152" marT="73152" marB="73152" anchor="ctr">
+                    <a:lnL w="9525" cap="flat" cmpd="sng" algn="ctr">
+                      <a:solidFill>
+                        <a:srgbClr val="E1E0D9"/>
+                      </a:solidFill>
+                      <a:prstDash val="solid"/>
+                      <a:round/>
+                      <a:headEnd type="none" w="med" len="med"/>
+                      <a:tailEnd type="none" w="med" len="med"/>
+                    </a:lnL>
+                    <a:lnR w="9525" cap="flat" cmpd="sng" algn="ctr">
+                      <a:solidFill>
+                        <a:srgbClr val="E1E0D9"/>
+                      </a:solidFill>
+                      <a:prstDash val="solid"/>
+                      <a:round/>
+                      <a:headEnd type="none" w="med" len="med"/>
+                      <a:tailEnd type="none" w="med" len="med"/>
+                    </a:lnR>
+                    <a:lnT w="9525" cap="flat" cmpd="sng" algn="ctr">
+                      <a:solidFill>
+                        <a:srgbClr val="E1E0D9"/>
+                      </a:solidFill>
+                      <a:prstDash val="solid"/>
+                      <a:round/>
+                      <a:headEnd type="none" w="med" len="med"/>
+                      <a:tailEnd type="none" w="med" len="med"/>
+                    </a:lnT>
+                    <a:lnB w="9525" cap="flat" cmpd="sng" algn="ctr">
+                      <a:solidFill>
+                        <a:srgbClr val="E1E0D9"/>
+                      </a:solidFill>
+                      <a:prstDash val="solid"/>
+                      <a:round/>
+                      <a:headEnd type="none" w="med" len="med"/>
+                      <a:tailEnd type="none" w="med" len="med"/>
+                    </a:lnB>
+                  </a:tcPr>
+                </a:tc>
+                <a:tc>
+                  <a:txBody>
+                    <a:bodyPr/>
+                    <a:lstStyle/>
+                    <a:p>
+                      <a:pPr algn="r" indent="0" marL="0">
+                        <a:buNone/>
+                      </a:pPr>
+                      <a:r>
+                        <a:rPr lang="en-US" sz="1200" dirty="0">
+                          <a:solidFill>
+                            <a:srgbClr val="0B0B0B"/>
+                          </a:solidFill>
+                          <a:latin typeface="Calibri" pitchFamily="34" charset="0"/>
+                          <a:ea typeface="Calibri" pitchFamily="34" charset="-122"/>
+                          <a:cs typeface="Calibri" pitchFamily="34" charset="-120"/>
+                        </a:rPr>
+                        <a:t>22,500</a:t>
+                      </a:r>
+                      <a:endParaRPr lang="en-US" sz="1200" dirty="0">
+                        <a:latin typeface="Calibri" charset="0"/>
+                        <a:ea typeface="Calibri" charset="0"/>
+                        <a:cs typeface="Calibri" charset="0"/>
+                      </a:endParaRPr>
+                    </a:p>
+                  </a:txBody>
+                  <a:tcPr marL="73152" marR="73152" marT="73152" marB="73152" anchor="ctr">
+                    <a:lnL w="9525" cap="flat" cmpd="sng" algn="ctr">
+                      <a:solidFill>
+                        <a:srgbClr val="E1E0D9"/>
+                      </a:solidFill>
+                      <a:prstDash val="solid"/>
+                      <a:round/>
+                      <a:headEnd type="none" w="med" len="med"/>
+                      <a:tailEnd type="none" w="med" len="med"/>
+                    </a:lnL>
+                    <a:lnR w="9525" cap="flat" cmpd="sng" algn="ctr">
+                      <a:solidFill>
+                        <a:srgbClr val="E1E0D9"/>
+                      </a:solidFill>
+                      <a:prstDash val="solid"/>
+                      <a:round/>
+                      <a:headEnd type="none" w="med" len="med"/>
+                      <a:tailEnd type="none" w="med" len="med"/>
+                    </a:lnR>
+                    <a:lnT w="9525" cap="flat" cmpd="sng" algn="ctr">
+                      <a:solidFill>
+                        <a:srgbClr val="E1E0D9"/>
+                      </a:solidFill>
+                      <a:prstDash val="solid"/>
+                      <a:round/>
+                      <a:headEnd type="none" w="med" len="med"/>
+                      <a:tailEnd type="none" w="med" len="med"/>
+                    </a:lnT>
+                    <a:lnB w="9525" cap="flat" cmpd="sng" algn="ctr">
+                      <a:solidFill>
+                        <a:srgbClr val="E1E0D9"/>
+                      </a:solidFill>
+                      <a:prstDash val="solid"/>
+                      <a:round/>
+                      <a:headEnd type="none" w="med" len="med"/>
+                      <a:tailEnd type="none" w="med" len="med"/>
+                    </a:lnB>
+                  </a:tcPr>
+                </a:tc>
+                <a:tc>
+                  <a:txBody>
+                    <a:bodyPr/>
+                    <a:lstStyle/>
+                    <a:p>
+                      <a:pPr algn="r" indent="0" marL="0">
+                        <a:buNone/>
+                      </a:pPr>
+                      <a:r>
+                        <a:rPr lang="en-US" sz="1200" dirty="0">
+                          <a:solidFill>
+                            <a:srgbClr val="0B0B0B"/>
+                          </a:solidFill>
+                          <a:latin typeface="Calibri" pitchFamily="34" charset="0"/>
+                          <a:ea typeface="Calibri" pitchFamily="34" charset="-122"/>
+                          <a:cs typeface="Calibri" pitchFamily="34" charset="-120"/>
+                        </a:rPr>
+                        <a:t>1000</a:t>
+                      </a:r>
+                      <a:endParaRPr lang="en-US" sz="1200" dirty="0">
+                        <a:latin typeface="Calibri" charset="0"/>
+                        <a:ea typeface="Calibri" charset="0"/>
+                        <a:cs typeface="Calibri" charset="0"/>
+                      </a:endParaRPr>
+                    </a:p>
+                  </a:txBody>
+                  <a:tcPr marL="73152" marR="73152" marT="73152" marB="73152" anchor="ctr">
+                    <a:lnL w="9525" cap="flat" cmpd="sng" algn="ctr">
+                      <a:solidFill>
+                        <a:srgbClr val="E1E0D9"/>
+                      </a:solidFill>
+                      <a:prstDash val="solid"/>
+                      <a:round/>
+                      <a:headEnd type="none" w="med" len="med"/>
+                      <a:tailEnd type="none" w="med" len="med"/>
+                    </a:lnL>
+                    <a:lnR w="9525" cap="flat" cmpd="sng" algn="ctr">
+                      <a:solidFill>
+                        <a:srgbClr val="E1E0D9"/>
+                      </a:solidFill>
+                      <a:prstDash val="solid"/>
+                      <a:round/>
+                      <a:headEnd type="none" w="med" len="med"/>
+                      <a:tailEnd type="none" w="med" len="med"/>
+                    </a:lnR>
+                    <a:lnT w="9525" cap="flat" cmpd="sng" algn="ctr">
+                      <a:solidFill>
+                        <a:srgbClr val="E1E0D9"/>
+                      </a:solidFill>
+                      <a:prstDash val="solid"/>
+                      <a:round/>
+                      <a:headEnd type="none" w="med" len="med"/>
+                      <a:tailEnd type="none" w="med" len="med"/>
+                    </a:lnT>
+                    <a:lnB w="9525" cap="flat" cmpd="sng" algn="ctr">
+                      <a:solidFill>
+                        <a:srgbClr val="E1E0D9"/>
+                      </a:solidFill>
+                      <a:prstDash val="solid"/>
+                      <a:round/>
+                      <a:headEnd type="none" w="med" len="med"/>
+                      <a:tailEnd type="none" w="med" len="med"/>
+                    </a:lnB>
+                  </a:tcPr>
+                </a:tc>
+              </a:tr>
+              <a:tr h="384048">
+                <a:tc>
+                  <a:txBody>
+                    <a:bodyPr/>
+                    <a:lstStyle/>
+                    <a:p>
+                      <a:pPr algn="l" indent="0" marL="0">
+                        <a:buNone/>
+                      </a:pPr>
+                      <a:r>
+                        <a:rPr lang="en-US" sz="1200" dirty="0">
+                          <a:solidFill>
+                            <a:srgbClr val="0B0B0B"/>
+                          </a:solidFill>
+                          <a:latin typeface="Calibri" pitchFamily="34" charset="0"/>
+                          <a:ea typeface="Calibri" pitchFamily="34" charset="-122"/>
+                          <a:cs typeface="Calibri" pitchFamily="34" charset="-120"/>
+                        </a:rPr>
+                        <a:t>validation</a:t>
+                      </a:r>
+                      <a:endParaRPr lang="en-US" sz="1200" dirty="0">
+                        <a:latin typeface="Calibri" charset="0"/>
+                        <a:ea typeface="Calibri" charset="0"/>
+                        <a:cs typeface="Calibri" charset="0"/>
+                      </a:endParaRPr>
+                    </a:p>
+                  </a:txBody>
+                  <a:tcPr marL="73152" marR="73152" marT="73152" marB="73152" anchor="ctr">
+                    <a:lnL w="9525" cap="flat" cmpd="sng" algn="ctr">
+                      <a:solidFill>
+                        <a:srgbClr val="E1E0D9"/>
+                      </a:solidFill>
+                      <a:prstDash val="solid"/>
+                      <a:round/>
+                      <a:headEnd type="none" w="med" len="med"/>
+                      <a:tailEnd type="none" w="med" len="med"/>
+                    </a:lnL>
+                    <a:lnR w="9525" cap="flat" cmpd="sng" algn="ctr">
+                      <a:solidFill>
+                        <a:srgbClr val="E1E0D9"/>
+                      </a:solidFill>
+                      <a:prstDash val="solid"/>
+                      <a:round/>
+                      <a:headEnd type="none" w="med" len="med"/>
+                      <a:tailEnd type="none" w="med" len="med"/>
+                    </a:lnR>
+                    <a:lnT w="9525" cap="flat" cmpd="sng" algn="ctr">
+                      <a:solidFill>
+                        <a:srgbClr val="E1E0D9"/>
+                      </a:solidFill>
+                      <a:prstDash val="solid"/>
+                      <a:round/>
+                      <a:headEnd type="none" w="med" len="med"/>
+                      <a:tailEnd type="none" w="med" len="med"/>
+                    </a:lnT>
+                    <a:lnB w="9525" cap="flat" cmpd="sng" algn="ctr">
+                      <a:solidFill>
+                        <a:srgbClr val="E1E0D9"/>
+                      </a:solidFill>
+                      <a:prstDash val="solid"/>
+                      <a:round/>
+                      <a:headEnd type="none" w="med" len="med"/>
+                      <a:tailEnd type="none" w="med" len="med"/>
+                    </a:lnB>
+                  </a:tcPr>
+                </a:tc>
+                <a:tc>
+                  <a:txBody>
+                    <a:bodyPr/>
+                    <a:lstStyle/>
+                    <a:p>
+                      <a:pPr algn="r" indent="0" marL="0">
+                        <a:buNone/>
+                      </a:pPr>
+                      <a:r>
+                        <a:rPr lang="en-US" sz="1200" dirty="0">
+                          <a:solidFill>
+                            <a:srgbClr val="0B0B0B"/>
+                          </a:solidFill>
+                          <a:latin typeface="Calibri" pitchFamily="34" charset="0"/>
+                          <a:ea typeface="Calibri" pitchFamily="34" charset="-122"/>
+                          <a:cs typeface="Calibri" pitchFamily="34" charset="-120"/>
+                        </a:rPr>
+                        <a:t>500</a:t>
+                      </a:r>
+                      <a:endParaRPr lang="en-US" sz="1200" dirty="0">
+                        <a:latin typeface="Calibri" charset="0"/>
+                        <a:ea typeface="Calibri" charset="0"/>
+                        <a:cs typeface="Calibri" charset="0"/>
+                      </a:endParaRPr>
+                    </a:p>
+                  </a:txBody>
+                  <a:tcPr marL="73152" marR="73152" marT="73152" marB="73152" anchor="ctr">
+                    <a:lnL w="9525" cap="flat" cmpd="sng" algn="ctr">
+                      <a:solidFill>
+                        <a:srgbClr val="E1E0D9"/>
+                      </a:solidFill>
+                      <a:prstDash val="solid"/>
+                      <a:round/>
+                      <a:headEnd type="none" w="med" len="med"/>
+                      <a:tailEnd type="none" w="med" len="med"/>
+                    </a:lnL>
+                    <a:lnR w="9525" cap="flat" cmpd="sng" algn="ctr">
+                      <a:solidFill>
+                        <a:srgbClr val="E1E0D9"/>
+                      </a:solidFill>
+                      <a:prstDash val="solid"/>
+                      <a:round/>
+                      <a:headEnd type="none" w="med" len="med"/>
+                      <a:tailEnd type="none" w="med" len="med"/>
+                    </a:lnR>
+                    <a:lnT w="9525" cap="flat" cmpd="sng" algn="ctr">
+                      <a:solidFill>
+                        <a:srgbClr val="E1E0D9"/>
+                      </a:solidFill>
+                      <a:prstDash val="solid"/>
+                      <a:round/>
+                      <a:headEnd type="none" w="med" len="med"/>
+                      <a:tailEnd type="none" w="med" len="med"/>
+                    </a:lnT>
+                    <a:lnB w="9525" cap="flat" cmpd="sng" algn="ctr">
+                      <a:solidFill>
+                        <a:srgbClr val="E1E0D9"/>
+                      </a:solidFill>
+                      <a:prstDash val="solid"/>
+                      <a:round/>
+                      <a:headEnd type="none" w="med" len="med"/>
+                      <a:tailEnd type="none" w="med" len="med"/>
+                    </a:lnB>
+                  </a:tcPr>
+                </a:tc>
+                <a:tc>
+                  <a:txBody>
+                    <a:bodyPr/>
+                    <a:lstStyle/>
+                    <a:p>
+                      <a:pPr algn="r" indent="0" marL="0">
+                        <a:buNone/>
+                      </a:pPr>
+                      <a:r>
+                        <a:rPr lang="en-US" sz="1200" dirty="0">
+                          <a:solidFill>
+                            <a:srgbClr val="0B0B0B"/>
+                          </a:solidFill>
+                          <a:latin typeface="Calibri" pitchFamily="34" charset="0"/>
+                          <a:ea typeface="Calibri" pitchFamily="34" charset="-122"/>
+                          <a:cs typeface="Calibri" pitchFamily="34" charset="-120"/>
+                        </a:rPr>
+                        <a:t>2,242</a:t>
+                      </a:r>
+                      <a:endParaRPr lang="en-US" sz="1200" dirty="0">
+                        <a:latin typeface="Calibri" charset="0"/>
+                        <a:ea typeface="Calibri" charset="0"/>
+                        <a:cs typeface="Calibri" charset="0"/>
+                      </a:endParaRPr>
+                    </a:p>
+                  </a:txBody>
+                  <a:tcPr marL="73152" marR="73152" marT="73152" marB="73152" anchor="ctr">
+                    <a:lnL w="9525" cap="flat" cmpd="sng" algn="ctr">
+                      <a:solidFill>
+                        <a:srgbClr val="E1E0D9"/>
+                      </a:solidFill>
+                      <a:prstDash val="solid"/>
+                      <a:round/>
+                      <a:headEnd type="none" w="med" len="med"/>
+                      <a:tailEnd type="none" w="med" len="med"/>
+                    </a:lnL>
+                    <a:lnR w="9525" cap="flat" cmpd="sng" algn="ctr">
+                      <a:solidFill>
+                        <a:srgbClr val="E1E0D9"/>
+                      </a:solidFill>
+                      <a:prstDash val="solid"/>
+                      <a:round/>
+                      <a:headEnd type="none" w="med" len="med"/>
+                      <a:tailEnd type="none" w="med" len="med"/>
+                    </a:lnR>
+                    <a:lnT w="9525" cap="flat" cmpd="sng" algn="ctr">
+                      <a:solidFill>
+                        <a:srgbClr val="E1E0D9"/>
+                      </a:solidFill>
+                      <a:prstDash val="solid"/>
+                      <a:round/>
+                      <a:headEnd type="none" w="med" len="med"/>
+                      <a:tailEnd type="none" w="med" len="med"/>
+                    </a:lnT>
+                    <a:lnB w="9525" cap="flat" cmpd="sng" algn="ctr">
+                      <a:solidFill>
+                        <a:srgbClr val="E1E0D9"/>
+                      </a:solidFill>
+                      <a:prstDash val="solid"/>
+                      <a:round/>
+                      <a:headEnd type="none" w="med" len="med"/>
+                      <a:tailEnd type="none" w="med" len="med"/>
+                    </a:lnB>
+                  </a:tcPr>
+                </a:tc>
+                <a:tc>
+                  <a:txBody>
+                    <a:bodyPr/>
+                    <a:lstStyle/>
+                    <a:p>
+                      <a:pPr algn="r" indent="0" marL="0">
+                        <a:buNone/>
+                      </a:pPr>
+                      <a:r>
+                        <a:rPr lang="en-US" sz="1200" dirty="0">
+                          <a:solidFill>
+                            <a:srgbClr val="0B0B0B"/>
+                          </a:solidFill>
+                          <a:latin typeface="Calibri" pitchFamily="34" charset="0"/>
+                          <a:ea typeface="Calibri" pitchFamily="34" charset="-122"/>
+                          <a:cs typeface="Calibri" pitchFamily="34" charset="-120"/>
+                        </a:rPr>
+                        <a:t>2000</a:t>
+                      </a:r>
+                      <a:endParaRPr lang="en-US" sz="1200" dirty="0">
+                        <a:latin typeface="Calibri" charset="0"/>
+                        <a:ea typeface="Calibri" charset="0"/>
+                        <a:cs typeface="Calibri" charset="0"/>
+                      </a:endParaRPr>
+                    </a:p>
+                  </a:txBody>
+                  <a:tcPr marL="73152" marR="73152" marT="73152" marB="73152" anchor="ctr">
+                    <a:lnL w="9525" cap="flat" cmpd="sng" algn="ctr">
+                      <a:solidFill>
+                        <a:srgbClr val="E1E0D9"/>
+                      </a:solidFill>
+                      <a:prstDash val="solid"/>
+                      <a:round/>
+                      <a:headEnd type="none" w="med" len="med"/>
+                      <a:tailEnd type="none" w="med" len="med"/>
+                    </a:lnL>
+                    <a:lnR w="9525" cap="flat" cmpd="sng" algn="ctr">
+                      <a:solidFill>
+                        <a:srgbClr val="E1E0D9"/>
+                      </a:solidFill>
+                      <a:prstDash val="solid"/>
+                      <a:round/>
+                      <a:headEnd type="none" w="med" len="med"/>
+                      <a:tailEnd type="none" w="med" len="med"/>
+                    </a:lnR>
+                    <a:lnT w="9525" cap="flat" cmpd="sng" algn="ctr">
+                      <a:solidFill>
+                        <a:srgbClr val="E1E0D9"/>
+                      </a:solidFill>
+                      <a:prstDash val="solid"/>
+                      <a:round/>
+                      <a:headEnd type="none" w="med" len="med"/>
+                      <a:tailEnd type="none" w="med" len="med"/>
+                    </a:lnT>
+                    <a:lnB w="9525" cap="flat" cmpd="sng" algn="ctr">
+                      <a:solidFill>
+                        <a:srgbClr val="E1E0D9"/>
+                      </a:solidFill>
+                      <a:prstDash val="solid"/>
+                      <a:round/>
+                      <a:headEnd type="none" w="med" len="med"/>
+                      <a:tailEnd type="none" w="med" len="med"/>
+                    </a:lnB>
+                  </a:tcPr>
+                </a:tc>
+              </a:tr>
+              <a:tr h="384048">
+                <a:tc>
+                  <a:txBody>
+                    <a:bodyPr/>
+                    <a:lstStyle/>
+                    <a:p>
+                      <a:pPr algn="l" indent="0" marL="0">
+                        <a:buNone/>
+                      </a:pPr>
+                      <a:r>
+                        <a:rPr lang="en-US" sz="1200" dirty="0">
+                          <a:solidFill>
+                            <a:srgbClr val="0B0B0B"/>
+                          </a:solidFill>
+                          <a:latin typeface="Calibri" pitchFamily="34" charset="0"/>
+                          <a:ea typeface="Calibri" pitchFamily="34" charset="-122"/>
+                          <a:cs typeface="Calibri" pitchFamily="34" charset="-120"/>
+                        </a:rPr>
+                        <a:t>test</a:t>
+                      </a:r>
+                      <a:endParaRPr lang="en-US" sz="1200" dirty="0">
+                        <a:latin typeface="Calibri" charset="0"/>
+                        <a:ea typeface="Calibri" charset="0"/>
+                        <a:cs typeface="Calibri" charset="0"/>
+                      </a:endParaRPr>
+                    </a:p>
+                  </a:txBody>
+                  <a:tcPr marL="73152" marR="73152" marT="73152" marB="73152" anchor="ctr">
+                    <a:lnL w="9525" cap="flat" cmpd="sng" algn="ctr">
+                      <a:solidFill>
+                        <a:srgbClr val="E1E0D9"/>
+                      </a:solidFill>
+                      <a:prstDash val="solid"/>
+                      <a:round/>
+                      <a:headEnd type="none" w="med" len="med"/>
+                      <a:tailEnd type="none" w="med" len="med"/>
+                    </a:lnL>
+                    <a:lnR w="9525" cap="flat" cmpd="sng" algn="ctr">
+                      <a:solidFill>
+                        <a:srgbClr val="E1E0D9"/>
+                      </a:solidFill>
+                      <a:prstDash val="solid"/>
+                      <a:round/>
+                      <a:headEnd type="none" w="med" len="med"/>
+                      <a:tailEnd type="none" w="med" len="med"/>
+                    </a:lnR>
+                    <a:lnT w="9525" cap="flat" cmpd="sng" algn="ctr">
+                      <a:solidFill>
+                        <a:srgbClr val="E1E0D9"/>
+                      </a:solidFill>
+                      <a:prstDash val="solid"/>
+                      <a:round/>
+                      <a:headEnd type="none" w="med" len="med"/>
+                      <a:tailEnd type="none" w="med" len="med"/>
+                    </a:lnT>
+                    <a:lnB w="9525" cap="flat" cmpd="sng" algn="ctr">
+                      <a:solidFill>
+                        <a:srgbClr val="E1E0D9"/>
+                      </a:solidFill>
+                      <a:prstDash val="solid"/>
+                      <a:round/>
+                      <a:headEnd type="none" w="med" len="med"/>
+                      <a:tailEnd type="none" w="med" len="med"/>
+                    </a:lnB>
+                  </a:tcPr>
+                </a:tc>
+                <a:tc>
+                  <a:txBody>
+                    <a:bodyPr/>
+                    <a:lstStyle/>
+                    <a:p>
+                      <a:pPr algn="r" indent="0" marL="0">
+                        <a:buNone/>
+                      </a:pPr>
+                      <a:r>
+                        <a:rPr lang="en-US" sz="1200" dirty="0">
+                          <a:solidFill>
+                            <a:srgbClr val="0B0B0B"/>
+                          </a:solidFill>
+                          <a:latin typeface="Calibri" pitchFamily="34" charset="0"/>
+                          <a:ea typeface="Calibri" pitchFamily="34" charset="-122"/>
+                          <a:cs typeface="Calibri" pitchFamily="34" charset="-120"/>
+                        </a:rPr>
+                        <a:t>500</a:t>
+                      </a:r>
+                      <a:endParaRPr lang="en-US" sz="1200" dirty="0">
+                        <a:latin typeface="Calibri" charset="0"/>
+                        <a:ea typeface="Calibri" charset="0"/>
+                        <a:cs typeface="Calibri" charset="0"/>
+                      </a:endParaRPr>
+                    </a:p>
+                  </a:txBody>
+                  <a:tcPr marL="73152" marR="73152" marT="73152" marB="73152" anchor="ctr">
+                    <a:lnL w="9525" cap="flat" cmpd="sng" algn="ctr">
+                      <a:solidFill>
+                        <a:srgbClr val="E1E0D9"/>
+                      </a:solidFill>
+                      <a:prstDash val="solid"/>
+                      <a:round/>
+                      <a:headEnd type="none" w="med" len="med"/>
+                      <a:tailEnd type="none" w="med" len="med"/>
+                    </a:lnL>
+                    <a:lnR w="9525" cap="flat" cmpd="sng" algn="ctr">
+                      <a:solidFill>
+                        <a:srgbClr val="E1E0D9"/>
+                      </a:solidFill>
+                      <a:prstDash val="solid"/>
+                      <a:round/>
+                      <a:headEnd type="none" w="med" len="med"/>
+                      <a:tailEnd type="none" w="med" len="med"/>
+                    </a:lnR>
+                    <a:lnT w="9525" cap="flat" cmpd="sng" algn="ctr">
+                      <a:solidFill>
+                        <a:srgbClr val="E1E0D9"/>
+                      </a:solidFill>
+                      <a:prstDash val="solid"/>
+                      <a:round/>
+                      <a:headEnd type="none" w="med" len="med"/>
+                      <a:tailEnd type="none" w="med" len="med"/>
+                    </a:lnT>
+                    <a:lnB w="9525" cap="flat" cmpd="sng" algn="ctr">
+                      <a:solidFill>
+                        <a:srgbClr val="E1E0D9"/>
+                      </a:solidFill>
+                      <a:prstDash val="solid"/>
+                      <a:round/>
+                      <a:headEnd type="none" w="med" len="med"/>
+                      <a:tailEnd type="none" w="med" len="med"/>
+                    </a:lnB>
+                  </a:tcPr>
+                </a:tc>
+                <a:tc>
+                  <a:txBody>
+                    <a:bodyPr/>
+                    <a:lstStyle/>
+                    <a:p>
+                      <a:pPr algn="r" indent="0" marL="0">
+                        <a:buNone/>
+                      </a:pPr>
+                      <a:r>
+                        <a:rPr lang="en-US" sz="1200" dirty="0">
+                          <a:solidFill>
+                            <a:srgbClr val="0B0B0B"/>
+                          </a:solidFill>
+                          <a:latin typeface="Calibri" pitchFamily="34" charset="0"/>
+                          <a:ea typeface="Calibri" pitchFamily="34" charset="-122"/>
+                          <a:cs typeface="Calibri" pitchFamily="34" charset="-120"/>
+                        </a:rPr>
+                        <a:t>2,242</a:t>
+                      </a:r>
+                      <a:endParaRPr lang="en-US" sz="1200" dirty="0">
+                        <a:latin typeface="Calibri" charset="0"/>
+                        <a:ea typeface="Calibri" charset="0"/>
+                        <a:cs typeface="Calibri" charset="0"/>
+                      </a:endParaRPr>
+                    </a:p>
+                  </a:txBody>
+                  <a:tcPr marL="73152" marR="73152" marT="73152" marB="73152" anchor="ctr">
+                    <a:lnL w="9525" cap="flat" cmpd="sng" algn="ctr">
+                      <a:solidFill>
+                        <a:srgbClr val="E1E0D9"/>
+                      </a:solidFill>
+                      <a:prstDash val="solid"/>
+                      <a:round/>
+                      <a:headEnd type="none" w="med" len="med"/>
+                      <a:tailEnd type="none" w="med" len="med"/>
+                    </a:lnL>
+                    <a:lnR w="9525" cap="flat" cmpd="sng" algn="ctr">
+                      <a:solidFill>
+                        <a:srgbClr val="E1E0D9"/>
+                      </a:solidFill>
+                      <a:prstDash val="solid"/>
+                      <a:round/>
+                      <a:headEnd type="none" w="med" len="med"/>
+                      <a:tailEnd type="none" w="med" len="med"/>
+                    </a:lnR>
+                    <a:lnT w="9525" cap="flat" cmpd="sng" algn="ctr">
+                      <a:solidFill>
+                        <a:srgbClr val="E1E0D9"/>
+                      </a:solidFill>
+                      <a:prstDash val="solid"/>
+                      <a:round/>
+                      <a:headEnd type="none" w="med" len="med"/>
+                      <a:tailEnd type="none" w="med" len="med"/>
+                    </a:lnT>
+                    <a:lnB w="9525" cap="flat" cmpd="sng" algn="ctr">
+                      <a:solidFill>
+                        <a:srgbClr val="E1E0D9"/>
+                      </a:solidFill>
+                      <a:prstDash val="solid"/>
+                      <a:round/>
+                      <a:headEnd type="none" w="med" len="med"/>
+                      <a:tailEnd type="none" w="med" len="med"/>
+                    </a:lnB>
+                  </a:tcPr>
+                </a:tc>
+                <a:tc>
+                  <a:txBody>
+                    <a:bodyPr/>
+                    <a:lstStyle/>
+                    <a:p>
+                      <a:pPr algn="r" indent="0" marL="0">
+                        <a:buNone/>
+                      </a:pPr>
+                      <a:r>
+                        <a:rPr lang="en-US" sz="1200" dirty="0">
+                          <a:solidFill>
+                            <a:srgbClr val="0B0B0B"/>
+                          </a:solidFill>
+                          <a:latin typeface="Calibri" pitchFamily="34" charset="0"/>
+                          <a:ea typeface="Calibri" pitchFamily="34" charset="-122"/>
+                          <a:cs typeface="Calibri" pitchFamily="34" charset="-120"/>
+                        </a:rPr>
+                        <a:t>3000</a:t>
+                      </a:r>
+                      <a:endParaRPr lang="en-US" sz="1200" dirty="0">
+                        <a:latin typeface="Calibri" charset="0"/>
+                        <a:ea typeface="Calibri" charset="0"/>
+                        <a:cs typeface="Calibri" charset="0"/>
+                      </a:endParaRPr>
+                    </a:p>
+                  </a:txBody>
+                  <a:tcPr marL="73152" marR="73152" marT="73152" marB="73152" anchor="ctr">
+                    <a:lnL w="9525" cap="flat" cmpd="sng" algn="ctr">
+                      <a:solidFill>
+                        <a:srgbClr val="E1E0D9"/>
+                      </a:solidFill>
+                      <a:prstDash val="solid"/>
+                      <a:round/>
+                      <a:headEnd type="none" w="med" len="med"/>
+                      <a:tailEnd type="none" w="med" len="med"/>
+                    </a:lnL>
+                    <a:lnR w="9525" cap="flat" cmpd="sng" algn="ctr">
+                      <a:solidFill>
+                        <a:srgbClr val="E1E0D9"/>
+                      </a:solidFill>
+                      <a:prstDash val="solid"/>
+                      <a:round/>
+                      <a:headEnd type="none" w="med" len="med"/>
+                      <a:tailEnd type="none" w="med" len="med"/>
+                    </a:lnR>
+                    <a:lnT w="9525" cap="flat" cmpd="sng" algn="ctr">
+                      <a:solidFill>
+                        <a:srgbClr val="E1E0D9"/>
+                      </a:solidFill>
+                      <a:prstDash val="solid"/>
+                      <a:round/>
+                      <a:headEnd type="none" w="med" len="med"/>
+                      <a:tailEnd type="none" w="med" len="med"/>
+                    </a:lnT>
+                    <a:lnB w="9525" cap="flat" cmpd="sng" algn="ctr">
+                      <a:solidFill>
+                        <a:srgbClr val="E1E0D9"/>
+                      </a:solidFill>
+                      <a:prstDash val="solid"/>
+                      <a:round/>
+                      <a:headEnd type="none" w="med" len="med"/>
+                      <a:tailEnd type="none" w="med" len="med"/>
+                    </a:lnB>
+                  </a:tcPr>
+                </a:tc>
+              </a:tr>
+              <a:tr h="384048">
+                <a:tc>
+                  <a:txBody>
+                    <a:bodyPr/>
+                    <a:lstStyle/>
+                    <a:p>
+                      <a:pPr algn="l" indent="0" marL="0">
+                        <a:buNone/>
+                      </a:pPr>
+                      <a:r>
+                        <a:rPr lang="en-US" sz="1200" dirty="0">
+                          <a:solidFill>
+                            <a:srgbClr val="0B0B0B"/>
+                          </a:solidFill>
+                          <a:latin typeface="Calibri" pitchFamily="34" charset="0"/>
+                          <a:ea typeface="Calibri" pitchFamily="34" charset="-122"/>
+                          <a:cs typeface="Calibri" pitchFamily="34" charset="-120"/>
+                        </a:rPr>
+                        <a:t>benchmark</a:t>
+                      </a:r>
+                      <a:endParaRPr lang="en-US" sz="1200" dirty="0">
+                        <a:latin typeface="Calibri" charset="0"/>
+                        <a:ea typeface="Calibri" charset="0"/>
+                        <a:cs typeface="Calibri" charset="0"/>
+                      </a:endParaRPr>
+                    </a:p>
+                  </a:txBody>
+                  <a:tcPr marL="73152" marR="73152" marT="73152" marB="73152" anchor="ctr">
+                    <a:lnL w="9525" cap="flat" cmpd="sng" algn="ctr">
+                      <a:solidFill>
+                        <a:srgbClr val="E1E0D9"/>
+                      </a:solidFill>
+                      <a:prstDash val="solid"/>
+                      <a:round/>
+                      <a:headEnd type="none" w="med" len="med"/>
+                      <a:tailEnd type="none" w="med" len="med"/>
+                    </a:lnL>
+                    <a:lnR w="9525" cap="flat" cmpd="sng" algn="ctr">
+                      <a:solidFill>
+                        <a:srgbClr val="E1E0D9"/>
+                      </a:solidFill>
+                      <a:prstDash val="solid"/>
+                      <a:round/>
+                      <a:headEnd type="none" w="med" len="med"/>
+                      <a:tailEnd type="none" w="med" len="med"/>
+                    </a:lnR>
+                    <a:lnT w="9525" cap="flat" cmpd="sng" algn="ctr">
+                      <a:solidFill>
+                        <a:srgbClr val="E1E0D9"/>
+                      </a:solidFill>
+                      <a:prstDash val="solid"/>
+                      <a:round/>
+                      <a:headEnd type="none" w="med" len="med"/>
+                      <a:tailEnd type="none" w="med" len="med"/>
+                    </a:lnT>
+                    <a:lnB w="9525" cap="flat" cmpd="sng" algn="ctr">
+                      <a:solidFill>
+                        <a:srgbClr val="E1E0D9"/>
+                      </a:solidFill>
+                      <a:prstDash val="solid"/>
+                      <a:round/>
+                      <a:headEnd type="none" w="med" len="med"/>
+                      <a:tailEnd type="none" w="med" len="med"/>
+                    </a:lnB>
+                  </a:tcPr>
+                </a:tc>
+                <a:tc>
+                  <a:txBody>
+                    <a:bodyPr/>
+                    <a:lstStyle/>
+                    <a:p>
+                      <a:pPr algn="r" indent="0" marL="0">
+                        <a:buNone/>
+                      </a:pPr>
+                      <a:r>
+                        <a:rPr lang="en-US" sz="1200" dirty="0">
+                          <a:solidFill>
+                            <a:srgbClr val="0B0B0B"/>
+                          </a:solidFill>
+                          <a:latin typeface="Calibri" pitchFamily="34" charset="0"/>
+                          <a:ea typeface="Calibri" pitchFamily="34" charset="-122"/>
+                          <a:cs typeface="Calibri" pitchFamily="34" charset="-120"/>
+                        </a:rPr>
+                        <a:t>1,000</a:t>
+                      </a:r>
+                      <a:endParaRPr lang="en-US" sz="1200" dirty="0">
+                        <a:latin typeface="Calibri" charset="0"/>
+                        <a:ea typeface="Calibri" charset="0"/>
+                        <a:cs typeface="Calibri" charset="0"/>
+                      </a:endParaRPr>
+                    </a:p>
+                  </a:txBody>
+                  <a:tcPr marL="73152" marR="73152" marT="73152" marB="73152" anchor="ctr">
+                    <a:lnL w="9525" cap="flat" cmpd="sng" algn="ctr">
+                      <a:solidFill>
+                        <a:srgbClr val="E1E0D9"/>
+                      </a:solidFill>
+                      <a:prstDash val="solid"/>
+                      <a:round/>
+                      <a:headEnd type="none" w="med" len="med"/>
+                      <a:tailEnd type="none" w="med" len="med"/>
+                    </a:lnL>
+                    <a:lnR w="9525" cap="flat" cmpd="sng" algn="ctr">
+                      <a:solidFill>
+                        <a:srgbClr val="E1E0D9"/>
+                      </a:solidFill>
+                      <a:prstDash val="solid"/>
+                      <a:round/>
+                      <a:headEnd type="none" w="med" len="med"/>
+                      <a:tailEnd type="none" w="med" len="med"/>
+                    </a:lnR>
+                    <a:lnT w="9525" cap="flat" cmpd="sng" algn="ctr">
+                      <a:solidFill>
+                        <a:srgbClr val="E1E0D9"/>
+                      </a:solidFill>
+                      <a:prstDash val="solid"/>
+                      <a:round/>
+                      <a:headEnd type="none" w="med" len="med"/>
+                      <a:tailEnd type="none" w="med" len="med"/>
+                    </a:lnT>
+                    <a:lnB w="9525" cap="flat" cmpd="sng" algn="ctr">
+                      <a:solidFill>
+                        <a:srgbClr val="E1E0D9"/>
+                      </a:solidFill>
+                      <a:prstDash val="solid"/>
+                      <a:round/>
+                      <a:headEnd type="none" w="med" len="med"/>
+                      <a:tailEnd type="none" w="med" len="med"/>
+                    </a:lnB>
+                  </a:tcPr>
+                </a:tc>
+                <a:tc>
+                  <a:txBody>
+                    <a:bodyPr/>
+                    <a:lstStyle/>
+                    <a:p>
+                      <a:pPr algn="r" indent="0" marL="0">
+                        <a:buNone/>
+                      </a:pPr>
+                      <a:r>
+                        <a:rPr lang="en-US" sz="1200" dirty="0">
+                          <a:solidFill>
+                            <a:srgbClr val="0B0B0B"/>
+                          </a:solidFill>
+                          <a:latin typeface="Calibri" pitchFamily="34" charset="0"/>
+                          <a:ea typeface="Calibri" pitchFamily="34" charset="-122"/>
+                          <a:cs typeface="Calibri" pitchFamily="34" charset="-120"/>
+                        </a:rPr>
+                        <a:t>4,500</a:t>
+                      </a:r>
+                      <a:endParaRPr lang="en-US" sz="1200" dirty="0">
+                        <a:latin typeface="Calibri" charset="0"/>
+                        <a:ea typeface="Calibri" charset="0"/>
+                        <a:cs typeface="Calibri" charset="0"/>
+                      </a:endParaRPr>
+                    </a:p>
+                  </a:txBody>
+                  <a:tcPr marL="73152" marR="73152" marT="73152" marB="73152" anchor="ctr">
+                    <a:lnL w="9525" cap="flat" cmpd="sng" algn="ctr">
+                      <a:solidFill>
+                        <a:srgbClr val="E1E0D9"/>
+                      </a:solidFill>
+                      <a:prstDash val="solid"/>
+                      <a:round/>
+                      <a:headEnd type="none" w="med" len="med"/>
+                      <a:tailEnd type="none" w="med" len="med"/>
+                    </a:lnL>
+                    <a:lnR w="9525" cap="flat" cmpd="sng" algn="ctr">
+                      <a:solidFill>
+                        <a:srgbClr val="E1E0D9"/>
+                      </a:solidFill>
+                      <a:prstDash val="solid"/>
+                      <a:round/>
+                      <a:headEnd type="none" w="med" len="med"/>
+                      <a:tailEnd type="none" w="med" len="med"/>
+                    </a:lnR>
+                    <a:lnT w="9525" cap="flat" cmpd="sng" algn="ctr">
+                      <a:solidFill>
+                        <a:srgbClr val="E1E0D9"/>
+                      </a:solidFill>
+                      <a:prstDash val="solid"/>
+                      <a:round/>
+                      <a:headEnd type="none" w="med" len="med"/>
+                      <a:tailEnd type="none" w="med" len="med"/>
+                    </a:lnT>
+                    <a:lnB w="9525" cap="flat" cmpd="sng" algn="ctr">
+                      <a:solidFill>
+                        <a:srgbClr val="E1E0D9"/>
+                      </a:solidFill>
+                      <a:prstDash val="solid"/>
+                      <a:round/>
+                      <a:headEnd type="none" w="med" len="med"/>
+                      <a:tailEnd type="none" w="med" len="med"/>
+                    </a:lnB>
+                  </a:tcPr>
+                </a:tc>
+                <a:tc>
+                  <a:txBody>
+                    <a:bodyPr/>
+                    <a:lstStyle/>
+                    <a:p>
+                      <a:pPr algn="r" indent="0" marL="0">
+                        <a:buNone/>
+                      </a:pPr>
+                      <a:r>
+                        <a:rPr lang="en-US" sz="1200" dirty="0">
+                          <a:solidFill>
+                            <a:srgbClr val="0B0B0B"/>
+                          </a:solidFill>
+                          <a:latin typeface="Calibri" pitchFamily="34" charset="0"/>
+                          <a:ea typeface="Calibri" pitchFamily="34" charset="-122"/>
+                          <a:cs typeface="Calibri" pitchFamily="34" charset="-120"/>
+                        </a:rPr>
+                        <a:t>42</a:t>
+                      </a:r>
+                      <a:endParaRPr lang="en-US" sz="1200" dirty="0">
+                        <a:latin typeface="Calibri" charset="0"/>
+                        <a:ea typeface="Calibri" charset="0"/>
+                        <a:cs typeface="Calibri" charset="0"/>
+                      </a:endParaRPr>
+                    </a:p>
+                  </a:txBody>
+                  <a:tcPr marL="73152" marR="73152" marT="73152" marB="73152" anchor="ctr">
+                    <a:lnL w="9525" cap="flat" cmpd="sng" algn="ctr">
+                      <a:solidFill>
+                        <a:srgbClr val="E1E0D9"/>
+                      </a:solidFill>
+                      <a:prstDash val="solid"/>
+                      <a:round/>
+                      <a:headEnd type="none" w="med" len="med"/>
+                      <a:tailEnd type="none" w="med" len="med"/>
+                    </a:lnL>
+                    <a:lnR w="9525" cap="flat" cmpd="sng" algn="ctr">
+                      <a:solidFill>
+                        <a:srgbClr val="E1E0D9"/>
+                      </a:solidFill>
+                      <a:prstDash val="solid"/>
+                      <a:round/>
+                      <a:headEnd type="none" w="med" len="med"/>
+                      <a:tailEnd type="none" w="med" len="med"/>
+                    </a:lnR>
+                    <a:lnT w="9525" cap="flat" cmpd="sng" algn="ctr">
+                      <a:solidFill>
+                        <a:srgbClr val="E1E0D9"/>
+                      </a:solidFill>
+                      <a:prstDash val="solid"/>
+                      <a:round/>
+                      <a:headEnd type="none" w="med" len="med"/>
+                      <a:tailEnd type="none" w="med" len="med"/>
+                    </a:lnT>
+                    <a:lnB w="9525" cap="flat" cmpd="sng" algn="ctr">
+                      <a:solidFill>
+                        <a:srgbClr val="E1E0D9"/>
+                      </a:solidFill>
+                      <a:prstDash val="solid"/>
+                      <a:round/>
+                      <a:headEnd type="none" w="med" len="med"/>
+                      <a:tailEnd type="none" w="med" len="med"/>
+                    </a:lnB>
+                  </a:tcPr>
+                </a:tc>
+              </a:tr>
+              <a:tr h="384048">
+                <a:tc>
+                  <a:txBody>
+                    <a:bodyPr/>
+                    <a:lstStyle/>
+                    <a:p>
+                      <a:pPr algn="l" indent="0" marL="0">
+                        <a:buNone/>
+                      </a:pPr>
+                      <a:r>
+                        <a:rPr lang="en-US" sz="1200" b="1" dirty="0">
+                          <a:solidFill>
+                            <a:srgbClr val="0B0B0B"/>
+                          </a:solidFill>
+                          <a:latin typeface="Calibri" pitchFamily="34" charset="0"/>
+                          <a:ea typeface="Calibri" pitchFamily="34" charset="-122"/>
+                          <a:cs typeface="Calibri" pitchFamily="34" charset="-120"/>
+                        </a:rPr>
+                        <a:t>total</a:t>
+                      </a:r>
+                      <a:endParaRPr lang="en-US" sz="1200" dirty="0">
+                        <a:latin typeface="Calibri" charset="0"/>
+                        <a:ea typeface="Calibri" charset="0"/>
+                        <a:cs typeface="Calibri" charset="0"/>
+                      </a:endParaRPr>
+                    </a:p>
+                  </a:txBody>
+                  <a:tcPr marL="73152" marR="73152" marT="73152" marB="73152" anchor="ctr">
+                    <a:lnL w="9525" cap="flat" cmpd="sng" algn="ctr">
+                      <a:solidFill>
+                        <a:srgbClr val="E1E0D9"/>
+                      </a:solidFill>
+                      <a:prstDash val="solid"/>
+                      <a:round/>
+                      <a:headEnd type="none" w="med" len="med"/>
+                      <a:tailEnd type="none" w="med" len="med"/>
+                    </a:lnL>
+                    <a:lnR w="9525" cap="flat" cmpd="sng" algn="ctr">
+                      <a:solidFill>
+                        <a:srgbClr val="E1E0D9"/>
+                      </a:solidFill>
+                      <a:prstDash val="solid"/>
+                      <a:round/>
+                      <a:headEnd type="none" w="med" len="med"/>
+                      <a:tailEnd type="none" w="med" len="med"/>
+                    </a:lnR>
+                    <a:lnT w="9525" cap="flat" cmpd="sng" algn="ctr">
+                      <a:solidFill>
+                        <a:srgbClr val="E1E0D9"/>
+                      </a:solidFill>
+                      <a:prstDash val="solid"/>
+                      <a:round/>
+                      <a:headEnd type="none" w="med" len="med"/>
+                      <a:tailEnd type="none" w="med" len="med"/>
+                    </a:lnT>
+                    <a:lnB w="9525" cap="flat" cmpd="sng" algn="ctr">
+                      <a:solidFill>
+                        <a:srgbClr val="E1E0D9"/>
+                      </a:solidFill>
+                      <a:prstDash val="solid"/>
+                      <a:round/>
+                      <a:headEnd type="none" w="med" len="med"/>
+                      <a:tailEnd type="none" w="med" len="med"/>
+                    </a:lnB>
+                  </a:tcPr>
+                </a:tc>
+                <a:tc>
+                  <a:txBody>
+                    <a:bodyPr/>
+                    <a:lstStyle/>
+                    <a:p>
+                      <a:pPr algn="r" indent="0" marL="0">
+                        <a:buNone/>
+                      </a:pPr>
+                      <a:r>
+                        <a:rPr lang="en-US" sz="1200" b="1" dirty="0">
+                          <a:solidFill>
+                            <a:srgbClr val="0B0B0B"/>
+                          </a:solidFill>
+                          <a:latin typeface="Calibri" pitchFamily="34" charset="0"/>
+                          <a:ea typeface="Calibri" pitchFamily="34" charset="-122"/>
+                          <a:cs typeface="Calibri" pitchFamily="34" charset="-120"/>
+                        </a:rPr>
+                        <a:t>7,000</a:t>
+                      </a:r>
+                      <a:endParaRPr lang="en-US" sz="1200" dirty="0">
+                        <a:latin typeface="Calibri" charset="0"/>
+                        <a:ea typeface="Calibri" charset="0"/>
+                        <a:cs typeface="Calibri" charset="0"/>
+                      </a:endParaRPr>
+                    </a:p>
+                  </a:txBody>
+                  <a:tcPr marL="73152" marR="73152" marT="73152" marB="73152" anchor="ctr">
+                    <a:lnL w="9525" cap="flat" cmpd="sng" algn="ctr">
+                      <a:solidFill>
+                        <a:srgbClr val="E1E0D9"/>
+                      </a:solidFill>
+                      <a:prstDash val="solid"/>
+                      <a:round/>
+                      <a:headEnd type="none" w="med" len="med"/>
+                      <a:tailEnd type="none" w="med" len="med"/>
+                    </a:lnL>
+                    <a:lnR w="9525" cap="flat" cmpd="sng" algn="ctr">
+                      <a:solidFill>
+                        <a:srgbClr val="E1E0D9"/>
+                      </a:solidFill>
+                      <a:prstDash val="solid"/>
+                      <a:round/>
+                      <a:headEnd type="none" w="med" len="med"/>
+                      <a:tailEnd type="none" w="med" len="med"/>
+                    </a:lnR>
+                    <a:lnT w="9525" cap="flat" cmpd="sng" algn="ctr">
+                      <a:solidFill>
+                        <a:srgbClr val="E1E0D9"/>
+                      </a:solidFill>
+                      <a:prstDash val="solid"/>
+                      <a:round/>
+                      <a:headEnd type="none" w="med" len="med"/>
+                      <a:tailEnd type="none" w="med" len="med"/>
+                    </a:lnT>
+                    <a:lnB w="9525" cap="flat" cmpd="sng" algn="ctr">
+                      <a:solidFill>
+                        <a:srgbClr val="E1E0D9"/>
+                      </a:solidFill>
+                      <a:prstDash val="solid"/>
+                      <a:round/>
+                      <a:headEnd type="none" w="med" len="med"/>
+                      <a:tailEnd type="none" w="med" len="med"/>
+                    </a:lnB>
+                  </a:tcPr>
+                </a:tc>
+                <a:tc>
+                  <a:txBody>
+                    <a:bodyPr/>
+                    <a:lstStyle/>
+                    <a:p>
+                      <a:pPr algn="r" indent="0" marL="0">
+                        <a:buNone/>
+                      </a:pPr>
+                      <a:r>
+                        <a:rPr lang="en-US" sz="1200" b="1" dirty="0">
+                          <a:solidFill>
+                            <a:srgbClr val="0B0B0B"/>
+                          </a:solidFill>
+                          <a:latin typeface="Calibri" pitchFamily="34" charset="0"/>
+                          <a:ea typeface="Calibri" pitchFamily="34" charset="-122"/>
+                          <a:cs typeface="Calibri" pitchFamily="34" charset="-120"/>
+                        </a:rPr>
+                        <a:t>31,484</a:t>
+                      </a:r>
+                      <a:endParaRPr lang="en-US" sz="1200" dirty="0">
+                        <a:latin typeface="Calibri" charset="0"/>
+                        <a:ea typeface="Calibri" charset="0"/>
+                        <a:cs typeface="Calibri" charset="0"/>
+                      </a:endParaRPr>
+                    </a:p>
+                  </a:txBody>
+                  <a:tcPr marL="73152" marR="73152" marT="73152" marB="73152" anchor="ctr">
+                    <a:lnL w="9525" cap="flat" cmpd="sng" algn="ctr">
+                      <a:solidFill>
+                        <a:srgbClr val="E1E0D9"/>
+                      </a:solidFill>
+                      <a:prstDash val="solid"/>
+                      <a:round/>
+                      <a:headEnd type="none" w="med" len="med"/>
+                      <a:tailEnd type="none" w="med" len="med"/>
+                    </a:lnL>
+                    <a:lnR w="9525" cap="flat" cmpd="sng" algn="ctr">
+                      <a:solidFill>
+                        <a:srgbClr val="E1E0D9"/>
+                      </a:solidFill>
+                      <a:prstDash val="solid"/>
+                      <a:round/>
+                      <a:headEnd type="none" w="med" len="med"/>
+                      <a:tailEnd type="none" w="med" len="med"/>
+                    </a:lnR>
+                    <a:lnT w="9525" cap="flat" cmpd="sng" algn="ctr">
+                      <a:solidFill>
+                        <a:srgbClr val="E1E0D9"/>
+                      </a:solidFill>
+                      <a:prstDash val="solid"/>
+                      <a:round/>
+                      <a:headEnd type="none" w="med" len="med"/>
+                      <a:tailEnd type="none" w="med" len="med"/>
+                    </a:lnT>
+                    <a:lnB w="9525" cap="flat" cmpd="sng" algn="ctr">
+                      <a:solidFill>
+                        <a:srgbClr val="E1E0D9"/>
+                      </a:solidFill>
+                      <a:prstDash val="solid"/>
+                      <a:round/>
+                      <a:headEnd type="none" w="med" len="med"/>
+                      <a:tailEnd type="none" w="med" len="med"/>
+                    </a:lnB>
+                  </a:tcPr>
+                </a:tc>
+                <a:tc>
+                  <a:txBody>
+                    <a:bodyPr/>
+                    <a:lstStyle/>
+                    <a:p>
+                      <a:pPr algn="r" indent="0" marL="0">
+                        <a:buNone/>
+                      </a:pPr>
+                      <a:endParaRPr lang="en-US" sz="1200" dirty="0">
+                        <a:latin typeface="Calibri" charset="0"/>
+                        <a:ea typeface="Calibri" charset="0"/>
+                        <a:cs typeface="Calibri" charset="0"/>
+                      </a:endParaRPr>
+                    </a:p>
+                  </a:txBody>
+                  <a:tcPr marL="73152" marR="73152" marT="73152" marB="73152" anchor="ctr">
+                    <a:lnL w="9525" cap="flat" cmpd="sng" algn="ctr">
+                      <a:solidFill>
+                        <a:srgbClr val="E1E0D9"/>
+                      </a:solidFill>
+                      <a:prstDash val="solid"/>
+                      <a:round/>
+                      <a:headEnd type="none" w="med" len="med"/>
+                      <a:tailEnd type="none" w="med" len="med"/>
+                    </a:lnL>
+                    <a:lnR w="9525" cap="flat" cmpd="sng" algn="ctr">
+                      <a:solidFill>
+                        <a:srgbClr val="E1E0D9"/>
+                      </a:solidFill>
+                      <a:prstDash val="solid"/>
+                      <a:round/>
+                      <a:headEnd type="none" w="med" len="med"/>
+                      <a:tailEnd type="none" w="med" len="med"/>
+                    </a:lnR>
+                    <a:lnT w="9525" cap="flat" cmpd="sng" algn="ctr">
+                      <a:solidFill>
+                        <a:srgbClr val="E1E0D9"/>
+                      </a:solidFill>
+                      <a:prstDash val="solid"/>
+                      <a:round/>
+                      <a:headEnd type="none" w="med" len="med"/>
+                      <a:tailEnd type="none" w="med" len="med"/>
+                    </a:lnT>
+                    <a:lnB w="9525" cap="flat" cmpd="sng" algn="ctr">
+                      <a:solidFill>
+                        <a:srgbClr val="E1E0D9"/>
+                      </a:solidFill>
+                      <a:prstDash val="solid"/>
+                      <a:round/>
+                      <a:headEnd type="none" w="med" len="med"/>
+                      <a:tailEnd type="none" w="med" len="med"/>
+                    </a:lnB>
+                  </a:tcPr>
+                </a:tc>
+              </a:tr>
+            </a:tbl>
+          </a:graphicData>
+        </a:graphic>
+      </p:graphicFrame>
+      <p:sp>
+        <p:nvSpPr>
+          <p:cNvPr id="4" name="release facts"/>
           <p:cNvSpPr txBox="1"/>
           <p:nvPr/>
         </p:nvSpPr>
         <p:spPr>
           <a:xfrm>
-            <a:off x="548640" y="6016752"/>
-            <a:ext cx="11091672" cy="457200"/>
+            <a:off x="548640" y="3977640"/>
+            <a:ext cx="5120640" cy="2148840"/>
           </a:xfrm>
           <a:prstGeom prst="rect">
             <a:avLst/>
@@ -10622,21 +15426,111 @@
           <a:bodyPr wrap="square" lIns="0" tIns="0" rIns="0" bIns="0" rtlCol="0" anchor="t"/>
           <a:lstStyle/>
           <a:p>
-            <a:pPr indent="0" marL="0">
-              <a:buNone/>
-            </a:pPr>
-            <a:r>
-              <a:rPr lang="en-US" sz="1100" dirty="0">
-                <a:solidFill>
-                  <a:srgbClr val="52514E"/>
+            <a:pPr marL="342900" indent="-342900">
+              <a:spcAft>
+                <a:spcPts val="600"/>
+              </a:spcAft>
+              <a:buSzPct val="100000"/>
+              <a:buChar char="•"/>
+            </a:pPr>
+            <a:r>
+              <a:rPr lang="en-US" sz="1300" dirty="0">
+                <a:solidFill>
+                  <a:schemeClr val="tx1"/>
                 </a:solidFill>
               </a:rPr>
-              <a:t>buildingSMART Duplex Apartment, MEP and Plumbing discipline models parsed with IfcOpenShell (427 and 231 segments): sizes, parallel-run counts, elevation spread and clear gaps measured. Gaps are irregular, not modular (median 108 mm, quartiles 24–238). The two real discipline models of the same building are 50 mm apart; a fixed modular gap would be 139 mm away.</a:t>
-            </a:r>
-            <a:endParaRPr lang="en-US" sz="1100" dirty="0"/>
+              <a:t>Tiers assigned round-robin: 625 per tier in train, 125 in the benchmark</a:t>
+            </a:r>
+            <a:endParaRPr lang="en-US" sz="1300" dirty="0"/>
+          </a:p>
+          <a:p>
+            <a:pPr marL="342900" indent="-342900">
+              <a:spcAft>
+                <a:spcPts val="600"/>
+              </a:spcAft>
+              <a:buSzPct val="100000"/>
+              <a:buChar char="•"/>
+            </a:pPr>
+            <a:r>
+              <a:rPr lang="en-US" sz="1300" dirty="0">
+                <a:solidFill>
+                  <a:schemeClr val="tx1"/>
+                </a:solidFill>
+              </a:rPr>
+              <a:t>Four in five contexts hang from a ceiling, one in five from a wall</a:t>
+            </a:r>
+            <a:endParaRPr lang="en-US" sz="1300" dirty="0"/>
+          </a:p>
+          <a:p>
+            <a:pPr marL="342900" indent="-342900">
+              <a:spcAft>
+                <a:spcPts val="600"/>
+              </a:spcAft>
+              <a:buSzPct val="100000"/>
+              <a:buChar char="•"/>
+            </a:pPr>
+            <a:r>
+              <a:rPr lang="en-US" sz="1300" dirty="0">
+                <a:solidFill>
+                  <a:schemeClr val="tx1"/>
+                </a:solidFill>
+              </a:rPr>
+              <a:t>Six trades: electrical 11,592, domestic water 5,889, heating 5,766, chilled water 4,129, sprinkler 2,200, ventilation 1,908 elements</a:t>
+            </a:r>
+            <a:endParaRPr lang="en-US" sz="1300" dirty="0"/>
+          </a:p>
+          <a:p>
+            <a:pPr marL="342900" indent="-342900">
+              <a:spcAft>
+                <a:spcPts val="600"/>
+              </a:spcAft>
+              <a:buSzPct val="100000"/>
+              <a:buChar char="•"/>
+            </a:pPr>
+            <a:r>
+              <a:rPr lang="en-US" sz="1300" dirty="0">
+                <a:solidFill>
+                  <a:schemeClr val="tx1"/>
+                </a:solidFill>
+              </a:rPr>
+              <a:t>Plain JSON, with a JSON Schema, Croissant metadata and a datasheet</a:t>
+            </a:r>
+            <a:endParaRPr lang="en-US" sz="1300" dirty="0"/>
           </a:p>
         </p:txBody>
       </p:sp>
+      <p:graphicFrame>
+        <p:nvGraphicFramePr>
+          <p:cNvPr id="5" name="kinds chart" descr=""/>
+          <p:cNvGraphicFramePr/>
+          <p:nvPr/>
+        </p:nvGraphicFramePr>
+        <p:xfrm>
+          <a:off x="5989320" y="1371600"/>
+          <a:ext cx="5650992" cy="2240280"/>
+        </p:xfrm>
+        <a:graphic xmlns:a="http://schemas.openxmlformats.org/drawingml/2006/main">
+          <a:graphicData uri="http://schemas.openxmlformats.org/drawingml/2006/chart">
+            <c:chart xmlns:c="http://schemas.openxmlformats.org/drawingml/2006/chart" r:id="rId1"/>
+          </a:graphicData>
+        </a:graphic>
+      </p:graphicFrame>
+      <p:graphicFrame>
+        <p:nvGraphicFramePr>
+          <p:cNvPr id="6" name="dn chart" descr=""/>
+          <p:cNvGraphicFramePr/>
+          <p:nvPr/>
+        </p:nvGraphicFramePr>
+        <p:xfrm>
+          <a:off x="5989320" y="3749040"/>
+          <a:ext cx="5650992" cy="2377440"/>
+        </p:xfrm>
+        <a:graphic xmlns:a="http://schemas.openxmlformats.org/drawingml/2006/main">
+          <a:graphicData uri="http://schemas.openxmlformats.org/drawingml/2006/chart">
+            <c:chart xmlns:c="http://schemas.openxmlformats.org/drawingml/2006/chart" r:id="rId2"/>
+          </a:graphicData>
+        </a:graphic>
+      </p:graphicFrame>
       <p:sp>
         <p:nvSpPr>
           <p:cNvPr id="25" name="Slide Number Placeholder 0"/>
@@ -10739,7 +15633,7 @@
                   <a:schemeClr val="tx1"/>
                 </a:solidFill>
               </a:rPr>
-              <a:t>What we found preparing the public release — and fixed</a:t>
+              <a:t>Eight difficulty tiers: tier Cn holds exactly n elements</a:t>
             </a:r>
             <a:endParaRPr lang="en-US" sz="2600" dirty="0"/>
           </a:p>
@@ -10747,7 +15641,7 @@
       </p:sp>
       <p:pic>
         <p:nvPicPr>
-          <p:cNvPr id="3" name="v3 vs v4" descr="/home/user/crossmep_dataset/docs/figures/05_v3_vs_v4.png">    </p:cNvPr>
+          <p:cNvPr id="3" name="tier gallery" descr="/home/user/crossmep_dataset/docs/figures/02_tier_gallery.png">    </p:cNvPr>
           <p:cNvPicPr>
             <a:picLocks noChangeAspect="1"/>
           </p:cNvPicPr>
@@ -10761,8 +15655,8 @@
         </p:blipFill>
         <p:spPr>
           <a:xfrm>
-            <a:off x="1285993" y="1280160"/>
-            <a:ext cx="9616966" cy="2788920"/>
+            <a:off x="1244890" y="1280160"/>
+            <a:ext cx="9699171" cy="4526280"/>
           </a:xfrm>
           <a:prstGeom prst="rect">
             <a:avLst/>
@@ -10771,72 +15665,14 @@
       </p:pic>
       <p:sp>
         <p:nvSpPr>
-          <p:cNvPr id="4" name="card 3.0"/>
-          <p:cNvSpPr/>
-          <p:nvPr/>
-        </p:nvSpPr>
-        <p:spPr>
-          <a:xfrm>
-            <a:off x="548640" y="4206240"/>
-            <a:ext cx="5440680" cy="1874520"/>
-          </a:xfrm>
-          <a:prstGeom prst="roundRect">
-            <a:avLst>
-              <a:gd name="adj" fmla="val 3415"/>
-            </a:avLst>
-          </a:prstGeom>
-          <a:solidFill>
-            <a:schemeClr val="bg2"/>
-          </a:solidFill>
-          <a:ln/>
-        </p:spPr>
-      </p:sp>
-      <p:sp>
-        <p:nvSpPr>
-          <p:cNvPr id="5" name="head 3.0"/>
+          <p:cNvPr id="4" name="gallery caption"/>
           <p:cNvSpPr txBox="1"/>
           <p:nvPr/>
         </p:nvSpPr>
         <p:spPr>
           <a:xfrm>
-            <a:off x="777240" y="4297680"/>
-            <a:ext cx="4983480" cy="320040"/>
-          </a:xfrm>
-          <a:prstGeom prst="rect">
-            <a:avLst/>
-          </a:prstGeom>
-          <a:noFill/>
-          <a:ln/>
-        </p:spPr>
-        <p:txBody>
-          <a:bodyPr wrap="square" lIns="0" tIns="0" rIns="0" bIns="0" rtlCol="0" anchor="ctr"/>
-          <a:lstStyle/>
-          <a:p>
-            <a:pPr indent="0" marL="0">
-              <a:buNone/>
-            </a:pPr>
-            <a:r>
-              <a:rPr lang="en-US" sz="1400" b="1" dirty="0">
-                <a:solidFill>
-                  <a:schemeClr val="tx1"/>
-                </a:solidFill>
-              </a:rPr>
-              <a:t>Revision 3.0 — the paper’s files</a:t>
-            </a:r>
-            <a:endParaRPr lang="en-US" sz="1400" dirty="0"/>
-          </a:p>
-        </p:txBody>
-      </p:sp>
-      <p:sp>
-        <p:nvSpPr>
-          <p:cNvPr id="6" name="bullets 3.0"/>
-          <p:cNvSpPr txBox="1"/>
-          <p:nvPr/>
-        </p:nvSpPr>
-        <p:spPr>
-          <a:xfrm>
-            <a:off x="777240" y="4663440"/>
-            <a:ext cx="4983480" cy="1325880"/>
+            <a:off x="548640" y="5897880"/>
+            <a:ext cx="11091672" cy="502920"/>
           </a:xfrm>
           <a:prstGeom prst="rect">
             <a:avLst/>
@@ -10848,192 +15684,18 @@
           <a:bodyPr wrap="square" lIns="0" tIns="0" rIns="0" bIns="0" rtlCol="0" anchor="t"/>
           <a:lstStyle/>
           <a:p>
-            <a:pPr marL="342900" indent="-342900">
-              <a:spcAft>
-                <a:spcPts val="600"/>
-              </a:spcAft>
-              <a:buSzPct val="100000"/>
-              <a:buChar char="•"/>
-            </a:pPr>
-            <a:r>
-              <a:rPr lang="en-US" sz="1200" dirty="0">
-                <a:solidFill>
-                  <a:schemeClr val="tx1"/>
-                </a:solidFill>
-              </a:rPr>
-              <a:t>A 25 mm routing envelope per element on top of the 25 mm minimum gap: neighbours 50 mm further apart than sampled</a:t>
-            </a:r>
-            <a:endParaRPr lang="en-US" sz="1200" dirty="0"/>
-          </a:p>
-          <a:p>
-            <a:pPr marL="342900" indent="-342900">
-              <a:spcAft>
-                <a:spcPts val="600"/>
-              </a:spcAft>
-              <a:buSzPct val="100000"/>
-              <a:buChar char="•"/>
-            </a:pPr>
-            <a:r>
-              <a:rPr lang="en-US" sz="1200" dirty="0">
-                <a:solidFill>
-                  <a:schemeClr val="tx1"/>
-                </a:solidFill>
-              </a:rPr>
-              <a:t>Nothing closer than 75 mm, while 42 % of measured gaps are</a:t>
-            </a:r>
-            <a:endParaRPr lang="en-US" sz="1200" dirty="0"/>
-          </a:p>
-          <a:p>
-            <a:pPr marL="342900" indent="-342900">
-              <a:spcAft>
-                <a:spcPts val="600"/>
-              </a:spcAft>
-              <a:buSzPct val="100000"/>
-              <a:buChar char="•"/>
-            </a:pPr>
-            <a:r>
-              <a:rPr lang="en-US" sz="1200" dirty="0">
-                <a:solidFill>
-                  <a:schemeClr val="tx1"/>
-                </a:solidFill>
-              </a:rPr>
-              <a:t>The 41 mm was computed on the sampled gap; physically the files were 89 mm from the project</a:t>
-            </a:r>
-            <a:endParaRPr lang="en-US" sz="1200" dirty="0"/>
-          </a:p>
-        </p:txBody>
-      </p:sp>
-      <p:sp>
-        <p:nvSpPr>
-          <p:cNvPr id="7" name="card 4.0"/>
-          <p:cNvSpPr/>
-          <p:nvPr/>
-        </p:nvSpPr>
-        <p:spPr>
-          <a:xfrm>
-            <a:off x="6199632" y="4206240"/>
-            <a:ext cx="5440680" cy="1874520"/>
-          </a:xfrm>
-          <a:prstGeom prst="roundRect">
-            <a:avLst>
-              <a:gd name="adj" fmla="val 3415"/>
-            </a:avLst>
-          </a:prstGeom>
-          <a:solidFill>
-            <a:schemeClr val="bg2"/>
-          </a:solidFill>
-          <a:ln/>
-        </p:spPr>
-      </p:sp>
-      <p:sp>
-        <p:nvSpPr>
-          <p:cNvPr id="8" name="head 4.0"/>
-          <p:cNvSpPr txBox="1"/>
-          <p:nvPr/>
-        </p:nvSpPr>
-        <p:spPr>
-          <a:xfrm>
-            <a:off x="6428232" y="4297680"/>
-            <a:ext cx="4983480" cy="320040"/>
-          </a:xfrm>
-          <a:prstGeom prst="rect">
-            <a:avLst/>
-          </a:prstGeom>
-          <a:noFill/>
-          <a:ln/>
-        </p:spPr>
-        <p:txBody>
-          <a:bodyPr wrap="square" lIns="0" tIns="0" rIns="0" bIns="0" rtlCol="0" anchor="ctr"/>
-          <a:lstStyle/>
-          <a:p>
             <a:pPr indent="0" marL="0">
               <a:buNone/>
             </a:pPr>
             <a:r>
-              <a:rPr lang="en-US" sz="1400" b="1" dirty="0">
-                <a:solidFill>
-                  <a:schemeClr val="tx1"/>
+              <a:rPr lang="en-US" sz="1100" dirty="0">
+                <a:solidFill>
+                  <a:srgbClr val="52514E"/>
                 </a:solidFill>
               </a:rPr>
-              <a:t>Revision 4.0 — today</a:t>
-            </a:r>
-            <a:endParaRPr lang="en-US" sz="1400" dirty="0"/>
-          </a:p>
-        </p:txBody>
-      </p:sp>
-      <p:sp>
-        <p:nvSpPr>
-          <p:cNvPr id="9" name="bullets 4.0"/>
-          <p:cNvSpPr txBox="1"/>
-          <p:nvPr/>
-        </p:nvSpPr>
-        <p:spPr>
-          <a:xfrm>
-            <a:off x="6428232" y="4663440"/>
-            <a:ext cx="4983480" cy="1325880"/>
-          </a:xfrm>
-          <a:prstGeom prst="rect">
-            <a:avLst/>
-          </a:prstGeom>
-          <a:noFill/>
-          <a:ln/>
-        </p:spPr>
-        <p:txBody>
-          <a:bodyPr wrap="square" lIns="0" tIns="0" rIns="0" bIns="0" rtlCol="0" anchor="t"/>
-          <a:lstStyle/>
-          <a:p>
-            <a:pPr marL="342900" indent="-342900">
-              <a:spcAft>
-                <a:spcPts val="600"/>
-              </a:spcAft>
-              <a:buSzPct val="100000"/>
-              <a:buChar char="•"/>
-            </a:pPr>
-            <a:r>
-              <a:rPr lang="en-US" sz="1200" dirty="0">
-                <a:solidFill>
-                  <a:schemeClr val="tx1"/>
-                </a:solidFill>
-              </a:rPr>
-              <a:t>The sampled gap is the physical gap; same elements, loads and rows — the spacing moved; 41 mm holds for geometry you can measure</a:t>
-            </a:r>
-            <a:endParaRPr lang="en-US" sz="1200" dirty="0"/>
-          </a:p>
-          <a:p>
-            <a:pPr marL="342900" indent="-342900">
-              <a:spcAft>
-                <a:spcPts val="600"/>
-              </a:spcAft>
-              <a:buSzPct val="100000"/>
-              <a:buChar char="•"/>
-            </a:pPr>
-            <a:r>
-              <a:rPr lang="en-US" sz="1200" dirty="0">
-                <a:solidFill>
-                  <a:schemeClr val="tx1"/>
-                </a:solidFill>
-              </a:rPr>
-              <a:t>All eight files regenerate byte-for-byte on every CI run; every paper number that reproduces is a test</a:t>
-            </a:r>
-            <a:endParaRPr lang="en-US" sz="1200" dirty="0"/>
-          </a:p>
-          <a:p>
-            <a:pPr marL="342900" indent="-342900">
-              <a:spcAft>
-                <a:spcPts val="600"/>
-              </a:spcAft>
-              <a:buSzPct val="100000"/>
-              <a:buChar char="•"/>
-            </a:pPr>
-            <a:r>
-              <a:rPr lang="en-US" sz="1200" dirty="0">
-                <a:solidFill>
-                  <a:schemeClr val="tx1"/>
-                </a:solidFill>
-              </a:rPr>
-              <a:t>The paper’s composition figures came from an internal build; the public values are restated</a:t>
-            </a:r>
-            <a:endParaRPr lang="en-US" sz="1200" dirty="0"/>
+              <a:t>One benchmark context per tier; dashed rings are insulation. Within a tier, kinds, trades, services, surfaces and stacking all vary, so element count is the one controlled difficulty axis. C1 is the most common support in any building; C8 is a congested rack.</a:t>
+            </a:r>
+            <a:endParaRPr lang="en-US" sz="1100" dirty="0"/>
           </a:p>
         </p:txBody>
       </p:sp>
@@ -11139,96 +15801,46 @@
                   <a:schemeClr val="tx1"/>
                 </a:solidFill>
               </a:rPr>
-              <a:t>A two-bin clamp catalog attaches 1 pipe in 9 — and no tray, duct or conduit</a:t>
+              <a:t>Experiment 1: as the count rises, scenes get tighter and heavier</a:t>
             </a:r>
             <a:endParaRPr lang="en-US" sz="2600" dirty="0"/>
           </a:p>
         </p:txBody>
       </p:sp>
-      <p:graphicFrame>
-        <p:nvGraphicFramePr>
-          <p:cNvPr id="3" name="coverage chart" descr=""/>
-          <p:cNvGraphicFramePr/>
+      <p:pic>
+        <p:nvPicPr>
+          <p:cNvPr id="3" name="tier statistics" descr="/home/user/crossmep_dataset/docs/figures/03_tiers_stats.png">    </p:cNvPr>
+          <p:cNvPicPr>
+            <a:picLocks noChangeAspect="1"/>
+          </p:cNvPicPr>
           <p:nvPr/>
-        </p:nvGraphicFramePr>
-        <p:xfrm>
-          <a:off x="548640" y="1371600"/>
-          <a:ext cx="6949440" cy="4663440"/>
-        </p:xfrm>
-        <a:graphic xmlns:a="http://schemas.openxmlformats.org/drawingml/2006/main">
-          <a:graphicData uri="http://schemas.openxmlformats.org/drawingml/2006/chart">
-            <c:chart xmlns:c="http://schemas.openxmlformats.org/drawingml/2006/chart" r:id="rId1"/>
-          </a:graphicData>
-        </a:graphic>
-      </p:graphicFrame>
-      <p:sp>
-        <p:nvSpPr>
-          <p:cNvPr id="4" name="tile of the benchmark’s pipes can be attached with the released two bins (48–54 mm at 2.5 kN; 108–114 mm at 4.0 kN)"/>
-          <p:cNvSpPr/>
-          <p:nvPr/>
-        </p:nvSpPr>
-        <p:spPr>
-          <a:xfrm>
-            <a:off x="7772400" y="1417320"/>
-            <a:ext cx="3867912" cy="1417320"/>
-          </a:xfrm>
-          <a:prstGeom prst="roundRect">
-            <a:avLst>
-              <a:gd name="adj" fmla="val 4516"/>
-            </a:avLst>
-          </a:prstGeom>
-          <a:solidFill>
-            <a:schemeClr val="bg2"/>
-          </a:solidFill>
-          <a:ln/>
-        </p:spPr>
-      </p:sp>
-      <p:sp>
-        <p:nvSpPr>
-          <p:cNvPr id="5" name="value of the benchmark’s pipes can be attached with the released two bins (48–54 mm at 2.5 kN; 108–114 mm at 4.0 kN)"/>
+        </p:nvPicPr>
+        <p:blipFill>
+          <a:blip r:embed="rId1"/>
+          <a:stretch>
+            <a:fillRect/>
+          </a:stretch>
+        </p:blipFill>
+        <p:spPr>
+          <a:xfrm>
+            <a:off x="548640" y="1390162"/>
+            <a:ext cx="11091672" cy="4214835"/>
+          </a:xfrm>
+          <a:prstGeom prst="rect">
+            <a:avLst/>
+          </a:prstGeom>
+        </p:spPr>
+      </p:pic>
+      <p:sp>
+        <p:nvSpPr>
+          <p:cNvPr id="4" name="experiment 1 caption"/>
           <p:cNvSpPr txBox="1"/>
           <p:nvPr/>
         </p:nvSpPr>
         <p:spPr>
           <a:xfrm>
-            <a:off x="8001000" y="1508760"/>
-            <a:ext cx="3410712" cy="793699"/>
-          </a:xfrm>
-          <a:prstGeom prst="rect">
-            <a:avLst/>
-          </a:prstGeom>
-          <a:noFill/>
-          <a:ln/>
-        </p:spPr>
-        <p:txBody>
-          <a:bodyPr wrap="square" lIns="0" tIns="0" rIns="0" bIns="0" rtlCol="0" anchor="ctr"/>
-          <a:lstStyle/>
-          <a:p>
-            <a:pPr indent="0" marL="0">
-              <a:buNone/>
-            </a:pPr>
-            <a:r>
-              <a:rPr lang="en-US" sz="3400" b="1" dirty="0">
-                <a:solidFill>
-                  <a:schemeClr val="accent1"/>
-                </a:solidFill>
-              </a:rPr>
-              <a:t>11.6 %</a:t>
-            </a:r>
-            <a:endParaRPr lang="en-US" sz="3400" dirty="0"/>
-          </a:p>
-        </p:txBody>
-      </p:sp>
-      <p:sp>
-        <p:nvSpPr>
-          <p:cNvPr id="6" name="label of the benchmark’s pipes can be attached with the released two bins (48–54 mm at 2.5 kN; 108–114 mm at 4.0 kN)"/>
-          <p:cNvSpPr txBox="1"/>
-          <p:nvPr/>
-        </p:nvSpPr>
-        <p:spPr>
-          <a:xfrm>
-            <a:off x="8001000" y="2324405"/>
-            <a:ext cx="3410712" cy="467716"/>
+            <a:off x="548640" y="5696438"/>
+            <a:ext cx="11091672" cy="548640"/>
           </a:xfrm>
           <a:prstGeom prst="rect">
             <a:avLst/>
@@ -11249,172 +15861,9 @@
                   <a:srgbClr val="52514E"/>
                 </a:solidFill>
               </a:rPr>
-              <a:t>of the benchmark’s pipes can be attached with the released two bins (48–54 mm at 2.5 kN; 108–114 mm at 4.0 kN)</a:t>
+              <a:t>Element count is exact by construction, so ordering is checked on congestion: the median closest gap falls from 120 mm (C2) to 62 mm (C8) and the median load at the support rises from 0.10 to 1.71 kN. The trends are near-monotone; with 125 contexts per tier, neighbouring tiers can swap.</a:t>
             </a:r>
             <a:endParaRPr lang="en-US" sz="1100" dirty="0"/>
-          </a:p>
-        </p:txBody>
-      </p:sp>
-      <p:sp>
-        <p:nvSpPr>
-          <p:cNvPr id="7" name="tile trays, ducts and conduits: a clamp catalog defines no attachment for them"/>
-          <p:cNvSpPr/>
-          <p:nvPr/>
-        </p:nvSpPr>
-        <p:spPr>
-          <a:xfrm>
-            <a:off x="7772400" y="3017520"/>
-            <a:ext cx="3867912" cy="1417320"/>
-          </a:xfrm>
-          <a:prstGeom prst="roundRect">
-            <a:avLst>
-              <a:gd name="adj" fmla="val 4516"/>
-            </a:avLst>
-          </a:prstGeom>
-          <a:solidFill>
-            <a:schemeClr val="bg2"/>
-          </a:solidFill>
-          <a:ln/>
-        </p:spPr>
-      </p:sp>
-      <p:sp>
-        <p:nvSpPr>
-          <p:cNvPr id="8" name="value trays, ducts and conduits: a clamp catalog defines no attachment for them"/>
-          <p:cNvSpPr txBox="1"/>
-          <p:nvPr/>
-        </p:nvSpPr>
-        <p:spPr>
-          <a:xfrm>
-            <a:off x="8001000" y="3108960"/>
-            <a:ext cx="3410712" cy="793699"/>
-          </a:xfrm>
-          <a:prstGeom prst="rect">
-            <a:avLst/>
-          </a:prstGeom>
-          <a:noFill/>
-          <a:ln/>
-        </p:spPr>
-        <p:txBody>
-          <a:bodyPr wrap="square" lIns="0" tIns="0" rIns="0" bIns="0" rtlCol="0" anchor="ctr"/>
-          <a:lstStyle/>
-          <a:p>
-            <a:pPr indent="0" marL="0">
-              <a:buNone/>
-            </a:pPr>
-            <a:r>
-              <a:rPr lang="en-US" sz="3400" b="1" dirty="0">
-                <a:solidFill>
-                  <a:schemeClr val="accent1"/>
-                </a:solidFill>
-              </a:rPr>
-              <a:t>0 of 1,971</a:t>
-            </a:r>
-            <a:endParaRPr lang="en-US" sz="3400" dirty="0"/>
-          </a:p>
-        </p:txBody>
-      </p:sp>
-      <p:sp>
-        <p:nvSpPr>
-          <p:cNvPr id="9" name="label trays, ducts and conduits: a clamp catalog defines no attachment for them"/>
-          <p:cNvSpPr txBox="1"/>
-          <p:nvPr/>
-        </p:nvSpPr>
-        <p:spPr>
-          <a:xfrm>
-            <a:off x="8001000" y="3924605"/>
-            <a:ext cx="3410712" cy="467716"/>
-          </a:xfrm>
-          <a:prstGeom prst="rect">
-            <a:avLst/>
-          </a:prstGeom>
-          <a:noFill/>
-          <a:ln/>
-        </p:spPr>
-        <p:txBody>
-          <a:bodyPr wrap="square" lIns="0" tIns="0" rIns="0" bIns="0" rtlCol="0" anchor="t"/>
-          <a:lstStyle/>
-          <a:p>
-            <a:pPr indent="0" marL="0">
-              <a:buNone/>
-            </a:pPr>
-            <a:r>
-              <a:rPr lang="en-US" sz="1100" dirty="0">
-                <a:solidFill>
-                  <a:srgbClr val="52514E"/>
-                </a:solidFill>
-              </a:rPr>
-              <a:t>trays, ducts and conduits: a clamp catalog defines no attachment for them</a:t>
-            </a:r>
-            <a:endParaRPr lang="en-US" sz="1100" dirty="0"/>
-          </a:p>
-        </p:txBody>
-      </p:sp>
-      <p:sp>
-        <p:nvSpPr>
-          <p:cNvPr id="10" name="catalog note card"/>
-          <p:cNvSpPr/>
-          <p:nvPr/>
-        </p:nvSpPr>
-        <p:spPr>
-          <a:xfrm>
-            <a:off x="7772400" y="4617720"/>
-            <a:ext cx="3867912" cy="1417320"/>
-          </a:xfrm>
-          <a:prstGeom prst="roundRect">
-            <a:avLst>
-              <a:gd name="adj" fmla="val 4516"/>
-            </a:avLst>
-          </a:prstGeom>
-          <a:solidFill>
-            <a:schemeClr val="bg2"/>
-          </a:solidFill>
-          <a:ln/>
-        </p:spPr>
-      </p:sp>
-      <p:sp>
-        <p:nvSpPr>
-          <p:cNvPr id="11" name="catalog note"/>
-          <p:cNvSpPr txBox="1"/>
-          <p:nvPr/>
-        </p:nvSpPr>
-        <p:spPr>
-          <a:xfrm>
-            <a:off x="8001000" y="4709160"/>
-            <a:ext cx="3429000" cy="1234440"/>
-          </a:xfrm>
-          <a:prstGeom prst="rect">
-            <a:avLst/>
-          </a:prstGeom>
-          <a:noFill/>
-          <a:ln/>
-        </p:spPr>
-        <p:txBody>
-          <a:bodyPr wrap="square" lIns="0" tIns="0" rIns="0" bIns="0" rtlCol="0" anchor="ctr"/>
-          <a:lstStyle/>
-          <a:p>
-            <a:pPr indent="0" marL="0">
-              <a:buNone/>
-            </a:pPr>
-            <a:r>
-              <a:rPr lang="en-US" sz="1250" b="1" dirty="0">
-                <a:solidFill>
-                  <a:schemeClr val="tx1"/>
-                </a:solidFill>
-              </a:rPr>
-              <a:t>Loads never bind; diameter and kind do. </a:t>
-            </a:r>
-            <a:pPr indent="0" marL="0">
-              <a:buNone/>
-            </a:pPr>
-            <a:r>
-              <a:rPr lang="en-US" sz="1250" dirty="0">
-                <a:solidFill>
-                  <a:schemeClr val="tx1"/>
-                </a:solidFill>
-              </a:rPr>
-              <a:t>“Generalise the catalog” becomes a measured requirement: small-bore clamps first, then tray, duct and conduit attachments.</a:t>
-            </a:r>
-            <a:endParaRPr lang="en-US" sz="1250" dirty="0"/>
           </a:p>
         </p:txBody>
       </p:sp>

--- a/docs/CrossMEP_CIBW78_talk.pptx
+++ b/docs/CrossMEP_CIBW78_talk.pptx
@@ -21,9 +21,10 @@
     <p:sldId id="269" r:id="rId15"/>
     <p:sldId id="270" r:id="rId16"/>
     <p:sldId id="271" r:id="rId17"/>
+    <p:sldId id="272" r:id="rId18"/>
   </p:sldIdLst>
   <p:notesMasterIdLst>
-    <p:notesMasterId r:id="rId18"/>
+    <p:notesMasterId r:id="rId19"/>
   </p:notesMasterIdLst>
   <p:sldSz cx="12192000" cy="6858000"/>
   <p:notesSz cx="6858000" cy="12192000"/>
@@ -122,18 +123,18 @@
   <p:extLst>
     <p:ext uri="{521415D9-36F7-43E2-AB2F-B90AF26B5E84}">
       <p14:sectionLst xmlns:p14="http://schemas.microsoft.com/office/powerpoint/2010/main">
-        <p14:section name="Opening" id="{3fa24993-b7be-168b-341f-823c9afa1797}">
+        <p14:section name="Opening" id="{66eece79-1ce1-5c3e-6d69-37583bdfcc27}">
           <p14:sldIdLst>
             <p14:sldId id="256"/>
           </p14:sldIdLst>
         </p14:section>
-        <p14:section name="Motivation" id="{500c02aa-0e3c-d6fe-fb65-f3f158989fe2}">
+        <p14:section name="Motivation" id="{8be7afa7-71e9-d7f2-ca59-ac91f4d5e4e1}">
           <p14:sldIdLst>
             <p14:sldId id="257"/>
             <p14:sldId id="258"/>
           </p14:sldIdLst>
         </p14:section>
-        <p14:section name="The dataset" id="{558c0af5-6ebe-534f-3253-48219def04d5}">
+        <p14:section name="The dataset" id="{d8587ef5-79a1-46e9-3526-caafef1e76ef}">
           <p14:sldIdLst>
             <p14:sldId id="259"/>
             <p14:sldId id="260"/>
@@ -142,24 +143,25 @@
             <p14:sldId id="263"/>
           </p14:sldIdLst>
         </p14:section>
-        <p14:section name="Experiments" id="{40898567-82b1-6663-a05c-8a2e1da4965f}">
+        <p14:section name="Experiments" id="{884b2a48-e498-fe43-ba0a-6a48be8872dd}">
           <p14:sldIdLst>
             <p14:sldId id="264"/>
             <p14:sldId id="265"/>
             <p14:sldId id="266"/>
           </p14:sldIdLst>
         </p14:section>
-        <p14:section name="Use" id="{c7d2feb0-fcf7-e8f4-841d-d58bdb1f5dd2}">
+        <p14:section name="Use" id="{52163845-df48-443a-c925-337414024f5f}">
           <p14:sldIdLst>
             <p14:sldId id="267"/>
             <p14:sldId id="268"/>
             <p14:sldId id="269"/>
           </p14:sldIdLst>
         </p14:section>
-        <p14:section name="Appendix" id="{5eafb434-9fce-90fb-5d31-d6b14ce7f3e4}">
+        <p14:section name="Appendix" id="{9b4dc607-6417-0e5c-12ad-a5441c7af412}">
           <p14:sldIdLst>
             <p14:sldId id="270"/>
             <p14:sldId id="271"/>
+            <p14:sldId id="272"/>
           </p14:sldIdLst>
         </p14:section>
       </p14:sectionLst>
@@ -769,7 +771,7 @@
                 </a:solidFill>
                 <a:latin typeface="+mn-lt"/>
               </a:rPr>
-              <a:t>Share of pipes the catalog can attach, by tier (%)</a:t>
+              <a:t>Pipes by nominal size: what the two-size catalog attaches</a:t>
             </a:r>
           </a:p>
         </c:rich>
@@ -782,7 +784,7 @@
       <c:layout/>
       <c:barChart>
         <c:barDir val="col"/>
-        <c:grouping val="clustered"/>
+        <c:grouping val="stacked"/>
         <c:varyColors val="0"/>
         <c:ser>
           <c:idx val="0"/>
@@ -793,7 +795,7 @@
               <c:strCache>
                 <c:ptCount val="1"/>
                 <c:pt idx="0">
-                  <c:v>pipes the catalog can attach (%)</c:v>
+                  <c:v>attachable</c:v>
                 </c:pt>
               </c:strCache>
             </c:strRef>
@@ -806,13 +808,13 @@
           </c:spPr>
           <c:invertIfNegative val="0"/>
           <c:dLbls>
-            <c:numFmt formatCode="0.0" sourceLinked="0"/>
+            <c:numFmt formatCode="#,##0;;;" sourceLinked="0"/>
             <c:txPr>
               <a:bodyPr/>
               <a:lstStyle/>
               <a:p>
                 <a:pPr>
-                  <a:defRPr b="0" i="0" strike="noStrike" sz="1000" u="none">
+                  <a:defRPr b="0" i="0" strike="noStrike" sz="900" u="none">
                     <a:solidFill>
                       <a:srgbClr val="0B0B0B"/>
                     </a:solidFill>
@@ -821,6 +823,7 @@
                 </a:pPr>
               </a:p>
             </c:txPr>
+            <c:dLblPos val="ctr"/>
             <c:showLegendKey val="0"/>
             <c:showVal val="1"/>
             <c:showCatName val="0"/>
@@ -831,33 +834,36 @@
           </c:dLbls>
           <c:cat>
             <c:multiLvlStrRef>
-              <c:f>Sheet1!$A$2:$A$9</c:f>
+              <c:f>Sheet1!$A$2:$A$10</c:f>
               <c:multiLvlStrCache>
-                <c:ptCount val="8"/>
+                <c:ptCount val="9"/>
                 <c:lvl>
                   <c:pt idx="0">
-                    <c:v>C1</c:v>
+                    <c:v>DN15</c:v>
                   </c:pt>
                   <c:pt idx="1">
-                    <c:v>C2</c:v>
+                    <c:v>DN20</c:v>
                   </c:pt>
                   <c:pt idx="2">
-                    <c:v>C3</c:v>
+                    <c:v>DN25</c:v>
                   </c:pt>
                   <c:pt idx="3">
-                    <c:v>C4</c:v>
+                    <c:v>DN32</c:v>
                   </c:pt>
                   <c:pt idx="4">
-                    <c:v>C5</c:v>
+                    <c:v>DN40</c:v>
                   </c:pt>
                   <c:pt idx="5">
-                    <c:v>C6</c:v>
+                    <c:v>DN50</c:v>
                   </c:pt>
                   <c:pt idx="6">
-                    <c:v>C7</c:v>
+                    <c:v>DN65</c:v>
                   </c:pt>
                   <c:pt idx="7">
-                    <c:v>C8</c:v>
+                    <c:v>DN80</c:v>
+                  </c:pt>
+                  <c:pt idx="8">
+                    <c:v>DN100</c:v>
                   </c:pt>
                 </c:lvl>
               </c:multiLvlStrCache>
@@ -865,46 +871,169 @@
           </c:cat>
           <c:val>
             <c:numRef>
-              <c:f>Sheet1!$B$2:$B$9</c:f>
+              <c:f>Sheet1!$B$2:$B$10</c:f>
               <c:numCache>
                 <c:formatCode>General</c:formatCode>
-                <c:ptCount val="8"/>
+                <c:ptCount val="9"/>
                 <c:pt idx="0">
-                  <c:v>11.3</c:v>
+                  <c:v>0</c:v>
                 </c:pt>
                 <c:pt idx="1">
-                  <c:v>12.2</c:v>
+                  <c:v>0</c:v>
                 </c:pt>
                 <c:pt idx="2">
-                  <c:v>10.3</c:v>
+                  <c:v>0</c:v>
                 </c:pt>
                 <c:pt idx="3">
-                  <c:v>13.6</c:v>
+                  <c:v>0</c:v>
                 </c:pt>
                 <c:pt idx="4">
-                  <c:v>9.2</c:v>
+                  <c:v>293</c:v>
                 </c:pt>
                 <c:pt idx="5">
-                  <c:v>11.5</c:v>
+                  <c:v>0</c:v>
                 </c:pt>
                 <c:pt idx="6">
-                  <c:v>10.8</c:v>
+                  <c:v>0</c:v>
                 </c:pt>
                 <c:pt idx="7">
-                  <c:v>13.3</c:v>
+                  <c:v>0</c:v>
+                </c:pt>
+                <c:pt idx="8">
+                  <c:v>0</c:v>
+                </c:pt>
+              </c:numCache>
+            </c:numRef>
+          </c:val>
+        </c:ser>
+        <c:ser>
+          <c:idx val="1"/>
+          <c:order val="1"/>
+          <c:tx>
+            <c:strRef>
+              <c:f>Sheet1!$C$1</c:f>
+              <c:strCache>
+                <c:ptCount val="1"/>
+                <c:pt idx="0">
+                  <c:v>no size fits</c:v>
+                </c:pt>
+              </c:strCache>
+            </c:strRef>
+          </c:tx>
+          <c:spPr>
+            <a:solidFill>
+              <a:srgbClr val="CFCDC3"/>
+            </a:solidFill>
+            <a:effectLst/>
+          </c:spPr>
+          <c:invertIfNegative val="0"/>
+          <c:dLbls>
+            <c:numFmt formatCode="#,##0;;;" sourceLinked="0"/>
+            <c:txPr>
+              <a:bodyPr/>
+              <a:lstStyle/>
+              <a:p>
+                <a:pPr>
+                  <a:defRPr b="0" i="0" strike="noStrike" sz="900" u="none">
+                    <a:solidFill>
+                      <a:srgbClr val="0B0B0B"/>
+                    </a:solidFill>
+                    <a:latin typeface="+mn-lt"/>
+                  </a:defRPr>
+                </a:pPr>
+              </a:p>
+            </c:txPr>
+            <c:dLblPos val="ctr"/>
+            <c:showLegendKey val="0"/>
+            <c:showVal val="1"/>
+            <c:showCatName val="0"/>
+            <c:showSerName val="0"/>
+            <c:showPercent val="0"/>
+            <c:showBubbleSize val="0"/>
+            <c:showLeaderLines val="0"/>
+          </c:dLbls>
+          <c:cat>
+            <c:multiLvlStrRef>
+              <c:f>Sheet1!$A$2:$A$10</c:f>
+              <c:multiLvlStrCache>
+                <c:ptCount val="9"/>
+                <c:lvl>
+                  <c:pt idx="0">
+                    <c:v>DN15</c:v>
+                  </c:pt>
+                  <c:pt idx="1">
+                    <c:v>DN20</c:v>
+                  </c:pt>
+                  <c:pt idx="2">
+                    <c:v>DN25</c:v>
+                  </c:pt>
+                  <c:pt idx="3">
+                    <c:v>DN32</c:v>
+                  </c:pt>
+                  <c:pt idx="4">
+                    <c:v>DN40</c:v>
+                  </c:pt>
+                  <c:pt idx="5">
+                    <c:v>DN50</c:v>
+                  </c:pt>
+                  <c:pt idx="6">
+                    <c:v>DN65</c:v>
+                  </c:pt>
+                  <c:pt idx="7">
+                    <c:v>DN80</c:v>
+                  </c:pt>
+                  <c:pt idx="8">
+                    <c:v>DN100</c:v>
+                  </c:pt>
+                </c:lvl>
+              </c:multiLvlStrCache>
+            </c:multiLvlStrRef>
+          </c:cat>
+          <c:val>
+            <c:numRef>
+              <c:f>Sheet1!$C$2:$C$10</c:f>
+              <c:numCache>
+                <c:formatCode>General</c:formatCode>
+                <c:ptCount val="9"/>
+                <c:pt idx="0">
+                  <c:v>221</c:v>
+                </c:pt>
+                <c:pt idx="1">
+                  <c:v>294</c:v>
+                </c:pt>
+                <c:pt idx="2">
+                  <c:v>523</c:v>
+                </c:pt>
+                <c:pt idx="3">
+                  <c:v>463</c:v>
+                </c:pt>
+                <c:pt idx="4">
+                  <c:v>0</c:v>
+                </c:pt>
+                <c:pt idx="5">
+                  <c:v>245</c:v>
+                </c:pt>
+                <c:pt idx="6">
+                  <c:v>250</c:v>
+                </c:pt>
+                <c:pt idx="7">
+                  <c:v>117</c:v>
+                </c:pt>
+                <c:pt idx="8">
+                  <c:v>123</c:v>
                 </c:pt>
               </c:numCache>
             </c:numRef>
           </c:val>
         </c:ser>
         <c:dLbls>
-          <c:numFmt formatCode="0.0" sourceLinked="0"/>
+          <c:numFmt formatCode="#,##0;;;" sourceLinked="0"/>
           <c:txPr>
             <a:bodyPr/>
             <a:lstStyle/>
             <a:p>
               <a:pPr>
-                <a:defRPr b="0" i="0" strike="noStrike" sz="1000" u="none">
+                <a:defRPr b="0" i="0" strike="noStrike" sz="900" u="none">
                   <a:solidFill>
                     <a:srgbClr val="0B0B0B"/>
                   </a:solidFill>
@@ -913,6 +1042,7 @@
               </a:pPr>
             </a:p>
           </c:txPr>
+          <c:dLblPos val="ctr"/>
           <c:showLegendKey val="0"/>
           <c:showVal val="1"/>
           <c:showCatName val="0"/>
@@ -921,8 +1051,8 @@
           <c:showBubbleSize val="0"/>
           <c:showLeaderLines val="0"/>
         </c:dLbls>
-        <c:gapWidth val="150"/>
-        <c:overlap val="0"/>
+        <c:gapWidth val="45"/>
+        <c:overlap val="100"/>
         <c:axId val="2094734554"/>
         <c:axId val="2094734552"/>
         <c:axId val="2094734556"/>
@@ -972,7 +1102,380 @@
         <c:axId val="2094734552"/>
         <c:scaling>
           <c:orientation val="minMax"/>
-          <c:max val="25"/>
+          <c:max val="600"/>
+          <c:min val="0"/>
+        </c:scaling>
+        <c:delete val="0"/>
+        <c:axPos val="l"/>
+        <c:majorGridlines>
+          <c:spPr>
+            <a:ln w="9525" cap="flat">
+              <a:solidFill>
+                <a:srgbClr val="E1E0D9"/>
+              </a:solidFill>
+              <a:prstDash val="solid"/>
+              <a:round/>
+            </a:ln>
+          </c:spPr>
+        </c:majorGridlines>
+        <c:numFmt formatCode="#,##0" sourceLinked="0"/>
+        <c:majorTickMark val="out"/>
+        <c:minorTickMark val="none"/>
+        <c:tickLblPos val="nextTo"/>
+        <c:spPr>
+          <a:ln w="12700" cap="flat">
+            <a:solidFill>
+              <a:srgbClr val="888888"/>
+            </a:solidFill>
+            <a:prstDash val="solid"/>
+            <a:round/>
+          </a:ln>
+        </c:spPr>
+        <c:txPr>
+          <a:bodyPr/>
+          <a:lstStyle/>
+          <a:p>
+            <a:pPr>
+              <a:defRPr sz="1000" b="0" i="0" u="none" strike="noStrike">
+                <a:solidFill>
+                  <a:srgbClr val="52514E"/>
+                </a:solidFill>
+                <a:latin typeface="+mn-lt"/>
+              </a:defRPr>
+            </a:pPr>
+            <a:endParaRPr lang="en-US"/>
+          </a:p>
+        </c:txPr>
+        <c:crossAx val="2094734554"/>
+        <c:crosses val="autoZero"/>
+        <c:crossBetween val="between"/>
+        <c:majorUnit val="100"/>
+      </c:valAx>
+      <c:spPr>
+        <a:noFill/>
+        <a:ln>
+          <a:noFill/>
+        </a:ln>
+        <a:effectLst/>
+      </c:spPr>
+    </c:plotArea>
+    <c:legend>
+      <c:legendPos val="b"/>
+      <c:overlay val="0"/>
+      <c:txPr>
+        <a:bodyPr/>
+        <a:lstStyle/>
+        <a:p>
+          <a:pPr>
+            <a:defRPr sz="1000">
+              <a:solidFill>
+                <a:srgbClr val="52514E"/>
+              </a:solidFill>
+            </a:defRPr>
+          </a:pPr>
+          <a:endParaRPr lang="en-US"/>
+        </a:p>
+      </c:txPr>
+    </c:legend>
+    <c:plotVisOnly val="1"/>
+    <c:dispBlanksAs val="span"/>
+  </c:chart>
+  <c:spPr>
+    <a:noFill/>
+    <a:ln>
+      <a:noFill/>
+    </a:ln>
+    <a:effectLst/>
+  </c:spPr>
+  <c:externalData r:id="rId1">
+    <c:autoUpdate val="0"/>
+  </c:externalData>
+</c:chartSpace>
+</file>
+
+<file path=ppt/charts/chart4.xml><?xml version="1.0" encoding="utf-8"?>
+<c:chartSpace xmlns:c="http://schemas.openxmlformats.org/drawingml/2006/chart" xmlns:a="http://schemas.openxmlformats.org/drawingml/2006/main" xmlns:r="http://schemas.openxmlformats.org/officeDocument/2006/relationships">
+  <c:date1904 val="0"/>
+  <c:roundedCorners val="1"/>
+  <c:chart>
+    <c:title>
+      <c:tx>
+        <c:rich>
+          <a:bodyPr/>
+          <a:lstStyle/>
+          <a:p>
+            <a:pPr>
+              <a:defRPr sz="1200" b="0" i="0" u="none" strike="noStrike">
+                <a:solidFill>
+                  <a:srgbClr val="0B0B0B"/>
+                </a:solidFill>
+                <a:latin typeface="+mn-lt"/>
+              </a:defRPr>
+            </a:pPr>
+            <a:r>
+              <a:rPr sz="1200" b="0" i="0" u="none" strike="noStrike">
+                <a:solidFill>
+                  <a:srgbClr val="0B0B0B"/>
+                </a:solidFill>
+                <a:latin typeface="+mn-lt"/>
+              </a:rPr>
+              <a:t>Best share of pipes (%) that any k clamp sizes could attach</a:t>
+            </a:r>
+          </a:p>
+        </c:rich>
+      </c:tx>
+      <c:layout/>
+      <c:overlay val="0"/>
+    </c:title>
+    <c:autoTitleDeleted val="0"/>
+    <c:plotArea>
+      <c:layout/>
+      <c:barChart>
+        <c:barDir val="col"/>
+        <c:grouping val="clustered"/>
+        <c:varyColors val="0"/>
+        <c:ser>
+          <c:idx val="0"/>
+          <c:order val="0"/>
+          <c:tx>
+            <c:strRef>
+              <c:f>Sheet1!$B$1</c:f>
+              <c:strCache>
+                <c:ptCount val="1"/>
+                <c:pt idx="0">
+                  <c:v>best possible share (%)</c:v>
+                </c:pt>
+              </c:strCache>
+            </c:strRef>
+          </c:tx>
+          <c:spPr>
+            <a:solidFill>
+              <a:srgbClr val="2A78D6"/>
+            </a:solidFill>
+            <a:effectLst/>
+          </c:spPr>
+          <c:invertIfNegative val="0"/>
+          <c:dLbls>
+            <c:numFmt formatCode="0" sourceLinked="0"/>
+            <c:txPr>
+              <a:bodyPr/>
+              <a:lstStyle/>
+              <a:p>
+                <a:pPr>
+                  <a:defRPr b="0" i="0" strike="noStrike" sz="900" u="none">
+                    <a:solidFill>
+                      <a:srgbClr val="0B0B0B"/>
+                    </a:solidFill>
+                    <a:latin typeface="+mn-lt"/>
+                  </a:defRPr>
+                </a:pPr>
+              </a:p>
+            </c:txPr>
+            <c:showLegendKey val="0"/>
+            <c:showVal val="1"/>
+            <c:showCatName val="0"/>
+            <c:showSerName val="0"/>
+            <c:showPercent val="0"/>
+            <c:showBubbleSize val="0"/>
+            <c:showLeaderLines val="0"/>
+          </c:dLbls>
+          <c:cat>
+            <c:multiLvlStrRef>
+              <c:f>Sheet1!$A$2:$A$13</c:f>
+              <c:multiLvlStrCache>
+                <c:ptCount val="12"/>
+                <c:lvl>
+                  <c:pt idx="0">
+                    <c:v>1</c:v>
+                  </c:pt>
+                  <c:pt idx="1">
+                    <c:v>2</c:v>
+                  </c:pt>
+                  <c:pt idx="2">
+                    <c:v>3</c:v>
+                  </c:pt>
+                  <c:pt idx="3">
+                    <c:v>4</c:v>
+                  </c:pt>
+                  <c:pt idx="4">
+                    <c:v>5</c:v>
+                  </c:pt>
+                  <c:pt idx="5">
+                    <c:v>6</c:v>
+                  </c:pt>
+                  <c:pt idx="6">
+                    <c:v>7</c:v>
+                  </c:pt>
+                  <c:pt idx="7">
+                    <c:v>8</c:v>
+                  </c:pt>
+                  <c:pt idx="8">
+                    <c:v>9</c:v>
+                  </c:pt>
+                  <c:pt idx="9">
+                    <c:v>10</c:v>
+                  </c:pt>
+                  <c:pt idx="10">
+                    <c:v>11</c:v>
+                  </c:pt>
+                  <c:pt idx="11">
+                    <c:v>12</c:v>
+                  </c:pt>
+                </c:lvl>
+              </c:multiLvlStrCache>
+            </c:multiLvlStrRef>
+          </c:cat>
+          <c:val>
+            <c:numRef>
+              <c:f>Sheet1!$B$2:$B$13</c:f>
+              <c:numCache>
+                <c:formatCode>General</c:formatCode>
+                <c:ptCount val="12"/>
+                <c:pt idx="0">
+                  <c:v>22.61763542902333</c:v>
+                </c:pt>
+                <c:pt idx="1">
+                  <c:v>42.981415579280345</c:v>
+                </c:pt>
+                <c:pt idx="2">
+                  <c:v>60.41913799920918</c:v>
+                </c:pt>
+                <c:pt idx="3">
+                  <c:v>67.69474100434955</c:v>
+                </c:pt>
+                <c:pt idx="4">
+                  <c:v>74.06089363384737</c:v>
+                </c:pt>
+                <c:pt idx="5">
+                  <c:v>80.11071569790431</c:v>
+                </c:pt>
+                <c:pt idx="6">
+                  <c:v>84.53934361407671</c:v>
+                </c:pt>
+                <c:pt idx="7">
+                  <c:v>88.1771451166469</c:v>
+                </c:pt>
+                <c:pt idx="8">
+                  <c:v>91.73586397785687</c:v>
+                </c:pt>
+                <c:pt idx="9">
+                  <c:v>95.25504151838672</c:v>
+                </c:pt>
+                <c:pt idx="10">
+                  <c:v>98.69513641755634</c:v>
+                </c:pt>
+                <c:pt idx="11">
+                  <c:v>100</c:v>
+                </c:pt>
+              </c:numCache>
+            </c:numRef>
+          </c:val>
+        </c:ser>
+        <c:dLbls>
+          <c:numFmt formatCode="0" sourceLinked="0"/>
+          <c:txPr>
+            <a:bodyPr/>
+            <a:lstStyle/>
+            <a:p>
+              <a:pPr>
+                <a:defRPr b="0" i="0" strike="noStrike" sz="900" u="none">
+                  <a:solidFill>
+                    <a:srgbClr val="0B0B0B"/>
+                  </a:solidFill>
+                  <a:latin typeface="+mn-lt"/>
+                </a:defRPr>
+              </a:pPr>
+            </a:p>
+          </c:txPr>
+          <c:showLegendKey val="0"/>
+          <c:showVal val="1"/>
+          <c:showCatName val="0"/>
+          <c:showSerName val="0"/>
+          <c:showPercent val="0"/>
+          <c:showBubbleSize val="0"/>
+          <c:showLeaderLines val="0"/>
+        </c:dLbls>
+        <c:gapWidth val="45"/>
+        <c:overlap val="0"/>
+        <c:axId val="2094734554"/>
+        <c:axId val="2094734552"/>
+        <c:axId val="2094734556"/>
+      </c:barChart>
+      <c:catAx>
+        <c:axId val="2094734554"/>
+        <c:scaling>
+          <c:orientation val="minMax"/>
+        </c:scaling>
+        <c:delete val="0"/>
+        <c:axPos val="b"/>
+        <c:title>
+          <c:tx>
+            <c:rich>
+              <a:bodyPr/>
+              <a:lstStyle/>
+              <a:p>
+                <a:pPr>
+                  <a:defRPr sz="1000" b="0" i="0" u="none" strike="noStrike">
+                    <a:solidFill>
+                      <a:srgbClr val="52514E"/>
+                    </a:solidFill>
+                    <a:latin typeface="Arial"/>
+                  </a:defRPr>
+                </a:pPr>
+                <a:r>
+                  <a:rPr sz="1000" b="0" i="0" u="none" strike="noStrike">
+                    <a:solidFill>
+                      <a:srgbClr val="52514E"/>
+                    </a:solidFill>
+                    <a:latin typeface="Arial"/>
+                  </a:rPr>
+                  <a:t>number of clamp sizes, each fitting a 6 mm diameter window</a:t>
+                </a:r>
+              </a:p>
+            </c:rich>
+          </c:tx>
+          <c:layout/>
+          <c:overlay val="0"/>
+        </c:title>
+        <c:numFmt formatCode="General" sourceLinked="1"/>
+        <c:majorTickMark val="out"/>
+        <c:minorTickMark val="none"/>
+        <c:tickLblPos val="low"/>
+        <c:spPr>
+          <a:ln w="12700" cap="flat">
+            <a:solidFill>
+              <a:srgbClr val="888888"/>
+            </a:solidFill>
+            <a:prstDash val="solid"/>
+            <a:round/>
+          </a:ln>
+        </c:spPr>
+        <c:txPr>
+          <a:bodyPr/>
+          <a:lstStyle/>
+          <a:p>
+            <a:pPr>
+              <a:defRPr sz="1100" b="0" i="0" u="none" strike="noStrike">
+                <a:solidFill>
+                  <a:srgbClr val="52514E"/>
+                </a:solidFill>
+                <a:latin typeface="+mn-lt"/>
+              </a:defRPr>
+            </a:pPr>
+            <a:endParaRPr lang="en-US"/>
+          </a:p>
+        </c:txPr>
+        <c:crossAx val="2094734552"/>
+        <c:crosses val="autoZero"/>
+        <c:auto val="1"/>
+        <c:lblAlgn val="ctr"/>
+        <c:noMultiLvlLbl val="1"/>
+      </c:catAx>
+      <c:valAx>
+        <c:axId val="2094734552"/>
+        <c:scaling>
+          <c:orientation val="minMax"/>
+          <c:max val="100"/>
           <c:min val="0"/>
         </c:scaling>
         <c:delete val="0"/>
@@ -1019,7 +1522,7 @@
         <c:crossAx val="2094734554"/>
         <c:crosses val="autoZero"/>
         <c:crossBetween val="between"/>
-        <c:majorUnit val="5"/>
+        <c:majorUnit val="20"/>
       </c:valAx>
       <c:spPr>
         <a:noFill/>
@@ -1616,7 +2119,7 @@
           <a:p>
             <a:r>
               <a:rPr lang="en-US" dirty="0"/>
-              <a:t>The third experiment connects the dataset to the task it serves. We take a released two-bin clamp catalog and ask which elements it can attach. 11.6 per cent of pipes, roughly uniform across tiers, and none of the trays, ducts and conduits. Load never binds; diameter and kind do. So the dataset turns 'generalise the catalog' into a measured requirement: small-bore clamps first, then tray, duct and conduit attachments. (7:05)</a:t>
+              <a:t>The third experiment connects the dataset to the task it serves: what must a catalog of clamps cover? Take the two-size catalog from the paper as an illustration. It attaches 11.6 per cent of the pipes - 293 of 2,529, interval 10 to 13 - and every one is a single size, DN40. Load never binds: the heaviest pipe is 0.88 kilonewtons against a 2.5 kilonewton clamp. Trays, ducts and conduits are not covered at all. On the right is what the dataset asks of any catalog: two sizes placed where the pipes are would attach 43 per cent, six sizes 80, and 12 sizes every pipe. So 'what should the catalog contain' becomes a measurement. (7:05)</a:t>
             </a:r>
             <a:endParaRPr lang="en-US" dirty="0"/>
           </a:p>
@@ -2056,7 +2559,7 @@
           <a:p>
             <a:r>
               <a:rPr lang="en-US" dirty="0"/>
-              <a:t>Backup: what one stored context looks like - plain JSON, one object per context.</a:t>
+              <a:t>Backup for questions on experiment 3. Per tier, the benchmark has only 125 contexts, so its intervals are wide; the population estimate from two thousand generated contexts per tier shows the tiers are about equal. The headline depends on the attach-diameter rule and on bin-edge tolerance because one nominal size, DN100, sits 0.3 millimetres outside a bin. Only size and capacity are tested - clearance, insert orientation and anchors are not - so the coverage is an upper bound on what can be installed.</a:t>
             </a:r>
             <a:endParaRPr lang="en-US" dirty="0"/>
           </a:p>
@@ -2080,6 +2583,94 @@
             <a:fld id="{F7021451-1387-4CA6-816F-3879F97B5CBC}" type="slidenum">
               <a:rPr lang="en-US"/>
               <a:t>16</a:t>
+            </a:fld>
+            <a:endParaRPr lang="en-US"/>
+          </a:p>
+        </p:txBody>
+      </p:sp>
+    </p:spTree>
+    <p:extLst>
+      <p:ext uri="{BB962C8B-B14F-4D97-AF65-F5344CB8AC3E}">
+        <p14:creationId xmlns:p14="http://schemas.microsoft.com/office/powerpoint/2010/main" val="1024086991"/>
+      </p:ext>
+    </p:extLst>
+  </p:cSld>
+  <p:clrMapOvr>
+    <a:masterClrMapping/>
+  </p:clrMapOvr>
+</p:notes>
+</file>
+
+<file path=ppt/notesSlides/notesSlide17.xml><?xml version="1.0" encoding="utf-8"?>
+<p:notes xmlns:a="http://schemas.openxmlformats.org/drawingml/2006/main" xmlns:r="http://schemas.openxmlformats.org/officeDocument/2006/relationships" xmlns:p="http://schemas.openxmlformats.org/presentationml/2006/main">
+  <p:cSld>
+    <p:spTree>
+      <p:nvGrpSpPr>
+        <p:cNvPr id="1" name=""/>
+        <p:cNvGrpSpPr/>
+        <p:nvPr/>
+      </p:nvGrpSpPr>
+      <p:grpSpPr>
+        <a:xfrm>
+          <a:off x="0" y="0"/>
+          <a:ext cx="0" cy="0"/>
+          <a:chOff x="0" y="0"/>
+          <a:chExt cx="0" cy="0"/>
+        </a:xfrm>
+      </p:grpSpPr>
+      <p:sp>
+        <p:nvSpPr>
+          <p:cNvPr id="2" name="Slide Image Placeholder 1"/>
+          <p:cNvSpPr>
+            <a:spLocks noGrp="1" noRot="1" noChangeAspect="1"/>
+          </p:cNvSpPr>
+          <p:nvPr>
+            <p:ph type="sldImg"/>
+          </p:nvPr>
+        </p:nvSpPr>
+        <p:spPr/>
+      </p:sp>
+      <p:sp>
+        <p:nvSpPr>
+          <p:cNvPr id="3" name="Notes Placeholder 2"/>
+          <p:cNvSpPr>
+            <a:spLocks noGrp="1"/>
+          </p:cNvSpPr>
+          <p:nvPr>
+            <p:ph type="body" idx="1"/>
+          </p:nvPr>
+        </p:nvSpPr>
+        <p:spPr/>
+        <p:txBody>
+          <a:bodyPr/>
+          <a:lstStyle/>
+          <a:p>
+            <a:r>
+              <a:rPr lang="en-US" dirty="0"/>
+              <a:t>Backup: what one stored context looks like - plain JSON, one object per context.</a:t>
+            </a:r>
+            <a:endParaRPr lang="en-US" dirty="0"/>
+          </a:p>
+        </p:txBody>
+      </p:sp>
+      <p:sp>
+        <p:nvSpPr>
+          <p:cNvPr id="4" name="Slide Number Placeholder 3"/>
+          <p:cNvSpPr>
+            <a:spLocks noGrp="1"/>
+          </p:cNvSpPr>
+          <p:nvPr>
+            <p:ph type="sldNum" sz="quarter" idx="10"/>
+          </p:nvPr>
+        </p:nvSpPr>
+        <p:spPr/>
+        <p:txBody>
+          <a:bodyPr/>
+          <a:lstStyle/>
+          <a:p>
+            <a:fld id="{F7021451-1387-4CA6-816F-3879F97B5CBC}" type="slidenum">
+              <a:rPr lang="en-US"/>
+              <a:t>17</a:t>
             </a:fld>
             <a:endParaRPr lang="en-US"/>
           </a:p>
@@ -4054,7 +4645,7 @@
                   <a:schemeClr val="tx1"/>
                 </a:solidFill>
               </a:rPr>
-              <a:t>Experiment 3: a two-bin clamp catalog covers 1 pipe in 9</a:t>
+              <a:t>Experiment 3: a two-size clamp catalog attaches 1 pipe in 9</a:t>
             </a:r>
             <a:endParaRPr lang="en-US" sz="2600" dirty="0"/>
           </a:p>
@@ -4062,13 +4653,13 @@
       </p:sp>
       <p:graphicFrame>
         <p:nvGraphicFramePr>
-          <p:cNvPr id="3" name="coverage chart" descr=""/>
+          <p:cNvPr id="3" name="attach by size chart" descr=""/>
           <p:cNvGraphicFramePr/>
           <p:nvPr/>
         </p:nvGraphicFramePr>
         <p:xfrm>
-          <a:off x="548640" y="1371600"/>
-          <a:ext cx="6949440" cy="4663440"/>
+          <a:off x="548640" y="1325880"/>
+          <a:ext cx="5486400" cy="3246120"/>
         </p:xfrm>
         <a:graphic xmlns:a="http://schemas.openxmlformats.org/drawingml/2006/main">
           <a:graphicData uri="http://schemas.openxmlformats.org/drawingml/2006/chart">
@@ -4076,20 +4667,36 @@
           </a:graphicData>
         </a:graphic>
       </p:graphicFrame>
+      <p:graphicFrame>
+        <p:nvGraphicFramePr>
+          <p:cNvPr id="4" name="demand chart" descr=""/>
+          <p:cNvGraphicFramePr/>
+          <p:nvPr/>
+        </p:nvGraphicFramePr>
+        <p:xfrm>
+          <a:off x="6172200" y="1325880"/>
+          <a:ext cx="5468112" cy="3246120"/>
+        </p:xfrm>
+        <a:graphic xmlns:a="http://schemas.openxmlformats.org/drawingml/2006/main">
+          <a:graphicData uri="http://schemas.openxmlformats.org/drawingml/2006/chart">
+            <c:chart xmlns:c="http://schemas.openxmlformats.org/drawingml/2006/chart" r:id="rId2"/>
+          </a:graphicData>
+        </a:graphic>
+      </p:graphicFrame>
       <p:sp>
         <p:nvSpPr>
-          <p:cNvPr id="4" name="tile of the benchmark’s pipes can be attached with two clamp bins (48–54 mm at 2.5 kN; 108–114 mm at 4.0 kN)"/>
+          <p:cNvPr id="5" name="tile of benchmark pipes attachable with the paper’s two sizes (95 % CI 10.1–13.0); every one is DN40"/>
           <p:cNvSpPr/>
           <p:nvPr/>
         </p:nvSpPr>
         <p:spPr>
           <a:xfrm>
-            <a:off x="7772400" y="1417320"/>
-            <a:ext cx="3867912" cy="1417320"/>
+            <a:off x="548640" y="4663440"/>
+            <a:ext cx="3575304" cy="1463040"/>
           </a:xfrm>
           <a:prstGeom prst="roundRect">
             <a:avLst>
-              <a:gd name="adj" fmla="val 4516"/>
+              <a:gd name="adj" fmla="val 4375"/>
             </a:avLst>
           </a:prstGeom>
           <a:solidFill>
@@ -4100,14 +4707,14 @@
       </p:sp>
       <p:sp>
         <p:nvSpPr>
-          <p:cNvPr id="5" name="value of the benchmark’s pipes can be attached with two clamp bins (48–54 mm at 2.5 kN; 108–114 mm at 4.0 kN)"/>
+          <p:cNvPr id="6" name="value of benchmark pipes attachable with the paper’s two sizes (95 % CI 10.1–13.0); every one is DN40"/>
           <p:cNvSpPr txBox="1"/>
           <p:nvPr/>
         </p:nvSpPr>
         <p:spPr>
           <a:xfrm>
-            <a:off x="7973568" y="1508760"/>
-            <a:ext cx="3465576" cy="708660"/>
+            <a:off x="749808" y="4754880"/>
+            <a:ext cx="3172968" cy="731520"/>
           </a:xfrm>
           <a:prstGeom prst="rect">
             <a:avLst/>
@@ -4136,14 +4743,14 @@
       </p:sp>
       <p:sp>
         <p:nvSpPr>
-          <p:cNvPr id="6" name="label of the benchmark’s pipes can be attached with two clamp bins (48–54 mm at 2.5 kN; 108–114 mm at 4.0 kN)"/>
+          <p:cNvPr id="7" name="label of benchmark pipes attachable with the paper’s two sizes (95 % CI 10.1–13.0); every one is DN40"/>
           <p:cNvSpPr txBox="1"/>
           <p:nvPr/>
         </p:nvSpPr>
         <p:spPr>
           <a:xfrm>
-            <a:off x="7973568" y="2239366"/>
-            <a:ext cx="3465576" cy="538582"/>
+            <a:off x="749808" y="5512003"/>
+            <a:ext cx="3172968" cy="555955"/>
           </a:xfrm>
           <a:prstGeom prst="rect">
             <a:avLst/>
@@ -4164,7 +4771,7 @@
                   <a:srgbClr val="52514E"/>
                 </a:solidFill>
               </a:rPr>
-              <a:t>of the benchmark’s pipes can be attached with two clamp bins (48–54 mm at 2.5 kN; 108–114 mm at 4.0 kN)</a:t>
+              <a:t>of benchmark pipes attachable with the paper’s two sizes (95 % CI 10.1–13.0); every one is DN40</a:t>
             </a:r>
             <a:endParaRPr lang="en-US" sz="1100" dirty="0"/>
           </a:p>
@@ -4172,18 +4779,18 @@
       </p:sp>
       <p:sp>
         <p:nvSpPr>
-          <p:cNvPr id="7" name="tile trays, ducts and conduits: a clamp catalog defines no attachment for them"/>
+          <p:cNvPr id="8" name="tile with two sizes placed where the pipes are; 80 % with six, and every pipe with 12"/>
           <p:cNvSpPr/>
           <p:nvPr/>
         </p:nvSpPr>
         <p:spPr>
           <a:xfrm>
-            <a:off x="7772400" y="3017520"/>
-            <a:ext cx="3867912" cy="1417320"/>
+            <a:off x="4306824" y="4663440"/>
+            <a:ext cx="3575304" cy="1463040"/>
           </a:xfrm>
           <a:prstGeom prst="roundRect">
             <a:avLst>
-              <a:gd name="adj" fmla="val 4516"/>
+              <a:gd name="adj" fmla="val 4375"/>
             </a:avLst>
           </a:prstGeom>
           <a:solidFill>
@@ -4194,14 +4801,108 @@
       </p:sp>
       <p:sp>
         <p:nvSpPr>
-          <p:cNvPr id="8" name="value trays, ducts and conduits: a clamp catalog defines no attachment for them"/>
+          <p:cNvPr id="9" name="value with two sizes placed where the pipes are; 80 % with six, and every pipe with 12"/>
           <p:cNvSpPr txBox="1"/>
           <p:nvPr/>
         </p:nvSpPr>
         <p:spPr>
           <a:xfrm>
-            <a:off x="7973568" y="3108960"/>
-            <a:ext cx="3465576" cy="708660"/>
+            <a:off x="4507992" y="4754880"/>
+            <a:ext cx="3172968" cy="731520"/>
+          </a:xfrm>
+          <a:prstGeom prst="rect">
+            <a:avLst/>
+          </a:prstGeom>
+          <a:noFill/>
+          <a:ln/>
+        </p:spPr>
+        <p:txBody>
+          <a:bodyPr wrap="square" lIns="0" tIns="0" rIns="0" bIns="0" rtlCol="0" anchor="ctr"/>
+          <a:lstStyle/>
+          <a:p>
+            <a:pPr indent="0" marL="0">
+              <a:buNone/>
+            </a:pPr>
+            <a:r>
+              <a:rPr lang="en-US" sz="3200" b="1" dirty="0">
+                <a:solidFill>
+                  <a:schemeClr val="accent1"/>
+                </a:solidFill>
+              </a:rPr>
+              <a:t>43.0 %</a:t>
+            </a:r>
+            <a:endParaRPr lang="en-US" sz="3200" dirty="0"/>
+          </a:p>
+        </p:txBody>
+      </p:sp>
+      <p:sp>
+        <p:nvSpPr>
+          <p:cNvPr id="10" name="label with two sizes placed where the pipes are; 80 % with six, and every pipe with 12"/>
+          <p:cNvSpPr txBox="1"/>
+          <p:nvPr/>
+        </p:nvSpPr>
+        <p:spPr>
+          <a:xfrm>
+            <a:off x="4507992" y="5512003"/>
+            <a:ext cx="3172968" cy="555955"/>
+          </a:xfrm>
+          <a:prstGeom prst="rect">
+            <a:avLst/>
+          </a:prstGeom>
+          <a:noFill/>
+          <a:ln/>
+        </p:spPr>
+        <p:txBody>
+          <a:bodyPr wrap="square" lIns="0" tIns="0" rIns="0" bIns="0" rtlCol="0" anchor="t"/>
+          <a:lstStyle/>
+          <a:p>
+            <a:pPr indent="0" marL="0">
+              <a:buNone/>
+            </a:pPr>
+            <a:r>
+              <a:rPr lang="en-US" sz="1100" dirty="0">
+                <a:solidFill>
+                  <a:srgbClr val="52514E"/>
+                </a:solidFill>
+              </a:rPr>
+              <a:t>with two sizes placed where the pipes are; 80 % with six, and every pipe with 12</a:t>
+            </a:r>
+            <a:endParaRPr lang="en-US" sz="1100" dirty="0"/>
+          </a:p>
+        </p:txBody>
+      </p:sp>
+      <p:sp>
+        <p:nvSpPr>
+          <p:cNvPr id="11" name="tile trays, ducts and conduits: a pipe-clamp catalog defines no attachment. Load never binds (0.88 vs 2.5 kN)"/>
+          <p:cNvSpPr/>
+          <p:nvPr/>
+        </p:nvSpPr>
+        <p:spPr>
+          <a:xfrm>
+            <a:off x="8065008" y="4663440"/>
+            <a:ext cx="3575304" cy="1463040"/>
+          </a:xfrm>
+          <a:prstGeom prst="roundRect">
+            <a:avLst>
+              <a:gd name="adj" fmla="val 4375"/>
+            </a:avLst>
+          </a:prstGeom>
+          <a:solidFill>
+            <a:schemeClr val="bg2"/>
+          </a:solidFill>
+          <a:ln/>
+        </p:spPr>
+      </p:sp>
+      <p:sp>
+        <p:nvSpPr>
+          <p:cNvPr id="12" name="value trays, ducts and conduits: a pipe-clamp catalog defines no attachment. Load never binds (0.88 vs 2.5 kN)"/>
+          <p:cNvSpPr txBox="1"/>
+          <p:nvPr/>
+        </p:nvSpPr>
+        <p:spPr>
+          <a:xfrm>
+            <a:off x="8266176" y="4754880"/>
+            <a:ext cx="3172968" cy="731520"/>
           </a:xfrm>
           <a:prstGeom prst="rect">
             <a:avLst/>
@@ -4230,14 +4931,14 @@
       </p:sp>
       <p:sp>
         <p:nvSpPr>
-          <p:cNvPr id="9" name="label trays, ducts and conduits: a clamp catalog defines no attachment for them"/>
+          <p:cNvPr id="13" name="label trays, ducts and conduits: a pipe-clamp catalog defines no attachment. Load never binds (0.88 vs 2.5 kN)"/>
           <p:cNvSpPr txBox="1"/>
           <p:nvPr/>
         </p:nvSpPr>
         <p:spPr>
           <a:xfrm>
-            <a:off x="7973568" y="3839566"/>
-            <a:ext cx="3465576" cy="538582"/>
+            <a:off x="8266176" y="5512003"/>
+            <a:ext cx="3172968" cy="555955"/>
           </a:xfrm>
           <a:prstGeom prst="rect">
             <a:avLst/>
@@ -4258,78 +4959,9 @@
                   <a:srgbClr val="52514E"/>
                 </a:solidFill>
               </a:rPr>
-              <a:t>trays, ducts and conduits: a clamp catalog defines no attachment for them</a:t>
+              <a:t>trays, ducts and conduits: a pipe-clamp catalog defines no attachment. Load never binds (0.88 vs 2.5 kN)</a:t>
             </a:r>
             <a:endParaRPr lang="en-US" sz="1100" dirty="0"/>
-          </a:p>
-        </p:txBody>
-      </p:sp>
-      <p:sp>
-        <p:nvSpPr>
-          <p:cNvPr id="10" name="catalog note card"/>
-          <p:cNvSpPr/>
-          <p:nvPr/>
-        </p:nvSpPr>
-        <p:spPr>
-          <a:xfrm>
-            <a:off x="7772400" y="4617720"/>
-            <a:ext cx="3867912" cy="1417320"/>
-          </a:xfrm>
-          <a:prstGeom prst="roundRect">
-            <a:avLst>
-              <a:gd name="adj" fmla="val 4516"/>
-            </a:avLst>
-          </a:prstGeom>
-          <a:solidFill>
-            <a:schemeClr val="bg2"/>
-          </a:solidFill>
-          <a:ln/>
-        </p:spPr>
-      </p:sp>
-      <p:sp>
-        <p:nvSpPr>
-          <p:cNvPr id="11" name="catalog note"/>
-          <p:cNvSpPr txBox="1"/>
-          <p:nvPr/>
-        </p:nvSpPr>
-        <p:spPr>
-          <a:xfrm>
-            <a:off x="8001000" y="4709160"/>
-            <a:ext cx="3429000" cy="1234440"/>
-          </a:xfrm>
-          <a:prstGeom prst="rect">
-            <a:avLst/>
-          </a:prstGeom>
-          <a:noFill/>
-          <a:ln/>
-        </p:spPr>
-        <p:txBody>
-          <a:bodyPr wrap="square" lIns="0" tIns="0" rIns="0" bIns="0" rtlCol="0" anchor="ctr"/>
-          <a:lstStyle/>
-          <a:p>
-            <a:pPr indent="0" marL="0">
-              <a:buNone/>
-            </a:pPr>
-            <a:r>
-              <a:rPr lang="en-US" sz="1250" b="1" dirty="0">
-                <a:solidFill>
-                  <a:schemeClr val="tx1"/>
-                </a:solidFill>
-              </a:rPr>
-              <a:t>Loads never bind; diameter and kind do. </a:t>
-            </a:r>
-            <a:pPr indent="0" marL="0">
-              <a:buNone/>
-            </a:pPr>
-            <a:r>
-              <a:rPr lang="en-US" sz="1250" dirty="0">
-                <a:solidFill>
-                  <a:schemeClr val="tx1"/>
-                </a:solidFill>
-              </a:rPr>
-              <a:t>“Generalise the catalog” becomes a measured requirement: small-bore clamps first, then tray, duct and conduit attachments.</a:t>
-            </a:r>
-            <a:endParaRPr lang="en-US" sz="1250" dirty="0"/>
           </a:p>
         </p:txBody>
       </p:sp>
@@ -9169,6 +9801,4763 @@
                   <a:schemeClr val="tx1"/>
                 </a:solidFill>
               </a:rPr>
+              <a:t>Appendix: the catalog stress test, with error bars</a:t>
+            </a:r>
+            <a:endParaRPr lang="en-US" sz="2600" dirty="0"/>
+          </a:p>
+        </p:txBody>
+      </p:sp>
+      <p:graphicFrame>
+        <p:nvGraphicFramePr>
+          <p:cNvPr id="17" name="per tier catalog table"/>
+          <p:cNvGraphicFramePr>
+            <a:graphicFrameLocks noGrp="1"/>
+          </p:cNvGraphicFramePr>
+          <p:nvPr>
+            <p:extLst>
+              <p:ext uri="{D42A27DB-BD31-4B8C-83A1-F6EECF244321}">
+                <p14:modId xmlns:p14="http://schemas.microsoft.com/office/powerpoint/2010/main" val="1579011935"/>
+              </p:ext>
+            </p:extLst>
+          </p:nvPr>
+        </p:nvGraphicFramePr>
+        <p:xfrm>
+          <a:off x="548640" y="1371600"/>
+          <a:ext cx="5852160" cy="914400"/>
+        </p:xfrm>
+        <a:graphic>
+          <a:graphicData uri="http://schemas.openxmlformats.org/drawingml/2006/table">
+            <a:tbl>
+              <a:tblPr/>
+              <a:tblGrid>
+                <a:gridCol w="731520"/>
+                <a:gridCol w="822960"/>
+                <a:gridCol w="2148840"/>
+                <a:gridCol w="2148840"/>
+              </a:tblGrid>
+              <a:tr h="301752">
+                <a:tc>
+                  <a:txBody>
+                    <a:bodyPr/>
+                    <a:lstStyle/>
+                    <a:p>
+                      <a:pPr algn="ctr" indent="0" marL="0">
+                        <a:buNone/>
+                      </a:pPr>
+                      <a:r>
+                        <a:rPr lang="en-US" sz="1100" b="1" dirty="0">
+                          <a:solidFill>
+                            <a:srgbClr val="FFFFFF"/>
+                          </a:solidFill>
+                          <a:latin typeface="Calibri" pitchFamily="34" charset="0"/>
+                          <a:ea typeface="Calibri" pitchFamily="34" charset="-122"/>
+                          <a:cs typeface="Calibri" pitchFamily="34" charset="-120"/>
+                        </a:rPr>
+                        <a:t>tier</a:t>
+                      </a:r>
+                      <a:endParaRPr lang="en-US" sz="1100" dirty="0">
+                        <a:latin typeface="Calibri" charset="0"/>
+                        <a:ea typeface="Calibri" charset="0"/>
+                        <a:cs typeface="Calibri" charset="0"/>
+                      </a:endParaRPr>
+                    </a:p>
+                  </a:txBody>
+                  <a:tcPr marL="36576" marR="36576" marT="36576" marB="36576" anchor="ctr">
+                    <a:lnL w="9525" cap="flat" cmpd="sng" algn="ctr">
+                      <a:solidFill>
+                        <a:srgbClr val="E1E0D9"/>
+                      </a:solidFill>
+                      <a:prstDash val="solid"/>
+                      <a:round/>
+                      <a:headEnd type="none" w="med" len="med"/>
+                      <a:tailEnd type="none" w="med" len="med"/>
+                    </a:lnL>
+                    <a:lnR w="9525" cap="flat" cmpd="sng" algn="ctr">
+                      <a:solidFill>
+                        <a:srgbClr val="E1E0D9"/>
+                      </a:solidFill>
+                      <a:prstDash val="solid"/>
+                      <a:round/>
+                      <a:headEnd type="none" w="med" len="med"/>
+                      <a:tailEnd type="none" w="med" len="med"/>
+                    </a:lnR>
+                    <a:lnT w="9525" cap="flat" cmpd="sng" algn="ctr">
+                      <a:solidFill>
+                        <a:srgbClr val="E1E0D9"/>
+                      </a:solidFill>
+                      <a:prstDash val="solid"/>
+                      <a:round/>
+                      <a:headEnd type="none" w="med" len="med"/>
+                      <a:tailEnd type="none" w="med" len="med"/>
+                    </a:lnT>
+                    <a:lnB w="9525" cap="flat" cmpd="sng" algn="ctr">
+                      <a:solidFill>
+                        <a:srgbClr val="E1E0D9"/>
+                      </a:solidFill>
+                      <a:prstDash val="solid"/>
+                      <a:round/>
+                      <a:headEnd type="none" w="med" len="med"/>
+                      <a:tailEnd type="none" w="med" len="med"/>
+                    </a:lnB>
+                    <a:solidFill>
+                      <a:srgbClr val="1F2933"/>
+                    </a:solidFill>
+                  </a:tcPr>
+                </a:tc>
+                <a:tc>
+                  <a:txBody>
+                    <a:bodyPr/>
+                    <a:lstStyle/>
+                    <a:p>
+                      <a:pPr algn="ctr" indent="0" marL="0">
+                        <a:buNone/>
+                      </a:pPr>
+                      <a:r>
+                        <a:rPr lang="en-US" sz="1100" b="1" dirty="0">
+                          <a:solidFill>
+                            <a:srgbClr val="FFFFFF"/>
+                          </a:solidFill>
+                          <a:latin typeface="Calibri" pitchFamily="34" charset="0"/>
+                          <a:ea typeface="Calibri" pitchFamily="34" charset="-122"/>
+                          <a:cs typeface="Calibri" pitchFamily="34" charset="-120"/>
+                        </a:rPr>
+                        <a:t>pipes</a:t>
+                      </a:r>
+                      <a:endParaRPr lang="en-US" sz="1100" dirty="0">
+                        <a:latin typeface="Calibri" charset="0"/>
+                        <a:ea typeface="Calibri" charset="0"/>
+                        <a:cs typeface="Calibri" charset="0"/>
+                      </a:endParaRPr>
+                    </a:p>
+                  </a:txBody>
+                  <a:tcPr marL="36576" marR="36576" marT="36576" marB="36576" anchor="ctr">
+                    <a:lnL w="9525" cap="flat" cmpd="sng" algn="ctr">
+                      <a:solidFill>
+                        <a:srgbClr val="E1E0D9"/>
+                      </a:solidFill>
+                      <a:prstDash val="solid"/>
+                      <a:round/>
+                      <a:headEnd type="none" w="med" len="med"/>
+                      <a:tailEnd type="none" w="med" len="med"/>
+                    </a:lnL>
+                    <a:lnR w="9525" cap="flat" cmpd="sng" algn="ctr">
+                      <a:solidFill>
+                        <a:srgbClr val="E1E0D9"/>
+                      </a:solidFill>
+                      <a:prstDash val="solid"/>
+                      <a:round/>
+                      <a:headEnd type="none" w="med" len="med"/>
+                      <a:tailEnd type="none" w="med" len="med"/>
+                    </a:lnR>
+                    <a:lnT w="9525" cap="flat" cmpd="sng" algn="ctr">
+                      <a:solidFill>
+                        <a:srgbClr val="E1E0D9"/>
+                      </a:solidFill>
+                      <a:prstDash val="solid"/>
+                      <a:round/>
+                      <a:headEnd type="none" w="med" len="med"/>
+                      <a:tailEnd type="none" w="med" len="med"/>
+                    </a:lnT>
+                    <a:lnB w="9525" cap="flat" cmpd="sng" algn="ctr">
+                      <a:solidFill>
+                        <a:srgbClr val="E1E0D9"/>
+                      </a:solidFill>
+                      <a:prstDash val="solid"/>
+                      <a:round/>
+                      <a:headEnd type="none" w="med" len="med"/>
+                      <a:tailEnd type="none" w="med" len="med"/>
+                    </a:lnB>
+                    <a:solidFill>
+                      <a:srgbClr val="1F2933"/>
+                    </a:solidFill>
+                  </a:tcPr>
+                </a:tc>
+                <a:tc>
+                  <a:txBody>
+                    <a:bodyPr/>
+                    <a:lstStyle/>
+                    <a:p>
+                      <a:pPr algn="ctr" indent="0" marL="0">
+                        <a:buNone/>
+                      </a:pPr>
+                      <a:r>
+                        <a:rPr lang="en-US" sz="1100" b="1" dirty="0">
+                          <a:solidFill>
+                            <a:srgbClr val="FFFFFF"/>
+                          </a:solidFill>
+                          <a:latin typeface="Calibri" pitchFamily="34" charset="0"/>
+                          <a:ea typeface="Calibri" pitchFamily="34" charset="-122"/>
+                          <a:cs typeface="Calibri" pitchFamily="34" charset="-120"/>
+                        </a:rPr>
+                        <a:t>benchmark %  (95 % CI)</a:t>
+                      </a:r>
+                      <a:endParaRPr lang="en-US" sz="1100" dirty="0">
+                        <a:latin typeface="Calibri" charset="0"/>
+                        <a:ea typeface="Calibri" charset="0"/>
+                        <a:cs typeface="Calibri" charset="0"/>
+                      </a:endParaRPr>
+                    </a:p>
+                  </a:txBody>
+                  <a:tcPr marL="36576" marR="36576" marT="36576" marB="36576" anchor="ctr">
+                    <a:lnL w="9525" cap="flat" cmpd="sng" algn="ctr">
+                      <a:solidFill>
+                        <a:srgbClr val="E1E0D9"/>
+                      </a:solidFill>
+                      <a:prstDash val="solid"/>
+                      <a:round/>
+                      <a:headEnd type="none" w="med" len="med"/>
+                      <a:tailEnd type="none" w="med" len="med"/>
+                    </a:lnL>
+                    <a:lnR w="9525" cap="flat" cmpd="sng" algn="ctr">
+                      <a:solidFill>
+                        <a:srgbClr val="E1E0D9"/>
+                      </a:solidFill>
+                      <a:prstDash val="solid"/>
+                      <a:round/>
+                      <a:headEnd type="none" w="med" len="med"/>
+                      <a:tailEnd type="none" w="med" len="med"/>
+                    </a:lnR>
+                    <a:lnT w="9525" cap="flat" cmpd="sng" algn="ctr">
+                      <a:solidFill>
+                        <a:srgbClr val="E1E0D9"/>
+                      </a:solidFill>
+                      <a:prstDash val="solid"/>
+                      <a:round/>
+                      <a:headEnd type="none" w="med" len="med"/>
+                      <a:tailEnd type="none" w="med" len="med"/>
+                    </a:lnT>
+                    <a:lnB w="9525" cap="flat" cmpd="sng" algn="ctr">
+                      <a:solidFill>
+                        <a:srgbClr val="E1E0D9"/>
+                      </a:solidFill>
+                      <a:prstDash val="solid"/>
+                      <a:round/>
+                      <a:headEnd type="none" w="med" len="med"/>
+                      <a:tailEnd type="none" w="med" len="med"/>
+                    </a:lnB>
+                    <a:solidFill>
+                      <a:srgbClr val="1F2933"/>
+                    </a:solidFill>
+                  </a:tcPr>
+                </a:tc>
+                <a:tc>
+                  <a:txBody>
+                    <a:bodyPr/>
+                    <a:lstStyle/>
+                    <a:p>
+                      <a:pPr algn="ctr" indent="0" marL="0">
+                        <a:buNone/>
+                      </a:pPr>
+                      <a:r>
+                        <a:rPr lang="en-US" sz="1100" b="1" dirty="0">
+                          <a:solidFill>
+                            <a:srgbClr val="FFFFFF"/>
+                          </a:solidFill>
+                          <a:latin typeface="Calibri" pitchFamily="34" charset="0"/>
+                          <a:ea typeface="Calibri" pitchFamily="34" charset="-122"/>
+                          <a:cs typeface="Calibri" pitchFamily="34" charset="-120"/>
+                        </a:rPr>
+                        <a:t>population %  (95 % CI)</a:t>
+                      </a:r>
+                      <a:endParaRPr lang="en-US" sz="1100" dirty="0">
+                        <a:latin typeface="Calibri" charset="0"/>
+                        <a:ea typeface="Calibri" charset="0"/>
+                        <a:cs typeface="Calibri" charset="0"/>
+                      </a:endParaRPr>
+                    </a:p>
+                  </a:txBody>
+                  <a:tcPr marL="36576" marR="36576" marT="36576" marB="36576" anchor="ctr">
+                    <a:lnL w="9525" cap="flat" cmpd="sng" algn="ctr">
+                      <a:solidFill>
+                        <a:srgbClr val="E1E0D9"/>
+                      </a:solidFill>
+                      <a:prstDash val="solid"/>
+                      <a:round/>
+                      <a:headEnd type="none" w="med" len="med"/>
+                      <a:tailEnd type="none" w="med" len="med"/>
+                    </a:lnL>
+                    <a:lnR w="9525" cap="flat" cmpd="sng" algn="ctr">
+                      <a:solidFill>
+                        <a:srgbClr val="E1E0D9"/>
+                      </a:solidFill>
+                      <a:prstDash val="solid"/>
+                      <a:round/>
+                      <a:headEnd type="none" w="med" len="med"/>
+                      <a:tailEnd type="none" w="med" len="med"/>
+                    </a:lnR>
+                    <a:lnT w="9525" cap="flat" cmpd="sng" algn="ctr">
+                      <a:solidFill>
+                        <a:srgbClr val="E1E0D9"/>
+                      </a:solidFill>
+                      <a:prstDash val="solid"/>
+                      <a:round/>
+                      <a:headEnd type="none" w="med" len="med"/>
+                      <a:tailEnd type="none" w="med" len="med"/>
+                    </a:lnT>
+                    <a:lnB w="9525" cap="flat" cmpd="sng" algn="ctr">
+                      <a:solidFill>
+                        <a:srgbClr val="E1E0D9"/>
+                      </a:solidFill>
+                      <a:prstDash val="solid"/>
+                      <a:round/>
+                      <a:headEnd type="none" w="med" len="med"/>
+                      <a:tailEnd type="none" w="med" len="med"/>
+                    </a:lnB>
+                    <a:solidFill>
+                      <a:srgbClr val="1F2933"/>
+                    </a:solidFill>
+                  </a:tcPr>
+                </a:tc>
+              </a:tr>
+              <a:tr h="301752">
+                <a:tc>
+                  <a:txBody>
+                    <a:bodyPr/>
+                    <a:lstStyle/>
+                    <a:p>
+                      <a:pPr algn="ctr" indent="0" marL="0">
+                        <a:buNone/>
+                      </a:pPr>
+                      <a:r>
+                        <a:rPr lang="en-US" sz="1100" dirty="0">
+                          <a:solidFill>
+                            <a:srgbClr val="0B0B0B"/>
+                          </a:solidFill>
+                          <a:latin typeface="Calibri" pitchFamily="34" charset="0"/>
+                          <a:ea typeface="Calibri" pitchFamily="34" charset="-122"/>
+                          <a:cs typeface="Calibri" pitchFamily="34" charset="-120"/>
+                        </a:rPr>
+                        <a:t>C1</a:t>
+                      </a:r>
+                      <a:endParaRPr lang="en-US" sz="1100" dirty="0">
+                        <a:latin typeface="Calibri" charset="0"/>
+                        <a:ea typeface="Calibri" charset="0"/>
+                        <a:cs typeface="Calibri" charset="0"/>
+                      </a:endParaRPr>
+                    </a:p>
+                  </a:txBody>
+                  <a:tcPr marL="36576" marR="36576" marT="36576" marB="36576" anchor="ctr">
+                    <a:lnL w="9525" cap="flat" cmpd="sng" algn="ctr">
+                      <a:solidFill>
+                        <a:srgbClr val="E1E0D9"/>
+                      </a:solidFill>
+                      <a:prstDash val="solid"/>
+                      <a:round/>
+                      <a:headEnd type="none" w="med" len="med"/>
+                      <a:tailEnd type="none" w="med" len="med"/>
+                    </a:lnL>
+                    <a:lnR w="9525" cap="flat" cmpd="sng" algn="ctr">
+                      <a:solidFill>
+                        <a:srgbClr val="E1E0D9"/>
+                      </a:solidFill>
+                      <a:prstDash val="solid"/>
+                      <a:round/>
+                      <a:headEnd type="none" w="med" len="med"/>
+                      <a:tailEnd type="none" w="med" len="med"/>
+                    </a:lnR>
+                    <a:lnT w="9525" cap="flat" cmpd="sng" algn="ctr">
+                      <a:solidFill>
+                        <a:srgbClr val="E1E0D9"/>
+                      </a:solidFill>
+                      <a:prstDash val="solid"/>
+                      <a:round/>
+                      <a:headEnd type="none" w="med" len="med"/>
+                      <a:tailEnd type="none" w="med" len="med"/>
+                    </a:lnT>
+                    <a:lnB w="9525" cap="flat" cmpd="sng" algn="ctr">
+                      <a:solidFill>
+                        <a:srgbClr val="E1E0D9"/>
+                      </a:solidFill>
+                      <a:prstDash val="solid"/>
+                      <a:round/>
+                      <a:headEnd type="none" w="med" len="med"/>
+                      <a:tailEnd type="none" w="med" len="med"/>
+                    </a:lnB>
+                  </a:tcPr>
+                </a:tc>
+                <a:tc>
+                  <a:txBody>
+                    <a:bodyPr/>
+                    <a:lstStyle/>
+                    <a:p>
+                      <a:pPr algn="ctr" indent="0" marL="0">
+                        <a:buNone/>
+                      </a:pPr>
+                      <a:r>
+                        <a:rPr lang="en-US" sz="1100" dirty="0">
+                          <a:solidFill>
+                            <a:srgbClr val="0B0B0B"/>
+                          </a:solidFill>
+                          <a:latin typeface="Calibri" pitchFamily="34" charset="0"/>
+                          <a:ea typeface="Calibri" pitchFamily="34" charset="-122"/>
+                          <a:cs typeface="Calibri" pitchFamily="34" charset="-120"/>
+                        </a:rPr>
+                        <a:t>71</a:t>
+                      </a:r>
+                      <a:endParaRPr lang="en-US" sz="1100" dirty="0">
+                        <a:latin typeface="Calibri" charset="0"/>
+                        <a:ea typeface="Calibri" charset="0"/>
+                        <a:cs typeface="Calibri" charset="0"/>
+                      </a:endParaRPr>
+                    </a:p>
+                  </a:txBody>
+                  <a:tcPr marL="36576" marR="36576" marT="36576" marB="36576" anchor="ctr">
+                    <a:lnL w="9525" cap="flat" cmpd="sng" algn="ctr">
+                      <a:solidFill>
+                        <a:srgbClr val="E1E0D9"/>
+                      </a:solidFill>
+                      <a:prstDash val="solid"/>
+                      <a:round/>
+                      <a:headEnd type="none" w="med" len="med"/>
+                      <a:tailEnd type="none" w="med" len="med"/>
+                    </a:lnL>
+                    <a:lnR w="9525" cap="flat" cmpd="sng" algn="ctr">
+                      <a:solidFill>
+                        <a:srgbClr val="E1E0D9"/>
+                      </a:solidFill>
+                      <a:prstDash val="solid"/>
+                      <a:round/>
+                      <a:headEnd type="none" w="med" len="med"/>
+                      <a:tailEnd type="none" w="med" len="med"/>
+                    </a:lnR>
+                    <a:lnT w="9525" cap="flat" cmpd="sng" algn="ctr">
+                      <a:solidFill>
+                        <a:srgbClr val="E1E0D9"/>
+                      </a:solidFill>
+                      <a:prstDash val="solid"/>
+                      <a:round/>
+                      <a:headEnd type="none" w="med" len="med"/>
+                      <a:tailEnd type="none" w="med" len="med"/>
+                    </a:lnT>
+                    <a:lnB w="9525" cap="flat" cmpd="sng" algn="ctr">
+                      <a:solidFill>
+                        <a:srgbClr val="E1E0D9"/>
+                      </a:solidFill>
+                      <a:prstDash val="solid"/>
+                      <a:round/>
+                      <a:headEnd type="none" w="med" len="med"/>
+                      <a:tailEnd type="none" w="med" len="med"/>
+                    </a:lnB>
+                  </a:tcPr>
+                </a:tc>
+                <a:tc>
+                  <a:txBody>
+                    <a:bodyPr/>
+                    <a:lstStyle/>
+                    <a:p>
+                      <a:pPr algn="ctr" indent="0" marL="0">
+                        <a:buNone/>
+                      </a:pPr>
+                      <a:r>
+                        <a:rPr lang="en-US" sz="1100" dirty="0">
+                          <a:solidFill>
+                            <a:srgbClr val="0B0B0B"/>
+                          </a:solidFill>
+                          <a:latin typeface="Calibri" pitchFamily="34" charset="0"/>
+                          <a:ea typeface="Calibri" pitchFamily="34" charset="-122"/>
+                          <a:cs typeface="Calibri" pitchFamily="34" charset="-120"/>
+                        </a:rPr>
+                        <a:t>11.3 (4.1–19.1)</a:t>
+                      </a:r>
+                      <a:endParaRPr lang="en-US" sz="1100" dirty="0">
+                        <a:latin typeface="Calibri" charset="0"/>
+                        <a:ea typeface="Calibri" charset="0"/>
+                        <a:cs typeface="Calibri" charset="0"/>
+                      </a:endParaRPr>
+                    </a:p>
+                  </a:txBody>
+                  <a:tcPr marL="36576" marR="36576" marT="36576" marB="36576" anchor="ctr">
+                    <a:lnL w="9525" cap="flat" cmpd="sng" algn="ctr">
+                      <a:solidFill>
+                        <a:srgbClr val="E1E0D9"/>
+                      </a:solidFill>
+                      <a:prstDash val="solid"/>
+                      <a:round/>
+                      <a:headEnd type="none" w="med" len="med"/>
+                      <a:tailEnd type="none" w="med" len="med"/>
+                    </a:lnL>
+                    <a:lnR w="9525" cap="flat" cmpd="sng" algn="ctr">
+                      <a:solidFill>
+                        <a:srgbClr val="E1E0D9"/>
+                      </a:solidFill>
+                      <a:prstDash val="solid"/>
+                      <a:round/>
+                      <a:headEnd type="none" w="med" len="med"/>
+                      <a:tailEnd type="none" w="med" len="med"/>
+                    </a:lnR>
+                    <a:lnT w="9525" cap="flat" cmpd="sng" algn="ctr">
+                      <a:solidFill>
+                        <a:srgbClr val="E1E0D9"/>
+                      </a:solidFill>
+                      <a:prstDash val="solid"/>
+                      <a:round/>
+                      <a:headEnd type="none" w="med" len="med"/>
+                      <a:tailEnd type="none" w="med" len="med"/>
+                    </a:lnT>
+                    <a:lnB w="9525" cap="flat" cmpd="sng" algn="ctr">
+                      <a:solidFill>
+                        <a:srgbClr val="E1E0D9"/>
+                      </a:solidFill>
+                      <a:prstDash val="solid"/>
+                      <a:round/>
+                      <a:headEnd type="none" w="med" len="med"/>
+                      <a:tailEnd type="none" w="med" len="med"/>
+                    </a:lnB>
+                  </a:tcPr>
+                </a:tc>
+                <a:tc>
+                  <a:txBody>
+                    <a:bodyPr/>
+                    <a:lstStyle/>
+                    <a:p>
+                      <a:pPr algn="ctr" indent="0" marL="0">
+                        <a:buNone/>
+                      </a:pPr>
+                      <a:r>
+                        <a:rPr lang="en-US" sz="1100" dirty="0">
+                          <a:solidFill>
+                            <a:srgbClr val="0B0B0B"/>
+                          </a:solidFill>
+                          <a:latin typeface="Calibri" pitchFamily="34" charset="0"/>
+                          <a:ea typeface="Calibri" pitchFamily="34" charset="-122"/>
+                          <a:cs typeface="Calibri" pitchFamily="34" charset="-120"/>
+                        </a:rPr>
+                        <a:t>11.4 (9.6–13.3)</a:t>
+                      </a:r>
+                      <a:endParaRPr lang="en-US" sz="1100" dirty="0">
+                        <a:latin typeface="Calibri" charset="0"/>
+                        <a:ea typeface="Calibri" charset="0"/>
+                        <a:cs typeface="Calibri" charset="0"/>
+                      </a:endParaRPr>
+                    </a:p>
+                  </a:txBody>
+                  <a:tcPr marL="36576" marR="36576" marT="36576" marB="36576" anchor="ctr">
+                    <a:lnL w="9525" cap="flat" cmpd="sng" algn="ctr">
+                      <a:solidFill>
+                        <a:srgbClr val="E1E0D9"/>
+                      </a:solidFill>
+                      <a:prstDash val="solid"/>
+                      <a:round/>
+                      <a:headEnd type="none" w="med" len="med"/>
+                      <a:tailEnd type="none" w="med" len="med"/>
+                    </a:lnL>
+                    <a:lnR w="9525" cap="flat" cmpd="sng" algn="ctr">
+                      <a:solidFill>
+                        <a:srgbClr val="E1E0D9"/>
+                      </a:solidFill>
+                      <a:prstDash val="solid"/>
+                      <a:round/>
+                      <a:headEnd type="none" w="med" len="med"/>
+                      <a:tailEnd type="none" w="med" len="med"/>
+                    </a:lnR>
+                    <a:lnT w="9525" cap="flat" cmpd="sng" algn="ctr">
+                      <a:solidFill>
+                        <a:srgbClr val="E1E0D9"/>
+                      </a:solidFill>
+                      <a:prstDash val="solid"/>
+                      <a:round/>
+                      <a:headEnd type="none" w="med" len="med"/>
+                      <a:tailEnd type="none" w="med" len="med"/>
+                    </a:lnT>
+                    <a:lnB w="9525" cap="flat" cmpd="sng" algn="ctr">
+                      <a:solidFill>
+                        <a:srgbClr val="E1E0D9"/>
+                      </a:solidFill>
+                      <a:prstDash val="solid"/>
+                      <a:round/>
+                      <a:headEnd type="none" w="med" len="med"/>
+                      <a:tailEnd type="none" w="med" len="med"/>
+                    </a:lnB>
+                  </a:tcPr>
+                </a:tc>
+              </a:tr>
+              <a:tr h="301752">
+                <a:tc>
+                  <a:txBody>
+                    <a:bodyPr/>
+                    <a:lstStyle/>
+                    <a:p>
+                      <a:pPr algn="ctr" indent="0" marL="0">
+                        <a:buNone/>
+                      </a:pPr>
+                      <a:r>
+                        <a:rPr lang="en-US" sz="1100" dirty="0">
+                          <a:solidFill>
+                            <a:srgbClr val="0B0B0B"/>
+                          </a:solidFill>
+                          <a:latin typeface="Calibri" pitchFamily="34" charset="0"/>
+                          <a:ea typeface="Calibri" pitchFamily="34" charset="-122"/>
+                          <a:cs typeface="Calibri" pitchFamily="34" charset="-120"/>
+                        </a:rPr>
+                        <a:t>C2</a:t>
+                      </a:r>
+                      <a:endParaRPr lang="en-US" sz="1100" dirty="0">
+                        <a:latin typeface="Calibri" charset="0"/>
+                        <a:ea typeface="Calibri" charset="0"/>
+                        <a:cs typeface="Calibri" charset="0"/>
+                      </a:endParaRPr>
+                    </a:p>
+                  </a:txBody>
+                  <a:tcPr marL="36576" marR="36576" marT="36576" marB="36576" anchor="ctr">
+                    <a:lnL w="9525" cap="flat" cmpd="sng" algn="ctr">
+                      <a:solidFill>
+                        <a:srgbClr val="E1E0D9"/>
+                      </a:solidFill>
+                      <a:prstDash val="solid"/>
+                      <a:round/>
+                      <a:headEnd type="none" w="med" len="med"/>
+                      <a:tailEnd type="none" w="med" len="med"/>
+                    </a:lnL>
+                    <a:lnR w="9525" cap="flat" cmpd="sng" algn="ctr">
+                      <a:solidFill>
+                        <a:srgbClr val="E1E0D9"/>
+                      </a:solidFill>
+                      <a:prstDash val="solid"/>
+                      <a:round/>
+                      <a:headEnd type="none" w="med" len="med"/>
+                      <a:tailEnd type="none" w="med" len="med"/>
+                    </a:lnR>
+                    <a:lnT w="9525" cap="flat" cmpd="sng" algn="ctr">
+                      <a:solidFill>
+                        <a:srgbClr val="E1E0D9"/>
+                      </a:solidFill>
+                      <a:prstDash val="solid"/>
+                      <a:round/>
+                      <a:headEnd type="none" w="med" len="med"/>
+                      <a:tailEnd type="none" w="med" len="med"/>
+                    </a:lnT>
+                    <a:lnB w="9525" cap="flat" cmpd="sng" algn="ctr">
+                      <a:solidFill>
+                        <a:srgbClr val="E1E0D9"/>
+                      </a:solidFill>
+                      <a:prstDash val="solid"/>
+                      <a:round/>
+                      <a:headEnd type="none" w="med" len="med"/>
+                      <a:tailEnd type="none" w="med" len="med"/>
+                    </a:lnB>
+                  </a:tcPr>
+                </a:tc>
+                <a:tc>
+                  <a:txBody>
+                    <a:bodyPr/>
+                    <a:lstStyle/>
+                    <a:p>
+                      <a:pPr algn="ctr" indent="0" marL="0">
+                        <a:buNone/>
+                      </a:pPr>
+                      <a:r>
+                        <a:rPr lang="en-US" sz="1100" dirty="0">
+                          <a:solidFill>
+                            <a:srgbClr val="0B0B0B"/>
+                          </a:solidFill>
+                          <a:latin typeface="Calibri" pitchFamily="34" charset="0"/>
+                          <a:ea typeface="Calibri" pitchFamily="34" charset="-122"/>
+                          <a:cs typeface="Calibri" pitchFamily="34" charset="-120"/>
+                        </a:rPr>
+                        <a:t>147</a:t>
+                      </a:r>
+                      <a:endParaRPr lang="en-US" sz="1100" dirty="0">
+                        <a:latin typeface="Calibri" charset="0"/>
+                        <a:ea typeface="Calibri" charset="0"/>
+                        <a:cs typeface="Calibri" charset="0"/>
+                      </a:endParaRPr>
+                    </a:p>
+                  </a:txBody>
+                  <a:tcPr marL="36576" marR="36576" marT="36576" marB="36576" anchor="ctr">
+                    <a:lnL w="9525" cap="flat" cmpd="sng" algn="ctr">
+                      <a:solidFill>
+                        <a:srgbClr val="E1E0D9"/>
+                      </a:solidFill>
+                      <a:prstDash val="solid"/>
+                      <a:round/>
+                      <a:headEnd type="none" w="med" len="med"/>
+                      <a:tailEnd type="none" w="med" len="med"/>
+                    </a:lnL>
+                    <a:lnR w="9525" cap="flat" cmpd="sng" algn="ctr">
+                      <a:solidFill>
+                        <a:srgbClr val="E1E0D9"/>
+                      </a:solidFill>
+                      <a:prstDash val="solid"/>
+                      <a:round/>
+                      <a:headEnd type="none" w="med" len="med"/>
+                      <a:tailEnd type="none" w="med" len="med"/>
+                    </a:lnR>
+                    <a:lnT w="9525" cap="flat" cmpd="sng" algn="ctr">
+                      <a:solidFill>
+                        <a:srgbClr val="E1E0D9"/>
+                      </a:solidFill>
+                      <a:prstDash val="solid"/>
+                      <a:round/>
+                      <a:headEnd type="none" w="med" len="med"/>
+                      <a:tailEnd type="none" w="med" len="med"/>
+                    </a:lnT>
+                    <a:lnB w="9525" cap="flat" cmpd="sng" algn="ctr">
+                      <a:solidFill>
+                        <a:srgbClr val="E1E0D9"/>
+                      </a:solidFill>
+                      <a:prstDash val="solid"/>
+                      <a:round/>
+                      <a:headEnd type="none" w="med" len="med"/>
+                      <a:tailEnd type="none" w="med" len="med"/>
+                    </a:lnB>
+                  </a:tcPr>
+                </a:tc>
+                <a:tc>
+                  <a:txBody>
+                    <a:bodyPr/>
+                    <a:lstStyle/>
+                    <a:p>
+                      <a:pPr algn="ctr" indent="0" marL="0">
+                        <a:buNone/>
+                      </a:pPr>
+                      <a:r>
+                        <a:rPr lang="en-US" sz="1100" dirty="0">
+                          <a:solidFill>
+                            <a:srgbClr val="0B0B0B"/>
+                          </a:solidFill>
+                          <a:latin typeface="Calibri" pitchFamily="34" charset="0"/>
+                          <a:ea typeface="Calibri" pitchFamily="34" charset="-122"/>
+                          <a:cs typeface="Calibri" pitchFamily="34" charset="-120"/>
+                        </a:rPr>
+                        <a:t>12.2 (6.5–18.8)</a:t>
+                      </a:r>
+                      <a:endParaRPr lang="en-US" sz="1100" dirty="0">
+                        <a:latin typeface="Calibri" charset="0"/>
+                        <a:ea typeface="Calibri" charset="0"/>
+                        <a:cs typeface="Calibri" charset="0"/>
+                      </a:endParaRPr>
+                    </a:p>
+                  </a:txBody>
+                  <a:tcPr marL="36576" marR="36576" marT="36576" marB="36576" anchor="ctr">
+                    <a:lnL w="9525" cap="flat" cmpd="sng" algn="ctr">
+                      <a:solidFill>
+                        <a:srgbClr val="E1E0D9"/>
+                      </a:solidFill>
+                      <a:prstDash val="solid"/>
+                      <a:round/>
+                      <a:headEnd type="none" w="med" len="med"/>
+                      <a:tailEnd type="none" w="med" len="med"/>
+                    </a:lnL>
+                    <a:lnR w="9525" cap="flat" cmpd="sng" algn="ctr">
+                      <a:solidFill>
+                        <a:srgbClr val="E1E0D9"/>
+                      </a:solidFill>
+                      <a:prstDash val="solid"/>
+                      <a:round/>
+                      <a:headEnd type="none" w="med" len="med"/>
+                      <a:tailEnd type="none" w="med" len="med"/>
+                    </a:lnR>
+                    <a:lnT w="9525" cap="flat" cmpd="sng" algn="ctr">
+                      <a:solidFill>
+                        <a:srgbClr val="E1E0D9"/>
+                      </a:solidFill>
+                      <a:prstDash val="solid"/>
+                      <a:round/>
+                      <a:headEnd type="none" w="med" len="med"/>
+                      <a:tailEnd type="none" w="med" len="med"/>
+                    </a:lnT>
+                    <a:lnB w="9525" cap="flat" cmpd="sng" algn="ctr">
+                      <a:solidFill>
+                        <a:srgbClr val="E1E0D9"/>
+                      </a:solidFill>
+                      <a:prstDash val="solid"/>
+                      <a:round/>
+                      <a:headEnd type="none" w="med" len="med"/>
+                      <a:tailEnd type="none" w="med" len="med"/>
+                    </a:lnB>
+                  </a:tcPr>
+                </a:tc>
+                <a:tc>
+                  <a:txBody>
+                    <a:bodyPr/>
+                    <a:lstStyle/>
+                    <a:p>
+                      <a:pPr algn="ctr" indent="0" marL="0">
+                        <a:buNone/>
+                      </a:pPr>
+                      <a:r>
+                        <a:rPr lang="en-US" sz="1100" dirty="0">
+                          <a:solidFill>
+                            <a:srgbClr val="0B0B0B"/>
+                          </a:solidFill>
+                          <a:latin typeface="Calibri" pitchFamily="34" charset="0"/>
+                          <a:ea typeface="Calibri" pitchFamily="34" charset="-122"/>
+                          <a:cs typeface="Calibri" pitchFamily="34" charset="-120"/>
+                        </a:rPr>
+                        <a:t>10.9 (9.4–12.5)</a:t>
+                      </a:r>
+                      <a:endParaRPr lang="en-US" sz="1100" dirty="0">
+                        <a:latin typeface="Calibri" charset="0"/>
+                        <a:ea typeface="Calibri" charset="0"/>
+                        <a:cs typeface="Calibri" charset="0"/>
+                      </a:endParaRPr>
+                    </a:p>
+                  </a:txBody>
+                  <a:tcPr marL="36576" marR="36576" marT="36576" marB="36576" anchor="ctr">
+                    <a:lnL w="9525" cap="flat" cmpd="sng" algn="ctr">
+                      <a:solidFill>
+                        <a:srgbClr val="E1E0D9"/>
+                      </a:solidFill>
+                      <a:prstDash val="solid"/>
+                      <a:round/>
+                      <a:headEnd type="none" w="med" len="med"/>
+                      <a:tailEnd type="none" w="med" len="med"/>
+                    </a:lnL>
+                    <a:lnR w="9525" cap="flat" cmpd="sng" algn="ctr">
+                      <a:solidFill>
+                        <a:srgbClr val="E1E0D9"/>
+                      </a:solidFill>
+                      <a:prstDash val="solid"/>
+                      <a:round/>
+                      <a:headEnd type="none" w="med" len="med"/>
+                      <a:tailEnd type="none" w="med" len="med"/>
+                    </a:lnR>
+                    <a:lnT w="9525" cap="flat" cmpd="sng" algn="ctr">
+                      <a:solidFill>
+                        <a:srgbClr val="E1E0D9"/>
+                      </a:solidFill>
+                      <a:prstDash val="solid"/>
+                      <a:round/>
+                      <a:headEnd type="none" w="med" len="med"/>
+                      <a:tailEnd type="none" w="med" len="med"/>
+                    </a:lnT>
+                    <a:lnB w="9525" cap="flat" cmpd="sng" algn="ctr">
+                      <a:solidFill>
+                        <a:srgbClr val="E1E0D9"/>
+                      </a:solidFill>
+                      <a:prstDash val="solid"/>
+                      <a:round/>
+                      <a:headEnd type="none" w="med" len="med"/>
+                      <a:tailEnd type="none" w="med" len="med"/>
+                    </a:lnB>
+                  </a:tcPr>
+                </a:tc>
+              </a:tr>
+              <a:tr h="301752">
+                <a:tc>
+                  <a:txBody>
+                    <a:bodyPr/>
+                    <a:lstStyle/>
+                    <a:p>
+                      <a:pPr algn="ctr" indent="0" marL="0">
+                        <a:buNone/>
+                      </a:pPr>
+                      <a:r>
+                        <a:rPr lang="en-US" sz="1100" dirty="0">
+                          <a:solidFill>
+                            <a:srgbClr val="0B0B0B"/>
+                          </a:solidFill>
+                          <a:latin typeface="Calibri" pitchFamily="34" charset="0"/>
+                          <a:ea typeface="Calibri" pitchFamily="34" charset="-122"/>
+                          <a:cs typeface="Calibri" pitchFamily="34" charset="-120"/>
+                        </a:rPr>
+                        <a:t>C3</a:t>
+                      </a:r>
+                      <a:endParaRPr lang="en-US" sz="1100" dirty="0">
+                        <a:latin typeface="Calibri" charset="0"/>
+                        <a:ea typeface="Calibri" charset="0"/>
+                        <a:cs typeface="Calibri" charset="0"/>
+                      </a:endParaRPr>
+                    </a:p>
+                  </a:txBody>
+                  <a:tcPr marL="36576" marR="36576" marT="36576" marB="36576" anchor="ctr">
+                    <a:lnL w="9525" cap="flat" cmpd="sng" algn="ctr">
+                      <a:solidFill>
+                        <a:srgbClr val="E1E0D9"/>
+                      </a:solidFill>
+                      <a:prstDash val="solid"/>
+                      <a:round/>
+                      <a:headEnd type="none" w="med" len="med"/>
+                      <a:tailEnd type="none" w="med" len="med"/>
+                    </a:lnL>
+                    <a:lnR w="9525" cap="flat" cmpd="sng" algn="ctr">
+                      <a:solidFill>
+                        <a:srgbClr val="E1E0D9"/>
+                      </a:solidFill>
+                      <a:prstDash val="solid"/>
+                      <a:round/>
+                      <a:headEnd type="none" w="med" len="med"/>
+                      <a:tailEnd type="none" w="med" len="med"/>
+                    </a:lnR>
+                    <a:lnT w="9525" cap="flat" cmpd="sng" algn="ctr">
+                      <a:solidFill>
+                        <a:srgbClr val="E1E0D9"/>
+                      </a:solidFill>
+                      <a:prstDash val="solid"/>
+                      <a:round/>
+                      <a:headEnd type="none" w="med" len="med"/>
+                      <a:tailEnd type="none" w="med" len="med"/>
+                    </a:lnT>
+                    <a:lnB w="9525" cap="flat" cmpd="sng" algn="ctr">
+                      <a:solidFill>
+                        <a:srgbClr val="E1E0D9"/>
+                      </a:solidFill>
+                      <a:prstDash val="solid"/>
+                      <a:round/>
+                      <a:headEnd type="none" w="med" len="med"/>
+                      <a:tailEnd type="none" w="med" len="med"/>
+                    </a:lnB>
+                  </a:tcPr>
+                </a:tc>
+                <a:tc>
+                  <a:txBody>
+                    <a:bodyPr/>
+                    <a:lstStyle/>
+                    <a:p>
+                      <a:pPr algn="ctr" indent="0" marL="0">
+                        <a:buNone/>
+                      </a:pPr>
+                      <a:r>
+                        <a:rPr lang="en-US" sz="1100" dirty="0">
+                          <a:solidFill>
+                            <a:srgbClr val="0B0B0B"/>
+                          </a:solidFill>
+                          <a:latin typeface="Calibri" pitchFamily="34" charset="0"/>
+                          <a:ea typeface="Calibri" pitchFamily="34" charset="-122"/>
+                          <a:cs typeface="Calibri" pitchFamily="34" charset="-120"/>
+                        </a:rPr>
+                        <a:t>203</a:t>
+                      </a:r>
+                      <a:endParaRPr lang="en-US" sz="1100" dirty="0">
+                        <a:latin typeface="Calibri" charset="0"/>
+                        <a:ea typeface="Calibri" charset="0"/>
+                        <a:cs typeface="Calibri" charset="0"/>
+                      </a:endParaRPr>
+                    </a:p>
+                  </a:txBody>
+                  <a:tcPr marL="36576" marR="36576" marT="36576" marB="36576" anchor="ctr">
+                    <a:lnL w="9525" cap="flat" cmpd="sng" algn="ctr">
+                      <a:solidFill>
+                        <a:srgbClr val="E1E0D9"/>
+                      </a:solidFill>
+                      <a:prstDash val="solid"/>
+                      <a:round/>
+                      <a:headEnd type="none" w="med" len="med"/>
+                      <a:tailEnd type="none" w="med" len="med"/>
+                    </a:lnL>
+                    <a:lnR w="9525" cap="flat" cmpd="sng" algn="ctr">
+                      <a:solidFill>
+                        <a:srgbClr val="E1E0D9"/>
+                      </a:solidFill>
+                      <a:prstDash val="solid"/>
+                      <a:round/>
+                      <a:headEnd type="none" w="med" len="med"/>
+                      <a:tailEnd type="none" w="med" len="med"/>
+                    </a:lnR>
+                    <a:lnT w="9525" cap="flat" cmpd="sng" algn="ctr">
+                      <a:solidFill>
+                        <a:srgbClr val="E1E0D9"/>
+                      </a:solidFill>
+                      <a:prstDash val="solid"/>
+                      <a:round/>
+                      <a:headEnd type="none" w="med" len="med"/>
+                      <a:tailEnd type="none" w="med" len="med"/>
+                    </a:lnT>
+                    <a:lnB w="9525" cap="flat" cmpd="sng" algn="ctr">
+                      <a:solidFill>
+                        <a:srgbClr val="E1E0D9"/>
+                      </a:solidFill>
+                      <a:prstDash val="solid"/>
+                      <a:round/>
+                      <a:headEnd type="none" w="med" len="med"/>
+                      <a:tailEnd type="none" w="med" len="med"/>
+                    </a:lnB>
+                  </a:tcPr>
+                </a:tc>
+                <a:tc>
+                  <a:txBody>
+                    <a:bodyPr/>
+                    <a:lstStyle/>
+                    <a:p>
+                      <a:pPr algn="ctr" indent="0" marL="0">
+                        <a:buNone/>
+                      </a:pPr>
+                      <a:r>
+                        <a:rPr lang="en-US" sz="1100" dirty="0">
+                          <a:solidFill>
+                            <a:srgbClr val="0B0B0B"/>
+                          </a:solidFill>
+                          <a:latin typeface="Calibri" pitchFamily="34" charset="0"/>
+                          <a:ea typeface="Calibri" pitchFamily="34" charset="-122"/>
+                          <a:cs typeface="Calibri" pitchFamily="34" charset="-120"/>
+                        </a:rPr>
+                        <a:t>10.3 (5.7–15.6)</a:t>
+                      </a:r>
+                      <a:endParaRPr lang="en-US" sz="1100" dirty="0">
+                        <a:latin typeface="Calibri" charset="0"/>
+                        <a:ea typeface="Calibri" charset="0"/>
+                        <a:cs typeface="Calibri" charset="0"/>
+                      </a:endParaRPr>
+                    </a:p>
+                  </a:txBody>
+                  <a:tcPr marL="36576" marR="36576" marT="36576" marB="36576" anchor="ctr">
+                    <a:lnL w="9525" cap="flat" cmpd="sng" algn="ctr">
+                      <a:solidFill>
+                        <a:srgbClr val="E1E0D9"/>
+                      </a:solidFill>
+                      <a:prstDash val="solid"/>
+                      <a:round/>
+                      <a:headEnd type="none" w="med" len="med"/>
+                      <a:tailEnd type="none" w="med" len="med"/>
+                    </a:lnL>
+                    <a:lnR w="9525" cap="flat" cmpd="sng" algn="ctr">
+                      <a:solidFill>
+                        <a:srgbClr val="E1E0D9"/>
+                      </a:solidFill>
+                      <a:prstDash val="solid"/>
+                      <a:round/>
+                      <a:headEnd type="none" w="med" len="med"/>
+                      <a:tailEnd type="none" w="med" len="med"/>
+                    </a:lnR>
+                    <a:lnT w="9525" cap="flat" cmpd="sng" algn="ctr">
+                      <a:solidFill>
+                        <a:srgbClr val="E1E0D9"/>
+                      </a:solidFill>
+                      <a:prstDash val="solid"/>
+                      <a:round/>
+                      <a:headEnd type="none" w="med" len="med"/>
+                      <a:tailEnd type="none" w="med" len="med"/>
+                    </a:lnT>
+                    <a:lnB w="9525" cap="flat" cmpd="sng" algn="ctr">
+                      <a:solidFill>
+                        <a:srgbClr val="E1E0D9"/>
+                      </a:solidFill>
+                      <a:prstDash val="solid"/>
+                      <a:round/>
+                      <a:headEnd type="none" w="med" len="med"/>
+                      <a:tailEnd type="none" w="med" len="med"/>
+                    </a:lnB>
+                  </a:tcPr>
+                </a:tc>
+                <a:tc>
+                  <a:txBody>
+                    <a:bodyPr/>
+                    <a:lstStyle/>
+                    <a:p>
+                      <a:pPr algn="ctr" indent="0" marL="0">
+                        <a:buNone/>
+                      </a:pPr>
+                      <a:r>
+                        <a:rPr lang="en-US" sz="1100" dirty="0">
+                          <a:solidFill>
+                            <a:srgbClr val="0B0B0B"/>
+                          </a:solidFill>
+                          <a:latin typeface="Calibri" pitchFamily="34" charset="0"/>
+                          <a:ea typeface="Calibri" pitchFamily="34" charset="-122"/>
+                          <a:cs typeface="Calibri" pitchFamily="34" charset="-120"/>
+                        </a:rPr>
+                        <a:t>10.8 (9.6–12.0)</a:t>
+                      </a:r>
+                      <a:endParaRPr lang="en-US" sz="1100" dirty="0">
+                        <a:latin typeface="Calibri" charset="0"/>
+                        <a:ea typeface="Calibri" charset="0"/>
+                        <a:cs typeface="Calibri" charset="0"/>
+                      </a:endParaRPr>
+                    </a:p>
+                  </a:txBody>
+                  <a:tcPr marL="36576" marR="36576" marT="36576" marB="36576" anchor="ctr">
+                    <a:lnL w="9525" cap="flat" cmpd="sng" algn="ctr">
+                      <a:solidFill>
+                        <a:srgbClr val="E1E0D9"/>
+                      </a:solidFill>
+                      <a:prstDash val="solid"/>
+                      <a:round/>
+                      <a:headEnd type="none" w="med" len="med"/>
+                      <a:tailEnd type="none" w="med" len="med"/>
+                    </a:lnL>
+                    <a:lnR w="9525" cap="flat" cmpd="sng" algn="ctr">
+                      <a:solidFill>
+                        <a:srgbClr val="E1E0D9"/>
+                      </a:solidFill>
+                      <a:prstDash val="solid"/>
+                      <a:round/>
+                      <a:headEnd type="none" w="med" len="med"/>
+                      <a:tailEnd type="none" w="med" len="med"/>
+                    </a:lnR>
+                    <a:lnT w="9525" cap="flat" cmpd="sng" algn="ctr">
+                      <a:solidFill>
+                        <a:srgbClr val="E1E0D9"/>
+                      </a:solidFill>
+                      <a:prstDash val="solid"/>
+                      <a:round/>
+                      <a:headEnd type="none" w="med" len="med"/>
+                      <a:tailEnd type="none" w="med" len="med"/>
+                    </a:lnT>
+                    <a:lnB w="9525" cap="flat" cmpd="sng" algn="ctr">
+                      <a:solidFill>
+                        <a:srgbClr val="E1E0D9"/>
+                      </a:solidFill>
+                      <a:prstDash val="solid"/>
+                      <a:round/>
+                      <a:headEnd type="none" w="med" len="med"/>
+                      <a:tailEnd type="none" w="med" len="med"/>
+                    </a:lnB>
+                  </a:tcPr>
+                </a:tc>
+              </a:tr>
+              <a:tr h="301752">
+                <a:tc>
+                  <a:txBody>
+                    <a:bodyPr/>
+                    <a:lstStyle/>
+                    <a:p>
+                      <a:pPr algn="ctr" indent="0" marL="0">
+                        <a:buNone/>
+                      </a:pPr>
+                      <a:r>
+                        <a:rPr lang="en-US" sz="1100" dirty="0">
+                          <a:solidFill>
+                            <a:srgbClr val="0B0B0B"/>
+                          </a:solidFill>
+                          <a:latin typeface="Calibri" pitchFamily="34" charset="0"/>
+                          <a:ea typeface="Calibri" pitchFamily="34" charset="-122"/>
+                          <a:cs typeface="Calibri" pitchFamily="34" charset="-120"/>
+                        </a:rPr>
+                        <a:t>C4</a:t>
+                      </a:r>
+                      <a:endParaRPr lang="en-US" sz="1100" dirty="0">
+                        <a:latin typeface="Calibri" charset="0"/>
+                        <a:ea typeface="Calibri" charset="0"/>
+                        <a:cs typeface="Calibri" charset="0"/>
+                      </a:endParaRPr>
+                    </a:p>
+                  </a:txBody>
+                  <a:tcPr marL="36576" marR="36576" marT="36576" marB="36576" anchor="ctr">
+                    <a:lnL w="9525" cap="flat" cmpd="sng" algn="ctr">
+                      <a:solidFill>
+                        <a:srgbClr val="E1E0D9"/>
+                      </a:solidFill>
+                      <a:prstDash val="solid"/>
+                      <a:round/>
+                      <a:headEnd type="none" w="med" len="med"/>
+                      <a:tailEnd type="none" w="med" len="med"/>
+                    </a:lnL>
+                    <a:lnR w="9525" cap="flat" cmpd="sng" algn="ctr">
+                      <a:solidFill>
+                        <a:srgbClr val="E1E0D9"/>
+                      </a:solidFill>
+                      <a:prstDash val="solid"/>
+                      <a:round/>
+                      <a:headEnd type="none" w="med" len="med"/>
+                      <a:tailEnd type="none" w="med" len="med"/>
+                    </a:lnR>
+                    <a:lnT w="9525" cap="flat" cmpd="sng" algn="ctr">
+                      <a:solidFill>
+                        <a:srgbClr val="E1E0D9"/>
+                      </a:solidFill>
+                      <a:prstDash val="solid"/>
+                      <a:round/>
+                      <a:headEnd type="none" w="med" len="med"/>
+                      <a:tailEnd type="none" w="med" len="med"/>
+                    </a:lnT>
+                    <a:lnB w="9525" cap="flat" cmpd="sng" algn="ctr">
+                      <a:solidFill>
+                        <a:srgbClr val="E1E0D9"/>
+                      </a:solidFill>
+                      <a:prstDash val="solid"/>
+                      <a:round/>
+                      <a:headEnd type="none" w="med" len="med"/>
+                      <a:tailEnd type="none" w="med" len="med"/>
+                    </a:lnB>
+                  </a:tcPr>
+                </a:tc>
+                <a:tc>
+                  <a:txBody>
+                    <a:bodyPr/>
+                    <a:lstStyle/>
+                    <a:p>
+                      <a:pPr algn="ctr" indent="0" marL="0">
+                        <a:buNone/>
+                      </a:pPr>
+                      <a:r>
+                        <a:rPr lang="en-US" sz="1100" dirty="0">
+                          <a:solidFill>
+                            <a:srgbClr val="0B0B0B"/>
+                          </a:solidFill>
+                          <a:latin typeface="Calibri" pitchFamily="34" charset="0"/>
+                          <a:ea typeface="Calibri" pitchFamily="34" charset="-122"/>
+                          <a:cs typeface="Calibri" pitchFamily="34" charset="-120"/>
+                        </a:rPr>
+                        <a:t>257</a:t>
+                      </a:r>
+                      <a:endParaRPr lang="en-US" sz="1100" dirty="0">
+                        <a:latin typeface="Calibri" charset="0"/>
+                        <a:ea typeface="Calibri" charset="0"/>
+                        <a:cs typeface="Calibri" charset="0"/>
+                      </a:endParaRPr>
+                    </a:p>
+                  </a:txBody>
+                  <a:tcPr marL="36576" marR="36576" marT="36576" marB="36576" anchor="ctr">
+                    <a:lnL w="9525" cap="flat" cmpd="sng" algn="ctr">
+                      <a:solidFill>
+                        <a:srgbClr val="E1E0D9"/>
+                      </a:solidFill>
+                      <a:prstDash val="solid"/>
+                      <a:round/>
+                      <a:headEnd type="none" w="med" len="med"/>
+                      <a:tailEnd type="none" w="med" len="med"/>
+                    </a:lnL>
+                    <a:lnR w="9525" cap="flat" cmpd="sng" algn="ctr">
+                      <a:solidFill>
+                        <a:srgbClr val="E1E0D9"/>
+                      </a:solidFill>
+                      <a:prstDash val="solid"/>
+                      <a:round/>
+                      <a:headEnd type="none" w="med" len="med"/>
+                      <a:tailEnd type="none" w="med" len="med"/>
+                    </a:lnR>
+                    <a:lnT w="9525" cap="flat" cmpd="sng" algn="ctr">
+                      <a:solidFill>
+                        <a:srgbClr val="E1E0D9"/>
+                      </a:solidFill>
+                      <a:prstDash val="solid"/>
+                      <a:round/>
+                      <a:headEnd type="none" w="med" len="med"/>
+                      <a:tailEnd type="none" w="med" len="med"/>
+                    </a:lnT>
+                    <a:lnB w="9525" cap="flat" cmpd="sng" algn="ctr">
+                      <a:solidFill>
+                        <a:srgbClr val="E1E0D9"/>
+                      </a:solidFill>
+                      <a:prstDash val="solid"/>
+                      <a:round/>
+                      <a:headEnd type="none" w="med" len="med"/>
+                      <a:tailEnd type="none" w="med" len="med"/>
+                    </a:lnB>
+                  </a:tcPr>
+                </a:tc>
+                <a:tc>
+                  <a:txBody>
+                    <a:bodyPr/>
+                    <a:lstStyle/>
+                    <a:p>
+                      <a:pPr algn="ctr" indent="0" marL="0">
+                        <a:buNone/>
+                      </a:pPr>
+                      <a:r>
+                        <a:rPr lang="en-US" sz="1100" dirty="0">
+                          <a:solidFill>
+                            <a:srgbClr val="0B0B0B"/>
+                          </a:solidFill>
+                          <a:latin typeface="Calibri" pitchFamily="34" charset="0"/>
+                          <a:ea typeface="Calibri" pitchFamily="34" charset="-122"/>
+                          <a:cs typeface="Calibri" pitchFamily="34" charset="-120"/>
+                        </a:rPr>
+                        <a:t>13.6 (8.4–19.3)</a:t>
+                      </a:r>
+                      <a:endParaRPr lang="en-US" sz="1100" dirty="0">
+                        <a:latin typeface="Calibri" charset="0"/>
+                        <a:ea typeface="Calibri" charset="0"/>
+                        <a:cs typeface="Calibri" charset="0"/>
+                      </a:endParaRPr>
+                    </a:p>
+                  </a:txBody>
+                  <a:tcPr marL="36576" marR="36576" marT="36576" marB="36576" anchor="ctr">
+                    <a:lnL w="9525" cap="flat" cmpd="sng" algn="ctr">
+                      <a:solidFill>
+                        <a:srgbClr val="E1E0D9"/>
+                      </a:solidFill>
+                      <a:prstDash val="solid"/>
+                      <a:round/>
+                      <a:headEnd type="none" w="med" len="med"/>
+                      <a:tailEnd type="none" w="med" len="med"/>
+                    </a:lnL>
+                    <a:lnR w="9525" cap="flat" cmpd="sng" algn="ctr">
+                      <a:solidFill>
+                        <a:srgbClr val="E1E0D9"/>
+                      </a:solidFill>
+                      <a:prstDash val="solid"/>
+                      <a:round/>
+                      <a:headEnd type="none" w="med" len="med"/>
+                      <a:tailEnd type="none" w="med" len="med"/>
+                    </a:lnR>
+                    <a:lnT w="9525" cap="flat" cmpd="sng" algn="ctr">
+                      <a:solidFill>
+                        <a:srgbClr val="E1E0D9"/>
+                      </a:solidFill>
+                      <a:prstDash val="solid"/>
+                      <a:round/>
+                      <a:headEnd type="none" w="med" len="med"/>
+                      <a:tailEnd type="none" w="med" len="med"/>
+                    </a:lnT>
+                    <a:lnB w="9525" cap="flat" cmpd="sng" algn="ctr">
+                      <a:solidFill>
+                        <a:srgbClr val="E1E0D9"/>
+                      </a:solidFill>
+                      <a:prstDash val="solid"/>
+                      <a:round/>
+                      <a:headEnd type="none" w="med" len="med"/>
+                      <a:tailEnd type="none" w="med" len="med"/>
+                    </a:lnB>
+                  </a:tcPr>
+                </a:tc>
+                <a:tc>
+                  <a:txBody>
+                    <a:bodyPr/>
+                    <a:lstStyle/>
+                    <a:p>
+                      <a:pPr algn="ctr" indent="0" marL="0">
+                        <a:buNone/>
+                      </a:pPr>
+                      <a:r>
+                        <a:rPr lang="en-US" sz="1100" dirty="0">
+                          <a:solidFill>
+                            <a:srgbClr val="0B0B0B"/>
+                          </a:solidFill>
+                          <a:latin typeface="Calibri" pitchFamily="34" charset="0"/>
+                          <a:ea typeface="Calibri" pitchFamily="34" charset="-122"/>
+                          <a:cs typeface="Calibri" pitchFamily="34" charset="-120"/>
+                        </a:rPr>
+                        <a:t>10.4 (9.4–11.4)</a:t>
+                      </a:r>
+                      <a:endParaRPr lang="en-US" sz="1100" dirty="0">
+                        <a:latin typeface="Calibri" charset="0"/>
+                        <a:ea typeface="Calibri" charset="0"/>
+                        <a:cs typeface="Calibri" charset="0"/>
+                      </a:endParaRPr>
+                    </a:p>
+                  </a:txBody>
+                  <a:tcPr marL="36576" marR="36576" marT="36576" marB="36576" anchor="ctr">
+                    <a:lnL w="9525" cap="flat" cmpd="sng" algn="ctr">
+                      <a:solidFill>
+                        <a:srgbClr val="E1E0D9"/>
+                      </a:solidFill>
+                      <a:prstDash val="solid"/>
+                      <a:round/>
+                      <a:headEnd type="none" w="med" len="med"/>
+                      <a:tailEnd type="none" w="med" len="med"/>
+                    </a:lnL>
+                    <a:lnR w="9525" cap="flat" cmpd="sng" algn="ctr">
+                      <a:solidFill>
+                        <a:srgbClr val="E1E0D9"/>
+                      </a:solidFill>
+                      <a:prstDash val="solid"/>
+                      <a:round/>
+                      <a:headEnd type="none" w="med" len="med"/>
+                      <a:tailEnd type="none" w="med" len="med"/>
+                    </a:lnR>
+                    <a:lnT w="9525" cap="flat" cmpd="sng" algn="ctr">
+                      <a:solidFill>
+                        <a:srgbClr val="E1E0D9"/>
+                      </a:solidFill>
+                      <a:prstDash val="solid"/>
+                      <a:round/>
+                      <a:headEnd type="none" w="med" len="med"/>
+                      <a:tailEnd type="none" w="med" len="med"/>
+                    </a:lnT>
+                    <a:lnB w="9525" cap="flat" cmpd="sng" algn="ctr">
+                      <a:solidFill>
+                        <a:srgbClr val="E1E0D9"/>
+                      </a:solidFill>
+                      <a:prstDash val="solid"/>
+                      <a:round/>
+                      <a:headEnd type="none" w="med" len="med"/>
+                      <a:tailEnd type="none" w="med" len="med"/>
+                    </a:lnB>
+                  </a:tcPr>
+                </a:tc>
+              </a:tr>
+              <a:tr h="301752">
+                <a:tc>
+                  <a:txBody>
+                    <a:bodyPr/>
+                    <a:lstStyle/>
+                    <a:p>
+                      <a:pPr algn="ctr" indent="0" marL="0">
+                        <a:buNone/>
+                      </a:pPr>
+                      <a:r>
+                        <a:rPr lang="en-US" sz="1100" dirty="0">
+                          <a:solidFill>
+                            <a:srgbClr val="0B0B0B"/>
+                          </a:solidFill>
+                          <a:latin typeface="Calibri" pitchFamily="34" charset="0"/>
+                          <a:ea typeface="Calibri" pitchFamily="34" charset="-122"/>
+                          <a:cs typeface="Calibri" pitchFamily="34" charset="-120"/>
+                        </a:rPr>
+                        <a:t>C5</a:t>
+                      </a:r>
+                      <a:endParaRPr lang="en-US" sz="1100" dirty="0">
+                        <a:latin typeface="Calibri" charset="0"/>
+                        <a:ea typeface="Calibri" charset="0"/>
+                        <a:cs typeface="Calibri" charset="0"/>
+                      </a:endParaRPr>
+                    </a:p>
+                  </a:txBody>
+                  <a:tcPr marL="36576" marR="36576" marT="36576" marB="36576" anchor="ctr">
+                    <a:lnL w="9525" cap="flat" cmpd="sng" algn="ctr">
+                      <a:solidFill>
+                        <a:srgbClr val="E1E0D9"/>
+                      </a:solidFill>
+                      <a:prstDash val="solid"/>
+                      <a:round/>
+                      <a:headEnd type="none" w="med" len="med"/>
+                      <a:tailEnd type="none" w="med" len="med"/>
+                    </a:lnL>
+                    <a:lnR w="9525" cap="flat" cmpd="sng" algn="ctr">
+                      <a:solidFill>
+                        <a:srgbClr val="E1E0D9"/>
+                      </a:solidFill>
+                      <a:prstDash val="solid"/>
+                      <a:round/>
+                      <a:headEnd type="none" w="med" len="med"/>
+                      <a:tailEnd type="none" w="med" len="med"/>
+                    </a:lnR>
+                    <a:lnT w="9525" cap="flat" cmpd="sng" algn="ctr">
+                      <a:solidFill>
+                        <a:srgbClr val="E1E0D9"/>
+                      </a:solidFill>
+                      <a:prstDash val="solid"/>
+                      <a:round/>
+                      <a:headEnd type="none" w="med" len="med"/>
+                      <a:tailEnd type="none" w="med" len="med"/>
+                    </a:lnT>
+                    <a:lnB w="9525" cap="flat" cmpd="sng" algn="ctr">
+                      <a:solidFill>
+                        <a:srgbClr val="E1E0D9"/>
+                      </a:solidFill>
+                      <a:prstDash val="solid"/>
+                      <a:round/>
+                      <a:headEnd type="none" w="med" len="med"/>
+                      <a:tailEnd type="none" w="med" len="med"/>
+                    </a:lnB>
+                  </a:tcPr>
+                </a:tc>
+                <a:tc>
+                  <a:txBody>
+                    <a:bodyPr/>
+                    <a:lstStyle/>
+                    <a:p>
+                      <a:pPr algn="ctr" indent="0" marL="0">
+                        <a:buNone/>
+                      </a:pPr>
+                      <a:r>
+                        <a:rPr lang="en-US" sz="1100" dirty="0">
+                          <a:solidFill>
+                            <a:srgbClr val="0B0B0B"/>
+                          </a:solidFill>
+                          <a:latin typeface="Calibri" pitchFamily="34" charset="0"/>
+                          <a:ea typeface="Calibri" pitchFamily="34" charset="-122"/>
+                          <a:cs typeface="Calibri" pitchFamily="34" charset="-120"/>
+                        </a:rPr>
+                        <a:t>391</a:t>
+                      </a:r>
+                      <a:endParaRPr lang="en-US" sz="1100" dirty="0">
+                        <a:latin typeface="Calibri" charset="0"/>
+                        <a:ea typeface="Calibri" charset="0"/>
+                        <a:cs typeface="Calibri" charset="0"/>
+                      </a:endParaRPr>
+                    </a:p>
+                  </a:txBody>
+                  <a:tcPr marL="36576" marR="36576" marT="36576" marB="36576" anchor="ctr">
+                    <a:lnL w="9525" cap="flat" cmpd="sng" algn="ctr">
+                      <a:solidFill>
+                        <a:srgbClr val="E1E0D9"/>
+                      </a:solidFill>
+                      <a:prstDash val="solid"/>
+                      <a:round/>
+                      <a:headEnd type="none" w="med" len="med"/>
+                      <a:tailEnd type="none" w="med" len="med"/>
+                    </a:lnL>
+                    <a:lnR w="9525" cap="flat" cmpd="sng" algn="ctr">
+                      <a:solidFill>
+                        <a:srgbClr val="E1E0D9"/>
+                      </a:solidFill>
+                      <a:prstDash val="solid"/>
+                      <a:round/>
+                      <a:headEnd type="none" w="med" len="med"/>
+                      <a:tailEnd type="none" w="med" len="med"/>
+                    </a:lnR>
+                    <a:lnT w="9525" cap="flat" cmpd="sng" algn="ctr">
+                      <a:solidFill>
+                        <a:srgbClr val="E1E0D9"/>
+                      </a:solidFill>
+                      <a:prstDash val="solid"/>
+                      <a:round/>
+                      <a:headEnd type="none" w="med" len="med"/>
+                      <a:tailEnd type="none" w="med" len="med"/>
+                    </a:lnT>
+                    <a:lnB w="9525" cap="flat" cmpd="sng" algn="ctr">
+                      <a:solidFill>
+                        <a:srgbClr val="E1E0D9"/>
+                      </a:solidFill>
+                      <a:prstDash val="solid"/>
+                      <a:round/>
+                      <a:headEnd type="none" w="med" len="med"/>
+                      <a:tailEnd type="none" w="med" len="med"/>
+                    </a:lnB>
+                  </a:tcPr>
+                </a:tc>
+                <a:tc>
+                  <a:txBody>
+                    <a:bodyPr/>
+                    <a:lstStyle/>
+                    <a:p>
+                      <a:pPr algn="ctr" indent="0" marL="0">
+                        <a:buNone/>
+                      </a:pPr>
+                      <a:r>
+                        <a:rPr lang="en-US" sz="1100" dirty="0">
+                          <a:solidFill>
+                            <a:srgbClr val="0B0B0B"/>
+                          </a:solidFill>
+                          <a:latin typeface="Calibri" pitchFamily="34" charset="0"/>
+                          <a:ea typeface="Calibri" pitchFamily="34" charset="-122"/>
+                          <a:cs typeface="Calibri" pitchFamily="34" charset="-120"/>
+                        </a:rPr>
+                        <a:t>9.2 (6.1–12.6)</a:t>
+                      </a:r>
+                      <a:endParaRPr lang="en-US" sz="1100" dirty="0">
+                        <a:latin typeface="Calibri" charset="0"/>
+                        <a:ea typeface="Calibri" charset="0"/>
+                        <a:cs typeface="Calibri" charset="0"/>
+                      </a:endParaRPr>
+                    </a:p>
+                  </a:txBody>
+                  <a:tcPr marL="36576" marR="36576" marT="36576" marB="36576" anchor="ctr">
+                    <a:lnL w="9525" cap="flat" cmpd="sng" algn="ctr">
+                      <a:solidFill>
+                        <a:srgbClr val="E1E0D9"/>
+                      </a:solidFill>
+                      <a:prstDash val="solid"/>
+                      <a:round/>
+                      <a:headEnd type="none" w="med" len="med"/>
+                      <a:tailEnd type="none" w="med" len="med"/>
+                    </a:lnL>
+                    <a:lnR w="9525" cap="flat" cmpd="sng" algn="ctr">
+                      <a:solidFill>
+                        <a:srgbClr val="E1E0D9"/>
+                      </a:solidFill>
+                      <a:prstDash val="solid"/>
+                      <a:round/>
+                      <a:headEnd type="none" w="med" len="med"/>
+                      <a:tailEnd type="none" w="med" len="med"/>
+                    </a:lnR>
+                    <a:lnT w="9525" cap="flat" cmpd="sng" algn="ctr">
+                      <a:solidFill>
+                        <a:srgbClr val="E1E0D9"/>
+                      </a:solidFill>
+                      <a:prstDash val="solid"/>
+                      <a:round/>
+                      <a:headEnd type="none" w="med" len="med"/>
+                      <a:tailEnd type="none" w="med" len="med"/>
+                    </a:lnT>
+                    <a:lnB w="9525" cap="flat" cmpd="sng" algn="ctr">
+                      <a:solidFill>
+                        <a:srgbClr val="E1E0D9"/>
+                      </a:solidFill>
+                      <a:prstDash val="solid"/>
+                      <a:round/>
+                      <a:headEnd type="none" w="med" len="med"/>
+                      <a:tailEnd type="none" w="med" len="med"/>
+                    </a:lnB>
+                  </a:tcPr>
+                </a:tc>
+                <a:tc>
+                  <a:txBody>
+                    <a:bodyPr/>
+                    <a:lstStyle/>
+                    <a:p>
+                      <a:pPr algn="ctr" indent="0" marL="0">
+                        <a:buNone/>
+                      </a:pPr>
+                      <a:r>
+                        <a:rPr lang="en-US" sz="1100" dirty="0">
+                          <a:solidFill>
+                            <a:srgbClr val="0B0B0B"/>
+                          </a:solidFill>
+                          <a:latin typeface="Calibri" pitchFamily="34" charset="0"/>
+                          <a:ea typeface="Calibri" pitchFamily="34" charset="-122"/>
+                          <a:cs typeface="Calibri" pitchFamily="34" charset="-120"/>
+                        </a:rPr>
+                        <a:t>10.5 (9.6–11.5)</a:t>
+                      </a:r>
+                      <a:endParaRPr lang="en-US" sz="1100" dirty="0">
+                        <a:latin typeface="Calibri" charset="0"/>
+                        <a:ea typeface="Calibri" charset="0"/>
+                        <a:cs typeface="Calibri" charset="0"/>
+                      </a:endParaRPr>
+                    </a:p>
+                  </a:txBody>
+                  <a:tcPr marL="36576" marR="36576" marT="36576" marB="36576" anchor="ctr">
+                    <a:lnL w="9525" cap="flat" cmpd="sng" algn="ctr">
+                      <a:solidFill>
+                        <a:srgbClr val="E1E0D9"/>
+                      </a:solidFill>
+                      <a:prstDash val="solid"/>
+                      <a:round/>
+                      <a:headEnd type="none" w="med" len="med"/>
+                      <a:tailEnd type="none" w="med" len="med"/>
+                    </a:lnL>
+                    <a:lnR w="9525" cap="flat" cmpd="sng" algn="ctr">
+                      <a:solidFill>
+                        <a:srgbClr val="E1E0D9"/>
+                      </a:solidFill>
+                      <a:prstDash val="solid"/>
+                      <a:round/>
+                      <a:headEnd type="none" w="med" len="med"/>
+                      <a:tailEnd type="none" w="med" len="med"/>
+                    </a:lnR>
+                    <a:lnT w="9525" cap="flat" cmpd="sng" algn="ctr">
+                      <a:solidFill>
+                        <a:srgbClr val="E1E0D9"/>
+                      </a:solidFill>
+                      <a:prstDash val="solid"/>
+                      <a:round/>
+                      <a:headEnd type="none" w="med" len="med"/>
+                      <a:tailEnd type="none" w="med" len="med"/>
+                    </a:lnT>
+                    <a:lnB w="9525" cap="flat" cmpd="sng" algn="ctr">
+                      <a:solidFill>
+                        <a:srgbClr val="E1E0D9"/>
+                      </a:solidFill>
+                      <a:prstDash val="solid"/>
+                      <a:round/>
+                      <a:headEnd type="none" w="med" len="med"/>
+                      <a:tailEnd type="none" w="med" len="med"/>
+                    </a:lnB>
+                  </a:tcPr>
+                </a:tc>
+              </a:tr>
+              <a:tr h="301752">
+                <a:tc>
+                  <a:txBody>
+                    <a:bodyPr/>
+                    <a:lstStyle/>
+                    <a:p>
+                      <a:pPr algn="ctr" indent="0" marL="0">
+                        <a:buNone/>
+                      </a:pPr>
+                      <a:r>
+                        <a:rPr lang="en-US" sz="1100" dirty="0">
+                          <a:solidFill>
+                            <a:srgbClr val="0B0B0B"/>
+                          </a:solidFill>
+                          <a:latin typeface="Calibri" pitchFamily="34" charset="0"/>
+                          <a:ea typeface="Calibri" pitchFamily="34" charset="-122"/>
+                          <a:cs typeface="Calibri" pitchFamily="34" charset="-120"/>
+                        </a:rPr>
+                        <a:t>C6</a:t>
+                      </a:r>
+                      <a:endParaRPr lang="en-US" sz="1100" dirty="0">
+                        <a:latin typeface="Calibri" charset="0"/>
+                        <a:ea typeface="Calibri" charset="0"/>
+                        <a:cs typeface="Calibri" charset="0"/>
+                      </a:endParaRPr>
+                    </a:p>
+                  </a:txBody>
+                  <a:tcPr marL="36576" marR="36576" marT="36576" marB="36576" anchor="ctr">
+                    <a:lnL w="9525" cap="flat" cmpd="sng" algn="ctr">
+                      <a:solidFill>
+                        <a:srgbClr val="E1E0D9"/>
+                      </a:solidFill>
+                      <a:prstDash val="solid"/>
+                      <a:round/>
+                      <a:headEnd type="none" w="med" len="med"/>
+                      <a:tailEnd type="none" w="med" len="med"/>
+                    </a:lnL>
+                    <a:lnR w="9525" cap="flat" cmpd="sng" algn="ctr">
+                      <a:solidFill>
+                        <a:srgbClr val="E1E0D9"/>
+                      </a:solidFill>
+                      <a:prstDash val="solid"/>
+                      <a:round/>
+                      <a:headEnd type="none" w="med" len="med"/>
+                      <a:tailEnd type="none" w="med" len="med"/>
+                    </a:lnR>
+                    <a:lnT w="9525" cap="flat" cmpd="sng" algn="ctr">
+                      <a:solidFill>
+                        <a:srgbClr val="E1E0D9"/>
+                      </a:solidFill>
+                      <a:prstDash val="solid"/>
+                      <a:round/>
+                      <a:headEnd type="none" w="med" len="med"/>
+                      <a:tailEnd type="none" w="med" len="med"/>
+                    </a:lnT>
+                    <a:lnB w="9525" cap="flat" cmpd="sng" algn="ctr">
+                      <a:solidFill>
+                        <a:srgbClr val="E1E0D9"/>
+                      </a:solidFill>
+                      <a:prstDash val="solid"/>
+                      <a:round/>
+                      <a:headEnd type="none" w="med" len="med"/>
+                      <a:tailEnd type="none" w="med" len="med"/>
+                    </a:lnB>
+                  </a:tcPr>
+                </a:tc>
+                <a:tc>
+                  <a:txBody>
+                    <a:bodyPr/>
+                    <a:lstStyle/>
+                    <a:p>
+                      <a:pPr algn="ctr" indent="0" marL="0">
+                        <a:buNone/>
+                      </a:pPr>
+                      <a:r>
+                        <a:rPr lang="en-US" sz="1100" dirty="0">
+                          <a:solidFill>
+                            <a:srgbClr val="0B0B0B"/>
+                          </a:solidFill>
+                          <a:latin typeface="Calibri" pitchFamily="34" charset="0"/>
+                          <a:ea typeface="Calibri" pitchFamily="34" charset="-122"/>
+                          <a:cs typeface="Calibri" pitchFamily="34" charset="-120"/>
+                        </a:rPr>
+                        <a:t>410</a:t>
+                      </a:r>
+                      <a:endParaRPr lang="en-US" sz="1100" dirty="0">
+                        <a:latin typeface="Calibri" charset="0"/>
+                        <a:ea typeface="Calibri" charset="0"/>
+                        <a:cs typeface="Calibri" charset="0"/>
+                      </a:endParaRPr>
+                    </a:p>
+                  </a:txBody>
+                  <a:tcPr marL="36576" marR="36576" marT="36576" marB="36576" anchor="ctr">
+                    <a:lnL w="9525" cap="flat" cmpd="sng" algn="ctr">
+                      <a:solidFill>
+                        <a:srgbClr val="E1E0D9"/>
+                      </a:solidFill>
+                      <a:prstDash val="solid"/>
+                      <a:round/>
+                      <a:headEnd type="none" w="med" len="med"/>
+                      <a:tailEnd type="none" w="med" len="med"/>
+                    </a:lnL>
+                    <a:lnR w="9525" cap="flat" cmpd="sng" algn="ctr">
+                      <a:solidFill>
+                        <a:srgbClr val="E1E0D9"/>
+                      </a:solidFill>
+                      <a:prstDash val="solid"/>
+                      <a:round/>
+                      <a:headEnd type="none" w="med" len="med"/>
+                      <a:tailEnd type="none" w="med" len="med"/>
+                    </a:lnR>
+                    <a:lnT w="9525" cap="flat" cmpd="sng" algn="ctr">
+                      <a:solidFill>
+                        <a:srgbClr val="E1E0D9"/>
+                      </a:solidFill>
+                      <a:prstDash val="solid"/>
+                      <a:round/>
+                      <a:headEnd type="none" w="med" len="med"/>
+                      <a:tailEnd type="none" w="med" len="med"/>
+                    </a:lnT>
+                    <a:lnB w="9525" cap="flat" cmpd="sng" algn="ctr">
+                      <a:solidFill>
+                        <a:srgbClr val="E1E0D9"/>
+                      </a:solidFill>
+                      <a:prstDash val="solid"/>
+                      <a:round/>
+                      <a:headEnd type="none" w="med" len="med"/>
+                      <a:tailEnd type="none" w="med" len="med"/>
+                    </a:lnB>
+                  </a:tcPr>
+                </a:tc>
+                <a:tc>
+                  <a:txBody>
+                    <a:bodyPr/>
+                    <a:lstStyle/>
+                    <a:p>
+                      <a:pPr algn="ctr" indent="0" marL="0">
+                        <a:buNone/>
+                      </a:pPr>
+                      <a:r>
+                        <a:rPr lang="en-US" sz="1100" dirty="0">
+                          <a:solidFill>
+                            <a:srgbClr val="0B0B0B"/>
+                          </a:solidFill>
+                          <a:latin typeface="Calibri" pitchFamily="34" charset="0"/>
+                          <a:ea typeface="Calibri" pitchFamily="34" charset="-122"/>
+                          <a:cs typeface="Calibri" pitchFamily="34" charset="-120"/>
+                        </a:rPr>
+                        <a:t>11.5 (7.9–15.4)</a:t>
+                      </a:r>
+                      <a:endParaRPr lang="en-US" sz="1100" dirty="0">
+                        <a:latin typeface="Calibri" charset="0"/>
+                        <a:ea typeface="Calibri" charset="0"/>
+                        <a:cs typeface="Calibri" charset="0"/>
+                      </a:endParaRPr>
+                    </a:p>
+                  </a:txBody>
+                  <a:tcPr marL="36576" marR="36576" marT="36576" marB="36576" anchor="ctr">
+                    <a:lnL w="9525" cap="flat" cmpd="sng" algn="ctr">
+                      <a:solidFill>
+                        <a:srgbClr val="E1E0D9"/>
+                      </a:solidFill>
+                      <a:prstDash val="solid"/>
+                      <a:round/>
+                      <a:headEnd type="none" w="med" len="med"/>
+                      <a:tailEnd type="none" w="med" len="med"/>
+                    </a:lnL>
+                    <a:lnR w="9525" cap="flat" cmpd="sng" algn="ctr">
+                      <a:solidFill>
+                        <a:srgbClr val="E1E0D9"/>
+                      </a:solidFill>
+                      <a:prstDash val="solid"/>
+                      <a:round/>
+                      <a:headEnd type="none" w="med" len="med"/>
+                      <a:tailEnd type="none" w="med" len="med"/>
+                    </a:lnR>
+                    <a:lnT w="9525" cap="flat" cmpd="sng" algn="ctr">
+                      <a:solidFill>
+                        <a:srgbClr val="E1E0D9"/>
+                      </a:solidFill>
+                      <a:prstDash val="solid"/>
+                      <a:round/>
+                      <a:headEnd type="none" w="med" len="med"/>
+                      <a:tailEnd type="none" w="med" len="med"/>
+                    </a:lnT>
+                    <a:lnB w="9525" cap="flat" cmpd="sng" algn="ctr">
+                      <a:solidFill>
+                        <a:srgbClr val="E1E0D9"/>
+                      </a:solidFill>
+                      <a:prstDash val="solid"/>
+                      <a:round/>
+                      <a:headEnd type="none" w="med" len="med"/>
+                      <a:tailEnd type="none" w="med" len="med"/>
+                    </a:lnB>
+                  </a:tcPr>
+                </a:tc>
+                <a:tc>
+                  <a:txBody>
+                    <a:bodyPr/>
+                    <a:lstStyle/>
+                    <a:p>
+                      <a:pPr algn="ctr" indent="0" marL="0">
+                        <a:buNone/>
+                      </a:pPr>
+                      <a:r>
+                        <a:rPr lang="en-US" sz="1100" dirty="0">
+                          <a:solidFill>
+                            <a:srgbClr val="0B0B0B"/>
+                          </a:solidFill>
+                          <a:latin typeface="Calibri" pitchFamily="34" charset="0"/>
+                          <a:ea typeface="Calibri" pitchFamily="34" charset="-122"/>
+                          <a:cs typeface="Calibri" pitchFamily="34" charset="-120"/>
+                        </a:rPr>
+                        <a:t>10.8 (9.9–11.8)</a:t>
+                      </a:r>
+                      <a:endParaRPr lang="en-US" sz="1100" dirty="0">
+                        <a:latin typeface="Calibri" charset="0"/>
+                        <a:ea typeface="Calibri" charset="0"/>
+                        <a:cs typeface="Calibri" charset="0"/>
+                      </a:endParaRPr>
+                    </a:p>
+                  </a:txBody>
+                  <a:tcPr marL="36576" marR="36576" marT="36576" marB="36576" anchor="ctr">
+                    <a:lnL w="9525" cap="flat" cmpd="sng" algn="ctr">
+                      <a:solidFill>
+                        <a:srgbClr val="E1E0D9"/>
+                      </a:solidFill>
+                      <a:prstDash val="solid"/>
+                      <a:round/>
+                      <a:headEnd type="none" w="med" len="med"/>
+                      <a:tailEnd type="none" w="med" len="med"/>
+                    </a:lnL>
+                    <a:lnR w="9525" cap="flat" cmpd="sng" algn="ctr">
+                      <a:solidFill>
+                        <a:srgbClr val="E1E0D9"/>
+                      </a:solidFill>
+                      <a:prstDash val="solid"/>
+                      <a:round/>
+                      <a:headEnd type="none" w="med" len="med"/>
+                      <a:tailEnd type="none" w="med" len="med"/>
+                    </a:lnR>
+                    <a:lnT w="9525" cap="flat" cmpd="sng" algn="ctr">
+                      <a:solidFill>
+                        <a:srgbClr val="E1E0D9"/>
+                      </a:solidFill>
+                      <a:prstDash val="solid"/>
+                      <a:round/>
+                      <a:headEnd type="none" w="med" len="med"/>
+                      <a:tailEnd type="none" w="med" len="med"/>
+                    </a:lnT>
+                    <a:lnB w="9525" cap="flat" cmpd="sng" algn="ctr">
+                      <a:solidFill>
+                        <a:srgbClr val="E1E0D9"/>
+                      </a:solidFill>
+                      <a:prstDash val="solid"/>
+                      <a:round/>
+                      <a:headEnd type="none" w="med" len="med"/>
+                      <a:tailEnd type="none" w="med" len="med"/>
+                    </a:lnB>
+                  </a:tcPr>
+                </a:tc>
+              </a:tr>
+              <a:tr h="301752">
+                <a:tc>
+                  <a:txBody>
+                    <a:bodyPr/>
+                    <a:lstStyle/>
+                    <a:p>
+                      <a:pPr algn="ctr" indent="0" marL="0">
+                        <a:buNone/>
+                      </a:pPr>
+                      <a:r>
+                        <a:rPr lang="en-US" sz="1100" dirty="0">
+                          <a:solidFill>
+                            <a:srgbClr val="0B0B0B"/>
+                          </a:solidFill>
+                          <a:latin typeface="Calibri" pitchFamily="34" charset="0"/>
+                          <a:ea typeface="Calibri" pitchFamily="34" charset="-122"/>
+                          <a:cs typeface="Calibri" pitchFamily="34" charset="-120"/>
+                        </a:rPr>
+                        <a:t>C7</a:t>
+                      </a:r>
+                      <a:endParaRPr lang="en-US" sz="1100" dirty="0">
+                        <a:latin typeface="Calibri" charset="0"/>
+                        <a:ea typeface="Calibri" charset="0"/>
+                        <a:cs typeface="Calibri" charset="0"/>
+                      </a:endParaRPr>
+                    </a:p>
+                  </a:txBody>
+                  <a:tcPr marL="36576" marR="36576" marT="36576" marB="36576" anchor="ctr">
+                    <a:lnL w="9525" cap="flat" cmpd="sng" algn="ctr">
+                      <a:solidFill>
+                        <a:srgbClr val="E1E0D9"/>
+                      </a:solidFill>
+                      <a:prstDash val="solid"/>
+                      <a:round/>
+                      <a:headEnd type="none" w="med" len="med"/>
+                      <a:tailEnd type="none" w="med" len="med"/>
+                    </a:lnL>
+                    <a:lnR w="9525" cap="flat" cmpd="sng" algn="ctr">
+                      <a:solidFill>
+                        <a:srgbClr val="E1E0D9"/>
+                      </a:solidFill>
+                      <a:prstDash val="solid"/>
+                      <a:round/>
+                      <a:headEnd type="none" w="med" len="med"/>
+                      <a:tailEnd type="none" w="med" len="med"/>
+                    </a:lnR>
+                    <a:lnT w="9525" cap="flat" cmpd="sng" algn="ctr">
+                      <a:solidFill>
+                        <a:srgbClr val="E1E0D9"/>
+                      </a:solidFill>
+                      <a:prstDash val="solid"/>
+                      <a:round/>
+                      <a:headEnd type="none" w="med" len="med"/>
+                      <a:tailEnd type="none" w="med" len="med"/>
+                    </a:lnT>
+                    <a:lnB w="9525" cap="flat" cmpd="sng" algn="ctr">
+                      <a:solidFill>
+                        <a:srgbClr val="E1E0D9"/>
+                      </a:solidFill>
+                      <a:prstDash val="solid"/>
+                      <a:round/>
+                      <a:headEnd type="none" w="med" len="med"/>
+                      <a:tailEnd type="none" w="med" len="med"/>
+                    </a:lnB>
+                  </a:tcPr>
+                </a:tc>
+                <a:tc>
+                  <a:txBody>
+                    <a:bodyPr/>
+                    <a:lstStyle/>
+                    <a:p>
+                      <a:pPr algn="ctr" indent="0" marL="0">
+                        <a:buNone/>
+                      </a:pPr>
+                      <a:r>
+                        <a:rPr lang="en-US" sz="1100" dirty="0">
+                          <a:solidFill>
+                            <a:srgbClr val="0B0B0B"/>
+                          </a:solidFill>
+                          <a:latin typeface="Calibri" pitchFamily="34" charset="0"/>
+                          <a:ea typeface="Calibri" pitchFamily="34" charset="-122"/>
+                          <a:cs typeface="Calibri" pitchFamily="34" charset="-120"/>
+                        </a:rPr>
+                        <a:t>465</a:t>
+                      </a:r>
+                      <a:endParaRPr lang="en-US" sz="1100" dirty="0">
+                        <a:latin typeface="Calibri" charset="0"/>
+                        <a:ea typeface="Calibri" charset="0"/>
+                        <a:cs typeface="Calibri" charset="0"/>
+                      </a:endParaRPr>
+                    </a:p>
+                  </a:txBody>
+                  <a:tcPr marL="36576" marR="36576" marT="36576" marB="36576" anchor="ctr">
+                    <a:lnL w="9525" cap="flat" cmpd="sng" algn="ctr">
+                      <a:solidFill>
+                        <a:srgbClr val="E1E0D9"/>
+                      </a:solidFill>
+                      <a:prstDash val="solid"/>
+                      <a:round/>
+                      <a:headEnd type="none" w="med" len="med"/>
+                      <a:tailEnd type="none" w="med" len="med"/>
+                    </a:lnL>
+                    <a:lnR w="9525" cap="flat" cmpd="sng" algn="ctr">
+                      <a:solidFill>
+                        <a:srgbClr val="E1E0D9"/>
+                      </a:solidFill>
+                      <a:prstDash val="solid"/>
+                      <a:round/>
+                      <a:headEnd type="none" w="med" len="med"/>
+                      <a:tailEnd type="none" w="med" len="med"/>
+                    </a:lnR>
+                    <a:lnT w="9525" cap="flat" cmpd="sng" algn="ctr">
+                      <a:solidFill>
+                        <a:srgbClr val="E1E0D9"/>
+                      </a:solidFill>
+                      <a:prstDash val="solid"/>
+                      <a:round/>
+                      <a:headEnd type="none" w="med" len="med"/>
+                      <a:tailEnd type="none" w="med" len="med"/>
+                    </a:lnT>
+                    <a:lnB w="9525" cap="flat" cmpd="sng" algn="ctr">
+                      <a:solidFill>
+                        <a:srgbClr val="E1E0D9"/>
+                      </a:solidFill>
+                      <a:prstDash val="solid"/>
+                      <a:round/>
+                      <a:headEnd type="none" w="med" len="med"/>
+                      <a:tailEnd type="none" w="med" len="med"/>
+                    </a:lnB>
+                  </a:tcPr>
+                </a:tc>
+                <a:tc>
+                  <a:txBody>
+                    <a:bodyPr/>
+                    <a:lstStyle/>
+                    <a:p>
+                      <a:pPr algn="ctr" indent="0" marL="0">
+                        <a:buNone/>
+                      </a:pPr>
+                      <a:r>
+                        <a:rPr lang="en-US" sz="1100" dirty="0">
+                          <a:solidFill>
+                            <a:srgbClr val="0B0B0B"/>
+                          </a:solidFill>
+                          <a:latin typeface="Calibri" pitchFamily="34" charset="0"/>
+                          <a:ea typeface="Calibri" pitchFamily="34" charset="-122"/>
+                          <a:cs typeface="Calibri" pitchFamily="34" charset="-120"/>
+                        </a:rPr>
+                        <a:t>10.8 (7.5–14.1)</a:t>
+                      </a:r>
+                      <a:endParaRPr lang="en-US" sz="1100" dirty="0">
+                        <a:latin typeface="Calibri" charset="0"/>
+                        <a:ea typeface="Calibri" charset="0"/>
+                        <a:cs typeface="Calibri" charset="0"/>
+                      </a:endParaRPr>
+                    </a:p>
+                  </a:txBody>
+                  <a:tcPr marL="36576" marR="36576" marT="36576" marB="36576" anchor="ctr">
+                    <a:lnL w="9525" cap="flat" cmpd="sng" algn="ctr">
+                      <a:solidFill>
+                        <a:srgbClr val="E1E0D9"/>
+                      </a:solidFill>
+                      <a:prstDash val="solid"/>
+                      <a:round/>
+                      <a:headEnd type="none" w="med" len="med"/>
+                      <a:tailEnd type="none" w="med" len="med"/>
+                    </a:lnL>
+                    <a:lnR w="9525" cap="flat" cmpd="sng" algn="ctr">
+                      <a:solidFill>
+                        <a:srgbClr val="E1E0D9"/>
+                      </a:solidFill>
+                      <a:prstDash val="solid"/>
+                      <a:round/>
+                      <a:headEnd type="none" w="med" len="med"/>
+                      <a:tailEnd type="none" w="med" len="med"/>
+                    </a:lnR>
+                    <a:lnT w="9525" cap="flat" cmpd="sng" algn="ctr">
+                      <a:solidFill>
+                        <a:srgbClr val="E1E0D9"/>
+                      </a:solidFill>
+                      <a:prstDash val="solid"/>
+                      <a:round/>
+                      <a:headEnd type="none" w="med" len="med"/>
+                      <a:tailEnd type="none" w="med" len="med"/>
+                    </a:lnT>
+                    <a:lnB w="9525" cap="flat" cmpd="sng" algn="ctr">
+                      <a:solidFill>
+                        <a:srgbClr val="E1E0D9"/>
+                      </a:solidFill>
+                      <a:prstDash val="solid"/>
+                      <a:round/>
+                      <a:headEnd type="none" w="med" len="med"/>
+                      <a:tailEnd type="none" w="med" len="med"/>
+                    </a:lnB>
+                  </a:tcPr>
+                </a:tc>
+                <a:tc>
+                  <a:txBody>
+                    <a:bodyPr/>
+                    <a:lstStyle/>
+                    <a:p>
+                      <a:pPr algn="ctr" indent="0" marL="0">
+                        <a:buNone/>
+                      </a:pPr>
+                      <a:r>
+                        <a:rPr lang="en-US" sz="1100" dirty="0">
+                          <a:solidFill>
+                            <a:srgbClr val="0B0B0B"/>
+                          </a:solidFill>
+                          <a:latin typeface="Calibri" pitchFamily="34" charset="0"/>
+                          <a:ea typeface="Calibri" pitchFamily="34" charset="-122"/>
+                          <a:cs typeface="Calibri" pitchFamily="34" charset="-120"/>
+                        </a:rPr>
+                        <a:t>11.0 (10.1–11.8)</a:t>
+                      </a:r>
+                      <a:endParaRPr lang="en-US" sz="1100" dirty="0">
+                        <a:latin typeface="Calibri" charset="0"/>
+                        <a:ea typeface="Calibri" charset="0"/>
+                        <a:cs typeface="Calibri" charset="0"/>
+                      </a:endParaRPr>
+                    </a:p>
+                  </a:txBody>
+                  <a:tcPr marL="36576" marR="36576" marT="36576" marB="36576" anchor="ctr">
+                    <a:lnL w="9525" cap="flat" cmpd="sng" algn="ctr">
+                      <a:solidFill>
+                        <a:srgbClr val="E1E0D9"/>
+                      </a:solidFill>
+                      <a:prstDash val="solid"/>
+                      <a:round/>
+                      <a:headEnd type="none" w="med" len="med"/>
+                      <a:tailEnd type="none" w="med" len="med"/>
+                    </a:lnL>
+                    <a:lnR w="9525" cap="flat" cmpd="sng" algn="ctr">
+                      <a:solidFill>
+                        <a:srgbClr val="E1E0D9"/>
+                      </a:solidFill>
+                      <a:prstDash val="solid"/>
+                      <a:round/>
+                      <a:headEnd type="none" w="med" len="med"/>
+                      <a:tailEnd type="none" w="med" len="med"/>
+                    </a:lnR>
+                    <a:lnT w="9525" cap="flat" cmpd="sng" algn="ctr">
+                      <a:solidFill>
+                        <a:srgbClr val="E1E0D9"/>
+                      </a:solidFill>
+                      <a:prstDash val="solid"/>
+                      <a:round/>
+                      <a:headEnd type="none" w="med" len="med"/>
+                      <a:tailEnd type="none" w="med" len="med"/>
+                    </a:lnT>
+                    <a:lnB w="9525" cap="flat" cmpd="sng" algn="ctr">
+                      <a:solidFill>
+                        <a:srgbClr val="E1E0D9"/>
+                      </a:solidFill>
+                      <a:prstDash val="solid"/>
+                      <a:round/>
+                      <a:headEnd type="none" w="med" len="med"/>
+                      <a:tailEnd type="none" w="med" len="med"/>
+                    </a:lnB>
+                  </a:tcPr>
+                </a:tc>
+              </a:tr>
+              <a:tr h="301752">
+                <a:tc>
+                  <a:txBody>
+                    <a:bodyPr/>
+                    <a:lstStyle/>
+                    <a:p>
+                      <a:pPr algn="ctr" indent="0" marL="0">
+                        <a:buNone/>
+                      </a:pPr>
+                      <a:r>
+                        <a:rPr lang="en-US" sz="1100" dirty="0">
+                          <a:solidFill>
+                            <a:srgbClr val="0B0B0B"/>
+                          </a:solidFill>
+                          <a:latin typeface="Calibri" pitchFamily="34" charset="0"/>
+                          <a:ea typeface="Calibri" pitchFamily="34" charset="-122"/>
+                          <a:cs typeface="Calibri" pitchFamily="34" charset="-120"/>
+                        </a:rPr>
+                        <a:t>C8</a:t>
+                      </a:r>
+                      <a:endParaRPr lang="en-US" sz="1100" dirty="0">
+                        <a:latin typeface="Calibri" charset="0"/>
+                        <a:ea typeface="Calibri" charset="0"/>
+                        <a:cs typeface="Calibri" charset="0"/>
+                      </a:endParaRPr>
+                    </a:p>
+                  </a:txBody>
+                  <a:tcPr marL="36576" marR="36576" marT="36576" marB="36576" anchor="ctr">
+                    <a:lnL w="9525" cap="flat" cmpd="sng" algn="ctr">
+                      <a:solidFill>
+                        <a:srgbClr val="E1E0D9"/>
+                      </a:solidFill>
+                      <a:prstDash val="solid"/>
+                      <a:round/>
+                      <a:headEnd type="none" w="med" len="med"/>
+                      <a:tailEnd type="none" w="med" len="med"/>
+                    </a:lnL>
+                    <a:lnR w="9525" cap="flat" cmpd="sng" algn="ctr">
+                      <a:solidFill>
+                        <a:srgbClr val="E1E0D9"/>
+                      </a:solidFill>
+                      <a:prstDash val="solid"/>
+                      <a:round/>
+                      <a:headEnd type="none" w="med" len="med"/>
+                      <a:tailEnd type="none" w="med" len="med"/>
+                    </a:lnR>
+                    <a:lnT w="9525" cap="flat" cmpd="sng" algn="ctr">
+                      <a:solidFill>
+                        <a:srgbClr val="E1E0D9"/>
+                      </a:solidFill>
+                      <a:prstDash val="solid"/>
+                      <a:round/>
+                      <a:headEnd type="none" w="med" len="med"/>
+                      <a:tailEnd type="none" w="med" len="med"/>
+                    </a:lnT>
+                    <a:lnB w="9525" cap="flat" cmpd="sng" algn="ctr">
+                      <a:solidFill>
+                        <a:srgbClr val="E1E0D9"/>
+                      </a:solidFill>
+                      <a:prstDash val="solid"/>
+                      <a:round/>
+                      <a:headEnd type="none" w="med" len="med"/>
+                      <a:tailEnd type="none" w="med" len="med"/>
+                    </a:lnB>
+                  </a:tcPr>
+                </a:tc>
+                <a:tc>
+                  <a:txBody>
+                    <a:bodyPr/>
+                    <a:lstStyle/>
+                    <a:p>
+                      <a:pPr algn="ctr" indent="0" marL="0">
+                        <a:buNone/>
+                      </a:pPr>
+                      <a:r>
+                        <a:rPr lang="en-US" sz="1100" dirty="0">
+                          <a:solidFill>
+                            <a:srgbClr val="0B0B0B"/>
+                          </a:solidFill>
+                          <a:latin typeface="Calibri" pitchFamily="34" charset="0"/>
+                          <a:ea typeface="Calibri" pitchFamily="34" charset="-122"/>
+                          <a:cs typeface="Calibri" pitchFamily="34" charset="-120"/>
+                        </a:rPr>
+                        <a:t>585</a:t>
+                      </a:r>
+                      <a:endParaRPr lang="en-US" sz="1100" dirty="0">
+                        <a:latin typeface="Calibri" charset="0"/>
+                        <a:ea typeface="Calibri" charset="0"/>
+                        <a:cs typeface="Calibri" charset="0"/>
+                      </a:endParaRPr>
+                    </a:p>
+                  </a:txBody>
+                  <a:tcPr marL="36576" marR="36576" marT="36576" marB="36576" anchor="ctr">
+                    <a:lnL w="9525" cap="flat" cmpd="sng" algn="ctr">
+                      <a:solidFill>
+                        <a:srgbClr val="E1E0D9"/>
+                      </a:solidFill>
+                      <a:prstDash val="solid"/>
+                      <a:round/>
+                      <a:headEnd type="none" w="med" len="med"/>
+                      <a:tailEnd type="none" w="med" len="med"/>
+                    </a:lnL>
+                    <a:lnR w="9525" cap="flat" cmpd="sng" algn="ctr">
+                      <a:solidFill>
+                        <a:srgbClr val="E1E0D9"/>
+                      </a:solidFill>
+                      <a:prstDash val="solid"/>
+                      <a:round/>
+                      <a:headEnd type="none" w="med" len="med"/>
+                      <a:tailEnd type="none" w="med" len="med"/>
+                    </a:lnR>
+                    <a:lnT w="9525" cap="flat" cmpd="sng" algn="ctr">
+                      <a:solidFill>
+                        <a:srgbClr val="E1E0D9"/>
+                      </a:solidFill>
+                      <a:prstDash val="solid"/>
+                      <a:round/>
+                      <a:headEnd type="none" w="med" len="med"/>
+                      <a:tailEnd type="none" w="med" len="med"/>
+                    </a:lnT>
+                    <a:lnB w="9525" cap="flat" cmpd="sng" algn="ctr">
+                      <a:solidFill>
+                        <a:srgbClr val="E1E0D9"/>
+                      </a:solidFill>
+                      <a:prstDash val="solid"/>
+                      <a:round/>
+                      <a:headEnd type="none" w="med" len="med"/>
+                      <a:tailEnd type="none" w="med" len="med"/>
+                    </a:lnB>
+                  </a:tcPr>
+                </a:tc>
+                <a:tc>
+                  <a:txBody>
+                    <a:bodyPr/>
+                    <a:lstStyle/>
+                    <a:p>
+                      <a:pPr algn="ctr" indent="0" marL="0">
+                        <a:buNone/>
+                      </a:pPr>
+                      <a:r>
+                        <a:rPr lang="en-US" sz="1100" dirty="0">
+                          <a:solidFill>
+                            <a:srgbClr val="0B0B0B"/>
+                          </a:solidFill>
+                          <a:latin typeface="Calibri" pitchFamily="34" charset="0"/>
+                          <a:ea typeface="Calibri" pitchFamily="34" charset="-122"/>
+                          <a:cs typeface="Calibri" pitchFamily="34" charset="-120"/>
+                        </a:rPr>
+                        <a:t>13.3 (9.8–17.1)</a:t>
+                      </a:r>
+                      <a:endParaRPr lang="en-US" sz="1100" dirty="0">
+                        <a:latin typeface="Calibri" charset="0"/>
+                        <a:ea typeface="Calibri" charset="0"/>
+                        <a:cs typeface="Calibri" charset="0"/>
+                      </a:endParaRPr>
+                    </a:p>
+                  </a:txBody>
+                  <a:tcPr marL="36576" marR="36576" marT="36576" marB="36576" anchor="ctr">
+                    <a:lnL w="9525" cap="flat" cmpd="sng" algn="ctr">
+                      <a:solidFill>
+                        <a:srgbClr val="E1E0D9"/>
+                      </a:solidFill>
+                      <a:prstDash val="solid"/>
+                      <a:round/>
+                      <a:headEnd type="none" w="med" len="med"/>
+                      <a:tailEnd type="none" w="med" len="med"/>
+                    </a:lnL>
+                    <a:lnR w="9525" cap="flat" cmpd="sng" algn="ctr">
+                      <a:solidFill>
+                        <a:srgbClr val="E1E0D9"/>
+                      </a:solidFill>
+                      <a:prstDash val="solid"/>
+                      <a:round/>
+                      <a:headEnd type="none" w="med" len="med"/>
+                      <a:tailEnd type="none" w="med" len="med"/>
+                    </a:lnR>
+                    <a:lnT w="9525" cap="flat" cmpd="sng" algn="ctr">
+                      <a:solidFill>
+                        <a:srgbClr val="E1E0D9"/>
+                      </a:solidFill>
+                      <a:prstDash val="solid"/>
+                      <a:round/>
+                      <a:headEnd type="none" w="med" len="med"/>
+                      <a:tailEnd type="none" w="med" len="med"/>
+                    </a:lnT>
+                    <a:lnB w="9525" cap="flat" cmpd="sng" algn="ctr">
+                      <a:solidFill>
+                        <a:srgbClr val="E1E0D9"/>
+                      </a:solidFill>
+                      <a:prstDash val="solid"/>
+                      <a:round/>
+                      <a:headEnd type="none" w="med" len="med"/>
+                      <a:tailEnd type="none" w="med" len="med"/>
+                    </a:lnB>
+                  </a:tcPr>
+                </a:tc>
+                <a:tc>
+                  <a:txBody>
+                    <a:bodyPr/>
+                    <a:lstStyle/>
+                    <a:p>
+                      <a:pPr algn="ctr" indent="0" marL="0">
+                        <a:buNone/>
+                      </a:pPr>
+                      <a:r>
+                        <a:rPr lang="en-US" sz="1100" dirty="0">
+                          <a:solidFill>
+                            <a:srgbClr val="0B0B0B"/>
+                          </a:solidFill>
+                          <a:latin typeface="Calibri" pitchFamily="34" charset="0"/>
+                          <a:ea typeface="Calibri" pitchFamily="34" charset="-122"/>
+                          <a:cs typeface="Calibri" pitchFamily="34" charset="-120"/>
+                        </a:rPr>
+                        <a:t>11.2 (10.4–12.0)</a:t>
+                      </a:r>
+                      <a:endParaRPr lang="en-US" sz="1100" dirty="0">
+                        <a:latin typeface="Calibri" charset="0"/>
+                        <a:ea typeface="Calibri" charset="0"/>
+                        <a:cs typeface="Calibri" charset="0"/>
+                      </a:endParaRPr>
+                    </a:p>
+                  </a:txBody>
+                  <a:tcPr marL="36576" marR="36576" marT="36576" marB="36576" anchor="ctr">
+                    <a:lnL w="9525" cap="flat" cmpd="sng" algn="ctr">
+                      <a:solidFill>
+                        <a:srgbClr val="E1E0D9"/>
+                      </a:solidFill>
+                      <a:prstDash val="solid"/>
+                      <a:round/>
+                      <a:headEnd type="none" w="med" len="med"/>
+                      <a:tailEnd type="none" w="med" len="med"/>
+                    </a:lnL>
+                    <a:lnR w="9525" cap="flat" cmpd="sng" algn="ctr">
+                      <a:solidFill>
+                        <a:srgbClr val="E1E0D9"/>
+                      </a:solidFill>
+                      <a:prstDash val="solid"/>
+                      <a:round/>
+                      <a:headEnd type="none" w="med" len="med"/>
+                      <a:tailEnd type="none" w="med" len="med"/>
+                    </a:lnR>
+                    <a:lnT w="9525" cap="flat" cmpd="sng" algn="ctr">
+                      <a:solidFill>
+                        <a:srgbClr val="E1E0D9"/>
+                      </a:solidFill>
+                      <a:prstDash val="solid"/>
+                      <a:round/>
+                      <a:headEnd type="none" w="med" len="med"/>
+                      <a:tailEnd type="none" w="med" len="med"/>
+                    </a:lnT>
+                    <a:lnB w="9525" cap="flat" cmpd="sng" algn="ctr">
+                      <a:solidFill>
+                        <a:srgbClr val="E1E0D9"/>
+                      </a:solidFill>
+                      <a:prstDash val="solid"/>
+                      <a:round/>
+                      <a:headEnd type="none" w="med" len="med"/>
+                      <a:tailEnd type="none" w="med" len="med"/>
+                    </a:lnB>
+                  </a:tcPr>
+                </a:tc>
+              </a:tr>
+            </a:tbl>
+          </a:graphicData>
+        </a:graphic>
+      </p:graphicFrame>
+      <p:graphicFrame>
+        <p:nvGraphicFramePr>
+          <p:cNvPr id="33" name="sensitivity table"/>
+          <p:cNvGraphicFramePr>
+            <a:graphicFrameLocks noGrp="1"/>
+          </p:cNvGraphicFramePr>
+          <p:nvPr>
+            <p:extLst>
+              <p:ext uri="{D42A27DB-BD31-4B8C-83A1-F6EECF244321}">
+                <p14:modId xmlns:p14="http://schemas.microsoft.com/office/powerpoint/2010/main" val="1579011935"/>
+              </p:ext>
+            </p:extLst>
+          </p:nvPr>
+        </p:nvGraphicFramePr>
+        <p:xfrm>
+          <a:off x="548640" y="4434840"/>
+          <a:ext cx="5852160" cy="914400"/>
+        </p:xfrm>
+        <a:graphic>
+          <a:graphicData uri="http://schemas.openxmlformats.org/drawingml/2006/table">
+            <a:tbl>
+              <a:tblPr/>
+              <a:tblGrid>
+                <a:gridCol w="2011680"/>
+                <a:gridCol w="1280160"/>
+                <a:gridCol w="1280160"/>
+                <a:gridCol w="1280160"/>
+              </a:tblGrid>
+              <a:tr h="301752">
+                <a:tc>
+                  <a:txBody>
+                    <a:bodyPr/>
+                    <a:lstStyle/>
+                    <a:p>
+                      <a:pPr algn="l" indent="0" marL="0">
+                        <a:buNone/>
+                      </a:pPr>
+                      <a:r>
+                        <a:rPr lang="en-US" sz="1100" b="1" dirty="0">
+                          <a:solidFill>
+                            <a:srgbClr val="FFFFFF"/>
+                          </a:solidFill>
+                          <a:latin typeface="Calibri" pitchFamily="34" charset="0"/>
+                          <a:ea typeface="Calibri" pitchFamily="34" charset="-122"/>
+                          <a:cs typeface="Calibri" pitchFamily="34" charset="-120"/>
+                        </a:rPr>
+                        <a:t>attach diameter rule</a:t>
+                      </a:r>
+                      <a:endParaRPr lang="en-US" sz="1100" dirty="0">
+                        <a:latin typeface="Calibri" charset="0"/>
+                        <a:ea typeface="Calibri" charset="0"/>
+                        <a:cs typeface="Calibri" charset="0"/>
+                      </a:endParaRPr>
+                    </a:p>
+                  </a:txBody>
+                  <a:tcPr marL="36576" marR="36576" marT="36576" marB="36576" anchor="ctr">
+                    <a:lnL w="9525" cap="flat" cmpd="sng" algn="ctr">
+                      <a:solidFill>
+                        <a:srgbClr val="E1E0D9"/>
+                      </a:solidFill>
+                      <a:prstDash val="solid"/>
+                      <a:round/>
+                      <a:headEnd type="none" w="med" len="med"/>
+                      <a:tailEnd type="none" w="med" len="med"/>
+                    </a:lnL>
+                    <a:lnR w="9525" cap="flat" cmpd="sng" algn="ctr">
+                      <a:solidFill>
+                        <a:srgbClr val="E1E0D9"/>
+                      </a:solidFill>
+                      <a:prstDash val="solid"/>
+                      <a:round/>
+                      <a:headEnd type="none" w="med" len="med"/>
+                      <a:tailEnd type="none" w="med" len="med"/>
+                    </a:lnR>
+                    <a:lnT w="9525" cap="flat" cmpd="sng" algn="ctr">
+                      <a:solidFill>
+                        <a:srgbClr val="E1E0D9"/>
+                      </a:solidFill>
+                      <a:prstDash val="solid"/>
+                      <a:round/>
+                      <a:headEnd type="none" w="med" len="med"/>
+                      <a:tailEnd type="none" w="med" len="med"/>
+                    </a:lnT>
+                    <a:lnB w="9525" cap="flat" cmpd="sng" algn="ctr">
+                      <a:solidFill>
+                        <a:srgbClr val="E1E0D9"/>
+                      </a:solidFill>
+                      <a:prstDash val="solid"/>
+                      <a:round/>
+                      <a:headEnd type="none" w="med" len="med"/>
+                      <a:tailEnd type="none" w="med" len="med"/>
+                    </a:lnB>
+                    <a:solidFill>
+                      <a:srgbClr val="1F2933"/>
+                    </a:solidFill>
+                  </a:tcPr>
+                </a:tc>
+                <a:tc>
+                  <a:txBody>
+                    <a:bodyPr/>
+                    <a:lstStyle/>
+                    <a:p>
+                      <a:pPr algn="ctr" indent="0" marL="0">
+                        <a:buNone/>
+                      </a:pPr>
+                      <a:r>
+                        <a:rPr lang="en-US" sz="1100" b="1" dirty="0">
+                          <a:solidFill>
+                            <a:srgbClr val="FFFFFF"/>
+                          </a:solidFill>
+                          <a:latin typeface="Calibri" pitchFamily="34" charset="0"/>
+                          <a:ea typeface="Calibri" pitchFamily="34" charset="-122"/>
+                          <a:cs typeface="Calibri" pitchFamily="34" charset="-120"/>
+                        </a:rPr>
+                        <a:t>bins ±0 mm</a:t>
+                      </a:r>
+                      <a:endParaRPr lang="en-US" sz="1100" dirty="0">
+                        <a:latin typeface="Calibri" charset="0"/>
+                        <a:ea typeface="Calibri" charset="0"/>
+                        <a:cs typeface="Calibri" charset="0"/>
+                      </a:endParaRPr>
+                    </a:p>
+                  </a:txBody>
+                  <a:tcPr marL="36576" marR="36576" marT="36576" marB="36576" anchor="ctr">
+                    <a:lnL w="9525" cap="flat" cmpd="sng" algn="ctr">
+                      <a:solidFill>
+                        <a:srgbClr val="E1E0D9"/>
+                      </a:solidFill>
+                      <a:prstDash val="solid"/>
+                      <a:round/>
+                      <a:headEnd type="none" w="med" len="med"/>
+                      <a:tailEnd type="none" w="med" len="med"/>
+                    </a:lnL>
+                    <a:lnR w="9525" cap="flat" cmpd="sng" algn="ctr">
+                      <a:solidFill>
+                        <a:srgbClr val="E1E0D9"/>
+                      </a:solidFill>
+                      <a:prstDash val="solid"/>
+                      <a:round/>
+                      <a:headEnd type="none" w="med" len="med"/>
+                      <a:tailEnd type="none" w="med" len="med"/>
+                    </a:lnR>
+                    <a:lnT w="9525" cap="flat" cmpd="sng" algn="ctr">
+                      <a:solidFill>
+                        <a:srgbClr val="E1E0D9"/>
+                      </a:solidFill>
+                      <a:prstDash val="solid"/>
+                      <a:round/>
+                      <a:headEnd type="none" w="med" len="med"/>
+                      <a:tailEnd type="none" w="med" len="med"/>
+                    </a:lnT>
+                    <a:lnB w="9525" cap="flat" cmpd="sng" algn="ctr">
+                      <a:solidFill>
+                        <a:srgbClr val="E1E0D9"/>
+                      </a:solidFill>
+                      <a:prstDash val="solid"/>
+                      <a:round/>
+                      <a:headEnd type="none" w="med" len="med"/>
+                      <a:tailEnd type="none" w="med" len="med"/>
+                    </a:lnB>
+                    <a:solidFill>
+                      <a:srgbClr val="1F2933"/>
+                    </a:solidFill>
+                  </a:tcPr>
+                </a:tc>
+                <a:tc>
+                  <a:txBody>
+                    <a:bodyPr/>
+                    <a:lstStyle/>
+                    <a:p>
+                      <a:pPr algn="ctr" indent="0" marL="0">
+                        <a:buNone/>
+                      </a:pPr>
+                      <a:r>
+                        <a:rPr lang="en-US" sz="1100" b="1" dirty="0">
+                          <a:solidFill>
+                            <a:srgbClr val="FFFFFF"/>
+                          </a:solidFill>
+                          <a:latin typeface="Calibri" pitchFamily="34" charset="0"/>
+                          <a:ea typeface="Calibri" pitchFamily="34" charset="-122"/>
+                          <a:cs typeface="Calibri" pitchFamily="34" charset="-120"/>
+                        </a:rPr>
+                        <a:t>bins ±0.5 mm</a:t>
+                      </a:r>
+                      <a:endParaRPr lang="en-US" sz="1100" dirty="0">
+                        <a:latin typeface="Calibri" charset="0"/>
+                        <a:ea typeface="Calibri" charset="0"/>
+                        <a:cs typeface="Calibri" charset="0"/>
+                      </a:endParaRPr>
+                    </a:p>
+                  </a:txBody>
+                  <a:tcPr marL="36576" marR="36576" marT="36576" marB="36576" anchor="ctr">
+                    <a:lnL w="9525" cap="flat" cmpd="sng" algn="ctr">
+                      <a:solidFill>
+                        <a:srgbClr val="E1E0D9"/>
+                      </a:solidFill>
+                      <a:prstDash val="solid"/>
+                      <a:round/>
+                      <a:headEnd type="none" w="med" len="med"/>
+                      <a:tailEnd type="none" w="med" len="med"/>
+                    </a:lnL>
+                    <a:lnR w="9525" cap="flat" cmpd="sng" algn="ctr">
+                      <a:solidFill>
+                        <a:srgbClr val="E1E0D9"/>
+                      </a:solidFill>
+                      <a:prstDash val="solid"/>
+                      <a:round/>
+                      <a:headEnd type="none" w="med" len="med"/>
+                      <a:tailEnd type="none" w="med" len="med"/>
+                    </a:lnR>
+                    <a:lnT w="9525" cap="flat" cmpd="sng" algn="ctr">
+                      <a:solidFill>
+                        <a:srgbClr val="E1E0D9"/>
+                      </a:solidFill>
+                      <a:prstDash val="solid"/>
+                      <a:round/>
+                      <a:headEnd type="none" w="med" len="med"/>
+                      <a:tailEnd type="none" w="med" len="med"/>
+                    </a:lnT>
+                    <a:lnB w="9525" cap="flat" cmpd="sng" algn="ctr">
+                      <a:solidFill>
+                        <a:srgbClr val="E1E0D9"/>
+                      </a:solidFill>
+                      <a:prstDash val="solid"/>
+                      <a:round/>
+                      <a:headEnd type="none" w="med" len="med"/>
+                      <a:tailEnd type="none" w="med" len="med"/>
+                    </a:lnB>
+                    <a:solidFill>
+                      <a:srgbClr val="1F2933"/>
+                    </a:solidFill>
+                  </a:tcPr>
+                </a:tc>
+                <a:tc>
+                  <a:txBody>
+                    <a:bodyPr/>
+                    <a:lstStyle/>
+                    <a:p>
+                      <a:pPr algn="ctr" indent="0" marL="0">
+                        <a:buNone/>
+                      </a:pPr>
+                      <a:r>
+                        <a:rPr lang="en-US" sz="1100" b="1" dirty="0">
+                          <a:solidFill>
+                            <a:srgbClr val="FFFFFF"/>
+                          </a:solidFill>
+                          <a:latin typeface="Calibri" pitchFamily="34" charset="0"/>
+                          <a:ea typeface="Calibri" pitchFamily="34" charset="-122"/>
+                          <a:cs typeface="Calibri" pitchFamily="34" charset="-120"/>
+                        </a:rPr>
+                        <a:t>bins ±1 mm</a:t>
+                      </a:r>
+                      <a:endParaRPr lang="en-US" sz="1100" dirty="0">
+                        <a:latin typeface="Calibri" charset="0"/>
+                        <a:ea typeface="Calibri" charset="0"/>
+                        <a:cs typeface="Calibri" charset="0"/>
+                      </a:endParaRPr>
+                    </a:p>
+                  </a:txBody>
+                  <a:tcPr marL="36576" marR="36576" marT="36576" marB="36576" anchor="ctr">
+                    <a:lnL w="9525" cap="flat" cmpd="sng" algn="ctr">
+                      <a:solidFill>
+                        <a:srgbClr val="E1E0D9"/>
+                      </a:solidFill>
+                      <a:prstDash val="solid"/>
+                      <a:round/>
+                      <a:headEnd type="none" w="med" len="med"/>
+                      <a:tailEnd type="none" w="med" len="med"/>
+                    </a:lnL>
+                    <a:lnR w="9525" cap="flat" cmpd="sng" algn="ctr">
+                      <a:solidFill>
+                        <a:srgbClr val="E1E0D9"/>
+                      </a:solidFill>
+                      <a:prstDash val="solid"/>
+                      <a:round/>
+                      <a:headEnd type="none" w="med" len="med"/>
+                      <a:tailEnd type="none" w="med" len="med"/>
+                    </a:lnR>
+                    <a:lnT w="9525" cap="flat" cmpd="sng" algn="ctr">
+                      <a:solidFill>
+                        <a:srgbClr val="E1E0D9"/>
+                      </a:solidFill>
+                      <a:prstDash val="solid"/>
+                      <a:round/>
+                      <a:headEnd type="none" w="med" len="med"/>
+                      <a:tailEnd type="none" w="med" len="med"/>
+                    </a:lnT>
+                    <a:lnB w="9525" cap="flat" cmpd="sng" algn="ctr">
+                      <a:solidFill>
+                        <a:srgbClr val="E1E0D9"/>
+                      </a:solidFill>
+                      <a:prstDash val="solid"/>
+                      <a:round/>
+                      <a:headEnd type="none" w="med" len="med"/>
+                      <a:tailEnd type="none" w="med" len="med"/>
+                    </a:lnB>
+                    <a:solidFill>
+                      <a:srgbClr val="1F2933"/>
+                    </a:solidFill>
+                  </a:tcPr>
+                </a:tc>
+              </a:tr>
+              <a:tr h="301752">
+                <a:tc>
+                  <a:txBody>
+                    <a:bodyPr/>
+                    <a:lstStyle/>
+                    <a:p>
+                      <a:pPr algn="l" indent="0" marL="0">
+                        <a:buNone/>
+                      </a:pPr>
+                      <a:r>
+                        <a:rPr lang="en-US" sz="1100" b="1" dirty="0">
+                          <a:solidFill>
+                            <a:srgbClr val="0B0B0B"/>
+                          </a:solidFill>
+                          <a:latin typeface="Calibri" pitchFamily="34" charset="0"/>
+                          <a:ea typeface="Calibri" pitchFamily="34" charset="-122"/>
+                          <a:cs typeface="Calibri" pitchFamily="34" charset="-120"/>
+                        </a:rPr>
+                        <a:t>service (paper)</a:t>
+                      </a:r>
+                      <a:endParaRPr lang="en-US" sz="1100" dirty="0">
+                        <a:latin typeface="Calibri" charset="0"/>
+                        <a:ea typeface="Calibri" charset="0"/>
+                        <a:cs typeface="Calibri" charset="0"/>
+                      </a:endParaRPr>
+                    </a:p>
+                  </a:txBody>
+                  <a:tcPr marL="36576" marR="36576" marT="36576" marB="36576" anchor="ctr">
+                    <a:lnL w="9525" cap="flat" cmpd="sng" algn="ctr">
+                      <a:solidFill>
+                        <a:srgbClr val="E1E0D9"/>
+                      </a:solidFill>
+                      <a:prstDash val="solid"/>
+                      <a:round/>
+                      <a:headEnd type="none" w="med" len="med"/>
+                      <a:tailEnd type="none" w="med" len="med"/>
+                    </a:lnL>
+                    <a:lnR w="9525" cap="flat" cmpd="sng" algn="ctr">
+                      <a:solidFill>
+                        <a:srgbClr val="E1E0D9"/>
+                      </a:solidFill>
+                      <a:prstDash val="solid"/>
+                      <a:round/>
+                      <a:headEnd type="none" w="med" len="med"/>
+                      <a:tailEnd type="none" w="med" len="med"/>
+                    </a:lnR>
+                    <a:lnT w="9525" cap="flat" cmpd="sng" algn="ctr">
+                      <a:solidFill>
+                        <a:srgbClr val="E1E0D9"/>
+                      </a:solidFill>
+                      <a:prstDash val="solid"/>
+                      <a:round/>
+                      <a:headEnd type="none" w="med" len="med"/>
+                      <a:tailEnd type="none" w="med" len="med"/>
+                    </a:lnT>
+                    <a:lnB w="9525" cap="flat" cmpd="sng" algn="ctr">
+                      <a:solidFill>
+                        <a:srgbClr val="E1E0D9"/>
+                      </a:solidFill>
+                      <a:prstDash val="solid"/>
+                      <a:round/>
+                      <a:headEnd type="none" w="med" len="med"/>
+                      <a:tailEnd type="none" w="med" len="med"/>
+                    </a:lnB>
+                  </a:tcPr>
+                </a:tc>
+                <a:tc>
+                  <a:txBody>
+                    <a:bodyPr/>
+                    <a:lstStyle/>
+                    <a:p>
+                      <a:pPr algn="ctr" indent="0" marL="0">
+                        <a:buNone/>
+                      </a:pPr>
+                      <a:r>
+                        <a:rPr lang="en-US" sz="1100" dirty="0">
+                          <a:solidFill>
+                            <a:srgbClr val="0B0B0B"/>
+                          </a:solidFill>
+                          <a:latin typeface="Calibri" pitchFamily="34" charset="0"/>
+                          <a:ea typeface="Calibri" pitchFamily="34" charset="-122"/>
+                          <a:cs typeface="Calibri" pitchFamily="34" charset="-120"/>
+                        </a:rPr>
+                        <a:t>11.6</a:t>
+                      </a:r>
+                      <a:endParaRPr lang="en-US" sz="1100" dirty="0">
+                        <a:latin typeface="Calibri" charset="0"/>
+                        <a:ea typeface="Calibri" charset="0"/>
+                        <a:cs typeface="Calibri" charset="0"/>
+                      </a:endParaRPr>
+                    </a:p>
+                  </a:txBody>
+                  <a:tcPr marL="36576" marR="36576" marT="36576" marB="36576" anchor="ctr">
+                    <a:lnL w="9525" cap="flat" cmpd="sng" algn="ctr">
+                      <a:solidFill>
+                        <a:srgbClr val="E1E0D9"/>
+                      </a:solidFill>
+                      <a:prstDash val="solid"/>
+                      <a:round/>
+                      <a:headEnd type="none" w="med" len="med"/>
+                      <a:tailEnd type="none" w="med" len="med"/>
+                    </a:lnL>
+                    <a:lnR w="9525" cap="flat" cmpd="sng" algn="ctr">
+                      <a:solidFill>
+                        <a:srgbClr val="E1E0D9"/>
+                      </a:solidFill>
+                      <a:prstDash val="solid"/>
+                      <a:round/>
+                      <a:headEnd type="none" w="med" len="med"/>
+                      <a:tailEnd type="none" w="med" len="med"/>
+                    </a:lnR>
+                    <a:lnT w="9525" cap="flat" cmpd="sng" algn="ctr">
+                      <a:solidFill>
+                        <a:srgbClr val="E1E0D9"/>
+                      </a:solidFill>
+                      <a:prstDash val="solid"/>
+                      <a:round/>
+                      <a:headEnd type="none" w="med" len="med"/>
+                      <a:tailEnd type="none" w="med" len="med"/>
+                    </a:lnT>
+                    <a:lnB w="9525" cap="flat" cmpd="sng" algn="ctr">
+                      <a:solidFill>
+                        <a:srgbClr val="E1E0D9"/>
+                      </a:solidFill>
+                      <a:prstDash val="solid"/>
+                      <a:round/>
+                      <a:headEnd type="none" w="med" len="med"/>
+                      <a:tailEnd type="none" w="med" len="med"/>
+                    </a:lnB>
+                  </a:tcPr>
+                </a:tc>
+                <a:tc>
+                  <a:txBody>
+                    <a:bodyPr/>
+                    <a:lstStyle/>
+                    <a:p>
+                      <a:pPr algn="ctr" indent="0" marL="0">
+                        <a:buNone/>
+                      </a:pPr>
+                      <a:r>
+                        <a:rPr lang="en-US" sz="1100" dirty="0">
+                          <a:solidFill>
+                            <a:srgbClr val="0B0B0B"/>
+                          </a:solidFill>
+                          <a:latin typeface="Calibri" pitchFamily="34" charset="0"/>
+                          <a:ea typeface="Calibri" pitchFamily="34" charset="-122"/>
+                          <a:cs typeface="Calibri" pitchFamily="34" charset="-120"/>
+                        </a:rPr>
+                        <a:t>12.9</a:t>
+                      </a:r>
+                      <a:endParaRPr lang="en-US" sz="1100" dirty="0">
+                        <a:latin typeface="Calibri" charset="0"/>
+                        <a:ea typeface="Calibri" charset="0"/>
+                        <a:cs typeface="Calibri" charset="0"/>
+                      </a:endParaRPr>
+                    </a:p>
+                  </a:txBody>
+                  <a:tcPr marL="36576" marR="36576" marT="36576" marB="36576" anchor="ctr">
+                    <a:lnL w="9525" cap="flat" cmpd="sng" algn="ctr">
+                      <a:solidFill>
+                        <a:srgbClr val="E1E0D9"/>
+                      </a:solidFill>
+                      <a:prstDash val="solid"/>
+                      <a:round/>
+                      <a:headEnd type="none" w="med" len="med"/>
+                      <a:tailEnd type="none" w="med" len="med"/>
+                    </a:lnL>
+                    <a:lnR w="9525" cap="flat" cmpd="sng" algn="ctr">
+                      <a:solidFill>
+                        <a:srgbClr val="E1E0D9"/>
+                      </a:solidFill>
+                      <a:prstDash val="solid"/>
+                      <a:round/>
+                      <a:headEnd type="none" w="med" len="med"/>
+                      <a:tailEnd type="none" w="med" len="med"/>
+                    </a:lnR>
+                    <a:lnT w="9525" cap="flat" cmpd="sng" algn="ctr">
+                      <a:solidFill>
+                        <a:srgbClr val="E1E0D9"/>
+                      </a:solidFill>
+                      <a:prstDash val="solid"/>
+                      <a:round/>
+                      <a:headEnd type="none" w="med" len="med"/>
+                      <a:tailEnd type="none" w="med" len="med"/>
+                    </a:lnT>
+                    <a:lnB w="9525" cap="flat" cmpd="sng" algn="ctr">
+                      <a:solidFill>
+                        <a:srgbClr val="E1E0D9"/>
+                      </a:solidFill>
+                      <a:prstDash val="solid"/>
+                      <a:round/>
+                      <a:headEnd type="none" w="med" len="med"/>
+                      <a:tailEnd type="none" w="med" len="med"/>
+                    </a:lnB>
+                  </a:tcPr>
+                </a:tc>
+                <a:tc>
+                  <a:txBody>
+                    <a:bodyPr/>
+                    <a:lstStyle/>
+                    <a:p>
+                      <a:pPr algn="ctr" indent="0" marL="0">
+                        <a:buNone/>
+                      </a:pPr>
+                      <a:r>
+                        <a:rPr lang="en-US" sz="1100" dirty="0">
+                          <a:solidFill>
+                            <a:srgbClr val="0B0B0B"/>
+                          </a:solidFill>
+                          <a:latin typeface="Calibri" pitchFamily="34" charset="0"/>
+                          <a:ea typeface="Calibri" pitchFamily="34" charset="-122"/>
+                          <a:cs typeface="Calibri" pitchFamily="34" charset="-120"/>
+                        </a:rPr>
+                        <a:t>12.9</a:t>
+                      </a:r>
+                      <a:endParaRPr lang="en-US" sz="1100" dirty="0">
+                        <a:latin typeface="Calibri" charset="0"/>
+                        <a:ea typeface="Calibri" charset="0"/>
+                        <a:cs typeface="Calibri" charset="0"/>
+                      </a:endParaRPr>
+                    </a:p>
+                  </a:txBody>
+                  <a:tcPr marL="36576" marR="36576" marT="36576" marB="36576" anchor="ctr">
+                    <a:lnL w="9525" cap="flat" cmpd="sng" algn="ctr">
+                      <a:solidFill>
+                        <a:srgbClr val="E1E0D9"/>
+                      </a:solidFill>
+                      <a:prstDash val="solid"/>
+                      <a:round/>
+                      <a:headEnd type="none" w="med" len="med"/>
+                      <a:tailEnd type="none" w="med" len="med"/>
+                    </a:lnL>
+                    <a:lnR w="9525" cap="flat" cmpd="sng" algn="ctr">
+                      <a:solidFill>
+                        <a:srgbClr val="E1E0D9"/>
+                      </a:solidFill>
+                      <a:prstDash val="solid"/>
+                      <a:round/>
+                      <a:headEnd type="none" w="med" len="med"/>
+                      <a:tailEnd type="none" w="med" len="med"/>
+                    </a:lnR>
+                    <a:lnT w="9525" cap="flat" cmpd="sng" algn="ctr">
+                      <a:solidFill>
+                        <a:srgbClr val="E1E0D9"/>
+                      </a:solidFill>
+                      <a:prstDash val="solid"/>
+                      <a:round/>
+                      <a:headEnd type="none" w="med" len="med"/>
+                      <a:tailEnd type="none" w="med" len="med"/>
+                    </a:lnT>
+                    <a:lnB w="9525" cap="flat" cmpd="sng" algn="ctr">
+                      <a:solidFill>
+                        <a:srgbClr val="E1E0D9"/>
+                      </a:solidFill>
+                      <a:prstDash val="solid"/>
+                      <a:round/>
+                      <a:headEnd type="none" w="med" len="med"/>
+                      <a:tailEnd type="none" w="med" len="med"/>
+                    </a:lnB>
+                  </a:tcPr>
+                </a:tc>
+              </a:tr>
+              <a:tr h="301752">
+                <a:tc>
+                  <a:txBody>
+                    <a:bodyPr/>
+                    <a:lstStyle/>
+                    <a:p>
+                      <a:pPr algn="l" indent="0" marL="0">
+                        <a:buNone/>
+                      </a:pPr>
+                      <a:r>
+                        <a:rPr lang="en-US" sz="1100" dirty="0">
+                          <a:solidFill>
+                            <a:srgbClr val="0B0B0B"/>
+                          </a:solidFill>
+                          <a:latin typeface="Calibri" pitchFamily="34" charset="0"/>
+                          <a:ea typeface="Calibri" pitchFamily="34" charset="-122"/>
+                          <a:cs typeface="Calibri" pitchFamily="34" charset="-120"/>
+                        </a:rPr>
+                        <a:t>bare</a:t>
+                      </a:r>
+                      <a:endParaRPr lang="en-US" sz="1100" dirty="0">
+                        <a:latin typeface="Calibri" charset="0"/>
+                        <a:ea typeface="Calibri" charset="0"/>
+                        <a:cs typeface="Calibri" charset="0"/>
+                      </a:endParaRPr>
+                    </a:p>
+                  </a:txBody>
+                  <a:tcPr marL="36576" marR="36576" marT="36576" marB="36576" anchor="ctr">
+                    <a:lnL w="9525" cap="flat" cmpd="sng" algn="ctr">
+                      <a:solidFill>
+                        <a:srgbClr val="E1E0D9"/>
+                      </a:solidFill>
+                      <a:prstDash val="solid"/>
+                      <a:round/>
+                      <a:headEnd type="none" w="med" len="med"/>
+                      <a:tailEnd type="none" w="med" len="med"/>
+                    </a:lnL>
+                    <a:lnR w="9525" cap="flat" cmpd="sng" algn="ctr">
+                      <a:solidFill>
+                        <a:srgbClr val="E1E0D9"/>
+                      </a:solidFill>
+                      <a:prstDash val="solid"/>
+                      <a:round/>
+                      <a:headEnd type="none" w="med" len="med"/>
+                      <a:tailEnd type="none" w="med" len="med"/>
+                    </a:lnR>
+                    <a:lnT w="9525" cap="flat" cmpd="sng" algn="ctr">
+                      <a:solidFill>
+                        <a:srgbClr val="E1E0D9"/>
+                      </a:solidFill>
+                      <a:prstDash val="solid"/>
+                      <a:round/>
+                      <a:headEnd type="none" w="med" len="med"/>
+                      <a:tailEnd type="none" w="med" len="med"/>
+                    </a:lnT>
+                    <a:lnB w="9525" cap="flat" cmpd="sng" algn="ctr">
+                      <a:solidFill>
+                        <a:srgbClr val="E1E0D9"/>
+                      </a:solidFill>
+                      <a:prstDash val="solid"/>
+                      <a:round/>
+                      <a:headEnd type="none" w="med" len="med"/>
+                      <a:tailEnd type="none" w="med" len="med"/>
+                    </a:lnB>
+                  </a:tcPr>
+                </a:tc>
+                <a:tc>
+                  <a:txBody>
+                    <a:bodyPr/>
+                    <a:lstStyle/>
+                    <a:p>
+                      <a:pPr algn="ctr" indent="0" marL="0">
+                        <a:buNone/>
+                      </a:pPr>
+                      <a:r>
+                        <a:rPr lang="en-US" sz="1100" dirty="0">
+                          <a:solidFill>
+                            <a:srgbClr val="0B0B0B"/>
+                          </a:solidFill>
+                          <a:latin typeface="Calibri" pitchFamily="34" charset="0"/>
+                          <a:ea typeface="Calibri" pitchFamily="34" charset="-122"/>
+                          <a:cs typeface="Calibri" pitchFamily="34" charset="-120"/>
+                        </a:rPr>
+                        <a:t>11.6</a:t>
+                      </a:r>
+                      <a:endParaRPr lang="en-US" sz="1100" dirty="0">
+                        <a:latin typeface="Calibri" charset="0"/>
+                        <a:ea typeface="Calibri" charset="0"/>
+                        <a:cs typeface="Calibri" charset="0"/>
+                      </a:endParaRPr>
+                    </a:p>
+                  </a:txBody>
+                  <a:tcPr marL="36576" marR="36576" marT="36576" marB="36576" anchor="ctr">
+                    <a:lnL w="9525" cap="flat" cmpd="sng" algn="ctr">
+                      <a:solidFill>
+                        <a:srgbClr val="E1E0D9"/>
+                      </a:solidFill>
+                      <a:prstDash val="solid"/>
+                      <a:round/>
+                      <a:headEnd type="none" w="med" len="med"/>
+                      <a:tailEnd type="none" w="med" len="med"/>
+                    </a:lnL>
+                    <a:lnR w="9525" cap="flat" cmpd="sng" algn="ctr">
+                      <a:solidFill>
+                        <a:srgbClr val="E1E0D9"/>
+                      </a:solidFill>
+                      <a:prstDash val="solid"/>
+                      <a:round/>
+                      <a:headEnd type="none" w="med" len="med"/>
+                      <a:tailEnd type="none" w="med" len="med"/>
+                    </a:lnR>
+                    <a:lnT w="9525" cap="flat" cmpd="sng" algn="ctr">
+                      <a:solidFill>
+                        <a:srgbClr val="E1E0D9"/>
+                      </a:solidFill>
+                      <a:prstDash val="solid"/>
+                      <a:round/>
+                      <a:headEnd type="none" w="med" len="med"/>
+                      <a:tailEnd type="none" w="med" len="med"/>
+                    </a:lnT>
+                    <a:lnB w="9525" cap="flat" cmpd="sng" algn="ctr">
+                      <a:solidFill>
+                        <a:srgbClr val="E1E0D9"/>
+                      </a:solidFill>
+                      <a:prstDash val="solid"/>
+                      <a:round/>
+                      <a:headEnd type="none" w="med" len="med"/>
+                      <a:tailEnd type="none" w="med" len="med"/>
+                    </a:lnB>
+                  </a:tcPr>
+                </a:tc>
+                <a:tc>
+                  <a:txBody>
+                    <a:bodyPr/>
+                    <a:lstStyle/>
+                    <a:p>
+                      <a:pPr algn="ctr" indent="0" marL="0">
+                        <a:buNone/>
+                      </a:pPr>
+                      <a:r>
+                        <a:rPr lang="en-US" sz="1100" dirty="0">
+                          <a:solidFill>
+                            <a:srgbClr val="0B0B0B"/>
+                          </a:solidFill>
+                          <a:latin typeface="Calibri" pitchFamily="34" charset="0"/>
+                          <a:ea typeface="Calibri" pitchFamily="34" charset="-122"/>
+                          <a:cs typeface="Calibri" pitchFamily="34" charset="-120"/>
+                        </a:rPr>
+                        <a:t>16.4</a:t>
+                      </a:r>
+                      <a:endParaRPr lang="en-US" sz="1100" dirty="0">
+                        <a:latin typeface="Calibri" charset="0"/>
+                        <a:ea typeface="Calibri" charset="0"/>
+                        <a:cs typeface="Calibri" charset="0"/>
+                      </a:endParaRPr>
+                    </a:p>
+                  </a:txBody>
+                  <a:tcPr marL="36576" marR="36576" marT="36576" marB="36576" anchor="ctr">
+                    <a:lnL w="9525" cap="flat" cmpd="sng" algn="ctr">
+                      <a:solidFill>
+                        <a:srgbClr val="E1E0D9"/>
+                      </a:solidFill>
+                      <a:prstDash val="solid"/>
+                      <a:round/>
+                      <a:headEnd type="none" w="med" len="med"/>
+                      <a:tailEnd type="none" w="med" len="med"/>
+                    </a:lnL>
+                    <a:lnR w="9525" cap="flat" cmpd="sng" algn="ctr">
+                      <a:solidFill>
+                        <a:srgbClr val="E1E0D9"/>
+                      </a:solidFill>
+                      <a:prstDash val="solid"/>
+                      <a:round/>
+                      <a:headEnd type="none" w="med" len="med"/>
+                      <a:tailEnd type="none" w="med" len="med"/>
+                    </a:lnR>
+                    <a:lnT w="9525" cap="flat" cmpd="sng" algn="ctr">
+                      <a:solidFill>
+                        <a:srgbClr val="E1E0D9"/>
+                      </a:solidFill>
+                      <a:prstDash val="solid"/>
+                      <a:round/>
+                      <a:headEnd type="none" w="med" len="med"/>
+                      <a:tailEnd type="none" w="med" len="med"/>
+                    </a:lnT>
+                    <a:lnB w="9525" cap="flat" cmpd="sng" algn="ctr">
+                      <a:solidFill>
+                        <a:srgbClr val="E1E0D9"/>
+                      </a:solidFill>
+                      <a:prstDash val="solid"/>
+                      <a:round/>
+                      <a:headEnd type="none" w="med" len="med"/>
+                      <a:tailEnd type="none" w="med" len="med"/>
+                    </a:lnB>
+                  </a:tcPr>
+                </a:tc>
+                <a:tc>
+                  <a:txBody>
+                    <a:bodyPr/>
+                    <a:lstStyle/>
+                    <a:p>
+                      <a:pPr algn="ctr" indent="0" marL="0">
+                        <a:buNone/>
+                      </a:pPr>
+                      <a:r>
+                        <a:rPr lang="en-US" sz="1100" dirty="0">
+                          <a:solidFill>
+                            <a:srgbClr val="0B0B0B"/>
+                          </a:solidFill>
+                          <a:latin typeface="Calibri" pitchFamily="34" charset="0"/>
+                          <a:ea typeface="Calibri" pitchFamily="34" charset="-122"/>
+                          <a:cs typeface="Calibri" pitchFamily="34" charset="-120"/>
+                        </a:rPr>
+                        <a:t>16.4</a:t>
+                      </a:r>
+                      <a:endParaRPr lang="en-US" sz="1100" dirty="0">
+                        <a:latin typeface="Calibri" charset="0"/>
+                        <a:ea typeface="Calibri" charset="0"/>
+                        <a:cs typeface="Calibri" charset="0"/>
+                      </a:endParaRPr>
+                    </a:p>
+                  </a:txBody>
+                  <a:tcPr marL="36576" marR="36576" marT="36576" marB="36576" anchor="ctr">
+                    <a:lnL w="9525" cap="flat" cmpd="sng" algn="ctr">
+                      <a:solidFill>
+                        <a:srgbClr val="E1E0D9"/>
+                      </a:solidFill>
+                      <a:prstDash val="solid"/>
+                      <a:round/>
+                      <a:headEnd type="none" w="med" len="med"/>
+                      <a:tailEnd type="none" w="med" len="med"/>
+                    </a:lnL>
+                    <a:lnR w="9525" cap="flat" cmpd="sng" algn="ctr">
+                      <a:solidFill>
+                        <a:srgbClr val="E1E0D9"/>
+                      </a:solidFill>
+                      <a:prstDash val="solid"/>
+                      <a:round/>
+                      <a:headEnd type="none" w="med" len="med"/>
+                      <a:tailEnd type="none" w="med" len="med"/>
+                    </a:lnR>
+                    <a:lnT w="9525" cap="flat" cmpd="sng" algn="ctr">
+                      <a:solidFill>
+                        <a:srgbClr val="E1E0D9"/>
+                      </a:solidFill>
+                      <a:prstDash val="solid"/>
+                      <a:round/>
+                      <a:headEnd type="none" w="med" len="med"/>
+                      <a:tailEnd type="none" w="med" len="med"/>
+                    </a:lnT>
+                    <a:lnB w="9525" cap="flat" cmpd="sng" algn="ctr">
+                      <a:solidFill>
+                        <a:srgbClr val="E1E0D9"/>
+                      </a:solidFill>
+                      <a:prstDash val="solid"/>
+                      <a:round/>
+                      <a:headEnd type="none" w="med" len="med"/>
+                      <a:tailEnd type="none" w="med" len="med"/>
+                    </a:lnB>
+                  </a:tcPr>
+                </a:tc>
+              </a:tr>
+              <a:tr h="301752">
+                <a:tc>
+                  <a:txBody>
+                    <a:bodyPr/>
+                    <a:lstStyle/>
+                    <a:p>
+                      <a:pPr algn="l" indent="0" marL="0">
+                        <a:buNone/>
+                      </a:pPr>
+                      <a:r>
+                        <a:rPr lang="en-US" sz="1100" dirty="0">
+                          <a:solidFill>
+                            <a:srgbClr val="0B0B0B"/>
+                          </a:solidFill>
+                          <a:latin typeface="Calibri" pitchFamily="34" charset="0"/>
+                          <a:ea typeface="Calibri" pitchFamily="34" charset="-122"/>
+                          <a:cs typeface="Calibri" pitchFamily="34" charset="-120"/>
+                        </a:rPr>
+                        <a:t>insulated</a:t>
+                      </a:r>
+                      <a:endParaRPr lang="en-US" sz="1100" dirty="0">
+                        <a:latin typeface="Calibri" charset="0"/>
+                        <a:ea typeface="Calibri" charset="0"/>
+                        <a:cs typeface="Calibri" charset="0"/>
+                      </a:endParaRPr>
+                    </a:p>
+                  </a:txBody>
+                  <a:tcPr marL="36576" marR="36576" marT="36576" marB="36576" anchor="ctr">
+                    <a:lnL w="9525" cap="flat" cmpd="sng" algn="ctr">
+                      <a:solidFill>
+                        <a:srgbClr val="E1E0D9"/>
+                      </a:solidFill>
+                      <a:prstDash val="solid"/>
+                      <a:round/>
+                      <a:headEnd type="none" w="med" len="med"/>
+                      <a:tailEnd type="none" w="med" len="med"/>
+                    </a:lnL>
+                    <a:lnR w="9525" cap="flat" cmpd="sng" algn="ctr">
+                      <a:solidFill>
+                        <a:srgbClr val="E1E0D9"/>
+                      </a:solidFill>
+                      <a:prstDash val="solid"/>
+                      <a:round/>
+                      <a:headEnd type="none" w="med" len="med"/>
+                      <a:tailEnd type="none" w="med" len="med"/>
+                    </a:lnR>
+                    <a:lnT w="9525" cap="flat" cmpd="sng" algn="ctr">
+                      <a:solidFill>
+                        <a:srgbClr val="E1E0D9"/>
+                      </a:solidFill>
+                      <a:prstDash val="solid"/>
+                      <a:round/>
+                      <a:headEnd type="none" w="med" len="med"/>
+                      <a:tailEnd type="none" w="med" len="med"/>
+                    </a:lnT>
+                    <a:lnB w="9525" cap="flat" cmpd="sng" algn="ctr">
+                      <a:solidFill>
+                        <a:srgbClr val="E1E0D9"/>
+                      </a:solidFill>
+                      <a:prstDash val="solid"/>
+                      <a:round/>
+                      <a:headEnd type="none" w="med" len="med"/>
+                      <a:tailEnd type="none" w="med" len="med"/>
+                    </a:lnB>
+                  </a:tcPr>
+                </a:tc>
+                <a:tc>
+                  <a:txBody>
+                    <a:bodyPr/>
+                    <a:lstStyle/>
+                    <a:p>
+                      <a:pPr algn="ctr" indent="0" marL="0">
+                        <a:buNone/>
+                      </a:pPr>
+                      <a:r>
+                        <a:rPr lang="en-US" sz="1100" dirty="0">
+                          <a:solidFill>
+                            <a:srgbClr val="0B0B0B"/>
+                          </a:solidFill>
+                          <a:latin typeface="Calibri" pitchFamily="34" charset="0"/>
+                          <a:ea typeface="Calibri" pitchFamily="34" charset="-122"/>
+                          <a:cs typeface="Calibri" pitchFamily="34" charset="-120"/>
+                        </a:rPr>
+                        <a:t>6.2</a:t>
+                      </a:r>
+                      <a:endParaRPr lang="en-US" sz="1100" dirty="0">
+                        <a:latin typeface="Calibri" charset="0"/>
+                        <a:ea typeface="Calibri" charset="0"/>
+                        <a:cs typeface="Calibri" charset="0"/>
+                      </a:endParaRPr>
+                    </a:p>
+                  </a:txBody>
+                  <a:tcPr marL="36576" marR="36576" marT="36576" marB="36576" anchor="ctr">
+                    <a:lnL w="9525" cap="flat" cmpd="sng" algn="ctr">
+                      <a:solidFill>
+                        <a:srgbClr val="E1E0D9"/>
+                      </a:solidFill>
+                      <a:prstDash val="solid"/>
+                      <a:round/>
+                      <a:headEnd type="none" w="med" len="med"/>
+                      <a:tailEnd type="none" w="med" len="med"/>
+                    </a:lnL>
+                    <a:lnR w="9525" cap="flat" cmpd="sng" algn="ctr">
+                      <a:solidFill>
+                        <a:srgbClr val="E1E0D9"/>
+                      </a:solidFill>
+                      <a:prstDash val="solid"/>
+                      <a:round/>
+                      <a:headEnd type="none" w="med" len="med"/>
+                      <a:tailEnd type="none" w="med" len="med"/>
+                    </a:lnR>
+                    <a:lnT w="9525" cap="flat" cmpd="sng" algn="ctr">
+                      <a:solidFill>
+                        <a:srgbClr val="E1E0D9"/>
+                      </a:solidFill>
+                      <a:prstDash val="solid"/>
+                      <a:round/>
+                      <a:headEnd type="none" w="med" len="med"/>
+                      <a:tailEnd type="none" w="med" len="med"/>
+                    </a:lnT>
+                    <a:lnB w="9525" cap="flat" cmpd="sng" algn="ctr">
+                      <a:solidFill>
+                        <a:srgbClr val="E1E0D9"/>
+                      </a:solidFill>
+                      <a:prstDash val="solid"/>
+                      <a:round/>
+                      <a:headEnd type="none" w="med" len="med"/>
+                      <a:tailEnd type="none" w="med" len="med"/>
+                    </a:lnB>
+                  </a:tcPr>
+                </a:tc>
+                <a:tc>
+                  <a:txBody>
+                    <a:bodyPr/>
+                    <a:lstStyle/>
+                    <a:p>
+                      <a:pPr algn="ctr" indent="0" marL="0">
+                        <a:buNone/>
+                      </a:pPr>
+                      <a:r>
+                        <a:rPr lang="en-US" sz="1100" dirty="0">
+                          <a:solidFill>
+                            <a:srgbClr val="0B0B0B"/>
+                          </a:solidFill>
+                          <a:latin typeface="Calibri" pitchFamily="34" charset="0"/>
+                          <a:ea typeface="Calibri" pitchFamily="34" charset="-122"/>
+                          <a:cs typeface="Calibri" pitchFamily="34" charset="-120"/>
+                        </a:rPr>
+                        <a:t>7.5</a:t>
+                      </a:r>
+                      <a:endParaRPr lang="en-US" sz="1100" dirty="0">
+                        <a:latin typeface="Calibri" charset="0"/>
+                        <a:ea typeface="Calibri" charset="0"/>
+                        <a:cs typeface="Calibri" charset="0"/>
+                      </a:endParaRPr>
+                    </a:p>
+                  </a:txBody>
+                  <a:tcPr marL="36576" marR="36576" marT="36576" marB="36576" anchor="ctr">
+                    <a:lnL w="9525" cap="flat" cmpd="sng" algn="ctr">
+                      <a:solidFill>
+                        <a:srgbClr val="E1E0D9"/>
+                      </a:solidFill>
+                      <a:prstDash val="solid"/>
+                      <a:round/>
+                      <a:headEnd type="none" w="med" len="med"/>
+                      <a:tailEnd type="none" w="med" len="med"/>
+                    </a:lnL>
+                    <a:lnR w="9525" cap="flat" cmpd="sng" algn="ctr">
+                      <a:solidFill>
+                        <a:srgbClr val="E1E0D9"/>
+                      </a:solidFill>
+                      <a:prstDash val="solid"/>
+                      <a:round/>
+                      <a:headEnd type="none" w="med" len="med"/>
+                      <a:tailEnd type="none" w="med" len="med"/>
+                    </a:lnR>
+                    <a:lnT w="9525" cap="flat" cmpd="sng" algn="ctr">
+                      <a:solidFill>
+                        <a:srgbClr val="E1E0D9"/>
+                      </a:solidFill>
+                      <a:prstDash val="solid"/>
+                      <a:round/>
+                      <a:headEnd type="none" w="med" len="med"/>
+                      <a:tailEnd type="none" w="med" len="med"/>
+                    </a:lnT>
+                    <a:lnB w="9525" cap="flat" cmpd="sng" algn="ctr">
+                      <a:solidFill>
+                        <a:srgbClr val="E1E0D9"/>
+                      </a:solidFill>
+                      <a:prstDash val="solid"/>
+                      <a:round/>
+                      <a:headEnd type="none" w="med" len="med"/>
+                      <a:tailEnd type="none" w="med" len="med"/>
+                    </a:lnB>
+                  </a:tcPr>
+                </a:tc>
+                <a:tc>
+                  <a:txBody>
+                    <a:bodyPr/>
+                    <a:lstStyle/>
+                    <a:p>
+                      <a:pPr algn="ctr" indent="0" marL="0">
+                        <a:buNone/>
+                      </a:pPr>
+                      <a:r>
+                        <a:rPr lang="en-US" sz="1100" dirty="0">
+                          <a:solidFill>
+                            <a:srgbClr val="0B0B0B"/>
+                          </a:solidFill>
+                          <a:latin typeface="Calibri" pitchFamily="34" charset="0"/>
+                          <a:ea typeface="Calibri" pitchFamily="34" charset="-122"/>
+                          <a:cs typeface="Calibri" pitchFamily="34" charset="-120"/>
+                        </a:rPr>
+                        <a:t>7.5</a:t>
+                      </a:r>
+                      <a:endParaRPr lang="en-US" sz="1100" dirty="0">
+                        <a:latin typeface="Calibri" charset="0"/>
+                        <a:ea typeface="Calibri" charset="0"/>
+                        <a:cs typeface="Calibri" charset="0"/>
+                      </a:endParaRPr>
+                    </a:p>
+                  </a:txBody>
+                  <a:tcPr marL="36576" marR="36576" marT="36576" marB="36576" anchor="ctr">
+                    <a:lnL w="9525" cap="flat" cmpd="sng" algn="ctr">
+                      <a:solidFill>
+                        <a:srgbClr val="E1E0D9"/>
+                      </a:solidFill>
+                      <a:prstDash val="solid"/>
+                      <a:round/>
+                      <a:headEnd type="none" w="med" len="med"/>
+                      <a:tailEnd type="none" w="med" len="med"/>
+                    </a:lnL>
+                    <a:lnR w="9525" cap="flat" cmpd="sng" algn="ctr">
+                      <a:solidFill>
+                        <a:srgbClr val="E1E0D9"/>
+                      </a:solidFill>
+                      <a:prstDash val="solid"/>
+                      <a:round/>
+                      <a:headEnd type="none" w="med" len="med"/>
+                      <a:tailEnd type="none" w="med" len="med"/>
+                    </a:lnR>
+                    <a:lnT w="9525" cap="flat" cmpd="sng" algn="ctr">
+                      <a:solidFill>
+                        <a:srgbClr val="E1E0D9"/>
+                      </a:solidFill>
+                      <a:prstDash val="solid"/>
+                      <a:round/>
+                      <a:headEnd type="none" w="med" len="med"/>
+                      <a:tailEnd type="none" w="med" len="med"/>
+                    </a:lnT>
+                    <a:lnB w="9525" cap="flat" cmpd="sng" algn="ctr">
+                      <a:solidFill>
+                        <a:srgbClr val="E1E0D9"/>
+                      </a:solidFill>
+                      <a:prstDash val="solid"/>
+                      <a:round/>
+                      <a:headEnd type="none" w="med" len="med"/>
+                      <a:tailEnd type="none" w="med" len="med"/>
+                    </a:lnB>
+                  </a:tcPr>
+                </a:tc>
+              </a:tr>
+            </a:tbl>
+          </a:graphicData>
+        </a:graphic>
+      </p:graphicFrame>
+      <p:sp>
+        <p:nvSpPr>
+          <p:cNvPr id="5" name="sensitivity caption"/>
+          <p:cNvSpPr txBox="1"/>
+          <p:nvPr/>
+        </p:nvSpPr>
+        <p:spPr>
+          <a:xfrm>
+            <a:off x="548640" y="5715000"/>
+            <a:ext cx="5852160" cy="502920"/>
+          </a:xfrm>
+          <a:prstGeom prst="rect">
+            <a:avLst/>
+          </a:prstGeom>
+          <a:noFill/>
+          <a:ln/>
+        </p:spPr>
+        <p:txBody>
+          <a:bodyPr wrap="square" lIns="0" tIns="0" rIns="0" bIns="0" rtlCol="0" anchor="t"/>
+          <a:lstStyle/>
+          <a:p>
+            <a:pPr indent="0" marL="0">
+              <a:buNone/>
+            </a:pPr>
+            <a:r>
+              <a:rPr lang="en-US" sz="1100" dirty="0">
+                <a:solidFill>
+                  <a:srgbClr val="52514E"/>
+                </a:solidFill>
+              </a:rPr>
+              <a:t>% of benchmark pipes attachable when both bin edges are widened by the stated amount. DN100 (114.3 mm) lies 0.3 mm above the 108–114 mm bin, so the headline moves with the diameter rule and the edge tolerance.</a:t>
+            </a:r>
+            <a:endParaRPr lang="en-US" sz="1100" dirty="0"/>
+          </a:p>
+        </p:txBody>
+      </p:sp>
+      <p:graphicFrame>
+        <p:nvGraphicFramePr>
+          <p:cNvPr id="49" name="split catalog table"/>
+          <p:cNvGraphicFramePr>
+            <a:graphicFrameLocks noGrp="1"/>
+          </p:cNvGraphicFramePr>
+          <p:nvPr>
+            <p:extLst>
+              <p:ext uri="{D42A27DB-BD31-4B8C-83A1-F6EECF244321}">
+                <p14:modId xmlns:p14="http://schemas.microsoft.com/office/powerpoint/2010/main" val="1579011935"/>
+              </p:ext>
+            </p:extLst>
+          </p:nvPr>
+        </p:nvGraphicFramePr>
+        <p:xfrm>
+          <a:off x="6675120" y="1371600"/>
+          <a:ext cx="4965192" cy="914400"/>
+        </p:xfrm>
+        <a:graphic>
+          <a:graphicData uri="http://schemas.openxmlformats.org/drawingml/2006/table">
+            <a:tbl>
+              <a:tblPr/>
+              <a:tblGrid>
+                <a:gridCol w="1280160"/>
+                <a:gridCol w="1097280"/>
+                <a:gridCol w="2587752"/>
+              </a:tblGrid>
+              <a:tr h="301752">
+                <a:tc>
+                  <a:txBody>
+                    <a:bodyPr/>
+                    <a:lstStyle/>
+                    <a:p>
+                      <a:pPr algn="l" indent="0" marL="0">
+                        <a:buNone/>
+                      </a:pPr>
+                      <a:r>
+                        <a:rPr lang="en-US" sz="1100" b="1" dirty="0">
+                          <a:solidFill>
+                            <a:srgbClr val="FFFFFF"/>
+                          </a:solidFill>
+                          <a:latin typeface="Calibri" pitchFamily="34" charset="0"/>
+                          <a:ea typeface="Calibri" pitchFamily="34" charset="-122"/>
+                          <a:cs typeface="Calibri" pitchFamily="34" charset="-120"/>
+                        </a:rPr>
+                        <a:t>split</a:t>
+                      </a:r>
+                      <a:endParaRPr lang="en-US" sz="1100" dirty="0">
+                        <a:latin typeface="Calibri" charset="0"/>
+                        <a:ea typeface="Calibri" charset="0"/>
+                        <a:cs typeface="Calibri" charset="0"/>
+                      </a:endParaRPr>
+                    </a:p>
+                  </a:txBody>
+                  <a:tcPr marL="36576" marR="36576" marT="36576" marB="36576" anchor="ctr">
+                    <a:lnL w="9525" cap="flat" cmpd="sng" algn="ctr">
+                      <a:solidFill>
+                        <a:srgbClr val="E1E0D9"/>
+                      </a:solidFill>
+                      <a:prstDash val="solid"/>
+                      <a:round/>
+                      <a:headEnd type="none" w="med" len="med"/>
+                      <a:tailEnd type="none" w="med" len="med"/>
+                    </a:lnL>
+                    <a:lnR w="9525" cap="flat" cmpd="sng" algn="ctr">
+                      <a:solidFill>
+                        <a:srgbClr val="E1E0D9"/>
+                      </a:solidFill>
+                      <a:prstDash val="solid"/>
+                      <a:round/>
+                      <a:headEnd type="none" w="med" len="med"/>
+                      <a:tailEnd type="none" w="med" len="med"/>
+                    </a:lnR>
+                    <a:lnT w="9525" cap="flat" cmpd="sng" algn="ctr">
+                      <a:solidFill>
+                        <a:srgbClr val="E1E0D9"/>
+                      </a:solidFill>
+                      <a:prstDash val="solid"/>
+                      <a:round/>
+                      <a:headEnd type="none" w="med" len="med"/>
+                      <a:tailEnd type="none" w="med" len="med"/>
+                    </a:lnT>
+                    <a:lnB w="9525" cap="flat" cmpd="sng" algn="ctr">
+                      <a:solidFill>
+                        <a:srgbClr val="E1E0D9"/>
+                      </a:solidFill>
+                      <a:prstDash val="solid"/>
+                      <a:round/>
+                      <a:headEnd type="none" w="med" len="med"/>
+                      <a:tailEnd type="none" w="med" len="med"/>
+                    </a:lnB>
+                    <a:solidFill>
+                      <a:srgbClr val="1F2933"/>
+                    </a:solidFill>
+                  </a:tcPr>
+                </a:tc>
+                <a:tc>
+                  <a:txBody>
+                    <a:bodyPr/>
+                    <a:lstStyle/>
+                    <a:p>
+                      <a:pPr algn="ctr" indent="0" marL="0">
+                        <a:buNone/>
+                      </a:pPr>
+                      <a:r>
+                        <a:rPr lang="en-US" sz="1100" b="1" dirty="0">
+                          <a:solidFill>
+                            <a:srgbClr val="FFFFFF"/>
+                          </a:solidFill>
+                          <a:latin typeface="Calibri" pitchFamily="34" charset="0"/>
+                          <a:ea typeface="Calibri" pitchFamily="34" charset="-122"/>
+                          <a:cs typeface="Calibri" pitchFamily="34" charset="-120"/>
+                        </a:rPr>
+                        <a:t>pipes</a:t>
+                      </a:r>
+                      <a:endParaRPr lang="en-US" sz="1100" dirty="0">
+                        <a:latin typeface="Calibri" charset="0"/>
+                        <a:ea typeface="Calibri" charset="0"/>
+                        <a:cs typeface="Calibri" charset="0"/>
+                      </a:endParaRPr>
+                    </a:p>
+                  </a:txBody>
+                  <a:tcPr marL="36576" marR="36576" marT="36576" marB="36576" anchor="ctr">
+                    <a:lnL w="9525" cap="flat" cmpd="sng" algn="ctr">
+                      <a:solidFill>
+                        <a:srgbClr val="E1E0D9"/>
+                      </a:solidFill>
+                      <a:prstDash val="solid"/>
+                      <a:round/>
+                      <a:headEnd type="none" w="med" len="med"/>
+                      <a:tailEnd type="none" w="med" len="med"/>
+                    </a:lnL>
+                    <a:lnR w="9525" cap="flat" cmpd="sng" algn="ctr">
+                      <a:solidFill>
+                        <a:srgbClr val="E1E0D9"/>
+                      </a:solidFill>
+                      <a:prstDash val="solid"/>
+                      <a:round/>
+                      <a:headEnd type="none" w="med" len="med"/>
+                      <a:tailEnd type="none" w="med" len="med"/>
+                    </a:lnR>
+                    <a:lnT w="9525" cap="flat" cmpd="sng" algn="ctr">
+                      <a:solidFill>
+                        <a:srgbClr val="E1E0D9"/>
+                      </a:solidFill>
+                      <a:prstDash val="solid"/>
+                      <a:round/>
+                      <a:headEnd type="none" w="med" len="med"/>
+                      <a:tailEnd type="none" w="med" len="med"/>
+                    </a:lnT>
+                    <a:lnB w="9525" cap="flat" cmpd="sng" algn="ctr">
+                      <a:solidFill>
+                        <a:srgbClr val="E1E0D9"/>
+                      </a:solidFill>
+                      <a:prstDash val="solid"/>
+                      <a:round/>
+                      <a:headEnd type="none" w="med" len="med"/>
+                      <a:tailEnd type="none" w="med" len="med"/>
+                    </a:lnB>
+                    <a:solidFill>
+                      <a:srgbClr val="1F2933"/>
+                    </a:solidFill>
+                  </a:tcPr>
+                </a:tc>
+                <a:tc>
+                  <a:txBody>
+                    <a:bodyPr/>
+                    <a:lstStyle/>
+                    <a:p>
+                      <a:pPr algn="ctr" indent="0" marL="0">
+                        <a:buNone/>
+                      </a:pPr>
+                      <a:r>
+                        <a:rPr lang="en-US" sz="1100" b="1" dirty="0">
+                          <a:solidFill>
+                            <a:srgbClr val="FFFFFF"/>
+                          </a:solidFill>
+                          <a:latin typeface="Calibri" pitchFamily="34" charset="0"/>
+                          <a:ea typeface="Calibri" pitchFamily="34" charset="-122"/>
+                          <a:cs typeface="Calibri" pitchFamily="34" charset="-120"/>
+                        </a:rPr>
+                        <a:t>% attachable (95 % CI)</a:t>
+                      </a:r>
+                      <a:endParaRPr lang="en-US" sz="1100" dirty="0">
+                        <a:latin typeface="Calibri" charset="0"/>
+                        <a:ea typeface="Calibri" charset="0"/>
+                        <a:cs typeface="Calibri" charset="0"/>
+                      </a:endParaRPr>
+                    </a:p>
+                  </a:txBody>
+                  <a:tcPr marL="36576" marR="36576" marT="36576" marB="36576" anchor="ctr">
+                    <a:lnL w="9525" cap="flat" cmpd="sng" algn="ctr">
+                      <a:solidFill>
+                        <a:srgbClr val="E1E0D9"/>
+                      </a:solidFill>
+                      <a:prstDash val="solid"/>
+                      <a:round/>
+                      <a:headEnd type="none" w="med" len="med"/>
+                      <a:tailEnd type="none" w="med" len="med"/>
+                    </a:lnL>
+                    <a:lnR w="9525" cap="flat" cmpd="sng" algn="ctr">
+                      <a:solidFill>
+                        <a:srgbClr val="E1E0D9"/>
+                      </a:solidFill>
+                      <a:prstDash val="solid"/>
+                      <a:round/>
+                      <a:headEnd type="none" w="med" len="med"/>
+                      <a:tailEnd type="none" w="med" len="med"/>
+                    </a:lnR>
+                    <a:lnT w="9525" cap="flat" cmpd="sng" algn="ctr">
+                      <a:solidFill>
+                        <a:srgbClr val="E1E0D9"/>
+                      </a:solidFill>
+                      <a:prstDash val="solid"/>
+                      <a:round/>
+                      <a:headEnd type="none" w="med" len="med"/>
+                      <a:tailEnd type="none" w="med" len="med"/>
+                    </a:lnT>
+                    <a:lnB w="9525" cap="flat" cmpd="sng" algn="ctr">
+                      <a:solidFill>
+                        <a:srgbClr val="E1E0D9"/>
+                      </a:solidFill>
+                      <a:prstDash val="solid"/>
+                      <a:round/>
+                      <a:headEnd type="none" w="med" len="med"/>
+                      <a:tailEnd type="none" w="med" len="med"/>
+                    </a:lnB>
+                    <a:solidFill>
+                      <a:srgbClr val="1F2933"/>
+                    </a:solidFill>
+                  </a:tcPr>
+                </a:tc>
+              </a:tr>
+              <a:tr h="301752">
+                <a:tc>
+                  <a:txBody>
+                    <a:bodyPr/>
+                    <a:lstStyle/>
+                    <a:p>
+                      <a:pPr algn="l" indent="0" marL="0">
+                        <a:buNone/>
+                      </a:pPr>
+                      <a:r>
+                        <a:rPr lang="en-US" sz="1100" dirty="0">
+                          <a:solidFill>
+                            <a:srgbClr val="0B0B0B"/>
+                          </a:solidFill>
+                          <a:latin typeface="Calibri" pitchFamily="34" charset="0"/>
+                          <a:ea typeface="Calibri" pitchFamily="34" charset="-122"/>
+                          <a:cs typeface="Calibri" pitchFamily="34" charset="-120"/>
+                        </a:rPr>
+                        <a:t>train</a:t>
+                      </a:r>
+                      <a:endParaRPr lang="en-US" sz="1100" dirty="0">
+                        <a:latin typeface="Calibri" charset="0"/>
+                        <a:ea typeface="Calibri" charset="0"/>
+                        <a:cs typeface="Calibri" charset="0"/>
+                      </a:endParaRPr>
+                    </a:p>
+                  </a:txBody>
+                  <a:tcPr marL="36576" marR="36576" marT="36576" marB="36576" anchor="ctr">
+                    <a:lnL w="9525" cap="flat" cmpd="sng" algn="ctr">
+                      <a:solidFill>
+                        <a:srgbClr val="E1E0D9"/>
+                      </a:solidFill>
+                      <a:prstDash val="solid"/>
+                      <a:round/>
+                      <a:headEnd type="none" w="med" len="med"/>
+                      <a:tailEnd type="none" w="med" len="med"/>
+                    </a:lnL>
+                    <a:lnR w="9525" cap="flat" cmpd="sng" algn="ctr">
+                      <a:solidFill>
+                        <a:srgbClr val="E1E0D9"/>
+                      </a:solidFill>
+                      <a:prstDash val="solid"/>
+                      <a:round/>
+                      <a:headEnd type="none" w="med" len="med"/>
+                      <a:tailEnd type="none" w="med" len="med"/>
+                    </a:lnR>
+                    <a:lnT w="9525" cap="flat" cmpd="sng" algn="ctr">
+                      <a:solidFill>
+                        <a:srgbClr val="E1E0D9"/>
+                      </a:solidFill>
+                      <a:prstDash val="solid"/>
+                      <a:round/>
+                      <a:headEnd type="none" w="med" len="med"/>
+                      <a:tailEnd type="none" w="med" len="med"/>
+                    </a:lnT>
+                    <a:lnB w="9525" cap="flat" cmpd="sng" algn="ctr">
+                      <a:solidFill>
+                        <a:srgbClr val="E1E0D9"/>
+                      </a:solidFill>
+                      <a:prstDash val="solid"/>
+                      <a:round/>
+                      <a:headEnd type="none" w="med" len="med"/>
+                      <a:tailEnd type="none" w="med" len="med"/>
+                    </a:lnB>
+                  </a:tcPr>
+                </a:tc>
+                <a:tc>
+                  <a:txBody>
+                    <a:bodyPr/>
+                    <a:lstStyle/>
+                    <a:p>
+                      <a:pPr algn="ctr" indent="0" marL="0">
+                        <a:buNone/>
+                      </a:pPr>
+                      <a:r>
+                        <a:rPr lang="en-US" sz="1100" dirty="0">
+                          <a:solidFill>
+                            <a:srgbClr val="0B0B0B"/>
+                          </a:solidFill>
+                          <a:latin typeface="Calibri" pitchFamily="34" charset="0"/>
+                          <a:ea typeface="Calibri" pitchFamily="34" charset="-122"/>
+                          <a:cs typeface="Calibri" pitchFamily="34" charset="-120"/>
+                        </a:rPr>
+                        <a:t>12,930</a:t>
+                      </a:r>
+                      <a:endParaRPr lang="en-US" sz="1100" dirty="0">
+                        <a:latin typeface="Calibri" charset="0"/>
+                        <a:ea typeface="Calibri" charset="0"/>
+                        <a:cs typeface="Calibri" charset="0"/>
+                      </a:endParaRPr>
+                    </a:p>
+                  </a:txBody>
+                  <a:tcPr marL="36576" marR="36576" marT="36576" marB="36576" anchor="ctr">
+                    <a:lnL w="9525" cap="flat" cmpd="sng" algn="ctr">
+                      <a:solidFill>
+                        <a:srgbClr val="E1E0D9"/>
+                      </a:solidFill>
+                      <a:prstDash val="solid"/>
+                      <a:round/>
+                      <a:headEnd type="none" w="med" len="med"/>
+                      <a:tailEnd type="none" w="med" len="med"/>
+                    </a:lnL>
+                    <a:lnR w="9525" cap="flat" cmpd="sng" algn="ctr">
+                      <a:solidFill>
+                        <a:srgbClr val="E1E0D9"/>
+                      </a:solidFill>
+                      <a:prstDash val="solid"/>
+                      <a:round/>
+                      <a:headEnd type="none" w="med" len="med"/>
+                      <a:tailEnd type="none" w="med" len="med"/>
+                    </a:lnR>
+                    <a:lnT w="9525" cap="flat" cmpd="sng" algn="ctr">
+                      <a:solidFill>
+                        <a:srgbClr val="E1E0D9"/>
+                      </a:solidFill>
+                      <a:prstDash val="solid"/>
+                      <a:round/>
+                      <a:headEnd type="none" w="med" len="med"/>
+                      <a:tailEnd type="none" w="med" len="med"/>
+                    </a:lnT>
+                    <a:lnB w="9525" cap="flat" cmpd="sng" algn="ctr">
+                      <a:solidFill>
+                        <a:srgbClr val="E1E0D9"/>
+                      </a:solidFill>
+                      <a:prstDash val="solid"/>
+                      <a:round/>
+                      <a:headEnd type="none" w="med" len="med"/>
+                      <a:tailEnd type="none" w="med" len="med"/>
+                    </a:lnB>
+                  </a:tcPr>
+                </a:tc>
+                <a:tc>
+                  <a:txBody>
+                    <a:bodyPr/>
+                    <a:lstStyle/>
+                    <a:p>
+                      <a:pPr algn="ctr" indent="0" marL="0">
+                        <a:buNone/>
+                      </a:pPr>
+                      <a:r>
+                        <a:rPr lang="en-US" sz="1100" dirty="0">
+                          <a:solidFill>
+                            <a:srgbClr val="0B0B0B"/>
+                          </a:solidFill>
+                          <a:latin typeface="Calibri" pitchFamily="34" charset="0"/>
+                          <a:ea typeface="Calibri" pitchFamily="34" charset="-122"/>
+                          <a:cs typeface="Calibri" pitchFamily="34" charset="-120"/>
+                        </a:rPr>
+                        <a:t>10.8 (10.2–11.5)</a:t>
+                      </a:r>
+                      <a:endParaRPr lang="en-US" sz="1100" dirty="0">
+                        <a:latin typeface="Calibri" charset="0"/>
+                        <a:ea typeface="Calibri" charset="0"/>
+                        <a:cs typeface="Calibri" charset="0"/>
+                      </a:endParaRPr>
+                    </a:p>
+                  </a:txBody>
+                  <a:tcPr marL="36576" marR="36576" marT="36576" marB="36576" anchor="ctr">
+                    <a:lnL w="9525" cap="flat" cmpd="sng" algn="ctr">
+                      <a:solidFill>
+                        <a:srgbClr val="E1E0D9"/>
+                      </a:solidFill>
+                      <a:prstDash val="solid"/>
+                      <a:round/>
+                      <a:headEnd type="none" w="med" len="med"/>
+                      <a:tailEnd type="none" w="med" len="med"/>
+                    </a:lnL>
+                    <a:lnR w="9525" cap="flat" cmpd="sng" algn="ctr">
+                      <a:solidFill>
+                        <a:srgbClr val="E1E0D9"/>
+                      </a:solidFill>
+                      <a:prstDash val="solid"/>
+                      <a:round/>
+                      <a:headEnd type="none" w="med" len="med"/>
+                      <a:tailEnd type="none" w="med" len="med"/>
+                    </a:lnR>
+                    <a:lnT w="9525" cap="flat" cmpd="sng" algn="ctr">
+                      <a:solidFill>
+                        <a:srgbClr val="E1E0D9"/>
+                      </a:solidFill>
+                      <a:prstDash val="solid"/>
+                      <a:round/>
+                      <a:headEnd type="none" w="med" len="med"/>
+                      <a:tailEnd type="none" w="med" len="med"/>
+                    </a:lnT>
+                    <a:lnB w="9525" cap="flat" cmpd="sng" algn="ctr">
+                      <a:solidFill>
+                        <a:srgbClr val="E1E0D9"/>
+                      </a:solidFill>
+                      <a:prstDash val="solid"/>
+                      <a:round/>
+                      <a:headEnd type="none" w="med" len="med"/>
+                      <a:tailEnd type="none" w="med" len="med"/>
+                    </a:lnB>
+                  </a:tcPr>
+                </a:tc>
+              </a:tr>
+              <a:tr h="301752">
+                <a:tc>
+                  <a:txBody>
+                    <a:bodyPr/>
+                    <a:lstStyle/>
+                    <a:p>
+                      <a:pPr algn="l" indent="0" marL="0">
+                        <a:buNone/>
+                      </a:pPr>
+                      <a:r>
+                        <a:rPr lang="en-US" sz="1100" dirty="0">
+                          <a:solidFill>
+                            <a:srgbClr val="0B0B0B"/>
+                          </a:solidFill>
+                          <a:latin typeface="Calibri" pitchFamily="34" charset="0"/>
+                          <a:ea typeface="Calibri" pitchFamily="34" charset="-122"/>
+                          <a:cs typeface="Calibri" pitchFamily="34" charset="-120"/>
+                        </a:rPr>
+                        <a:t>val</a:t>
+                      </a:r>
+                      <a:endParaRPr lang="en-US" sz="1100" dirty="0">
+                        <a:latin typeface="Calibri" charset="0"/>
+                        <a:ea typeface="Calibri" charset="0"/>
+                        <a:cs typeface="Calibri" charset="0"/>
+                      </a:endParaRPr>
+                    </a:p>
+                  </a:txBody>
+                  <a:tcPr marL="36576" marR="36576" marT="36576" marB="36576" anchor="ctr">
+                    <a:lnL w="9525" cap="flat" cmpd="sng" algn="ctr">
+                      <a:solidFill>
+                        <a:srgbClr val="E1E0D9"/>
+                      </a:solidFill>
+                      <a:prstDash val="solid"/>
+                      <a:round/>
+                      <a:headEnd type="none" w="med" len="med"/>
+                      <a:tailEnd type="none" w="med" len="med"/>
+                    </a:lnL>
+                    <a:lnR w="9525" cap="flat" cmpd="sng" algn="ctr">
+                      <a:solidFill>
+                        <a:srgbClr val="E1E0D9"/>
+                      </a:solidFill>
+                      <a:prstDash val="solid"/>
+                      <a:round/>
+                      <a:headEnd type="none" w="med" len="med"/>
+                      <a:tailEnd type="none" w="med" len="med"/>
+                    </a:lnR>
+                    <a:lnT w="9525" cap="flat" cmpd="sng" algn="ctr">
+                      <a:solidFill>
+                        <a:srgbClr val="E1E0D9"/>
+                      </a:solidFill>
+                      <a:prstDash val="solid"/>
+                      <a:round/>
+                      <a:headEnd type="none" w="med" len="med"/>
+                      <a:tailEnd type="none" w="med" len="med"/>
+                    </a:lnT>
+                    <a:lnB w="9525" cap="flat" cmpd="sng" algn="ctr">
+                      <a:solidFill>
+                        <a:srgbClr val="E1E0D9"/>
+                      </a:solidFill>
+                      <a:prstDash val="solid"/>
+                      <a:round/>
+                      <a:headEnd type="none" w="med" len="med"/>
+                      <a:tailEnd type="none" w="med" len="med"/>
+                    </a:lnB>
+                  </a:tcPr>
+                </a:tc>
+                <a:tc>
+                  <a:txBody>
+                    <a:bodyPr/>
+                    <a:lstStyle/>
+                    <a:p>
+                      <a:pPr algn="ctr" indent="0" marL="0">
+                        <a:buNone/>
+                      </a:pPr>
+                      <a:r>
+                        <a:rPr lang="en-US" sz="1100" dirty="0">
+                          <a:solidFill>
+                            <a:srgbClr val="0B0B0B"/>
+                          </a:solidFill>
+                          <a:latin typeface="Calibri" pitchFamily="34" charset="0"/>
+                          <a:ea typeface="Calibri" pitchFamily="34" charset="-122"/>
+                          <a:cs typeface="Calibri" pitchFamily="34" charset="-120"/>
+                        </a:rPr>
+                        <a:t>1,254</a:t>
+                      </a:r>
+                      <a:endParaRPr lang="en-US" sz="1100" dirty="0">
+                        <a:latin typeface="Calibri" charset="0"/>
+                        <a:ea typeface="Calibri" charset="0"/>
+                        <a:cs typeface="Calibri" charset="0"/>
+                      </a:endParaRPr>
+                    </a:p>
+                  </a:txBody>
+                  <a:tcPr marL="36576" marR="36576" marT="36576" marB="36576" anchor="ctr">
+                    <a:lnL w="9525" cap="flat" cmpd="sng" algn="ctr">
+                      <a:solidFill>
+                        <a:srgbClr val="E1E0D9"/>
+                      </a:solidFill>
+                      <a:prstDash val="solid"/>
+                      <a:round/>
+                      <a:headEnd type="none" w="med" len="med"/>
+                      <a:tailEnd type="none" w="med" len="med"/>
+                    </a:lnL>
+                    <a:lnR w="9525" cap="flat" cmpd="sng" algn="ctr">
+                      <a:solidFill>
+                        <a:srgbClr val="E1E0D9"/>
+                      </a:solidFill>
+                      <a:prstDash val="solid"/>
+                      <a:round/>
+                      <a:headEnd type="none" w="med" len="med"/>
+                      <a:tailEnd type="none" w="med" len="med"/>
+                    </a:lnR>
+                    <a:lnT w="9525" cap="flat" cmpd="sng" algn="ctr">
+                      <a:solidFill>
+                        <a:srgbClr val="E1E0D9"/>
+                      </a:solidFill>
+                      <a:prstDash val="solid"/>
+                      <a:round/>
+                      <a:headEnd type="none" w="med" len="med"/>
+                      <a:tailEnd type="none" w="med" len="med"/>
+                    </a:lnT>
+                    <a:lnB w="9525" cap="flat" cmpd="sng" algn="ctr">
+                      <a:solidFill>
+                        <a:srgbClr val="E1E0D9"/>
+                      </a:solidFill>
+                      <a:prstDash val="solid"/>
+                      <a:round/>
+                      <a:headEnd type="none" w="med" len="med"/>
+                      <a:tailEnd type="none" w="med" len="med"/>
+                    </a:lnB>
+                  </a:tcPr>
+                </a:tc>
+                <a:tc>
+                  <a:txBody>
+                    <a:bodyPr/>
+                    <a:lstStyle/>
+                    <a:p>
+                      <a:pPr algn="ctr" indent="0" marL="0">
+                        <a:buNone/>
+                      </a:pPr>
+                      <a:r>
+                        <a:rPr lang="en-US" sz="1100" dirty="0">
+                          <a:solidFill>
+                            <a:srgbClr val="0B0B0B"/>
+                          </a:solidFill>
+                          <a:latin typeface="Calibri" pitchFamily="34" charset="0"/>
+                          <a:ea typeface="Calibri" pitchFamily="34" charset="-122"/>
+                          <a:cs typeface="Calibri" pitchFamily="34" charset="-120"/>
+                        </a:rPr>
+                        <a:t>9.4 (7.4–11.4)</a:t>
+                      </a:r>
+                      <a:endParaRPr lang="en-US" sz="1100" dirty="0">
+                        <a:latin typeface="Calibri" charset="0"/>
+                        <a:ea typeface="Calibri" charset="0"/>
+                        <a:cs typeface="Calibri" charset="0"/>
+                      </a:endParaRPr>
+                    </a:p>
+                  </a:txBody>
+                  <a:tcPr marL="36576" marR="36576" marT="36576" marB="36576" anchor="ctr">
+                    <a:lnL w="9525" cap="flat" cmpd="sng" algn="ctr">
+                      <a:solidFill>
+                        <a:srgbClr val="E1E0D9"/>
+                      </a:solidFill>
+                      <a:prstDash val="solid"/>
+                      <a:round/>
+                      <a:headEnd type="none" w="med" len="med"/>
+                      <a:tailEnd type="none" w="med" len="med"/>
+                    </a:lnL>
+                    <a:lnR w="9525" cap="flat" cmpd="sng" algn="ctr">
+                      <a:solidFill>
+                        <a:srgbClr val="E1E0D9"/>
+                      </a:solidFill>
+                      <a:prstDash val="solid"/>
+                      <a:round/>
+                      <a:headEnd type="none" w="med" len="med"/>
+                      <a:tailEnd type="none" w="med" len="med"/>
+                    </a:lnR>
+                    <a:lnT w="9525" cap="flat" cmpd="sng" algn="ctr">
+                      <a:solidFill>
+                        <a:srgbClr val="E1E0D9"/>
+                      </a:solidFill>
+                      <a:prstDash val="solid"/>
+                      <a:round/>
+                      <a:headEnd type="none" w="med" len="med"/>
+                      <a:tailEnd type="none" w="med" len="med"/>
+                    </a:lnT>
+                    <a:lnB w="9525" cap="flat" cmpd="sng" algn="ctr">
+                      <a:solidFill>
+                        <a:srgbClr val="E1E0D9"/>
+                      </a:solidFill>
+                      <a:prstDash val="solid"/>
+                      <a:round/>
+                      <a:headEnd type="none" w="med" len="med"/>
+                      <a:tailEnd type="none" w="med" len="med"/>
+                    </a:lnB>
+                  </a:tcPr>
+                </a:tc>
+              </a:tr>
+              <a:tr h="301752">
+                <a:tc>
+                  <a:txBody>
+                    <a:bodyPr/>
+                    <a:lstStyle/>
+                    <a:p>
+                      <a:pPr algn="l" indent="0" marL="0">
+                        <a:buNone/>
+                      </a:pPr>
+                      <a:r>
+                        <a:rPr lang="en-US" sz="1100" dirty="0">
+                          <a:solidFill>
+                            <a:srgbClr val="0B0B0B"/>
+                          </a:solidFill>
+                          <a:latin typeface="Calibri" pitchFamily="34" charset="0"/>
+                          <a:ea typeface="Calibri" pitchFamily="34" charset="-122"/>
+                          <a:cs typeface="Calibri" pitchFamily="34" charset="-120"/>
+                        </a:rPr>
+                        <a:t>test</a:t>
+                      </a:r>
+                      <a:endParaRPr lang="en-US" sz="1100" dirty="0">
+                        <a:latin typeface="Calibri" charset="0"/>
+                        <a:ea typeface="Calibri" charset="0"/>
+                        <a:cs typeface="Calibri" charset="0"/>
+                      </a:endParaRPr>
+                    </a:p>
+                  </a:txBody>
+                  <a:tcPr marL="36576" marR="36576" marT="36576" marB="36576" anchor="ctr">
+                    <a:lnL w="9525" cap="flat" cmpd="sng" algn="ctr">
+                      <a:solidFill>
+                        <a:srgbClr val="E1E0D9"/>
+                      </a:solidFill>
+                      <a:prstDash val="solid"/>
+                      <a:round/>
+                      <a:headEnd type="none" w="med" len="med"/>
+                      <a:tailEnd type="none" w="med" len="med"/>
+                    </a:lnL>
+                    <a:lnR w="9525" cap="flat" cmpd="sng" algn="ctr">
+                      <a:solidFill>
+                        <a:srgbClr val="E1E0D9"/>
+                      </a:solidFill>
+                      <a:prstDash val="solid"/>
+                      <a:round/>
+                      <a:headEnd type="none" w="med" len="med"/>
+                      <a:tailEnd type="none" w="med" len="med"/>
+                    </a:lnR>
+                    <a:lnT w="9525" cap="flat" cmpd="sng" algn="ctr">
+                      <a:solidFill>
+                        <a:srgbClr val="E1E0D9"/>
+                      </a:solidFill>
+                      <a:prstDash val="solid"/>
+                      <a:round/>
+                      <a:headEnd type="none" w="med" len="med"/>
+                      <a:tailEnd type="none" w="med" len="med"/>
+                    </a:lnT>
+                    <a:lnB w="9525" cap="flat" cmpd="sng" algn="ctr">
+                      <a:solidFill>
+                        <a:srgbClr val="E1E0D9"/>
+                      </a:solidFill>
+                      <a:prstDash val="solid"/>
+                      <a:round/>
+                      <a:headEnd type="none" w="med" len="med"/>
+                      <a:tailEnd type="none" w="med" len="med"/>
+                    </a:lnB>
+                  </a:tcPr>
+                </a:tc>
+                <a:tc>
+                  <a:txBody>
+                    <a:bodyPr/>
+                    <a:lstStyle/>
+                    <a:p>
+                      <a:pPr algn="ctr" indent="0" marL="0">
+                        <a:buNone/>
+                      </a:pPr>
+                      <a:r>
+                        <a:rPr lang="en-US" sz="1100" dirty="0">
+                          <a:solidFill>
+                            <a:srgbClr val="0B0B0B"/>
+                          </a:solidFill>
+                          <a:latin typeface="Calibri" pitchFamily="34" charset="0"/>
+                          <a:ea typeface="Calibri" pitchFamily="34" charset="-122"/>
+                          <a:cs typeface="Calibri" pitchFamily="34" charset="-120"/>
+                        </a:rPr>
+                        <a:t>1,271</a:t>
+                      </a:r>
+                      <a:endParaRPr lang="en-US" sz="1100" dirty="0">
+                        <a:latin typeface="Calibri" charset="0"/>
+                        <a:ea typeface="Calibri" charset="0"/>
+                        <a:cs typeface="Calibri" charset="0"/>
+                      </a:endParaRPr>
+                    </a:p>
+                  </a:txBody>
+                  <a:tcPr marL="36576" marR="36576" marT="36576" marB="36576" anchor="ctr">
+                    <a:lnL w="9525" cap="flat" cmpd="sng" algn="ctr">
+                      <a:solidFill>
+                        <a:srgbClr val="E1E0D9"/>
+                      </a:solidFill>
+                      <a:prstDash val="solid"/>
+                      <a:round/>
+                      <a:headEnd type="none" w="med" len="med"/>
+                      <a:tailEnd type="none" w="med" len="med"/>
+                    </a:lnL>
+                    <a:lnR w="9525" cap="flat" cmpd="sng" algn="ctr">
+                      <a:solidFill>
+                        <a:srgbClr val="E1E0D9"/>
+                      </a:solidFill>
+                      <a:prstDash val="solid"/>
+                      <a:round/>
+                      <a:headEnd type="none" w="med" len="med"/>
+                      <a:tailEnd type="none" w="med" len="med"/>
+                    </a:lnR>
+                    <a:lnT w="9525" cap="flat" cmpd="sng" algn="ctr">
+                      <a:solidFill>
+                        <a:srgbClr val="E1E0D9"/>
+                      </a:solidFill>
+                      <a:prstDash val="solid"/>
+                      <a:round/>
+                      <a:headEnd type="none" w="med" len="med"/>
+                      <a:tailEnd type="none" w="med" len="med"/>
+                    </a:lnT>
+                    <a:lnB w="9525" cap="flat" cmpd="sng" algn="ctr">
+                      <a:solidFill>
+                        <a:srgbClr val="E1E0D9"/>
+                      </a:solidFill>
+                      <a:prstDash val="solid"/>
+                      <a:round/>
+                      <a:headEnd type="none" w="med" len="med"/>
+                      <a:tailEnd type="none" w="med" len="med"/>
+                    </a:lnB>
+                  </a:tcPr>
+                </a:tc>
+                <a:tc>
+                  <a:txBody>
+                    <a:bodyPr/>
+                    <a:lstStyle/>
+                    <a:p>
+                      <a:pPr algn="ctr" indent="0" marL="0">
+                        <a:buNone/>
+                      </a:pPr>
+                      <a:r>
+                        <a:rPr lang="en-US" sz="1100" dirty="0">
+                          <a:solidFill>
+                            <a:srgbClr val="0B0B0B"/>
+                          </a:solidFill>
+                          <a:latin typeface="Calibri" pitchFamily="34" charset="0"/>
+                          <a:ea typeface="Calibri" pitchFamily="34" charset="-122"/>
+                          <a:cs typeface="Calibri" pitchFamily="34" charset="-120"/>
+                        </a:rPr>
+                        <a:t>9.0 (7.2–11.0)</a:t>
+                      </a:r>
+                      <a:endParaRPr lang="en-US" sz="1100" dirty="0">
+                        <a:latin typeface="Calibri" charset="0"/>
+                        <a:ea typeface="Calibri" charset="0"/>
+                        <a:cs typeface="Calibri" charset="0"/>
+                      </a:endParaRPr>
+                    </a:p>
+                  </a:txBody>
+                  <a:tcPr marL="36576" marR="36576" marT="36576" marB="36576" anchor="ctr">
+                    <a:lnL w="9525" cap="flat" cmpd="sng" algn="ctr">
+                      <a:solidFill>
+                        <a:srgbClr val="E1E0D9"/>
+                      </a:solidFill>
+                      <a:prstDash val="solid"/>
+                      <a:round/>
+                      <a:headEnd type="none" w="med" len="med"/>
+                      <a:tailEnd type="none" w="med" len="med"/>
+                    </a:lnL>
+                    <a:lnR w="9525" cap="flat" cmpd="sng" algn="ctr">
+                      <a:solidFill>
+                        <a:srgbClr val="E1E0D9"/>
+                      </a:solidFill>
+                      <a:prstDash val="solid"/>
+                      <a:round/>
+                      <a:headEnd type="none" w="med" len="med"/>
+                      <a:tailEnd type="none" w="med" len="med"/>
+                    </a:lnR>
+                    <a:lnT w="9525" cap="flat" cmpd="sng" algn="ctr">
+                      <a:solidFill>
+                        <a:srgbClr val="E1E0D9"/>
+                      </a:solidFill>
+                      <a:prstDash val="solid"/>
+                      <a:round/>
+                      <a:headEnd type="none" w="med" len="med"/>
+                      <a:tailEnd type="none" w="med" len="med"/>
+                    </a:lnT>
+                    <a:lnB w="9525" cap="flat" cmpd="sng" algn="ctr">
+                      <a:solidFill>
+                        <a:srgbClr val="E1E0D9"/>
+                      </a:solidFill>
+                      <a:prstDash val="solid"/>
+                      <a:round/>
+                      <a:headEnd type="none" w="med" len="med"/>
+                      <a:tailEnd type="none" w="med" len="med"/>
+                    </a:lnB>
+                  </a:tcPr>
+                </a:tc>
+              </a:tr>
+              <a:tr h="301752">
+                <a:tc>
+                  <a:txBody>
+                    <a:bodyPr/>
+                    <a:lstStyle/>
+                    <a:p>
+                      <a:pPr algn="l" indent="0" marL="0">
+                        <a:buNone/>
+                      </a:pPr>
+                      <a:r>
+                        <a:rPr lang="en-US" sz="1100" dirty="0">
+                          <a:solidFill>
+                            <a:srgbClr val="0B0B0B"/>
+                          </a:solidFill>
+                          <a:latin typeface="Calibri" pitchFamily="34" charset="0"/>
+                          <a:ea typeface="Calibri" pitchFamily="34" charset="-122"/>
+                          <a:cs typeface="Calibri" pitchFamily="34" charset="-120"/>
+                        </a:rPr>
+                        <a:t>benchmark</a:t>
+                      </a:r>
+                      <a:endParaRPr lang="en-US" sz="1100" dirty="0">
+                        <a:latin typeface="Calibri" charset="0"/>
+                        <a:ea typeface="Calibri" charset="0"/>
+                        <a:cs typeface="Calibri" charset="0"/>
+                      </a:endParaRPr>
+                    </a:p>
+                  </a:txBody>
+                  <a:tcPr marL="36576" marR="36576" marT="36576" marB="36576" anchor="ctr">
+                    <a:lnL w="9525" cap="flat" cmpd="sng" algn="ctr">
+                      <a:solidFill>
+                        <a:srgbClr val="E1E0D9"/>
+                      </a:solidFill>
+                      <a:prstDash val="solid"/>
+                      <a:round/>
+                      <a:headEnd type="none" w="med" len="med"/>
+                      <a:tailEnd type="none" w="med" len="med"/>
+                    </a:lnL>
+                    <a:lnR w="9525" cap="flat" cmpd="sng" algn="ctr">
+                      <a:solidFill>
+                        <a:srgbClr val="E1E0D9"/>
+                      </a:solidFill>
+                      <a:prstDash val="solid"/>
+                      <a:round/>
+                      <a:headEnd type="none" w="med" len="med"/>
+                      <a:tailEnd type="none" w="med" len="med"/>
+                    </a:lnR>
+                    <a:lnT w="9525" cap="flat" cmpd="sng" algn="ctr">
+                      <a:solidFill>
+                        <a:srgbClr val="E1E0D9"/>
+                      </a:solidFill>
+                      <a:prstDash val="solid"/>
+                      <a:round/>
+                      <a:headEnd type="none" w="med" len="med"/>
+                      <a:tailEnd type="none" w="med" len="med"/>
+                    </a:lnT>
+                    <a:lnB w="9525" cap="flat" cmpd="sng" algn="ctr">
+                      <a:solidFill>
+                        <a:srgbClr val="E1E0D9"/>
+                      </a:solidFill>
+                      <a:prstDash val="solid"/>
+                      <a:round/>
+                      <a:headEnd type="none" w="med" len="med"/>
+                      <a:tailEnd type="none" w="med" len="med"/>
+                    </a:lnB>
+                  </a:tcPr>
+                </a:tc>
+                <a:tc>
+                  <a:txBody>
+                    <a:bodyPr/>
+                    <a:lstStyle/>
+                    <a:p>
+                      <a:pPr algn="ctr" indent="0" marL="0">
+                        <a:buNone/>
+                      </a:pPr>
+                      <a:r>
+                        <a:rPr lang="en-US" sz="1100" dirty="0">
+                          <a:solidFill>
+                            <a:srgbClr val="0B0B0B"/>
+                          </a:solidFill>
+                          <a:latin typeface="Calibri" pitchFamily="34" charset="0"/>
+                          <a:ea typeface="Calibri" pitchFamily="34" charset="-122"/>
+                          <a:cs typeface="Calibri" pitchFamily="34" charset="-120"/>
+                        </a:rPr>
+                        <a:t>2,529</a:t>
+                      </a:r>
+                      <a:endParaRPr lang="en-US" sz="1100" dirty="0">
+                        <a:latin typeface="Calibri" charset="0"/>
+                        <a:ea typeface="Calibri" charset="0"/>
+                        <a:cs typeface="Calibri" charset="0"/>
+                      </a:endParaRPr>
+                    </a:p>
+                  </a:txBody>
+                  <a:tcPr marL="36576" marR="36576" marT="36576" marB="36576" anchor="ctr">
+                    <a:lnL w="9525" cap="flat" cmpd="sng" algn="ctr">
+                      <a:solidFill>
+                        <a:srgbClr val="E1E0D9"/>
+                      </a:solidFill>
+                      <a:prstDash val="solid"/>
+                      <a:round/>
+                      <a:headEnd type="none" w="med" len="med"/>
+                      <a:tailEnd type="none" w="med" len="med"/>
+                    </a:lnL>
+                    <a:lnR w="9525" cap="flat" cmpd="sng" algn="ctr">
+                      <a:solidFill>
+                        <a:srgbClr val="E1E0D9"/>
+                      </a:solidFill>
+                      <a:prstDash val="solid"/>
+                      <a:round/>
+                      <a:headEnd type="none" w="med" len="med"/>
+                      <a:tailEnd type="none" w="med" len="med"/>
+                    </a:lnR>
+                    <a:lnT w="9525" cap="flat" cmpd="sng" algn="ctr">
+                      <a:solidFill>
+                        <a:srgbClr val="E1E0D9"/>
+                      </a:solidFill>
+                      <a:prstDash val="solid"/>
+                      <a:round/>
+                      <a:headEnd type="none" w="med" len="med"/>
+                      <a:tailEnd type="none" w="med" len="med"/>
+                    </a:lnT>
+                    <a:lnB w="9525" cap="flat" cmpd="sng" algn="ctr">
+                      <a:solidFill>
+                        <a:srgbClr val="E1E0D9"/>
+                      </a:solidFill>
+                      <a:prstDash val="solid"/>
+                      <a:round/>
+                      <a:headEnd type="none" w="med" len="med"/>
+                      <a:tailEnd type="none" w="med" len="med"/>
+                    </a:lnB>
+                  </a:tcPr>
+                </a:tc>
+                <a:tc>
+                  <a:txBody>
+                    <a:bodyPr/>
+                    <a:lstStyle/>
+                    <a:p>
+                      <a:pPr algn="ctr" indent="0" marL="0">
+                        <a:buNone/>
+                      </a:pPr>
+                      <a:r>
+                        <a:rPr lang="en-US" sz="1100" dirty="0">
+                          <a:solidFill>
+                            <a:srgbClr val="0B0B0B"/>
+                          </a:solidFill>
+                          <a:latin typeface="Calibri" pitchFamily="34" charset="0"/>
+                          <a:ea typeface="Calibri" pitchFamily="34" charset="-122"/>
+                          <a:cs typeface="Calibri" pitchFamily="34" charset="-120"/>
+                        </a:rPr>
+                        <a:t>11.6 (10.1–13.0)</a:t>
+                      </a:r>
+                      <a:endParaRPr lang="en-US" sz="1100" dirty="0">
+                        <a:latin typeface="Calibri" charset="0"/>
+                        <a:ea typeface="Calibri" charset="0"/>
+                        <a:cs typeface="Calibri" charset="0"/>
+                      </a:endParaRPr>
+                    </a:p>
+                  </a:txBody>
+                  <a:tcPr marL="36576" marR="36576" marT="36576" marB="36576" anchor="ctr">
+                    <a:lnL w="9525" cap="flat" cmpd="sng" algn="ctr">
+                      <a:solidFill>
+                        <a:srgbClr val="E1E0D9"/>
+                      </a:solidFill>
+                      <a:prstDash val="solid"/>
+                      <a:round/>
+                      <a:headEnd type="none" w="med" len="med"/>
+                      <a:tailEnd type="none" w="med" len="med"/>
+                    </a:lnL>
+                    <a:lnR w="9525" cap="flat" cmpd="sng" algn="ctr">
+                      <a:solidFill>
+                        <a:srgbClr val="E1E0D9"/>
+                      </a:solidFill>
+                      <a:prstDash val="solid"/>
+                      <a:round/>
+                      <a:headEnd type="none" w="med" len="med"/>
+                      <a:tailEnd type="none" w="med" len="med"/>
+                    </a:lnR>
+                    <a:lnT w="9525" cap="flat" cmpd="sng" algn="ctr">
+                      <a:solidFill>
+                        <a:srgbClr val="E1E0D9"/>
+                      </a:solidFill>
+                      <a:prstDash val="solid"/>
+                      <a:round/>
+                      <a:headEnd type="none" w="med" len="med"/>
+                      <a:tailEnd type="none" w="med" len="med"/>
+                    </a:lnT>
+                    <a:lnB w="9525" cap="flat" cmpd="sng" algn="ctr">
+                      <a:solidFill>
+                        <a:srgbClr val="E1E0D9"/>
+                      </a:solidFill>
+                      <a:prstDash val="solid"/>
+                      <a:round/>
+                      <a:headEnd type="none" w="med" len="med"/>
+                      <a:tailEnd type="none" w="med" len="med"/>
+                    </a:lnB>
+                  </a:tcPr>
+                </a:tc>
+              </a:tr>
+            </a:tbl>
+          </a:graphicData>
+        </a:graphic>
+      </p:graphicFrame>
+      <p:sp>
+        <p:nvSpPr>
+          <p:cNvPr id="7" name="stress method bullets"/>
+          <p:cNvSpPr txBox="1"/>
+          <p:nvPr/>
+        </p:nvSpPr>
+        <p:spPr>
+          <a:xfrm>
+            <a:off x="6675120" y="3108960"/>
+            <a:ext cx="4965192" cy="3017520"/>
+          </a:xfrm>
+          <a:prstGeom prst="rect">
+            <a:avLst/>
+          </a:prstGeom>
+          <a:noFill/>
+          <a:ln/>
+        </p:spPr>
+        <p:txBody>
+          <a:bodyPr wrap="square" lIns="0" tIns="0" rIns="0" bIns="0" rtlCol="0" anchor="t"/>
+          <a:lstStyle/>
+          <a:p>
+            <a:pPr marL="342900" indent="-342900">
+              <a:spcAft>
+                <a:spcPts val="600"/>
+              </a:spcAft>
+              <a:buSzPct val="100000"/>
+              <a:buChar char="•"/>
+            </a:pPr>
+            <a:r>
+              <a:rPr lang="en-US" sz="1200" dirty="0">
+                <a:solidFill>
+                  <a:schemeClr val="tx1"/>
+                </a:solidFill>
+              </a:rPr>
+              <a:t>Intervals: cluster bootstrap over contexts (2,000 resamples), because the elements of one context are correlated</a:t>
+            </a:r>
+            <a:endParaRPr lang="en-US" sz="1200" dirty="0"/>
+          </a:p>
+          <a:p>
+            <a:pPr marL="342900" indent="-342900">
+              <a:spcAft>
+                <a:spcPts val="600"/>
+              </a:spcAft>
+              <a:buSzPct val="100000"/>
+              <a:buChar char="•"/>
+            </a:pPr>
+            <a:r>
+              <a:rPr lang="en-US" sz="1200" dirty="0">
+                <a:solidFill>
+                  <a:schemeClr val="tx1"/>
+                </a:solidFill>
+              </a:rPr>
+              <a:t>Population: 2,000 freshly generated contexts per tier; overall 10.8 % (95 % CI 10.5–11.2)</a:t>
+            </a:r>
+            <a:endParaRPr lang="en-US" sz="1200" dirty="0"/>
+          </a:p>
+          <a:p>
+            <a:pPr marL="342900" indent="-342900">
+              <a:spcAft>
+                <a:spcPts val="600"/>
+              </a:spcAft>
+              <a:buSzPct val="100000"/>
+              <a:buChar char="•"/>
+            </a:pPr>
+            <a:r>
+              <a:rPr lang="en-US" sz="1200" dirty="0">
+                <a:solidFill>
+                  <a:schemeClr val="tx1"/>
+                </a:solidFill>
+              </a:rPr>
+              <a:t>Only size and capacity are tested, so coverage is an upper bound on what can be installed</a:t>
+            </a:r>
+            <a:endParaRPr lang="en-US" sz="1200" dirty="0"/>
+          </a:p>
+          <a:p>
+            <a:pPr marL="342900" indent="-342900">
+              <a:spcAft>
+                <a:spcPts val="600"/>
+              </a:spcAft>
+              <a:buSzPct val="100000"/>
+              <a:buChar char="•"/>
+            </a:pPr>
+            <a:r>
+              <a:rPr lang="en-US" sz="1200" dirty="0">
+                <a:solidFill>
+                  <a:schemeClr val="tx1"/>
+                </a:solidFill>
+              </a:rPr>
+              <a:t>Best possible share with k sizes: exact optimum over the distinct attach diameters</a:t>
+            </a:r>
+            <a:endParaRPr lang="en-US" sz="1200" dirty="0"/>
+          </a:p>
+        </p:txBody>
+      </p:sp>
+      <p:sp>
+        <p:nvSpPr>
+          <p:cNvPr id="25" name="Slide Number Placeholder 0"/>
+          <p:cNvSpPr>
+            <a:spLocks noGrp="1"/>
+          </p:cNvSpPr>
+          <p:nvPr>
+            <p:ph type="sldNum" sz="quarter" idx="4294967295"/>
+          </p:nvPr>
+        </p:nvSpPr>
+        <p:spPr>
+          <a:xfrm>
+            <a:off x="11064240" y="6419088"/>
+            <a:ext cx="594360" cy="274320"/>
+          </a:xfrm>
+          <a:prstGeom prst="rect">
+            <a:avLst/>
+          </a:prstGeom>
+          <a:extLst>
+            <a:ext uri="{C572A759-6A51-4108-AA02-DFA0A04FC94B}">
+              <ma14:wrappingTextBoxFlag xmlns:ma14="http://schemas.microsoft.com/office/mac/drawingml/2011/main" val="0"/>
+            </a:ext>
+          </a:extLst>
+        </p:spPr>
+        <p:txBody>
+          <a:bodyPr/>
+          <a:lstStyle>
+            <a:lvl1pPr>
+              <a:defRPr sz="900">
+                <a:solidFill>
+                  <a:srgbClr val="898781"/>
+                </a:solidFill>
+              </a:defRPr>
+            </a:lvl1pPr>
+          </a:lstStyle>
+          <a:p>
+            <a:pPr algn="r"/>
+            <a:fld id="{F7021451-1387-4CA6-816F-3879F97B5CBC}" type="slidenum">
+              <a:rPr b="0" lang="en-US"/>
+              <a:t>16</a:t>
+            </a:fld>
+            <a:endParaRPr lang="en-US"/>
+          </a:p>
+        </p:txBody>
+      </p:sp>
+    </p:spTree>
+  </p:cSld>
+  <p:clrMapOvr>
+    <a:masterClrMapping/>
+  </p:clrMapOvr>
+</p:sld>
+</file>
+
+<file path=ppt/slides/slide17.xml><?xml version="1.0" encoding="utf-8"?>
+<p:sld xmlns:a="http://schemas.openxmlformats.org/drawingml/2006/main" xmlns:r="http://schemas.openxmlformats.org/officeDocument/2006/relationships" xmlns:p="http://schemas.openxmlformats.org/presentationml/2006/main">
+  <p:cSld name="Slide 17">
+    <p:spTree>
+      <p:nvGrpSpPr>
+        <p:cNvPr id="1" name=""/>
+        <p:cNvGrpSpPr/>
+        <p:nvPr/>
+      </p:nvGrpSpPr>
+      <p:grpSpPr>
+        <a:xfrm>
+          <a:off x="0" y="0"/>
+          <a:ext cx="0" cy="0"/>
+          <a:chOff x="0" y="0"/>
+          <a:chExt cx="0" cy="0"/>
+        </a:xfrm>
+      </p:grpSpPr>
+      <p:sp>
+        <p:nvSpPr>
+          <p:cNvPr id="2" name="Text 0"/>
+          <p:cNvSpPr/>
+          <p:nvPr>
+            <p:ph idx="100" type="title" hasCustomPrompt="1"/>
+          </p:nvPr>
+        </p:nvSpPr>
+        <p:spPr>
+          <a:xfrm>
+            <a:off x="548640" y="274320"/>
+            <a:ext cx="11091672" cy="960120"/>
+          </a:xfrm>
+          <a:prstGeom prst="rect">
+            <a:avLst/>
+          </a:prstGeom>
+          <a:noFill/>
+          <a:ln/>
+        </p:spPr>
+        <p:txBody>
+          <a:bodyPr wrap="square" lIns="0" tIns="0" rIns="0" bIns="0" rtlCol="0" anchor="ctr"/>
+          <a:lstStyle/>
+          <a:p>
+            <a:pPr algn="l" indent="0" marL="0">
+              <a:buNone/>
+            </a:pPr>
+            <a:r>
+              <a:rPr lang="en-US" sz="2600" b="1" dirty="0">
+                <a:solidFill>
+                  <a:schemeClr val="tx1"/>
+                </a:solidFill>
+              </a:rPr>
               <a:t>Appendix: one record, as stored</a:t>
             </a:r>
             <a:endParaRPr lang="en-US" sz="2600" dirty="0"/>
@@ -9591,7 +14980,7 @@
             <a:pPr algn="r"/>
             <a:fld id="{F7021451-1387-4CA6-816F-3879F97B5CBC}" type="slidenum">
               <a:rPr b="0" lang="en-US"/>
-              <a:t>16</a:t>
+              <a:t>17</a:t>
             </a:fld>
             <a:endParaRPr lang="en-US"/>
           </a:p>

--- a/docs/CrossMEP_CIBW78_talk.pptx
+++ b/docs/CrossMEP_CIBW78_talk.pptx
@@ -22,9 +22,10 @@
     <p:sldId id="270" r:id="rId16"/>
     <p:sldId id="271" r:id="rId17"/>
     <p:sldId id="272" r:id="rId18"/>
+    <p:sldId id="273" r:id="rId19"/>
   </p:sldIdLst>
   <p:notesMasterIdLst>
-    <p:notesMasterId r:id="rId19"/>
+    <p:notesMasterId r:id="rId20"/>
   </p:notesMasterIdLst>
   <p:sldSz cx="12192000" cy="6858000"/>
   <p:notesSz cx="6858000" cy="12192000"/>
@@ -123,18 +124,18 @@
   <p:extLst>
     <p:ext uri="{521415D9-36F7-43E2-AB2F-B90AF26B5E84}">
       <p14:sectionLst xmlns:p14="http://schemas.microsoft.com/office/powerpoint/2010/main">
-        <p14:section name="Opening" id="{66eece79-1ce1-5c3e-6d69-37583bdfcc27}">
+        <p14:section name="Opening" id="{ae595e5e-94ce-81c5-e535-810e40650e6a}">
           <p14:sldIdLst>
             <p14:sldId id="256"/>
           </p14:sldIdLst>
         </p14:section>
-        <p14:section name="Motivation" id="{8be7afa7-71e9-d7f2-ca59-ac91f4d5e4e1}">
+        <p14:section name="Motivation" id="{3b89c19d-0cb8-d8aa-956f-bafa473af851}">
           <p14:sldIdLst>
             <p14:sldId id="257"/>
             <p14:sldId id="258"/>
           </p14:sldIdLst>
         </p14:section>
-        <p14:section name="The dataset" id="{d8587ef5-79a1-46e9-3526-caafef1e76ef}">
+        <p14:section name="The dataset" id="{814136bf-ffcc-4142-eb50-e191096d1801}">
           <p14:sldIdLst>
             <p14:sldId id="259"/>
             <p14:sldId id="260"/>
@@ -143,25 +144,26 @@
             <p14:sldId id="263"/>
           </p14:sldIdLst>
         </p14:section>
-        <p14:section name="Experiments" id="{884b2a48-e498-fe43-ba0a-6a48be8872dd}">
+        <p14:section name="Experiments" id="{32e14631-e5ef-3172-1046-09b601e35a4c}">
           <p14:sldIdLst>
             <p14:sldId id="264"/>
             <p14:sldId id="265"/>
             <p14:sldId id="266"/>
           </p14:sldIdLst>
         </p14:section>
-        <p14:section name="Use" id="{52163845-df48-443a-c925-337414024f5f}">
+        <p14:section name="Use" id="{a131732d-eb52-1a21-8dbe-3b34d3992790}">
           <p14:sldIdLst>
             <p14:sldId id="267"/>
             <p14:sldId id="268"/>
             <p14:sldId id="269"/>
           </p14:sldIdLst>
         </p14:section>
-        <p14:section name="Appendix" id="{9b4dc607-6417-0e5c-12ad-a5441c7af412}">
+        <p14:section name="Appendix" id="{f5ebbb5c-7571-06b5-c085-1d2bfe93f2f0}">
           <p14:sldIdLst>
             <p14:sldId id="270"/>
             <p14:sldId id="271"/>
             <p14:sldId id="272"/>
+            <p14:sldId id="273"/>
           </p14:sldIdLst>
         </p14:section>
       </p14:sectionLst>
@@ -2031,7 +2033,7 @@
           <a:p>
             <a:r>
               <a:rPr lang="en-US" dirty="0"/>
-              <a:t>Second experiment: is the spacing realistic? We parsed two discipline models of the open buildingSMART Duplex Apartment with IfcOpenShell and measured the gaps between parallel runs. They are irregular, not modular - the median is about 108 mm. The generator samples a lognormal fitted to those gaps. The distance between generated and measured distributions is 41 mm between insulation surfaces and 68 mm between pipe surfaces; the building's own two discipline models are 50 mm apart, and a fixed modular gap would be 139 mm away. So the generated spacing sits in the range of the variation between two real models of one building. (6:15)</a:t>
+              <a:t>Second experiment: is the spacing realistic? We took two open buildings from buildingSMART - a residential duplex and a medical-dental clinic, which is a real building - and cut sections every 250 millimetres, the way a context is defined, measuring the gap between pipes running side by side. On the left, the clinic, which the generator never saw: the generated gaps follow the measured ones closely. On the right, the distances. Generated to clinic: 28 millimetres, about as close as the duplex's own two models are to each other. The small duplex is as far from the generator as it is from the clinic. A fixed modular gap would be about 190 millimetres off. (6:15)</a:t>
             </a:r>
             <a:endParaRPr lang="en-US" dirty="0"/>
           </a:p>
@@ -2207,7 +2209,7 @@
           <a:p>
             <a:r>
               <a:rPr lang="en-US" dirty="0"/>
-              <a:t>Using it takes a few lines. Load a split - the loader needs only the Python standard library - filter by composition, test your own catalog against the benchmark, or generate your own mix with the same rules. There is an interactive gallery for inspection. And because there are no labels, the same files serve reinforcement learning, constraint-programming baselines and human benchmarking: a curriculum over the tiers, per-tier evaluation, and held-out seeds and custom compositions as probes. (7:50)</a:t>
+              <a:t>Using it takes a few lines. Load a split - only the Python standard library is needed - filter by composition, or generate your own mix with the same rules; there is an interactive gallery for inspection. Because there are no labels, the same files serve reinforcement learning, constraint-programming baselines and human benchmarking, and we ship the scoring too: train on the generator with as many seeds as you like, from C1 up to C8; evaluate on the benchmark, the same 125 contexts per tier for every method; and report per tier with 95 per cent intervals and paired tests, so two methods can be compared fairly. (7:50)</a:t>
             </a:r>
             <a:endParaRPr lang="en-US" dirty="0"/>
           </a:p>
@@ -2295,7 +2297,7 @@
           <a:p>
             <a:r>
               <a:rPr lang="en-US" dirty="0"/>
-              <a:t>Its scope: one section at one support - routing, branches and spacing are outside it, although the span is recorded so a method can vary it. Realism is checked on one open residential project; congested racks rest on practice and standards. The trade mix is a design choice, and the data is not for structural design. Next: measuring per-tier feasibility collapse in a multi-element synthesis environment, verification on commercial corridor models, and an expert plausibility review - which is where we would value your eye. (8:40)</a:t>
+              <a:t>Its scope: one section at one support - routing, branches and spacing are outside it, although the span is recorded so a method can vary it. Realism is checked on sections of two open buildings; congested racks rest on practice and standards. The trade mix is a design choice, and the data is not for structural design. Next: a public checker for support designs, with best-known costs, so methods can be compared on the answer and not only on the brief; the catalog as an input, so a method is tested on catalogs it has never seen; and a real test set from commercial projects, with supports designed by engineers - which is where we would value your eye. (8:40)</a:t>
             </a:r>
             <a:endParaRPr lang="en-US" dirty="0"/>
           </a:p>
@@ -2383,7 +2385,7 @@
           <a:p>
             <a:r>
               <a:rPr lang="en-US" dirty="0"/>
-              <a:t>CrossMEP is the brief, not the answer: 7,000 support-design problems, every number traced to its source, checked against a built project, and open. The QR code takes you to the data, the code and the gallery. Thank you. (9:10)</a:t>
+              <a:t>CrossMEP is the brief, not the answer: 7,000 support-design problems, every number traced to its source, checked against two open buildings, and open. The QR code takes you to the data, the code and the gallery. Thank you. (9:10)</a:t>
             </a:r>
             <a:endParaRPr lang="en-US" dirty="0"/>
           </a:p>
@@ -2471,7 +2473,7 @@
           <a:p>
             <a:r>
               <a:rPr lang="en-US" dirty="0"/>
-              <a:t>Backup: per-tier medians on the benchmark split, and the fit statistics behind experiment 2.</a:t>
+              <a:t>Backup: per-tier medians on the benchmark split, the distance to the held-out building, and the trend statistics behind experiment 1.</a:t>
             </a:r>
             <a:endParaRPr lang="en-US" dirty="0"/>
           </a:p>
@@ -2559,7 +2561,7 @@
           <a:p>
             <a:r>
               <a:rPr lang="en-US" dirty="0"/>
-              <a:t>Backup for questions on experiment 3. Per tier, the benchmark has only 125 contexts, so its intervals are wide; the population estimate from two thousand generated contexts per tier shows the tiers are about equal. The headline depends on the attach-diameter rule and on bin-edge tolerance because one nominal size, DN100, sits 0.3 millimetres outside a bin. Only size and capacity are tested - clearance, insert orientation and anchors are not - so the coverage is an upper bound on what can be installed.</a:t>
+              <a:t>Backup for questions on experiment 2: sample sizes, both weightings, the noise floor and the sensitivity of the result to the way the sections are cut.</a:t>
             </a:r>
             <a:endParaRPr lang="en-US" dirty="0"/>
           </a:p>
@@ -2647,6 +2649,94 @@
           <a:p>
             <a:r>
               <a:rPr lang="en-US" dirty="0"/>
+              <a:t>Backup for questions on experiment 3. Per tier, the benchmark has only 125 contexts, so its intervals are wide; the population estimate from two thousand generated contexts per tier shows the tiers are about equal. The headline depends on the attach-diameter rule and on bin-edge tolerance because one nominal size, DN100, sits 0.3 millimetres outside a bin. Only size and capacity are tested - clearance, insert orientation and anchors are not - so the coverage is an upper bound on what can be installed.</a:t>
+            </a:r>
+            <a:endParaRPr lang="en-US" dirty="0"/>
+          </a:p>
+        </p:txBody>
+      </p:sp>
+      <p:sp>
+        <p:nvSpPr>
+          <p:cNvPr id="4" name="Slide Number Placeholder 3"/>
+          <p:cNvSpPr>
+            <a:spLocks noGrp="1"/>
+          </p:cNvSpPr>
+          <p:nvPr>
+            <p:ph type="sldNum" sz="quarter" idx="10"/>
+          </p:nvPr>
+        </p:nvSpPr>
+        <p:spPr/>
+        <p:txBody>
+          <a:bodyPr/>
+          <a:lstStyle/>
+          <a:p>
+            <a:fld id="{F7021451-1387-4CA6-816F-3879F97B5CBC}" type="slidenum">
+              <a:rPr lang="en-US"/>
+              <a:t>17</a:t>
+            </a:fld>
+            <a:endParaRPr lang="en-US"/>
+          </a:p>
+        </p:txBody>
+      </p:sp>
+    </p:spTree>
+    <p:extLst>
+      <p:ext uri="{BB962C8B-B14F-4D97-AF65-F5344CB8AC3E}">
+        <p14:creationId xmlns:p14="http://schemas.microsoft.com/office/powerpoint/2010/main" val="1024086991"/>
+      </p:ext>
+    </p:extLst>
+  </p:cSld>
+  <p:clrMapOvr>
+    <a:masterClrMapping/>
+  </p:clrMapOvr>
+</p:notes>
+</file>
+
+<file path=ppt/notesSlides/notesSlide18.xml><?xml version="1.0" encoding="utf-8"?>
+<p:notes xmlns:a="http://schemas.openxmlformats.org/drawingml/2006/main" xmlns:r="http://schemas.openxmlformats.org/officeDocument/2006/relationships" xmlns:p="http://schemas.openxmlformats.org/presentationml/2006/main">
+  <p:cSld>
+    <p:spTree>
+      <p:nvGrpSpPr>
+        <p:cNvPr id="1" name=""/>
+        <p:cNvGrpSpPr/>
+        <p:nvPr/>
+      </p:nvGrpSpPr>
+      <p:grpSpPr>
+        <a:xfrm>
+          <a:off x="0" y="0"/>
+          <a:ext cx="0" cy="0"/>
+          <a:chOff x="0" y="0"/>
+          <a:chExt cx="0" cy="0"/>
+        </a:xfrm>
+      </p:grpSpPr>
+      <p:sp>
+        <p:nvSpPr>
+          <p:cNvPr id="2" name="Slide Image Placeholder 1"/>
+          <p:cNvSpPr>
+            <a:spLocks noGrp="1" noRot="1" noChangeAspect="1"/>
+          </p:cNvSpPr>
+          <p:nvPr>
+            <p:ph type="sldImg"/>
+          </p:nvPr>
+        </p:nvSpPr>
+        <p:spPr/>
+      </p:sp>
+      <p:sp>
+        <p:nvSpPr>
+          <p:cNvPr id="3" name="Notes Placeholder 2"/>
+          <p:cNvSpPr>
+            <a:spLocks noGrp="1"/>
+          </p:cNvSpPr>
+          <p:nvPr>
+            <p:ph type="body" idx="1"/>
+          </p:nvPr>
+        </p:nvSpPr>
+        <p:spPr/>
+        <p:txBody>
+          <a:bodyPr/>
+          <a:lstStyle/>
+          <a:p>
+            <a:r>
+              <a:rPr lang="en-US" dirty="0"/>
               <a:t>Backup: what one stored context looks like - plain JSON, one object per context.</a:t>
             </a:r>
             <a:endParaRPr lang="en-US" dirty="0"/>
@@ -2670,7 +2760,7 @@
           <a:p>
             <a:fld id="{F7021451-1387-4CA6-816F-3879F97B5CBC}" type="slidenum">
               <a:rPr lang="en-US"/>
-              <a:t>17</a:t>
+              <a:t>18</a:t>
             </a:fld>
             <a:endParaRPr lang="en-US"/>
           </a:p>
@@ -2823,7 +2913,7 @@
           <a:p>
             <a:r>
               <a:rPr lang="en-US" dirty="0"/>
-              <a:t>Learning-based methods for this task need many such sections, and none were public. Project models are proprietary, the open ones are not organised around supports, and any one project covers one narrow slice. So we built CrossMEP: 7,000 contexts with about 31,500 elements, stratified into eight tiers, deliberately unlabeled, with every constant traced to its source, checked against an open IFC project, and released openly with the generator. (1:00)</a:t>
+              <a:t>Learning-based methods for this task need many such sections, and none were public. Project models are proprietary, the open ones are not organised around supports, and any one project covers one narrow slice. So we built CrossMEP: 7,000 contexts with about 31,500 elements, stratified into eight tiers, deliberately unlabeled, with every constant traced to its source, checked against open IFC buildings, and released openly with the generator. (1:00)</a:t>
             </a:r>
             <a:endParaRPr lang="en-US" dirty="0"/>
           </a:p>
@@ -3351,7 +3441,7 @@
           <a:p>
             <a:r>
               <a:rPr lang="en-US" dirty="0"/>
-              <a:t>First experiment: are the tiers actually ordered? The element count is exact by construction, so we look at congestion. The median closest gap between elements falls from 120 mm at C2 to about 60 mm at C8, and the median load at the support rises from 0.1 to 1.7 kilonewtons. The trend is near-monotone - with 125 contexts per tier, neighbouring tiers can swap - so difficulty is carried jointly by count, congestion and load, with count as the controlled axis. (5:20)</a:t>
+              <a:t>First experiment: are the tiers ordered by difficulty? The count is exact by construction, so we look at congestion and load. The boxes are the benchmark; the diamonds are medians over 2,000 freshly generated contexts per tier - the generator itself, not sampling noise. Load at the support rises at every step, from 0.1 to 1.7 kilonewtons. Congestion rises overall - the closest gap falls from 120 to about 62 millimetres - but at C6 the generator starts stacking in two or three rows, so each row holds fewer elements and the gap widens again. So the tier fixes the count; congestion and load follow on average, and methods should be compared tier by tier. (5:20)</a:t>
             </a:r>
             <a:endParaRPr lang="en-US" dirty="0"/>
           </a:p>
@@ -4477,7 +4567,7 @@
                   <a:schemeClr val="tx1"/>
                 </a:solidFill>
               </a:rPr>
-              <a:t>Experiment 2: generated spacing follows a built project</a:t>
+              <a:t>Experiment 2: generated spacing matches a building it never saw</a:t>
             </a:r>
             <a:endParaRPr lang="en-US" sz="2600" dirty="0"/>
           </a:p>
@@ -4485,7 +4575,7 @@
       </p:sp>
       <p:pic>
         <p:nvPicPr>
-          <p:cNvPr id="3" name="gap distributions" descr="/home/user/crossmep_dataset/docs/figures/04_gaps_vs_measured.png">    </p:cNvPr>
+          <p:cNvPr id="3" name="gap distributions" descr="/home/user/crossmep_dataset/docs/figures/04_gaps_vs_buildings.png">    </p:cNvPr>
           <p:cNvPicPr>
             <a:picLocks noChangeAspect="1"/>
           </p:cNvPicPr>
@@ -4499,8 +4589,8 @@
         </p:blipFill>
         <p:spPr>
           <a:xfrm>
-            <a:off x="1158794" y="1325880"/>
-            <a:ext cx="9871364" cy="4343400"/>
+            <a:off x="797336" y="1325880"/>
+            <a:ext cx="10594281" cy="4297680"/>
           </a:xfrm>
           <a:prstGeom prst="rect">
             <a:avLst/>
@@ -4515,8 +4605,8 @@
         </p:nvSpPr>
         <p:spPr>
           <a:xfrm>
-            <a:off x="548640" y="5760720"/>
-            <a:ext cx="11091672" cy="548640"/>
+            <a:off x="548640" y="5715000"/>
+            <a:ext cx="11091672" cy="594360"/>
           </a:xfrm>
           <a:prstGeom prst="rect">
             <a:avLst/>
@@ -4537,7 +4627,7 @@
                   <a:srgbClr val="52514E"/>
                 </a:solidFill>
               </a:rPr>
-              <a:t>buildingSMART Duplex Apartment (open IFC): MEP and Plumbing discipline models parsed with IfcOpenShell, 427 and 231 segments. Measured gaps are irregular, not modular. The two discipline models of the same building are 50 mm apart; the generated gaps are 41 mm from the measured ones between insulation surfaces (68 mm between pipe surfaces); a fixed modular gap would be 139 mm away.</a:t>
+              <a:t>Sections cut every 250 mm through two open IFC buildings from buildingSMART (CC BY 4.0), measuring the clear gap between side-by-side pipes. The medical-dental clinic, a real building with 797 measured pipe pairs, is 28 mm from the generated gaps (95 % CI 16–44): about as close as the duplex’s own two models are to each other (26 mm). The small residential duplex is as far from the generator (70–85 mm) as from the clinic (71–85 mm).</a:t>
             </a:r>
             <a:endParaRPr lang="en-US" sz="1100" dirty="0"/>
           </a:p>
@@ -5067,7 +5157,7 @@
                   <a:schemeClr val="tx1"/>
                 </a:solidFill>
               </a:rPr>
-              <a:t>Using CrossMEP: load, filter, generate, inspect</a:t>
+              <a:t>Using CrossMEP: train, evaluate, report</a:t>
             </a:r>
             <a:endParaRPr lang="en-US" sz="2600" dirty="0"/>
           </a:p>
@@ -5193,23 +5283,6 @@
                 <a:ea typeface="Courier New" pitchFamily="34" charset="-122"/>
                 <a:cs typeface="Courier New" pitchFamily="34" charset="-120"/>
               </a:rPr>
-              <a:t>cm.catalog_coverage(data, my_catalog)</a:t>
-            </a:r>
-            <a:endParaRPr lang="en-US" sz="1300" dirty="0"/>
-          </a:p>
-          <a:p>
-            <a:pPr indent="0" marL="0">
-              <a:buNone/>
-            </a:pPr>
-            <a:r>
-              <a:rPr lang="en-US" sz="1300" dirty="0">
-                <a:solidFill>
-                  <a:srgbClr val="FFFFFF"/>
-                </a:solidFill>
-                <a:latin typeface="Courier New" pitchFamily="34" charset="0"/>
-                <a:ea typeface="Courier New" pitchFamily="34" charset="-122"/>
-                <a:cs typeface="Courier New" pitchFamily="34" charset="-120"/>
-              </a:rPr>
               <a:t> </a:t>
             </a:r>
             <a:endParaRPr lang="en-US" sz="1300" dirty="0"/>
@@ -5227,7 +5300,7 @@
                 <a:ea typeface="Courier New" pitchFamily="34" charset="-122"/>
                 <a:cs typeface="Courier New" pitchFamily="34" charset="-120"/>
               </a:rPr>
-              <a:t>from crossmep import generate_custom</a:t>
+              <a:t>from crossmep.evaluate import score, compare</a:t>
             </a:r>
             <a:endParaRPr lang="en-US" sz="1300" dirty="0"/>
           </a:p>
@@ -5244,7 +5317,52 @@
                 <a:ea typeface="Courier New" pitchFamily="34" charset="-122"/>
                 <a:cs typeface="Courier New" pitchFamily="34" charset="-120"/>
               </a:rPr>
-              <a:t>generate_custom(100, pipes=(2, 4), trays=1)</a:t>
+              <a:t>score(my_results, data)</a:t>
+            </a:r>
+            <a:pPr indent="0" marL="0">
+              <a:buNone/>
+            </a:pPr>
+            <a:r>
+              <a:rPr lang="en-US" sz="1300" dirty="0">
+                <a:solidFill>
+                  <a:srgbClr val="CADCFC"/>
+                </a:solidFill>
+                <a:latin typeface="Courier New" pitchFamily="34" charset="0"/>
+                <a:ea typeface="Courier New" pitchFamily="34" charset="-122"/>
+                <a:cs typeface="Courier New" pitchFamily="34" charset="-120"/>
+              </a:rPr>
+              <a:t>  # per tier, 95 % CI</a:t>
+            </a:r>
+            <a:endParaRPr lang="en-US" sz="1300" dirty="0"/>
+          </a:p>
+          <a:p>
+            <a:pPr indent="0" marL="0">
+              <a:buNone/>
+            </a:pPr>
+            <a:r>
+              <a:rPr lang="en-US" sz="1300" dirty="0">
+                <a:solidFill>
+                  <a:srgbClr val="FFFFFF"/>
+                </a:solidFill>
+                <a:latin typeface="Courier New" pitchFamily="34" charset="0"/>
+                <a:ea typeface="Courier New" pitchFamily="34" charset="-122"/>
+                <a:cs typeface="Courier New" pitchFamily="34" charset="-120"/>
+              </a:rPr>
+              <a:t>compare(mine, baseline, data)</a:t>
+            </a:r>
+            <a:pPr indent="0" marL="0">
+              <a:buNone/>
+            </a:pPr>
+            <a:r>
+              <a:rPr lang="en-US" sz="1300" dirty="0">
+                <a:solidFill>
+                  <a:srgbClr val="CADCFC"/>
+                </a:solidFill>
+                <a:latin typeface="Courier New" pitchFamily="34" charset="0"/>
+                <a:ea typeface="Courier New" pitchFamily="34" charset="-122"/>
+                <a:cs typeface="Courier New" pitchFamily="34" charset="-120"/>
+              </a:rPr>
+              <a:t>  # paired test</a:t>
             </a:r>
             <a:endParaRPr lang="en-US" sz="1300" dirty="0"/>
           </a:p>
@@ -5280,7 +5398,7 @@
                   <a:srgbClr val="52514E"/>
                 </a:solidFill>
               </a:rPr>
-              <a:t>The loader and metrics need only the Python standard library; the generator needs NumPy. Command line: python -m crossmep.</a:t>
+              <a:t>Loading, metrics and scoring need only the Python standard library; the generator needs NumPy. Command line: python -m crossmep generate | validate | evaluate.</a:t>
             </a:r>
             <a:endParaRPr lang="en-US" sz="1100" dirty="0"/>
           </a:p>
@@ -5348,7 +5466,7 @@
       </p:sp>
       <p:sp>
         <p:nvSpPr>
-          <p:cNvPr id="8" name="use Curriculum"/>
+          <p:cNvPr id="8" name="use Train"/>
           <p:cNvSpPr/>
           <p:nvPr/>
         </p:nvSpPr>
@@ -5370,7 +5488,7 @@
       </p:sp>
       <p:sp>
         <p:nvSpPr>
-          <p:cNvPr id="9" name="use head Curriculum"/>
+          <p:cNvPr id="9" name="use head Train"/>
           <p:cNvSpPr txBox="1"/>
           <p:nvPr/>
         </p:nvSpPr>
@@ -5398,7 +5516,7 @@
                   <a:schemeClr val="tx1"/>
                 </a:solidFill>
               </a:rPr>
-              <a:t>Curriculum</a:t>
+              <a:t>Train</a:t>
             </a:r>
             <a:endParaRPr lang="en-US" sz="1500" dirty="0"/>
           </a:p>
@@ -5406,7 +5524,7 @@
       </p:sp>
       <p:sp>
         <p:nvSpPr>
-          <p:cNvPr id="10" name="use text Curriculum"/>
+          <p:cNvPr id="10" name="use text Train"/>
           <p:cNvSpPr txBox="1"/>
           <p:nvPr/>
         </p:nvSpPr>
@@ -5434,7 +5552,7 @@
                   <a:schemeClr val="tx1"/>
                 </a:solidFill>
               </a:rPr>
-              <a:t>train from C1 to C8, one element at a time</a:t>
+              <a:t>on the generator: unlimited seeds, a curriculum from C1 up to C8</a:t>
             </a:r>
             <a:endParaRPr lang="en-US" sz="1250" dirty="0"/>
           </a:p>
@@ -5442,7 +5560,7 @@
       </p:sp>
       <p:sp>
         <p:nvSpPr>
-          <p:cNvPr id="11" name="use Stratified evaluation"/>
+          <p:cNvPr id="11" name="use Evaluate"/>
           <p:cNvSpPr/>
           <p:nvPr/>
         </p:nvSpPr>
@@ -5464,7 +5582,7 @@
       </p:sp>
       <p:sp>
         <p:nvSpPr>
-          <p:cNvPr id="12" name="use head Stratified evaluation"/>
+          <p:cNvPr id="12" name="use head Evaluate"/>
           <p:cNvSpPr txBox="1"/>
           <p:nvPr/>
         </p:nvSpPr>
@@ -5492,7 +5610,7 @@
                   <a:schemeClr val="tx1"/>
                 </a:solidFill>
               </a:rPr>
-              <a:t>Stratified evaluation</a:t>
+              <a:t>Evaluate</a:t>
             </a:r>
             <a:endParaRPr lang="en-US" sz="1500" dirty="0"/>
           </a:p>
@@ -5500,7 +5618,7 @@
       </p:sp>
       <p:sp>
         <p:nvSpPr>
-          <p:cNvPr id="13" name="use text Stratified evaluation"/>
+          <p:cNvPr id="13" name="use text Evaluate"/>
           <p:cNvSpPr txBox="1"/>
           <p:nvPr/>
         </p:nvSpPr>
@@ -5528,7 +5646,7 @@
                   <a:schemeClr val="tx1"/>
                 </a:solidFill>
               </a:rPr>
-              <a:t>success and feasibility-collapse rate per tier</a:t>
+              <a:t>on the benchmark: 125 held-out contexts per tier, the same for every method</a:t>
             </a:r>
             <a:endParaRPr lang="en-US" sz="1250" dirty="0"/>
           </a:p>
@@ -5536,7 +5654,7 @@
       </p:sp>
       <p:sp>
         <p:nvSpPr>
-          <p:cNvPr id="14" name="use Probes"/>
+          <p:cNvPr id="14" name="use Report"/>
           <p:cNvSpPr/>
           <p:nvPr/>
         </p:nvSpPr>
@@ -5558,7 +5676,7 @@
       </p:sp>
       <p:sp>
         <p:nvSpPr>
-          <p:cNvPr id="15" name="use head Probes"/>
+          <p:cNvPr id="15" name="use head Report"/>
           <p:cNvSpPr txBox="1"/>
           <p:nvPr/>
         </p:nvSpPr>
@@ -5586,7 +5704,7 @@
                   <a:schemeClr val="tx1"/>
                 </a:solidFill>
               </a:rPr>
-              <a:t>Probes</a:t>
+              <a:t>Report</a:t>
             </a:r>
             <a:endParaRPr lang="en-US" sz="1500" dirty="0"/>
           </a:p>
@@ -5594,7 +5712,7 @@
       </p:sp>
       <p:sp>
         <p:nvSpPr>
-          <p:cNvPr id="16" name="use text Probes"/>
+          <p:cNvPr id="16" name="use text Report"/>
           <p:cNvSpPr txBox="1"/>
           <p:nvPr/>
         </p:nvSpPr>
@@ -5622,7 +5740,7 @@
                   <a:schemeClr val="tx1"/>
                 </a:solidFill>
               </a:rPr>
-              <a:t>held-out seeds and custom compositions</a:t>
+              <a:t>per tier with 95 % intervals, paired tests between methods</a:t>
             </a:r>
             <a:endParaRPr lang="en-US" sz="1250" dirty="0"/>
           </a:p>
@@ -5846,7 +5964,7 @@
                   <a:schemeClr val="tx1"/>
                 </a:solidFill>
               </a:rPr>
-              <a:t>Realism checked on two discipline models of one open residential project; congested racks rest on coordination practice and standards</a:t>
+              <a:t>Realism checked on sections of two open buildings, a residential duplex and a medical clinic; congested racks rest on coordination practice and standards</a:t>
             </a:r>
             <a:endParaRPr lang="en-US" sz="1400" dirty="0"/>
           </a:p>
@@ -5980,7 +6098,7 @@
                   <a:schemeClr val="tx1"/>
                 </a:solidFill>
               </a:rPr>
-              <a:t>Per-tier feasibility-collapse measurement in a multi-element synthesis environment</a:t>
+              <a:t>A public checker for support designs, with best-known costs from an exact solver on the small tiers</a:t>
             </a:r>
             <a:endParaRPr lang="en-US" sz="1400" dirty="0"/>
           </a:p>
@@ -5998,7 +6116,7 @@
                   <a:schemeClr val="tx1"/>
                 </a:solidFill>
               </a:rPr>
-              <a:t>Verification against commercial corridor models</a:t>
+              <a:t>The catalog as an input: generated catalogs, and tests on catalogs a method has never seen</a:t>
             </a:r>
             <a:endParaRPr lang="en-US" sz="1400" dirty="0"/>
           </a:p>
@@ -6016,7 +6134,7 @@
                   <a:schemeClr val="tx1"/>
                 </a:solidFill>
               </a:rPr>
-              <a:t>An expert plausibility review of generated scenes, and a curated expert reference set for evaluation</a:t>
+              <a:t>A real test set: sections from commercial projects with supports designed by engineers</a:t>
             </a:r>
             <a:endParaRPr lang="en-US" sz="1400" dirty="0"/>
           </a:p>
@@ -6255,7 +6373,7 @@
                   <a:srgbClr val="CADCFC"/>
                 </a:solidFill>
               </a:rPr>
-              <a:t>7,000 support-design problems  ·  every number traced  ·  checked against a built project  ·  open data and code</a:t>
+              <a:t>7,000 support-design problems  ·  every number traced  ·  checked against two open buildings  ·  open data and code</a:t>
             </a:r>
             <a:endParaRPr lang="en-US" sz="1600" dirty="0"/>
           </a:p>
@@ -9513,7 +9631,7 @@
       </p:sp>
       <p:sp>
         <p:nvSpPr>
-          <p:cNvPr id="7" name="tile Wasserstein-1, generated to measured gaps: insulation / pipe surfaces"/>
+          <p:cNvPr id="7" name="tile Wasserstein-1, generated to measured pipe gaps of the clinic (95 % CI 16–44)"/>
           <p:cNvSpPr/>
           <p:nvPr/>
         </p:nvSpPr>
@@ -9535,7 +9653,7 @@
       </p:sp>
       <p:sp>
         <p:nvSpPr>
-          <p:cNvPr id="8" name="value Wasserstein-1, generated to measured gaps: insulation / pipe surfaces"/>
+          <p:cNvPr id="8" name="value Wasserstein-1, generated to measured pipe gaps of the clinic (95 % CI 16–44)"/>
           <p:cNvSpPr txBox="1"/>
           <p:nvPr/>
         </p:nvSpPr>
@@ -9563,7 +9681,7 @@
                   <a:schemeClr val="accent1"/>
                 </a:solidFill>
               </a:rPr>
-              <a:t>41 / 68 mm</a:t>
+              <a:t>28 mm</a:t>
             </a:r>
             <a:endParaRPr lang="en-US" sz="2400" dirty="0"/>
           </a:p>
@@ -9571,7 +9689,7 @@
       </p:sp>
       <p:sp>
         <p:nvSpPr>
-          <p:cNvPr id="9" name="label Wasserstein-1, generated to measured gaps: insulation / pipe surfaces"/>
+          <p:cNvPr id="9" name="label Wasserstein-1, generated to measured pipe gaps of the clinic (95 % CI 16–44)"/>
           <p:cNvSpPr txBox="1"/>
           <p:nvPr/>
         </p:nvSpPr>
@@ -9599,7 +9717,7 @@
                   <a:srgbClr val="52514E"/>
                 </a:solidFill>
               </a:rPr>
-              <a:t>Wasserstein-1, generated to measured gaps: insulation / pipe surfaces</a:t>
+              <a:t>Wasserstein-1, generated to measured pipe gaps of the clinic (95 % CI 16–44)</a:t>
             </a:r>
             <a:endParaRPr lang="en-US" sz="1100" dirty="0"/>
           </a:p>
@@ -9607,7 +9725,7 @@
       </p:sp>
       <p:sp>
         <p:nvSpPr>
-          <p:cNvPr id="10" name="tile lognormal fit to the measured gaps above 25 mm (n = 73)"/>
+          <p:cNvPr id="10" name="tile rank correlation of tier with the closest gap / with the load"/>
           <p:cNvSpPr/>
           <p:nvPr/>
         </p:nvSpPr>
@@ -9629,7 +9747,7 @@
       </p:sp>
       <p:sp>
         <p:nvSpPr>
-          <p:cNvPr id="11" name="value lognormal fit to the measured gaps above 25 mm (n = 73)"/>
+          <p:cNvPr id="11" name="value rank correlation of tier with the closest gap / with the load"/>
           <p:cNvSpPr txBox="1"/>
           <p:nvPr/>
         </p:nvSpPr>
@@ -9657,7 +9775,7 @@
                   <a:schemeClr val="accent1"/>
                 </a:solidFill>
               </a:rPr>
-              <a:t>KS p = 0.53</a:t>
+              <a:t>−0.36 / +0.56</a:t>
             </a:r>
             <a:endParaRPr lang="en-US" sz="2400" dirty="0"/>
           </a:p>
@@ -9665,7 +9783,7 @@
       </p:sp>
       <p:sp>
         <p:nvSpPr>
-          <p:cNvPr id="12" name="label lognormal fit to the measured gaps above 25 mm (n = 73)"/>
+          <p:cNvPr id="12" name="label rank correlation of tier with the closest gap / with the load"/>
           <p:cNvSpPr txBox="1"/>
           <p:nvPr/>
         </p:nvSpPr>
@@ -9693,7 +9811,7 @@
                   <a:srgbClr val="52514E"/>
                 </a:solidFill>
               </a:rPr>
-              <a:t>lognormal fit to the measured gaps above 25 mm (n = 73)</a:t>
+              <a:t>rank correlation of tier with the closest gap / with the load</a:t>
             </a:r>
             <a:endParaRPr lang="en-US" sz="1100" dirty="0"/>
           </a:p>
@@ -9801,6 +9919,3805 @@
                   <a:schemeClr val="tx1"/>
                 </a:solidFill>
               </a:rPr>
+              <a:t>Appendix: the realism check, in detail</a:t>
+            </a:r>
+            <a:endParaRPr lang="en-US" sz="2600" dirty="0"/>
+          </a:p>
+        </p:txBody>
+      </p:sp>
+      <p:graphicFrame>
+        <p:nvGraphicFramePr>
+          <p:cNvPr id="17" name="samples table"/>
+          <p:cNvGraphicFramePr>
+            <a:graphicFrameLocks noGrp="1"/>
+          </p:cNvGraphicFramePr>
+          <p:nvPr>
+            <p:extLst>
+              <p:ext uri="{D42A27DB-BD31-4B8C-83A1-F6EECF244321}">
+                <p14:modId xmlns:p14="http://schemas.microsoft.com/office/powerpoint/2010/main" val="1579011935"/>
+              </p:ext>
+            </p:extLst>
+          </p:nvPr>
+        </p:nvGraphicFramePr>
+        <p:xfrm>
+          <a:off x="548640" y="1371600"/>
+          <a:ext cx="5394960" cy="914400"/>
+        </p:xfrm>
+        <a:graphic>
+          <a:graphicData uri="http://schemas.openxmlformats.org/drawingml/2006/table">
+            <a:tbl>
+              <a:tblPr/>
+              <a:tblGrid>
+                <a:gridCol w="1828800"/>
+                <a:gridCol w="822960"/>
+                <a:gridCol w="914400"/>
+                <a:gridCol w="1005840"/>
+                <a:gridCol w="822960"/>
+              </a:tblGrid>
+              <a:tr h="310896">
+                <a:tc>
+                  <a:txBody>
+                    <a:bodyPr/>
+                    <a:lstStyle/>
+                    <a:p>
+                      <a:pPr algn="l" indent="0" marL="0">
+                        <a:buNone/>
+                      </a:pPr>
+                      <a:r>
+                        <a:rPr lang="en-US" sz="1100" b="1" dirty="0">
+                          <a:solidFill>
+                            <a:srgbClr val="FFFFFF"/>
+                          </a:solidFill>
+                          <a:latin typeface="Calibri" pitchFamily="34" charset="0"/>
+                          <a:ea typeface="Calibri" pitchFamily="34" charset="-122"/>
+                          <a:cs typeface="Calibri" pitchFamily="34" charset="-120"/>
+                        </a:rPr>
+                        <a:t>pipe gaps</a:t>
+                      </a:r>
+                      <a:endParaRPr lang="en-US" sz="1100" dirty="0">
+                        <a:latin typeface="Calibri" charset="0"/>
+                        <a:ea typeface="Calibri" charset="0"/>
+                        <a:cs typeface="Calibri" charset="0"/>
+                      </a:endParaRPr>
+                    </a:p>
+                  </a:txBody>
+                  <a:tcPr marL="36576" marR="36576" marT="36576" marB="36576" anchor="ctr">
+                    <a:lnL w="9525" cap="flat" cmpd="sng" algn="ctr">
+                      <a:solidFill>
+                        <a:srgbClr val="E1E0D9"/>
+                      </a:solidFill>
+                      <a:prstDash val="solid"/>
+                      <a:round/>
+                      <a:headEnd type="none" w="med" len="med"/>
+                      <a:tailEnd type="none" w="med" len="med"/>
+                    </a:lnL>
+                    <a:lnR w="9525" cap="flat" cmpd="sng" algn="ctr">
+                      <a:solidFill>
+                        <a:srgbClr val="E1E0D9"/>
+                      </a:solidFill>
+                      <a:prstDash val="solid"/>
+                      <a:round/>
+                      <a:headEnd type="none" w="med" len="med"/>
+                      <a:tailEnd type="none" w="med" len="med"/>
+                    </a:lnR>
+                    <a:lnT w="9525" cap="flat" cmpd="sng" algn="ctr">
+                      <a:solidFill>
+                        <a:srgbClr val="E1E0D9"/>
+                      </a:solidFill>
+                      <a:prstDash val="solid"/>
+                      <a:round/>
+                      <a:headEnd type="none" w="med" len="med"/>
+                      <a:tailEnd type="none" w="med" len="med"/>
+                    </a:lnT>
+                    <a:lnB w="9525" cap="flat" cmpd="sng" algn="ctr">
+                      <a:solidFill>
+                        <a:srgbClr val="E1E0D9"/>
+                      </a:solidFill>
+                      <a:prstDash val="solid"/>
+                      <a:round/>
+                      <a:headEnd type="none" w="med" len="med"/>
+                      <a:tailEnd type="none" w="med" len="med"/>
+                    </a:lnB>
+                    <a:solidFill>
+                      <a:srgbClr val="1F2933"/>
+                    </a:solidFill>
+                  </a:tcPr>
+                </a:tc>
+                <a:tc>
+                  <a:txBody>
+                    <a:bodyPr/>
+                    <a:lstStyle/>
+                    <a:p>
+                      <a:pPr algn="ctr" indent="0" marL="0">
+                        <a:buNone/>
+                      </a:pPr>
+                      <a:r>
+                        <a:rPr lang="en-US" sz="1100" b="1" dirty="0">
+                          <a:solidFill>
+                            <a:srgbClr val="FFFFFF"/>
+                          </a:solidFill>
+                          <a:latin typeface="Calibri" pitchFamily="34" charset="0"/>
+                          <a:ea typeface="Calibri" pitchFamily="34" charset="-122"/>
+                          <a:cs typeface="Calibri" pitchFamily="34" charset="-120"/>
+                        </a:rPr>
+                        <a:t>pairs</a:t>
+                      </a:r>
+                      <a:endParaRPr lang="en-US" sz="1100" dirty="0">
+                        <a:latin typeface="Calibri" charset="0"/>
+                        <a:ea typeface="Calibri" charset="0"/>
+                        <a:cs typeface="Calibri" charset="0"/>
+                      </a:endParaRPr>
+                    </a:p>
+                  </a:txBody>
+                  <a:tcPr marL="36576" marR="36576" marT="36576" marB="36576" anchor="ctr">
+                    <a:lnL w="9525" cap="flat" cmpd="sng" algn="ctr">
+                      <a:solidFill>
+                        <a:srgbClr val="E1E0D9"/>
+                      </a:solidFill>
+                      <a:prstDash val="solid"/>
+                      <a:round/>
+                      <a:headEnd type="none" w="med" len="med"/>
+                      <a:tailEnd type="none" w="med" len="med"/>
+                    </a:lnL>
+                    <a:lnR w="9525" cap="flat" cmpd="sng" algn="ctr">
+                      <a:solidFill>
+                        <a:srgbClr val="E1E0D9"/>
+                      </a:solidFill>
+                      <a:prstDash val="solid"/>
+                      <a:round/>
+                      <a:headEnd type="none" w="med" len="med"/>
+                      <a:tailEnd type="none" w="med" len="med"/>
+                    </a:lnR>
+                    <a:lnT w="9525" cap="flat" cmpd="sng" algn="ctr">
+                      <a:solidFill>
+                        <a:srgbClr val="E1E0D9"/>
+                      </a:solidFill>
+                      <a:prstDash val="solid"/>
+                      <a:round/>
+                      <a:headEnd type="none" w="med" len="med"/>
+                      <a:tailEnd type="none" w="med" len="med"/>
+                    </a:lnT>
+                    <a:lnB w="9525" cap="flat" cmpd="sng" algn="ctr">
+                      <a:solidFill>
+                        <a:srgbClr val="E1E0D9"/>
+                      </a:solidFill>
+                      <a:prstDash val="solid"/>
+                      <a:round/>
+                      <a:headEnd type="none" w="med" len="med"/>
+                      <a:tailEnd type="none" w="med" len="med"/>
+                    </a:lnB>
+                    <a:solidFill>
+                      <a:srgbClr val="1F2933"/>
+                    </a:solidFill>
+                  </a:tcPr>
+                </a:tc>
+                <a:tc>
+                  <a:txBody>
+                    <a:bodyPr/>
+                    <a:lstStyle/>
+                    <a:p>
+                      <a:pPr algn="ctr" indent="0" marL="0">
+                        <a:buNone/>
+                      </a:pPr>
+                      <a:r>
+                        <a:rPr lang="en-US" sz="1100" b="1" dirty="0">
+                          <a:solidFill>
+                            <a:srgbClr val="FFFFFF"/>
+                          </a:solidFill>
+                          <a:latin typeface="Calibri" pitchFamily="34" charset="0"/>
+                          <a:ea typeface="Calibri" pitchFamily="34" charset="-122"/>
+                          <a:cs typeface="Calibri" pitchFamily="34" charset="-120"/>
+                        </a:rPr>
+                        <a:t>sections</a:t>
+                      </a:r>
+                      <a:endParaRPr lang="en-US" sz="1100" dirty="0">
+                        <a:latin typeface="Calibri" charset="0"/>
+                        <a:ea typeface="Calibri" charset="0"/>
+                        <a:cs typeface="Calibri" charset="0"/>
+                      </a:endParaRPr>
+                    </a:p>
+                  </a:txBody>
+                  <a:tcPr marL="36576" marR="36576" marT="36576" marB="36576" anchor="ctr">
+                    <a:lnL w="9525" cap="flat" cmpd="sng" algn="ctr">
+                      <a:solidFill>
+                        <a:srgbClr val="E1E0D9"/>
+                      </a:solidFill>
+                      <a:prstDash val="solid"/>
+                      <a:round/>
+                      <a:headEnd type="none" w="med" len="med"/>
+                      <a:tailEnd type="none" w="med" len="med"/>
+                    </a:lnL>
+                    <a:lnR w="9525" cap="flat" cmpd="sng" algn="ctr">
+                      <a:solidFill>
+                        <a:srgbClr val="E1E0D9"/>
+                      </a:solidFill>
+                      <a:prstDash val="solid"/>
+                      <a:round/>
+                      <a:headEnd type="none" w="med" len="med"/>
+                      <a:tailEnd type="none" w="med" len="med"/>
+                    </a:lnR>
+                    <a:lnT w="9525" cap="flat" cmpd="sng" algn="ctr">
+                      <a:solidFill>
+                        <a:srgbClr val="E1E0D9"/>
+                      </a:solidFill>
+                      <a:prstDash val="solid"/>
+                      <a:round/>
+                      <a:headEnd type="none" w="med" len="med"/>
+                      <a:tailEnd type="none" w="med" len="med"/>
+                    </a:lnT>
+                    <a:lnB w="9525" cap="flat" cmpd="sng" algn="ctr">
+                      <a:solidFill>
+                        <a:srgbClr val="E1E0D9"/>
+                      </a:solidFill>
+                      <a:prstDash val="solid"/>
+                      <a:round/>
+                      <a:headEnd type="none" w="med" len="med"/>
+                      <a:tailEnd type="none" w="med" len="med"/>
+                    </a:lnB>
+                    <a:solidFill>
+                      <a:srgbClr val="1F2933"/>
+                    </a:solidFill>
+                  </a:tcPr>
+                </a:tc>
+                <a:tc>
+                  <a:txBody>
+                    <a:bodyPr/>
+                    <a:lstStyle/>
+                    <a:p>
+                      <a:pPr algn="ctr" indent="0" marL="0">
+                        <a:buNone/>
+                      </a:pPr>
+                      <a:r>
+                        <a:rPr lang="en-US" sz="1100" b="1" dirty="0">
+                          <a:solidFill>
+                            <a:srgbClr val="FFFFFF"/>
+                          </a:solidFill>
+                          <a:latin typeface="Calibri" pitchFamily="34" charset="0"/>
+                          <a:ea typeface="Calibri" pitchFamily="34" charset="-122"/>
+                          <a:cs typeface="Calibri" pitchFamily="34" charset="-120"/>
+                        </a:rPr>
+                        <a:t>median (mm)</a:t>
+                      </a:r>
+                      <a:endParaRPr lang="en-US" sz="1100" dirty="0">
+                        <a:latin typeface="Calibri" charset="0"/>
+                        <a:ea typeface="Calibri" charset="0"/>
+                        <a:cs typeface="Calibri" charset="0"/>
+                      </a:endParaRPr>
+                    </a:p>
+                  </a:txBody>
+                  <a:tcPr marL="36576" marR="36576" marT="36576" marB="36576" anchor="ctr">
+                    <a:lnL w="9525" cap="flat" cmpd="sng" algn="ctr">
+                      <a:solidFill>
+                        <a:srgbClr val="E1E0D9"/>
+                      </a:solidFill>
+                      <a:prstDash val="solid"/>
+                      <a:round/>
+                      <a:headEnd type="none" w="med" len="med"/>
+                      <a:tailEnd type="none" w="med" len="med"/>
+                    </a:lnL>
+                    <a:lnR w="9525" cap="flat" cmpd="sng" algn="ctr">
+                      <a:solidFill>
+                        <a:srgbClr val="E1E0D9"/>
+                      </a:solidFill>
+                      <a:prstDash val="solid"/>
+                      <a:round/>
+                      <a:headEnd type="none" w="med" len="med"/>
+                      <a:tailEnd type="none" w="med" len="med"/>
+                    </a:lnR>
+                    <a:lnT w="9525" cap="flat" cmpd="sng" algn="ctr">
+                      <a:solidFill>
+                        <a:srgbClr val="E1E0D9"/>
+                      </a:solidFill>
+                      <a:prstDash val="solid"/>
+                      <a:round/>
+                      <a:headEnd type="none" w="med" len="med"/>
+                      <a:tailEnd type="none" w="med" len="med"/>
+                    </a:lnT>
+                    <a:lnB w="9525" cap="flat" cmpd="sng" algn="ctr">
+                      <a:solidFill>
+                        <a:srgbClr val="E1E0D9"/>
+                      </a:solidFill>
+                      <a:prstDash val="solid"/>
+                      <a:round/>
+                      <a:headEnd type="none" w="med" len="med"/>
+                      <a:tailEnd type="none" w="med" len="med"/>
+                    </a:lnB>
+                    <a:solidFill>
+                      <a:srgbClr val="1F2933"/>
+                    </a:solidFill>
+                  </a:tcPr>
+                </a:tc>
+                <a:tc>
+                  <a:txBody>
+                    <a:bodyPr/>
+                    <a:lstStyle/>
+                    <a:p>
+                      <a:pPr algn="ctr" indent="0" marL="0">
+                        <a:buNone/>
+                      </a:pPr>
+                      <a:r>
+                        <a:rPr lang="en-US" sz="1100" b="1" dirty="0">
+                          <a:solidFill>
+                            <a:srgbClr val="FFFFFF"/>
+                          </a:solidFill>
+                          <a:latin typeface="Calibri" pitchFamily="34" charset="0"/>
+                          <a:ea typeface="Calibri" pitchFamily="34" charset="-122"/>
+                          <a:cs typeface="Calibri" pitchFamily="34" charset="-120"/>
+                        </a:rPr>
+                        <a:t>&lt; 25 mm</a:t>
+                      </a:r>
+                      <a:endParaRPr lang="en-US" sz="1100" dirty="0">
+                        <a:latin typeface="Calibri" charset="0"/>
+                        <a:ea typeface="Calibri" charset="0"/>
+                        <a:cs typeface="Calibri" charset="0"/>
+                      </a:endParaRPr>
+                    </a:p>
+                  </a:txBody>
+                  <a:tcPr marL="36576" marR="36576" marT="36576" marB="36576" anchor="ctr">
+                    <a:lnL w="9525" cap="flat" cmpd="sng" algn="ctr">
+                      <a:solidFill>
+                        <a:srgbClr val="E1E0D9"/>
+                      </a:solidFill>
+                      <a:prstDash val="solid"/>
+                      <a:round/>
+                      <a:headEnd type="none" w="med" len="med"/>
+                      <a:tailEnd type="none" w="med" len="med"/>
+                    </a:lnL>
+                    <a:lnR w="9525" cap="flat" cmpd="sng" algn="ctr">
+                      <a:solidFill>
+                        <a:srgbClr val="E1E0D9"/>
+                      </a:solidFill>
+                      <a:prstDash val="solid"/>
+                      <a:round/>
+                      <a:headEnd type="none" w="med" len="med"/>
+                      <a:tailEnd type="none" w="med" len="med"/>
+                    </a:lnR>
+                    <a:lnT w="9525" cap="flat" cmpd="sng" algn="ctr">
+                      <a:solidFill>
+                        <a:srgbClr val="E1E0D9"/>
+                      </a:solidFill>
+                      <a:prstDash val="solid"/>
+                      <a:round/>
+                      <a:headEnd type="none" w="med" len="med"/>
+                      <a:tailEnd type="none" w="med" len="med"/>
+                    </a:lnT>
+                    <a:lnB w="9525" cap="flat" cmpd="sng" algn="ctr">
+                      <a:solidFill>
+                        <a:srgbClr val="E1E0D9"/>
+                      </a:solidFill>
+                      <a:prstDash val="solid"/>
+                      <a:round/>
+                      <a:headEnd type="none" w="med" len="med"/>
+                      <a:tailEnd type="none" w="med" len="med"/>
+                    </a:lnB>
+                    <a:solidFill>
+                      <a:srgbClr val="1F2933"/>
+                    </a:solidFill>
+                  </a:tcPr>
+                </a:tc>
+              </a:tr>
+              <a:tr h="310896">
+                <a:tc>
+                  <a:txBody>
+                    <a:bodyPr/>
+                    <a:lstStyle/>
+                    <a:p>
+                      <a:pPr algn="l" indent="0" marL="0">
+                        <a:buNone/>
+                      </a:pPr>
+                      <a:r>
+                        <a:rPr lang="en-US" sz="1100" dirty="0">
+                          <a:solidFill>
+                            <a:srgbClr val="0B0B0B"/>
+                          </a:solidFill>
+                          <a:latin typeface="Calibri" pitchFamily="34" charset="0"/>
+                          <a:ea typeface="Calibri" pitchFamily="34" charset="-122"/>
+                          <a:cs typeface="Calibri" pitchFamily="34" charset="-120"/>
+                        </a:rPr>
+                        <a:t>generated (benchmark)</a:t>
+                      </a:r>
+                      <a:endParaRPr lang="en-US" sz="1100" dirty="0">
+                        <a:latin typeface="Calibri" charset="0"/>
+                        <a:ea typeface="Calibri" charset="0"/>
+                        <a:cs typeface="Calibri" charset="0"/>
+                      </a:endParaRPr>
+                    </a:p>
+                  </a:txBody>
+                  <a:tcPr marL="36576" marR="36576" marT="36576" marB="36576" anchor="ctr">
+                    <a:lnL w="9525" cap="flat" cmpd="sng" algn="ctr">
+                      <a:solidFill>
+                        <a:srgbClr val="E1E0D9"/>
+                      </a:solidFill>
+                      <a:prstDash val="solid"/>
+                      <a:round/>
+                      <a:headEnd type="none" w="med" len="med"/>
+                      <a:tailEnd type="none" w="med" len="med"/>
+                    </a:lnL>
+                    <a:lnR w="9525" cap="flat" cmpd="sng" algn="ctr">
+                      <a:solidFill>
+                        <a:srgbClr val="E1E0D9"/>
+                      </a:solidFill>
+                      <a:prstDash val="solid"/>
+                      <a:round/>
+                      <a:headEnd type="none" w="med" len="med"/>
+                      <a:tailEnd type="none" w="med" len="med"/>
+                    </a:lnR>
+                    <a:lnT w="9525" cap="flat" cmpd="sng" algn="ctr">
+                      <a:solidFill>
+                        <a:srgbClr val="E1E0D9"/>
+                      </a:solidFill>
+                      <a:prstDash val="solid"/>
+                      <a:round/>
+                      <a:headEnd type="none" w="med" len="med"/>
+                      <a:tailEnd type="none" w="med" len="med"/>
+                    </a:lnT>
+                    <a:lnB w="9525" cap="flat" cmpd="sng" algn="ctr">
+                      <a:solidFill>
+                        <a:srgbClr val="E1E0D9"/>
+                      </a:solidFill>
+                      <a:prstDash val="solid"/>
+                      <a:round/>
+                      <a:headEnd type="none" w="med" len="med"/>
+                      <a:tailEnd type="none" w="med" len="med"/>
+                    </a:lnB>
+                  </a:tcPr>
+                </a:tc>
+                <a:tc>
+                  <a:txBody>
+                    <a:bodyPr/>
+                    <a:lstStyle/>
+                    <a:p>
+                      <a:pPr algn="ctr" indent="0" marL="0">
+                        <a:buNone/>
+                      </a:pPr>
+                      <a:r>
+                        <a:rPr lang="en-US" sz="1100" dirty="0">
+                          <a:solidFill>
+                            <a:srgbClr val="0B0B0B"/>
+                          </a:solidFill>
+                          <a:latin typeface="Calibri" pitchFamily="34" charset="0"/>
+                          <a:ea typeface="Calibri" pitchFamily="34" charset="-122"/>
+                          <a:cs typeface="Calibri" pitchFamily="34" charset="-120"/>
+                        </a:rPr>
+                        <a:t>1,543</a:t>
+                      </a:r>
+                      <a:endParaRPr lang="en-US" sz="1100" dirty="0">
+                        <a:latin typeface="Calibri" charset="0"/>
+                        <a:ea typeface="Calibri" charset="0"/>
+                        <a:cs typeface="Calibri" charset="0"/>
+                      </a:endParaRPr>
+                    </a:p>
+                  </a:txBody>
+                  <a:tcPr marL="36576" marR="36576" marT="36576" marB="36576" anchor="ctr">
+                    <a:lnL w="9525" cap="flat" cmpd="sng" algn="ctr">
+                      <a:solidFill>
+                        <a:srgbClr val="E1E0D9"/>
+                      </a:solidFill>
+                      <a:prstDash val="solid"/>
+                      <a:round/>
+                      <a:headEnd type="none" w="med" len="med"/>
+                      <a:tailEnd type="none" w="med" len="med"/>
+                    </a:lnL>
+                    <a:lnR w="9525" cap="flat" cmpd="sng" algn="ctr">
+                      <a:solidFill>
+                        <a:srgbClr val="E1E0D9"/>
+                      </a:solidFill>
+                      <a:prstDash val="solid"/>
+                      <a:round/>
+                      <a:headEnd type="none" w="med" len="med"/>
+                      <a:tailEnd type="none" w="med" len="med"/>
+                    </a:lnR>
+                    <a:lnT w="9525" cap="flat" cmpd="sng" algn="ctr">
+                      <a:solidFill>
+                        <a:srgbClr val="E1E0D9"/>
+                      </a:solidFill>
+                      <a:prstDash val="solid"/>
+                      <a:round/>
+                      <a:headEnd type="none" w="med" len="med"/>
+                      <a:tailEnd type="none" w="med" len="med"/>
+                    </a:lnT>
+                    <a:lnB w="9525" cap="flat" cmpd="sng" algn="ctr">
+                      <a:solidFill>
+                        <a:srgbClr val="E1E0D9"/>
+                      </a:solidFill>
+                      <a:prstDash val="solid"/>
+                      <a:round/>
+                      <a:headEnd type="none" w="med" len="med"/>
+                      <a:tailEnd type="none" w="med" len="med"/>
+                    </a:lnB>
+                  </a:tcPr>
+                </a:tc>
+                <a:tc>
+                  <a:txBody>
+                    <a:bodyPr/>
+                    <a:lstStyle/>
+                    <a:p>
+                      <a:pPr algn="ctr" indent="0" marL="0">
+                        <a:buNone/>
+                      </a:pPr>
+                      <a:r>
+                        <a:rPr lang="en-US" sz="1100" dirty="0">
+                          <a:solidFill>
+                            <a:srgbClr val="0B0B0B"/>
+                          </a:solidFill>
+                          <a:latin typeface="Calibri" pitchFamily="34" charset="0"/>
+                          <a:ea typeface="Calibri" pitchFamily="34" charset="-122"/>
+                          <a:cs typeface="Calibri" pitchFamily="34" charset="-120"/>
+                        </a:rPr>
+                        <a:t>—</a:t>
+                      </a:r>
+                      <a:endParaRPr lang="en-US" sz="1100" dirty="0">
+                        <a:latin typeface="Calibri" charset="0"/>
+                        <a:ea typeface="Calibri" charset="0"/>
+                        <a:cs typeface="Calibri" charset="0"/>
+                      </a:endParaRPr>
+                    </a:p>
+                  </a:txBody>
+                  <a:tcPr marL="36576" marR="36576" marT="36576" marB="36576" anchor="ctr">
+                    <a:lnL w="9525" cap="flat" cmpd="sng" algn="ctr">
+                      <a:solidFill>
+                        <a:srgbClr val="E1E0D9"/>
+                      </a:solidFill>
+                      <a:prstDash val="solid"/>
+                      <a:round/>
+                      <a:headEnd type="none" w="med" len="med"/>
+                      <a:tailEnd type="none" w="med" len="med"/>
+                    </a:lnL>
+                    <a:lnR w="9525" cap="flat" cmpd="sng" algn="ctr">
+                      <a:solidFill>
+                        <a:srgbClr val="E1E0D9"/>
+                      </a:solidFill>
+                      <a:prstDash val="solid"/>
+                      <a:round/>
+                      <a:headEnd type="none" w="med" len="med"/>
+                      <a:tailEnd type="none" w="med" len="med"/>
+                    </a:lnR>
+                    <a:lnT w="9525" cap="flat" cmpd="sng" algn="ctr">
+                      <a:solidFill>
+                        <a:srgbClr val="E1E0D9"/>
+                      </a:solidFill>
+                      <a:prstDash val="solid"/>
+                      <a:round/>
+                      <a:headEnd type="none" w="med" len="med"/>
+                      <a:tailEnd type="none" w="med" len="med"/>
+                    </a:lnT>
+                    <a:lnB w="9525" cap="flat" cmpd="sng" algn="ctr">
+                      <a:solidFill>
+                        <a:srgbClr val="E1E0D9"/>
+                      </a:solidFill>
+                      <a:prstDash val="solid"/>
+                      <a:round/>
+                      <a:headEnd type="none" w="med" len="med"/>
+                      <a:tailEnd type="none" w="med" len="med"/>
+                    </a:lnB>
+                  </a:tcPr>
+                </a:tc>
+                <a:tc>
+                  <a:txBody>
+                    <a:bodyPr/>
+                    <a:lstStyle/>
+                    <a:p>
+                      <a:pPr algn="ctr" indent="0" marL="0">
+                        <a:buNone/>
+                      </a:pPr>
+                      <a:r>
+                        <a:rPr lang="en-US" sz="1100" dirty="0">
+                          <a:solidFill>
+                            <a:srgbClr val="0B0B0B"/>
+                          </a:solidFill>
+                          <a:latin typeface="Calibri" pitchFamily="34" charset="0"/>
+                          <a:ea typeface="Calibri" pitchFamily="34" charset="-122"/>
+                          <a:cs typeface="Calibri" pitchFamily="34" charset="-120"/>
+                        </a:rPr>
+                        <a:t>207</a:t>
+                      </a:r>
+                      <a:endParaRPr lang="en-US" sz="1100" dirty="0">
+                        <a:latin typeface="Calibri" charset="0"/>
+                        <a:ea typeface="Calibri" charset="0"/>
+                        <a:cs typeface="Calibri" charset="0"/>
+                      </a:endParaRPr>
+                    </a:p>
+                  </a:txBody>
+                  <a:tcPr marL="36576" marR="36576" marT="36576" marB="36576" anchor="ctr">
+                    <a:lnL w="9525" cap="flat" cmpd="sng" algn="ctr">
+                      <a:solidFill>
+                        <a:srgbClr val="E1E0D9"/>
+                      </a:solidFill>
+                      <a:prstDash val="solid"/>
+                      <a:round/>
+                      <a:headEnd type="none" w="med" len="med"/>
+                      <a:tailEnd type="none" w="med" len="med"/>
+                    </a:lnL>
+                    <a:lnR w="9525" cap="flat" cmpd="sng" algn="ctr">
+                      <a:solidFill>
+                        <a:srgbClr val="E1E0D9"/>
+                      </a:solidFill>
+                      <a:prstDash val="solid"/>
+                      <a:round/>
+                      <a:headEnd type="none" w="med" len="med"/>
+                      <a:tailEnd type="none" w="med" len="med"/>
+                    </a:lnR>
+                    <a:lnT w="9525" cap="flat" cmpd="sng" algn="ctr">
+                      <a:solidFill>
+                        <a:srgbClr val="E1E0D9"/>
+                      </a:solidFill>
+                      <a:prstDash val="solid"/>
+                      <a:round/>
+                      <a:headEnd type="none" w="med" len="med"/>
+                      <a:tailEnd type="none" w="med" len="med"/>
+                    </a:lnT>
+                    <a:lnB w="9525" cap="flat" cmpd="sng" algn="ctr">
+                      <a:solidFill>
+                        <a:srgbClr val="E1E0D9"/>
+                      </a:solidFill>
+                      <a:prstDash val="solid"/>
+                      <a:round/>
+                      <a:headEnd type="none" w="med" len="med"/>
+                      <a:tailEnd type="none" w="med" len="med"/>
+                    </a:lnB>
+                  </a:tcPr>
+                </a:tc>
+                <a:tc>
+                  <a:txBody>
+                    <a:bodyPr/>
+                    <a:lstStyle/>
+                    <a:p>
+                      <a:pPr algn="ctr" indent="0" marL="0">
+                        <a:buNone/>
+                      </a:pPr>
+                      <a:r>
+                        <a:rPr lang="en-US" sz="1100" dirty="0">
+                          <a:solidFill>
+                            <a:srgbClr val="0B0B0B"/>
+                          </a:solidFill>
+                          <a:latin typeface="Calibri" pitchFamily="34" charset="0"/>
+                          <a:ea typeface="Calibri" pitchFamily="34" charset="-122"/>
+                          <a:cs typeface="Calibri" pitchFamily="34" charset="-120"/>
+                        </a:rPr>
+                        <a:t>0 %</a:t>
+                      </a:r>
+                      <a:endParaRPr lang="en-US" sz="1100" dirty="0">
+                        <a:latin typeface="Calibri" charset="0"/>
+                        <a:ea typeface="Calibri" charset="0"/>
+                        <a:cs typeface="Calibri" charset="0"/>
+                      </a:endParaRPr>
+                    </a:p>
+                  </a:txBody>
+                  <a:tcPr marL="36576" marR="36576" marT="36576" marB="36576" anchor="ctr">
+                    <a:lnL w="9525" cap="flat" cmpd="sng" algn="ctr">
+                      <a:solidFill>
+                        <a:srgbClr val="E1E0D9"/>
+                      </a:solidFill>
+                      <a:prstDash val="solid"/>
+                      <a:round/>
+                      <a:headEnd type="none" w="med" len="med"/>
+                      <a:tailEnd type="none" w="med" len="med"/>
+                    </a:lnL>
+                    <a:lnR w="9525" cap="flat" cmpd="sng" algn="ctr">
+                      <a:solidFill>
+                        <a:srgbClr val="E1E0D9"/>
+                      </a:solidFill>
+                      <a:prstDash val="solid"/>
+                      <a:round/>
+                      <a:headEnd type="none" w="med" len="med"/>
+                      <a:tailEnd type="none" w="med" len="med"/>
+                    </a:lnR>
+                    <a:lnT w="9525" cap="flat" cmpd="sng" algn="ctr">
+                      <a:solidFill>
+                        <a:srgbClr val="E1E0D9"/>
+                      </a:solidFill>
+                      <a:prstDash val="solid"/>
+                      <a:round/>
+                      <a:headEnd type="none" w="med" len="med"/>
+                      <a:tailEnd type="none" w="med" len="med"/>
+                    </a:lnT>
+                    <a:lnB w="9525" cap="flat" cmpd="sng" algn="ctr">
+                      <a:solidFill>
+                        <a:srgbClr val="E1E0D9"/>
+                      </a:solidFill>
+                      <a:prstDash val="solid"/>
+                      <a:round/>
+                      <a:headEnd type="none" w="med" len="med"/>
+                      <a:tailEnd type="none" w="med" len="med"/>
+                    </a:lnB>
+                  </a:tcPr>
+                </a:tc>
+              </a:tr>
+              <a:tr h="310896">
+                <a:tc>
+                  <a:txBody>
+                    <a:bodyPr/>
+                    <a:lstStyle/>
+                    <a:p>
+                      <a:pPr algn="l" indent="0" marL="0">
+                        <a:buNone/>
+                      </a:pPr>
+                      <a:r>
+                        <a:rPr lang="en-US" sz="1100" dirty="0">
+                          <a:solidFill>
+                            <a:srgbClr val="0B0B0B"/>
+                          </a:solidFill>
+                          <a:latin typeface="Calibri" pitchFamily="34" charset="0"/>
+                          <a:ea typeface="Calibri" pitchFamily="34" charset="-122"/>
+                          <a:cs typeface="Calibri" pitchFamily="34" charset="-120"/>
+                        </a:rPr>
+                        <a:t>Clinic, Plumbing</a:t>
+                      </a:r>
+                      <a:endParaRPr lang="en-US" sz="1100" dirty="0">
+                        <a:latin typeface="Calibri" charset="0"/>
+                        <a:ea typeface="Calibri" charset="0"/>
+                        <a:cs typeface="Calibri" charset="0"/>
+                      </a:endParaRPr>
+                    </a:p>
+                  </a:txBody>
+                  <a:tcPr marL="36576" marR="36576" marT="36576" marB="36576" anchor="ctr">
+                    <a:lnL w="9525" cap="flat" cmpd="sng" algn="ctr">
+                      <a:solidFill>
+                        <a:srgbClr val="E1E0D9"/>
+                      </a:solidFill>
+                      <a:prstDash val="solid"/>
+                      <a:round/>
+                      <a:headEnd type="none" w="med" len="med"/>
+                      <a:tailEnd type="none" w="med" len="med"/>
+                    </a:lnL>
+                    <a:lnR w="9525" cap="flat" cmpd="sng" algn="ctr">
+                      <a:solidFill>
+                        <a:srgbClr val="E1E0D9"/>
+                      </a:solidFill>
+                      <a:prstDash val="solid"/>
+                      <a:round/>
+                      <a:headEnd type="none" w="med" len="med"/>
+                      <a:tailEnd type="none" w="med" len="med"/>
+                    </a:lnR>
+                    <a:lnT w="9525" cap="flat" cmpd="sng" algn="ctr">
+                      <a:solidFill>
+                        <a:srgbClr val="E1E0D9"/>
+                      </a:solidFill>
+                      <a:prstDash val="solid"/>
+                      <a:round/>
+                      <a:headEnd type="none" w="med" len="med"/>
+                      <a:tailEnd type="none" w="med" len="med"/>
+                    </a:lnT>
+                    <a:lnB w="9525" cap="flat" cmpd="sng" algn="ctr">
+                      <a:solidFill>
+                        <a:srgbClr val="E1E0D9"/>
+                      </a:solidFill>
+                      <a:prstDash val="solid"/>
+                      <a:round/>
+                      <a:headEnd type="none" w="med" len="med"/>
+                      <a:tailEnd type="none" w="med" len="med"/>
+                    </a:lnB>
+                  </a:tcPr>
+                </a:tc>
+                <a:tc>
+                  <a:txBody>
+                    <a:bodyPr/>
+                    <a:lstStyle/>
+                    <a:p>
+                      <a:pPr algn="ctr" indent="0" marL="0">
+                        <a:buNone/>
+                      </a:pPr>
+                      <a:r>
+                        <a:rPr lang="en-US" sz="1100" dirty="0">
+                          <a:solidFill>
+                            <a:srgbClr val="0B0B0B"/>
+                          </a:solidFill>
+                          <a:latin typeface="Calibri" pitchFamily="34" charset="0"/>
+                          <a:ea typeface="Calibri" pitchFamily="34" charset="-122"/>
+                          <a:cs typeface="Calibri" pitchFamily="34" charset="-120"/>
+                        </a:rPr>
+                        <a:t>797</a:t>
+                      </a:r>
+                      <a:endParaRPr lang="en-US" sz="1100" dirty="0">
+                        <a:latin typeface="Calibri" charset="0"/>
+                        <a:ea typeface="Calibri" charset="0"/>
+                        <a:cs typeface="Calibri" charset="0"/>
+                      </a:endParaRPr>
+                    </a:p>
+                  </a:txBody>
+                  <a:tcPr marL="36576" marR="36576" marT="36576" marB="36576" anchor="ctr">
+                    <a:lnL w="9525" cap="flat" cmpd="sng" algn="ctr">
+                      <a:solidFill>
+                        <a:srgbClr val="E1E0D9"/>
+                      </a:solidFill>
+                      <a:prstDash val="solid"/>
+                      <a:round/>
+                      <a:headEnd type="none" w="med" len="med"/>
+                      <a:tailEnd type="none" w="med" len="med"/>
+                    </a:lnL>
+                    <a:lnR w="9525" cap="flat" cmpd="sng" algn="ctr">
+                      <a:solidFill>
+                        <a:srgbClr val="E1E0D9"/>
+                      </a:solidFill>
+                      <a:prstDash val="solid"/>
+                      <a:round/>
+                      <a:headEnd type="none" w="med" len="med"/>
+                      <a:tailEnd type="none" w="med" len="med"/>
+                    </a:lnR>
+                    <a:lnT w="9525" cap="flat" cmpd="sng" algn="ctr">
+                      <a:solidFill>
+                        <a:srgbClr val="E1E0D9"/>
+                      </a:solidFill>
+                      <a:prstDash val="solid"/>
+                      <a:round/>
+                      <a:headEnd type="none" w="med" len="med"/>
+                      <a:tailEnd type="none" w="med" len="med"/>
+                    </a:lnT>
+                    <a:lnB w="9525" cap="flat" cmpd="sng" algn="ctr">
+                      <a:solidFill>
+                        <a:srgbClr val="E1E0D9"/>
+                      </a:solidFill>
+                      <a:prstDash val="solid"/>
+                      <a:round/>
+                      <a:headEnd type="none" w="med" len="med"/>
+                      <a:tailEnd type="none" w="med" len="med"/>
+                    </a:lnB>
+                  </a:tcPr>
+                </a:tc>
+                <a:tc>
+                  <a:txBody>
+                    <a:bodyPr/>
+                    <a:lstStyle/>
+                    <a:p>
+                      <a:pPr algn="ctr" indent="0" marL="0">
+                        <a:buNone/>
+                      </a:pPr>
+                      <a:r>
+                        <a:rPr lang="en-US" sz="1100" dirty="0">
+                          <a:solidFill>
+                            <a:srgbClr val="0B0B0B"/>
+                          </a:solidFill>
+                          <a:latin typeface="Calibri" pitchFamily="34" charset="0"/>
+                          <a:ea typeface="Calibri" pitchFamily="34" charset="-122"/>
+                          <a:cs typeface="Calibri" pitchFamily="34" charset="-120"/>
+                        </a:rPr>
+                        <a:t>3,833</a:t>
+                      </a:r>
+                      <a:endParaRPr lang="en-US" sz="1100" dirty="0">
+                        <a:latin typeface="Calibri" charset="0"/>
+                        <a:ea typeface="Calibri" charset="0"/>
+                        <a:cs typeface="Calibri" charset="0"/>
+                      </a:endParaRPr>
+                    </a:p>
+                  </a:txBody>
+                  <a:tcPr marL="36576" marR="36576" marT="36576" marB="36576" anchor="ctr">
+                    <a:lnL w="9525" cap="flat" cmpd="sng" algn="ctr">
+                      <a:solidFill>
+                        <a:srgbClr val="E1E0D9"/>
+                      </a:solidFill>
+                      <a:prstDash val="solid"/>
+                      <a:round/>
+                      <a:headEnd type="none" w="med" len="med"/>
+                      <a:tailEnd type="none" w="med" len="med"/>
+                    </a:lnL>
+                    <a:lnR w="9525" cap="flat" cmpd="sng" algn="ctr">
+                      <a:solidFill>
+                        <a:srgbClr val="E1E0D9"/>
+                      </a:solidFill>
+                      <a:prstDash val="solid"/>
+                      <a:round/>
+                      <a:headEnd type="none" w="med" len="med"/>
+                      <a:tailEnd type="none" w="med" len="med"/>
+                    </a:lnR>
+                    <a:lnT w="9525" cap="flat" cmpd="sng" algn="ctr">
+                      <a:solidFill>
+                        <a:srgbClr val="E1E0D9"/>
+                      </a:solidFill>
+                      <a:prstDash val="solid"/>
+                      <a:round/>
+                      <a:headEnd type="none" w="med" len="med"/>
+                      <a:tailEnd type="none" w="med" len="med"/>
+                    </a:lnT>
+                    <a:lnB w="9525" cap="flat" cmpd="sng" algn="ctr">
+                      <a:solidFill>
+                        <a:srgbClr val="E1E0D9"/>
+                      </a:solidFill>
+                      <a:prstDash val="solid"/>
+                      <a:round/>
+                      <a:headEnd type="none" w="med" len="med"/>
+                      <a:tailEnd type="none" w="med" len="med"/>
+                    </a:lnB>
+                  </a:tcPr>
+                </a:tc>
+                <a:tc>
+                  <a:txBody>
+                    <a:bodyPr/>
+                    <a:lstStyle/>
+                    <a:p>
+                      <a:pPr algn="ctr" indent="0" marL="0">
+                        <a:buNone/>
+                      </a:pPr>
+                      <a:r>
+                        <a:rPr lang="en-US" sz="1100" dirty="0">
+                          <a:solidFill>
+                            <a:srgbClr val="0B0B0B"/>
+                          </a:solidFill>
+                          <a:latin typeface="Calibri" pitchFamily="34" charset="0"/>
+                          <a:ea typeface="Calibri" pitchFamily="34" charset="-122"/>
+                          <a:cs typeface="Calibri" pitchFamily="34" charset="-120"/>
+                        </a:rPr>
+                        <a:t>203</a:t>
+                      </a:r>
+                      <a:endParaRPr lang="en-US" sz="1100" dirty="0">
+                        <a:latin typeface="Calibri" charset="0"/>
+                        <a:ea typeface="Calibri" charset="0"/>
+                        <a:cs typeface="Calibri" charset="0"/>
+                      </a:endParaRPr>
+                    </a:p>
+                  </a:txBody>
+                  <a:tcPr marL="36576" marR="36576" marT="36576" marB="36576" anchor="ctr">
+                    <a:lnL w="9525" cap="flat" cmpd="sng" algn="ctr">
+                      <a:solidFill>
+                        <a:srgbClr val="E1E0D9"/>
+                      </a:solidFill>
+                      <a:prstDash val="solid"/>
+                      <a:round/>
+                      <a:headEnd type="none" w="med" len="med"/>
+                      <a:tailEnd type="none" w="med" len="med"/>
+                    </a:lnL>
+                    <a:lnR w="9525" cap="flat" cmpd="sng" algn="ctr">
+                      <a:solidFill>
+                        <a:srgbClr val="E1E0D9"/>
+                      </a:solidFill>
+                      <a:prstDash val="solid"/>
+                      <a:round/>
+                      <a:headEnd type="none" w="med" len="med"/>
+                      <a:tailEnd type="none" w="med" len="med"/>
+                    </a:lnR>
+                    <a:lnT w="9525" cap="flat" cmpd="sng" algn="ctr">
+                      <a:solidFill>
+                        <a:srgbClr val="E1E0D9"/>
+                      </a:solidFill>
+                      <a:prstDash val="solid"/>
+                      <a:round/>
+                      <a:headEnd type="none" w="med" len="med"/>
+                      <a:tailEnd type="none" w="med" len="med"/>
+                    </a:lnT>
+                    <a:lnB w="9525" cap="flat" cmpd="sng" algn="ctr">
+                      <a:solidFill>
+                        <a:srgbClr val="E1E0D9"/>
+                      </a:solidFill>
+                      <a:prstDash val="solid"/>
+                      <a:round/>
+                      <a:headEnd type="none" w="med" len="med"/>
+                      <a:tailEnd type="none" w="med" len="med"/>
+                    </a:lnB>
+                  </a:tcPr>
+                </a:tc>
+                <a:tc>
+                  <a:txBody>
+                    <a:bodyPr/>
+                    <a:lstStyle/>
+                    <a:p>
+                      <a:pPr algn="ctr" indent="0" marL="0">
+                        <a:buNone/>
+                      </a:pPr>
+                      <a:r>
+                        <a:rPr lang="en-US" sz="1100" dirty="0">
+                          <a:solidFill>
+                            <a:srgbClr val="0B0B0B"/>
+                          </a:solidFill>
+                          <a:latin typeface="Calibri" pitchFamily="34" charset="0"/>
+                          <a:ea typeface="Calibri" pitchFamily="34" charset="-122"/>
+                          <a:cs typeface="Calibri" pitchFamily="34" charset="-120"/>
+                        </a:rPr>
+                        <a:t>2 %</a:t>
+                      </a:r>
+                      <a:endParaRPr lang="en-US" sz="1100" dirty="0">
+                        <a:latin typeface="Calibri" charset="0"/>
+                        <a:ea typeface="Calibri" charset="0"/>
+                        <a:cs typeface="Calibri" charset="0"/>
+                      </a:endParaRPr>
+                    </a:p>
+                  </a:txBody>
+                  <a:tcPr marL="36576" marR="36576" marT="36576" marB="36576" anchor="ctr">
+                    <a:lnL w="9525" cap="flat" cmpd="sng" algn="ctr">
+                      <a:solidFill>
+                        <a:srgbClr val="E1E0D9"/>
+                      </a:solidFill>
+                      <a:prstDash val="solid"/>
+                      <a:round/>
+                      <a:headEnd type="none" w="med" len="med"/>
+                      <a:tailEnd type="none" w="med" len="med"/>
+                    </a:lnL>
+                    <a:lnR w="9525" cap="flat" cmpd="sng" algn="ctr">
+                      <a:solidFill>
+                        <a:srgbClr val="E1E0D9"/>
+                      </a:solidFill>
+                      <a:prstDash val="solid"/>
+                      <a:round/>
+                      <a:headEnd type="none" w="med" len="med"/>
+                      <a:tailEnd type="none" w="med" len="med"/>
+                    </a:lnR>
+                    <a:lnT w="9525" cap="flat" cmpd="sng" algn="ctr">
+                      <a:solidFill>
+                        <a:srgbClr val="E1E0D9"/>
+                      </a:solidFill>
+                      <a:prstDash val="solid"/>
+                      <a:round/>
+                      <a:headEnd type="none" w="med" len="med"/>
+                      <a:tailEnd type="none" w="med" len="med"/>
+                    </a:lnT>
+                    <a:lnB w="9525" cap="flat" cmpd="sng" algn="ctr">
+                      <a:solidFill>
+                        <a:srgbClr val="E1E0D9"/>
+                      </a:solidFill>
+                      <a:prstDash val="solid"/>
+                      <a:round/>
+                      <a:headEnd type="none" w="med" len="med"/>
+                      <a:tailEnd type="none" w="med" len="med"/>
+                    </a:lnB>
+                  </a:tcPr>
+                </a:tc>
+              </a:tr>
+              <a:tr h="310896">
+                <a:tc>
+                  <a:txBody>
+                    <a:bodyPr/>
+                    <a:lstStyle/>
+                    <a:p>
+                      <a:pPr algn="l" indent="0" marL="0">
+                        <a:buNone/>
+                      </a:pPr>
+                      <a:r>
+                        <a:rPr lang="en-US" sz="1100" dirty="0">
+                          <a:solidFill>
+                            <a:srgbClr val="0B0B0B"/>
+                          </a:solidFill>
+                          <a:latin typeface="Calibri" pitchFamily="34" charset="0"/>
+                          <a:ea typeface="Calibri" pitchFamily="34" charset="-122"/>
+                          <a:cs typeface="Calibri" pitchFamily="34" charset="-120"/>
+                        </a:rPr>
+                        <a:t>Duplex, MEP</a:t>
+                      </a:r>
+                      <a:endParaRPr lang="en-US" sz="1100" dirty="0">
+                        <a:latin typeface="Calibri" charset="0"/>
+                        <a:ea typeface="Calibri" charset="0"/>
+                        <a:cs typeface="Calibri" charset="0"/>
+                      </a:endParaRPr>
+                    </a:p>
+                  </a:txBody>
+                  <a:tcPr marL="36576" marR="36576" marT="36576" marB="36576" anchor="ctr">
+                    <a:lnL w="9525" cap="flat" cmpd="sng" algn="ctr">
+                      <a:solidFill>
+                        <a:srgbClr val="E1E0D9"/>
+                      </a:solidFill>
+                      <a:prstDash val="solid"/>
+                      <a:round/>
+                      <a:headEnd type="none" w="med" len="med"/>
+                      <a:tailEnd type="none" w="med" len="med"/>
+                    </a:lnL>
+                    <a:lnR w="9525" cap="flat" cmpd="sng" algn="ctr">
+                      <a:solidFill>
+                        <a:srgbClr val="E1E0D9"/>
+                      </a:solidFill>
+                      <a:prstDash val="solid"/>
+                      <a:round/>
+                      <a:headEnd type="none" w="med" len="med"/>
+                      <a:tailEnd type="none" w="med" len="med"/>
+                    </a:lnR>
+                    <a:lnT w="9525" cap="flat" cmpd="sng" algn="ctr">
+                      <a:solidFill>
+                        <a:srgbClr val="E1E0D9"/>
+                      </a:solidFill>
+                      <a:prstDash val="solid"/>
+                      <a:round/>
+                      <a:headEnd type="none" w="med" len="med"/>
+                      <a:tailEnd type="none" w="med" len="med"/>
+                    </a:lnT>
+                    <a:lnB w="9525" cap="flat" cmpd="sng" algn="ctr">
+                      <a:solidFill>
+                        <a:srgbClr val="E1E0D9"/>
+                      </a:solidFill>
+                      <a:prstDash val="solid"/>
+                      <a:round/>
+                      <a:headEnd type="none" w="med" len="med"/>
+                      <a:tailEnd type="none" w="med" len="med"/>
+                    </a:lnB>
+                  </a:tcPr>
+                </a:tc>
+                <a:tc>
+                  <a:txBody>
+                    <a:bodyPr/>
+                    <a:lstStyle/>
+                    <a:p>
+                      <a:pPr algn="ctr" indent="0" marL="0">
+                        <a:buNone/>
+                      </a:pPr>
+                      <a:r>
+                        <a:rPr lang="en-US" sz="1100" dirty="0">
+                          <a:solidFill>
+                            <a:srgbClr val="0B0B0B"/>
+                          </a:solidFill>
+                          <a:latin typeface="Calibri" pitchFamily="34" charset="0"/>
+                          <a:ea typeface="Calibri" pitchFamily="34" charset="-122"/>
+                          <a:cs typeface="Calibri" pitchFamily="34" charset="-120"/>
+                        </a:rPr>
+                        <a:t>74</a:t>
+                      </a:r>
+                      <a:endParaRPr lang="en-US" sz="1100" dirty="0">
+                        <a:latin typeface="Calibri" charset="0"/>
+                        <a:ea typeface="Calibri" charset="0"/>
+                        <a:cs typeface="Calibri" charset="0"/>
+                      </a:endParaRPr>
+                    </a:p>
+                  </a:txBody>
+                  <a:tcPr marL="36576" marR="36576" marT="36576" marB="36576" anchor="ctr">
+                    <a:lnL w="9525" cap="flat" cmpd="sng" algn="ctr">
+                      <a:solidFill>
+                        <a:srgbClr val="E1E0D9"/>
+                      </a:solidFill>
+                      <a:prstDash val="solid"/>
+                      <a:round/>
+                      <a:headEnd type="none" w="med" len="med"/>
+                      <a:tailEnd type="none" w="med" len="med"/>
+                    </a:lnL>
+                    <a:lnR w="9525" cap="flat" cmpd="sng" algn="ctr">
+                      <a:solidFill>
+                        <a:srgbClr val="E1E0D9"/>
+                      </a:solidFill>
+                      <a:prstDash val="solid"/>
+                      <a:round/>
+                      <a:headEnd type="none" w="med" len="med"/>
+                      <a:tailEnd type="none" w="med" len="med"/>
+                    </a:lnR>
+                    <a:lnT w="9525" cap="flat" cmpd="sng" algn="ctr">
+                      <a:solidFill>
+                        <a:srgbClr val="E1E0D9"/>
+                      </a:solidFill>
+                      <a:prstDash val="solid"/>
+                      <a:round/>
+                      <a:headEnd type="none" w="med" len="med"/>
+                      <a:tailEnd type="none" w="med" len="med"/>
+                    </a:lnT>
+                    <a:lnB w="9525" cap="flat" cmpd="sng" algn="ctr">
+                      <a:solidFill>
+                        <a:srgbClr val="E1E0D9"/>
+                      </a:solidFill>
+                      <a:prstDash val="solid"/>
+                      <a:round/>
+                      <a:headEnd type="none" w="med" len="med"/>
+                      <a:tailEnd type="none" w="med" len="med"/>
+                    </a:lnB>
+                  </a:tcPr>
+                </a:tc>
+                <a:tc>
+                  <a:txBody>
+                    <a:bodyPr/>
+                    <a:lstStyle/>
+                    <a:p>
+                      <a:pPr algn="ctr" indent="0" marL="0">
+                        <a:buNone/>
+                      </a:pPr>
+                      <a:r>
+                        <a:rPr lang="en-US" sz="1100" dirty="0">
+                          <a:solidFill>
+                            <a:srgbClr val="0B0B0B"/>
+                          </a:solidFill>
+                          <a:latin typeface="Calibri" pitchFamily="34" charset="0"/>
+                          <a:ea typeface="Calibri" pitchFamily="34" charset="-122"/>
+                          <a:cs typeface="Calibri" pitchFamily="34" charset="-120"/>
+                        </a:rPr>
+                        <a:t>204</a:t>
+                      </a:r>
+                      <a:endParaRPr lang="en-US" sz="1100" dirty="0">
+                        <a:latin typeface="Calibri" charset="0"/>
+                        <a:ea typeface="Calibri" charset="0"/>
+                        <a:cs typeface="Calibri" charset="0"/>
+                      </a:endParaRPr>
+                    </a:p>
+                  </a:txBody>
+                  <a:tcPr marL="36576" marR="36576" marT="36576" marB="36576" anchor="ctr">
+                    <a:lnL w="9525" cap="flat" cmpd="sng" algn="ctr">
+                      <a:solidFill>
+                        <a:srgbClr val="E1E0D9"/>
+                      </a:solidFill>
+                      <a:prstDash val="solid"/>
+                      <a:round/>
+                      <a:headEnd type="none" w="med" len="med"/>
+                      <a:tailEnd type="none" w="med" len="med"/>
+                    </a:lnL>
+                    <a:lnR w="9525" cap="flat" cmpd="sng" algn="ctr">
+                      <a:solidFill>
+                        <a:srgbClr val="E1E0D9"/>
+                      </a:solidFill>
+                      <a:prstDash val="solid"/>
+                      <a:round/>
+                      <a:headEnd type="none" w="med" len="med"/>
+                      <a:tailEnd type="none" w="med" len="med"/>
+                    </a:lnR>
+                    <a:lnT w="9525" cap="flat" cmpd="sng" algn="ctr">
+                      <a:solidFill>
+                        <a:srgbClr val="E1E0D9"/>
+                      </a:solidFill>
+                      <a:prstDash val="solid"/>
+                      <a:round/>
+                      <a:headEnd type="none" w="med" len="med"/>
+                      <a:tailEnd type="none" w="med" len="med"/>
+                    </a:lnT>
+                    <a:lnB w="9525" cap="flat" cmpd="sng" algn="ctr">
+                      <a:solidFill>
+                        <a:srgbClr val="E1E0D9"/>
+                      </a:solidFill>
+                      <a:prstDash val="solid"/>
+                      <a:round/>
+                      <a:headEnd type="none" w="med" len="med"/>
+                      <a:tailEnd type="none" w="med" len="med"/>
+                    </a:lnB>
+                  </a:tcPr>
+                </a:tc>
+                <a:tc>
+                  <a:txBody>
+                    <a:bodyPr/>
+                    <a:lstStyle/>
+                    <a:p>
+                      <a:pPr algn="ctr" indent="0" marL="0">
+                        <a:buNone/>
+                      </a:pPr>
+                      <a:r>
+                        <a:rPr lang="en-US" sz="1100" dirty="0">
+                          <a:solidFill>
+                            <a:srgbClr val="0B0B0B"/>
+                          </a:solidFill>
+                          <a:latin typeface="Calibri" pitchFamily="34" charset="0"/>
+                          <a:ea typeface="Calibri" pitchFamily="34" charset="-122"/>
+                          <a:cs typeface="Calibri" pitchFamily="34" charset="-120"/>
+                        </a:rPr>
+                        <a:t>177</a:t>
+                      </a:r>
+                      <a:endParaRPr lang="en-US" sz="1100" dirty="0">
+                        <a:latin typeface="Calibri" charset="0"/>
+                        <a:ea typeface="Calibri" charset="0"/>
+                        <a:cs typeface="Calibri" charset="0"/>
+                      </a:endParaRPr>
+                    </a:p>
+                  </a:txBody>
+                  <a:tcPr marL="36576" marR="36576" marT="36576" marB="36576" anchor="ctr">
+                    <a:lnL w="9525" cap="flat" cmpd="sng" algn="ctr">
+                      <a:solidFill>
+                        <a:srgbClr val="E1E0D9"/>
+                      </a:solidFill>
+                      <a:prstDash val="solid"/>
+                      <a:round/>
+                      <a:headEnd type="none" w="med" len="med"/>
+                      <a:tailEnd type="none" w="med" len="med"/>
+                    </a:lnL>
+                    <a:lnR w="9525" cap="flat" cmpd="sng" algn="ctr">
+                      <a:solidFill>
+                        <a:srgbClr val="E1E0D9"/>
+                      </a:solidFill>
+                      <a:prstDash val="solid"/>
+                      <a:round/>
+                      <a:headEnd type="none" w="med" len="med"/>
+                      <a:tailEnd type="none" w="med" len="med"/>
+                    </a:lnR>
+                    <a:lnT w="9525" cap="flat" cmpd="sng" algn="ctr">
+                      <a:solidFill>
+                        <a:srgbClr val="E1E0D9"/>
+                      </a:solidFill>
+                      <a:prstDash val="solid"/>
+                      <a:round/>
+                      <a:headEnd type="none" w="med" len="med"/>
+                      <a:tailEnd type="none" w="med" len="med"/>
+                    </a:lnT>
+                    <a:lnB w="9525" cap="flat" cmpd="sng" algn="ctr">
+                      <a:solidFill>
+                        <a:srgbClr val="E1E0D9"/>
+                      </a:solidFill>
+                      <a:prstDash val="solid"/>
+                      <a:round/>
+                      <a:headEnd type="none" w="med" len="med"/>
+                      <a:tailEnd type="none" w="med" len="med"/>
+                    </a:lnB>
+                  </a:tcPr>
+                </a:tc>
+                <a:tc>
+                  <a:txBody>
+                    <a:bodyPr/>
+                    <a:lstStyle/>
+                    <a:p>
+                      <a:pPr algn="ctr" indent="0" marL="0">
+                        <a:buNone/>
+                      </a:pPr>
+                      <a:r>
+                        <a:rPr lang="en-US" sz="1100" dirty="0">
+                          <a:solidFill>
+                            <a:srgbClr val="0B0B0B"/>
+                          </a:solidFill>
+                          <a:latin typeface="Calibri" pitchFamily="34" charset="0"/>
+                          <a:ea typeface="Calibri" pitchFamily="34" charset="-122"/>
+                          <a:cs typeface="Calibri" pitchFamily="34" charset="-120"/>
+                        </a:rPr>
+                        <a:t>23 %</a:t>
+                      </a:r>
+                      <a:endParaRPr lang="en-US" sz="1100" dirty="0">
+                        <a:latin typeface="Calibri" charset="0"/>
+                        <a:ea typeface="Calibri" charset="0"/>
+                        <a:cs typeface="Calibri" charset="0"/>
+                      </a:endParaRPr>
+                    </a:p>
+                  </a:txBody>
+                  <a:tcPr marL="36576" marR="36576" marT="36576" marB="36576" anchor="ctr">
+                    <a:lnL w="9525" cap="flat" cmpd="sng" algn="ctr">
+                      <a:solidFill>
+                        <a:srgbClr val="E1E0D9"/>
+                      </a:solidFill>
+                      <a:prstDash val="solid"/>
+                      <a:round/>
+                      <a:headEnd type="none" w="med" len="med"/>
+                      <a:tailEnd type="none" w="med" len="med"/>
+                    </a:lnL>
+                    <a:lnR w="9525" cap="flat" cmpd="sng" algn="ctr">
+                      <a:solidFill>
+                        <a:srgbClr val="E1E0D9"/>
+                      </a:solidFill>
+                      <a:prstDash val="solid"/>
+                      <a:round/>
+                      <a:headEnd type="none" w="med" len="med"/>
+                      <a:tailEnd type="none" w="med" len="med"/>
+                    </a:lnR>
+                    <a:lnT w="9525" cap="flat" cmpd="sng" algn="ctr">
+                      <a:solidFill>
+                        <a:srgbClr val="E1E0D9"/>
+                      </a:solidFill>
+                      <a:prstDash val="solid"/>
+                      <a:round/>
+                      <a:headEnd type="none" w="med" len="med"/>
+                      <a:tailEnd type="none" w="med" len="med"/>
+                    </a:lnT>
+                    <a:lnB w="9525" cap="flat" cmpd="sng" algn="ctr">
+                      <a:solidFill>
+                        <a:srgbClr val="E1E0D9"/>
+                      </a:solidFill>
+                      <a:prstDash val="solid"/>
+                      <a:round/>
+                      <a:headEnd type="none" w="med" len="med"/>
+                      <a:tailEnd type="none" w="med" len="med"/>
+                    </a:lnB>
+                  </a:tcPr>
+                </a:tc>
+              </a:tr>
+              <a:tr h="310896">
+                <a:tc>
+                  <a:txBody>
+                    <a:bodyPr/>
+                    <a:lstStyle/>
+                    <a:p>
+                      <a:pPr algn="l" indent="0" marL="0">
+                        <a:buNone/>
+                      </a:pPr>
+                      <a:r>
+                        <a:rPr lang="en-US" sz="1100" dirty="0">
+                          <a:solidFill>
+                            <a:srgbClr val="0B0B0B"/>
+                          </a:solidFill>
+                          <a:latin typeface="Calibri" pitchFamily="34" charset="0"/>
+                          <a:ea typeface="Calibri" pitchFamily="34" charset="-122"/>
+                          <a:cs typeface="Calibri" pitchFamily="34" charset="-120"/>
+                        </a:rPr>
+                        <a:t>Duplex, Plumbing</a:t>
+                      </a:r>
+                      <a:endParaRPr lang="en-US" sz="1100" dirty="0">
+                        <a:latin typeface="Calibri" charset="0"/>
+                        <a:ea typeface="Calibri" charset="0"/>
+                        <a:cs typeface="Calibri" charset="0"/>
+                      </a:endParaRPr>
+                    </a:p>
+                  </a:txBody>
+                  <a:tcPr marL="36576" marR="36576" marT="36576" marB="36576" anchor="ctr">
+                    <a:lnL w="9525" cap="flat" cmpd="sng" algn="ctr">
+                      <a:solidFill>
+                        <a:srgbClr val="E1E0D9"/>
+                      </a:solidFill>
+                      <a:prstDash val="solid"/>
+                      <a:round/>
+                      <a:headEnd type="none" w="med" len="med"/>
+                      <a:tailEnd type="none" w="med" len="med"/>
+                    </a:lnL>
+                    <a:lnR w="9525" cap="flat" cmpd="sng" algn="ctr">
+                      <a:solidFill>
+                        <a:srgbClr val="E1E0D9"/>
+                      </a:solidFill>
+                      <a:prstDash val="solid"/>
+                      <a:round/>
+                      <a:headEnd type="none" w="med" len="med"/>
+                      <a:tailEnd type="none" w="med" len="med"/>
+                    </a:lnR>
+                    <a:lnT w="9525" cap="flat" cmpd="sng" algn="ctr">
+                      <a:solidFill>
+                        <a:srgbClr val="E1E0D9"/>
+                      </a:solidFill>
+                      <a:prstDash val="solid"/>
+                      <a:round/>
+                      <a:headEnd type="none" w="med" len="med"/>
+                      <a:tailEnd type="none" w="med" len="med"/>
+                    </a:lnT>
+                    <a:lnB w="9525" cap="flat" cmpd="sng" algn="ctr">
+                      <a:solidFill>
+                        <a:srgbClr val="E1E0D9"/>
+                      </a:solidFill>
+                      <a:prstDash val="solid"/>
+                      <a:round/>
+                      <a:headEnd type="none" w="med" len="med"/>
+                      <a:tailEnd type="none" w="med" len="med"/>
+                    </a:lnB>
+                  </a:tcPr>
+                </a:tc>
+                <a:tc>
+                  <a:txBody>
+                    <a:bodyPr/>
+                    <a:lstStyle/>
+                    <a:p>
+                      <a:pPr algn="ctr" indent="0" marL="0">
+                        <a:buNone/>
+                      </a:pPr>
+                      <a:r>
+                        <a:rPr lang="en-US" sz="1100" dirty="0">
+                          <a:solidFill>
+                            <a:srgbClr val="0B0B0B"/>
+                          </a:solidFill>
+                          <a:latin typeface="Calibri" pitchFamily="34" charset="0"/>
+                          <a:ea typeface="Calibri" pitchFamily="34" charset="-122"/>
+                          <a:cs typeface="Calibri" pitchFamily="34" charset="-120"/>
+                        </a:rPr>
+                        <a:t>41</a:t>
+                      </a:r>
+                      <a:endParaRPr lang="en-US" sz="1100" dirty="0">
+                        <a:latin typeface="Calibri" charset="0"/>
+                        <a:ea typeface="Calibri" charset="0"/>
+                        <a:cs typeface="Calibri" charset="0"/>
+                      </a:endParaRPr>
+                    </a:p>
+                  </a:txBody>
+                  <a:tcPr marL="36576" marR="36576" marT="36576" marB="36576" anchor="ctr">
+                    <a:lnL w="9525" cap="flat" cmpd="sng" algn="ctr">
+                      <a:solidFill>
+                        <a:srgbClr val="E1E0D9"/>
+                      </a:solidFill>
+                      <a:prstDash val="solid"/>
+                      <a:round/>
+                      <a:headEnd type="none" w="med" len="med"/>
+                      <a:tailEnd type="none" w="med" len="med"/>
+                    </a:lnL>
+                    <a:lnR w="9525" cap="flat" cmpd="sng" algn="ctr">
+                      <a:solidFill>
+                        <a:srgbClr val="E1E0D9"/>
+                      </a:solidFill>
+                      <a:prstDash val="solid"/>
+                      <a:round/>
+                      <a:headEnd type="none" w="med" len="med"/>
+                      <a:tailEnd type="none" w="med" len="med"/>
+                    </a:lnR>
+                    <a:lnT w="9525" cap="flat" cmpd="sng" algn="ctr">
+                      <a:solidFill>
+                        <a:srgbClr val="E1E0D9"/>
+                      </a:solidFill>
+                      <a:prstDash val="solid"/>
+                      <a:round/>
+                      <a:headEnd type="none" w="med" len="med"/>
+                      <a:tailEnd type="none" w="med" len="med"/>
+                    </a:lnT>
+                    <a:lnB w="9525" cap="flat" cmpd="sng" algn="ctr">
+                      <a:solidFill>
+                        <a:srgbClr val="E1E0D9"/>
+                      </a:solidFill>
+                      <a:prstDash val="solid"/>
+                      <a:round/>
+                      <a:headEnd type="none" w="med" len="med"/>
+                      <a:tailEnd type="none" w="med" len="med"/>
+                    </a:lnB>
+                  </a:tcPr>
+                </a:tc>
+                <a:tc>
+                  <a:txBody>
+                    <a:bodyPr/>
+                    <a:lstStyle/>
+                    <a:p>
+                      <a:pPr algn="ctr" indent="0" marL="0">
+                        <a:buNone/>
+                      </a:pPr>
+                      <a:r>
+                        <a:rPr lang="en-US" sz="1100" dirty="0">
+                          <a:solidFill>
+                            <a:srgbClr val="0B0B0B"/>
+                          </a:solidFill>
+                          <a:latin typeface="Calibri" pitchFamily="34" charset="0"/>
+                          <a:ea typeface="Calibri" pitchFamily="34" charset="-122"/>
+                          <a:cs typeface="Calibri" pitchFamily="34" charset="-120"/>
+                        </a:rPr>
+                        <a:t>112</a:t>
+                      </a:r>
+                      <a:endParaRPr lang="en-US" sz="1100" dirty="0">
+                        <a:latin typeface="Calibri" charset="0"/>
+                        <a:ea typeface="Calibri" charset="0"/>
+                        <a:cs typeface="Calibri" charset="0"/>
+                      </a:endParaRPr>
+                    </a:p>
+                  </a:txBody>
+                  <a:tcPr marL="36576" marR="36576" marT="36576" marB="36576" anchor="ctr">
+                    <a:lnL w="9525" cap="flat" cmpd="sng" algn="ctr">
+                      <a:solidFill>
+                        <a:srgbClr val="E1E0D9"/>
+                      </a:solidFill>
+                      <a:prstDash val="solid"/>
+                      <a:round/>
+                      <a:headEnd type="none" w="med" len="med"/>
+                      <a:tailEnd type="none" w="med" len="med"/>
+                    </a:lnL>
+                    <a:lnR w="9525" cap="flat" cmpd="sng" algn="ctr">
+                      <a:solidFill>
+                        <a:srgbClr val="E1E0D9"/>
+                      </a:solidFill>
+                      <a:prstDash val="solid"/>
+                      <a:round/>
+                      <a:headEnd type="none" w="med" len="med"/>
+                      <a:tailEnd type="none" w="med" len="med"/>
+                    </a:lnR>
+                    <a:lnT w="9525" cap="flat" cmpd="sng" algn="ctr">
+                      <a:solidFill>
+                        <a:srgbClr val="E1E0D9"/>
+                      </a:solidFill>
+                      <a:prstDash val="solid"/>
+                      <a:round/>
+                      <a:headEnd type="none" w="med" len="med"/>
+                      <a:tailEnd type="none" w="med" len="med"/>
+                    </a:lnT>
+                    <a:lnB w="9525" cap="flat" cmpd="sng" algn="ctr">
+                      <a:solidFill>
+                        <a:srgbClr val="E1E0D9"/>
+                      </a:solidFill>
+                      <a:prstDash val="solid"/>
+                      <a:round/>
+                      <a:headEnd type="none" w="med" len="med"/>
+                      <a:tailEnd type="none" w="med" len="med"/>
+                    </a:lnB>
+                  </a:tcPr>
+                </a:tc>
+                <a:tc>
+                  <a:txBody>
+                    <a:bodyPr/>
+                    <a:lstStyle/>
+                    <a:p>
+                      <a:pPr algn="ctr" indent="0" marL="0">
+                        <a:buNone/>
+                      </a:pPr>
+                      <a:r>
+                        <a:rPr lang="en-US" sz="1100" dirty="0">
+                          <a:solidFill>
+                            <a:srgbClr val="0B0B0B"/>
+                          </a:solidFill>
+                          <a:latin typeface="Calibri" pitchFamily="34" charset="0"/>
+                          <a:ea typeface="Calibri" pitchFamily="34" charset="-122"/>
+                          <a:cs typeface="Calibri" pitchFamily="34" charset="-120"/>
+                        </a:rPr>
+                        <a:t>114</a:t>
+                      </a:r>
+                      <a:endParaRPr lang="en-US" sz="1100" dirty="0">
+                        <a:latin typeface="Calibri" charset="0"/>
+                        <a:ea typeface="Calibri" charset="0"/>
+                        <a:cs typeface="Calibri" charset="0"/>
+                      </a:endParaRPr>
+                    </a:p>
+                  </a:txBody>
+                  <a:tcPr marL="36576" marR="36576" marT="36576" marB="36576" anchor="ctr">
+                    <a:lnL w="9525" cap="flat" cmpd="sng" algn="ctr">
+                      <a:solidFill>
+                        <a:srgbClr val="E1E0D9"/>
+                      </a:solidFill>
+                      <a:prstDash val="solid"/>
+                      <a:round/>
+                      <a:headEnd type="none" w="med" len="med"/>
+                      <a:tailEnd type="none" w="med" len="med"/>
+                    </a:lnL>
+                    <a:lnR w="9525" cap="flat" cmpd="sng" algn="ctr">
+                      <a:solidFill>
+                        <a:srgbClr val="E1E0D9"/>
+                      </a:solidFill>
+                      <a:prstDash val="solid"/>
+                      <a:round/>
+                      <a:headEnd type="none" w="med" len="med"/>
+                      <a:tailEnd type="none" w="med" len="med"/>
+                    </a:lnR>
+                    <a:lnT w="9525" cap="flat" cmpd="sng" algn="ctr">
+                      <a:solidFill>
+                        <a:srgbClr val="E1E0D9"/>
+                      </a:solidFill>
+                      <a:prstDash val="solid"/>
+                      <a:round/>
+                      <a:headEnd type="none" w="med" len="med"/>
+                      <a:tailEnd type="none" w="med" len="med"/>
+                    </a:lnT>
+                    <a:lnB w="9525" cap="flat" cmpd="sng" algn="ctr">
+                      <a:solidFill>
+                        <a:srgbClr val="E1E0D9"/>
+                      </a:solidFill>
+                      <a:prstDash val="solid"/>
+                      <a:round/>
+                      <a:headEnd type="none" w="med" len="med"/>
+                      <a:tailEnd type="none" w="med" len="med"/>
+                    </a:lnB>
+                  </a:tcPr>
+                </a:tc>
+                <a:tc>
+                  <a:txBody>
+                    <a:bodyPr/>
+                    <a:lstStyle/>
+                    <a:p>
+                      <a:pPr algn="ctr" indent="0" marL="0">
+                        <a:buNone/>
+                      </a:pPr>
+                      <a:r>
+                        <a:rPr lang="en-US" sz="1100" dirty="0">
+                          <a:solidFill>
+                            <a:srgbClr val="0B0B0B"/>
+                          </a:solidFill>
+                          <a:latin typeface="Calibri" pitchFamily="34" charset="0"/>
+                          <a:ea typeface="Calibri" pitchFamily="34" charset="-122"/>
+                          <a:cs typeface="Calibri" pitchFamily="34" charset="-120"/>
+                        </a:rPr>
+                        <a:t>32 %</a:t>
+                      </a:r>
+                      <a:endParaRPr lang="en-US" sz="1100" dirty="0">
+                        <a:latin typeface="Calibri" charset="0"/>
+                        <a:ea typeface="Calibri" charset="0"/>
+                        <a:cs typeface="Calibri" charset="0"/>
+                      </a:endParaRPr>
+                    </a:p>
+                  </a:txBody>
+                  <a:tcPr marL="36576" marR="36576" marT="36576" marB="36576" anchor="ctr">
+                    <a:lnL w="9525" cap="flat" cmpd="sng" algn="ctr">
+                      <a:solidFill>
+                        <a:srgbClr val="E1E0D9"/>
+                      </a:solidFill>
+                      <a:prstDash val="solid"/>
+                      <a:round/>
+                      <a:headEnd type="none" w="med" len="med"/>
+                      <a:tailEnd type="none" w="med" len="med"/>
+                    </a:lnL>
+                    <a:lnR w="9525" cap="flat" cmpd="sng" algn="ctr">
+                      <a:solidFill>
+                        <a:srgbClr val="E1E0D9"/>
+                      </a:solidFill>
+                      <a:prstDash val="solid"/>
+                      <a:round/>
+                      <a:headEnd type="none" w="med" len="med"/>
+                      <a:tailEnd type="none" w="med" len="med"/>
+                    </a:lnR>
+                    <a:lnT w="9525" cap="flat" cmpd="sng" algn="ctr">
+                      <a:solidFill>
+                        <a:srgbClr val="E1E0D9"/>
+                      </a:solidFill>
+                      <a:prstDash val="solid"/>
+                      <a:round/>
+                      <a:headEnd type="none" w="med" len="med"/>
+                      <a:tailEnd type="none" w="med" len="med"/>
+                    </a:lnT>
+                    <a:lnB w="9525" cap="flat" cmpd="sng" algn="ctr">
+                      <a:solidFill>
+                        <a:srgbClr val="E1E0D9"/>
+                      </a:solidFill>
+                      <a:prstDash val="solid"/>
+                      <a:round/>
+                      <a:headEnd type="none" w="med" len="med"/>
+                      <a:tailEnd type="none" w="med" len="med"/>
+                    </a:lnB>
+                  </a:tcPr>
+                </a:tc>
+              </a:tr>
+            </a:tbl>
+          </a:graphicData>
+        </a:graphic>
+      </p:graphicFrame>
+      <p:graphicFrame>
+        <p:nvGraphicFramePr>
+          <p:cNvPr id="33" name="distances table"/>
+          <p:cNvGraphicFramePr>
+            <a:graphicFrameLocks noGrp="1"/>
+          </p:cNvGraphicFramePr>
+          <p:nvPr>
+            <p:extLst>
+              <p:ext uri="{D42A27DB-BD31-4B8C-83A1-F6EECF244321}">
+                <p14:modId xmlns:p14="http://schemas.microsoft.com/office/powerpoint/2010/main" val="1579011935"/>
+              </p:ext>
+            </p:extLst>
+          </p:nvPr>
+        </p:nvGraphicFramePr>
+        <p:xfrm>
+          <a:off x="6172200" y="1371600"/>
+          <a:ext cx="5468112" cy="914400"/>
+        </p:xfrm>
+        <a:graphic>
+          <a:graphicData uri="http://schemas.openxmlformats.org/drawingml/2006/table">
+            <a:tbl>
+              <a:tblPr/>
+              <a:tblGrid>
+                <a:gridCol w="2176272"/>
+                <a:gridCol w="1143000"/>
+                <a:gridCol w="1234440"/>
+                <a:gridCol w="914400"/>
+              </a:tblGrid>
+              <a:tr h="310896">
+                <a:tc>
+                  <a:txBody>
+                    <a:bodyPr/>
+                    <a:lstStyle/>
+                    <a:p>
+                      <a:pPr algn="l" indent="0" marL="0">
+                        <a:buNone/>
+                      </a:pPr>
+                      <a:r>
+                        <a:rPr lang="en-US" sz="1100" b="1" dirty="0">
+                          <a:solidFill>
+                            <a:srgbClr val="FFFFFF"/>
+                          </a:solidFill>
+                          <a:latin typeface="Calibri" pitchFamily="34" charset="0"/>
+                          <a:ea typeface="Calibri" pitchFamily="34" charset="-122"/>
+                          <a:cs typeface="Calibri" pitchFamily="34" charset="-120"/>
+                        </a:rPr>
+                        <a:t>Wasserstein-1 (mm)</a:t>
+                      </a:r>
+                      <a:endParaRPr lang="en-US" sz="1100" dirty="0">
+                        <a:latin typeface="Calibri" charset="0"/>
+                        <a:ea typeface="Calibri" charset="0"/>
+                        <a:cs typeface="Calibri" charset="0"/>
+                      </a:endParaRPr>
+                    </a:p>
+                  </a:txBody>
+                  <a:tcPr marL="36576" marR="36576" marT="36576" marB="36576" anchor="ctr">
+                    <a:lnL w="9525" cap="flat" cmpd="sng" algn="ctr">
+                      <a:solidFill>
+                        <a:srgbClr val="E1E0D9"/>
+                      </a:solidFill>
+                      <a:prstDash val="solid"/>
+                      <a:round/>
+                      <a:headEnd type="none" w="med" len="med"/>
+                      <a:tailEnd type="none" w="med" len="med"/>
+                    </a:lnL>
+                    <a:lnR w="9525" cap="flat" cmpd="sng" algn="ctr">
+                      <a:solidFill>
+                        <a:srgbClr val="E1E0D9"/>
+                      </a:solidFill>
+                      <a:prstDash val="solid"/>
+                      <a:round/>
+                      <a:headEnd type="none" w="med" len="med"/>
+                      <a:tailEnd type="none" w="med" len="med"/>
+                    </a:lnR>
+                    <a:lnT w="9525" cap="flat" cmpd="sng" algn="ctr">
+                      <a:solidFill>
+                        <a:srgbClr val="E1E0D9"/>
+                      </a:solidFill>
+                      <a:prstDash val="solid"/>
+                      <a:round/>
+                      <a:headEnd type="none" w="med" len="med"/>
+                      <a:tailEnd type="none" w="med" len="med"/>
+                    </a:lnT>
+                    <a:lnB w="9525" cap="flat" cmpd="sng" algn="ctr">
+                      <a:solidFill>
+                        <a:srgbClr val="E1E0D9"/>
+                      </a:solidFill>
+                      <a:prstDash val="solid"/>
+                      <a:round/>
+                      <a:headEnd type="none" w="med" len="med"/>
+                      <a:tailEnd type="none" w="med" len="med"/>
+                    </a:lnB>
+                    <a:solidFill>
+                      <a:srgbClr val="1F2933"/>
+                    </a:solidFill>
+                  </a:tcPr>
+                </a:tc>
+                <a:tc>
+                  <a:txBody>
+                    <a:bodyPr/>
+                    <a:lstStyle/>
+                    <a:p>
+                      <a:pPr algn="ctr" indent="0" marL="0">
+                        <a:buNone/>
+                      </a:pPr>
+                      <a:r>
+                        <a:rPr lang="en-US" sz="1100" b="1" dirty="0">
+                          <a:solidFill>
+                            <a:srgbClr val="FFFFFF"/>
+                          </a:solidFill>
+                          <a:latin typeface="Calibri" pitchFamily="34" charset="0"/>
+                          <a:ea typeface="Calibri" pitchFamily="34" charset="-122"/>
+                          <a:cs typeface="Calibri" pitchFamily="34" charset="-120"/>
+                        </a:rPr>
+                        <a:t>by length</a:t>
+                      </a:r>
+                      <a:endParaRPr lang="en-US" sz="1100" dirty="0">
+                        <a:latin typeface="Calibri" charset="0"/>
+                        <a:ea typeface="Calibri" charset="0"/>
+                        <a:cs typeface="Calibri" charset="0"/>
+                      </a:endParaRPr>
+                    </a:p>
+                  </a:txBody>
+                  <a:tcPr marL="36576" marR="36576" marT="36576" marB="36576" anchor="ctr">
+                    <a:lnL w="9525" cap="flat" cmpd="sng" algn="ctr">
+                      <a:solidFill>
+                        <a:srgbClr val="E1E0D9"/>
+                      </a:solidFill>
+                      <a:prstDash val="solid"/>
+                      <a:round/>
+                      <a:headEnd type="none" w="med" len="med"/>
+                      <a:tailEnd type="none" w="med" len="med"/>
+                    </a:lnL>
+                    <a:lnR w="9525" cap="flat" cmpd="sng" algn="ctr">
+                      <a:solidFill>
+                        <a:srgbClr val="E1E0D9"/>
+                      </a:solidFill>
+                      <a:prstDash val="solid"/>
+                      <a:round/>
+                      <a:headEnd type="none" w="med" len="med"/>
+                      <a:tailEnd type="none" w="med" len="med"/>
+                    </a:lnR>
+                    <a:lnT w="9525" cap="flat" cmpd="sng" algn="ctr">
+                      <a:solidFill>
+                        <a:srgbClr val="E1E0D9"/>
+                      </a:solidFill>
+                      <a:prstDash val="solid"/>
+                      <a:round/>
+                      <a:headEnd type="none" w="med" len="med"/>
+                      <a:tailEnd type="none" w="med" len="med"/>
+                    </a:lnT>
+                    <a:lnB w="9525" cap="flat" cmpd="sng" algn="ctr">
+                      <a:solidFill>
+                        <a:srgbClr val="E1E0D9"/>
+                      </a:solidFill>
+                      <a:prstDash val="solid"/>
+                      <a:round/>
+                      <a:headEnd type="none" w="med" len="med"/>
+                      <a:tailEnd type="none" w="med" len="med"/>
+                    </a:lnB>
+                    <a:solidFill>
+                      <a:srgbClr val="1F2933"/>
+                    </a:solidFill>
+                  </a:tcPr>
+                </a:tc>
+                <a:tc>
+                  <a:txBody>
+                    <a:bodyPr/>
+                    <a:lstStyle/>
+                    <a:p>
+                      <a:pPr algn="ctr" indent="0" marL="0">
+                        <a:buNone/>
+                      </a:pPr>
+                      <a:r>
+                        <a:rPr lang="en-US" sz="1100" b="1" dirty="0">
+                          <a:solidFill>
+                            <a:srgbClr val="FFFFFF"/>
+                          </a:solidFill>
+                          <a:latin typeface="Calibri" pitchFamily="34" charset="0"/>
+                          <a:ea typeface="Calibri" pitchFamily="34" charset="-122"/>
+                          <a:cs typeface="Calibri" pitchFamily="34" charset="-120"/>
+                        </a:rPr>
+                        <a:t>each pair once</a:t>
+                      </a:r>
+                      <a:endParaRPr lang="en-US" sz="1100" dirty="0">
+                        <a:latin typeface="Calibri" charset="0"/>
+                        <a:ea typeface="Calibri" charset="0"/>
+                        <a:cs typeface="Calibri" charset="0"/>
+                      </a:endParaRPr>
+                    </a:p>
+                  </a:txBody>
+                  <a:tcPr marL="36576" marR="36576" marT="36576" marB="36576" anchor="ctr">
+                    <a:lnL w="9525" cap="flat" cmpd="sng" algn="ctr">
+                      <a:solidFill>
+                        <a:srgbClr val="E1E0D9"/>
+                      </a:solidFill>
+                      <a:prstDash val="solid"/>
+                      <a:round/>
+                      <a:headEnd type="none" w="med" len="med"/>
+                      <a:tailEnd type="none" w="med" len="med"/>
+                    </a:lnL>
+                    <a:lnR w="9525" cap="flat" cmpd="sng" algn="ctr">
+                      <a:solidFill>
+                        <a:srgbClr val="E1E0D9"/>
+                      </a:solidFill>
+                      <a:prstDash val="solid"/>
+                      <a:round/>
+                      <a:headEnd type="none" w="med" len="med"/>
+                      <a:tailEnd type="none" w="med" len="med"/>
+                    </a:lnR>
+                    <a:lnT w="9525" cap="flat" cmpd="sng" algn="ctr">
+                      <a:solidFill>
+                        <a:srgbClr val="E1E0D9"/>
+                      </a:solidFill>
+                      <a:prstDash val="solid"/>
+                      <a:round/>
+                      <a:headEnd type="none" w="med" len="med"/>
+                      <a:tailEnd type="none" w="med" len="med"/>
+                    </a:lnT>
+                    <a:lnB w="9525" cap="flat" cmpd="sng" algn="ctr">
+                      <a:solidFill>
+                        <a:srgbClr val="E1E0D9"/>
+                      </a:solidFill>
+                      <a:prstDash val="solid"/>
+                      <a:round/>
+                      <a:headEnd type="none" w="med" len="med"/>
+                      <a:tailEnd type="none" w="med" len="med"/>
+                    </a:lnB>
+                    <a:solidFill>
+                      <a:srgbClr val="1F2933"/>
+                    </a:solidFill>
+                  </a:tcPr>
+                </a:tc>
+                <a:tc>
+                  <a:txBody>
+                    <a:bodyPr/>
+                    <a:lstStyle/>
+                    <a:p>
+                      <a:pPr algn="ctr" indent="0" marL="0">
+                        <a:buNone/>
+                      </a:pPr>
+                      <a:r>
+                        <a:rPr lang="en-US" sz="1100" b="1" dirty="0">
+                          <a:solidFill>
+                            <a:srgbClr val="FFFFFF"/>
+                          </a:solidFill>
+                          <a:latin typeface="Calibri" pitchFamily="34" charset="0"/>
+                          <a:ea typeface="Calibri" pitchFamily="34" charset="-122"/>
+                          <a:cs typeface="Calibri" pitchFamily="34" charset="-120"/>
+                        </a:rPr>
+                        <a:t>noise floor</a:t>
+                      </a:r>
+                      <a:endParaRPr lang="en-US" sz="1100" dirty="0">
+                        <a:latin typeface="Calibri" charset="0"/>
+                        <a:ea typeface="Calibri" charset="0"/>
+                        <a:cs typeface="Calibri" charset="0"/>
+                      </a:endParaRPr>
+                    </a:p>
+                  </a:txBody>
+                  <a:tcPr marL="36576" marR="36576" marT="36576" marB="36576" anchor="ctr">
+                    <a:lnL w="9525" cap="flat" cmpd="sng" algn="ctr">
+                      <a:solidFill>
+                        <a:srgbClr val="E1E0D9"/>
+                      </a:solidFill>
+                      <a:prstDash val="solid"/>
+                      <a:round/>
+                      <a:headEnd type="none" w="med" len="med"/>
+                      <a:tailEnd type="none" w="med" len="med"/>
+                    </a:lnL>
+                    <a:lnR w="9525" cap="flat" cmpd="sng" algn="ctr">
+                      <a:solidFill>
+                        <a:srgbClr val="E1E0D9"/>
+                      </a:solidFill>
+                      <a:prstDash val="solid"/>
+                      <a:round/>
+                      <a:headEnd type="none" w="med" len="med"/>
+                      <a:tailEnd type="none" w="med" len="med"/>
+                    </a:lnR>
+                    <a:lnT w="9525" cap="flat" cmpd="sng" algn="ctr">
+                      <a:solidFill>
+                        <a:srgbClr val="E1E0D9"/>
+                      </a:solidFill>
+                      <a:prstDash val="solid"/>
+                      <a:round/>
+                      <a:headEnd type="none" w="med" len="med"/>
+                      <a:tailEnd type="none" w="med" len="med"/>
+                    </a:lnT>
+                    <a:lnB w="9525" cap="flat" cmpd="sng" algn="ctr">
+                      <a:solidFill>
+                        <a:srgbClr val="E1E0D9"/>
+                      </a:solidFill>
+                      <a:prstDash val="solid"/>
+                      <a:round/>
+                      <a:headEnd type="none" w="med" len="med"/>
+                      <a:tailEnd type="none" w="med" len="med"/>
+                    </a:lnB>
+                    <a:solidFill>
+                      <a:srgbClr val="1F2933"/>
+                    </a:solidFill>
+                  </a:tcPr>
+                </a:tc>
+              </a:tr>
+              <a:tr h="310896">
+                <a:tc>
+                  <a:txBody>
+                    <a:bodyPr/>
+                    <a:lstStyle/>
+                    <a:p>
+                      <a:pPr algn="l" indent="0" marL="0">
+                        <a:buNone/>
+                      </a:pPr>
+                      <a:r>
+                        <a:rPr lang="en-US" sz="1100" dirty="0">
+                          <a:solidFill>
+                            <a:srgbClr val="0B0B0B"/>
+                          </a:solidFill>
+                          <a:latin typeface="Calibri" pitchFamily="34" charset="0"/>
+                          <a:ea typeface="Calibri" pitchFamily="34" charset="-122"/>
+                          <a:cs typeface="Calibri" pitchFamily="34" charset="-120"/>
+                        </a:rPr>
+                        <a:t>generated ↔ Clinic</a:t>
+                      </a:r>
+                      <a:endParaRPr lang="en-US" sz="1100" dirty="0">
+                        <a:latin typeface="Calibri" charset="0"/>
+                        <a:ea typeface="Calibri" charset="0"/>
+                        <a:cs typeface="Calibri" charset="0"/>
+                      </a:endParaRPr>
+                    </a:p>
+                  </a:txBody>
+                  <a:tcPr marL="36576" marR="36576" marT="36576" marB="36576" anchor="ctr">
+                    <a:lnL w="9525" cap="flat" cmpd="sng" algn="ctr">
+                      <a:solidFill>
+                        <a:srgbClr val="E1E0D9"/>
+                      </a:solidFill>
+                      <a:prstDash val="solid"/>
+                      <a:round/>
+                      <a:headEnd type="none" w="med" len="med"/>
+                      <a:tailEnd type="none" w="med" len="med"/>
+                    </a:lnL>
+                    <a:lnR w="9525" cap="flat" cmpd="sng" algn="ctr">
+                      <a:solidFill>
+                        <a:srgbClr val="E1E0D9"/>
+                      </a:solidFill>
+                      <a:prstDash val="solid"/>
+                      <a:round/>
+                      <a:headEnd type="none" w="med" len="med"/>
+                      <a:tailEnd type="none" w="med" len="med"/>
+                    </a:lnR>
+                    <a:lnT w="9525" cap="flat" cmpd="sng" algn="ctr">
+                      <a:solidFill>
+                        <a:srgbClr val="E1E0D9"/>
+                      </a:solidFill>
+                      <a:prstDash val="solid"/>
+                      <a:round/>
+                      <a:headEnd type="none" w="med" len="med"/>
+                      <a:tailEnd type="none" w="med" len="med"/>
+                    </a:lnT>
+                    <a:lnB w="9525" cap="flat" cmpd="sng" algn="ctr">
+                      <a:solidFill>
+                        <a:srgbClr val="E1E0D9"/>
+                      </a:solidFill>
+                      <a:prstDash val="solid"/>
+                      <a:round/>
+                      <a:headEnd type="none" w="med" len="med"/>
+                      <a:tailEnd type="none" w="med" len="med"/>
+                    </a:lnB>
+                  </a:tcPr>
+                </a:tc>
+                <a:tc>
+                  <a:txBody>
+                    <a:bodyPr/>
+                    <a:lstStyle/>
+                    <a:p>
+                      <a:pPr algn="ctr" indent="0" marL="0">
+                        <a:buNone/>
+                      </a:pPr>
+                      <a:r>
+                        <a:rPr lang="en-US" sz="1100" dirty="0">
+                          <a:solidFill>
+                            <a:srgbClr val="0B0B0B"/>
+                          </a:solidFill>
+                          <a:latin typeface="Calibri" pitchFamily="34" charset="0"/>
+                          <a:ea typeface="Calibri" pitchFamily="34" charset="-122"/>
+                          <a:cs typeface="Calibri" pitchFamily="34" charset="-120"/>
+                        </a:rPr>
+                        <a:t>28 (16–44)</a:t>
+                      </a:r>
+                      <a:endParaRPr lang="en-US" sz="1100" dirty="0">
+                        <a:latin typeface="Calibri" charset="0"/>
+                        <a:ea typeface="Calibri" charset="0"/>
+                        <a:cs typeface="Calibri" charset="0"/>
+                      </a:endParaRPr>
+                    </a:p>
+                  </a:txBody>
+                  <a:tcPr marL="36576" marR="36576" marT="36576" marB="36576" anchor="ctr">
+                    <a:lnL w="9525" cap="flat" cmpd="sng" algn="ctr">
+                      <a:solidFill>
+                        <a:srgbClr val="E1E0D9"/>
+                      </a:solidFill>
+                      <a:prstDash val="solid"/>
+                      <a:round/>
+                      <a:headEnd type="none" w="med" len="med"/>
+                      <a:tailEnd type="none" w="med" len="med"/>
+                    </a:lnL>
+                    <a:lnR w="9525" cap="flat" cmpd="sng" algn="ctr">
+                      <a:solidFill>
+                        <a:srgbClr val="E1E0D9"/>
+                      </a:solidFill>
+                      <a:prstDash val="solid"/>
+                      <a:round/>
+                      <a:headEnd type="none" w="med" len="med"/>
+                      <a:tailEnd type="none" w="med" len="med"/>
+                    </a:lnR>
+                    <a:lnT w="9525" cap="flat" cmpd="sng" algn="ctr">
+                      <a:solidFill>
+                        <a:srgbClr val="E1E0D9"/>
+                      </a:solidFill>
+                      <a:prstDash val="solid"/>
+                      <a:round/>
+                      <a:headEnd type="none" w="med" len="med"/>
+                      <a:tailEnd type="none" w="med" len="med"/>
+                    </a:lnT>
+                    <a:lnB w="9525" cap="flat" cmpd="sng" algn="ctr">
+                      <a:solidFill>
+                        <a:srgbClr val="E1E0D9"/>
+                      </a:solidFill>
+                      <a:prstDash val="solid"/>
+                      <a:round/>
+                      <a:headEnd type="none" w="med" len="med"/>
+                      <a:tailEnd type="none" w="med" len="med"/>
+                    </a:lnB>
+                  </a:tcPr>
+                </a:tc>
+                <a:tc>
+                  <a:txBody>
+                    <a:bodyPr/>
+                    <a:lstStyle/>
+                    <a:p>
+                      <a:pPr algn="ctr" indent="0" marL="0">
+                        <a:buNone/>
+                      </a:pPr>
+                      <a:r>
+                        <a:rPr lang="en-US" sz="1100" dirty="0">
+                          <a:solidFill>
+                            <a:srgbClr val="0B0B0B"/>
+                          </a:solidFill>
+                          <a:latin typeface="Calibri" pitchFamily="34" charset="0"/>
+                          <a:ea typeface="Calibri" pitchFamily="34" charset="-122"/>
+                          <a:cs typeface="Calibri" pitchFamily="34" charset="-120"/>
+                        </a:rPr>
+                        <a:t>15 (11–24)</a:t>
+                      </a:r>
+                      <a:endParaRPr lang="en-US" sz="1100" dirty="0">
+                        <a:latin typeface="Calibri" charset="0"/>
+                        <a:ea typeface="Calibri" charset="0"/>
+                        <a:cs typeface="Calibri" charset="0"/>
+                      </a:endParaRPr>
+                    </a:p>
+                  </a:txBody>
+                  <a:tcPr marL="36576" marR="36576" marT="36576" marB="36576" anchor="ctr">
+                    <a:lnL w="9525" cap="flat" cmpd="sng" algn="ctr">
+                      <a:solidFill>
+                        <a:srgbClr val="E1E0D9"/>
+                      </a:solidFill>
+                      <a:prstDash val="solid"/>
+                      <a:round/>
+                      <a:headEnd type="none" w="med" len="med"/>
+                      <a:tailEnd type="none" w="med" len="med"/>
+                    </a:lnL>
+                    <a:lnR w="9525" cap="flat" cmpd="sng" algn="ctr">
+                      <a:solidFill>
+                        <a:srgbClr val="E1E0D9"/>
+                      </a:solidFill>
+                      <a:prstDash val="solid"/>
+                      <a:round/>
+                      <a:headEnd type="none" w="med" len="med"/>
+                      <a:tailEnd type="none" w="med" len="med"/>
+                    </a:lnR>
+                    <a:lnT w="9525" cap="flat" cmpd="sng" algn="ctr">
+                      <a:solidFill>
+                        <a:srgbClr val="E1E0D9"/>
+                      </a:solidFill>
+                      <a:prstDash val="solid"/>
+                      <a:round/>
+                      <a:headEnd type="none" w="med" len="med"/>
+                      <a:tailEnd type="none" w="med" len="med"/>
+                    </a:lnT>
+                    <a:lnB w="9525" cap="flat" cmpd="sng" algn="ctr">
+                      <a:solidFill>
+                        <a:srgbClr val="E1E0D9"/>
+                      </a:solidFill>
+                      <a:prstDash val="solid"/>
+                      <a:round/>
+                      <a:headEnd type="none" w="med" len="med"/>
+                      <a:tailEnd type="none" w="med" len="med"/>
+                    </a:lnB>
+                  </a:tcPr>
+                </a:tc>
+                <a:tc>
+                  <a:txBody>
+                    <a:bodyPr/>
+                    <a:lstStyle/>
+                    <a:p>
+                      <a:pPr algn="ctr" indent="0" marL="0">
+                        <a:buNone/>
+                      </a:pPr>
+                      <a:r>
+                        <a:rPr lang="en-US" sz="1100" dirty="0">
+                          <a:solidFill>
+                            <a:srgbClr val="0B0B0B"/>
+                          </a:solidFill>
+                          <a:latin typeface="Calibri" pitchFamily="34" charset="0"/>
+                          <a:ea typeface="Calibri" pitchFamily="34" charset="-122"/>
+                          <a:cs typeface="Calibri" pitchFamily="34" charset="-120"/>
+                        </a:rPr>
+                        <a:t>8</a:t>
+                      </a:r>
+                      <a:endParaRPr lang="en-US" sz="1100" dirty="0">
+                        <a:latin typeface="Calibri" charset="0"/>
+                        <a:ea typeface="Calibri" charset="0"/>
+                        <a:cs typeface="Calibri" charset="0"/>
+                      </a:endParaRPr>
+                    </a:p>
+                  </a:txBody>
+                  <a:tcPr marL="36576" marR="36576" marT="36576" marB="36576" anchor="ctr">
+                    <a:lnL w="9525" cap="flat" cmpd="sng" algn="ctr">
+                      <a:solidFill>
+                        <a:srgbClr val="E1E0D9"/>
+                      </a:solidFill>
+                      <a:prstDash val="solid"/>
+                      <a:round/>
+                      <a:headEnd type="none" w="med" len="med"/>
+                      <a:tailEnd type="none" w="med" len="med"/>
+                    </a:lnL>
+                    <a:lnR w="9525" cap="flat" cmpd="sng" algn="ctr">
+                      <a:solidFill>
+                        <a:srgbClr val="E1E0D9"/>
+                      </a:solidFill>
+                      <a:prstDash val="solid"/>
+                      <a:round/>
+                      <a:headEnd type="none" w="med" len="med"/>
+                      <a:tailEnd type="none" w="med" len="med"/>
+                    </a:lnR>
+                    <a:lnT w="9525" cap="flat" cmpd="sng" algn="ctr">
+                      <a:solidFill>
+                        <a:srgbClr val="E1E0D9"/>
+                      </a:solidFill>
+                      <a:prstDash val="solid"/>
+                      <a:round/>
+                      <a:headEnd type="none" w="med" len="med"/>
+                      <a:tailEnd type="none" w="med" len="med"/>
+                    </a:lnT>
+                    <a:lnB w="9525" cap="flat" cmpd="sng" algn="ctr">
+                      <a:solidFill>
+                        <a:srgbClr val="E1E0D9"/>
+                      </a:solidFill>
+                      <a:prstDash val="solid"/>
+                      <a:round/>
+                      <a:headEnd type="none" w="med" len="med"/>
+                      <a:tailEnd type="none" w="med" len="med"/>
+                    </a:lnB>
+                  </a:tcPr>
+                </a:tc>
+              </a:tr>
+              <a:tr h="310896">
+                <a:tc>
+                  <a:txBody>
+                    <a:bodyPr/>
+                    <a:lstStyle/>
+                    <a:p>
+                      <a:pPr algn="l" indent="0" marL="0">
+                        <a:buNone/>
+                      </a:pPr>
+                      <a:r>
+                        <a:rPr lang="en-US" sz="1100" dirty="0">
+                          <a:solidFill>
+                            <a:srgbClr val="0B0B0B"/>
+                          </a:solidFill>
+                          <a:latin typeface="Calibri" pitchFamily="34" charset="0"/>
+                          <a:ea typeface="Calibri" pitchFamily="34" charset="-122"/>
+                          <a:cs typeface="Calibri" pitchFamily="34" charset="-120"/>
+                        </a:rPr>
+                        <a:t>generated ↔ Duplex MEP</a:t>
+                      </a:r>
+                      <a:endParaRPr lang="en-US" sz="1100" dirty="0">
+                        <a:latin typeface="Calibri" charset="0"/>
+                        <a:ea typeface="Calibri" charset="0"/>
+                        <a:cs typeface="Calibri" charset="0"/>
+                      </a:endParaRPr>
+                    </a:p>
+                  </a:txBody>
+                  <a:tcPr marL="36576" marR="36576" marT="36576" marB="36576" anchor="ctr">
+                    <a:lnL w="9525" cap="flat" cmpd="sng" algn="ctr">
+                      <a:solidFill>
+                        <a:srgbClr val="E1E0D9"/>
+                      </a:solidFill>
+                      <a:prstDash val="solid"/>
+                      <a:round/>
+                      <a:headEnd type="none" w="med" len="med"/>
+                      <a:tailEnd type="none" w="med" len="med"/>
+                    </a:lnL>
+                    <a:lnR w="9525" cap="flat" cmpd="sng" algn="ctr">
+                      <a:solidFill>
+                        <a:srgbClr val="E1E0D9"/>
+                      </a:solidFill>
+                      <a:prstDash val="solid"/>
+                      <a:round/>
+                      <a:headEnd type="none" w="med" len="med"/>
+                      <a:tailEnd type="none" w="med" len="med"/>
+                    </a:lnR>
+                    <a:lnT w="9525" cap="flat" cmpd="sng" algn="ctr">
+                      <a:solidFill>
+                        <a:srgbClr val="E1E0D9"/>
+                      </a:solidFill>
+                      <a:prstDash val="solid"/>
+                      <a:round/>
+                      <a:headEnd type="none" w="med" len="med"/>
+                      <a:tailEnd type="none" w="med" len="med"/>
+                    </a:lnT>
+                    <a:lnB w="9525" cap="flat" cmpd="sng" algn="ctr">
+                      <a:solidFill>
+                        <a:srgbClr val="E1E0D9"/>
+                      </a:solidFill>
+                      <a:prstDash val="solid"/>
+                      <a:round/>
+                      <a:headEnd type="none" w="med" len="med"/>
+                      <a:tailEnd type="none" w="med" len="med"/>
+                    </a:lnB>
+                  </a:tcPr>
+                </a:tc>
+                <a:tc>
+                  <a:txBody>
+                    <a:bodyPr/>
+                    <a:lstStyle/>
+                    <a:p>
+                      <a:pPr algn="ctr" indent="0" marL="0">
+                        <a:buNone/>
+                      </a:pPr>
+                      <a:r>
+                        <a:rPr lang="en-US" sz="1100" dirty="0">
+                          <a:solidFill>
+                            <a:srgbClr val="0B0B0B"/>
+                          </a:solidFill>
+                          <a:latin typeface="Calibri" pitchFamily="34" charset="0"/>
+                          <a:ea typeface="Calibri" pitchFamily="34" charset="-122"/>
+                          <a:cs typeface="Calibri" pitchFamily="34" charset="-120"/>
+                        </a:rPr>
+                        <a:t>70 (57–99)</a:t>
+                      </a:r>
+                      <a:endParaRPr lang="en-US" sz="1100" dirty="0">
+                        <a:latin typeface="Calibri" charset="0"/>
+                        <a:ea typeface="Calibri" charset="0"/>
+                        <a:cs typeface="Calibri" charset="0"/>
+                      </a:endParaRPr>
+                    </a:p>
+                  </a:txBody>
+                  <a:tcPr marL="36576" marR="36576" marT="36576" marB="36576" anchor="ctr">
+                    <a:lnL w="9525" cap="flat" cmpd="sng" algn="ctr">
+                      <a:solidFill>
+                        <a:srgbClr val="E1E0D9"/>
+                      </a:solidFill>
+                      <a:prstDash val="solid"/>
+                      <a:round/>
+                      <a:headEnd type="none" w="med" len="med"/>
+                      <a:tailEnd type="none" w="med" len="med"/>
+                    </a:lnL>
+                    <a:lnR w="9525" cap="flat" cmpd="sng" algn="ctr">
+                      <a:solidFill>
+                        <a:srgbClr val="E1E0D9"/>
+                      </a:solidFill>
+                      <a:prstDash val="solid"/>
+                      <a:round/>
+                      <a:headEnd type="none" w="med" len="med"/>
+                      <a:tailEnd type="none" w="med" len="med"/>
+                    </a:lnR>
+                    <a:lnT w="9525" cap="flat" cmpd="sng" algn="ctr">
+                      <a:solidFill>
+                        <a:srgbClr val="E1E0D9"/>
+                      </a:solidFill>
+                      <a:prstDash val="solid"/>
+                      <a:round/>
+                      <a:headEnd type="none" w="med" len="med"/>
+                      <a:tailEnd type="none" w="med" len="med"/>
+                    </a:lnT>
+                    <a:lnB w="9525" cap="flat" cmpd="sng" algn="ctr">
+                      <a:solidFill>
+                        <a:srgbClr val="E1E0D9"/>
+                      </a:solidFill>
+                      <a:prstDash val="solid"/>
+                      <a:round/>
+                      <a:headEnd type="none" w="med" len="med"/>
+                      <a:tailEnd type="none" w="med" len="med"/>
+                    </a:lnB>
+                  </a:tcPr>
+                </a:tc>
+                <a:tc>
+                  <a:txBody>
+                    <a:bodyPr/>
+                    <a:lstStyle/>
+                    <a:p>
+                      <a:pPr algn="ctr" indent="0" marL="0">
+                        <a:buNone/>
+                      </a:pPr>
+                      <a:r>
+                        <a:rPr lang="en-US" sz="1100" dirty="0">
+                          <a:solidFill>
+                            <a:srgbClr val="0B0B0B"/>
+                          </a:solidFill>
+                          <a:latin typeface="Calibri" pitchFamily="34" charset="0"/>
+                          <a:ea typeface="Calibri" pitchFamily="34" charset="-122"/>
+                          <a:cs typeface="Calibri" pitchFamily="34" charset="-120"/>
+                        </a:rPr>
+                        <a:t>94 (74–119)</a:t>
+                      </a:r>
+                      <a:endParaRPr lang="en-US" sz="1100" dirty="0">
+                        <a:latin typeface="Calibri" charset="0"/>
+                        <a:ea typeface="Calibri" charset="0"/>
+                        <a:cs typeface="Calibri" charset="0"/>
+                      </a:endParaRPr>
+                    </a:p>
+                  </a:txBody>
+                  <a:tcPr marL="36576" marR="36576" marT="36576" marB="36576" anchor="ctr">
+                    <a:lnL w="9525" cap="flat" cmpd="sng" algn="ctr">
+                      <a:solidFill>
+                        <a:srgbClr val="E1E0D9"/>
+                      </a:solidFill>
+                      <a:prstDash val="solid"/>
+                      <a:round/>
+                      <a:headEnd type="none" w="med" len="med"/>
+                      <a:tailEnd type="none" w="med" len="med"/>
+                    </a:lnL>
+                    <a:lnR w="9525" cap="flat" cmpd="sng" algn="ctr">
+                      <a:solidFill>
+                        <a:srgbClr val="E1E0D9"/>
+                      </a:solidFill>
+                      <a:prstDash val="solid"/>
+                      <a:round/>
+                      <a:headEnd type="none" w="med" len="med"/>
+                      <a:tailEnd type="none" w="med" len="med"/>
+                    </a:lnR>
+                    <a:lnT w="9525" cap="flat" cmpd="sng" algn="ctr">
+                      <a:solidFill>
+                        <a:srgbClr val="E1E0D9"/>
+                      </a:solidFill>
+                      <a:prstDash val="solid"/>
+                      <a:round/>
+                      <a:headEnd type="none" w="med" len="med"/>
+                      <a:tailEnd type="none" w="med" len="med"/>
+                    </a:lnT>
+                    <a:lnB w="9525" cap="flat" cmpd="sng" algn="ctr">
+                      <a:solidFill>
+                        <a:srgbClr val="E1E0D9"/>
+                      </a:solidFill>
+                      <a:prstDash val="solid"/>
+                      <a:round/>
+                      <a:headEnd type="none" w="med" len="med"/>
+                      <a:tailEnd type="none" w="med" len="med"/>
+                    </a:lnB>
+                  </a:tcPr>
+                </a:tc>
+                <a:tc>
+                  <a:txBody>
+                    <a:bodyPr/>
+                    <a:lstStyle/>
+                    <a:p>
+                      <a:pPr algn="ctr" indent="0" marL="0">
+                        <a:buNone/>
+                      </a:pPr>
+                      <a:r>
+                        <a:rPr lang="en-US" sz="1100" dirty="0">
+                          <a:solidFill>
+                            <a:srgbClr val="0B0B0B"/>
+                          </a:solidFill>
+                          <a:latin typeface="Calibri" pitchFamily="34" charset="0"/>
+                          <a:ea typeface="Calibri" pitchFamily="34" charset="-122"/>
+                          <a:cs typeface="Calibri" pitchFamily="34" charset="-120"/>
+                        </a:rPr>
+                        <a:t>25</a:t>
+                      </a:r>
+                      <a:endParaRPr lang="en-US" sz="1100" dirty="0">
+                        <a:latin typeface="Calibri" charset="0"/>
+                        <a:ea typeface="Calibri" charset="0"/>
+                        <a:cs typeface="Calibri" charset="0"/>
+                      </a:endParaRPr>
+                    </a:p>
+                  </a:txBody>
+                  <a:tcPr marL="36576" marR="36576" marT="36576" marB="36576" anchor="ctr">
+                    <a:lnL w="9525" cap="flat" cmpd="sng" algn="ctr">
+                      <a:solidFill>
+                        <a:srgbClr val="E1E0D9"/>
+                      </a:solidFill>
+                      <a:prstDash val="solid"/>
+                      <a:round/>
+                      <a:headEnd type="none" w="med" len="med"/>
+                      <a:tailEnd type="none" w="med" len="med"/>
+                    </a:lnL>
+                    <a:lnR w="9525" cap="flat" cmpd="sng" algn="ctr">
+                      <a:solidFill>
+                        <a:srgbClr val="E1E0D9"/>
+                      </a:solidFill>
+                      <a:prstDash val="solid"/>
+                      <a:round/>
+                      <a:headEnd type="none" w="med" len="med"/>
+                      <a:tailEnd type="none" w="med" len="med"/>
+                    </a:lnR>
+                    <a:lnT w="9525" cap="flat" cmpd="sng" algn="ctr">
+                      <a:solidFill>
+                        <a:srgbClr val="E1E0D9"/>
+                      </a:solidFill>
+                      <a:prstDash val="solid"/>
+                      <a:round/>
+                      <a:headEnd type="none" w="med" len="med"/>
+                      <a:tailEnd type="none" w="med" len="med"/>
+                    </a:lnT>
+                    <a:lnB w="9525" cap="flat" cmpd="sng" algn="ctr">
+                      <a:solidFill>
+                        <a:srgbClr val="E1E0D9"/>
+                      </a:solidFill>
+                      <a:prstDash val="solid"/>
+                      <a:round/>
+                      <a:headEnd type="none" w="med" len="med"/>
+                      <a:tailEnd type="none" w="med" len="med"/>
+                    </a:lnB>
+                  </a:tcPr>
+                </a:tc>
+              </a:tr>
+              <a:tr h="310896">
+                <a:tc>
+                  <a:txBody>
+                    <a:bodyPr/>
+                    <a:lstStyle/>
+                    <a:p>
+                      <a:pPr algn="l" indent="0" marL="0">
+                        <a:buNone/>
+                      </a:pPr>
+                      <a:r>
+                        <a:rPr lang="en-US" sz="1100" dirty="0">
+                          <a:solidFill>
+                            <a:srgbClr val="0B0B0B"/>
+                          </a:solidFill>
+                          <a:latin typeface="Calibri" pitchFamily="34" charset="0"/>
+                          <a:ea typeface="Calibri" pitchFamily="34" charset="-122"/>
+                          <a:cs typeface="Calibri" pitchFamily="34" charset="-120"/>
+                        </a:rPr>
+                        <a:t>generated ↔ Duplex Plumbing</a:t>
+                      </a:r>
+                      <a:endParaRPr lang="en-US" sz="1100" dirty="0">
+                        <a:latin typeface="Calibri" charset="0"/>
+                        <a:ea typeface="Calibri" charset="0"/>
+                        <a:cs typeface="Calibri" charset="0"/>
+                      </a:endParaRPr>
+                    </a:p>
+                  </a:txBody>
+                  <a:tcPr marL="36576" marR="36576" marT="36576" marB="36576" anchor="ctr">
+                    <a:lnL w="9525" cap="flat" cmpd="sng" algn="ctr">
+                      <a:solidFill>
+                        <a:srgbClr val="E1E0D9"/>
+                      </a:solidFill>
+                      <a:prstDash val="solid"/>
+                      <a:round/>
+                      <a:headEnd type="none" w="med" len="med"/>
+                      <a:tailEnd type="none" w="med" len="med"/>
+                    </a:lnL>
+                    <a:lnR w="9525" cap="flat" cmpd="sng" algn="ctr">
+                      <a:solidFill>
+                        <a:srgbClr val="E1E0D9"/>
+                      </a:solidFill>
+                      <a:prstDash val="solid"/>
+                      <a:round/>
+                      <a:headEnd type="none" w="med" len="med"/>
+                      <a:tailEnd type="none" w="med" len="med"/>
+                    </a:lnR>
+                    <a:lnT w="9525" cap="flat" cmpd="sng" algn="ctr">
+                      <a:solidFill>
+                        <a:srgbClr val="E1E0D9"/>
+                      </a:solidFill>
+                      <a:prstDash val="solid"/>
+                      <a:round/>
+                      <a:headEnd type="none" w="med" len="med"/>
+                      <a:tailEnd type="none" w="med" len="med"/>
+                    </a:lnT>
+                    <a:lnB w="9525" cap="flat" cmpd="sng" algn="ctr">
+                      <a:solidFill>
+                        <a:srgbClr val="E1E0D9"/>
+                      </a:solidFill>
+                      <a:prstDash val="solid"/>
+                      <a:round/>
+                      <a:headEnd type="none" w="med" len="med"/>
+                      <a:tailEnd type="none" w="med" len="med"/>
+                    </a:lnB>
+                  </a:tcPr>
+                </a:tc>
+                <a:tc>
+                  <a:txBody>
+                    <a:bodyPr/>
+                    <a:lstStyle/>
+                    <a:p>
+                      <a:pPr algn="ctr" indent="0" marL="0">
+                        <a:buNone/>
+                      </a:pPr>
+                      <a:r>
+                        <a:rPr lang="en-US" sz="1100" dirty="0">
+                          <a:solidFill>
+                            <a:srgbClr val="0B0B0B"/>
+                          </a:solidFill>
+                          <a:latin typeface="Calibri" pitchFamily="34" charset="0"/>
+                          <a:ea typeface="Calibri" pitchFamily="34" charset="-122"/>
+                          <a:cs typeface="Calibri" pitchFamily="34" charset="-120"/>
+                        </a:rPr>
+                        <a:t>85 (59–132)</a:t>
+                      </a:r>
+                      <a:endParaRPr lang="en-US" sz="1100" dirty="0">
+                        <a:latin typeface="Calibri" charset="0"/>
+                        <a:ea typeface="Calibri" charset="0"/>
+                        <a:cs typeface="Calibri" charset="0"/>
+                      </a:endParaRPr>
+                    </a:p>
+                  </a:txBody>
+                  <a:tcPr marL="36576" marR="36576" marT="36576" marB="36576" anchor="ctr">
+                    <a:lnL w="9525" cap="flat" cmpd="sng" algn="ctr">
+                      <a:solidFill>
+                        <a:srgbClr val="E1E0D9"/>
+                      </a:solidFill>
+                      <a:prstDash val="solid"/>
+                      <a:round/>
+                      <a:headEnd type="none" w="med" len="med"/>
+                      <a:tailEnd type="none" w="med" len="med"/>
+                    </a:lnL>
+                    <a:lnR w="9525" cap="flat" cmpd="sng" algn="ctr">
+                      <a:solidFill>
+                        <a:srgbClr val="E1E0D9"/>
+                      </a:solidFill>
+                      <a:prstDash val="solid"/>
+                      <a:round/>
+                      <a:headEnd type="none" w="med" len="med"/>
+                      <a:tailEnd type="none" w="med" len="med"/>
+                    </a:lnR>
+                    <a:lnT w="9525" cap="flat" cmpd="sng" algn="ctr">
+                      <a:solidFill>
+                        <a:srgbClr val="E1E0D9"/>
+                      </a:solidFill>
+                      <a:prstDash val="solid"/>
+                      <a:round/>
+                      <a:headEnd type="none" w="med" len="med"/>
+                      <a:tailEnd type="none" w="med" len="med"/>
+                    </a:lnT>
+                    <a:lnB w="9525" cap="flat" cmpd="sng" algn="ctr">
+                      <a:solidFill>
+                        <a:srgbClr val="E1E0D9"/>
+                      </a:solidFill>
+                      <a:prstDash val="solid"/>
+                      <a:round/>
+                      <a:headEnd type="none" w="med" len="med"/>
+                      <a:tailEnd type="none" w="med" len="med"/>
+                    </a:lnB>
+                  </a:tcPr>
+                </a:tc>
+                <a:tc>
+                  <a:txBody>
+                    <a:bodyPr/>
+                    <a:lstStyle/>
+                    <a:p>
+                      <a:pPr algn="ctr" indent="0" marL="0">
+                        <a:buNone/>
+                      </a:pPr>
+                      <a:r>
+                        <a:rPr lang="en-US" sz="1100" dirty="0">
+                          <a:solidFill>
+                            <a:srgbClr val="0B0B0B"/>
+                          </a:solidFill>
+                          <a:latin typeface="Calibri" pitchFamily="34" charset="0"/>
+                          <a:ea typeface="Calibri" pitchFamily="34" charset="-122"/>
+                          <a:cs typeface="Calibri" pitchFamily="34" charset="-120"/>
+                        </a:rPr>
+                        <a:t>100 (85–125)</a:t>
+                      </a:r>
+                      <a:endParaRPr lang="en-US" sz="1100" dirty="0">
+                        <a:latin typeface="Calibri" charset="0"/>
+                        <a:ea typeface="Calibri" charset="0"/>
+                        <a:cs typeface="Calibri" charset="0"/>
+                      </a:endParaRPr>
+                    </a:p>
+                  </a:txBody>
+                  <a:tcPr marL="36576" marR="36576" marT="36576" marB="36576" anchor="ctr">
+                    <a:lnL w="9525" cap="flat" cmpd="sng" algn="ctr">
+                      <a:solidFill>
+                        <a:srgbClr val="E1E0D9"/>
+                      </a:solidFill>
+                      <a:prstDash val="solid"/>
+                      <a:round/>
+                      <a:headEnd type="none" w="med" len="med"/>
+                      <a:tailEnd type="none" w="med" len="med"/>
+                    </a:lnL>
+                    <a:lnR w="9525" cap="flat" cmpd="sng" algn="ctr">
+                      <a:solidFill>
+                        <a:srgbClr val="E1E0D9"/>
+                      </a:solidFill>
+                      <a:prstDash val="solid"/>
+                      <a:round/>
+                      <a:headEnd type="none" w="med" len="med"/>
+                      <a:tailEnd type="none" w="med" len="med"/>
+                    </a:lnR>
+                    <a:lnT w="9525" cap="flat" cmpd="sng" algn="ctr">
+                      <a:solidFill>
+                        <a:srgbClr val="E1E0D9"/>
+                      </a:solidFill>
+                      <a:prstDash val="solid"/>
+                      <a:round/>
+                      <a:headEnd type="none" w="med" len="med"/>
+                      <a:tailEnd type="none" w="med" len="med"/>
+                    </a:lnT>
+                    <a:lnB w="9525" cap="flat" cmpd="sng" algn="ctr">
+                      <a:solidFill>
+                        <a:srgbClr val="E1E0D9"/>
+                      </a:solidFill>
+                      <a:prstDash val="solid"/>
+                      <a:round/>
+                      <a:headEnd type="none" w="med" len="med"/>
+                      <a:tailEnd type="none" w="med" len="med"/>
+                    </a:lnB>
+                  </a:tcPr>
+                </a:tc>
+                <a:tc>
+                  <a:txBody>
+                    <a:bodyPr/>
+                    <a:lstStyle/>
+                    <a:p>
+                      <a:pPr algn="ctr" indent="0" marL="0">
+                        <a:buNone/>
+                      </a:pPr>
+                      <a:r>
+                        <a:rPr lang="en-US" sz="1100" dirty="0">
+                          <a:solidFill>
+                            <a:srgbClr val="0B0B0B"/>
+                          </a:solidFill>
+                          <a:latin typeface="Calibri" pitchFamily="34" charset="0"/>
+                          <a:ea typeface="Calibri" pitchFamily="34" charset="-122"/>
+                          <a:cs typeface="Calibri" pitchFamily="34" charset="-120"/>
+                        </a:rPr>
+                        <a:t>34</a:t>
+                      </a:r>
+                      <a:endParaRPr lang="en-US" sz="1100" dirty="0">
+                        <a:latin typeface="Calibri" charset="0"/>
+                        <a:ea typeface="Calibri" charset="0"/>
+                        <a:cs typeface="Calibri" charset="0"/>
+                      </a:endParaRPr>
+                    </a:p>
+                  </a:txBody>
+                  <a:tcPr marL="36576" marR="36576" marT="36576" marB="36576" anchor="ctr">
+                    <a:lnL w="9525" cap="flat" cmpd="sng" algn="ctr">
+                      <a:solidFill>
+                        <a:srgbClr val="E1E0D9"/>
+                      </a:solidFill>
+                      <a:prstDash val="solid"/>
+                      <a:round/>
+                      <a:headEnd type="none" w="med" len="med"/>
+                      <a:tailEnd type="none" w="med" len="med"/>
+                    </a:lnL>
+                    <a:lnR w="9525" cap="flat" cmpd="sng" algn="ctr">
+                      <a:solidFill>
+                        <a:srgbClr val="E1E0D9"/>
+                      </a:solidFill>
+                      <a:prstDash val="solid"/>
+                      <a:round/>
+                      <a:headEnd type="none" w="med" len="med"/>
+                      <a:tailEnd type="none" w="med" len="med"/>
+                    </a:lnR>
+                    <a:lnT w="9525" cap="flat" cmpd="sng" algn="ctr">
+                      <a:solidFill>
+                        <a:srgbClr val="E1E0D9"/>
+                      </a:solidFill>
+                      <a:prstDash val="solid"/>
+                      <a:round/>
+                      <a:headEnd type="none" w="med" len="med"/>
+                      <a:tailEnd type="none" w="med" len="med"/>
+                    </a:lnT>
+                    <a:lnB w="9525" cap="flat" cmpd="sng" algn="ctr">
+                      <a:solidFill>
+                        <a:srgbClr val="E1E0D9"/>
+                      </a:solidFill>
+                      <a:prstDash val="solid"/>
+                      <a:round/>
+                      <a:headEnd type="none" w="med" len="med"/>
+                      <a:tailEnd type="none" w="med" len="med"/>
+                    </a:lnB>
+                  </a:tcPr>
+                </a:tc>
+              </a:tr>
+              <a:tr h="310896">
+                <a:tc>
+                  <a:txBody>
+                    <a:bodyPr/>
+                    <a:lstStyle/>
+                    <a:p>
+                      <a:pPr algn="l" indent="0" marL="0">
+                        <a:buNone/>
+                      </a:pPr>
+                      <a:r>
+                        <a:rPr lang="en-US" sz="1100" dirty="0">
+                          <a:solidFill>
+                            <a:srgbClr val="0B0B0B"/>
+                          </a:solidFill>
+                          <a:latin typeface="Calibri" pitchFamily="34" charset="0"/>
+                          <a:ea typeface="Calibri" pitchFamily="34" charset="-122"/>
+                          <a:cs typeface="Calibri" pitchFamily="34" charset="-120"/>
+                        </a:rPr>
+                        <a:t>Clinic ↔ Duplex MEP</a:t>
+                      </a:r>
+                      <a:endParaRPr lang="en-US" sz="1100" dirty="0">
+                        <a:latin typeface="Calibri" charset="0"/>
+                        <a:ea typeface="Calibri" charset="0"/>
+                        <a:cs typeface="Calibri" charset="0"/>
+                      </a:endParaRPr>
+                    </a:p>
+                  </a:txBody>
+                  <a:tcPr marL="36576" marR="36576" marT="36576" marB="36576" anchor="ctr">
+                    <a:lnL w="9525" cap="flat" cmpd="sng" algn="ctr">
+                      <a:solidFill>
+                        <a:srgbClr val="E1E0D9"/>
+                      </a:solidFill>
+                      <a:prstDash val="solid"/>
+                      <a:round/>
+                      <a:headEnd type="none" w="med" len="med"/>
+                      <a:tailEnd type="none" w="med" len="med"/>
+                    </a:lnL>
+                    <a:lnR w="9525" cap="flat" cmpd="sng" algn="ctr">
+                      <a:solidFill>
+                        <a:srgbClr val="E1E0D9"/>
+                      </a:solidFill>
+                      <a:prstDash val="solid"/>
+                      <a:round/>
+                      <a:headEnd type="none" w="med" len="med"/>
+                      <a:tailEnd type="none" w="med" len="med"/>
+                    </a:lnR>
+                    <a:lnT w="9525" cap="flat" cmpd="sng" algn="ctr">
+                      <a:solidFill>
+                        <a:srgbClr val="E1E0D9"/>
+                      </a:solidFill>
+                      <a:prstDash val="solid"/>
+                      <a:round/>
+                      <a:headEnd type="none" w="med" len="med"/>
+                      <a:tailEnd type="none" w="med" len="med"/>
+                    </a:lnT>
+                    <a:lnB w="9525" cap="flat" cmpd="sng" algn="ctr">
+                      <a:solidFill>
+                        <a:srgbClr val="E1E0D9"/>
+                      </a:solidFill>
+                      <a:prstDash val="solid"/>
+                      <a:round/>
+                      <a:headEnd type="none" w="med" len="med"/>
+                      <a:tailEnd type="none" w="med" len="med"/>
+                    </a:lnB>
+                  </a:tcPr>
+                </a:tc>
+                <a:tc>
+                  <a:txBody>
+                    <a:bodyPr/>
+                    <a:lstStyle/>
+                    <a:p>
+                      <a:pPr algn="ctr" indent="0" marL="0">
+                        <a:buNone/>
+                      </a:pPr>
+                      <a:r>
+                        <a:rPr lang="en-US" sz="1100" dirty="0">
+                          <a:solidFill>
+                            <a:srgbClr val="0B0B0B"/>
+                          </a:solidFill>
+                          <a:latin typeface="Calibri" pitchFamily="34" charset="0"/>
+                          <a:ea typeface="Calibri" pitchFamily="34" charset="-122"/>
+                          <a:cs typeface="Calibri" pitchFamily="34" charset="-120"/>
+                        </a:rPr>
+                        <a:t>71 (54–101)</a:t>
+                      </a:r>
+                      <a:endParaRPr lang="en-US" sz="1100" dirty="0">
+                        <a:latin typeface="Calibri" charset="0"/>
+                        <a:ea typeface="Calibri" charset="0"/>
+                        <a:cs typeface="Calibri" charset="0"/>
+                      </a:endParaRPr>
+                    </a:p>
+                  </a:txBody>
+                  <a:tcPr marL="36576" marR="36576" marT="36576" marB="36576" anchor="ctr">
+                    <a:lnL w="9525" cap="flat" cmpd="sng" algn="ctr">
+                      <a:solidFill>
+                        <a:srgbClr val="E1E0D9"/>
+                      </a:solidFill>
+                      <a:prstDash val="solid"/>
+                      <a:round/>
+                      <a:headEnd type="none" w="med" len="med"/>
+                      <a:tailEnd type="none" w="med" len="med"/>
+                    </a:lnL>
+                    <a:lnR w="9525" cap="flat" cmpd="sng" algn="ctr">
+                      <a:solidFill>
+                        <a:srgbClr val="E1E0D9"/>
+                      </a:solidFill>
+                      <a:prstDash val="solid"/>
+                      <a:round/>
+                      <a:headEnd type="none" w="med" len="med"/>
+                      <a:tailEnd type="none" w="med" len="med"/>
+                    </a:lnR>
+                    <a:lnT w="9525" cap="flat" cmpd="sng" algn="ctr">
+                      <a:solidFill>
+                        <a:srgbClr val="E1E0D9"/>
+                      </a:solidFill>
+                      <a:prstDash val="solid"/>
+                      <a:round/>
+                      <a:headEnd type="none" w="med" len="med"/>
+                      <a:tailEnd type="none" w="med" len="med"/>
+                    </a:lnT>
+                    <a:lnB w="9525" cap="flat" cmpd="sng" algn="ctr">
+                      <a:solidFill>
+                        <a:srgbClr val="E1E0D9"/>
+                      </a:solidFill>
+                      <a:prstDash val="solid"/>
+                      <a:round/>
+                      <a:headEnd type="none" w="med" len="med"/>
+                      <a:tailEnd type="none" w="med" len="med"/>
+                    </a:lnB>
+                  </a:tcPr>
+                </a:tc>
+                <a:tc>
+                  <a:txBody>
+                    <a:bodyPr/>
+                    <a:lstStyle/>
+                    <a:p>
+                      <a:pPr algn="ctr" indent="0" marL="0">
+                        <a:buNone/>
+                      </a:pPr>
+                      <a:r>
+                        <a:rPr lang="en-US" sz="1100" dirty="0">
+                          <a:solidFill>
+                            <a:srgbClr val="0B0B0B"/>
+                          </a:solidFill>
+                          <a:latin typeface="Calibri" pitchFamily="34" charset="0"/>
+                          <a:ea typeface="Calibri" pitchFamily="34" charset="-122"/>
+                          <a:cs typeface="Calibri" pitchFamily="34" charset="-120"/>
+                        </a:rPr>
+                        <a:t>88 (70–118)</a:t>
+                      </a:r>
+                      <a:endParaRPr lang="en-US" sz="1100" dirty="0">
+                        <a:latin typeface="Calibri" charset="0"/>
+                        <a:ea typeface="Calibri" charset="0"/>
+                        <a:cs typeface="Calibri" charset="0"/>
+                      </a:endParaRPr>
+                    </a:p>
+                  </a:txBody>
+                  <a:tcPr marL="36576" marR="36576" marT="36576" marB="36576" anchor="ctr">
+                    <a:lnL w="9525" cap="flat" cmpd="sng" algn="ctr">
+                      <a:solidFill>
+                        <a:srgbClr val="E1E0D9"/>
+                      </a:solidFill>
+                      <a:prstDash val="solid"/>
+                      <a:round/>
+                      <a:headEnd type="none" w="med" len="med"/>
+                      <a:tailEnd type="none" w="med" len="med"/>
+                    </a:lnL>
+                    <a:lnR w="9525" cap="flat" cmpd="sng" algn="ctr">
+                      <a:solidFill>
+                        <a:srgbClr val="E1E0D9"/>
+                      </a:solidFill>
+                      <a:prstDash val="solid"/>
+                      <a:round/>
+                      <a:headEnd type="none" w="med" len="med"/>
+                      <a:tailEnd type="none" w="med" len="med"/>
+                    </a:lnR>
+                    <a:lnT w="9525" cap="flat" cmpd="sng" algn="ctr">
+                      <a:solidFill>
+                        <a:srgbClr val="E1E0D9"/>
+                      </a:solidFill>
+                      <a:prstDash val="solid"/>
+                      <a:round/>
+                      <a:headEnd type="none" w="med" len="med"/>
+                      <a:tailEnd type="none" w="med" len="med"/>
+                    </a:lnT>
+                    <a:lnB w="9525" cap="flat" cmpd="sng" algn="ctr">
+                      <a:solidFill>
+                        <a:srgbClr val="E1E0D9"/>
+                      </a:solidFill>
+                      <a:prstDash val="solid"/>
+                      <a:round/>
+                      <a:headEnd type="none" w="med" len="med"/>
+                      <a:tailEnd type="none" w="med" len="med"/>
+                    </a:lnB>
+                  </a:tcPr>
+                </a:tc>
+                <a:tc>
+                  <a:txBody>
+                    <a:bodyPr/>
+                    <a:lstStyle/>
+                    <a:p>
+                      <a:pPr algn="ctr" indent="0" marL="0">
+                        <a:buNone/>
+                      </a:pPr>
+                      <a:r>
+                        <a:rPr lang="en-US" sz="1100" dirty="0">
+                          <a:solidFill>
+                            <a:srgbClr val="0B0B0B"/>
+                          </a:solidFill>
+                          <a:latin typeface="Calibri" pitchFamily="34" charset="0"/>
+                          <a:ea typeface="Calibri" pitchFamily="34" charset="-122"/>
+                          <a:cs typeface="Calibri" pitchFamily="34" charset="-120"/>
+                        </a:rPr>
+                        <a:t>—</a:t>
+                      </a:r>
+                      <a:endParaRPr lang="en-US" sz="1100" dirty="0">
+                        <a:latin typeface="Calibri" charset="0"/>
+                        <a:ea typeface="Calibri" charset="0"/>
+                        <a:cs typeface="Calibri" charset="0"/>
+                      </a:endParaRPr>
+                    </a:p>
+                  </a:txBody>
+                  <a:tcPr marL="36576" marR="36576" marT="36576" marB="36576" anchor="ctr">
+                    <a:lnL w="9525" cap="flat" cmpd="sng" algn="ctr">
+                      <a:solidFill>
+                        <a:srgbClr val="E1E0D9"/>
+                      </a:solidFill>
+                      <a:prstDash val="solid"/>
+                      <a:round/>
+                      <a:headEnd type="none" w="med" len="med"/>
+                      <a:tailEnd type="none" w="med" len="med"/>
+                    </a:lnL>
+                    <a:lnR w="9525" cap="flat" cmpd="sng" algn="ctr">
+                      <a:solidFill>
+                        <a:srgbClr val="E1E0D9"/>
+                      </a:solidFill>
+                      <a:prstDash val="solid"/>
+                      <a:round/>
+                      <a:headEnd type="none" w="med" len="med"/>
+                      <a:tailEnd type="none" w="med" len="med"/>
+                    </a:lnR>
+                    <a:lnT w="9525" cap="flat" cmpd="sng" algn="ctr">
+                      <a:solidFill>
+                        <a:srgbClr val="E1E0D9"/>
+                      </a:solidFill>
+                      <a:prstDash val="solid"/>
+                      <a:round/>
+                      <a:headEnd type="none" w="med" len="med"/>
+                      <a:tailEnd type="none" w="med" len="med"/>
+                    </a:lnT>
+                    <a:lnB w="9525" cap="flat" cmpd="sng" algn="ctr">
+                      <a:solidFill>
+                        <a:srgbClr val="E1E0D9"/>
+                      </a:solidFill>
+                      <a:prstDash val="solid"/>
+                      <a:round/>
+                      <a:headEnd type="none" w="med" len="med"/>
+                      <a:tailEnd type="none" w="med" len="med"/>
+                    </a:lnB>
+                  </a:tcPr>
+                </a:tc>
+              </a:tr>
+              <a:tr h="310896">
+                <a:tc>
+                  <a:txBody>
+                    <a:bodyPr/>
+                    <a:lstStyle/>
+                    <a:p>
+                      <a:pPr algn="l" indent="0" marL="0">
+                        <a:buNone/>
+                      </a:pPr>
+                      <a:r>
+                        <a:rPr lang="en-US" sz="1100" dirty="0">
+                          <a:solidFill>
+                            <a:srgbClr val="0B0B0B"/>
+                          </a:solidFill>
+                          <a:latin typeface="Calibri" pitchFamily="34" charset="0"/>
+                          <a:ea typeface="Calibri" pitchFamily="34" charset="-122"/>
+                          <a:cs typeface="Calibri" pitchFamily="34" charset="-120"/>
+                        </a:rPr>
+                        <a:t>Clinic ↔ Duplex Plumbing</a:t>
+                      </a:r>
+                      <a:endParaRPr lang="en-US" sz="1100" dirty="0">
+                        <a:latin typeface="Calibri" charset="0"/>
+                        <a:ea typeface="Calibri" charset="0"/>
+                        <a:cs typeface="Calibri" charset="0"/>
+                      </a:endParaRPr>
+                    </a:p>
+                  </a:txBody>
+                  <a:tcPr marL="36576" marR="36576" marT="36576" marB="36576" anchor="ctr">
+                    <a:lnL w="9525" cap="flat" cmpd="sng" algn="ctr">
+                      <a:solidFill>
+                        <a:srgbClr val="E1E0D9"/>
+                      </a:solidFill>
+                      <a:prstDash val="solid"/>
+                      <a:round/>
+                      <a:headEnd type="none" w="med" len="med"/>
+                      <a:tailEnd type="none" w="med" len="med"/>
+                    </a:lnL>
+                    <a:lnR w="9525" cap="flat" cmpd="sng" algn="ctr">
+                      <a:solidFill>
+                        <a:srgbClr val="E1E0D9"/>
+                      </a:solidFill>
+                      <a:prstDash val="solid"/>
+                      <a:round/>
+                      <a:headEnd type="none" w="med" len="med"/>
+                      <a:tailEnd type="none" w="med" len="med"/>
+                    </a:lnR>
+                    <a:lnT w="9525" cap="flat" cmpd="sng" algn="ctr">
+                      <a:solidFill>
+                        <a:srgbClr val="E1E0D9"/>
+                      </a:solidFill>
+                      <a:prstDash val="solid"/>
+                      <a:round/>
+                      <a:headEnd type="none" w="med" len="med"/>
+                      <a:tailEnd type="none" w="med" len="med"/>
+                    </a:lnT>
+                    <a:lnB w="9525" cap="flat" cmpd="sng" algn="ctr">
+                      <a:solidFill>
+                        <a:srgbClr val="E1E0D9"/>
+                      </a:solidFill>
+                      <a:prstDash val="solid"/>
+                      <a:round/>
+                      <a:headEnd type="none" w="med" len="med"/>
+                      <a:tailEnd type="none" w="med" len="med"/>
+                    </a:lnB>
+                  </a:tcPr>
+                </a:tc>
+                <a:tc>
+                  <a:txBody>
+                    <a:bodyPr/>
+                    <a:lstStyle/>
+                    <a:p>
+                      <a:pPr algn="ctr" indent="0" marL="0">
+                        <a:buNone/>
+                      </a:pPr>
+                      <a:r>
+                        <a:rPr lang="en-US" sz="1100" dirty="0">
+                          <a:solidFill>
+                            <a:srgbClr val="0B0B0B"/>
+                          </a:solidFill>
+                          <a:latin typeface="Calibri" pitchFamily="34" charset="0"/>
+                          <a:ea typeface="Calibri" pitchFamily="34" charset="-122"/>
+                          <a:cs typeface="Calibri" pitchFamily="34" charset="-120"/>
+                        </a:rPr>
+                        <a:t>85 (55–137)</a:t>
+                      </a:r>
+                      <a:endParaRPr lang="en-US" sz="1100" dirty="0">
+                        <a:latin typeface="Calibri" charset="0"/>
+                        <a:ea typeface="Calibri" charset="0"/>
+                        <a:cs typeface="Calibri" charset="0"/>
+                      </a:endParaRPr>
+                    </a:p>
+                  </a:txBody>
+                  <a:tcPr marL="36576" marR="36576" marT="36576" marB="36576" anchor="ctr">
+                    <a:lnL w="9525" cap="flat" cmpd="sng" algn="ctr">
+                      <a:solidFill>
+                        <a:srgbClr val="E1E0D9"/>
+                      </a:solidFill>
+                      <a:prstDash val="solid"/>
+                      <a:round/>
+                      <a:headEnd type="none" w="med" len="med"/>
+                      <a:tailEnd type="none" w="med" len="med"/>
+                    </a:lnL>
+                    <a:lnR w="9525" cap="flat" cmpd="sng" algn="ctr">
+                      <a:solidFill>
+                        <a:srgbClr val="E1E0D9"/>
+                      </a:solidFill>
+                      <a:prstDash val="solid"/>
+                      <a:round/>
+                      <a:headEnd type="none" w="med" len="med"/>
+                      <a:tailEnd type="none" w="med" len="med"/>
+                    </a:lnR>
+                    <a:lnT w="9525" cap="flat" cmpd="sng" algn="ctr">
+                      <a:solidFill>
+                        <a:srgbClr val="E1E0D9"/>
+                      </a:solidFill>
+                      <a:prstDash val="solid"/>
+                      <a:round/>
+                      <a:headEnd type="none" w="med" len="med"/>
+                      <a:tailEnd type="none" w="med" len="med"/>
+                    </a:lnT>
+                    <a:lnB w="9525" cap="flat" cmpd="sng" algn="ctr">
+                      <a:solidFill>
+                        <a:srgbClr val="E1E0D9"/>
+                      </a:solidFill>
+                      <a:prstDash val="solid"/>
+                      <a:round/>
+                      <a:headEnd type="none" w="med" len="med"/>
+                      <a:tailEnd type="none" w="med" len="med"/>
+                    </a:lnB>
+                  </a:tcPr>
+                </a:tc>
+                <a:tc>
+                  <a:txBody>
+                    <a:bodyPr/>
+                    <a:lstStyle/>
+                    <a:p>
+                      <a:pPr algn="ctr" indent="0" marL="0">
+                        <a:buNone/>
+                      </a:pPr>
+                      <a:r>
+                        <a:rPr lang="en-US" sz="1100" dirty="0">
+                          <a:solidFill>
+                            <a:srgbClr val="0B0B0B"/>
+                          </a:solidFill>
+                          <a:latin typeface="Calibri" pitchFamily="34" charset="0"/>
+                          <a:ea typeface="Calibri" pitchFamily="34" charset="-122"/>
+                          <a:cs typeface="Calibri" pitchFamily="34" charset="-120"/>
+                        </a:rPr>
+                        <a:t>94 (77–121)</a:t>
+                      </a:r>
+                      <a:endParaRPr lang="en-US" sz="1100" dirty="0">
+                        <a:latin typeface="Calibri" charset="0"/>
+                        <a:ea typeface="Calibri" charset="0"/>
+                        <a:cs typeface="Calibri" charset="0"/>
+                      </a:endParaRPr>
+                    </a:p>
+                  </a:txBody>
+                  <a:tcPr marL="36576" marR="36576" marT="36576" marB="36576" anchor="ctr">
+                    <a:lnL w="9525" cap="flat" cmpd="sng" algn="ctr">
+                      <a:solidFill>
+                        <a:srgbClr val="E1E0D9"/>
+                      </a:solidFill>
+                      <a:prstDash val="solid"/>
+                      <a:round/>
+                      <a:headEnd type="none" w="med" len="med"/>
+                      <a:tailEnd type="none" w="med" len="med"/>
+                    </a:lnL>
+                    <a:lnR w="9525" cap="flat" cmpd="sng" algn="ctr">
+                      <a:solidFill>
+                        <a:srgbClr val="E1E0D9"/>
+                      </a:solidFill>
+                      <a:prstDash val="solid"/>
+                      <a:round/>
+                      <a:headEnd type="none" w="med" len="med"/>
+                      <a:tailEnd type="none" w="med" len="med"/>
+                    </a:lnR>
+                    <a:lnT w="9525" cap="flat" cmpd="sng" algn="ctr">
+                      <a:solidFill>
+                        <a:srgbClr val="E1E0D9"/>
+                      </a:solidFill>
+                      <a:prstDash val="solid"/>
+                      <a:round/>
+                      <a:headEnd type="none" w="med" len="med"/>
+                      <a:tailEnd type="none" w="med" len="med"/>
+                    </a:lnT>
+                    <a:lnB w="9525" cap="flat" cmpd="sng" algn="ctr">
+                      <a:solidFill>
+                        <a:srgbClr val="E1E0D9"/>
+                      </a:solidFill>
+                      <a:prstDash val="solid"/>
+                      <a:round/>
+                      <a:headEnd type="none" w="med" len="med"/>
+                      <a:tailEnd type="none" w="med" len="med"/>
+                    </a:lnB>
+                  </a:tcPr>
+                </a:tc>
+                <a:tc>
+                  <a:txBody>
+                    <a:bodyPr/>
+                    <a:lstStyle/>
+                    <a:p>
+                      <a:pPr algn="ctr" indent="0" marL="0">
+                        <a:buNone/>
+                      </a:pPr>
+                      <a:r>
+                        <a:rPr lang="en-US" sz="1100" dirty="0">
+                          <a:solidFill>
+                            <a:srgbClr val="0B0B0B"/>
+                          </a:solidFill>
+                          <a:latin typeface="Calibri" pitchFamily="34" charset="0"/>
+                          <a:ea typeface="Calibri" pitchFamily="34" charset="-122"/>
+                          <a:cs typeface="Calibri" pitchFamily="34" charset="-120"/>
+                        </a:rPr>
+                        <a:t>—</a:t>
+                      </a:r>
+                      <a:endParaRPr lang="en-US" sz="1100" dirty="0">
+                        <a:latin typeface="Calibri" charset="0"/>
+                        <a:ea typeface="Calibri" charset="0"/>
+                        <a:cs typeface="Calibri" charset="0"/>
+                      </a:endParaRPr>
+                    </a:p>
+                  </a:txBody>
+                  <a:tcPr marL="36576" marR="36576" marT="36576" marB="36576" anchor="ctr">
+                    <a:lnL w="9525" cap="flat" cmpd="sng" algn="ctr">
+                      <a:solidFill>
+                        <a:srgbClr val="E1E0D9"/>
+                      </a:solidFill>
+                      <a:prstDash val="solid"/>
+                      <a:round/>
+                      <a:headEnd type="none" w="med" len="med"/>
+                      <a:tailEnd type="none" w="med" len="med"/>
+                    </a:lnL>
+                    <a:lnR w="9525" cap="flat" cmpd="sng" algn="ctr">
+                      <a:solidFill>
+                        <a:srgbClr val="E1E0D9"/>
+                      </a:solidFill>
+                      <a:prstDash val="solid"/>
+                      <a:round/>
+                      <a:headEnd type="none" w="med" len="med"/>
+                      <a:tailEnd type="none" w="med" len="med"/>
+                    </a:lnR>
+                    <a:lnT w="9525" cap="flat" cmpd="sng" algn="ctr">
+                      <a:solidFill>
+                        <a:srgbClr val="E1E0D9"/>
+                      </a:solidFill>
+                      <a:prstDash val="solid"/>
+                      <a:round/>
+                      <a:headEnd type="none" w="med" len="med"/>
+                      <a:tailEnd type="none" w="med" len="med"/>
+                    </a:lnT>
+                    <a:lnB w="9525" cap="flat" cmpd="sng" algn="ctr">
+                      <a:solidFill>
+                        <a:srgbClr val="E1E0D9"/>
+                      </a:solidFill>
+                      <a:prstDash val="solid"/>
+                      <a:round/>
+                      <a:headEnd type="none" w="med" len="med"/>
+                      <a:tailEnd type="none" w="med" len="med"/>
+                    </a:lnB>
+                  </a:tcPr>
+                </a:tc>
+              </a:tr>
+              <a:tr h="310896">
+                <a:tc>
+                  <a:txBody>
+                    <a:bodyPr/>
+                    <a:lstStyle/>
+                    <a:p>
+                      <a:pPr algn="l" indent="0" marL="0">
+                        <a:buNone/>
+                      </a:pPr>
+                      <a:r>
+                        <a:rPr lang="en-US" sz="1100" dirty="0">
+                          <a:solidFill>
+                            <a:srgbClr val="0B0B0B"/>
+                          </a:solidFill>
+                          <a:latin typeface="Calibri" pitchFamily="34" charset="0"/>
+                          <a:ea typeface="Calibri" pitchFamily="34" charset="-122"/>
+                          <a:cs typeface="Calibri" pitchFamily="34" charset="-120"/>
+                        </a:rPr>
+                        <a:t>Duplex MEP ↔ Duplex Plumbing</a:t>
+                      </a:r>
+                      <a:endParaRPr lang="en-US" sz="1100" dirty="0">
+                        <a:latin typeface="Calibri" charset="0"/>
+                        <a:ea typeface="Calibri" charset="0"/>
+                        <a:cs typeface="Calibri" charset="0"/>
+                      </a:endParaRPr>
+                    </a:p>
+                  </a:txBody>
+                  <a:tcPr marL="36576" marR="36576" marT="36576" marB="36576" anchor="ctr">
+                    <a:lnL w="9525" cap="flat" cmpd="sng" algn="ctr">
+                      <a:solidFill>
+                        <a:srgbClr val="E1E0D9"/>
+                      </a:solidFill>
+                      <a:prstDash val="solid"/>
+                      <a:round/>
+                      <a:headEnd type="none" w="med" len="med"/>
+                      <a:tailEnd type="none" w="med" len="med"/>
+                    </a:lnL>
+                    <a:lnR w="9525" cap="flat" cmpd="sng" algn="ctr">
+                      <a:solidFill>
+                        <a:srgbClr val="E1E0D9"/>
+                      </a:solidFill>
+                      <a:prstDash val="solid"/>
+                      <a:round/>
+                      <a:headEnd type="none" w="med" len="med"/>
+                      <a:tailEnd type="none" w="med" len="med"/>
+                    </a:lnR>
+                    <a:lnT w="9525" cap="flat" cmpd="sng" algn="ctr">
+                      <a:solidFill>
+                        <a:srgbClr val="E1E0D9"/>
+                      </a:solidFill>
+                      <a:prstDash val="solid"/>
+                      <a:round/>
+                      <a:headEnd type="none" w="med" len="med"/>
+                      <a:tailEnd type="none" w="med" len="med"/>
+                    </a:lnT>
+                    <a:lnB w="9525" cap="flat" cmpd="sng" algn="ctr">
+                      <a:solidFill>
+                        <a:srgbClr val="E1E0D9"/>
+                      </a:solidFill>
+                      <a:prstDash val="solid"/>
+                      <a:round/>
+                      <a:headEnd type="none" w="med" len="med"/>
+                      <a:tailEnd type="none" w="med" len="med"/>
+                    </a:lnB>
+                  </a:tcPr>
+                </a:tc>
+                <a:tc>
+                  <a:txBody>
+                    <a:bodyPr/>
+                    <a:lstStyle/>
+                    <a:p>
+                      <a:pPr algn="ctr" indent="0" marL="0">
+                        <a:buNone/>
+                      </a:pPr>
+                      <a:r>
+                        <a:rPr lang="en-US" sz="1100" dirty="0">
+                          <a:solidFill>
+                            <a:srgbClr val="0B0B0B"/>
+                          </a:solidFill>
+                          <a:latin typeface="Calibri" pitchFamily="34" charset="0"/>
+                          <a:ea typeface="Calibri" pitchFamily="34" charset="-122"/>
+                          <a:cs typeface="Calibri" pitchFamily="34" charset="-120"/>
+                        </a:rPr>
+                        <a:t>26 (24–124)</a:t>
+                      </a:r>
+                      <a:endParaRPr lang="en-US" sz="1100" dirty="0">
+                        <a:latin typeface="Calibri" charset="0"/>
+                        <a:ea typeface="Calibri" charset="0"/>
+                        <a:cs typeface="Calibri" charset="0"/>
+                      </a:endParaRPr>
+                    </a:p>
+                  </a:txBody>
+                  <a:tcPr marL="36576" marR="36576" marT="36576" marB="36576" anchor="ctr">
+                    <a:lnL w="9525" cap="flat" cmpd="sng" algn="ctr">
+                      <a:solidFill>
+                        <a:srgbClr val="E1E0D9"/>
+                      </a:solidFill>
+                      <a:prstDash val="solid"/>
+                      <a:round/>
+                      <a:headEnd type="none" w="med" len="med"/>
+                      <a:tailEnd type="none" w="med" len="med"/>
+                    </a:lnL>
+                    <a:lnR w="9525" cap="flat" cmpd="sng" algn="ctr">
+                      <a:solidFill>
+                        <a:srgbClr val="E1E0D9"/>
+                      </a:solidFill>
+                      <a:prstDash val="solid"/>
+                      <a:round/>
+                      <a:headEnd type="none" w="med" len="med"/>
+                      <a:tailEnd type="none" w="med" len="med"/>
+                    </a:lnR>
+                    <a:lnT w="9525" cap="flat" cmpd="sng" algn="ctr">
+                      <a:solidFill>
+                        <a:srgbClr val="E1E0D9"/>
+                      </a:solidFill>
+                      <a:prstDash val="solid"/>
+                      <a:round/>
+                      <a:headEnd type="none" w="med" len="med"/>
+                      <a:tailEnd type="none" w="med" len="med"/>
+                    </a:lnT>
+                    <a:lnB w="9525" cap="flat" cmpd="sng" algn="ctr">
+                      <a:solidFill>
+                        <a:srgbClr val="E1E0D9"/>
+                      </a:solidFill>
+                      <a:prstDash val="solid"/>
+                      <a:round/>
+                      <a:headEnd type="none" w="med" len="med"/>
+                      <a:tailEnd type="none" w="med" len="med"/>
+                    </a:lnB>
+                  </a:tcPr>
+                </a:tc>
+                <a:tc>
+                  <a:txBody>
+                    <a:bodyPr/>
+                    <a:lstStyle/>
+                    <a:p>
+                      <a:pPr algn="ctr" indent="0" marL="0">
+                        <a:buNone/>
+                      </a:pPr>
+                      <a:r>
+                        <a:rPr lang="en-US" sz="1100" dirty="0">
+                          <a:solidFill>
+                            <a:srgbClr val="0B0B0B"/>
+                          </a:solidFill>
+                          <a:latin typeface="Calibri" pitchFamily="34" charset="0"/>
+                          <a:ea typeface="Calibri" pitchFamily="34" charset="-122"/>
+                          <a:cs typeface="Calibri" pitchFamily="34" charset="-120"/>
+                        </a:rPr>
+                        <a:t>25 (21–108)</a:t>
+                      </a:r>
+                      <a:endParaRPr lang="en-US" sz="1100" dirty="0">
+                        <a:latin typeface="Calibri" charset="0"/>
+                        <a:ea typeface="Calibri" charset="0"/>
+                        <a:cs typeface="Calibri" charset="0"/>
+                      </a:endParaRPr>
+                    </a:p>
+                  </a:txBody>
+                  <a:tcPr marL="36576" marR="36576" marT="36576" marB="36576" anchor="ctr">
+                    <a:lnL w="9525" cap="flat" cmpd="sng" algn="ctr">
+                      <a:solidFill>
+                        <a:srgbClr val="E1E0D9"/>
+                      </a:solidFill>
+                      <a:prstDash val="solid"/>
+                      <a:round/>
+                      <a:headEnd type="none" w="med" len="med"/>
+                      <a:tailEnd type="none" w="med" len="med"/>
+                    </a:lnL>
+                    <a:lnR w="9525" cap="flat" cmpd="sng" algn="ctr">
+                      <a:solidFill>
+                        <a:srgbClr val="E1E0D9"/>
+                      </a:solidFill>
+                      <a:prstDash val="solid"/>
+                      <a:round/>
+                      <a:headEnd type="none" w="med" len="med"/>
+                      <a:tailEnd type="none" w="med" len="med"/>
+                    </a:lnR>
+                    <a:lnT w="9525" cap="flat" cmpd="sng" algn="ctr">
+                      <a:solidFill>
+                        <a:srgbClr val="E1E0D9"/>
+                      </a:solidFill>
+                      <a:prstDash val="solid"/>
+                      <a:round/>
+                      <a:headEnd type="none" w="med" len="med"/>
+                      <a:tailEnd type="none" w="med" len="med"/>
+                    </a:lnT>
+                    <a:lnB w="9525" cap="flat" cmpd="sng" algn="ctr">
+                      <a:solidFill>
+                        <a:srgbClr val="E1E0D9"/>
+                      </a:solidFill>
+                      <a:prstDash val="solid"/>
+                      <a:round/>
+                      <a:headEnd type="none" w="med" len="med"/>
+                      <a:tailEnd type="none" w="med" len="med"/>
+                    </a:lnB>
+                  </a:tcPr>
+                </a:tc>
+                <a:tc>
+                  <a:txBody>
+                    <a:bodyPr/>
+                    <a:lstStyle/>
+                    <a:p>
+                      <a:pPr algn="ctr" indent="0" marL="0">
+                        <a:buNone/>
+                      </a:pPr>
+                      <a:r>
+                        <a:rPr lang="en-US" sz="1100" dirty="0">
+                          <a:solidFill>
+                            <a:srgbClr val="0B0B0B"/>
+                          </a:solidFill>
+                          <a:latin typeface="Calibri" pitchFamily="34" charset="0"/>
+                          <a:ea typeface="Calibri" pitchFamily="34" charset="-122"/>
+                          <a:cs typeface="Calibri" pitchFamily="34" charset="-120"/>
+                        </a:rPr>
+                        <a:t>—</a:t>
+                      </a:r>
+                      <a:endParaRPr lang="en-US" sz="1100" dirty="0">
+                        <a:latin typeface="Calibri" charset="0"/>
+                        <a:ea typeface="Calibri" charset="0"/>
+                        <a:cs typeface="Calibri" charset="0"/>
+                      </a:endParaRPr>
+                    </a:p>
+                  </a:txBody>
+                  <a:tcPr marL="36576" marR="36576" marT="36576" marB="36576" anchor="ctr">
+                    <a:lnL w="9525" cap="flat" cmpd="sng" algn="ctr">
+                      <a:solidFill>
+                        <a:srgbClr val="E1E0D9"/>
+                      </a:solidFill>
+                      <a:prstDash val="solid"/>
+                      <a:round/>
+                      <a:headEnd type="none" w="med" len="med"/>
+                      <a:tailEnd type="none" w="med" len="med"/>
+                    </a:lnL>
+                    <a:lnR w="9525" cap="flat" cmpd="sng" algn="ctr">
+                      <a:solidFill>
+                        <a:srgbClr val="E1E0D9"/>
+                      </a:solidFill>
+                      <a:prstDash val="solid"/>
+                      <a:round/>
+                      <a:headEnd type="none" w="med" len="med"/>
+                      <a:tailEnd type="none" w="med" len="med"/>
+                    </a:lnR>
+                    <a:lnT w="9525" cap="flat" cmpd="sng" algn="ctr">
+                      <a:solidFill>
+                        <a:srgbClr val="E1E0D9"/>
+                      </a:solidFill>
+                      <a:prstDash val="solid"/>
+                      <a:round/>
+                      <a:headEnd type="none" w="med" len="med"/>
+                      <a:tailEnd type="none" w="med" len="med"/>
+                    </a:lnT>
+                    <a:lnB w="9525" cap="flat" cmpd="sng" algn="ctr">
+                      <a:solidFill>
+                        <a:srgbClr val="E1E0D9"/>
+                      </a:solidFill>
+                      <a:prstDash val="solid"/>
+                      <a:round/>
+                      <a:headEnd type="none" w="med" len="med"/>
+                      <a:tailEnd type="none" w="med" len="med"/>
+                    </a:lnB>
+                  </a:tcPr>
+                </a:tc>
+              </a:tr>
+            </a:tbl>
+          </a:graphicData>
+        </a:graphic>
+      </p:graphicFrame>
+      <p:sp>
+        <p:nvSpPr>
+          <p:cNvPr id="5" name="realism bullets"/>
+          <p:cNvSpPr txBox="1"/>
+          <p:nvPr/>
+        </p:nvSpPr>
+        <p:spPr>
+          <a:xfrm>
+            <a:off x="548640" y="3154680"/>
+            <a:ext cx="5394960" cy="2926080"/>
+          </a:xfrm>
+          <a:prstGeom prst="rect">
+            <a:avLst/>
+          </a:prstGeom>
+          <a:noFill/>
+          <a:ln/>
+        </p:spPr>
+        <p:txBody>
+          <a:bodyPr wrap="square" lIns="0" tIns="0" rIns="0" bIns="0" rtlCol="0" anchor="t"/>
+          <a:lstStyle/>
+          <a:p>
+            <a:pPr marL="342900" indent="-342900">
+              <a:spcAft>
+                <a:spcPts val="600"/>
+              </a:spcAft>
+              <a:buSzPct val="100000"/>
+              <a:buChar char="•"/>
+            </a:pPr>
+            <a:r>
+              <a:rPr lang="en-US" sz="1250" dirty="0">
+                <a:solidFill>
+                  <a:schemeClr val="tx1"/>
+                </a:solidFill>
+              </a:rPr>
+              <a:t>Sections every 250 mm; runs within 400 mm of height form a row; gaps between bare pipe surfaces, below 600 mm</a:t>
+            </a:r>
+            <a:endParaRPr lang="en-US" sz="1250" dirty="0"/>
+          </a:p>
+          <a:p>
+            <a:pPr marL="342900" indent="-342900">
+              <a:spcAft>
+                <a:spcPts val="600"/>
+              </a:spcAft>
+              <a:buSzPct val="100000"/>
+              <a:buChar char="•"/>
+            </a:pPr>
+            <a:r>
+              <a:rPr lang="en-US" sz="1250" dirty="0">
+                <a:solidFill>
+                  <a:schemeClr val="tx1"/>
+                </a:solidFill>
+              </a:rPr>
+              <a:t>Robust: across 11 settings of the cut (spacing, row band, axis tolerance, run length) generated ↔ clinic stays at 27–36 mm</a:t>
+            </a:r>
+            <a:endParaRPr lang="en-US" sz="1250" dirty="0"/>
+          </a:p>
+          <a:p>
+            <a:pPr marL="342900" indent="-342900">
+              <a:spcAft>
+                <a:spcPts val="600"/>
+              </a:spcAft>
+              <a:buSzPct val="100000"/>
+              <a:buChar char="•"/>
+            </a:pPr>
+            <a:r>
+              <a:rPr lang="en-US" sz="1250" dirty="0">
+                <a:solidFill>
+                  <a:schemeClr val="tx1"/>
+                </a:solidFill>
+              </a:rPr>
+              <a:t>Noise floor: the distance a perfect generator would still show at that sample size</a:t>
+            </a:r>
+            <a:endParaRPr lang="en-US" sz="1250" dirty="0"/>
+          </a:p>
+          <a:p>
+            <a:pPr marL="342900" indent="-342900">
+              <a:spcAft>
+                <a:spcPts val="600"/>
+              </a:spcAft>
+              <a:buSzPct val="100000"/>
+              <a:buChar char="•"/>
+            </a:pPr>
+            <a:r>
+              <a:rPr lang="en-US" sz="1250" dirty="0">
+                <a:solidFill>
+                  <a:schemeClr val="tx1"/>
+                </a:solidFill>
+              </a:rPr>
+              <a:t>The duplex samples are small, hence the wide intervals</a:t>
+            </a:r>
+            <a:endParaRPr lang="en-US" sz="1250" dirty="0"/>
+          </a:p>
+        </p:txBody>
+      </p:sp>
+      <p:sp>
+        <p:nvSpPr>
+          <p:cNvPr id="6" name="distances caption"/>
+          <p:cNvSpPr txBox="1"/>
+          <p:nvPr/>
+        </p:nvSpPr>
+        <p:spPr>
+          <a:xfrm>
+            <a:off x="6172200" y="3931920"/>
+            <a:ext cx="5468112" cy="731520"/>
+          </a:xfrm>
+          <a:prstGeom prst="rect">
+            <a:avLst/>
+          </a:prstGeom>
+          <a:noFill/>
+          <a:ln/>
+        </p:spPr>
+        <p:txBody>
+          <a:bodyPr wrap="square" lIns="0" tIns="0" rIns="0" bIns="0" rtlCol="0" anchor="t"/>
+          <a:lstStyle/>
+          <a:p>
+            <a:pPr indent="0" marL="0">
+              <a:buNone/>
+            </a:pPr>
+            <a:r>
+              <a:rPr lang="en-US" sz="1100" dirty="0">
+                <a:solidFill>
+                  <a:srgbClr val="52514E"/>
+                </a:solidFill>
+              </a:rPr>
+              <a:t>Intervals: 95 % bootstrap over contexts (generated) and pipe pairs (measured). Models: buildingSMART Duplex Apartment and Medical-Dental Clinic, CC BY 4.0; derived measurements and attribution in verify/measured/.</a:t>
+            </a:r>
+            <a:endParaRPr lang="en-US" sz="1100" dirty="0"/>
+          </a:p>
+        </p:txBody>
+      </p:sp>
+      <p:sp>
+        <p:nvSpPr>
+          <p:cNvPr id="25" name="Slide Number Placeholder 0"/>
+          <p:cNvSpPr>
+            <a:spLocks noGrp="1"/>
+          </p:cNvSpPr>
+          <p:nvPr>
+            <p:ph type="sldNum" sz="quarter" idx="4294967295"/>
+          </p:nvPr>
+        </p:nvSpPr>
+        <p:spPr>
+          <a:xfrm>
+            <a:off x="11064240" y="6419088"/>
+            <a:ext cx="594360" cy="274320"/>
+          </a:xfrm>
+          <a:prstGeom prst="rect">
+            <a:avLst/>
+          </a:prstGeom>
+          <a:extLst>
+            <a:ext uri="{C572A759-6A51-4108-AA02-DFA0A04FC94B}">
+              <ma14:wrappingTextBoxFlag xmlns:ma14="http://schemas.microsoft.com/office/mac/drawingml/2011/main" val="0"/>
+            </a:ext>
+          </a:extLst>
+        </p:spPr>
+        <p:txBody>
+          <a:bodyPr/>
+          <a:lstStyle>
+            <a:lvl1pPr>
+              <a:defRPr sz="900">
+                <a:solidFill>
+                  <a:srgbClr val="898781"/>
+                </a:solidFill>
+              </a:defRPr>
+            </a:lvl1pPr>
+          </a:lstStyle>
+          <a:p>
+            <a:pPr algn="r"/>
+            <a:fld id="{F7021451-1387-4CA6-816F-3879F97B5CBC}" type="slidenum">
+              <a:rPr b="0" lang="en-US"/>
+              <a:t>16</a:t>
+            </a:fld>
+            <a:endParaRPr lang="en-US"/>
+          </a:p>
+        </p:txBody>
+      </p:sp>
+    </p:spTree>
+  </p:cSld>
+  <p:clrMapOvr>
+    <a:masterClrMapping/>
+  </p:clrMapOvr>
+</p:sld>
+</file>
+
+<file path=ppt/slides/slide17.xml><?xml version="1.0" encoding="utf-8"?>
+<p:sld xmlns:a="http://schemas.openxmlformats.org/drawingml/2006/main" xmlns:r="http://schemas.openxmlformats.org/officeDocument/2006/relationships" xmlns:p="http://schemas.openxmlformats.org/presentationml/2006/main">
+  <p:cSld name="Slide 17">
+    <p:spTree>
+      <p:nvGrpSpPr>
+        <p:cNvPr id="1" name=""/>
+        <p:cNvGrpSpPr/>
+        <p:nvPr/>
+      </p:nvGrpSpPr>
+      <p:grpSpPr>
+        <a:xfrm>
+          <a:off x="0" y="0"/>
+          <a:ext cx="0" cy="0"/>
+          <a:chOff x="0" y="0"/>
+          <a:chExt cx="0" cy="0"/>
+        </a:xfrm>
+      </p:grpSpPr>
+      <p:sp>
+        <p:nvSpPr>
+          <p:cNvPr id="2" name="Text 0"/>
+          <p:cNvSpPr/>
+          <p:nvPr>
+            <p:ph idx="100" type="title" hasCustomPrompt="1"/>
+          </p:nvPr>
+        </p:nvSpPr>
+        <p:spPr>
+          <a:xfrm>
+            <a:off x="548640" y="274320"/>
+            <a:ext cx="11091672" cy="960120"/>
+          </a:xfrm>
+          <a:prstGeom prst="rect">
+            <a:avLst/>
+          </a:prstGeom>
+          <a:noFill/>
+          <a:ln/>
+        </p:spPr>
+        <p:txBody>
+          <a:bodyPr wrap="square" lIns="0" tIns="0" rIns="0" bIns="0" rtlCol="0" anchor="ctr"/>
+          <a:lstStyle/>
+          <a:p>
+            <a:pPr algn="l" indent="0" marL="0">
+              <a:buNone/>
+            </a:pPr>
+            <a:r>
+              <a:rPr lang="en-US" sz="2600" b="1" dirty="0">
+                <a:solidFill>
+                  <a:schemeClr val="tx1"/>
+                </a:solidFill>
+              </a:rPr>
               <a:t>Appendix: the catalog stress test, with error bars</a:t>
             </a:r>
             <a:endParaRPr lang="en-US" sz="2600" dirty="0"/>
@@ -9809,7 +13726,7 @@
       </p:sp>
       <p:graphicFrame>
         <p:nvGraphicFramePr>
-          <p:cNvPr id="17" name="per tier catalog table"/>
+          <p:cNvPr id="18" name="per tier catalog table"/>
           <p:cNvGraphicFramePr>
             <a:graphicFrameLocks noGrp="1"/>
           </p:cNvGraphicFramePr>
@@ -12211,7 +16128,7 @@
       </p:graphicFrame>
       <p:graphicFrame>
         <p:nvGraphicFramePr>
-          <p:cNvPr id="33" name="sensitivity table"/>
+          <p:cNvPr id="35" name="sensitivity table"/>
           <p:cNvGraphicFramePr>
             <a:graphicFrameLocks noGrp="1"/>
           </p:cNvGraphicFramePr>
@@ -13339,7 +17256,7 @@
       </p:sp>
       <p:graphicFrame>
         <p:nvGraphicFramePr>
-          <p:cNvPr id="49" name="split catalog table"/>
+          <p:cNvPr id="52" name="split catalog table"/>
           <p:cNvGraphicFramePr>
             <a:graphicFrameLocks noGrp="1"/>
           </p:cNvGraphicFramePr>
@@ -14495,7 +18412,7 @@
             <a:pPr algn="r"/>
             <a:fld id="{F7021451-1387-4CA6-816F-3879F97B5CBC}" type="slidenum">
               <a:rPr b="0" lang="en-US"/>
-              <a:t>16</a:t>
+              <a:t>17</a:t>
             </a:fld>
             <a:endParaRPr lang="en-US"/>
           </a:p>
@@ -14509,9 +18426,9 @@
 </p:sld>
 </file>
 
-<file path=ppt/slides/slide17.xml><?xml version="1.0" encoding="utf-8"?>
+<file path=ppt/slides/slide18.xml><?xml version="1.0" encoding="utf-8"?>
 <p:sld xmlns:a="http://schemas.openxmlformats.org/drawingml/2006/main" xmlns:r="http://schemas.openxmlformats.org/officeDocument/2006/relationships" xmlns:p="http://schemas.openxmlformats.org/presentationml/2006/main">
-  <p:cSld name="Slide 17">
+  <p:cSld name="Slide 18">
     <p:spTree>
       <p:nvGrpSpPr>
         <p:cNvPr id="1" name=""/>
@@ -14980,7 +18897,7 @@
             <a:pPr algn="r"/>
             <a:fld id="{F7021451-1387-4CA6-816F-3879F97B5CBC}" type="slidenum">
               <a:rPr b="0" lang="en-US"/>
-              <a:t>17</a:t>
+              <a:t>18</a:t>
             </a:fld>
             <a:endParaRPr lang="en-US"/>
           </a:p>
@@ -21190,7 +25107,7 @@
                   <a:schemeClr val="tx1"/>
                 </a:solidFill>
               </a:rPr>
-              <a:t>Experiment 1: as the count rises, scenes get tighter and heavier</a:t>
+              <a:t>Experiment 1: higher tiers are heavier and, on average, tighter</a:t>
             </a:r>
             <a:endParaRPr lang="en-US" sz="2600" dirty="0"/>
           </a:p>
@@ -21212,8 +25129,8 @@
         </p:blipFill>
         <p:spPr>
           <a:xfrm>
-            <a:off x="548640" y="1390162"/>
-            <a:ext cx="11091672" cy="4214835"/>
+            <a:off x="584630" y="1325880"/>
+            <a:ext cx="11019692" cy="4297680"/>
           </a:xfrm>
           <a:prstGeom prst="rect">
             <a:avLst/>
@@ -21228,8 +25145,8 @@
         </p:nvSpPr>
         <p:spPr>
           <a:xfrm>
-            <a:off x="548640" y="5696438"/>
-            <a:ext cx="11091672" cy="548640"/>
+            <a:off x="548640" y="5715000"/>
+            <a:ext cx="11091672" cy="594360"/>
           </a:xfrm>
           <a:prstGeom prst="rect">
             <a:avLst/>
@@ -21250,7 +25167,7 @@
                   <a:srgbClr val="52514E"/>
                 </a:solidFill>
               </a:rPr>
-              <a:t>Element count is exact by construction, so ordering is checked on congestion: the median closest gap falls from 120 mm (C2) to 62 mm (C8) and the median load at the support rises from 0.10 to 1.71 kN. The trends are near-monotone; with 125 contexts per tier, neighbouring tiers can swap.</a:t>
+              <a:t>Boxes: the benchmark, 125 contexts per tier. Diamonds: medians of 2,000 freshly generated contexts per tier, so the trends belong to the generator, not to sampling noise. Load rises at every tier (rank correlation with tier +0.56); the closest gap shrinks overall (−0.36) but widens again at C6 (70 → 75 mm), where the generator starts stacking elements in two or three rows.</a:t>
             </a:r>
             <a:endParaRPr lang="en-US" sz="1100" dirty="0"/>
           </a:p>

--- a/docs/CrossMEP_CIBW78_talk.pptx
+++ b/docs/CrossMEP_CIBW78_talk.pptx
@@ -23,9 +23,11 @@
     <p:sldId id="271" r:id="rId17"/>
     <p:sldId id="272" r:id="rId18"/>
     <p:sldId id="273" r:id="rId19"/>
+    <p:sldId id="274" r:id="rId20"/>
+    <p:sldId id="275" r:id="rId21"/>
   </p:sldIdLst>
   <p:notesMasterIdLst>
-    <p:notesMasterId r:id="rId20"/>
+    <p:notesMasterId r:id="rId22"/>
   </p:notesMasterIdLst>
   <p:sldSz cx="12192000" cy="6858000"/>
   <p:notesSz cx="6858000" cy="12192000"/>
@@ -124,18 +126,18 @@
   <p:extLst>
     <p:ext uri="{521415D9-36F7-43E2-AB2F-B90AF26B5E84}">
       <p14:sectionLst xmlns:p14="http://schemas.microsoft.com/office/powerpoint/2010/main">
-        <p14:section name="Opening" id="{ae595e5e-94ce-81c5-e535-810e40650e6a}">
+        <p14:section name="Opening" id="{4c611684-4a5d-11ba-3c2f-2a96587b7a76}">
           <p14:sldIdLst>
             <p14:sldId id="256"/>
           </p14:sldIdLst>
         </p14:section>
-        <p14:section name="Motivation" id="{3b89c19d-0cb8-d8aa-956f-bafa473af851}">
+        <p14:section name="Motivation" id="{d23312e0-704f-ec5a-6a3c-8ff2d7ee669c}">
           <p14:sldIdLst>
             <p14:sldId id="257"/>
             <p14:sldId id="258"/>
           </p14:sldIdLst>
         </p14:section>
-        <p14:section name="The dataset" id="{814136bf-ffcc-4142-eb50-e191096d1801}">
+        <p14:section name="The dataset" id="{4c5f959b-55d5-84b4-d094-b454fc8bcaef}">
           <p14:sldIdLst>
             <p14:sldId id="259"/>
             <p14:sldId id="260"/>
@@ -144,26 +146,28 @@
             <p14:sldId id="263"/>
           </p14:sldIdLst>
         </p14:section>
-        <p14:section name="Experiments" id="{32e14631-e5ef-3172-1046-09b601e35a4c}">
+        <p14:section name="Experiments" id="{bbb2e11e-54ba-a0ec-6c0d-6e7169dd0181}">
           <p14:sldIdLst>
             <p14:sldId id="264"/>
             <p14:sldId id="265"/>
             <p14:sldId id="266"/>
           </p14:sldIdLst>
         </p14:section>
-        <p14:section name="Use" id="{a131732d-eb52-1a21-8dbe-3b34d3992790}">
+        <p14:section name="Use" id="{e88cd628-f5fc-6f7d-69e4-e45826598288}">
           <p14:sldIdLst>
             <p14:sldId id="267"/>
             <p14:sldId id="268"/>
             <p14:sldId id="269"/>
+            <p14:sldId id="270"/>
           </p14:sldIdLst>
         </p14:section>
-        <p14:section name="Appendix" id="{f5ebbb5c-7571-06b5-c085-1d2bfe93f2f0}">
+        <p14:section name="Appendix" id="{11d5b320-f10b-5b31-bb11-55531da13b9b}">
           <p14:sldIdLst>
-            <p14:sldId id="270"/>
             <p14:sldId id="271"/>
             <p14:sldId id="272"/>
             <p14:sldId id="273"/>
+            <p14:sldId id="274"/>
+            <p14:sldId id="275"/>
           </p14:sldIdLst>
         </p14:section>
       </p14:sectionLst>
@@ -2033,7 +2037,7 @@
           <a:p>
             <a:r>
               <a:rPr lang="en-US" dirty="0"/>
-              <a:t>Second experiment: is the spacing realistic? We took two open buildings from buildingSMART - a residential duplex and a medical-dental clinic, which is a real building - and cut sections every 250 millimetres, the way a context is defined, measuring the gap between pipes running side by side. On the left, the clinic, which the generator never saw: the generated gaps follow the measured ones closely. On the right, the distances. Generated to clinic: 28 millimetres, about as close as the duplex's own two models are to each other. The small duplex is as far from the generator as it is from the clinic. A fixed modular gap would be about 190 millimetres off. (6:15)</a:t>
+              <a:t>The second experiment is the one the generator could fail: is the spacing realistic in a building it never saw? The gap distribution was fitted on a residential duplex from buildingSMART. We held out a second open building, a medical-dental clinic, which is a real building, cut it into sections every 250 millimetres, the way a context is defined, and measured the gap between pipes running side by side. On the left, the clinic: the generated gaps follow the measured ones. On the right, the distances: generated to clinic 28 millimetres, about as close as the duplex's own two models are to each other. A fixed modular gap would be about 190 millimetres off. (6:00)</a:t>
             </a:r>
             <a:endParaRPr lang="en-US" dirty="0"/>
           </a:p>
@@ -2121,7 +2125,7 @@
           <a:p>
             <a:r>
               <a:rPr lang="en-US" dirty="0"/>
-              <a:t>The third experiment connects the dataset to the task it serves: what must a catalog of clamps cover? Take the two-size catalog from the paper as an illustration. It attaches 11.6 per cent of the pipes - 293 of 2,529, interval 10 to 13 - and every one is a single size, DN40. Load never binds: the heaviest pipe is 0.88 kilonewtons against a 2.5 kilonewton clamp. Trays, ducts and conduits are not covered at all. On the right is what the dataset asks of any catalog: two sizes placed where the pipes are would attach 43 per cent, six sizes 80, and 12 sizes every pipe. So 'what should the catalog contain' becomes a measurement. (7:05)</a:t>
+              <a:t>The third is a use of the dataset, not a test of it: what must a catalog of clamps cover? Take the paper's two-size catalog as an illustration. It attaches 11.6 per cent of the pipes, interval 10 to 13, all of one size, DN40; load never binds, and trays, ducts and conduits are not covered at all. On the right is what the dataset asks of any catalog: two well-placed sizes attach 43 per cent, six 80, 12 every pipe. So 'what should the catalog contain' becomes a measurement. (6:50)</a:t>
             </a:r>
             <a:endParaRPr lang="en-US" dirty="0"/>
           </a:p>
@@ -2209,7 +2213,7 @@
           <a:p>
             <a:r>
               <a:rPr lang="en-US" dirty="0"/>
-              <a:t>Using it takes a few lines. Load a split - only the Python standard library is needed - filter by composition, or generate your own mix with the same rules; there is an interactive gallery for inspection. Because there are no labels, the same files serve reinforcement learning, constraint-programming baselines and human benchmarking, and we ship the scoring too: train on the generator with as many seeds as you like, from C1 up to C8; evaluate on the benchmark, the same 125 contexts per tier for every method; and report per tier with 95 per cent intervals and paired tests, so two methods can be compared fairly. (7:50)</a:t>
+              <a:t>Here is what that means in practice. In the studio I choose what crosses the hanger: a tier, or an exact mix, and the seed. Out comes the section a support designer receives, drawn the way an engineer would issue it: every service at true size, its level below the slab, its load at the support, the closest clear gap; and the same run in 3D. Every section is a stored output of the released generator, with the Python call that reproduces it. [Live: switch to the studio, click C3, then Generate another twice, then Exact mix with a duct. If the demo fails, stay on this slide; slide 16 shows two more sections.] (7:30)</a:t>
             </a:r>
             <a:endParaRPr lang="en-US" dirty="0"/>
           </a:p>
@@ -2297,7 +2301,7 @@
           <a:p>
             <a:r>
               <a:rPr lang="en-US" dirty="0"/>
-              <a:t>Its scope: one section at one support - routing, branches and spacing are outside it, although the span is recorded so a method can vary it. Realism is checked on sections of two open buildings; congested racks rest on practice and standards. The trade mix is a design choice, and the data is not for structural design. Next: a public checker for support designs, with best-known costs, so methods can be compared on the answer and not only on the brief; the catalog as an input, so a method is tested on catalogs it has never seen; and a real test set from commercial projects, with supports designed by engineers - which is where we would value your eye. (8:40)</a:t>
+              <a:t>Using it takes a few lines: load a split with the Python standard library, filter by composition, or generate your own mix with the same rules. Because there are no labels, the same files serve reinforcement learning, constraint-programming baselines and human benchmarking, and we ship the scoring: train on the generator, from C1 up to C8; evaluate on the benchmark, the same 125 contexts per tier for every method; report per tier with 95 per cent intervals and paired tests. (8:10)</a:t>
             </a:r>
             <a:endParaRPr lang="en-US" dirty="0"/>
           </a:p>
@@ -2385,7 +2389,7 @@
           <a:p>
             <a:r>
               <a:rPr lang="en-US" dirty="0"/>
-              <a:t>CrossMEP is the brief, not the answer: 7,000 support-design problems, every number traced to its source, checked against two open buildings, and open. The QR code takes you to the data, the code and the gallery. Thank you. (9:10)</a:t>
+              <a:t>Its scope: one section at one support - routing, branches and spacing are outside it, although the span is recorded so a method can vary it. Realism is checked on sections of two open buildings; congested racks rest on practice and standards. The trade mix is a design choice, and the data is not for structural design. Next: a public checker for support designs, with best-known costs, so methods can be compared on the answer and not only on the brief; the catalog as an input, so a method is tested on catalogs it has never seen; and a real test set from commercial projects, with supports designed by engineers - which is where we would value your eye. (8:45)</a:t>
             </a:r>
             <a:endParaRPr lang="en-US" dirty="0"/>
           </a:p>
@@ -2473,7 +2477,7 @@
           <a:p>
             <a:r>
               <a:rPr lang="en-US" dirty="0"/>
-              <a:t>Backup: per-tier medians on the benchmark split, the distance to the held-out building, and the trend statistics behind experiment 1.</a:t>
+              <a:t>CrossMEP is the brief, not the answer: 7,000 support-design problems, every number traced to its source, checked against two open buildings, and open. The QR code takes you to the data, the code, the gallery and the studio. Thank you. (9:15)</a:t>
             </a:r>
             <a:endParaRPr lang="en-US" dirty="0"/>
           </a:p>
@@ -2561,7 +2565,7 @@
           <a:p>
             <a:r>
               <a:rPr lang="en-US" dirty="0"/>
-              <a:t>Backup for questions on experiment 2: sample sizes, both weightings, the noise floor and the sensitivity of the result to the way the sections are cut.</a:t>
+              <a:t>Backup for the live demo. Left: a wall section, six pipes in two rows, each labelled with its size, trade, insulation, offset from the wall and load at the support. Right: an exact mix on a slab, with a duct, a tray, conduits and pipes, their levels below the soffit and the closest clear gap.</a:t>
             </a:r>
             <a:endParaRPr lang="en-US" dirty="0"/>
           </a:p>
@@ -2649,7 +2653,7 @@
           <a:p>
             <a:r>
               <a:rPr lang="en-US" dirty="0"/>
-              <a:t>Backup for questions on experiment 3. Per tier, the benchmark has only 125 contexts, so its intervals are wide; the population estimate from two thousand generated contexts per tier shows the tiers are about equal. The headline depends on the attach-diameter rule and on bin-edge tolerance because one nominal size, DN100, sits 0.3 millimetres outside a bin. Only size and capacity are tested - clearance, insert orientation and anchors are not - so the coverage is an upper bound on what can be installed.</a:t>
+              <a:t>Backup: per-tier medians on the benchmark split, the distance to the held-out building, and the trend statistics behind experiment 1.</a:t>
             </a:r>
             <a:endParaRPr lang="en-US" dirty="0"/>
           </a:p>
@@ -2737,7 +2741,7 @@
           <a:p>
             <a:r>
               <a:rPr lang="en-US" dirty="0"/>
-              <a:t>Backup: what one stored context looks like - plain JSON, one object per context.</a:t>
+              <a:t>Backup for questions on experiment 2: sample sizes, both weightings, the noise floor and the sensitivity of the result to the way the sections are cut.</a:t>
             </a:r>
             <a:endParaRPr lang="en-US" dirty="0"/>
           </a:p>
@@ -2761,6 +2765,94 @@
             <a:fld id="{F7021451-1387-4CA6-816F-3879F97B5CBC}" type="slidenum">
               <a:rPr lang="en-US"/>
               <a:t>18</a:t>
+            </a:fld>
+            <a:endParaRPr lang="en-US"/>
+          </a:p>
+        </p:txBody>
+      </p:sp>
+    </p:spTree>
+    <p:extLst>
+      <p:ext uri="{BB962C8B-B14F-4D97-AF65-F5344CB8AC3E}">
+        <p14:creationId xmlns:p14="http://schemas.microsoft.com/office/powerpoint/2010/main" val="1024086991"/>
+      </p:ext>
+    </p:extLst>
+  </p:cSld>
+  <p:clrMapOvr>
+    <a:masterClrMapping/>
+  </p:clrMapOvr>
+</p:notes>
+</file>
+
+<file path=ppt/notesSlides/notesSlide19.xml><?xml version="1.0" encoding="utf-8"?>
+<p:notes xmlns:a="http://schemas.openxmlformats.org/drawingml/2006/main" xmlns:r="http://schemas.openxmlformats.org/officeDocument/2006/relationships" xmlns:p="http://schemas.openxmlformats.org/presentationml/2006/main">
+  <p:cSld>
+    <p:spTree>
+      <p:nvGrpSpPr>
+        <p:cNvPr id="1" name=""/>
+        <p:cNvGrpSpPr/>
+        <p:nvPr/>
+      </p:nvGrpSpPr>
+      <p:grpSpPr>
+        <a:xfrm>
+          <a:off x="0" y="0"/>
+          <a:ext cx="0" cy="0"/>
+          <a:chOff x="0" y="0"/>
+          <a:chExt cx="0" cy="0"/>
+        </a:xfrm>
+      </p:grpSpPr>
+      <p:sp>
+        <p:nvSpPr>
+          <p:cNvPr id="2" name="Slide Image Placeholder 1"/>
+          <p:cNvSpPr>
+            <a:spLocks noGrp="1" noRot="1" noChangeAspect="1"/>
+          </p:cNvSpPr>
+          <p:nvPr>
+            <p:ph type="sldImg"/>
+          </p:nvPr>
+        </p:nvSpPr>
+        <p:spPr/>
+      </p:sp>
+      <p:sp>
+        <p:nvSpPr>
+          <p:cNvPr id="3" name="Notes Placeholder 2"/>
+          <p:cNvSpPr>
+            <a:spLocks noGrp="1"/>
+          </p:cNvSpPr>
+          <p:nvPr>
+            <p:ph type="body" idx="1"/>
+          </p:nvPr>
+        </p:nvSpPr>
+        <p:spPr/>
+        <p:txBody>
+          <a:bodyPr/>
+          <a:lstStyle/>
+          <a:p>
+            <a:r>
+              <a:rPr lang="en-US" dirty="0"/>
+              <a:t>Backup for questions on experiment 3. Per tier, the benchmark has only 125 contexts, so its intervals are wide; the population estimate from two thousand generated contexts per tier shows the tiers are about equal. The headline depends on the attach-diameter rule and on bin-edge tolerance because one nominal size, DN100, sits 0.3 millimetres outside a bin. Only size and capacity are tested - clearance, insert orientation and anchors are not - so the coverage is an upper bound on what can be installed.</a:t>
+            </a:r>
+            <a:endParaRPr lang="en-US" dirty="0"/>
+          </a:p>
+        </p:txBody>
+      </p:sp>
+      <p:sp>
+        <p:nvSpPr>
+          <p:cNvPr id="4" name="Slide Number Placeholder 3"/>
+          <p:cNvSpPr>
+            <a:spLocks noGrp="1"/>
+          </p:cNvSpPr>
+          <p:nvPr>
+            <p:ph type="sldNum" sz="quarter" idx="10"/>
+          </p:nvPr>
+        </p:nvSpPr>
+        <p:spPr/>
+        <p:txBody>
+          <a:bodyPr/>
+          <a:lstStyle/>
+          <a:p>
+            <a:fld id="{F7021451-1387-4CA6-816F-3879F97B5CBC}" type="slidenum">
+              <a:rPr lang="en-US"/>
+              <a:t>19</a:t>
             </a:fld>
             <a:endParaRPr lang="en-US"/>
           </a:p>
@@ -2849,6 +2941,94 @@
             <a:fld id="{F7021451-1387-4CA6-816F-3879F97B5CBC}" type="slidenum">
               <a:rPr lang="en-US"/>
               <a:t>2</a:t>
+            </a:fld>
+            <a:endParaRPr lang="en-US"/>
+          </a:p>
+        </p:txBody>
+      </p:sp>
+    </p:spTree>
+    <p:extLst>
+      <p:ext uri="{BB962C8B-B14F-4D97-AF65-F5344CB8AC3E}">
+        <p14:creationId xmlns:p14="http://schemas.microsoft.com/office/powerpoint/2010/main" val="1024086991"/>
+      </p:ext>
+    </p:extLst>
+  </p:cSld>
+  <p:clrMapOvr>
+    <a:masterClrMapping/>
+  </p:clrMapOvr>
+</p:notes>
+</file>
+
+<file path=ppt/notesSlides/notesSlide20.xml><?xml version="1.0" encoding="utf-8"?>
+<p:notes xmlns:a="http://schemas.openxmlformats.org/drawingml/2006/main" xmlns:r="http://schemas.openxmlformats.org/officeDocument/2006/relationships" xmlns:p="http://schemas.openxmlformats.org/presentationml/2006/main">
+  <p:cSld>
+    <p:spTree>
+      <p:nvGrpSpPr>
+        <p:cNvPr id="1" name=""/>
+        <p:cNvGrpSpPr/>
+        <p:nvPr/>
+      </p:nvGrpSpPr>
+      <p:grpSpPr>
+        <a:xfrm>
+          <a:off x="0" y="0"/>
+          <a:ext cx="0" cy="0"/>
+          <a:chOff x="0" y="0"/>
+          <a:chExt cx="0" cy="0"/>
+        </a:xfrm>
+      </p:grpSpPr>
+      <p:sp>
+        <p:nvSpPr>
+          <p:cNvPr id="2" name="Slide Image Placeholder 1"/>
+          <p:cNvSpPr>
+            <a:spLocks noGrp="1" noRot="1" noChangeAspect="1"/>
+          </p:cNvSpPr>
+          <p:nvPr>
+            <p:ph type="sldImg"/>
+          </p:nvPr>
+        </p:nvSpPr>
+        <p:spPr/>
+      </p:sp>
+      <p:sp>
+        <p:nvSpPr>
+          <p:cNvPr id="3" name="Notes Placeholder 2"/>
+          <p:cNvSpPr>
+            <a:spLocks noGrp="1"/>
+          </p:cNvSpPr>
+          <p:nvPr>
+            <p:ph type="body" idx="1"/>
+          </p:nvPr>
+        </p:nvSpPr>
+        <p:spPr/>
+        <p:txBody>
+          <a:bodyPr/>
+          <a:lstStyle/>
+          <a:p>
+            <a:r>
+              <a:rPr lang="en-US" dirty="0"/>
+              <a:t>Backup: what one stored context looks like - plain JSON, one object per context.</a:t>
+            </a:r>
+            <a:endParaRPr lang="en-US" dirty="0"/>
+          </a:p>
+        </p:txBody>
+      </p:sp>
+      <p:sp>
+        <p:nvSpPr>
+          <p:cNvPr id="4" name="Slide Number Placeholder 3"/>
+          <p:cNvSpPr>
+            <a:spLocks noGrp="1"/>
+          </p:cNvSpPr>
+          <p:nvPr>
+            <p:ph type="sldNum" sz="quarter" idx="10"/>
+          </p:nvPr>
+        </p:nvSpPr>
+        <p:spPr/>
+        <p:txBody>
+          <a:bodyPr/>
+          <a:lstStyle/>
+          <a:p>
+            <a:fld id="{F7021451-1387-4CA6-816F-3879F97B5CBC}" type="slidenum">
+              <a:rPr lang="en-US"/>
+              <a:t>20</a:t>
             </a:fld>
             <a:endParaRPr lang="en-US"/>
           </a:p>
@@ -3441,7 +3621,7 @@
           <a:p>
             <a:r>
               <a:rPr lang="en-US" dirty="0"/>
-              <a:t>First experiment: are the tiers ordered by difficulty? The count is exact by construction, so we look at congestion and load. The boxes are the benchmark; the diamonds are medians over 2,000 freshly generated contexts per tier - the generator itself, not sampling noise. Load at the support rises at every step, from 0.1 to 1.7 kilonewtons. Congestion rises overall - the closest gap falls from 120 to about 62 millimetres - but at C6 the generator starts stacking in two or three rows, so each row holds fewer elements and the gap widens again. So the tier fixes the count; congestion and load follow on average, and methods should be compared tier by tier. (5:20)</a:t>
+              <a:t>The first experiment is a design check, not a discovery: does difficulty grow with the tier, as intended? The count is fixed by construction; load and congestion follow from the rules, so this shows the dataset behaves as designed. Load at the support rises at every step, from 0.1 to 1.7 kilonewtons. The closest gap falls from 120 to about 62 millimetres, but widens again at C6, where the generator starts stacking in two or three rows. So report methods tier by tier. (5:20)</a:t>
             </a:r>
             <a:endParaRPr lang="en-US" dirty="0"/>
           </a:p>
@@ -4567,7 +4747,7 @@
                   <a:schemeClr val="tx1"/>
                 </a:solidFill>
               </a:rPr>
-              <a:t>Experiment 2: generated spacing matches a building it never saw</a:t>
+              <a:t>Experiment 2, the real test: spacing in a building it never saw</a:t>
             </a:r>
             <a:endParaRPr lang="en-US" sz="2600" dirty="0"/>
           </a:p>
@@ -4627,7 +4807,7 @@
                   <a:srgbClr val="52514E"/>
                 </a:solidFill>
               </a:rPr>
-              <a:t>Sections cut every 250 mm through two open IFC buildings from buildingSMART (CC BY 4.0), measuring the clear gap between side-by-side pipes. The medical-dental clinic, a real building with 797 measured pipe pairs, is 28 mm from the generated gaps (95 % CI 16–44): about as close as the duplex’s own two models are to each other (26 mm). The small residential duplex is as far from the generator (70–85 mm) as from the clinic (71–85 mm).</a:t>
+              <a:t>The gap distribution was fitted on the duplex; the clinic was held out. Sections cut every 250 mm through two open IFC buildings from buildingSMART (CC BY 4.0), measuring the clear gap between side-by-side pipes. The medical-dental clinic, a real building with 797 measured pipe pairs, is 28 mm from the generated gaps (95 % CI 16–44): about as close as the duplex’s own two models are to each other (26 mm). The small residential duplex is as far from the generator (70–85 mm) as from the clinic (71–85 mm).</a:t>
             </a:r>
             <a:endParaRPr lang="en-US" sz="1100" dirty="0"/>
           </a:p>
@@ -4735,7 +4915,7 @@
                   <a:schemeClr val="tx1"/>
                 </a:solidFill>
               </a:rPr>
-              <a:t>Experiment 3: a two-size clamp catalog attaches 1 pipe in 9</a:t>
+              <a:t>Experiment 3, a use: what must a clamp catalog cover?</a:t>
             </a:r>
             <a:endParaRPr lang="en-US" sz="2600" dirty="0"/>
           </a:p>
@@ -5111,6 +5291,310 @@
 <file path=ppt/slides/slide12.xml><?xml version="1.0" encoding="utf-8"?>
 <p:sld xmlns:a="http://schemas.openxmlformats.org/drawingml/2006/main" xmlns:r="http://schemas.openxmlformats.org/officeDocument/2006/relationships" xmlns:p="http://schemas.openxmlformats.org/presentationml/2006/main">
   <p:cSld name="Slide 12">
+    <p:spTree>
+      <p:nvGrpSpPr>
+        <p:cNvPr id="1" name=""/>
+        <p:cNvGrpSpPr/>
+        <p:nvPr/>
+      </p:nvGrpSpPr>
+      <p:grpSpPr>
+        <a:xfrm>
+          <a:off x="0" y="0"/>
+          <a:ext cx="0" cy="0"/>
+          <a:chOff x="0" y="0"/>
+          <a:chExt cx="0" cy="0"/>
+        </a:xfrm>
+      </p:grpSpPr>
+      <p:sp>
+        <p:nvSpPr>
+          <p:cNvPr id="2" name="Text 0"/>
+          <p:cNvSpPr/>
+          <p:nvPr>
+            <p:ph idx="100" type="title" hasCustomPrompt="1"/>
+          </p:nvPr>
+        </p:nvSpPr>
+        <p:spPr>
+          <a:xfrm>
+            <a:off x="548640" y="274320"/>
+            <a:ext cx="11091672" cy="960120"/>
+          </a:xfrm>
+          <a:prstGeom prst="rect">
+            <a:avLst/>
+          </a:prstGeom>
+          <a:noFill/>
+          <a:ln/>
+        </p:spPr>
+        <p:txBody>
+          <a:bodyPr wrap="square" lIns="0" tIns="0" rIns="0" bIns="0" rtlCol="0" anchor="ctr"/>
+          <a:lstStyle/>
+          <a:p>
+            <a:pPr algn="l" indent="0" marL="0">
+              <a:buNone/>
+            </a:pPr>
+            <a:r>
+              <a:rPr lang="en-US" sz="2600" b="1" dirty="0">
+                <a:solidFill>
+                  <a:schemeClr val="tx1"/>
+                </a:solidFill>
+              </a:rPr>
+              <a:t>See it: set the parameters, get the support designer’s brief</a:t>
+            </a:r>
+            <a:endParaRPr lang="en-US" sz="2600" dirty="0"/>
+          </a:p>
+        </p:txBody>
+      </p:sp>
+      <p:pic>
+        <p:nvPicPr>
+          <p:cNvPr id="3" name="studio screenshot" descr="/home/user/crossmep_dataset/docs/figures/08_studio_demo.png">    </p:cNvPr>
+          <p:cNvPicPr>
+            <a:picLocks noChangeAspect="1"/>
+          </p:cNvPicPr>
+          <p:nvPr/>
+        </p:nvPicPr>
+        <p:blipFill>
+          <a:blip r:embed="rId1"/>
+          <a:stretch>
+            <a:fillRect/>
+          </a:stretch>
+        </p:blipFill>
+        <p:spPr>
+          <a:xfrm>
+            <a:off x="548640" y="1355716"/>
+            <a:ext cx="8001000" cy="4512329"/>
+          </a:xfrm>
+          <a:prstGeom prst="rect">
+            <a:avLst/>
+          </a:prstGeom>
+        </p:spPr>
+      </p:pic>
+      <p:sp>
+        <p:nvSpPr>
+          <p:cNvPr id="4" name="studio caption"/>
+          <p:cNvSpPr txBox="1"/>
+          <p:nvPr/>
+        </p:nvSpPr>
+        <p:spPr>
+          <a:xfrm>
+            <a:off x="548640" y="5941196"/>
+            <a:ext cx="8001000" cy="274320"/>
+          </a:xfrm>
+          <a:prstGeom prst="rect">
+            <a:avLst/>
+          </a:prstGeom>
+          <a:noFill/>
+          <a:ln/>
+        </p:spPr>
+        <p:txBody>
+          <a:bodyPr wrap="square" lIns="0" tIns="0" rIns="0" bIns="0" rtlCol="0" anchor="t"/>
+          <a:lstStyle/>
+          <a:p>
+            <a:pPr indent="0" marL="0">
+              <a:buNone/>
+            </a:pPr>
+            <a:r>
+              <a:rPr lang="en-US" sz="1100" dirty="0">
+                <a:solidFill>
+                  <a:srgbClr val="52514E"/>
+                </a:solidFill>
+              </a:rPr>
+              <a:t>Generator Studio, tier C7, seed 0: the section as a support detail (scale 1:20) and in 3D.</a:t>
+            </a:r>
+            <a:endParaRPr lang="en-US" sz="1100" dirty="0"/>
+          </a:p>
+        </p:txBody>
+      </p:sp>
+      <p:sp>
+        <p:nvSpPr>
+          <p:cNvPr id="5" name="studio bullets"/>
+          <p:cNvSpPr txBox="1"/>
+          <p:nvPr/>
+        </p:nvSpPr>
+        <p:spPr>
+          <a:xfrm>
+            <a:off x="8823960" y="1371600"/>
+            <a:ext cx="2816352" cy="2743200"/>
+          </a:xfrm>
+          <a:prstGeom prst="rect">
+            <a:avLst/>
+          </a:prstGeom>
+          <a:noFill/>
+          <a:ln/>
+        </p:spPr>
+        <p:txBody>
+          <a:bodyPr wrap="square" lIns="0" tIns="0" rIns="0" bIns="0" rtlCol="0" anchor="t"/>
+          <a:lstStyle/>
+          <a:p>
+            <a:pPr marL="342900" indent="-342900">
+              <a:spcAft>
+                <a:spcPts val="600"/>
+              </a:spcAft>
+              <a:buSzPct val="100000"/>
+              <a:buChar char="•"/>
+            </a:pPr>
+            <a:r>
+              <a:rPr lang="en-US" sz="1400" dirty="0">
+                <a:solidFill>
+                  <a:schemeClr val="tx1"/>
+                </a:solidFill>
+              </a:rPr>
+              <a:t>In: a tier or an exact mix of services, slab or wall, a seed</a:t>
+            </a:r>
+            <a:endParaRPr lang="en-US" sz="1400" dirty="0"/>
+          </a:p>
+          <a:p>
+            <a:pPr marL="342900" indent="-342900">
+              <a:spcAft>
+                <a:spcPts val="600"/>
+              </a:spcAft>
+              <a:buSzPct val="100000"/>
+              <a:buChar char="•"/>
+            </a:pPr>
+            <a:r>
+              <a:rPr lang="en-US" sz="1400" dirty="0">
+                <a:solidFill>
+                  <a:schemeClr val="tx1"/>
+                </a:solidFill>
+              </a:rPr>
+              <a:t>Out: the section a support designer receives, with sizes, levels, loads and clear gaps</a:t>
+            </a:r>
+            <a:endParaRPr lang="en-US" sz="1400" dirty="0"/>
+          </a:p>
+          <a:p>
+            <a:pPr marL="342900" indent="-342900">
+              <a:spcAft>
+                <a:spcPts val="600"/>
+              </a:spcAft>
+              <a:buSzPct val="100000"/>
+              <a:buChar char="•"/>
+            </a:pPr>
+            <a:r>
+              <a:rPr lang="en-US" sz="1400" dirty="0">
+                <a:solidFill>
+                  <a:schemeClr val="tx1"/>
+                </a:solidFill>
+              </a:rPr>
+              <a:t>Every section is a stored output of the released generator, with the Python call that reproduces it</a:t>
+            </a:r>
+            <a:endParaRPr lang="en-US" sz="1400" dirty="0"/>
+          </a:p>
+        </p:txBody>
+      </p:sp>
+      <p:pic>
+        <p:nvPicPr>
+          <p:cNvPr id="6" name="qr studio" descr="/home/user/crossmep_dataset/docs/figures/qr_studio.png">    </p:cNvPr>
+          <p:cNvPicPr>
+            <a:picLocks noChangeAspect="1"/>
+          </p:cNvPicPr>
+          <p:nvPr/>
+        </p:nvPicPr>
+        <p:blipFill>
+          <a:blip r:embed="rId2"/>
+          <a:stretch>
+            <a:fillRect/>
+          </a:stretch>
+        </p:blipFill>
+        <p:spPr>
+          <a:xfrm>
+            <a:off x="9500616" y="4160520"/>
+            <a:ext cx="1463040" cy="1463040"/>
+          </a:xfrm>
+          <a:prstGeom prst="rect">
+            <a:avLst/>
+          </a:prstGeom>
+        </p:spPr>
+      </p:pic>
+      <p:sp>
+        <p:nvSpPr>
+          <p:cNvPr id="7" name="studio link"/>
+          <p:cNvSpPr txBox="1"/>
+          <p:nvPr/>
+        </p:nvSpPr>
+        <p:spPr>
+          <a:xfrm>
+            <a:off x="8823960" y="5669280"/>
+            <a:ext cx="2816352" cy="320040"/>
+          </a:xfrm>
+          <a:prstGeom prst="rect">
+            <a:avLst/>
+          </a:prstGeom>
+          <a:noFill/>
+          <a:ln/>
+        </p:spPr>
+        <p:txBody>
+          <a:bodyPr wrap="square" lIns="0" tIns="0" rIns="0" bIns="0" rtlCol="0" anchor="t"/>
+          <a:lstStyle/>
+          <a:p>
+            <a:pPr algn="ctr" indent="0" marL="0">
+              <a:buNone/>
+            </a:pPr>
+            <a:r>
+              <a:rPr lang="en-US" sz="1100" dirty="0">
+                <a:solidFill>
+                  <a:srgbClr val="52514E"/>
+                </a:solidFill>
+              </a:rPr>
+              <a:t>Try it: docs/studio in the repository</a:t>
+            </a:r>
+            <a:endParaRPr lang="en-US" sz="1100" dirty="0"/>
+          </a:p>
+        </p:txBody>
+      </p:sp>
+      <p:sp>
+        <p:nvSpPr>
+          <p:cNvPr id="25" name="Slide Number Placeholder 0"/>
+          <p:cNvSpPr>
+            <a:spLocks noGrp="1"/>
+          </p:cNvSpPr>
+          <p:nvPr>
+            <p:ph type="sldNum" sz="quarter" idx="4294967295"/>
+          </p:nvPr>
+        </p:nvSpPr>
+        <p:spPr>
+          <a:xfrm>
+            <a:off x="11064240" y="6419088"/>
+            <a:ext cx="594360" cy="274320"/>
+          </a:xfrm>
+          <a:prstGeom prst="rect">
+            <a:avLst/>
+          </a:prstGeom>
+          <a:extLst>
+            <a:ext uri="{C572A759-6A51-4108-AA02-DFA0A04FC94B}">
+              <ma14:wrappingTextBoxFlag xmlns:ma14="http://schemas.microsoft.com/office/mac/drawingml/2011/main" val="0"/>
+            </a:ext>
+          </a:extLst>
+        </p:spPr>
+        <p:txBody>
+          <a:bodyPr/>
+          <a:lstStyle>
+            <a:lvl1pPr>
+              <a:defRPr sz="900">
+                <a:solidFill>
+                  <a:srgbClr val="898781"/>
+                </a:solidFill>
+              </a:defRPr>
+            </a:lvl1pPr>
+          </a:lstStyle>
+          <a:p>
+            <a:pPr algn="r"/>
+            <a:fld id="{F7021451-1387-4CA6-816F-3879F97B5CBC}" type="slidenum">
+              <a:rPr b="0" lang="en-US"/>
+              <a:t>12</a:t>
+            </a:fld>
+            <a:endParaRPr lang="en-US"/>
+          </a:p>
+        </p:txBody>
+      </p:sp>
+    </p:spTree>
+  </p:cSld>
+  <p:clrMapOvr>
+    <a:masterClrMapping/>
+  </p:clrMapOvr>
+</p:sld>
+</file>
+
+<file path=ppt/slides/slide13.xml><?xml version="1.0" encoding="utf-8"?>
+<p:sld xmlns:a="http://schemas.openxmlformats.org/drawingml/2006/main" xmlns:r="http://schemas.openxmlformats.org/officeDocument/2006/relationships" xmlns:p="http://schemas.openxmlformats.org/presentationml/2006/main">
+  <p:cSld name="Slide 13">
     <p:spTree>
       <p:nvGrpSpPr>
         <p:cNvPr id="1" name=""/>
@@ -5785,7 +6269,7 @@
             <a:pPr algn="r"/>
             <a:fld id="{F7021451-1387-4CA6-816F-3879F97B5CBC}" type="slidenum">
               <a:rPr b="0" lang="en-US"/>
-              <a:t>12</a:t>
+              <a:t>13</a:t>
             </a:fld>
             <a:endParaRPr lang="en-US"/>
           </a:p>
@@ -5799,9 +6283,9 @@
 </p:sld>
 </file>
 
-<file path=ppt/slides/slide13.xml><?xml version="1.0" encoding="utf-8"?>
+<file path=ppt/slides/slide14.xml><?xml version="1.0" encoding="utf-8"?>
 <p:sld xmlns:a="http://schemas.openxmlformats.org/drawingml/2006/main" xmlns:r="http://schemas.openxmlformats.org/officeDocument/2006/relationships" xmlns:p="http://schemas.openxmlformats.org/presentationml/2006/main">
-  <p:cSld name="Slide 13">
+  <p:cSld name="Slide 14">
     <p:spTree>
       <p:nvGrpSpPr>
         <p:cNvPr id="1" name=""/>
@@ -6272,7 +6756,7 @@
             <a:pPr algn="r"/>
             <a:fld id="{F7021451-1387-4CA6-816F-3879F97B5CBC}" type="slidenum">
               <a:rPr b="0" lang="en-US"/>
-              <a:t>13</a:t>
+              <a:t>14</a:t>
             </a:fld>
             <a:endParaRPr lang="en-US"/>
           </a:p>
@@ -6286,9 +6770,9 @@
 </p:sld>
 </file>
 
-<file path=ppt/slides/slide14.xml><?xml version="1.0" encoding="utf-8"?>
+<file path=ppt/slides/slide15.xml><?xml version="1.0" encoding="utf-8"?>
 <p:sld xmlns:a="http://schemas.openxmlformats.org/drawingml/2006/main" xmlns:r="http://schemas.openxmlformats.org/officeDocument/2006/relationships" xmlns:p="http://schemas.openxmlformats.org/presentationml/2006/main">
-  <p:cSld name="Slide 14">
+  <p:cSld name="Slide 15">
     <p:spTree>
       <p:nvGrpSpPr>
         <p:cNvPr id="1" name=""/>
@@ -6489,9 +6973,237 @@
 </p:sld>
 </file>
 
-<file path=ppt/slides/slide15.xml><?xml version="1.0" encoding="utf-8"?>
+<file path=ppt/slides/slide16.xml><?xml version="1.0" encoding="utf-8"?>
 <p:sld xmlns:a="http://schemas.openxmlformats.org/drawingml/2006/main" xmlns:r="http://schemas.openxmlformats.org/officeDocument/2006/relationships" xmlns:p="http://schemas.openxmlformats.org/presentationml/2006/main">
-  <p:cSld name="Slide 15">
+  <p:cSld name="Slide 16">
+    <p:spTree>
+      <p:nvGrpSpPr>
+        <p:cNvPr id="1" name=""/>
+        <p:cNvGrpSpPr/>
+        <p:nvPr/>
+      </p:nvGrpSpPr>
+      <p:grpSpPr>
+        <a:xfrm>
+          <a:off x="0" y="0"/>
+          <a:ext cx="0" cy="0"/>
+          <a:chOff x="0" y="0"/>
+          <a:chExt cx="0" cy="0"/>
+        </a:xfrm>
+      </p:grpSpPr>
+      <p:sp>
+        <p:nvSpPr>
+          <p:cNvPr id="2" name="Text 0"/>
+          <p:cNvSpPr/>
+          <p:nvPr>
+            <p:ph idx="100" type="title" hasCustomPrompt="1"/>
+          </p:nvPr>
+        </p:nvSpPr>
+        <p:spPr>
+          <a:xfrm>
+            <a:off x="548640" y="274320"/>
+            <a:ext cx="11091672" cy="960120"/>
+          </a:xfrm>
+          <a:prstGeom prst="rect">
+            <a:avLst/>
+          </a:prstGeom>
+          <a:noFill/>
+          <a:ln/>
+        </p:spPr>
+        <p:txBody>
+          <a:bodyPr wrap="square" lIns="0" tIns="0" rIns="0" bIns="0" rtlCol="0" anchor="ctr"/>
+          <a:lstStyle/>
+          <a:p>
+            <a:pPr algn="l" indent="0" marL="0">
+              <a:buNone/>
+            </a:pPr>
+            <a:r>
+              <a:rPr lang="en-US" sz="2600" b="1" dirty="0">
+                <a:solidFill>
+                  <a:schemeClr val="tx1"/>
+                </a:solidFill>
+              </a:rPr>
+              <a:t>Appendix: two more sections from the Generator Studio</a:t>
+            </a:r>
+            <a:endParaRPr lang="en-US" sz="2600" dirty="0"/>
+          </a:p>
+        </p:txBody>
+      </p:sp>
+      <p:pic>
+        <p:nvPicPr>
+          <p:cNvPr id="3" name="studio wall sheet" descr="/home/user/crossmep_dataset/docs/figures/09_studio_wall.png">    </p:cNvPr>
+          <p:cNvPicPr>
+            <a:picLocks noChangeAspect="1"/>
+          </p:cNvPicPr>
+          <p:nvPr/>
+        </p:nvPicPr>
+        <p:blipFill>
+          <a:blip r:embed="rId1"/>
+          <a:stretch>
+            <a:fillRect/>
+          </a:stretch>
+        </p:blipFill>
+        <p:spPr>
+          <a:xfrm>
+            <a:off x="548640" y="1553108"/>
+            <a:ext cx="5431536" cy="3843223"/>
+          </a:xfrm>
+          <a:prstGeom prst="rect">
+            <a:avLst/>
+          </a:prstGeom>
+        </p:spPr>
+      </p:pic>
+      <p:pic>
+        <p:nvPicPr>
+          <p:cNvPr id="4" name="studio mix sheet" descr="/home/user/crossmep_dataset/docs/figures/10_studio_mix.png">    </p:cNvPr>
+          <p:cNvPicPr>
+            <a:picLocks noChangeAspect="1"/>
+          </p:cNvPicPr>
+          <p:nvPr/>
+        </p:nvPicPr>
+        <p:blipFill>
+          <a:blip r:embed="rId2"/>
+          <a:stretch>
+            <a:fillRect/>
+          </a:stretch>
+        </p:blipFill>
+        <p:spPr>
+          <a:xfrm>
+            <a:off x="6208776" y="1553108"/>
+            <a:ext cx="5431536" cy="3843223"/>
+          </a:xfrm>
+          <a:prstGeom prst="rect">
+            <a:avLst/>
+          </a:prstGeom>
+        </p:spPr>
+      </p:pic>
+      <p:sp>
+        <p:nvSpPr>
+          <p:cNvPr id="5" name="wall caption"/>
+          <p:cNvSpPr txBox="1"/>
+          <p:nvPr/>
+        </p:nvSpPr>
+        <p:spPr>
+          <a:xfrm>
+            <a:off x="548640" y="5469484"/>
+            <a:ext cx="5431536" cy="457200"/>
+          </a:xfrm>
+          <a:prstGeom prst="rect">
+            <a:avLst/>
+          </a:prstGeom>
+          <a:noFill/>
+          <a:ln/>
+        </p:spPr>
+        <p:txBody>
+          <a:bodyPr wrap="square" lIns="0" tIns="0" rIns="0" bIns="0" rtlCol="0" anchor="t"/>
+          <a:lstStyle/>
+          <a:p>
+            <a:pPr indent="0" marL="0">
+              <a:buNone/>
+            </a:pPr>
+            <a:r>
+              <a:rPr lang="en-US" sz="1100" dirty="0">
+                <a:solidFill>
+                  <a:srgbClr val="52514E"/>
+                </a:solidFill>
+              </a:rPr>
+              <a:t>Tier C6, seed 0, section 5: six pipes fixed to a wall; offsets from the wall face, the closest clear gap 25 mm.</a:t>
+            </a:r>
+            <a:endParaRPr lang="en-US" sz="1100" dirty="0"/>
+          </a:p>
+        </p:txBody>
+      </p:sp>
+      <p:sp>
+        <p:nvSpPr>
+          <p:cNvPr id="6" name="mix caption"/>
+          <p:cNvSpPr txBox="1"/>
+          <p:nvPr/>
+        </p:nvSpPr>
+        <p:spPr>
+          <a:xfrm>
+            <a:off x="6208776" y="5469484"/>
+            <a:ext cx="5431536" cy="457200"/>
+          </a:xfrm>
+          <a:prstGeom prst="rect">
+            <a:avLst/>
+          </a:prstGeom>
+          <a:noFill/>
+          <a:ln/>
+        </p:spPr>
+        <p:txBody>
+          <a:bodyPr wrap="square" lIns="0" tIns="0" rIns="0" bIns="0" rtlCol="0" anchor="t"/>
+          <a:lstStyle/>
+          <a:p>
+            <a:pPr indent="0" marL="0">
+              <a:buNone/>
+            </a:pPr>
+            <a:r>
+              <a:rPr lang="en-US" sz="1100" dirty="0">
+                <a:solidFill>
+                  <a:srgbClr val="52514E"/>
+                </a:solidFill>
+              </a:rPr>
+              <a:t>Exact mix: 2 pipes, 1 tray, 1 duct, 2 conduits on a slab; levels below the soffit and the load at the support.</a:t>
+            </a:r>
+            <a:endParaRPr lang="en-US" sz="1100" dirty="0"/>
+          </a:p>
+        </p:txBody>
+      </p:sp>
+      <p:sp>
+        <p:nvSpPr>
+          <p:cNvPr id="25" name="Slide Number Placeholder 0"/>
+          <p:cNvSpPr>
+            <a:spLocks noGrp="1"/>
+          </p:cNvSpPr>
+          <p:nvPr>
+            <p:ph type="sldNum" sz="quarter" idx="4294967295"/>
+          </p:nvPr>
+        </p:nvSpPr>
+        <p:spPr>
+          <a:xfrm>
+            <a:off x="11064240" y="6419088"/>
+            <a:ext cx="594360" cy="274320"/>
+          </a:xfrm>
+          <a:prstGeom prst="rect">
+            <a:avLst/>
+          </a:prstGeom>
+          <a:extLst>
+            <a:ext uri="{C572A759-6A51-4108-AA02-DFA0A04FC94B}">
+              <ma14:wrappingTextBoxFlag xmlns:ma14="http://schemas.microsoft.com/office/mac/drawingml/2011/main" val="0"/>
+            </a:ext>
+          </a:extLst>
+        </p:spPr>
+        <p:txBody>
+          <a:bodyPr/>
+          <a:lstStyle>
+            <a:lvl1pPr>
+              <a:defRPr sz="900">
+                <a:solidFill>
+                  <a:srgbClr val="898781"/>
+                </a:solidFill>
+              </a:defRPr>
+            </a:lvl1pPr>
+          </a:lstStyle>
+          <a:p>
+            <a:pPr algn="r"/>
+            <a:fld id="{F7021451-1387-4CA6-816F-3879F97B5CBC}" type="slidenum">
+              <a:rPr b="0" lang="en-US"/>
+              <a:t>16</a:t>
+            </a:fld>
+            <a:endParaRPr lang="en-US"/>
+          </a:p>
+        </p:txBody>
+      </p:sp>
+    </p:spTree>
+  </p:cSld>
+  <p:clrMapOvr>
+    <a:masterClrMapping/>
+  </p:clrMapOvr>
+</p:sld>
+</file>
+
+<file path=ppt/slides/slide17.xml><?xml version="1.0" encoding="utf-8"?>
+<p:sld xmlns:a="http://schemas.openxmlformats.org/drawingml/2006/main" xmlns:r="http://schemas.openxmlformats.org/officeDocument/2006/relationships" xmlns:p="http://schemas.openxmlformats.org/presentationml/2006/main">
+  <p:cSld name="Slide 17">
     <p:spTree>
       <p:nvGrpSpPr>
         <p:cNvPr id="1" name=""/>
@@ -6546,7 +7258,7 @@
       </p:sp>
       <p:graphicFrame>
         <p:nvGraphicFramePr>
-          <p:cNvPr id="16" name="tier table"/>
+          <p:cNvPr id="18" name="tier table"/>
           <p:cNvGraphicFramePr>
             <a:graphicFrameLocks noGrp="1"/>
           </p:cNvGraphicFramePr>
@@ -9856,7 +10568,7 @@
             <a:pPr algn="r"/>
             <a:fld id="{F7021451-1387-4CA6-816F-3879F97B5CBC}" type="slidenum">
               <a:rPr b="0" lang="en-US"/>
-              <a:t>15</a:t>
+              <a:t>17</a:t>
             </a:fld>
             <a:endParaRPr lang="en-US"/>
           </a:p>
@@ -9870,9 +10582,9 @@
 </p:sld>
 </file>
 
-<file path=ppt/slides/slide16.xml><?xml version="1.0" encoding="utf-8"?>
+<file path=ppt/slides/slide18.xml><?xml version="1.0" encoding="utf-8"?>
 <p:sld xmlns:a="http://schemas.openxmlformats.org/drawingml/2006/main" xmlns:r="http://schemas.openxmlformats.org/officeDocument/2006/relationships" xmlns:p="http://schemas.openxmlformats.org/presentationml/2006/main">
-  <p:cSld name="Slide 16">
+  <p:cSld name="Slide 18">
     <p:spTree>
       <p:nvGrpSpPr>
         <p:cNvPr id="1" name=""/>
@@ -9927,7 +10639,7 @@
       </p:sp>
       <p:graphicFrame>
         <p:nvGraphicFramePr>
-          <p:cNvPr id="17" name="samples table"/>
+          <p:cNvPr id="19" name="samples table"/>
           <p:cNvGraphicFramePr>
             <a:graphicFrameLocks noGrp="1"/>
           </p:cNvGraphicFramePr>
@@ -11610,7 +12322,7 @@
       </p:graphicFrame>
       <p:graphicFrame>
         <p:nvGraphicFramePr>
-          <p:cNvPr id="33" name="distances table"/>
+          <p:cNvPr id="37" name="distances table"/>
           <p:cNvGraphicFramePr>
             <a:graphicFrameLocks noGrp="1"/>
           </p:cNvGraphicFramePr>
@@ -13655,7 +14367,7 @@
             <a:pPr algn="r"/>
             <a:fld id="{F7021451-1387-4CA6-816F-3879F97B5CBC}" type="slidenum">
               <a:rPr b="0" lang="en-US"/>
-              <a:t>16</a:t>
+              <a:t>18</a:t>
             </a:fld>
             <a:endParaRPr lang="en-US"/>
           </a:p>
@@ -13669,9 +14381,9 @@
 </p:sld>
 </file>
 
-<file path=ppt/slides/slide17.xml><?xml version="1.0" encoding="utf-8"?>
+<file path=ppt/slides/slide19.xml><?xml version="1.0" encoding="utf-8"?>
 <p:sld xmlns:a="http://schemas.openxmlformats.org/drawingml/2006/main" xmlns:r="http://schemas.openxmlformats.org/officeDocument/2006/relationships" xmlns:p="http://schemas.openxmlformats.org/presentationml/2006/main">
-  <p:cSld name="Slide 17">
+  <p:cSld name="Slide 19">
     <p:spTree>
       <p:nvGrpSpPr>
         <p:cNvPr id="1" name=""/>
@@ -13726,7 +14438,7 @@
       </p:sp>
       <p:graphicFrame>
         <p:nvGraphicFramePr>
-          <p:cNvPr id="18" name="per tier catalog table"/>
+          <p:cNvPr id="20" name="per tier catalog table"/>
           <p:cNvGraphicFramePr>
             <a:graphicFrameLocks noGrp="1"/>
           </p:cNvGraphicFramePr>
@@ -16128,7 +16840,7 @@
       </p:graphicFrame>
       <p:graphicFrame>
         <p:nvGraphicFramePr>
-          <p:cNvPr id="35" name="sensitivity table"/>
+          <p:cNvPr id="39" name="sensitivity table"/>
           <p:cNvGraphicFramePr>
             <a:graphicFrameLocks noGrp="1"/>
           </p:cNvGraphicFramePr>
@@ -17256,7 +17968,7 @@
       </p:sp>
       <p:graphicFrame>
         <p:nvGraphicFramePr>
-          <p:cNvPr id="52" name="split catalog table"/>
+          <p:cNvPr id="58" name="split catalog table"/>
           <p:cNvGraphicFramePr>
             <a:graphicFrameLocks noGrp="1"/>
           </p:cNvGraphicFramePr>
@@ -18412,492 +19124,7 @@
             <a:pPr algn="r"/>
             <a:fld id="{F7021451-1387-4CA6-816F-3879F97B5CBC}" type="slidenum">
               <a:rPr b="0" lang="en-US"/>
-              <a:t>17</a:t>
-            </a:fld>
-            <a:endParaRPr lang="en-US"/>
-          </a:p>
-        </p:txBody>
-      </p:sp>
-    </p:spTree>
-  </p:cSld>
-  <p:clrMapOvr>
-    <a:masterClrMapping/>
-  </p:clrMapOvr>
-</p:sld>
-</file>
-
-<file path=ppt/slides/slide18.xml><?xml version="1.0" encoding="utf-8"?>
-<p:sld xmlns:a="http://schemas.openxmlformats.org/drawingml/2006/main" xmlns:r="http://schemas.openxmlformats.org/officeDocument/2006/relationships" xmlns:p="http://schemas.openxmlformats.org/presentationml/2006/main">
-  <p:cSld name="Slide 18">
-    <p:spTree>
-      <p:nvGrpSpPr>
-        <p:cNvPr id="1" name=""/>
-        <p:cNvGrpSpPr/>
-        <p:nvPr/>
-      </p:nvGrpSpPr>
-      <p:grpSpPr>
-        <a:xfrm>
-          <a:off x="0" y="0"/>
-          <a:ext cx="0" cy="0"/>
-          <a:chOff x="0" y="0"/>
-          <a:chExt cx="0" cy="0"/>
-        </a:xfrm>
-      </p:grpSpPr>
-      <p:sp>
-        <p:nvSpPr>
-          <p:cNvPr id="2" name="Text 0"/>
-          <p:cNvSpPr/>
-          <p:nvPr>
-            <p:ph idx="100" type="title" hasCustomPrompt="1"/>
-          </p:nvPr>
-        </p:nvSpPr>
-        <p:spPr>
-          <a:xfrm>
-            <a:off x="548640" y="274320"/>
-            <a:ext cx="11091672" cy="960120"/>
-          </a:xfrm>
-          <a:prstGeom prst="rect">
-            <a:avLst/>
-          </a:prstGeom>
-          <a:noFill/>
-          <a:ln/>
-        </p:spPr>
-        <p:txBody>
-          <a:bodyPr wrap="square" lIns="0" tIns="0" rIns="0" bIns="0" rtlCol="0" anchor="ctr"/>
-          <a:lstStyle/>
-          <a:p>
-            <a:pPr algn="l" indent="0" marL="0">
-              <a:buNone/>
-            </a:pPr>
-            <a:r>
-              <a:rPr lang="en-US" sz="2600" b="1" dirty="0">
-                <a:solidFill>
-                  <a:schemeClr val="tx1"/>
-                </a:solidFill>
-              </a:rPr>
-              <a:t>Appendix: one record, as stored</a:t>
-            </a:r>
-            <a:endParaRPr lang="en-US" sz="2600" dirty="0"/>
-          </a:p>
-        </p:txBody>
-      </p:sp>
-      <p:sp>
-        <p:nvSpPr>
-          <p:cNvPr id="3" name="record card"/>
-          <p:cNvSpPr/>
-          <p:nvPr/>
-        </p:nvSpPr>
-        <p:spPr>
-          <a:xfrm>
-            <a:off x="548640" y="1417320"/>
-            <a:ext cx="7818120" cy="2560320"/>
-          </a:xfrm>
-          <a:prstGeom prst="roundRect">
-            <a:avLst>
-              <a:gd name="adj" fmla="val 2500"/>
-            </a:avLst>
-          </a:prstGeom>
-          <a:solidFill>
-            <a:schemeClr val="tx2"/>
-          </a:solidFill>
-          <a:ln/>
-        </p:spPr>
-      </p:sp>
-      <p:sp>
-        <p:nvSpPr>
-          <p:cNvPr id="4" name="record"/>
-          <p:cNvSpPr txBox="1"/>
-          <p:nvPr/>
-        </p:nvSpPr>
-        <p:spPr>
-          <a:xfrm>
-            <a:off x="777240" y="1600200"/>
-            <a:ext cx="7360920" cy="2194560"/>
-          </a:xfrm>
-          <a:prstGeom prst="rect">
-            <a:avLst/>
-          </a:prstGeom>
-          <a:noFill/>
-          <a:ln/>
-        </p:spPr>
-        <p:txBody>
-          <a:bodyPr wrap="square" lIns="0" tIns="0" rIns="0" bIns="0" rtlCol="0" anchor="t"/>
-          <a:lstStyle/>
-          <a:p>
-            <a:pPr indent="0" marL="0">
-              <a:buNone/>
-            </a:pPr>
-            <a:r>
-              <a:rPr lang="en-US" sz="1050" dirty="0">
-                <a:solidFill>
-                  <a:srgbClr val="FFFFFF"/>
-                </a:solidFill>
-                <a:latin typeface="Courier New" pitchFamily="34" charset="0"/>
-                <a:ea typeface="Courier New" pitchFamily="34" charset="-122"/>
-                <a:cs typeface="Courier New" pitchFamily="34" charset="-120"/>
-              </a:rPr>
-              <a:t>{"context_id": "mep_57", "tier": "C2",</a:t>
-            </a:r>
-            <a:endParaRPr lang="en-US" sz="1050" dirty="0"/>
-          </a:p>
-          <a:p>
-            <a:pPr indent="0" marL="0">
-              <a:buNone/>
-            </a:pPr>
-            <a:r>
-              <a:rPr lang="en-US" sz="1050" dirty="0">
-                <a:solidFill>
-                  <a:srgbClr val="FFFFFF"/>
-                </a:solidFill>
-                <a:latin typeface="Courier New" pitchFamily="34" charset="0"/>
-                <a:ea typeface="Courier New" pitchFamily="34" charset="-122"/>
-                <a:cs typeface="Courier New" pitchFamily="34" charset="-120"/>
-              </a:rPr>
-              <a:t> "surface": {"kind": "ceiling", "substrate": "concrete_C25", "thickness_mm": 200.0},</a:t>
-            </a:r>
-            <a:endParaRPr lang="en-US" sz="1050" dirty="0"/>
-          </a:p>
-          <a:p>
-            <a:pPr indent="0" marL="0">
-              <a:buNone/>
-            </a:pPr>
-            <a:r>
-              <a:rPr lang="en-US" sz="1050" dirty="0">
-                <a:solidFill>
-                  <a:srgbClr val="FFFFFF"/>
-                </a:solidFill>
-                <a:latin typeface="Courier New" pitchFamily="34" charset="0"/>
-                <a:ea typeface="Courier New" pitchFamily="34" charset="-122"/>
-                <a:cs typeface="Courier New" pitchFamily="34" charset="-120"/>
-              </a:rPr>
-              <a:t> "n_elements": 2, "n_levels": 1, "total_load_kN": 1.12, "bundle_width_mm": 588.0,</a:t>
-            </a:r>
-            <a:endParaRPr lang="en-US" sz="1050" dirty="0"/>
-          </a:p>
-          <a:p>
-            <a:pPr indent="0" marL="0">
-              <a:buNone/>
-            </a:pPr>
-            <a:r>
-              <a:rPr lang="en-US" sz="1050" dirty="0">
-                <a:solidFill>
-                  <a:srgbClr val="FFFFFF"/>
-                </a:solidFill>
-                <a:latin typeface="Courier New" pitchFamily="34" charset="0"/>
-                <a:ea typeface="Courier New" pitchFamily="34" charset="-122"/>
-                <a:cs typeface="Courier New" pitchFamily="34" charset="-120"/>
-              </a:rPr>
-              <a:t> "elements": [</a:t>
-            </a:r>
-            <a:endParaRPr lang="en-US" sz="1050" dirty="0"/>
-          </a:p>
-          <a:p>
-            <a:pPr indent="0" marL="0">
-              <a:buNone/>
-            </a:pPr>
-            <a:r>
-              <a:rPr lang="en-US" sz="1050" dirty="0">
-                <a:solidFill>
-                  <a:srgbClr val="FFFFFF"/>
-                </a:solidFill>
-                <a:latin typeface="Courier New" pitchFamily="34" charset="0"/>
-                <a:ea typeface="Courier New" pitchFamily="34" charset="-122"/>
-                <a:cs typeface="Courier New" pitchFamily="34" charset="-120"/>
-              </a:rPr>
-              <a:t>  {"kind": "cable_tray", "service": "tray", "trade": "electrical", "shape": "rect",</a:t>
-            </a:r>
-            <a:endParaRPr lang="en-US" sz="1050" dirty="0"/>
-          </a:p>
-          <a:p>
-            <a:pPr indent="0" marL="0">
-              <a:buNone/>
-            </a:pPr>
-            <a:r>
-              <a:rPr lang="en-US" sz="1050" dirty="0">
-                <a:solidFill>
-                  <a:srgbClr val="FFFFFF"/>
-                </a:solidFill>
-                <a:latin typeface="Courier New" pitchFamily="34" charset="0"/>
-                <a:ea typeface="Courier New" pitchFamily="34" charset="-122"/>
-                <a:cs typeface="Courier New" pitchFamily="34" charset="-120"/>
-              </a:rPr>
-              <a:t>   "label": "300 tray", "width_mm": 300.0, "height_mm": 60.0, "insulation_mm": 0.0,</a:t>
-            </a:r>
-            <a:endParaRPr lang="en-US" sz="1050" dirty="0"/>
-          </a:p>
-          <a:p>
-            <a:pPr indent="0" marL="0">
-              <a:buNone/>
-            </a:pPr>
-            <a:r>
-              <a:rPr lang="en-US" sz="1050" dirty="0">
-                <a:solidFill>
-                  <a:srgbClr val="FFFFFF"/>
-                </a:solidFill>
-                <a:latin typeface="Courier New" pitchFamily="34" charset="0"/>
-                <a:ea typeface="Courier New" pitchFamily="34" charset="-122"/>
-                <a:cs typeface="Courier New" pitchFamily="34" charset="-120"/>
-              </a:rPr>
-              <a:t>   "load_kN": 1.08, "span_m": 2.0, "load_kN_per_m": 0.5396,</a:t>
-            </a:r>
-            <a:endParaRPr lang="en-US" sz="1050" dirty="0"/>
-          </a:p>
-          <a:p>
-            <a:pPr indent="0" marL="0">
-              <a:buNone/>
-            </a:pPr>
-            <a:r>
-              <a:rPr lang="en-US" sz="1050" dirty="0">
-                <a:solidFill>
-                  <a:srgbClr val="FFFFFF"/>
-                </a:solidFill>
-                <a:latin typeface="Courier New" pitchFamily="34" charset="0"/>
-                <a:ea typeface="Courier New" pitchFamily="34" charset="-122"/>
-                <a:cs typeface="Courier New" pitchFamily="34" charset="-120"/>
-              </a:rPr>
-              <a:t>   "level": 0, "along_mm": -144.0, "out_mm": 120.0},</a:t>
-            </a:r>
-            <a:endParaRPr lang="en-US" sz="1050" dirty="0"/>
-          </a:p>
-          <a:p>
-            <a:pPr indent="0" marL="0">
-              <a:buNone/>
-            </a:pPr>
-            <a:r>
-              <a:rPr lang="en-US" sz="1050" dirty="0">
-                <a:solidFill>
-                  <a:srgbClr val="FFFFFF"/>
-                </a:solidFill>
-                <a:latin typeface="Courier New" pitchFamily="34" charset="0"/>
-                <a:ea typeface="Courier New" pitchFamily="34" charset="-122"/>
-                <a:cs typeface="Courier New" pitchFamily="34" charset="-120"/>
-              </a:rPr>
-              <a:t>  {"kind": "pipe", "service": "heating", "trade": "heating", "shape": "round",</a:t>
-            </a:r>
-            <a:endParaRPr lang="en-US" sz="1050" dirty="0"/>
-          </a:p>
-          <a:p>
-            <a:pPr indent="0" marL="0">
-              <a:buNone/>
-            </a:pPr>
-            <a:r>
-              <a:rPr lang="en-US" sz="1050" dirty="0">
-                <a:solidFill>
-                  <a:srgbClr val="FFFFFF"/>
-                </a:solidFill>
-                <a:latin typeface="Courier New" pitchFamily="34" charset="0"/>
-                <a:ea typeface="Courier New" pitchFamily="34" charset="-122"/>
-                <a:cs typeface="Courier New" pitchFamily="34" charset="-120"/>
-              </a:rPr>
-              <a:t>   "label": "DN20", "width_mm": 26.9, "height_mm": 26.9, "insulation_mm": 20.0,</a:t>
-            </a:r>
-            <a:endParaRPr lang="en-US" sz="1050" dirty="0"/>
-          </a:p>
-          <a:p>
-            <a:pPr indent="0" marL="0">
-              <a:buNone/>
-            </a:pPr>
-            <a:r>
-              <a:rPr lang="en-US" sz="1050" dirty="0">
-                <a:solidFill>
-                  <a:srgbClr val="FFFFFF"/>
-                </a:solidFill>
-                <a:latin typeface="Courier New" pitchFamily="34" charset="0"/>
-                <a:ea typeface="Courier New" pitchFamily="34" charset="-122"/>
-                <a:cs typeface="Courier New" pitchFamily="34" charset="-120"/>
-              </a:rPr>
-              <a:t>   "load_kN": 0.04, "span_m": 2.1, "load_kN_per_m": 0.0189,</a:t>
-            </a:r>
-            <a:endParaRPr lang="en-US" sz="1050" dirty="0"/>
-          </a:p>
-          <a:p>
-            <a:pPr indent="0" marL="0">
-              <a:buNone/>
-            </a:pPr>
-            <a:r>
-              <a:rPr lang="en-US" sz="1050" dirty="0">
-                <a:solidFill>
-                  <a:srgbClr val="FFFFFF"/>
-                </a:solidFill>
-                <a:latin typeface="Courier New" pitchFamily="34" charset="0"/>
-                <a:ea typeface="Courier New" pitchFamily="34" charset="-122"/>
-                <a:cs typeface="Courier New" pitchFamily="34" charset="-120"/>
-              </a:rPr>
-              <a:t>   "level": 0, "along_mm": 260.5, "out_mm": 156.2}</a:t>
-            </a:r>
-            <a:endParaRPr lang="en-US" sz="1050" dirty="0"/>
-          </a:p>
-          <a:p>
-            <a:pPr indent="0" marL="0">
-              <a:buNone/>
-            </a:pPr>
-            <a:r>
-              <a:rPr lang="en-US" sz="1050" dirty="0">
-                <a:solidFill>
-                  <a:srgbClr val="FFFFFF"/>
-                </a:solidFill>
-                <a:latin typeface="Courier New" pitchFamily="34" charset="0"/>
-                <a:ea typeface="Courier New" pitchFamily="34" charset="-122"/>
-                <a:cs typeface="Courier New" pitchFamily="34" charset="-120"/>
-              </a:rPr>
-              <a:t> ]}</a:t>
-            </a:r>
-            <a:endParaRPr lang="en-US" sz="1050" dirty="0"/>
-          </a:p>
-        </p:txBody>
-      </p:sp>
-      <p:sp>
-        <p:nvSpPr>
-          <p:cNvPr id="5" name="record notes"/>
-          <p:cNvSpPr txBox="1"/>
-          <p:nvPr/>
-        </p:nvSpPr>
-        <p:spPr>
-          <a:xfrm>
-            <a:off x="8641080" y="1463040"/>
-            <a:ext cx="2999232" cy="3749040"/>
-          </a:xfrm>
-          <a:prstGeom prst="rect">
-            <a:avLst/>
-          </a:prstGeom>
-          <a:noFill/>
-          <a:ln/>
-        </p:spPr>
-        <p:txBody>
-          <a:bodyPr wrap="square" lIns="0" tIns="0" rIns="0" bIns="0" rtlCol="0" anchor="t"/>
-          <a:lstStyle/>
-          <a:p>
-            <a:pPr marL="342900" indent="-342900">
-              <a:spcAft>
-                <a:spcPts val="600"/>
-              </a:spcAft>
-              <a:buSzPct val="100000"/>
-              <a:buChar char="•"/>
-            </a:pPr>
-            <a:r>
-              <a:rPr lang="en-US" sz="1300" dirty="0">
-                <a:solidFill>
-                  <a:schemeClr val="tx1"/>
-                </a:solidFill>
-              </a:rPr>
-              <a:t>Units: millimetres, kilonewtons, metres (span)</a:t>
-            </a:r>
-            <a:endParaRPr lang="en-US" sz="1300" dirty="0"/>
-          </a:p>
-          <a:p>
-            <a:pPr marL="342900" indent="-342900">
-              <a:spcAft>
-                <a:spcPts val="600"/>
-              </a:spcAft>
-              <a:buSzPct val="100000"/>
-              <a:buChar char="•"/>
-            </a:pPr>
-            <a:r>
-              <a:rPr lang="en-US" sz="1300" dirty="0">
-                <a:solidFill>
-                  <a:schemeClr val="tx1"/>
-                </a:solidFill>
-              </a:rPr>
-              <a:t>Widths are bare; insulation_mm is per side</a:t>
-            </a:r>
-            <a:endParaRPr lang="en-US" sz="1300" dirty="0"/>
-          </a:p>
-          <a:p>
-            <a:pPr marL="342900" indent="-342900">
-              <a:spcAft>
-                <a:spcPts val="600"/>
-              </a:spcAft>
-              <a:buSzPct val="100000"/>
-              <a:buChar char="•"/>
-            </a:pPr>
-            <a:r>
-              <a:rPr lang="en-US" sz="1300" dirty="0">
-                <a:solidFill>
-                  <a:schemeClr val="tx1"/>
-                </a:solidFill>
-              </a:rPr>
-              <a:t>load_kN = load_kN_per_m × span_m</a:t>
-            </a:r>
-            <a:endParaRPr lang="en-US" sz="1300" dirty="0"/>
-          </a:p>
-          <a:p>
-            <a:pPr marL="342900" indent="-342900">
-              <a:spcAft>
-                <a:spcPts val="600"/>
-              </a:spcAft>
-              <a:buSzPct val="100000"/>
-              <a:buChar char="•"/>
-            </a:pPr>
-            <a:r>
-              <a:rPr lang="en-US" sz="1300" dirty="0">
-                <a:solidFill>
-                  <a:schemeClr val="tx1"/>
-                </a:solidFill>
-              </a:rPr>
-              <a:t>along_mm, out_mm: position along and out from the surface</a:t>
-            </a:r>
-            <a:endParaRPr lang="en-US" sz="1300" dirty="0"/>
-          </a:p>
-          <a:p>
-            <a:pPr marL="342900" indent="-342900">
-              <a:spcAft>
-                <a:spcPts val="600"/>
-              </a:spcAft>
-              <a:buSzPct val="100000"/>
-              <a:buChar char="•"/>
-            </a:pPr>
-            <a:r>
-              <a:rPr lang="en-US" sz="1300" dirty="0">
-                <a:solidFill>
-                  <a:schemeClr val="tx1"/>
-                </a:solidFill>
-              </a:rPr>
-              <a:t>level: the generative row (metadata)</a:t>
-            </a:r>
-            <a:endParaRPr lang="en-US" sz="1300" dirty="0"/>
-          </a:p>
-        </p:txBody>
-      </p:sp>
-      <p:sp>
-        <p:nvSpPr>
-          <p:cNvPr id="25" name="Slide Number Placeholder 0"/>
-          <p:cNvSpPr>
-            <a:spLocks noGrp="1"/>
-          </p:cNvSpPr>
-          <p:nvPr>
-            <p:ph type="sldNum" sz="quarter" idx="4294967295"/>
-          </p:nvPr>
-        </p:nvSpPr>
-        <p:spPr>
-          <a:xfrm>
-            <a:off x="11064240" y="6419088"/>
-            <a:ext cx="594360" cy="274320"/>
-          </a:xfrm>
-          <a:prstGeom prst="rect">
-            <a:avLst/>
-          </a:prstGeom>
-          <a:extLst>
-            <a:ext uri="{C572A759-6A51-4108-AA02-DFA0A04FC94B}">
-              <ma14:wrappingTextBoxFlag xmlns:ma14="http://schemas.microsoft.com/office/mac/drawingml/2011/main" val="0"/>
-            </a:ext>
-          </a:extLst>
-        </p:spPr>
-        <p:txBody>
-          <a:bodyPr/>
-          <a:lstStyle>
-            <a:lvl1pPr>
-              <a:defRPr sz="900">
-                <a:solidFill>
-                  <a:srgbClr val="898781"/>
-                </a:solidFill>
-              </a:defRPr>
-            </a:lvl1pPr>
-          </a:lstStyle>
-          <a:p>
-            <a:pPr algn="r"/>
-            <a:fld id="{F7021451-1387-4CA6-816F-3879F97B5CBC}" type="slidenum">
-              <a:rPr b="0" lang="en-US"/>
-              <a:t>18</a:t>
+              <a:t>19</a:t>
             </a:fld>
             <a:endParaRPr lang="en-US"/>
           </a:p>
@@ -19456,6 +19683,491 @@
             <a:fld id="{F7021451-1387-4CA6-816F-3879F97B5CBC}" type="slidenum">
               <a:rPr b="0" lang="en-US"/>
               <a:t>2</a:t>
+            </a:fld>
+            <a:endParaRPr lang="en-US"/>
+          </a:p>
+        </p:txBody>
+      </p:sp>
+    </p:spTree>
+  </p:cSld>
+  <p:clrMapOvr>
+    <a:masterClrMapping/>
+  </p:clrMapOvr>
+</p:sld>
+</file>
+
+<file path=ppt/slides/slide20.xml><?xml version="1.0" encoding="utf-8"?>
+<p:sld xmlns:a="http://schemas.openxmlformats.org/drawingml/2006/main" xmlns:r="http://schemas.openxmlformats.org/officeDocument/2006/relationships" xmlns:p="http://schemas.openxmlformats.org/presentationml/2006/main">
+  <p:cSld name="Slide 20">
+    <p:spTree>
+      <p:nvGrpSpPr>
+        <p:cNvPr id="1" name=""/>
+        <p:cNvGrpSpPr/>
+        <p:nvPr/>
+      </p:nvGrpSpPr>
+      <p:grpSpPr>
+        <a:xfrm>
+          <a:off x="0" y="0"/>
+          <a:ext cx="0" cy="0"/>
+          <a:chOff x="0" y="0"/>
+          <a:chExt cx="0" cy="0"/>
+        </a:xfrm>
+      </p:grpSpPr>
+      <p:sp>
+        <p:nvSpPr>
+          <p:cNvPr id="2" name="Text 0"/>
+          <p:cNvSpPr/>
+          <p:nvPr>
+            <p:ph idx="100" type="title" hasCustomPrompt="1"/>
+          </p:nvPr>
+        </p:nvSpPr>
+        <p:spPr>
+          <a:xfrm>
+            <a:off x="548640" y="274320"/>
+            <a:ext cx="11091672" cy="960120"/>
+          </a:xfrm>
+          <a:prstGeom prst="rect">
+            <a:avLst/>
+          </a:prstGeom>
+          <a:noFill/>
+          <a:ln/>
+        </p:spPr>
+        <p:txBody>
+          <a:bodyPr wrap="square" lIns="0" tIns="0" rIns="0" bIns="0" rtlCol="0" anchor="ctr"/>
+          <a:lstStyle/>
+          <a:p>
+            <a:pPr algn="l" indent="0" marL="0">
+              <a:buNone/>
+            </a:pPr>
+            <a:r>
+              <a:rPr lang="en-US" sz="2600" b="1" dirty="0">
+                <a:solidFill>
+                  <a:schemeClr val="tx1"/>
+                </a:solidFill>
+              </a:rPr>
+              <a:t>Appendix: one record, as stored</a:t>
+            </a:r>
+            <a:endParaRPr lang="en-US" sz="2600" dirty="0"/>
+          </a:p>
+        </p:txBody>
+      </p:sp>
+      <p:sp>
+        <p:nvSpPr>
+          <p:cNvPr id="3" name="record card"/>
+          <p:cNvSpPr/>
+          <p:nvPr/>
+        </p:nvSpPr>
+        <p:spPr>
+          <a:xfrm>
+            <a:off x="548640" y="1417320"/>
+            <a:ext cx="7818120" cy="2560320"/>
+          </a:xfrm>
+          <a:prstGeom prst="roundRect">
+            <a:avLst>
+              <a:gd name="adj" fmla="val 2500"/>
+            </a:avLst>
+          </a:prstGeom>
+          <a:solidFill>
+            <a:schemeClr val="tx2"/>
+          </a:solidFill>
+          <a:ln/>
+        </p:spPr>
+      </p:sp>
+      <p:sp>
+        <p:nvSpPr>
+          <p:cNvPr id="4" name="record"/>
+          <p:cNvSpPr txBox="1"/>
+          <p:nvPr/>
+        </p:nvSpPr>
+        <p:spPr>
+          <a:xfrm>
+            <a:off x="777240" y="1600200"/>
+            <a:ext cx="7360920" cy="2194560"/>
+          </a:xfrm>
+          <a:prstGeom prst="rect">
+            <a:avLst/>
+          </a:prstGeom>
+          <a:noFill/>
+          <a:ln/>
+        </p:spPr>
+        <p:txBody>
+          <a:bodyPr wrap="square" lIns="0" tIns="0" rIns="0" bIns="0" rtlCol="0" anchor="t"/>
+          <a:lstStyle/>
+          <a:p>
+            <a:pPr indent="0" marL="0">
+              <a:buNone/>
+            </a:pPr>
+            <a:r>
+              <a:rPr lang="en-US" sz="1050" dirty="0">
+                <a:solidFill>
+                  <a:srgbClr val="FFFFFF"/>
+                </a:solidFill>
+                <a:latin typeface="Courier New" pitchFamily="34" charset="0"/>
+                <a:ea typeface="Courier New" pitchFamily="34" charset="-122"/>
+                <a:cs typeface="Courier New" pitchFamily="34" charset="-120"/>
+              </a:rPr>
+              <a:t>{"context_id": "mep_57", "tier": "C2",</a:t>
+            </a:r>
+            <a:endParaRPr lang="en-US" sz="1050" dirty="0"/>
+          </a:p>
+          <a:p>
+            <a:pPr indent="0" marL="0">
+              <a:buNone/>
+            </a:pPr>
+            <a:r>
+              <a:rPr lang="en-US" sz="1050" dirty="0">
+                <a:solidFill>
+                  <a:srgbClr val="FFFFFF"/>
+                </a:solidFill>
+                <a:latin typeface="Courier New" pitchFamily="34" charset="0"/>
+                <a:ea typeface="Courier New" pitchFamily="34" charset="-122"/>
+                <a:cs typeface="Courier New" pitchFamily="34" charset="-120"/>
+              </a:rPr>
+              <a:t> "surface": {"kind": "ceiling", "substrate": "concrete_C25", "thickness_mm": 200.0},</a:t>
+            </a:r>
+            <a:endParaRPr lang="en-US" sz="1050" dirty="0"/>
+          </a:p>
+          <a:p>
+            <a:pPr indent="0" marL="0">
+              <a:buNone/>
+            </a:pPr>
+            <a:r>
+              <a:rPr lang="en-US" sz="1050" dirty="0">
+                <a:solidFill>
+                  <a:srgbClr val="FFFFFF"/>
+                </a:solidFill>
+                <a:latin typeface="Courier New" pitchFamily="34" charset="0"/>
+                <a:ea typeface="Courier New" pitchFamily="34" charset="-122"/>
+                <a:cs typeface="Courier New" pitchFamily="34" charset="-120"/>
+              </a:rPr>
+              <a:t> "n_elements": 2, "n_levels": 1, "total_load_kN": 1.12, "bundle_width_mm": 588.0,</a:t>
+            </a:r>
+            <a:endParaRPr lang="en-US" sz="1050" dirty="0"/>
+          </a:p>
+          <a:p>
+            <a:pPr indent="0" marL="0">
+              <a:buNone/>
+            </a:pPr>
+            <a:r>
+              <a:rPr lang="en-US" sz="1050" dirty="0">
+                <a:solidFill>
+                  <a:srgbClr val="FFFFFF"/>
+                </a:solidFill>
+                <a:latin typeface="Courier New" pitchFamily="34" charset="0"/>
+                <a:ea typeface="Courier New" pitchFamily="34" charset="-122"/>
+                <a:cs typeface="Courier New" pitchFamily="34" charset="-120"/>
+              </a:rPr>
+              <a:t> "elements": [</a:t>
+            </a:r>
+            <a:endParaRPr lang="en-US" sz="1050" dirty="0"/>
+          </a:p>
+          <a:p>
+            <a:pPr indent="0" marL="0">
+              <a:buNone/>
+            </a:pPr>
+            <a:r>
+              <a:rPr lang="en-US" sz="1050" dirty="0">
+                <a:solidFill>
+                  <a:srgbClr val="FFFFFF"/>
+                </a:solidFill>
+                <a:latin typeface="Courier New" pitchFamily="34" charset="0"/>
+                <a:ea typeface="Courier New" pitchFamily="34" charset="-122"/>
+                <a:cs typeface="Courier New" pitchFamily="34" charset="-120"/>
+              </a:rPr>
+              <a:t>  {"kind": "cable_tray", "service": "tray", "trade": "electrical", "shape": "rect",</a:t>
+            </a:r>
+            <a:endParaRPr lang="en-US" sz="1050" dirty="0"/>
+          </a:p>
+          <a:p>
+            <a:pPr indent="0" marL="0">
+              <a:buNone/>
+            </a:pPr>
+            <a:r>
+              <a:rPr lang="en-US" sz="1050" dirty="0">
+                <a:solidFill>
+                  <a:srgbClr val="FFFFFF"/>
+                </a:solidFill>
+                <a:latin typeface="Courier New" pitchFamily="34" charset="0"/>
+                <a:ea typeface="Courier New" pitchFamily="34" charset="-122"/>
+                <a:cs typeface="Courier New" pitchFamily="34" charset="-120"/>
+              </a:rPr>
+              <a:t>   "label": "300 tray", "width_mm": 300.0, "height_mm": 60.0, "insulation_mm": 0.0,</a:t>
+            </a:r>
+            <a:endParaRPr lang="en-US" sz="1050" dirty="0"/>
+          </a:p>
+          <a:p>
+            <a:pPr indent="0" marL="0">
+              <a:buNone/>
+            </a:pPr>
+            <a:r>
+              <a:rPr lang="en-US" sz="1050" dirty="0">
+                <a:solidFill>
+                  <a:srgbClr val="FFFFFF"/>
+                </a:solidFill>
+                <a:latin typeface="Courier New" pitchFamily="34" charset="0"/>
+                <a:ea typeface="Courier New" pitchFamily="34" charset="-122"/>
+                <a:cs typeface="Courier New" pitchFamily="34" charset="-120"/>
+              </a:rPr>
+              <a:t>   "load_kN": 1.08, "span_m": 2.0, "load_kN_per_m": 0.5396,</a:t>
+            </a:r>
+            <a:endParaRPr lang="en-US" sz="1050" dirty="0"/>
+          </a:p>
+          <a:p>
+            <a:pPr indent="0" marL="0">
+              <a:buNone/>
+            </a:pPr>
+            <a:r>
+              <a:rPr lang="en-US" sz="1050" dirty="0">
+                <a:solidFill>
+                  <a:srgbClr val="FFFFFF"/>
+                </a:solidFill>
+                <a:latin typeface="Courier New" pitchFamily="34" charset="0"/>
+                <a:ea typeface="Courier New" pitchFamily="34" charset="-122"/>
+                <a:cs typeface="Courier New" pitchFamily="34" charset="-120"/>
+              </a:rPr>
+              <a:t>   "level": 0, "along_mm": -144.0, "out_mm": 120.0},</a:t>
+            </a:r>
+            <a:endParaRPr lang="en-US" sz="1050" dirty="0"/>
+          </a:p>
+          <a:p>
+            <a:pPr indent="0" marL="0">
+              <a:buNone/>
+            </a:pPr>
+            <a:r>
+              <a:rPr lang="en-US" sz="1050" dirty="0">
+                <a:solidFill>
+                  <a:srgbClr val="FFFFFF"/>
+                </a:solidFill>
+                <a:latin typeface="Courier New" pitchFamily="34" charset="0"/>
+                <a:ea typeface="Courier New" pitchFamily="34" charset="-122"/>
+                <a:cs typeface="Courier New" pitchFamily="34" charset="-120"/>
+              </a:rPr>
+              <a:t>  {"kind": "pipe", "service": "heating", "trade": "heating", "shape": "round",</a:t>
+            </a:r>
+            <a:endParaRPr lang="en-US" sz="1050" dirty="0"/>
+          </a:p>
+          <a:p>
+            <a:pPr indent="0" marL="0">
+              <a:buNone/>
+            </a:pPr>
+            <a:r>
+              <a:rPr lang="en-US" sz="1050" dirty="0">
+                <a:solidFill>
+                  <a:srgbClr val="FFFFFF"/>
+                </a:solidFill>
+                <a:latin typeface="Courier New" pitchFamily="34" charset="0"/>
+                <a:ea typeface="Courier New" pitchFamily="34" charset="-122"/>
+                <a:cs typeface="Courier New" pitchFamily="34" charset="-120"/>
+              </a:rPr>
+              <a:t>   "label": "DN20", "width_mm": 26.9, "height_mm": 26.9, "insulation_mm": 20.0,</a:t>
+            </a:r>
+            <a:endParaRPr lang="en-US" sz="1050" dirty="0"/>
+          </a:p>
+          <a:p>
+            <a:pPr indent="0" marL="0">
+              <a:buNone/>
+            </a:pPr>
+            <a:r>
+              <a:rPr lang="en-US" sz="1050" dirty="0">
+                <a:solidFill>
+                  <a:srgbClr val="FFFFFF"/>
+                </a:solidFill>
+                <a:latin typeface="Courier New" pitchFamily="34" charset="0"/>
+                <a:ea typeface="Courier New" pitchFamily="34" charset="-122"/>
+                <a:cs typeface="Courier New" pitchFamily="34" charset="-120"/>
+              </a:rPr>
+              <a:t>   "load_kN": 0.04, "span_m": 2.1, "load_kN_per_m": 0.0189,</a:t>
+            </a:r>
+            <a:endParaRPr lang="en-US" sz="1050" dirty="0"/>
+          </a:p>
+          <a:p>
+            <a:pPr indent="0" marL="0">
+              <a:buNone/>
+            </a:pPr>
+            <a:r>
+              <a:rPr lang="en-US" sz="1050" dirty="0">
+                <a:solidFill>
+                  <a:srgbClr val="FFFFFF"/>
+                </a:solidFill>
+                <a:latin typeface="Courier New" pitchFamily="34" charset="0"/>
+                <a:ea typeface="Courier New" pitchFamily="34" charset="-122"/>
+                <a:cs typeface="Courier New" pitchFamily="34" charset="-120"/>
+              </a:rPr>
+              <a:t>   "level": 0, "along_mm": 260.5, "out_mm": 156.2}</a:t>
+            </a:r>
+            <a:endParaRPr lang="en-US" sz="1050" dirty="0"/>
+          </a:p>
+          <a:p>
+            <a:pPr indent="0" marL="0">
+              <a:buNone/>
+            </a:pPr>
+            <a:r>
+              <a:rPr lang="en-US" sz="1050" dirty="0">
+                <a:solidFill>
+                  <a:srgbClr val="FFFFFF"/>
+                </a:solidFill>
+                <a:latin typeface="Courier New" pitchFamily="34" charset="0"/>
+                <a:ea typeface="Courier New" pitchFamily="34" charset="-122"/>
+                <a:cs typeface="Courier New" pitchFamily="34" charset="-120"/>
+              </a:rPr>
+              <a:t> ]}</a:t>
+            </a:r>
+            <a:endParaRPr lang="en-US" sz="1050" dirty="0"/>
+          </a:p>
+        </p:txBody>
+      </p:sp>
+      <p:sp>
+        <p:nvSpPr>
+          <p:cNvPr id="5" name="record notes"/>
+          <p:cNvSpPr txBox="1"/>
+          <p:nvPr/>
+        </p:nvSpPr>
+        <p:spPr>
+          <a:xfrm>
+            <a:off x="8641080" y="1463040"/>
+            <a:ext cx="2999232" cy="3749040"/>
+          </a:xfrm>
+          <a:prstGeom prst="rect">
+            <a:avLst/>
+          </a:prstGeom>
+          <a:noFill/>
+          <a:ln/>
+        </p:spPr>
+        <p:txBody>
+          <a:bodyPr wrap="square" lIns="0" tIns="0" rIns="0" bIns="0" rtlCol="0" anchor="t"/>
+          <a:lstStyle/>
+          <a:p>
+            <a:pPr marL="342900" indent="-342900">
+              <a:spcAft>
+                <a:spcPts val="600"/>
+              </a:spcAft>
+              <a:buSzPct val="100000"/>
+              <a:buChar char="•"/>
+            </a:pPr>
+            <a:r>
+              <a:rPr lang="en-US" sz="1300" dirty="0">
+                <a:solidFill>
+                  <a:schemeClr val="tx1"/>
+                </a:solidFill>
+              </a:rPr>
+              <a:t>Units: millimetres, kilonewtons, metres (span)</a:t>
+            </a:r>
+            <a:endParaRPr lang="en-US" sz="1300" dirty="0"/>
+          </a:p>
+          <a:p>
+            <a:pPr marL="342900" indent="-342900">
+              <a:spcAft>
+                <a:spcPts val="600"/>
+              </a:spcAft>
+              <a:buSzPct val="100000"/>
+              <a:buChar char="•"/>
+            </a:pPr>
+            <a:r>
+              <a:rPr lang="en-US" sz="1300" dirty="0">
+                <a:solidFill>
+                  <a:schemeClr val="tx1"/>
+                </a:solidFill>
+              </a:rPr>
+              <a:t>Widths are bare; insulation_mm is per side</a:t>
+            </a:r>
+            <a:endParaRPr lang="en-US" sz="1300" dirty="0"/>
+          </a:p>
+          <a:p>
+            <a:pPr marL="342900" indent="-342900">
+              <a:spcAft>
+                <a:spcPts val="600"/>
+              </a:spcAft>
+              <a:buSzPct val="100000"/>
+              <a:buChar char="•"/>
+            </a:pPr>
+            <a:r>
+              <a:rPr lang="en-US" sz="1300" dirty="0">
+                <a:solidFill>
+                  <a:schemeClr val="tx1"/>
+                </a:solidFill>
+              </a:rPr>
+              <a:t>load_kN = load_kN_per_m × span_m</a:t>
+            </a:r>
+            <a:endParaRPr lang="en-US" sz="1300" dirty="0"/>
+          </a:p>
+          <a:p>
+            <a:pPr marL="342900" indent="-342900">
+              <a:spcAft>
+                <a:spcPts val="600"/>
+              </a:spcAft>
+              <a:buSzPct val="100000"/>
+              <a:buChar char="•"/>
+            </a:pPr>
+            <a:r>
+              <a:rPr lang="en-US" sz="1300" dirty="0">
+                <a:solidFill>
+                  <a:schemeClr val="tx1"/>
+                </a:solidFill>
+              </a:rPr>
+              <a:t>along_mm, out_mm: position along and out from the surface</a:t>
+            </a:r>
+            <a:endParaRPr lang="en-US" sz="1300" dirty="0"/>
+          </a:p>
+          <a:p>
+            <a:pPr marL="342900" indent="-342900">
+              <a:spcAft>
+                <a:spcPts val="600"/>
+              </a:spcAft>
+              <a:buSzPct val="100000"/>
+              <a:buChar char="•"/>
+            </a:pPr>
+            <a:r>
+              <a:rPr lang="en-US" sz="1300" dirty="0">
+                <a:solidFill>
+                  <a:schemeClr val="tx1"/>
+                </a:solidFill>
+              </a:rPr>
+              <a:t>level: the generative row (metadata)</a:t>
+            </a:r>
+            <a:endParaRPr lang="en-US" sz="1300" dirty="0"/>
+          </a:p>
+        </p:txBody>
+      </p:sp>
+      <p:sp>
+        <p:nvSpPr>
+          <p:cNvPr id="25" name="Slide Number Placeholder 0"/>
+          <p:cNvSpPr>
+            <a:spLocks noGrp="1"/>
+          </p:cNvSpPr>
+          <p:nvPr>
+            <p:ph type="sldNum" sz="quarter" idx="4294967295"/>
+          </p:nvPr>
+        </p:nvSpPr>
+        <p:spPr>
+          <a:xfrm>
+            <a:off x="11064240" y="6419088"/>
+            <a:ext cx="594360" cy="274320"/>
+          </a:xfrm>
+          <a:prstGeom prst="rect">
+            <a:avLst/>
+          </a:prstGeom>
+          <a:extLst>
+            <a:ext uri="{C572A759-6A51-4108-AA02-DFA0A04FC94B}">
+              <ma14:wrappingTextBoxFlag xmlns:ma14="http://schemas.microsoft.com/office/mac/drawingml/2011/main" val="0"/>
+            </a:ext>
+          </a:extLst>
+        </p:spPr>
+        <p:txBody>
+          <a:bodyPr/>
+          <a:lstStyle>
+            <a:lvl1pPr>
+              <a:defRPr sz="900">
+                <a:solidFill>
+                  <a:srgbClr val="898781"/>
+                </a:solidFill>
+              </a:defRPr>
+            </a:lvl1pPr>
+          </a:lstStyle>
+          <a:p>
+            <a:pPr algn="r"/>
+            <a:fld id="{F7021451-1387-4CA6-816F-3879F97B5CBC}" type="slidenum">
+              <a:rPr b="0" lang="en-US"/>
+              <a:t>20</a:t>
             </a:fld>
             <a:endParaRPr lang="en-US"/>
           </a:p>
@@ -25107,7 +25819,7 @@
                   <a:schemeClr val="tx1"/>
                 </a:solidFill>
               </a:rPr>
-              <a:t>Experiment 1: higher tiers are heavier and, on average, tighter</a:t>
+              <a:t>Experiment 1, a design check: difficulty grows with the tier</a:t>
             </a:r>
             <a:endParaRPr lang="en-US" sz="2600" dirty="0"/>
           </a:p>
@@ -25167,7 +25879,7 @@
                   <a:srgbClr val="52514E"/>
                 </a:solidFill>
               </a:rPr>
-              <a:t>Boxes: the benchmark, 125 contexts per tier. Diamonds: medians of 2,000 freshly generated contexts per tier, so the trends belong to the generator, not to sampling noise. Load rises at every tier (rank correlation with tier +0.56); the closest gap shrinks overall (−0.36) but widens again at C6 (70 → 75 mm), where the generator starts stacking elements in two or three rows.</a:t>
+              <a:t>A check that the dataset behaves as designed, not a finding about buildings: the tier fixes the element count, and load and congestion follow from the generator’s rules. Boxes: the benchmark, 125 contexts per tier; diamonds: medians of 2,000 freshly generated contexts per tier. Load rises at every tier (rank correlation with tier +0.56); the closest gap shrinks overall (−0.36) but widens again at C6 (70 → 75 mm), where the generator starts stacking elements in two or three rows.</a:t>
             </a:r>
             <a:endParaRPr lang="en-US" sz="1100" dirty="0"/>
           </a:p>

--- a/docs/CrossMEP_CIBW78_talk.pptx
+++ b/docs/CrossMEP_CIBW78_talk.pptx
@@ -126,18 +126,18 @@
   <p:extLst>
     <p:ext uri="{521415D9-36F7-43E2-AB2F-B90AF26B5E84}">
       <p14:sectionLst xmlns:p14="http://schemas.microsoft.com/office/powerpoint/2010/main">
-        <p14:section name="Opening" id="{4c611684-4a5d-11ba-3c2f-2a96587b7a76}">
+        <p14:section name="Opening" id="{222d0e4b-2290-b829-86b3-fe2b48b4af00}">
           <p14:sldIdLst>
             <p14:sldId id="256"/>
           </p14:sldIdLst>
         </p14:section>
-        <p14:section name="Motivation" id="{d23312e0-704f-ec5a-6a3c-8ff2d7ee669c}">
+        <p14:section name="Motivation" id="{1a55bc43-81fb-9643-76d7-e9e36c672aa5}">
           <p14:sldIdLst>
             <p14:sldId id="257"/>
             <p14:sldId id="258"/>
           </p14:sldIdLst>
         </p14:section>
-        <p14:section name="The dataset" id="{4c5f959b-55d5-84b4-d094-b454fc8bcaef}">
+        <p14:section name="The dataset" id="{6be02dc2-8c5e-892b-f328-66315ddcd4bd}">
           <p14:sldIdLst>
             <p14:sldId id="259"/>
             <p14:sldId id="260"/>
@@ -146,14 +146,14 @@
             <p14:sldId id="263"/>
           </p14:sldIdLst>
         </p14:section>
-        <p14:section name="Experiments" id="{bbb2e11e-54ba-a0ec-6c0d-6e7169dd0181}">
+        <p14:section name="Experiments" id="{906f8a34-1dad-623f-8783-c4b89e06b19c}">
           <p14:sldIdLst>
             <p14:sldId id="264"/>
             <p14:sldId id="265"/>
             <p14:sldId id="266"/>
           </p14:sldIdLst>
         </p14:section>
-        <p14:section name="Use" id="{e88cd628-f5fc-6f7d-69e4-e45826598288}">
+        <p14:section name="Use" id="{41ce8121-4ca6-d21d-a734-6c94be272bad}">
           <p14:sldIdLst>
             <p14:sldId id="267"/>
             <p14:sldId id="268"/>
@@ -161,7 +161,7 @@
             <p14:sldId id="270"/>
           </p14:sldIdLst>
         </p14:section>
-        <p14:section name="Appendix" id="{11d5b320-f10b-5b31-bb11-55531da13b9b}">
+        <p14:section name="Appendix" id="{93fb55c0-1488-1f0d-ecf2-6a333f428a70}">
           <p14:sldIdLst>
             <p14:sldId id="271"/>
             <p14:sldId id="272"/>
@@ -787,7 +787,17 @@
     </c:title>
     <c:autoTitleDeleted val="0"/>
     <c:plotArea>
-      <c:layout/>
+      <c:layout>
+        <c:manualLayout>
+          <c:layoutTarget val="inner"/>
+          <c:xMode val="edge"/>
+          <c:yMode val="edge"/>
+          <c:x val="0.08"/>
+          <c:y val="0.14"/>
+          <c:w val="0.9"/>
+          <c:h val="0.62"/>
+        </c:manualLayout>
+      </c:layout>
       <c:barChart>
         <c:barDir val="col"/>
         <c:grouping val="stacked"/>
@@ -820,7 +830,7 @@
               <a:lstStyle/>
               <a:p>
                 <a:pPr>
-                  <a:defRPr b="0" i="0" strike="noStrike" sz="900" u="none">
+                  <a:defRPr b="0" i="0" strike="noStrike" sz="1100" u="none">
                     <a:solidFill>
                       <a:srgbClr val="0B0B0B"/>
                     </a:solidFill>
@@ -940,7 +950,7 @@
               <a:lstStyle/>
               <a:p>
                 <a:pPr>
-                  <a:defRPr b="0" i="0" strike="noStrike" sz="900" u="none">
+                  <a:defRPr b="0" i="0" strike="noStrike" sz="1100" u="none">
                     <a:solidFill>
                       <a:srgbClr val="0B0B0B"/>
                     </a:solidFill>
@@ -1039,7 +1049,7 @@
             <a:lstStyle/>
             <a:p>
               <a:pPr>
-                <a:defRPr b="0" i="0" strike="noStrike" sz="900" u="none">
+                <a:defRPr b="0" i="0" strike="noStrike" sz="1100" u="none">
                   <a:solidFill>
                     <a:srgbClr val="0B0B0B"/>
                   </a:solidFill>
@@ -1235,7 +1245,17 @@
     </c:title>
     <c:autoTitleDeleted val="0"/>
     <c:plotArea>
-      <c:layout/>
+      <c:layout>
+        <c:manualLayout>
+          <c:layoutTarget val="inner"/>
+          <c:xMode val="edge"/>
+          <c:yMode val="edge"/>
+          <c:x val="0.08"/>
+          <c:y val="0.14"/>
+          <c:w val="0.9"/>
+          <c:h val="0.62"/>
+        </c:manualLayout>
+      </c:layout>
       <c:barChart>
         <c:barDir val="col"/>
         <c:grouping val="clustered"/>
@@ -1268,7 +1288,7 @@
               <a:lstStyle/>
               <a:p>
                 <a:pPr>
-                  <a:defRPr b="0" i="0" strike="noStrike" sz="900" u="none">
+                  <a:defRPr b="0" i="0" strike="noStrike" sz="1100" u="none">
                     <a:solidFill>
                       <a:srgbClr val="0B0B0B"/>
                     </a:solidFill>
@@ -1384,7 +1404,7 @@
             <a:lstStyle/>
             <a:p>
               <a:pPr>
-                <a:defRPr b="0" i="0" strike="noStrike" sz="900" u="none">
+                <a:defRPr b="0" i="0" strike="noStrike" sz="1100" u="none">
                   <a:solidFill>
                     <a:srgbClr val="0B0B0B"/>
                   </a:solidFill>
@@ -1425,7 +1445,7 @@
                     <a:solidFill>
                       <a:srgbClr val="52514E"/>
                     </a:solidFill>
-                    <a:latin typeface="Arial"/>
+                    <a:latin typeface="+mn-lt"/>
                   </a:defRPr>
                 </a:pPr>
                 <a:r>
@@ -1433,7 +1453,7 @@
                     <a:solidFill>
                       <a:srgbClr val="52514E"/>
                     </a:solidFill>
-                    <a:latin typeface="Arial"/>
+                    <a:latin typeface="+mn-lt"/>
                   </a:rPr>
                   <a:t>number of clamp sizes, each fitting a 6 mm diameter window</a:t>
                 </a:r>
@@ -2037,7 +2057,7 @@
           <a:p>
             <a:r>
               <a:rPr lang="en-US" dirty="0"/>
-              <a:t>The second experiment is the one the generator could fail: is the spacing realistic in a building it never saw? The gap distribution was fitted on a residential duplex from buildingSMART. We held out a second open building, a medical-dental clinic, which is a real building, cut it into sections every 250 millimetres, the way a context is defined, and measured the gap between pipes running side by side. On the left, the clinic: the generated gaps follow the measured ones. On the right, the distances: generated to clinic 28 millimetres, about as close as the duplex's own two models are to each other. A fixed modular gap would be about 190 millimetres off. (6:00)</a:t>
+              <a:t>The second experiment is the one the generator could fail: is the spacing realistic in a building it never saw? The gap distribution was fitted on a residential duplex from buildingSMART. We held out a second open building, a medical-dental clinic, which is a real building, cut it into sections every 250 millimetres, the way a context is defined, and measured the gap between pipes running side by side. On the left, the clinic: the generated gaps are close to the measured ones, though not identical. On the right, the distances: generated to clinic 28 millimetres. That is above the 8 a perfect generator would show, so not a perfect match, but about as close as the duplex's own two models are to each other. A fixed gap at the 25 millimetre minimum would be about 190 millimetres off. (5:20)</a:t>
             </a:r>
             <a:endParaRPr lang="en-US" dirty="0"/>
           </a:p>
@@ -2125,7 +2145,7 @@
           <a:p>
             <a:r>
               <a:rPr lang="en-US" dirty="0"/>
-              <a:t>The third is a use of the dataset, not a test of it: what must a catalog of clamps cover? Take the paper's two-size catalog as an illustration. It attaches 11.6 per cent of the pipes, interval 10 to 13, all of one size, DN40; load never binds, and trays, ducts and conduits are not covered at all. On the right is what the dataset asks of any catalog: two well-placed sizes attach 43 per cent, six 80, 12 every pipe. So 'what should the catalog contain' becomes a measurement. (6:50)</a:t>
+              <a:t>The third is a use of the dataset, not a test of it: what must a catalog of clamps cover? Take the paper's two-size catalog as an illustration. It attaches 11.6 per cent of the pipes, interval 10 to 13, all of one size, DN40; load never binds, and trays, ducts and conduits are not covered at all. On the right is what the dataset asks of any catalog: two well-placed sizes attach 43 per cent, six 80, twelve every pipe. So 'what should the catalog contain' becomes a measurement. (6:05)</a:t>
             </a:r>
             <a:endParaRPr lang="en-US" dirty="0"/>
           </a:p>
@@ -2213,7 +2233,7 @@
           <a:p>
             <a:r>
               <a:rPr lang="en-US" dirty="0"/>
-              <a:t>Here is what that means in practice. In the studio I choose what crosses the hanger: a tier, or an exact mix, and the seed. Out comes the section a support designer receives, drawn the way an engineer would issue it: every service at true size, its level below the slab, its load at the support, the closest clear gap; and the same run in 3D. Every section is a stored output of the released generator, with the Python call that reproduces it. [Live: switch to the studio, click C3, then Generate another twice, then Exact mix with a duct. If the demo fails, stay on this slide; slide 16 shows two more sections.] (7:30)</a:t>
+              <a:t>Here is what that means in practice. In the studio I choose what crosses the hanger: a tier, or an exact mix, and the seed. Out comes the section a support designer receives, drawn the way an engineer would issue it: every service at true size, its level below the slab, its load at the support, the closest clear gap; and the same run in 3D. Every section is a stored output of the released generator, with the Python call that reproduces it. [Live: switch to the studio, click C3, then Generate another twice, then Exact mix with a duct. If the demo fails, stay on this slide; slide 16 shows two more sections. Before the talk: open the studio once with internet, set its link sharing to public, scan the QR from a phone not logged in.] (6:40)</a:t>
             </a:r>
             <a:endParaRPr lang="en-US" dirty="0"/>
           </a:p>
@@ -2301,7 +2321,7 @@
           <a:p>
             <a:r>
               <a:rPr lang="en-US" dirty="0"/>
-              <a:t>Using it takes a few lines: load a split with the Python standard library, filter by composition, or generate your own mix with the same rules. Because there are no labels, the same files serve reinforcement learning, constraint-programming baselines and human benchmarking, and we ship the scoring: train on the generator, from C1 up to C8; evaluate on the benchmark, the same 125 contexts per tier for every method; report per tier with 95 per cent intervals and paired tests. (8:10)</a:t>
+              <a:t>Using it takes a few lines: load a split with the Python standard library, filter by composition, or generate your own mix with the same rules. Because there are no labels, the same files serve reinforcement learning, constraint-programming baselines and human benchmarking, and we ship the scoring: train on the generator, from C1 up to C8; evaluate on the benchmark, the same 125 contexts per tier for every method; report per tier with 95 per cent intervals and paired tests. (7:45)</a:t>
             </a:r>
             <a:endParaRPr lang="en-US" dirty="0"/>
           </a:p>
@@ -2389,7 +2409,7 @@
           <a:p>
             <a:r>
               <a:rPr lang="en-US" dirty="0"/>
-              <a:t>Its scope: one section at one support - routing, branches and spacing are outside it, although the span is recorded so a method can vary it. Realism is checked on sections of two open buildings; congested racks rest on practice and standards. The trade mix is a design choice, and the data is not for structural design. Next: a public checker for support designs, with best-known costs, so methods can be compared on the answer and not only on the brief; the catalog as an input, so a method is tested on catalogs it has never seen; and a real test set from commercial projects, with supports designed by engineers - which is where we would value your eye. (8:45)</a:t>
+              <a:t>Its scope: one section at one support - routing, branches and spacing are outside it, although the span is recorded so a method can vary it. Realism is checked on sections of two open buildings; congested racks rest on practice and standards. The trade mix is a design choice, and the data is not for structural design. Next: a public checker for support designs, with best-known costs, so methods can be compared on the answer and not only on the brief; the catalog as an input, so a method is tested on catalogs it has never seen; and a real test set from commercial projects, with supports designed by engineers - which is where we would value your eye. (8:20)</a:t>
             </a:r>
             <a:endParaRPr lang="en-US" dirty="0"/>
           </a:p>
@@ -2477,7 +2497,7 @@
           <a:p>
             <a:r>
               <a:rPr lang="en-US" dirty="0"/>
-              <a:t>CrossMEP is the brief, not the answer: 7,000 support-design problems, every number traced to its source, checked against two open buildings, and open. The QR code takes you to the data, the code, the gallery and the studio. Thank you. (9:15)</a:t>
+              <a:t>CrossMEP is the brief, not the answer: 7,000 support-design problems, every constant traced to its source or declared a design choice, pipe gaps checked against two open buildings, and open. The QR code takes you to the data, the code, the gallery and the studio. Thank you. (9:10)</a:t>
             </a:r>
             <a:endParaRPr lang="en-US" dirty="0"/>
           </a:p>
@@ -2917,7 +2937,7 @@
           <a:p>
             <a:r>
               <a:rPr lang="en-US" dirty="0"/>
-              <a:t>Every pipe, duct and tray in a building hangs from a support assembly: anchors, rods, channel, clamps. On a 200,000 square-foot hospital that is on the order of 10,000 assemblies, each taking 20 minutes to two hours by hand - together roughly a quarter of the MEP design effort. These are practitioner estimates. The work starts after coordination: at every hanger location the designer takes the section across the run and designs a support for exactly what passes through it. That section is the unit of work, and it is the unit of our dataset. (0:15)</a:t>
+              <a:t>Every pipe, duct and tray in a building hangs from a support assembly: anchors, rods, channel, clamps. On a 200,000 square-foot hospital that is on the order of 10,000 assemblies, each taking 20 minutes to two hours by hand - together roughly a quarter of the MEP design effort. These are practitioner estimates. The work starts after coordination: at every hanger location the designer takes the section across the run and designs a support for exactly what passes through it. That section is the unit of work, and it is the unit of our dataset. (0:20)</a:t>
             </a:r>
             <a:endParaRPr lang="en-US" dirty="0"/>
           </a:p>
@@ -3093,7 +3113,7 @@
           <a:p>
             <a:r>
               <a:rPr lang="en-US" dirty="0"/>
-              <a:t>Learning-based methods for this task need many such sections, and none were public. Project models are proprietary, the open ones are not organised around supports, and any one project covers one narrow slice. So we built CrossMEP: 7,000 contexts with about 31,500 elements, stratified into eight tiers, deliberately unlabeled, with every constant traced to its source, checked against open IFC buildings, and released openly with the generator. (1:00)</a:t>
+              <a:t>Learning-based methods for this task need many such sections, and none were public. Project models are proprietary, the open ones are not organised around supports, and any one project covers one narrow slice. So we built CrossMEP: 7,000 contexts with about 31,500 elements, stratified into eight tiers, deliberately unlabeled, with every constant traced to its source or declared a design choice, pipe gaps checked against open IFC buildings, and released openly with the generator. (1:00)</a:t>
             </a:r>
             <a:endParaRPr lang="en-US" dirty="0"/>
           </a:p>
@@ -3181,7 +3201,7 @@
           <a:p>
             <a:r>
               <a:rPr lang="en-US" dirty="0"/>
-              <a:t>Here is one context. It is a 2-D section at one support location. Each element carries its kind, service and trade, its bare size, its insulation, its load per metre and the span it was sized at - so the load at this support - and its position along and out from the surface. Plus the surface itself: slab or wall, substrate, thickness. What is not in it is the support: no channel, no rods, no anchors, and no 'correct answer', because a feasible support depends on the catalog you build from. The context is the brief; the assembly is the answer. (1:40)</a:t>
+              <a:t>Here is one context. It is a 2-D section at one support location. Each element carries its kind, service and trade, its bare size, its insulation, its load per metre and the span it was sized at - so the load at this support - and its position along and out from the surface. Plus the surface itself: slab or wall, substrate, thickness. What is not in it is the support: no channel, no rods, no anchors, and no 'correct answer', because a feasible support depends on the catalog you build from. The context is the brief; the assembly is the answer. (1:25)</a:t>
             </a:r>
             <a:endParaRPr lang="en-US" dirty="0"/>
           </a:p>
@@ -3269,7 +3289,7 @@
           <a:p>
             <a:r>
               <a:rPr lang="en-US" dirty="0"/>
-              <a:t>How is a context made? Not by free randomness: by rules you would recognise. The tier fixes the number of elements. We pick the surface. We fill the count with services the way trades actually run - hot and cold together, flow and return together, conduits in groups. Bulky services go nearest the slab: ducts, then containment, then pipes. Gaps between neighbours are drawn from gaps measured on a built project, with a 25 millimetre minimum, plus a small stagger within rows; on walls, electrical stays above water. Finally every context is checked - every pair at least 25 millimetres clear - and it is seeded: the same seed gives the same file, byte for byte. (2:30)</a:t>
+              <a:t>How is a context made? Not by free randomness: by rules you would recognise. The tier fixes the number of elements. We pick the surface. We fill the count with services the way trades actually run - hot and cold together, flow and return together, conduits in groups. Bulky services go nearest the slab: ducts, then containment, then pipes. Gaps between neighbours are drawn from gaps measured on a built project, with a 25 millimetre minimum, plus a small stagger within rows; on walls, electrical stays above water. Finally every context is checked - every pair at least 25 millimetres clear - and it is seeded: the same seed gives the same file, byte for byte. (2:10)</a:t>
             </a:r>
             <a:endParaRPr lang="en-US" dirty="0"/>
           </a:p>
@@ -3357,7 +3377,7 @@
           <a:p>
             <a:r>
               <a:rPr lang="en-US" dirty="0"/>
-              <a:t>Every number in a context has a source. Pipe sizes and walls from EN 10220 and 10255, filled with water, at ASME B31.1 water-service spans. Insulation from the German GEG for heated lines and a condensation-control schedule for chilled water. Trays at IEC 61537 widths, loaded full. Ducts at the EN preferred sizes with a manufacturer weight table. Conduits at IEC 61386 sizes with 40 per cent cable fill. The loads are computed from these sources in the code, and every constant is documented with its source and status. Things that are choices - the trade mix, the tier composition - are labelled as design choices, not presented as measurements. (3:20)</a:t>
+              <a:t>Every number in a context comes from a cited source or a declared design choice. Pipe sizes and walls from EN 10220 and 10255, filled with water, at ASME B31.1 water-service spans. Insulation from the German GEG for heated lines and a condensation-control schedule for chilled water. Trays at IEC 61537 widths, loaded full. Ducts at the EN preferred sizes with a manufacturer weight table. Conduits at IEC 61386 sizes with 40 per cent cable fill. The loads are computed from these sources in the code, and every constant is documented with its source and status. Things that are choices - the trade mix, the tier composition - are labelled as design choices, not presented as measurements. (2:55)</a:t>
             </a:r>
             <a:endParaRPr lang="en-US" dirty="0"/>
           </a:p>
@@ -3445,7 +3465,7 @@
           <a:p>
             <a:r>
               <a:rPr lang="en-US" dirty="0"/>
-              <a:t>The release has four splits on disjoint seeds: 5,000 contexts for training, 500 for validation, 500 for test, and a 1,000-context benchmark with 125 per tier. 31,484 elements in total - mostly pipes, then conduits, trays and ducts; pipe sizes from DN15 to DN100, mostly small bore, as in the measured project. Four in five contexts hang from a ceiling, one in five from a wall, and electrical containment is the largest trade by count. Everything is plain JSON with a schema, metadata and a datasheet. (4:05)</a:t>
+              <a:t>The release has four splits on disjoint seeds: 5,000 contexts for training, 500 for validation, 500 for test, and a 1,000-context benchmark with 125 per tier. 31,484 elements in total - mostly pipes, then conduits, trays and ducts; pipe sizes from DN15 to DN100, mostly small bore, as in the measured project. Four in five contexts hang from a ceiling, one in five from a wall, and electrical containment is the largest trade by count. Everything is plain JSON with a schema, metadata and a datasheet. (3:40)</a:t>
             </a:r>
             <a:endParaRPr lang="en-US" dirty="0"/>
           </a:p>
@@ -3533,7 +3553,7 @@
           <a:p>
             <a:r>
               <a:rPr lang="en-US" dirty="0"/>
-              <a:t>This is what the data looks like: one benchmark context per tier. C1 is a single element - the most common support in any building. By C8 you have eight services on three rows. Within a tier everything else varies - kinds, trades, surfaces and stacking - so the element count is the one controlled difficulty axis. Note the walls: the section rotates, and electrical sits above water. (4:45)</a:t>
+              <a:t>This is what the data looks like: one benchmark context per tier. C1 is a single element - the most common support in any building. By C8 you have eight services on three rows. Within a tier everything else varies - kinds, trades, surfaces and stacking - so the element count is the one controlled difficulty axis. Note the walls: the section rotates, and electrical sits above water. (4:15)</a:t>
             </a:r>
             <a:endParaRPr lang="en-US" dirty="0"/>
           </a:p>
@@ -3621,7 +3641,7 @@
           <a:p>
             <a:r>
               <a:rPr lang="en-US" dirty="0"/>
-              <a:t>The first experiment is a design check, not a discovery: does difficulty grow with the tier, as intended? The count is fixed by construction; load and congestion follow from the rules, so this shows the dataset behaves as designed. Load at the support rises at every step, from 0.1 to 1.7 kilonewtons. The closest gap falls from 120 to about 62 millimetres, but widens again at C6, where the generator starts stacking in two or three rows. So report methods tier by tier. (5:20)</a:t>
+              <a:t>The first experiment is a design check, not a discovery: does difficulty grow with the tier, as intended? The count is fixed by construction; load and congestion follow from the rules, so this shows the dataset behaves as designed. Load at the support rises at every step, from 0.1 to 1.7 kilonewtons. The closest gap falls from 120 to about 62 millimetres, but widens again at C6, where the generator starts stacking in two or three rows. So report methods tier by tier. (4:45)</a:t>
             </a:r>
             <a:endParaRPr lang="en-US" dirty="0"/>
           </a:p>
@@ -4755,7 +4775,7 @@
       </p:sp>
       <p:pic>
         <p:nvPicPr>
-          <p:cNvPr id="3" name="gap distributions" descr="/home/user/crossmep_dataset/docs/figures/04_gaps_vs_buildings.png">    </p:cNvPr>
+          <p:cNvPr id="3" name="gap distributions" descr="preencoded.png">    </p:cNvPr>
           <p:cNvPicPr>
             <a:picLocks noChangeAspect="1"/>
           </p:cNvPicPr>
@@ -4769,8 +4789,8 @@
         </p:blipFill>
         <p:spPr>
           <a:xfrm>
-            <a:off x="797336" y="1325880"/>
-            <a:ext cx="10594281" cy="4297680"/>
+            <a:off x="548640" y="1325880"/>
+            <a:ext cx="11091672" cy="4133217"/>
           </a:xfrm>
           <a:prstGeom prst="rect">
             <a:avLst/>
@@ -4785,8 +4805,8 @@
         </p:nvSpPr>
         <p:spPr>
           <a:xfrm>
-            <a:off x="548640" y="5715000"/>
-            <a:ext cx="11091672" cy="594360"/>
+            <a:off x="548640" y="5568825"/>
+            <a:ext cx="11091672" cy="731520"/>
           </a:xfrm>
           <a:prstGeom prst="rect">
             <a:avLst/>
@@ -4802,14 +4822,14 @@
               <a:buNone/>
             </a:pPr>
             <a:r>
-              <a:rPr lang="en-US" sz="1100" dirty="0">
+              <a:rPr lang="en-US" sz="1250" dirty="0">
                 <a:solidFill>
                   <a:srgbClr val="52514E"/>
                 </a:solidFill>
               </a:rPr>
-              <a:t>The gap distribution was fitted on the duplex; the clinic was held out. Sections cut every 250 mm through two open IFC buildings from buildingSMART (CC BY 4.0), measuring the clear gap between side-by-side pipes. The medical-dental clinic, a real building with 797 measured pipe pairs, is 28 mm from the generated gaps (95 % CI 16–44): about as close as the duplex’s own two models are to each other (26 mm). The small residential duplex is as far from the generator (70–85 mm) as from the clinic (71–85 mm).</a:t>
+              <a:t>The gap distribution was fitted on the duplex; the clinic was held out. Clear gaps between side-by-side pipes, on sections every 250 mm. Clinic (797 pipe pairs): 28 mm from the generated gaps (95 % CI 16–44), more than the 8 mm a perfect generator would show, and about as close as the duplex’s own two models are to each other (26 mm). Models: buildingSMART Duplex Apartment and Medical-Dental Clinic, CC BY 4.0.</a:t>
             </a:r>
-            <a:endParaRPr lang="en-US" sz="1100" dirty="0"/>
+            <a:endParaRPr lang="en-US" sz="1250" dirty="0"/>
           </a:p>
         </p:txBody>
       </p:sp>
@@ -5345,7 +5365,7 @@
       </p:sp>
       <p:pic>
         <p:nvPicPr>
-          <p:cNvPr id="3" name="studio screenshot" descr="/home/user/crossmep_dataset/docs/figures/08_studio_demo.png">    </p:cNvPr>
+          <p:cNvPr id="3" name="studio parameters" descr="preencoded.png">    </p:cNvPr>
           <p:cNvPicPr>
             <a:picLocks noChangeAspect="1"/>
           </p:cNvPicPr>
@@ -5359,8 +5379,32 @@
         </p:blipFill>
         <p:spPr>
           <a:xfrm>
-            <a:off x="548640" y="1355716"/>
-            <a:ext cx="8001000" cy="4512329"/>
+            <a:off x="548640" y="1280160"/>
+            <a:ext cx="11091672" cy="733885"/>
+          </a:xfrm>
+          <a:prstGeom prst="rect">
+            <a:avLst/>
+          </a:prstGeom>
+        </p:spPr>
+      </p:pic>
+      <p:pic>
+        <p:nvPicPr>
+          <p:cNvPr id="4" name="studio section" descr="preencoded.png">    </p:cNvPr>
+          <p:cNvPicPr>
+            <a:picLocks noChangeAspect="1"/>
+          </p:cNvPicPr>
+          <p:nvPr/>
+        </p:nvPicPr>
+        <p:blipFill>
+          <a:blip r:embed="rId2"/>
+          <a:stretch>
+            <a:fillRect/>
+          </a:stretch>
+        </p:blipFill>
+        <p:spPr>
+          <a:xfrm>
+            <a:off x="548640" y="2196925"/>
+            <a:ext cx="7726680" cy="3000652"/>
           </a:xfrm>
           <a:prstGeom prst="rect">
             <a:avLst/>
@@ -5369,14 +5413,14 @@
       </p:pic>
       <p:sp>
         <p:nvSpPr>
-          <p:cNvPr id="4" name="studio caption"/>
+          <p:cNvPr id="5" name="studio caption"/>
           <p:cNvSpPr txBox="1"/>
           <p:nvPr/>
         </p:nvSpPr>
         <p:spPr>
           <a:xfrm>
-            <a:off x="548640" y="5941196"/>
-            <a:ext cx="8001000" cy="274320"/>
+            <a:off x="548640" y="5334737"/>
+            <a:ext cx="7726680" cy="731520"/>
           </a:xfrm>
           <a:prstGeom prst="rect">
             <a:avLst/>
@@ -5392,111 +5436,59 @@
               <a:buNone/>
             </a:pPr>
             <a:r>
-              <a:rPr lang="en-US" sz="1100" dirty="0">
+              <a:rPr lang="en-US" sz="1250" dirty="0">
                 <a:solidFill>
                   <a:srgbClr val="52514E"/>
                 </a:solidFill>
               </a:rPr>
-              <a:t>Generator Studio, tier C7, seed 0: the section as a support detail (scale 1:20) and in 3D.</a:t>
+              <a:t>In: the parameters (tier C7, seed 0). Out: section A–A at the support, as the support designer receives it (scale 1:20), and the same run in 3D. Every section is a stored output of the released generator, with the Python call that reproduces it.</a:t>
             </a:r>
-            <a:endParaRPr lang="en-US" sz="1100" dirty="0"/>
-          </a:p>
-        </p:txBody>
-      </p:sp>
-      <p:sp>
-        <p:nvSpPr>
-          <p:cNvPr id="5" name="studio bullets"/>
-          <p:cNvSpPr txBox="1"/>
-          <p:nvPr/>
-        </p:nvSpPr>
-        <p:spPr>
-          <a:xfrm>
-            <a:off x="8823960" y="1371600"/>
-            <a:ext cx="2816352" cy="2743200"/>
-          </a:xfrm>
-          <a:prstGeom prst="rect">
-            <a:avLst/>
-          </a:prstGeom>
-          <a:noFill/>
-          <a:ln/>
-        </p:spPr>
-        <p:txBody>
-          <a:bodyPr wrap="square" lIns="0" tIns="0" rIns="0" bIns="0" rtlCol="0" anchor="t"/>
-          <a:lstStyle/>
-          <a:p>
-            <a:pPr marL="342900" indent="-342900">
-              <a:spcAft>
-                <a:spcPts val="600"/>
-              </a:spcAft>
-              <a:buSzPct val="100000"/>
-              <a:buChar char="•"/>
-            </a:pPr>
-            <a:r>
-              <a:rPr lang="en-US" sz="1400" dirty="0">
-                <a:solidFill>
-                  <a:schemeClr val="tx1"/>
-                </a:solidFill>
-              </a:rPr>
-              <a:t>In: a tier or an exact mix of services, slab or wall, a seed</a:t>
-            </a:r>
-            <a:endParaRPr lang="en-US" sz="1400" dirty="0"/>
-          </a:p>
-          <a:p>
-            <a:pPr marL="342900" indent="-342900">
-              <a:spcAft>
-                <a:spcPts val="600"/>
-              </a:spcAft>
-              <a:buSzPct val="100000"/>
-              <a:buChar char="•"/>
-            </a:pPr>
-            <a:r>
-              <a:rPr lang="en-US" sz="1400" dirty="0">
-                <a:solidFill>
-                  <a:schemeClr val="tx1"/>
-                </a:solidFill>
-              </a:rPr>
-              <a:t>Out: the section a support designer receives, with sizes, levels, loads and clear gaps</a:t>
-            </a:r>
-            <a:endParaRPr lang="en-US" sz="1400" dirty="0"/>
-          </a:p>
-          <a:p>
-            <a:pPr marL="342900" indent="-342900">
-              <a:spcAft>
-                <a:spcPts val="600"/>
-              </a:spcAft>
-              <a:buSzPct val="100000"/>
-              <a:buChar char="•"/>
-            </a:pPr>
-            <a:r>
-              <a:rPr lang="en-US" sz="1400" dirty="0">
-                <a:solidFill>
-                  <a:schemeClr val="tx1"/>
-                </a:solidFill>
-              </a:rPr>
-              <a:t>Every section is a stored output of the released generator, with the Python call that reproduces it</a:t>
-            </a:r>
-            <a:endParaRPr lang="en-US" sz="1400" dirty="0"/>
+            <a:endParaRPr lang="en-US" sz="1250" dirty="0"/>
           </a:p>
         </p:txBody>
       </p:sp>
       <p:pic>
         <p:nvPicPr>
-          <p:cNvPr id="6" name="qr studio" descr="/home/user/crossmep_dataset/docs/figures/qr_studio.png">    </p:cNvPr>
+          <p:cNvPr id="6" name="studio 3D" descr="preencoded.png">    </p:cNvPr>
           <p:cNvPicPr>
             <a:picLocks noChangeAspect="1"/>
           </p:cNvPicPr>
           <p:nvPr/>
         </p:nvPicPr>
         <p:blipFill>
-          <a:blip r:embed="rId2"/>
+          <a:blip r:embed="rId3"/>
           <a:stretch>
             <a:fillRect/>
           </a:stretch>
         </p:blipFill>
         <p:spPr>
           <a:xfrm>
-            <a:off x="9500616" y="4160520"/>
-            <a:ext cx="1463040" cy="1463040"/>
+            <a:off x="8503920" y="2196925"/>
+            <a:ext cx="3136392" cy="2240280"/>
+          </a:xfrm>
+          <a:prstGeom prst="rect">
+            <a:avLst/>
+          </a:prstGeom>
+        </p:spPr>
+      </p:pic>
+      <p:pic>
+        <p:nvPicPr>
+          <p:cNvPr id="7" name="qr studio" descr="/home/user/crossmep_dataset/docs/figures/qr_studio.png">    </p:cNvPr>
+          <p:cNvPicPr>
+            <a:picLocks noChangeAspect="1"/>
+          </p:cNvPicPr>
+          <p:nvPr/>
+        </p:nvPicPr>
+        <p:blipFill>
+          <a:blip r:embed="rId4"/>
+          <a:stretch>
+            <a:fillRect/>
+          </a:stretch>
+        </p:blipFill>
+        <p:spPr>
+          <a:xfrm>
+            <a:off x="9454896" y="4665805"/>
+            <a:ext cx="1234440" cy="1234440"/>
           </a:xfrm>
           <a:prstGeom prst="rect">
             <a:avLst/>
@@ -5505,14 +5497,14 @@
       </p:pic>
       <p:sp>
         <p:nvSpPr>
-          <p:cNvPr id="7" name="studio link"/>
+          <p:cNvPr id="8" name="studio link"/>
           <p:cNvSpPr txBox="1"/>
           <p:nvPr/>
         </p:nvSpPr>
         <p:spPr>
           <a:xfrm>
-            <a:off x="8823960" y="5669280"/>
-            <a:ext cx="2816352" cy="320040"/>
+            <a:off x="8503920" y="5945965"/>
+            <a:ext cx="3136392" cy="274320"/>
           </a:xfrm>
           <a:prstGeom prst="rect">
             <a:avLst/>
@@ -5528,14 +5520,14 @@
               <a:buNone/>
             </a:pPr>
             <a:r>
-              <a:rPr lang="en-US" sz="1100" dirty="0">
+              <a:rPr lang="en-US" sz="1200" dirty="0">
                 <a:solidFill>
                   <a:srgbClr val="52514E"/>
                 </a:solidFill>
               </a:rPr>
-              <a:t>Try it: docs/studio in the repository</a:t>
+              <a:t>Scan to open the studio</a:t>
             </a:r>
-            <a:endParaRPr lang="en-US" sz="1100" dirty="0"/>
+            <a:endParaRPr lang="en-US" sz="1200" dirty="0"/>
           </a:p>
         </p:txBody>
       </p:sp>
@@ -5890,7 +5882,7 @@
       </p:sp>
       <p:pic>
         <p:nvPicPr>
-          <p:cNvPr id="6" name="gallery screenshot" descr="/home/user/crossmep_dataset/docs/figures/07_gallery_screenshot.png">    </p:cNvPr>
+          <p:cNvPr id="6" name="gallery screenshot" descr="preencoded.png">    </p:cNvPr>
           <p:cNvPicPr>
             <a:picLocks noChangeAspect="1"/>
           </p:cNvPicPr>
@@ -5904,8 +5896,8 @@
         </p:blipFill>
         <p:spPr>
           <a:xfrm>
-            <a:off x="6812259" y="1417320"/>
-            <a:ext cx="4370873" cy="2834640"/>
+            <a:off x="6570536" y="1417320"/>
+            <a:ext cx="4854321" cy="2834640"/>
           </a:xfrm>
           <a:prstGeom prst="rect">
             <a:avLst/>
@@ -5920,8 +5912,8 @@
         </p:nvSpPr>
         <p:spPr>
           <a:xfrm>
-            <a:off x="6355080" y="4325112"/>
-            <a:ext cx="5285232" cy="274320"/>
+            <a:off x="6570536" y="4325112"/>
+            <a:ext cx="4854321" cy="274320"/>
           </a:xfrm>
           <a:prstGeom prst="rect">
             <a:avLst/>
@@ -6857,7 +6849,21 @@
                   <a:srgbClr val="CADCFC"/>
                 </a:solidFill>
               </a:rPr>
-              <a:t>7,000 support-design problems  ·  every number traced  ·  checked against two open buildings  ·  open data and code</a:t>
+              <a:t>7,000 support-design problems  ·  every constant sourced or declared</a:t>
+            </a:r>
+            <a:endParaRPr lang="en-US" sz="1600" dirty="0"/>
+          </a:p>
+          <a:p>
+            <a:pPr indent="0" marL="0">
+              <a:buNone/>
+            </a:pPr>
+            <a:r>
+              <a:rPr lang="en-US" sz="1600" dirty="0">
+                <a:solidFill>
+                  <a:srgbClr val="CADCFC"/>
+                </a:solidFill>
+              </a:rPr>
+              <a:t>pipe gaps checked on two open buildings  ·  open data and code</a:t>
             </a:r>
             <a:endParaRPr lang="en-US" sz="1600" dirty="0"/>
           </a:p>
@@ -7030,7 +7036,7 @@
       </p:sp>
       <p:pic>
         <p:nvPicPr>
-          <p:cNvPr id="3" name="studio wall sheet" descr="/home/user/crossmep_dataset/docs/figures/09_studio_wall.png">    </p:cNvPr>
+          <p:cNvPr id="3" name="studio wall sheet" descr="preencoded.png">    </p:cNvPr>
           <p:cNvPicPr>
             <a:picLocks noChangeAspect="1"/>
           </p:cNvPicPr>
@@ -7044,8 +7050,8 @@
         </p:blipFill>
         <p:spPr>
           <a:xfrm>
-            <a:off x="548640" y="1553108"/>
-            <a:ext cx="5431536" cy="3843223"/>
+            <a:off x="1564579" y="1325880"/>
+            <a:ext cx="3399657" cy="4297680"/>
           </a:xfrm>
           <a:prstGeom prst="rect">
             <a:avLst/>
@@ -7054,7 +7060,7 @@
       </p:pic>
       <p:pic>
         <p:nvPicPr>
-          <p:cNvPr id="4" name="studio mix sheet" descr="/home/user/crossmep_dataset/docs/figures/10_studio_mix.png">    </p:cNvPr>
+          <p:cNvPr id="4" name="studio mix sheet" descr="preencoded.png">    </p:cNvPr>
           <p:cNvPicPr>
             <a:picLocks noChangeAspect="1"/>
           </p:cNvPicPr>
@@ -7068,8 +7074,8 @@
         </p:blipFill>
         <p:spPr>
           <a:xfrm>
-            <a:off x="6208776" y="1553108"/>
-            <a:ext cx="5431536" cy="3843223"/>
+            <a:off x="6542497" y="1325880"/>
+            <a:ext cx="4764095" cy="4297680"/>
           </a:xfrm>
           <a:prstGeom prst="rect">
             <a:avLst/>
@@ -7084,8 +7090,8 @@
         </p:nvSpPr>
         <p:spPr>
           <a:xfrm>
-            <a:off x="548640" y="5469484"/>
-            <a:ext cx="5431536" cy="457200"/>
+            <a:off x="1564579" y="5696712"/>
+            <a:ext cx="3399657" cy="457200"/>
           </a:xfrm>
           <a:prstGeom prst="rect">
             <a:avLst/>
@@ -7120,8 +7126,8 @@
         </p:nvSpPr>
         <p:spPr>
           <a:xfrm>
-            <a:off x="6208776" y="5469484"/>
-            <a:ext cx="5431536" cy="457200"/>
+            <a:off x="6542497" y="5696712"/>
+            <a:ext cx="4764095" cy="457200"/>
           </a:xfrm>
           <a:prstGeom prst="rect">
             <a:avLst/>
@@ -21034,7 +21040,7 @@
       </p:sp>
       <p:sp>
         <p:nvSpPr>
-          <p:cNvPr id="29" name="tile every constant from a standard, a manufacturer table or a measurement"/>
+          <p:cNvPr id="29" name="tile every constant with its source, or declared a design choice"/>
           <p:cNvSpPr/>
           <p:nvPr/>
         </p:nvSpPr>
@@ -21056,7 +21062,7 @@
       </p:sp>
       <p:sp>
         <p:nvSpPr>
-          <p:cNvPr id="30" name="value every constant from a standard, a manufacturer table or a measurement"/>
+          <p:cNvPr id="30" name="value every constant with its source, or declared a design choice"/>
           <p:cNvSpPr txBox="1"/>
           <p:nvPr/>
         </p:nvSpPr>
@@ -21092,7 +21098,7 @@
       </p:sp>
       <p:sp>
         <p:nvSpPr>
-          <p:cNvPr id="31" name="label every constant from a standard, a manufacturer table or a measurement"/>
+          <p:cNvPr id="31" name="label every constant with its source, or declared a design choice"/>
           <p:cNvSpPr txBox="1"/>
           <p:nvPr/>
         </p:nvSpPr>
@@ -21120,7 +21126,7 @@
                   <a:srgbClr val="52514E"/>
                 </a:solidFill>
               </a:rPr>
-              <a:t>every constant from a standard, a manufacturer table or a measurement</a:t>
+              <a:t>every constant with its source, or declared a design choice</a:t>
             </a:r>
             <a:endParaRPr lang="en-US" sz="1150" dirty="0"/>
           </a:p>
@@ -22276,7 +22282,7 @@
                   <a:schemeClr val="tx1"/>
                 </a:solidFill>
               </a:rPr>
-              <a:t>Every number has a source, and every load is computed from it</a:t>
+              <a:t>Every constant is sourced or declared a choice; every load is computed</a:t>
             </a:r>
             <a:endParaRPr lang="en-US" sz="2600" dirty="0"/>
           </a:p>
@@ -25827,7 +25833,7 @@
       </p:sp>
       <p:pic>
         <p:nvPicPr>
-          <p:cNvPr id="3" name="tier statistics" descr="/home/user/crossmep_dataset/docs/figures/03_tiers_stats.png">    </p:cNvPr>
+          <p:cNvPr id="3" name="tier statistics" descr="preencoded.png">    </p:cNvPr>
           <p:cNvPicPr>
             <a:picLocks noChangeAspect="1"/>
           </p:cNvPicPr>
@@ -25841,8 +25847,8 @@
         </p:blipFill>
         <p:spPr>
           <a:xfrm>
-            <a:off x="584630" y="1325880"/>
-            <a:ext cx="11019692" cy="4297680"/>
+            <a:off x="548640" y="1325880"/>
+            <a:ext cx="11091672" cy="3965273"/>
           </a:xfrm>
           <a:prstGeom prst="rect">
             <a:avLst/>
@@ -25857,8 +25863,8 @@
         </p:nvSpPr>
         <p:spPr>
           <a:xfrm>
-            <a:off x="548640" y="5715000"/>
-            <a:ext cx="11091672" cy="594360"/>
+            <a:off x="548640" y="5400881"/>
+            <a:ext cx="11091672" cy="731520"/>
           </a:xfrm>
           <a:prstGeom prst="rect">
             <a:avLst/>
@@ -25874,14 +25880,14 @@
               <a:buNone/>
             </a:pPr>
             <a:r>
-              <a:rPr lang="en-US" sz="1100" dirty="0">
+              <a:rPr lang="en-US" sz="1250" dirty="0">
                 <a:solidFill>
                   <a:srgbClr val="52514E"/>
                 </a:solidFill>
               </a:rPr>
-              <a:t>A check that the dataset behaves as designed, not a finding about buildings: the tier fixes the element count, and load and congestion follow from the generator’s rules. Boxes: the benchmark, 125 contexts per tier; diamonds: medians of 2,000 freshly generated contexts per tier. Load rises at every tier (rank correlation with tier +0.56); the closest gap shrinks overall (−0.36) but widens again at C6 (70 → 75 mm), where the generator starts stacking elements in two or three rows.</a:t>
+              <a:t>A check that the dataset behaves as designed: the tier fixes the element count; load and congestion follow from the rules. Boxes: benchmark, 125 contexts per tier (IQR, whiskers 1.5 IQR); diamonds: medians of 2,000 generated contexts per tier. Load rises at every tier (rank correlation +0.56); the closest gap shrinks overall (−0.36) but widens at C6 (70 → 75 mm), where elements start to stack in two or three rows.</a:t>
             </a:r>
-            <a:endParaRPr lang="en-US" sz="1100" dirty="0"/>
+            <a:endParaRPr lang="en-US" sz="1250" dirty="0"/>
           </a:p>
         </p:txBody>
       </p:sp>

--- a/docs/CrossMEP_CIBW78_talk.pptx
+++ b/docs/CrossMEP_CIBW78_talk.pptx
@@ -126,18 +126,18 @@
   <p:extLst>
     <p:ext uri="{521415D9-36F7-43E2-AB2F-B90AF26B5E84}">
       <p14:sectionLst xmlns:p14="http://schemas.microsoft.com/office/powerpoint/2010/main">
-        <p14:section name="Opening" id="{222d0e4b-2290-b829-86b3-fe2b48b4af00}">
+        <p14:section name="Opening" id="{d96c531c-391f-a77b-2589-7bbab5d88ce3}">
           <p14:sldIdLst>
             <p14:sldId id="256"/>
           </p14:sldIdLst>
         </p14:section>
-        <p14:section name="Motivation" id="{1a55bc43-81fb-9643-76d7-e9e36c672aa5}">
+        <p14:section name="Motivation" id="{57b0d418-9757-a80d-ed0e-2304d7793489}">
           <p14:sldIdLst>
             <p14:sldId id="257"/>
             <p14:sldId id="258"/>
           </p14:sldIdLst>
         </p14:section>
-        <p14:section name="The dataset" id="{6be02dc2-8c5e-892b-f328-66315ddcd4bd}">
+        <p14:section name="The dataset" id="{0647dabb-f33c-9f6d-864a-2bc9373d6266}">
           <p14:sldIdLst>
             <p14:sldId id="259"/>
             <p14:sldId id="260"/>
@@ -146,14 +146,14 @@
             <p14:sldId id="263"/>
           </p14:sldIdLst>
         </p14:section>
-        <p14:section name="Experiments" id="{906f8a34-1dad-623f-8783-c4b89e06b19c}">
+        <p14:section name="Experiments" id="{81d08310-2509-2e35-a957-77b78003ee35}">
           <p14:sldIdLst>
             <p14:sldId id="264"/>
             <p14:sldId id="265"/>
             <p14:sldId id="266"/>
           </p14:sldIdLst>
         </p14:section>
-        <p14:section name="Use" id="{41ce8121-4ca6-d21d-a734-6c94be272bad}">
+        <p14:section name="Use" id="{f597c559-b6a0-e3bc-65de-6de29064ca2d}">
           <p14:sldIdLst>
             <p14:sldId id="267"/>
             <p14:sldId id="268"/>
@@ -161,7 +161,7 @@
             <p14:sldId id="270"/>
           </p14:sldIdLst>
         </p14:section>
-        <p14:section name="Appendix" id="{93fb55c0-1488-1f0d-ecf2-6a333f428a70}">
+        <p14:section name="Appendix" id="{14edb194-819a-3276-a9dd-4b62614448cb}">
           <p14:sldIdLst>
             <p14:sldId id="271"/>
             <p14:sldId id="272"/>
@@ -4767,7 +4767,7 @@
                   <a:schemeClr val="tx1"/>
                 </a:solidFill>
               </a:rPr>
-              <a:t>Experiment 2, the real test: spacing in a building it never saw</a:t>
+              <a:t>Spacing holds up on a clinic the generator never saw</a:t>
             </a:r>
             <a:endParaRPr lang="en-US" sz="2600" dirty="0"/>
           </a:p>
@@ -4935,7 +4935,7 @@
                   <a:schemeClr val="tx1"/>
                 </a:solidFill>
               </a:rPr>
-              <a:t>Experiment 3, a use: what must a clamp catalog cover?</a:t>
+              <a:t>A two-size catalog attaches 1 pipe in 9; the dataset shows what to cover</a:t>
             </a:r>
             <a:endParaRPr lang="en-US" sz="2600" dirty="0"/>
           </a:p>
@@ -5357,7 +5357,7 @@
                   <a:schemeClr val="tx1"/>
                 </a:solidFill>
               </a:rPr>
-              <a:t>See it: set the parameters, get the support designer’s brief</a:t>
+              <a:t>Set the parameters and the generator returns the designer’s brief</a:t>
             </a:r>
             <a:endParaRPr lang="en-US" sz="2600" dirty="0"/>
           </a:p>
@@ -5633,7 +5633,7 @@
                   <a:schemeClr val="tx1"/>
                 </a:solidFill>
               </a:rPr>
-              <a:t>Using CrossMEP: train, evaluate, report</a:t>
+              <a:t>Train on the generator, evaluate on the benchmark, report per tier</a:t>
             </a:r>
             <a:endParaRPr lang="en-US" sz="2600" dirty="0"/>
           </a:p>
@@ -6324,7 +6324,7 @@
                   <a:schemeClr val="tx1"/>
                 </a:solidFill>
               </a:rPr>
-              <a:t>Scope, and what comes next</a:t>
+              <a:t>One section at one support today; a checker and real data come next</a:t>
             </a:r>
             <a:endParaRPr lang="en-US" sz="2600" dirty="0"/>
           </a:p>
@@ -6811,7 +6811,7 @@
                   <a:schemeClr val="bg1"/>
                 </a:solidFill>
               </a:rPr>
-              <a:t>CrossMEP: the brief, not the answer</a:t>
+              <a:t>Support design now has open problems to learn from</a:t>
             </a:r>
             <a:endParaRPr lang="en-US" sz="3600" dirty="0"/>
           </a:p>
@@ -7028,7 +7028,7 @@
                   <a:schemeClr val="tx1"/>
                 </a:solidFill>
               </a:rPr>
-              <a:t>Appendix: two more sections from the Generator Studio</a:t>
+              <a:t>A wall with six pipes, and a slab with a duct, a tray and conduits</a:t>
             </a:r>
             <a:endParaRPr lang="en-US" sz="2600" dirty="0"/>
           </a:p>
@@ -7256,7 +7256,7 @@
                   <a:schemeClr val="tx1"/>
                 </a:solidFill>
               </a:rPr>
-              <a:t>Appendix: per-tier statistics, benchmark split</a:t>
+              <a:t>Median load rises from 0.10 kN at C1 to 1.71 kN at C8 as the gap narrows</a:t>
             </a:r>
             <a:endParaRPr lang="en-US" sz="2600" dirty="0"/>
           </a:p>
@@ -10637,7 +10637,7 @@
                   <a:schemeClr val="tx1"/>
                 </a:solidFill>
               </a:rPr>
-              <a:t>Appendix: the realism check, in detail</a:t>
+              <a:t>Against the clinic the generator is 28 mm off; the small duplex is 70 to 85</a:t>
             </a:r>
             <a:endParaRPr lang="en-US" sz="2600" dirty="0"/>
           </a:p>
@@ -14436,7 +14436,7 @@
                   <a:schemeClr val="tx1"/>
                 </a:solidFill>
               </a:rPr>
-              <a:t>Appendix: the catalog stress test, with error bars</a:t>
+              <a:t>The diameter rule moves catalog coverage more than tier or split does</a:t>
             </a:r>
             <a:endParaRPr lang="en-US" sz="2600" dirty="0"/>
           </a:p>
@@ -19193,7 +19193,7 @@
                   <a:schemeClr val="tx1"/>
                 </a:solidFill>
               </a:rPr>
-              <a:t>Every pipe, duct and tray hangs from a support designed by hand</a:t>
+              <a:t>Nowadays, every pipe, duct and tray hangs from a hand-designed support</a:t>
             </a:r>
             <a:endParaRPr lang="en-US" sz="2600" dirty="0"/>
           </a:p>
@@ -19751,7 +19751,7 @@
                   <a:schemeClr val="tx1"/>
                 </a:solidFill>
               </a:rPr>
-              <a:t>Appendix: one record, as stored</a:t>
+              <a:t>A context is stored as plain JSON: elements, sizes, loads, positions</a:t>
             </a:r>
             <a:endParaRPr lang="en-US" sz="2600" dirty="0"/>
           </a:p>
@@ -20236,7 +20236,7 @@
                   <a:schemeClr val="tx1"/>
                 </a:solidFill>
               </a:rPr>
-              <a:t>There was no public dataset of support-design problems</a:t>
+              <a:t>Learning to design supports needs many problems, and none were public</a:t>
             </a:r>
             <a:endParaRPr lang="en-US" sz="2600" dirty="0"/>
           </a:p>
@@ -21328,7 +21328,7 @@
                   <a:schemeClr val="tx1"/>
                 </a:solidFill>
               </a:rPr>
-              <a:t>A context is the section at one hanger: the brief, not the answer</a:t>
+              <a:t>We generate what a designer receives: the section at one hanger</a:t>
             </a:r>
             <a:endParaRPr lang="en-US" sz="2600" dirty="0"/>
           </a:p>
@@ -21496,7 +21496,7 @@
                   <a:schemeClr val="tx1"/>
                 </a:solidFill>
               </a:rPr>
-              <a:t>How a context is generated: rules, not free randomness</a:t>
+              <a:t>Sections follow trade practice and measured spacing, not random shapes</a:t>
             </a:r>
             <a:endParaRPr lang="en-US" sz="2600" dirty="0"/>
           </a:p>
@@ -22282,7 +22282,7 @@
                   <a:schemeClr val="tx1"/>
                 </a:solidFill>
               </a:rPr>
-              <a:t>Every constant is sourced or declared a choice; every load is computed</a:t>
+              <a:t>Sizes, spans and loads come from standards; the choices are declared</a:t>
             </a:r>
             <a:endParaRPr lang="en-US" sz="2600" dirty="0"/>
           </a:p>
@@ -23818,7 +23818,7 @@
                   <a:schemeClr val="tx1"/>
                 </a:solidFill>
               </a:rPr>
-              <a:t>The release: 7,000 contexts in four splits on disjoint seeds</a:t>
+              <a:t>7,000 contexts in four splits; the test seeds are never trained on</a:t>
             </a:r>
             <a:endParaRPr lang="en-US" sz="2600" dirty="0"/>
           </a:p>
@@ -25657,7 +25657,7 @@
                   <a:schemeClr val="tx1"/>
                 </a:solidFill>
               </a:rPr>
-              <a:t>Eight difficulty tiers: tier Cn holds exactly n elements</a:t>
+              <a:t>Difficulty is one number: tier Cn holds exactly n elements</a:t>
             </a:r>
             <a:endParaRPr lang="en-US" sz="2600" dirty="0"/>
           </a:p>
@@ -25825,7 +25825,7 @@
                   <a:schemeClr val="tx1"/>
                 </a:solidFill>
               </a:rPr>
-              <a:t>Experiment 1, a design check: difficulty grows with the tier</a:t>
+              <a:t>Higher tiers are heavier and, overall, tighter, as designed</a:t>
             </a:r>
             <a:endParaRPr lang="en-US" sz="2600" dirty="0"/>
           </a:p>

--- a/docs/CrossMEP_CIBW78_talk.pptx
+++ b/docs/CrossMEP_CIBW78_talk.pptx
@@ -25,9 +25,10 @@
     <p:sldId id="273" r:id="rId19"/>
     <p:sldId id="274" r:id="rId20"/>
     <p:sldId id="275" r:id="rId21"/>
+    <p:sldId id="276" r:id="rId22"/>
   </p:sldIdLst>
   <p:notesMasterIdLst>
-    <p:notesMasterId r:id="rId22"/>
+    <p:notesMasterId r:id="rId23"/>
   </p:notesMasterIdLst>
   <p:sldSz cx="12192000" cy="6858000"/>
   <p:notesSz cx="6858000" cy="12192000"/>
@@ -126,48 +127,49 @@
   <p:extLst>
     <p:ext uri="{521415D9-36F7-43E2-AB2F-B90AF26B5E84}">
       <p14:sectionLst xmlns:p14="http://schemas.microsoft.com/office/powerpoint/2010/main">
-        <p14:section name="Opening" id="{d96c531c-391f-a77b-2589-7bbab5d88ce3}">
+        <p14:section name="Opening" id="{4ba9412d-72b2-c3d6-8d40-587955bf9c75}">
           <p14:sldIdLst>
             <p14:sldId id="256"/>
           </p14:sldIdLst>
         </p14:section>
-        <p14:section name="Motivation" id="{57b0d418-9757-a80d-ed0e-2304d7793489}">
+        <p14:section name="Motivation" id="{5101bc50-b2ec-a1ab-70fe-49adc88418bf}">
           <p14:sldIdLst>
             <p14:sldId id="257"/>
             <p14:sldId id="258"/>
+            <p14:sldId id="259"/>
           </p14:sldIdLst>
         </p14:section>
-        <p14:section name="The dataset" id="{0647dabb-f33c-9f6d-864a-2bc9373d6266}">
+        <p14:section name="The dataset" id="{be418935-f5f2-dec0-23f7-db9e5066ccef}">
           <p14:sldIdLst>
-            <p14:sldId id="259"/>
             <p14:sldId id="260"/>
             <p14:sldId id="261"/>
             <p14:sldId id="262"/>
             <p14:sldId id="263"/>
+            <p14:sldId id="264"/>
           </p14:sldIdLst>
         </p14:section>
-        <p14:section name="Experiments" id="{81d08310-2509-2e35-a957-77b78003ee35}">
+        <p14:section name="Experiments" id="{2bd65c4c-b1fc-1921-b425-34a5bae00738}">
           <p14:sldIdLst>
-            <p14:sldId id="264"/>
             <p14:sldId id="265"/>
             <p14:sldId id="266"/>
+            <p14:sldId id="267"/>
           </p14:sldIdLst>
         </p14:section>
-        <p14:section name="Use" id="{f597c559-b6a0-e3bc-65de-6de29064ca2d}">
+        <p14:section name="Use" id="{ad95764a-de7c-b336-ff4d-51ccc51f8cac}">
           <p14:sldIdLst>
-            <p14:sldId id="267"/>
             <p14:sldId id="268"/>
             <p14:sldId id="269"/>
             <p14:sldId id="270"/>
+            <p14:sldId id="271"/>
           </p14:sldIdLst>
         </p14:section>
-        <p14:section name="Appendix" id="{14edb194-819a-3276-a9dd-4b62614448cb}">
+        <p14:section name="Appendix" id="{cf67def0-fc7c-8476-6df5-32113d772a2f}">
           <p14:sldIdLst>
-            <p14:sldId id="271"/>
             <p14:sldId id="272"/>
             <p14:sldId id="273"/>
             <p14:sldId id="274"/>
             <p14:sldId id="275"/>
+            <p14:sldId id="276"/>
           </p14:sldIdLst>
         </p14:section>
       </p14:sectionLst>
@@ -2057,7 +2059,7 @@
           <a:p>
             <a:r>
               <a:rPr lang="en-US" dirty="0"/>
-              <a:t>The second experiment is the one the generator could fail: is the spacing realistic in a building it never saw? The gap distribution was fitted on a residential duplex from buildingSMART. We held out a second open building, a medical-dental clinic, which is a real building, cut it into sections every 250 millimetres, the way a context is defined, and measured the gap between pipes running side by side. On the left, the clinic: the generated gaps are close to the measured ones, though not identical. On the right, the distances: generated to clinic 28 millimetres. That is above the 8 a perfect generator would show, so not a perfect match, but about as close as the duplex's own two models are to each other. A fixed gap at the 25 millimetre minimum would be about 190 millimetres off. (5:20)</a:t>
+              <a:t>The first experiment is a design check, not a discovery: does difficulty grow with the tier, as intended? The count is fixed by construction; load and congestion follow from the rules, so this shows the dataset behaves as designed. Load at the support rises at every step, from 0.1 to 1.7 kilonewtons. The closest gap falls from 120 to about 62 millimetres, but widens again at C6, where the generator starts stacking in two or three rows. So report methods tier by tier. (4:55)</a:t>
             </a:r>
             <a:endParaRPr lang="en-US" dirty="0"/>
           </a:p>
@@ -2145,7 +2147,7 @@
           <a:p>
             <a:r>
               <a:rPr lang="en-US" dirty="0"/>
-              <a:t>The third is a use of the dataset, not a test of it: what must a catalog of clamps cover? Take the paper's two-size catalog as an illustration. It attaches 11.6 per cent of the pipes, interval 10 to 13, all of one size, DN40; load never binds, and trays, ducts and conduits are not covered at all. On the right is what the dataset asks of any catalog: two well-placed sizes attach 43 per cent, six 80, twelve every pipe. So 'what should the catalog contain' becomes a measurement. (6:05)</a:t>
+              <a:t>The second experiment is the one the generator could fail: is the spacing realistic in a building it never saw? The gap distribution was fitted on a residential duplex from buildingSMART. We held out a second open building, a medical-dental clinic, which is a real building, cut it into sections every 250 millimetres, the way a context is defined, and measured the gap between pipes running side by side. On the left, the clinic: the generated gaps are close to the measured ones, though not identical. On the right, the distances: generated to clinic 28 millimetres. That is above the 8 a perfect generator would show, so not a perfect match, but about as close as the duplex's own two models are to each other. A fixed gap at the 25 millimetre minimum would be about 190 millimetres off. (5:30)</a:t>
             </a:r>
             <a:endParaRPr lang="en-US" dirty="0"/>
           </a:p>
@@ -2233,7 +2235,7 @@
           <a:p>
             <a:r>
               <a:rPr lang="en-US" dirty="0"/>
-              <a:t>Here is what that means in practice. In the studio I choose what crosses the hanger: a tier, or an exact mix, and the seed. Out comes the section a support designer receives, drawn the way an engineer would issue it: every service at true size, its level below the slab, its load at the support, the closest clear gap; and the same run in 3D. Every section is a stored output of the released generator, with the Python call that reproduces it. [Live: switch to the studio, click C3, then Generate another twice, then Exact mix with a duct. If the demo fails, stay on this slide; slide 16 shows two more sections. Before the talk: open the studio once with internet, set its link sharing to public, scan the QR from a phone not logged in.] (6:40)</a:t>
+              <a:t>The third is a use of the dataset, not a test of it: what must a catalog of clamps cover? Take the paper's two-size catalog as an illustration. It attaches 11.6 per cent of the pipes, interval 10 to 13, all of one size, DN40; load never binds, and trays, ducts and conduits are not covered at all. On the right is what the dataset asks of any catalog: two well-placed sizes attach 43 per cent, six 80, twelve every pipe. So 'what should the catalog contain' becomes a measurement. (6:25)</a:t>
             </a:r>
             <a:endParaRPr lang="en-US" dirty="0"/>
           </a:p>
@@ -2321,7 +2323,7 @@
           <a:p>
             <a:r>
               <a:rPr lang="en-US" dirty="0"/>
-              <a:t>Using it takes a few lines: load a split with the Python standard library, filter by composition, or generate your own mix with the same rules. Because there are no labels, the same files serve reinforcement learning, constraint-programming baselines and human benchmarking, and we ship the scoring: train on the generator, from C1 up to C8; evaluate on the benchmark, the same 125 contexts per tier for every method; report per tier with 95 per cent intervals and paired tests. (7:45)</a:t>
+              <a:t>Here is what that means in practice. In the studio I choose what crosses the hanger: a tier, or an exact mix, and the seed. Out comes the section a support designer receives, drawn the way an engineer would issue it: every service at true size, its level below the slab, its load at the support, the closest clear gap; and the same run in 3D. Every section is a stored output of the released generator, with the Python call that reproduces it. [Live: switch to the studio, click C3, then Generate another twice, then Exact mix with a duct. If the demo fails, stay on this slide; slide 17 shows two more sections. Before the talk: open the studio once with internet, set its link sharing to public, scan the QR from a phone not logged in.] (7:00)</a:t>
             </a:r>
             <a:endParaRPr lang="en-US" dirty="0"/>
           </a:p>
@@ -2409,7 +2411,7 @@
           <a:p>
             <a:r>
               <a:rPr lang="en-US" dirty="0"/>
-              <a:t>Its scope: one section at one support - routing, branches and spacing are outside it, although the span is recorded so a method can vary it. Realism is checked on sections of two open buildings; congested racks rest on practice and standards. The trade mix is a design choice, and the data is not for structural design. Next: a public checker for support designs, with best-known costs, so methods can be compared on the answer and not only on the brief; the catalog as an input, so a method is tested on catalogs it has never seen; and a real test set from commercial projects, with supports designed by engineers - which is where we would value your eye. (8:20)</a:t>
+              <a:t>Using it takes a few lines: load a split with the Python standard library, filter by composition, or generate your own mix with the same rules. Because there are no labels, the same files serve reinforcement learning, constraint-programming baselines and human benchmarking, and we ship the scoring: train on the generator, from C1 up to C8; evaluate on the benchmark, the same 125 contexts per tier for every method; report per tier with 95 per cent intervals and paired tests. (8:05)</a:t>
             </a:r>
             <a:endParaRPr lang="en-US" dirty="0"/>
           </a:p>
@@ -2497,7 +2499,7 @@
           <a:p>
             <a:r>
               <a:rPr lang="en-US" dirty="0"/>
-              <a:t>CrossMEP is the brief, not the answer: 7,000 support-design problems, every constant traced to its source or declared a design choice, pipe gaps checked against two open buildings, and open. The QR code takes you to the data, the code, the gallery and the studio. Thank you. (9:10)</a:t>
+              <a:t>Its scope: one section at one support - routing, branches and spacing are outside it, although the span is recorded so a method can vary it. Realism is checked on sections of two open buildings; congested racks rest on practice and standards. The trade mix is a design choice, and the data is not for structural design. Next: a public checker for support designs, with best-known costs, so methods can be compared on the answer and not only on the brief; the catalog as an input, so a method is tested on catalogs it has never seen; and a real test set from commercial projects, with supports designed by engineers - which is where we would value your eye. (8:35)</a:t>
             </a:r>
             <a:endParaRPr lang="en-US" dirty="0"/>
           </a:p>
@@ -2585,7 +2587,7 @@
           <a:p>
             <a:r>
               <a:rPr lang="en-US" dirty="0"/>
-              <a:t>Backup for the live demo. Left: a wall section, six pipes in two rows, each labelled with its size, trade, insulation, offset from the wall and load at the support. Right: an exact mix on a slab, with a duct, a tray, conduits and pipes, their levels below the soffit and the closest clear gap.</a:t>
+              <a:t>CrossMEP is the brief, not the answer: 7,000 support-design problems, every constant traced to its source or declared a design choice, pipe gaps checked against two open buildings, and open. The QR code takes you to the data, the code, the gallery and the studio. Thank you. (9:25)</a:t>
             </a:r>
             <a:endParaRPr lang="en-US" dirty="0"/>
           </a:p>
@@ -2673,7 +2675,7 @@
           <a:p>
             <a:r>
               <a:rPr lang="en-US" dirty="0"/>
-              <a:t>Backup: per-tier medians on the benchmark split, the distance to the held-out building, and the trend statistics behind experiment 1.</a:t>
+              <a:t>Backup for the live demo. Left: a wall section, six pipes in two rows, each labelled with its size, trade, insulation, offset from the wall and load at the support. Right: an exact mix on a slab, with a duct, a tray, conduits and pipes, their levels below the soffit and the closest clear gap.</a:t>
             </a:r>
             <a:endParaRPr lang="en-US" dirty="0"/>
           </a:p>
@@ -2761,7 +2763,7 @@
           <a:p>
             <a:r>
               <a:rPr lang="en-US" dirty="0"/>
-              <a:t>Backup for questions on experiment 2: sample sizes, both weightings, the noise floor and the sensitivity of the result to the way the sections are cut.</a:t>
+              <a:t>Backup: per-tier medians on the benchmark split, the distance to the held-out building, and the trend statistics behind experiment 1.</a:t>
             </a:r>
             <a:endParaRPr lang="en-US" dirty="0"/>
           </a:p>
@@ -2849,7 +2851,7 @@
           <a:p>
             <a:r>
               <a:rPr lang="en-US" dirty="0"/>
-              <a:t>Backup for questions on experiment 3. Per tier, the benchmark has only 125 contexts, so its intervals are wide; the population estimate from two thousand generated contexts per tier shows the tiers are about equal. The headline depends on the attach-diameter rule and on bin-edge tolerance because one nominal size, DN100, sits 0.3 millimetres outside a bin. Only size and capacity are tested - clearance, insert orientation and anchors are not - so the coverage is an upper bound on what can be installed.</a:t>
+              <a:t>Backup for questions on experiment 2: sample sizes, both weightings, the noise floor and the sensitivity of the result to the way the sections are cut.</a:t>
             </a:r>
             <a:endParaRPr lang="en-US" dirty="0"/>
           </a:p>
@@ -2937,7 +2939,7 @@
           <a:p>
             <a:r>
               <a:rPr lang="en-US" dirty="0"/>
-              <a:t>Every pipe, duct and tray in a building hangs from a support assembly: anchors, rods, channel, clamps. On a 200,000 square-foot hospital that is on the order of 10,000 assemblies, each taking 20 minutes to two hours by hand - together roughly a quarter of the MEP design effort. These are practitioner estimates. The work starts after coordination: at every hanger location the designer takes the section across the run and designs a support for exactly what passes through it. That section is the unit of work, and it is the unit of our dataset. (0:20)</a:t>
+              <a:t>A modular support system groups several MEP services - pipes, ducts, cable trays - onto one prefabricated frame, installed as one unit: a structural support assembly. A 200,000 square-foot hospital needs on the order of 10,000 of them, and each takes 20 minutes to two hours to design by hand: together about a quarter of the MEP design effort. These are practitioner estimates. (0:15)</a:t>
             </a:r>
             <a:endParaRPr lang="en-US" dirty="0"/>
           </a:p>
@@ -3025,6 +3027,94 @@
           <a:p>
             <a:r>
               <a:rPr lang="en-US" dirty="0"/>
+              <a:t>Backup for questions on experiment 3. Per tier, the benchmark has only 125 contexts, so its intervals are wide; the population estimate from two thousand generated contexts per tier shows the tiers are about equal. The headline depends on the attach-diameter rule and on bin-edge tolerance because one nominal size, DN100, sits 0.3 millimetres outside a bin. Only size and capacity are tested - clearance, insert orientation and anchors are not - so the coverage is an upper bound on what can be installed.</a:t>
+            </a:r>
+            <a:endParaRPr lang="en-US" dirty="0"/>
+          </a:p>
+        </p:txBody>
+      </p:sp>
+      <p:sp>
+        <p:nvSpPr>
+          <p:cNvPr id="4" name="Slide Number Placeholder 3"/>
+          <p:cNvSpPr>
+            <a:spLocks noGrp="1"/>
+          </p:cNvSpPr>
+          <p:nvPr>
+            <p:ph type="sldNum" sz="quarter" idx="10"/>
+          </p:nvPr>
+        </p:nvSpPr>
+        <p:spPr/>
+        <p:txBody>
+          <a:bodyPr/>
+          <a:lstStyle/>
+          <a:p>
+            <a:fld id="{F7021451-1387-4CA6-816F-3879F97B5CBC}" type="slidenum">
+              <a:rPr lang="en-US"/>
+              <a:t>20</a:t>
+            </a:fld>
+            <a:endParaRPr lang="en-US"/>
+          </a:p>
+        </p:txBody>
+      </p:sp>
+    </p:spTree>
+    <p:extLst>
+      <p:ext uri="{BB962C8B-B14F-4D97-AF65-F5344CB8AC3E}">
+        <p14:creationId xmlns:p14="http://schemas.microsoft.com/office/powerpoint/2010/main" val="1024086991"/>
+      </p:ext>
+    </p:extLst>
+  </p:cSld>
+  <p:clrMapOvr>
+    <a:masterClrMapping/>
+  </p:clrMapOvr>
+</p:notes>
+</file>
+
+<file path=ppt/notesSlides/notesSlide21.xml><?xml version="1.0" encoding="utf-8"?>
+<p:notes xmlns:a="http://schemas.openxmlformats.org/drawingml/2006/main" xmlns:r="http://schemas.openxmlformats.org/officeDocument/2006/relationships" xmlns:p="http://schemas.openxmlformats.org/presentationml/2006/main">
+  <p:cSld>
+    <p:spTree>
+      <p:nvGrpSpPr>
+        <p:cNvPr id="1" name=""/>
+        <p:cNvGrpSpPr/>
+        <p:nvPr/>
+      </p:nvGrpSpPr>
+      <p:grpSpPr>
+        <a:xfrm>
+          <a:off x="0" y="0"/>
+          <a:ext cx="0" cy="0"/>
+          <a:chOff x="0" y="0"/>
+          <a:chExt cx="0" cy="0"/>
+        </a:xfrm>
+      </p:grpSpPr>
+      <p:sp>
+        <p:nvSpPr>
+          <p:cNvPr id="2" name="Slide Image Placeholder 1"/>
+          <p:cNvSpPr>
+            <a:spLocks noGrp="1" noRot="1" noChangeAspect="1"/>
+          </p:cNvSpPr>
+          <p:nvPr>
+            <p:ph type="sldImg"/>
+          </p:nvPr>
+        </p:nvSpPr>
+        <p:spPr/>
+      </p:sp>
+      <p:sp>
+        <p:nvSpPr>
+          <p:cNvPr id="3" name="Notes Placeholder 2"/>
+          <p:cNvSpPr>
+            <a:spLocks noGrp="1"/>
+          </p:cNvSpPr>
+          <p:nvPr>
+            <p:ph type="body" idx="1"/>
+          </p:nvPr>
+        </p:nvSpPr>
+        <p:spPr/>
+        <p:txBody>
+          <a:bodyPr/>
+          <a:lstStyle/>
+          <a:p>
+            <a:r>
+              <a:rPr lang="en-US" dirty="0"/>
               <a:t>Backup: what one stored context looks like - plain JSON, one object per context.</a:t>
             </a:r>
             <a:endParaRPr lang="en-US" dirty="0"/>
@@ -3048,7 +3138,7 @@
           <a:p>
             <a:fld id="{F7021451-1387-4CA6-816F-3879F97B5CBC}" type="slidenum">
               <a:rPr lang="en-US"/>
-              <a:t>20</a:t>
+              <a:t>21</a:t>
             </a:fld>
             <a:endParaRPr lang="en-US"/>
           </a:p>
@@ -3113,7 +3203,7 @@
           <a:p>
             <a:r>
               <a:rPr lang="en-US" dirty="0"/>
-              <a:t>Learning-based methods for this task need many such sections, and none were public. Project models are proprietary, the open ones are not organised around supports, and any one project covers one narrow slice. So we built CrossMEP: 7,000 contexts with about 31,500 elements, stratified into eight tiers, deliberately unlabeled, with every constant traced to its source or declared a design choice, pipe gaps checked against open IFC buildings, and released openly with the generator. (1:00)</a:t>
+              <a:t>At ISARC we stated the task: given a fixed catalog of components and the MEP context - the services crossing the hanger and the surface they hang from - synthesize a feasible assembly. Design starts after coordination, from the section at each hanger, not from the whole model. Tools coordinate the model and check a design, but choosing the topology and the parts is still manual, because it rests on judgment, on rules that interact across thousands of combinations, and on catalogs that keep changing. The section at the hanger is the unit of that work, and the unit of our dataset. (0:40)</a:t>
             </a:r>
             <a:endParaRPr lang="en-US" dirty="0"/>
           </a:p>
@@ -3201,7 +3291,7 @@
           <a:p>
             <a:r>
               <a:rPr lang="en-US" dirty="0"/>
-              <a:t>Here is one context. It is a 2-D section at one support location. Each element carries its kind, service and trade, its bare size, its insulation, its load per metre and the span it was sized at - so the load at this support - and its position along and out from the surface. Plus the surface itself: slab or wall, substrate, thickness. What is not in it is the support: no channel, no rods, no anchors, and no 'correct answer', because a feasible support depends on the catalog you build from. The context is the brief; the assembly is the answer. (1:25)</a:t>
+              <a:t>Learning-based methods for this task need many such sections, and none were public. Project models are proprietary, the open ones are not organised around supports, and any one project covers one narrow slice. So we built CrossMEP: 7,000 contexts with about 31,500 elements, stratified into eight tiers, deliberately unlabeled, with every constant traced to its source or declared a design choice, pipe gaps checked against open IFC buildings, and released openly with the generator. (1:25)</a:t>
             </a:r>
             <a:endParaRPr lang="en-US" dirty="0"/>
           </a:p>
@@ -3289,7 +3379,7 @@
           <a:p>
             <a:r>
               <a:rPr lang="en-US" dirty="0"/>
-              <a:t>How is a context made? Not by free randomness: by rules you would recognise. The tier fixes the number of elements. We pick the surface. We fill the count with services the way trades actually run - hot and cold together, flow and return together, conduits in groups. Bulky services go nearest the slab: ducts, then containment, then pipes. Gaps between neighbours are drawn from gaps measured on a built project, with a 25 millimetre minimum, plus a small stagger within rows; on walls, electrical stays above water. Finally every context is checked - every pair at least 25 millimetres clear - and it is seeded: the same seed gives the same file, byte for byte. (2:10)</a:t>
+              <a:t>Here is one context. It is a 2-D section at one support location. Each element carries its kind, service and trade, its bare size, its insulation, its load per metre and the span it was sized at - so the load at this support - and its position along and out from the surface. Plus the surface itself: slab or wall, substrate, thickness. What is not in it is the support: no channel, no rods, no anchors, and no 'correct answer', because a feasible support depends on the catalog you build from. The context is the brief; the assembly is the answer. (1:55)</a:t>
             </a:r>
             <a:endParaRPr lang="en-US" dirty="0"/>
           </a:p>
@@ -3377,7 +3467,7 @@
           <a:p>
             <a:r>
               <a:rPr lang="en-US" dirty="0"/>
-              <a:t>Every number in a context comes from a cited source or a declared design choice. Pipe sizes and walls from EN 10220 and 10255, filled with water, at ASME B31.1 water-service spans. Insulation from the German GEG for heated lines and a condensation-control schedule for chilled water. Trays at IEC 61537 widths, loaded full. Ducts at the EN preferred sizes with a manufacturer weight table. Conduits at IEC 61386 sizes with 40 per cent cable fill. The loads are computed from these sources in the code, and every constant is documented with its source and status. Things that are choices - the trade mix, the tier composition - are labelled as design choices, not presented as measurements. (2:55)</a:t>
+              <a:t>How is a context made? Not by free randomness: by rules you would recognise. The tier fixes the number of elements. We pick the surface. We fill the count with services the way trades actually run - hot and cold together, flow and return together, conduits in groups. Bulky services go nearest the slab: ducts, then containment, then pipes. Gaps between neighbours are drawn from gaps measured on a built project, with a 25 millimetre minimum, plus a small stagger within rows; on walls, electrical stays above water. Finally every context is checked - every pair at least 25 millimetres clear - and it is seeded: the same seed gives the same file, byte for byte. (2:35)</a:t>
             </a:r>
             <a:endParaRPr lang="en-US" dirty="0"/>
           </a:p>
@@ -3465,7 +3555,7 @@
           <a:p>
             <a:r>
               <a:rPr lang="en-US" dirty="0"/>
-              <a:t>The release has four splits on disjoint seeds: 5,000 contexts for training, 500 for validation, 500 for test, and a 1,000-context benchmark with 125 per tier. 31,484 elements in total - mostly pipes, then conduits, trays and ducts; pipe sizes from DN15 to DN100, mostly small bore, as in the measured project. Four in five contexts hang from a ceiling, one in five from a wall, and electrical containment is the largest trade by count. Everything is plain JSON with a schema, metadata and a datasheet. (3:40)</a:t>
+              <a:t>Every number in a context comes from a cited source or a declared design choice. Pipes from EN 10220 and 10255, filled with water, at ASME B31.1 water-service spans; insulation from the German GEG and a condensation-control schedule; trays at IEC 61537 widths, loaded full; ducts at EN sizes with a manufacturer weight table; conduits at IEC 61386 sizes with 40 per cent fill. Loads are computed from these in the code, and choices such as the trade mix are labelled as design choices. (3:20)</a:t>
             </a:r>
             <a:endParaRPr lang="en-US" dirty="0"/>
           </a:p>
@@ -3553,7 +3643,7 @@
           <a:p>
             <a:r>
               <a:rPr lang="en-US" dirty="0"/>
-              <a:t>This is what the data looks like: one benchmark context per tier. C1 is a single element - the most common support in any building. By C8 you have eight services on three rows. Within a tier everything else varies - kinds, trades, surfaces and stacking - so the element count is the one controlled difficulty axis. Note the walls: the section rotates, and electrical sits above water. (4:15)</a:t>
+              <a:t>The release has four splits on disjoint seeds: 5,000 contexts for training, 500 for validation, 500 for test, and a 1,000-context benchmark with 125 per tier. 31,484 elements in total - mostly pipes, then conduits, trays and ducts; pipe sizes from DN15 to DN100, mostly small bore, as in the measured project. Four in five contexts hang from a ceiling, one in five from a wall, and electrical containment is the largest trade by count. Everything is plain JSON with a schema, metadata and a datasheet. (3:55)</a:t>
             </a:r>
             <a:endParaRPr lang="en-US" dirty="0"/>
           </a:p>
@@ -3641,7 +3731,7 @@
           <a:p>
             <a:r>
               <a:rPr lang="en-US" dirty="0"/>
-              <a:t>The first experiment is a design check, not a discovery: does difficulty grow with the tier, as intended? The count is fixed by construction; load and congestion follow from the rules, so this shows the dataset behaves as designed. Load at the support rises at every step, from 0.1 to 1.7 kilonewtons. The closest gap falls from 120 to about 62 millimetres, but widens again at C6, where the generator starts stacking in two or three rows. So report methods tier by tier. (4:45)</a:t>
+              <a:t>This is what the data looks like: one benchmark context per tier. C1 is a single element - the most common support in any building. By C8 you have eight services on three rows. Within a tier everything else varies - kinds, trades, surfaces and stacking - so the element count is the one controlled difficulty axis. Note the walls: the section rotates, and electrical sits above water. (4:30)</a:t>
             </a:r>
             <a:endParaRPr lang="en-US" dirty="0"/>
           </a:p>
@@ -4767,6 +4857,174 @@
                   <a:schemeClr val="tx1"/>
                 </a:solidFill>
               </a:rPr>
+              <a:t>Higher tiers are heavier and, overall, tighter, as designed</a:t>
+            </a:r>
+            <a:endParaRPr lang="en-US" sz="2600" dirty="0"/>
+          </a:p>
+        </p:txBody>
+      </p:sp>
+      <p:pic>
+        <p:nvPicPr>
+          <p:cNvPr id="3" name="tier statistics" descr="preencoded.png">    </p:cNvPr>
+          <p:cNvPicPr>
+            <a:picLocks noChangeAspect="1"/>
+          </p:cNvPicPr>
+          <p:nvPr/>
+        </p:nvPicPr>
+        <p:blipFill>
+          <a:blip r:embed="rId1"/>
+          <a:stretch>
+            <a:fillRect/>
+          </a:stretch>
+        </p:blipFill>
+        <p:spPr>
+          <a:xfrm>
+            <a:off x="548640" y="1325880"/>
+            <a:ext cx="11091672" cy="3965273"/>
+          </a:xfrm>
+          <a:prstGeom prst="rect">
+            <a:avLst/>
+          </a:prstGeom>
+        </p:spPr>
+      </p:pic>
+      <p:sp>
+        <p:nvSpPr>
+          <p:cNvPr id="4" name="experiment 1 caption"/>
+          <p:cNvSpPr txBox="1"/>
+          <p:nvPr/>
+        </p:nvSpPr>
+        <p:spPr>
+          <a:xfrm>
+            <a:off x="548640" y="5400881"/>
+            <a:ext cx="11091672" cy="731520"/>
+          </a:xfrm>
+          <a:prstGeom prst="rect">
+            <a:avLst/>
+          </a:prstGeom>
+          <a:noFill/>
+          <a:ln/>
+        </p:spPr>
+        <p:txBody>
+          <a:bodyPr wrap="square" lIns="0" tIns="0" rIns="0" bIns="0" rtlCol="0" anchor="t"/>
+          <a:lstStyle/>
+          <a:p>
+            <a:pPr indent="0" marL="0">
+              <a:buNone/>
+            </a:pPr>
+            <a:r>
+              <a:rPr lang="en-US" sz="1250" dirty="0">
+                <a:solidFill>
+                  <a:srgbClr val="52514E"/>
+                </a:solidFill>
+              </a:rPr>
+              <a:t>A check that the dataset behaves as designed: the tier fixes the element count; load and congestion follow from the rules. Boxes: benchmark, 125 contexts per tier (IQR, whiskers 1.5 IQR); diamonds: medians of 2,000 generated contexts per tier. Load rises at every tier (rank correlation +0.56); the closest gap shrinks overall (−0.36) but widens at C6 (70 → 75 mm), where elements start to stack in two or three rows.</a:t>
+            </a:r>
+            <a:endParaRPr lang="en-US" sz="1250" dirty="0"/>
+          </a:p>
+        </p:txBody>
+      </p:sp>
+      <p:sp>
+        <p:nvSpPr>
+          <p:cNvPr id="25" name="Slide Number Placeholder 0"/>
+          <p:cNvSpPr>
+            <a:spLocks noGrp="1"/>
+          </p:cNvSpPr>
+          <p:nvPr>
+            <p:ph type="sldNum" sz="quarter" idx="4294967295"/>
+          </p:nvPr>
+        </p:nvSpPr>
+        <p:spPr>
+          <a:xfrm>
+            <a:off x="11064240" y="6419088"/>
+            <a:ext cx="594360" cy="274320"/>
+          </a:xfrm>
+          <a:prstGeom prst="rect">
+            <a:avLst/>
+          </a:prstGeom>
+          <a:extLst>
+            <a:ext uri="{C572A759-6A51-4108-AA02-DFA0A04FC94B}">
+              <ma14:wrappingTextBoxFlag xmlns:ma14="http://schemas.microsoft.com/office/mac/drawingml/2011/main" val="0"/>
+            </a:ext>
+          </a:extLst>
+        </p:spPr>
+        <p:txBody>
+          <a:bodyPr/>
+          <a:lstStyle>
+            <a:lvl1pPr>
+              <a:defRPr sz="900">
+                <a:solidFill>
+                  <a:srgbClr val="898781"/>
+                </a:solidFill>
+              </a:defRPr>
+            </a:lvl1pPr>
+          </a:lstStyle>
+          <a:p>
+            <a:pPr algn="r"/>
+            <a:fld id="{F7021451-1387-4CA6-816F-3879F97B5CBC}" type="slidenum">
+              <a:rPr b="0" lang="en-US"/>
+              <a:t>10</a:t>
+            </a:fld>
+            <a:endParaRPr lang="en-US"/>
+          </a:p>
+        </p:txBody>
+      </p:sp>
+    </p:spTree>
+  </p:cSld>
+  <p:clrMapOvr>
+    <a:masterClrMapping/>
+  </p:clrMapOvr>
+</p:sld>
+</file>
+
+<file path=ppt/slides/slide11.xml><?xml version="1.0" encoding="utf-8"?>
+<p:sld xmlns:a="http://schemas.openxmlformats.org/drawingml/2006/main" xmlns:r="http://schemas.openxmlformats.org/officeDocument/2006/relationships" xmlns:p="http://schemas.openxmlformats.org/presentationml/2006/main">
+  <p:cSld name="Slide 11">
+    <p:spTree>
+      <p:nvGrpSpPr>
+        <p:cNvPr id="1" name=""/>
+        <p:cNvGrpSpPr/>
+        <p:nvPr/>
+      </p:nvGrpSpPr>
+      <p:grpSpPr>
+        <a:xfrm>
+          <a:off x="0" y="0"/>
+          <a:ext cx="0" cy="0"/>
+          <a:chOff x="0" y="0"/>
+          <a:chExt cx="0" cy="0"/>
+        </a:xfrm>
+      </p:grpSpPr>
+      <p:sp>
+        <p:nvSpPr>
+          <p:cNvPr id="2" name="Text 0"/>
+          <p:cNvSpPr/>
+          <p:nvPr>
+            <p:ph idx="100" type="title" hasCustomPrompt="1"/>
+          </p:nvPr>
+        </p:nvSpPr>
+        <p:spPr>
+          <a:xfrm>
+            <a:off x="548640" y="274320"/>
+            <a:ext cx="11091672" cy="960120"/>
+          </a:xfrm>
+          <a:prstGeom prst="rect">
+            <a:avLst/>
+          </a:prstGeom>
+          <a:noFill/>
+          <a:ln/>
+        </p:spPr>
+        <p:txBody>
+          <a:bodyPr wrap="square" lIns="0" tIns="0" rIns="0" bIns="0" rtlCol="0" anchor="ctr"/>
+          <a:lstStyle/>
+          <a:p>
+            <a:pPr algn="l" indent="0" marL="0">
+              <a:buNone/>
+            </a:pPr>
+            <a:r>
+              <a:rPr lang="en-US" sz="2600" b="1" dirty="0">
+                <a:solidFill>
+                  <a:schemeClr val="tx1"/>
+                </a:solidFill>
+              </a:rPr>
               <a:t>Spacing holds up on a clinic the generator never saw</a:t>
             </a:r>
             <a:endParaRPr lang="en-US" sz="2600" dirty="0"/>
@@ -4872,7 +5130,7 @@
             <a:pPr algn="r"/>
             <a:fld id="{F7021451-1387-4CA6-816F-3879F97B5CBC}" type="slidenum">
               <a:rPr b="0" lang="en-US"/>
-              <a:t>10</a:t>
+              <a:t>11</a:t>
             </a:fld>
             <a:endParaRPr lang="en-US"/>
           </a:p>
@@ -4886,9 +5144,9 @@
 </p:sld>
 </file>
 
-<file path=ppt/slides/slide11.xml><?xml version="1.0" encoding="utf-8"?>
+<file path=ppt/slides/slide12.xml><?xml version="1.0" encoding="utf-8"?>
 <p:sld xmlns:a="http://schemas.openxmlformats.org/drawingml/2006/main" xmlns:r="http://schemas.openxmlformats.org/officeDocument/2006/relationships" xmlns:p="http://schemas.openxmlformats.org/presentationml/2006/main">
-  <p:cSld name="Slide 11">
+  <p:cSld name="Slide 12">
     <p:spTree>
       <p:nvGrpSpPr>
         <p:cNvPr id="1" name=""/>
@@ -5294,7 +5552,7 @@
             <a:pPr algn="r"/>
             <a:fld id="{F7021451-1387-4CA6-816F-3879F97B5CBC}" type="slidenum">
               <a:rPr b="0" lang="en-US"/>
-              <a:t>11</a:t>
+              <a:t>12</a:t>
             </a:fld>
             <a:endParaRPr lang="en-US"/>
           </a:p>
@@ -5308,9 +5566,9 @@
 </p:sld>
 </file>
 
-<file path=ppt/slides/slide12.xml><?xml version="1.0" encoding="utf-8"?>
+<file path=ppt/slides/slide13.xml><?xml version="1.0" encoding="utf-8"?>
 <p:sld xmlns:a="http://schemas.openxmlformats.org/drawingml/2006/main" xmlns:r="http://schemas.openxmlformats.org/officeDocument/2006/relationships" xmlns:p="http://schemas.openxmlformats.org/presentationml/2006/main">
-  <p:cSld name="Slide 12">
+  <p:cSld name="Slide 13">
     <p:spTree>
       <p:nvGrpSpPr>
         <p:cNvPr id="1" name=""/>
@@ -5570,7 +5828,7 @@
             <a:pPr algn="r"/>
             <a:fld id="{F7021451-1387-4CA6-816F-3879F97B5CBC}" type="slidenum">
               <a:rPr b="0" lang="en-US"/>
-              <a:t>12</a:t>
+              <a:t>13</a:t>
             </a:fld>
             <a:endParaRPr lang="en-US"/>
           </a:p>
@@ -5584,9 +5842,9 @@
 </p:sld>
 </file>
 
-<file path=ppt/slides/slide13.xml><?xml version="1.0" encoding="utf-8"?>
+<file path=ppt/slides/slide14.xml><?xml version="1.0" encoding="utf-8"?>
 <p:sld xmlns:a="http://schemas.openxmlformats.org/drawingml/2006/main" xmlns:r="http://schemas.openxmlformats.org/officeDocument/2006/relationships" xmlns:p="http://schemas.openxmlformats.org/presentationml/2006/main">
-  <p:cSld name="Slide 13">
+  <p:cSld name="Slide 14">
     <p:spTree>
       <p:nvGrpSpPr>
         <p:cNvPr id="1" name=""/>
@@ -6261,7 +6519,7 @@
             <a:pPr algn="r"/>
             <a:fld id="{F7021451-1387-4CA6-816F-3879F97B5CBC}" type="slidenum">
               <a:rPr b="0" lang="en-US"/>
-              <a:t>13</a:t>
+              <a:t>14</a:t>
             </a:fld>
             <a:endParaRPr lang="en-US"/>
           </a:p>
@@ -6275,9 +6533,9 @@
 </p:sld>
 </file>
 
-<file path=ppt/slides/slide14.xml><?xml version="1.0" encoding="utf-8"?>
+<file path=ppt/slides/slide15.xml><?xml version="1.0" encoding="utf-8"?>
 <p:sld xmlns:a="http://schemas.openxmlformats.org/drawingml/2006/main" xmlns:r="http://schemas.openxmlformats.org/officeDocument/2006/relationships" xmlns:p="http://schemas.openxmlformats.org/presentationml/2006/main">
-  <p:cSld name="Slide 14">
+  <p:cSld name="Slide 15">
     <p:spTree>
       <p:nvGrpSpPr>
         <p:cNvPr id="1" name=""/>
@@ -6748,7 +7006,7 @@
             <a:pPr algn="r"/>
             <a:fld id="{F7021451-1387-4CA6-816F-3879F97B5CBC}" type="slidenum">
               <a:rPr b="0" lang="en-US"/>
-              <a:t>14</a:t>
+              <a:t>15</a:t>
             </a:fld>
             <a:endParaRPr lang="en-US"/>
           </a:p>
@@ -6762,9 +7020,9 @@
 </p:sld>
 </file>
 
-<file path=ppt/slides/slide15.xml><?xml version="1.0" encoding="utf-8"?>
+<file path=ppt/slides/slide16.xml><?xml version="1.0" encoding="utf-8"?>
 <p:sld xmlns:a="http://schemas.openxmlformats.org/drawingml/2006/main" xmlns:r="http://schemas.openxmlformats.org/officeDocument/2006/relationships" xmlns:p="http://schemas.openxmlformats.org/presentationml/2006/main">
-  <p:cSld name="Slide 15">
+  <p:cSld name="Slide 16">
     <p:spTree>
       <p:nvGrpSpPr>
         <p:cNvPr id="1" name=""/>
@@ -6979,9 +7237,9 @@
 </p:sld>
 </file>
 
-<file path=ppt/slides/slide16.xml><?xml version="1.0" encoding="utf-8"?>
+<file path=ppt/slides/slide17.xml><?xml version="1.0" encoding="utf-8"?>
 <p:sld xmlns:a="http://schemas.openxmlformats.org/drawingml/2006/main" xmlns:r="http://schemas.openxmlformats.org/officeDocument/2006/relationships" xmlns:p="http://schemas.openxmlformats.org/presentationml/2006/main">
-  <p:cSld name="Slide 16">
+  <p:cSld name="Slide 17">
     <p:spTree>
       <p:nvGrpSpPr>
         <p:cNvPr id="1" name=""/>
@@ -7193,7 +7451,7 @@
             <a:pPr algn="r"/>
             <a:fld id="{F7021451-1387-4CA6-816F-3879F97B5CBC}" type="slidenum">
               <a:rPr b="0" lang="en-US"/>
-              <a:t>16</a:t>
+              <a:t>17</a:t>
             </a:fld>
             <a:endParaRPr lang="en-US"/>
           </a:p>
@@ -7207,9 +7465,9 @@
 </p:sld>
 </file>
 
-<file path=ppt/slides/slide17.xml><?xml version="1.0" encoding="utf-8"?>
+<file path=ppt/slides/slide18.xml><?xml version="1.0" encoding="utf-8"?>
 <p:sld xmlns:a="http://schemas.openxmlformats.org/drawingml/2006/main" xmlns:r="http://schemas.openxmlformats.org/officeDocument/2006/relationships" xmlns:p="http://schemas.openxmlformats.org/presentationml/2006/main">
-  <p:cSld name="Slide 17">
+  <p:cSld name="Slide 18">
     <p:spTree>
       <p:nvGrpSpPr>
         <p:cNvPr id="1" name=""/>
@@ -7264,7 +7522,7 @@
       </p:sp>
       <p:graphicFrame>
         <p:nvGraphicFramePr>
-          <p:cNvPr id="18" name="tier table"/>
+          <p:cNvPr id="19" name="tier table"/>
           <p:cNvGraphicFramePr>
             <a:graphicFrameLocks noGrp="1"/>
           </p:cNvGraphicFramePr>
@@ -10574,7 +10832,7 @@
             <a:pPr algn="r"/>
             <a:fld id="{F7021451-1387-4CA6-816F-3879F97B5CBC}" type="slidenum">
               <a:rPr b="0" lang="en-US"/>
-              <a:t>17</a:t>
+              <a:t>18</a:t>
             </a:fld>
             <a:endParaRPr lang="en-US"/>
           </a:p>
@@ -10588,9 +10846,9 @@
 </p:sld>
 </file>
 
-<file path=ppt/slides/slide18.xml><?xml version="1.0" encoding="utf-8"?>
+<file path=ppt/slides/slide19.xml><?xml version="1.0" encoding="utf-8"?>
 <p:sld xmlns:a="http://schemas.openxmlformats.org/drawingml/2006/main" xmlns:r="http://schemas.openxmlformats.org/officeDocument/2006/relationships" xmlns:p="http://schemas.openxmlformats.org/presentationml/2006/main">
-  <p:cSld name="Slide 18">
+  <p:cSld name="Slide 19">
     <p:spTree>
       <p:nvGrpSpPr>
         <p:cNvPr id="1" name=""/>
@@ -10645,7 +10903,7 @@
       </p:sp>
       <p:graphicFrame>
         <p:nvGraphicFramePr>
-          <p:cNvPr id="19" name="samples table"/>
+          <p:cNvPr id="20" name="samples table"/>
           <p:cNvGraphicFramePr>
             <a:graphicFrameLocks noGrp="1"/>
           </p:cNvGraphicFramePr>
@@ -12328,7 +12586,7 @@
       </p:graphicFrame>
       <p:graphicFrame>
         <p:nvGraphicFramePr>
-          <p:cNvPr id="37" name="distances table"/>
+          <p:cNvPr id="39" name="distances table"/>
           <p:cNvGraphicFramePr>
             <a:graphicFrameLocks noGrp="1"/>
           </p:cNvGraphicFramePr>
@@ -14373,7 +14631,7 @@
             <a:pPr algn="r"/>
             <a:fld id="{F7021451-1387-4CA6-816F-3879F97B5CBC}" type="slidenum">
               <a:rPr b="0" lang="en-US"/>
-              <a:t>18</a:t>
+              <a:t>19</a:t>
             </a:fld>
             <a:endParaRPr lang="en-US"/>
           </a:p>
@@ -14387,9 +14645,609 @@
 </p:sld>
 </file>
 
-<file path=ppt/slides/slide19.xml><?xml version="1.0" encoding="utf-8"?>
+<file path=ppt/slides/slide2.xml><?xml version="1.0" encoding="utf-8"?>
 <p:sld xmlns:a="http://schemas.openxmlformats.org/drawingml/2006/main" xmlns:r="http://schemas.openxmlformats.org/officeDocument/2006/relationships" xmlns:p="http://schemas.openxmlformats.org/presentationml/2006/main">
-  <p:cSld name="Slide 19">
+  <p:cSld name="Slide 2">
+    <p:spTree>
+      <p:nvGrpSpPr>
+        <p:cNvPr id="1" name=""/>
+        <p:cNvGrpSpPr/>
+        <p:nvPr/>
+      </p:nvGrpSpPr>
+      <p:grpSpPr>
+        <a:xfrm>
+          <a:off x="0" y="0"/>
+          <a:ext cx="0" cy="0"/>
+          <a:chOff x="0" y="0"/>
+          <a:chExt cx="0" cy="0"/>
+        </a:xfrm>
+      </p:grpSpPr>
+      <p:sp>
+        <p:nvSpPr>
+          <p:cNvPr id="2" name="Text 0"/>
+          <p:cNvSpPr/>
+          <p:nvPr>
+            <p:ph idx="100" type="title" hasCustomPrompt="1"/>
+          </p:nvPr>
+        </p:nvSpPr>
+        <p:spPr>
+          <a:xfrm>
+            <a:off x="548640" y="274320"/>
+            <a:ext cx="11091672" cy="960120"/>
+          </a:xfrm>
+          <a:prstGeom prst="rect">
+            <a:avLst/>
+          </a:prstGeom>
+          <a:noFill/>
+          <a:ln/>
+        </p:spPr>
+        <p:txBody>
+          <a:bodyPr wrap="square" lIns="0" tIns="0" rIns="0" bIns="0" rtlCol="0" anchor="ctr"/>
+          <a:lstStyle/>
+          <a:p>
+            <a:pPr algn="l" indent="0" marL="0">
+              <a:buNone/>
+            </a:pPr>
+            <a:r>
+              <a:rPr lang="en-US" sz="2600" b="1" dirty="0">
+                <a:solidFill>
+                  <a:schemeClr val="tx1"/>
+                </a:solidFill>
+              </a:rPr>
+              <a:t>A hospital needs about 10,000 support assemblies, each designed by hand</a:t>
+            </a:r>
+            <a:endParaRPr lang="en-US" sz="2600" dirty="0"/>
+          </a:p>
+        </p:txBody>
+      </p:sp>
+      <p:pic>
+        <p:nvPicPr>
+          <p:cNvPr id="3" name="hospital model" descr="/home/user/crossmep_dataset/docs/figures/isarc_building.jpg">    </p:cNvPr>
+          <p:cNvPicPr>
+            <a:picLocks noChangeAspect="1"/>
+          </p:cNvPicPr>
+          <p:nvPr/>
+        </p:nvPicPr>
+        <p:blipFill>
+          <a:blip r:embed="rId1"/>
+          <a:stretch>
+            <a:fillRect/>
+          </a:stretch>
+        </p:blipFill>
+        <p:spPr>
+          <a:xfrm>
+            <a:off x="548640" y="1325880"/>
+            <a:ext cx="6035040" cy="3394710"/>
+          </a:xfrm>
+          <a:prstGeom prst="rect">
+            <a:avLst/>
+          </a:prstGeom>
+        </p:spPr>
+      </p:pic>
+      <p:sp>
+        <p:nvSpPr>
+          <p:cNvPr id="4" name="zoom box"/>
+          <p:cNvSpPr/>
+          <p:nvPr/>
+        </p:nvSpPr>
+        <p:spPr>
+          <a:xfrm>
+            <a:off x="3304843" y="2791716"/>
+            <a:ext cx="592641" cy="473902"/>
+          </a:xfrm>
+          <a:prstGeom prst="rect">
+            <a:avLst/>
+          </a:prstGeom>
+          <a:ln w="19050">
+            <a:solidFill>
+              <a:srgbClr val="EB6834"/>
+            </a:solidFill>
+            <a:prstDash val="solid"/>
+          </a:ln>
+        </p:spPr>
+      </p:sp>
+      <p:sp>
+        <p:nvSpPr>
+          <p:cNvPr id="5" name="zoom line top"/>
+          <p:cNvSpPr/>
+          <p:nvPr/>
+        </p:nvSpPr>
+        <p:spPr>
+          <a:xfrm flipV="1">
+            <a:off x="3897484" y="2791716"/>
+            <a:ext cx="3051956" cy="-1008636"/>
+          </a:xfrm>
+          <a:prstGeom prst="line">
+            <a:avLst/>
+          </a:prstGeom>
+          <a:noFill/>
+          <a:ln w="19050">
+            <a:solidFill>
+              <a:srgbClr val="EB6834"/>
+            </a:solidFill>
+            <a:prstDash val="solid"/>
+          </a:ln>
+        </p:spPr>
+      </p:sp>
+      <p:sp>
+        <p:nvSpPr>
+          <p:cNvPr id="6" name="zoom line bottom"/>
+          <p:cNvSpPr/>
+          <p:nvPr/>
+        </p:nvSpPr>
+        <p:spPr>
+          <a:xfrm>
+            <a:off x="3897484" y="3265617"/>
+            <a:ext cx="3051956" cy="1210645"/>
+          </a:xfrm>
+          <a:prstGeom prst="line">
+            <a:avLst/>
+          </a:prstGeom>
+          <a:noFill/>
+          <a:ln w="19050">
+            <a:solidFill>
+              <a:srgbClr val="EB6834"/>
+            </a:solidFill>
+            <a:prstDash val="solid"/>
+          </a:ln>
+        </p:spPr>
+      </p:sp>
+      <p:pic>
+        <p:nvPicPr>
+          <p:cNvPr id="7" name="one assembly" descr="/home/user/crossmep_dataset/docs/figures/isarc_ssa.jpg">    </p:cNvPr>
+          <p:cNvPicPr>
+            <a:picLocks noChangeAspect="1"/>
+          </p:cNvPicPr>
+          <p:nvPr/>
+        </p:nvPicPr>
+        <p:blipFill>
+          <a:blip r:embed="rId2"/>
+          <a:stretch>
+            <a:fillRect/>
+          </a:stretch>
+        </p:blipFill>
+        <p:spPr>
+          <a:xfrm>
+            <a:off x="6949440" y="1783080"/>
+            <a:ext cx="4690872" cy="2693182"/>
+          </a:xfrm>
+          <a:prstGeom prst="rect">
+            <a:avLst/>
+          </a:prstGeom>
+        </p:spPr>
+      </p:pic>
+      <p:sp>
+        <p:nvSpPr>
+          <p:cNvPr id="8" name="inset frame"/>
+          <p:cNvSpPr/>
+          <p:nvPr/>
+        </p:nvSpPr>
+        <p:spPr>
+          <a:xfrm>
+            <a:off x="6949440" y="1783080"/>
+            <a:ext cx="4690872" cy="2693182"/>
+          </a:xfrm>
+          <a:prstGeom prst="rect">
+            <a:avLst/>
+          </a:prstGeom>
+          <a:ln w="19050">
+            <a:solidFill>
+              <a:srgbClr val="EB6834"/>
+            </a:solidFill>
+            <a:prstDash val="solid"/>
+          </a:ln>
+        </p:spPr>
+      </p:sp>
+      <p:sp>
+        <p:nvSpPr>
+          <p:cNvPr id="9" name="inset label"/>
+          <p:cNvSpPr txBox="1"/>
+          <p:nvPr/>
+        </p:nvSpPr>
+        <p:spPr>
+          <a:xfrm>
+            <a:off x="6949440" y="1325880"/>
+            <a:ext cx="4690872" cy="411480"/>
+          </a:xfrm>
+          <a:prstGeom prst="rect">
+            <a:avLst/>
+          </a:prstGeom>
+          <a:noFill/>
+          <a:ln/>
+        </p:spPr>
+        <p:txBody>
+          <a:bodyPr wrap="square" lIns="0" tIns="0" rIns="0" bIns="0" rtlCol="0" anchor="b"/>
+          <a:lstStyle/>
+          <a:p>
+            <a:pPr indent="0" marL="0">
+              <a:buNone/>
+            </a:pPr>
+            <a:r>
+              <a:rPr lang="en-US" sz="1500" b="1" dirty="0">
+                <a:solidFill>
+                  <a:schemeClr val="tx1"/>
+                </a:solidFill>
+              </a:rPr>
+              <a:t>1 unit = 1 structural support assembly (SSA)</a:t>
+            </a:r>
+            <a:endParaRPr lang="en-US" sz="1500" dirty="0"/>
+          </a:p>
+        </p:txBody>
+      </p:sp>
+      <p:sp>
+        <p:nvSpPr>
+          <p:cNvPr id="10" name="tile support assemblies in one 200,000 sq ft hospital"/>
+          <p:cNvSpPr/>
+          <p:nvPr/>
+        </p:nvSpPr>
+        <p:spPr>
+          <a:xfrm>
+            <a:off x="548640" y="4892040"/>
+            <a:ext cx="3575304" cy="1188720"/>
+          </a:xfrm>
+          <a:prstGeom prst="roundRect">
+            <a:avLst>
+              <a:gd name="adj" fmla="val 5385"/>
+            </a:avLst>
+          </a:prstGeom>
+          <a:solidFill>
+            <a:schemeClr val="bg2"/>
+          </a:solidFill>
+          <a:ln/>
+        </p:spPr>
+      </p:sp>
+      <p:sp>
+        <p:nvSpPr>
+          <p:cNvPr id="11" name="value support assemblies in one 200,000 sq ft hospital"/>
+          <p:cNvSpPr txBox="1"/>
+          <p:nvPr/>
+        </p:nvSpPr>
+        <p:spPr>
+          <a:xfrm>
+            <a:off x="749808" y="4983480"/>
+            <a:ext cx="3172968" cy="594360"/>
+          </a:xfrm>
+          <a:prstGeom prst="rect">
+            <a:avLst/>
+          </a:prstGeom>
+          <a:noFill/>
+          <a:ln/>
+        </p:spPr>
+        <p:txBody>
+          <a:bodyPr wrap="square" lIns="0" tIns="0" rIns="0" bIns="0" rtlCol="0" anchor="ctr"/>
+          <a:lstStyle/>
+          <a:p>
+            <a:pPr indent="0" marL="0">
+              <a:buNone/>
+            </a:pPr>
+            <a:r>
+              <a:rPr lang="en-US" sz="2800" b="1" dirty="0">
+                <a:solidFill>
+                  <a:schemeClr val="accent1"/>
+                </a:solidFill>
+              </a:rPr>
+              <a:t>≈ 10,000</a:t>
+            </a:r>
+            <a:endParaRPr lang="en-US" sz="2800" dirty="0"/>
+          </a:p>
+        </p:txBody>
+      </p:sp>
+      <p:sp>
+        <p:nvSpPr>
+          <p:cNvPr id="12" name="label support assemblies in one 200,000 sq ft hospital"/>
+          <p:cNvSpPr txBox="1"/>
+          <p:nvPr/>
+        </p:nvSpPr>
+        <p:spPr>
+          <a:xfrm>
+            <a:off x="749808" y="5581498"/>
+            <a:ext cx="3172968" cy="451714"/>
+          </a:xfrm>
+          <a:prstGeom prst="rect">
+            <a:avLst/>
+          </a:prstGeom>
+          <a:noFill/>
+          <a:ln/>
+        </p:spPr>
+        <p:txBody>
+          <a:bodyPr wrap="square" lIns="0" tIns="0" rIns="0" bIns="0" rtlCol="0" anchor="t"/>
+          <a:lstStyle/>
+          <a:p>
+            <a:pPr indent="0" marL="0">
+              <a:buNone/>
+            </a:pPr>
+            <a:r>
+              <a:rPr lang="en-US" sz="1200" dirty="0">
+                <a:solidFill>
+                  <a:srgbClr val="52514E"/>
+                </a:solidFill>
+              </a:rPr>
+              <a:t>support assemblies in one 200,000 sq ft hospital</a:t>
+            </a:r>
+            <a:endParaRPr lang="en-US" sz="1200" dirty="0"/>
+          </a:p>
+        </p:txBody>
+      </p:sp>
+      <p:sp>
+        <p:nvSpPr>
+          <p:cNvPr id="13" name="tile of engineering for each assembly, designed one by one"/>
+          <p:cNvSpPr/>
+          <p:nvPr/>
+        </p:nvSpPr>
+        <p:spPr>
+          <a:xfrm>
+            <a:off x="4306824" y="4892040"/>
+            <a:ext cx="3575304" cy="1188720"/>
+          </a:xfrm>
+          <a:prstGeom prst="roundRect">
+            <a:avLst>
+              <a:gd name="adj" fmla="val 5385"/>
+            </a:avLst>
+          </a:prstGeom>
+          <a:solidFill>
+            <a:schemeClr val="bg2"/>
+          </a:solidFill>
+          <a:ln/>
+        </p:spPr>
+      </p:sp>
+      <p:sp>
+        <p:nvSpPr>
+          <p:cNvPr id="14" name="value of engineering for each assembly, designed one by one"/>
+          <p:cNvSpPr txBox="1"/>
+          <p:nvPr/>
+        </p:nvSpPr>
+        <p:spPr>
+          <a:xfrm>
+            <a:off x="4507992" y="4983480"/>
+            <a:ext cx="3172968" cy="594360"/>
+          </a:xfrm>
+          <a:prstGeom prst="rect">
+            <a:avLst/>
+          </a:prstGeom>
+          <a:noFill/>
+          <a:ln/>
+        </p:spPr>
+        <p:txBody>
+          <a:bodyPr wrap="square" lIns="0" tIns="0" rIns="0" bIns="0" rtlCol="0" anchor="ctr"/>
+          <a:lstStyle/>
+          <a:p>
+            <a:pPr indent="0" marL="0">
+              <a:buNone/>
+            </a:pPr>
+            <a:r>
+              <a:rPr lang="en-US" sz="2800" b="1" dirty="0">
+                <a:solidFill>
+                  <a:schemeClr val="accent1"/>
+                </a:solidFill>
+              </a:rPr>
+              <a:t>20 min – 2 h</a:t>
+            </a:r>
+            <a:endParaRPr lang="en-US" sz="2800" dirty="0"/>
+          </a:p>
+        </p:txBody>
+      </p:sp>
+      <p:sp>
+        <p:nvSpPr>
+          <p:cNvPr id="15" name="label of engineering for each assembly, designed one by one"/>
+          <p:cNvSpPr txBox="1"/>
+          <p:nvPr/>
+        </p:nvSpPr>
+        <p:spPr>
+          <a:xfrm>
+            <a:off x="4507992" y="5581498"/>
+            <a:ext cx="3172968" cy="451714"/>
+          </a:xfrm>
+          <a:prstGeom prst="rect">
+            <a:avLst/>
+          </a:prstGeom>
+          <a:noFill/>
+          <a:ln/>
+        </p:spPr>
+        <p:txBody>
+          <a:bodyPr wrap="square" lIns="0" tIns="0" rIns="0" bIns="0" rtlCol="0" anchor="t"/>
+          <a:lstStyle/>
+          <a:p>
+            <a:pPr indent="0" marL="0">
+              <a:buNone/>
+            </a:pPr>
+            <a:r>
+              <a:rPr lang="en-US" sz="1200" dirty="0">
+                <a:solidFill>
+                  <a:srgbClr val="52514E"/>
+                </a:solidFill>
+              </a:rPr>
+              <a:t>of engineering for each assembly, designed one by one</a:t>
+            </a:r>
+            <a:endParaRPr lang="en-US" sz="1200" dirty="0"/>
+          </a:p>
+        </p:txBody>
+      </p:sp>
+      <p:sp>
+        <p:nvSpPr>
+          <p:cNvPr id="16" name="tile of MEP design effort; on the order of $600K per project"/>
+          <p:cNvSpPr/>
+          <p:nvPr/>
+        </p:nvSpPr>
+        <p:spPr>
+          <a:xfrm>
+            <a:off x="8065008" y="4892040"/>
+            <a:ext cx="3575304" cy="1188720"/>
+          </a:xfrm>
+          <a:prstGeom prst="roundRect">
+            <a:avLst>
+              <a:gd name="adj" fmla="val 5385"/>
+            </a:avLst>
+          </a:prstGeom>
+          <a:solidFill>
+            <a:schemeClr val="bg2"/>
+          </a:solidFill>
+          <a:ln/>
+        </p:spPr>
+      </p:sp>
+      <p:sp>
+        <p:nvSpPr>
+          <p:cNvPr id="17" name="value of MEP design effort; on the order of $600K per project"/>
+          <p:cNvSpPr txBox="1"/>
+          <p:nvPr/>
+        </p:nvSpPr>
+        <p:spPr>
+          <a:xfrm>
+            <a:off x="8266176" y="4983480"/>
+            <a:ext cx="3172968" cy="594360"/>
+          </a:xfrm>
+          <a:prstGeom prst="rect">
+            <a:avLst/>
+          </a:prstGeom>
+          <a:noFill/>
+          <a:ln/>
+        </p:spPr>
+        <p:txBody>
+          <a:bodyPr wrap="square" lIns="0" tIns="0" rIns="0" bIns="0" rtlCol="0" anchor="ctr"/>
+          <a:lstStyle/>
+          <a:p>
+            <a:pPr indent="0" marL="0">
+              <a:buNone/>
+            </a:pPr>
+            <a:r>
+              <a:rPr lang="en-US" sz="2800" b="1" dirty="0">
+                <a:solidFill>
+                  <a:schemeClr val="accent1"/>
+                </a:solidFill>
+              </a:rPr>
+              <a:t>≈ ¼</a:t>
+            </a:r>
+            <a:endParaRPr lang="en-US" sz="2800" dirty="0"/>
+          </a:p>
+        </p:txBody>
+      </p:sp>
+      <p:sp>
+        <p:nvSpPr>
+          <p:cNvPr id="18" name="label of MEP design effort; on the order of $600K per project"/>
+          <p:cNvSpPr txBox="1"/>
+          <p:nvPr/>
+        </p:nvSpPr>
+        <p:spPr>
+          <a:xfrm>
+            <a:off x="8266176" y="5581498"/>
+            <a:ext cx="3172968" cy="451714"/>
+          </a:xfrm>
+          <a:prstGeom prst="rect">
+            <a:avLst/>
+          </a:prstGeom>
+          <a:noFill/>
+          <a:ln/>
+        </p:spPr>
+        <p:txBody>
+          <a:bodyPr wrap="square" lIns="0" tIns="0" rIns="0" bIns="0" rtlCol="0" anchor="t"/>
+          <a:lstStyle/>
+          <a:p>
+            <a:pPr indent="0" marL="0">
+              <a:buNone/>
+            </a:pPr>
+            <a:r>
+              <a:rPr lang="en-US" sz="1200" dirty="0">
+                <a:solidFill>
+                  <a:srgbClr val="52514E"/>
+                </a:solidFill>
+              </a:rPr>
+              <a:t>of MEP design effort; on the order of $600K per project</a:t>
+            </a:r>
+            <a:endParaRPr lang="en-US" sz="1200" dirty="0"/>
+          </a:p>
+        </p:txBody>
+      </p:sp>
+      <p:sp>
+        <p:nvSpPr>
+          <p:cNvPr id="19" name="estimates note"/>
+          <p:cNvSpPr txBox="1"/>
+          <p:nvPr/>
+        </p:nvSpPr>
+        <p:spPr>
+          <a:xfrm>
+            <a:off x="548640" y="6126480"/>
+            <a:ext cx="5486400" cy="228600"/>
+          </a:xfrm>
+          <a:prstGeom prst="rect">
+            <a:avLst/>
+          </a:prstGeom>
+          <a:noFill/>
+          <a:ln/>
+        </p:spPr>
+        <p:txBody>
+          <a:bodyPr wrap="square" lIns="0" tIns="0" rIns="0" bIns="0" rtlCol="0" anchor="t"/>
+          <a:lstStyle/>
+          <a:p>
+            <a:pPr indent="0" marL="0">
+              <a:buNone/>
+            </a:pPr>
+            <a:r>
+              <a:rPr lang="en-US" sz="1100" dirty="0">
+                <a:solidFill>
+                  <a:srgbClr val="52514E"/>
+                </a:solidFill>
+              </a:rPr>
+              <a:t>Approximate practitioner estimates.</a:t>
+            </a:r>
+            <a:endParaRPr lang="en-US" sz="1100" dirty="0"/>
+          </a:p>
+        </p:txBody>
+      </p:sp>
+      <p:sp>
+        <p:nvSpPr>
+          <p:cNvPr id="25" name="Slide Number Placeholder 0"/>
+          <p:cNvSpPr>
+            <a:spLocks noGrp="1"/>
+          </p:cNvSpPr>
+          <p:nvPr>
+            <p:ph type="sldNum" sz="quarter" idx="4294967295"/>
+          </p:nvPr>
+        </p:nvSpPr>
+        <p:spPr>
+          <a:xfrm>
+            <a:off x="11064240" y="6419088"/>
+            <a:ext cx="594360" cy="274320"/>
+          </a:xfrm>
+          <a:prstGeom prst="rect">
+            <a:avLst/>
+          </a:prstGeom>
+          <a:extLst>
+            <a:ext uri="{C572A759-6A51-4108-AA02-DFA0A04FC94B}">
+              <ma14:wrappingTextBoxFlag xmlns:ma14="http://schemas.microsoft.com/office/mac/drawingml/2011/main" val="0"/>
+            </a:ext>
+          </a:extLst>
+        </p:spPr>
+        <p:txBody>
+          <a:bodyPr/>
+          <a:lstStyle>
+            <a:lvl1pPr>
+              <a:defRPr sz="900">
+                <a:solidFill>
+                  <a:srgbClr val="898781"/>
+                </a:solidFill>
+              </a:defRPr>
+            </a:lvl1pPr>
+          </a:lstStyle>
+          <a:p>
+            <a:pPr algn="r"/>
+            <a:fld id="{F7021451-1387-4CA6-816F-3879F97B5CBC}" type="slidenum">
+              <a:rPr b="0" lang="en-US"/>
+              <a:t>2</a:t>
+            </a:fld>
+            <a:endParaRPr lang="en-US"/>
+          </a:p>
+        </p:txBody>
+      </p:sp>
+    </p:spTree>
+  </p:cSld>
+  <p:clrMapOvr>
+    <a:masterClrMapping/>
+  </p:clrMapOvr>
+</p:sld>
+</file>
+
+<file path=ppt/slides/slide20.xml><?xml version="1.0" encoding="utf-8"?>
+<p:sld xmlns:a="http://schemas.openxmlformats.org/drawingml/2006/main" xmlns:r="http://schemas.openxmlformats.org/officeDocument/2006/relationships" xmlns:p="http://schemas.openxmlformats.org/presentationml/2006/main">
+  <p:cSld name="Slide 20">
     <p:spTree>
       <p:nvGrpSpPr>
         <p:cNvPr id="1" name=""/>
@@ -14444,7 +15302,7 @@
       </p:sp>
       <p:graphicFrame>
         <p:nvGraphicFramePr>
-          <p:cNvPr id="20" name="per tier catalog table"/>
+          <p:cNvPr id="21" name="per tier catalog table"/>
           <p:cNvGraphicFramePr>
             <a:graphicFrameLocks noGrp="1"/>
           </p:cNvGraphicFramePr>
@@ -16846,7 +17704,7 @@
       </p:graphicFrame>
       <p:graphicFrame>
         <p:nvGraphicFramePr>
-          <p:cNvPr id="39" name="sensitivity table"/>
+          <p:cNvPr id="41" name="sensitivity table"/>
           <p:cNvGraphicFramePr>
             <a:graphicFrameLocks noGrp="1"/>
           </p:cNvGraphicFramePr>
@@ -17974,7 +18832,7 @@
       </p:sp>
       <p:graphicFrame>
         <p:nvGraphicFramePr>
-          <p:cNvPr id="58" name="split catalog table"/>
+          <p:cNvPr id="61" name="split catalog table"/>
           <p:cNvGraphicFramePr>
             <a:graphicFrameLocks noGrp="1"/>
           </p:cNvGraphicFramePr>
@@ -19130,7 +19988,7 @@
             <a:pPr algn="r"/>
             <a:fld id="{F7021451-1387-4CA6-816F-3879F97B5CBC}" type="slidenum">
               <a:rPr b="0" lang="en-US"/>
-              <a:t>19</a:t>
+              <a:t>20</a:t>
             </a:fld>
             <a:endParaRPr lang="en-US"/>
           </a:p>
@@ -19144,567 +20002,9 @@
 </p:sld>
 </file>
 
-<file path=ppt/slides/slide2.xml><?xml version="1.0" encoding="utf-8"?>
+<file path=ppt/slides/slide21.xml><?xml version="1.0" encoding="utf-8"?>
 <p:sld xmlns:a="http://schemas.openxmlformats.org/drawingml/2006/main" xmlns:r="http://schemas.openxmlformats.org/officeDocument/2006/relationships" xmlns:p="http://schemas.openxmlformats.org/presentationml/2006/main">
-  <p:cSld name="Slide 2">
-    <p:spTree>
-      <p:nvGrpSpPr>
-        <p:cNvPr id="1" name=""/>
-        <p:cNvGrpSpPr/>
-        <p:nvPr/>
-      </p:nvGrpSpPr>
-      <p:grpSpPr>
-        <a:xfrm>
-          <a:off x="0" y="0"/>
-          <a:ext cx="0" cy="0"/>
-          <a:chOff x="0" y="0"/>
-          <a:chExt cx="0" cy="0"/>
-        </a:xfrm>
-      </p:grpSpPr>
-      <p:sp>
-        <p:nvSpPr>
-          <p:cNvPr id="2" name="Text 0"/>
-          <p:cNvSpPr/>
-          <p:nvPr>
-            <p:ph idx="100" type="title" hasCustomPrompt="1"/>
-          </p:nvPr>
-        </p:nvSpPr>
-        <p:spPr>
-          <a:xfrm>
-            <a:off x="548640" y="274320"/>
-            <a:ext cx="11091672" cy="960120"/>
-          </a:xfrm>
-          <a:prstGeom prst="rect">
-            <a:avLst/>
-          </a:prstGeom>
-          <a:noFill/>
-          <a:ln/>
-        </p:spPr>
-        <p:txBody>
-          <a:bodyPr wrap="square" lIns="0" tIns="0" rIns="0" bIns="0" rtlCol="0" anchor="ctr"/>
-          <a:lstStyle/>
-          <a:p>
-            <a:pPr algn="l" indent="0" marL="0">
-              <a:buNone/>
-            </a:pPr>
-            <a:r>
-              <a:rPr lang="en-US" sz="2600" b="1" dirty="0">
-                <a:solidFill>
-                  <a:schemeClr val="tx1"/>
-                </a:solidFill>
-              </a:rPr>
-              <a:t>Nowadays, every pipe, duct and tray hangs from a hand-designed support</a:t>
-            </a:r>
-            <a:endParaRPr lang="en-US" sz="2600" dirty="0"/>
-          </a:p>
-        </p:txBody>
-      </p:sp>
-      <p:sp>
-        <p:nvSpPr>
-          <p:cNvPr id="3" name="tile support assemblies in one 200,000 sq ft hospital"/>
-          <p:cNvSpPr/>
-          <p:nvPr/>
-        </p:nvSpPr>
-        <p:spPr>
-          <a:xfrm>
-            <a:off x="548640" y="1417320"/>
-            <a:ext cx="3566160" cy="1371600"/>
-          </a:xfrm>
-          <a:prstGeom prst="roundRect">
-            <a:avLst>
-              <a:gd name="adj" fmla="val 4667"/>
-            </a:avLst>
-          </a:prstGeom>
-          <a:solidFill>
-            <a:schemeClr val="bg2"/>
-          </a:solidFill>
-          <a:ln/>
-        </p:spPr>
-      </p:sp>
-      <p:sp>
-        <p:nvSpPr>
-          <p:cNvPr id="4" name="value support assemblies in one 200,000 sq ft hospital"/>
-          <p:cNvSpPr txBox="1"/>
-          <p:nvPr/>
-        </p:nvSpPr>
-        <p:spPr>
-          <a:xfrm>
-            <a:off x="749808" y="1508760"/>
-            <a:ext cx="3163824" cy="685800"/>
-          </a:xfrm>
-          <a:prstGeom prst="rect">
-            <a:avLst/>
-          </a:prstGeom>
-          <a:noFill/>
-          <a:ln/>
-        </p:spPr>
-        <p:txBody>
-          <a:bodyPr wrap="square" lIns="0" tIns="0" rIns="0" bIns="0" rtlCol="0" anchor="ctr"/>
-          <a:lstStyle/>
-          <a:p>
-            <a:pPr indent="0" marL="0">
-              <a:buNone/>
-            </a:pPr>
-            <a:r>
-              <a:rPr lang="en-US" sz="3200" b="1" dirty="0">
-                <a:solidFill>
-                  <a:schemeClr val="accent1"/>
-                </a:solidFill>
-              </a:rPr>
-              <a:t>≈ 10,000</a:t>
-            </a:r>
-            <a:endParaRPr lang="en-US" sz="3200" dirty="0"/>
-          </a:p>
-        </p:txBody>
-      </p:sp>
-      <p:sp>
-        <p:nvSpPr>
-          <p:cNvPr id="5" name="label support assemblies in one 200,000 sq ft hospital"/>
-          <p:cNvSpPr txBox="1"/>
-          <p:nvPr/>
-        </p:nvSpPr>
-        <p:spPr>
-          <a:xfrm>
-            <a:off x="749808" y="2212848"/>
-            <a:ext cx="3163824" cy="521208"/>
-          </a:xfrm>
-          <a:prstGeom prst="rect">
-            <a:avLst/>
-          </a:prstGeom>
-          <a:noFill/>
-          <a:ln/>
-        </p:spPr>
-        <p:txBody>
-          <a:bodyPr wrap="square" lIns="0" tIns="0" rIns="0" bIns="0" rtlCol="0" anchor="t"/>
-          <a:lstStyle/>
-          <a:p>
-            <a:pPr indent="0" marL="0">
-              <a:buNone/>
-            </a:pPr>
-            <a:r>
-              <a:rPr lang="en-US" sz="1200" dirty="0">
-                <a:solidFill>
-                  <a:srgbClr val="52514E"/>
-                </a:solidFill>
-              </a:rPr>
-              <a:t>support assemblies in one 200,000 sq ft hospital</a:t>
-            </a:r>
-            <a:endParaRPr lang="en-US" sz="1200" dirty="0"/>
-          </a:p>
-        </p:txBody>
-      </p:sp>
-      <p:sp>
-        <p:nvSpPr>
-          <p:cNvPr id="6" name="tile to design each one by hand, from the coordinated model"/>
-          <p:cNvSpPr/>
-          <p:nvPr/>
-        </p:nvSpPr>
-        <p:spPr>
-          <a:xfrm>
-            <a:off x="548640" y="2926080"/>
-            <a:ext cx="3566160" cy="1371600"/>
-          </a:xfrm>
-          <a:prstGeom prst="roundRect">
-            <a:avLst>
-              <a:gd name="adj" fmla="val 4667"/>
-            </a:avLst>
-          </a:prstGeom>
-          <a:solidFill>
-            <a:schemeClr val="bg2"/>
-          </a:solidFill>
-          <a:ln/>
-        </p:spPr>
-      </p:sp>
-      <p:sp>
-        <p:nvSpPr>
-          <p:cNvPr id="7" name="value to design each one by hand, from the coordinated model"/>
-          <p:cNvSpPr txBox="1"/>
-          <p:nvPr/>
-        </p:nvSpPr>
-        <p:spPr>
-          <a:xfrm>
-            <a:off x="749808" y="3017520"/>
-            <a:ext cx="3163824" cy="685800"/>
-          </a:xfrm>
-          <a:prstGeom prst="rect">
-            <a:avLst/>
-          </a:prstGeom>
-          <a:noFill/>
-          <a:ln/>
-        </p:spPr>
-        <p:txBody>
-          <a:bodyPr wrap="square" lIns="0" tIns="0" rIns="0" bIns="0" rtlCol="0" anchor="ctr"/>
-          <a:lstStyle/>
-          <a:p>
-            <a:pPr indent="0" marL="0">
-              <a:buNone/>
-            </a:pPr>
-            <a:r>
-              <a:rPr lang="en-US" sz="3200" b="1" dirty="0">
-                <a:solidFill>
-                  <a:schemeClr val="accent1"/>
-                </a:solidFill>
-              </a:rPr>
-              <a:t>20 min – 2 h</a:t>
-            </a:r>
-            <a:endParaRPr lang="en-US" sz="3200" dirty="0"/>
-          </a:p>
-        </p:txBody>
-      </p:sp>
-      <p:sp>
-        <p:nvSpPr>
-          <p:cNvPr id="8" name="label to design each one by hand, from the coordinated model"/>
-          <p:cNvSpPr txBox="1"/>
-          <p:nvPr/>
-        </p:nvSpPr>
-        <p:spPr>
-          <a:xfrm>
-            <a:off x="749808" y="3721608"/>
-            <a:ext cx="3163824" cy="521208"/>
-          </a:xfrm>
-          <a:prstGeom prst="rect">
-            <a:avLst/>
-          </a:prstGeom>
-          <a:noFill/>
-          <a:ln/>
-        </p:spPr>
-        <p:txBody>
-          <a:bodyPr wrap="square" lIns="0" tIns="0" rIns="0" bIns="0" rtlCol="0" anchor="t"/>
-          <a:lstStyle/>
-          <a:p>
-            <a:pPr indent="0" marL="0">
-              <a:buNone/>
-            </a:pPr>
-            <a:r>
-              <a:rPr lang="en-US" sz="1200" dirty="0">
-                <a:solidFill>
-                  <a:srgbClr val="52514E"/>
-                </a:solidFill>
-              </a:rPr>
-              <a:t>to design each one by hand, from the coordinated model</a:t>
-            </a:r>
-            <a:endParaRPr lang="en-US" sz="1200" dirty="0"/>
-          </a:p>
-        </p:txBody>
-      </p:sp>
-      <p:sp>
-        <p:nvSpPr>
-          <p:cNvPr id="9" name="tile of all MEP design effort; on the order of $600K of engineering per project"/>
-          <p:cNvSpPr/>
-          <p:nvPr/>
-        </p:nvSpPr>
-        <p:spPr>
-          <a:xfrm>
-            <a:off x="548640" y="4434840"/>
-            <a:ext cx="3566160" cy="1371600"/>
-          </a:xfrm>
-          <a:prstGeom prst="roundRect">
-            <a:avLst>
-              <a:gd name="adj" fmla="val 4667"/>
-            </a:avLst>
-          </a:prstGeom>
-          <a:solidFill>
-            <a:schemeClr val="bg2"/>
-          </a:solidFill>
-          <a:ln/>
-        </p:spPr>
-      </p:sp>
-      <p:sp>
-        <p:nvSpPr>
-          <p:cNvPr id="10" name="value of all MEP design effort; on the order of $600K of engineering per project"/>
-          <p:cNvSpPr txBox="1"/>
-          <p:nvPr/>
-        </p:nvSpPr>
-        <p:spPr>
-          <a:xfrm>
-            <a:off x="749808" y="4526280"/>
-            <a:ext cx="3163824" cy="685800"/>
-          </a:xfrm>
-          <a:prstGeom prst="rect">
-            <a:avLst/>
-          </a:prstGeom>
-          <a:noFill/>
-          <a:ln/>
-        </p:spPr>
-        <p:txBody>
-          <a:bodyPr wrap="square" lIns="0" tIns="0" rIns="0" bIns="0" rtlCol="0" anchor="ctr"/>
-          <a:lstStyle/>
-          <a:p>
-            <a:pPr indent="0" marL="0">
-              <a:buNone/>
-            </a:pPr>
-            <a:r>
-              <a:rPr lang="en-US" sz="3200" b="1" dirty="0">
-                <a:solidFill>
-                  <a:schemeClr val="accent1"/>
-                </a:solidFill>
-              </a:rPr>
-              <a:t>≈ ¼</a:t>
-            </a:r>
-            <a:endParaRPr lang="en-US" sz="3200" dirty="0"/>
-          </a:p>
-        </p:txBody>
-      </p:sp>
-      <p:sp>
-        <p:nvSpPr>
-          <p:cNvPr id="11" name="label of all MEP design effort; on the order of $600K of engineering per project"/>
-          <p:cNvSpPr txBox="1"/>
-          <p:nvPr/>
-        </p:nvSpPr>
-        <p:spPr>
-          <a:xfrm>
-            <a:off x="749808" y="5230368"/>
-            <a:ext cx="3163824" cy="521208"/>
-          </a:xfrm>
-          <a:prstGeom prst="rect">
-            <a:avLst/>
-          </a:prstGeom>
-          <a:noFill/>
-          <a:ln/>
-        </p:spPr>
-        <p:txBody>
-          <a:bodyPr wrap="square" lIns="0" tIns="0" rIns="0" bIns="0" rtlCol="0" anchor="t"/>
-          <a:lstStyle/>
-          <a:p>
-            <a:pPr indent="0" marL="0">
-              <a:buNone/>
-            </a:pPr>
-            <a:r>
-              <a:rPr lang="en-US" sz="1200" dirty="0">
-                <a:solidFill>
-                  <a:srgbClr val="52514E"/>
-                </a:solidFill>
-              </a:rPr>
-              <a:t>of all MEP design effort; on the order of $600K of engineering per project</a:t>
-            </a:r>
-            <a:endParaRPr lang="en-US" sz="1200" dirty="0"/>
-          </a:p>
-        </p:txBody>
-      </p:sp>
-      <p:sp>
-        <p:nvSpPr>
-          <p:cNvPr id="12" name="estimates note"/>
-          <p:cNvSpPr txBox="1"/>
-          <p:nvPr/>
-        </p:nvSpPr>
-        <p:spPr>
-          <a:xfrm>
-            <a:off x="548640" y="5897880"/>
-            <a:ext cx="3566160" cy="274320"/>
-          </a:xfrm>
-          <a:prstGeom prst="rect">
-            <a:avLst/>
-          </a:prstGeom>
-          <a:noFill/>
-          <a:ln/>
-        </p:spPr>
-        <p:txBody>
-          <a:bodyPr wrap="square" lIns="0" tIns="0" rIns="0" bIns="0" rtlCol="0" anchor="t"/>
-          <a:lstStyle/>
-          <a:p>
-            <a:pPr indent="0" marL="0">
-              <a:buNone/>
-            </a:pPr>
-            <a:r>
-              <a:rPr lang="en-US" sz="1100" dirty="0">
-                <a:solidFill>
-                  <a:srgbClr val="52514E"/>
-                </a:solidFill>
-              </a:rPr>
-              <a:t>Approximate practitioner estimates.</a:t>
-            </a:r>
-            <a:endParaRPr lang="en-US" sz="1100" dirty="0"/>
-          </a:p>
-        </p:txBody>
-      </p:sp>
-      <p:pic>
-        <p:nvPicPr>
-          <p:cNvPr id="13" name="route to section" descr="/home/user/crossmep_dataset/docs/figures/paper_fig1_route_to_section.png">    </p:cNvPr>
-          <p:cNvPicPr>
-            <a:picLocks noChangeAspect="1"/>
-          </p:cNvPicPr>
-          <p:nvPr/>
-        </p:nvPicPr>
-        <p:blipFill>
-          <a:blip r:embed="rId1"/>
-          <a:stretch>
-            <a:fillRect/>
-          </a:stretch>
-        </p:blipFill>
-        <p:spPr>
-          <a:xfrm>
-            <a:off x="4480560" y="1525290"/>
-            <a:ext cx="7159752" cy="1978621"/>
-          </a:xfrm>
-          <a:prstGeom prst="rect">
-            <a:avLst/>
-          </a:prstGeom>
-        </p:spPr>
-      </p:pic>
-      <p:sp>
-        <p:nvSpPr>
-          <p:cNvPr id="14" name="fig1 caption"/>
-          <p:cNvSpPr txBox="1"/>
-          <p:nvPr/>
-        </p:nvSpPr>
-        <p:spPr>
-          <a:xfrm>
-            <a:off x="4480560" y="3641070"/>
-            <a:ext cx="7159752" cy="685800"/>
-          </a:xfrm>
-          <a:prstGeom prst="rect">
-            <a:avLst/>
-          </a:prstGeom>
-          <a:noFill/>
-          <a:ln/>
-        </p:spPr>
-        <p:txBody>
-          <a:bodyPr wrap="square" lIns="0" tIns="0" rIns="0" bIns="0" rtlCol="0" anchor="t"/>
-          <a:lstStyle/>
-          <a:p>
-            <a:pPr indent="0" marL="0">
-              <a:buNone/>
-            </a:pPr>
-            <a:r>
-              <a:rPr lang="en-US" sz="1100" dirty="0">
-                <a:solidFill>
-                  <a:srgbClr val="52514E"/>
-                </a:solidFill>
-              </a:rPr>
-              <a:t>Support design starts after coordination. At each hanger location the designer works from the section across the run: what passes, how big, how heavy, how far apart, what it hangs from.</a:t>
-            </a:r>
-            <a:endParaRPr lang="en-US" sz="1100" dirty="0"/>
-          </a:p>
-        </p:txBody>
-      </p:sp>
-      <p:sp>
-        <p:nvSpPr>
-          <p:cNvPr id="15" name="quote card"/>
-          <p:cNvSpPr/>
-          <p:nvPr/>
-        </p:nvSpPr>
-        <p:spPr>
-          <a:xfrm>
-            <a:off x="4480560" y="4434840"/>
-            <a:ext cx="7159752" cy="1371600"/>
-          </a:xfrm>
-          <a:prstGeom prst="roundRect">
-            <a:avLst>
-              <a:gd name="adj" fmla="val 4667"/>
-            </a:avLst>
-          </a:prstGeom>
-          <a:solidFill>
-            <a:schemeClr val="bg2"/>
-          </a:solidFill>
-          <a:ln/>
-        </p:spPr>
-      </p:sp>
-      <p:sp>
-        <p:nvSpPr>
-          <p:cNvPr id="16" name="quote"/>
-          <p:cNvSpPr txBox="1"/>
-          <p:nvPr/>
-        </p:nvSpPr>
-        <p:spPr>
-          <a:xfrm>
-            <a:off x="4754880" y="4572000"/>
-            <a:ext cx="6611112" cy="1097280"/>
-          </a:xfrm>
-          <a:prstGeom prst="rect">
-            <a:avLst/>
-          </a:prstGeom>
-          <a:noFill/>
-          <a:ln/>
-        </p:spPr>
-        <p:txBody>
-          <a:bodyPr wrap="square" lIns="0" tIns="0" rIns="0" bIns="0" rtlCol="0" anchor="ctr"/>
-          <a:lstStyle/>
-          <a:p>
-            <a:pPr indent="0" marL="0">
-              <a:buNone/>
-            </a:pPr>
-            <a:r>
-              <a:rPr lang="en-US" sz="1500" i="1" dirty="0">
-                <a:solidFill>
-                  <a:schemeClr val="tx1"/>
-                </a:solidFill>
-              </a:rPr>
-              <a:t>Nobody designs a support from the whole model; it is designed from the section at that hanger.</a:t>
-            </a:r>
-            <a:endParaRPr lang="en-US" sz="1500" dirty="0"/>
-          </a:p>
-          <a:p>
-            <a:pPr indent="0" marL="0">
-              <a:buNone/>
-            </a:pPr>
-            <a:r>
-              <a:rPr lang="en-US" sz="1500" b="1" dirty="0">
-                <a:solidFill>
-                  <a:schemeClr val="tx1"/>
-                </a:solidFill>
-              </a:rPr>
-              <a:t>That section is the unit of work — and the unit of CrossMEP.</a:t>
-            </a:r>
-            <a:endParaRPr lang="en-US" sz="1500" dirty="0"/>
-          </a:p>
-        </p:txBody>
-      </p:sp>
-      <p:sp>
-        <p:nvSpPr>
-          <p:cNvPr id="25" name="Slide Number Placeholder 0"/>
-          <p:cNvSpPr>
-            <a:spLocks noGrp="1"/>
-          </p:cNvSpPr>
-          <p:nvPr>
-            <p:ph type="sldNum" sz="quarter" idx="4294967295"/>
-          </p:nvPr>
-        </p:nvSpPr>
-        <p:spPr>
-          <a:xfrm>
-            <a:off x="11064240" y="6419088"/>
-            <a:ext cx="594360" cy="274320"/>
-          </a:xfrm>
-          <a:prstGeom prst="rect">
-            <a:avLst/>
-          </a:prstGeom>
-          <a:extLst>
-            <a:ext uri="{C572A759-6A51-4108-AA02-DFA0A04FC94B}">
-              <ma14:wrappingTextBoxFlag xmlns:ma14="http://schemas.microsoft.com/office/mac/drawingml/2011/main" val="0"/>
-            </a:ext>
-          </a:extLst>
-        </p:spPr>
-        <p:txBody>
-          <a:bodyPr/>
-          <a:lstStyle>
-            <a:lvl1pPr>
-              <a:defRPr sz="900">
-                <a:solidFill>
-                  <a:srgbClr val="898781"/>
-                </a:solidFill>
-              </a:defRPr>
-            </a:lvl1pPr>
-          </a:lstStyle>
-          <a:p>
-            <a:pPr algn="r"/>
-            <a:fld id="{F7021451-1387-4CA6-816F-3879F97B5CBC}" type="slidenum">
-              <a:rPr b="0" lang="en-US"/>
-              <a:t>2</a:t>
-            </a:fld>
-            <a:endParaRPr lang="en-US"/>
-          </a:p>
-        </p:txBody>
-      </p:sp>
-    </p:spTree>
-  </p:cSld>
-  <p:clrMapOvr>
-    <a:masterClrMapping/>
-  </p:clrMapOvr>
-</p:sld>
-</file>
-
-<file path=ppt/slides/slide20.xml><?xml version="1.0" encoding="utf-8"?>
-<p:sld xmlns:a="http://schemas.openxmlformats.org/drawingml/2006/main" xmlns:r="http://schemas.openxmlformats.org/officeDocument/2006/relationships" xmlns:p="http://schemas.openxmlformats.org/presentationml/2006/main">
-  <p:cSld name="Slide 20">
+  <p:cSld name="Slide 21">
     <p:spTree>
       <p:nvGrpSpPr>
         <p:cNvPr id="1" name=""/>
@@ -20173,7 +20473,7 @@
             <a:pPr algn="r"/>
             <a:fld id="{F7021451-1387-4CA6-816F-3879F97B5CBC}" type="slidenum">
               <a:rPr b="0" lang="en-US"/>
-              <a:t>20</a:t>
+              <a:t>21</a:t>
             </a:fld>
             <a:endParaRPr lang="en-US"/>
           </a:p>
@@ -20190,6 +20490,620 @@
 <file path=ppt/slides/slide3.xml><?xml version="1.0" encoding="utf-8"?>
 <p:sld xmlns:a="http://schemas.openxmlformats.org/drawingml/2006/main" xmlns:r="http://schemas.openxmlformats.org/officeDocument/2006/relationships" xmlns:p="http://schemas.openxmlformats.org/presentationml/2006/main">
   <p:cSld name="Slide 3">
+    <p:spTree>
+      <p:nvGrpSpPr>
+        <p:cNvPr id="1" name=""/>
+        <p:cNvGrpSpPr/>
+        <p:nvPr/>
+      </p:nvGrpSpPr>
+      <p:grpSpPr>
+        <a:xfrm>
+          <a:off x="0" y="0"/>
+          <a:ext cx="0" cy="0"/>
+          <a:chOff x="0" y="0"/>
+          <a:chExt cx="0" cy="0"/>
+        </a:xfrm>
+      </p:grpSpPr>
+      <p:sp>
+        <p:nvSpPr>
+          <p:cNvPr id="2" name="Text 0"/>
+          <p:cNvSpPr/>
+          <p:nvPr>
+            <p:ph idx="100" type="title" hasCustomPrompt="1"/>
+          </p:nvPr>
+        </p:nvSpPr>
+        <p:spPr>
+          <a:xfrm>
+            <a:off x="548640" y="274320"/>
+            <a:ext cx="11091672" cy="960120"/>
+          </a:xfrm>
+          <a:prstGeom prst="rect">
+            <a:avLst/>
+          </a:prstGeom>
+          <a:noFill/>
+          <a:ln/>
+        </p:spPr>
+        <p:txBody>
+          <a:bodyPr wrap="square" lIns="0" tIns="0" rIns="0" bIns="0" rtlCol="0" anchor="ctr"/>
+          <a:lstStyle/>
+          <a:p>
+            <a:pPr algn="l" indent="0" marL="0">
+              <a:buNone/>
+            </a:pPr>
+            <a:r>
+              <a:rPr lang="en-US" sz="2600" b="1" dirty="0">
+                <a:solidFill>
+                  <a:schemeClr val="tx1"/>
+                </a:solidFill>
+              </a:rPr>
+              <a:t>Synthesizing an assembly from a catalog and a section has resisted automation</a:t>
+            </a:r>
+            <a:endParaRPr lang="en-US" sz="2600" dirty="0"/>
+          </a:p>
+        </p:txBody>
+      </p:sp>
+      <p:sp>
+        <p:nvSpPr>
+          <p:cNvPr id="3" name="problem card"/>
+          <p:cNvSpPr/>
+          <p:nvPr/>
+        </p:nvSpPr>
+        <p:spPr>
+          <a:xfrm>
+            <a:off x="548640" y="1371600"/>
+            <a:ext cx="5212080" cy="2606040"/>
+          </a:xfrm>
+          <a:prstGeom prst="roundRect">
+            <a:avLst>
+              <a:gd name="adj" fmla="val 2456"/>
+            </a:avLst>
+          </a:prstGeom>
+          <a:solidFill>
+            <a:schemeClr val="bg2"/>
+          </a:solidFill>
+          <a:ln/>
+        </p:spPr>
+      </p:sp>
+      <p:sp>
+        <p:nvSpPr>
+          <p:cNvPr id="4" name="problem"/>
+          <p:cNvSpPr txBox="1"/>
+          <p:nvPr/>
+        </p:nvSpPr>
+        <p:spPr>
+          <a:xfrm>
+            <a:off x="777240" y="1508760"/>
+            <a:ext cx="4754880" cy="2377440"/>
+          </a:xfrm>
+          <a:prstGeom prst="rect">
+            <a:avLst/>
+          </a:prstGeom>
+          <a:noFill/>
+          <a:ln/>
+        </p:spPr>
+        <p:txBody>
+          <a:bodyPr wrap="square" lIns="0" tIns="0" rIns="0" bIns="0" rtlCol="0" anchor="t"/>
+          <a:lstStyle/>
+          <a:p>
+            <a:pPr indent="0" marL="0">
+              <a:buNone/>
+            </a:pPr>
+            <a:r>
+              <a:rPr lang="en-US" sz="1700" b="1" dirty="0">
+                <a:solidFill>
+                  <a:schemeClr val="tx1"/>
+                </a:solidFill>
+              </a:rPr>
+              <a:t>The synthesis problem</a:t>
+            </a:r>
+            <a:endParaRPr lang="en-US" sz="1500" dirty="0"/>
+          </a:p>
+          <a:p>
+            <a:pPr indent="0" marL="0">
+              <a:buNone/>
+            </a:pPr>
+            <a:r>
+              <a:rPr lang="en-US" sz="600" dirty="0">
+                <a:solidFill>
+                  <a:schemeClr val="tx1"/>
+                </a:solidFill>
+              </a:rPr>
+              <a:t> </a:t>
+            </a:r>
+            <a:endParaRPr lang="en-US" sz="1500" dirty="0"/>
+          </a:p>
+          <a:p>
+            <a:pPr indent="0" marL="0">
+              <a:buNone/>
+            </a:pPr>
+            <a:r>
+              <a:rPr lang="en-US" sz="1500" b="1" dirty="0">
+                <a:solidFill>
+                  <a:schemeClr val="tx1"/>
+                </a:solidFill>
+              </a:rPr>
+              <a:t>Given </a:t>
+            </a:r>
+            <a:pPr indent="0" marL="0">
+              <a:buNone/>
+            </a:pPr>
+            <a:r>
+              <a:rPr lang="en-US" sz="1500" dirty="0">
+                <a:solidFill>
+                  <a:schemeClr val="tx1"/>
+                </a:solidFill>
+              </a:rPr>
+              <a:t>a fixed catalog of components and the MEP context: the services crossing the hanger and the surface they hang from.</a:t>
+            </a:r>
+            <a:endParaRPr lang="en-US" sz="1500" dirty="0"/>
+          </a:p>
+          <a:p>
+            <a:pPr indent="0" marL="0">
+              <a:buNone/>
+            </a:pPr>
+            <a:r>
+              <a:rPr lang="en-US" sz="600" dirty="0">
+                <a:solidFill>
+                  <a:schemeClr val="tx1"/>
+                </a:solidFill>
+              </a:rPr>
+              <a:t> </a:t>
+            </a:r>
+            <a:endParaRPr lang="en-US" sz="1500" dirty="0"/>
+          </a:p>
+          <a:p>
+            <a:pPr indent="0" marL="0">
+              <a:buNone/>
+            </a:pPr>
+            <a:r>
+              <a:rPr lang="en-US" sz="1500" b="1" dirty="0">
+                <a:solidFill>
+                  <a:schemeClr val="tx1"/>
+                </a:solidFill>
+              </a:rPr>
+              <a:t>Find </a:t>
+            </a:r>
+            <a:pPr indent="0" marL="0">
+              <a:buNone/>
+            </a:pPr>
+            <a:r>
+              <a:rPr lang="en-US" sz="1500" dirty="0">
+                <a:solidFill>
+                  <a:schemeClr val="tx1"/>
+                </a:solidFill>
+              </a:rPr>
+              <a:t>a feasible assembly that carries the services to the structure.</a:t>
+            </a:r>
+            <a:endParaRPr lang="en-US" sz="1500" dirty="0"/>
+          </a:p>
+          <a:p>
+            <a:pPr indent="0" marL="0">
+              <a:buNone/>
+            </a:pPr>
+            <a:r>
+              <a:rPr lang="en-US" sz="600" dirty="0">
+                <a:solidFill>
+                  <a:schemeClr val="tx1"/>
+                </a:solidFill>
+              </a:rPr>
+              <a:t> </a:t>
+            </a:r>
+            <a:endParaRPr lang="en-US" sz="1500" dirty="0"/>
+          </a:p>
+          <a:p>
+            <a:pPr indent="0" marL="0">
+              <a:buNone/>
+            </a:pPr>
+            <a:r>
+              <a:rPr lang="en-US" sz="1500" i="1" dirty="0">
+                <a:solidFill>
+                  <a:schemeClr val="tx1"/>
+                </a:solidFill>
+              </a:rPr>
+              <a:t>Tools coordinate the model and check a design; choosing the topology and the parts is still done by hand.</a:t>
+            </a:r>
+            <a:endParaRPr lang="en-US" sz="1500" dirty="0"/>
+          </a:p>
+        </p:txBody>
+      </p:sp>
+      <p:pic>
+        <p:nvPicPr>
+          <p:cNvPr id="5" name="route to section" descr="/home/user/crossmep_dataset/docs/figures/paper_fig1_route_to_section.png">    </p:cNvPr>
+          <p:cNvPicPr>
+            <a:picLocks noChangeAspect="1"/>
+          </p:cNvPicPr>
+          <p:nvPr/>
+        </p:nvPicPr>
+        <p:blipFill>
+          <a:blip r:embed="rId1"/>
+          <a:stretch>
+            <a:fillRect/>
+          </a:stretch>
+        </p:blipFill>
+        <p:spPr>
+          <a:xfrm>
+            <a:off x="5989320" y="1642325"/>
+            <a:ext cx="5650992" cy="1561670"/>
+          </a:xfrm>
+          <a:prstGeom prst="rect">
+            <a:avLst/>
+          </a:prstGeom>
+        </p:spPr>
+      </p:pic>
+      <p:sp>
+        <p:nvSpPr>
+          <p:cNvPr id="6" name="fig1 caption"/>
+          <p:cNvSpPr txBox="1"/>
+          <p:nvPr/>
+        </p:nvSpPr>
+        <p:spPr>
+          <a:xfrm>
+            <a:off x="5989320" y="3295435"/>
+            <a:ext cx="5650992" cy="457200"/>
+          </a:xfrm>
+          <a:prstGeom prst="rect">
+            <a:avLst/>
+          </a:prstGeom>
+          <a:noFill/>
+          <a:ln/>
+        </p:spPr>
+        <p:txBody>
+          <a:bodyPr wrap="square" lIns="0" tIns="0" rIns="0" bIns="0" rtlCol="0" anchor="t"/>
+          <a:lstStyle/>
+          <a:p>
+            <a:pPr indent="0" marL="0">
+              <a:buNone/>
+            </a:pPr>
+            <a:r>
+              <a:rPr lang="en-US" sz="1100" dirty="0">
+                <a:solidFill>
+                  <a:srgbClr val="52514E"/>
+                </a:solidFill>
+              </a:rPr>
+              <a:t>Design starts after coordination: at each hanger the designer works from the section across the run, not from the whole model.</a:t>
+            </a:r>
+            <a:endParaRPr lang="en-US" sz="1100" dirty="0"/>
+          </a:p>
+        </p:txBody>
+      </p:sp>
+      <p:sp>
+        <p:nvSpPr>
+          <p:cNvPr id="7" name="why Geometric judgment"/>
+          <p:cNvSpPr/>
+          <p:nvPr/>
+        </p:nvSpPr>
+        <p:spPr>
+          <a:xfrm>
+            <a:off x="548640" y="4251960"/>
+            <a:ext cx="3575304" cy="1463040"/>
+          </a:xfrm>
+          <a:prstGeom prst="roundRect">
+            <a:avLst>
+              <a:gd name="adj" fmla="val 4375"/>
+            </a:avLst>
+          </a:prstGeom>
+          <a:solidFill>
+            <a:schemeClr val="bg2"/>
+          </a:solidFill>
+          <a:ln/>
+        </p:spPr>
+      </p:sp>
+      <p:sp>
+        <p:nvSpPr>
+          <p:cNvPr id="8" name="why head Geometric judgment"/>
+          <p:cNvSpPr txBox="1"/>
+          <p:nvPr/>
+        </p:nvSpPr>
+        <p:spPr>
+          <a:xfrm>
+            <a:off x="777240" y="4389120"/>
+            <a:ext cx="3118104" cy="384048"/>
+          </a:xfrm>
+          <a:prstGeom prst="rect">
+            <a:avLst/>
+          </a:prstGeom>
+          <a:noFill/>
+          <a:ln/>
+        </p:spPr>
+        <p:txBody>
+          <a:bodyPr wrap="square" lIns="0" tIns="0" rIns="0" bIns="0" rtlCol="0" anchor="ctr"/>
+          <a:lstStyle/>
+          <a:p>
+            <a:pPr indent="0" marL="0">
+              <a:buNone/>
+            </a:pPr>
+            <a:r>
+              <a:rPr lang="en-US" sz="1700" b="1" dirty="0">
+                <a:solidFill>
+                  <a:schemeClr val="accent1"/>
+                </a:solidFill>
+              </a:rPr>
+              <a:t>1. Geometric judgment</a:t>
+            </a:r>
+            <a:endParaRPr lang="en-US" sz="1700" dirty="0"/>
+          </a:p>
+        </p:txBody>
+      </p:sp>
+      <p:sp>
+        <p:nvSpPr>
+          <p:cNvPr id="9" name="why text Geometric judgment"/>
+          <p:cNvSpPr txBox="1"/>
+          <p:nvPr/>
+        </p:nvSpPr>
+        <p:spPr>
+          <a:xfrm>
+            <a:off x="777240" y="4828032"/>
+            <a:ext cx="3118104" cy="822960"/>
+          </a:xfrm>
+          <a:prstGeom prst="rect">
+            <a:avLst/>
+          </a:prstGeom>
+          <a:noFill/>
+          <a:ln/>
+        </p:spPr>
+        <p:txBody>
+          <a:bodyPr wrap="square" lIns="0" tIns="0" rIns="0" bIns="0" rtlCol="0" anchor="t"/>
+          <a:lstStyle/>
+          <a:p>
+            <a:pPr indent="0" marL="0">
+              <a:buNone/>
+            </a:pPr>
+            <a:r>
+              <a:rPr lang="en-US" sz="1500" dirty="0">
+                <a:solidFill>
+                  <a:schemeClr val="tx1"/>
+                </a:solidFill>
+              </a:rPr>
+              <a:t>Engineers choose an assembly’s topology from experience.</a:t>
+            </a:r>
+            <a:endParaRPr lang="en-US" sz="1500" dirty="0"/>
+          </a:p>
+        </p:txBody>
+      </p:sp>
+      <p:sp>
+        <p:nvSpPr>
+          <p:cNvPr id="10" name="why Rule explosion"/>
+          <p:cNvSpPr/>
+          <p:nvPr/>
+        </p:nvSpPr>
+        <p:spPr>
+          <a:xfrm>
+            <a:off x="4306824" y="4251960"/>
+            <a:ext cx="3575304" cy="1463040"/>
+          </a:xfrm>
+          <a:prstGeom prst="roundRect">
+            <a:avLst>
+              <a:gd name="adj" fmla="val 4375"/>
+            </a:avLst>
+          </a:prstGeom>
+          <a:solidFill>
+            <a:schemeClr val="bg2"/>
+          </a:solidFill>
+          <a:ln/>
+        </p:spPr>
+      </p:sp>
+      <p:sp>
+        <p:nvSpPr>
+          <p:cNvPr id="11" name="why head Rule explosion"/>
+          <p:cNvSpPr txBox="1"/>
+          <p:nvPr/>
+        </p:nvSpPr>
+        <p:spPr>
+          <a:xfrm>
+            <a:off x="4535424" y="4389120"/>
+            <a:ext cx="3118104" cy="384048"/>
+          </a:xfrm>
+          <a:prstGeom prst="rect">
+            <a:avLst/>
+          </a:prstGeom>
+          <a:noFill/>
+          <a:ln/>
+        </p:spPr>
+        <p:txBody>
+          <a:bodyPr wrap="square" lIns="0" tIns="0" rIns="0" bIns="0" rtlCol="0" anchor="ctr"/>
+          <a:lstStyle/>
+          <a:p>
+            <a:pPr indent="0" marL="0">
+              <a:buNone/>
+            </a:pPr>
+            <a:r>
+              <a:rPr lang="en-US" sz="1700" b="1" dirty="0">
+                <a:solidFill>
+                  <a:schemeClr val="accent1"/>
+                </a:solidFill>
+              </a:rPr>
+              <a:t>2. Rule explosion</a:t>
+            </a:r>
+            <a:endParaRPr lang="en-US" sz="1700" dirty="0"/>
+          </a:p>
+        </p:txBody>
+      </p:sp>
+      <p:sp>
+        <p:nvSpPr>
+          <p:cNvPr id="12" name="why text Rule explosion"/>
+          <p:cNvSpPr txBox="1"/>
+          <p:nvPr/>
+        </p:nvSpPr>
+        <p:spPr>
+          <a:xfrm>
+            <a:off x="4535424" y="4828032"/>
+            <a:ext cx="3118104" cy="822960"/>
+          </a:xfrm>
+          <a:prstGeom prst="rect">
+            <a:avLst/>
+          </a:prstGeom>
+          <a:noFill/>
+          <a:ln/>
+        </p:spPr>
+        <p:txBody>
+          <a:bodyPr wrap="square" lIns="0" tIns="0" rIns="0" bIns="0" rtlCol="0" anchor="t"/>
+          <a:lstStyle/>
+          <a:p>
+            <a:pPr indent="0" marL="0">
+              <a:buNone/>
+            </a:pPr>
+            <a:r>
+              <a:rPr lang="en-US" sz="1500" dirty="0">
+                <a:solidFill>
+                  <a:schemeClr val="tx1"/>
+                </a:solidFill>
+              </a:rPr>
+              <a:t>Code, load and material constraints interact across thousands of combinations.</a:t>
+            </a:r>
+            <a:endParaRPr lang="en-US" sz="1500" dirty="0"/>
+          </a:p>
+        </p:txBody>
+      </p:sp>
+      <p:sp>
+        <p:nvSpPr>
+          <p:cNvPr id="13" name="why Catalog volatility"/>
+          <p:cNvSpPr/>
+          <p:nvPr/>
+        </p:nvSpPr>
+        <p:spPr>
+          <a:xfrm>
+            <a:off x="8065008" y="4251960"/>
+            <a:ext cx="3575304" cy="1463040"/>
+          </a:xfrm>
+          <a:prstGeom prst="roundRect">
+            <a:avLst>
+              <a:gd name="adj" fmla="val 4375"/>
+            </a:avLst>
+          </a:prstGeom>
+          <a:solidFill>
+            <a:schemeClr val="bg2"/>
+          </a:solidFill>
+          <a:ln/>
+        </p:spPr>
+      </p:sp>
+      <p:sp>
+        <p:nvSpPr>
+          <p:cNvPr id="14" name="why head Catalog volatility"/>
+          <p:cNvSpPr txBox="1"/>
+          <p:nvPr/>
+        </p:nvSpPr>
+        <p:spPr>
+          <a:xfrm>
+            <a:off x="8293608" y="4389120"/>
+            <a:ext cx="3118104" cy="384048"/>
+          </a:xfrm>
+          <a:prstGeom prst="rect">
+            <a:avLst/>
+          </a:prstGeom>
+          <a:noFill/>
+          <a:ln/>
+        </p:spPr>
+        <p:txBody>
+          <a:bodyPr wrap="square" lIns="0" tIns="0" rIns="0" bIns="0" rtlCol="0" anchor="ctr"/>
+          <a:lstStyle/>
+          <a:p>
+            <a:pPr indent="0" marL="0">
+              <a:buNone/>
+            </a:pPr>
+            <a:r>
+              <a:rPr lang="en-US" sz="1700" b="1" dirty="0">
+                <a:solidFill>
+                  <a:schemeClr val="accent1"/>
+                </a:solidFill>
+              </a:rPr>
+              <a:t>3. Catalog volatility</a:t>
+            </a:r>
+            <a:endParaRPr lang="en-US" sz="1700" dirty="0"/>
+          </a:p>
+        </p:txBody>
+      </p:sp>
+      <p:sp>
+        <p:nvSpPr>
+          <p:cNvPr id="15" name="why text Catalog volatility"/>
+          <p:cNvSpPr txBox="1"/>
+          <p:nvPr/>
+        </p:nvSpPr>
+        <p:spPr>
+          <a:xfrm>
+            <a:off x="8293608" y="4828032"/>
+            <a:ext cx="3118104" cy="822960"/>
+          </a:xfrm>
+          <a:prstGeom prst="rect">
+            <a:avLst/>
+          </a:prstGeom>
+          <a:noFill/>
+          <a:ln/>
+        </p:spPr>
+        <p:txBody>
+          <a:bodyPr wrap="square" lIns="0" tIns="0" rIns="0" bIns="0" rtlCol="0" anchor="t"/>
+          <a:lstStyle/>
+          <a:p>
+            <a:pPr indent="0" marL="0">
+              <a:buNone/>
+            </a:pPr>
+            <a:r>
+              <a:rPr lang="en-US" sz="1500" dirty="0">
+                <a:solidFill>
+                  <a:schemeClr val="tx1"/>
+                </a:solidFill>
+              </a:rPr>
+              <a:t>Catalogs change faster than rule-based systems can be rewritten.</a:t>
+            </a:r>
+            <a:endParaRPr lang="en-US" sz="1500" dirty="0"/>
+          </a:p>
+        </p:txBody>
+      </p:sp>
+      <p:sp>
+        <p:nvSpPr>
+          <p:cNvPr id="25" name="Slide Number Placeholder 0"/>
+          <p:cNvSpPr>
+            <a:spLocks noGrp="1"/>
+          </p:cNvSpPr>
+          <p:nvPr>
+            <p:ph type="sldNum" sz="quarter" idx="4294967295"/>
+          </p:nvPr>
+        </p:nvSpPr>
+        <p:spPr>
+          <a:xfrm>
+            <a:off x="11064240" y="6419088"/>
+            <a:ext cx="594360" cy="274320"/>
+          </a:xfrm>
+          <a:prstGeom prst="rect">
+            <a:avLst/>
+          </a:prstGeom>
+          <a:extLst>
+            <a:ext uri="{C572A759-6A51-4108-AA02-DFA0A04FC94B}">
+              <ma14:wrappingTextBoxFlag xmlns:ma14="http://schemas.microsoft.com/office/mac/drawingml/2011/main" val="0"/>
+            </a:ext>
+          </a:extLst>
+        </p:spPr>
+        <p:txBody>
+          <a:bodyPr/>
+          <a:lstStyle>
+            <a:lvl1pPr>
+              <a:defRPr sz="900">
+                <a:solidFill>
+                  <a:srgbClr val="898781"/>
+                </a:solidFill>
+              </a:defRPr>
+            </a:lvl1pPr>
+          </a:lstStyle>
+          <a:p>
+            <a:pPr algn="r"/>
+            <a:fld id="{F7021451-1387-4CA6-816F-3879F97B5CBC}" type="slidenum">
+              <a:rPr b="0" lang="en-US"/>
+              <a:t>3</a:t>
+            </a:fld>
+            <a:endParaRPr lang="en-US"/>
+          </a:p>
+        </p:txBody>
+      </p:sp>
+    </p:spTree>
+  </p:cSld>
+  <p:clrMapOvr>
+    <a:masterClrMapping/>
+  </p:clrMapOvr>
+</p:sld>
+</file>
+
+<file path=ppt/slides/slide4.xml><?xml version="1.0" encoding="utf-8"?>
+<p:sld xmlns:a="http://schemas.openxmlformats.org/drawingml/2006/main" xmlns:r="http://schemas.openxmlformats.org/officeDocument/2006/relationships" xmlns:p="http://schemas.openxmlformats.org/presentationml/2006/main">
+  <p:cSld name="Slide 4">
     <p:spTree>
       <p:nvGrpSpPr>
         <p:cNvPr id="1" name=""/>
@@ -21265,7 +22179,7 @@
             <a:pPr algn="r"/>
             <a:fld id="{F7021451-1387-4CA6-816F-3879F97B5CBC}" type="slidenum">
               <a:rPr b="0" lang="en-US"/>
-              <a:t>3</a:t>
+              <a:t>4</a:t>
             </a:fld>
             <a:endParaRPr lang="en-US"/>
           </a:p>
@@ -21279,9 +22193,9 @@
 </p:sld>
 </file>
 
-<file path=ppt/slides/slide4.xml><?xml version="1.0" encoding="utf-8"?>
+<file path=ppt/slides/slide5.xml><?xml version="1.0" encoding="utf-8"?>
 <p:sld xmlns:a="http://schemas.openxmlformats.org/drawingml/2006/main" xmlns:r="http://schemas.openxmlformats.org/officeDocument/2006/relationships" xmlns:p="http://schemas.openxmlformats.org/presentationml/2006/main">
-  <p:cSld name="Slide 4">
+  <p:cSld name="Slide 5">
     <p:spTree>
       <p:nvGrpSpPr>
         <p:cNvPr id="1" name=""/>
@@ -21433,7 +22347,7 @@
             <a:pPr algn="r"/>
             <a:fld id="{F7021451-1387-4CA6-816F-3879F97B5CBC}" type="slidenum">
               <a:rPr b="0" lang="en-US"/>
-              <a:t>4</a:t>
+              <a:t>5</a:t>
             </a:fld>
             <a:endParaRPr lang="en-US"/>
           </a:p>
@@ -21447,9 +22361,9 @@
 </p:sld>
 </file>
 
-<file path=ppt/slides/slide5.xml><?xml version="1.0" encoding="utf-8"?>
+<file path=ppt/slides/slide6.xml><?xml version="1.0" encoding="utf-8"?>
 <p:sld xmlns:a="http://schemas.openxmlformats.org/drawingml/2006/main" xmlns:r="http://schemas.openxmlformats.org/officeDocument/2006/relationships" xmlns:p="http://schemas.openxmlformats.org/presentationml/2006/main">
-  <p:cSld name="Slide 5">
+  <p:cSld name="Slide 6">
     <p:spTree>
       <p:nvGrpSpPr>
         <p:cNvPr id="1" name=""/>
@@ -22219,7 +23133,7 @@
             <a:pPr algn="r"/>
             <a:fld id="{F7021451-1387-4CA6-816F-3879F97B5CBC}" type="slidenum">
               <a:rPr b="0" lang="en-US"/>
-              <a:t>5</a:t>
+              <a:t>6</a:t>
             </a:fld>
             <a:endParaRPr lang="en-US"/>
           </a:p>
@@ -22233,9 +23147,9 @@
 </p:sld>
 </file>
 
-<file path=ppt/slides/slide6.xml><?xml version="1.0" encoding="utf-8"?>
+<file path=ppt/slides/slide7.xml><?xml version="1.0" encoding="utf-8"?>
 <p:sld xmlns:a="http://schemas.openxmlformats.org/drawingml/2006/main" xmlns:r="http://schemas.openxmlformats.org/officeDocument/2006/relationships" xmlns:p="http://schemas.openxmlformats.org/presentationml/2006/main">
-  <p:cSld name="Slide 6">
+  <p:cSld name="Slide 7">
     <p:spTree>
       <p:nvGrpSpPr>
         <p:cNvPr id="1" name=""/>
@@ -22290,7 +23204,7 @@
       </p:sp>
       <p:graphicFrame>
         <p:nvGraphicFramePr>
-          <p:cNvPr id="7" name="sources table"/>
+          <p:cNvPr id="8" name="sources table"/>
           <p:cNvGraphicFramePr>
             <a:graphicFrameLocks noGrp="1"/>
           </p:cNvGraphicFramePr>
@@ -23755,7 +24669,7 @@
             <a:pPr algn="r"/>
             <a:fld id="{F7021451-1387-4CA6-816F-3879F97B5CBC}" type="slidenum">
               <a:rPr b="0" lang="en-US"/>
-              <a:t>6</a:t>
+              <a:t>7</a:t>
             </a:fld>
             <a:endParaRPr lang="en-US"/>
           </a:p>
@@ -23769,9 +24683,9 @@
 </p:sld>
 </file>
 
-<file path=ppt/slides/slide7.xml><?xml version="1.0" encoding="utf-8"?>
+<file path=ppt/slides/slide8.xml><?xml version="1.0" encoding="utf-8"?>
 <p:sld xmlns:a="http://schemas.openxmlformats.org/drawingml/2006/main" xmlns:r="http://schemas.openxmlformats.org/officeDocument/2006/relationships" xmlns:p="http://schemas.openxmlformats.org/presentationml/2006/main">
-  <p:cSld name="Slide 7">
+  <p:cSld name="Slide 8">
     <p:spTree>
       <p:nvGrpSpPr>
         <p:cNvPr id="1" name=""/>
@@ -23826,7 +24740,7 @@
       </p:sp>
       <p:graphicFrame>
         <p:nvGraphicFramePr>
-          <p:cNvPr id="8" name="splits table"/>
+          <p:cNvPr id="9" name="splits table"/>
           <p:cNvGraphicFramePr>
             <a:graphicFrameLocks noGrp="1"/>
           </p:cNvGraphicFramePr>
@@ -25594,7 +26508,7 @@
             <a:pPr algn="r"/>
             <a:fld id="{F7021451-1387-4CA6-816F-3879F97B5CBC}" type="slidenum">
               <a:rPr b="0" lang="en-US"/>
-              <a:t>7</a:t>
+              <a:t>8</a:t>
             </a:fld>
             <a:endParaRPr lang="en-US"/>
           </a:p>
@@ -25608,9 +26522,9 @@
 </p:sld>
 </file>
 
-<file path=ppt/slides/slide8.xml><?xml version="1.0" encoding="utf-8"?>
+<file path=ppt/slides/slide9.xml><?xml version="1.0" encoding="utf-8"?>
 <p:sld xmlns:a="http://schemas.openxmlformats.org/drawingml/2006/main" xmlns:r="http://schemas.openxmlformats.org/officeDocument/2006/relationships" xmlns:p="http://schemas.openxmlformats.org/presentationml/2006/main">
-  <p:cSld name="Slide 8">
+  <p:cSld name="Slide 9">
     <p:spTree>
       <p:nvGrpSpPr>
         <p:cNvPr id="1" name=""/>
@@ -25762,174 +26676,6 @@
             <a:pPr algn="r"/>
             <a:fld id="{F7021451-1387-4CA6-816F-3879F97B5CBC}" type="slidenum">
               <a:rPr b="0" lang="en-US"/>
-              <a:t>8</a:t>
-            </a:fld>
-            <a:endParaRPr lang="en-US"/>
-          </a:p>
-        </p:txBody>
-      </p:sp>
-    </p:spTree>
-  </p:cSld>
-  <p:clrMapOvr>
-    <a:masterClrMapping/>
-  </p:clrMapOvr>
-</p:sld>
-</file>
-
-<file path=ppt/slides/slide9.xml><?xml version="1.0" encoding="utf-8"?>
-<p:sld xmlns:a="http://schemas.openxmlformats.org/drawingml/2006/main" xmlns:r="http://schemas.openxmlformats.org/officeDocument/2006/relationships" xmlns:p="http://schemas.openxmlformats.org/presentationml/2006/main">
-  <p:cSld name="Slide 9">
-    <p:spTree>
-      <p:nvGrpSpPr>
-        <p:cNvPr id="1" name=""/>
-        <p:cNvGrpSpPr/>
-        <p:nvPr/>
-      </p:nvGrpSpPr>
-      <p:grpSpPr>
-        <a:xfrm>
-          <a:off x="0" y="0"/>
-          <a:ext cx="0" cy="0"/>
-          <a:chOff x="0" y="0"/>
-          <a:chExt cx="0" cy="0"/>
-        </a:xfrm>
-      </p:grpSpPr>
-      <p:sp>
-        <p:nvSpPr>
-          <p:cNvPr id="2" name="Text 0"/>
-          <p:cNvSpPr/>
-          <p:nvPr>
-            <p:ph idx="100" type="title" hasCustomPrompt="1"/>
-          </p:nvPr>
-        </p:nvSpPr>
-        <p:spPr>
-          <a:xfrm>
-            <a:off x="548640" y="274320"/>
-            <a:ext cx="11091672" cy="960120"/>
-          </a:xfrm>
-          <a:prstGeom prst="rect">
-            <a:avLst/>
-          </a:prstGeom>
-          <a:noFill/>
-          <a:ln/>
-        </p:spPr>
-        <p:txBody>
-          <a:bodyPr wrap="square" lIns="0" tIns="0" rIns="0" bIns="0" rtlCol="0" anchor="ctr"/>
-          <a:lstStyle/>
-          <a:p>
-            <a:pPr algn="l" indent="0" marL="0">
-              <a:buNone/>
-            </a:pPr>
-            <a:r>
-              <a:rPr lang="en-US" sz="2600" b="1" dirty="0">
-                <a:solidFill>
-                  <a:schemeClr val="tx1"/>
-                </a:solidFill>
-              </a:rPr>
-              <a:t>Higher tiers are heavier and, overall, tighter, as designed</a:t>
-            </a:r>
-            <a:endParaRPr lang="en-US" sz="2600" dirty="0"/>
-          </a:p>
-        </p:txBody>
-      </p:sp>
-      <p:pic>
-        <p:nvPicPr>
-          <p:cNvPr id="3" name="tier statistics" descr="preencoded.png">    </p:cNvPr>
-          <p:cNvPicPr>
-            <a:picLocks noChangeAspect="1"/>
-          </p:cNvPicPr>
-          <p:nvPr/>
-        </p:nvPicPr>
-        <p:blipFill>
-          <a:blip r:embed="rId1"/>
-          <a:stretch>
-            <a:fillRect/>
-          </a:stretch>
-        </p:blipFill>
-        <p:spPr>
-          <a:xfrm>
-            <a:off x="548640" y="1325880"/>
-            <a:ext cx="11091672" cy="3965273"/>
-          </a:xfrm>
-          <a:prstGeom prst="rect">
-            <a:avLst/>
-          </a:prstGeom>
-        </p:spPr>
-      </p:pic>
-      <p:sp>
-        <p:nvSpPr>
-          <p:cNvPr id="4" name="experiment 1 caption"/>
-          <p:cNvSpPr txBox="1"/>
-          <p:nvPr/>
-        </p:nvSpPr>
-        <p:spPr>
-          <a:xfrm>
-            <a:off x="548640" y="5400881"/>
-            <a:ext cx="11091672" cy="731520"/>
-          </a:xfrm>
-          <a:prstGeom prst="rect">
-            <a:avLst/>
-          </a:prstGeom>
-          <a:noFill/>
-          <a:ln/>
-        </p:spPr>
-        <p:txBody>
-          <a:bodyPr wrap="square" lIns="0" tIns="0" rIns="0" bIns="0" rtlCol="0" anchor="t"/>
-          <a:lstStyle/>
-          <a:p>
-            <a:pPr indent="0" marL="0">
-              <a:buNone/>
-            </a:pPr>
-            <a:r>
-              <a:rPr lang="en-US" sz="1250" dirty="0">
-                <a:solidFill>
-                  <a:srgbClr val="52514E"/>
-                </a:solidFill>
-              </a:rPr>
-              <a:t>A check that the dataset behaves as designed: the tier fixes the element count; load and congestion follow from the rules. Boxes: benchmark, 125 contexts per tier (IQR, whiskers 1.5 IQR); diamonds: medians of 2,000 generated contexts per tier. Load rises at every tier (rank correlation +0.56); the closest gap shrinks overall (−0.36) but widens at C6 (70 → 75 mm), where elements start to stack in two or three rows.</a:t>
-            </a:r>
-            <a:endParaRPr lang="en-US" sz="1250" dirty="0"/>
-          </a:p>
-        </p:txBody>
-      </p:sp>
-      <p:sp>
-        <p:nvSpPr>
-          <p:cNvPr id="25" name="Slide Number Placeholder 0"/>
-          <p:cNvSpPr>
-            <a:spLocks noGrp="1"/>
-          </p:cNvSpPr>
-          <p:nvPr>
-            <p:ph type="sldNum" sz="quarter" idx="4294967295"/>
-          </p:nvPr>
-        </p:nvSpPr>
-        <p:spPr>
-          <a:xfrm>
-            <a:off x="11064240" y="6419088"/>
-            <a:ext cx="594360" cy="274320"/>
-          </a:xfrm>
-          <a:prstGeom prst="rect">
-            <a:avLst/>
-          </a:prstGeom>
-          <a:extLst>
-            <a:ext uri="{C572A759-6A51-4108-AA02-DFA0A04FC94B}">
-              <ma14:wrappingTextBoxFlag xmlns:ma14="http://schemas.microsoft.com/office/mac/drawingml/2011/main" val="0"/>
-            </a:ext>
-          </a:extLst>
-        </p:spPr>
-        <p:txBody>
-          <a:bodyPr/>
-          <a:lstStyle>
-            <a:lvl1pPr>
-              <a:defRPr sz="900">
-                <a:solidFill>
-                  <a:srgbClr val="898781"/>
-                </a:solidFill>
-              </a:defRPr>
-            </a:lvl1pPr>
-          </a:lstStyle>
-          <a:p>
-            <a:pPr algn="r"/>
-            <a:fld id="{F7021451-1387-4CA6-816F-3879F97B5CBC}" type="slidenum">
-              <a:rPr b="0" lang="en-US"/>
               <a:t>9</a:t>
             </a:fld>
             <a:endParaRPr lang="en-US"/>
@@ -25987,7 +26733,7 @@
     </a:clrScheme>
     <a:fontScheme name="Office">
       <a:majorFont>
-        <a:latin typeface="Cambria"/>
+        <a:latin typeface="Calibri"/>
         <a:ea typeface=""/>
         <a:cs typeface=""/>
         <a:font script="Jpan" typeface="游ゴシック Light"/>

--- a/docs/CrossMEP_CIBW78_talk.pptx
+++ b/docs/CrossMEP_CIBW78_talk.pptx
@@ -127,19 +127,19 @@
   <p:extLst>
     <p:ext uri="{521415D9-36F7-43E2-AB2F-B90AF26B5E84}">
       <p14:sectionLst xmlns:p14="http://schemas.microsoft.com/office/powerpoint/2010/main">
-        <p14:section name="Opening" id="{4ba9412d-72b2-c3d6-8d40-587955bf9c75}">
+        <p14:section name="Opening" id="{e65f3c1d-c380-a6a4-18a6-b977126011d9}">
           <p14:sldIdLst>
             <p14:sldId id="256"/>
           </p14:sldIdLst>
         </p14:section>
-        <p14:section name="Motivation" id="{5101bc50-b2ec-a1ab-70fe-49adc88418bf}">
+        <p14:section name="Motivation" id="{acade001-3c0d-0fd1-29c9-67a0ea581c0a}">
           <p14:sldIdLst>
             <p14:sldId id="257"/>
             <p14:sldId id="258"/>
             <p14:sldId id="259"/>
           </p14:sldIdLst>
         </p14:section>
-        <p14:section name="The dataset" id="{be418935-f5f2-dec0-23f7-db9e5066ccef}">
+        <p14:section name="The dataset" id="{73343f88-bc53-41b1-4bc8-3d900e2eb1a0}">
           <p14:sldIdLst>
             <p14:sldId id="260"/>
             <p14:sldId id="261"/>
@@ -148,14 +148,14 @@
             <p14:sldId id="264"/>
           </p14:sldIdLst>
         </p14:section>
-        <p14:section name="Experiments" id="{2bd65c4c-b1fc-1921-b425-34a5bae00738}">
+        <p14:section name="Experiments" id="{6442129f-f8dd-e9ff-355e-54e88ca28ae0}">
           <p14:sldIdLst>
             <p14:sldId id="265"/>
             <p14:sldId id="266"/>
             <p14:sldId id="267"/>
           </p14:sldIdLst>
         </p14:section>
-        <p14:section name="Use" id="{ad95764a-de7c-b336-ff4d-51ccc51f8cac}">
+        <p14:section name="Use" id="{3d1e51c7-5c52-9a6e-8d81-dac0c0239b26}">
           <p14:sldIdLst>
             <p14:sldId id="268"/>
             <p14:sldId id="269"/>
@@ -163,7 +163,7 @@
             <p14:sldId id="271"/>
           </p14:sldIdLst>
         </p14:section>
-        <p14:section name="Appendix" id="{cf67def0-fc7c-8476-6df5-32113d772a2f}">
+        <p14:section name="Appendix" id="{7eceff1c-2356-f682-60b2-f5e3c18d4de1}">
           <p14:sldIdLst>
             <p14:sldId id="272"/>
             <p14:sldId id="273"/>
@@ -1971,7 +1971,7 @@
           <a:p>
             <a:r>
               <a:rPr lang="en-US" dirty="0"/>
-              <a:t>Hello, I'm Lavinia Pedrollo from Stanford's Center for Integrated Facility Engineering. This is CrossMEP, joint work with David Gvadzabia, Torben Graeber and Martin Fischer: a dataset of the problems a support designer solves, made for training and testing methods that design MEP supports. (0:00)</a:t>
+              <a:t>Hello everyone, I'm Lavinia Pedrollo from Stanford's Center for Integrated Facility Engineering. Today I'll show you CrossMEP, built with David Gvadzabia, Torben Graeber and Martin Fischer. It's a dataset of the problems a support designer solves, made so we can train and test methods that design MEP supports. (0:00)</a:t>
             </a:r>
             <a:endParaRPr lang="en-US" dirty="0"/>
           </a:p>
@@ -2059,7 +2059,7 @@
           <a:p>
             <a:r>
               <a:rPr lang="en-US" dirty="0"/>
-              <a:t>The first experiment is a design check, not a discovery: does difficulty grow with the tier, as intended? The count is fixed by construction; load and congestion follow from the rules, so this shows the dataset behaves as designed. Load at the support rises at every step, from 0.1 to 1.7 kilonewtons. The closest gap falls from 120 to about 62 millimetres, but widens again at C6, where the generator starts stacking in two or three rows. So report methods tier by tier. (4:55)</a:t>
+              <a:t>Now three experiments. The first is a design check, not a discovery: does difficulty grow with the tier? The count is fixed by construction, and load and congestion follow from the rules, so this shows the dataset behaves as designed. The load at the support rises at every step, from 0.1 to 1.7 kilonewtons. The closest gap shrinks from 120 to about 62 millimeters, but widens again at C6, where elements start stacking in two or three rows. So: report methods tier by tier. (4:50)</a:t>
             </a:r>
             <a:endParaRPr lang="en-US" dirty="0"/>
           </a:p>
@@ -2147,7 +2147,7 @@
           <a:p>
             <a:r>
               <a:rPr lang="en-US" dirty="0"/>
-              <a:t>The second experiment is the one the generator could fail: is the spacing realistic in a building it never saw? The gap distribution was fitted on a residential duplex from buildingSMART. We held out a second open building, a medical-dental clinic, which is a real building, cut it into sections every 250 millimetres, the way a context is defined, and measured the gap between pipes running side by side. On the left, the clinic: the generated gaps are close to the measured ones, though not identical. On the right, the distances: generated to clinic 28 millimetres. That is above the 8 a perfect generator would show, so not a perfect match, but about as close as the duplex's own two models are to each other. A fixed gap at the 25 millimetre minimum would be about 190 millimetres off. (5:30)</a:t>
+              <a:t>The second experiment is the one the generator could fail. Is the spacing realistic in a building it has never seen? The gap distribution was fitted on a residential duplex. We kept a second open building aside, a medical-dental clinic, cut it into sections every 250 millimeters, the way a context is defined, and measured the gaps between pipes running side by side. On the left, the clinic: generated gaps are close to measured ones, though not identical. On the right, the distances. Generator to clinic: 28 millimeters. That is above the 8 a perfect generator would show, so not a perfect match, but about as close as the duplex's own two models are to each other. A fixed 25-millimeter gap would be about 190 off. (5:25)</a:t>
             </a:r>
             <a:endParaRPr lang="en-US" dirty="0"/>
           </a:p>
@@ -2235,7 +2235,7 @@
           <a:p>
             <a:r>
               <a:rPr lang="en-US" dirty="0"/>
-              <a:t>The third is a use of the dataset, not a test of it: what must a catalog of clamps cover? Take the paper's two-size catalog as an illustration. It attaches 11.6 per cent of the pipes, interval 10 to 13, all of one size, DN40; load never binds, and trays, ducts and conduits are not covered at all. On the right is what the dataset asks of any catalog: two well-placed sizes attach 43 per cent, six 80, twelve every pipe. So 'what should the catalog contain' becomes a measurement. (6:25)</a:t>
+              <a:t>The third experiment is a use of the dataset, not a test of it: what must a catalog of clamps cover? Our paper's two-size catalog attaches 11.6 percent of the pipes, with an interval of 10 to 13, all one size, DN40. Load is never the limit, and trays, ducts and conduits aren't covered at all. On the right is what the dataset asks of any catalog: two well-placed sizes could attach 43 percent, six sizes 80, twelve sizes every pipe. So 'what should the catalog contain' becomes a measurement. (6:20)</a:t>
             </a:r>
             <a:endParaRPr lang="en-US" dirty="0"/>
           </a:p>
@@ -2323,7 +2323,7 @@
           <a:p>
             <a:r>
               <a:rPr lang="en-US" dirty="0"/>
-              <a:t>Here is what that means in practice. In the studio I choose what crosses the hanger: a tier, or an exact mix, and the seed. Out comes the section a support designer receives, drawn the way an engineer would issue it: every service at true size, its level below the slab, its load at the support, the closest clear gap; and the same run in 3D. Every section is a stored output of the released generator, with the Python call that reproduces it. [Live: switch to the studio, click C3, then Generate another twice, then Exact mix with a duct. If the demo fails, stay on this slide; slide 17 shows two more sections. Before the talk: open the studio once with internet, set its link sharing to public, scan the QR from a phone not logged in.] (7:00)</a:t>
+              <a:t>Let me show it. This is the Generator Studio. I choose what crosses the hanger, a tier or an exact mix, and a seed. Out comes the section a support designer receives, drawn the way an engineer would issue it: every service at true size, its level below the slab, its load, the closest clear gap, and the same run in 3D. Every section is a stored output of the released generator, with the Python call that reproduces it. Scan the code to try it yourself. [Live: switch to the studio, click C3, then Generate another twice, then Exact mix with a duct. If the demo fails, stay on this slide; slide 17 shows two more sections. Before the talk: open the studio once with internet, set its link sharing to public, scan the QR from a phone not logged in.] (6:55)</a:t>
             </a:r>
             <a:endParaRPr lang="en-US" dirty="0"/>
           </a:p>
@@ -2411,7 +2411,7 @@
           <a:p>
             <a:r>
               <a:rPr lang="en-US" dirty="0"/>
-              <a:t>Using it takes a few lines: load a split with the Python standard library, filter by composition, or generate your own mix with the same rules. Because there are no labels, the same files serve reinforcement learning, constraint-programming baselines and human benchmarking, and we ship the scoring: train on the generator, from C1 up to C8; evaluate on the benchmark, the same 125 contexts per tier for every method; report per tier with 95 per cent intervals and paired tests. (8:05)</a:t>
+              <a:t>Using it takes a few lines: load a split, filter by composition, or generate your own mix. Because there are no labels, the same files serve reinforcement learning, constraint programming, and benchmarking people. We ship the scoring too. Train on the generator, from C1 up to C8. Evaluate on the benchmark, the same 125 contexts per tier for every method. Report per tier, with 95 percent intervals and paired tests. (8:05)</a:t>
             </a:r>
             <a:endParaRPr lang="en-US" dirty="0"/>
           </a:p>
@@ -2499,7 +2499,7 @@
           <a:p>
             <a:r>
               <a:rPr lang="en-US" dirty="0"/>
-              <a:t>Its scope: one section at one support - routing, branches and spacing are outside it, although the span is recorded so a method can vary it. Realism is checked on sections of two open buildings; congested racks rest on practice and standards. The trade mix is a design choice, and the data is not for structural design. Next: a public checker for support designs, with best-known costs, so methods can be compared on the answer and not only on the brief; the catalog as an input, so a method is tested on catalogs it has never seen; and a real test set from commercial projects, with supports designed by engineers - which is where we would value your eye. (8:35)</a:t>
+              <a:t>A word on scope. CrossMEP is one section at one support. Routing and branches are outside it, but the span is recorded, so a method can vary it. Pipe spacing was checked on two open buildings; the rest rests on practice and standards, and the trade mix is a design choice. It's not for structural design of real installations. Next: a public checker, with best-known costs, so we can compare methods on the answer; the catalog as an input; and a real test set from commercial projects, with supports designed by engineers. That's where I'd value your eye. (8:35)</a:t>
             </a:r>
             <a:endParaRPr lang="en-US" dirty="0"/>
           </a:p>
@@ -2587,7 +2587,7 @@
           <a:p>
             <a:r>
               <a:rPr lang="en-US" dirty="0"/>
-              <a:t>CrossMEP is the brief, not the answer: 7,000 support-design problems, every constant traced to its source or declared a design choice, pipe gaps checked against two open buildings, and open. The QR code takes you to the data, the code, the gallery and the studio. Thank you. (9:25)</a:t>
+              <a:t>To sum up: CrossMEP is the brief, not the answer. Seven thousand support-design problems, every constant sourced or declared a design choice, pipe spacing checked on two open buildings, and all of it open. If you coordinate services or design supports, try the studio and tell me what looks wrong. Thank you. (9:15)</a:t>
             </a:r>
             <a:endParaRPr lang="en-US" dirty="0"/>
           </a:p>
@@ -2939,7 +2939,7 @@
           <a:p>
             <a:r>
               <a:rPr lang="en-US" dirty="0"/>
-              <a:t>A modular support system groups several MEP services - pipes, ducts, cable trays - onto one prefabricated frame, installed as one unit: a structural support assembly. A 200,000 square-foot hospital needs on the order of 10,000 of them, and each takes 20 minutes to two hours to design by hand: together about a quarter of the MEP design effort. These are practitioner estimates. (0:15)</a:t>
+              <a:t>Let's start with the problem. In this hospital, every red mark is a place where pipes, ducts or cable trays hang from the structure. A modular support system groups several services onto one prefabricated frame, installed as a single unit: a structural support assembly. A hospital of two hundred thousand square feet needs about ten thousand of them. Each takes twenty minutes to two hours to design by hand, roughly a quarter of the whole MEP design effort. These are practitioner estimates, but they give you the scale. (0:20)</a:t>
             </a:r>
             <a:endParaRPr lang="en-US" dirty="0"/>
           </a:p>
@@ -3203,7 +3203,7 @@
           <a:p>
             <a:r>
               <a:rPr lang="en-US" dirty="0"/>
-              <a:t>At ISARC we stated the task: given a fixed catalog of components and the MEP context - the services crossing the hanger and the surface they hang from - synthesize a feasible assembly. Design starts after coordination, from the section at each hanger, not from the whole model. Tools coordinate the model and check a design, but choosing the topology and the parts is still manual, because it rests on judgment, on rules that interact across thousands of combinations, and on catalogs that keep changing. The section at the hanger is the unit of that work, and the unit of our dataset. (0:40)</a:t>
+              <a:t>So what is the task? At ISARC we defined it like this. You're given a fixed catalog of components and the context: which services cross the hanger, and what they hang from. You must find a feasible assembly that carries them to the structure. Designers don't work from the whole model. They work from one section at each hanger, like this one. Today's tools help coordinate the model and check a design, but choosing the layout and the parts is still manual. It takes judgment, interacting rules, and ever-changing catalogs. That section is the unit of this work, and the unit of our dataset. (0:55)</a:t>
             </a:r>
             <a:endParaRPr lang="en-US" dirty="0"/>
           </a:p>
@@ -3291,7 +3291,7 @@
           <a:p>
             <a:r>
               <a:rPr lang="en-US" dirty="0"/>
-              <a:t>Learning-based methods for this task need many such sections, and none were public. Project models are proprietary, the open ones are not organised around supports, and any one project covers one narrow slice. So we built CrossMEP: 7,000 contexts with about 31,500 elements, stratified into eight tiers, deliberately unlabeled, with every constant traced to its source or declared a design choice, pipe gaps checked against open IFC buildings, and released openly with the generator. (1:25)</a:t>
+              <a:t>To teach a machine this, you need many examples, and there were none. Project models are proprietary, the open ones aren't organized around supports, and any one project is a narrow slice. So we built CrossMEP: seven thousand contexts, about thirty-one and a half thousand elements, in eight difficulty tiers. They are deliberately unlabeled: you get the problem, never the answer. Every constant is sourced or declared a design choice, and everything is open. (1:40)</a:t>
             </a:r>
             <a:endParaRPr lang="en-US" dirty="0"/>
           </a:p>
@@ -3379,7 +3379,7 @@
           <a:p>
             <a:r>
               <a:rPr lang="en-US" dirty="0"/>
-              <a:t>Here is one context. It is a 2-D section at one support location. Each element carries its kind, service and trade, its bare size, its insulation, its load per metre and the span it was sized at - so the load at this support - and its position along and out from the surface. Plus the surface itself: slab or wall, substrate, thickness. What is not in it is the support: no channel, no rods, no anchors, and no 'correct answer', because a feasible support depends on the catalog you build from. The context is the brief; the assembly is the answer. (1:55)</a:t>
+              <a:t>Here's one context: a two-dimensional section at one support location. Each element has its kind, service and trade, its size, its insulation, and its load, which is weight per metre times the span it was sized at, plus its position. Add the surface, a slab or a wall, and that's all. What you won't find is the support: no channel, no rods, no anchors, and no correct answer, because a feasible support depends on the catalog you build from. The context is the brief. The assembly is the answer. (2:10)</a:t>
             </a:r>
             <a:endParaRPr lang="en-US" dirty="0"/>
           </a:p>
@@ -3467,7 +3467,7 @@
           <a:p>
             <a:r>
               <a:rPr lang="en-US" dirty="0"/>
-              <a:t>How is a context made? Not by free randomness: by rules you would recognise. The tier fixes the number of elements. We pick the surface. We fill the count with services the way trades actually run - hot and cold together, flow and return together, conduits in groups. Bulky services go nearest the slab: ducts, then containment, then pipes. Gaps between neighbours are drawn from gaps measured on a built project, with a 25 millimetre minimum, plus a small stagger within rows; on walls, electrical stays above water. Finally every context is checked - every pair at least 25 millimetres clear - and it is seeded: the same seed gives the same file, byte for byte. (2:35)</a:t>
+              <a:t>How do we make a context? Not by free randomness, but by rules an engineer would recognize. The tier fixes how many elements there are. We pick the surface and fill it the way trades really run services: hot and cold together, flow and return together, conduits in groups, bulky services nearest the slab. Gaps between neighbors are drawn from gaps measured on a built project, never below twenty-five millimeters. On walls, electrical stays above water. Every context is checked, and it's seeded: the same seed gives the same file, byte for byte. (2:45)</a:t>
             </a:r>
             <a:endParaRPr lang="en-US" dirty="0"/>
           </a:p>
@@ -3555,7 +3555,7 @@
           <a:p>
             <a:r>
               <a:rPr lang="en-US" dirty="0"/>
-              <a:t>Every number in a context comes from a cited source or a declared design choice. Pipes from EN 10220 and 10255, filled with water, at ASME B31.1 water-service spans; insulation from the German GEG and a condensation-control schedule; trays at IEC 61537 widths, loaded full; ducts at EN sizes with a manufacturer weight table; conduits at IEC 61386 sizes with 40 per cent fill. Loads are computed from these in the code, and choices such as the trade mix are labelled as design choices. (3:20)</a:t>
+              <a:t>Where do the numbers come from? Each comes from a cited source or is declared a design choice. Pipes follow the European steel pipe standards, filled with water, at ASME B31.1 spans. Insulation follows the German GEG, and a condensation schedule for chilled water. Trays and conduits follow IEC standards, ducts European sizes with a manufacturer's weight table. Loads are computed in code, and pure choices, like the trade mix, are labeled as choices. (3:25)</a:t>
             </a:r>
             <a:endParaRPr lang="en-US" dirty="0"/>
           </a:p>
@@ -3643,7 +3643,7 @@
           <a:p>
             <a:r>
               <a:rPr lang="en-US" dirty="0"/>
-              <a:t>The release has four splits on disjoint seeds: 5,000 contexts for training, 500 for validation, 500 for test, and a 1,000-context benchmark with 125 per tier. 31,484 elements in total - mostly pipes, then conduits, trays and ducts; pipe sizes from DN15 to DN100, mostly small bore, as in the measured project. Four in five contexts hang from a ceiling, one in five from a wall, and electrical containment is the largest trade by count. Everything is plain JSON with a schema, metadata and a datasheet. (3:55)</a:t>
+              <a:t>The release has four splits on disjoint seeds, so a method is never tested on what it trained on: five thousand contexts for training, five hundred each for validation and test, and a benchmark of one thousand, a hundred and twenty-five per tier. Mostly pipes, then conduits, trays and ducts. Four in five hang from a ceiling, one in five from a wall. Everything is plain JSON with a schema and a datasheet. (3:55)</a:t>
             </a:r>
             <a:endParaRPr lang="en-US" dirty="0"/>
           </a:p>
@@ -3731,7 +3731,7 @@
           <a:p>
             <a:r>
               <a:rPr lang="en-US" dirty="0"/>
-              <a:t>This is what the data looks like: one benchmark context per tier. C1 is a single element - the most common support in any building. By C8 you have eight services on three rows. Within a tier everything else varies - kinds, trades, surfaces and stacking - so the element count is the one controlled difficulty axis. Note the walls: the section rotates, and electrical sits above water. (4:30)</a:t>
+              <a:t>Here's one benchmark context per tier. C1 is a single element, the most common support in any building. By C8 you have eight services on three rows. Within a tier everything else varies: kinds, trades, surfaces, stacking. So the element count is the one controlled axis of difficulty. And notice the walls: the section rotates, and electrical sits above water. (4:25)</a:t>
             </a:r>
             <a:endParaRPr lang="en-US" dirty="0"/>
           </a:p>

--- a/docs/CrossMEP_CIBW78_talk.pptx
+++ b/docs/CrossMEP_CIBW78_talk.pptx
@@ -127,19 +127,19 @@
   <p:extLst>
     <p:ext uri="{521415D9-36F7-43E2-AB2F-B90AF26B5E84}">
       <p14:sectionLst xmlns:p14="http://schemas.microsoft.com/office/powerpoint/2010/main">
-        <p14:section name="Opening" id="{e65f3c1d-c380-a6a4-18a6-b977126011d9}">
+        <p14:section name="Opening" id="{4e27408b-89b1-49b7-d13f-4a7a61d8a484}">
           <p14:sldIdLst>
             <p14:sldId id="256"/>
           </p14:sldIdLst>
         </p14:section>
-        <p14:section name="Motivation" id="{acade001-3c0d-0fd1-29c9-67a0ea581c0a}">
+        <p14:section name="Motivation" id="{be1eb483-1da7-b5a9-df59-dc2c937fb447}">
           <p14:sldIdLst>
             <p14:sldId id="257"/>
             <p14:sldId id="258"/>
             <p14:sldId id="259"/>
           </p14:sldIdLst>
         </p14:section>
-        <p14:section name="The dataset" id="{73343f88-bc53-41b1-4bc8-3d900e2eb1a0}">
+        <p14:section name="The dataset" id="{d5581d54-24e7-c1a7-196e-a250db613ccb}">
           <p14:sldIdLst>
             <p14:sldId id="260"/>
             <p14:sldId id="261"/>
@@ -148,14 +148,14 @@
             <p14:sldId id="264"/>
           </p14:sldIdLst>
         </p14:section>
-        <p14:section name="Experiments" id="{6442129f-f8dd-e9ff-355e-54e88ca28ae0}">
+        <p14:section name="Experiments" id="{437b6458-ef8d-1a1a-ab56-424bd354df7a}">
           <p14:sldIdLst>
             <p14:sldId id="265"/>
             <p14:sldId id="266"/>
             <p14:sldId id="267"/>
           </p14:sldIdLst>
         </p14:section>
-        <p14:section name="Use" id="{3d1e51c7-5c52-9a6e-8d81-dac0c0239b26}">
+        <p14:section name="Use" id="{396ec00b-1b79-9267-fcad-67ca0a727990}">
           <p14:sldIdLst>
             <p14:sldId id="268"/>
             <p14:sldId id="269"/>
@@ -163,7 +163,7 @@
             <p14:sldId id="271"/>
           </p14:sldIdLst>
         </p14:section>
-        <p14:section name="Appendix" id="{7eceff1c-2356-f682-60b2-f5e3c18d4de1}">
+        <p14:section name="Appendix" id="{12241547-dc0d-39ab-e9cf-83eff5387825}">
           <p14:sldIdLst>
             <p14:sldId id="272"/>
             <p14:sldId id="273"/>
@@ -1971,7 +1971,7 @@
           <a:p>
             <a:r>
               <a:rPr lang="en-US" dirty="0"/>
-              <a:t>Hello everyone, I'm Lavinia Pedrollo from Stanford's Center for Integrated Facility Engineering. Today I'll show you CrossMEP, built with David Gvadzabia, Torben Graeber and Martin Fischer. It's a dataset of the problems a support designer solves, made so we can train and test methods that design MEP supports. (0:00)</a:t>
+              <a:t>Next time you're in a hospital, look up. Above the ceiling, pipes, ducts and cable trays run in every direction, and not one of them floats. Each hangs from a support that an engineer designed by hand, one at a time. And until now, there was no public data to teach a machine to do that. I'm Lavinia Pedrollo, from Stanford, and with David Gvadzabia, Torben Graeber and Martin Fischer, we built that data: CrossMEP. (0:00)</a:t>
             </a:r>
             <a:endParaRPr lang="en-US" dirty="0"/>
           </a:p>
@@ -2059,7 +2059,7 @@
           <a:p>
             <a:r>
               <a:rPr lang="en-US" dirty="0"/>
-              <a:t>Now three experiments. The first is a design check, not a discovery: does difficulty grow with the tier? The count is fixed by construction, and load and congestion follow from the rules, so this shows the dataset behaves as designed. The load at the support rises at every step, from 0.1 to 1.7 kilonewtons. The closest gap shrinks from 120 to about 62 millimeters, but widens again at C6, where elements start stacking in two or three rows. So: report methods tier by tier. (4:50)</a:t>
+              <a:t>Now three experiments. The first is a design check, not a discovery: does difficulty grow with the tier? The count is fixed by construction, and load and congestion follow from the rules, so this shows the dataset behaves as designed. The load at the support rises at every step, from 0.1 to 1.7 kilonewtons. The closest gap shrinks from 120 to about 62 millimeters, but widens again at C6, where elements start stacking in two or three rows. So: report methods tier by tier. (5:00)</a:t>
             </a:r>
             <a:endParaRPr lang="en-US" dirty="0"/>
           </a:p>
@@ -2147,7 +2147,7 @@
           <a:p>
             <a:r>
               <a:rPr lang="en-US" dirty="0"/>
-              <a:t>The second experiment is the one the generator could fail. Is the spacing realistic in a building it has never seen? The gap distribution was fitted on a residential duplex. We kept a second open building aside, a medical-dental clinic, cut it into sections every 250 millimeters, the way a context is defined, and measured the gaps between pipes running side by side. On the left, the clinic: generated gaps are close to measured ones, though not identical. On the right, the distances. Generator to clinic: 28 millimeters. That is above the 8 a perfect generator would show, so not a perfect match, but about as close as the duplex's own two models are to each other. A fixed 25-millimeter gap would be about 190 off. (5:25)</a:t>
+              <a:t>The second experiment is the one the generator could fail. Is the spacing realistic in a building it has never seen? The gap distribution was fitted on a residential duplex. We kept a second open building aside, a medical-dental clinic, cut it into sections every 250 millimeters, the way a context is defined, and measured the gaps between pipes running side by side. On the left, the clinic: generated gaps are close to measured ones, though not identical. On the right, the distances. Generator to clinic: 28 millimeters. That is above the 8 a perfect generator would show, so not a perfect match, but about as close as the duplex's own two models are to each other. A fixed 25-millimeter gap would be about 190 off. (5:35)</a:t>
             </a:r>
             <a:endParaRPr lang="en-US" dirty="0"/>
           </a:p>
@@ -2235,7 +2235,7 @@
           <a:p>
             <a:r>
               <a:rPr lang="en-US" dirty="0"/>
-              <a:t>The third experiment is a use of the dataset, not a test of it: what must a catalog of clamps cover? Our paper's two-size catalog attaches 11.6 percent of the pipes, with an interval of 10 to 13, all one size, DN40. Load is never the limit, and trays, ducts and conduits aren't covered at all. On the right is what the dataset asks of any catalog: two well-placed sizes could attach 43 percent, six sizes 80, twelve sizes every pipe. So 'what should the catalog contain' becomes a measurement. (6:20)</a:t>
+              <a:t>The third experiment is a use of the dataset, not a test of it: what must a catalog of clamps cover? Our paper's two-size catalog attaches 11.6 percent of the pipes, with an interval of 10 to 13, all one size, DN40. Load is never the limit, and trays, ducts and conduits aren't covered at all. On the right is what the dataset asks of any catalog: two well-placed sizes could attach 43 percent, six sizes 80, twelve sizes every pipe. So 'what should the catalog contain' becomes a measurement. (6:25)</a:t>
             </a:r>
             <a:endParaRPr lang="en-US" dirty="0"/>
           </a:p>
@@ -2323,7 +2323,7 @@
           <a:p>
             <a:r>
               <a:rPr lang="en-US" dirty="0"/>
-              <a:t>Let me show it. This is the Generator Studio. I choose what crosses the hanger, a tier or an exact mix, and a seed. Out comes the section a support designer receives, drawn the way an engineer would issue it: every service at true size, its level below the slab, its load, the closest clear gap, and the same run in 3D. Every section is a stored output of the released generator, with the Python call that reproduces it. Scan the code to try it yourself. [Live: switch to the studio, click C3, then Generate another twice, then Exact mix with a duct. If the demo fails, stay on this slide; slide 17 shows two more sections. Before the talk: open the studio once with internet, set its link sharing to public, scan the QR from a phone not logged in.] (6:55)</a:t>
+              <a:t>Let me show it. This is the Generator Studio. I choose what crosses the hanger, a tier or an exact mix, and a seed. Out comes the section a support designer receives, drawn the way an engineer would issue it: every service at true size, its level below the slab, its load, the closest clear gap, and the same run in 3D. Every section is a stored output of the released generator, with the Python call that reproduces it. Scan the code to try it yourself. [Live: switch to the studio, click C3, then Generate another twice, then Exact mix with a duct. If the demo fails, stay on this slide; slide 17 shows two more sections. Before the talk: open the studio once with internet, set its link sharing to public, scan the QR from a phone not logged in.] (7:05)</a:t>
             </a:r>
             <a:endParaRPr lang="en-US" dirty="0"/>
           </a:p>
@@ -2411,7 +2411,7 @@
           <a:p>
             <a:r>
               <a:rPr lang="en-US" dirty="0"/>
-              <a:t>Using it takes a few lines: load a split, filter by composition, or generate your own mix. Because there are no labels, the same files serve reinforcement learning, constraint programming, and benchmarking people. We ship the scoring too. Train on the generator, from C1 up to C8. Evaluate on the benchmark, the same 125 contexts per tier for every method. Report per tier, with 95 percent intervals and paired tests. (8:05)</a:t>
+              <a:t>Using it takes a few lines: load a split, filter by composition, or generate your own mix. Because there are no labels, the same files serve reinforcement learning, constraint programming, and benchmarking people. We ship the scoring too. Train on the generator, from C1 up to C8. Evaluate on the benchmark, the same 125 contexts per tier for every method. Report per tier, with 95 percent intervals and paired tests. (8:15)</a:t>
             </a:r>
             <a:endParaRPr lang="en-US" dirty="0"/>
           </a:p>
@@ -2499,7 +2499,7 @@
           <a:p>
             <a:r>
               <a:rPr lang="en-US" dirty="0"/>
-              <a:t>A word on scope. CrossMEP is one section at one support. Routing and branches are outside it, but the span is recorded, so a method can vary it. Pipe spacing was checked on two open buildings; the rest rests on practice and standards, and the trade mix is a design choice. It's not for structural design of real installations. Next: a public checker, with best-known costs, so we can compare methods on the answer; the catalog as an input; and a real test set from commercial projects, with supports designed by engineers. That's where I'd value your eye. (8:35)</a:t>
+              <a:t>A word on scope. CrossMEP is one section at one support. Routing and branches are outside it, but the span is recorded, so a method can vary it. Pipe spacing was checked on two open buildings; the rest rests on practice and standards, and the trade mix is a design choice. It's not for structural design of real installations. Next: a public checker, with best-known costs, so we can compare methods on the answer; the catalog as an input; and a real test set from commercial projects, with supports designed by engineers. That's where I'd value your eye. (8:45)</a:t>
             </a:r>
             <a:endParaRPr lang="en-US" dirty="0"/>
           </a:p>
@@ -2587,7 +2587,7 @@
           <a:p>
             <a:r>
               <a:rPr lang="en-US" dirty="0"/>
-              <a:t>To sum up: CrossMEP is the brief, not the answer. Seven thousand support-design problems, every constant sourced or declared a design choice, pipe spacing checked on two open buildings, and all of it open. If you coordinate services or design supports, try the studio and tell me what looks wrong. Thank you. (9:15)</a:t>
+              <a:t>To sum up: CrossMEP is the brief, not the answer. Seven thousand support-design problems, every constant sourced or declared a design choice, pipe spacing checked on two open buildings, and all of it open. If you coordinate services or design supports, try the studio and tell me what looks wrong. Thank you. (9:25)</a:t>
             </a:r>
             <a:endParaRPr lang="en-US" dirty="0"/>
           </a:p>
@@ -2939,7 +2939,7 @@
           <a:p>
             <a:r>
               <a:rPr lang="en-US" dirty="0"/>
-              <a:t>Let's start with the problem. In this hospital, every red mark is a place where pipes, ducts or cable trays hang from the structure. A modular support system groups several services onto one prefabricated frame, installed as a single unit: a structural support assembly. A hospital of two hundred thousand square feet needs about ten thousand of them. Each takes twenty minutes to two hours to design by hand, roughly a quarter of the whole MEP design effort. These are practitioner estimates, but they give you the scale. (0:20)</a:t>
+              <a:t>Here's what that looks like. In this hospital, every red mark is a place where pipes, ducts or cable trays hang from the structure. A modular support system groups several services onto one prefabricated frame, installed as a single unit: a structural support assembly. A hospital of two hundred thousand square feet needs about ten thousand of them. Each takes twenty minutes to two hours to design by hand, roughly a quarter of the whole MEP design effort. These are practitioner estimates. (0:30)</a:t>
             </a:r>
             <a:endParaRPr lang="en-US" dirty="0"/>
           </a:p>
@@ -3203,7 +3203,7 @@
           <a:p>
             <a:r>
               <a:rPr lang="en-US" dirty="0"/>
-              <a:t>So what is the task? At ISARC we defined it like this. You're given a fixed catalog of components and the context: which services cross the hanger, and what they hang from. You must find a feasible assembly that carries them to the structure. Designers don't work from the whole model. They work from one section at each hanger, like this one. Today's tools help coordinate the model and check a design, but choosing the layout and the parts is still manual. It takes judgment, interacting rules, and ever-changing catalogs. That section is the unit of this work, and the unit of our dataset. (0:55)</a:t>
+              <a:t>So what is the task? At ISARC we defined it like this. You're given a fixed catalog of components and the context: which services cross the hanger, and what they hang from. You must find a feasible assembly that carries them to the structure. Designers don't work from the whole model. They work from one section at each hanger, like this one. Today's tools help coordinate the model and check a design, but choosing the layout and the parts is still manual. It takes judgment, interacting rules, and ever-changing catalogs. That section is the unit of this work, and the unit of our dataset. (1:05)</a:t>
             </a:r>
             <a:endParaRPr lang="en-US" dirty="0"/>
           </a:p>
@@ -3291,7 +3291,7 @@
           <a:p>
             <a:r>
               <a:rPr lang="en-US" dirty="0"/>
-              <a:t>To teach a machine this, you need many examples, and there were none. Project models are proprietary, the open ones aren't organized around supports, and any one project is a narrow slice. So we built CrossMEP: seven thousand contexts, about thirty-one and a half thousand elements, in eight difficulty tiers. They are deliberately unlabeled: you get the problem, never the answer. Every constant is sourced or declared a design choice, and everything is open. (1:40)</a:t>
+              <a:t>To teach a machine this, you need many examples, and there were none. Project models are proprietary, the open ones aren't organized around supports, and any one project is a narrow slice. So we built CrossMEP: seven thousand contexts, about thirty-one and a half thousand elements, in eight difficulty tiers. They are deliberately unlabeled: you get the problem, never the answer. Every constant is sourced or declared a design choice, and everything is open. (1:50)</a:t>
             </a:r>
             <a:endParaRPr lang="en-US" dirty="0"/>
           </a:p>
@@ -3379,7 +3379,7 @@
           <a:p>
             <a:r>
               <a:rPr lang="en-US" dirty="0"/>
-              <a:t>Here's one context: a two-dimensional section at one support location. Each element has its kind, service and trade, its size, its insulation, and its load, which is weight per metre times the span it was sized at, plus its position. Add the surface, a slab or a wall, and that's all. What you won't find is the support: no channel, no rods, no anchors, and no correct answer, because a feasible support depends on the catalog you build from. The context is the brief. The assembly is the answer. (2:10)</a:t>
+              <a:t>Here's one context: a two-dimensional section at one support location. Each element has its kind, service and trade, its size, its insulation, and its load, which is weight per metre times the span it was sized at, plus its position. Add the surface, a slab or a wall, and that's all. What you won't find is the support: no channel, no rods, no anchors, and no correct answer, because a feasible support depends on the catalog you build from. The context is the brief. The assembly is the answer. (2:20)</a:t>
             </a:r>
             <a:endParaRPr lang="en-US" dirty="0"/>
           </a:p>
@@ -3467,7 +3467,7 @@
           <a:p>
             <a:r>
               <a:rPr lang="en-US" dirty="0"/>
-              <a:t>How do we make a context? Not by free randomness, but by rules an engineer would recognize. The tier fixes how many elements there are. We pick the surface and fill it the way trades really run services: hot and cold together, flow and return together, conduits in groups, bulky services nearest the slab. Gaps between neighbors are drawn from gaps measured on a built project, never below twenty-five millimeters. On walls, electrical stays above water. Every context is checked, and it's seeded: the same seed gives the same file, byte for byte. (2:45)</a:t>
+              <a:t>How do we make a context? Not by free randomness, but by rules an engineer would recognize. The tier fixes how many elements there are. We pick the surface and fill it the way trades really run services: hot and cold together, flow and return together, conduits in groups, bulky services nearest the slab. Gaps between neighbors are drawn from gaps measured on a built project, never below twenty-five millimeters. On walls, electrical stays above water. Every context is checked, and it's seeded: the same seed gives the same file, byte for byte. (2:55)</a:t>
             </a:r>
             <a:endParaRPr lang="en-US" dirty="0"/>
           </a:p>
@@ -3555,7 +3555,7 @@
           <a:p>
             <a:r>
               <a:rPr lang="en-US" dirty="0"/>
-              <a:t>Where do the numbers come from? Each comes from a cited source or is declared a design choice. Pipes follow the European steel pipe standards, filled with water, at ASME B31.1 spans. Insulation follows the German GEG, and a condensation schedule for chilled water. Trays and conduits follow IEC standards, ducts European sizes with a manufacturer's weight table. Loads are computed in code, and pure choices, like the trade mix, are labeled as choices. (3:25)</a:t>
+              <a:t>Where do the numbers come from? Each comes from a cited source or is declared a design choice. Pipes follow the European steel pipe standards, filled with water, at ASME B31.1 spans. Insulation follows the German GEG, and a condensation schedule for chilled water. Trays and conduits follow IEC standards, ducts European sizes with a manufacturer's weight table. Loads are computed in code, and pure choices, like the trade mix, are labeled as choices. (3:35)</a:t>
             </a:r>
             <a:endParaRPr lang="en-US" dirty="0"/>
           </a:p>
@@ -3643,7 +3643,7 @@
           <a:p>
             <a:r>
               <a:rPr lang="en-US" dirty="0"/>
-              <a:t>The release has four splits on disjoint seeds, so a method is never tested on what it trained on: five thousand contexts for training, five hundred each for validation and test, and a benchmark of one thousand, a hundred and twenty-five per tier. Mostly pipes, then conduits, trays and ducts. Four in five hang from a ceiling, one in five from a wall. Everything is plain JSON with a schema and a datasheet. (3:55)</a:t>
+              <a:t>The release has four splits on disjoint seeds, so a method is never tested on what it trained on: five thousand contexts for training, five hundred each for validation and test, and a benchmark of one thousand, a hundred and twenty-five per tier. Mostly pipes, then conduits, trays and ducts. Four in five hang from a ceiling, one in five from a wall. Everything is plain JSON with a schema and a datasheet. (4:05)</a:t>
             </a:r>
             <a:endParaRPr lang="en-US" dirty="0"/>
           </a:p>
@@ -3731,7 +3731,7 @@
           <a:p>
             <a:r>
               <a:rPr lang="en-US" dirty="0"/>
-              <a:t>Here's one benchmark context per tier. C1 is a single element, the most common support in any building. By C8 you have eight services on three rows. Within a tier everything else varies: kinds, trades, surfaces, stacking. So the element count is the one controlled axis of difficulty. And notice the walls: the section rotates, and electrical sits above water. (4:25)</a:t>
+              <a:t>Here's one benchmark context per tier. C1 is a single element, the most common support in any building. By C8 you have eight services on three rows. Within a tier everything else varies: kinds, trades, surfaces, stacking. So the element count is the one controlled axis of difficulty. And notice the walls: the section rotates, and electrical sits above water. (4:35)</a:t>
             </a:r>
             <a:endParaRPr lang="en-US" dirty="0"/>
           </a:p>

--- a/docs/CrossMEP_CIBW78_talk.pptx
+++ b/docs/CrossMEP_CIBW78_talk.pptx
@@ -127,19 +127,19 @@
   <p:extLst>
     <p:ext uri="{521415D9-36F7-43E2-AB2F-B90AF26B5E84}">
       <p14:sectionLst xmlns:p14="http://schemas.microsoft.com/office/powerpoint/2010/main">
-        <p14:section name="Opening" id="{4e27408b-89b1-49b7-d13f-4a7a61d8a484}">
+        <p14:section name="Opening" id="{207b5f30-6313-e9f5-0728-a76c3984fcdc}">
           <p14:sldIdLst>
             <p14:sldId id="256"/>
           </p14:sldIdLst>
         </p14:section>
-        <p14:section name="Motivation" id="{be1eb483-1da7-b5a9-df59-dc2c937fb447}">
+        <p14:section name="Motivation" id="{73c61c99-1c51-9abc-2815-a7b8bf8fdc4d}">
           <p14:sldIdLst>
             <p14:sldId id="257"/>
             <p14:sldId id="258"/>
             <p14:sldId id="259"/>
           </p14:sldIdLst>
         </p14:section>
-        <p14:section name="The dataset" id="{d5581d54-24e7-c1a7-196e-a250db613ccb}">
+        <p14:section name="The dataset" id="{fdc4878a-4bc3-6df2-fe2c-7734f0f08d62}">
           <p14:sldIdLst>
             <p14:sldId id="260"/>
             <p14:sldId id="261"/>
@@ -148,14 +148,14 @@
             <p14:sldId id="264"/>
           </p14:sldIdLst>
         </p14:section>
-        <p14:section name="Experiments" id="{437b6458-ef8d-1a1a-ab56-424bd354df7a}">
+        <p14:section name="Experiments" id="{55266165-38ff-343a-ccc7-00b06895a68d}">
           <p14:sldIdLst>
             <p14:sldId id="265"/>
             <p14:sldId id="266"/>
             <p14:sldId id="267"/>
           </p14:sldIdLst>
         </p14:section>
-        <p14:section name="Use" id="{396ec00b-1b79-9267-fcad-67ca0a727990}">
+        <p14:section name="Use" id="{5719fcaa-7769-ea54-ba49-bd9e06b778bb}">
           <p14:sldIdLst>
             <p14:sldId id="268"/>
             <p14:sldId id="269"/>
@@ -163,7 +163,7 @@
             <p14:sldId id="271"/>
           </p14:sldIdLst>
         </p14:section>
-        <p14:section name="Appendix" id="{12241547-dc0d-39ab-e9cf-83eff5387825}">
+        <p14:section name="Appendix" id="{55675618-867e-8995-20a8-b9b7a4b21393}">
           <p14:sldIdLst>
             <p14:sldId id="272"/>
             <p14:sldId id="273"/>
@@ -1971,7 +1971,7 @@
           <a:p>
             <a:r>
               <a:rPr lang="en-US" dirty="0"/>
-              <a:t>Next time you're in a hospital, look up. Above the ceiling, pipes, ducts and cable trays run in every direction, and not one of them floats. Each hangs from a support that an engineer designed by hand, one at a time. And until now, there was no public data to teach a machine to do that. I'm Lavinia Pedrollo, from Stanford, and with David Gvadzabia, Torben Graeber and Martin Fischer, we built that data: CrossMEP. (0:00)</a:t>
+              <a:t>Hello everyone, I'm Lavinia Pedrollo, from Stanford. Every pipe, duct and cable tray in a building hangs from a support that an engineer designs by hand, from the section at that spot. We want to teach machines to do some of that work, and the first thing we found missing was data: there was no public set of support-design problems. So, with David Gvadzabia, Torben Graeber and Martin Fischer, we built one. It's called CrossMEP. (0:00)</a:t>
             </a:r>
             <a:endParaRPr lang="en-US" dirty="0"/>
           </a:p>

--- a/docs/CrossMEP_CIBW78_talk.pptx
+++ b/docs/CrossMEP_CIBW78_talk.pptx
@@ -127,19 +127,19 @@
   <p:extLst>
     <p:ext uri="{521415D9-36F7-43E2-AB2F-B90AF26B5E84}">
       <p14:sectionLst xmlns:p14="http://schemas.microsoft.com/office/powerpoint/2010/main">
-        <p14:section name="Opening" id="{207b5f30-6313-e9f5-0728-a76c3984fcdc}">
+        <p14:section name="Opening" id="{f619b1dd-9bde-542a-de63-f1b60ef8eebb}">
           <p14:sldIdLst>
             <p14:sldId id="256"/>
           </p14:sldIdLst>
         </p14:section>
-        <p14:section name="Motivation" id="{73c61c99-1c51-9abc-2815-a7b8bf8fdc4d}">
+        <p14:section name="Motivation" id="{bc2681ef-5355-a865-9fac-73b550e01649}">
           <p14:sldIdLst>
             <p14:sldId id="257"/>
             <p14:sldId id="258"/>
             <p14:sldId id="259"/>
           </p14:sldIdLst>
         </p14:section>
-        <p14:section name="The dataset" id="{fdc4878a-4bc3-6df2-fe2c-7734f0f08d62}">
+        <p14:section name="The dataset" id="{7e3d5f0c-e114-ec5d-91ea-19b92d958cf5}">
           <p14:sldIdLst>
             <p14:sldId id="260"/>
             <p14:sldId id="261"/>
@@ -148,14 +148,14 @@
             <p14:sldId id="264"/>
           </p14:sldIdLst>
         </p14:section>
-        <p14:section name="Experiments" id="{55266165-38ff-343a-ccc7-00b06895a68d}">
+        <p14:section name="Experiments" id="{227babb1-eddf-d202-4db9-5141d570910b}">
           <p14:sldIdLst>
             <p14:sldId id="265"/>
             <p14:sldId id="266"/>
             <p14:sldId id="267"/>
           </p14:sldIdLst>
         </p14:section>
-        <p14:section name="Use" id="{5719fcaa-7769-ea54-ba49-bd9e06b778bb}">
+        <p14:section name="Use" id="{380cd82d-b7dd-f40a-864f-1c98181bbe3d}">
           <p14:sldIdLst>
             <p14:sldId id="268"/>
             <p14:sldId id="269"/>
@@ -163,7 +163,7 @@
             <p14:sldId id="271"/>
           </p14:sldIdLst>
         </p14:section>
-        <p14:section name="Appendix" id="{55675618-867e-8995-20a8-b9b7a4b21393}">
+        <p14:section name="Appendix" id="{a007e22d-99f7-c498-1b46-2a31c895fc5c}">
           <p14:sldIdLst>
             <p14:sldId id="272"/>
             <p14:sldId id="273"/>
@@ -2059,7 +2059,7 @@
           <a:p>
             <a:r>
               <a:rPr lang="en-US" dirty="0"/>
-              <a:t>Now three experiments. The first is a design check, not a discovery: does difficulty grow with the tier? The count is fixed by construction, and load and congestion follow from the rules, so this shows the dataset behaves as designed. The load at the support rises at every step, from 0.1 to 1.7 kilonewtons. The closest gap shrinks from 120 to about 62 millimeters, but widens again at C6, where elements start stacking in two or three rows. So: report methods tier by tier. (5:00)</a:t>
+              <a:t>Now three analyses. The first is a design check, not a discovery: does difficulty grow with the tier? The count is fixed by construction, and load and congestion follow from the rules, so this shows the dataset behaves as designed. The load at the support rises at every step, from 0.1 to 1.7 kilonewtons. The closest gap shrinks from 120 to about 62 millimeters, but widens again at C6, where elements start stacking in two or three rows. So: report methods tier by tier. (4:50)</a:t>
             </a:r>
             <a:endParaRPr lang="en-US" dirty="0"/>
           </a:p>
@@ -2147,7 +2147,7 @@
           <a:p>
             <a:r>
               <a:rPr lang="en-US" dirty="0"/>
-              <a:t>The second experiment is the one the generator could fail. Is the spacing realistic in a building it has never seen? The gap distribution was fitted on a residential duplex. We kept a second open building aside, a medical-dental clinic, cut it into sections every 250 millimeters, the way a context is defined, and measured the gaps between pipes running side by side. On the left, the clinic: generated gaps are close to measured ones, though not identical. On the right, the distances. Generator to clinic: 28 millimeters. That is above the 8 a perfect generator would show, so not a perfect match, but about as close as the duplex's own two models are to each other. A fixed 25-millimeter gap would be about 190 off. (5:35)</a:t>
+              <a:t>The second analysis is the one the generator could fail. Is the spacing realistic in a building it has never seen? The gap distribution was fitted on a residential duplex. We kept a second open building aside, a medical-dental clinic, cut it into sections every 250 millimeters, the way a context is defined, and measured the gaps between pipes running side by side. On the left, the clinic: generated gaps are close to measured ones, though not identical. On the right, the distances. Generator to clinic: 28 millimeters. That is above the 8 a perfect generator would show, so not a perfect match, but about as close as the duplex's own two models are to each other. A fixed 25-millimeter gap would be about 190 off. (5:25)</a:t>
             </a:r>
             <a:endParaRPr lang="en-US" dirty="0"/>
           </a:p>
@@ -2235,7 +2235,7 @@
           <a:p>
             <a:r>
               <a:rPr lang="en-US" dirty="0"/>
-              <a:t>The third experiment is a use of the dataset, not a test of it: what must a catalog of clamps cover? Our paper's two-size catalog attaches 11.6 percent of the pipes, with an interval of 10 to 13, all one size, DN40. Load is never the limit, and trays, ducts and conduits aren't covered at all. On the right is what the dataset asks of any catalog: two well-placed sizes could attach 43 percent, six sizes 80, twelve sizes every pipe. So 'what should the catalog contain' becomes a measurement. (6:25)</a:t>
+              <a:t>The third analysis is a use of the dataset, not a test of it: what must a catalog of clamps cover? Our paper's two-size catalog attaches 11.6 percent of the pipes, with an interval of 10 to 13, all one size, DN40. Load is never the limit, and trays, ducts and conduits aren't covered at all. On the right is what the dataset asks of any catalog: two well-placed sizes could attach 43 percent, six sizes 80, twelve sizes every pipe. So 'what should the catalog contain' becomes a measurement. (6:15)</a:t>
             </a:r>
             <a:endParaRPr lang="en-US" dirty="0"/>
           </a:p>
@@ -2323,7 +2323,7 @@
           <a:p>
             <a:r>
               <a:rPr lang="en-US" dirty="0"/>
-              <a:t>Let me show it. This is the Generator Studio. I choose what crosses the hanger, a tier or an exact mix, and a seed. Out comes the section a support designer receives, drawn the way an engineer would issue it: every service at true size, its level below the slab, its load, the closest clear gap, and the same run in 3D. Every section is a stored output of the released generator, with the Python call that reproduces it. Scan the code to try it yourself. [Live: switch to the studio, click C3, then Generate another twice, then Exact mix with a duct. If the demo fails, stay on this slide; slide 17 shows two more sections. Before the talk: open the studio once with internet, set its link sharing to public, scan the QR from a phone not logged in.] (7:05)</a:t>
+              <a:t>Let me show it. This is the Generator Studio. I choose what crosses the hanger, a tier or an exact mix, and a seed. Out comes the section a support designer receives, drawn the way an engineer would issue it: every service at true size, its level below the slab, its load, the closest clear gap, and the same run in 3D. Every section is a stored output of the released generator, with the Python call that reproduces it. Scan the code to try it yourself. [Live: switch to the studio, click C3, then Generate another twice, then Exact mix with a duct. If the demo fails, stay on this slide; slide 17 shows two more sections. Before the talk: open the studio once with internet, set its link sharing to public, scan the QR from a phone not logged in.] (6:55)</a:t>
             </a:r>
             <a:endParaRPr lang="en-US" dirty="0"/>
           </a:p>
@@ -2411,7 +2411,7 @@
           <a:p>
             <a:r>
               <a:rPr lang="en-US" dirty="0"/>
-              <a:t>Using it takes a few lines: load a split, filter by composition, or generate your own mix. Because there are no labels, the same files serve reinforcement learning, constraint programming, and benchmarking people. We ship the scoring too. Train on the generator, from C1 up to C8. Evaluate on the benchmark, the same 125 contexts per tier for every method. Report per tier, with 95 percent intervals and paired tests. (8:15)</a:t>
+              <a:t>Using it takes a few lines: load a split, filter by composition, or generate your own mix. Because there are no labels, the same files serve reinforcement learning, constraint programming, and benchmarking people. We ship the scoring too. Train on the generator, from C1 up to C8. Evaluate on the benchmark, the same 125 contexts per tier for every method. Report per tier, with 95 percent intervals and paired tests. (8:05)</a:t>
             </a:r>
             <a:endParaRPr lang="en-US" dirty="0"/>
           </a:p>
@@ -2499,7 +2499,7 @@
           <a:p>
             <a:r>
               <a:rPr lang="en-US" dirty="0"/>
-              <a:t>A word on scope. CrossMEP is one section at one support. Routing and branches are outside it, but the span is recorded, so a method can vary it. Pipe spacing was checked on two open buildings; the rest rests on practice and standards, and the trade mix is a design choice. It's not for structural design of real installations. Next: a public checker, with best-known costs, so we can compare methods on the answer; the catalog as an input; and a real test set from commercial projects, with supports designed by engineers. That's where I'd value your eye. (8:45)</a:t>
+              <a:t>A word on scope. CrossMEP is one section at one support. Routing and branches are outside it, but the span is recorded, so a method can vary it. Pipe spacing was checked on two open buildings; the rest rests on practice and standards, and the trade mix is a design choice. It's not for structural design of real installations. Next: a public checker, with best-known costs, so we can compare methods on the answer; the catalog as an input; and a real test set from commercial projects, with supports designed by engineers. That's where I'd value your eye. (8:35)</a:t>
             </a:r>
             <a:endParaRPr lang="en-US" dirty="0"/>
           </a:p>
@@ -2587,7 +2587,7 @@
           <a:p>
             <a:r>
               <a:rPr lang="en-US" dirty="0"/>
-              <a:t>To sum up: CrossMEP is the brief, not the answer. Seven thousand support-design problems, every constant sourced or declared a design choice, pipe spacing checked on two open buildings, and all of it open. If you coordinate services or design supports, try the studio and tell me what looks wrong. Thank you. (9:25)</a:t>
+              <a:t>To sum up: CrossMEP is the brief, not the answer. Seven thousand support-design problems, every constant sourced or declared a design choice, pipe spacing checked on two open buildings, and all of it open. If you coordinate services or design supports, try the studio and tell me what looks wrong. Thank you. (9:15)</a:t>
             </a:r>
             <a:endParaRPr lang="en-US" dirty="0"/>
           </a:p>
@@ -3555,7 +3555,7 @@
           <a:p>
             <a:r>
               <a:rPr lang="en-US" dirty="0"/>
-              <a:t>Where do the numbers come from? Each comes from a cited source or is declared a design choice. Pipes follow the European steel pipe standards, filled with water, at ASME B31.1 spans. Insulation follows the German GEG, and a condensation schedule for chilled water. Trays and conduits follow IEC standards, ducts European sizes with a manufacturer's weight table. Loads are computed in code, and pure choices, like the trade mix, are labeled as choices. (3:35)</a:t>
+              <a:t>Where do the numbers come from? Three places. Sizes, weights and spans come from standards: European steel pipe and duct standards, IEC for conduits and trays, ASME for spans, the German GEG for insulation. How close neighbors sit comes from measured open buildings. And a few things are simply our choices, like the trade mix, and we label them that way. Loads are computed in code from all of this. (3:35)</a:t>
             </a:r>
             <a:endParaRPr lang="en-US" dirty="0"/>
           </a:p>
@@ -3643,7 +3643,7 @@
           <a:p>
             <a:r>
               <a:rPr lang="en-US" dirty="0"/>
-              <a:t>The release has four splits on disjoint seeds, so a method is never tested on what it trained on: five thousand contexts for training, five hundred each for validation and test, and a benchmark of one thousand, a hundred and twenty-five per tier. Mostly pipes, then conduits, trays and ducts. Four in five hang from a ceiling, one in five from a wall. Everything is plain JSON with a schema and a datasheet. (4:05)</a:t>
+              <a:t>The release has four splits on disjoint seeds, so a method is never tested on what it trained on: five thousand contexts for training, five hundred each for validation and test, and a benchmark of one thousand, a hundred and twenty-five per tier. Everything is plain JSON with a schema and a datasheet. (4:05)</a:t>
             </a:r>
             <a:endParaRPr lang="en-US" dirty="0"/>
           </a:p>
@@ -3731,7 +3731,7 @@
           <a:p>
             <a:r>
               <a:rPr lang="en-US" dirty="0"/>
-              <a:t>Here's one benchmark context per tier. C1 is a single element, the most common support in any building. By C8 you have eight services on three rows. Within a tier everything else varies: kinds, trades, surfaces, stacking. So the element count is the one controlled axis of difficulty. And notice the walls: the section rotates, and electrical sits above water. (4:35)</a:t>
+              <a:t>Here's one benchmark context per tier. C1 is a single element, the most common support in any building. By C8 you have eight services on three rows. Within a tier everything else varies: kinds, trades, surfaces, stacking. So the element count is the one controlled axis of difficulty. And notice the walls: the section rotates, and electrical sits above water. (4:25)</a:t>
             </a:r>
             <a:endParaRPr lang="en-US" dirty="0"/>
           </a:p>
@@ -24624,7 +24624,7 @@
                   <a:schemeClr val="tx1"/>
                 </a:solidFill>
               </a:rPr>
-              <a:t>Every constant carries a source and a status (verified, practice-cited, or a declared design choice) in the repository. Loads are derived in code from those sources, so each number can be traced and checked.</a:t>
+              <a:t>Three kinds of ground: standards (what each element is and weighs), measured open buildings (how close neighbours sit) and declared design choices (trade mix, surface mix, number of rows). Every constant carries its source and status in the repository.</a:t>
             </a:r>
             <a:endParaRPr lang="en-US" sz="1300" dirty="0"/>
           </a:p>

--- a/docs/CrossMEP_CIBW78_talk.pptx
+++ b/docs/CrossMEP_CIBW78_talk.pptx
@@ -127,19 +127,19 @@
   <p:extLst>
     <p:ext uri="{521415D9-36F7-43E2-AB2F-B90AF26B5E84}">
       <p14:sectionLst xmlns:p14="http://schemas.microsoft.com/office/powerpoint/2010/main">
-        <p14:section name="Opening" id="{f619b1dd-9bde-542a-de63-f1b60ef8eebb}">
+        <p14:section name="Opening" id="{cd55ca8e-65ae-d9cc-cbde-8d694977a650}">
           <p14:sldIdLst>
             <p14:sldId id="256"/>
           </p14:sldIdLst>
         </p14:section>
-        <p14:section name="Motivation" id="{bc2681ef-5355-a865-9fac-73b550e01649}">
+        <p14:section name="Motivation" id="{398e56f7-b272-22ad-397b-1c63fb8deb7d}">
           <p14:sldIdLst>
             <p14:sldId id="257"/>
             <p14:sldId id="258"/>
             <p14:sldId id="259"/>
           </p14:sldIdLst>
         </p14:section>
-        <p14:section name="The dataset" id="{7e3d5f0c-e114-ec5d-91ea-19b92d958cf5}">
+        <p14:section name="The dataset" id="{0f711070-7125-3e0f-fbc5-3ef5ce34b63c}">
           <p14:sldIdLst>
             <p14:sldId id="260"/>
             <p14:sldId id="261"/>
@@ -148,14 +148,14 @@
             <p14:sldId id="264"/>
           </p14:sldIdLst>
         </p14:section>
-        <p14:section name="Experiments" id="{227babb1-eddf-d202-4db9-5141d570910b}">
+        <p14:section name="Experiments" id="{7454a8f7-c38c-5428-c566-a382a6171289}">
           <p14:sldIdLst>
             <p14:sldId id="265"/>
             <p14:sldId id="266"/>
             <p14:sldId id="267"/>
           </p14:sldIdLst>
         </p14:section>
-        <p14:section name="Use" id="{380cd82d-b7dd-f40a-864f-1c98181bbe3d}">
+        <p14:section name="Use" id="{b954cbcf-8d57-270e-3fd0-5d5b8327e0fe}">
           <p14:sldIdLst>
             <p14:sldId id="268"/>
             <p14:sldId id="269"/>
@@ -163,7 +163,7 @@
             <p14:sldId id="271"/>
           </p14:sldIdLst>
         </p14:section>
-        <p14:section name="Appendix" id="{a007e22d-99f7-c498-1b46-2a31c895fc5c}">
+        <p14:section name="Appendix" id="{20d71cb3-5a9d-b9f6-85a9-517588e27e90}">
           <p14:sldIdLst>
             <p14:sldId id="272"/>
             <p14:sldId id="273"/>
@@ -23912,7 +23912,7 @@
                           <a:ea typeface="Calibri" pitchFamily="34" charset="-122"/>
                           <a:cs typeface="Calibri" pitchFamily="34" charset="-120"/>
                         </a:rPr>
-                        <a:t>IEC 61537 systems</a:t>
+                        <a:t>IEC 61537 systems, NEMA VE 1 widths</a:t>
                       </a:r>
                       <a:endParaRPr lang="en-US" sz="1200" dirty="0">
                         <a:latin typeface="Calibri" charset="0"/>
@@ -23977,7 +23977,7 @@
                           <a:ea typeface="Calibri" pitchFamily="34" charset="-122"/>
                           <a:cs typeface="Calibri" pitchFamily="34" charset="-120"/>
                         </a:rPr>
-                        <a:t>full tray: 50 kg/m at 300 mm datum, × 2.0 m</a:t>
+                        <a:t>full tray: 50 kg/m at 300 mm datum, × 2.0 m (NEMA VE 1 class span)</a:t>
                       </a:r>
                       <a:endParaRPr lang="en-US" sz="1200" dirty="0">
                         <a:latin typeface="Calibri" charset="0"/>
@@ -24174,7 +24174,7 @@
                           <a:ea typeface="Calibri" pitchFamily="34" charset="-122"/>
                           <a:cs typeface="Calibri" pitchFamily="34" charset="-120"/>
                         </a:rPr>
-                        <a:t>manufacturer duct-weight table incl. flanges, × 2.4 m</a:t>
+                        <a:t>manufacturer duct-weight table incl. flanges, × 2.4 m (SMACNA)</a:t>
                       </a:r>
                       <a:endParaRPr lang="en-US" sz="1200" dirty="0">
                         <a:latin typeface="Calibri" charset="0"/>
@@ -24371,7 +24371,7 @@
                           <a:ea typeface="Calibri" pitchFamily="34" charset="-122"/>
                           <a:cs typeface="Calibri" pitchFamily="34" charset="-120"/>
                         </a:rPr>
-                        <a:t>steel tube + 40 %-of-bore cable fill, × 2.0 m</a:t>
+                        <a:t>steel tube + 40 %-of-bore cable fill, × 2.0 m (IET / BS 7671)</a:t>
                       </a:r>
                       <a:endParaRPr lang="en-US" sz="1200" dirty="0">
                         <a:latin typeface="Calibri" charset="0"/>
@@ -24530,7 +24530,7 @@
                   <a:schemeClr val="tx1"/>
                 </a:solidFill>
               </a:rPr>
-              <a:t>Electrical kept above wet services on walls (drip)</a:t>
+              <a:t>Electrical kept above wet services on walls (drip; BS 7671 528.3.2)</a:t>
             </a:r>
             <a:endParaRPr lang="en-US" sz="1300" dirty="0"/>
           </a:p>
@@ -24624,7 +24624,7 @@
                   <a:schemeClr val="tx1"/>
                 </a:solidFill>
               </a:rPr>
-              <a:t>Three kinds of ground: standards (what each element is and weighs), measured open buildings (how close neighbours sit) and declared design choices (trade mix, surface mix, number of rows). Every constant carries its source and status in the repository.</a:t>
+              <a:t>Three kinds of ground: standards (what each element is and weighs), measured open buildings (how close neighbours sit) and declared design choices (trade mix, surface mix, number of rows). Every constant carries its source and status in the repository, and the log says why each standard was chosen over its alternatives.</a:t>
             </a:r>
             <a:endParaRPr lang="en-US" sz="1300" dirty="0"/>
           </a:p>

--- a/docs/CrossMEP_CIBW78_talk.pptx
+++ b/docs/CrossMEP_CIBW78_talk.pptx
@@ -127,19 +127,19 @@
   <p:extLst>
     <p:ext uri="{521415D9-36F7-43E2-AB2F-B90AF26B5E84}">
       <p14:sectionLst xmlns:p14="http://schemas.microsoft.com/office/powerpoint/2010/main">
-        <p14:section name="Opening" id="{cd55ca8e-65ae-d9cc-cbde-8d694977a650}">
+        <p14:section name="Opening" id="{3ecd03bf-27e8-cac9-d6fc-a4c6572562ce}">
           <p14:sldIdLst>
             <p14:sldId id="256"/>
           </p14:sldIdLst>
         </p14:section>
-        <p14:section name="Motivation" id="{398e56f7-b272-22ad-397b-1c63fb8deb7d}">
+        <p14:section name="Motivation" id="{47d5fc43-069d-ad00-3223-c7cb4e1e356f}">
           <p14:sldIdLst>
             <p14:sldId id="257"/>
             <p14:sldId id="258"/>
             <p14:sldId id="259"/>
           </p14:sldIdLst>
         </p14:section>
-        <p14:section name="The dataset" id="{0f711070-7125-3e0f-fbc5-3ef5ce34b63c}">
+        <p14:section name="The dataset" id="{cf077af1-df7b-ee94-fe34-93b4edc9517d}">
           <p14:sldIdLst>
             <p14:sldId id="260"/>
             <p14:sldId id="261"/>
@@ -148,14 +148,14 @@
             <p14:sldId id="264"/>
           </p14:sldIdLst>
         </p14:section>
-        <p14:section name="Experiments" id="{7454a8f7-c38c-5428-c566-a382a6171289}">
+        <p14:section name="Experiments" id="{6f77a037-3f3e-cf5c-b7be-10f2ed2d4500}">
           <p14:sldIdLst>
             <p14:sldId id="265"/>
             <p14:sldId id="266"/>
             <p14:sldId id="267"/>
           </p14:sldIdLst>
         </p14:section>
-        <p14:section name="Use" id="{b954cbcf-8d57-270e-3fd0-5d5b8327e0fe}">
+        <p14:section name="Use" id="{50420905-d810-d3e8-c453-8db36bb35d74}">
           <p14:sldIdLst>
             <p14:sldId id="268"/>
             <p14:sldId id="269"/>
@@ -163,7 +163,7 @@
             <p14:sldId id="271"/>
           </p14:sldIdLst>
         </p14:section>
-        <p14:section name="Appendix" id="{20d71cb3-5a9d-b9f6-85a9-517588e27e90}">
+        <p14:section name="Appendix" id="{f19a98a8-2692-b28d-8571-0f5c497b70f5}">
           <p14:sldIdLst>
             <p14:sldId id="272"/>
             <p14:sldId id="273"/>
@@ -296,16 +296,16 @@
                 <c:formatCode>General</c:formatCode>
                 <c:ptCount val="4"/>
                 <c:pt idx="0">
-                  <c:v>17984</c:v>
+                  <c:v>17573</c:v>
                 </c:pt>
                 <c:pt idx="1">
-                  <c:v>7617</c:v>
+                  <c:v>6257</c:v>
                 </c:pt>
                 <c:pt idx="2">
-                  <c:v>3975</c:v>
+                  <c:v>4237</c:v>
                 </c:pt>
                 <c:pt idx="3">
-                  <c:v>1908</c:v>
+                  <c:v>3417</c:v>
                 </c:pt>
               </c:numCache>
             </c:numRef>
@@ -533,9 +533,9 @@
           </c:dLbls>
           <c:cat>
             <c:multiLvlStrRef>
-              <c:f>Sheet1!$A$2:$A$10</c:f>
+              <c:f>Sheet1!$A$2:$A$12</c:f>
               <c:multiLvlStrCache>
-                <c:ptCount val="9"/>
+                <c:ptCount val="11"/>
                 <c:lvl>
                   <c:pt idx="0">
                     <c:v>DN15</c:v>
@@ -564,42 +564,54 @@
                   <c:pt idx="8">
                     <c:v>DN100</c:v>
                   </c:pt>
+                  <c:pt idx="9">
+                    <c:v>DN125</c:v>
+                  </c:pt>
+                  <c:pt idx="10">
+                    <c:v>DN150</c:v>
+                  </c:pt>
                 </c:lvl>
               </c:multiLvlStrCache>
             </c:multiLvlStrRef>
           </c:cat>
           <c:val>
             <c:numRef>
-              <c:f>Sheet1!$B$2:$B$10</c:f>
+              <c:f>Sheet1!$B$2:$B$12</c:f>
               <c:numCache>
                 <c:formatCode>General</c:formatCode>
-                <c:ptCount val="9"/>
+                <c:ptCount val="11"/>
                 <c:pt idx="0">
-                  <c:v>1495</c:v>
+                  <c:v>959</c:v>
                 </c:pt>
                 <c:pt idx="1">
-                  <c:v>2415</c:v>
+                  <c:v>1654</c:v>
                 </c:pt>
                 <c:pt idx="2">
-                  <c:v>3399</c:v>
+                  <c:v>2503</c:v>
                 </c:pt>
                 <c:pt idx="3">
-                  <c:v>3431</c:v>
+                  <c:v>2443</c:v>
                 </c:pt>
                 <c:pt idx="4">
-                  <c:v>1924</c:v>
+                  <c:v>2512</c:v>
                 </c:pt>
                 <c:pt idx="5">
-                  <c:v>1777</c:v>
+                  <c:v>2276</c:v>
                 </c:pt>
                 <c:pt idx="6">
-                  <c:v>1804</c:v>
+                  <c:v>1308</c:v>
                 </c:pt>
                 <c:pt idx="7">
-                  <c:v>865</c:v>
+                  <c:v>1313</c:v>
                 </c:pt>
                 <c:pt idx="8">
-                  <c:v>874</c:v>
+                  <c:v>1348</c:v>
+                </c:pt>
+                <c:pt idx="9">
+                  <c:v>635</c:v>
+                </c:pt>
+                <c:pt idx="10">
+                  <c:v>622</c:v>
                 </c:pt>
               </c:numCache>
             </c:numRef>
@@ -852,9 +864,9 @@
           </c:dLbls>
           <c:cat>
             <c:multiLvlStrRef>
-              <c:f>Sheet1!$A$2:$A$10</c:f>
+              <c:f>Sheet1!$A$2:$A$12</c:f>
               <c:multiLvlStrCache>
-                <c:ptCount val="9"/>
+                <c:ptCount val="11"/>
                 <c:lvl>
                   <c:pt idx="0">
                     <c:v>DN15</c:v>
@@ -883,16 +895,22 @@
                   <c:pt idx="8">
                     <c:v>DN100</c:v>
                   </c:pt>
+                  <c:pt idx="9">
+                    <c:v>DN125</c:v>
+                  </c:pt>
+                  <c:pt idx="10">
+                    <c:v>DN150</c:v>
+                  </c:pt>
                 </c:lvl>
               </c:multiLvlStrCache>
             </c:multiLvlStrRef>
           </c:cat>
           <c:val>
             <c:numRef>
-              <c:f>Sheet1!$B$2:$B$10</c:f>
+              <c:f>Sheet1!$B$2:$B$12</c:f>
               <c:numCache>
                 <c:formatCode>General</c:formatCode>
-                <c:ptCount val="9"/>
+                <c:ptCount val="11"/>
                 <c:pt idx="0">
                   <c:v>0</c:v>
                 </c:pt>
@@ -906,7 +924,7 @@
                   <c:v>0</c:v>
                 </c:pt>
                 <c:pt idx="4">
-                  <c:v>293</c:v>
+                  <c:v>360</c:v>
                 </c:pt>
                 <c:pt idx="5">
                   <c:v>0</c:v>
@@ -918,6 +936,12 @@
                   <c:v>0</c:v>
                 </c:pt>
                 <c:pt idx="8">
+                  <c:v>0</c:v>
+                </c:pt>
+                <c:pt idx="9">
+                  <c:v>0</c:v>
+                </c:pt>
+                <c:pt idx="10">
                   <c:v>0</c:v>
                 </c:pt>
               </c:numCache>
@@ -972,9 +996,9 @@
           </c:dLbls>
           <c:cat>
             <c:multiLvlStrRef>
-              <c:f>Sheet1!$A$2:$A$10</c:f>
+              <c:f>Sheet1!$A$2:$A$12</c:f>
               <c:multiLvlStrCache>
-                <c:ptCount val="9"/>
+                <c:ptCount val="11"/>
                 <c:lvl>
                   <c:pt idx="0">
                     <c:v>DN15</c:v>
@@ -1003,42 +1027,54 @@
                   <c:pt idx="8">
                     <c:v>DN100</c:v>
                   </c:pt>
+                  <c:pt idx="9">
+                    <c:v>DN125</c:v>
+                  </c:pt>
+                  <c:pt idx="10">
+                    <c:v>DN150</c:v>
+                  </c:pt>
                 </c:lvl>
               </c:multiLvlStrCache>
             </c:multiLvlStrRef>
           </c:cat>
           <c:val>
             <c:numRef>
-              <c:f>Sheet1!$C$2:$C$10</c:f>
+              <c:f>Sheet1!$C$2:$C$12</c:f>
               <c:numCache>
                 <c:formatCode>General</c:formatCode>
-                <c:ptCount val="9"/>
+                <c:ptCount val="11"/>
                 <c:pt idx="0">
-                  <c:v>221</c:v>
+                  <c:v>137</c:v>
                 </c:pt>
                 <c:pt idx="1">
-                  <c:v>294</c:v>
+                  <c:v>239</c:v>
                 </c:pt>
                 <c:pt idx="2">
-                  <c:v>523</c:v>
+                  <c:v>390</c:v>
                 </c:pt>
                 <c:pt idx="3">
-                  <c:v>463</c:v>
+                  <c:v>335</c:v>
                 </c:pt>
                 <c:pt idx="4">
                   <c:v>0</c:v>
                 </c:pt>
                 <c:pt idx="5">
-                  <c:v>245</c:v>
+                  <c:v>316</c:v>
                 </c:pt>
                 <c:pt idx="6">
-                  <c:v>250</c:v>
+                  <c:v>190</c:v>
                 </c:pt>
                 <c:pt idx="7">
-                  <c:v>117</c:v>
+                  <c:v>160</c:v>
                 </c:pt>
                 <c:pt idx="8">
-                  <c:v>123</c:v>
+                  <c:v>188</c:v>
+                </c:pt>
+                <c:pt idx="9">
+                  <c:v>85</c:v>
+                </c:pt>
+                <c:pt idx="10">
+                  <c:v>88</c:v>
                 </c:pt>
               </c:numCache>
             </c:numRef>
@@ -1309,9 +1345,9 @@
           </c:dLbls>
           <c:cat>
             <c:multiLvlStrRef>
-              <c:f>Sheet1!$A$2:$A$13</c:f>
+              <c:f>Sheet1!$A$2:$A$16</c:f>
               <c:multiLvlStrCache>
-                <c:ptCount val="12"/>
+                <c:ptCount val="15"/>
                 <c:lvl>
                   <c:pt idx="0">
                     <c:v>1</c:v>
@@ -1349,50 +1385,68 @@
                   <c:pt idx="11">
                     <c:v>12</c:v>
                   </c:pt>
+                  <c:pt idx="12">
+                    <c:v>13</c:v>
+                  </c:pt>
+                  <c:pt idx="13">
+                    <c:v>14</c:v>
+                  </c:pt>
+                  <c:pt idx="14">
+                    <c:v>15</c:v>
+                  </c:pt>
                 </c:lvl>
               </c:multiLvlStrCache>
             </c:multiLvlStrRef>
           </c:cat>
           <c:val>
             <c:numRef>
-              <c:f>Sheet1!$B$2:$B$13</c:f>
+              <c:f>Sheet1!$B$2:$B$16</c:f>
               <c:numCache>
                 <c:formatCode>General</c:formatCode>
-                <c:ptCount val="12"/>
+                <c:ptCount val="15"/>
                 <c:pt idx="0">
-                  <c:v>22.61763542902333</c:v>
+                  <c:v>22.95016077170418</c:v>
                 </c:pt>
                 <c:pt idx="1">
-                  <c:v>42.981415579280345</c:v>
+                  <c:v>38.062700964630224</c:v>
                 </c:pt>
                 <c:pt idx="2">
-                  <c:v>60.41913799920918</c:v>
+                  <c:v>50.643086816720256</c:v>
                 </c:pt>
                 <c:pt idx="3">
-                  <c:v>67.69474100434955</c:v>
+                  <c:v>60.4903536977492</c:v>
                 </c:pt>
                 <c:pt idx="4">
-                  <c:v>74.06089363384737</c:v>
+                  <c:v>68.72990353697749</c:v>
                 </c:pt>
                 <c:pt idx="5">
-                  <c:v>80.11071569790431</c:v>
+                  <c:v>76.20578778135048</c:v>
                 </c:pt>
                 <c:pt idx="6">
-                  <c:v>84.53934361407671</c:v>
+                  <c:v>81.39067524115755</c:v>
                 </c:pt>
                 <c:pt idx="7">
-                  <c:v>88.1771451166469</c:v>
+                  <c:v>85.20900321543408</c:v>
                 </c:pt>
                 <c:pt idx="8">
-                  <c:v>91.73586397785687</c:v>
+                  <c:v>87.78135048231512</c:v>
                 </c:pt>
                 <c:pt idx="9">
-                  <c:v>95.25504151838672</c:v>
+                  <c:v>90.23311897106109</c:v>
                 </c:pt>
                 <c:pt idx="10">
-                  <c:v>98.69513641755634</c:v>
+                  <c:v>92.60450160771704</c:v>
                 </c:pt>
                 <c:pt idx="11">
+                  <c:v>94.85530546623794</c:v>
+                </c:pt>
+                <c:pt idx="12">
+                  <c:v>96.90514469453376</c:v>
+                </c:pt>
+                <c:pt idx="13">
+                  <c:v>98.95498392282958</c:v>
+                </c:pt>
+                <c:pt idx="14">
                   <c:v>100</c:v>
                 </c:pt>
               </c:numCache>
@@ -2059,7 +2113,7 @@
           <a:p>
             <a:r>
               <a:rPr lang="en-US" dirty="0"/>
-              <a:t>Now three analyses. The first is a design check, not a discovery: does difficulty grow with the tier? The count is fixed by construction, and load and congestion follow from the rules, so this shows the dataset behaves as designed. The load at the support rises at every step, from 0.1 to 1.7 kilonewtons. The closest gap shrinks from 120 to about 62 millimeters, but widens again at C6, where elements start stacking in two or three rows. So: report methods tier by tier. (4:50)</a:t>
+              <a:t>Now three analyses. The first is a design check, not a discovery: does difficulty grow with the tier? The count is fixed by construction, and load and congestion follow from the rules, so this shows the dataset behaves as designed. The load at the support rises with the tier, from about 0.3 to 2.0 kilonewtons. The closest gap narrows at every step, from 130 to about 51 millimeters. So: report methods tier by tier. (4:50)</a:t>
             </a:r>
             <a:endParaRPr lang="en-US" dirty="0"/>
           </a:p>
@@ -2147,7 +2201,7 @@
           <a:p>
             <a:r>
               <a:rPr lang="en-US" dirty="0"/>
-              <a:t>The second analysis is the one the generator could fail. Is the spacing realistic in a building it has never seen? The gap distribution was fitted on a residential duplex. We kept a second open building aside, a medical-dental clinic, cut it into sections every 250 millimeters, the way a context is defined, and measured the gaps between pipes running side by side. On the left, the clinic: generated gaps are close to measured ones, though not identical. On the right, the distances. Generator to clinic: 28 millimeters. That is above the 8 a perfect generator would show, so not a perfect match, but about as close as the duplex's own two models are to each other. A fixed 25-millimeter gap would be about 190 off. (5:25)</a:t>
+              <a:t>The second analysis is the one the generator could fail. Is the spacing realistic in a building it has never seen? The gap distribution was fitted on a residential duplex. We kept a second open building aside, a medical-dental clinic, cut it into sections every 250 millimeters, the way a context is defined, and measured the gaps between pipes running side by side. On the left, the clinic: generated gaps are close to measured ones, though not identical. On the right, the distances. Generator to clinic: 32 millimeters. That is above the 8 a perfect generator would show, so not a perfect match, but about as close as the duplex's own two models are to each other. A fixed 25-millimeter gap would be about 190 off. (5:20)</a:t>
             </a:r>
             <a:endParaRPr lang="en-US" dirty="0"/>
           </a:p>
@@ -2235,7 +2289,7 @@
           <a:p>
             <a:r>
               <a:rPr lang="en-US" dirty="0"/>
-              <a:t>The third analysis is a use of the dataset, not a test of it: what must a catalog of clamps cover? Our paper's two-size catalog attaches 11.6 percent of the pipes, with an interval of 10 to 13, all one size, DN40. Load is never the limit, and trays, ducts and conduits aren't covered at all. On the right is what the dataset asks of any catalog: two well-placed sizes could attach 43 percent, six sizes 80, twelve sizes every pipe. So 'what should the catalog contain' becomes a measurement. (6:15)</a:t>
+              <a:t>The third analysis is a use of the dataset, not a test of it: what must a catalog of clamps cover? Our paper's two-size catalog attaches 14.5 percent of the pipes, with an interval of 13 to 16, all one size, DN40. Load is never the limit, and trays, ducts and conduits aren't covered at all. On the right is what the dataset asks of any catalog: two well-placed sizes could attach 38 percent, six sizes 76, fifteen sizes every pipe. So 'what should the catalog contain' becomes a measurement. (6:10)</a:t>
             </a:r>
             <a:endParaRPr lang="en-US" dirty="0"/>
           </a:p>
@@ -2323,7 +2377,7 @@
           <a:p>
             <a:r>
               <a:rPr lang="en-US" dirty="0"/>
-              <a:t>Let me show it. This is the Generator Studio. I choose what crosses the hanger, a tier or an exact mix, and a seed. Out comes the section a support designer receives, drawn the way an engineer would issue it: every service at true size, its level below the slab, its load, the closest clear gap, and the same run in 3D. Every section is a stored output of the released generator, with the Python call that reproduces it. Scan the code to try it yourself. [Live: switch to the studio, click C3, then Generate another twice, then Exact mix with a duct. If the demo fails, stay on this slide; slide 17 shows two more sections. Before the talk: open the studio once with internet, set its link sharing to public, scan the QR from a phone not logged in.] (6:55)</a:t>
+              <a:t>Let me show it. This is the Generator Studio. I choose what crosses the hanger, a tier or an exact mix, and a seed. Out comes the section a support designer receives, drawn the way an engineer would issue it: every service at true size, its level below the slab, its load, the closest clear gap, and the same run in 3D. Every section is a stored output of the released generator, with the Python call that reproduces it. Scan the code to try it yourself. [Live: switch to the studio, click C3, then Generate another twice, then Exact mix with a duct. If the demo fails, stay on this slide; slide 17 shows two more sections. Before the talk: open the studio once with internet, set its link sharing to public, scan the QR from a phone not logged in.] (6:50)</a:t>
             </a:r>
             <a:endParaRPr lang="en-US" dirty="0"/>
           </a:p>
@@ -2411,7 +2465,7 @@
           <a:p>
             <a:r>
               <a:rPr lang="en-US" dirty="0"/>
-              <a:t>Using it takes a few lines: load a split, filter by composition, or generate your own mix. Because there are no labels, the same files serve reinforcement learning, constraint programming, and benchmarking people. We ship the scoring too. Train on the generator, from C1 up to C8. Evaluate on the benchmark, the same 125 contexts per tier for every method. Report per tier, with 95 percent intervals and paired tests. (8:05)</a:t>
+              <a:t>Using it takes a few lines: load a split, filter by composition, or generate your own mix. Because there are no labels, the same files serve reinforcement learning, constraint programming, and benchmarking people. We ship the scoring too. Train on the generator, from C1 up to C8. Evaluate on the benchmark, the same 125 contexts per tier for every method. Report per tier, with 95 percent intervals and paired tests. (8:00)</a:t>
             </a:r>
             <a:endParaRPr lang="en-US" dirty="0"/>
           </a:p>
@@ -2499,7 +2553,7 @@
           <a:p>
             <a:r>
               <a:rPr lang="en-US" dirty="0"/>
-              <a:t>A word on scope. CrossMEP is one section at one support. Routing and branches are outside it, but the span is recorded, so a method can vary it. Pipe spacing was checked on two open buildings; the rest rests on practice and standards, and the trade mix is a design choice. It's not for structural design of real installations. Next: a public checker, with best-known costs, so we can compare methods on the answer; the catalog as an input; and a real test set from commercial projects, with supports designed by engineers. That's where I'd value your eye. (8:35)</a:t>
+              <a:t>A word on scope. CrossMEP is one section at one support. Routing and branches are outside it, but the span is recorded, so a method can vary it. Pipe spacing was checked on two open buildings; the rest rests on practice and standards, and the trade mix is a design choice. It's not for structural design of real installations. Next: a public checker, with best-known costs, so we can compare methods on the answer; the catalog as an input; and a real test set from commercial projects, with supports designed by engineers. That's where I'd value your eye. (8:30)</a:t>
             </a:r>
             <a:endParaRPr lang="en-US" dirty="0"/>
           </a:p>
@@ -2587,7 +2641,7 @@
           <a:p>
             <a:r>
               <a:rPr lang="en-US" dirty="0"/>
-              <a:t>To sum up: CrossMEP is the brief, not the answer. Seven thousand support-design problems, every constant sourced or declared a design choice, pipe spacing checked on two open buildings, and all of it open. If you coordinate services or design supports, try the studio and tell me what looks wrong. Thank you. (9:15)</a:t>
+              <a:t>To sum up: CrossMEP is the brief, not the answer. Seven thousand support-design problems, every constant sourced or declared a design choice, pipe spacing checked on two open buildings, and all of it open. If you coordinate services or design supports, try the studio and tell me what looks wrong. Thank you. (9:10)</a:t>
             </a:r>
             <a:endParaRPr lang="en-US" dirty="0"/>
           </a:p>
@@ -4857,7 +4911,7 @@
                   <a:schemeClr val="tx1"/>
                 </a:solidFill>
               </a:rPr>
-              <a:t>Higher tiers are heavier and, overall, tighter, as designed</a:t>
+              <a:t>Higher tiers are heavier and tighter, as designed</a:t>
             </a:r>
             <a:endParaRPr lang="en-US" sz="2600" dirty="0"/>
           </a:p>
@@ -4917,7 +4971,7 @@
                   <a:srgbClr val="52514E"/>
                 </a:solidFill>
               </a:rPr>
-              <a:t>A check that the dataset behaves as designed: the tier fixes the element count; load and congestion follow from the rules. Boxes: benchmark, 125 contexts per tier (IQR, whiskers 1.5 IQR); diamonds: medians of 2,000 generated contexts per tier. Load rises at every tier (rank correlation +0.56); the closest gap shrinks overall (−0.36) but widens at C6 (70 → 75 mm), where elements start to stack in two or three rows.</a:t>
+              <a:t>A check that the dataset behaves as designed: the tier fixes the element count; load and congestion follow from the rules. Boxes: benchmark, 125 contexts per tier (IQR, whiskers 1.5 IQR); diamonds: medians of 2,000 generated contexts per tier. Load rises with the tier (rank correlation +0.46; the population medians rise at every step) and the closest gap narrows at every step (−0.38; 149 → 55 mm in the population).</a:t>
             </a:r>
             <a:endParaRPr lang="en-US" sz="1250" dirty="0"/>
           </a:p>
@@ -5085,7 +5139,7 @@
                   <a:srgbClr val="52514E"/>
                 </a:solidFill>
               </a:rPr>
-              <a:t>The gap distribution was fitted on the duplex; the clinic was held out. Clear gaps between side-by-side pipes, on sections every 250 mm. Clinic (797 pipe pairs): 28 mm from the generated gaps (95 % CI 16–44), more than the 8 mm a perfect generator would show, and about as close as the duplex’s own two models are to each other (26 mm). Models: buildingSMART Duplex Apartment and Medical-Dental Clinic, CC BY 4.0.</a:t>
+              <a:t>The gap distribution was fitted on the duplex; the clinic was held out. Clear gaps between side-by-side pipes, on sections every 250 mm. Clinic (797 pipe pairs): 32 mm from the generated gaps (95 % CI 17–48), more than the 8 mm a perfect generator would show, and about as close as the duplex’s own two models are to each other (26 mm). Models: buildingSMART Duplex Apartment and Medical-Dental Clinic, CC BY 4.0.</a:t>
             </a:r>
             <a:endParaRPr lang="en-US" sz="1250" dirty="0"/>
           </a:p>
@@ -5193,7 +5247,7 @@
                   <a:schemeClr val="tx1"/>
                 </a:solidFill>
               </a:rPr>
-              <a:t>A two-size catalog attaches 1 pipe in 9; the dataset shows what to cover</a:t>
+              <a:t>A two-size catalog attaches 1 pipe in 7; the dataset shows what to cover</a:t>
             </a:r>
             <a:endParaRPr lang="en-US" sz="2600" dirty="0"/>
           </a:p>
@@ -5233,7 +5287,7 @@
       </p:graphicFrame>
       <p:sp>
         <p:nvSpPr>
-          <p:cNvPr id="5" name="tile of benchmark pipes attachable with the paper’s two sizes (95 % CI 10.1–13.0); every one is DN40"/>
+          <p:cNvPr id="5" name="tile of benchmark pipes attachable with the paper’s two sizes (95 % CI 12.7–16.2); every one is DN40"/>
           <p:cNvSpPr/>
           <p:nvPr/>
         </p:nvSpPr>
@@ -5255,7 +5309,7 @@
       </p:sp>
       <p:sp>
         <p:nvSpPr>
-          <p:cNvPr id="6" name="value of benchmark pipes attachable with the paper’s two sizes (95 % CI 10.1–13.0); every one is DN40"/>
+          <p:cNvPr id="6" name="value of benchmark pipes attachable with the paper’s two sizes (95 % CI 12.7–16.2); every one is DN40"/>
           <p:cNvSpPr txBox="1"/>
           <p:nvPr/>
         </p:nvSpPr>
@@ -5283,7 +5337,7 @@
                   <a:schemeClr val="accent1"/>
                 </a:solidFill>
               </a:rPr>
-              <a:t>11.6 %</a:t>
+              <a:t>14.5 %</a:t>
             </a:r>
             <a:endParaRPr lang="en-US" sz="3200" dirty="0"/>
           </a:p>
@@ -5291,7 +5345,7 @@
       </p:sp>
       <p:sp>
         <p:nvSpPr>
-          <p:cNvPr id="7" name="label of benchmark pipes attachable with the paper’s two sizes (95 % CI 10.1–13.0); every one is DN40"/>
+          <p:cNvPr id="7" name="label of benchmark pipes attachable with the paper’s two sizes (95 % CI 12.7–16.2); every one is DN40"/>
           <p:cNvSpPr txBox="1"/>
           <p:nvPr/>
         </p:nvSpPr>
@@ -5319,7 +5373,7 @@
                   <a:srgbClr val="52514E"/>
                 </a:solidFill>
               </a:rPr>
-              <a:t>of benchmark pipes attachable with the paper’s two sizes (95 % CI 10.1–13.0); every one is DN40</a:t>
+              <a:t>of benchmark pipes attachable with the paper’s two sizes (95 % CI 12.7–16.2); every one is DN40</a:t>
             </a:r>
             <a:endParaRPr lang="en-US" sz="1100" dirty="0"/>
           </a:p>
@@ -5327,7 +5381,7 @@
       </p:sp>
       <p:sp>
         <p:nvSpPr>
-          <p:cNvPr id="8" name="tile with two sizes placed where the pipes are; 80 % with six, and every pipe with 12"/>
+          <p:cNvPr id="8" name="tile with two sizes placed where the pipes are; 76 % with six, and every pipe with 15"/>
           <p:cNvSpPr/>
           <p:nvPr/>
         </p:nvSpPr>
@@ -5349,7 +5403,7 @@
       </p:sp>
       <p:sp>
         <p:nvSpPr>
-          <p:cNvPr id="9" name="value with two sizes placed where the pipes are; 80 % with six, and every pipe with 12"/>
+          <p:cNvPr id="9" name="value with two sizes placed where the pipes are; 76 % with six, and every pipe with 15"/>
           <p:cNvSpPr txBox="1"/>
           <p:nvPr/>
         </p:nvSpPr>
@@ -5377,7 +5431,7 @@
                   <a:schemeClr val="accent1"/>
                 </a:solidFill>
               </a:rPr>
-              <a:t>43.0 %</a:t>
+              <a:t>38.1 %</a:t>
             </a:r>
             <a:endParaRPr lang="en-US" sz="3200" dirty="0"/>
           </a:p>
@@ -5385,7 +5439,7 @@
       </p:sp>
       <p:sp>
         <p:nvSpPr>
-          <p:cNvPr id="10" name="label with two sizes placed where the pipes are; 80 % with six, and every pipe with 12"/>
+          <p:cNvPr id="10" name="label with two sizes placed where the pipes are; 76 % with six, and every pipe with 15"/>
           <p:cNvSpPr txBox="1"/>
           <p:nvPr/>
         </p:nvSpPr>
@@ -5413,7 +5467,7 @@
                   <a:srgbClr val="52514E"/>
                 </a:solidFill>
               </a:rPr>
-              <a:t>with two sizes placed where the pipes are; 80 % with six, and every pipe with 12</a:t>
+              <a:t>with two sizes placed where the pipes are; 76 % with six, and every pipe with 15</a:t>
             </a:r>
             <a:endParaRPr lang="en-US" sz="1100" dirty="0"/>
           </a:p>
@@ -5421,7 +5475,7 @@
       </p:sp>
       <p:sp>
         <p:nvSpPr>
-          <p:cNvPr id="11" name="tile trays, ducts and conduits: a pipe-clamp catalog defines no attachment. Load never binds (0.88 vs 2.5 kN)"/>
+          <p:cNvPr id="11" name="tile trays, ducts and conduits: a pipe-clamp catalog defines no attachment. Load never binds (1.97 vs 2.5 kN)"/>
           <p:cNvSpPr/>
           <p:nvPr/>
         </p:nvSpPr>
@@ -5443,7 +5497,7 @@
       </p:sp>
       <p:sp>
         <p:nvSpPr>
-          <p:cNvPr id="12" name="value trays, ducts and conduits: a pipe-clamp catalog defines no attachment. Load never binds (0.88 vs 2.5 kN)"/>
+          <p:cNvPr id="12" name="value trays, ducts and conduits: a pipe-clamp catalog defines no attachment. Load never binds (1.97 vs 2.5 kN)"/>
           <p:cNvSpPr txBox="1"/>
           <p:nvPr/>
         </p:nvSpPr>
@@ -5471,7 +5525,7 @@
                   <a:schemeClr val="accent1"/>
                 </a:solidFill>
               </a:rPr>
-              <a:t>0 of 1,971</a:t>
+              <a:t>0 of 2,012</a:t>
             </a:r>
             <a:endParaRPr lang="en-US" sz="3200" dirty="0"/>
           </a:p>
@@ -5479,7 +5533,7 @@
       </p:sp>
       <p:sp>
         <p:nvSpPr>
-          <p:cNvPr id="13" name="label trays, ducts and conduits: a pipe-clamp catalog defines no attachment. Load never binds (0.88 vs 2.5 kN)"/>
+          <p:cNvPr id="13" name="label trays, ducts and conduits: a pipe-clamp catalog defines no attachment. Load never binds (1.97 vs 2.5 kN)"/>
           <p:cNvSpPr txBox="1"/>
           <p:nvPr/>
         </p:nvSpPr>
@@ -5507,7 +5561,7 @@
                   <a:srgbClr val="52514E"/>
                 </a:solidFill>
               </a:rPr>
-              <a:t>trays, ducts and conduits: a pipe-clamp catalog defines no attachment. Load never binds (0.88 vs 2.5 kN)</a:t>
+              <a:t>trays, ducts and conduits: a pipe-clamp catalog defines no attachment. Load never binds (1.97 vs 2.5 kN)</a:t>
             </a:r>
             <a:endParaRPr lang="en-US" sz="1100" dirty="0"/>
           </a:p>
@@ -7514,7 +7568,7 @@
                   <a:schemeClr val="tx1"/>
                 </a:solidFill>
               </a:rPr>
-              <a:t>Median load rises from 0.10 kN at C1 to 1.71 kN at C8 as the gap narrows</a:t>
+              <a:t>Median load rises from 0.30 kN at C1 to 2.04 kN at C8 as the gap narrows</a:t>
             </a:r>
             <a:endParaRPr lang="en-US" sz="2600" dirty="0"/>
           </a:p>
@@ -8104,7 +8158,7 @@
                           <a:ea typeface="Calibri" pitchFamily="34" charset="-122"/>
                           <a:cs typeface="Calibri" pitchFamily="34" charset="-120"/>
                         </a:rPr>
-                        <a:t>0.10</a:t>
+                        <a:t>0.30</a:t>
                       </a:r>
                       <a:endParaRPr lang="en-US" sz="1200" dirty="0">
                         <a:latin typeface="Calibri" charset="0"/>
@@ -8169,7 +8223,7 @@
                           <a:ea typeface="Calibri" pitchFamily="34" charset="-122"/>
                           <a:cs typeface="Calibri" pitchFamily="34" charset="-120"/>
                         </a:rPr>
-                        <a:t>102</a:t>
+                        <a:t>140</a:t>
                       </a:r>
                       <a:endParaRPr lang="en-US" sz="1200" dirty="0">
                         <a:latin typeface="Calibri" charset="0"/>
@@ -8366,7 +8420,7 @@
                           <a:ea typeface="Calibri" pitchFamily="34" charset="-122"/>
                           <a:cs typeface="Calibri" pitchFamily="34" charset="-120"/>
                         </a:rPr>
-                        <a:t>120</a:t>
+                        <a:t>130</a:t>
                       </a:r>
                       <a:endParaRPr lang="en-US" sz="1200" dirty="0">
                         <a:latin typeface="Calibri" charset="0"/>
@@ -8431,7 +8485,7 @@
                           <a:ea typeface="Calibri" pitchFamily="34" charset="-122"/>
                           <a:cs typeface="Calibri" pitchFamily="34" charset="-120"/>
                         </a:rPr>
-                        <a:t>0.23</a:t>
+                        <a:t>0.24</a:t>
                       </a:r>
                       <a:endParaRPr lang="en-US" sz="1200" dirty="0">
                         <a:latin typeface="Calibri" charset="0"/>
@@ -8496,7 +8550,7 @@
                           <a:ea typeface="Calibri" pitchFamily="34" charset="-122"/>
                           <a:cs typeface="Calibri" pitchFamily="34" charset="-120"/>
                         </a:rPr>
-                        <a:t>344</a:t>
+                        <a:t>431</a:t>
                       </a:r>
                       <a:endParaRPr lang="en-US" sz="1200" dirty="0">
                         <a:latin typeface="Calibri" charset="0"/>
@@ -8693,7 +8747,7 @@
                           <a:ea typeface="Calibri" pitchFamily="34" charset="-122"/>
                           <a:cs typeface="Calibri" pitchFamily="34" charset="-120"/>
                         </a:rPr>
-                        <a:t>98</a:t>
+                        <a:t>89</a:t>
                       </a:r>
                       <a:endParaRPr lang="en-US" sz="1200" dirty="0">
                         <a:latin typeface="Calibri" charset="0"/>
@@ -8758,7 +8812,7 @@
                           <a:ea typeface="Calibri" pitchFamily="34" charset="-122"/>
                           <a:cs typeface="Calibri" pitchFamily="34" charset="-120"/>
                         </a:rPr>
-                        <a:t>0.44</a:t>
+                        <a:t>1.04</a:t>
                       </a:r>
                       <a:endParaRPr lang="en-US" sz="1200" dirty="0">
                         <a:latin typeface="Calibri" charset="0"/>
@@ -8823,7 +8877,7 @@
                           <a:ea typeface="Calibri" pitchFamily="34" charset="-122"/>
                           <a:cs typeface="Calibri" pitchFamily="34" charset="-120"/>
                         </a:rPr>
-                        <a:t>613</a:t>
+                        <a:t>776</a:t>
                       </a:r>
                       <a:endParaRPr lang="en-US" sz="1200" dirty="0">
                         <a:latin typeface="Calibri" charset="0"/>
@@ -9020,7 +9074,7 @@
                           <a:ea typeface="Calibri" pitchFamily="34" charset="-122"/>
                           <a:cs typeface="Calibri" pitchFamily="34" charset="-120"/>
                         </a:rPr>
-                        <a:t>90</a:t>
+                        <a:t>77</a:t>
                       </a:r>
                       <a:endParaRPr lang="en-US" sz="1200" dirty="0">
                         <a:latin typeface="Calibri" charset="0"/>
@@ -9085,7 +9139,7 @@
                           <a:ea typeface="Calibri" pitchFamily="34" charset="-122"/>
                           <a:cs typeface="Calibri" pitchFamily="34" charset="-120"/>
                         </a:rPr>
-                        <a:t>0.55</a:t>
+                        <a:t>0.94</a:t>
                       </a:r>
                       <a:endParaRPr lang="en-US" sz="1200" dirty="0">
                         <a:latin typeface="Calibri" charset="0"/>
@@ -9150,7 +9204,7 @@
                           <a:ea typeface="Calibri" pitchFamily="34" charset="-122"/>
                           <a:cs typeface="Calibri" pitchFamily="34" charset="-120"/>
                         </a:rPr>
-                        <a:t>728</a:t>
+                        <a:t>1037</a:t>
                       </a:r>
                       <a:endParaRPr lang="en-US" sz="1200" dirty="0">
                         <a:latin typeface="Calibri" charset="0"/>
@@ -9347,7 +9401,7 @@
                           <a:ea typeface="Calibri" pitchFamily="34" charset="-122"/>
                           <a:cs typeface="Calibri" pitchFamily="34" charset="-120"/>
                         </a:rPr>
-                        <a:t>73</a:t>
+                        <a:t>72</a:t>
                       </a:r>
                       <a:endParaRPr lang="en-US" sz="1200" dirty="0">
                         <a:latin typeface="Calibri" charset="0"/>
@@ -9412,7 +9466,7 @@
                           <a:ea typeface="Calibri" pitchFamily="34" charset="-122"/>
                           <a:cs typeface="Calibri" pitchFamily="34" charset="-120"/>
                         </a:rPr>
-                        <a:t>0.78</a:t>
+                        <a:t>1.22</a:t>
                       </a:r>
                       <a:endParaRPr lang="en-US" sz="1200" dirty="0">
                         <a:latin typeface="Calibri" charset="0"/>
@@ -9477,7 +9531,7 @@
                           <a:ea typeface="Calibri" pitchFamily="34" charset="-122"/>
                           <a:cs typeface="Calibri" pitchFamily="34" charset="-120"/>
                         </a:rPr>
-                        <a:t>1027</a:t>
+                        <a:t>1275</a:t>
                       </a:r>
                       <a:endParaRPr lang="en-US" sz="1200" dirty="0">
                         <a:latin typeface="Calibri" charset="0"/>
@@ -9674,7 +9728,7 @@
                           <a:ea typeface="Calibri" pitchFamily="34" charset="-122"/>
                           <a:cs typeface="Calibri" pitchFamily="34" charset="-120"/>
                         </a:rPr>
-                        <a:t>76</a:t>
+                        <a:t>69</a:t>
                       </a:r>
                       <a:endParaRPr lang="en-US" sz="1200" dirty="0">
                         <a:latin typeface="Calibri" charset="0"/>
@@ -9739,7 +9793,7 @@
                           <a:ea typeface="Calibri" pitchFamily="34" charset="-122"/>
                           <a:cs typeface="Calibri" pitchFamily="34" charset="-120"/>
                         </a:rPr>
-                        <a:t>1.21</a:t>
+                        <a:t>1.36</a:t>
                       </a:r>
                       <a:endParaRPr lang="en-US" sz="1200" dirty="0">
                         <a:latin typeface="Calibri" charset="0"/>
@@ -9804,7 +9858,7 @@
                           <a:ea typeface="Calibri" pitchFamily="34" charset="-122"/>
                           <a:cs typeface="Calibri" pitchFamily="34" charset="-120"/>
                         </a:rPr>
-                        <a:t>993</a:t>
+                        <a:t>1494</a:t>
                       </a:r>
                       <a:endParaRPr lang="en-US" sz="1200" dirty="0">
                         <a:latin typeface="Calibri" charset="0"/>
@@ -10001,7 +10055,7 @@
                           <a:ea typeface="Calibri" pitchFamily="34" charset="-122"/>
                           <a:cs typeface="Calibri" pitchFamily="34" charset="-120"/>
                         </a:rPr>
-                        <a:t>60</a:t>
+                        <a:t>61</a:t>
                       </a:r>
                       <a:endParaRPr lang="en-US" sz="1200" dirty="0">
                         <a:latin typeface="Calibri" charset="0"/>
@@ -10066,7 +10120,7 @@
                           <a:ea typeface="Calibri" pitchFamily="34" charset="-122"/>
                           <a:cs typeface="Calibri" pitchFamily="34" charset="-120"/>
                         </a:rPr>
-                        <a:t>1.49</a:t>
+                        <a:t>2.24</a:t>
                       </a:r>
                       <a:endParaRPr lang="en-US" sz="1200" dirty="0">
                         <a:latin typeface="Calibri" charset="0"/>
@@ -10131,7 +10185,7 @@
                           <a:ea typeface="Calibri" pitchFamily="34" charset="-122"/>
                           <a:cs typeface="Calibri" pitchFamily="34" charset="-120"/>
                         </a:rPr>
-                        <a:t>1138</a:t>
+                        <a:t>1861</a:t>
                       </a:r>
                       <a:endParaRPr lang="en-US" sz="1200" dirty="0">
                         <a:latin typeface="Calibri" charset="0"/>
@@ -10328,7 +10382,7 @@
                           <a:ea typeface="Calibri" pitchFamily="34" charset="-122"/>
                           <a:cs typeface="Calibri" pitchFamily="34" charset="-120"/>
                         </a:rPr>
-                        <a:t>62</a:t>
+                        <a:t>51</a:t>
                       </a:r>
                       <a:endParaRPr lang="en-US" sz="1200" dirty="0">
                         <a:latin typeface="Calibri" charset="0"/>
@@ -10393,7 +10447,7 @@
                           <a:ea typeface="Calibri" pitchFamily="34" charset="-122"/>
                           <a:cs typeface="Calibri" pitchFamily="34" charset="-120"/>
                         </a:rPr>
-                        <a:t>1.71</a:t>
+                        <a:t>2.04</a:t>
                       </a:r>
                       <a:endParaRPr lang="en-US" sz="1200" dirty="0">
                         <a:latin typeface="Calibri" charset="0"/>
@@ -10458,7 +10512,7 @@
                           <a:ea typeface="Calibri" pitchFamily="34" charset="-122"/>
                           <a:cs typeface="Calibri" pitchFamily="34" charset="-120"/>
                         </a:rPr>
-                        <a:t>1448</a:t>
+                        <a:t>2225</a:t>
                       </a:r>
                       <a:endParaRPr lang="en-US" sz="1200" dirty="0">
                         <a:latin typeface="Calibri" charset="0"/>
@@ -10513,7 +10567,7 @@
       </p:graphicFrame>
       <p:sp>
         <p:nvSpPr>
-          <p:cNvPr id="4" name="tile 2,529 pipes · 1,141 conduits · 569 trays · 261 ducts"/>
+          <p:cNvPr id="4" name="tile 2,488 pipes · 968 conduits · 559 trays · 485 ducts"/>
           <p:cNvSpPr/>
           <p:nvPr/>
         </p:nvSpPr>
@@ -10535,7 +10589,7 @@
       </p:sp>
       <p:sp>
         <p:nvSpPr>
-          <p:cNvPr id="5" name="value 2,529 pipes · 1,141 conduits · 569 trays · 261 ducts"/>
+          <p:cNvPr id="5" name="value 2,488 pipes · 968 conduits · 559 trays · 485 ducts"/>
           <p:cNvSpPr txBox="1"/>
           <p:nvPr/>
         </p:nvSpPr>
@@ -10571,7 +10625,7 @@
       </p:sp>
       <p:sp>
         <p:nvSpPr>
-          <p:cNvPr id="6" name="label 2,529 pipes · 1,141 conduits · 569 trays · 261 ducts"/>
+          <p:cNvPr id="6" name="label 2,488 pipes · 968 conduits · 559 trays · 485 ducts"/>
           <p:cNvSpPr txBox="1"/>
           <p:nvPr/>
         </p:nvSpPr>
@@ -10599,7 +10653,7 @@
                   <a:srgbClr val="52514E"/>
                 </a:solidFill>
               </a:rPr>
-              <a:t>2,529 pipes · 1,141 conduits · 569 trays · 261 ducts</a:t>
+              <a:t>2,488 pipes · 968 conduits · 559 trays · 485 ducts</a:t>
             </a:r>
             <a:endParaRPr lang="en-US" sz="1100" dirty="0"/>
           </a:p>
@@ -10607,7 +10661,7 @@
       </p:sp>
       <p:sp>
         <p:nvSpPr>
-          <p:cNvPr id="7" name="tile Wasserstein-1, generated to measured pipe gaps of the clinic (95 % CI 16–44)"/>
+          <p:cNvPr id="7" name="tile Wasserstein-1, generated to measured pipe gaps of the clinic (95 % CI 17–48)"/>
           <p:cNvSpPr/>
           <p:nvPr/>
         </p:nvSpPr>
@@ -10629,7 +10683,7 @@
       </p:sp>
       <p:sp>
         <p:nvSpPr>
-          <p:cNvPr id="8" name="value Wasserstein-1, generated to measured pipe gaps of the clinic (95 % CI 16–44)"/>
+          <p:cNvPr id="8" name="value Wasserstein-1, generated to measured pipe gaps of the clinic (95 % CI 17–48)"/>
           <p:cNvSpPr txBox="1"/>
           <p:nvPr/>
         </p:nvSpPr>
@@ -10657,7 +10711,7 @@
                   <a:schemeClr val="accent1"/>
                 </a:solidFill>
               </a:rPr>
-              <a:t>28 mm</a:t>
+              <a:t>32 mm</a:t>
             </a:r>
             <a:endParaRPr lang="en-US" sz="2400" dirty="0"/>
           </a:p>
@@ -10665,7 +10719,7 @@
       </p:sp>
       <p:sp>
         <p:nvSpPr>
-          <p:cNvPr id="9" name="label Wasserstein-1, generated to measured pipe gaps of the clinic (95 % CI 16–44)"/>
+          <p:cNvPr id="9" name="label Wasserstein-1, generated to measured pipe gaps of the clinic (95 % CI 17–48)"/>
           <p:cNvSpPr txBox="1"/>
           <p:nvPr/>
         </p:nvSpPr>
@@ -10693,7 +10747,7 @@
                   <a:srgbClr val="52514E"/>
                 </a:solidFill>
               </a:rPr>
-              <a:t>Wasserstein-1, generated to measured pipe gaps of the clinic (95 % CI 16–44)</a:t>
+              <a:t>Wasserstein-1, generated to measured pipe gaps of the clinic (95 % CI 17–48)</a:t>
             </a:r>
             <a:endParaRPr lang="en-US" sz="1100" dirty="0"/>
           </a:p>
@@ -10751,7 +10805,7 @@
                   <a:schemeClr val="accent1"/>
                 </a:solidFill>
               </a:rPr>
-              <a:t>−0.36 / +0.56</a:t>
+              <a:t>−0.38 / +0.46</a:t>
             </a:r>
             <a:endParaRPr lang="en-US" sz="2400" dirty="0"/>
           </a:p>
@@ -10895,7 +10949,7 @@
                   <a:schemeClr val="tx1"/>
                 </a:solidFill>
               </a:rPr>
-              <a:t>Against the clinic the generator is 28 mm off; the small duplex is 70 to 85</a:t>
+              <a:t>Against the clinic the generator is 32 mm off; the small duplex is 76 to 88</a:t>
             </a:r>
             <a:endParaRPr lang="en-US" sz="2600" dirty="0"/>
           </a:p>
@@ -11355,7 +11409,7 @@
                           <a:ea typeface="Calibri" pitchFamily="34" charset="-122"/>
                           <a:cs typeface="Calibri" pitchFamily="34" charset="-120"/>
                         </a:rPr>
-                        <a:t>1,543</a:t>
+                        <a:t>1,690</a:t>
                       </a:r>
                       <a:endParaRPr lang="en-US" sz="1100" dirty="0">
                         <a:latin typeface="Calibri" charset="0"/>
@@ -11485,7 +11539,7 @@
                           <a:ea typeface="Calibri" pitchFamily="34" charset="-122"/>
                           <a:cs typeface="Calibri" pitchFamily="34" charset="-120"/>
                         </a:rPr>
-                        <a:t>207</a:t>
+                        <a:t>216</a:t>
                       </a:r>
                       <a:endParaRPr lang="en-US" sz="1100" dirty="0">
                         <a:latin typeface="Calibri" charset="0"/>
@@ -12969,7 +13023,7 @@
                           <a:ea typeface="Calibri" pitchFamily="34" charset="-122"/>
                           <a:cs typeface="Calibri" pitchFamily="34" charset="-120"/>
                         </a:rPr>
-                        <a:t>28 (16–44)</a:t>
+                        <a:t>32 (17–48)</a:t>
                       </a:r>
                       <a:endParaRPr lang="en-US" sz="1100" dirty="0">
                         <a:latin typeface="Calibri" charset="0"/>
@@ -13034,7 +13088,7 @@
                           <a:ea typeface="Calibri" pitchFamily="34" charset="-122"/>
                           <a:cs typeface="Calibri" pitchFamily="34" charset="-120"/>
                         </a:rPr>
-                        <a:t>15 (11–24)</a:t>
+                        <a:t>18 (13–27)</a:t>
                       </a:r>
                       <a:endParaRPr lang="en-US" sz="1100" dirty="0">
                         <a:latin typeface="Calibri" charset="0"/>
@@ -13231,7 +13285,7 @@
                           <a:ea typeface="Calibri" pitchFamily="34" charset="-122"/>
                           <a:cs typeface="Calibri" pitchFamily="34" charset="-120"/>
                         </a:rPr>
-                        <a:t>70 (57–99)</a:t>
+                        <a:t>76 (61–103)</a:t>
                       </a:r>
                       <a:endParaRPr lang="en-US" sz="1100" dirty="0">
                         <a:latin typeface="Calibri" charset="0"/>
@@ -13296,7 +13350,7 @@
                           <a:ea typeface="Calibri" pitchFamily="34" charset="-122"/>
                           <a:cs typeface="Calibri" pitchFamily="34" charset="-120"/>
                         </a:rPr>
-                        <a:t>94 (74–119)</a:t>
+                        <a:t>97 (78–120)</a:t>
                       </a:r>
                       <a:endParaRPr lang="en-US" sz="1100" dirty="0">
                         <a:latin typeface="Calibri" charset="0"/>
@@ -13361,7 +13415,7 @@
                           <a:ea typeface="Calibri" pitchFamily="34" charset="-122"/>
                           <a:cs typeface="Calibri" pitchFamily="34" charset="-120"/>
                         </a:rPr>
-                        <a:t>25</a:t>
+                        <a:t>23</a:t>
                       </a:r>
                       <a:endParaRPr lang="en-US" sz="1100" dirty="0">
                         <a:latin typeface="Calibri" charset="0"/>
@@ -13493,7 +13547,7 @@
                           <a:ea typeface="Calibri" pitchFamily="34" charset="-122"/>
                           <a:cs typeface="Calibri" pitchFamily="34" charset="-120"/>
                         </a:rPr>
-                        <a:t>85 (59–132)</a:t>
+                        <a:t>88 (62–132)</a:t>
                       </a:r>
                       <a:endParaRPr lang="en-US" sz="1100" dirty="0">
                         <a:latin typeface="Calibri" charset="0"/>
@@ -13558,7 +13612,7 @@
                           <a:ea typeface="Calibri" pitchFamily="34" charset="-122"/>
                           <a:cs typeface="Calibri" pitchFamily="34" charset="-120"/>
                         </a:rPr>
-                        <a:t>100 (85–125)</a:t>
+                        <a:t>104 (89–127)</a:t>
                       </a:r>
                       <a:endParaRPr lang="en-US" sz="1100" dirty="0">
                         <a:latin typeface="Calibri" charset="0"/>
@@ -13623,7 +13677,7 @@
                           <a:ea typeface="Calibri" pitchFamily="34" charset="-122"/>
                           <a:cs typeface="Calibri" pitchFamily="34" charset="-120"/>
                         </a:rPr>
-                        <a:t>34</a:t>
+                        <a:t>32</a:t>
                       </a:r>
                       <a:endParaRPr lang="en-US" sz="1100" dirty="0">
                         <a:latin typeface="Calibri" charset="0"/>
@@ -14514,7 +14568,7 @@
                   <a:schemeClr val="tx1"/>
                 </a:solidFill>
               </a:rPr>
-              <a:t>Robust: across 11 settings of the cut (spacing, row band, axis tolerance, run length) generated ↔ clinic stays at 27–36 mm</a:t>
+              <a:t>Robust: across 11 settings of the cut (spacing, row band, axis tolerance, run length) generated ↔ clinic stays at 31–41 mm</a:t>
             </a:r>
             <a:endParaRPr lang="en-US" sz="1250" dirty="0"/>
           </a:p>
@@ -15685,7 +15739,7 @@
                           <a:ea typeface="Calibri" pitchFamily="34" charset="-122"/>
                           <a:cs typeface="Calibri" pitchFamily="34" charset="-120"/>
                         </a:rPr>
-                        <a:t>71</a:t>
+                        <a:t>66</a:t>
                       </a:r>
                       <a:endParaRPr lang="en-US" sz="1100" dirty="0">
                         <a:latin typeface="Calibri" charset="0"/>
@@ -15750,7 +15804,7 @@
                           <a:ea typeface="Calibri" pitchFamily="34" charset="-122"/>
                           <a:cs typeface="Calibri" pitchFamily="34" charset="-120"/>
                         </a:rPr>
-                        <a:t>11.3 (4.1–19.1)</a:t>
+                        <a:t>16.7 (8.3–26.6)</a:t>
                       </a:r>
                       <a:endParaRPr lang="en-US" sz="1100" dirty="0">
                         <a:latin typeface="Calibri" charset="0"/>
@@ -15815,7 +15869,7 @@
                           <a:ea typeface="Calibri" pitchFamily="34" charset="-122"/>
                           <a:cs typeface="Calibri" pitchFamily="34" charset="-120"/>
                         </a:rPr>
-                        <a:t>11.4 (9.6–13.3)</a:t>
+                        <a:t>12.7 (10.7–14.7)</a:t>
                       </a:r>
                       <a:endParaRPr lang="en-US" sz="1100" dirty="0">
                         <a:latin typeface="Calibri" charset="0"/>
@@ -15947,7 +16001,7 @@
                           <a:ea typeface="Calibri" pitchFamily="34" charset="-122"/>
                           <a:cs typeface="Calibri" pitchFamily="34" charset="-120"/>
                         </a:rPr>
-                        <a:t>147</a:t>
+                        <a:t>132</a:t>
                       </a:r>
                       <a:endParaRPr lang="en-US" sz="1100" dirty="0">
                         <a:latin typeface="Calibri" charset="0"/>
@@ -16012,7 +16066,7 @@
                           <a:ea typeface="Calibri" pitchFamily="34" charset="-122"/>
                           <a:cs typeface="Calibri" pitchFamily="34" charset="-120"/>
                         </a:rPr>
-                        <a:t>12.2 (6.5–18.8)</a:t>
+                        <a:t>11.4 (5.0–18.4)</a:t>
                       </a:r>
                       <a:endParaRPr lang="en-US" sz="1100" dirty="0">
                         <a:latin typeface="Calibri" charset="0"/>
@@ -16077,7 +16131,7 @@
                           <a:ea typeface="Calibri" pitchFamily="34" charset="-122"/>
                           <a:cs typeface="Calibri" pitchFamily="34" charset="-120"/>
                         </a:rPr>
-                        <a:t>10.9 (9.4–12.5)</a:t>
+                        <a:t>13.5 (11.8–15.4)</a:t>
                       </a:r>
                       <a:endParaRPr lang="en-US" sz="1100" dirty="0">
                         <a:latin typeface="Calibri" charset="0"/>
@@ -16209,7 +16263,7 @@
                           <a:ea typeface="Calibri" pitchFamily="34" charset="-122"/>
                           <a:cs typeface="Calibri" pitchFamily="34" charset="-120"/>
                         </a:rPr>
-                        <a:t>203</a:t>
+                        <a:t>212</a:t>
                       </a:r>
                       <a:endParaRPr lang="en-US" sz="1100" dirty="0">
                         <a:latin typeface="Calibri" charset="0"/>
@@ -16274,7 +16328,7 @@
                           <a:ea typeface="Calibri" pitchFamily="34" charset="-122"/>
                           <a:cs typeface="Calibri" pitchFamily="34" charset="-120"/>
                         </a:rPr>
-                        <a:t>10.3 (5.7–15.6)</a:t>
+                        <a:t>15.6 (10.5–21.1)</a:t>
                       </a:r>
                       <a:endParaRPr lang="en-US" sz="1100" dirty="0">
                         <a:latin typeface="Calibri" charset="0"/>
@@ -16339,7 +16393,7 @@
                           <a:ea typeface="Calibri" pitchFamily="34" charset="-122"/>
                           <a:cs typeface="Calibri" pitchFamily="34" charset="-120"/>
                         </a:rPr>
-                        <a:t>10.8 (9.6–12.0)</a:t>
+                        <a:t>13.8 (12.4–15.2)</a:t>
                       </a:r>
                       <a:endParaRPr lang="en-US" sz="1100" dirty="0">
                         <a:latin typeface="Calibri" charset="0"/>
@@ -16471,7 +16525,7 @@
                           <a:ea typeface="Calibri" pitchFamily="34" charset="-122"/>
                           <a:cs typeface="Calibri" pitchFamily="34" charset="-120"/>
                         </a:rPr>
-                        <a:t>257</a:t>
+                        <a:t>284</a:t>
                       </a:r>
                       <a:endParaRPr lang="en-US" sz="1100" dirty="0">
                         <a:latin typeface="Calibri" charset="0"/>
@@ -16536,7 +16590,7 @@
                           <a:ea typeface="Calibri" pitchFamily="34" charset="-122"/>
                           <a:cs typeface="Calibri" pitchFamily="34" charset="-120"/>
                         </a:rPr>
-                        <a:t>13.6 (8.4–19.3)</a:t>
+                        <a:t>16.9 (11.8–22.1)</a:t>
                       </a:r>
                       <a:endParaRPr lang="en-US" sz="1100" dirty="0">
                         <a:latin typeface="Calibri" charset="0"/>
@@ -16601,7 +16655,7 @@
                           <a:ea typeface="Calibri" pitchFamily="34" charset="-122"/>
                           <a:cs typeface="Calibri" pitchFamily="34" charset="-120"/>
                         </a:rPr>
-                        <a:t>10.4 (9.4–11.4)</a:t>
+                        <a:t>13.2 (12.0–14.4)</a:t>
                       </a:r>
                       <a:endParaRPr lang="en-US" sz="1100" dirty="0">
                         <a:latin typeface="Calibri" charset="0"/>
@@ -16733,7 +16787,7 @@
                           <a:ea typeface="Calibri" pitchFamily="34" charset="-122"/>
                           <a:cs typeface="Calibri" pitchFamily="34" charset="-120"/>
                         </a:rPr>
-                        <a:t>391</a:t>
+                        <a:t>365</a:t>
                       </a:r>
                       <a:endParaRPr lang="en-US" sz="1100" dirty="0">
                         <a:latin typeface="Calibri" charset="0"/>
@@ -16798,7 +16852,7 @@
                           <a:ea typeface="Calibri" pitchFamily="34" charset="-122"/>
                           <a:cs typeface="Calibri" pitchFamily="34" charset="-120"/>
                         </a:rPr>
-                        <a:t>9.2 (6.1–12.6)</a:t>
+                        <a:t>11.5 (7.3–16.0)</a:t>
                       </a:r>
                       <a:endParaRPr lang="en-US" sz="1100" dirty="0">
                         <a:latin typeface="Calibri" charset="0"/>
@@ -16863,7 +16917,7 @@
                           <a:ea typeface="Calibri" pitchFamily="34" charset="-122"/>
                           <a:cs typeface="Calibri" pitchFamily="34" charset="-120"/>
                         </a:rPr>
-                        <a:t>10.5 (9.6–11.5)</a:t>
+                        <a:t>14.7 (13.5–15.9)</a:t>
                       </a:r>
                       <a:endParaRPr lang="en-US" sz="1100" dirty="0">
                         <a:latin typeface="Calibri" charset="0"/>
@@ -16995,7 +17049,7 @@
                           <a:ea typeface="Calibri" pitchFamily="34" charset="-122"/>
                           <a:cs typeface="Calibri" pitchFamily="34" charset="-120"/>
                         </a:rPr>
-                        <a:t>410</a:t>
+                        <a:t>366</a:t>
                       </a:r>
                       <a:endParaRPr lang="en-US" sz="1100" dirty="0">
                         <a:latin typeface="Calibri" charset="0"/>
@@ -17060,7 +17114,7 @@
                           <a:ea typeface="Calibri" pitchFamily="34" charset="-122"/>
                           <a:cs typeface="Calibri" pitchFamily="34" charset="-120"/>
                         </a:rPr>
-                        <a:t>11.5 (7.9–15.4)</a:t>
+                        <a:t>10.7 (7.2–14.5)</a:t>
                       </a:r>
                       <a:endParaRPr lang="en-US" sz="1100" dirty="0">
                         <a:latin typeface="Calibri" charset="0"/>
@@ -17125,7 +17179,7 @@
                           <a:ea typeface="Calibri" pitchFamily="34" charset="-122"/>
                           <a:cs typeface="Calibri" pitchFamily="34" charset="-120"/>
                         </a:rPr>
-                        <a:t>10.8 (9.9–11.8)</a:t>
+                        <a:t>14.3 (13.3–15.4)</a:t>
                       </a:r>
                       <a:endParaRPr lang="en-US" sz="1100" dirty="0">
                         <a:latin typeface="Calibri" charset="0"/>
@@ -17257,7 +17311,7 @@
                           <a:ea typeface="Calibri" pitchFamily="34" charset="-122"/>
                           <a:cs typeface="Calibri" pitchFamily="34" charset="-120"/>
                         </a:rPr>
-                        <a:t>465</a:t>
+                        <a:t>517</a:t>
                       </a:r>
                       <a:endParaRPr lang="en-US" sz="1100" dirty="0">
                         <a:latin typeface="Calibri" charset="0"/>
@@ -17322,7 +17376,7 @@
                           <a:ea typeface="Calibri" pitchFamily="34" charset="-122"/>
                           <a:cs typeface="Calibri" pitchFamily="34" charset="-120"/>
                         </a:rPr>
-                        <a:t>10.8 (7.5–14.1)</a:t>
+                        <a:t>17.2 (13.4–21.1)</a:t>
                       </a:r>
                       <a:endParaRPr lang="en-US" sz="1100" dirty="0">
                         <a:latin typeface="Calibri" charset="0"/>
@@ -17387,7 +17441,7 @@
                           <a:ea typeface="Calibri" pitchFamily="34" charset="-122"/>
                           <a:cs typeface="Calibri" pitchFamily="34" charset="-120"/>
                         </a:rPr>
-                        <a:t>11.0 (10.1–11.8)</a:t>
+                        <a:t>14.9 (13.9–16.0)</a:t>
                       </a:r>
                       <a:endParaRPr lang="en-US" sz="1100" dirty="0">
                         <a:latin typeface="Calibri" charset="0"/>
@@ -17519,7 +17573,7 @@
                           <a:ea typeface="Calibri" pitchFamily="34" charset="-122"/>
                           <a:cs typeface="Calibri" pitchFamily="34" charset="-120"/>
                         </a:rPr>
-                        <a:t>585</a:t>
+                        <a:t>546</a:t>
                       </a:r>
                       <a:endParaRPr lang="en-US" sz="1100" dirty="0">
                         <a:latin typeface="Calibri" charset="0"/>
@@ -17584,7 +17638,7 @@
                           <a:ea typeface="Calibri" pitchFamily="34" charset="-122"/>
                           <a:cs typeface="Calibri" pitchFamily="34" charset="-120"/>
                         </a:rPr>
-                        <a:t>13.3 (9.8–17.1)</a:t>
+                        <a:t>15.2 (11.7–19.1)</a:t>
                       </a:r>
                       <a:endParaRPr lang="en-US" sz="1100" dirty="0">
                         <a:latin typeface="Calibri" charset="0"/>
@@ -17649,7 +17703,7 @@
                           <a:ea typeface="Calibri" pitchFamily="34" charset="-122"/>
                           <a:cs typeface="Calibri" pitchFamily="34" charset="-120"/>
                         </a:rPr>
-                        <a:t>11.2 (10.4–12.0)</a:t>
+                        <a:t>14.4 (13.5–15.4)</a:t>
                       </a:r>
                       <a:endParaRPr lang="en-US" sz="1100" dirty="0">
                         <a:latin typeface="Calibri" charset="0"/>
@@ -18087,7 +18141,7 @@
                           <a:ea typeface="Calibri" pitchFamily="34" charset="-122"/>
                           <a:cs typeface="Calibri" pitchFamily="34" charset="-120"/>
                         </a:rPr>
-                        <a:t>11.6</a:t>
+                        <a:t>14.5</a:t>
                       </a:r>
                       <a:endParaRPr lang="en-US" sz="1100" dirty="0">
                         <a:latin typeface="Calibri" charset="0"/>
@@ -18152,7 +18206,7 @@
                           <a:ea typeface="Calibri" pitchFamily="34" charset="-122"/>
                           <a:cs typeface="Calibri" pitchFamily="34" charset="-120"/>
                         </a:rPr>
-                        <a:t>12.9</a:t>
+                        <a:t>19.8</a:t>
                       </a:r>
                       <a:endParaRPr lang="en-US" sz="1100" dirty="0">
                         <a:latin typeface="Calibri" charset="0"/>
@@ -18217,7 +18271,7 @@
                           <a:ea typeface="Calibri" pitchFamily="34" charset="-122"/>
                           <a:cs typeface="Calibri" pitchFamily="34" charset="-120"/>
                         </a:rPr>
-                        <a:t>12.9</a:t>
+                        <a:t>19.8</a:t>
                       </a:r>
                       <a:endParaRPr lang="en-US" sz="1100" dirty="0">
                         <a:latin typeface="Calibri" charset="0"/>
@@ -18349,7 +18403,7 @@
                           <a:ea typeface="Calibri" pitchFamily="34" charset="-122"/>
                           <a:cs typeface="Calibri" pitchFamily="34" charset="-120"/>
                         </a:rPr>
-                        <a:t>11.6</a:t>
+                        <a:t>14.5</a:t>
                       </a:r>
                       <a:endParaRPr lang="en-US" sz="1100" dirty="0">
                         <a:latin typeface="Calibri" charset="0"/>
@@ -18414,7 +18468,7 @@
                           <a:ea typeface="Calibri" pitchFamily="34" charset="-122"/>
                           <a:cs typeface="Calibri" pitchFamily="34" charset="-120"/>
                         </a:rPr>
-                        <a:t>16.4</a:t>
+                        <a:t>22.0</a:t>
                       </a:r>
                       <a:endParaRPr lang="en-US" sz="1100" dirty="0">
                         <a:latin typeface="Calibri" charset="0"/>
@@ -18479,7 +18533,7 @@
                           <a:ea typeface="Calibri" pitchFamily="34" charset="-122"/>
                           <a:cs typeface="Calibri" pitchFamily="34" charset="-120"/>
                         </a:rPr>
-                        <a:t>16.4</a:t>
+                        <a:t>22.0</a:t>
                       </a:r>
                       <a:endParaRPr lang="en-US" sz="1100" dirty="0">
                         <a:latin typeface="Calibri" charset="0"/>
@@ -18611,7 +18665,7 @@
                           <a:ea typeface="Calibri" pitchFamily="34" charset="-122"/>
                           <a:cs typeface="Calibri" pitchFamily="34" charset="-120"/>
                         </a:rPr>
-                        <a:t>6.2</a:t>
+                        <a:t>7.2</a:t>
                       </a:r>
                       <a:endParaRPr lang="en-US" sz="1100" dirty="0">
                         <a:latin typeface="Calibri" charset="0"/>
@@ -18676,7 +18730,7 @@
                           <a:ea typeface="Calibri" pitchFamily="34" charset="-122"/>
                           <a:cs typeface="Calibri" pitchFamily="34" charset="-120"/>
                         </a:rPr>
-                        <a:t>7.5</a:t>
+                        <a:t>8.2</a:t>
                       </a:r>
                       <a:endParaRPr lang="en-US" sz="1100" dirty="0">
                         <a:latin typeface="Calibri" charset="0"/>
@@ -18741,7 +18795,7 @@
                           <a:ea typeface="Calibri" pitchFamily="34" charset="-122"/>
                           <a:cs typeface="Calibri" pitchFamily="34" charset="-120"/>
                         </a:rPr>
-                        <a:t>7.5</a:t>
+                        <a:t>8.2</a:t>
                       </a:r>
                       <a:endParaRPr lang="en-US" sz="1100" dirty="0">
                         <a:latin typeface="Calibri" charset="0"/>
@@ -19146,7 +19200,7 @@
                           <a:ea typeface="Calibri" pitchFamily="34" charset="-122"/>
                           <a:cs typeface="Calibri" pitchFamily="34" charset="-120"/>
                         </a:rPr>
-                        <a:t>12,930</a:t>
+                        <a:t>12,590</a:t>
                       </a:r>
                       <a:endParaRPr lang="en-US" sz="1100" dirty="0">
                         <a:latin typeface="Calibri" charset="0"/>
@@ -19211,7 +19265,7 @@
                           <a:ea typeface="Calibri" pitchFamily="34" charset="-122"/>
                           <a:cs typeface="Calibri" pitchFamily="34" charset="-120"/>
                         </a:rPr>
-                        <a:t>10.8 (10.2–11.5)</a:t>
+                        <a:t>14.4 (13.7–15.2)</a:t>
                       </a:r>
                       <a:endParaRPr lang="en-US" sz="1100" dirty="0">
                         <a:latin typeface="Calibri" charset="0"/>
@@ -19343,7 +19397,7 @@
                           <a:ea typeface="Calibri" pitchFamily="34" charset="-122"/>
                           <a:cs typeface="Calibri" pitchFamily="34" charset="-120"/>
                         </a:rPr>
-                        <a:t>1,254</a:t>
+                        <a:t>1,295</a:t>
                       </a:r>
                       <a:endParaRPr lang="en-US" sz="1100" dirty="0">
                         <a:latin typeface="Calibri" charset="0"/>
@@ -19408,7 +19462,7 @@
                           <a:ea typeface="Calibri" pitchFamily="34" charset="-122"/>
                           <a:cs typeface="Calibri" pitchFamily="34" charset="-120"/>
                         </a:rPr>
-                        <a:t>9.4 (7.4–11.4)</a:t>
+                        <a:t>13.2 (11.2–15.6)</a:t>
                       </a:r>
                       <a:endParaRPr lang="en-US" sz="1100" dirty="0">
                         <a:latin typeface="Calibri" charset="0"/>
@@ -19540,7 +19594,7 @@
                           <a:ea typeface="Calibri" pitchFamily="34" charset="-122"/>
                           <a:cs typeface="Calibri" pitchFamily="34" charset="-120"/>
                         </a:rPr>
-                        <a:t>1,271</a:t>
+                        <a:t>1,200</a:t>
                       </a:r>
                       <a:endParaRPr lang="en-US" sz="1100" dirty="0">
                         <a:latin typeface="Calibri" charset="0"/>
@@ -19605,7 +19659,7 @@
                           <a:ea typeface="Calibri" pitchFamily="34" charset="-122"/>
                           <a:cs typeface="Calibri" pitchFamily="34" charset="-120"/>
                         </a:rPr>
-                        <a:t>9.0 (7.2–11.0)</a:t>
+                        <a:t>13.8 (11.5–16.4)</a:t>
                       </a:r>
                       <a:endParaRPr lang="en-US" sz="1100" dirty="0">
                         <a:latin typeface="Calibri" charset="0"/>
@@ -19737,7 +19791,7 @@
                           <a:ea typeface="Calibri" pitchFamily="34" charset="-122"/>
                           <a:cs typeface="Calibri" pitchFamily="34" charset="-120"/>
                         </a:rPr>
-                        <a:t>2,529</a:t>
+                        <a:t>2,488</a:t>
                       </a:r>
                       <a:endParaRPr lang="en-US" sz="1100" dirty="0">
                         <a:latin typeface="Calibri" charset="0"/>
@@ -19802,7 +19856,7 @@
                           <a:ea typeface="Calibri" pitchFamily="34" charset="-122"/>
                           <a:cs typeface="Calibri" pitchFamily="34" charset="-120"/>
                         </a:rPr>
-                        <a:t>11.6 (10.1–13.0)</a:t>
+                        <a:t>14.5 (12.7–16.2)</a:t>
                       </a:r>
                       <a:endParaRPr lang="en-US" sz="1100" dirty="0">
                         <a:latin typeface="Calibri" charset="0"/>
@@ -19907,7 +19961,7 @@
                   <a:schemeClr val="tx1"/>
                 </a:solidFill>
               </a:rPr>
-              <a:t>Population: 2,000 freshly generated contexts per tier; overall 10.8 % (95 % CI 10.5–11.2)</a:t>
+              <a:t>Population: 2,000 freshly generated contexts per tier; overall 14.3 % (95 % CI 13.8–14.7)</a:t>
             </a:r>
             <a:endParaRPr lang="en-US" sz="1200" dirty="0"/>
           </a:p>
@@ -20112,7 +20166,7 @@
                 <a:ea typeface="Courier New" pitchFamily="34" charset="-122"/>
                 <a:cs typeface="Courier New" pitchFamily="34" charset="-120"/>
               </a:rPr>
-              <a:t>{"context_id": "mep_57", "tier": "C2",</a:t>
+              <a:t>{"context_id": "mep_9", "tier": "C2",</a:t>
             </a:r>
             <a:endParaRPr lang="en-US" sz="1050" dirty="0"/>
           </a:p>
@@ -20146,7 +20200,7 @@
                 <a:ea typeface="Courier New" pitchFamily="34" charset="-122"/>
                 <a:cs typeface="Courier New" pitchFamily="34" charset="-120"/>
               </a:rPr>
-              <a:t> "n_elements": 2, "n_levels": 1, "total_load_kN": 1.12, "bundle_width_mm": 588.0,</a:t>
+              <a:t> "n_elements": 2, "n_levels": 1, "total_load_kN": 0.76, "bundle_width_mm": 1527.0,</a:t>
             </a:r>
             <a:endParaRPr lang="en-US" sz="1050" dirty="0"/>
           </a:p>
@@ -20180,7 +20234,7 @@
                 <a:ea typeface="Courier New" pitchFamily="34" charset="-122"/>
                 <a:cs typeface="Courier New" pitchFamily="34" charset="-120"/>
               </a:rPr>
-              <a:t>  {"kind": "cable_tray", "service": "tray", "trade": "electrical", "shape": "rect",</a:t>
+              <a:t>  {"kind": "duct", "service": "duct", "trade": "ventilation", "shape": "rect",</a:t>
             </a:r>
             <a:endParaRPr lang="en-US" sz="1050" dirty="0"/>
           </a:p>
@@ -20197,7 +20251,7 @@
                 <a:ea typeface="Courier New" pitchFamily="34" charset="-122"/>
                 <a:cs typeface="Courier New" pitchFamily="34" charset="-120"/>
               </a:rPr>
-              <a:t>   "label": "300 tray", "width_mm": 300.0, "height_mm": 60.0, "insulation_mm": 0.0,</a:t>
+              <a:t>   "label": "1000x500 duct", "width_mm": 1000.0, "height_mm": 500.0, "insulation_mm": 0.0,</a:t>
             </a:r>
             <a:endParaRPr lang="en-US" sz="1050" dirty="0"/>
           </a:p>
@@ -20214,7 +20268,7 @@
                 <a:ea typeface="Courier New" pitchFamily="34" charset="-122"/>
                 <a:cs typeface="Courier New" pitchFamily="34" charset="-120"/>
               </a:rPr>
-              <a:t>   "load_kN": 1.08, "span_m": 2.0, "load_kN_per_m": 0.5396,</a:t>
+              <a:t>   "load_kN": 0.72, "span_m": 2.4, "load_kN_per_m": 0.3002,</a:t>
             </a:r>
             <a:endParaRPr lang="en-US" sz="1050" dirty="0"/>
           </a:p>
@@ -20231,7 +20285,7 @@
                 <a:ea typeface="Courier New" pitchFamily="34" charset="-122"/>
                 <a:cs typeface="Courier New" pitchFamily="34" charset="-120"/>
               </a:rPr>
-              <a:t>   "level": 0, "along_mm": -144.0, "out_mm": 120.0},</a:t>
+              <a:t>   "level": 0, "along_mm": -263.5, "out_mm": 340.0},</a:t>
             </a:r>
             <a:endParaRPr lang="en-US" sz="1050" dirty="0"/>
           </a:p>
@@ -20248,7 +20302,7 @@
                 <a:ea typeface="Courier New" pitchFamily="34" charset="-122"/>
                 <a:cs typeface="Courier New" pitchFamily="34" charset="-120"/>
               </a:rPr>
-              <a:t>  {"kind": "pipe", "service": "heating", "trade": "heating", "shape": "round",</a:t>
+              <a:t>  {"kind": "pipe", "service": "domestic_cold", "trade": "domestic", "shape": "round",</a:t>
             </a:r>
             <a:endParaRPr lang="en-US" sz="1050" dirty="0"/>
           </a:p>
@@ -20265,7 +20319,7 @@
                 <a:ea typeface="Courier New" pitchFamily="34" charset="-122"/>
                 <a:cs typeface="Courier New" pitchFamily="34" charset="-120"/>
               </a:rPr>
-              <a:t>   "label": "DN20", "width_mm": 26.9, "height_mm": 26.9, "insulation_mm": 20.0,</a:t>
+              <a:t>   "label": "DN20", "width_mm": 26.9, "height_mm": 26.9, "insulation_mm": 0.0,</a:t>
             </a:r>
             <a:endParaRPr lang="en-US" sz="1050" dirty="0"/>
           </a:p>
@@ -20299,7 +20353,7 @@
                 <a:ea typeface="Courier New" pitchFamily="34" charset="-122"/>
                 <a:cs typeface="Courier New" pitchFamily="34" charset="-120"/>
               </a:rPr>
-              <a:t>   "level": 0, "along_mm": 260.5, "out_mm": 156.2}</a:t>
+              <a:t>   "level": 0, "along_mm": 750.0, "out_mm": 341.3}</a:t>
             </a:r>
             <a:endParaRPr lang="en-US" sz="1050" dirty="0"/>
           </a:p>
@@ -23050,8 +23104,8 @@
         </p:blipFill>
         <p:spPr>
           <a:xfrm>
-            <a:off x="6309360" y="1582022"/>
-            <a:ext cx="5330952" cy="3511075"/>
+            <a:off x="6309360" y="1708403"/>
+            <a:ext cx="5330952" cy="3258315"/>
           </a:xfrm>
           <a:prstGeom prst="rect">
             <a:avLst/>
@@ -23066,7 +23120,7 @@
         </p:nvSpPr>
         <p:spPr>
           <a:xfrm>
-            <a:off x="6309360" y="5202826"/>
+            <a:off x="6309360" y="5076445"/>
             <a:ext cx="5330952" cy="685800"/>
           </a:xfrm>
           <a:prstGeom prst="rect">
@@ -26413,7 +26467,7 @@
                   <a:schemeClr val="tx1"/>
                 </a:solidFill>
               </a:rPr>
-              <a:t>Six trades: electrical 11,592, domestic water 5,889, heating 5,766, chilled water 4,129, sprinkler 2,200, ventilation 1,908 elements</a:t>
+              <a:t>Six trades: electrical 10,494, domestic water 5,725, heating 5,788, chilled water 3,987, sprinkler 2,073, ventilation 3,417 elements</a:t>
             </a:r>
             <a:endParaRPr lang="en-US" sz="1300" dirty="0"/>
           </a:p>

--- a/docs/CrossMEP_CIBW78_talk.pptx
+++ b/docs/CrossMEP_CIBW78_talk.pptx
@@ -127,19 +127,19 @@
   <p:extLst>
     <p:ext uri="{521415D9-36F7-43E2-AB2F-B90AF26B5E84}">
       <p14:sectionLst xmlns:p14="http://schemas.microsoft.com/office/powerpoint/2010/main">
-        <p14:section name="Opening" id="{3ecd03bf-27e8-cac9-d6fc-a4c6572562ce}">
+        <p14:section name="Opening" id="{021b6d9c-56d5-f91f-1381-3a955c152bcd}">
           <p14:sldIdLst>
             <p14:sldId id="256"/>
           </p14:sldIdLst>
         </p14:section>
-        <p14:section name="Motivation" id="{47d5fc43-069d-ad00-3223-c7cb4e1e356f}">
+        <p14:section name="Motivation" id="{02f0e3e0-5816-8845-29ae-2722d9f0aa4d}">
           <p14:sldIdLst>
             <p14:sldId id="257"/>
             <p14:sldId id="258"/>
             <p14:sldId id="259"/>
           </p14:sldIdLst>
         </p14:section>
-        <p14:section name="The dataset" id="{cf077af1-df7b-ee94-fe34-93b4edc9517d}">
+        <p14:section name="The dataset" id="{57215155-aa2d-eff5-a6a3-5a61810bd123}">
           <p14:sldIdLst>
             <p14:sldId id="260"/>
             <p14:sldId id="261"/>
@@ -148,14 +148,14 @@
             <p14:sldId id="264"/>
           </p14:sldIdLst>
         </p14:section>
-        <p14:section name="Experiments" id="{6f77a037-3f3e-cf5c-b7be-10f2ed2d4500}">
+        <p14:section name="Experiments" id="{a70baab3-c231-ad61-af91-e9928648d7bf}">
           <p14:sldIdLst>
             <p14:sldId id="265"/>
             <p14:sldId id="266"/>
             <p14:sldId id="267"/>
           </p14:sldIdLst>
         </p14:section>
-        <p14:section name="Use" id="{50420905-d810-d3e8-c453-8db36bb35d74}">
+        <p14:section name="Use" id="{6816cbe2-03ef-006b-635b-fd72e3d5f12b}">
           <p14:sldIdLst>
             <p14:sldId id="268"/>
             <p14:sldId id="269"/>
@@ -163,7 +163,7 @@
             <p14:sldId id="271"/>
           </p14:sldIdLst>
         </p14:section>
-        <p14:section name="Appendix" id="{f19a98a8-2692-b28d-8571-0f5c497b70f5}">
+        <p14:section name="Appendix" id="{15802603-c737-0810-f18e-99de15b8193a}">
           <p14:sldIdLst>
             <p14:sldId id="272"/>
             <p14:sldId id="273"/>

--- a/docs/CrossMEP_CIBW78_talk.pptx
+++ b/docs/CrossMEP_CIBW78_talk.pptx
@@ -26,9 +26,10 @@
     <p:sldId id="274" r:id="rId20"/>
     <p:sldId id="275" r:id="rId21"/>
     <p:sldId id="276" r:id="rId22"/>
+    <p:sldId id="277" r:id="rId23"/>
   </p:sldIdLst>
   <p:notesMasterIdLst>
-    <p:notesMasterId r:id="rId23"/>
+    <p:notesMasterId r:id="rId24"/>
   </p:notesMasterIdLst>
   <p:sldSz cx="12192000" cy="6858000"/>
   <p:notesSz cx="6858000" cy="12192000"/>
@@ -127,49 +128,50 @@
   <p:extLst>
     <p:ext uri="{521415D9-36F7-43E2-AB2F-B90AF26B5E84}">
       <p14:sectionLst xmlns:p14="http://schemas.microsoft.com/office/powerpoint/2010/main">
-        <p14:section name="Opening" id="{021b6d9c-56d5-f91f-1381-3a955c152bcd}">
+        <p14:section name="Opening" id="{9c4030de-114d-c0e5-2726-f3fd4d80ce72}">
           <p14:sldIdLst>
             <p14:sldId id="256"/>
           </p14:sldIdLst>
         </p14:section>
-        <p14:section name="Motivation" id="{02f0e3e0-5816-8845-29ae-2722d9f0aa4d}">
+        <p14:section name="Motivation" id="{440fec81-15e4-8400-ac1c-88370ec92a30}">
           <p14:sldIdLst>
             <p14:sldId id="257"/>
             <p14:sldId id="258"/>
             <p14:sldId id="259"/>
+            <p14:sldId id="260"/>
           </p14:sldIdLst>
         </p14:section>
-        <p14:section name="The dataset" id="{57215155-aa2d-eff5-a6a3-5a61810bd123}">
+        <p14:section name="The dataset" id="{fbb90206-4df6-db85-45e7-00e33dbb79c2}">
           <p14:sldIdLst>
-            <p14:sldId id="260"/>
             <p14:sldId id="261"/>
             <p14:sldId id="262"/>
             <p14:sldId id="263"/>
             <p14:sldId id="264"/>
+            <p14:sldId id="265"/>
           </p14:sldIdLst>
         </p14:section>
-        <p14:section name="Experiments" id="{a70baab3-c231-ad61-af91-e9928648d7bf}">
+        <p14:section name="Experiments" id="{f17f2e08-4f9a-6e76-ba2f-aa957f1f4829}">
           <p14:sldIdLst>
-            <p14:sldId id="265"/>
             <p14:sldId id="266"/>
             <p14:sldId id="267"/>
+            <p14:sldId id="268"/>
           </p14:sldIdLst>
         </p14:section>
-        <p14:section name="Use" id="{6816cbe2-03ef-006b-635b-fd72e3d5f12b}">
+        <p14:section name="Use" id="{067e71b8-6d08-0ff0-feb5-621cf1b493f5}">
           <p14:sldIdLst>
-            <p14:sldId id="268"/>
             <p14:sldId id="269"/>
             <p14:sldId id="270"/>
             <p14:sldId id="271"/>
+            <p14:sldId id="272"/>
           </p14:sldIdLst>
         </p14:section>
-        <p14:section name="Appendix" id="{15802603-c737-0810-f18e-99de15b8193a}">
+        <p14:section name="Appendix" id="{6be03e17-062f-bf95-f71e-21b3fc8c0610}">
           <p14:sldIdLst>
-            <p14:sldId id="272"/>
             <p14:sldId id="273"/>
             <p14:sldId id="274"/>
             <p14:sldId id="275"/>
             <p14:sldId id="276"/>
+            <p14:sldId id="277"/>
           </p14:sldIdLst>
         </p14:section>
       </p14:sectionLst>
@@ -2113,7 +2115,7 @@
           <a:p>
             <a:r>
               <a:rPr lang="en-US" dirty="0"/>
-              <a:t>Now three analyses. The first is a design check, not a discovery: does difficulty grow with the tier? The count is fixed by construction, and load and congestion follow from the rules, so this shows the dataset behaves as designed. The load at the support rises with the tier, from about 0.3 to 2.0 kilonewtons. The closest gap narrows at every step, from 130 to about 51 millimeters. So: report methods tier by tier. (4:50)</a:t>
+              <a:t>Here's one benchmark context per tier. C1 is a single element, the most common support in any building. By C8 you have eight services on three rows. Within a tier everything else varies: kinds, trades, surfaces, stacking. So the element count is the one controlled axis of difficulty. And notice the walls: the section rotates, and electrical sits above water. (4:45)</a:t>
             </a:r>
             <a:endParaRPr lang="en-US" dirty="0"/>
           </a:p>
@@ -2201,7 +2203,7 @@
           <a:p>
             <a:r>
               <a:rPr lang="en-US" dirty="0"/>
-              <a:t>The second analysis is the one the generator could fail. Is the spacing realistic in a building it has never seen? The gap distribution was fitted on a residential duplex. We kept a second open building aside, a medical-dental clinic, cut it into sections every 250 millimeters, the way a context is defined, and measured the gaps between pipes running side by side. On the left, the clinic: generated gaps are close to measured ones, though not identical. On the right, the distances. Generator to clinic: 32 millimeters. That is above the 8 a perfect generator would show, so not a perfect match, but about as close as the duplex's own two models are to each other. A fixed 25-millimeter gap would be about 190 off. (5:20)</a:t>
+              <a:t>Now three analyses. The first is a design check, not a discovery: does difficulty grow with the tier? The count is fixed by construction, and load and congestion follow from the rules, so this shows the dataset behaves as designed. The load at the support rises with the tier, from about 0.3 to 2.0 kilonewtons. The closest gap narrows at every step, from 130 to about 51 millimeters. So: report methods tier by tier. (5:10)</a:t>
             </a:r>
             <a:endParaRPr lang="en-US" dirty="0"/>
           </a:p>
@@ -2289,7 +2291,7 @@
           <a:p>
             <a:r>
               <a:rPr lang="en-US" dirty="0"/>
-              <a:t>The third analysis is a use of the dataset, not a test of it: what must a catalog of clamps cover? Our paper's two-size catalog attaches 14.5 percent of the pipes, with an interval of 13 to 16, all one size, DN40. Load is never the limit, and trays, ducts and conduits aren't covered at all. On the right is what the dataset asks of any catalog: two well-placed sizes could attach 38 percent, six sizes 76, fifteen sizes every pipe. So 'what should the catalog contain' becomes a measurement. (6:10)</a:t>
+              <a:t>The second analysis is the one the generator could fail. Is the spacing realistic in a building it has never seen? The gap distribution was fitted on a residential duplex. We kept a second open building aside, a medical-dental clinic, cut it into sections every 250 millimeters, the way a context is defined, and measured the gaps between pipes running side by side. On the left, the clinic: generated gaps are close to measured ones, though not identical. On the right, the distances. Generator to clinic: 32 millimeters. That is above the 8 a perfect generator would show, so not a perfect match, but about as close as the duplex's own two models are to each other. A fixed 25-millimeter gap would be about 190 off. (5:40)</a:t>
             </a:r>
             <a:endParaRPr lang="en-US" dirty="0"/>
           </a:p>
@@ -2377,7 +2379,7 @@
           <a:p>
             <a:r>
               <a:rPr lang="en-US" dirty="0"/>
-              <a:t>Let me show it. This is the Generator Studio. I choose what crosses the hanger, a tier or an exact mix, and a seed. Out comes the section a support designer receives, drawn the way an engineer would issue it: every service at true size, its level below the slab, its load, the closest clear gap, and the same run in 3D. Every section is a stored output of the released generator, with the Python call that reproduces it. Scan the code to try it yourself. [Live: switch to the studio, click C3, then Generate another twice, then Exact mix with a duct. If the demo fails, stay on this slide; slide 17 shows two more sections. Before the talk: open the studio once with internet, set its link sharing to public, scan the QR from a phone not logged in.] (6:50)</a:t>
+              <a:t>The third analysis is a use of the dataset, not a test of it: what must a catalog of clamps cover? Our paper's two-size catalog attaches 14.5 percent of the pipes, with an interval of 13 to 16, all one size, DN40. Load is never the limit, and trays, ducts and conduits aren't covered at all. On the right is what the dataset asks of any catalog: two well-placed sizes could attach 38 percent, six sizes 76, fifteen sizes every pipe. So 'what should the catalog contain' becomes a measurement. (6:35)</a:t>
             </a:r>
             <a:endParaRPr lang="en-US" dirty="0"/>
           </a:p>
@@ -2465,7 +2467,7 @@
           <a:p>
             <a:r>
               <a:rPr lang="en-US" dirty="0"/>
-              <a:t>Using it takes a few lines: load a split, filter by composition, or generate your own mix. Because there are no labels, the same files serve reinforcement learning, constraint programming, and benchmarking people. We ship the scoring too. Train on the generator, from C1 up to C8. Evaluate on the benchmark, the same 125 contexts per tier for every method. Report per tier, with 95 percent intervals and paired tests. (8:00)</a:t>
+              <a:t>Let me show it. This is the Generator Studio. I choose what crosses the hanger, a tier or an exact mix, and a seed. Out comes the section a support designer receives, drawn the way an engineer would issue it: every service at true size, its level below the slab, its load, the closest clear gap, and the same run in 3D. Every section is a stored output of the released generator, with the Python call that reproduces it. Scan the code to try it yourself. [Live: switch to the studio, click C3, then Generate another twice, then Exact mix with a duct. If the demo fails, stay on this slide; slide 18 shows two more sections. Before the talk: open the studio once with internet, set its link sharing to public, scan the QR from a phone not logged in.] (7:10)</a:t>
             </a:r>
             <a:endParaRPr lang="en-US" dirty="0"/>
           </a:p>
@@ -2553,7 +2555,7 @@
           <a:p>
             <a:r>
               <a:rPr lang="en-US" dirty="0"/>
-              <a:t>A word on scope. CrossMEP is one section at one support. Routing and branches are outside it, but the span is recorded, so a method can vary it. Pipe spacing was checked on two open buildings; the rest rests on practice and standards, and the trade mix is a design choice. It's not for structural design of real installations. Next: a public checker, with best-known costs, so we can compare methods on the answer; the catalog as an input; and a real test set from commercial projects, with supports designed by engineers. That's where I'd value your eye. (8:30)</a:t>
+              <a:t>Using it takes a few lines: load a split, filter by composition, or generate your own mix. Because there are no labels, the same files serve reinforcement learning, constraint programming, and benchmarking people. We ship the scoring too. Train on the generator, from C1 up to C8. Evaluate on the benchmark, the same 125 contexts per tier for every method. Report per tier, with 95 percent intervals and paired tests. (8:20)</a:t>
             </a:r>
             <a:endParaRPr lang="en-US" dirty="0"/>
           </a:p>
@@ -2641,7 +2643,7 @@
           <a:p>
             <a:r>
               <a:rPr lang="en-US" dirty="0"/>
-              <a:t>To sum up: CrossMEP is the brief, not the answer. Seven thousand support-design problems, every constant sourced or declared a design choice, pipe spacing checked on two open buildings, and all of it open. If you coordinate services or design supports, try the studio and tell me what looks wrong. Thank you. (9:10)</a:t>
+              <a:t>A word on scope. CrossMEP is one section at one support. Routing and branches are outside it, but the span is recorded, so a method can vary it. Pipe spacing was checked on two open buildings; the rest rests on practice and standards, and the trade mix is a design choice. It's not for structural design of real installations. Next: a public checker, with best-known costs, so we can compare methods on the answer; the catalog as an input; and a real test set from commercial projects, with supports designed by engineers. That's where I'd value your eye. (8:50)</a:t>
             </a:r>
             <a:endParaRPr lang="en-US" dirty="0"/>
           </a:p>
@@ -2729,7 +2731,7 @@
           <a:p>
             <a:r>
               <a:rPr lang="en-US" dirty="0"/>
-              <a:t>Backup for the live demo. Left: a wall section, six pipes in two rows, each labelled with its size, trade, insulation, offset from the wall and load at the support. Right: an exact mix on a slab, with a duct, a tray, conduits and pipes, their levels below the soffit and the closest clear gap.</a:t>
+              <a:t>To sum up: CrossMEP is the brief, not the answer. Seven thousand support-design problems, every constant sourced or declared a design choice, pipe spacing checked on two open buildings, and all of it open. If you coordinate services or design supports, try the studio and tell me what looks wrong. Thank you. (9:30)</a:t>
             </a:r>
             <a:endParaRPr lang="en-US" dirty="0"/>
           </a:p>
@@ -2817,7 +2819,7 @@
           <a:p>
             <a:r>
               <a:rPr lang="en-US" dirty="0"/>
-              <a:t>Backup: per-tier medians on the benchmark split, the distance to the held-out building, and the trend statistics behind experiment 1.</a:t>
+              <a:t>Backup for the live demo. Left: a wall section, six pipes in two rows, each labelled with its size, trade, insulation, offset from the wall and load at the support. Right: an exact mix on a slab, with a duct, a tray, conduits and pipes, their levels below the soffit and the closest clear gap.</a:t>
             </a:r>
             <a:endParaRPr lang="en-US" dirty="0"/>
           </a:p>
@@ -2905,7 +2907,7 @@
           <a:p>
             <a:r>
               <a:rPr lang="en-US" dirty="0"/>
-              <a:t>Backup for questions on experiment 2: sample sizes, both weightings, the noise floor and the sensitivity of the result to the way the sections are cut.</a:t>
+              <a:t>Backup: per-tier medians on the benchmark split, the distance to the held-out building, and the trend statistics behind experiment 1.</a:t>
             </a:r>
             <a:endParaRPr lang="en-US" dirty="0"/>
           </a:p>
@@ -3081,7 +3083,7 @@
           <a:p>
             <a:r>
               <a:rPr lang="en-US" dirty="0"/>
-              <a:t>Backup for questions on experiment 3. Per tier, the benchmark has only 125 contexts, so its intervals are wide; the population estimate from two thousand generated contexts per tier shows the tiers are about equal. The headline depends on the attach-diameter rule and on bin-edge tolerance because one nominal size, DN100, sits 0.3 millimetres outside a bin. Only size and capacity are tested - clearance, insert orientation and anchors are not - so the coverage is an upper bound on what can be installed.</a:t>
+              <a:t>Backup for questions on experiment 2: sample sizes, both weightings, the noise floor and the sensitivity of the result to the way the sections are cut.</a:t>
             </a:r>
             <a:endParaRPr lang="en-US" dirty="0"/>
           </a:p>
@@ -3169,7 +3171,7 @@
           <a:p>
             <a:r>
               <a:rPr lang="en-US" dirty="0"/>
-              <a:t>Backup: what one stored context looks like - plain JSON, one object per context.</a:t>
+              <a:t>Backup for questions on experiment 3. Per tier, the benchmark has only 125 contexts, so its intervals are wide; the population estimate from two thousand generated contexts per tier shows the tiers are about equal. The headline depends on the attach-diameter rule and on bin-edge tolerance because one nominal size, DN100, sits 0.3 millimetres outside a bin. Only size and capacity are tested - clearance, insert orientation and anchors are not - so the coverage is an upper bound on what can be installed.</a:t>
             </a:r>
             <a:endParaRPr lang="en-US" dirty="0"/>
           </a:p>
@@ -3193,6 +3195,94 @@
             <a:fld id="{F7021451-1387-4CA6-816F-3879F97B5CBC}" type="slidenum">
               <a:rPr lang="en-US"/>
               <a:t>21</a:t>
+            </a:fld>
+            <a:endParaRPr lang="en-US"/>
+          </a:p>
+        </p:txBody>
+      </p:sp>
+    </p:spTree>
+    <p:extLst>
+      <p:ext uri="{BB962C8B-B14F-4D97-AF65-F5344CB8AC3E}">
+        <p14:creationId xmlns:p14="http://schemas.microsoft.com/office/powerpoint/2010/main" val="1024086991"/>
+      </p:ext>
+    </p:extLst>
+  </p:cSld>
+  <p:clrMapOvr>
+    <a:masterClrMapping/>
+  </p:clrMapOvr>
+</p:notes>
+</file>
+
+<file path=ppt/notesSlides/notesSlide22.xml><?xml version="1.0" encoding="utf-8"?>
+<p:notes xmlns:a="http://schemas.openxmlformats.org/drawingml/2006/main" xmlns:r="http://schemas.openxmlformats.org/officeDocument/2006/relationships" xmlns:p="http://schemas.openxmlformats.org/presentationml/2006/main">
+  <p:cSld>
+    <p:spTree>
+      <p:nvGrpSpPr>
+        <p:cNvPr id="1" name=""/>
+        <p:cNvGrpSpPr/>
+        <p:nvPr/>
+      </p:nvGrpSpPr>
+      <p:grpSpPr>
+        <a:xfrm>
+          <a:off x="0" y="0"/>
+          <a:ext cx="0" cy="0"/>
+          <a:chOff x="0" y="0"/>
+          <a:chExt cx="0" cy="0"/>
+        </a:xfrm>
+      </p:grpSpPr>
+      <p:sp>
+        <p:nvSpPr>
+          <p:cNvPr id="2" name="Slide Image Placeholder 1"/>
+          <p:cNvSpPr>
+            <a:spLocks noGrp="1" noRot="1" noChangeAspect="1"/>
+          </p:cNvSpPr>
+          <p:nvPr>
+            <p:ph type="sldImg"/>
+          </p:nvPr>
+        </p:nvSpPr>
+        <p:spPr/>
+      </p:sp>
+      <p:sp>
+        <p:nvSpPr>
+          <p:cNvPr id="3" name="Notes Placeholder 2"/>
+          <p:cNvSpPr>
+            <a:spLocks noGrp="1"/>
+          </p:cNvSpPr>
+          <p:nvPr>
+            <p:ph type="body" idx="1"/>
+          </p:nvPr>
+        </p:nvSpPr>
+        <p:spPr/>
+        <p:txBody>
+          <a:bodyPr/>
+          <a:lstStyle/>
+          <a:p>
+            <a:r>
+              <a:rPr lang="en-US" dirty="0"/>
+              <a:t>Backup: what one stored context looks like - plain JSON, one object per context.</a:t>
+            </a:r>
+            <a:endParaRPr lang="en-US" dirty="0"/>
+          </a:p>
+        </p:txBody>
+      </p:sp>
+      <p:sp>
+        <p:nvSpPr>
+          <p:cNvPr id="4" name="Slide Number Placeholder 3"/>
+          <p:cNvSpPr>
+            <a:spLocks noGrp="1"/>
+          </p:cNvSpPr>
+          <p:nvPr>
+            <p:ph type="sldNum" sz="quarter" idx="10"/>
+          </p:nvPr>
+        </p:nvSpPr>
+        <p:spPr/>
+        <p:txBody>
+          <a:bodyPr/>
+          <a:lstStyle/>
+          <a:p>
+            <a:fld id="{F7021451-1387-4CA6-816F-3879F97B5CBC}" type="slidenum">
+              <a:rPr lang="en-US"/>
+              <a:t>22</a:t>
             </a:fld>
             <a:endParaRPr lang="en-US"/>
           </a:p>
@@ -3257,7 +3347,7 @@
           <a:p>
             <a:r>
               <a:rPr lang="en-US" dirty="0"/>
-              <a:t>So what is the task? At ISARC we defined it like this. You're given a fixed catalog of components and the context: which services cross the hanger, and what they hang from. You must find a feasible assembly that carries them to the structure. Designers don't work from the whole model. They work from one section at each hanger, like this one. Today's tools help coordinate the model and check a design, but choosing the layout and the parts is still manual. It takes judgment, interacting rules, and ever-changing catalogs. That section is the unit of this work, and the unit of our dataset. (1:05)</a:t>
+              <a:t>So what is the task? At ISARC we defined it like this. You're given a fixed catalog of components and the context: which services cross the hanger, and what they hang from. You must find a feasible assembly that carries them to the structure. Designers don't work from the whole model. They work from one section at each hanger, like this one. Today's tools coordinate and check; choosing the layout and the parts is still manual. That section is the unit of this work, and the unit of our dataset. (1:05)</a:t>
             </a:r>
             <a:endParaRPr lang="en-US" dirty="0"/>
           </a:p>
@@ -3345,7 +3435,7 @@
           <a:p>
             <a:r>
               <a:rPr lang="en-US" dirty="0"/>
-              <a:t>To teach a machine this, you need many examples, and there were none. Project models are proprietary, the open ones aren't organized around supports, and any one project is a narrow slice. So we built CrossMEP: seven thousand contexts, about thirty-one and a half thousand elements, in eight difficulty tiers. They are deliberately unlabeled: you get the problem, never the answer. Every constant is sourced or declared a design choice, and everything is open. (1:50)</a:t>
+              <a:t>What would a method look like? One section in, verified supports out. Build the assembly step by step from a catalog, each step allowed by the rules and chosen by a rule table, by search, or by a learned policy; then check every finished design: statics, anchors, buildability. That is learnable. But anything that learns needs problems to learn from, a fixed set to compare on, and problems that look like practice. (1:40)</a:t>
             </a:r>
             <a:endParaRPr lang="en-US" dirty="0"/>
           </a:p>
@@ -3433,7 +3523,7 @@
           <a:p>
             <a:r>
               <a:rPr lang="en-US" dirty="0"/>
-              <a:t>Here's one context: a two-dimensional section at one support location. Each element has its kind, service and trade, its size, its insulation, and its load, which is weight per metre times the span it was sized at, plus its position. Add the surface, a slab or a wall, and that's all. What you won't find is the support: no channel, no rods, no anchors, and no correct answer, because a feasible support depends on the catalog you build from. The context is the brief. The assembly is the answer. (2:20)</a:t>
+              <a:t>And there were none. Project models are proprietary, the open ones aren't organized around supports, and any one project is a narrow slice. So we built CrossMEP: seven thousand contexts, about thirty-one and a half thousand elements, in eight difficulty tiers. They are deliberately unlabeled: you get the problem, never the answer. Every constant is sourced or declared a design choice, and everything is open. (2:10)</a:t>
             </a:r>
             <a:endParaRPr lang="en-US" dirty="0"/>
           </a:p>
@@ -3521,7 +3611,7 @@
           <a:p>
             <a:r>
               <a:rPr lang="en-US" dirty="0"/>
-              <a:t>How do we make a context? Not by free randomness, but by rules an engineer would recognize. The tier fixes how many elements there are. We pick the surface and fill it the way trades really run services: hot and cold together, flow and return together, conduits in groups, bulky services nearest the slab. Gaps between neighbors are drawn from gaps measured on a built project, never below twenty-five millimeters. On walls, electrical stays above water. Every context is checked, and it's seeded: the same seed gives the same file, byte for byte. (2:55)</a:t>
+              <a:t>Here's one context: a two-dimensional section at one support location. Each element has its kind, service and trade, its size, its insulation, and its load, which is weight per metre times the span it was sized at, plus its position. Add the surface, a slab or a wall, and that's all. What you won't find is the support: no channel, no rods, no anchors, and no correct answer, because a feasible support depends on the catalog you build from. The context is the brief. The assembly is the answer. (2:40)</a:t>
             </a:r>
             <a:endParaRPr lang="en-US" dirty="0"/>
           </a:p>
@@ -3609,7 +3699,7 @@
           <a:p>
             <a:r>
               <a:rPr lang="en-US" dirty="0"/>
-              <a:t>Where do the numbers come from? Three places. Sizes, weights and spans come from standards: European steel pipe and duct standards, IEC for conduits and trays, ASME for spans, the German GEG for insulation. How close neighbors sit comes from measured open buildings. And a few things are simply our choices, like the trade mix, and we label them that way. Loads are computed in code from all of this. (3:35)</a:t>
+              <a:t>How do we make a context? Not by free randomness, but by rules an engineer would recognize. The tier fixes how many elements there are. We pick the surface and fill it the way trades really run services: hot and cold together, flow and return together, conduits in groups, bulky services nearest the slab. Gaps between neighbors are drawn from gaps measured on a built project, never below twenty-five millimeters. On walls, electrical stays above water. Every context is checked, and it's seeded: the same seed gives the same file, byte for byte. (3:15)</a:t>
             </a:r>
             <a:endParaRPr lang="en-US" dirty="0"/>
           </a:p>
@@ -3697,7 +3787,7 @@
           <a:p>
             <a:r>
               <a:rPr lang="en-US" dirty="0"/>
-              <a:t>The release has four splits on disjoint seeds, so a method is never tested on what it trained on: five thousand contexts for training, five hundred each for validation and test, and a benchmark of one thousand, a hundred and twenty-five per tier. Everything is plain JSON with a schema and a datasheet. (4:05)</a:t>
+              <a:t>Where do the numbers come from? Three places. Sizes, weights and spans come from standards: European steel pipe and duct standards, IEC for conduits and trays, ASME for spans, the German GEG for insulation. How close neighbors sit comes from measured open buildings. And a few things are simply our choices, like the trade mix, and we label them that way. Loads are computed in code from all of this. (3:55)</a:t>
             </a:r>
             <a:endParaRPr lang="en-US" dirty="0"/>
           </a:p>
@@ -3785,7 +3875,7 @@
           <a:p>
             <a:r>
               <a:rPr lang="en-US" dirty="0"/>
-              <a:t>Here's one benchmark context per tier. C1 is a single element, the most common support in any building. By C8 you have eight services on three rows. Within a tier everything else varies: kinds, trades, surfaces, stacking. So the element count is the one controlled axis of difficulty. And notice the walls: the section rotates, and electrical sits above water. (4:25)</a:t>
+              <a:t>The release has four splits on disjoint seeds, so a method is never tested on what it trained on: five thousand contexts for training, five hundred each for validation and test, and a benchmark of one thousand, a hundred and twenty-five per tier. Everything is plain JSON with a schema and a datasheet. (4:25)</a:t>
             </a:r>
             <a:endParaRPr lang="en-US" dirty="0"/>
           </a:p>
@@ -4911,7 +5001,7 @@
                   <a:schemeClr val="tx1"/>
                 </a:solidFill>
               </a:rPr>
-              <a:t>Higher tiers are heavier and tighter, as designed</a:t>
+              <a:t>Difficulty is one number: tier Cn holds exactly n elements</a:t>
             </a:r>
             <a:endParaRPr lang="en-US" sz="2600" dirty="0"/>
           </a:p>
@@ -4919,7 +5009,7 @@
       </p:sp>
       <p:pic>
         <p:nvPicPr>
-          <p:cNvPr id="3" name="tier statistics" descr="preencoded.png">    </p:cNvPr>
+          <p:cNvPr id="3" name="tier gallery" descr="/home/user/crossmep_dataset/docs/figures/02_tier_gallery.png">    </p:cNvPr>
           <p:cNvPicPr>
             <a:picLocks noChangeAspect="1"/>
           </p:cNvPicPr>
@@ -4933,8 +5023,8 @@
         </p:blipFill>
         <p:spPr>
           <a:xfrm>
-            <a:off x="548640" y="1325880"/>
-            <a:ext cx="11091672" cy="3965273"/>
+            <a:off x="1244890" y="1280160"/>
+            <a:ext cx="9699171" cy="4526280"/>
           </a:xfrm>
           <a:prstGeom prst="rect">
             <a:avLst/>
@@ -4943,14 +5033,14 @@
       </p:pic>
       <p:sp>
         <p:nvSpPr>
-          <p:cNvPr id="4" name="experiment 1 caption"/>
+          <p:cNvPr id="4" name="gallery caption"/>
           <p:cNvSpPr txBox="1"/>
           <p:nvPr/>
         </p:nvSpPr>
         <p:spPr>
           <a:xfrm>
-            <a:off x="548640" y="5400881"/>
-            <a:ext cx="11091672" cy="731520"/>
+            <a:off x="548640" y="5897880"/>
+            <a:ext cx="11091672" cy="502920"/>
           </a:xfrm>
           <a:prstGeom prst="rect">
             <a:avLst/>
@@ -4966,14 +5056,14 @@
               <a:buNone/>
             </a:pPr>
             <a:r>
-              <a:rPr lang="en-US" sz="1250" dirty="0">
+              <a:rPr lang="en-US" sz="1100" dirty="0">
                 <a:solidFill>
                   <a:srgbClr val="52514E"/>
                 </a:solidFill>
               </a:rPr>
-              <a:t>A check that the dataset behaves as designed: the tier fixes the element count; load and congestion follow from the rules. Boxes: benchmark, 125 contexts per tier (IQR, whiskers 1.5 IQR); diamonds: medians of 2,000 generated contexts per tier. Load rises with the tier (rank correlation +0.46; the population medians rise at every step) and the closest gap narrows at every step (−0.38; 149 → 55 mm in the population).</a:t>
+              <a:t>One benchmark context per tier; dashed rings are insulation. Within a tier, kinds, trades, services, surfaces and stacking all vary, so element count is the one controlled difficulty axis. C1 is the most common support in any building; C8 is a congested rack.</a:t>
             </a:r>
-            <a:endParaRPr lang="en-US" sz="1250" dirty="0"/>
+            <a:endParaRPr lang="en-US" sz="1100" dirty="0"/>
           </a:p>
         </p:txBody>
       </p:sp>
@@ -5079,7 +5169,7 @@
                   <a:schemeClr val="tx1"/>
                 </a:solidFill>
               </a:rPr>
-              <a:t>Spacing holds up on a clinic the generator never saw</a:t>
+              <a:t>Higher tiers are heavier and tighter, as designed</a:t>
             </a:r>
             <a:endParaRPr lang="en-US" sz="2600" dirty="0"/>
           </a:p>
@@ -5087,7 +5177,7 @@
       </p:sp>
       <p:pic>
         <p:nvPicPr>
-          <p:cNvPr id="3" name="gap distributions" descr="preencoded.png">    </p:cNvPr>
+          <p:cNvPr id="3" name="tier statistics" descr="preencoded.png">    </p:cNvPr>
           <p:cNvPicPr>
             <a:picLocks noChangeAspect="1"/>
           </p:cNvPicPr>
@@ -5102,7 +5192,7 @@
         <p:spPr>
           <a:xfrm>
             <a:off x="548640" y="1325880"/>
-            <a:ext cx="11091672" cy="4133217"/>
+            <a:ext cx="11091672" cy="3965273"/>
           </a:xfrm>
           <a:prstGeom prst="rect">
             <a:avLst/>
@@ -5111,13 +5201,13 @@
       </p:pic>
       <p:sp>
         <p:nvSpPr>
-          <p:cNvPr id="4" name="experiment 2 caption"/>
+          <p:cNvPr id="4" name="experiment 1 caption"/>
           <p:cNvSpPr txBox="1"/>
           <p:nvPr/>
         </p:nvSpPr>
         <p:spPr>
           <a:xfrm>
-            <a:off x="548640" y="5568825"/>
+            <a:off x="548640" y="5400881"/>
             <a:ext cx="11091672" cy="731520"/>
           </a:xfrm>
           <a:prstGeom prst="rect">
@@ -5139,7 +5229,7 @@
                   <a:srgbClr val="52514E"/>
                 </a:solidFill>
               </a:rPr>
-              <a:t>The gap distribution was fitted on the duplex; the clinic was held out. Clear gaps between side-by-side pipes, on sections every 250 mm. Clinic (797 pipe pairs): 32 mm from the generated gaps (95 % CI 17–48), more than the 8 mm a perfect generator would show, and about as close as the duplex’s own two models are to each other (26 mm). Models: buildingSMART Duplex Apartment and Medical-Dental Clinic, CC BY 4.0.</a:t>
+              <a:t>A check that the dataset behaves as designed: the tier fixes the element count; load and congestion follow from the rules. Boxes: benchmark, 125 contexts per tier (IQR, whiskers 1.5 IQR); diamonds: medians of 2,000 generated contexts per tier. Load rises with the tier (rank correlation +0.46; the population medians rise at every step) and the closest gap narrows at every step (−0.38; 149 → 55 mm in the population).</a:t>
             </a:r>
             <a:endParaRPr lang="en-US" sz="1250" dirty="0"/>
           </a:p>
@@ -5201,6 +5291,174 @@
 <file path=ppt/slides/slide12.xml><?xml version="1.0" encoding="utf-8"?>
 <p:sld xmlns:a="http://schemas.openxmlformats.org/drawingml/2006/main" xmlns:r="http://schemas.openxmlformats.org/officeDocument/2006/relationships" xmlns:p="http://schemas.openxmlformats.org/presentationml/2006/main">
   <p:cSld name="Slide 12">
+    <p:spTree>
+      <p:nvGrpSpPr>
+        <p:cNvPr id="1" name=""/>
+        <p:cNvGrpSpPr/>
+        <p:nvPr/>
+      </p:nvGrpSpPr>
+      <p:grpSpPr>
+        <a:xfrm>
+          <a:off x="0" y="0"/>
+          <a:ext cx="0" cy="0"/>
+          <a:chOff x="0" y="0"/>
+          <a:chExt cx="0" cy="0"/>
+        </a:xfrm>
+      </p:grpSpPr>
+      <p:sp>
+        <p:nvSpPr>
+          <p:cNvPr id="2" name="Text 0"/>
+          <p:cNvSpPr/>
+          <p:nvPr>
+            <p:ph idx="100" type="title" hasCustomPrompt="1"/>
+          </p:nvPr>
+        </p:nvSpPr>
+        <p:spPr>
+          <a:xfrm>
+            <a:off x="548640" y="274320"/>
+            <a:ext cx="11091672" cy="960120"/>
+          </a:xfrm>
+          <a:prstGeom prst="rect">
+            <a:avLst/>
+          </a:prstGeom>
+          <a:noFill/>
+          <a:ln/>
+        </p:spPr>
+        <p:txBody>
+          <a:bodyPr wrap="square" lIns="0" tIns="0" rIns="0" bIns="0" rtlCol="0" anchor="ctr"/>
+          <a:lstStyle/>
+          <a:p>
+            <a:pPr algn="l" indent="0" marL="0">
+              <a:buNone/>
+            </a:pPr>
+            <a:r>
+              <a:rPr lang="en-US" sz="2600" b="1" dirty="0">
+                <a:solidFill>
+                  <a:schemeClr val="tx1"/>
+                </a:solidFill>
+              </a:rPr>
+              <a:t>Spacing holds up on a clinic the generator never saw</a:t>
+            </a:r>
+            <a:endParaRPr lang="en-US" sz="2600" dirty="0"/>
+          </a:p>
+        </p:txBody>
+      </p:sp>
+      <p:pic>
+        <p:nvPicPr>
+          <p:cNvPr id="3" name="gap distributions" descr="preencoded.png">    </p:cNvPr>
+          <p:cNvPicPr>
+            <a:picLocks noChangeAspect="1"/>
+          </p:cNvPicPr>
+          <p:nvPr/>
+        </p:nvPicPr>
+        <p:blipFill>
+          <a:blip r:embed="rId1"/>
+          <a:stretch>
+            <a:fillRect/>
+          </a:stretch>
+        </p:blipFill>
+        <p:spPr>
+          <a:xfrm>
+            <a:off x="548640" y="1325880"/>
+            <a:ext cx="11091672" cy="4133217"/>
+          </a:xfrm>
+          <a:prstGeom prst="rect">
+            <a:avLst/>
+          </a:prstGeom>
+        </p:spPr>
+      </p:pic>
+      <p:sp>
+        <p:nvSpPr>
+          <p:cNvPr id="4" name="experiment 2 caption"/>
+          <p:cNvSpPr txBox="1"/>
+          <p:nvPr/>
+        </p:nvSpPr>
+        <p:spPr>
+          <a:xfrm>
+            <a:off x="548640" y="5568825"/>
+            <a:ext cx="11091672" cy="731520"/>
+          </a:xfrm>
+          <a:prstGeom prst="rect">
+            <a:avLst/>
+          </a:prstGeom>
+          <a:noFill/>
+          <a:ln/>
+        </p:spPr>
+        <p:txBody>
+          <a:bodyPr wrap="square" lIns="0" tIns="0" rIns="0" bIns="0" rtlCol="0" anchor="t"/>
+          <a:lstStyle/>
+          <a:p>
+            <a:pPr indent="0" marL="0">
+              <a:buNone/>
+            </a:pPr>
+            <a:r>
+              <a:rPr lang="en-US" sz="1250" dirty="0">
+                <a:solidFill>
+                  <a:srgbClr val="52514E"/>
+                </a:solidFill>
+              </a:rPr>
+              <a:t>The gap distribution was fitted on the duplex; the clinic was held out. Clear gaps between side-by-side pipes, on sections every 250 mm. Clinic (797 pipe pairs): 32 mm from the generated gaps (95 % CI 17–48), more than the 8 mm a perfect generator would show, and about as close as the duplex’s own two models are to each other (26 mm). Models: buildingSMART Duplex Apartment and Medical-Dental Clinic, CC BY 4.0.</a:t>
+            </a:r>
+            <a:endParaRPr lang="en-US" sz="1250" dirty="0"/>
+          </a:p>
+        </p:txBody>
+      </p:sp>
+      <p:sp>
+        <p:nvSpPr>
+          <p:cNvPr id="25" name="Slide Number Placeholder 0"/>
+          <p:cNvSpPr>
+            <a:spLocks noGrp="1"/>
+          </p:cNvSpPr>
+          <p:nvPr>
+            <p:ph type="sldNum" sz="quarter" idx="4294967295"/>
+          </p:nvPr>
+        </p:nvSpPr>
+        <p:spPr>
+          <a:xfrm>
+            <a:off x="11064240" y="6419088"/>
+            <a:ext cx="594360" cy="274320"/>
+          </a:xfrm>
+          <a:prstGeom prst="rect">
+            <a:avLst/>
+          </a:prstGeom>
+          <a:extLst>
+            <a:ext uri="{C572A759-6A51-4108-AA02-DFA0A04FC94B}">
+              <ma14:wrappingTextBoxFlag xmlns:ma14="http://schemas.microsoft.com/office/mac/drawingml/2011/main" val="0"/>
+            </a:ext>
+          </a:extLst>
+        </p:spPr>
+        <p:txBody>
+          <a:bodyPr/>
+          <a:lstStyle>
+            <a:lvl1pPr>
+              <a:defRPr sz="900">
+                <a:solidFill>
+                  <a:srgbClr val="898781"/>
+                </a:solidFill>
+              </a:defRPr>
+            </a:lvl1pPr>
+          </a:lstStyle>
+          <a:p>
+            <a:pPr algn="r"/>
+            <a:fld id="{F7021451-1387-4CA6-816F-3879F97B5CBC}" type="slidenum">
+              <a:rPr b="0" lang="en-US"/>
+              <a:t>12</a:t>
+            </a:fld>
+            <a:endParaRPr lang="en-US"/>
+          </a:p>
+        </p:txBody>
+      </p:sp>
+    </p:spTree>
+  </p:cSld>
+  <p:clrMapOvr>
+    <a:masterClrMapping/>
+  </p:clrMapOvr>
+</p:sld>
+</file>
+
+<file path=ppt/slides/slide13.xml><?xml version="1.0" encoding="utf-8"?>
+<p:sld xmlns:a="http://schemas.openxmlformats.org/drawingml/2006/main" xmlns:r="http://schemas.openxmlformats.org/officeDocument/2006/relationships" xmlns:p="http://schemas.openxmlformats.org/presentationml/2006/main">
+  <p:cSld name="Slide 13">
     <p:spTree>
       <p:nvGrpSpPr>
         <p:cNvPr id="1" name=""/>
@@ -5606,7 +5864,7 @@
             <a:pPr algn="r"/>
             <a:fld id="{F7021451-1387-4CA6-816F-3879F97B5CBC}" type="slidenum">
               <a:rPr b="0" lang="en-US"/>
-              <a:t>12</a:t>
+              <a:t>13</a:t>
             </a:fld>
             <a:endParaRPr lang="en-US"/>
           </a:p>
@@ -5620,9 +5878,9 @@
 </p:sld>
 </file>
 
-<file path=ppt/slides/slide13.xml><?xml version="1.0" encoding="utf-8"?>
+<file path=ppt/slides/slide14.xml><?xml version="1.0" encoding="utf-8"?>
 <p:sld xmlns:a="http://schemas.openxmlformats.org/drawingml/2006/main" xmlns:r="http://schemas.openxmlformats.org/officeDocument/2006/relationships" xmlns:p="http://schemas.openxmlformats.org/presentationml/2006/main">
-  <p:cSld name="Slide 13">
+  <p:cSld name="Slide 14">
     <p:spTree>
       <p:nvGrpSpPr>
         <p:cNvPr id="1" name=""/>
@@ -5882,7 +6140,7 @@
             <a:pPr algn="r"/>
             <a:fld id="{F7021451-1387-4CA6-816F-3879F97B5CBC}" type="slidenum">
               <a:rPr b="0" lang="en-US"/>
-              <a:t>13</a:t>
+              <a:t>14</a:t>
             </a:fld>
             <a:endParaRPr lang="en-US"/>
           </a:p>
@@ -5896,9 +6154,9 @@
 </p:sld>
 </file>
 
-<file path=ppt/slides/slide14.xml><?xml version="1.0" encoding="utf-8"?>
+<file path=ppt/slides/slide15.xml><?xml version="1.0" encoding="utf-8"?>
 <p:sld xmlns:a="http://schemas.openxmlformats.org/drawingml/2006/main" xmlns:r="http://schemas.openxmlformats.org/officeDocument/2006/relationships" xmlns:p="http://schemas.openxmlformats.org/presentationml/2006/main">
-  <p:cSld name="Slide 14">
+  <p:cSld name="Slide 15">
     <p:spTree>
       <p:nvGrpSpPr>
         <p:cNvPr id="1" name=""/>
@@ -6573,7 +6831,7 @@
             <a:pPr algn="r"/>
             <a:fld id="{F7021451-1387-4CA6-816F-3879F97B5CBC}" type="slidenum">
               <a:rPr b="0" lang="en-US"/>
-              <a:t>14</a:t>
+              <a:t>15</a:t>
             </a:fld>
             <a:endParaRPr lang="en-US"/>
           </a:p>
@@ -6587,9 +6845,9 @@
 </p:sld>
 </file>
 
-<file path=ppt/slides/slide15.xml><?xml version="1.0" encoding="utf-8"?>
+<file path=ppt/slides/slide16.xml><?xml version="1.0" encoding="utf-8"?>
 <p:sld xmlns:a="http://schemas.openxmlformats.org/drawingml/2006/main" xmlns:r="http://schemas.openxmlformats.org/officeDocument/2006/relationships" xmlns:p="http://schemas.openxmlformats.org/presentationml/2006/main">
-  <p:cSld name="Slide 15">
+  <p:cSld name="Slide 16">
     <p:spTree>
       <p:nvGrpSpPr>
         <p:cNvPr id="1" name=""/>
@@ -7060,7 +7318,7 @@
             <a:pPr algn="r"/>
             <a:fld id="{F7021451-1387-4CA6-816F-3879F97B5CBC}" type="slidenum">
               <a:rPr b="0" lang="en-US"/>
-              <a:t>15</a:t>
+              <a:t>16</a:t>
             </a:fld>
             <a:endParaRPr lang="en-US"/>
           </a:p>
@@ -7074,9 +7332,9 @@
 </p:sld>
 </file>
 
-<file path=ppt/slides/slide16.xml><?xml version="1.0" encoding="utf-8"?>
+<file path=ppt/slides/slide17.xml><?xml version="1.0" encoding="utf-8"?>
 <p:sld xmlns:a="http://schemas.openxmlformats.org/drawingml/2006/main" xmlns:r="http://schemas.openxmlformats.org/officeDocument/2006/relationships" xmlns:p="http://schemas.openxmlformats.org/presentationml/2006/main">
-  <p:cSld name="Slide 16">
+  <p:cSld name="Slide 17">
     <p:spTree>
       <p:nvGrpSpPr>
         <p:cNvPr id="1" name=""/>
@@ -7291,9 +7549,9 @@
 </p:sld>
 </file>
 
-<file path=ppt/slides/slide17.xml><?xml version="1.0" encoding="utf-8"?>
+<file path=ppt/slides/slide18.xml><?xml version="1.0" encoding="utf-8"?>
 <p:sld xmlns:a="http://schemas.openxmlformats.org/drawingml/2006/main" xmlns:r="http://schemas.openxmlformats.org/officeDocument/2006/relationships" xmlns:p="http://schemas.openxmlformats.org/presentationml/2006/main">
-  <p:cSld name="Slide 17">
+  <p:cSld name="Slide 18">
     <p:spTree>
       <p:nvGrpSpPr>
         <p:cNvPr id="1" name=""/>
@@ -7505,7 +7763,7 @@
             <a:pPr algn="r"/>
             <a:fld id="{F7021451-1387-4CA6-816F-3879F97B5CBC}" type="slidenum">
               <a:rPr b="0" lang="en-US"/>
-              <a:t>17</a:t>
+              <a:t>18</a:t>
             </a:fld>
             <a:endParaRPr lang="en-US"/>
           </a:p>
@@ -7519,9 +7777,9 @@
 </p:sld>
 </file>
 
-<file path=ppt/slides/slide18.xml><?xml version="1.0" encoding="utf-8"?>
+<file path=ppt/slides/slide19.xml><?xml version="1.0" encoding="utf-8"?>
 <p:sld xmlns:a="http://schemas.openxmlformats.org/drawingml/2006/main" xmlns:r="http://schemas.openxmlformats.org/officeDocument/2006/relationships" xmlns:p="http://schemas.openxmlformats.org/presentationml/2006/main">
-  <p:cSld name="Slide 18">
+  <p:cSld name="Slide 19">
     <p:spTree>
       <p:nvGrpSpPr>
         <p:cNvPr id="1" name=""/>
@@ -7576,7 +7834,7 @@
       </p:sp>
       <p:graphicFrame>
         <p:nvGraphicFramePr>
-          <p:cNvPr id="19" name="tier table"/>
+          <p:cNvPr id="20" name="tier table"/>
           <p:cNvGraphicFramePr>
             <a:graphicFrameLocks noGrp="1"/>
           </p:cNvGraphicFramePr>
@@ -10886,7 +11144,7 @@
             <a:pPr algn="r"/>
             <a:fld id="{F7021451-1387-4CA6-816F-3879F97B5CBC}" type="slidenum">
               <a:rPr b="0" lang="en-US"/>
-              <a:t>18</a:t>
+              <a:t>19</a:t>
             </a:fld>
             <a:endParaRPr lang="en-US"/>
           </a:p>
@@ -10900,9 +11158,9 @@
 </p:sld>
 </file>
 
-<file path=ppt/slides/slide19.xml><?xml version="1.0" encoding="utf-8"?>
+<file path=ppt/slides/slide2.xml><?xml version="1.0" encoding="utf-8"?>
 <p:sld xmlns:a="http://schemas.openxmlformats.org/drawingml/2006/main" xmlns:r="http://schemas.openxmlformats.org/officeDocument/2006/relationships" xmlns:p="http://schemas.openxmlformats.org/presentationml/2006/main">
-  <p:cSld name="Slide 19">
+  <p:cSld name="Slide 2">
     <p:spTree>
       <p:nvGrpSpPr>
         <p:cNvPr id="1" name=""/>
@@ -10949,6 +11207,606 @@
                   <a:schemeClr val="tx1"/>
                 </a:solidFill>
               </a:rPr>
+              <a:t>A hospital needs about 10,000 support assemblies, each designed by hand</a:t>
+            </a:r>
+            <a:endParaRPr lang="en-US" sz="2600" dirty="0"/>
+          </a:p>
+        </p:txBody>
+      </p:sp>
+      <p:pic>
+        <p:nvPicPr>
+          <p:cNvPr id="3" name="hospital model" descr="/home/user/crossmep_dataset/docs/figures/isarc_building.jpg">    </p:cNvPr>
+          <p:cNvPicPr>
+            <a:picLocks noChangeAspect="1"/>
+          </p:cNvPicPr>
+          <p:nvPr/>
+        </p:nvPicPr>
+        <p:blipFill>
+          <a:blip r:embed="rId1"/>
+          <a:stretch>
+            <a:fillRect/>
+          </a:stretch>
+        </p:blipFill>
+        <p:spPr>
+          <a:xfrm>
+            <a:off x="548640" y="1325880"/>
+            <a:ext cx="6035040" cy="3394710"/>
+          </a:xfrm>
+          <a:prstGeom prst="rect">
+            <a:avLst/>
+          </a:prstGeom>
+        </p:spPr>
+      </p:pic>
+      <p:sp>
+        <p:nvSpPr>
+          <p:cNvPr id="4" name="zoom box"/>
+          <p:cNvSpPr/>
+          <p:nvPr/>
+        </p:nvSpPr>
+        <p:spPr>
+          <a:xfrm>
+            <a:off x="3304843" y="2791716"/>
+            <a:ext cx="592641" cy="473902"/>
+          </a:xfrm>
+          <a:prstGeom prst="rect">
+            <a:avLst/>
+          </a:prstGeom>
+          <a:ln w="19050">
+            <a:solidFill>
+              <a:srgbClr val="EB6834"/>
+            </a:solidFill>
+            <a:prstDash val="solid"/>
+          </a:ln>
+        </p:spPr>
+      </p:sp>
+      <p:sp>
+        <p:nvSpPr>
+          <p:cNvPr id="5" name="zoom line top"/>
+          <p:cNvSpPr/>
+          <p:nvPr/>
+        </p:nvSpPr>
+        <p:spPr>
+          <a:xfrm flipV="1">
+            <a:off x="3897484" y="2791716"/>
+            <a:ext cx="3051956" cy="-1008636"/>
+          </a:xfrm>
+          <a:prstGeom prst="line">
+            <a:avLst/>
+          </a:prstGeom>
+          <a:noFill/>
+          <a:ln w="19050">
+            <a:solidFill>
+              <a:srgbClr val="EB6834"/>
+            </a:solidFill>
+            <a:prstDash val="solid"/>
+          </a:ln>
+        </p:spPr>
+      </p:sp>
+      <p:sp>
+        <p:nvSpPr>
+          <p:cNvPr id="6" name="zoom line bottom"/>
+          <p:cNvSpPr/>
+          <p:nvPr/>
+        </p:nvSpPr>
+        <p:spPr>
+          <a:xfrm>
+            <a:off x="3897484" y="3265617"/>
+            <a:ext cx="3051956" cy="1210645"/>
+          </a:xfrm>
+          <a:prstGeom prst="line">
+            <a:avLst/>
+          </a:prstGeom>
+          <a:noFill/>
+          <a:ln w="19050">
+            <a:solidFill>
+              <a:srgbClr val="EB6834"/>
+            </a:solidFill>
+            <a:prstDash val="solid"/>
+          </a:ln>
+        </p:spPr>
+      </p:sp>
+      <p:pic>
+        <p:nvPicPr>
+          <p:cNvPr id="7" name="one assembly" descr="/home/user/crossmep_dataset/docs/figures/isarc_ssa.jpg">    </p:cNvPr>
+          <p:cNvPicPr>
+            <a:picLocks noChangeAspect="1"/>
+          </p:cNvPicPr>
+          <p:nvPr/>
+        </p:nvPicPr>
+        <p:blipFill>
+          <a:blip r:embed="rId2"/>
+          <a:stretch>
+            <a:fillRect/>
+          </a:stretch>
+        </p:blipFill>
+        <p:spPr>
+          <a:xfrm>
+            <a:off x="6949440" y="1783080"/>
+            <a:ext cx="4690872" cy="2693182"/>
+          </a:xfrm>
+          <a:prstGeom prst="rect">
+            <a:avLst/>
+          </a:prstGeom>
+        </p:spPr>
+      </p:pic>
+      <p:sp>
+        <p:nvSpPr>
+          <p:cNvPr id="8" name="inset frame"/>
+          <p:cNvSpPr/>
+          <p:nvPr/>
+        </p:nvSpPr>
+        <p:spPr>
+          <a:xfrm>
+            <a:off x="6949440" y="1783080"/>
+            <a:ext cx="4690872" cy="2693182"/>
+          </a:xfrm>
+          <a:prstGeom prst="rect">
+            <a:avLst/>
+          </a:prstGeom>
+          <a:ln w="19050">
+            <a:solidFill>
+              <a:srgbClr val="EB6834"/>
+            </a:solidFill>
+            <a:prstDash val="solid"/>
+          </a:ln>
+        </p:spPr>
+      </p:sp>
+      <p:sp>
+        <p:nvSpPr>
+          <p:cNvPr id="9" name="inset label"/>
+          <p:cNvSpPr txBox="1"/>
+          <p:nvPr/>
+        </p:nvSpPr>
+        <p:spPr>
+          <a:xfrm>
+            <a:off x="6949440" y="1325880"/>
+            <a:ext cx="4690872" cy="411480"/>
+          </a:xfrm>
+          <a:prstGeom prst="rect">
+            <a:avLst/>
+          </a:prstGeom>
+          <a:noFill/>
+          <a:ln/>
+        </p:spPr>
+        <p:txBody>
+          <a:bodyPr wrap="square" lIns="0" tIns="0" rIns="0" bIns="0" rtlCol="0" anchor="b"/>
+          <a:lstStyle/>
+          <a:p>
+            <a:pPr indent="0" marL="0">
+              <a:buNone/>
+            </a:pPr>
+            <a:r>
+              <a:rPr lang="en-US" sz="1500" b="1" dirty="0">
+                <a:solidFill>
+                  <a:schemeClr val="tx1"/>
+                </a:solidFill>
+              </a:rPr>
+              <a:t>1 unit = 1 structural support assembly (SSA)</a:t>
+            </a:r>
+            <a:endParaRPr lang="en-US" sz="1500" dirty="0"/>
+          </a:p>
+        </p:txBody>
+      </p:sp>
+      <p:sp>
+        <p:nvSpPr>
+          <p:cNvPr id="10" name="tile support assemblies in one 200,000 sq ft hospital"/>
+          <p:cNvSpPr/>
+          <p:nvPr/>
+        </p:nvSpPr>
+        <p:spPr>
+          <a:xfrm>
+            <a:off x="548640" y="4892040"/>
+            <a:ext cx="3575304" cy="1188720"/>
+          </a:xfrm>
+          <a:prstGeom prst="roundRect">
+            <a:avLst>
+              <a:gd name="adj" fmla="val 5385"/>
+            </a:avLst>
+          </a:prstGeom>
+          <a:solidFill>
+            <a:schemeClr val="bg2"/>
+          </a:solidFill>
+          <a:ln/>
+        </p:spPr>
+      </p:sp>
+      <p:sp>
+        <p:nvSpPr>
+          <p:cNvPr id="11" name="value support assemblies in one 200,000 sq ft hospital"/>
+          <p:cNvSpPr txBox="1"/>
+          <p:nvPr/>
+        </p:nvSpPr>
+        <p:spPr>
+          <a:xfrm>
+            <a:off x="749808" y="4983480"/>
+            <a:ext cx="3172968" cy="594360"/>
+          </a:xfrm>
+          <a:prstGeom prst="rect">
+            <a:avLst/>
+          </a:prstGeom>
+          <a:noFill/>
+          <a:ln/>
+        </p:spPr>
+        <p:txBody>
+          <a:bodyPr wrap="square" lIns="0" tIns="0" rIns="0" bIns="0" rtlCol="0" anchor="ctr"/>
+          <a:lstStyle/>
+          <a:p>
+            <a:pPr indent="0" marL="0">
+              <a:buNone/>
+            </a:pPr>
+            <a:r>
+              <a:rPr lang="en-US" sz="2800" b="1" dirty="0">
+                <a:solidFill>
+                  <a:schemeClr val="accent1"/>
+                </a:solidFill>
+              </a:rPr>
+              <a:t>≈ 10,000</a:t>
+            </a:r>
+            <a:endParaRPr lang="en-US" sz="2800" dirty="0"/>
+          </a:p>
+        </p:txBody>
+      </p:sp>
+      <p:sp>
+        <p:nvSpPr>
+          <p:cNvPr id="12" name="label support assemblies in one 200,000 sq ft hospital"/>
+          <p:cNvSpPr txBox="1"/>
+          <p:nvPr/>
+        </p:nvSpPr>
+        <p:spPr>
+          <a:xfrm>
+            <a:off x="749808" y="5581498"/>
+            <a:ext cx="3172968" cy="451714"/>
+          </a:xfrm>
+          <a:prstGeom prst="rect">
+            <a:avLst/>
+          </a:prstGeom>
+          <a:noFill/>
+          <a:ln/>
+        </p:spPr>
+        <p:txBody>
+          <a:bodyPr wrap="square" lIns="0" tIns="0" rIns="0" bIns="0" rtlCol="0" anchor="t"/>
+          <a:lstStyle/>
+          <a:p>
+            <a:pPr indent="0" marL="0">
+              <a:buNone/>
+            </a:pPr>
+            <a:r>
+              <a:rPr lang="en-US" sz="1200" dirty="0">
+                <a:solidFill>
+                  <a:srgbClr val="52514E"/>
+                </a:solidFill>
+              </a:rPr>
+              <a:t>support assemblies in one 200,000 sq ft hospital</a:t>
+            </a:r>
+            <a:endParaRPr lang="en-US" sz="1200" dirty="0"/>
+          </a:p>
+        </p:txBody>
+      </p:sp>
+      <p:sp>
+        <p:nvSpPr>
+          <p:cNvPr id="13" name="tile of engineering for each assembly, designed one by one"/>
+          <p:cNvSpPr/>
+          <p:nvPr/>
+        </p:nvSpPr>
+        <p:spPr>
+          <a:xfrm>
+            <a:off x="4306824" y="4892040"/>
+            <a:ext cx="3575304" cy="1188720"/>
+          </a:xfrm>
+          <a:prstGeom prst="roundRect">
+            <a:avLst>
+              <a:gd name="adj" fmla="val 5385"/>
+            </a:avLst>
+          </a:prstGeom>
+          <a:solidFill>
+            <a:schemeClr val="bg2"/>
+          </a:solidFill>
+          <a:ln/>
+        </p:spPr>
+      </p:sp>
+      <p:sp>
+        <p:nvSpPr>
+          <p:cNvPr id="14" name="value of engineering for each assembly, designed one by one"/>
+          <p:cNvSpPr txBox="1"/>
+          <p:nvPr/>
+        </p:nvSpPr>
+        <p:spPr>
+          <a:xfrm>
+            <a:off x="4507992" y="4983480"/>
+            <a:ext cx="3172968" cy="594360"/>
+          </a:xfrm>
+          <a:prstGeom prst="rect">
+            <a:avLst/>
+          </a:prstGeom>
+          <a:noFill/>
+          <a:ln/>
+        </p:spPr>
+        <p:txBody>
+          <a:bodyPr wrap="square" lIns="0" tIns="0" rIns="0" bIns="0" rtlCol="0" anchor="ctr"/>
+          <a:lstStyle/>
+          <a:p>
+            <a:pPr indent="0" marL="0">
+              <a:buNone/>
+            </a:pPr>
+            <a:r>
+              <a:rPr lang="en-US" sz="2800" b="1" dirty="0">
+                <a:solidFill>
+                  <a:schemeClr val="accent1"/>
+                </a:solidFill>
+              </a:rPr>
+              <a:t>20 min – 2 h</a:t>
+            </a:r>
+            <a:endParaRPr lang="en-US" sz="2800" dirty="0"/>
+          </a:p>
+        </p:txBody>
+      </p:sp>
+      <p:sp>
+        <p:nvSpPr>
+          <p:cNvPr id="15" name="label of engineering for each assembly, designed one by one"/>
+          <p:cNvSpPr txBox="1"/>
+          <p:nvPr/>
+        </p:nvSpPr>
+        <p:spPr>
+          <a:xfrm>
+            <a:off x="4507992" y="5581498"/>
+            <a:ext cx="3172968" cy="451714"/>
+          </a:xfrm>
+          <a:prstGeom prst="rect">
+            <a:avLst/>
+          </a:prstGeom>
+          <a:noFill/>
+          <a:ln/>
+        </p:spPr>
+        <p:txBody>
+          <a:bodyPr wrap="square" lIns="0" tIns="0" rIns="0" bIns="0" rtlCol="0" anchor="t"/>
+          <a:lstStyle/>
+          <a:p>
+            <a:pPr indent="0" marL="0">
+              <a:buNone/>
+            </a:pPr>
+            <a:r>
+              <a:rPr lang="en-US" sz="1200" dirty="0">
+                <a:solidFill>
+                  <a:srgbClr val="52514E"/>
+                </a:solidFill>
+              </a:rPr>
+              <a:t>of engineering for each assembly, designed one by one</a:t>
+            </a:r>
+            <a:endParaRPr lang="en-US" sz="1200" dirty="0"/>
+          </a:p>
+        </p:txBody>
+      </p:sp>
+      <p:sp>
+        <p:nvSpPr>
+          <p:cNvPr id="16" name="tile of MEP design effort; on the order of $600K per project"/>
+          <p:cNvSpPr/>
+          <p:nvPr/>
+        </p:nvSpPr>
+        <p:spPr>
+          <a:xfrm>
+            <a:off x="8065008" y="4892040"/>
+            <a:ext cx="3575304" cy="1188720"/>
+          </a:xfrm>
+          <a:prstGeom prst="roundRect">
+            <a:avLst>
+              <a:gd name="adj" fmla="val 5385"/>
+            </a:avLst>
+          </a:prstGeom>
+          <a:solidFill>
+            <a:schemeClr val="bg2"/>
+          </a:solidFill>
+          <a:ln/>
+        </p:spPr>
+      </p:sp>
+      <p:sp>
+        <p:nvSpPr>
+          <p:cNvPr id="17" name="value of MEP design effort; on the order of $600K per project"/>
+          <p:cNvSpPr txBox="1"/>
+          <p:nvPr/>
+        </p:nvSpPr>
+        <p:spPr>
+          <a:xfrm>
+            <a:off x="8266176" y="4983480"/>
+            <a:ext cx="3172968" cy="594360"/>
+          </a:xfrm>
+          <a:prstGeom prst="rect">
+            <a:avLst/>
+          </a:prstGeom>
+          <a:noFill/>
+          <a:ln/>
+        </p:spPr>
+        <p:txBody>
+          <a:bodyPr wrap="square" lIns="0" tIns="0" rIns="0" bIns="0" rtlCol="0" anchor="ctr"/>
+          <a:lstStyle/>
+          <a:p>
+            <a:pPr indent="0" marL="0">
+              <a:buNone/>
+            </a:pPr>
+            <a:r>
+              <a:rPr lang="en-US" sz="2800" b="1" dirty="0">
+                <a:solidFill>
+                  <a:schemeClr val="accent1"/>
+                </a:solidFill>
+              </a:rPr>
+              <a:t>≈ ¼</a:t>
+            </a:r>
+            <a:endParaRPr lang="en-US" sz="2800" dirty="0"/>
+          </a:p>
+        </p:txBody>
+      </p:sp>
+      <p:sp>
+        <p:nvSpPr>
+          <p:cNvPr id="18" name="label of MEP design effort; on the order of $600K per project"/>
+          <p:cNvSpPr txBox="1"/>
+          <p:nvPr/>
+        </p:nvSpPr>
+        <p:spPr>
+          <a:xfrm>
+            <a:off x="8266176" y="5581498"/>
+            <a:ext cx="3172968" cy="451714"/>
+          </a:xfrm>
+          <a:prstGeom prst="rect">
+            <a:avLst/>
+          </a:prstGeom>
+          <a:noFill/>
+          <a:ln/>
+        </p:spPr>
+        <p:txBody>
+          <a:bodyPr wrap="square" lIns="0" tIns="0" rIns="0" bIns="0" rtlCol="0" anchor="t"/>
+          <a:lstStyle/>
+          <a:p>
+            <a:pPr indent="0" marL="0">
+              <a:buNone/>
+            </a:pPr>
+            <a:r>
+              <a:rPr lang="en-US" sz="1200" dirty="0">
+                <a:solidFill>
+                  <a:srgbClr val="52514E"/>
+                </a:solidFill>
+              </a:rPr>
+              <a:t>of MEP design effort; on the order of $600K per project</a:t>
+            </a:r>
+            <a:endParaRPr lang="en-US" sz="1200" dirty="0"/>
+          </a:p>
+        </p:txBody>
+      </p:sp>
+      <p:sp>
+        <p:nvSpPr>
+          <p:cNvPr id="19" name="estimates note"/>
+          <p:cNvSpPr txBox="1"/>
+          <p:nvPr/>
+        </p:nvSpPr>
+        <p:spPr>
+          <a:xfrm>
+            <a:off x="548640" y="6126480"/>
+            <a:ext cx="5486400" cy="228600"/>
+          </a:xfrm>
+          <a:prstGeom prst="rect">
+            <a:avLst/>
+          </a:prstGeom>
+          <a:noFill/>
+          <a:ln/>
+        </p:spPr>
+        <p:txBody>
+          <a:bodyPr wrap="square" lIns="0" tIns="0" rIns="0" bIns="0" rtlCol="0" anchor="t"/>
+          <a:lstStyle/>
+          <a:p>
+            <a:pPr indent="0" marL="0">
+              <a:buNone/>
+            </a:pPr>
+            <a:r>
+              <a:rPr lang="en-US" sz="1100" dirty="0">
+                <a:solidFill>
+                  <a:srgbClr val="52514E"/>
+                </a:solidFill>
+              </a:rPr>
+              <a:t>Approximate practitioner estimates.</a:t>
+            </a:r>
+            <a:endParaRPr lang="en-US" sz="1100" dirty="0"/>
+          </a:p>
+        </p:txBody>
+      </p:sp>
+      <p:sp>
+        <p:nvSpPr>
+          <p:cNvPr id="25" name="Slide Number Placeholder 0"/>
+          <p:cNvSpPr>
+            <a:spLocks noGrp="1"/>
+          </p:cNvSpPr>
+          <p:nvPr>
+            <p:ph type="sldNum" sz="quarter" idx="4294967295"/>
+          </p:nvPr>
+        </p:nvSpPr>
+        <p:spPr>
+          <a:xfrm>
+            <a:off x="11064240" y="6419088"/>
+            <a:ext cx="594360" cy="274320"/>
+          </a:xfrm>
+          <a:prstGeom prst="rect">
+            <a:avLst/>
+          </a:prstGeom>
+          <a:extLst>
+            <a:ext uri="{C572A759-6A51-4108-AA02-DFA0A04FC94B}">
+              <ma14:wrappingTextBoxFlag xmlns:ma14="http://schemas.microsoft.com/office/mac/drawingml/2011/main" val="0"/>
+            </a:ext>
+          </a:extLst>
+        </p:spPr>
+        <p:txBody>
+          <a:bodyPr/>
+          <a:lstStyle>
+            <a:lvl1pPr>
+              <a:defRPr sz="900">
+                <a:solidFill>
+                  <a:srgbClr val="898781"/>
+                </a:solidFill>
+              </a:defRPr>
+            </a:lvl1pPr>
+          </a:lstStyle>
+          <a:p>
+            <a:pPr algn="r"/>
+            <a:fld id="{F7021451-1387-4CA6-816F-3879F97B5CBC}" type="slidenum">
+              <a:rPr b="0" lang="en-US"/>
+              <a:t>2</a:t>
+            </a:fld>
+            <a:endParaRPr lang="en-US"/>
+          </a:p>
+        </p:txBody>
+      </p:sp>
+    </p:spTree>
+  </p:cSld>
+  <p:clrMapOvr>
+    <a:masterClrMapping/>
+  </p:clrMapOvr>
+</p:sld>
+</file>
+
+<file path=ppt/slides/slide20.xml><?xml version="1.0" encoding="utf-8"?>
+<p:sld xmlns:a="http://schemas.openxmlformats.org/drawingml/2006/main" xmlns:r="http://schemas.openxmlformats.org/officeDocument/2006/relationships" xmlns:p="http://schemas.openxmlformats.org/presentationml/2006/main">
+  <p:cSld name="Slide 20">
+    <p:spTree>
+      <p:nvGrpSpPr>
+        <p:cNvPr id="1" name=""/>
+        <p:cNvGrpSpPr/>
+        <p:nvPr/>
+      </p:nvGrpSpPr>
+      <p:grpSpPr>
+        <a:xfrm>
+          <a:off x="0" y="0"/>
+          <a:ext cx="0" cy="0"/>
+          <a:chOff x="0" y="0"/>
+          <a:chExt cx="0" cy="0"/>
+        </a:xfrm>
+      </p:grpSpPr>
+      <p:sp>
+        <p:nvSpPr>
+          <p:cNvPr id="2" name="Text 0"/>
+          <p:cNvSpPr/>
+          <p:nvPr>
+            <p:ph idx="100" type="title" hasCustomPrompt="1"/>
+          </p:nvPr>
+        </p:nvSpPr>
+        <p:spPr>
+          <a:xfrm>
+            <a:off x="548640" y="274320"/>
+            <a:ext cx="11091672" cy="960120"/>
+          </a:xfrm>
+          <a:prstGeom prst="rect">
+            <a:avLst/>
+          </a:prstGeom>
+          <a:noFill/>
+          <a:ln/>
+        </p:spPr>
+        <p:txBody>
+          <a:bodyPr wrap="square" lIns="0" tIns="0" rIns="0" bIns="0" rtlCol="0" anchor="ctr"/>
+          <a:lstStyle/>
+          <a:p>
+            <a:pPr algn="l" indent="0" marL="0">
+              <a:buNone/>
+            </a:pPr>
+            <a:r>
+              <a:rPr lang="en-US" sz="2600" b="1" dirty="0">
+                <a:solidFill>
+                  <a:schemeClr val="tx1"/>
+                </a:solidFill>
+              </a:rPr>
               <a:t>Against the clinic the generator is 32 mm off; the small duplex is 76 to 88</a:t>
             </a:r>
             <a:endParaRPr lang="en-US" sz="2600" dirty="0"/>
@@ -10957,7 +11815,7 @@
       </p:sp>
       <p:graphicFrame>
         <p:nvGraphicFramePr>
-          <p:cNvPr id="20" name="samples table"/>
+          <p:cNvPr id="21" name="samples table"/>
           <p:cNvGraphicFramePr>
             <a:graphicFrameLocks noGrp="1"/>
           </p:cNvGraphicFramePr>
@@ -12640,7 +13498,7 @@
       </p:graphicFrame>
       <p:graphicFrame>
         <p:nvGraphicFramePr>
-          <p:cNvPr id="39" name="distances table"/>
+          <p:cNvPr id="41" name="distances table"/>
           <p:cNvGraphicFramePr>
             <a:graphicFrameLocks noGrp="1"/>
           </p:cNvGraphicFramePr>
@@ -14685,7 +15543,7 @@
             <a:pPr algn="r"/>
             <a:fld id="{F7021451-1387-4CA6-816F-3879F97B5CBC}" type="slidenum">
               <a:rPr b="0" lang="en-US"/>
-              <a:t>19</a:t>
+              <a:t>20</a:t>
             </a:fld>
             <a:endParaRPr lang="en-US"/>
           </a:p>
@@ -14699,9 +15557,9 @@
 </p:sld>
 </file>
 
-<file path=ppt/slides/slide2.xml><?xml version="1.0" encoding="utf-8"?>
+<file path=ppt/slides/slide21.xml><?xml version="1.0" encoding="utf-8"?>
 <p:sld xmlns:a="http://schemas.openxmlformats.org/drawingml/2006/main" xmlns:r="http://schemas.openxmlformats.org/officeDocument/2006/relationships" xmlns:p="http://schemas.openxmlformats.org/presentationml/2006/main">
-  <p:cSld name="Slide 2">
+  <p:cSld name="Slide 21">
     <p:spTree>
       <p:nvGrpSpPr>
         <p:cNvPr id="1" name=""/>
@@ -14748,606 +15606,6 @@
                   <a:schemeClr val="tx1"/>
                 </a:solidFill>
               </a:rPr>
-              <a:t>A hospital needs about 10,000 support assemblies, each designed by hand</a:t>
-            </a:r>
-            <a:endParaRPr lang="en-US" sz="2600" dirty="0"/>
-          </a:p>
-        </p:txBody>
-      </p:sp>
-      <p:pic>
-        <p:nvPicPr>
-          <p:cNvPr id="3" name="hospital model" descr="/home/user/crossmep_dataset/docs/figures/isarc_building.jpg">    </p:cNvPr>
-          <p:cNvPicPr>
-            <a:picLocks noChangeAspect="1"/>
-          </p:cNvPicPr>
-          <p:nvPr/>
-        </p:nvPicPr>
-        <p:blipFill>
-          <a:blip r:embed="rId1"/>
-          <a:stretch>
-            <a:fillRect/>
-          </a:stretch>
-        </p:blipFill>
-        <p:spPr>
-          <a:xfrm>
-            <a:off x="548640" y="1325880"/>
-            <a:ext cx="6035040" cy="3394710"/>
-          </a:xfrm>
-          <a:prstGeom prst="rect">
-            <a:avLst/>
-          </a:prstGeom>
-        </p:spPr>
-      </p:pic>
-      <p:sp>
-        <p:nvSpPr>
-          <p:cNvPr id="4" name="zoom box"/>
-          <p:cNvSpPr/>
-          <p:nvPr/>
-        </p:nvSpPr>
-        <p:spPr>
-          <a:xfrm>
-            <a:off x="3304843" y="2791716"/>
-            <a:ext cx="592641" cy="473902"/>
-          </a:xfrm>
-          <a:prstGeom prst="rect">
-            <a:avLst/>
-          </a:prstGeom>
-          <a:ln w="19050">
-            <a:solidFill>
-              <a:srgbClr val="EB6834"/>
-            </a:solidFill>
-            <a:prstDash val="solid"/>
-          </a:ln>
-        </p:spPr>
-      </p:sp>
-      <p:sp>
-        <p:nvSpPr>
-          <p:cNvPr id="5" name="zoom line top"/>
-          <p:cNvSpPr/>
-          <p:nvPr/>
-        </p:nvSpPr>
-        <p:spPr>
-          <a:xfrm flipV="1">
-            <a:off x="3897484" y="2791716"/>
-            <a:ext cx="3051956" cy="-1008636"/>
-          </a:xfrm>
-          <a:prstGeom prst="line">
-            <a:avLst/>
-          </a:prstGeom>
-          <a:noFill/>
-          <a:ln w="19050">
-            <a:solidFill>
-              <a:srgbClr val="EB6834"/>
-            </a:solidFill>
-            <a:prstDash val="solid"/>
-          </a:ln>
-        </p:spPr>
-      </p:sp>
-      <p:sp>
-        <p:nvSpPr>
-          <p:cNvPr id="6" name="zoom line bottom"/>
-          <p:cNvSpPr/>
-          <p:nvPr/>
-        </p:nvSpPr>
-        <p:spPr>
-          <a:xfrm>
-            <a:off x="3897484" y="3265617"/>
-            <a:ext cx="3051956" cy="1210645"/>
-          </a:xfrm>
-          <a:prstGeom prst="line">
-            <a:avLst/>
-          </a:prstGeom>
-          <a:noFill/>
-          <a:ln w="19050">
-            <a:solidFill>
-              <a:srgbClr val="EB6834"/>
-            </a:solidFill>
-            <a:prstDash val="solid"/>
-          </a:ln>
-        </p:spPr>
-      </p:sp>
-      <p:pic>
-        <p:nvPicPr>
-          <p:cNvPr id="7" name="one assembly" descr="/home/user/crossmep_dataset/docs/figures/isarc_ssa.jpg">    </p:cNvPr>
-          <p:cNvPicPr>
-            <a:picLocks noChangeAspect="1"/>
-          </p:cNvPicPr>
-          <p:nvPr/>
-        </p:nvPicPr>
-        <p:blipFill>
-          <a:blip r:embed="rId2"/>
-          <a:stretch>
-            <a:fillRect/>
-          </a:stretch>
-        </p:blipFill>
-        <p:spPr>
-          <a:xfrm>
-            <a:off x="6949440" y="1783080"/>
-            <a:ext cx="4690872" cy="2693182"/>
-          </a:xfrm>
-          <a:prstGeom prst="rect">
-            <a:avLst/>
-          </a:prstGeom>
-        </p:spPr>
-      </p:pic>
-      <p:sp>
-        <p:nvSpPr>
-          <p:cNvPr id="8" name="inset frame"/>
-          <p:cNvSpPr/>
-          <p:nvPr/>
-        </p:nvSpPr>
-        <p:spPr>
-          <a:xfrm>
-            <a:off x="6949440" y="1783080"/>
-            <a:ext cx="4690872" cy="2693182"/>
-          </a:xfrm>
-          <a:prstGeom prst="rect">
-            <a:avLst/>
-          </a:prstGeom>
-          <a:ln w="19050">
-            <a:solidFill>
-              <a:srgbClr val="EB6834"/>
-            </a:solidFill>
-            <a:prstDash val="solid"/>
-          </a:ln>
-        </p:spPr>
-      </p:sp>
-      <p:sp>
-        <p:nvSpPr>
-          <p:cNvPr id="9" name="inset label"/>
-          <p:cNvSpPr txBox="1"/>
-          <p:nvPr/>
-        </p:nvSpPr>
-        <p:spPr>
-          <a:xfrm>
-            <a:off x="6949440" y="1325880"/>
-            <a:ext cx="4690872" cy="411480"/>
-          </a:xfrm>
-          <a:prstGeom prst="rect">
-            <a:avLst/>
-          </a:prstGeom>
-          <a:noFill/>
-          <a:ln/>
-        </p:spPr>
-        <p:txBody>
-          <a:bodyPr wrap="square" lIns="0" tIns="0" rIns="0" bIns="0" rtlCol="0" anchor="b"/>
-          <a:lstStyle/>
-          <a:p>
-            <a:pPr indent="0" marL="0">
-              <a:buNone/>
-            </a:pPr>
-            <a:r>
-              <a:rPr lang="en-US" sz="1500" b="1" dirty="0">
-                <a:solidFill>
-                  <a:schemeClr val="tx1"/>
-                </a:solidFill>
-              </a:rPr>
-              <a:t>1 unit = 1 structural support assembly (SSA)</a:t>
-            </a:r>
-            <a:endParaRPr lang="en-US" sz="1500" dirty="0"/>
-          </a:p>
-        </p:txBody>
-      </p:sp>
-      <p:sp>
-        <p:nvSpPr>
-          <p:cNvPr id="10" name="tile support assemblies in one 200,000 sq ft hospital"/>
-          <p:cNvSpPr/>
-          <p:nvPr/>
-        </p:nvSpPr>
-        <p:spPr>
-          <a:xfrm>
-            <a:off x="548640" y="4892040"/>
-            <a:ext cx="3575304" cy="1188720"/>
-          </a:xfrm>
-          <a:prstGeom prst="roundRect">
-            <a:avLst>
-              <a:gd name="adj" fmla="val 5385"/>
-            </a:avLst>
-          </a:prstGeom>
-          <a:solidFill>
-            <a:schemeClr val="bg2"/>
-          </a:solidFill>
-          <a:ln/>
-        </p:spPr>
-      </p:sp>
-      <p:sp>
-        <p:nvSpPr>
-          <p:cNvPr id="11" name="value support assemblies in one 200,000 sq ft hospital"/>
-          <p:cNvSpPr txBox="1"/>
-          <p:nvPr/>
-        </p:nvSpPr>
-        <p:spPr>
-          <a:xfrm>
-            <a:off x="749808" y="4983480"/>
-            <a:ext cx="3172968" cy="594360"/>
-          </a:xfrm>
-          <a:prstGeom prst="rect">
-            <a:avLst/>
-          </a:prstGeom>
-          <a:noFill/>
-          <a:ln/>
-        </p:spPr>
-        <p:txBody>
-          <a:bodyPr wrap="square" lIns="0" tIns="0" rIns="0" bIns="0" rtlCol="0" anchor="ctr"/>
-          <a:lstStyle/>
-          <a:p>
-            <a:pPr indent="0" marL="0">
-              <a:buNone/>
-            </a:pPr>
-            <a:r>
-              <a:rPr lang="en-US" sz="2800" b="1" dirty="0">
-                <a:solidFill>
-                  <a:schemeClr val="accent1"/>
-                </a:solidFill>
-              </a:rPr>
-              <a:t>≈ 10,000</a:t>
-            </a:r>
-            <a:endParaRPr lang="en-US" sz="2800" dirty="0"/>
-          </a:p>
-        </p:txBody>
-      </p:sp>
-      <p:sp>
-        <p:nvSpPr>
-          <p:cNvPr id="12" name="label support assemblies in one 200,000 sq ft hospital"/>
-          <p:cNvSpPr txBox="1"/>
-          <p:nvPr/>
-        </p:nvSpPr>
-        <p:spPr>
-          <a:xfrm>
-            <a:off x="749808" y="5581498"/>
-            <a:ext cx="3172968" cy="451714"/>
-          </a:xfrm>
-          <a:prstGeom prst="rect">
-            <a:avLst/>
-          </a:prstGeom>
-          <a:noFill/>
-          <a:ln/>
-        </p:spPr>
-        <p:txBody>
-          <a:bodyPr wrap="square" lIns="0" tIns="0" rIns="0" bIns="0" rtlCol="0" anchor="t"/>
-          <a:lstStyle/>
-          <a:p>
-            <a:pPr indent="0" marL="0">
-              <a:buNone/>
-            </a:pPr>
-            <a:r>
-              <a:rPr lang="en-US" sz="1200" dirty="0">
-                <a:solidFill>
-                  <a:srgbClr val="52514E"/>
-                </a:solidFill>
-              </a:rPr>
-              <a:t>support assemblies in one 200,000 sq ft hospital</a:t>
-            </a:r>
-            <a:endParaRPr lang="en-US" sz="1200" dirty="0"/>
-          </a:p>
-        </p:txBody>
-      </p:sp>
-      <p:sp>
-        <p:nvSpPr>
-          <p:cNvPr id="13" name="tile of engineering for each assembly, designed one by one"/>
-          <p:cNvSpPr/>
-          <p:nvPr/>
-        </p:nvSpPr>
-        <p:spPr>
-          <a:xfrm>
-            <a:off x="4306824" y="4892040"/>
-            <a:ext cx="3575304" cy="1188720"/>
-          </a:xfrm>
-          <a:prstGeom prst="roundRect">
-            <a:avLst>
-              <a:gd name="adj" fmla="val 5385"/>
-            </a:avLst>
-          </a:prstGeom>
-          <a:solidFill>
-            <a:schemeClr val="bg2"/>
-          </a:solidFill>
-          <a:ln/>
-        </p:spPr>
-      </p:sp>
-      <p:sp>
-        <p:nvSpPr>
-          <p:cNvPr id="14" name="value of engineering for each assembly, designed one by one"/>
-          <p:cNvSpPr txBox="1"/>
-          <p:nvPr/>
-        </p:nvSpPr>
-        <p:spPr>
-          <a:xfrm>
-            <a:off x="4507992" y="4983480"/>
-            <a:ext cx="3172968" cy="594360"/>
-          </a:xfrm>
-          <a:prstGeom prst="rect">
-            <a:avLst/>
-          </a:prstGeom>
-          <a:noFill/>
-          <a:ln/>
-        </p:spPr>
-        <p:txBody>
-          <a:bodyPr wrap="square" lIns="0" tIns="0" rIns="0" bIns="0" rtlCol="0" anchor="ctr"/>
-          <a:lstStyle/>
-          <a:p>
-            <a:pPr indent="0" marL="0">
-              <a:buNone/>
-            </a:pPr>
-            <a:r>
-              <a:rPr lang="en-US" sz="2800" b="1" dirty="0">
-                <a:solidFill>
-                  <a:schemeClr val="accent1"/>
-                </a:solidFill>
-              </a:rPr>
-              <a:t>20 min – 2 h</a:t>
-            </a:r>
-            <a:endParaRPr lang="en-US" sz="2800" dirty="0"/>
-          </a:p>
-        </p:txBody>
-      </p:sp>
-      <p:sp>
-        <p:nvSpPr>
-          <p:cNvPr id="15" name="label of engineering for each assembly, designed one by one"/>
-          <p:cNvSpPr txBox="1"/>
-          <p:nvPr/>
-        </p:nvSpPr>
-        <p:spPr>
-          <a:xfrm>
-            <a:off x="4507992" y="5581498"/>
-            <a:ext cx="3172968" cy="451714"/>
-          </a:xfrm>
-          <a:prstGeom prst="rect">
-            <a:avLst/>
-          </a:prstGeom>
-          <a:noFill/>
-          <a:ln/>
-        </p:spPr>
-        <p:txBody>
-          <a:bodyPr wrap="square" lIns="0" tIns="0" rIns="0" bIns="0" rtlCol="0" anchor="t"/>
-          <a:lstStyle/>
-          <a:p>
-            <a:pPr indent="0" marL="0">
-              <a:buNone/>
-            </a:pPr>
-            <a:r>
-              <a:rPr lang="en-US" sz="1200" dirty="0">
-                <a:solidFill>
-                  <a:srgbClr val="52514E"/>
-                </a:solidFill>
-              </a:rPr>
-              <a:t>of engineering for each assembly, designed one by one</a:t>
-            </a:r>
-            <a:endParaRPr lang="en-US" sz="1200" dirty="0"/>
-          </a:p>
-        </p:txBody>
-      </p:sp>
-      <p:sp>
-        <p:nvSpPr>
-          <p:cNvPr id="16" name="tile of MEP design effort; on the order of $600K per project"/>
-          <p:cNvSpPr/>
-          <p:nvPr/>
-        </p:nvSpPr>
-        <p:spPr>
-          <a:xfrm>
-            <a:off x="8065008" y="4892040"/>
-            <a:ext cx="3575304" cy="1188720"/>
-          </a:xfrm>
-          <a:prstGeom prst="roundRect">
-            <a:avLst>
-              <a:gd name="adj" fmla="val 5385"/>
-            </a:avLst>
-          </a:prstGeom>
-          <a:solidFill>
-            <a:schemeClr val="bg2"/>
-          </a:solidFill>
-          <a:ln/>
-        </p:spPr>
-      </p:sp>
-      <p:sp>
-        <p:nvSpPr>
-          <p:cNvPr id="17" name="value of MEP design effort; on the order of $600K per project"/>
-          <p:cNvSpPr txBox="1"/>
-          <p:nvPr/>
-        </p:nvSpPr>
-        <p:spPr>
-          <a:xfrm>
-            <a:off x="8266176" y="4983480"/>
-            <a:ext cx="3172968" cy="594360"/>
-          </a:xfrm>
-          <a:prstGeom prst="rect">
-            <a:avLst/>
-          </a:prstGeom>
-          <a:noFill/>
-          <a:ln/>
-        </p:spPr>
-        <p:txBody>
-          <a:bodyPr wrap="square" lIns="0" tIns="0" rIns="0" bIns="0" rtlCol="0" anchor="ctr"/>
-          <a:lstStyle/>
-          <a:p>
-            <a:pPr indent="0" marL="0">
-              <a:buNone/>
-            </a:pPr>
-            <a:r>
-              <a:rPr lang="en-US" sz="2800" b="1" dirty="0">
-                <a:solidFill>
-                  <a:schemeClr val="accent1"/>
-                </a:solidFill>
-              </a:rPr>
-              <a:t>≈ ¼</a:t>
-            </a:r>
-            <a:endParaRPr lang="en-US" sz="2800" dirty="0"/>
-          </a:p>
-        </p:txBody>
-      </p:sp>
-      <p:sp>
-        <p:nvSpPr>
-          <p:cNvPr id="18" name="label of MEP design effort; on the order of $600K per project"/>
-          <p:cNvSpPr txBox="1"/>
-          <p:nvPr/>
-        </p:nvSpPr>
-        <p:spPr>
-          <a:xfrm>
-            <a:off x="8266176" y="5581498"/>
-            <a:ext cx="3172968" cy="451714"/>
-          </a:xfrm>
-          <a:prstGeom prst="rect">
-            <a:avLst/>
-          </a:prstGeom>
-          <a:noFill/>
-          <a:ln/>
-        </p:spPr>
-        <p:txBody>
-          <a:bodyPr wrap="square" lIns="0" tIns="0" rIns="0" bIns="0" rtlCol="0" anchor="t"/>
-          <a:lstStyle/>
-          <a:p>
-            <a:pPr indent="0" marL="0">
-              <a:buNone/>
-            </a:pPr>
-            <a:r>
-              <a:rPr lang="en-US" sz="1200" dirty="0">
-                <a:solidFill>
-                  <a:srgbClr val="52514E"/>
-                </a:solidFill>
-              </a:rPr>
-              <a:t>of MEP design effort; on the order of $600K per project</a:t>
-            </a:r>
-            <a:endParaRPr lang="en-US" sz="1200" dirty="0"/>
-          </a:p>
-        </p:txBody>
-      </p:sp>
-      <p:sp>
-        <p:nvSpPr>
-          <p:cNvPr id="19" name="estimates note"/>
-          <p:cNvSpPr txBox="1"/>
-          <p:nvPr/>
-        </p:nvSpPr>
-        <p:spPr>
-          <a:xfrm>
-            <a:off x="548640" y="6126480"/>
-            <a:ext cx="5486400" cy="228600"/>
-          </a:xfrm>
-          <a:prstGeom prst="rect">
-            <a:avLst/>
-          </a:prstGeom>
-          <a:noFill/>
-          <a:ln/>
-        </p:spPr>
-        <p:txBody>
-          <a:bodyPr wrap="square" lIns="0" tIns="0" rIns="0" bIns="0" rtlCol="0" anchor="t"/>
-          <a:lstStyle/>
-          <a:p>
-            <a:pPr indent="0" marL="0">
-              <a:buNone/>
-            </a:pPr>
-            <a:r>
-              <a:rPr lang="en-US" sz="1100" dirty="0">
-                <a:solidFill>
-                  <a:srgbClr val="52514E"/>
-                </a:solidFill>
-              </a:rPr>
-              <a:t>Approximate practitioner estimates.</a:t>
-            </a:r>
-            <a:endParaRPr lang="en-US" sz="1100" dirty="0"/>
-          </a:p>
-        </p:txBody>
-      </p:sp>
-      <p:sp>
-        <p:nvSpPr>
-          <p:cNvPr id="25" name="Slide Number Placeholder 0"/>
-          <p:cNvSpPr>
-            <a:spLocks noGrp="1"/>
-          </p:cNvSpPr>
-          <p:nvPr>
-            <p:ph type="sldNum" sz="quarter" idx="4294967295"/>
-          </p:nvPr>
-        </p:nvSpPr>
-        <p:spPr>
-          <a:xfrm>
-            <a:off x="11064240" y="6419088"/>
-            <a:ext cx="594360" cy="274320"/>
-          </a:xfrm>
-          <a:prstGeom prst="rect">
-            <a:avLst/>
-          </a:prstGeom>
-          <a:extLst>
-            <a:ext uri="{C572A759-6A51-4108-AA02-DFA0A04FC94B}">
-              <ma14:wrappingTextBoxFlag xmlns:ma14="http://schemas.microsoft.com/office/mac/drawingml/2011/main" val="0"/>
-            </a:ext>
-          </a:extLst>
-        </p:spPr>
-        <p:txBody>
-          <a:bodyPr/>
-          <a:lstStyle>
-            <a:lvl1pPr>
-              <a:defRPr sz="900">
-                <a:solidFill>
-                  <a:srgbClr val="898781"/>
-                </a:solidFill>
-              </a:defRPr>
-            </a:lvl1pPr>
-          </a:lstStyle>
-          <a:p>
-            <a:pPr algn="r"/>
-            <a:fld id="{F7021451-1387-4CA6-816F-3879F97B5CBC}" type="slidenum">
-              <a:rPr b="0" lang="en-US"/>
-              <a:t>2</a:t>
-            </a:fld>
-            <a:endParaRPr lang="en-US"/>
-          </a:p>
-        </p:txBody>
-      </p:sp>
-    </p:spTree>
-  </p:cSld>
-  <p:clrMapOvr>
-    <a:masterClrMapping/>
-  </p:clrMapOvr>
-</p:sld>
-</file>
-
-<file path=ppt/slides/slide20.xml><?xml version="1.0" encoding="utf-8"?>
-<p:sld xmlns:a="http://schemas.openxmlformats.org/drawingml/2006/main" xmlns:r="http://schemas.openxmlformats.org/officeDocument/2006/relationships" xmlns:p="http://schemas.openxmlformats.org/presentationml/2006/main">
-  <p:cSld name="Slide 20">
-    <p:spTree>
-      <p:nvGrpSpPr>
-        <p:cNvPr id="1" name=""/>
-        <p:cNvGrpSpPr/>
-        <p:nvPr/>
-      </p:nvGrpSpPr>
-      <p:grpSpPr>
-        <a:xfrm>
-          <a:off x="0" y="0"/>
-          <a:ext cx="0" cy="0"/>
-          <a:chOff x="0" y="0"/>
-          <a:chExt cx="0" cy="0"/>
-        </a:xfrm>
-      </p:grpSpPr>
-      <p:sp>
-        <p:nvSpPr>
-          <p:cNvPr id="2" name="Text 0"/>
-          <p:cNvSpPr/>
-          <p:nvPr>
-            <p:ph idx="100" type="title" hasCustomPrompt="1"/>
-          </p:nvPr>
-        </p:nvSpPr>
-        <p:spPr>
-          <a:xfrm>
-            <a:off x="548640" y="274320"/>
-            <a:ext cx="11091672" cy="960120"/>
-          </a:xfrm>
-          <a:prstGeom prst="rect">
-            <a:avLst/>
-          </a:prstGeom>
-          <a:noFill/>
-          <a:ln/>
-        </p:spPr>
-        <p:txBody>
-          <a:bodyPr wrap="square" lIns="0" tIns="0" rIns="0" bIns="0" rtlCol="0" anchor="ctr"/>
-          <a:lstStyle/>
-          <a:p>
-            <a:pPr algn="l" indent="0" marL="0">
-              <a:buNone/>
-            </a:pPr>
-            <a:r>
-              <a:rPr lang="en-US" sz="2600" b="1" dirty="0">
-                <a:solidFill>
-                  <a:schemeClr val="tx1"/>
-                </a:solidFill>
-              </a:rPr>
               <a:t>The diameter rule moves catalog coverage more than tier or split does</a:t>
             </a:r>
             <a:endParaRPr lang="en-US" sz="2600" dirty="0"/>
@@ -15356,7 +15614,7 @@
       </p:sp>
       <p:graphicFrame>
         <p:nvGraphicFramePr>
-          <p:cNvPr id="21" name="per tier catalog table"/>
+          <p:cNvPr id="22" name="per tier catalog table"/>
           <p:cNvGraphicFramePr>
             <a:graphicFrameLocks noGrp="1"/>
           </p:cNvGraphicFramePr>
@@ -17758,7 +18016,7 @@
       </p:graphicFrame>
       <p:graphicFrame>
         <p:nvGraphicFramePr>
-          <p:cNvPr id="41" name="sensitivity table"/>
+          <p:cNvPr id="43" name="sensitivity table"/>
           <p:cNvGraphicFramePr>
             <a:graphicFrameLocks noGrp="1"/>
           </p:cNvGraphicFramePr>
@@ -18886,7 +19144,7 @@
       </p:sp>
       <p:graphicFrame>
         <p:nvGraphicFramePr>
-          <p:cNvPr id="61" name="split catalog table"/>
+          <p:cNvPr id="64" name="split catalog table"/>
           <p:cNvGraphicFramePr>
             <a:graphicFrameLocks noGrp="1"/>
           </p:cNvGraphicFramePr>
@@ -20042,7 +20300,7 @@
             <a:pPr algn="r"/>
             <a:fld id="{F7021451-1387-4CA6-816F-3879F97B5CBC}" type="slidenum">
               <a:rPr b="0" lang="en-US"/>
-              <a:t>20</a:t>
+              <a:t>21</a:t>
             </a:fld>
             <a:endParaRPr lang="en-US"/>
           </a:p>
@@ -20056,9 +20314,9 @@
 </p:sld>
 </file>
 
-<file path=ppt/slides/slide21.xml><?xml version="1.0" encoding="utf-8"?>
+<file path=ppt/slides/slide22.xml><?xml version="1.0" encoding="utf-8"?>
 <p:sld xmlns:a="http://schemas.openxmlformats.org/drawingml/2006/main" xmlns:r="http://schemas.openxmlformats.org/officeDocument/2006/relationships" xmlns:p="http://schemas.openxmlformats.org/presentationml/2006/main">
-  <p:cSld name="Slide 21">
+  <p:cSld name="Slide 22">
     <p:spTree>
       <p:nvGrpSpPr>
         <p:cNvPr id="1" name=""/>
@@ -20527,7 +20785,7 @@
             <a:pPr algn="r"/>
             <a:fld id="{F7021451-1387-4CA6-816F-3879F97B5CBC}" type="slidenum">
               <a:rPr b="0" lang="en-US"/>
-              <a:t>21</a:t>
+              <a:t>22</a:t>
             </a:fld>
             <a:endParaRPr lang="en-US"/>
           </a:p>
@@ -21204,7 +21462,7 @@
                   <a:schemeClr val="tx1"/>
                 </a:solidFill>
               </a:rPr>
-              <a:t>Learning to design supports needs many problems, and none were public</a:t>
+              <a:t>One section in, verified supports out: learnable, given problems to learn from</a:t>
             </a:r>
             <a:endParaRPr lang="en-US" sz="2600" dirty="0"/>
           </a:p>
@@ -21212,14 +21470,36 @@
       </p:sp>
       <p:sp>
         <p:nvSpPr>
-          <p:cNvPr id="3" name="why heading"/>
+          <p:cNvPr id="3" name="flow box brief"/>
+          <p:cNvSpPr/>
+          <p:nvPr/>
+        </p:nvSpPr>
+        <p:spPr>
+          <a:xfrm>
+            <a:off x="548640" y="1600200"/>
+            <a:ext cx="2148840" cy="1554480"/>
+          </a:xfrm>
+          <a:prstGeom prst="roundRect">
+            <a:avLst>
+              <a:gd name="adj" fmla="val 4118"/>
+            </a:avLst>
+          </a:prstGeom>
+          <a:solidFill>
+            <a:schemeClr val="bg2"/>
+          </a:solidFill>
+          <a:ln/>
+        </p:spPr>
+      </p:sp>
+      <p:sp>
+        <p:nvSpPr>
+          <p:cNvPr id="4" name="flow text brief"/>
           <p:cNvSpPr txBox="1"/>
           <p:nvPr/>
         </p:nvSpPr>
         <p:spPr>
           <a:xfrm>
-            <a:off x="548640" y="1371600"/>
-            <a:ext cx="4937760" cy="365760"/>
+            <a:off x="713232" y="1709928"/>
+            <a:ext cx="1819656" cy="1335024"/>
           </a:xfrm>
           <a:prstGeom prst="rect">
             <a:avLst/>
@@ -21231,75 +21511,96 @@
           <a:bodyPr wrap="square" lIns="0" tIns="0" rIns="0" bIns="0" rtlCol="0" anchor="ctr"/>
           <a:lstStyle/>
           <a:p>
-            <a:pPr indent="0" marL="0">
+            <a:pPr algn="ctr" indent="0" marL="0">
               <a:buNone/>
             </a:pPr>
             <a:r>
-              <a:rPr lang="en-US" sz="1600" b="1" dirty="0">
+              <a:rPr lang="en-US" sz="1500" b="1" dirty="0">
                 <a:solidFill>
                   <a:schemeClr val="tx1"/>
                 </a:solidFill>
               </a:rPr>
-              <a:t>Why it has to be synthetic</a:t>
+              <a:t>The brief</a:t>
             </a:r>
-            <a:endParaRPr lang="en-US" sz="1600" dirty="0"/>
+            <a:endParaRPr lang="en-US" sz="1500" dirty="0"/>
+          </a:p>
+          <a:p>
+            <a:pPr algn="ctr" indent="0" marL="0">
+              <a:buNone/>
+            </a:pPr>
+            <a:r>
+              <a:rPr lang="en-US" sz="1250" dirty="0">
+                <a:solidFill>
+                  <a:srgbClr val="52514E"/>
+                </a:solidFill>
+              </a:rPr>
+              <a:t>the section at one hanger: structure, services and their loads, plus a catalog of parts with unit costs</a:t>
+            </a:r>
+            <a:endParaRPr lang="en-US" sz="1500" dirty="0"/>
           </a:p>
         </p:txBody>
       </p:sp>
       <p:sp>
         <p:nvSpPr>
-          <p:cNvPr id="4" name="icon ring Scarcity"/>
+          <p:cNvPr id="5" name="flow arrow 1"/>
           <p:cNvSpPr/>
           <p:nvPr/>
         </p:nvSpPr>
         <p:spPr>
           <a:xfrm>
-            <a:off x="548640" y="1874520"/>
-            <a:ext cx="530352" cy="530352"/>
+            <a:off x="2697480" y="2377440"/>
+            <a:ext cx="457200" cy="0"/>
           </a:xfrm>
-          <a:prstGeom prst="ellipse">
+          <a:prstGeom prst="line">
             <a:avLst/>
           </a:prstGeom>
-          <a:solidFill>
-            <a:schemeClr val="accent1"/>
-          </a:solidFill>
-          <a:ln/>
+          <a:noFill/>
+          <a:ln w="19050">
+            <a:solidFill>
+              <a:srgbClr val="52514E"/>
+            </a:solidFill>
+            <a:prstDash val="solid"/>
+            <a:tailEnd type="triangle"/>
+          </a:ln>
         </p:spPr>
       </p:sp>
-      <p:pic>
-        <p:nvPicPr>
-          <p:cNvPr id="5" name="icon Scarcity" descr="preencoded.png">    </p:cNvPr>
-          <p:cNvPicPr>
-            <a:picLocks noChangeAspect="1"/>
-          </p:cNvPicPr>
+      <p:sp>
+        <p:nvSpPr>
+          <p:cNvPr id="6" name="flow box build"/>
+          <p:cNvSpPr/>
           <p:nvPr/>
-        </p:nvPicPr>
-        <p:blipFill>
-          <a:blip r:embed="rId1"/>
-          <a:stretch>
-            <a:fillRect/>
-          </a:stretch>
-        </p:blipFill>
+        </p:nvSpPr>
         <p:spPr>
           <a:xfrm>
-            <a:off x="660014" y="1985894"/>
-            <a:ext cx="307604" cy="307604"/>
+            <a:off x="3154680" y="1600200"/>
+            <a:ext cx="3017520" cy="1554480"/>
           </a:xfrm>
-          <a:prstGeom prst="rect">
-            <a:avLst/>
+          <a:prstGeom prst="roundRect">
+            <a:avLst>
+              <a:gd name="adj" fmla="val 4118"/>
+            </a:avLst>
           </a:prstGeom>
+          <a:solidFill>
+            <a:schemeClr val="bg2"/>
+          </a:solidFill>
+          <a:ln w="19050">
+            <a:solidFill>
+              <a:schemeClr val="accent1"/>
+            </a:solidFill>
+            <a:prstDash val="solid"/>
+          </a:ln>
         </p:spPr>
-      </p:pic>
-      <p:sp>
-        <p:nvSpPr>
-          <p:cNvPr id="6" name="reason Scarcity"/>
+      </p:sp>
+      <p:sp>
+        <p:nvSpPr>
+          <p:cNvPr id="7" name="flow text build"/>
           <p:cNvSpPr txBox="1"/>
           <p:nvPr/>
         </p:nvSpPr>
         <p:spPr>
           <a:xfrm>
-            <a:off x="1280160" y="1856232"/>
-            <a:ext cx="4206240" cy="329184"/>
+            <a:off x="3319272" y="1709928"/>
+            <a:ext cx="2688336" cy="1335024"/>
           </a:xfrm>
           <a:prstGeom prst="rect">
             <a:avLst/>
@@ -21311,7 +21612,7 @@
           <a:bodyPr wrap="square" lIns="0" tIns="0" rIns="0" bIns="0" rtlCol="0" anchor="ctr"/>
           <a:lstStyle/>
           <a:p>
-            <a:pPr indent="0" marL="0">
+            <a:pPr algn="ctr" indent="0" marL="0">
               <a:buNone/>
             </a:pPr>
             <a:r>
@@ -21320,22 +21621,387 @@
                   <a:schemeClr val="tx1"/>
                 </a:solidFill>
               </a:rPr>
-              <a:t>Scarcity</a:t>
+              <a:t>Build the assembly step by step</a:t>
             </a:r>
             <a:endParaRPr lang="en-US" sz="1500" dirty="0"/>
           </a:p>
+          <a:p>
+            <a:pPr algn="ctr" indent="0" marL="0">
+              <a:buNone/>
+            </a:pPr>
+            <a:r>
+              <a:rPr lang="en-US" sz="1250" dirty="0">
+                <a:solidFill>
+                  <a:srgbClr val="52514E"/>
+                </a:solidFill>
+              </a:rPr>
+              <a:t>each step adds parts the rules allow; the step is chosen by a rule table, by search, or by a learned policy</a:t>
+            </a:r>
+            <a:endParaRPr lang="en-US" sz="1500" dirty="0"/>
+          </a:p>
         </p:txBody>
       </p:sp>
       <p:sp>
         <p:nvSpPr>
-          <p:cNvPr id="7" name="reason text Scarcity"/>
+          <p:cNvPr id="8" name="flow arrow 2"/>
+          <p:cNvSpPr/>
+          <p:nvPr/>
+        </p:nvSpPr>
+        <p:spPr>
+          <a:xfrm>
+            <a:off x="6172200" y="2377440"/>
+            <a:ext cx="457200" cy="0"/>
+          </a:xfrm>
+          <a:prstGeom prst="line">
+            <a:avLst/>
+          </a:prstGeom>
+          <a:noFill/>
+          <a:ln w="19050">
+            <a:solidFill>
+              <a:srgbClr val="52514E"/>
+            </a:solidFill>
+            <a:prstDash val="solid"/>
+            <a:tailEnd type="triangle"/>
+          </a:ln>
+        </p:spPr>
+      </p:sp>
+      <p:sp>
+        <p:nvSpPr>
+          <p:cNvPr id="9" name="flow box check"/>
+          <p:cNvSpPr/>
+          <p:nvPr/>
+        </p:nvSpPr>
+        <p:spPr>
+          <a:xfrm>
+            <a:off x="6629400" y="1600200"/>
+            <a:ext cx="2697480" cy="1554480"/>
+          </a:xfrm>
+          <a:prstGeom prst="roundRect">
+            <a:avLst>
+              <a:gd name="adj" fmla="val 4118"/>
+            </a:avLst>
+          </a:prstGeom>
+          <a:solidFill>
+            <a:schemeClr val="bg2"/>
+          </a:solidFill>
+          <a:ln w="19050">
+            <a:solidFill>
+              <a:srgbClr val="008300"/>
+            </a:solidFill>
+            <a:prstDash val="solid"/>
+          </a:ln>
+        </p:spPr>
+      </p:sp>
+      <p:sp>
+        <p:nvSpPr>
+          <p:cNvPr id="10" name="flow text check"/>
           <p:cNvSpPr txBox="1"/>
           <p:nvPr/>
         </p:nvSpPr>
         <p:spPr>
           <a:xfrm>
-            <a:off x="1280160" y="2221992"/>
-            <a:ext cx="4206240" cy="868680"/>
+            <a:off x="6793992" y="1709928"/>
+            <a:ext cx="2368296" cy="1335024"/>
+          </a:xfrm>
+          <a:prstGeom prst="rect">
+            <a:avLst/>
+          </a:prstGeom>
+          <a:noFill/>
+          <a:ln/>
+        </p:spPr>
+        <p:txBody>
+          <a:bodyPr wrap="square" lIns="0" tIns="0" rIns="0" bIns="0" rtlCol="0" anchor="ctr"/>
+          <a:lstStyle/>
+          <a:p>
+            <a:pPr algn="ctr" indent="0" marL="0">
+              <a:buNone/>
+            </a:pPr>
+            <a:r>
+              <a:rPr lang="en-US" sz="1500" b="1" dirty="0">
+                <a:solidFill>
+                  <a:schemeClr val="tx1"/>
+                </a:solidFill>
+              </a:rPr>
+              <a:t>Check every finished design</a:t>
+            </a:r>
+            <a:endParaRPr lang="en-US" sz="1500" dirty="0"/>
+          </a:p>
+          <a:p>
+            <a:pPr algn="ctr" indent="0" marL="0">
+              <a:buNone/>
+            </a:pPr>
+            <a:r>
+              <a:rPr lang="en-US" sz="1250" dirty="0">
+                <a:solidFill>
+                  <a:srgbClr val="52514E"/>
+                </a:solidFill>
+              </a:rPr>
+              <a:t>statics, anchors, connectors, buildability</a:t>
+            </a:r>
+            <a:endParaRPr lang="en-US" sz="1500" dirty="0"/>
+          </a:p>
+        </p:txBody>
+      </p:sp>
+      <p:sp>
+        <p:nvSpPr>
+          <p:cNvPr id="11" name="flow arrow 3"/>
+          <p:cNvSpPr/>
+          <p:nvPr/>
+        </p:nvSpPr>
+        <p:spPr>
+          <a:xfrm>
+            <a:off x="9326880" y="2377440"/>
+            <a:ext cx="457200" cy="0"/>
+          </a:xfrm>
+          <a:prstGeom prst="line">
+            <a:avLst/>
+          </a:prstGeom>
+          <a:noFill/>
+          <a:ln w="19050">
+            <a:solidFill>
+              <a:srgbClr val="52514E"/>
+            </a:solidFill>
+            <a:prstDash val="solid"/>
+            <a:tailEnd type="triangle"/>
+          </a:ln>
+        </p:spPr>
+      </p:sp>
+      <p:sp>
+        <p:nvSpPr>
+          <p:cNvPr id="12" name="flow box out"/>
+          <p:cNvSpPr/>
+          <p:nvPr/>
+        </p:nvSpPr>
+        <p:spPr>
+          <a:xfrm>
+            <a:off x="9784080" y="1600200"/>
+            <a:ext cx="1856232" cy="1554480"/>
+          </a:xfrm>
+          <a:prstGeom prst="roundRect">
+            <a:avLst>
+              <a:gd name="adj" fmla="val 4118"/>
+            </a:avLst>
+          </a:prstGeom>
+          <a:solidFill>
+            <a:schemeClr val="tx2"/>
+          </a:solidFill>
+          <a:ln/>
+        </p:spPr>
+      </p:sp>
+      <p:sp>
+        <p:nvSpPr>
+          <p:cNvPr id="13" name="flow text out"/>
+          <p:cNvSpPr txBox="1"/>
+          <p:nvPr/>
+        </p:nvSpPr>
+        <p:spPr>
+          <a:xfrm>
+            <a:off x="9948672" y="1709928"/>
+            <a:ext cx="1527048" cy="1335024"/>
+          </a:xfrm>
+          <a:prstGeom prst="rect">
+            <a:avLst/>
+          </a:prstGeom>
+          <a:noFill/>
+          <a:ln/>
+        </p:spPr>
+        <p:txBody>
+          <a:bodyPr wrap="square" lIns="0" tIns="0" rIns="0" bIns="0" rtlCol="0" anchor="ctr"/>
+          <a:lstStyle/>
+          <a:p>
+            <a:pPr algn="ctr" indent="0" marL="0">
+              <a:buNone/>
+            </a:pPr>
+            <a:r>
+              <a:rPr lang="en-US" sz="1500" b="1" dirty="0">
+                <a:solidFill>
+                  <a:srgbClr val="FFFFFF"/>
+                </a:solidFill>
+              </a:rPr>
+              <a:t>Verified designs</a:t>
+            </a:r>
+            <a:endParaRPr lang="en-US" sz="1500" dirty="0"/>
+          </a:p>
+          <a:p>
+            <a:pPr algn="ctr" indent="0" marL="0">
+              <a:buNone/>
+            </a:pPr>
+            <a:r>
+              <a:rPr lang="en-US" sz="1250" dirty="0">
+                <a:solidFill>
+                  <a:srgbClr val="CADCFC"/>
+                </a:solidFill>
+              </a:rPr>
+              <a:t>up to ten, ranked by installed cost</a:t>
+            </a:r>
+            <a:endParaRPr lang="en-US" sz="1500" dirty="0"/>
+          </a:p>
+        </p:txBody>
+      </p:sp>
+      <p:sp>
+        <p:nvSpPr>
+          <p:cNvPr id="14" name="feedback line"/>
+          <p:cNvSpPr/>
+          <p:nvPr/>
+        </p:nvSpPr>
+        <p:spPr>
+          <a:xfrm>
+            <a:off x="4663440" y="3227832"/>
+            <a:ext cx="3291840" cy="0"/>
+          </a:xfrm>
+          <a:prstGeom prst="line">
+            <a:avLst/>
+          </a:prstGeom>
+          <a:noFill/>
+          <a:ln w="15875">
+            <a:solidFill>
+              <a:srgbClr val="008300"/>
+            </a:solidFill>
+            <a:prstDash val="dash"/>
+            <a:headEnd type="triangle"/>
+          </a:ln>
+        </p:spPr>
+      </p:sp>
+      <p:sp>
+        <p:nvSpPr>
+          <p:cNvPr id="15" name="feedback label"/>
+          <p:cNvSpPr txBox="1"/>
+          <p:nvPr/>
+        </p:nvSpPr>
+        <p:spPr>
+          <a:xfrm>
+            <a:off x="4663440" y="3264408"/>
+            <a:ext cx="3291840" cy="274320"/>
+          </a:xfrm>
+          <a:prstGeom prst="rect">
+            <a:avLst/>
+          </a:prstGeom>
+          <a:noFill/>
+          <a:ln/>
+        </p:spPr>
+        <p:txBody>
+          <a:bodyPr wrap="square" lIns="0" tIns="0" rIns="0" bIns="0" rtlCol="0" anchor="ctr"/>
+          <a:lstStyle/>
+          <a:p>
+            <a:pPr algn="ctr" indent="0" marL="0">
+              <a:buNone/>
+            </a:pPr>
+            <a:r>
+              <a:rPr lang="en-US" sz="1100" dirty="0">
+                <a:solidFill>
+                  <a:srgbClr val="008300"/>
+                </a:solidFill>
+              </a:rPr>
+              <a:t>pass or fail, fed back to the next attempt</a:t>
+            </a:r>
+            <a:endParaRPr lang="en-US" sz="1100" dirty="0"/>
+          </a:p>
+        </p:txBody>
+      </p:sp>
+      <p:sp>
+        <p:nvSpPr>
+          <p:cNvPr id="16" name="needs heading"/>
+          <p:cNvSpPr txBox="1"/>
+          <p:nvPr/>
+        </p:nvSpPr>
+        <p:spPr>
+          <a:xfrm>
+            <a:off x="548640" y="3931920"/>
+            <a:ext cx="11091672" cy="365760"/>
+          </a:xfrm>
+          <a:prstGeom prst="rect">
+            <a:avLst/>
+          </a:prstGeom>
+          <a:noFill/>
+          <a:ln/>
+        </p:spPr>
+        <p:txBody>
+          <a:bodyPr wrap="square" lIns="0" tIns="0" rIns="0" bIns="0" rtlCol="0" anchor="ctr"/>
+          <a:lstStyle/>
+          <a:p>
+            <a:pPr indent="0" marL="0">
+              <a:buNone/>
+            </a:pPr>
+            <a:r>
+              <a:rPr lang="en-US" sz="1700" b="1" dirty="0">
+                <a:solidFill>
+                  <a:schemeClr val="tx1"/>
+                </a:solidFill>
+              </a:rPr>
+              <a:t>What any such method needs before it can be built or compared</a:t>
+            </a:r>
+            <a:endParaRPr lang="en-US" sz="1700" dirty="0"/>
+          </a:p>
+        </p:txBody>
+      </p:sp>
+      <p:sp>
+        <p:nvSpPr>
+          <p:cNvPr id="17" name="need Problems to learn from"/>
+          <p:cNvSpPr/>
+          <p:nvPr/>
+        </p:nvSpPr>
+        <p:spPr>
+          <a:xfrm>
+            <a:off x="548640" y="4434840"/>
+            <a:ext cx="3575304" cy="1325880"/>
+          </a:xfrm>
+          <a:prstGeom prst="roundRect">
+            <a:avLst>
+              <a:gd name="adj" fmla="val 4828"/>
+            </a:avLst>
+          </a:prstGeom>
+          <a:solidFill>
+            <a:schemeClr val="bg2"/>
+          </a:solidFill>
+          <a:ln/>
+        </p:spPr>
+      </p:sp>
+      <p:sp>
+        <p:nvSpPr>
+          <p:cNvPr id="18" name="need head Problems to learn from"/>
+          <p:cNvSpPr txBox="1"/>
+          <p:nvPr/>
+        </p:nvSpPr>
+        <p:spPr>
+          <a:xfrm>
+            <a:off x="777240" y="4553712"/>
+            <a:ext cx="3118104" cy="384048"/>
+          </a:xfrm>
+          <a:prstGeom prst="rect">
+            <a:avLst/>
+          </a:prstGeom>
+          <a:noFill/>
+          <a:ln/>
+        </p:spPr>
+        <p:txBody>
+          <a:bodyPr wrap="square" lIns="0" tIns="0" rIns="0" bIns="0" rtlCol="0" anchor="ctr"/>
+          <a:lstStyle/>
+          <a:p>
+            <a:pPr indent="0" marL="0">
+              <a:buNone/>
+            </a:pPr>
+            <a:r>
+              <a:rPr lang="en-US" sz="1600" b="1" dirty="0">
+                <a:solidFill>
+                  <a:schemeClr val="accent1"/>
+                </a:solidFill>
+              </a:rPr>
+              <a:t>1. Problems to learn from</a:t>
+            </a:r>
+            <a:endParaRPr lang="en-US" sz="1600" dirty="0"/>
+          </a:p>
+        </p:txBody>
+      </p:sp>
+      <p:sp>
+        <p:nvSpPr>
+          <p:cNvPr id="19" name="need text Problems to learn from"/>
+          <p:cNvSpPr txBox="1"/>
+          <p:nvPr/>
+        </p:nvSpPr>
+        <p:spPr>
+          <a:xfrm>
+            <a:off x="777240" y="4983480"/>
+            <a:ext cx="3118104" cy="685800"/>
           </a:xfrm>
           <a:prstGeom prst="rect">
             <a:avLst/>
@@ -21351,71 +22017,49 @@
               <a:buNone/>
             </a:pPr>
             <a:r>
-              <a:rPr lang="en-US" sz="1250" dirty="0">
+              <a:rPr lang="en-US" sz="1400" dirty="0">
                 <a:solidFill>
                   <a:schemeClr val="tx1"/>
                 </a:solidFill>
               </a:rPr>
-              <a:t>Project models are proprietary; the few open ones are not organised around supports and often export no element sizes.</a:t>
+              <a:t>many sections at hangers, varied the way buildings vary</a:t>
             </a:r>
-            <a:endParaRPr lang="en-US" sz="1250" dirty="0"/>
+            <a:endParaRPr lang="en-US" sz="1400" dirty="0"/>
           </a:p>
         </p:txBody>
       </p:sp>
       <p:sp>
         <p:nvSpPr>
-          <p:cNvPr id="8" name="icon ring Coverage"/>
+          <p:cNvPr id="20" name="need A fixed set to compare on"/>
           <p:cNvSpPr/>
           <p:nvPr/>
         </p:nvSpPr>
         <p:spPr>
           <a:xfrm>
-            <a:off x="548640" y="3246120"/>
-            <a:ext cx="530352" cy="530352"/>
+            <a:off x="4306824" y="4434840"/>
+            <a:ext cx="3575304" cy="1325880"/>
           </a:xfrm>
-          <a:prstGeom prst="ellipse">
-            <a:avLst/>
+          <a:prstGeom prst="roundRect">
+            <a:avLst>
+              <a:gd name="adj" fmla="val 4828"/>
+            </a:avLst>
           </a:prstGeom>
           <a:solidFill>
-            <a:schemeClr val="accent1"/>
+            <a:schemeClr val="bg2"/>
           </a:solidFill>
           <a:ln/>
         </p:spPr>
       </p:sp>
-      <p:pic>
-        <p:nvPicPr>
-          <p:cNvPr id="9" name="icon Coverage" descr="preencoded.png">    </p:cNvPr>
-          <p:cNvPicPr>
-            <a:picLocks noChangeAspect="1"/>
-          </p:cNvPicPr>
+      <p:sp>
+        <p:nvSpPr>
+          <p:cNvPr id="21" name="need head A fixed set to compare on"/>
+          <p:cNvSpPr txBox="1"/>
           <p:nvPr/>
-        </p:nvPicPr>
-        <p:blipFill>
-          <a:blip r:embed="rId2"/>
-          <a:stretch>
-            <a:fillRect/>
-          </a:stretch>
-        </p:blipFill>
+        </p:nvSpPr>
         <p:spPr>
           <a:xfrm>
-            <a:off x="660014" y="3357494"/>
-            <a:ext cx="307604" cy="307604"/>
-          </a:xfrm>
-          <a:prstGeom prst="rect">
-            <a:avLst/>
-          </a:prstGeom>
-        </p:spPr>
-      </p:pic>
-      <p:sp>
-        <p:nvSpPr>
-          <p:cNvPr id="10" name="reason Coverage"/>
-          <p:cNvSpPr txBox="1"/>
-          <p:nvPr/>
-        </p:nvSpPr>
-        <p:spPr>
-          <a:xfrm>
-            <a:off x="1280160" y="3227832"/>
-            <a:ext cx="4206240" cy="329184"/>
+            <a:off x="4535424" y="4553712"/>
+            <a:ext cx="3118104" cy="384048"/>
           </a:xfrm>
           <a:prstGeom prst="rect">
             <a:avLst/>
@@ -21431,27 +22075,27 @@
               <a:buNone/>
             </a:pPr>
             <a:r>
-              <a:rPr lang="en-US" sz="1500" b="1" dirty="0">
+              <a:rPr lang="en-US" sz="1600" b="1" dirty="0">
                 <a:solidFill>
-                  <a:schemeClr val="tx1"/>
+                  <a:schemeClr val="accent1"/>
                 </a:solidFill>
               </a:rPr>
-              <a:t>Coverage</a:t>
+              <a:t>2. A fixed set to compare on</a:t>
             </a:r>
-            <a:endParaRPr lang="en-US" sz="1500" dirty="0"/>
+            <a:endParaRPr lang="en-US" sz="1600" dirty="0"/>
           </a:p>
         </p:txBody>
       </p:sp>
       <p:sp>
         <p:nvSpPr>
-          <p:cNvPr id="11" name="reason text Coverage"/>
+          <p:cNvPr id="22" name="need text A fixed set to compare on"/>
           <p:cNvSpPr txBox="1"/>
           <p:nvPr/>
         </p:nvSpPr>
         <p:spPr>
           <a:xfrm>
-            <a:off x="1280160" y="3593592"/>
-            <a:ext cx="4206240" cy="868680"/>
+            <a:off x="4535424" y="4983480"/>
+            <a:ext cx="3118104" cy="685800"/>
           </a:xfrm>
           <a:prstGeom prst="rect">
             <a:avLst/>
@@ -21467,71 +22111,49 @@
               <a:buNone/>
             </a:pPr>
             <a:r>
-              <a:rPr lang="en-US" sz="1250" dirty="0">
+              <a:rPr lang="en-US" sz="1400" dirty="0">
                 <a:solidFill>
                   <a:schemeClr val="tx1"/>
                 </a:solidFill>
               </a:rPr>
-              <a:t>One project is one narrow slice: one building type, one trade mix. A method tuned to it measures fit to that project.</a:t>
+              <a:t>the same problems for every method, by difficulty</a:t>
             </a:r>
-            <a:endParaRPr lang="en-US" sz="1250" dirty="0"/>
+            <a:endParaRPr lang="en-US" sz="1400" dirty="0"/>
           </a:p>
         </p:txBody>
       </p:sp>
       <p:sp>
         <p:nvSpPr>
-          <p:cNvPr id="12" name="icon ring Control"/>
+          <p:cNvPr id="23" name="need Problems that look like practice"/>
           <p:cNvSpPr/>
           <p:nvPr/>
         </p:nvSpPr>
         <p:spPr>
           <a:xfrm>
-            <a:off x="548640" y="4617720"/>
-            <a:ext cx="530352" cy="530352"/>
+            <a:off x="8065008" y="4434840"/>
+            <a:ext cx="3575304" cy="1325880"/>
           </a:xfrm>
-          <a:prstGeom prst="ellipse">
-            <a:avLst/>
+          <a:prstGeom prst="roundRect">
+            <a:avLst>
+              <a:gd name="adj" fmla="val 4828"/>
+            </a:avLst>
           </a:prstGeom>
           <a:solidFill>
-            <a:schemeClr val="accent1"/>
+            <a:schemeClr val="bg2"/>
           </a:solidFill>
           <a:ln/>
         </p:spPr>
       </p:sp>
-      <p:pic>
-        <p:nvPicPr>
-          <p:cNvPr id="13" name="icon Control" descr="preencoded.png">    </p:cNvPr>
-          <p:cNvPicPr>
-            <a:picLocks noChangeAspect="1"/>
-          </p:cNvPicPr>
+      <p:sp>
+        <p:nvSpPr>
+          <p:cNvPr id="24" name="need head Problems that look like practice"/>
+          <p:cNvSpPr txBox="1"/>
           <p:nvPr/>
-        </p:nvPicPr>
-        <p:blipFill>
-          <a:blip r:embed="rId3"/>
-          <a:stretch>
-            <a:fillRect/>
-          </a:stretch>
-        </p:blipFill>
+        </p:nvSpPr>
         <p:spPr>
           <a:xfrm>
-            <a:off x="660014" y="4729094"/>
-            <a:ext cx="307604" cy="307604"/>
-          </a:xfrm>
-          <a:prstGeom prst="rect">
-            <a:avLst/>
-          </a:prstGeom>
-        </p:spPr>
-      </p:pic>
-      <p:sp>
-        <p:nvSpPr>
-          <p:cNvPr id="14" name="reason Control"/>
-          <p:cNvSpPr txBox="1"/>
-          <p:nvPr/>
-        </p:nvSpPr>
-        <p:spPr>
-          <a:xfrm>
-            <a:off x="1280160" y="4599432"/>
-            <a:ext cx="4206240" cy="329184"/>
+            <a:off x="8293608" y="4553712"/>
+            <a:ext cx="3118104" cy="384048"/>
           </a:xfrm>
           <a:prstGeom prst="rect">
             <a:avLst/>
@@ -21547,27 +22169,27 @@
               <a:buNone/>
             </a:pPr>
             <a:r>
-              <a:rPr lang="en-US" sz="1500" b="1" dirty="0">
+              <a:rPr lang="en-US" sz="1600" b="1" dirty="0">
                 <a:solidFill>
-                  <a:schemeClr val="tx1"/>
+                  <a:schemeClr val="accent1"/>
                 </a:solidFill>
               </a:rPr>
-              <a:t>Control</a:t>
+              <a:t>3. Problems that look like practice</a:t>
             </a:r>
-            <a:endParaRPr lang="en-US" sz="1500" dirty="0"/>
+            <a:endParaRPr lang="en-US" sz="1600" dirty="0"/>
           </a:p>
         </p:txBody>
       </p:sp>
       <p:sp>
         <p:nvSpPr>
-          <p:cNvPr id="15" name="reason text Control"/>
+          <p:cNvPr id="25" name="need text Problems that look like practice"/>
           <p:cNvSpPr txBox="1"/>
           <p:nvPr/>
         </p:nvSpPr>
         <p:spPr>
           <a:xfrm>
-            <a:off x="1280160" y="4965192"/>
-            <a:ext cx="4206240" cy="868680"/>
+            <a:off x="8293608" y="4983480"/>
+            <a:ext cx="3118104" cy="685800"/>
           </a:xfrm>
           <a:prstGeom prst="rect">
             <a:avLst/>
@@ -21583,614 +22205,14 @@
               <a:buNone/>
             </a:pPr>
             <a:r>
-              <a:rPr lang="en-US" sz="1250" dirty="0">
+              <a:rPr lang="en-US" sz="1400" dirty="0">
                 <a:solidFill>
                   <a:schemeClr val="tx1"/>
                 </a:solidFill>
               </a:rPr>
-              <a:t>A seeded generator gives unlimited problems with a known distribution, difficulty by construction and held-out seeds.</a:t>
+              <a:t>sizes, spacing and loads an engineer would recognise</a:t>
             </a:r>
-            <a:endParaRPr lang="en-US" sz="1250" dirty="0"/>
-          </a:p>
-        </p:txBody>
-      </p:sp>
-      <p:sp>
-        <p:nvSpPr>
-          <p:cNvPr id="16" name="glance heading"/>
-          <p:cNvSpPr txBox="1"/>
-          <p:nvPr/>
-        </p:nvSpPr>
-        <p:spPr>
-          <a:xfrm>
-            <a:off x="5806440" y="1371600"/>
-            <a:ext cx="5833872" cy="365760"/>
-          </a:xfrm>
-          <a:prstGeom prst="rect">
-            <a:avLst/>
-          </a:prstGeom>
-          <a:noFill/>
-          <a:ln/>
-        </p:spPr>
-        <p:txBody>
-          <a:bodyPr wrap="square" lIns="0" tIns="0" rIns="0" bIns="0" rtlCol="0" anchor="ctr"/>
-          <a:lstStyle/>
-          <a:p>
-            <a:pPr indent="0" marL="0">
-              <a:buNone/>
-            </a:pPr>
-            <a:r>
-              <a:rPr lang="en-US" sz="1600" b="1" dirty="0">
-                <a:solidFill>
-                  <a:schemeClr val="tx1"/>
-                </a:solidFill>
-              </a:rPr>
-              <a:t>CrossMEP at a glance</a:t>
-            </a:r>
-            <a:endParaRPr lang="en-US" sz="1600" dirty="0"/>
-          </a:p>
-        </p:txBody>
-      </p:sp>
-      <p:sp>
-        <p:nvSpPr>
-          <p:cNvPr id="17" name="tile contexts in four splits on disjoint seeds"/>
-          <p:cNvSpPr/>
-          <p:nvPr/>
-        </p:nvSpPr>
-        <p:spPr>
-          <a:xfrm>
-            <a:off x="5806440" y="1874520"/>
-            <a:ext cx="1822704" cy="1965960"/>
-          </a:xfrm>
-          <a:prstGeom prst="roundRect">
-            <a:avLst>
-              <a:gd name="adj" fmla="val 3512"/>
-            </a:avLst>
-          </a:prstGeom>
-          <a:solidFill>
-            <a:schemeClr val="bg2"/>
-          </a:solidFill>
-          <a:ln/>
-        </p:spPr>
-      </p:sp>
-      <p:sp>
-        <p:nvSpPr>
-          <p:cNvPr id="18" name="value contexts in four splits on disjoint seeds"/>
-          <p:cNvSpPr txBox="1"/>
-          <p:nvPr/>
-        </p:nvSpPr>
-        <p:spPr>
-          <a:xfrm>
-            <a:off x="6007608" y="1965960"/>
-            <a:ext cx="1420368" cy="982980"/>
-          </a:xfrm>
-          <a:prstGeom prst="rect">
-            <a:avLst/>
-          </a:prstGeom>
-          <a:noFill/>
-          <a:ln/>
-        </p:spPr>
-        <p:txBody>
-          <a:bodyPr wrap="square" lIns="0" tIns="0" rIns="0" bIns="0" rtlCol="0" anchor="ctr"/>
-          <a:lstStyle/>
-          <a:p>
-            <a:pPr indent="0" marL="0">
-              <a:buNone/>
-            </a:pPr>
-            <a:r>
-              <a:rPr lang="en-US" sz="2600" b="1" dirty="0">
-                <a:solidFill>
-                  <a:schemeClr val="accent1"/>
-                </a:solidFill>
-              </a:rPr>
-              <a:t>7,000</a:t>
-            </a:r>
-            <a:endParaRPr lang="en-US" sz="2600" dirty="0"/>
-          </a:p>
-        </p:txBody>
-      </p:sp>
-      <p:sp>
-        <p:nvSpPr>
-          <p:cNvPr id="19" name="label contexts in four splits on disjoint seeds"/>
-          <p:cNvSpPr txBox="1"/>
-          <p:nvPr/>
-        </p:nvSpPr>
-        <p:spPr>
-          <a:xfrm>
-            <a:off x="6007608" y="3014777"/>
-            <a:ext cx="1420368" cy="747065"/>
-          </a:xfrm>
-          <a:prstGeom prst="rect">
-            <a:avLst/>
-          </a:prstGeom>
-          <a:noFill/>
-          <a:ln/>
-        </p:spPr>
-        <p:txBody>
-          <a:bodyPr wrap="square" lIns="0" tIns="0" rIns="0" bIns="0" rtlCol="0" anchor="t"/>
-          <a:lstStyle/>
-          <a:p>
-            <a:pPr indent="0" marL="0">
-              <a:buNone/>
-            </a:pPr>
-            <a:r>
-              <a:rPr lang="en-US" sz="1150" dirty="0">
-                <a:solidFill>
-                  <a:srgbClr val="52514E"/>
-                </a:solidFill>
-              </a:rPr>
-              <a:t>contexts in four splits on disjoint seeds</a:t>
-            </a:r>
-            <a:endParaRPr lang="en-US" sz="1150" dirty="0"/>
-          </a:p>
-        </p:txBody>
-      </p:sp>
-      <p:sp>
-        <p:nvSpPr>
-          <p:cNvPr id="20" name="tile elements: pipes, cable trays, ducts and conduits; six trades"/>
-          <p:cNvSpPr/>
-          <p:nvPr/>
-        </p:nvSpPr>
-        <p:spPr>
-          <a:xfrm>
-            <a:off x="7812024" y="1874520"/>
-            <a:ext cx="1822704" cy="1965960"/>
-          </a:xfrm>
-          <a:prstGeom prst="roundRect">
-            <a:avLst>
-              <a:gd name="adj" fmla="val 3512"/>
-            </a:avLst>
-          </a:prstGeom>
-          <a:solidFill>
-            <a:schemeClr val="bg2"/>
-          </a:solidFill>
-          <a:ln/>
-        </p:spPr>
-      </p:sp>
-      <p:sp>
-        <p:nvSpPr>
-          <p:cNvPr id="21" name="value elements: pipes, cable trays, ducts and conduits; six trades"/>
-          <p:cNvSpPr txBox="1"/>
-          <p:nvPr/>
-        </p:nvSpPr>
-        <p:spPr>
-          <a:xfrm>
-            <a:off x="8013192" y="1965960"/>
-            <a:ext cx="1420368" cy="982980"/>
-          </a:xfrm>
-          <a:prstGeom prst="rect">
-            <a:avLst/>
-          </a:prstGeom>
-          <a:noFill/>
-          <a:ln/>
-        </p:spPr>
-        <p:txBody>
-          <a:bodyPr wrap="square" lIns="0" tIns="0" rIns="0" bIns="0" rtlCol="0" anchor="ctr"/>
-          <a:lstStyle/>
-          <a:p>
-            <a:pPr indent="0" marL="0">
-              <a:buNone/>
-            </a:pPr>
-            <a:r>
-              <a:rPr lang="en-US" sz="2600" b="1" dirty="0">
-                <a:solidFill>
-                  <a:schemeClr val="accent1"/>
-                </a:solidFill>
-              </a:rPr>
-              <a:t>31,484</a:t>
-            </a:r>
-            <a:endParaRPr lang="en-US" sz="2600" dirty="0"/>
-          </a:p>
-        </p:txBody>
-      </p:sp>
-      <p:sp>
-        <p:nvSpPr>
-          <p:cNvPr id="22" name="label elements: pipes, cable trays, ducts and conduits; six trades"/>
-          <p:cNvSpPr txBox="1"/>
-          <p:nvPr/>
-        </p:nvSpPr>
-        <p:spPr>
-          <a:xfrm>
-            <a:off x="8013192" y="3014777"/>
-            <a:ext cx="1420368" cy="747065"/>
-          </a:xfrm>
-          <a:prstGeom prst="rect">
-            <a:avLst/>
-          </a:prstGeom>
-          <a:noFill/>
-          <a:ln/>
-        </p:spPr>
-        <p:txBody>
-          <a:bodyPr wrap="square" lIns="0" tIns="0" rIns="0" bIns="0" rtlCol="0" anchor="t"/>
-          <a:lstStyle/>
-          <a:p>
-            <a:pPr indent="0" marL="0">
-              <a:buNone/>
-            </a:pPr>
-            <a:r>
-              <a:rPr lang="en-US" sz="1150" dirty="0">
-                <a:solidFill>
-                  <a:srgbClr val="52514E"/>
-                </a:solidFill>
-              </a:rPr>
-              <a:t>elements: pipes, cable trays, ducts and conduits; six trades</a:t>
-            </a:r>
-            <a:endParaRPr lang="en-US" sz="1150" dirty="0"/>
-          </a:p>
-        </p:txBody>
-      </p:sp>
-      <p:sp>
-        <p:nvSpPr>
-          <p:cNvPr id="23" name="tile eight difficulty tiers by exact element count"/>
-          <p:cNvSpPr/>
-          <p:nvPr/>
-        </p:nvSpPr>
-        <p:spPr>
-          <a:xfrm>
-            <a:off x="9817608" y="1874520"/>
-            <a:ext cx="1822704" cy="1965960"/>
-          </a:xfrm>
-          <a:prstGeom prst="roundRect">
-            <a:avLst>
-              <a:gd name="adj" fmla="val 3512"/>
-            </a:avLst>
-          </a:prstGeom>
-          <a:solidFill>
-            <a:schemeClr val="bg2"/>
-          </a:solidFill>
-          <a:ln/>
-        </p:spPr>
-      </p:sp>
-      <p:sp>
-        <p:nvSpPr>
-          <p:cNvPr id="24" name="value eight difficulty tiers by exact element count"/>
-          <p:cNvSpPr txBox="1"/>
-          <p:nvPr/>
-        </p:nvSpPr>
-        <p:spPr>
-          <a:xfrm>
-            <a:off x="10018776" y="1965960"/>
-            <a:ext cx="1420368" cy="982980"/>
-          </a:xfrm>
-          <a:prstGeom prst="rect">
-            <a:avLst/>
-          </a:prstGeom>
-          <a:noFill/>
-          <a:ln/>
-        </p:spPr>
-        <p:txBody>
-          <a:bodyPr wrap="square" lIns="0" tIns="0" rIns="0" bIns="0" rtlCol="0" anchor="ctr"/>
-          <a:lstStyle/>
-          <a:p>
-            <a:pPr indent="0" marL="0">
-              <a:buNone/>
-            </a:pPr>
-            <a:r>
-              <a:rPr lang="en-US" sz="2600" b="1" dirty="0">
-                <a:solidFill>
-                  <a:schemeClr val="accent1"/>
-                </a:solidFill>
-              </a:rPr>
-              <a:t>C1–C8</a:t>
-            </a:r>
-            <a:endParaRPr lang="en-US" sz="2600" dirty="0"/>
-          </a:p>
-        </p:txBody>
-      </p:sp>
-      <p:sp>
-        <p:nvSpPr>
-          <p:cNvPr id="25" name="label eight difficulty tiers by exact element count"/>
-          <p:cNvSpPr txBox="1"/>
-          <p:nvPr/>
-        </p:nvSpPr>
-        <p:spPr>
-          <a:xfrm>
-            <a:off x="10018776" y="3014777"/>
-            <a:ext cx="1420368" cy="747065"/>
-          </a:xfrm>
-          <a:prstGeom prst="rect">
-            <a:avLst/>
-          </a:prstGeom>
-          <a:noFill/>
-          <a:ln/>
-        </p:spPr>
-        <p:txBody>
-          <a:bodyPr wrap="square" lIns="0" tIns="0" rIns="0" bIns="0" rtlCol="0" anchor="t"/>
-          <a:lstStyle/>
-          <a:p>
-            <a:pPr indent="0" marL="0">
-              <a:buNone/>
-            </a:pPr>
-            <a:r>
-              <a:rPr lang="en-US" sz="1150" dirty="0">
-                <a:solidFill>
-                  <a:srgbClr val="52514E"/>
-                </a:solidFill>
-              </a:rPr>
-              <a:t>eight difficulty tiers by exact element count</a:t>
-            </a:r>
-            <a:endParaRPr lang="en-US" sz="1150" dirty="0"/>
-          </a:p>
-        </p:txBody>
-      </p:sp>
-      <p:sp>
-        <p:nvSpPr>
-          <p:cNvPr id="26" name="tile the brief, not the answer: no support-assembly information"/>
-          <p:cNvSpPr/>
-          <p:nvPr/>
-        </p:nvSpPr>
-        <p:spPr>
-          <a:xfrm>
-            <a:off x="5806440" y="4023360"/>
-            <a:ext cx="1822704" cy="1965960"/>
-          </a:xfrm>
-          <a:prstGeom prst="roundRect">
-            <a:avLst>
-              <a:gd name="adj" fmla="val 3512"/>
-            </a:avLst>
-          </a:prstGeom>
-          <a:solidFill>
-            <a:schemeClr val="bg2"/>
-          </a:solidFill>
-          <a:ln/>
-        </p:spPr>
-      </p:sp>
-      <p:sp>
-        <p:nvSpPr>
-          <p:cNvPr id="27" name="value the brief, not the answer: no support-assembly information"/>
-          <p:cNvSpPr txBox="1"/>
-          <p:nvPr/>
-        </p:nvSpPr>
-        <p:spPr>
-          <a:xfrm>
-            <a:off x="6007608" y="4114800"/>
-            <a:ext cx="1420368" cy="982980"/>
-          </a:xfrm>
-          <a:prstGeom prst="rect">
-            <a:avLst/>
-          </a:prstGeom>
-          <a:noFill/>
-          <a:ln/>
-        </p:spPr>
-        <p:txBody>
-          <a:bodyPr wrap="square" lIns="0" tIns="0" rIns="0" bIns="0" rtlCol="0" anchor="ctr"/>
-          <a:lstStyle/>
-          <a:p>
-            <a:pPr indent="0" marL="0">
-              <a:buNone/>
-            </a:pPr>
-            <a:r>
-              <a:rPr lang="en-US" sz="2600" b="1" dirty="0">
-                <a:solidFill>
-                  <a:schemeClr val="accent1"/>
-                </a:solidFill>
-              </a:rPr>
-              <a:t>0 labels</a:t>
-            </a:r>
-            <a:endParaRPr lang="en-US" sz="2600" dirty="0"/>
-          </a:p>
-        </p:txBody>
-      </p:sp>
-      <p:sp>
-        <p:nvSpPr>
-          <p:cNvPr id="28" name="label the brief, not the answer: no support-assembly information"/>
-          <p:cNvSpPr txBox="1"/>
-          <p:nvPr/>
-        </p:nvSpPr>
-        <p:spPr>
-          <a:xfrm>
-            <a:off x="6007608" y="5163617"/>
-            <a:ext cx="1420368" cy="747065"/>
-          </a:xfrm>
-          <a:prstGeom prst="rect">
-            <a:avLst/>
-          </a:prstGeom>
-          <a:noFill/>
-          <a:ln/>
-        </p:spPr>
-        <p:txBody>
-          <a:bodyPr wrap="square" lIns="0" tIns="0" rIns="0" bIns="0" rtlCol="0" anchor="t"/>
-          <a:lstStyle/>
-          <a:p>
-            <a:pPr indent="0" marL="0">
-              <a:buNone/>
-            </a:pPr>
-            <a:r>
-              <a:rPr lang="en-US" sz="1150" dirty="0">
-                <a:solidFill>
-                  <a:srgbClr val="52514E"/>
-                </a:solidFill>
-              </a:rPr>
-              <a:t>the brief, not the answer: no support-assembly information</a:t>
-            </a:r>
-            <a:endParaRPr lang="en-US" sz="1150" dirty="0"/>
-          </a:p>
-        </p:txBody>
-      </p:sp>
-      <p:sp>
-        <p:nvSpPr>
-          <p:cNvPr id="29" name="tile every constant with its source, or declared a design choice"/>
-          <p:cNvSpPr/>
-          <p:nvPr/>
-        </p:nvSpPr>
-        <p:spPr>
-          <a:xfrm>
-            <a:off x="7812024" y="4023360"/>
-            <a:ext cx="1822704" cy="1965960"/>
-          </a:xfrm>
-          <a:prstGeom prst="roundRect">
-            <a:avLst>
-              <a:gd name="adj" fmla="val 3512"/>
-            </a:avLst>
-          </a:prstGeom>
-          <a:solidFill>
-            <a:schemeClr val="bg2"/>
-          </a:solidFill>
-          <a:ln/>
-        </p:spPr>
-      </p:sp>
-      <p:sp>
-        <p:nvSpPr>
-          <p:cNvPr id="30" name="value every constant with its source, or declared a design choice"/>
-          <p:cNvSpPr txBox="1"/>
-          <p:nvPr/>
-        </p:nvSpPr>
-        <p:spPr>
-          <a:xfrm>
-            <a:off x="8013192" y="4114800"/>
-            <a:ext cx="1420368" cy="982980"/>
-          </a:xfrm>
-          <a:prstGeom prst="rect">
-            <a:avLst/>
-          </a:prstGeom>
-          <a:noFill/>
-          <a:ln/>
-        </p:spPr>
-        <p:txBody>
-          <a:bodyPr wrap="square" lIns="0" tIns="0" rIns="0" bIns="0" rtlCol="0" anchor="ctr"/>
-          <a:lstStyle/>
-          <a:p>
-            <a:pPr indent="0" marL="0">
-              <a:buNone/>
-            </a:pPr>
-            <a:r>
-              <a:rPr lang="en-US" sz="2600" b="1" dirty="0">
-                <a:solidFill>
-                  <a:schemeClr val="accent1"/>
-                </a:solidFill>
-              </a:rPr>
-              <a:t>Traced</a:t>
-            </a:r>
-            <a:endParaRPr lang="en-US" sz="2600" dirty="0"/>
-          </a:p>
-        </p:txBody>
-      </p:sp>
-      <p:sp>
-        <p:nvSpPr>
-          <p:cNvPr id="31" name="label every constant with its source, or declared a design choice"/>
-          <p:cNvSpPr txBox="1"/>
-          <p:nvPr/>
-        </p:nvSpPr>
-        <p:spPr>
-          <a:xfrm>
-            <a:off x="8013192" y="5163617"/>
-            <a:ext cx="1420368" cy="747065"/>
-          </a:xfrm>
-          <a:prstGeom prst="rect">
-            <a:avLst/>
-          </a:prstGeom>
-          <a:noFill/>
-          <a:ln/>
-        </p:spPr>
-        <p:txBody>
-          <a:bodyPr wrap="square" lIns="0" tIns="0" rIns="0" bIns="0" rtlCol="0" anchor="t"/>
-          <a:lstStyle/>
-          <a:p>
-            <a:pPr indent="0" marL="0">
-              <a:buNone/>
-            </a:pPr>
-            <a:r>
-              <a:rPr lang="en-US" sz="1150" dirty="0">
-                <a:solidFill>
-                  <a:srgbClr val="52514E"/>
-                </a:solidFill>
-              </a:rPr>
-              <a:t>every constant with its source, or declared a design choice</a:t>
-            </a:r>
-            <a:endParaRPr lang="en-US" sz="1150" dirty="0"/>
-          </a:p>
-        </p:txBody>
-      </p:sp>
-      <p:sp>
-        <p:nvSpPr>
-          <p:cNvPr id="32" name="tile data CC BY 4.0, code MIT; a seeded, deterministic generator"/>
-          <p:cNvSpPr/>
-          <p:nvPr/>
-        </p:nvSpPr>
-        <p:spPr>
-          <a:xfrm>
-            <a:off x="9817608" y="4023360"/>
-            <a:ext cx="1822704" cy="1965960"/>
-          </a:xfrm>
-          <a:prstGeom prst="roundRect">
-            <a:avLst>
-              <a:gd name="adj" fmla="val 3512"/>
-            </a:avLst>
-          </a:prstGeom>
-          <a:solidFill>
-            <a:schemeClr val="bg2"/>
-          </a:solidFill>
-          <a:ln/>
-        </p:spPr>
-      </p:sp>
-      <p:sp>
-        <p:nvSpPr>
-          <p:cNvPr id="33" name="value data CC BY 4.0, code MIT; a seeded, deterministic generator"/>
-          <p:cNvSpPr txBox="1"/>
-          <p:nvPr/>
-        </p:nvSpPr>
-        <p:spPr>
-          <a:xfrm>
-            <a:off x="10018776" y="4114800"/>
-            <a:ext cx="1420368" cy="982980"/>
-          </a:xfrm>
-          <a:prstGeom prst="rect">
-            <a:avLst/>
-          </a:prstGeom>
-          <a:noFill/>
-          <a:ln/>
-        </p:spPr>
-        <p:txBody>
-          <a:bodyPr wrap="square" lIns="0" tIns="0" rIns="0" bIns="0" rtlCol="0" anchor="ctr"/>
-          <a:lstStyle/>
-          <a:p>
-            <a:pPr indent="0" marL="0">
-              <a:buNone/>
-            </a:pPr>
-            <a:r>
-              <a:rPr lang="en-US" sz="2600" b="1" dirty="0">
-                <a:solidFill>
-                  <a:schemeClr val="accent1"/>
-                </a:solidFill>
-              </a:rPr>
-              <a:t>Open</a:t>
-            </a:r>
-            <a:endParaRPr lang="en-US" sz="2600" dirty="0"/>
-          </a:p>
-        </p:txBody>
-      </p:sp>
-      <p:sp>
-        <p:nvSpPr>
-          <p:cNvPr id="34" name="label data CC BY 4.0, code MIT; a seeded, deterministic generator"/>
-          <p:cNvSpPr txBox="1"/>
-          <p:nvPr/>
-        </p:nvSpPr>
-        <p:spPr>
-          <a:xfrm>
-            <a:off x="10018776" y="5163617"/>
-            <a:ext cx="1420368" cy="747065"/>
-          </a:xfrm>
-          <a:prstGeom prst="rect">
-            <a:avLst/>
-          </a:prstGeom>
-          <a:noFill/>
-          <a:ln/>
-        </p:spPr>
-        <p:txBody>
-          <a:bodyPr wrap="square" lIns="0" tIns="0" rIns="0" bIns="0" rtlCol="0" anchor="t"/>
-          <a:lstStyle/>
-          <a:p>
-            <a:pPr indent="0" marL="0">
-              <a:buNone/>
-            </a:pPr>
-            <a:r>
-              <a:rPr lang="en-US" sz="1150" dirty="0">
-                <a:solidFill>
-                  <a:srgbClr val="52514E"/>
-                </a:solidFill>
-              </a:rPr>
-              <a:t>data CC BY 4.0, code MIT; a seeded, deterministic generator</a:t>
-            </a:r>
-            <a:endParaRPr lang="en-US" sz="1150" dirty="0"/>
+            <a:endParaRPr lang="en-US" sz="1400" dirty="0"/>
           </a:p>
         </p:txBody>
       </p:sp>
@@ -22296,15 +22318,71 @@
                   <a:schemeClr val="tx1"/>
                 </a:solidFill>
               </a:rPr>
-              <a:t>We generate what a designer receives: the section at one hanger</a:t>
+              <a:t>Learning to design supports needs many problems, and none were public</a:t>
             </a:r>
             <a:endParaRPr lang="en-US" sz="2600" dirty="0"/>
           </a:p>
         </p:txBody>
       </p:sp>
+      <p:sp>
+        <p:nvSpPr>
+          <p:cNvPr id="3" name="why heading"/>
+          <p:cNvSpPr txBox="1"/>
+          <p:nvPr/>
+        </p:nvSpPr>
+        <p:spPr>
+          <a:xfrm>
+            <a:off x="548640" y="1371600"/>
+            <a:ext cx="4937760" cy="365760"/>
+          </a:xfrm>
+          <a:prstGeom prst="rect">
+            <a:avLst/>
+          </a:prstGeom>
+          <a:noFill/>
+          <a:ln/>
+        </p:spPr>
+        <p:txBody>
+          <a:bodyPr wrap="square" lIns="0" tIns="0" rIns="0" bIns="0" rtlCol="0" anchor="ctr"/>
+          <a:lstStyle/>
+          <a:p>
+            <a:pPr indent="0" marL="0">
+              <a:buNone/>
+            </a:pPr>
+            <a:r>
+              <a:rPr lang="en-US" sz="1600" b="1" dirty="0">
+                <a:solidFill>
+                  <a:schemeClr val="tx1"/>
+                </a:solidFill>
+              </a:rPr>
+              <a:t>Why it has to be synthetic</a:t>
+            </a:r>
+            <a:endParaRPr lang="en-US" sz="1600" dirty="0"/>
+          </a:p>
+        </p:txBody>
+      </p:sp>
+      <p:sp>
+        <p:nvSpPr>
+          <p:cNvPr id="4" name="icon ring Scarcity"/>
+          <p:cNvSpPr/>
+          <p:nvPr/>
+        </p:nvSpPr>
+        <p:spPr>
+          <a:xfrm>
+            <a:off x="548640" y="1874520"/>
+            <a:ext cx="530352" cy="530352"/>
+          </a:xfrm>
+          <a:prstGeom prst="ellipse">
+            <a:avLst/>
+          </a:prstGeom>
+          <a:solidFill>
+            <a:schemeClr val="accent1"/>
+          </a:solidFill>
+          <a:ln/>
+        </p:spPr>
+      </p:sp>
       <p:pic>
         <p:nvPicPr>
-          <p:cNvPr id="3" name="context figure" descr="/home/user/crossmep_dataset/docs/figures/01_what_a_context_is.png">    </p:cNvPr>
+          <p:cNvPr id="5" name="icon Scarcity" descr="preencoded.png">    </p:cNvPr>
           <p:cNvPicPr>
             <a:picLocks noChangeAspect="1"/>
           </p:cNvPicPr>
@@ -22318,8 +22396,8 @@
         </p:blipFill>
         <p:spPr>
           <a:xfrm>
-            <a:off x="1174606" y="1325880"/>
-            <a:ext cx="9839739" cy="4526280"/>
+            <a:off x="660014" y="1985894"/>
+            <a:ext cx="307604" cy="307604"/>
           </a:xfrm>
           <a:prstGeom prst="rect">
             <a:avLst/>
@@ -22328,14 +22406,50 @@
       </p:pic>
       <p:sp>
         <p:nvSpPr>
-          <p:cNvPr id="4" name="context caption"/>
+          <p:cNvPr id="6" name="reason Scarcity"/>
           <p:cNvSpPr txBox="1"/>
           <p:nvPr/>
         </p:nvSpPr>
         <p:spPr>
           <a:xfrm>
-            <a:off x="548640" y="5943600"/>
-            <a:ext cx="11091672" cy="502920"/>
+            <a:off x="1280160" y="1856232"/>
+            <a:ext cx="4206240" cy="329184"/>
+          </a:xfrm>
+          <a:prstGeom prst="rect">
+            <a:avLst/>
+          </a:prstGeom>
+          <a:noFill/>
+          <a:ln/>
+        </p:spPr>
+        <p:txBody>
+          <a:bodyPr wrap="square" lIns="0" tIns="0" rIns="0" bIns="0" rtlCol="0" anchor="ctr"/>
+          <a:lstStyle/>
+          <a:p>
+            <a:pPr indent="0" marL="0">
+              <a:buNone/>
+            </a:pPr>
+            <a:r>
+              <a:rPr lang="en-US" sz="1500" b="1" dirty="0">
+                <a:solidFill>
+                  <a:schemeClr val="tx1"/>
+                </a:solidFill>
+              </a:rPr>
+              <a:t>Scarcity</a:t>
+            </a:r>
+            <a:endParaRPr lang="en-US" sz="1500" dirty="0"/>
+          </a:p>
+        </p:txBody>
+      </p:sp>
+      <p:sp>
+        <p:nvSpPr>
+          <p:cNvPr id="7" name="reason text Scarcity"/>
+          <p:cNvSpPr txBox="1"/>
+          <p:nvPr/>
+        </p:nvSpPr>
+        <p:spPr>
+          <a:xfrm>
+            <a:off x="1280160" y="2221992"/>
+            <a:ext cx="4206240" cy="868680"/>
           </a:xfrm>
           <a:prstGeom prst="rect">
             <a:avLst/>
@@ -22351,14 +22465,846 @@
               <a:buNone/>
             </a:pPr>
             <a:r>
-              <a:rPr lang="en-US" sz="1100" dirty="0">
+              <a:rPr lang="en-US" sz="1250" dirty="0">
+                <a:solidFill>
+                  <a:schemeClr val="tx1"/>
+                </a:solidFill>
+              </a:rPr>
+              <a:t>Project models are proprietary; the few open ones are not organised around supports and often export no element sizes.</a:t>
+            </a:r>
+            <a:endParaRPr lang="en-US" sz="1250" dirty="0"/>
+          </a:p>
+        </p:txBody>
+      </p:sp>
+      <p:sp>
+        <p:nvSpPr>
+          <p:cNvPr id="8" name="icon ring Coverage"/>
+          <p:cNvSpPr/>
+          <p:nvPr/>
+        </p:nvSpPr>
+        <p:spPr>
+          <a:xfrm>
+            <a:off x="548640" y="3246120"/>
+            <a:ext cx="530352" cy="530352"/>
+          </a:xfrm>
+          <a:prstGeom prst="ellipse">
+            <a:avLst/>
+          </a:prstGeom>
+          <a:solidFill>
+            <a:schemeClr val="accent1"/>
+          </a:solidFill>
+          <a:ln/>
+        </p:spPr>
+      </p:sp>
+      <p:pic>
+        <p:nvPicPr>
+          <p:cNvPr id="9" name="icon Coverage" descr="preencoded.png">    </p:cNvPr>
+          <p:cNvPicPr>
+            <a:picLocks noChangeAspect="1"/>
+          </p:cNvPicPr>
+          <p:nvPr/>
+        </p:nvPicPr>
+        <p:blipFill>
+          <a:blip r:embed="rId2"/>
+          <a:stretch>
+            <a:fillRect/>
+          </a:stretch>
+        </p:blipFill>
+        <p:spPr>
+          <a:xfrm>
+            <a:off x="660014" y="3357494"/>
+            <a:ext cx="307604" cy="307604"/>
+          </a:xfrm>
+          <a:prstGeom prst="rect">
+            <a:avLst/>
+          </a:prstGeom>
+        </p:spPr>
+      </p:pic>
+      <p:sp>
+        <p:nvSpPr>
+          <p:cNvPr id="10" name="reason Coverage"/>
+          <p:cNvSpPr txBox="1"/>
+          <p:nvPr/>
+        </p:nvSpPr>
+        <p:spPr>
+          <a:xfrm>
+            <a:off x="1280160" y="3227832"/>
+            <a:ext cx="4206240" cy="329184"/>
+          </a:xfrm>
+          <a:prstGeom prst="rect">
+            <a:avLst/>
+          </a:prstGeom>
+          <a:noFill/>
+          <a:ln/>
+        </p:spPr>
+        <p:txBody>
+          <a:bodyPr wrap="square" lIns="0" tIns="0" rIns="0" bIns="0" rtlCol="0" anchor="ctr"/>
+          <a:lstStyle/>
+          <a:p>
+            <a:pPr indent="0" marL="0">
+              <a:buNone/>
+            </a:pPr>
+            <a:r>
+              <a:rPr lang="en-US" sz="1500" b="1" dirty="0">
+                <a:solidFill>
+                  <a:schemeClr val="tx1"/>
+                </a:solidFill>
+              </a:rPr>
+              <a:t>Coverage</a:t>
+            </a:r>
+            <a:endParaRPr lang="en-US" sz="1500" dirty="0"/>
+          </a:p>
+        </p:txBody>
+      </p:sp>
+      <p:sp>
+        <p:nvSpPr>
+          <p:cNvPr id="11" name="reason text Coverage"/>
+          <p:cNvSpPr txBox="1"/>
+          <p:nvPr/>
+        </p:nvSpPr>
+        <p:spPr>
+          <a:xfrm>
+            <a:off x="1280160" y="3593592"/>
+            <a:ext cx="4206240" cy="868680"/>
+          </a:xfrm>
+          <a:prstGeom prst="rect">
+            <a:avLst/>
+          </a:prstGeom>
+          <a:noFill/>
+          <a:ln/>
+        </p:spPr>
+        <p:txBody>
+          <a:bodyPr wrap="square" lIns="0" tIns="0" rIns="0" bIns="0" rtlCol="0" anchor="t"/>
+          <a:lstStyle/>
+          <a:p>
+            <a:pPr indent="0" marL="0">
+              <a:buNone/>
+            </a:pPr>
+            <a:r>
+              <a:rPr lang="en-US" sz="1250" dirty="0">
+                <a:solidFill>
+                  <a:schemeClr val="tx1"/>
+                </a:solidFill>
+              </a:rPr>
+              <a:t>One project is one narrow slice: one building type, one trade mix. A method tuned to it measures fit to that project.</a:t>
+            </a:r>
+            <a:endParaRPr lang="en-US" sz="1250" dirty="0"/>
+          </a:p>
+        </p:txBody>
+      </p:sp>
+      <p:sp>
+        <p:nvSpPr>
+          <p:cNvPr id="12" name="icon ring Control"/>
+          <p:cNvSpPr/>
+          <p:nvPr/>
+        </p:nvSpPr>
+        <p:spPr>
+          <a:xfrm>
+            <a:off x="548640" y="4617720"/>
+            <a:ext cx="530352" cy="530352"/>
+          </a:xfrm>
+          <a:prstGeom prst="ellipse">
+            <a:avLst/>
+          </a:prstGeom>
+          <a:solidFill>
+            <a:schemeClr val="accent1"/>
+          </a:solidFill>
+          <a:ln/>
+        </p:spPr>
+      </p:sp>
+      <p:pic>
+        <p:nvPicPr>
+          <p:cNvPr id="13" name="icon Control" descr="preencoded.png">    </p:cNvPr>
+          <p:cNvPicPr>
+            <a:picLocks noChangeAspect="1"/>
+          </p:cNvPicPr>
+          <p:nvPr/>
+        </p:nvPicPr>
+        <p:blipFill>
+          <a:blip r:embed="rId3"/>
+          <a:stretch>
+            <a:fillRect/>
+          </a:stretch>
+        </p:blipFill>
+        <p:spPr>
+          <a:xfrm>
+            <a:off x="660014" y="4729094"/>
+            <a:ext cx="307604" cy="307604"/>
+          </a:xfrm>
+          <a:prstGeom prst="rect">
+            <a:avLst/>
+          </a:prstGeom>
+        </p:spPr>
+      </p:pic>
+      <p:sp>
+        <p:nvSpPr>
+          <p:cNvPr id="14" name="reason Control"/>
+          <p:cNvSpPr txBox="1"/>
+          <p:nvPr/>
+        </p:nvSpPr>
+        <p:spPr>
+          <a:xfrm>
+            <a:off x="1280160" y="4599432"/>
+            <a:ext cx="4206240" cy="329184"/>
+          </a:xfrm>
+          <a:prstGeom prst="rect">
+            <a:avLst/>
+          </a:prstGeom>
+          <a:noFill/>
+          <a:ln/>
+        </p:spPr>
+        <p:txBody>
+          <a:bodyPr wrap="square" lIns="0" tIns="0" rIns="0" bIns="0" rtlCol="0" anchor="ctr"/>
+          <a:lstStyle/>
+          <a:p>
+            <a:pPr indent="0" marL="0">
+              <a:buNone/>
+            </a:pPr>
+            <a:r>
+              <a:rPr lang="en-US" sz="1500" b="1" dirty="0">
+                <a:solidFill>
+                  <a:schemeClr val="tx1"/>
+                </a:solidFill>
+              </a:rPr>
+              <a:t>Control</a:t>
+            </a:r>
+            <a:endParaRPr lang="en-US" sz="1500" dirty="0"/>
+          </a:p>
+        </p:txBody>
+      </p:sp>
+      <p:sp>
+        <p:nvSpPr>
+          <p:cNvPr id="15" name="reason text Control"/>
+          <p:cNvSpPr txBox="1"/>
+          <p:nvPr/>
+        </p:nvSpPr>
+        <p:spPr>
+          <a:xfrm>
+            <a:off x="1280160" y="4965192"/>
+            <a:ext cx="4206240" cy="868680"/>
+          </a:xfrm>
+          <a:prstGeom prst="rect">
+            <a:avLst/>
+          </a:prstGeom>
+          <a:noFill/>
+          <a:ln/>
+        </p:spPr>
+        <p:txBody>
+          <a:bodyPr wrap="square" lIns="0" tIns="0" rIns="0" bIns="0" rtlCol="0" anchor="t"/>
+          <a:lstStyle/>
+          <a:p>
+            <a:pPr indent="0" marL="0">
+              <a:buNone/>
+            </a:pPr>
+            <a:r>
+              <a:rPr lang="en-US" sz="1250" dirty="0">
+                <a:solidFill>
+                  <a:schemeClr val="tx1"/>
+                </a:solidFill>
+              </a:rPr>
+              <a:t>A seeded generator gives unlimited problems with a known distribution, difficulty by construction and held-out seeds.</a:t>
+            </a:r>
+            <a:endParaRPr lang="en-US" sz="1250" dirty="0"/>
+          </a:p>
+        </p:txBody>
+      </p:sp>
+      <p:sp>
+        <p:nvSpPr>
+          <p:cNvPr id="16" name="glance heading"/>
+          <p:cNvSpPr txBox="1"/>
+          <p:nvPr/>
+        </p:nvSpPr>
+        <p:spPr>
+          <a:xfrm>
+            <a:off x="5806440" y="1371600"/>
+            <a:ext cx="5833872" cy="365760"/>
+          </a:xfrm>
+          <a:prstGeom prst="rect">
+            <a:avLst/>
+          </a:prstGeom>
+          <a:noFill/>
+          <a:ln/>
+        </p:spPr>
+        <p:txBody>
+          <a:bodyPr wrap="square" lIns="0" tIns="0" rIns="0" bIns="0" rtlCol="0" anchor="ctr"/>
+          <a:lstStyle/>
+          <a:p>
+            <a:pPr indent="0" marL="0">
+              <a:buNone/>
+            </a:pPr>
+            <a:r>
+              <a:rPr lang="en-US" sz="1600" b="1" dirty="0">
+                <a:solidFill>
+                  <a:schemeClr val="tx1"/>
+                </a:solidFill>
+              </a:rPr>
+              <a:t>CrossMEP at a glance</a:t>
+            </a:r>
+            <a:endParaRPr lang="en-US" sz="1600" dirty="0"/>
+          </a:p>
+        </p:txBody>
+      </p:sp>
+      <p:sp>
+        <p:nvSpPr>
+          <p:cNvPr id="17" name="tile contexts in four splits on disjoint seeds"/>
+          <p:cNvSpPr/>
+          <p:nvPr/>
+        </p:nvSpPr>
+        <p:spPr>
+          <a:xfrm>
+            <a:off x="5806440" y="1874520"/>
+            <a:ext cx="1822704" cy="1965960"/>
+          </a:xfrm>
+          <a:prstGeom prst="roundRect">
+            <a:avLst>
+              <a:gd name="adj" fmla="val 3512"/>
+            </a:avLst>
+          </a:prstGeom>
+          <a:solidFill>
+            <a:schemeClr val="bg2"/>
+          </a:solidFill>
+          <a:ln/>
+        </p:spPr>
+      </p:sp>
+      <p:sp>
+        <p:nvSpPr>
+          <p:cNvPr id="18" name="value contexts in four splits on disjoint seeds"/>
+          <p:cNvSpPr txBox="1"/>
+          <p:nvPr/>
+        </p:nvSpPr>
+        <p:spPr>
+          <a:xfrm>
+            <a:off x="6007608" y="1965960"/>
+            <a:ext cx="1420368" cy="982980"/>
+          </a:xfrm>
+          <a:prstGeom prst="rect">
+            <a:avLst/>
+          </a:prstGeom>
+          <a:noFill/>
+          <a:ln/>
+        </p:spPr>
+        <p:txBody>
+          <a:bodyPr wrap="square" lIns="0" tIns="0" rIns="0" bIns="0" rtlCol="0" anchor="ctr"/>
+          <a:lstStyle/>
+          <a:p>
+            <a:pPr indent="0" marL="0">
+              <a:buNone/>
+            </a:pPr>
+            <a:r>
+              <a:rPr lang="en-US" sz="2600" b="1" dirty="0">
+                <a:solidFill>
+                  <a:schemeClr val="accent1"/>
+                </a:solidFill>
+              </a:rPr>
+              <a:t>7,000</a:t>
+            </a:r>
+            <a:endParaRPr lang="en-US" sz="2600" dirty="0"/>
+          </a:p>
+        </p:txBody>
+      </p:sp>
+      <p:sp>
+        <p:nvSpPr>
+          <p:cNvPr id="19" name="label contexts in four splits on disjoint seeds"/>
+          <p:cNvSpPr txBox="1"/>
+          <p:nvPr/>
+        </p:nvSpPr>
+        <p:spPr>
+          <a:xfrm>
+            <a:off x="6007608" y="3014777"/>
+            <a:ext cx="1420368" cy="747065"/>
+          </a:xfrm>
+          <a:prstGeom prst="rect">
+            <a:avLst/>
+          </a:prstGeom>
+          <a:noFill/>
+          <a:ln/>
+        </p:spPr>
+        <p:txBody>
+          <a:bodyPr wrap="square" lIns="0" tIns="0" rIns="0" bIns="0" rtlCol="0" anchor="t"/>
+          <a:lstStyle/>
+          <a:p>
+            <a:pPr indent="0" marL="0">
+              <a:buNone/>
+            </a:pPr>
+            <a:r>
+              <a:rPr lang="en-US" sz="1150" dirty="0">
                 <a:solidFill>
                   <a:srgbClr val="52514E"/>
                 </a:solidFill>
               </a:rPr>
-              <a:t>Per element: kind, service and trade · bare size · insulation per side · load per metre × the span it was sized at = load at the support · position along and out from the surface. Per context: slab or wall, substrate, thickness. Absent by design: channel, rods, clamps, anchors — and any “correct” answer, since a feasible support depends on the catalog you build from.</a:t>
+              <a:t>contexts in four splits on disjoint seeds</a:t>
             </a:r>
-            <a:endParaRPr lang="en-US" sz="1100" dirty="0"/>
+            <a:endParaRPr lang="en-US" sz="1150" dirty="0"/>
+          </a:p>
+        </p:txBody>
+      </p:sp>
+      <p:sp>
+        <p:nvSpPr>
+          <p:cNvPr id="20" name="tile elements: pipes, cable trays, ducts and conduits; six trades"/>
+          <p:cNvSpPr/>
+          <p:nvPr/>
+        </p:nvSpPr>
+        <p:spPr>
+          <a:xfrm>
+            <a:off x="7812024" y="1874520"/>
+            <a:ext cx="1822704" cy="1965960"/>
+          </a:xfrm>
+          <a:prstGeom prst="roundRect">
+            <a:avLst>
+              <a:gd name="adj" fmla="val 3512"/>
+            </a:avLst>
+          </a:prstGeom>
+          <a:solidFill>
+            <a:schemeClr val="bg2"/>
+          </a:solidFill>
+          <a:ln/>
+        </p:spPr>
+      </p:sp>
+      <p:sp>
+        <p:nvSpPr>
+          <p:cNvPr id="21" name="value elements: pipes, cable trays, ducts and conduits; six trades"/>
+          <p:cNvSpPr txBox="1"/>
+          <p:nvPr/>
+        </p:nvSpPr>
+        <p:spPr>
+          <a:xfrm>
+            <a:off x="8013192" y="1965960"/>
+            <a:ext cx="1420368" cy="982980"/>
+          </a:xfrm>
+          <a:prstGeom prst="rect">
+            <a:avLst/>
+          </a:prstGeom>
+          <a:noFill/>
+          <a:ln/>
+        </p:spPr>
+        <p:txBody>
+          <a:bodyPr wrap="square" lIns="0" tIns="0" rIns="0" bIns="0" rtlCol="0" anchor="ctr"/>
+          <a:lstStyle/>
+          <a:p>
+            <a:pPr indent="0" marL="0">
+              <a:buNone/>
+            </a:pPr>
+            <a:r>
+              <a:rPr lang="en-US" sz="2600" b="1" dirty="0">
+                <a:solidFill>
+                  <a:schemeClr val="accent1"/>
+                </a:solidFill>
+              </a:rPr>
+              <a:t>31,484</a:t>
+            </a:r>
+            <a:endParaRPr lang="en-US" sz="2600" dirty="0"/>
+          </a:p>
+        </p:txBody>
+      </p:sp>
+      <p:sp>
+        <p:nvSpPr>
+          <p:cNvPr id="22" name="label elements: pipes, cable trays, ducts and conduits; six trades"/>
+          <p:cNvSpPr txBox="1"/>
+          <p:nvPr/>
+        </p:nvSpPr>
+        <p:spPr>
+          <a:xfrm>
+            <a:off x="8013192" y="3014777"/>
+            <a:ext cx="1420368" cy="747065"/>
+          </a:xfrm>
+          <a:prstGeom prst="rect">
+            <a:avLst/>
+          </a:prstGeom>
+          <a:noFill/>
+          <a:ln/>
+        </p:spPr>
+        <p:txBody>
+          <a:bodyPr wrap="square" lIns="0" tIns="0" rIns="0" bIns="0" rtlCol="0" anchor="t"/>
+          <a:lstStyle/>
+          <a:p>
+            <a:pPr indent="0" marL="0">
+              <a:buNone/>
+            </a:pPr>
+            <a:r>
+              <a:rPr lang="en-US" sz="1150" dirty="0">
+                <a:solidFill>
+                  <a:srgbClr val="52514E"/>
+                </a:solidFill>
+              </a:rPr>
+              <a:t>elements: pipes, cable trays, ducts and conduits; six trades</a:t>
+            </a:r>
+            <a:endParaRPr lang="en-US" sz="1150" dirty="0"/>
+          </a:p>
+        </p:txBody>
+      </p:sp>
+      <p:sp>
+        <p:nvSpPr>
+          <p:cNvPr id="23" name="tile eight difficulty tiers by exact element count"/>
+          <p:cNvSpPr/>
+          <p:nvPr/>
+        </p:nvSpPr>
+        <p:spPr>
+          <a:xfrm>
+            <a:off x="9817608" y="1874520"/>
+            <a:ext cx="1822704" cy="1965960"/>
+          </a:xfrm>
+          <a:prstGeom prst="roundRect">
+            <a:avLst>
+              <a:gd name="adj" fmla="val 3512"/>
+            </a:avLst>
+          </a:prstGeom>
+          <a:solidFill>
+            <a:schemeClr val="bg2"/>
+          </a:solidFill>
+          <a:ln/>
+        </p:spPr>
+      </p:sp>
+      <p:sp>
+        <p:nvSpPr>
+          <p:cNvPr id="24" name="value eight difficulty tiers by exact element count"/>
+          <p:cNvSpPr txBox="1"/>
+          <p:nvPr/>
+        </p:nvSpPr>
+        <p:spPr>
+          <a:xfrm>
+            <a:off x="10018776" y="1965960"/>
+            <a:ext cx="1420368" cy="982980"/>
+          </a:xfrm>
+          <a:prstGeom prst="rect">
+            <a:avLst/>
+          </a:prstGeom>
+          <a:noFill/>
+          <a:ln/>
+        </p:spPr>
+        <p:txBody>
+          <a:bodyPr wrap="square" lIns="0" tIns="0" rIns="0" bIns="0" rtlCol="0" anchor="ctr"/>
+          <a:lstStyle/>
+          <a:p>
+            <a:pPr indent="0" marL="0">
+              <a:buNone/>
+            </a:pPr>
+            <a:r>
+              <a:rPr lang="en-US" sz="2600" b="1" dirty="0">
+                <a:solidFill>
+                  <a:schemeClr val="accent1"/>
+                </a:solidFill>
+              </a:rPr>
+              <a:t>C1–C8</a:t>
+            </a:r>
+            <a:endParaRPr lang="en-US" sz="2600" dirty="0"/>
+          </a:p>
+        </p:txBody>
+      </p:sp>
+      <p:sp>
+        <p:nvSpPr>
+          <p:cNvPr id="25" name="label eight difficulty tiers by exact element count"/>
+          <p:cNvSpPr txBox="1"/>
+          <p:nvPr/>
+        </p:nvSpPr>
+        <p:spPr>
+          <a:xfrm>
+            <a:off x="10018776" y="3014777"/>
+            <a:ext cx="1420368" cy="747065"/>
+          </a:xfrm>
+          <a:prstGeom prst="rect">
+            <a:avLst/>
+          </a:prstGeom>
+          <a:noFill/>
+          <a:ln/>
+        </p:spPr>
+        <p:txBody>
+          <a:bodyPr wrap="square" lIns="0" tIns="0" rIns="0" bIns="0" rtlCol="0" anchor="t"/>
+          <a:lstStyle/>
+          <a:p>
+            <a:pPr indent="0" marL="0">
+              <a:buNone/>
+            </a:pPr>
+            <a:r>
+              <a:rPr lang="en-US" sz="1150" dirty="0">
+                <a:solidFill>
+                  <a:srgbClr val="52514E"/>
+                </a:solidFill>
+              </a:rPr>
+              <a:t>eight difficulty tiers by exact element count</a:t>
+            </a:r>
+            <a:endParaRPr lang="en-US" sz="1150" dirty="0"/>
+          </a:p>
+        </p:txBody>
+      </p:sp>
+      <p:sp>
+        <p:nvSpPr>
+          <p:cNvPr id="26" name="tile the brief, not the answer: no support-assembly information"/>
+          <p:cNvSpPr/>
+          <p:nvPr/>
+        </p:nvSpPr>
+        <p:spPr>
+          <a:xfrm>
+            <a:off x="5806440" y="4023360"/>
+            <a:ext cx="1822704" cy="1965960"/>
+          </a:xfrm>
+          <a:prstGeom prst="roundRect">
+            <a:avLst>
+              <a:gd name="adj" fmla="val 3512"/>
+            </a:avLst>
+          </a:prstGeom>
+          <a:solidFill>
+            <a:schemeClr val="bg2"/>
+          </a:solidFill>
+          <a:ln/>
+        </p:spPr>
+      </p:sp>
+      <p:sp>
+        <p:nvSpPr>
+          <p:cNvPr id="27" name="value the brief, not the answer: no support-assembly information"/>
+          <p:cNvSpPr txBox="1"/>
+          <p:nvPr/>
+        </p:nvSpPr>
+        <p:spPr>
+          <a:xfrm>
+            <a:off x="6007608" y="4114800"/>
+            <a:ext cx="1420368" cy="982980"/>
+          </a:xfrm>
+          <a:prstGeom prst="rect">
+            <a:avLst/>
+          </a:prstGeom>
+          <a:noFill/>
+          <a:ln/>
+        </p:spPr>
+        <p:txBody>
+          <a:bodyPr wrap="square" lIns="0" tIns="0" rIns="0" bIns="0" rtlCol="0" anchor="ctr"/>
+          <a:lstStyle/>
+          <a:p>
+            <a:pPr indent="0" marL="0">
+              <a:buNone/>
+            </a:pPr>
+            <a:r>
+              <a:rPr lang="en-US" sz="2600" b="1" dirty="0">
+                <a:solidFill>
+                  <a:schemeClr val="accent1"/>
+                </a:solidFill>
+              </a:rPr>
+              <a:t>0 labels</a:t>
+            </a:r>
+            <a:endParaRPr lang="en-US" sz="2600" dirty="0"/>
+          </a:p>
+        </p:txBody>
+      </p:sp>
+      <p:sp>
+        <p:nvSpPr>
+          <p:cNvPr id="28" name="label the brief, not the answer: no support-assembly information"/>
+          <p:cNvSpPr txBox="1"/>
+          <p:nvPr/>
+        </p:nvSpPr>
+        <p:spPr>
+          <a:xfrm>
+            <a:off x="6007608" y="5163617"/>
+            <a:ext cx="1420368" cy="747065"/>
+          </a:xfrm>
+          <a:prstGeom prst="rect">
+            <a:avLst/>
+          </a:prstGeom>
+          <a:noFill/>
+          <a:ln/>
+        </p:spPr>
+        <p:txBody>
+          <a:bodyPr wrap="square" lIns="0" tIns="0" rIns="0" bIns="0" rtlCol="0" anchor="t"/>
+          <a:lstStyle/>
+          <a:p>
+            <a:pPr indent="0" marL="0">
+              <a:buNone/>
+            </a:pPr>
+            <a:r>
+              <a:rPr lang="en-US" sz="1150" dirty="0">
+                <a:solidFill>
+                  <a:srgbClr val="52514E"/>
+                </a:solidFill>
+              </a:rPr>
+              <a:t>the brief, not the answer: no support-assembly information</a:t>
+            </a:r>
+            <a:endParaRPr lang="en-US" sz="1150" dirty="0"/>
+          </a:p>
+        </p:txBody>
+      </p:sp>
+      <p:sp>
+        <p:nvSpPr>
+          <p:cNvPr id="29" name="tile every constant with its source, or declared a design choice"/>
+          <p:cNvSpPr/>
+          <p:nvPr/>
+        </p:nvSpPr>
+        <p:spPr>
+          <a:xfrm>
+            <a:off x="7812024" y="4023360"/>
+            <a:ext cx="1822704" cy="1965960"/>
+          </a:xfrm>
+          <a:prstGeom prst="roundRect">
+            <a:avLst>
+              <a:gd name="adj" fmla="val 3512"/>
+            </a:avLst>
+          </a:prstGeom>
+          <a:solidFill>
+            <a:schemeClr val="bg2"/>
+          </a:solidFill>
+          <a:ln/>
+        </p:spPr>
+      </p:sp>
+      <p:sp>
+        <p:nvSpPr>
+          <p:cNvPr id="30" name="value every constant with its source, or declared a design choice"/>
+          <p:cNvSpPr txBox="1"/>
+          <p:nvPr/>
+        </p:nvSpPr>
+        <p:spPr>
+          <a:xfrm>
+            <a:off x="8013192" y="4114800"/>
+            <a:ext cx="1420368" cy="982980"/>
+          </a:xfrm>
+          <a:prstGeom prst="rect">
+            <a:avLst/>
+          </a:prstGeom>
+          <a:noFill/>
+          <a:ln/>
+        </p:spPr>
+        <p:txBody>
+          <a:bodyPr wrap="square" lIns="0" tIns="0" rIns="0" bIns="0" rtlCol="0" anchor="ctr"/>
+          <a:lstStyle/>
+          <a:p>
+            <a:pPr indent="0" marL="0">
+              <a:buNone/>
+            </a:pPr>
+            <a:r>
+              <a:rPr lang="en-US" sz="2600" b="1" dirty="0">
+                <a:solidFill>
+                  <a:schemeClr val="accent1"/>
+                </a:solidFill>
+              </a:rPr>
+              <a:t>Traced</a:t>
+            </a:r>
+            <a:endParaRPr lang="en-US" sz="2600" dirty="0"/>
+          </a:p>
+        </p:txBody>
+      </p:sp>
+      <p:sp>
+        <p:nvSpPr>
+          <p:cNvPr id="31" name="label every constant with its source, or declared a design choice"/>
+          <p:cNvSpPr txBox="1"/>
+          <p:nvPr/>
+        </p:nvSpPr>
+        <p:spPr>
+          <a:xfrm>
+            <a:off x="8013192" y="5163617"/>
+            <a:ext cx="1420368" cy="747065"/>
+          </a:xfrm>
+          <a:prstGeom prst="rect">
+            <a:avLst/>
+          </a:prstGeom>
+          <a:noFill/>
+          <a:ln/>
+        </p:spPr>
+        <p:txBody>
+          <a:bodyPr wrap="square" lIns="0" tIns="0" rIns="0" bIns="0" rtlCol="0" anchor="t"/>
+          <a:lstStyle/>
+          <a:p>
+            <a:pPr indent="0" marL="0">
+              <a:buNone/>
+            </a:pPr>
+            <a:r>
+              <a:rPr lang="en-US" sz="1150" dirty="0">
+                <a:solidFill>
+                  <a:srgbClr val="52514E"/>
+                </a:solidFill>
+              </a:rPr>
+              <a:t>every constant with its source, or declared a design choice</a:t>
+            </a:r>
+            <a:endParaRPr lang="en-US" sz="1150" dirty="0"/>
+          </a:p>
+        </p:txBody>
+      </p:sp>
+      <p:sp>
+        <p:nvSpPr>
+          <p:cNvPr id="32" name="tile data CC BY 4.0, code MIT; a seeded, deterministic generator"/>
+          <p:cNvSpPr/>
+          <p:nvPr/>
+        </p:nvSpPr>
+        <p:spPr>
+          <a:xfrm>
+            <a:off x="9817608" y="4023360"/>
+            <a:ext cx="1822704" cy="1965960"/>
+          </a:xfrm>
+          <a:prstGeom prst="roundRect">
+            <a:avLst>
+              <a:gd name="adj" fmla="val 3512"/>
+            </a:avLst>
+          </a:prstGeom>
+          <a:solidFill>
+            <a:schemeClr val="bg2"/>
+          </a:solidFill>
+          <a:ln/>
+        </p:spPr>
+      </p:sp>
+      <p:sp>
+        <p:nvSpPr>
+          <p:cNvPr id="33" name="value data CC BY 4.0, code MIT; a seeded, deterministic generator"/>
+          <p:cNvSpPr txBox="1"/>
+          <p:nvPr/>
+        </p:nvSpPr>
+        <p:spPr>
+          <a:xfrm>
+            <a:off x="10018776" y="4114800"/>
+            <a:ext cx="1420368" cy="982980"/>
+          </a:xfrm>
+          <a:prstGeom prst="rect">
+            <a:avLst/>
+          </a:prstGeom>
+          <a:noFill/>
+          <a:ln/>
+        </p:spPr>
+        <p:txBody>
+          <a:bodyPr wrap="square" lIns="0" tIns="0" rIns="0" bIns="0" rtlCol="0" anchor="ctr"/>
+          <a:lstStyle/>
+          <a:p>
+            <a:pPr indent="0" marL="0">
+              <a:buNone/>
+            </a:pPr>
+            <a:r>
+              <a:rPr lang="en-US" sz="2600" b="1" dirty="0">
+                <a:solidFill>
+                  <a:schemeClr val="accent1"/>
+                </a:solidFill>
+              </a:rPr>
+              <a:t>Open</a:t>
+            </a:r>
+            <a:endParaRPr lang="en-US" sz="2600" dirty="0"/>
+          </a:p>
+        </p:txBody>
+      </p:sp>
+      <p:sp>
+        <p:nvSpPr>
+          <p:cNvPr id="34" name="label data CC BY 4.0, code MIT; a seeded, deterministic generator"/>
+          <p:cNvSpPr txBox="1"/>
+          <p:nvPr/>
+        </p:nvSpPr>
+        <p:spPr>
+          <a:xfrm>
+            <a:off x="10018776" y="5163617"/>
+            <a:ext cx="1420368" cy="747065"/>
+          </a:xfrm>
+          <a:prstGeom prst="rect">
+            <a:avLst/>
+          </a:prstGeom>
+          <a:noFill/>
+          <a:ln/>
+        </p:spPr>
+        <p:txBody>
+          <a:bodyPr wrap="square" lIns="0" tIns="0" rIns="0" bIns="0" rtlCol="0" anchor="t"/>
+          <a:lstStyle/>
+          <a:p>
+            <a:pPr indent="0" marL="0">
+              <a:buNone/>
+            </a:pPr>
+            <a:r>
+              <a:rPr lang="en-US" sz="1150" dirty="0">
+                <a:solidFill>
+                  <a:srgbClr val="52514E"/>
+                </a:solidFill>
+              </a:rPr>
+              <a:t>data CC BY 4.0, code MIT; a seeded, deterministic generator</a:t>
+            </a:r>
+            <a:endParaRPr lang="en-US" sz="1150" dirty="0"/>
           </a:p>
         </p:txBody>
       </p:sp>
@@ -22464,633 +23410,15 @@
                   <a:schemeClr val="tx1"/>
                 </a:solidFill>
               </a:rPr>
-              <a:t>Sections follow trade practice and measured spacing, not random shapes</a:t>
+              <a:t>We generate what a designer receives: the section at one hanger</a:t>
             </a:r>
             <a:endParaRPr lang="en-US" sz="2600" dirty="0"/>
           </a:p>
         </p:txBody>
       </p:sp>
-      <p:sp>
-        <p:nvSpPr>
-          <p:cNvPr id="3" name="step circle 1"/>
-          <p:cNvSpPr/>
-          <p:nvPr/>
-        </p:nvSpPr>
-        <p:spPr>
-          <a:xfrm>
-            <a:off x="548640" y="1453896"/>
-            <a:ext cx="402336" cy="402336"/>
-          </a:xfrm>
-          <a:prstGeom prst="ellipse">
-            <a:avLst/>
-          </a:prstGeom>
-          <a:solidFill>
-            <a:schemeClr val="accent1"/>
-          </a:solidFill>
-          <a:ln/>
-        </p:spPr>
-      </p:sp>
-      <p:sp>
-        <p:nvSpPr>
-          <p:cNvPr id="4" name="step number 1"/>
-          <p:cNvSpPr txBox="1"/>
-          <p:nvPr/>
-        </p:nvSpPr>
-        <p:spPr>
-          <a:xfrm>
-            <a:off x="548640" y="1453896"/>
-            <a:ext cx="402336" cy="402336"/>
-          </a:xfrm>
-          <a:prstGeom prst="rect">
-            <a:avLst/>
-          </a:prstGeom>
-          <a:noFill/>
-          <a:ln/>
-        </p:spPr>
-        <p:txBody>
-          <a:bodyPr wrap="square" lIns="0" tIns="0" rIns="0" bIns="0" rtlCol="0" anchor="ctr"/>
-          <a:lstStyle/>
-          <a:p>
-            <a:pPr algn="ctr" indent="0" marL="0">
-              <a:buNone/>
-            </a:pPr>
-            <a:r>
-              <a:rPr lang="en-US" sz="1400" b="1" dirty="0">
-                <a:solidFill>
-                  <a:schemeClr val="bg1"/>
-                </a:solidFill>
-              </a:rPr>
-              <a:t>1</a:t>
-            </a:r>
-            <a:endParaRPr lang="en-US" sz="1400" dirty="0"/>
-          </a:p>
-        </p:txBody>
-      </p:sp>
-      <p:sp>
-        <p:nvSpPr>
-          <p:cNvPr id="5" name="step 1"/>
-          <p:cNvSpPr txBox="1"/>
-          <p:nvPr/>
-        </p:nvSpPr>
-        <p:spPr>
-          <a:xfrm>
-            <a:off x="1143000" y="1325880"/>
-            <a:ext cx="4983480" cy="658368"/>
-          </a:xfrm>
-          <a:prstGeom prst="rect">
-            <a:avLst/>
-          </a:prstGeom>
-          <a:noFill/>
-          <a:ln/>
-        </p:spPr>
-        <p:txBody>
-          <a:bodyPr wrap="square" lIns="0" tIns="0" rIns="0" bIns="0" rtlCol="0" anchor="ctr"/>
-          <a:lstStyle/>
-          <a:p>
-            <a:pPr indent="0" marL="0">
-              <a:buNone/>
-            </a:pPr>
-            <a:r>
-              <a:rPr lang="en-US" sz="1300" b="1" dirty="0">
-                <a:solidFill>
-                  <a:schemeClr val="tx1"/>
-                </a:solidFill>
-              </a:rPr>
-              <a:t>Tier. </a:t>
-            </a:r>
-            <a:pPr indent="0" marL="0">
-              <a:buNone/>
-            </a:pPr>
-            <a:r>
-              <a:rPr lang="en-US" sz="1300" dirty="0">
-                <a:solidFill>
-                  <a:schemeClr val="tx1"/>
-                </a:solidFill>
-              </a:rPr>
-              <a:t>Cn fixes the exact element count, n = 1 … 8.</a:t>
-            </a:r>
-            <a:endParaRPr lang="en-US" sz="1300" dirty="0"/>
-          </a:p>
-        </p:txBody>
-      </p:sp>
-      <p:sp>
-        <p:nvSpPr>
-          <p:cNvPr id="6" name="step circle 2"/>
-          <p:cNvSpPr/>
-          <p:nvPr/>
-        </p:nvSpPr>
-        <p:spPr>
-          <a:xfrm>
-            <a:off x="548640" y="2240280"/>
-            <a:ext cx="402336" cy="402336"/>
-          </a:xfrm>
-          <a:prstGeom prst="ellipse">
-            <a:avLst/>
-          </a:prstGeom>
-          <a:solidFill>
-            <a:schemeClr val="accent1"/>
-          </a:solidFill>
-          <a:ln/>
-        </p:spPr>
-      </p:sp>
-      <p:sp>
-        <p:nvSpPr>
-          <p:cNvPr id="7" name="step number 2"/>
-          <p:cNvSpPr txBox="1"/>
-          <p:nvPr/>
-        </p:nvSpPr>
-        <p:spPr>
-          <a:xfrm>
-            <a:off x="548640" y="2240280"/>
-            <a:ext cx="402336" cy="402336"/>
-          </a:xfrm>
-          <a:prstGeom prst="rect">
-            <a:avLst/>
-          </a:prstGeom>
-          <a:noFill/>
-          <a:ln/>
-        </p:spPr>
-        <p:txBody>
-          <a:bodyPr wrap="square" lIns="0" tIns="0" rIns="0" bIns="0" rtlCol="0" anchor="ctr"/>
-          <a:lstStyle/>
-          <a:p>
-            <a:pPr algn="ctr" indent="0" marL="0">
-              <a:buNone/>
-            </a:pPr>
-            <a:r>
-              <a:rPr lang="en-US" sz="1400" b="1" dirty="0">
-                <a:solidFill>
-                  <a:schemeClr val="bg1"/>
-                </a:solidFill>
-              </a:rPr>
-              <a:t>2</a:t>
-            </a:r>
-            <a:endParaRPr lang="en-US" sz="1400" dirty="0"/>
-          </a:p>
-        </p:txBody>
-      </p:sp>
-      <p:sp>
-        <p:nvSpPr>
-          <p:cNvPr id="8" name="step 2"/>
-          <p:cNvSpPr txBox="1"/>
-          <p:nvPr/>
-        </p:nvSpPr>
-        <p:spPr>
-          <a:xfrm>
-            <a:off x="1143000" y="2112264"/>
-            <a:ext cx="4983480" cy="658368"/>
-          </a:xfrm>
-          <a:prstGeom prst="rect">
-            <a:avLst/>
-          </a:prstGeom>
-          <a:noFill/>
-          <a:ln/>
-        </p:spPr>
-        <p:txBody>
-          <a:bodyPr wrap="square" lIns="0" tIns="0" rIns="0" bIns="0" rtlCol="0" anchor="ctr"/>
-          <a:lstStyle/>
-          <a:p>
-            <a:pPr indent="0" marL="0">
-              <a:buNone/>
-            </a:pPr>
-            <a:r>
-              <a:rPr lang="en-US" sz="1300" b="1" dirty="0">
-                <a:solidFill>
-                  <a:schemeClr val="tx1"/>
-                </a:solidFill>
-              </a:rPr>
-              <a:t>Surface. </a:t>
-            </a:r>
-            <a:pPr indent="0" marL="0">
-              <a:buNone/>
-            </a:pPr>
-            <a:r>
-              <a:rPr lang="en-US" sz="1300" dirty="0">
-                <a:solidFill>
-                  <a:schemeClr val="tx1"/>
-                </a:solidFill>
-              </a:rPr>
-              <a:t>Ceiling or wall (78 / 22 %); concrete slab or wall, 150–300 mm thick.</a:t>
-            </a:r>
-            <a:endParaRPr lang="en-US" sz="1300" dirty="0"/>
-          </a:p>
-        </p:txBody>
-      </p:sp>
-      <p:sp>
-        <p:nvSpPr>
-          <p:cNvPr id="9" name="step circle 3"/>
-          <p:cNvSpPr/>
-          <p:nvPr/>
-        </p:nvSpPr>
-        <p:spPr>
-          <a:xfrm>
-            <a:off x="548640" y="3026664"/>
-            <a:ext cx="402336" cy="402336"/>
-          </a:xfrm>
-          <a:prstGeom prst="ellipse">
-            <a:avLst/>
-          </a:prstGeom>
-          <a:solidFill>
-            <a:schemeClr val="accent1"/>
-          </a:solidFill>
-          <a:ln/>
-        </p:spPr>
-      </p:sp>
-      <p:sp>
-        <p:nvSpPr>
-          <p:cNvPr id="10" name="step number 3"/>
-          <p:cNvSpPr txBox="1"/>
-          <p:nvPr/>
-        </p:nvSpPr>
-        <p:spPr>
-          <a:xfrm>
-            <a:off x="548640" y="3026664"/>
-            <a:ext cx="402336" cy="402336"/>
-          </a:xfrm>
-          <a:prstGeom prst="rect">
-            <a:avLst/>
-          </a:prstGeom>
-          <a:noFill/>
-          <a:ln/>
-        </p:spPr>
-        <p:txBody>
-          <a:bodyPr wrap="square" lIns="0" tIns="0" rIns="0" bIns="0" rtlCol="0" anchor="ctr"/>
-          <a:lstStyle/>
-          <a:p>
-            <a:pPr algn="ctr" indent="0" marL="0">
-              <a:buNone/>
-            </a:pPr>
-            <a:r>
-              <a:rPr lang="en-US" sz="1400" b="1" dirty="0">
-                <a:solidFill>
-                  <a:schemeClr val="bg1"/>
-                </a:solidFill>
-              </a:rPr>
-              <a:t>3</a:t>
-            </a:r>
-            <a:endParaRPr lang="en-US" sz="1400" dirty="0"/>
-          </a:p>
-        </p:txBody>
-      </p:sp>
-      <p:sp>
-        <p:nvSpPr>
-          <p:cNvPr id="11" name="step 3"/>
-          <p:cNvSpPr txBox="1"/>
-          <p:nvPr/>
-        </p:nvSpPr>
-        <p:spPr>
-          <a:xfrm>
-            <a:off x="1143000" y="2898648"/>
-            <a:ext cx="4983480" cy="658368"/>
-          </a:xfrm>
-          <a:prstGeom prst="rect">
-            <a:avLst/>
-          </a:prstGeom>
-          <a:noFill/>
-          <a:ln/>
-        </p:spPr>
-        <p:txBody>
-          <a:bodyPr wrap="square" lIns="0" tIns="0" rIns="0" bIns="0" rtlCol="0" anchor="ctr"/>
-          <a:lstStyle/>
-          <a:p>
-            <a:pPr indent="0" marL="0">
-              <a:buNone/>
-            </a:pPr>
-            <a:r>
-              <a:rPr lang="en-US" sz="1300" b="1" dirty="0">
-                <a:solidFill>
-                  <a:schemeClr val="tx1"/>
-                </a:solidFill>
-              </a:rPr>
-              <a:t>Services. </a:t>
-            </a:r>
-            <a:pPr indent="0" marL="0">
-              <a:buNone/>
-            </a:pPr>
-            <a:r>
-              <a:rPr lang="en-US" sz="1300" dirty="0">
-                <a:solidFill>
-                  <a:schemeClr val="tx1"/>
-                </a:solidFill>
-              </a:rPr>
-              <a:t>Grouped as trades run: hot + cold pairs, flow + return, chilled banks, sprinkler mains, 1–2 trays, ducts, conduit groups of 2–6.</a:t>
-            </a:r>
-            <a:endParaRPr lang="en-US" sz="1300" dirty="0"/>
-          </a:p>
-        </p:txBody>
-      </p:sp>
-      <p:sp>
-        <p:nvSpPr>
-          <p:cNvPr id="12" name="step circle 4"/>
-          <p:cNvSpPr/>
-          <p:nvPr/>
-        </p:nvSpPr>
-        <p:spPr>
-          <a:xfrm>
-            <a:off x="548640" y="3813048"/>
-            <a:ext cx="402336" cy="402336"/>
-          </a:xfrm>
-          <a:prstGeom prst="ellipse">
-            <a:avLst/>
-          </a:prstGeom>
-          <a:solidFill>
-            <a:schemeClr val="accent1"/>
-          </a:solidFill>
-          <a:ln/>
-        </p:spPr>
-      </p:sp>
-      <p:sp>
-        <p:nvSpPr>
-          <p:cNvPr id="13" name="step number 4"/>
-          <p:cNvSpPr txBox="1"/>
-          <p:nvPr/>
-        </p:nvSpPr>
-        <p:spPr>
-          <a:xfrm>
-            <a:off x="548640" y="3813048"/>
-            <a:ext cx="402336" cy="402336"/>
-          </a:xfrm>
-          <a:prstGeom prst="rect">
-            <a:avLst/>
-          </a:prstGeom>
-          <a:noFill/>
-          <a:ln/>
-        </p:spPr>
-        <p:txBody>
-          <a:bodyPr wrap="square" lIns="0" tIns="0" rIns="0" bIns="0" rtlCol="0" anchor="ctr"/>
-          <a:lstStyle/>
-          <a:p>
-            <a:pPr algn="ctr" indent="0" marL="0">
-              <a:buNone/>
-            </a:pPr>
-            <a:r>
-              <a:rPr lang="en-US" sz="1400" b="1" dirty="0">
-                <a:solidFill>
-                  <a:schemeClr val="bg1"/>
-                </a:solidFill>
-              </a:rPr>
-              <a:t>4</a:t>
-            </a:r>
-            <a:endParaRPr lang="en-US" sz="1400" dirty="0"/>
-          </a:p>
-        </p:txBody>
-      </p:sp>
-      <p:sp>
-        <p:nvSpPr>
-          <p:cNvPr id="14" name="step 4"/>
-          <p:cNvSpPr txBox="1"/>
-          <p:nvPr/>
-        </p:nvSpPr>
-        <p:spPr>
-          <a:xfrm>
-            <a:off x="1143000" y="3685032"/>
-            <a:ext cx="4983480" cy="658368"/>
-          </a:xfrm>
-          <a:prstGeom prst="rect">
-            <a:avLst/>
-          </a:prstGeom>
-          <a:noFill/>
-          <a:ln/>
-        </p:spPr>
-        <p:txBody>
-          <a:bodyPr wrap="square" lIns="0" tIns="0" rIns="0" bIns="0" rtlCol="0" anchor="ctr"/>
-          <a:lstStyle/>
-          <a:p>
-            <a:pPr indent="0" marL="0">
-              <a:buNone/>
-            </a:pPr>
-            <a:r>
-              <a:rPr lang="en-US" sz="1300" b="1" dirty="0">
-                <a:solidFill>
-                  <a:schemeClr val="tx1"/>
-                </a:solidFill>
-              </a:rPr>
-              <a:t>Rows. </a:t>
-            </a:r>
-            <a:pPr indent="0" marL="0">
-              <a:buNone/>
-            </a:pPr>
-            <a:r>
-              <a:rPr lang="en-US" sz="1300" dirty="0">
-                <a:solidFill>
-                  <a:schemeClr val="tx1"/>
-                </a:solidFill>
-              </a:rPr>
-              <a:t>Bulky first: ducts nearest the surface, then trays and conduits, then pipes.</a:t>
-            </a:r>
-            <a:endParaRPr lang="en-US" sz="1300" dirty="0"/>
-          </a:p>
-        </p:txBody>
-      </p:sp>
-      <p:sp>
-        <p:nvSpPr>
-          <p:cNvPr id="15" name="step circle 5"/>
-          <p:cNvSpPr/>
-          <p:nvPr/>
-        </p:nvSpPr>
-        <p:spPr>
-          <a:xfrm>
-            <a:off x="548640" y="4599432"/>
-            <a:ext cx="402336" cy="402336"/>
-          </a:xfrm>
-          <a:prstGeom prst="ellipse">
-            <a:avLst/>
-          </a:prstGeom>
-          <a:solidFill>
-            <a:schemeClr val="accent1"/>
-          </a:solidFill>
-          <a:ln/>
-        </p:spPr>
-      </p:sp>
-      <p:sp>
-        <p:nvSpPr>
-          <p:cNvPr id="16" name="step number 5"/>
-          <p:cNvSpPr txBox="1"/>
-          <p:nvPr/>
-        </p:nvSpPr>
-        <p:spPr>
-          <a:xfrm>
-            <a:off x="548640" y="4599432"/>
-            <a:ext cx="402336" cy="402336"/>
-          </a:xfrm>
-          <a:prstGeom prst="rect">
-            <a:avLst/>
-          </a:prstGeom>
-          <a:noFill/>
-          <a:ln/>
-        </p:spPr>
-        <p:txBody>
-          <a:bodyPr wrap="square" lIns="0" tIns="0" rIns="0" bIns="0" rtlCol="0" anchor="ctr"/>
-          <a:lstStyle/>
-          <a:p>
-            <a:pPr algn="ctr" indent="0" marL="0">
-              <a:buNone/>
-            </a:pPr>
-            <a:r>
-              <a:rPr lang="en-US" sz="1400" b="1" dirty="0">
-                <a:solidFill>
-                  <a:schemeClr val="bg1"/>
-                </a:solidFill>
-              </a:rPr>
-              <a:t>5</a:t>
-            </a:r>
-            <a:endParaRPr lang="en-US" sz="1400" dirty="0"/>
-          </a:p>
-        </p:txBody>
-      </p:sp>
-      <p:sp>
-        <p:nvSpPr>
-          <p:cNvPr id="17" name="step 5"/>
-          <p:cNvSpPr txBox="1"/>
-          <p:nvPr/>
-        </p:nvSpPr>
-        <p:spPr>
-          <a:xfrm>
-            <a:off x="1143000" y="4471416"/>
-            <a:ext cx="4983480" cy="658368"/>
-          </a:xfrm>
-          <a:prstGeom prst="rect">
-            <a:avLst/>
-          </a:prstGeom>
-          <a:noFill/>
-          <a:ln/>
-        </p:spPr>
-        <p:txBody>
-          <a:bodyPr wrap="square" lIns="0" tIns="0" rIns="0" bIns="0" rtlCol="0" anchor="ctr"/>
-          <a:lstStyle/>
-          <a:p>
-            <a:pPr indent="0" marL="0">
-              <a:buNone/>
-            </a:pPr>
-            <a:r>
-              <a:rPr lang="en-US" sz="1300" b="1" dirty="0">
-                <a:solidFill>
-                  <a:schemeClr val="tx1"/>
-                </a:solidFill>
-              </a:rPr>
-              <a:t>Spacing. </a:t>
-            </a:r>
-            <a:pPr indent="0" marL="0">
-              <a:buNone/>
-            </a:pPr>
-            <a:r>
-              <a:rPr lang="en-US" sz="1300" dirty="0">
-                <a:solidFill>
-                  <a:schemeClr val="tx1"/>
-                </a:solidFill>
-              </a:rPr>
-              <a:t>Gaps drawn from gaps measured on a built project (at least 25 mm); stagger within rows; electrical above wet on walls.</a:t>
-            </a:r>
-            <a:endParaRPr lang="en-US" sz="1300" dirty="0"/>
-          </a:p>
-        </p:txBody>
-      </p:sp>
-      <p:sp>
-        <p:nvSpPr>
-          <p:cNvPr id="18" name="step circle 6"/>
-          <p:cNvSpPr/>
-          <p:nvPr/>
-        </p:nvSpPr>
-        <p:spPr>
-          <a:xfrm>
-            <a:off x="548640" y="5385816"/>
-            <a:ext cx="402336" cy="402336"/>
-          </a:xfrm>
-          <a:prstGeom prst="ellipse">
-            <a:avLst/>
-          </a:prstGeom>
-          <a:solidFill>
-            <a:schemeClr val="accent1"/>
-          </a:solidFill>
-          <a:ln/>
-        </p:spPr>
-      </p:sp>
-      <p:sp>
-        <p:nvSpPr>
-          <p:cNvPr id="19" name="step number 6"/>
-          <p:cNvSpPr txBox="1"/>
-          <p:nvPr/>
-        </p:nvSpPr>
-        <p:spPr>
-          <a:xfrm>
-            <a:off x="548640" y="5385816"/>
-            <a:ext cx="402336" cy="402336"/>
-          </a:xfrm>
-          <a:prstGeom prst="rect">
-            <a:avLst/>
-          </a:prstGeom>
-          <a:noFill/>
-          <a:ln/>
-        </p:spPr>
-        <p:txBody>
-          <a:bodyPr wrap="square" lIns="0" tIns="0" rIns="0" bIns="0" rtlCol="0" anchor="ctr"/>
-          <a:lstStyle/>
-          <a:p>
-            <a:pPr algn="ctr" indent="0" marL="0">
-              <a:buNone/>
-            </a:pPr>
-            <a:r>
-              <a:rPr lang="en-US" sz="1400" b="1" dirty="0">
-                <a:solidFill>
-                  <a:schemeClr val="bg1"/>
-                </a:solidFill>
-              </a:rPr>
-              <a:t>6</a:t>
-            </a:r>
-            <a:endParaRPr lang="en-US" sz="1400" dirty="0"/>
-          </a:p>
-        </p:txBody>
-      </p:sp>
-      <p:sp>
-        <p:nvSpPr>
-          <p:cNvPr id="20" name="step 6"/>
-          <p:cNvSpPr txBox="1"/>
-          <p:nvPr/>
-        </p:nvSpPr>
-        <p:spPr>
-          <a:xfrm>
-            <a:off x="1143000" y="5257800"/>
-            <a:ext cx="4983480" cy="658368"/>
-          </a:xfrm>
-          <a:prstGeom prst="rect">
-            <a:avLst/>
-          </a:prstGeom>
-          <a:noFill/>
-          <a:ln/>
-        </p:spPr>
-        <p:txBody>
-          <a:bodyPr wrap="square" lIns="0" tIns="0" rIns="0" bIns="0" rtlCol="0" anchor="ctr"/>
-          <a:lstStyle/>
-          <a:p>
-            <a:pPr indent="0" marL="0">
-              <a:buNone/>
-            </a:pPr>
-            <a:r>
-              <a:rPr lang="en-US" sz="1300" b="1" dirty="0">
-                <a:solidFill>
-                  <a:schemeClr val="tx1"/>
-                </a:solidFill>
-              </a:rPr>
-              <a:t>Check. </a:t>
-            </a:r>
-            <a:pPr indent="0" marL="0">
-              <a:buNone/>
-            </a:pPr>
-            <a:r>
-              <a:rPr lang="en-US" sz="1300" dirty="0">
-                <a:solidFill>
-                  <a:schemeClr val="tx1"/>
-                </a:solidFill>
-              </a:rPr>
-              <a:t>Every pair at least 25 mm clear; rows centred; sizes, insulation, loads and positions recorded.</a:t>
-            </a:r>
-            <a:endParaRPr lang="en-US" sz="1300" dirty="0"/>
-          </a:p>
-        </p:txBody>
-      </p:sp>
       <p:pic>
         <p:nvPicPr>
-          <p:cNvPr id="21" name="generation example" descr="/home/user/crossmep_dataset/docs/figures/05_generation_example.png">    </p:cNvPr>
+          <p:cNvPr id="3" name="context figure" descr="/home/user/crossmep_dataset/docs/figures/01_what_a_context_is.png">    </p:cNvPr>
           <p:cNvPicPr>
             <a:picLocks noChangeAspect="1"/>
           </p:cNvPicPr>
@@ -23104,8 +23432,8 @@
         </p:blipFill>
         <p:spPr>
           <a:xfrm>
-            <a:off x="6309360" y="1708403"/>
-            <a:ext cx="5330952" cy="3258315"/>
+            <a:off x="1174606" y="1325880"/>
+            <a:ext cx="9839739" cy="4526280"/>
           </a:xfrm>
           <a:prstGeom prst="rect">
             <a:avLst/>
@@ -23114,14 +23442,14 @@
       </p:pic>
       <p:sp>
         <p:nvSpPr>
-          <p:cNvPr id="22" name="generation caption"/>
+          <p:cNvPr id="4" name="context caption"/>
           <p:cNvSpPr txBox="1"/>
           <p:nvPr/>
         </p:nvSpPr>
         <p:spPr>
           <a:xfrm>
-            <a:off x="6309360" y="5076445"/>
-            <a:ext cx="5330952" cy="685800"/>
+            <a:off x="548640" y="5943600"/>
+            <a:ext cx="11091672" cy="502920"/>
           </a:xfrm>
           <a:prstGeom prst="rect">
             <a:avLst/>
@@ -23142,7 +23470,7 @@
                   <a:srgbClr val="52514E"/>
                 </a:solidFill>
               </a:rPr>
-              <a:t>One generated benchmark context, three rows by priority; the gap marked is one draw from the measured distribution. Every context is seeded: the same seed gives the same file, byte for byte.</a:t>
+              <a:t>Per element: kind, service and trade · bare size · insulation per side · load per metre × the span it was sized at = load at the support · position along and out from the surface. Per context: slab or wall, substrate, thickness. Absent by design: channel, rods, clamps, anchors — and any “correct” answer, since a feasible support depends on the catalog you build from.</a:t>
             </a:r>
             <a:endParaRPr lang="en-US" sz="1100" dirty="0"/>
           </a:p>
@@ -23250,6 +23578,792 @@
                   <a:schemeClr val="tx1"/>
                 </a:solidFill>
               </a:rPr>
+              <a:t>Sections follow trade practice and measured spacing, not random shapes</a:t>
+            </a:r>
+            <a:endParaRPr lang="en-US" sz="2600" dirty="0"/>
+          </a:p>
+        </p:txBody>
+      </p:sp>
+      <p:sp>
+        <p:nvSpPr>
+          <p:cNvPr id="3" name="step circle 1"/>
+          <p:cNvSpPr/>
+          <p:nvPr/>
+        </p:nvSpPr>
+        <p:spPr>
+          <a:xfrm>
+            <a:off x="548640" y="1453896"/>
+            <a:ext cx="402336" cy="402336"/>
+          </a:xfrm>
+          <a:prstGeom prst="ellipse">
+            <a:avLst/>
+          </a:prstGeom>
+          <a:solidFill>
+            <a:schemeClr val="accent1"/>
+          </a:solidFill>
+          <a:ln/>
+        </p:spPr>
+      </p:sp>
+      <p:sp>
+        <p:nvSpPr>
+          <p:cNvPr id="4" name="step number 1"/>
+          <p:cNvSpPr txBox="1"/>
+          <p:nvPr/>
+        </p:nvSpPr>
+        <p:spPr>
+          <a:xfrm>
+            <a:off x="548640" y="1453896"/>
+            <a:ext cx="402336" cy="402336"/>
+          </a:xfrm>
+          <a:prstGeom prst="rect">
+            <a:avLst/>
+          </a:prstGeom>
+          <a:noFill/>
+          <a:ln/>
+        </p:spPr>
+        <p:txBody>
+          <a:bodyPr wrap="square" lIns="0" tIns="0" rIns="0" bIns="0" rtlCol="0" anchor="ctr"/>
+          <a:lstStyle/>
+          <a:p>
+            <a:pPr algn="ctr" indent="0" marL="0">
+              <a:buNone/>
+            </a:pPr>
+            <a:r>
+              <a:rPr lang="en-US" sz="1400" b="1" dirty="0">
+                <a:solidFill>
+                  <a:schemeClr val="bg1"/>
+                </a:solidFill>
+              </a:rPr>
+              <a:t>1</a:t>
+            </a:r>
+            <a:endParaRPr lang="en-US" sz="1400" dirty="0"/>
+          </a:p>
+        </p:txBody>
+      </p:sp>
+      <p:sp>
+        <p:nvSpPr>
+          <p:cNvPr id="5" name="step 1"/>
+          <p:cNvSpPr txBox="1"/>
+          <p:nvPr/>
+        </p:nvSpPr>
+        <p:spPr>
+          <a:xfrm>
+            <a:off x="1143000" y="1325880"/>
+            <a:ext cx="4983480" cy="658368"/>
+          </a:xfrm>
+          <a:prstGeom prst="rect">
+            <a:avLst/>
+          </a:prstGeom>
+          <a:noFill/>
+          <a:ln/>
+        </p:spPr>
+        <p:txBody>
+          <a:bodyPr wrap="square" lIns="0" tIns="0" rIns="0" bIns="0" rtlCol="0" anchor="ctr"/>
+          <a:lstStyle/>
+          <a:p>
+            <a:pPr indent="0" marL="0">
+              <a:buNone/>
+            </a:pPr>
+            <a:r>
+              <a:rPr lang="en-US" sz="1300" b="1" dirty="0">
+                <a:solidFill>
+                  <a:schemeClr val="tx1"/>
+                </a:solidFill>
+              </a:rPr>
+              <a:t>Tier. </a:t>
+            </a:r>
+            <a:pPr indent="0" marL="0">
+              <a:buNone/>
+            </a:pPr>
+            <a:r>
+              <a:rPr lang="en-US" sz="1300" dirty="0">
+                <a:solidFill>
+                  <a:schemeClr val="tx1"/>
+                </a:solidFill>
+              </a:rPr>
+              <a:t>Cn fixes the exact element count, n = 1 … 8.</a:t>
+            </a:r>
+            <a:endParaRPr lang="en-US" sz="1300" dirty="0"/>
+          </a:p>
+        </p:txBody>
+      </p:sp>
+      <p:sp>
+        <p:nvSpPr>
+          <p:cNvPr id="6" name="step circle 2"/>
+          <p:cNvSpPr/>
+          <p:nvPr/>
+        </p:nvSpPr>
+        <p:spPr>
+          <a:xfrm>
+            <a:off x="548640" y="2240280"/>
+            <a:ext cx="402336" cy="402336"/>
+          </a:xfrm>
+          <a:prstGeom prst="ellipse">
+            <a:avLst/>
+          </a:prstGeom>
+          <a:solidFill>
+            <a:schemeClr val="accent1"/>
+          </a:solidFill>
+          <a:ln/>
+        </p:spPr>
+      </p:sp>
+      <p:sp>
+        <p:nvSpPr>
+          <p:cNvPr id="7" name="step number 2"/>
+          <p:cNvSpPr txBox="1"/>
+          <p:nvPr/>
+        </p:nvSpPr>
+        <p:spPr>
+          <a:xfrm>
+            <a:off x="548640" y="2240280"/>
+            <a:ext cx="402336" cy="402336"/>
+          </a:xfrm>
+          <a:prstGeom prst="rect">
+            <a:avLst/>
+          </a:prstGeom>
+          <a:noFill/>
+          <a:ln/>
+        </p:spPr>
+        <p:txBody>
+          <a:bodyPr wrap="square" lIns="0" tIns="0" rIns="0" bIns="0" rtlCol="0" anchor="ctr"/>
+          <a:lstStyle/>
+          <a:p>
+            <a:pPr algn="ctr" indent="0" marL="0">
+              <a:buNone/>
+            </a:pPr>
+            <a:r>
+              <a:rPr lang="en-US" sz="1400" b="1" dirty="0">
+                <a:solidFill>
+                  <a:schemeClr val="bg1"/>
+                </a:solidFill>
+              </a:rPr>
+              <a:t>2</a:t>
+            </a:r>
+            <a:endParaRPr lang="en-US" sz="1400" dirty="0"/>
+          </a:p>
+        </p:txBody>
+      </p:sp>
+      <p:sp>
+        <p:nvSpPr>
+          <p:cNvPr id="8" name="step 2"/>
+          <p:cNvSpPr txBox="1"/>
+          <p:nvPr/>
+        </p:nvSpPr>
+        <p:spPr>
+          <a:xfrm>
+            <a:off x="1143000" y="2112264"/>
+            <a:ext cx="4983480" cy="658368"/>
+          </a:xfrm>
+          <a:prstGeom prst="rect">
+            <a:avLst/>
+          </a:prstGeom>
+          <a:noFill/>
+          <a:ln/>
+        </p:spPr>
+        <p:txBody>
+          <a:bodyPr wrap="square" lIns="0" tIns="0" rIns="0" bIns="0" rtlCol="0" anchor="ctr"/>
+          <a:lstStyle/>
+          <a:p>
+            <a:pPr indent="0" marL="0">
+              <a:buNone/>
+            </a:pPr>
+            <a:r>
+              <a:rPr lang="en-US" sz="1300" b="1" dirty="0">
+                <a:solidFill>
+                  <a:schemeClr val="tx1"/>
+                </a:solidFill>
+              </a:rPr>
+              <a:t>Surface. </a:t>
+            </a:r>
+            <a:pPr indent="0" marL="0">
+              <a:buNone/>
+            </a:pPr>
+            <a:r>
+              <a:rPr lang="en-US" sz="1300" dirty="0">
+                <a:solidFill>
+                  <a:schemeClr val="tx1"/>
+                </a:solidFill>
+              </a:rPr>
+              <a:t>Ceiling or wall (78 / 22 %); concrete slab or wall, 150–300 mm thick.</a:t>
+            </a:r>
+            <a:endParaRPr lang="en-US" sz="1300" dirty="0"/>
+          </a:p>
+        </p:txBody>
+      </p:sp>
+      <p:sp>
+        <p:nvSpPr>
+          <p:cNvPr id="9" name="step circle 3"/>
+          <p:cNvSpPr/>
+          <p:nvPr/>
+        </p:nvSpPr>
+        <p:spPr>
+          <a:xfrm>
+            <a:off x="548640" y="3026664"/>
+            <a:ext cx="402336" cy="402336"/>
+          </a:xfrm>
+          <a:prstGeom prst="ellipse">
+            <a:avLst/>
+          </a:prstGeom>
+          <a:solidFill>
+            <a:schemeClr val="accent1"/>
+          </a:solidFill>
+          <a:ln/>
+        </p:spPr>
+      </p:sp>
+      <p:sp>
+        <p:nvSpPr>
+          <p:cNvPr id="10" name="step number 3"/>
+          <p:cNvSpPr txBox="1"/>
+          <p:nvPr/>
+        </p:nvSpPr>
+        <p:spPr>
+          <a:xfrm>
+            <a:off x="548640" y="3026664"/>
+            <a:ext cx="402336" cy="402336"/>
+          </a:xfrm>
+          <a:prstGeom prst="rect">
+            <a:avLst/>
+          </a:prstGeom>
+          <a:noFill/>
+          <a:ln/>
+        </p:spPr>
+        <p:txBody>
+          <a:bodyPr wrap="square" lIns="0" tIns="0" rIns="0" bIns="0" rtlCol="0" anchor="ctr"/>
+          <a:lstStyle/>
+          <a:p>
+            <a:pPr algn="ctr" indent="0" marL="0">
+              <a:buNone/>
+            </a:pPr>
+            <a:r>
+              <a:rPr lang="en-US" sz="1400" b="1" dirty="0">
+                <a:solidFill>
+                  <a:schemeClr val="bg1"/>
+                </a:solidFill>
+              </a:rPr>
+              <a:t>3</a:t>
+            </a:r>
+            <a:endParaRPr lang="en-US" sz="1400" dirty="0"/>
+          </a:p>
+        </p:txBody>
+      </p:sp>
+      <p:sp>
+        <p:nvSpPr>
+          <p:cNvPr id="11" name="step 3"/>
+          <p:cNvSpPr txBox="1"/>
+          <p:nvPr/>
+        </p:nvSpPr>
+        <p:spPr>
+          <a:xfrm>
+            <a:off x="1143000" y="2898648"/>
+            <a:ext cx="4983480" cy="658368"/>
+          </a:xfrm>
+          <a:prstGeom prst="rect">
+            <a:avLst/>
+          </a:prstGeom>
+          <a:noFill/>
+          <a:ln/>
+        </p:spPr>
+        <p:txBody>
+          <a:bodyPr wrap="square" lIns="0" tIns="0" rIns="0" bIns="0" rtlCol="0" anchor="ctr"/>
+          <a:lstStyle/>
+          <a:p>
+            <a:pPr indent="0" marL="0">
+              <a:buNone/>
+            </a:pPr>
+            <a:r>
+              <a:rPr lang="en-US" sz="1300" b="1" dirty="0">
+                <a:solidFill>
+                  <a:schemeClr val="tx1"/>
+                </a:solidFill>
+              </a:rPr>
+              <a:t>Services. </a:t>
+            </a:r>
+            <a:pPr indent="0" marL="0">
+              <a:buNone/>
+            </a:pPr>
+            <a:r>
+              <a:rPr lang="en-US" sz="1300" dirty="0">
+                <a:solidFill>
+                  <a:schemeClr val="tx1"/>
+                </a:solidFill>
+              </a:rPr>
+              <a:t>Grouped as trades run: hot + cold pairs, flow + return, chilled banks, sprinkler mains, 1–2 trays, ducts, conduit groups of 2–6.</a:t>
+            </a:r>
+            <a:endParaRPr lang="en-US" sz="1300" dirty="0"/>
+          </a:p>
+        </p:txBody>
+      </p:sp>
+      <p:sp>
+        <p:nvSpPr>
+          <p:cNvPr id="12" name="step circle 4"/>
+          <p:cNvSpPr/>
+          <p:nvPr/>
+        </p:nvSpPr>
+        <p:spPr>
+          <a:xfrm>
+            <a:off x="548640" y="3813048"/>
+            <a:ext cx="402336" cy="402336"/>
+          </a:xfrm>
+          <a:prstGeom prst="ellipse">
+            <a:avLst/>
+          </a:prstGeom>
+          <a:solidFill>
+            <a:schemeClr val="accent1"/>
+          </a:solidFill>
+          <a:ln/>
+        </p:spPr>
+      </p:sp>
+      <p:sp>
+        <p:nvSpPr>
+          <p:cNvPr id="13" name="step number 4"/>
+          <p:cNvSpPr txBox="1"/>
+          <p:nvPr/>
+        </p:nvSpPr>
+        <p:spPr>
+          <a:xfrm>
+            <a:off x="548640" y="3813048"/>
+            <a:ext cx="402336" cy="402336"/>
+          </a:xfrm>
+          <a:prstGeom prst="rect">
+            <a:avLst/>
+          </a:prstGeom>
+          <a:noFill/>
+          <a:ln/>
+        </p:spPr>
+        <p:txBody>
+          <a:bodyPr wrap="square" lIns="0" tIns="0" rIns="0" bIns="0" rtlCol="0" anchor="ctr"/>
+          <a:lstStyle/>
+          <a:p>
+            <a:pPr algn="ctr" indent="0" marL="0">
+              <a:buNone/>
+            </a:pPr>
+            <a:r>
+              <a:rPr lang="en-US" sz="1400" b="1" dirty="0">
+                <a:solidFill>
+                  <a:schemeClr val="bg1"/>
+                </a:solidFill>
+              </a:rPr>
+              <a:t>4</a:t>
+            </a:r>
+            <a:endParaRPr lang="en-US" sz="1400" dirty="0"/>
+          </a:p>
+        </p:txBody>
+      </p:sp>
+      <p:sp>
+        <p:nvSpPr>
+          <p:cNvPr id="14" name="step 4"/>
+          <p:cNvSpPr txBox="1"/>
+          <p:nvPr/>
+        </p:nvSpPr>
+        <p:spPr>
+          <a:xfrm>
+            <a:off x="1143000" y="3685032"/>
+            <a:ext cx="4983480" cy="658368"/>
+          </a:xfrm>
+          <a:prstGeom prst="rect">
+            <a:avLst/>
+          </a:prstGeom>
+          <a:noFill/>
+          <a:ln/>
+        </p:spPr>
+        <p:txBody>
+          <a:bodyPr wrap="square" lIns="0" tIns="0" rIns="0" bIns="0" rtlCol="0" anchor="ctr"/>
+          <a:lstStyle/>
+          <a:p>
+            <a:pPr indent="0" marL="0">
+              <a:buNone/>
+            </a:pPr>
+            <a:r>
+              <a:rPr lang="en-US" sz="1300" b="1" dirty="0">
+                <a:solidFill>
+                  <a:schemeClr val="tx1"/>
+                </a:solidFill>
+              </a:rPr>
+              <a:t>Rows. </a:t>
+            </a:r>
+            <a:pPr indent="0" marL="0">
+              <a:buNone/>
+            </a:pPr>
+            <a:r>
+              <a:rPr lang="en-US" sz="1300" dirty="0">
+                <a:solidFill>
+                  <a:schemeClr val="tx1"/>
+                </a:solidFill>
+              </a:rPr>
+              <a:t>Bulky first: ducts nearest the surface, then trays and conduits, then pipes.</a:t>
+            </a:r>
+            <a:endParaRPr lang="en-US" sz="1300" dirty="0"/>
+          </a:p>
+        </p:txBody>
+      </p:sp>
+      <p:sp>
+        <p:nvSpPr>
+          <p:cNvPr id="15" name="step circle 5"/>
+          <p:cNvSpPr/>
+          <p:nvPr/>
+        </p:nvSpPr>
+        <p:spPr>
+          <a:xfrm>
+            <a:off x="548640" y="4599432"/>
+            <a:ext cx="402336" cy="402336"/>
+          </a:xfrm>
+          <a:prstGeom prst="ellipse">
+            <a:avLst/>
+          </a:prstGeom>
+          <a:solidFill>
+            <a:schemeClr val="accent1"/>
+          </a:solidFill>
+          <a:ln/>
+        </p:spPr>
+      </p:sp>
+      <p:sp>
+        <p:nvSpPr>
+          <p:cNvPr id="16" name="step number 5"/>
+          <p:cNvSpPr txBox="1"/>
+          <p:nvPr/>
+        </p:nvSpPr>
+        <p:spPr>
+          <a:xfrm>
+            <a:off x="548640" y="4599432"/>
+            <a:ext cx="402336" cy="402336"/>
+          </a:xfrm>
+          <a:prstGeom prst="rect">
+            <a:avLst/>
+          </a:prstGeom>
+          <a:noFill/>
+          <a:ln/>
+        </p:spPr>
+        <p:txBody>
+          <a:bodyPr wrap="square" lIns="0" tIns="0" rIns="0" bIns="0" rtlCol="0" anchor="ctr"/>
+          <a:lstStyle/>
+          <a:p>
+            <a:pPr algn="ctr" indent="0" marL="0">
+              <a:buNone/>
+            </a:pPr>
+            <a:r>
+              <a:rPr lang="en-US" sz="1400" b="1" dirty="0">
+                <a:solidFill>
+                  <a:schemeClr val="bg1"/>
+                </a:solidFill>
+              </a:rPr>
+              <a:t>5</a:t>
+            </a:r>
+            <a:endParaRPr lang="en-US" sz="1400" dirty="0"/>
+          </a:p>
+        </p:txBody>
+      </p:sp>
+      <p:sp>
+        <p:nvSpPr>
+          <p:cNvPr id="17" name="step 5"/>
+          <p:cNvSpPr txBox="1"/>
+          <p:nvPr/>
+        </p:nvSpPr>
+        <p:spPr>
+          <a:xfrm>
+            <a:off x="1143000" y="4471416"/>
+            <a:ext cx="4983480" cy="658368"/>
+          </a:xfrm>
+          <a:prstGeom prst="rect">
+            <a:avLst/>
+          </a:prstGeom>
+          <a:noFill/>
+          <a:ln/>
+        </p:spPr>
+        <p:txBody>
+          <a:bodyPr wrap="square" lIns="0" tIns="0" rIns="0" bIns="0" rtlCol="0" anchor="ctr"/>
+          <a:lstStyle/>
+          <a:p>
+            <a:pPr indent="0" marL="0">
+              <a:buNone/>
+            </a:pPr>
+            <a:r>
+              <a:rPr lang="en-US" sz="1300" b="1" dirty="0">
+                <a:solidFill>
+                  <a:schemeClr val="tx1"/>
+                </a:solidFill>
+              </a:rPr>
+              <a:t>Spacing. </a:t>
+            </a:r>
+            <a:pPr indent="0" marL="0">
+              <a:buNone/>
+            </a:pPr>
+            <a:r>
+              <a:rPr lang="en-US" sz="1300" dirty="0">
+                <a:solidFill>
+                  <a:schemeClr val="tx1"/>
+                </a:solidFill>
+              </a:rPr>
+              <a:t>Gaps drawn from gaps measured on a built project (at least 25 mm); stagger within rows; electrical above wet on walls.</a:t>
+            </a:r>
+            <a:endParaRPr lang="en-US" sz="1300" dirty="0"/>
+          </a:p>
+        </p:txBody>
+      </p:sp>
+      <p:sp>
+        <p:nvSpPr>
+          <p:cNvPr id="18" name="step circle 6"/>
+          <p:cNvSpPr/>
+          <p:nvPr/>
+        </p:nvSpPr>
+        <p:spPr>
+          <a:xfrm>
+            <a:off x="548640" y="5385816"/>
+            <a:ext cx="402336" cy="402336"/>
+          </a:xfrm>
+          <a:prstGeom prst="ellipse">
+            <a:avLst/>
+          </a:prstGeom>
+          <a:solidFill>
+            <a:schemeClr val="accent1"/>
+          </a:solidFill>
+          <a:ln/>
+        </p:spPr>
+      </p:sp>
+      <p:sp>
+        <p:nvSpPr>
+          <p:cNvPr id="19" name="step number 6"/>
+          <p:cNvSpPr txBox="1"/>
+          <p:nvPr/>
+        </p:nvSpPr>
+        <p:spPr>
+          <a:xfrm>
+            <a:off x="548640" y="5385816"/>
+            <a:ext cx="402336" cy="402336"/>
+          </a:xfrm>
+          <a:prstGeom prst="rect">
+            <a:avLst/>
+          </a:prstGeom>
+          <a:noFill/>
+          <a:ln/>
+        </p:spPr>
+        <p:txBody>
+          <a:bodyPr wrap="square" lIns="0" tIns="0" rIns="0" bIns="0" rtlCol="0" anchor="ctr"/>
+          <a:lstStyle/>
+          <a:p>
+            <a:pPr algn="ctr" indent="0" marL="0">
+              <a:buNone/>
+            </a:pPr>
+            <a:r>
+              <a:rPr lang="en-US" sz="1400" b="1" dirty="0">
+                <a:solidFill>
+                  <a:schemeClr val="bg1"/>
+                </a:solidFill>
+              </a:rPr>
+              <a:t>6</a:t>
+            </a:r>
+            <a:endParaRPr lang="en-US" sz="1400" dirty="0"/>
+          </a:p>
+        </p:txBody>
+      </p:sp>
+      <p:sp>
+        <p:nvSpPr>
+          <p:cNvPr id="20" name="step 6"/>
+          <p:cNvSpPr txBox="1"/>
+          <p:nvPr/>
+        </p:nvSpPr>
+        <p:spPr>
+          <a:xfrm>
+            <a:off x="1143000" y="5257800"/>
+            <a:ext cx="4983480" cy="658368"/>
+          </a:xfrm>
+          <a:prstGeom prst="rect">
+            <a:avLst/>
+          </a:prstGeom>
+          <a:noFill/>
+          <a:ln/>
+        </p:spPr>
+        <p:txBody>
+          <a:bodyPr wrap="square" lIns="0" tIns="0" rIns="0" bIns="0" rtlCol="0" anchor="ctr"/>
+          <a:lstStyle/>
+          <a:p>
+            <a:pPr indent="0" marL="0">
+              <a:buNone/>
+            </a:pPr>
+            <a:r>
+              <a:rPr lang="en-US" sz="1300" b="1" dirty="0">
+                <a:solidFill>
+                  <a:schemeClr val="tx1"/>
+                </a:solidFill>
+              </a:rPr>
+              <a:t>Check. </a:t>
+            </a:r>
+            <a:pPr indent="0" marL="0">
+              <a:buNone/>
+            </a:pPr>
+            <a:r>
+              <a:rPr lang="en-US" sz="1300" dirty="0">
+                <a:solidFill>
+                  <a:schemeClr val="tx1"/>
+                </a:solidFill>
+              </a:rPr>
+              <a:t>Every pair at least 25 mm clear; rows centred; sizes, insulation, loads and positions recorded.</a:t>
+            </a:r>
+            <a:endParaRPr lang="en-US" sz="1300" dirty="0"/>
+          </a:p>
+        </p:txBody>
+      </p:sp>
+      <p:pic>
+        <p:nvPicPr>
+          <p:cNvPr id="21" name="generation example" descr="/home/user/crossmep_dataset/docs/figures/05_generation_example.png">    </p:cNvPr>
+          <p:cNvPicPr>
+            <a:picLocks noChangeAspect="1"/>
+          </p:cNvPicPr>
+          <p:nvPr/>
+        </p:nvPicPr>
+        <p:blipFill>
+          <a:blip r:embed="rId1"/>
+          <a:stretch>
+            <a:fillRect/>
+          </a:stretch>
+        </p:blipFill>
+        <p:spPr>
+          <a:xfrm>
+            <a:off x="6309360" y="1708403"/>
+            <a:ext cx="5330952" cy="3258315"/>
+          </a:xfrm>
+          <a:prstGeom prst="rect">
+            <a:avLst/>
+          </a:prstGeom>
+        </p:spPr>
+      </p:pic>
+      <p:sp>
+        <p:nvSpPr>
+          <p:cNvPr id="22" name="generation caption"/>
+          <p:cNvSpPr txBox="1"/>
+          <p:nvPr/>
+        </p:nvSpPr>
+        <p:spPr>
+          <a:xfrm>
+            <a:off x="6309360" y="5076445"/>
+            <a:ext cx="5330952" cy="685800"/>
+          </a:xfrm>
+          <a:prstGeom prst="rect">
+            <a:avLst/>
+          </a:prstGeom>
+          <a:noFill/>
+          <a:ln/>
+        </p:spPr>
+        <p:txBody>
+          <a:bodyPr wrap="square" lIns="0" tIns="0" rIns="0" bIns="0" rtlCol="0" anchor="t"/>
+          <a:lstStyle/>
+          <a:p>
+            <a:pPr indent="0" marL="0">
+              <a:buNone/>
+            </a:pPr>
+            <a:r>
+              <a:rPr lang="en-US" sz="1100" dirty="0">
+                <a:solidFill>
+                  <a:srgbClr val="52514E"/>
+                </a:solidFill>
+              </a:rPr>
+              <a:t>One generated benchmark context, three rows by priority; the gap marked is one draw from the measured distribution. Every context is seeded: the same seed gives the same file, byte for byte.</a:t>
+            </a:r>
+            <a:endParaRPr lang="en-US" sz="1100" dirty="0"/>
+          </a:p>
+        </p:txBody>
+      </p:sp>
+      <p:sp>
+        <p:nvSpPr>
+          <p:cNvPr id="25" name="Slide Number Placeholder 0"/>
+          <p:cNvSpPr>
+            <a:spLocks noGrp="1"/>
+          </p:cNvSpPr>
+          <p:nvPr>
+            <p:ph type="sldNum" sz="quarter" idx="4294967295"/>
+          </p:nvPr>
+        </p:nvSpPr>
+        <p:spPr>
+          <a:xfrm>
+            <a:off x="11064240" y="6419088"/>
+            <a:ext cx="594360" cy="274320"/>
+          </a:xfrm>
+          <a:prstGeom prst="rect">
+            <a:avLst/>
+          </a:prstGeom>
+          <a:extLst>
+            <a:ext uri="{C572A759-6A51-4108-AA02-DFA0A04FC94B}">
+              <ma14:wrappingTextBoxFlag xmlns:ma14="http://schemas.microsoft.com/office/mac/drawingml/2011/main" val="0"/>
+            </a:ext>
+          </a:extLst>
+        </p:spPr>
+        <p:txBody>
+          <a:bodyPr/>
+          <a:lstStyle>
+            <a:lvl1pPr>
+              <a:defRPr sz="900">
+                <a:solidFill>
+                  <a:srgbClr val="898781"/>
+                </a:solidFill>
+              </a:defRPr>
+            </a:lvl1pPr>
+          </a:lstStyle>
+          <a:p>
+            <a:pPr algn="r"/>
+            <a:fld id="{F7021451-1387-4CA6-816F-3879F97B5CBC}" type="slidenum">
+              <a:rPr b="0" lang="en-US"/>
+              <a:t>7</a:t>
+            </a:fld>
+            <a:endParaRPr lang="en-US"/>
+          </a:p>
+        </p:txBody>
+      </p:sp>
+    </p:spTree>
+  </p:cSld>
+  <p:clrMapOvr>
+    <a:masterClrMapping/>
+  </p:clrMapOvr>
+</p:sld>
+</file>
+
+<file path=ppt/slides/slide8.xml><?xml version="1.0" encoding="utf-8"?>
+<p:sld xmlns:a="http://schemas.openxmlformats.org/drawingml/2006/main" xmlns:r="http://schemas.openxmlformats.org/officeDocument/2006/relationships" xmlns:p="http://schemas.openxmlformats.org/presentationml/2006/main">
+  <p:cSld name="Slide 8">
+    <p:spTree>
+      <p:nvGrpSpPr>
+        <p:cNvPr id="1" name=""/>
+        <p:cNvGrpSpPr/>
+        <p:nvPr/>
+      </p:nvGrpSpPr>
+      <p:grpSpPr>
+        <a:xfrm>
+          <a:off x="0" y="0"/>
+          <a:ext cx="0" cy="0"/>
+          <a:chOff x="0" y="0"/>
+          <a:chExt cx="0" cy="0"/>
+        </a:xfrm>
+      </p:grpSpPr>
+      <p:sp>
+        <p:nvSpPr>
+          <p:cNvPr id="2" name="Text 0"/>
+          <p:cNvSpPr/>
+          <p:nvPr>
+            <p:ph idx="100" type="title" hasCustomPrompt="1"/>
+          </p:nvPr>
+        </p:nvSpPr>
+        <p:spPr>
+          <a:xfrm>
+            <a:off x="548640" y="274320"/>
+            <a:ext cx="11091672" cy="960120"/>
+          </a:xfrm>
+          <a:prstGeom prst="rect">
+            <a:avLst/>
+          </a:prstGeom>
+          <a:noFill/>
+          <a:ln/>
+        </p:spPr>
+        <p:txBody>
+          <a:bodyPr wrap="square" lIns="0" tIns="0" rIns="0" bIns="0" rtlCol="0" anchor="ctr"/>
+          <a:lstStyle/>
+          <a:p>
+            <a:pPr algn="l" indent="0" marL="0">
+              <a:buNone/>
+            </a:pPr>
+            <a:r>
+              <a:rPr lang="en-US" sz="2600" b="1" dirty="0">
+                <a:solidFill>
+                  <a:schemeClr val="tx1"/>
+                </a:solidFill>
+              </a:rPr>
               <a:t>Sizes, spans and loads come from standards; the choices are declared</a:t>
             </a:r>
             <a:endParaRPr lang="en-US" sz="2600" dirty="0"/>
@@ -23258,7 +24372,7 @@
       </p:sp>
       <p:graphicFrame>
         <p:nvGraphicFramePr>
-          <p:cNvPr id="8" name="sources table"/>
+          <p:cNvPr id="9" name="sources table"/>
           <p:cNvGraphicFramePr>
             <a:graphicFrameLocks noGrp="1"/>
           </p:cNvGraphicFramePr>
@@ -24723,7 +25837,7 @@
             <a:pPr algn="r"/>
             <a:fld id="{F7021451-1387-4CA6-816F-3879F97B5CBC}" type="slidenum">
               <a:rPr b="0" lang="en-US"/>
-              <a:t>7</a:t>
+              <a:t>8</a:t>
             </a:fld>
             <a:endParaRPr lang="en-US"/>
           </a:p>
@@ -24737,9 +25851,9 @@
 </p:sld>
 </file>
 
-<file path=ppt/slides/slide8.xml><?xml version="1.0" encoding="utf-8"?>
+<file path=ppt/slides/slide9.xml><?xml version="1.0" encoding="utf-8"?>
 <p:sld xmlns:a="http://schemas.openxmlformats.org/drawingml/2006/main" xmlns:r="http://schemas.openxmlformats.org/officeDocument/2006/relationships" xmlns:p="http://schemas.openxmlformats.org/presentationml/2006/main">
-  <p:cSld name="Slide 8">
+  <p:cSld name="Slide 9">
     <p:spTree>
       <p:nvGrpSpPr>
         <p:cNvPr id="1" name=""/>
@@ -24794,7 +25908,7 @@
       </p:sp>
       <p:graphicFrame>
         <p:nvGraphicFramePr>
-          <p:cNvPr id="9" name="splits table"/>
+          <p:cNvPr id="10" name="splits table"/>
           <p:cNvGraphicFramePr>
             <a:graphicFrameLocks noGrp="1"/>
           </p:cNvGraphicFramePr>
@@ -26523,174 +27637,6 @@
           </a:graphicData>
         </a:graphic>
       </p:graphicFrame>
-      <p:sp>
-        <p:nvSpPr>
-          <p:cNvPr id="25" name="Slide Number Placeholder 0"/>
-          <p:cNvSpPr>
-            <a:spLocks noGrp="1"/>
-          </p:cNvSpPr>
-          <p:nvPr>
-            <p:ph type="sldNum" sz="quarter" idx="4294967295"/>
-          </p:nvPr>
-        </p:nvSpPr>
-        <p:spPr>
-          <a:xfrm>
-            <a:off x="11064240" y="6419088"/>
-            <a:ext cx="594360" cy="274320"/>
-          </a:xfrm>
-          <a:prstGeom prst="rect">
-            <a:avLst/>
-          </a:prstGeom>
-          <a:extLst>
-            <a:ext uri="{C572A759-6A51-4108-AA02-DFA0A04FC94B}">
-              <ma14:wrappingTextBoxFlag xmlns:ma14="http://schemas.microsoft.com/office/mac/drawingml/2011/main" val="0"/>
-            </a:ext>
-          </a:extLst>
-        </p:spPr>
-        <p:txBody>
-          <a:bodyPr/>
-          <a:lstStyle>
-            <a:lvl1pPr>
-              <a:defRPr sz="900">
-                <a:solidFill>
-                  <a:srgbClr val="898781"/>
-                </a:solidFill>
-              </a:defRPr>
-            </a:lvl1pPr>
-          </a:lstStyle>
-          <a:p>
-            <a:pPr algn="r"/>
-            <a:fld id="{F7021451-1387-4CA6-816F-3879F97B5CBC}" type="slidenum">
-              <a:rPr b="0" lang="en-US"/>
-              <a:t>8</a:t>
-            </a:fld>
-            <a:endParaRPr lang="en-US"/>
-          </a:p>
-        </p:txBody>
-      </p:sp>
-    </p:spTree>
-  </p:cSld>
-  <p:clrMapOvr>
-    <a:masterClrMapping/>
-  </p:clrMapOvr>
-</p:sld>
-</file>
-
-<file path=ppt/slides/slide9.xml><?xml version="1.0" encoding="utf-8"?>
-<p:sld xmlns:a="http://schemas.openxmlformats.org/drawingml/2006/main" xmlns:r="http://schemas.openxmlformats.org/officeDocument/2006/relationships" xmlns:p="http://schemas.openxmlformats.org/presentationml/2006/main">
-  <p:cSld name="Slide 9">
-    <p:spTree>
-      <p:nvGrpSpPr>
-        <p:cNvPr id="1" name=""/>
-        <p:cNvGrpSpPr/>
-        <p:nvPr/>
-      </p:nvGrpSpPr>
-      <p:grpSpPr>
-        <a:xfrm>
-          <a:off x="0" y="0"/>
-          <a:ext cx="0" cy="0"/>
-          <a:chOff x="0" y="0"/>
-          <a:chExt cx="0" cy="0"/>
-        </a:xfrm>
-      </p:grpSpPr>
-      <p:sp>
-        <p:nvSpPr>
-          <p:cNvPr id="2" name="Text 0"/>
-          <p:cNvSpPr/>
-          <p:nvPr>
-            <p:ph idx="100" type="title" hasCustomPrompt="1"/>
-          </p:nvPr>
-        </p:nvSpPr>
-        <p:spPr>
-          <a:xfrm>
-            <a:off x="548640" y="274320"/>
-            <a:ext cx="11091672" cy="960120"/>
-          </a:xfrm>
-          <a:prstGeom prst="rect">
-            <a:avLst/>
-          </a:prstGeom>
-          <a:noFill/>
-          <a:ln/>
-        </p:spPr>
-        <p:txBody>
-          <a:bodyPr wrap="square" lIns="0" tIns="0" rIns="0" bIns="0" rtlCol="0" anchor="ctr"/>
-          <a:lstStyle/>
-          <a:p>
-            <a:pPr algn="l" indent="0" marL="0">
-              <a:buNone/>
-            </a:pPr>
-            <a:r>
-              <a:rPr lang="en-US" sz="2600" b="1" dirty="0">
-                <a:solidFill>
-                  <a:schemeClr val="tx1"/>
-                </a:solidFill>
-              </a:rPr>
-              <a:t>Difficulty is one number: tier Cn holds exactly n elements</a:t>
-            </a:r>
-            <a:endParaRPr lang="en-US" sz="2600" dirty="0"/>
-          </a:p>
-        </p:txBody>
-      </p:sp>
-      <p:pic>
-        <p:nvPicPr>
-          <p:cNvPr id="3" name="tier gallery" descr="/home/user/crossmep_dataset/docs/figures/02_tier_gallery.png">    </p:cNvPr>
-          <p:cNvPicPr>
-            <a:picLocks noChangeAspect="1"/>
-          </p:cNvPicPr>
-          <p:nvPr/>
-        </p:nvPicPr>
-        <p:blipFill>
-          <a:blip r:embed="rId1"/>
-          <a:stretch>
-            <a:fillRect/>
-          </a:stretch>
-        </p:blipFill>
-        <p:spPr>
-          <a:xfrm>
-            <a:off x="1244890" y="1280160"/>
-            <a:ext cx="9699171" cy="4526280"/>
-          </a:xfrm>
-          <a:prstGeom prst="rect">
-            <a:avLst/>
-          </a:prstGeom>
-        </p:spPr>
-      </p:pic>
-      <p:sp>
-        <p:nvSpPr>
-          <p:cNvPr id="4" name="gallery caption"/>
-          <p:cNvSpPr txBox="1"/>
-          <p:nvPr/>
-        </p:nvSpPr>
-        <p:spPr>
-          <a:xfrm>
-            <a:off x="548640" y="5897880"/>
-            <a:ext cx="11091672" cy="502920"/>
-          </a:xfrm>
-          <a:prstGeom prst="rect">
-            <a:avLst/>
-          </a:prstGeom>
-          <a:noFill/>
-          <a:ln/>
-        </p:spPr>
-        <p:txBody>
-          <a:bodyPr wrap="square" lIns="0" tIns="0" rIns="0" bIns="0" rtlCol="0" anchor="t"/>
-          <a:lstStyle/>
-          <a:p>
-            <a:pPr indent="0" marL="0">
-              <a:buNone/>
-            </a:pPr>
-            <a:r>
-              <a:rPr lang="en-US" sz="1100" dirty="0">
-                <a:solidFill>
-                  <a:srgbClr val="52514E"/>
-                </a:solidFill>
-              </a:rPr>
-              <a:t>One benchmark context per tier; dashed rings are insulation. Within a tier, kinds, trades, services, surfaces and stacking all vary, so element count is the one controlled difficulty axis. C1 is the most common support in any building; C8 is a congested rack.</a:t>
-            </a:r>
-            <a:endParaRPr lang="en-US" sz="1100" dirty="0"/>
-          </a:p>
-        </p:txBody>
-      </p:sp>
       <p:sp>
         <p:nvSpPr>
           <p:cNvPr id="25" name="Slide Number Placeholder 0"/>

--- a/docs/CrossMEP_CIBW78_talk.pptx
+++ b/docs/CrossMEP_CIBW78_talk.pptx
@@ -128,12 +128,12 @@
   <p:extLst>
     <p:ext uri="{521415D9-36F7-43E2-AB2F-B90AF26B5E84}">
       <p14:sectionLst xmlns:p14="http://schemas.microsoft.com/office/powerpoint/2010/main">
-        <p14:section name="Opening" id="{9c4030de-114d-c0e5-2726-f3fd4d80ce72}">
+        <p14:section name="Opening" id="{31f29fa2-fc81-a175-6699-e8f9f6b214b1}">
           <p14:sldIdLst>
             <p14:sldId id="256"/>
           </p14:sldIdLst>
         </p14:section>
-        <p14:section name="Motivation" id="{440fec81-15e4-8400-ac1c-88370ec92a30}">
+        <p14:section name="Motivation" id="{9c32c71e-94ac-03b5-eff5-372297e607a2}">
           <p14:sldIdLst>
             <p14:sldId id="257"/>
             <p14:sldId id="258"/>
@@ -141,7 +141,7 @@
             <p14:sldId id="260"/>
           </p14:sldIdLst>
         </p14:section>
-        <p14:section name="The dataset" id="{fbb90206-4df6-db85-45e7-00e33dbb79c2}">
+        <p14:section name="The dataset" id="{8caa210c-38f6-4b0f-12ab-5df97c59af36}">
           <p14:sldIdLst>
             <p14:sldId id="261"/>
             <p14:sldId id="262"/>
@@ -150,14 +150,14 @@
             <p14:sldId id="265"/>
           </p14:sldIdLst>
         </p14:section>
-        <p14:section name="Experiments" id="{f17f2e08-4f9a-6e76-ba2f-aa957f1f4829}">
+        <p14:section name="Experiments" id="{b8daf8d6-11d2-8c5b-d9a7-76f22832ac2d}">
           <p14:sldIdLst>
             <p14:sldId id="266"/>
             <p14:sldId id="267"/>
             <p14:sldId id="268"/>
           </p14:sldIdLst>
         </p14:section>
-        <p14:section name="Use" id="{067e71b8-6d08-0ff0-feb5-621cf1b493f5}">
+        <p14:section name="Use" id="{f9cdaaab-1e09-eea7-e613-6797021d7e62}">
           <p14:sldIdLst>
             <p14:sldId id="269"/>
             <p14:sldId id="270"/>
@@ -165,7 +165,7 @@
             <p14:sldId id="272"/>
           </p14:sldIdLst>
         </p14:section>
-        <p14:section name="Appendix" id="{6be03e17-062f-bf95-f71e-21b3fc8c0610}">
+        <p14:section name="Appendix" id="{2902dba2-6425-1ed0-9162-24fc703f2bad}">
           <p14:sldIdLst>
             <p14:sldId id="273"/>
             <p14:sldId id="274"/>
@@ -21470,36 +21470,407 @@
       </p:sp>
       <p:sp>
         <p:nvSpPr>
-          <p:cNvPr id="3" name="flow box brief"/>
+          <p:cNvPr id="3" name="box context"/>
           <p:cNvSpPr/>
           <p:nvPr/>
         </p:nvSpPr>
         <p:spPr>
           <a:xfrm>
-            <a:off x="548640" y="1600200"/>
-            <a:ext cx="2148840" cy="1554480"/>
+            <a:off x="548640" y="1554480"/>
+            <a:ext cx="1737360" cy="960120"/>
           </a:xfrm>
           <a:prstGeom prst="roundRect">
             <a:avLst>
-              <a:gd name="adj" fmla="val 4118"/>
+              <a:gd name="adj" fmla="val 5714"/>
             </a:avLst>
           </a:prstGeom>
           <a:solidFill>
             <a:schemeClr val="bg2"/>
           </a:solidFill>
+          <a:ln w="12700">
+            <a:solidFill>
+              <a:srgbClr val="52514E"/>
+            </a:solidFill>
+            <a:prstDash val="solid"/>
+          </a:ln>
+        </p:spPr>
+      </p:sp>
+      <p:sp>
+        <p:nvSpPr>
+          <p:cNvPr id="4" name="text context"/>
+          <p:cNvSpPr txBox="1"/>
+          <p:nvPr/>
+        </p:nvSpPr>
+        <p:spPr>
+          <a:xfrm>
+            <a:off x="548640" y="1554480"/>
+            <a:ext cx="1737360" cy="960120"/>
+          </a:xfrm>
+          <a:prstGeom prst="rect">
+            <a:avLst/>
+          </a:prstGeom>
+          <a:noFill/>
           <a:ln/>
         </p:spPr>
-      </p:sp>
-      <p:sp>
-        <p:nvSpPr>
-          <p:cNvPr id="4" name="flow text brief"/>
+        <p:txBody>
+          <a:bodyPr wrap="square" lIns="1016" tIns="1016" rIns="1016" bIns="1016" rtlCol="0" anchor="ctr"/>
+          <a:lstStyle/>
+          <a:p>
+            <a:pPr algn="ctr" indent="0" marL="0">
+              <a:buNone/>
+            </a:pPr>
+            <a:r>
+              <a:rPr lang="en-US" sz="1400" b="1" dirty="0">
+                <a:solidFill>
+                  <a:schemeClr val="tx1"/>
+                </a:solidFill>
+              </a:rPr>
+              <a:t>Context</a:t>
+            </a:r>
+            <a:endParaRPr lang="en-US" sz="1400" dirty="0"/>
+          </a:p>
+          <a:p>
+            <a:pPr algn="ctr" indent="0" marL="0">
+              <a:buNone/>
+            </a:pPr>
+            <a:r>
+              <a:rPr lang="en-US" sz="1150" dirty="0">
+                <a:solidFill>
+                  <a:srgbClr val="52514E"/>
+                </a:solidFill>
+              </a:rPr>
+              <a:t>structure, services, loads</a:t>
+            </a:r>
+            <a:endParaRPr lang="en-US" sz="1400" dirty="0"/>
+          </a:p>
+        </p:txBody>
+      </p:sp>
+      <p:sp>
+        <p:nvSpPr>
+          <p:cNvPr id="5" name="box catalog"/>
+          <p:cNvSpPr/>
+          <p:nvPr/>
+        </p:nvSpPr>
+        <p:spPr>
+          <a:xfrm>
+            <a:off x="640080" y="2743200"/>
+            <a:ext cx="1554480" cy="1051560"/>
+          </a:xfrm>
+          <a:prstGeom prst="can">
+            <a:avLst/>
+          </a:prstGeom>
+          <a:solidFill>
+            <a:schemeClr val="bg2"/>
+          </a:solidFill>
+          <a:ln w="12700">
+            <a:solidFill>
+              <a:srgbClr val="52514E"/>
+            </a:solidFill>
+            <a:prstDash val="solid"/>
+          </a:ln>
+        </p:spPr>
+      </p:sp>
+      <p:sp>
+        <p:nvSpPr>
+          <p:cNvPr id="6" name="text catalog"/>
           <p:cNvSpPr txBox="1"/>
           <p:nvPr/>
         </p:nvSpPr>
         <p:spPr>
           <a:xfrm>
-            <a:off x="713232" y="1709928"/>
-            <a:ext cx="1819656" cy="1335024"/>
+            <a:off x="548640" y="2834640"/>
+            <a:ext cx="1737360" cy="914400"/>
+          </a:xfrm>
+          <a:prstGeom prst="rect">
+            <a:avLst/>
+          </a:prstGeom>
+          <a:noFill/>
+          <a:ln/>
+        </p:spPr>
+        <p:txBody>
+          <a:bodyPr wrap="square" lIns="1016" tIns="1016" rIns="1016" bIns="1016" rtlCol="0" anchor="ctr"/>
+          <a:lstStyle/>
+          <a:p>
+            <a:pPr algn="ctr" indent="0" marL="0">
+              <a:buNone/>
+            </a:pPr>
+            <a:r>
+              <a:rPr lang="en-US" sz="1400" b="1" dirty="0">
+                <a:solidFill>
+                  <a:schemeClr val="tx1"/>
+                </a:solidFill>
+              </a:rPr>
+              <a:t>Catalog</a:t>
+            </a:r>
+            <a:endParaRPr lang="en-US" sz="1400" dirty="0"/>
+          </a:p>
+          <a:p>
+            <a:pPr algn="ctr" indent="0" marL="0">
+              <a:buNone/>
+            </a:pPr>
+            <a:r>
+              <a:rPr lang="en-US" sz="1150" dirty="0">
+                <a:solidFill>
+                  <a:srgbClr val="52514E"/>
+                </a:solidFill>
+              </a:rPr>
+              <a:t>parts, sizes, unit costs</a:t>
+            </a:r>
+            <a:endParaRPr lang="en-US" sz="1400" dirty="0"/>
+          </a:p>
+        </p:txBody>
+      </p:sp>
+      <p:sp>
+        <p:nvSpPr>
+          <p:cNvPr id="7" name="box rules"/>
+          <p:cNvSpPr/>
+          <p:nvPr/>
+        </p:nvSpPr>
+        <p:spPr>
+          <a:xfrm>
+            <a:off x="2743200" y="1554480"/>
+            <a:ext cx="1828800" cy="2240280"/>
+          </a:xfrm>
+          <a:prstGeom prst="roundRect">
+            <a:avLst>
+              <a:gd name="adj" fmla="val 3000"/>
+            </a:avLst>
+          </a:prstGeom>
+          <a:solidFill>
+            <a:schemeClr val="bg2"/>
+          </a:solidFill>
+          <a:ln w="15875">
+            <a:solidFill>
+              <a:srgbClr val="1F2933"/>
+            </a:solidFill>
+            <a:prstDash val="solid"/>
+          </a:ln>
+        </p:spPr>
+      </p:sp>
+      <p:sp>
+        <p:nvSpPr>
+          <p:cNvPr id="8" name="text rules"/>
+          <p:cNvSpPr txBox="1"/>
+          <p:nvPr/>
+        </p:nvSpPr>
+        <p:spPr>
+          <a:xfrm>
+            <a:off x="2743200" y="1554480"/>
+            <a:ext cx="1828800" cy="2240280"/>
+          </a:xfrm>
+          <a:prstGeom prst="rect">
+            <a:avLst/>
+          </a:prstGeom>
+          <a:noFill/>
+          <a:ln/>
+        </p:spPr>
+        <p:txBody>
+          <a:bodyPr wrap="square" lIns="1016" tIns="1016" rIns="1016" bIns="1016" rtlCol="0" anchor="ctr"/>
+          <a:lstStyle/>
+          <a:p>
+            <a:pPr algn="ctr" indent="0" marL="0">
+              <a:buNone/>
+            </a:pPr>
+            <a:r>
+              <a:rPr lang="en-US" sz="1400" b="1" dirty="0">
+                <a:solidFill>
+                  <a:schemeClr val="tx1"/>
+                </a:solidFill>
+              </a:rPr>
+              <a:t>Rules</a:t>
+            </a:r>
+            <a:endParaRPr lang="en-US" sz="1400" dirty="0"/>
+          </a:p>
+          <a:p>
+            <a:pPr algn="ctr" indent="0" marL="0">
+              <a:buNone/>
+            </a:pPr>
+            <a:r>
+              <a:rPr lang="en-US" sz="1150" dirty="0">
+                <a:solidFill>
+                  <a:srgbClr val="52514E"/>
+                </a:solidFill>
+              </a:rPr>
+              <a:t>which actions are legal in a state; each action adds parts</a:t>
+            </a:r>
+            <a:endParaRPr lang="en-US" sz="1400" dirty="0"/>
+          </a:p>
+        </p:txBody>
+      </p:sp>
+      <p:sp>
+        <p:nvSpPr>
+          <p:cNvPr id="9" name="arrow context to rules"/>
+          <p:cNvSpPr/>
+          <p:nvPr/>
+        </p:nvSpPr>
+        <p:spPr>
+          <a:xfrm>
+            <a:off x="2286000" y="2029968"/>
+            <a:ext cx="457200" cy="0"/>
+          </a:xfrm>
+          <a:prstGeom prst="line">
+            <a:avLst/>
+          </a:prstGeom>
+          <a:noFill/>
+          <a:ln w="15875">
+            <a:solidFill>
+              <a:srgbClr val="52514E"/>
+            </a:solidFill>
+            <a:prstDash val="solid"/>
+            <a:tailEnd type="triangle"/>
+          </a:ln>
+        </p:spPr>
+      </p:sp>
+      <p:sp>
+        <p:nvSpPr>
+          <p:cNvPr id="10" name="arrow catalog to rules"/>
+          <p:cNvSpPr/>
+          <p:nvPr/>
+        </p:nvSpPr>
+        <p:spPr>
+          <a:xfrm>
+            <a:off x="2194560" y="3291840"/>
+            <a:ext cx="548640" cy="0"/>
+          </a:xfrm>
+          <a:prstGeom prst="line">
+            <a:avLst/>
+          </a:prstGeom>
+          <a:noFill/>
+          <a:ln w="15875">
+            <a:solidFill>
+              <a:srgbClr val="52514E"/>
+            </a:solidFill>
+            <a:prstDash val="solid"/>
+            <a:tailEnd type="triangle"/>
+          </a:ln>
+        </p:spPr>
+      </p:sp>
+      <p:sp>
+        <p:nvSpPr>
+          <p:cNvPr id="11" name="black box approach"/>
+          <p:cNvSpPr/>
+          <p:nvPr/>
+        </p:nvSpPr>
+        <p:spPr>
+          <a:xfrm>
+            <a:off x="5120640" y="1554480"/>
+            <a:ext cx="2194560" cy="2240280"/>
+          </a:xfrm>
+          <a:prstGeom prst="roundRect">
+            <a:avLst>
+              <a:gd name="adj" fmla="val 2500"/>
+            </a:avLst>
+          </a:prstGeom>
+          <a:solidFill>
+            <a:srgbClr val="0B0B0B"/>
+          </a:solidFill>
+          <a:ln/>
+        </p:spPr>
+      </p:sp>
+      <p:sp>
+        <p:nvSpPr>
+          <p:cNvPr id="12" name="text approach"/>
+          <p:cNvSpPr txBox="1"/>
+          <p:nvPr/>
+        </p:nvSpPr>
+        <p:spPr>
+          <a:xfrm>
+            <a:off x="5120640" y="1554480"/>
+            <a:ext cx="2194560" cy="2240280"/>
+          </a:xfrm>
+          <a:prstGeom prst="rect">
+            <a:avLst/>
+          </a:prstGeom>
+          <a:noFill/>
+          <a:ln/>
+        </p:spPr>
+        <p:txBody>
+          <a:bodyPr wrap="square" lIns="1016" tIns="1016" rIns="1016" bIns="1016" rtlCol="0" anchor="ctr"/>
+          <a:lstStyle/>
+          <a:p>
+            <a:pPr algn="ctr" indent="0" marL="0">
+              <a:buNone/>
+            </a:pPr>
+            <a:r>
+              <a:rPr lang="en-US" sz="1600" b="1" dirty="0">
+                <a:solidFill>
+                  <a:srgbClr val="FFFFFF"/>
+                </a:solidFill>
+              </a:rPr>
+              <a:t>Approach</a:t>
+            </a:r>
+            <a:endParaRPr lang="en-US" sz="1600" dirty="0"/>
+          </a:p>
+          <a:p>
+            <a:pPr algn="ctr" indent="0" marL="0">
+              <a:buNone/>
+            </a:pPr>
+            <a:r>
+              <a:rPr lang="en-US" sz="1150" dirty="0">
+                <a:solidFill>
+                  <a:srgbClr val="CADCFC"/>
+                </a:solidFill>
+              </a:rPr>
+              <a:t>a black box that chooses the next action</a:t>
+            </a:r>
+            <a:endParaRPr lang="en-US" sz="1600" dirty="0"/>
+          </a:p>
+          <a:p>
+            <a:pPr algn="ctr" indent="0" marL="0">
+              <a:buNone/>
+            </a:pPr>
+            <a:endParaRPr lang="en-US" sz="1600" dirty="0"/>
+          </a:p>
+          <a:p>
+            <a:pPr algn="ctr" indent="0" marL="0">
+              <a:buNone/>
+            </a:pPr>
+            <a:r>
+              <a:rPr lang="en-US" sz="1150" dirty="0">
+                <a:solidFill>
+                  <a:srgbClr val="CADCFC"/>
+                </a:solidFill>
+              </a:rPr>
+              <a:t>rule table · search · learned policy</a:t>
+            </a:r>
+            <a:endParaRPr lang="en-US" sz="1600" dirty="0"/>
+          </a:p>
+        </p:txBody>
+      </p:sp>
+      <p:sp>
+        <p:nvSpPr>
+          <p:cNvPr id="13" name="arrow legal actions"/>
+          <p:cNvSpPr/>
+          <p:nvPr/>
+        </p:nvSpPr>
+        <p:spPr>
+          <a:xfrm>
+            <a:off x="4572000" y="2354580"/>
+            <a:ext cx="548640" cy="0"/>
+          </a:xfrm>
+          <a:prstGeom prst="line">
+            <a:avLst/>
+          </a:prstGeom>
+          <a:noFill/>
+          <a:ln w="15875">
+            <a:solidFill>
+              <a:srgbClr val="52514E"/>
+            </a:solidFill>
+            <a:prstDash val="solid"/>
+            <a:tailEnd type="triangle"/>
+          </a:ln>
+        </p:spPr>
+      </p:sp>
+      <p:sp>
+        <p:nvSpPr>
+          <p:cNvPr id="14" name="label legal actions"/>
+          <p:cNvSpPr txBox="1"/>
+          <p:nvPr/>
+        </p:nvSpPr>
+        <p:spPr>
+          <a:xfrm>
+            <a:off x="4572000" y="2071116"/>
+            <a:ext cx="548640" cy="237744"/>
           </a:xfrm>
           <a:prstGeom prst="rect">
             <a:avLst/>
@@ -21515,92 +21886,51 @@
               <a:buNone/>
             </a:pPr>
             <a:r>
-              <a:rPr lang="en-US" sz="1500" b="1" dirty="0">
-                <a:solidFill>
-                  <a:schemeClr val="tx1"/>
-                </a:solidFill>
-              </a:rPr>
-              <a:t>The brief</a:t>
-            </a:r>
-            <a:endParaRPr lang="en-US" sz="1500" dirty="0"/>
-          </a:p>
-          <a:p>
-            <a:pPr algn="ctr" indent="0" marL="0">
-              <a:buNone/>
-            </a:pPr>
-            <a:r>
-              <a:rPr lang="en-US" sz="1250" dirty="0">
+              <a:rPr lang="en-US" sz="1050" dirty="0">
                 <a:solidFill>
                   <a:srgbClr val="52514E"/>
                 </a:solidFill>
               </a:rPr>
-              <a:t>the section at one hanger: structure, services and their loads, plus a catalog of parts with unit costs</a:t>
+              <a:t>legal actions</a:t>
             </a:r>
-            <a:endParaRPr lang="en-US" sz="1500" dirty="0"/>
+            <a:endParaRPr lang="en-US" sz="1050" dirty="0"/>
           </a:p>
         </p:txBody>
       </p:sp>
       <p:sp>
         <p:nvSpPr>
-          <p:cNvPr id="5" name="flow arrow 1"/>
+          <p:cNvPr id="15" name="arrow chosen action"/>
           <p:cNvSpPr/>
           <p:nvPr/>
         </p:nvSpPr>
         <p:spPr>
           <a:xfrm>
-            <a:off x="2697480" y="2377440"/>
-            <a:ext cx="457200" cy="0"/>
+            <a:off x="4572000" y="2994660"/>
+            <a:ext cx="548640" cy="0"/>
           </a:xfrm>
           <a:prstGeom prst="line">
             <a:avLst/>
           </a:prstGeom>
           <a:noFill/>
-          <a:ln w="19050">
+          <a:ln w="15875">
             <a:solidFill>
               <a:srgbClr val="52514E"/>
             </a:solidFill>
             <a:prstDash val="solid"/>
-            <a:tailEnd type="triangle"/>
+            <a:headEnd type="triangle"/>
           </a:ln>
         </p:spPr>
       </p:sp>
       <p:sp>
         <p:nvSpPr>
-          <p:cNvPr id="6" name="flow box build"/>
-          <p:cNvSpPr/>
+          <p:cNvPr id="16" name="label chosen action"/>
+          <p:cNvSpPr txBox="1"/>
           <p:nvPr/>
         </p:nvSpPr>
         <p:spPr>
           <a:xfrm>
-            <a:off x="3154680" y="1600200"/>
-            <a:ext cx="3017520" cy="1554480"/>
-          </a:xfrm>
-          <a:prstGeom prst="roundRect">
-            <a:avLst>
-              <a:gd name="adj" fmla="val 4118"/>
-            </a:avLst>
-          </a:prstGeom>
-          <a:solidFill>
-            <a:schemeClr val="bg2"/>
-          </a:solidFill>
-          <a:ln w="19050">
-            <a:solidFill>
-              <a:schemeClr val="accent1"/>
-            </a:solidFill>
-            <a:prstDash val="solid"/>
-          </a:ln>
-        </p:spPr>
-      </p:sp>
-      <p:sp>
-        <p:nvSpPr>
-          <p:cNvPr id="7" name="flow text build"/>
-          <p:cNvSpPr txBox="1"/>
-          <p:nvPr/>
-        </p:nvSpPr>
-        <p:spPr>
-          <a:xfrm>
-            <a:off x="3319272" y="1709928"/>
-            <a:ext cx="2688336" cy="1335024"/>
+            <a:off x="4572000" y="3040380"/>
+            <a:ext cx="548640" cy="237744"/>
           </a:xfrm>
           <a:prstGeom prst="rect">
             <a:avLst/>
@@ -21616,73 +21946,35 @@
               <a:buNone/>
             </a:pPr>
             <a:r>
-              <a:rPr lang="en-US" sz="1500" b="1" dirty="0">
-                <a:solidFill>
-                  <a:schemeClr val="tx1"/>
-                </a:solidFill>
-              </a:rPr>
-              <a:t>Build the assembly step by step</a:t>
-            </a:r>
-            <a:endParaRPr lang="en-US" sz="1500" dirty="0"/>
-          </a:p>
-          <a:p>
-            <a:pPr algn="ctr" indent="0" marL="0">
-              <a:buNone/>
-            </a:pPr>
-            <a:r>
-              <a:rPr lang="en-US" sz="1250" dirty="0">
+              <a:rPr lang="en-US" sz="1050" dirty="0">
                 <a:solidFill>
                   <a:srgbClr val="52514E"/>
                 </a:solidFill>
               </a:rPr>
-              <a:t>each step adds parts the rules allow; the step is chosen by a rule table, by search, or by a learned policy</a:t>
+              <a:t>chosen action</a:t>
             </a:r>
-            <a:endParaRPr lang="en-US" sz="1500" dirty="0"/>
+            <a:endParaRPr lang="en-US" sz="1050" dirty="0"/>
           </a:p>
         </p:txBody>
       </p:sp>
       <p:sp>
         <p:nvSpPr>
-          <p:cNvPr id="8" name="flow arrow 2"/>
+          <p:cNvPr id="17" name="box verifier"/>
           <p:cNvSpPr/>
           <p:nvPr/>
         </p:nvSpPr>
         <p:spPr>
           <a:xfrm>
-            <a:off x="6172200" y="2377440"/>
-            <a:ext cx="457200" cy="0"/>
-          </a:xfrm>
-          <a:prstGeom prst="line">
-            <a:avLst/>
-          </a:prstGeom>
-          <a:noFill/>
-          <a:ln w="19050">
-            <a:solidFill>
-              <a:srgbClr val="52514E"/>
-            </a:solidFill>
-            <a:prstDash val="solid"/>
-            <a:tailEnd type="triangle"/>
-          </a:ln>
-        </p:spPr>
-      </p:sp>
-      <p:sp>
-        <p:nvSpPr>
-          <p:cNvPr id="9" name="flow box check"/>
-          <p:cNvSpPr/>
-          <p:nvPr/>
-        </p:nvSpPr>
-        <p:spPr>
-          <a:xfrm>
-            <a:off x="6629400" y="1600200"/>
-            <a:ext cx="2697480" cy="1554480"/>
+            <a:off x="7863840" y="1554480"/>
+            <a:ext cx="1828800" cy="2240280"/>
           </a:xfrm>
           <a:prstGeom prst="roundRect">
             <a:avLst>
-              <a:gd name="adj" fmla="val 4118"/>
+              <a:gd name="adj" fmla="val 3000"/>
             </a:avLst>
           </a:prstGeom>
           <a:solidFill>
-            <a:schemeClr val="bg2"/>
+            <a:srgbClr val="EAF5EE"/>
           </a:solidFill>
           <a:ln w="19050">
             <a:solidFill>
@@ -21694,14 +21986,88 @@
       </p:sp>
       <p:sp>
         <p:nvSpPr>
-          <p:cNvPr id="10" name="flow text check"/>
+          <p:cNvPr id="18" name="text verifier"/>
           <p:cNvSpPr txBox="1"/>
           <p:nvPr/>
         </p:nvSpPr>
         <p:spPr>
           <a:xfrm>
-            <a:off x="6793992" y="1709928"/>
-            <a:ext cx="2368296" cy="1335024"/>
+            <a:off x="7863840" y="1554480"/>
+            <a:ext cx="1828800" cy="2240280"/>
+          </a:xfrm>
+          <a:prstGeom prst="rect">
+            <a:avLst/>
+          </a:prstGeom>
+          <a:noFill/>
+          <a:ln/>
+        </p:spPr>
+        <p:txBody>
+          <a:bodyPr wrap="square" lIns="1016" tIns="1016" rIns="1016" bIns="1016" rtlCol="0" anchor="ctr"/>
+          <a:lstStyle/>
+          <a:p>
+            <a:pPr algn="ctr" indent="0" marL="0">
+              <a:buNone/>
+            </a:pPr>
+            <a:r>
+              <a:rPr lang="en-US" sz="1400" b="1" dirty="0">
+                <a:solidFill>
+                  <a:schemeClr val="tx1"/>
+                </a:solidFill>
+              </a:rPr>
+              <a:t>Verifier</a:t>
+            </a:r>
+            <a:endParaRPr lang="en-US" sz="1400" dirty="0"/>
+          </a:p>
+          <a:p>
+            <a:pPr algn="ctr" indent="0" marL="0">
+              <a:buNone/>
+            </a:pPr>
+            <a:r>
+              <a:rPr lang="en-US" sz="1150" dirty="0">
+                <a:solidFill>
+                  <a:srgbClr val="52514E"/>
+                </a:solidFill>
+              </a:rPr>
+              <a:t>judges every finished design: statics, anchors, connectors, buildability</a:t>
+            </a:r>
+            <a:endParaRPr lang="en-US" sz="1400" dirty="0"/>
+          </a:p>
+        </p:txBody>
+      </p:sp>
+      <p:sp>
+        <p:nvSpPr>
+          <p:cNvPr id="19" name="arrow finished design"/>
+          <p:cNvSpPr/>
+          <p:nvPr/>
+        </p:nvSpPr>
+        <p:spPr>
+          <a:xfrm>
+            <a:off x="7315200" y="2674620"/>
+            <a:ext cx="548640" cy="0"/>
+          </a:xfrm>
+          <a:prstGeom prst="line">
+            <a:avLst/>
+          </a:prstGeom>
+          <a:noFill/>
+          <a:ln w="15875">
+            <a:solidFill>
+              <a:srgbClr val="52514E"/>
+            </a:solidFill>
+            <a:prstDash val="solid"/>
+            <a:tailEnd type="triangle"/>
+          </a:ln>
+        </p:spPr>
+      </p:sp>
+      <p:sp>
+        <p:nvSpPr>
+          <p:cNvPr id="20" name="label finished design"/>
+          <p:cNvSpPr txBox="1"/>
+          <p:nvPr/>
+        </p:nvSpPr>
+        <p:spPr>
+          <a:xfrm>
+            <a:off x="7315200" y="2391156"/>
+            <a:ext cx="548640" cy="237744"/>
           </a:xfrm>
           <a:prstGeom prst="rect">
             <a:avLst/>
@@ -21717,87 +22083,54 @@
               <a:buNone/>
             </a:pPr>
             <a:r>
-              <a:rPr lang="en-US" sz="1500" b="1" dirty="0">
-                <a:solidFill>
-                  <a:schemeClr val="tx1"/>
-                </a:solidFill>
-              </a:rPr>
-              <a:t>Check every finished design</a:t>
-            </a:r>
-            <a:endParaRPr lang="en-US" sz="1500" dirty="0"/>
-          </a:p>
-          <a:p>
-            <a:pPr algn="ctr" indent="0" marL="0">
-              <a:buNone/>
-            </a:pPr>
-            <a:r>
-              <a:rPr lang="en-US" sz="1250" dirty="0">
+              <a:rPr lang="en-US" sz="1050" dirty="0">
                 <a:solidFill>
                   <a:srgbClr val="52514E"/>
                 </a:solidFill>
               </a:rPr>
-              <a:t>statics, anchors, connectors, buildability</a:t>
+              <a:t>finished design</a:t>
             </a:r>
-            <a:endParaRPr lang="en-US" sz="1500" dirty="0"/>
+            <a:endParaRPr lang="en-US" sz="1050" dirty="0"/>
           </a:p>
         </p:txBody>
       </p:sp>
       <p:sp>
         <p:nvSpPr>
-          <p:cNvPr id="11" name="flow arrow 3"/>
+          <p:cNvPr id="21" name="box output"/>
           <p:cNvSpPr/>
           <p:nvPr/>
         </p:nvSpPr>
         <p:spPr>
           <a:xfrm>
-            <a:off x="9326880" y="2377440"/>
-            <a:ext cx="457200" cy="0"/>
-          </a:xfrm>
-          <a:prstGeom prst="line">
-            <a:avLst/>
-          </a:prstGeom>
-          <a:noFill/>
-          <a:ln w="19050">
-            <a:solidFill>
-              <a:srgbClr val="52514E"/>
-            </a:solidFill>
-            <a:prstDash val="solid"/>
-            <a:tailEnd type="triangle"/>
-          </a:ln>
-        </p:spPr>
-      </p:sp>
-      <p:sp>
-        <p:nvSpPr>
-          <p:cNvPr id="12" name="flow box out"/>
-          <p:cNvSpPr/>
-          <p:nvPr/>
-        </p:nvSpPr>
-        <p:spPr>
-          <a:xfrm>
-            <a:off x="9784080" y="1600200"/>
-            <a:ext cx="1856232" cy="1554480"/>
+            <a:off x="10104120" y="1554480"/>
+            <a:ext cx="1536192" cy="2240280"/>
           </a:xfrm>
           <a:prstGeom prst="roundRect">
             <a:avLst>
-              <a:gd name="adj" fmla="val 4118"/>
+              <a:gd name="adj" fmla="val 3571"/>
             </a:avLst>
           </a:prstGeom>
           <a:solidFill>
-            <a:schemeClr val="tx2"/>
+            <a:schemeClr val="bg2"/>
           </a:solidFill>
-          <a:ln/>
+          <a:ln w="19050">
+            <a:solidFill>
+              <a:srgbClr val="0B0B0B"/>
+            </a:solidFill>
+            <a:prstDash val="solid"/>
+          </a:ln>
         </p:spPr>
       </p:sp>
       <p:sp>
         <p:nvSpPr>
-          <p:cNvPr id="13" name="flow text out"/>
+          <p:cNvPr id="22" name="text output"/>
           <p:cNvSpPr txBox="1"/>
           <p:nvPr/>
         </p:nvSpPr>
         <p:spPr>
           <a:xfrm>
-            <a:off x="9948672" y="1709928"/>
-            <a:ext cx="1527048" cy="1335024"/>
+            <a:off x="10104120" y="1554480"/>
+            <a:ext cx="1536192" cy="2240280"/>
           </a:xfrm>
           <a:prstGeom prst="rect">
             <a:avLst/>
@@ -21806,48 +22139,118 @@
           <a:ln/>
         </p:spPr>
         <p:txBody>
-          <a:bodyPr wrap="square" lIns="0" tIns="0" rIns="0" bIns="0" rtlCol="0" anchor="ctr"/>
+          <a:bodyPr wrap="square" lIns="1016" tIns="1016" rIns="1016" bIns="1016" rtlCol="0" anchor="ctr"/>
           <a:lstStyle/>
           <a:p>
             <a:pPr algn="ctr" indent="0" marL="0">
               <a:buNone/>
             </a:pPr>
             <a:r>
-              <a:rPr lang="en-US" sz="1500" b="1" dirty="0">
+              <a:rPr lang="en-US" sz="1400" b="1" dirty="0">
                 <a:solidFill>
-                  <a:srgbClr val="FFFFFF"/>
+                  <a:schemeClr val="tx1"/>
                 </a:solidFill>
               </a:rPr>
               <a:t>Verified designs</a:t>
             </a:r>
-            <a:endParaRPr lang="en-US" sz="1500" dirty="0"/>
+            <a:endParaRPr lang="en-US" sz="1400" dirty="0"/>
           </a:p>
           <a:p>
             <a:pPr algn="ctr" indent="0" marL="0">
               <a:buNone/>
             </a:pPr>
             <a:r>
-              <a:rPr lang="en-US" sz="1250" dirty="0">
+              <a:rPr lang="en-US" sz="1150" dirty="0">
                 <a:solidFill>
-                  <a:srgbClr val="CADCFC"/>
+                  <a:srgbClr val="52514E"/>
                 </a:solidFill>
               </a:rPr>
               <a:t>up to ten, ranked by installed cost</a:t>
             </a:r>
-            <a:endParaRPr lang="en-US" sz="1500" dirty="0"/>
+            <a:endParaRPr lang="en-US" sz="1400" dirty="0"/>
           </a:p>
         </p:txBody>
       </p:sp>
       <p:sp>
         <p:nvSpPr>
-          <p:cNvPr id="14" name="feedback line"/>
+          <p:cNvPr id="23" name="arrow to output"/>
           <p:cNvSpPr/>
           <p:nvPr/>
         </p:nvSpPr>
         <p:spPr>
           <a:xfrm>
-            <a:off x="4663440" y="3227832"/>
-            <a:ext cx="3291840" cy="0"/>
+            <a:off x="9692640" y="2674620"/>
+            <a:ext cx="411480" cy="0"/>
+          </a:xfrm>
+          <a:prstGeom prst="line">
+            <a:avLst/>
+          </a:prstGeom>
+          <a:noFill/>
+          <a:ln w="15875">
+            <a:solidFill>
+              <a:srgbClr val="52514E"/>
+            </a:solidFill>
+            <a:prstDash val="solid"/>
+            <a:tailEnd type="triangle"/>
+          </a:ln>
+        </p:spPr>
+      </p:sp>
+      <p:sp>
+        <p:nvSpPr>
+          <p:cNvPr id="24" name="feedback down"/>
+          <p:cNvSpPr/>
+          <p:nvPr/>
+        </p:nvSpPr>
+        <p:spPr>
+          <a:xfrm>
+            <a:off x="8778240" y="3794760"/>
+            <a:ext cx="0" cy="274320"/>
+          </a:xfrm>
+          <a:prstGeom prst="line">
+            <a:avLst/>
+          </a:prstGeom>
+          <a:noFill/>
+          <a:ln w="15875">
+            <a:solidFill>
+              <a:srgbClr val="008300"/>
+            </a:solidFill>
+            <a:prstDash val="dash"/>
+          </a:ln>
+        </p:spPr>
+      </p:sp>
+      <p:sp>
+        <p:nvSpPr>
+          <p:cNvPr id="25" name="feedback across"/>
+          <p:cNvSpPr/>
+          <p:nvPr/>
+        </p:nvSpPr>
+        <p:spPr>
+          <a:xfrm>
+            <a:off x="6217920" y="4069080"/>
+            <a:ext cx="2560320" cy="0"/>
+          </a:xfrm>
+          <a:prstGeom prst="line">
+            <a:avLst/>
+          </a:prstGeom>
+          <a:noFill/>
+          <a:ln w="15875">
+            <a:solidFill>
+              <a:srgbClr val="008300"/>
+            </a:solidFill>
+            <a:prstDash val="dash"/>
+          </a:ln>
+        </p:spPr>
+      </p:sp>
+      <p:sp>
+        <p:nvSpPr>
+          <p:cNvPr id="26" name="feedback up"/>
+          <p:cNvSpPr/>
+          <p:nvPr/>
+        </p:nvSpPr>
+        <p:spPr>
+          <a:xfrm>
+            <a:off x="6217920" y="3794760"/>
+            <a:ext cx="0" cy="274320"/>
           </a:xfrm>
           <a:prstGeom prst="line">
             <a:avLst/>
@@ -21864,14 +22267,14 @@
       </p:sp>
       <p:sp>
         <p:nvSpPr>
-          <p:cNvPr id="15" name="feedback label"/>
+          <p:cNvPr id="27" name="label feedback"/>
           <p:cNvSpPr txBox="1"/>
           <p:nvPr/>
         </p:nvSpPr>
         <p:spPr>
           <a:xfrm>
-            <a:off x="4663440" y="3264408"/>
-            <a:ext cx="3291840" cy="274320"/>
+            <a:off x="6400800" y="4096512"/>
+            <a:ext cx="2194560" cy="237744"/>
           </a:xfrm>
           <a:prstGeom prst="rect">
             <a:avLst/>
@@ -21887,27 +22290,54 @@
               <a:buNone/>
             </a:pPr>
             <a:r>
-              <a:rPr lang="en-US" sz="1100" dirty="0">
+              <a:rPr lang="en-US" sz="1050" dirty="0">
                 <a:solidFill>
                   <a:srgbClr val="008300"/>
                 </a:solidFill>
               </a:rPr>
-              <a:t>pass or fail, fed back to the next attempt</a:t>
+              <a:t>pass or fail, fed back</a:t>
             </a:r>
-            <a:endParaRPr lang="en-US" sz="1100" dirty="0"/>
+            <a:endParaRPr lang="en-US" sz="1050" dirty="0"/>
           </a:p>
         </p:txBody>
       </p:sp>
       <p:sp>
         <p:nvSpPr>
-          <p:cNvPr id="16" name="needs heading"/>
+          <p:cNvPr id="28" name="legend swatch Input"/>
+          <p:cNvSpPr/>
+          <p:nvPr/>
+        </p:nvSpPr>
+        <p:spPr>
+          <a:xfrm>
+            <a:off x="548640" y="4654296"/>
+            <a:ext cx="274320" cy="182880"/>
+          </a:xfrm>
+          <a:prstGeom prst="roundRect">
+            <a:avLst>
+              <a:gd name="adj" fmla="val 20000"/>
+            </a:avLst>
+          </a:prstGeom>
+          <a:solidFill>
+            <a:schemeClr val="bg2"/>
+          </a:solidFill>
+          <a:ln w="12700">
+            <a:solidFill>
+              <a:srgbClr val="52514E"/>
+            </a:solidFill>
+            <a:prstDash val="solid"/>
+          </a:ln>
+        </p:spPr>
+      </p:sp>
+      <p:sp>
+        <p:nvSpPr>
+          <p:cNvPr id="29" name="legend Input"/>
           <p:cNvSpPr txBox="1"/>
           <p:nvPr/>
         </p:nvSpPr>
         <p:spPr>
           <a:xfrm>
-            <a:off x="548640" y="3931920"/>
-            <a:ext cx="11091672" cy="365760"/>
+            <a:off x="896112" y="4617720"/>
+            <a:ext cx="2011680" cy="256032"/>
           </a:xfrm>
           <a:prstGeom prst="rect">
             <a:avLst/>
@@ -21923,49 +22353,54 @@
               <a:buNone/>
             </a:pPr>
             <a:r>
-              <a:rPr lang="en-US" sz="1700" b="1" dirty="0">
+              <a:rPr lang="en-US" sz="1150" dirty="0">
                 <a:solidFill>
                   <a:schemeClr val="tx1"/>
                 </a:solidFill>
               </a:rPr>
-              <a:t>What any such method needs before it can be built or compared</a:t>
+              <a:t>Input</a:t>
             </a:r>
-            <a:endParaRPr lang="en-US" sz="1700" dirty="0"/>
+            <a:endParaRPr lang="en-US" sz="1150" dirty="0"/>
           </a:p>
         </p:txBody>
       </p:sp>
       <p:sp>
         <p:nvSpPr>
-          <p:cNvPr id="17" name="need Problems to learn from"/>
+          <p:cNvPr id="30" name="legend swatch Rules"/>
           <p:cNvSpPr/>
           <p:nvPr/>
         </p:nvSpPr>
         <p:spPr>
           <a:xfrm>
-            <a:off x="548640" y="4434840"/>
-            <a:ext cx="3575304" cy="1325880"/>
+            <a:off x="1787652" y="4654296"/>
+            <a:ext cx="274320" cy="182880"/>
           </a:xfrm>
           <a:prstGeom prst="roundRect">
             <a:avLst>
-              <a:gd name="adj" fmla="val 4828"/>
+              <a:gd name="adj" fmla="val 20000"/>
             </a:avLst>
           </a:prstGeom>
           <a:solidFill>
             <a:schemeClr val="bg2"/>
           </a:solidFill>
-          <a:ln/>
+          <a:ln w="12700">
+            <a:solidFill>
+              <a:srgbClr val="1F2933"/>
+            </a:solidFill>
+            <a:prstDash val="solid"/>
+          </a:ln>
         </p:spPr>
       </p:sp>
       <p:sp>
         <p:nvSpPr>
-          <p:cNvPr id="18" name="need head Problems to learn from"/>
+          <p:cNvPr id="31" name="legend Rules"/>
           <p:cNvSpPr txBox="1"/>
           <p:nvPr/>
         </p:nvSpPr>
         <p:spPr>
           <a:xfrm>
-            <a:off x="777240" y="4553712"/>
-            <a:ext cx="3118104" cy="384048"/>
+            <a:off x="2135124" y="4617720"/>
+            <a:ext cx="2011680" cy="256032"/>
           </a:xfrm>
           <a:prstGeom prst="rect">
             <a:avLst/>
@@ -21981,85 +22416,54 @@
               <a:buNone/>
             </a:pPr>
             <a:r>
-              <a:rPr lang="en-US" sz="1600" b="1" dirty="0">
-                <a:solidFill>
-                  <a:schemeClr val="accent1"/>
-                </a:solidFill>
-              </a:rPr>
-              <a:t>1. Problems to learn from</a:t>
-            </a:r>
-            <a:endParaRPr lang="en-US" sz="1600" dirty="0"/>
-          </a:p>
-        </p:txBody>
-      </p:sp>
-      <p:sp>
-        <p:nvSpPr>
-          <p:cNvPr id="19" name="need text Problems to learn from"/>
-          <p:cNvSpPr txBox="1"/>
-          <p:nvPr/>
-        </p:nvSpPr>
-        <p:spPr>
-          <a:xfrm>
-            <a:off x="777240" y="4983480"/>
-            <a:ext cx="3118104" cy="685800"/>
-          </a:xfrm>
-          <a:prstGeom prst="rect">
-            <a:avLst/>
-          </a:prstGeom>
-          <a:noFill/>
-          <a:ln/>
-        </p:spPr>
-        <p:txBody>
-          <a:bodyPr wrap="square" lIns="0" tIns="0" rIns="0" bIns="0" rtlCol="0" anchor="t"/>
-          <a:lstStyle/>
-          <a:p>
-            <a:pPr indent="0" marL="0">
-              <a:buNone/>
-            </a:pPr>
-            <a:r>
-              <a:rPr lang="en-US" sz="1400" dirty="0">
+              <a:rPr lang="en-US" sz="1150" dirty="0">
                 <a:solidFill>
                   <a:schemeClr val="tx1"/>
                 </a:solidFill>
               </a:rPr>
-              <a:t>many sections at hangers, varied the way buildings vary</a:t>
+              <a:t>Rules</a:t>
             </a:r>
-            <a:endParaRPr lang="en-US" sz="1400" dirty="0"/>
+            <a:endParaRPr lang="en-US" sz="1150" dirty="0"/>
           </a:p>
         </p:txBody>
       </p:sp>
       <p:sp>
         <p:nvSpPr>
-          <p:cNvPr id="20" name="need A fixed set to compare on"/>
+          <p:cNvPr id="32" name="legend swatch Approach (black box)"/>
           <p:cNvSpPr/>
           <p:nvPr/>
         </p:nvSpPr>
         <p:spPr>
           <a:xfrm>
-            <a:off x="4306824" y="4434840"/>
-            <a:ext cx="3575304" cy="1325880"/>
+            <a:off x="3026664" y="4654296"/>
+            <a:ext cx="274320" cy="182880"/>
           </a:xfrm>
           <a:prstGeom prst="roundRect">
             <a:avLst>
-              <a:gd name="adj" fmla="val 4828"/>
+              <a:gd name="adj" fmla="val 20000"/>
             </a:avLst>
           </a:prstGeom>
           <a:solidFill>
-            <a:schemeClr val="bg2"/>
+            <a:srgbClr val="0B0B0B"/>
           </a:solidFill>
-          <a:ln/>
+          <a:ln w="12700">
+            <a:solidFill>
+              <a:srgbClr val="0B0B0B"/>
+            </a:solidFill>
+            <a:prstDash val="solid"/>
+          </a:ln>
         </p:spPr>
       </p:sp>
       <p:sp>
         <p:nvSpPr>
-          <p:cNvPr id="21" name="need head A fixed set to compare on"/>
+          <p:cNvPr id="33" name="legend Approach (black box)"/>
           <p:cNvSpPr txBox="1"/>
           <p:nvPr/>
         </p:nvSpPr>
         <p:spPr>
           <a:xfrm>
-            <a:off x="4535424" y="4553712"/>
-            <a:ext cx="3118104" cy="384048"/>
+            <a:off x="3374136" y="4617720"/>
+            <a:ext cx="2011680" cy="256032"/>
           </a:xfrm>
           <a:prstGeom prst="rect">
             <a:avLst/>
@@ -22075,85 +22479,54 @@
               <a:buNone/>
             </a:pPr>
             <a:r>
-              <a:rPr lang="en-US" sz="1600" b="1" dirty="0">
-                <a:solidFill>
-                  <a:schemeClr val="accent1"/>
-                </a:solidFill>
-              </a:rPr>
-              <a:t>2. A fixed set to compare on</a:t>
-            </a:r>
-            <a:endParaRPr lang="en-US" sz="1600" dirty="0"/>
-          </a:p>
-        </p:txBody>
-      </p:sp>
-      <p:sp>
-        <p:nvSpPr>
-          <p:cNvPr id="22" name="need text A fixed set to compare on"/>
-          <p:cNvSpPr txBox="1"/>
-          <p:nvPr/>
-        </p:nvSpPr>
-        <p:spPr>
-          <a:xfrm>
-            <a:off x="4535424" y="4983480"/>
-            <a:ext cx="3118104" cy="685800"/>
-          </a:xfrm>
-          <a:prstGeom prst="rect">
-            <a:avLst/>
-          </a:prstGeom>
-          <a:noFill/>
-          <a:ln/>
-        </p:spPr>
-        <p:txBody>
-          <a:bodyPr wrap="square" lIns="0" tIns="0" rIns="0" bIns="0" rtlCol="0" anchor="t"/>
-          <a:lstStyle/>
-          <a:p>
-            <a:pPr indent="0" marL="0">
-              <a:buNone/>
-            </a:pPr>
-            <a:r>
-              <a:rPr lang="en-US" sz="1400" dirty="0">
+              <a:rPr lang="en-US" sz="1150" dirty="0">
                 <a:solidFill>
                   <a:schemeClr val="tx1"/>
                 </a:solidFill>
               </a:rPr>
-              <a:t>the same problems for every method, by difficulty</a:t>
+              <a:t>Approach (black box)</a:t>
             </a:r>
-            <a:endParaRPr lang="en-US" sz="1400" dirty="0"/>
+            <a:endParaRPr lang="en-US" sz="1150" dirty="0"/>
           </a:p>
         </p:txBody>
       </p:sp>
       <p:sp>
         <p:nvSpPr>
-          <p:cNvPr id="23" name="need Problems that look like practice"/>
+          <p:cNvPr id="34" name="legend swatch Verifier"/>
           <p:cNvSpPr/>
           <p:nvPr/>
         </p:nvSpPr>
         <p:spPr>
           <a:xfrm>
-            <a:off x="8065008" y="4434840"/>
-            <a:ext cx="3575304" cy="1325880"/>
+            <a:off x="5431536" y="4654296"/>
+            <a:ext cx="274320" cy="182880"/>
           </a:xfrm>
           <a:prstGeom prst="roundRect">
             <a:avLst>
-              <a:gd name="adj" fmla="val 4828"/>
+              <a:gd name="adj" fmla="val 20000"/>
             </a:avLst>
           </a:prstGeom>
           <a:solidFill>
-            <a:schemeClr val="bg2"/>
+            <a:srgbClr val="EAF5EE"/>
           </a:solidFill>
-          <a:ln/>
+          <a:ln w="12700">
+            <a:solidFill>
+              <a:srgbClr val="008300"/>
+            </a:solidFill>
+            <a:prstDash val="solid"/>
+          </a:ln>
         </p:spPr>
       </p:sp>
       <p:sp>
         <p:nvSpPr>
-          <p:cNvPr id="24" name="need head Problems that look like practice"/>
+          <p:cNvPr id="35" name="legend Verifier"/>
           <p:cNvSpPr txBox="1"/>
           <p:nvPr/>
         </p:nvSpPr>
         <p:spPr>
           <a:xfrm>
-            <a:off x="8293608" y="4553712"/>
-            <a:ext cx="3118104" cy="384048"/>
+            <a:off x="5779008" y="4617720"/>
+            <a:ext cx="2011680" cy="256032"/>
           </a:xfrm>
           <a:prstGeom prst="rect">
             <a:avLst/>
@@ -22169,27 +22542,54 @@
               <a:buNone/>
             </a:pPr>
             <a:r>
-              <a:rPr lang="en-US" sz="1600" b="1" dirty="0">
+              <a:rPr lang="en-US" sz="1150" dirty="0">
                 <a:solidFill>
-                  <a:schemeClr val="accent1"/>
+                  <a:schemeClr val="tx1"/>
                 </a:solidFill>
               </a:rPr>
-              <a:t>3. Problems that look like practice</a:t>
+              <a:t>Verifier</a:t>
             </a:r>
-            <a:endParaRPr lang="en-US" sz="1600" dirty="0"/>
+            <a:endParaRPr lang="en-US" sz="1150" dirty="0"/>
           </a:p>
         </p:txBody>
       </p:sp>
       <p:sp>
         <p:nvSpPr>
-          <p:cNvPr id="25" name="need text Problems that look like practice"/>
+          <p:cNvPr id="36" name="legend swatch Output"/>
+          <p:cNvSpPr/>
+          <p:nvPr/>
+        </p:nvSpPr>
+        <p:spPr>
+          <a:xfrm>
+            <a:off x="6903720" y="4654296"/>
+            <a:ext cx="274320" cy="182880"/>
+          </a:xfrm>
+          <a:prstGeom prst="roundRect">
+            <a:avLst>
+              <a:gd name="adj" fmla="val 20000"/>
+            </a:avLst>
+          </a:prstGeom>
+          <a:solidFill>
+            <a:schemeClr val="bg2"/>
+          </a:solidFill>
+          <a:ln w="12700">
+            <a:solidFill>
+              <a:srgbClr val="0B0B0B"/>
+            </a:solidFill>
+            <a:prstDash val="solid"/>
+          </a:ln>
+        </p:spPr>
+      </p:sp>
+      <p:sp>
+        <p:nvSpPr>
+          <p:cNvPr id="37" name="legend Output"/>
           <p:cNvSpPr txBox="1"/>
           <p:nvPr/>
         </p:nvSpPr>
         <p:spPr>
           <a:xfrm>
-            <a:off x="8293608" y="4983480"/>
-            <a:ext cx="3118104" cy="685800"/>
+            <a:off x="7251192" y="4617720"/>
+            <a:ext cx="2011680" cy="256032"/>
           </a:xfrm>
           <a:prstGeom prst="rect">
             <a:avLst/>
@@ -22198,21 +22598,145 @@
           <a:ln/>
         </p:spPr>
         <p:txBody>
-          <a:bodyPr wrap="square" lIns="0" tIns="0" rIns="0" bIns="0" rtlCol="0" anchor="t"/>
+          <a:bodyPr wrap="square" lIns="0" tIns="0" rIns="0" bIns="0" rtlCol="0" anchor="ctr"/>
           <a:lstStyle/>
           <a:p>
             <a:pPr indent="0" marL="0">
               <a:buNone/>
             </a:pPr>
             <a:r>
-              <a:rPr lang="en-US" sz="1400" dirty="0">
+              <a:rPr lang="en-US" sz="1150" dirty="0">
                 <a:solidFill>
                   <a:schemeClr val="tx1"/>
                 </a:solidFill>
               </a:rPr>
-              <a:t>sizes, spacing and loads an engineer would recognise</a:t>
+              <a:t>Output</a:t>
             </a:r>
-            <a:endParaRPr lang="en-US" sz="1400" dirty="0"/>
+            <a:endParaRPr lang="en-US" sz="1150" dirty="0"/>
+          </a:p>
+        </p:txBody>
+      </p:sp>
+      <p:sp>
+        <p:nvSpPr>
+          <p:cNvPr id="38" name="needs band"/>
+          <p:cNvSpPr/>
+          <p:nvPr/>
+        </p:nvSpPr>
+        <p:spPr>
+          <a:xfrm>
+            <a:off x="548640" y="5074920"/>
+            <a:ext cx="11091672" cy="914400"/>
+          </a:xfrm>
+          <a:prstGeom prst="roundRect">
+            <a:avLst>
+              <a:gd name="adj" fmla="val 7000"/>
+            </a:avLst>
+          </a:prstGeom>
+          <a:solidFill>
+            <a:schemeClr val="tx2"/>
+          </a:solidFill>
+          <a:ln/>
+        </p:spPr>
+      </p:sp>
+      <p:sp>
+        <p:nvSpPr>
+          <p:cNvPr id="39" name="needs text"/>
+          <p:cNvSpPr txBox="1"/>
+          <p:nvPr/>
+        </p:nvSpPr>
+        <p:spPr>
+          <a:xfrm>
+            <a:off x="822960" y="5074920"/>
+            <a:ext cx="10515600" cy="914400"/>
+          </a:xfrm>
+          <a:prstGeom prst="rect">
+            <a:avLst/>
+          </a:prstGeom>
+          <a:noFill/>
+          <a:ln/>
+        </p:spPr>
+        <p:txBody>
+          <a:bodyPr wrap="square" lIns="0" tIns="0" rIns="0" bIns="0" rtlCol="0" anchor="ctr"/>
+          <a:lstStyle/>
+          <a:p>
+            <a:pPr indent="0" marL="0">
+              <a:buNone/>
+            </a:pPr>
+            <a:r>
+              <a:rPr lang="en-US" sz="1600" dirty="0">
+                <a:solidFill>
+                  <a:srgbClr val="FFFFFF"/>
+                </a:solidFill>
+              </a:rPr>
+              <a:t>Whatever sits in the black box, it needs </a:t>
+            </a:r>
+            <a:pPr indent="0" marL="0">
+              <a:buNone/>
+            </a:pPr>
+            <a:r>
+              <a:rPr lang="en-US" sz="1600" b="1" dirty="0">
+                <a:solidFill>
+                  <a:srgbClr val="FFFFFF"/>
+                </a:solidFill>
+              </a:rPr>
+              <a:t>problems to learn from</a:t>
+            </a:r>
+            <a:pPr indent="0" marL="0">
+              <a:buNone/>
+            </a:pPr>
+            <a:r>
+              <a:rPr lang="en-US" sz="1600" dirty="0">
+                <a:solidFill>
+                  <a:srgbClr val="FFFFFF"/>
+                </a:solidFill>
+              </a:rPr>
+              <a:t>, </a:t>
+            </a:r>
+            <a:pPr indent="0" marL="0">
+              <a:buNone/>
+            </a:pPr>
+            <a:r>
+              <a:rPr lang="en-US" sz="1600" b="1" dirty="0">
+                <a:solidFill>
+                  <a:srgbClr val="FFFFFF"/>
+                </a:solidFill>
+              </a:rPr>
+              <a:t>a fixed set to compare on</a:t>
+            </a:r>
+            <a:pPr indent="0" marL="0">
+              <a:buNone/>
+            </a:pPr>
+            <a:r>
+              <a:rPr lang="en-US" sz="1600" dirty="0">
+                <a:solidFill>
+                  <a:srgbClr val="FFFFFF"/>
+                </a:solidFill>
+              </a:rPr>
+              <a:t> and </a:t>
+            </a:r>
+            <a:pPr indent="0" marL="0">
+              <a:buNone/>
+            </a:pPr>
+            <a:r>
+              <a:rPr lang="en-US" sz="1600" b="1" dirty="0">
+                <a:solidFill>
+                  <a:srgbClr val="FFFFFF"/>
+                </a:solidFill>
+              </a:rPr>
+              <a:t>problems that look like practice</a:t>
+            </a:r>
+            <a:pPr indent="0" marL="0">
+              <a:buNone/>
+            </a:pPr>
+            <a:r>
+              <a:rPr lang="en-US" sz="1600" dirty="0">
+                <a:solidFill>
+                  <a:srgbClr val="FFFFFF"/>
+                </a:solidFill>
+              </a:rPr>
+              <a:t>.</a:t>
+            </a:r>
+            <a:endParaRPr lang="en-US" sz="1600" dirty="0"/>
           </a:p>
         </p:txBody>
       </p:sp>

--- a/docs/CrossMEP_CIBW78_talk.pptx
+++ b/docs/CrossMEP_CIBW78_talk.pptx
@@ -128,12 +128,12 @@
   <p:extLst>
     <p:ext uri="{521415D9-36F7-43E2-AB2F-B90AF26B5E84}">
       <p14:sectionLst xmlns:p14="http://schemas.microsoft.com/office/powerpoint/2010/main">
-        <p14:section name="Opening" id="{31f29fa2-fc81-a175-6699-e8f9f6b214b1}">
+        <p14:section name="Opening" id="{82ac0653-a41a-33f5-6b5d-37467d25163c}">
           <p14:sldIdLst>
             <p14:sldId id="256"/>
           </p14:sldIdLst>
         </p14:section>
-        <p14:section name="Motivation" id="{9c32c71e-94ac-03b5-eff5-372297e607a2}">
+        <p14:section name="Motivation" id="{46b6629c-60c0-9abe-1faf-a6dde6a84244}">
           <p14:sldIdLst>
             <p14:sldId id="257"/>
             <p14:sldId id="258"/>
@@ -141,7 +141,7 @@
             <p14:sldId id="260"/>
           </p14:sldIdLst>
         </p14:section>
-        <p14:section name="The dataset" id="{8caa210c-38f6-4b0f-12ab-5df97c59af36}">
+        <p14:section name="The dataset" id="{6988c8fc-c5a3-99f4-bc44-54b62fb8c7a5}">
           <p14:sldIdLst>
             <p14:sldId id="261"/>
             <p14:sldId id="262"/>
@@ -150,14 +150,14 @@
             <p14:sldId id="265"/>
           </p14:sldIdLst>
         </p14:section>
-        <p14:section name="Experiments" id="{b8daf8d6-11d2-8c5b-d9a7-76f22832ac2d}">
+        <p14:section name="Experiments" id="{ae2329e8-53e4-c805-f436-cf41d0646b77}">
           <p14:sldIdLst>
             <p14:sldId id="266"/>
             <p14:sldId id="267"/>
             <p14:sldId id="268"/>
           </p14:sldIdLst>
         </p14:section>
-        <p14:section name="Use" id="{f9cdaaab-1e09-eea7-e613-6797021d7e62}">
+        <p14:section name="Use" id="{27d8e8a0-dfa3-6bd8-7c33-04245facefd1}">
           <p14:sldIdLst>
             <p14:sldId id="269"/>
             <p14:sldId id="270"/>
@@ -165,7 +165,7 @@
             <p14:sldId id="272"/>
           </p14:sldIdLst>
         </p14:section>
-        <p14:section name="Appendix" id="{2902dba2-6425-1ed0-9162-24fc703f2bad}">
+        <p14:section name="Appendix" id="{21758f25-c35d-d6c4-0388-29614f98d7cb}">
           <p14:sldIdLst>
             <p14:sldId id="273"/>
             <p14:sldId id="274"/>
@@ -2115,7 +2115,7 @@
           <a:p>
             <a:r>
               <a:rPr lang="en-US" dirty="0"/>
-              <a:t>Here's one benchmark context per tier. C1 is a single element, the most common support in any building. By C8 you have eight services on three rows. Within a tier everything else varies: kinds, trades, surfaces, stacking. So the element count is the one controlled axis of difficulty. And notice the walls: the section rotates, and electrical sits above water. (4:45)</a:t>
+              <a:t>Here's one benchmark context per tier. C1 is a single element, the most common support in any building. By C8 you have eight services on three rows. Within a tier everything else varies: kinds, trades, surfaces, stacking. So the element count is the one controlled axis of difficulty. And notice the walls: the section rotates, and electrical sits above water. (5:00)</a:t>
             </a:r>
             <a:endParaRPr lang="en-US" dirty="0"/>
           </a:p>
@@ -2203,7 +2203,7 @@
           <a:p>
             <a:r>
               <a:rPr lang="en-US" dirty="0"/>
-              <a:t>Now three analyses. The first is a design check, not a discovery: does difficulty grow with the tier? The count is fixed by construction, and load and congestion follow from the rules, so this shows the dataset behaves as designed. The load at the support rises with the tier, from about 0.3 to 2.0 kilonewtons. The closest gap narrows at every step, from 130 to about 51 millimeters. So: report methods tier by tier. (5:10)</a:t>
+              <a:t>Now three analyses. The first is a design check, not a discovery: does difficulty grow with the tier? The count is fixed by construction, and load and congestion follow from the rules, so this shows the dataset behaves as designed. The load at the support rises with the tier, from about 0.3 to 2.0 kilonewtons. The closest gap narrows at every step, from 130 to about 51 millimeters. So: report methods tier by tier. (5:25)</a:t>
             </a:r>
             <a:endParaRPr lang="en-US" dirty="0"/>
           </a:p>
@@ -2291,7 +2291,7 @@
           <a:p>
             <a:r>
               <a:rPr lang="en-US" dirty="0"/>
-              <a:t>The second analysis is the one the generator could fail. Is the spacing realistic in a building it has never seen? The gap distribution was fitted on a residential duplex. We kept a second open building aside, a medical-dental clinic, cut it into sections every 250 millimeters, the way a context is defined, and measured the gaps between pipes running side by side. On the left, the clinic: generated gaps are close to measured ones, though not identical. On the right, the distances. Generator to clinic: 32 millimeters. That is above the 8 a perfect generator would show, so not a perfect match, but about as close as the duplex's own two models are to each other. A fixed 25-millimeter gap would be about 190 off. (5:40)</a:t>
+              <a:t>The second analysis is the one the generator could fail. Is the spacing realistic in a building it has never seen? The gap distribution was fitted on a residential duplex. We kept a second open building aside, a medical-dental clinic, cut it into sections every 250 millimeters, the way a context is defined, and measured the gaps between pipes running side by side. On the left, the clinic: generated gaps are close to measured ones, though not identical. On the right, the distances. Generator to clinic: 32 millimeters. That is above the 8 a perfect generator would show, so not a perfect match, but about as close as the duplex's own two models are to each other. A fixed 25-millimeter gap would be about 190 off. (6:00)</a:t>
             </a:r>
             <a:endParaRPr lang="en-US" dirty="0"/>
           </a:p>
@@ -2379,7 +2379,7 @@
           <a:p>
             <a:r>
               <a:rPr lang="en-US" dirty="0"/>
-              <a:t>The third analysis is a use of the dataset, not a test of it: what must a catalog of clamps cover? Our paper's two-size catalog attaches 14.5 percent of the pipes, with an interval of 13 to 16, all one size, DN40. Load is never the limit, and trays, ducts and conduits aren't covered at all. On the right is what the dataset asks of any catalog: two well-placed sizes could attach 38 percent, six sizes 76, fifteen sizes every pipe. So 'what should the catalog contain' becomes a measurement. (6:35)</a:t>
+              <a:t>The third analysis is a use of the dataset, not a test of it: what must a catalog of clamps cover? Our paper's two-size catalog attaches 14.5 percent of the pipes, with an interval of 13 to 16, all one size, DN40. Load is never the limit, and trays, ducts and conduits aren't covered at all. On the right is what the dataset asks of any catalog: two well-placed sizes could attach 38 percent, six sizes 76, fifteen sizes every pipe. So 'what should the catalog contain' becomes a measurement. (6:50)</a:t>
             </a:r>
             <a:endParaRPr lang="en-US" dirty="0"/>
           </a:p>
@@ -2467,7 +2467,7 @@
           <a:p>
             <a:r>
               <a:rPr lang="en-US" dirty="0"/>
-              <a:t>Let me show it. This is the Generator Studio. I choose what crosses the hanger, a tier or an exact mix, and a seed. Out comes the section a support designer receives, drawn the way an engineer would issue it: every service at true size, its level below the slab, its load, the closest clear gap, and the same run in 3D. Every section is a stored output of the released generator, with the Python call that reproduces it. Scan the code to try it yourself. [Live: switch to the studio, click C3, then Generate another twice, then Exact mix with a duct. If the demo fails, stay on this slide; slide 18 shows two more sections. Before the talk: open the studio once with internet, set its link sharing to public, scan the QR from a phone not logged in.] (7:10)</a:t>
+              <a:t>Let me show it. This is the Generator Studio. I choose what crosses the hanger, a tier or an exact mix, and a seed. Out comes the section a support designer receives, drawn the way an engineer would issue it: every service at true size, its level below the slab, its load, the closest clear gap, and the same run in 3D. Every section is a stored output of the released generator, with the Python call that reproduces it. Scan the code to try it yourself. [Live: switch to the studio, click C3, then Generate another twice, then Exact mix with a duct. If the demo fails, stay on this slide; slide 18 shows two more sections. Before the talk: open the studio once with internet, set its link sharing to public, scan the QR from a phone not logged in.] (7:25)</a:t>
             </a:r>
             <a:endParaRPr lang="en-US" dirty="0"/>
           </a:p>
@@ -2555,7 +2555,7 @@
           <a:p>
             <a:r>
               <a:rPr lang="en-US" dirty="0"/>
-              <a:t>Using it takes a few lines: load a split, filter by composition, or generate your own mix. Because there are no labels, the same files serve reinforcement learning, constraint programming, and benchmarking people. We ship the scoring too. Train on the generator, from C1 up to C8. Evaluate on the benchmark, the same 125 contexts per tier for every method. Report per tier, with 95 percent intervals and paired tests. (8:20)</a:t>
+              <a:t>Using it takes a few lines: load a split, filter by composition, or generate your own mix. Because there are no labels, the same files serve reinforcement learning, constraint programming, and benchmarking people. We ship the scoring too. Train on the generator, from C1 up to C8. Evaluate on the benchmark, the same 125 contexts per tier for every method. Report per tier, with 95 percent intervals and paired tests. (8:35)</a:t>
             </a:r>
             <a:endParaRPr lang="en-US" dirty="0"/>
           </a:p>
@@ -2643,7 +2643,7 @@
           <a:p>
             <a:r>
               <a:rPr lang="en-US" dirty="0"/>
-              <a:t>A word on scope. CrossMEP is one section at one support. Routing and branches are outside it, but the span is recorded, so a method can vary it. Pipe spacing was checked on two open buildings; the rest rests on practice and standards, and the trade mix is a design choice. It's not for structural design of real installations. Next: a public checker, with best-known costs, so we can compare methods on the answer; the catalog as an input; and a real test set from commercial projects, with supports designed by engineers. That's where I'd value your eye. (8:50)</a:t>
+              <a:t>A word on scope. CrossMEP is one section at one support. Routing and branches are outside it, but the span is recorded, so a method can vary it. Pipe spacing was checked on two open buildings; the rest rests on practice and standards, and the trade mix is a design choice. It's not for structural design of real installations. Next: a public checker, with best-known costs, so we can compare methods on the answer; the catalog as an input; and a real test set from commercial projects, with supports designed by engineers. That's where I'd value your eye. (9:05)</a:t>
             </a:r>
             <a:endParaRPr lang="en-US" dirty="0"/>
           </a:p>
@@ -2731,7 +2731,7 @@
           <a:p>
             <a:r>
               <a:rPr lang="en-US" dirty="0"/>
-              <a:t>To sum up: CrossMEP is the brief, not the answer. Seven thousand support-design problems, every constant sourced or declared a design choice, pipe spacing checked on two open buildings, and all of it open. If you coordinate services or design supports, try the studio and tell me what looks wrong. Thank you. (9:30)</a:t>
+              <a:t>To sum up: CrossMEP is the brief, not the answer. Seven thousand support-design problems, every constant sourced or declared a design choice, pipe spacing checked on two open buildings, and all of it open. If you coordinate services or design supports, try the studio and tell me what looks wrong. Thank you. (9:45)</a:t>
             </a:r>
             <a:endParaRPr lang="en-US" dirty="0"/>
           </a:p>
@@ -3435,7 +3435,7 @@
           <a:p>
             <a:r>
               <a:rPr lang="en-US" dirty="0"/>
-              <a:t>What would a method look like? One section in, verified supports out. Build the assembly step by step from a catalog, each step allowed by the rules and chosen by a rule table, by search, or by a learned policy; then check every finished design: statics, anchors, buildability. That is learnable. But anything that learns needs problems to learn from, a fixed set to compare on, and problems that look like practice. (1:40)</a:t>
+              <a:t>What would a method look like? Think of it as a pipeline. On the left, the brief: the context, and a catalog of parts with prices. The rules say which actions are legal in a given state; each action adds parts. In the middle, a black box chooses the next action. It could be a rule table, a search, or a learned policy; the pipeline doesn't care. A verifier judges every finished design, statics, anchors, buildability, and feeds pass or fail back. Out come verified designs, ranked by cost. Whatever sits in that black box, it needs problems to learn from, a fixed set to compare on, and problems that look like practice. (1:40)</a:t>
             </a:r>
             <a:endParaRPr lang="en-US" dirty="0"/>
           </a:p>
@@ -3523,7 +3523,7 @@
           <a:p>
             <a:r>
               <a:rPr lang="en-US" dirty="0"/>
-              <a:t>And there were none. Project models are proprietary, the open ones aren't organized around supports, and any one project is a narrow slice. So we built CrossMEP: seven thousand contexts, about thirty-one and a half thousand elements, in eight difficulty tiers. They are deliberately unlabeled: you get the problem, never the answer. Every constant is sourced or declared a design choice, and everything is open. (2:10)</a:t>
+              <a:t>And there were none. Project models are proprietary, the open ones aren't organized around supports, and any one project is a narrow slice. So we built CrossMEP: seven thousand contexts, about thirty-one and a half thousand elements, in eight difficulty tiers. They are deliberately unlabeled: you get the problem, never the answer. Every constant is sourced or declared a design choice, and everything is open. (2:30)</a:t>
             </a:r>
             <a:endParaRPr lang="en-US" dirty="0"/>
           </a:p>
@@ -3611,7 +3611,7 @@
           <a:p>
             <a:r>
               <a:rPr lang="en-US" dirty="0"/>
-              <a:t>Here's one context: a two-dimensional section at one support location. Each element has its kind, service and trade, its size, its insulation, and its load, which is weight per metre times the span it was sized at, plus its position. Add the surface, a slab or a wall, and that's all. What you won't find is the support: no channel, no rods, no anchors, and no correct answer, because a feasible support depends on the catalog you build from. The context is the brief. The assembly is the answer. (2:40)</a:t>
+              <a:t>Here's one context: a two-dimensional section at one support location. Each element has its kind, service and trade, its size, its insulation, and its load, which is weight per metre times the span it was sized at, plus its position. Add the surface, a slab or a wall, and that's all. What you won't find is the support: no channel, no rods, no anchors, and no correct answer, because a feasible support depends on the catalog you build from. The context is the brief. The assembly is the answer. (2:55)</a:t>
             </a:r>
             <a:endParaRPr lang="en-US" dirty="0"/>
           </a:p>
@@ -3699,7 +3699,7 @@
           <a:p>
             <a:r>
               <a:rPr lang="en-US" dirty="0"/>
-              <a:t>How do we make a context? Not by free randomness, but by rules an engineer would recognize. The tier fixes how many elements there are. We pick the surface and fill it the way trades really run services: hot and cold together, flow and return together, conduits in groups, bulky services nearest the slab. Gaps between neighbors are drawn from gaps measured on a built project, never below twenty-five millimeters. On walls, electrical stays above water. Every context is checked, and it's seeded: the same seed gives the same file, byte for byte. (3:15)</a:t>
+              <a:t>How do we make a context? Not by free randomness, but by rules an engineer would recognize. The tier fixes how many elements there are. We pick the surface and fill it the way trades really run services: hot and cold together, flow and return together, conduits in groups, bulky services nearest the slab. Gaps between neighbors are drawn from gaps measured on a built project, never below twenty-five millimeters. On walls, electrical stays above water. Every context is checked, and it's seeded: the same seed gives the same file, byte for byte. (3:35)</a:t>
             </a:r>
             <a:endParaRPr lang="en-US" dirty="0"/>
           </a:p>
@@ -3787,7 +3787,7 @@
           <a:p>
             <a:r>
               <a:rPr lang="en-US" dirty="0"/>
-              <a:t>Where do the numbers come from? Three places. Sizes, weights and spans come from standards: European steel pipe and duct standards, IEC for conduits and trays, ASME for spans, the German GEG for insulation. How close neighbors sit comes from measured open buildings. And a few things are simply our choices, like the trade mix, and we label them that way. Loads are computed in code from all of this. (3:55)</a:t>
+              <a:t>Where do the numbers come from? Three places. Sizes, weights and spans come from standards: European steel pipe and duct standards, IEC for conduits and trays, ASME for spans, the German GEG for insulation. How close neighbors sit comes from measured open buildings. And a few things are simply our choices, like the trade mix, and we label them that way. Loads are computed in code from all of this. (4:10)</a:t>
             </a:r>
             <a:endParaRPr lang="en-US" dirty="0"/>
           </a:p>
@@ -3875,7 +3875,7 @@
           <a:p>
             <a:r>
               <a:rPr lang="en-US" dirty="0"/>
-              <a:t>The release has four splits on disjoint seeds, so a method is never tested on what it trained on: five thousand contexts for training, five hundred each for validation and test, and a benchmark of one thousand, a hundred and twenty-five per tier. Everything is plain JSON with a schema and a datasheet. (4:25)</a:t>
+              <a:t>The release has four splits on disjoint seeds, so a method is never tested on what it trained on: five thousand contexts for training, five hundred each for validation and test, and a benchmark of one thousand, a hundred and twenty-five per tier. Everything is plain JSON with a schema and a datasheet. (4:40)</a:t>
             </a:r>
             <a:endParaRPr lang="en-US" dirty="0"/>
           </a:p>

--- a/docs/CrossMEP_CIBW78_talk.pptx
+++ b/docs/CrossMEP_CIBW78_talk.pptx
@@ -128,12 +128,12 @@
   <p:extLst>
     <p:ext uri="{521415D9-36F7-43E2-AB2F-B90AF26B5E84}">
       <p14:sectionLst xmlns:p14="http://schemas.microsoft.com/office/powerpoint/2010/main">
-        <p14:section name="Opening" id="{82ac0653-a41a-33f5-6b5d-37467d25163c}">
+        <p14:section name="Opening" id="{33e86e91-eb94-6cbe-144c-42cfe58cb314}">
           <p14:sldIdLst>
             <p14:sldId id="256"/>
           </p14:sldIdLst>
         </p14:section>
-        <p14:section name="Motivation" id="{46b6629c-60c0-9abe-1faf-a6dde6a84244}">
+        <p14:section name="Motivation" id="{94e6513c-1ec1-572f-b684-bba4e459683d}">
           <p14:sldIdLst>
             <p14:sldId id="257"/>
             <p14:sldId id="258"/>
@@ -141,7 +141,7 @@
             <p14:sldId id="260"/>
           </p14:sldIdLst>
         </p14:section>
-        <p14:section name="The dataset" id="{6988c8fc-c5a3-99f4-bc44-54b62fb8c7a5}">
+        <p14:section name="The dataset" id="{a91a8b79-35c9-7535-7bc1-952095e98f77}">
           <p14:sldIdLst>
             <p14:sldId id="261"/>
             <p14:sldId id="262"/>
@@ -150,14 +150,14 @@
             <p14:sldId id="265"/>
           </p14:sldIdLst>
         </p14:section>
-        <p14:section name="Experiments" id="{ae2329e8-53e4-c805-f436-cf41d0646b77}">
+        <p14:section name="Experiments" id="{97888156-51ef-126b-94f4-45f41495ceed}">
           <p14:sldIdLst>
             <p14:sldId id="266"/>
             <p14:sldId id="267"/>
             <p14:sldId id="268"/>
           </p14:sldIdLst>
         </p14:section>
-        <p14:section name="Use" id="{27d8e8a0-dfa3-6bd8-7c33-04245facefd1}">
+        <p14:section name="Use" id="{d4f1bc69-25fc-8912-6afa-b98367dec7c2}">
           <p14:sldIdLst>
             <p14:sldId id="269"/>
             <p14:sldId id="270"/>
@@ -165,7 +165,7 @@
             <p14:sldId id="272"/>
           </p14:sldIdLst>
         </p14:section>
-        <p14:section name="Appendix" id="{21758f25-c35d-d6c4-0388-29614f98d7cb}">
+        <p14:section name="Appendix" id="{d4ac16dd-8e3f-d33e-9fe4-27076ea172c9}">
           <p14:sldIdLst>
             <p14:sldId id="273"/>
             <p14:sldId id="274"/>
@@ -2115,7 +2115,7 @@
           <a:p>
             <a:r>
               <a:rPr lang="en-US" dirty="0"/>
-              <a:t>Here's one benchmark context per tier. C1 is a single element, the most common support in any building. By C8 you have eight services on three rows. Within a tier everything else varies: kinds, trades, surfaces, stacking. So the element count is the one controlled axis of difficulty. And notice the walls: the section rotates, and electrical sits above water. (5:00)</a:t>
+              <a:t>Here's one benchmark context per tier. C1 is a single element, the most common support in any building. By C8 you have eight services on three rows. Within a tier everything else varies: kinds, trades, surfaces, stacking. So the element count is the one controlled axis of difficulty. And notice the walls: the section rotates, and electrical sits above water. (4:55)</a:t>
             </a:r>
             <a:endParaRPr lang="en-US" dirty="0"/>
           </a:p>
@@ -2203,7 +2203,7 @@
           <a:p>
             <a:r>
               <a:rPr lang="en-US" dirty="0"/>
-              <a:t>Now three analyses. The first is a design check, not a discovery: does difficulty grow with the tier? The count is fixed by construction, and load and congestion follow from the rules, so this shows the dataset behaves as designed. The load at the support rises with the tier, from about 0.3 to 2.0 kilonewtons. The closest gap narrows at every step, from 130 to about 51 millimeters. So: report methods tier by tier. (5:25)</a:t>
+              <a:t>Now three analyses. The first is a design check, not a discovery: does difficulty grow with the tier? The count is fixed by construction, and load and congestion follow from the rules, so this shows the dataset behaves as designed. The load at the support rises with the tier, from about 0.3 to 2.0 kilonewtons. The closest gap narrows at every step, from 130 to about 51 millimeters. So: report methods tier by tier. (5:20)</a:t>
             </a:r>
             <a:endParaRPr lang="en-US" dirty="0"/>
           </a:p>
@@ -2291,7 +2291,7 @@
           <a:p>
             <a:r>
               <a:rPr lang="en-US" dirty="0"/>
-              <a:t>The second analysis is the one the generator could fail. Is the spacing realistic in a building it has never seen? The gap distribution was fitted on a residential duplex. We kept a second open building aside, a medical-dental clinic, cut it into sections every 250 millimeters, the way a context is defined, and measured the gaps between pipes running side by side. On the left, the clinic: generated gaps are close to measured ones, though not identical. On the right, the distances. Generator to clinic: 32 millimeters. That is above the 8 a perfect generator would show, so not a perfect match, but about as close as the duplex's own two models are to each other. A fixed 25-millimeter gap would be about 190 off. (6:00)</a:t>
+              <a:t>The second analysis is the one the generator could fail. Is the spacing realistic in a building it has never seen? The gap distribution was fitted on a residential duplex. We kept a second open building aside, a medical-dental clinic, cut it into sections every 250 millimeters, the way a context is defined, and measured the gaps between pipes running side by side. On the right, the distances. Generator to clinic: 32 millimeters. That is above the 8 a perfect generator would show, so not a perfect match, but about as close as the duplex's own two models are to each other. A fixed 25-millimeter gap would be about 190 off. (5:50)</a:t>
             </a:r>
             <a:endParaRPr lang="en-US" dirty="0"/>
           </a:p>
@@ -2379,7 +2379,7 @@
           <a:p>
             <a:r>
               <a:rPr lang="en-US" dirty="0"/>
-              <a:t>The third analysis is a use of the dataset, not a test of it: what must a catalog of clamps cover? Our paper's two-size catalog attaches 14.5 percent of the pipes, with an interval of 13 to 16, all one size, DN40. Load is never the limit, and trays, ducts and conduits aren't covered at all. On the right is what the dataset asks of any catalog: two well-placed sizes could attach 38 percent, six sizes 76, fifteen sizes every pipe. So 'what should the catalog contain' becomes a measurement. (6:50)</a:t>
+              <a:t>The third analysis is a use of the dataset, not a test of it: what must a catalog of clamps cover? Our paper's two-size catalog attaches 14.5 percent of the pipes, with an interval of 13 to 16, all one size, DN40. Load is never the limit, and trays, ducts and conduits aren't covered at all. On the right is what the dataset asks of any catalog: two well-placed sizes could attach 38 percent, six sizes 76, fifteen sizes every pipe. So 'what should the catalog contain' becomes a measurement. (6:35)</a:t>
             </a:r>
             <a:endParaRPr lang="en-US" dirty="0"/>
           </a:p>
@@ -2467,7 +2467,7 @@
           <a:p>
             <a:r>
               <a:rPr lang="en-US" dirty="0"/>
-              <a:t>Let me show it. This is the Generator Studio. I choose what crosses the hanger, a tier or an exact mix, and a seed. Out comes the section a support designer receives, drawn the way an engineer would issue it: every service at true size, its level below the slab, its load, the closest clear gap, and the same run in 3D. Every section is a stored output of the released generator, with the Python call that reproduces it. Scan the code to try it yourself. [Live: switch to the studio, click C3, then Generate another twice, then Exact mix with a duct. If the demo fails, stay on this slide; slide 18 shows two more sections. Before the talk: open the studio once with internet, set its link sharing to public, scan the QR from a phone not logged in.] (7:25)</a:t>
+              <a:t>Let me show it. This is the Generator Studio. I choose what crosses the hanger, a tier or an exact mix, and a seed. Out comes the section a support designer receives, drawn the way an engineer would issue it: every service at true size, its level below the slab, its load, the closest clear gap, and the same run in 3D. Every section is a stored output of the released generator, with the Python call that reproduces it. Scan the code to try it yourself. [Live: switch to the studio, click C3, then Generate another twice, then Exact mix with a duct. If the demo fails, stay on this slide; slide 18 shows two more sections. Before the talk: open the studio once with internet, set its link sharing to public, scan the QR from a phone not logged in.] (7:15)</a:t>
             </a:r>
             <a:endParaRPr lang="en-US" dirty="0"/>
           </a:p>
@@ -2555,7 +2555,7 @@
           <a:p>
             <a:r>
               <a:rPr lang="en-US" dirty="0"/>
-              <a:t>Using it takes a few lines: load a split, filter by composition, or generate your own mix. Because there are no labels, the same files serve reinforcement learning, constraint programming, and benchmarking people. We ship the scoring too. Train on the generator, from C1 up to C8. Evaluate on the benchmark, the same 125 contexts per tier for every method. Report per tier, with 95 percent intervals and paired tests. (8:35)</a:t>
+              <a:t>Using it takes a few lines: load a split, filter by composition, or generate your own mix. Because there are no labels, the same files serve reinforcement learning, constraint programming, and benchmarking people. We ship the scoring too. Train on the generator, from C1 up to C8. Evaluate on the benchmark, the same 125 contexts per tier for every method. Report per tier, with 95 percent intervals and paired tests. (8:25)</a:t>
             </a:r>
             <a:endParaRPr lang="en-US" dirty="0"/>
           </a:p>
@@ -2643,7 +2643,7 @@
           <a:p>
             <a:r>
               <a:rPr lang="en-US" dirty="0"/>
-              <a:t>A word on scope. CrossMEP is one section at one support. Routing and branches are outside it, but the span is recorded, so a method can vary it. Pipe spacing was checked on two open buildings; the rest rests on practice and standards, and the trade mix is a design choice. It's not for structural design of real installations. Next: a public checker, with best-known costs, so we can compare methods on the answer; the catalog as an input; and a real test set from commercial projects, with supports designed by engineers. That's where I'd value your eye. (9:05)</a:t>
+              <a:t>A word on scope. CrossMEP is one section at one support. Pipe spacing was checked on two open buildings; the rest rests on practice and standards, and the trade mix is a design choice. It's not for structural design of real installations. Next: a public checker, with best-known costs, so we can compare methods on the answer; the catalog as an input; and a real test set from commercial projects, with supports designed by engineers. That's where I'd value your eye. (8:55)</a:t>
             </a:r>
             <a:endParaRPr lang="en-US" dirty="0"/>
           </a:p>
@@ -2731,7 +2731,7 @@
           <a:p>
             <a:r>
               <a:rPr lang="en-US" dirty="0"/>
-              <a:t>To sum up: CrossMEP is the brief, not the answer. Seven thousand support-design problems, every constant sourced or declared a design choice, pipe spacing checked on two open buildings, and all of it open. If you coordinate services or design supports, try the studio and tell me what looks wrong. Thank you. (9:45)</a:t>
+              <a:t>To sum up: CrossMEP is the brief, not the answer. Seven thousand support-design problems, every constant sourced or declared a design choice, pipe spacing checked on two open buildings, and all of it open. If you coordinate services or design supports, try the studio and tell me what looks wrong. Thank you. (9:25)</a:t>
             </a:r>
             <a:endParaRPr lang="en-US" dirty="0"/>
           </a:p>
@@ -3435,7 +3435,7 @@
           <a:p>
             <a:r>
               <a:rPr lang="en-US" dirty="0"/>
-              <a:t>What would a method look like? Think of it as a pipeline. On the left, the brief: the context, and a catalog of parts with prices. The rules say which actions are legal in a given state; each action adds parts. In the middle, a black box chooses the next action. It could be a rule table, a search, or a learned policy; the pipeline doesn't care. A verifier judges every finished design, statics, anchors, buildability, and feeds pass or fail back. Out come verified designs, ranked by cost. Whatever sits in that black box, it needs problems to learn from, a fixed set to compare on, and problems that look like practice. (1:40)</a:t>
+              <a:t>What would a method look like? On the left, the brief: the context, and a catalog of parts with prices. The rules say which actions are legal; each action adds parts. In the middle, a black box chooses the next action: a rule table, a search, or a learned policy. A verifier judges every finished design, statics, anchors, buildability, and feeds pass or fail back. Out come verified designs, ranked by cost. Whatever sits in that black box, it needs problems to learn from, a fixed set to compare on, and problems that look like practice. (1:40)</a:t>
             </a:r>
             <a:endParaRPr lang="en-US" dirty="0"/>
           </a:p>
@@ -3523,7 +3523,7 @@
           <a:p>
             <a:r>
               <a:rPr lang="en-US" dirty="0"/>
-              <a:t>And there were none. Project models are proprietary, the open ones aren't organized around supports, and any one project is a narrow slice. So we built CrossMEP: seven thousand contexts, about thirty-one and a half thousand elements, in eight difficulty tiers. They are deliberately unlabeled: you get the problem, never the answer. Every constant is sourced or declared a design choice, and everything is open. (2:30)</a:t>
+              <a:t>And there were none. Project models are proprietary, the open ones aren't organized around supports, and any one project is a narrow slice. So we built CrossMEP: seven thousand contexts, about thirty-one and a half thousand elements, in eight difficulty tiers. They are deliberately unlabeled: you get the problem, never the answer. Every constant is sourced or declared a design choice, and everything is open. (2:20)</a:t>
             </a:r>
             <a:endParaRPr lang="en-US" dirty="0"/>
           </a:p>
@@ -3611,7 +3611,7 @@
           <a:p>
             <a:r>
               <a:rPr lang="en-US" dirty="0"/>
-              <a:t>Here's one context: a two-dimensional section at one support location. Each element has its kind, service and trade, its size, its insulation, and its load, which is weight per metre times the span it was sized at, plus its position. Add the surface, a slab or a wall, and that's all. What you won't find is the support: no channel, no rods, no anchors, and no correct answer, because a feasible support depends on the catalog you build from. The context is the brief. The assembly is the answer. (2:55)</a:t>
+              <a:t>Here's one context: a two-dimensional section at one support location. Each element has its kind, service and trade, its size, its insulation, and its load, which is weight per metre times the span it was sized at, plus its position. Add the surface, a slab or a wall, and that's all. What you won't find is the support: no channel, no rods, no anchors, and no correct answer, because a feasible support depends on the catalog you build from. The context is the brief. The assembly is the answer. (2:50)</a:t>
             </a:r>
             <a:endParaRPr lang="en-US" dirty="0"/>
           </a:p>
@@ -3699,7 +3699,7 @@
           <a:p>
             <a:r>
               <a:rPr lang="en-US" dirty="0"/>
-              <a:t>How do we make a context? Not by free randomness, but by rules an engineer would recognize. The tier fixes how many elements there are. We pick the surface and fill it the way trades really run services: hot and cold together, flow and return together, conduits in groups, bulky services nearest the slab. Gaps between neighbors are drawn from gaps measured on a built project, never below twenty-five millimeters. On walls, electrical stays above water. Every context is checked, and it's seeded: the same seed gives the same file, byte for byte. (3:35)</a:t>
+              <a:t>How do we make a context? Not by free randomness, but by rules an engineer would recognize. The tier fixes how many elements there are. We pick the surface and fill it the way trades really run services: hot and cold together, flow and return together, conduits in groups, bulky services nearest the slab. Gaps between neighbors are drawn from gaps measured on a built project, never below twenty-five millimeters. On walls, electrical stays above water. Every context is checked, and it's seeded: the same seed gives the same file, byte for byte. (3:25)</a:t>
             </a:r>
             <a:endParaRPr lang="en-US" dirty="0"/>
           </a:p>
@@ -3787,7 +3787,7 @@
           <a:p>
             <a:r>
               <a:rPr lang="en-US" dirty="0"/>
-              <a:t>Where do the numbers come from? Three places. Sizes, weights and spans come from standards: European steel pipe and duct standards, IEC for conduits and trays, ASME for spans, the German GEG for insulation. How close neighbors sit comes from measured open buildings. And a few things are simply our choices, like the trade mix, and we label them that way. Loads are computed in code from all of this. (4:10)</a:t>
+              <a:t>Where do the numbers come from? Three places. Sizes, weights and spans come from standards: European steel pipe and duct standards, IEC for conduits and trays, ASME for spans, the German GEG for insulation. How close neighbors sit comes from measured open buildings. And a few things are simply our choices, like the trade mix, and we label them that way. Loads are computed in code from all of this. (4:05)</a:t>
             </a:r>
             <a:endParaRPr lang="en-US" dirty="0"/>
           </a:p>
@@ -3875,7 +3875,7 @@
           <a:p>
             <a:r>
               <a:rPr lang="en-US" dirty="0"/>
-              <a:t>The release has four splits on disjoint seeds, so a method is never tested on what it trained on: five thousand contexts for training, five hundred each for validation and test, and a benchmark of one thousand, a hundred and twenty-five per tier. Everything is plain JSON with a schema and a datasheet. (4:40)</a:t>
+              <a:t>The release has four splits on disjoint seeds, so a method is never tested on what it trained on: five thousand contexts for training, five hundred each for validation and test, and a benchmark of one thousand, a hundred and twenty-five per tier. Everything is plain JSON with a schema and a datasheet. (4:35)</a:t>
             </a:r>
             <a:endParaRPr lang="en-US" dirty="0"/>
           </a:p>

--- a/docs/CrossMEP_CIBW78_talk.pptx
+++ b/docs/CrossMEP_CIBW78_talk.pptx
@@ -128,12 +128,12 @@
   <p:extLst>
     <p:ext uri="{521415D9-36F7-43E2-AB2F-B90AF26B5E84}">
       <p14:sectionLst xmlns:p14="http://schemas.microsoft.com/office/powerpoint/2010/main">
-        <p14:section name="Opening" id="{33e86e91-eb94-6cbe-144c-42cfe58cb314}">
+        <p14:section name="Opening" id="{69f9f7ff-88d0-815e-977e-921b4825ca9d}">
           <p14:sldIdLst>
             <p14:sldId id="256"/>
           </p14:sldIdLst>
         </p14:section>
-        <p14:section name="Motivation" id="{94e6513c-1ec1-572f-b684-bba4e459683d}">
+        <p14:section name="Motivation" id="{f59603e7-eb3f-e8b0-ae36-1d4d9780f69b}">
           <p14:sldIdLst>
             <p14:sldId id="257"/>
             <p14:sldId id="258"/>
@@ -141,7 +141,7 @@
             <p14:sldId id="260"/>
           </p14:sldIdLst>
         </p14:section>
-        <p14:section name="The dataset" id="{a91a8b79-35c9-7535-7bc1-952095e98f77}">
+        <p14:section name="The dataset" id="{8635cb3a-0985-fac6-02e0-9ef048966470}">
           <p14:sldIdLst>
             <p14:sldId id="261"/>
             <p14:sldId id="262"/>
@@ -150,14 +150,14 @@
             <p14:sldId id="265"/>
           </p14:sldIdLst>
         </p14:section>
-        <p14:section name="Experiments" id="{97888156-51ef-126b-94f4-45f41495ceed}">
+        <p14:section name="Experiments" id="{8126c942-6515-c622-7dd8-4dcdd1accb35}">
           <p14:sldIdLst>
             <p14:sldId id="266"/>
             <p14:sldId id="267"/>
             <p14:sldId id="268"/>
           </p14:sldIdLst>
         </p14:section>
-        <p14:section name="Use" id="{d4f1bc69-25fc-8912-6afa-b98367dec7c2}">
+        <p14:section name="Use" id="{9fb13e76-6dd3-4563-fbd1-2c6290d770dc}">
           <p14:sldIdLst>
             <p14:sldId id="269"/>
             <p14:sldId id="270"/>
@@ -165,7 +165,7 @@
             <p14:sldId id="272"/>
           </p14:sldIdLst>
         </p14:section>
-        <p14:section name="Appendix" id="{d4ac16dd-8e3f-d33e-9fe4-27076ea172c9}">
+        <p14:section name="Appendix" id="{ec553587-b12e-489b-0c3a-57873fd6345d}">
           <p14:sldIdLst>
             <p14:sldId id="273"/>
             <p14:sldId id="274"/>
@@ -2115,7 +2115,7 @@
           <a:p>
             <a:r>
               <a:rPr lang="en-US" dirty="0"/>
-              <a:t>Here's one benchmark context per tier. C1 is a single element, the most common support in any building. By C8 you have eight services on three rows. Within a tier everything else varies: kinds, trades, surfaces, stacking. So the element count is the one controlled axis of difficulty. And notice the walls: the section rotates, and electrical sits above water. (4:55)</a:t>
+              <a:t>Here's one benchmark context per tier. C1 is a single element, the most common support in any building. By C8 you have eight services on three rows. Within a tier everything else varies: kinds, trades, surfaces, stacking. So the element count is the one controlled axis of difficulty. And notice the walls: the section rotates, and electrical sits above water. (5:05)</a:t>
             </a:r>
             <a:endParaRPr lang="en-US" dirty="0"/>
           </a:p>
@@ -2203,7 +2203,7 @@
           <a:p>
             <a:r>
               <a:rPr lang="en-US" dirty="0"/>
-              <a:t>Now three analyses. The first is a design check, not a discovery: does difficulty grow with the tier? The count is fixed by construction, and load and congestion follow from the rules, so this shows the dataset behaves as designed. The load at the support rises with the tier, from about 0.3 to 2.0 kilonewtons. The closest gap narrows at every step, from 130 to about 51 millimeters. So: report methods tier by tier. (5:20)</a:t>
+              <a:t>Now three analyses. The first is a design check, not a discovery: does difficulty grow with the tier? The count is fixed by construction, and load and congestion follow from the rules, so this shows the dataset behaves as designed. The load at the support rises with the tier, from about 0.3 to 2.0 kilonewtons. The closest gap narrows at every step, from 130 to about 51 millimeters. So: report methods tier by tier. (5:30)</a:t>
             </a:r>
             <a:endParaRPr lang="en-US" dirty="0"/>
           </a:p>
@@ -2291,7 +2291,7 @@
           <a:p>
             <a:r>
               <a:rPr lang="en-US" dirty="0"/>
-              <a:t>The second analysis is the one the generator could fail. Is the spacing realistic in a building it has never seen? The gap distribution was fitted on a residential duplex. We kept a second open building aside, a medical-dental clinic, cut it into sections every 250 millimeters, the way a context is defined, and measured the gaps between pipes running side by side. On the right, the distances. Generator to clinic: 32 millimeters. That is above the 8 a perfect generator would show, so not a perfect match, but about as close as the duplex's own two models are to each other. A fixed 25-millimeter gap would be about 190 off. (5:50)</a:t>
+              <a:t>The second analysis is the one the generator could fail. Is the spacing realistic in a building it has never seen? The gap distribution was fitted on a residential duplex. We kept a second open building aside, a medical-dental clinic, cut it into sections every 250 millimeters, the way a context is defined, and measured the gaps between pipes running side by side. On the right, the distances. Generator to clinic: 32 millimeters. That is above the 8 a perfect generator would show, so not a perfect match, but about as close as the duplex's own two models are to each other. A fixed 25-millimeter gap would be about 190 off. (6:00)</a:t>
             </a:r>
             <a:endParaRPr lang="en-US" dirty="0"/>
           </a:p>
@@ -2379,7 +2379,7 @@
           <a:p>
             <a:r>
               <a:rPr lang="en-US" dirty="0"/>
-              <a:t>The third analysis is a use of the dataset, not a test of it: what must a catalog of clamps cover? Our paper's two-size catalog attaches 14.5 percent of the pipes, with an interval of 13 to 16, all one size, DN40. Load is never the limit, and trays, ducts and conduits aren't covered at all. On the right is what the dataset asks of any catalog: two well-placed sizes could attach 38 percent, six sizes 76, fifteen sizes every pipe. So 'what should the catalog contain' becomes a measurement. (6:35)</a:t>
+              <a:t>The third analysis is a use of the dataset, not a test of it: what must a catalog of clamps cover? Our paper's two-size catalog attaches 14.5 percent of the pipes, with an interval of 13 to 16, all one size, DN40. Load is never the limit, and trays, ducts and conduits aren't covered at all. On the right is what the dataset asks of any catalog: two well-placed sizes could attach 38 percent, six sizes 76, fifteen sizes every pipe. So 'what should the catalog contain' becomes a measurement. (6:45)</a:t>
             </a:r>
             <a:endParaRPr lang="en-US" dirty="0"/>
           </a:p>
@@ -2467,7 +2467,7 @@
           <a:p>
             <a:r>
               <a:rPr lang="en-US" dirty="0"/>
-              <a:t>Let me show it. This is the Generator Studio. I choose what crosses the hanger, a tier or an exact mix, and a seed. Out comes the section a support designer receives, drawn the way an engineer would issue it: every service at true size, its level below the slab, its load, the closest clear gap, and the same run in 3D. Every section is a stored output of the released generator, with the Python call that reproduces it. Scan the code to try it yourself. [Live: switch to the studio, click C3, then Generate another twice, then Exact mix with a duct. If the demo fails, stay on this slide; slide 18 shows two more sections. Before the talk: open the studio once with internet, set its link sharing to public, scan the QR from a phone not logged in.] (7:15)</a:t>
+              <a:t>Let me show it. This is the Generator Studio. I choose what crosses the hanger, a tier or an exact mix, and a seed. Out comes the section a support designer receives, drawn the way an engineer would issue it: every service at true size, its level below the slab, its load, the closest clear gap, and the same run in 3D. Every section is a stored output of the released generator, with the Python call that reproduces it. Scan the code to try it yourself. [Live: switch to the studio, click C3, then Generate another twice, then Exact mix with a duct. If the demo fails, stay on this slide; slide 18 shows two more sections. Before the talk: open the studio once with internet, set its link sharing to public, scan the QR from a phone not logged in.] (7:20)</a:t>
             </a:r>
             <a:endParaRPr lang="en-US" dirty="0"/>
           </a:p>
@@ -2555,7 +2555,7 @@
           <a:p>
             <a:r>
               <a:rPr lang="en-US" dirty="0"/>
-              <a:t>Using it takes a few lines: load a split, filter by composition, or generate your own mix. Because there are no labels, the same files serve reinforcement learning, constraint programming, and benchmarking people. We ship the scoring too. Train on the generator, from C1 up to C8. Evaluate on the benchmark, the same 125 contexts per tier for every method. Report per tier, with 95 percent intervals and paired tests. (8:25)</a:t>
+              <a:t>Using it takes a few lines: load a split, filter by composition, or generate your own mix. Because there are no labels, the same files serve reinforcement learning, constraint programming, and benchmarking people. We ship the scoring too. Train on the generator, from C1 up to C8. Evaluate on the benchmark, the same 125 contexts per tier for every method. Report per tier, with 95 percent intervals and paired tests. (8:35)</a:t>
             </a:r>
             <a:endParaRPr lang="en-US" dirty="0"/>
           </a:p>
@@ -2643,7 +2643,7 @@
           <a:p>
             <a:r>
               <a:rPr lang="en-US" dirty="0"/>
-              <a:t>A word on scope. CrossMEP is one section at one support. Pipe spacing was checked on two open buildings; the rest rests on practice and standards, and the trade mix is a design choice. It's not for structural design of real installations. Next: a public checker, with best-known costs, so we can compare methods on the answer; the catalog as an input; and a real test set from commercial projects, with supports designed by engineers. That's where I'd value your eye. (8:55)</a:t>
+              <a:t>A word on scope. CrossMEP is one section at one support. Pipe spacing was checked on two open buildings; the rest rests on practice and standards, and the trade mix is a design choice. It's not for structural design of real installations. Next: a public checker, with best-known costs, so we can compare methods on the answer; the catalog as an input; and a real test set from commercial projects, with supports designed by engineers. That's where I'd value your eye. (9:00)</a:t>
             </a:r>
             <a:endParaRPr lang="en-US" dirty="0"/>
           </a:p>
@@ -2731,7 +2731,7 @@
           <a:p>
             <a:r>
               <a:rPr lang="en-US" dirty="0"/>
-              <a:t>To sum up: CrossMEP is the brief, not the answer. Seven thousand support-design problems, every constant sourced or declared a design choice, pipe spacing checked on two open buildings, and all of it open. If you coordinate services or design supports, try the studio and tell me what looks wrong. Thank you. (9:25)</a:t>
+              <a:t>To sum up: CrossMEP is the brief, not the answer. Seven thousand support-design problems, every constant sourced or declared a design choice, pipe spacing checked on two open buildings, and all of it open. If you coordinate services or design supports, try the studio and tell me what looks wrong. Thank you. (9:35)</a:t>
             </a:r>
             <a:endParaRPr lang="en-US" dirty="0"/>
           </a:p>
@@ -3523,7 +3523,7 @@
           <a:p>
             <a:r>
               <a:rPr lang="en-US" dirty="0"/>
-              <a:t>And there were none. Project models are proprietary, the open ones aren't organized around supports, and any one project is a narrow slice. So we built CrossMEP: seven thousand contexts, about thirty-one and a half thousand elements, in eight difficulty tiers. They are deliberately unlabeled: you get the problem, never the answer. Every constant is sourced or declared a design choice, and everything is open. (2:20)</a:t>
+              <a:t>Here is the idea behind CrossMEP. The real designs we had were few, and they sat in one corner of the design space: one kind of project, one trade mix. A method tuned to them measures fit to that project, and project models are proprietary anyway. So we generate. CrossMEP covers the space by construction: uniform over the tiers, or shaped to whatever mix you ask for. Seven thousand contexts in eight tiers, deliberately unlabeled, every constant sourced or declared, and all of it open. (2:20)</a:t>
             </a:r>
             <a:endParaRPr lang="en-US" dirty="0"/>
           </a:p>
@@ -3611,7 +3611,7 @@
           <a:p>
             <a:r>
               <a:rPr lang="en-US" dirty="0"/>
-              <a:t>Here's one context: a two-dimensional section at one support location. Each element has its kind, service and trade, its size, its insulation, and its load, which is weight per metre times the span it was sized at, plus its position. Add the surface, a slab or a wall, and that's all. What you won't find is the support: no channel, no rods, no anchors, and no correct answer, because a feasible support depends on the catalog you build from. The context is the brief. The assembly is the answer. (2:50)</a:t>
+              <a:t>Here's one context: a two-dimensional section at one support location. Each element has its kind, service and trade, its size, its insulation, and its load, which is weight per metre times the span it was sized at, plus its position. Add the surface, a slab or a wall, and that's all. What you won't find is the support: no channel, no rods, no anchors, and no correct answer, because a feasible support depends on the catalog you build from. The context is the brief. The assembly is the answer. (2:55)</a:t>
             </a:r>
             <a:endParaRPr lang="en-US" dirty="0"/>
           </a:p>
@@ -3699,7 +3699,7 @@
           <a:p>
             <a:r>
               <a:rPr lang="en-US" dirty="0"/>
-              <a:t>How do we make a context? Not by free randomness, but by rules an engineer would recognize. The tier fixes how many elements there are. We pick the surface and fill it the way trades really run services: hot and cold together, flow and return together, conduits in groups, bulky services nearest the slab. Gaps between neighbors are drawn from gaps measured on a built project, never below twenty-five millimeters. On walls, electrical stays above water. Every context is checked, and it's seeded: the same seed gives the same file, byte for byte. (3:25)</a:t>
+              <a:t>How do we make a context? Not by free randomness, but by rules an engineer would recognize. The tier fixes how many elements there are. We pick the surface and fill it the way trades really run services: hot and cold together, flow and return together, conduits in groups, bulky services nearest the slab. Gaps between neighbors are drawn from gaps measured on a built project, never below twenty-five millimeters. On walls, electrical stays above water. Every context is checked, and it's seeded: the same seed gives the same file, byte for byte. (3:35)</a:t>
             </a:r>
             <a:endParaRPr lang="en-US" dirty="0"/>
           </a:p>
@@ -3787,7 +3787,7 @@
           <a:p>
             <a:r>
               <a:rPr lang="en-US" dirty="0"/>
-              <a:t>Where do the numbers come from? Three places. Sizes, weights and spans come from standards: European steel pipe and duct standards, IEC for conduits and trays, ASME for spans, the German GEG for insulation. How close neighbors sit comes from measured open buildings. And a few things are simply our choices, like the trade mix, and we label them that way. Loads are computed in code from all of this. (4:05)</a:t>
+              <a:t>Where do the numbers come from? Three places. Sizes, weights and spans come from standards: European steel pipe and duct standards, IEC for conduits and trays, ASME for spans, the German GEG for insulation. How close neighbors sit comes from measured open buildings. And a few things are simply our choices, like the trade mix, and we label them that way. Loads are computed in code from all of this. (4:10)</a:t>
             </a:r>
             <a:endParaRPr lang="en-US" dirty="0"/>
           </a:p>
@@ -3875,7 +3875,7 @@
           <a:p>
             <a:r>
               <a:rPr lang="en-US" dirty="0"/>
-              <a:t>The release has four splits on disjoint seeds, so a method is never tested on what it trained on: five thousand contexts for training, five hundred each for validation and test, and a benchmark of one thousand, a hundred and twenty-five per tier. Everything is plain JSON with a schema and a datasheet. (4:35)</a:t>
+              <a:t>The release has four splits on disjoint seeds, so a method is never tested on what it trained on: five thousand contexts for training, five hundred each for validation and test, and a benchmark of one thousand, a hundred and twenty-five per tier. Everything is plain JSON with a schema and a datasheet. (4:40)</a:t>
             </a:r>
             <a:endParaRPr lang="en-US" dirty="0"/>
           </a:p>
@@ -22842,7 +22842,7 @@
                   <a:schemeClr val="tx1"/>
                 </a:solidFill>
               </a:rPr>
-              <a:t>Learning to design supports needs many problems, and none were public</a:t>
+              <a:t>Real designs cover one corner of the design space; CrossMEP covers all of it</a:t>
             </a:r>
             <a:endParaRPr lang="en-US" sz="2600" dirty="0"/>
           </a:p>
@@ -22850,14 +22850,528 @@
       </p:sp>
       <p:sp>
         <p:nvSpPr>
-          <p:cNvPr id="3" name="why heading"/>
+          <p:cNvPr id="3" name="space real"/>
+          <p:cNvSpPr/>
+          <p:nvPr/>
+        </p:nvSpPr>
+        <p:spPr>
+          <a:xfrm>
+            <a:off x="548640" y="1371600"/>
+            <a:ext cx="5212080" cy="2103120"/>
+          </a:xfrm>
+          <a:prstGeom prst="roundRect">
+            <a:avLst>
+              <a:gd name="adj" fmla="val 3043"/>
+            </a:avLst>
+          </a:prstGeom>
+          <a:solidFill>
+            <a:schemeClr val="bg2"/>
+          </a:solidFill>
+          <a:ln/>
+        </p:spPr>
+      </p:sp>
+      <p:sp>
+        <p:nvSpPr>
+          <p:cNvPr id="4" name="space head real"/>
           <p:cNvSpPr txBox="1"/>
           <p:nvPr/>
         </p:nvSpPr>
         <p:spPr>
           <a:xfrm>
-            <a:off x="548640" y="1371600"/>
-            <a:ext cx="4937760" cy="365760"/>
+            <a:off x="731520" y="1481328"/>
+            <a:ext cx="4846320" cy="566928"/>
+          </a:xfrm>
+          <a:prstGeom prst="rect">
+            <a:avLst/>
+          </a:prstGeom>
+          <a:noFill/>
+          <a:ln/>
+        </p:spPr>
+        <p:txBody>
+          <a:bodyPr wrap="square" lIns="0" tIns="0" rIns="0" bIns="0" rtlCol="0" anchor="t"/>
+          <a:lstStyle/>
+          <a:p>
+            <a:pPr indent="0" marL="0">
+              <a:buNone/>
+            </a:pPr>
+            <a:r>
+              <a:rPr lang="en-US" sz="1400" b="1" dirty="0">
+                <a:solidFill>
+                  <a:schemeClr val="tx1"/>
+                </a:solidFill>
+              </a:rPr>
+              <a:t>The real designs we had</a:t>
+            </a:r>
+            <a:endParaRPr lang="en-US" sz="1400" dirty="0"/>
+          </a:p>
+          <a:p>
+            <a:pPr indent="0" marL="0">
+              <a:buNone/>
+            </a:pPr>
+            <a:r>
+              <a:rPr lang="en-US" sz="1150" dirty="0">
+                <a:solidFill>
+                  <a:srgbClr val="52514E"/>
+                </a:solidFill>
+              </a:rPr>
+              <a:t>few, from one kind of project with one trade mix: one corner of the space</a:t>
+            </a:r>
+            <a:endParaRPr lang="en-US" sz="1400" dirty="0"/>
+          </a:p>
+        </p:txBody>
+      </p:sp>
+      <p:sp>
+        <p:nvSpPr>
+          <p:cNvPr id="5" name="x axis real"/>
+          <p:cNvSpPr/>
+          <p:nvPr/>
+        </p:nvSpPr>
+        <p:spPr>
+          <a:xfrm>
+            <a:off x="1051560" y="3063240"/>
+            <a:ext cx="4480560" cy="0"/>
+          </a:xfrm>
+          <a:prstGeom prst="line">
+            <a:avLst/>
+          </a:prstGeom>
+          <a:noFill/>
+          <a:ln w="12700">
+            <a:solidFill>
+              <a:srgbClr val="52514E"/>
+            </a:solidFill>
+            <a:prstDash val="solid"/>
+            <a:tailEnd type="triangle"/>
+          </a:ln>
+        </p:spPr>
+      </p:sp>
+      <p:sp>
+        <p:nvSpPr>
+          <p:cNvPr id="6" name="y axis real"/>
+          <p:cNvSpPr/>
+          <p:nvPr/>
+        </p:nvSpPr>
+        <p:spPr>
+          <a:xfrm>
+            <a:off x="1051560" y="2148840"/>
+            <a:ext cx="0" cy="914400"/>
+          </a:xfrm>
+          <a:prstGeom prst="line">
+            <a:avLst/>
+          </a:prstGeom>
+          <a:noFill/>
+          <a:ln w="12700">
+            <a:solidFill>
+              <a:srgbClr val="52514E"/>
+            </a:solidFill>
+            <a:prstDash val="solid"/>
+            <a:headEnd type="triangle"/>
+          </a:ln>
+        </p:spPr>
+      </p:sp>
+      <p:sp>
+        <p:nvSpPr>
+          <p:cNvPr id="7" name="x label real"/>
+          <p:cNvSpPr txBox="1"/>
+          <p:nvPr/>
+        </p:nvSpPr>
+        <p:spPr>
+          <a:xfrm>
+            <a:off x="1051560" y="3090672"/>
+            <a:ext cx="4480560" cy="228600"/>
+          </a:xfrm>
+          <a:prstGeom prst="rect">
+            <a:avLst/>
+          </a:prstGeom>
+          <a:noFill/>
+          <a:ln/>
+        </p:spPr>
+        <p:txBody>
+          <a:bodyPr wrap="square" lIns="0" tIns="0" rIns="0" bIns="0" rtlCol="0" anchor="ctr"/>
+          <a:lstStyle/>
+          <a:p>
+            <a:pPr algn="ctr" indent="0" marL="0">
+              <a:buNone/>
+            </a:pPr>
+            <a:r>
+              <a:rPr lang="en-US" sz="1000" dirty="0">
+                <a:solidFill>
+                  <a:srgbClr val="52514E"/>
+                </a:solidFill>
+              </a:rPr>
+              <a:t>elements at the hanger: 1 … 8</a:t>
+            </a:r>
+            <a:endParaRPr lang="en-US" sz="1000" dirty="0"/>
+          </a:p>
+        </p:txBody>
+      </p:sp>
+      <p:sp>
+        <p:nvSpPr>
+          <p:cNvPr id="8" name="y label real"/>
+          <p:cNvSpPr txBox="1"/>
+          <p:nvPr/>
+        </p:nvSpPr>
+        <p:spPr>
+          <a:xfrm rot="16200000">
+            <a:off x="566928" y="2148840"/>
+            <a:ext cx="457200" cy="914400"/>
+          </a:xfrm>
+          <a:prstGeom prst="rect">
+            <a:avLst/>
+          </a:prstGeom>
+          <a:noFill/>
+          <a:ln/>
+        </p:spPr>
+        <p:txBody>
+          <a:bodyPr wrap="square" lIns="0" tIns="0" rIns="0" bIns="0" rtlCol="0" anchor="ctr"/>
+          <a:lstStyle/>
+          <a:p>
+            <a:pPr algn="ctr" indent="0" marL="0">
+              <a:buNone/>
+            </a:pPr>
+            <a:r>
+              <a:rPr lang="en-US" sz="1000" dirty="0">
+                <a:solidFill>
+                  <a:srgbClr val="52514E"/>
+                </a:solidFill>
+              </a:rPr>
+              <a:t>kinds, trades, surface</a:t>
+            </a:r>
+            <a:endParaRPr lang="en-US" sz="1000" dirty="0"/>
+          </a:p>
+        </p:txBody>
+      </p:sp>
+      <p:sp>
+        <p:nvSpPr>
+          <p:cNvPr id="9" name="dot real 0"/>
+          <p:cNvSpPr/>
+          <p:nvPr/>
+        </p:nvSpPr>
+        <p:spPr>
+          <a:xfrm>
+            <a:off x="1516075" y="2807208"/>
+            <a:ext cx="146304" cy="146304"/>
+          </a:xfrm>
+          <a:prstGeom prst="ellipse">
+            <a:avLst/>
+          </a:prstGeom>
+          <a:solidFill>
+            <a:srgbClr val="EB6834"/>
+          </a:solidFill>
+          <a:ln w="6350">
+            <a:solidFill>
+              <a:srgbClr val="FFFFFF"/>
+            </a:solidFill>
+            <a:prstDash val="solid"/>
+          </a:ln>
+        </p:spPr>
+      </p:sp>
+      <p:sp>
+        <p:nvSpPr>
+          <p:cNvPr id="10" name="dot real 1"/>
+          <p:cNvSpPr/>
+          <p:nvPr/>
+        </p:nvSpPr>
+        <p:spPr>
+          <a:xfrm>
+            <a:off x="1784909" y="2752344"/>
+            <a:ext cx="146304" cy="146304"/>
+          </a:xfrm>
+          <a:prstGeom prst="ellipse">
+            <a:avLst/>
+          </a:prstGeom>
+          <a:solidFill>
+            <a:srgbClr val="EB6834"/>
+          </a:solidFill>
+          <a:ln w="6350">
+            <a:solidFill>
+              <a:srgbClr val="FFFFFF"/>
+            </a:solidFill>
+            <a:prstDash val="solid"/>
+          </a:ln>
+        </p:spPr>
+      </p:sp>
+      <p:sp>
+        <p:nvSpPr>
+          <p:cNvPr id="11" name="dot real 2"/>
+          <p:cNvSpPr/>
+          <p:nvPr/>
+        </p:nvSpPr>
+        <p:spPr>
+          <a:xfrm>
+            <a:off x="1964131" y="2834640"/>
+            <a:ext cx="146304" cy="146304"/>
+          </a:xfrm>
+          <a:prstGeom prst="ellipse">
+            <a:avLst/>
+          </a:prstGeom>
+          <a:solidFill>
+            <a:srgbClr val="EB6834"/>
+          </a:solidFill>
+          <a:ln w="6350">
+            <a:solidFill>
+              <a:srgbClr val="FFFFFF"/>
+            </a:solidFill>
+            <a:prstDash val="solid"/>
+          </a:ln>
+        </p:spPr>
+      </p:sp>
+      <p:sp>
+        <p:nvSpPr>
+          <p:cNvPr id="12" name="dot real 3"/>
+          <p:cNvSpPr/>
+          <p:nvPr/>
+        </p:nvSpPr>
+        <p:spPr>
+          <a:xfrm>
+            <a:off x="1650492" y="2688336"/>
+            <a:ext cx="146304" cy="146304"/>
+          </a:xfrm>
+          <a:prstGeom prst="ellipse">
+            <a:avLst/>
+          </a:prstGeom>
+          <a:solidFill>
+            <a:srgbClr val="EB6834"/>
+          </a:solidFill>
+          <a:ln w="6350">
+            <a:solidFill>
+              <a:srgbClr val="FFFFFF"/>
+            </a:solidFill>
+            <a:prstDash val="solid"/>
+          </a:ln>
+        </p:spPr>
+      </p:sp>
+      <p:sp>
+        <p:nvSpPr>
+          <p:cNvPr id="13" name="dot real 4"/>
+          <p:cNvSpPr/>
+          <p:nvPr/>
+        </p:nvSpPr>
+        <p:spPr>
+          <a:xfrm>
+            <a:off x="2188159" y="2770632"/>
+            <a:ext cx="146304" cy="146304"/>
+          </a:xfrm>
+          <a:prstGeom prst="ellipse">
+            <a:avLst/>
+          </a:prstGeom>
+          <a:solidFill>
+            <a:srgbClr val="EB6834"/>
+          </a:solidFill>
+          <a:ln w="6350">
+            <a:solidFill>
+              <a:srgbClr val="FFFFFF"/>
+            </a:solidFill>
+            <a:prstDash val="solid"/>
+          </a:ln>
+        </p:spPr>
+      </p:sp>
+      <p:sp>
+        <p:nvSpPr>
+          <p:cNvPr id="14" name="dot real 5"/>
+          <p:cNvSpPr/>
+          <p:nvPr/>
+        </p:nvSpPr>
+        <p:spPr>
+          <a:xfrm>
+            <a:off x="1874520" y="2880360"/>
+            <a:ext cx="146304" cy="146304"/>
+          </a:xfrm>
+          <a:prstGeom prst="ellipse">
+            <a:avLst/>
+          </a:prstGeom>
+          <a:solidFill>
+            <a:srgbClr val="EB6834"/>
+          </a:solidFill>
+          <a:ln w="6350">
+            <a:solidFill>
+              <a:srgbClr val="FFFFFF"/>
+            </a:solidFill>
+            <a:prstDash val="solid"/>
+          </a:ln>
+        </p:spPr>
+      </p:sp>
+      <p:sp>
+        <p:nvSpPr>
+          <p:cNvPr id="15" name="dot real 6"/>
+          <p:cNvSpPr/>
+          <p:nvPr/>
+        </p:nvSpPr>
+        <p:spPr>
+          <a:xfrm>
+            <a:off x="2367382" y="2715768"/>
+            <a:ext cx="146304" cy="146304"/>
+          </a:xfrm>
+          <a:prstGeom prst="ellipse">
+            <a:avLst/>
+          </a:prstGeom>
+          <a:solidFill>
+            <a:srgbClr val="EB6834"/>
+          </a:solidFill>
+          <a:ln w="6350">
+            <a:solidFill>
+              <a:srgbClr val="FFFFFF"/>
+            </a:solidFill>
+            <a:prstDash val="solid"/>
+          </a:ln>
+        </p:spPr>
+      </p:sp>
+      <p:sp>
+        <p:nvSpPr>
+          <p:cNvPr id="16" name="dot real 7"/>
+          <p:cNvSpPr/>
+          <p:nvPr/>
+        </p:nvSpPr>
+        <p:spPr>
+          <a:xfrm>
+            <a:off x="1381658" y="2734056"/>
+            <a:ext cx="146304" cy="146304"/>
+          </a:xfrm>
+          <a:prstGeom prst="ellipse">
+            <a:avLst/>
+          </a:prstGeom>
+          <a:solidFill>
+            <a:srgbClr val="EB6834"/>
+          </a:solidFill>
+          <a:ln w="6350">
+            <a:solidFill>
+              <a:srgbClr val="FFFFFF"/>
+            </a:solidFill>
+            <a:prstDash val="solid"/>
+          </a:ln>
+        </p:spPr>
+      </p:sp>
+      <p:sp>
+        <p:nvSpPr>
+          <p:cNvPr id="17" name="dot real 8"/>
+          <p:cNvSpPr/>
+          <p:nvPr/>
+        </p:nvSpPr>
+        <p:spPr>
+          <a:xfrm>
+            <a:off x="2098548" y="2660904"/>
+            <a:ext cx="146304" cy="146304"/>
+          </a:xfrm>
+          <a:prstGeom prst="ellipse">
+            <a:avLst/>
+          </a:prstGeom>
+          <a:solidFill>
+            <a:srgbClr val="EB6834"/>
+          </a:solidFill>
+          <a:ln w="6350">
+            <a:solidFill>
+              <a:srgbClr val="FFFFFF"/>
+            </a:solidFill>
+            <a:prstDash val="solid"/>
+          </a:ln>
+        </p:spPr>
+      </p:sp>
+      <p:sp>
+        <p:nvSpPr>
+          <p:cNvPr id="18" name="dot real 9"/>
+          <p:cNvSpPr/>
+          <p:nvPr/>
+        </p:nvSpPr>
+        <p:spPr>
+          <a:xfrm>
+            <a:off x="2456993" y="2816352"/>
+            <a:ext cx="146304" cy="146304"/>
+          </a:xfrm>
+          <a:prstGeom prst="ellipse">
+            <a:avLst/>
+          </a:prstGeom>
+          <a:solidFill>
+            <a:srgbClr val="EB6834"/>
+          </a:solidFill>
+          <a:ln w="6350">
+            <a:solidFill>
+              <a:srgbClr val="FFFFFF"/>
+            </a:solidFill>
+            <a:prstDash val="solid"/>
+          </a:ln>
+        </p:spPr>
+      </p:sp>
+      <p:sp>
+        <p:nvSpPr>
+          <p:cNvPr id="19" name="dot real 10"/>
+          <p:cNvSpPr/>
+          <p:nvPr/>
+        </p:nvSpPr>
+        <p:spPr>
+          <a:xfrm>
+            <a:off x="1740103" y="2624328"/>
+            <a:ext cx="146304" cy="146304"/>
+          </a:xfrm>
+          <a:prstGeom prst="ellipse">
+            <a:avLst/>
+          </a:prstGeom>
+          <a:solidFill>
+            <a:srgbClr val="EB6834"/>
+          </a:solidFill>
+          <a:ln w="6350">
+            <a:solidFill>
+              <a:srgbClr val="FFFFFF"/>
+            </a:solidFill>
+            <a:prstDash val="solid"/>
+          </a:ln>
+        </p:spPr>
+      </p:sp>
+      <p:sp>
+        <p:nvSpPr>
+          <p:cNvPr id="20" name="dot real 11"/>
+          <p:cNvSpPr/>
+          <p:nvPr/>
+        </p:nvSpPr>
+        <p:spPr>
+          <a:xfrm>
+            <a:off x="2322576" y="2898648"/>
+            <a:ext cx="146304" cy="146304"/>
+          </a:xfrm>
+          <a:prstGeom prst="ellipse">
+            <a:avLst/>
+          </a:prstGeom>
+          <a:solidFill>
+            <a:srgbClr val="EB6834"/>
+          </a:solidFill>
+          <a:ln w="6350">
+            <a:solidFill>
+              <a:srgbClr val="FFFFFF"/>
+            </a:solidFill>
+            <a:prstDash val="solid"/>
+          </a:ln>
+        </p:spPr>
+      </p:sp>
+      <p:sp>
+        <p:nvSpPr>
+          <p:cNvPr id="21" name="real cluster ring"/>
+          <p:cNvSpPr/>
+          <p:nvPr/>
+        </p:nvSpPr>
+        <p:spPr>
+          <a:xfrm>
+            <a:off x="1141171" y="2624328"/>
+            <a:ext cx="1702613" cy="420624"/>
+          </a:xfrm>
+          <a:prstGeom prst="ellipse">
+            <a:avLst/>
+          </a:prstGeom>
+          <a:ln w="12700">
+            <a:solidFill>
+              <a:srgbClr val="EB6834"/>
+            </a:solidFill>
+            <a:prstDash val="dash"/>
+          </a:ln>
+        </p:spPr>
+      </p:sp>
+      <p:sp>
+        <p:nvSpPr>
+          <p:cNvPr id="22" name="real note"/>
+          <p:cNvSpPr txBox="1"/>
+          <p:nvPr/>
+        </p:nvSpPr>
+        <p:spPr>
+          <a:xfrm>
+            <a:off x="3023006" y="2377440"/>
+            <a:ext cx="2464308" cy="457200"/>
           </a:xfrm>
           <a:prstGeom prst="rect">
             <a:avLst/>
@@ -22873,107 +23387,49 @@
               <a:buNone/>
             </a:pPr>
             <a:r>
-              <a:rPr lang="en-US" sz="1600" b="1" dirty="0">
+              <a:rPr lang="en-US" sz="1100" i="1" dirty="0">
                 <a:solidFill>
-                  <a:schemeClr val="tx1"/>
+                  <a:srgbClr val="52514E"/>
                 </a:solidFill>
               </a:rPr>
-              <a:t>Why it has to be synthetic</a:t>
+              <a:t>a method tuned here measures fit to that project</a:t>
             </a:r>
-            <a:endParaRPr lang="en-US" sz="1600" dirty="0"/>
+            <a:endParaRPr lang="en-US" sz="1100" dirty="0"/>
           </a:p>
         </p:txBody>
       </p:sp>
       <p:sp>
         <p:nvSpPr>
-          <p:cNvPr id="4" name="icon ring Scarcity"/>
+          <p:cNvPr id="23" name="space synthetic"/>
           <p:cNvSpPr/>
           <p:nvPr/>
         </p:nvSpPr>
         <p:spPr>
           <a:xfrm>
-            <a:off x="548640" y="1874520"/>
-            <a:ext cx="530352" cy="530352"/>
-          </a:xfrm>
-          <a:prstGeom prst="ellipse">
-            <a:avLst/>
+            <a:off x="548640" y="3611880"/>
+            <a:ext cx="5212080" cy="2103120"/>
+          </a:xfrm>
+          <a:prstGeom prst="roundRect">
+            <a:avLst>
+              <a:gd name="adj" fmla="val 3043"/>
+            </a:avLst>
           </a:prstGeom>
           <a:solidFill>
-            <a:schemeClr val="accent1"/>
+            <a:schemeClr val="bg2"/>
           </a:solidFill>
           <a:ln/>
         </p:spPr>
       </p:sp>
-      <p:pic>
-        <p:nvPicPr>
-          <p:cNvPr id="5" name="icon Scarcity" descr="preencoded.png">    </p:cNvPr>
-          <p:cNvPicPr>
-            <a:picLocks noChangeAspect="1"/>
-          </p:cNvPicPr>
-          <p:nvPr/>
-        </p:nvPicPr>
-        <p:blipFill>
-          <a:blip r:embed="rId1"/>
-          <a:stretch>
-            <a:fillRect/>
-          </a:stretch>
-        </p:blipFill>
-        <p:spPr>
-          <a:xfrm>
-            <a:off x="660014" y="1985894"/>
-            <a:ext cx="307604" cy="307604"/>
-          </a:xfrm>
-          <a:prstGeom prst="rect">
-            <a:avLst/>
-          </a:prstGeom>
-        </p:spPr>
-      </p:pic>
-      <p:sp>
-        <p:nvSpPr>
-          <p:cNvPr id="6" name="reason Scarcity"/>
+      <p:sp>
+        <p:nvSpPr>
+          <p:cNvPr id="24" name="space head synthetic"/>
           <p:cNvSpPr txBox="1"/>
           <p:nvPr/>
         </p:nvSpPr>
         <p:spPr>
           <a:xfrm>
-            <a:off x="1280160" y="1856232"/>
-            <a:ext cx="4206240" cy="329184"/>
-          </a:xfrm>
-          <a:prstGeom prst="rect">
-            <a:avLst/>
-          </a:prstGeom>
-          <a:noFill/>
-          <a:ln/>
-        </p:spPr>
-        <p:txBody>
-          <a:bodyPr wrap="square" lIns="0" tIns="0" rIns="0" bIns="0" rtlCol="0" anchor="ctr"/>
-          <a:lstStyle/>
-          <a:p>
-            <a:pPr indent="0" marL="0">
-              <a:buNone/>
-            </a:pPr>
-            <a:r>
-              <a:rPr lang="en-US" sz="1500" b="1" dirty="0">
-                <a:solidFill>
-                  <a:schemeClr val="tx1"/>
-                </a:solidFill>
-              </a:rPr>
-              <a:t>Scarcity</a:t>
-            </a:r>
-            <a:endParaRPr lang="en-US" sz="1500" dirty="0"/>
-          </a:p>
-        </p:txBody>
-      </p:sp>
-      <p:sp>
-        <p:nvSpPr>
-          <p:cNvPr id="7" name="reason text Scarcity"/>
-          <p:cNvSpPr txBox="1"/>
-          <p:nvPr/>
-        </p:nvSpPr>
-        <p:spPr>
-          <a:xfrm>
-            <a:off x="1280160" y="2221992"/>
-            <a:ext cx="4206240" cy="868680"/>
+            <a:off x="731520" y="3721608"/>
+            <a:ext cx="4846320" cy="566928"/>
           </a:xfrm>
           <a:prstGeom prst="rect">
             <a:avLst/>
@@ -22989,187 +23445,89 @@
               <a:buNone/>
             </a:pPr>
             <a:r>
-              <a:rPr lang="en-US" sz="1250" dirty="0">
+              <a:rPr lang="en-US" sz="1400" b="1" dirty="0">
                 <a:solidFill>
                   <a:schemeClr val="tx1"/>
                 </a:solidFill>
               </a:rPr>
-              <a:t>Project models are proprietary; the few open ones are not organised around supports and often export no element sizes.</a:t>
+              <a:t>CrossMEP</a:t>
             </a:r>
-            <a:endParaRPr lang="en-US" sz="1250" dirty="0"/>
+            <a:endParaRPr lang="en-US" sz="1400" dirty="0"/>
           </a:p>
-        </p:txBody>
-      </p:sp>
-      <p:sp>
-        <p:nvSpPr>
-          <p:cNvPr id="8" name="icon ring Coverage"/>
-          <p:cNvSpPr/>
-          <p:nvPr/>
-        </p:nvSpPr>
-        <p:spPr>
-          <a:xfrm>
-            <a:off x="548640" y="3246120"/>
-            <a:ext cx="530352" cy="530352"/>
-          </a:xfrm>
-          <a:prstGeom prst="ellipse">
-            <a:avLst/>
-          </a:prstGeom>
-          <a:solidFill>
-            <a:schemeClr val="accent1"/>
-          </a:solidFill>
-          <a:ln/>
-        </p:spPr>
-      </p:sp>
-      <p:pic>
-        <p:nvPicPr>
-          <p:cNvPr id="9" name="icon Coverage" descr="preencoded.png">    </p:cNvPr>
-          <p:cNvPicPr>
-            <a:picLocks noChangeAspect="1"/>
-          </p:cNvPicPr>
-          <p:nvPr/>
-        </p:nvPicPr>
-        <p:blipFill>
-          <a:blip r:embed="rId2"/>
-          <a:stretch>
-            <a:fillRect/>
-          </a:stretch>
-        </p:blipFill>
-        <p:spPr>
-          <a:xfrm>
-            <a:off x="660014" y="3357494"/>
-            <a:ext cx="307604" cy="307604"/>
-          </a:xfrm>
-          <a:prstGeom prst="rect">
-            <a:avLst/>
-          </a:prstGeom>
-        </p:spPr>
-      </p:pic>
-      <p:sp>
-        <p:nvSpPr>
-          <p:cNvPr id="10" name="reason Coverage"/>
-          <p:cNvSpPr txBox="1"/>
-          <p:nvPr/>
-        </p:nvSpPr>
-        <p:spPr>
-          <a:xfrm>
-            <a:off x="1280160" y="3227832"/>
-            <a:ext cx="4206240" cy="329184"/>
-          </a:xfrm>
-          <a:prstGeom prst="rect">
-            <a:avLst/>
-          </a:prstGeom>
-          <a:noFill/>
-          <a:ln/>
-        </p:spPr>
-        <p:txBody>
-          <a:bodyPr wrap="square" lIns="0" tIns="0" rIns="0" bIns="0" rtlCol="0" anchor="ctr"/>
-          <a:lstStyle/>
           <a:p>
             <a:pPr indent="0" marL="0">
               <a:buNone/>
             </a:pPr>
             <a:r>
-              <a:rPr lang="en-US" sz="1500" b="1" dirty="0">
+              <a:rPr lang="en-US" sz="1150" dirty="0">
                 <a:solidFill>
-                  <a:schemeClr val="tx1"/>
+                  <a:srgbClr val="52514E"/>
                 </a:solidFill>
               </a:rPr>
-              <a:t>Coverage</a:t>
+              <a:t>the space filled by construction: uniform over the tiers, or any mix you ask for (generate_custom)</a:t>
             </a:r>
-            <a:endParaRPr lang="en-US" sz="1500" dirty="0"/>
+            <a:endParaRPr lang="en-US" sz="1400" dirty="0"/>
           </a:p>
         </p:txBody>
       </p:sp>
       <p:sp>
         <p:nvSpPr>
-          <p:cNvPr id="11" name="reason text Coverage"/>
+          <p:cNvPr id="25" name="x axis synthetic"/>
+          <p:cNvSpPr/>
+          <p:nvPr/>
+        </p:nvSpPr>
+        <p:spPr>
+          <a:xfrm>
+            <a:off x="1051560" y="5303520"/>
+            <a:ext cx="4480560" cy="0"/>
+          </a:xfrm>
+          <a:prstGeom prst="line">
+            <a:avLst/>
+          </a:prstGeom>
+          <a:noFill/>
+          <a:ln w="12700">
+            <a:solidFill>
+              <a:srgbClr val="52514E"/>
+            </a:solidFill>
+            <a:prstDash val="solid"/>
+            <a:tailEnd type="triangle"/>
+          </a:ln>
+        </p:spPr>
+      </p:sp>
+      <p:sp>
+        <p:nvSpPr>
+          <p:cNvPr id="26" name="y axis synthetic"/>
+          <p:cNvSpPr/>
+          <p:nvPr/>
+        </p:nvSpPr>
+        <p:spPr>
+          <a:xfrm>
+            <a:off x="1051560" y="4389120"/>
+            <a:ext cx="0" cy="914400"/>
+          </a:xfrm>
+          <a:prstGeom prst="line">
+            <a:avLst/>
+          </a:prstGeom>
+          <a:noFill/>
+          <a:ln w="12700">
+            <a:solidFill>
+              <a:srgbClr val="52514E"/>
+            </a:solidFill>
+            <a:prstDash val="solid"/>
+            <a:headEnd type="triangle"/>
+          </a:ln>
+        </p:spPr>
+      </p:sp>
+      <p:sp>
+        <p:nvSpPr>
+          <p:cNvPr id="27" name="x label synthetic"/>
           <p:cNvSpPr txBox="1"/>
           <p:nvPr/>
         </p:nvSpPr>
         <p:spPr>
           <a:xfrm>
-            <a:off x="1280160" y="3593592"/>
-            <a:ext cx="4206240" cy="868680"/>
-          </a:xfrm>
-          <a:prstGeom prst="rect">
-            <a:avLst/>
-          </a:prstGeom>
-          <a:noFill/>
-          <a:ln/>
-        </p:spPr>
-        <p:txBody>
-          <a:bodyPr wrap="square" lIns="0" tIns="0" rIns="0" bIns="0" rtlCol="0" anchor="t"/>
-          <a:lstStyle/>
-          <a:p>
-            <a:pPr indent="0" marL="0">
-              <a:buNone/>
-            </a:pPr>
-            <a:r>
-              <a:rPr lang="en-US" sz="1250" dirty="0">
-                <a:solidFill>
-                  <a:schemeClr val="tx1"/>
-                </a:solidFill>
-              </a:rPr>
-              <a:t>One project is one narrow slice: one building type, one trade mix. A method tuned to it measures fit to that project.</a:t>
-            </a:r>
-            <a:endParaRPr lang="en-US" sz="1250" dirty="0"/>
-          </a:p>
-        </p:txBody>
-      </p:sp>
-      <p:sp>
-        <p:nvSpPr>
-          <p:cNvPr id="12" name="icon ring Control"/>
-          <p:cNvSpPr/>
-          <p:nvPr/>
-        </p:nvSpPr>
-        <p:spPr>
-          <a:xfrm>
-            <a:off x="548640" y="4617720"/>
-            <a:ext cx="530352" cy="530352"/>
-          </a:xfrm>
-          <a:prstGeom prst="ellipse">
-            <a:avLst/>
-          </a:prstGeom>
-          <a:solidFill>
-            <a:schemeClr val="accent1"/>
-          </a:solidFill>
-          <a:ln/>
-        </p:spPr>
-      </p:sp>
-      <p:pic>
-        <p:nvPicPr>
-          <p:cNvPr id="13" name="icon Control" descr="preencoded.png">    </p:cNvPr>
-          <p:cNvPicPr>
-            <a:picLocks noChangeAspect="1"/>
-          </p:cNvPicPr>
-          <p:nvPr/>
-        </p:nvPicPr>
-        <p:blipFill>
-          <a:blip r:embed="rId3"/>
-          <a:stretch>
-            <a:fillRect/>
-          </a:stretch>
-        </p:blipFill>
-        <p:spPr>
-          <a:xfrm>
-            <a:off x="660014" y="4729094"/>
-            <a:ext cx="307604" cy="307604"/>
-          </a:xfrm>
-          <a:prstGeom prst="rect">
-            <a:avLst/>
-          </a:prstGeom>
-        </p:spPr>
-      </p:pic>
-      <p:sp>
-        <p:nvSpPr>
-          <p:cNvPr id="14" name="reason Control"/>
-          <p:cNvSpPr txBox="1"/>
-          <p:nvPr/>
-        </p:nvSpPr>
-        <p:spPr>
-          <a:xfrm>
-            <a:off x="1280160" y="4599432"/>
-            <a:ext cx="4206240" cy="329184"/>
+            <a:off x="1051560" y="5330952"/>
+            <a:ext cx="4480560" cy="228600"/>
           </a:xfrm>
           <a:prstGeom prst="rect">
             <a:avLst/>
@@ -23181,31 +23539,31 @@
           <a:bodyPr wrap="square" lIns="0" tIns="0" rIns="0" bIns="0" rtlCol="0" anchor="ctr"/>
           <a:lstStyle/>
           <a:p>
-            <a:pPr indent="0" marL="0">
+            <a:pPr algn="ctr" indent="0" marL="0">
               <a:buNone/>
             </a:pPr>
             <a:r>
-              <a:rPr lang="en-US" sz="1500" b="1" dirty="0">
+              <a:rPr lang="en-US" sz="1000" dirty="0">
                 <a:solidFill>
-                  <a:schemeClr val="tx1"/>
+                  <a:srgbClr val="52514E"/>
                 </a:solidFill>
               </a:rPr>
-              <a:t>Control</a:t>
+              <a:t>elements at the hanger: 1 … 8</a:t>
             </a:r>
-            <a:endParaRPr lang="en-US" sz="1500" dirty="0"/>
+            <a:endParaRPr lang="en-US" sz="1000" dirty="0"/>
           </a:p>
         </p:txBody>
       </p:sp>
       <p:sp>
         <p:nvSpPr>
-          <p:cNvPr id="15" name="reason text Control"/>
+          <p:cNvPr id="28" name="y label synthetic"/>
           <p:cNvSpPr txBox="1"/>
           <p:nvPr/>
         </p:nvSpPr>
         <p:spPr>
-          <a:xfrm>
-            <a:off x="1280160" y="4965192"/>
-            <a:ext cx="4206240" cy="868680"/>
+          <a:xfrm rot="16200000">
+            <a:off x="566928" y="4389120"/>
+            <a:ext cx="457200" cy="914400"/>
           </a:xfrm>
           <a:prstGeom prst="rect">
             <a:avLst/>
@@ -23214,27 +23572,827 @@
           <a:ln/>
         </p:spPr>
         <p:txBody>
-          <a:bodyPr wrap="square" lIns="0" tIns="0" rIns="0" bIns="0" rtlCol="0" anchor="t"/>
+          <a:bodyPr wrap="square" lIns="0" tIns="0" rIns="0" bIns="0" rtlCol="0" anchor="ctr"/>
           <a:lstStyle/>
           <a:p>
-            <a:pPr indent="0" marL="0">
+            <a:pPr algn="ctr" indent="0" marL="0">
               <a:buNone/>
             </a:pPr>
             <a:r>
-              <a:rPr lang="en-US" sz="1250" dirty="0">
+              <a:rPr lang="en-US" sz="1000" dirty="0">
                 <a:solidFill>
-                  <a:schemeClr val="tx1"/>
+                  <a:srgbClr val="52514E"/>
                 </a:solidFill>
               </a:rPr>
-              <a:t>A seeded generator gives unlimited problems with a known distribution, difficulty by construction and held-out seeds.</a:t>
+              <a:t>kinds, trades, surface</a:t>
             </a:r>
-            <a:endParaRPr lang="en-US" sz="1250" dirty="0"/>
+            <a:endParaRPr lang="en-US" sz="1000" dirty="0"/>
           </a:p>
         </p:txBody>
       </p:sp>
       <p:sp>
         <p:nvSpPr>
-          <p:cNvPr id="16" name="glance heading"/>
+          <p:cNvPr id="29" name="dot syn 00"/>
+          <p:cNvSpPr/>
+          <p:nvPr/>
+        </p:nvSpPr>
+        <p:spPr>
+          <a:xfrm>
+            <a:off x="1350569" y="5134356"/>
+            <a:ext cx="118872" cy="118872"/>
+          </a:xfrm>
+          <a:prstGeom prst="ellipse">
+            <a:avLst/>
+          </a:prstGeom>
+          <a:solidFill>
+            <a:schemeClr val="accent1"/>
+          </a:solidFill>
+          <a:ln w="6350">
+            <a:solidFill>
+              <a:srgbClr val="FFFFFF"/>
+            </a:solidFill>
+            <a:prstDash val="solid"/>
+          </a:ln>
+        </p:spPr>
+      </p:sp>
+      <p:sp>
+        <p:nvSpPr>
+          <p:cNvPr id="30" name="dot syn 01"/>
+          <p:cNvSpPr/>
+          <p:nvPr/>
+        </p:nvSpPr>
+        <p:spPr>
+          <a:xfrm>
+            <a:off x="1350569" y="4896612"/>
+            <a:ext cx="118872" cy="118872"/>
+          </a:xfrm>
+          <a:prstGeom prst="ellipse">
+            <a:avLst/>
+          </a:prstGeom>
+          <a:solidFill>
+            <a:schemeClr val="accent1"/>
+          </a:solidFill>
+          <a:ln w="6350">
+            <a:solidFill>
+              <a:srgbClr val="FFFFFF"/>
+            </a:solidFill>
+            <a:prstDash val="solid"/>
+          </a:ln>
+        </p:spPr>
+      </p:sp>
+      <p:sp>
+        <p:nvSpPr>
+          <p:cNvPr id="31" name="dot syn 02"/>
+          <p:cNvSpPr/>
+          <p:nvPr/>
+        </p:nvSpPr>
+        <p:spPr>
+          <a:xfrm>
+            <a:off x="1350569" y="4658868"/>
+            <a:ext cx="118872" cy="118872"/>
+          </a:xfrm>
+          <a:prstGeom prst="ellipse">
+            <a:avLst/>
+          </a:prstGeom>
+          <a:solidFill>
+            <a:schemeClr val="accent1"/>
+          </a:solidFill>
+          <a:ln w="6350">
+            <a:solidFill>
+              <a:srgbClr val="FFFFFF"/>
+            </a:solidFill>
+            <a:prstDash val="solid"/>
+          </a:ln>
+        </p:spPr>
+      </p:sp>
+      <p:sp>
+        <p:nvSpPr>
+          <p:cNvPr id="32" name="dot syn 03"/>
+          <p:cNvSpPr/>
+          <p:nvPr/>
+        </p:nvSpPr>
+        <p:spPr>
+          <a:xfrm>
+            <a:off x="1350569" y="4421124"/>
+            <a:ext cx="118872" cy="118872"/>
+          </a:xfrm>
+          <a:prstGeom prst="ellipse">
+            <a:avLst/>
+          </a:prstGeom>
+          <a:solidFill>
+            <a:schemeClr val="accent1"/>
+          </a:solidFill>
+          <a:ln w="6350">
+            <a:solidFill>
+              <a:srgbClr val="FFFFFF"/>
+            </a:solidFill>
+            <a:prstDash val="solid"/>
+          </a:ln>
+        </p:spPr>
+      </p:sp>
+      <p:sp>
+        <p:nvSpPr>
+          <p:cNvPr id="33" name="dot syn 10"/>
+          <p:cNvSpPr/>
+          <p:nvPr/>
+        </p:nvSpPr>
+        <p:spPr>
+          <a:xfrm>
+            <a:off x="1910639" y="5134356"/>
+            <a:ext cx="118872" cy="118872"/>
+          </a:xfrm>
+          <a:prstGeom prst="ellipse">
+            <a:avLst/>
+          </a:prstGeom>
+          <a:solidFill>
+            <a:schemeClr val="accent1"/>
+          </a:solidFill>
+          <a:ln w="6350">
+            <a:solidFill>
+              <a:srgbClr val="FFFFFF"/>
+            </a:solidFill>
+            <a:prstDash val="solid"/>
+          </a:ln>
+        </p:spPr>
+      </p:sp>
+      <p:sp>
+        <p:nvSpPr>
+          <p:cNvPr id="34" name="dot syn 11"/>
+          <p:cNvSpPr/>
+          <p:nvPr/>
+        </p:nvSpPr>
+        <p:spPr>
+          <a:xfrm>
+            <a:off x="1910639" y="4896612"/>
+            <a:ext cx="118872" cy="118872"/>
+          </a:xfrm>
+          <a:prstGeom prst="ellipse">
+            <a:avLst/>
+          </a:prstGeom>
+          <a:solidFill>
+            <a:schemeClr val="accent1"/>
+          </a:solidFill>
+          <a:ln w="6350">
+            <a:solidFill>
+              <a:srgbClr val="FFFFFF"/>
+            </a:solidFill>
+            <a:prstDash val="solid"/>
+          </a:ln>
+        </p:spPr>
+      </p:sp>
+      <p:sp>
+        <p:nvSpPr>
+          <p:cNvPr id="35" name="dot syn 12"/>
+          <p:cNvSpPr/>
+          <p:nvPr/>
+        </p:nvSpPr>
+        <p:spPr>
+          <a:xfrm>
+            <a:off x="1910639" y="4658868"/>
+            <a:ext cx="118872" cy="118872"/>
+          </a:xfrm>
+          <a:prstGeom prst="ellipse">
+            <a:avLst/>
+          </a:prstGeom>
+          <a:solidFill>
+            <a:schemeClr val="accent1"/>
+          </a:solidFill>
+          <a:ln w="6350">
+            <a:solidFill>
+              <a:srgbClr val="FFFFFF"/>
+            </a:solidFill>
+            <a:prstDash val="solid"/>
+          </a:ln>
+        </p:spPr>
+      </p:sp>
+      <p:sp>
+        <p:nvSpPr>
+          <p:cNvPr id="36" name="dot syn 13"/>
+          <p:cNvSpPr/>
+          <p:nvPr/>
+        </p:nvSpPr>
+        <p:spPr>
+          <a:xfrm>
+            <a:off x="1910639" y="4421124"/>
+            <a:ext cx="118872" cy="118872"/>
+          </a:xfrm>
+          <a:prstGeom prst="ellipse">
+            <a:avLst/>
+          </a:prstGeom>
+          <a:solidFill>
+            <a:schemeClr val="accent1"/>
+          </a:solidFill>
+          <a:ln w="6350">
+            <a:solidFill>
+              <a:srgbClr val="FFFFFF"/>
+            </a:solidFill>
+            <a:prstDash val="solid"/>
+          </a:ln>
+        </p:spPr>
+      </p:sp>
+      <p:sp>
+        <p:nvSpPr>
+          <p:cNvPr id="37" name="dot syn 20"/>
+          <p:cNvSpPr/>
+          <p:nvPr/>
+        </p:nvSpPr>
+        <p:spPr>
+          <a:xfrm>
+            <a:off x="2470709" y="5134356"/>
+            <a:ext cx="118872" cy="118872"/>
+          </a:xfrm>
+          <a:prstGeom prst="ellipse">
+            <a:avLst/>
+          </a:prstGeom>
+          <a:solidFill>
+            <a:schemeClr val="accent1"/>
+          </a:solidFill>
+          <a:ln w="6350">
+            <a:solidFill>
+              <a:srgbClr val="FFFFFF"/>
+            </a:solidFill>
+            <a:prstDash val="solid"/>
+          </a:ln>
+        </p:spPr>
+      </p:sp>
+      <p:sp>
+        <p:nvSpPr>
+          <p:cNvPr id="38" name="dot syn 21"/>
+          <p:cNvSpPr/>
+          <p:nvPr/>
+        </p:nvSpPr>
+        <p:spPr>
+          <a:xfrm>
+            <a:off x="2470709" y="4896612"/>
+            <a:ext cx="118872" cy="118872"/>
+          </a:xfrm>
+          <a:prstGeom prst="ellipse">
+            <a:avLst/>
+          </a:prstGeom>
+          <a:solidFill>
+            <a:schemeClr val="accent1"/>
+          </a:solidFill>
+          <a:ln w="6350">
+            <a:solidFill>
+              <a:srgbClr val="FFFFFF"/>
+            </a:solidFill>
+            <a:prstDash val="solid"/>
+          </a:ln>
+        </p:spPr>
+      </p:sp>
+      <p:sp>
+        <p:nvSpPr>
+          <p:cNvPr id="39" name="dot syn 22"/>
+          <p:cNvSpPr/>
+          <p:nvPr/>
+        </p:nvSpPr>
+        <p:spPr>
+          <a:xfrm>
+            <a:off x="2470709" y="4658868"/>
+            <a:ext cx="118872" cy="118872"/>
+          </a:xfrm>
+          <a:prstGeom prst="ellipse">
+            <a:avLst/>
+          </a:prstGeom>
+          <a:solidFill>
+            <a:schemeClr val="accent1"/>
+          </a:solidFill>
+          <a:ln w="6350">
+            <a:solidFill>
+              <a:srgbClr val="FFFFFF"/>
+            </a:solidFill>
+            <a:prstDash val="solid"/>
+          </a:ln>
+        </p:spPr>
+      </p:sp>
+      <p:sp>
+        <p:nvSpPr>
+          <p:cNvPr id="40" name="dot syn 23"/>
+          <p:cNvSpPr/>
+          <p:nvPr/>
+        </p:nvSpPr>
+        <p:spPr>
+          <a:xfrm>
+            <a:off x="2470709" y="4421124"/>
+            <a:ext cx="118872" cy="118872"/>
+          </a:xfrm>
+          <a:prstGeom prst="ellipse">
+            <a:avLst/>
+          </a:prstGeom>
+          <a:solidFill>
+            <a:schemeClr val="accent1"/>
+          </a:solidFill>
+          <a:ln w="6350">
+            <a:solidFill>
+              <a:srgbClr val="FFFFFF"/>
+            </a:solidFill>
+            <a:prstDash val="solid"/>
+          </a:ln>
+        </p:spPr>
+      </p:sp>
+      <p:sp>
+        <p:nvSpPr>
+          <p:cNvPr id="41" name="dot syn 30"/>
+          <p:cNvSpPr/>
+          <p:nvPr/>
+        </p:nvSpPr>
+        <p:spPr>
+          <a:xfrm>
+            <a:off x="3030779" y="5134356"/>
+            <a:ext cx="118872" cy="118872"/>
+          </a:xfrm>
+          <a:prstGeom prst="ellipse">
+            <a:avLst/>
+          </a:prstGeom>
+          <a:solidFill>
+            <a:schemeClr val="accent1"/>
+          </a:solidFill>
+          <a:ln w="6350">
+            <a:solidFill>
+              <a:srgbClr val="FFFFFF"/>
+            </a:solidFill>
+            <a:prstDash val="solid"/>
+          </a:ln>
+        </p:spPr>
+      </p:sp>
+      <p:sp>
+        <p:nvSpPr>
+          <p:cNvPr id="42" name="dot syn 31"/>
+          <p:cNvSpPr/>
+          <p:nvPr/>
+        </p:nvSpPr>
+        <p:spPr>
+          <a:xfrm>
+            <a:off x="3030779" y="4896612"/>
+            <a:ext cx="118872" cy="118872"/>
+          </a:xfrm>
+          <a:prstGeom prst="ellipse">
+            <a:avLst/>
+          </a:prstGeom>
+          <a:solidFill>
+            <a:schemeClr val="accent1"/>
+          </a:solidFill>
+          <a:ln w="6350">
+            <a:solidFill>
+              <a:srgbClr val="FFFFFF"/>
+            </a:solidFill>
+            <a:prstDash val="solid"/>
+          </a:ln>
+        </p:spPr>
+      </p:sp>
+      <p:sp>
+        <p:nvSpPr>
+          <p:cNvPr id="43" name="dot syn 32"/>
+          <p:cNvSpPr/>
+          <p:nvPr/>
+        </p:nvSpPr>
+        <p:spPr>
+          <a:xfrm>
+            <a:off x="3030779" y="4658868"/>
+            <a:ext cx="118872" cy="118872"/>
+          </a:xfrm>
+          <a:prstGeom prst="ellipse">
+            <a:avLst/>
+          </a:prstGeom>
+          <a:solidFill>
+            <a:schemeClr val="accent1"/>
+          </a:solidFill>
+          <a:ln w="6350">
+            <a:solidFill>
+              <a:srgbClr val="FFFFFF"/>
+            </a:solidFill>
+            <a:prstDash val="solid"/>
+          </a:ln>
+        </p:spPr>
+      </p:sp>
+      <p:sp>
+        <p:nvSpPr>
+          <p:cNvPr id="44" name="dot syn 33"/>
+          <p:cNvSpPr/>
+          <p:nvPr/>
+        </p:nvSpPr>
+        <p:spPr>
+          <a:xfrm>
+            <a:off x="3030779" y="4421124"/>
+            <a:ext cx="118872" cy="118872"/>
+          </a:xfrm>
+          <a:prstGeom prst="ellipse">
+            <a:avLst/>
+          </a:prstGeom>
+          <a:solidFill>
+            <a:schemeClr val="accent1"/>
+          </a:solidFill>
+          <a:ln w="6350">
+            <a:solidFill>
+              <a:srgbClr val="FFFFFF"/>
+            </a:solidFill>
+            <a:prstDash val="solid"/>
+          </a:ln>
+        </p:spPr>
+      </p:sp>
+      <p:sp>
+        <p:nvSpPr>
+          <p:cNvPr id="45" name="dot syn 40"/>
+          <p:cNvSpPr/>
+          <p:nvPr/>
+        </p:nvSpPr>
+        <p:spPr>
+          <a:xfrm>
+            <a:off x="3590849" y="5134356"/>
+            <a:ext cx="118872" cy="118872"/>
+          </a:xfrm>
+          <a:prstGeom prst="ellipse">
+            <a:avLst/>
+          </a:prstGeom>
+          <a:solidFill>
+            <a:schemeClr val="accent1"/>
+          </a:solidFill>
+          <a:ln w="6350">
+            <a:solidFill>
+              <a:srgbClr val="FFFFFF"/>
+            </a:solidFill>
+            <a:prstDash val="solid"/>
+          </a:ln>
+        </p:spPr>
+      </p:sp>
+      <p:sp>
+        <p:nvSpPr>
+          <p:cNvPr id="46" name="dot syn 41"/>
+          <p:cNvSpPr/>
+          <p:nvPr/>
+        </p:nvSpPr>
+        <p:spPr>
+          <a:xfrm>
+            <a:off x="3590849" y="4896612"/>
+            <a:ext cx="118872" cy="118872"/>
+          </a:xfrm>
+          <a:prstGeom prst="ellipse">
+            <a:avLst/>
+          </a:prstGeom>
+          <a:solidFill>
+            <a:schemeClr val="accent1"/>
+          </a:solidFill>
+          <a:ln w="6350">
+            <a:solidFill>
+              <a:srgbClr val="FFFFFF"/>
+            </a:solidFill>
+            <a:prstDash val="solid"/>
+          </a:ln>
+        </p:spPr>
+      </p:sp>
+      <p:sp>
+        <p:nvSpPr>
+          <p:cNvPr id="47" name="dot syn 42"/>
+          <p:cNvSpPr/>
+          <p:nvPr/>
+        </p:nvSpPr>
+        <p:spPr>
+          <a:xfrm>
+            <a:off x="3590849" y="4658868"/>
+            <a:ext cx="118872" cy="118872"/>
+          </a:xfrm>
+          <a:prstGeom prst="ellipse">
+            <a:avLst/>
+          </a:prstGeom>
+          <a:solidFill>
+            <a:schemeClr val="accent1"/>
+          </a:solidFill>
+          <a:ln w="6350">
+            <a:solidFill>
+              <a:srgbClr val="FFFFFF"/>
+            </a:solidFill>
+            <a:prstDash val="solid"/>
+          </a:ln>
+        </p:spPr>
+      </p:sp>
+      <p:sp>
+        <p:nvSpPr>
+          <p:cNvPr id="48" name="dot syn 43"/>
+          <p:cNvSpPr/>
+          <p:nvPr/>
+        </p:nvSpPr>
+        <p:spPr>
+          <a:xfrm>
+            <a:off x="3590849" y="4421124"/>
+            <a:ext cx="118872" cy="118872"/>
+          </a:xfrm>
+          <a:prstGeom prst="ellipse">
+            <a:avLst/>
+          </a:prstGeom>
+          <a:solidFill>
+            <a:schemeClr val="accent1"/>
+          </a:solidFill>
+          <a:ln w="6350">
+            <a:solidFill>
+              <a:srgbClr val="FFFFFF"/>
+            </a:solidFill>
+            <a:prstDash val="solid"/>
+          </a:ln>
+        </p:spPr>
+      </p:sp>
+      <p:sp>
+        <p:nvSpPr>
+          <p:cNvPr id="49" name="dot syn 50"/>
+          <p:cNvSpPr/>
+          <p:nvPr/>
+        </p:nvSpPr>
+        <p:spPr>
+          <a:xfrm>
+            <a:off x="4150919" y="5134356"/>
+            <a:ext cx="118872" cy="118872"/>
+          </a:xfrm>
+          <a:prstGeom prst="ellipse">
+            <a:avLst/>
+          </a:prstGeom>
+          <a:solidFill>
+            <a:schemeClr val="accent1"/>
+          </a:solidFill>
+          <a:ln w="6350">
+            <a:solidFill>
+              <a:srgbClr val="FFFFFF"/>
+            </a:solidFill>
+            <a:prstDash val="solid"/>
+          </a:ln>
+        </p:spPr>
+      </p:sp>
+      <p:sp>
+        <p:nvSpPr>
+          <p:cNvPr id="50" name="dot syn 51"/>
+          <p:cNvSpPr/>
+          <p:nvPr/>
+        </p:nvSpPr>
+        <p:spPr>
+          <a:xfrm>
+            <a:off x="4150919" y="4896612"/>
+            <a:ext cx="118872" cy="118872"/>
+          </a:xfrm>
+          <a:prstGeom prst="ellipse">
+            <a:avLst/>
+          </a:prstGeom>
+          <a:solidFill>
+            <a:schemeClr val="accent1"/>
+          </a:solidFill>
+          <a:ln w="6350">
+            <a:solidFill>
+              <a:srgbClr val="FFFFFF"/>
+            </a:solidFill>
+            <a:prstDash val="solid"/>
+          </a:ln>
+        </p:spPr>
+      </p:sp>
+      <p:sp>
+        <p:nvSpPr>
+          <p:cNvPr id="51" name="dot syn 52"/>
+          <p:cNvSpPr/>
+          <p:nvPr/>
+        </p:nvSpPr>
+        <p:spPr>
+          <a:xfrm>
+            <a:off x="4150919" y="4658868"/>
+            <a:ext cx="118872" cy="118872"/>
+          </a:xfrm>
+          <a:prstGeom prst="ellipse">
+            <a:avLst/>
+          </a:prstGeom>
+          <a:solidFill>
+            <a:schemeClr val="accent1"/>
+          </a:solidFill>
+          <a:ln w="6350">
+            <a:solidFill>
+              <a:srgbClr val="FFFFFF"/>
+            </a:solidFill>
+            <a:prstDash val="solid"/>
+          </a:ln>
+        </p:spPr>
+      </p:sp>
+      <p:sp>
+        <p:nvSpPr>
+          <p:cNvPr id="52" name="dot syn 53"/>
+          <p:cNvSpPr/>
+          <p:nvPr/>
+        </p:nvSpPr>
+        <p:spPr>
+          <a:xfrm>
+            <a:off x="4150919" y="4421124"/>
+            <a:ext cx="118872" cy="118872"/>
+          </a:xfrm>
+          <a:prstGeom prst="ellipse">
+            <a:avLst/>
+          </a:prstGeom>
+          <a:solidFill>
+            <a:schemeClr val="accent1"/>
+          </a:solidFill>
+          <a:ln w="6350">
+            <a:solidFill>
+              <a:srgbClr val="FFFFFF"/>
+            </a:solidFill>
+            <a:prstDash val="solid"/>
+          </a:ln>
+        </p:spPr>
+      </p:sp>
+      <p:sp>
+        <p:nvSpPr>
+          <p:cNvPr id="53" name="dot syn 60"/>
+          <p:cNvSpPr/>
+          <p:nvPr/>
+        </p:nvSpPr>
+        <p:spPr>
+          <a:xfrm>
+            <a:off x="4710989" y="5134356"/>
+            <a:ext cx="118872" cy="118872"/>
+          </a:xfrm>
+          <a:prstGeom prst="ellipse">
+            <a:avLst/>
+          </a:prstGeom>
+          <a:solidFill>
+            <a:schemeClr val="accent1"/>
+          </a:solidFill>
+          <a:ln w="6350">
+            <a:solidFill>
+              <a:srgbClr val="FFFFFF"/>
+            </a:solidFill>
+            <a:prstDash val="solid"/>
+          </a:ln>
+        </p:spPr>
+      </p:sp>
+      <p:sp>
+        <p:nvSpPr>
+          <p:cNvPr id="54" name="dot syn 61"/>
+          <p:cNvSpPr/>
+          <p:nvPr/>
+        </p:nvSpPr>
+        <p:spPr>
+          <a:xfrm>
+            <a:off x="4710989" y="4896612"/>
+            <a:ext cx="118872" cy="118872"/>
+          </a:xfrm>
+          <a:prstGeom prst="ellipse">
+            <a:avLst/>
+          </a:prstGeom>
+          <a:solidFill>
+            <a:schemeClr val="accent1"/>
+          </a:solidFill>
+          <a:ln w="6350">
+            <a:solidFill>
+              <a:srgbClr val="FFFFFF"/>
+            </a:solidFill>
+            <a:prstDash val="solid"/>
+          </a:ln>
+        </p:spPr>
+      </p:sp>
+      <p:sp>
+        <p:nvSpPr>
+          <p:cNvPr id="55" name="dot syn 62"/>
+          <p:cNvSpPr/>
+          <p:nvPr/>
+        </p:nvSpPr>
+        <p:spPr>
+          <a:xfrm>
+            <a:off x="4710989" y="4658868"/>
+            <a:ext cx="118872" cy="118872"/>
+          </a:xfrm>
+          <a:prstGeom prst="ellipse">
+            <a:avLst/>
+          </a:prstGeom>
+          <a:solidFill>
+            <a:schemeClr val="accent1"/>
+          </a:solidFill>
+          <a:ln w="6350">
+            <a:solidFill>
+              <a:srgbClr val="FFFFFF"/>
+            </a:solidFill>
+            <a:prstDash val="solid"/>
+          </a:ln>
+        </p:spPr>
+      </p:sp>
+      <p:sp>
+        <p:nvSpPr>
+          <p:cNvPr id="56" name="dot syn 63"/>
+          <p:cNvSpPr/>
+          <p:nvPr/>
+        </p:nvSpPr>
+        <p:spPr>
+          <a:xfrm>
+            <a:off x="4710989" y="4421124"/>
+            <a:ext cx="118872" cy="118872"/>
+          </a:xfrm>
+          <a:prstGeom prst="ellipse">
+            <a:avLst/>
+          </a:prstGeom>
+          <a:solidFill>
+            <a:schemeClr val="accent1"/>
+          </a:solidFill>
+          <a:ln w="6350">
+            <a:solidFill>
+              <a:srgbClr val="FFFFFF"/>
+            </a:solidFill>
+            <a:prstDash val="solid"/>
+          </a:ln>
+        </p:spPr>
+      </p:sp>
+      <p:sp>
+        <p:nvSpPr>
+          <p:cNvPr id="57" name="dot syn 70"/>
+          <p:cNvSpPr/>
+          <p:nvPr/>
+        </p:nvSpPr>
+        <p:spPr>
+          <a:xfrm>
+            <a:off x="5271059" y="5134356"/>
+            <a:ext cx="118872" cy="118872"/>
+          </a:xfrm>
+          <a:prstGeom prst="ellipse">
+            <a:avLst/>
+          </a:prstGeom>
+          <a:solidFill>
+            <a:schemeClr val="accent1"/>
+          </a:solidFill>
+          <a:ln w="6350">
+            <a:solidFill>
+              <a:srgbClr val="FFFFFF"/>
+            </a:solidFill>
+            <a:prstDash val="solid"/>
+          </a:ln>
+        </p:spPr>
+      </p:sp>
+      <p:sp>
+        <p:nvSpPr>
+          <p:cNvPr id="58" name="dot syn 71"/>
+          <p:cNvSpPr/>
+          <p:nvPr/>
+        </p:nvSpPr>
+        <p:spPr>
+          <a:xfrm>
+            <a:off x="5271059" y="4896612"/>
+            <a:ext cx="118872" cy="118872"/>
+          </a:xfrm>
+          <a:prstGeom prst="ellipse">
+            <a:avLst/>
+          </a:prstGeom>
+          <a:solidFill>
+            <a:schemeClr val="accent1"/>
+          </a:solidFill>
+          <a:ln w="6350">
+            <a:solidFill>
+              <a:srgbClr val="FFFFFF"/>
+            </a:solidFill>
+            <a:prstDash val="solid"/>
+          </a:ln>
+        </p:spPr>
+      </p:sp>
+      <p:sp>
+        <p:nvSpPr>
+          <p:cNvPr id="59" name="dot syn 72"/>
+          <p:cNvSpPr/>
+          <p:nvPr/>
+        </p:nvSpPr>
+        <p:spPr>
+          <a:xfrm>
+            <a:off x="5271059" y="4658868"/>
+            <a:ext cx="118872" cy="118872"/>
+          </a:xfrm>
+          <a:prstGeom prst="ellipse">
+            <a:avLst/>
+          </a:prstGeom>
+          <a:solidFill>
+            <a:schemeClr val="accent1"/>
+          </a:solidFill>
+          <a:ln w="6350">
+            <a:solidFill>
+              <a:srgbClr val="FFFFFF"/>
+            </a:solidFill>
+            <a:prstDash val="solid"/>
+          </a:ln>
+        </p:spPr>
+      </p:sp>
+      <p:sp>
+        <p:nvSpPr>
+          <p:cNvPr id="60" name="dot syn 73"/>
+          <p:cNvSpPr/>
+          <p:nvPr/>
+        </p:nvSpPr>
+        <p:spPr>
+          <a:xfrm>
+            <a:off x="5271059" y="4421124"/>
+            <a:ext cx="118872" cy="118872"/>
+          </a:xfrm>
+          <a:prstGeom prst="ellipse">
+            <a:avLst/>
+          </a:prstGeom>
+          <a:solidFill>
+            <a:schemeClr val="accent1"/>
+          </a:solidFill>
+          <a:ln w="6350">
+            <a:solidFill>
+              <a:srgbClr val="FFFFFF"/>
+            </a:solidFill>
+            <a:prstDash val="solid"/>
+          </a:ln>
+        </p:spPr>
+      </p:sp>
+      <p:sp>
+        <p:nvSpPr>
+          <p:cNvPr id="61" name="glance heading"/>
           <p:cNvSpPr txBox="1"/>
           <p:nvPr/>
         </p:nvSpPr>
@@ -23270,7 +24428,7 @@
       </p:sp>
       <p:sp>
         <p:nvSpPr>
-          <p:cNvPr id="17" name="tile contexts in four splits on disjoint seeds"/>
+          <p:cNvPr id="62" name="tile contexts in four splits on disjoint seeds"/>
           <p:cNvSpPr/>
           <p:nvPr/>
         </p:nvSpPr>
@@ -23292,7 +24450,7 @@
       </p:sp>
       <p:sp>
         <p:nvSpPr>
-          <p:cNvPr id="18" name="value contexts in four splits on disjoint seeds"/>
+          <p:cNvPr id="63" name="value contexts in four splits on disjoint seeds"/>
           <p:cNvSpPr txBox="1"/>
           <p:nvPr/>
         </p:nvSpPr>
@@ -23328,7 +24486,7 @@
       </p:sp>
       <p:sp>
         <p:nvSpPr>
-          <p:cNvPr id="19" name="label contexts in four splits on disjoint seeds"/>
+          <p:cNvPr id="64" name="label contexts in four splits on disjoint seeds"/>
           <p:cNvSpPr txBox="1"/>
           <p:nvPr/>
         </p:nvSpPr>
@@ -23364,7 +24522,7 @@
       </p:sp>
       <p:sp>
         <p:nvSpPr>
-          <p:cNvPr id="20" name="tile elements: pipes, cable trays, ducts and conduits; six trades"/>
+          <p:cNvPr id="65" name="tile elements: pipes, cable trays, ducts and conduits; six trades"/>
           <p:cNvSpPr/>
           <p:nvPr/>
         </p:nvSpPr>
@@ -23386,7 +24544,7 @@
       </p:sp>
       <p:sp>
         <p:nvSpPr>
-          <p:cNvPr id="21" name="value elements: pipes, cable trays, ducts and conduits; six trades"/>
+          <p:cNvPr id="66" name="value elements: pipes, cable trays, ducts and conduits; six trades"/>
           <p:cNvSpPr txBox="1"/>
           <p:nvPr/>
         </p:nvSpPr>
@@ -23422,7 +24580,7 @@
       </p:sp>
       <p:sp>
         <p:nvSpPr>
-          <p:cNvPr id="22" name="label elements: pipes, cable trays, ducts and conduits; six trades"/>
+          <p:cNvPr id="67" name="label elements: pipes, cable trays, ducts and conduits; six trades"/>
           <p:cNvSpPr txBox="1"/>
           <p:nvPr/>
         </p:nvSpPr>
@@ -23458,7 +24616,7 @@
       </p:sp>
       <p:sp>
         <p:nvSpPr>
-          <p:cNvPr id="23" name="tile eight difficulty tiers by exact element count"/>
+          <p:cNvPr id="68" name="tile eight difficulty tiers by exact element count"/>
           <p:cNvSpPr/>
           <p:nvPr/>
         </p:nvSpPr>
@@ -23480,7 +24638,7 @@
       </p:sp>
       <p:sp>
         <p:nvSpPr>
-          <p:cNvPr id="24" name="value eight difficulty tiers by exact element count"/>
+          <p:cNvPr id="69" name="value eight difficulty tiers by exact element count"/>
           <p:cNvSpPr txBox="1"/>
           <p:nvPr/>
         </p:nvSpPr>
@@ -23516,7 +24674,7 @@
       </p:sp>
       <p:sp>
         <p:nvSpPr>
-          <p:cNvPr id="25" name="label eight difficulty tiers by exact element count"/>
+          <p:cNvPr id="70" name="label eight difficulty tiers by exact element count"/>
           <p:cNvSpPr txBox="1"/>
           <p:nvPr/>
         </p:nvSpPr>
@@ -23552,7 +24710,7 @@
       </p:sp>
       <p:sp>
         <p:nvSpPr>
-          <p:cNvPr id="26" name="tile the brief, not the answer: no support-assembly information"/>
+          <p:cNvPr id="71" name="tile the brief, not the answer: no support-assembly information"/>
           <p:cNvSpPr/>
           <p:nvPr/>
         </p:nvSpPr>
@@ -23574,7 +24732,7 @@
       </p:sp>
       <p:sp>
         <p:nvSpPr>
-          <p:cNvPr id="27" name="value the brief, not the answer: no support-assembly information"/>
+          <p:cNvPr id="72" name="value the brief, not the answer: no support-assembly information"/>
           <p:cNvSpPr txBox="1"/>
           <p:nvPr/>
         </p:nvSpPr>
@@ -23610,7 +24768,7 @@
       </p:sp>
       <p:sp>
         <p:nvSpPr>
-          <p:cNvPr id="28" name="label the brief, not the answer: no support-assembly information"/>
+          <p:cNvPr id="73" name="label the brief, not the answer: no support-assembly information"/>
           <p:cNvSpPr txBox="1"/>
           <p:nvPr/>
         </p:nvSpPr>
@@ -23646,7 +24804,7 @@
       </p:sp>
       <p:sp>
         <p:nvSpPr>
-          <p:cNvPr id="29" name="tile every constant with its source, or declared a design choice"/>
+          <p:cNvPr id="74" name="tile every constant with its source, or declared a design choice"/>
           <p:cNvSpPr/>
           <p:nvPr/>
         </p:nvSpPr>
@@ -23668,7 +24826,7 @@
       </p:sp>
       <p:sp>
         <p:nvSpPr>
-          <p:cNvPr id="30" name="value every constant with its source, or declared a design choice"/>
+          <p:cNvPr id="75" name="value every constant with its source, or declared a design choice"/>
           <p:cNvSpPr txBox="1"/>
           <p:nvPr/>
         </p:nvSpPr>
@@ -23704,7 +24862,7 @@
       </p:sp>
       <p:sp>
         <p:nvSpPr>
-          <p:cNvPr id="31" name="label every constant with its source, or declared a design choice"/>
+          <p:cNvPr id="76" name="label every constant with its source, or declared a design choice"/>
           <p:cNvSpPr txBox="1"/>
           <p:nvPr/>
         </p:nvSpPr>
@@ -23740,7 +24898,7 @@
       </p:sp>
       <p:sp>
         <p:nvSpPr>
-          <p:cNvPr id="32" name="tile data CC BY 4.0, code MIT; a seeded, deterministic generator"/>
+          <p:cNvPr id="77" name="tile data CC BY 4.0, code MIT; a seeded, deterministic generator"/>
           <p:cNvSpPr/>
           <p:nvPr/>
         </p:nvSpPr>
@@ -23762,7 +24920,7 @@
       </p:sp>
       <p:sp>
         <p:nvSpPr>
-          <p:cNvPr id="33" name="value data CC BY 4.0, code MIT; a seeded, deterministic generator"/>
+          <p:cNvPr id="78" name="value data CC BY 4.0, code MIT; a seeded, deterministic generator"/>
           <p:cNvSpPr txBox="1"/>
           <p:nvPr/>
         </p:nvSpPr>
@@ -23798,7 +24956,7 @@
       </p:sp>
       <p:sp>
         <p:nvSpPr>
-          <p:cNvPr id="34" name="label data CC BY 4.0, code MIT; a seeded, deterministic generator"/>
+          <p:cNvPr id="79" name="label data CC BY 4.0, code MIT; a seeded, deterministic generator"/>
           <p:cNvSpPr txBox="1"/>
           <p:nvPr/>
         </p:nvSpPr>

--- a/docs/CrossMEP_CIBW78_talk.pptx
+++ b/docs/CrossMEP_CIBW78_talk.pptx
@@ -128,12 +128,12 @@
   <p:extLst>
     <p:ext uri="{521415D9-36F7-43E2-AB2F-B90AF26B5E84}">
       <p14:sectionLst xmlns:p14="http://schemas.microsoft.com/office/powerpoint/2010/main">
-        <p14:section name="Opening" id="{69f9f7ff-88d0-815e-977e-921b4825ca9d}">
+        <p14:section name="Opening" id="{dfe1afe3-a823-4255-9608-39023fa2363f}">
           <p14:sldIdLst>
             <p14:sldId id="256"/>
           </p14:sldIdLst>
         </p14:section>
-        <p14:section name="Motivation" id="{f59603e7-eb3f-e8b0-ae36-1d4d9780f69b}">
+        <p14:section name="Motivation" id="{6e67dcb6-a399-d06d-1bd0-da367e61f274}">
           <p14:sldIdLst>
             <p14:sldId id="257"/>
             <p14:sldId id="258"/>
@@ -141,7 +141,7 @@
             <p14:sldId id="260"/>
           </p14:sldIdLst>
         </p14:section>
-        <p14:section name="The dataset" id="{8635cb3a-0985-fac6-02e0-9ef048966470}">
+        <p14:section name="The dataset" id="{6d75c548-553a-c7dd-bd8c-6056f11ca4b4}">
           <p14:sldIdLst>
             <p14:sldId id="261"/>
             <p14:sldId id="262"/>
@@ -150,14 +150,14 @@
             <p14:sldId id="265"/>
           </p14:sldIdLst>
         </p14:section>
-        <p14:section name="Experiments" id="{8126c942-6515-c622-7dd8-4dcdd1accb35}">
+        <p14:section name="Experiments" id="{6d43f88d-be2f-835f-3355-424698a4ddb9}">
           <p14:sldIdLst>
             <p14:sldId id="266"/>
             <p14:sldId id="267"/>
             <p14:sldId id="268"/>
           </p14:sldIdLst>
         </p14:section>
-        <p14:section name="Use" id="{9fb13e76-6dd3-4563-fbd1-2c6290d770dc}">
+        <p14:section name="Use" id="{fea792df-5679-e342-e44a-203daf60c439}">
           <p14:sldIdLst>
             <p14:sldId id="269"/>
             <p14:sldId id="270"/>
@@ -165,7 +165,7 @@
             <p14:sldId id="272"/>
           </p14:sldIdLst>
         </p14:section>
-        <p14:section name="Appendix" id="{ec553587-b12e-489b-0c3a-57873fd6345d}">
+        <p14:section name="Appendix" id="{f19ce314-4422-d3ab-a5cf-67ae5898172f}">
           <p14:sldIdLst>
             <p14:sldId id="273"/>
             <p14:sldId id="274"/>
@@ -2115,7 +2115,7 @@
           <a:p>
             <a:r>
               <a:rPr lang="en-US" dirty="0"/>
-              <a:t>Here's one benchmark context per tier. C1 is a single element, the most common support in any building. By C8 you have eight services on three rows. Within a tier everything else varies: kinds, trades, surfaces, stacking. So the element count is the one controlled axis of difficulty. And notice the walls: the section rotates, and electrical sits above water. (5:05)</a:t>
+              <a:t>Here's one benchmark context per tier. C1 is a single element, the most common support in any building. By C8 you have eight services on three rows. Within a tier everything else varies: kinds, trades, surfaces, stacking. So the element count is the one controlled axis of difficulty. And notice the walls: the section rotates, and electrical sits above water. (5:10)</a:t>
             </a:r>
             <a:endParaRPr lang="en-US" dirty="0"/>
           </a:p>
@@ -2203,7 +2203,7 @@
           <a:p>
             <a:r>
               <a:rPr lang="en-US" dirty="0"/>
-              <a:t>Now three analyses. The first is a design check, not a discovery: does difficulty grow with the tier? The count is fixed by construction, and load and congestion follow from the rules, so this shows the dataset behaves as designed. The load at the support rises with the tier, from about 0.3 to 2.0 kilonewtons. The closest gap narrows at every step, from 130 to about 51 millimeters. So: report methods tier by tier. (5:30)</a:t>
+              <a:t>Now three analyses. The first is a design check, not a discovery: does difficulty grow with the tier? The count is fixed by construction, and load and congestion follow from the rules, so this shows the dataset behaves as designed. The load at the support rises with the tier, from about 0.3 to 2.0 kilonewtons. The closest gap narrows at every step, from 130 to about 51 millimeters. So: report methods tier by tier. (5:35)</a:t>
             </a:r>
             <a:endParaRPr lang="en-US" dirty="0"/>
           </a:p>
@@ -2291,7 +2291,7 @@
           <a:p>
             <a:r>
               <a:rPr lang="en-US" dirty="0"/>
-              <a:t>The second analysis is the one the generator could fail. Is the spacing realistic in a building it has never seen? The gap distribution was fitted on a residential duplex. We kept a second open building aside, a medical-dental clinic, cut it into sections every 250 millimeters, the way a context is defined, and measured the gaps between pipes running side by side. On the right, the distances. Generator to clinic: 32 millimeters. That is above the 8 a perfect generator would show, so not a perfect match, but about as close as the duplex's own two models are to each other. A fixed 25-millimeter gap would be about 190 off. (6:00)</a:t>
+              <a:t>The second analysis is the one the generator could fail. Is the spacing realistic in a building it has never seen? The gap distribution was fitted on a residential duplex. We kept a second open building aside, a medical-dental clinic, cut it into sections every 250 millimeters, the way a context is defined, and measured the gaps between pipes running side by side. On the right, the distances. Generator to clinic: 32 millimeters. That is above the 8 a perfect generator would show, so not a perfect match, but about as close as the duplex's own two models are to each other. A fixed 25-millimeter gap would be about 190 off. (6:05)</a:t>
             </a:r>
             <a:endParaRPr lang="en-US" dirty="0"/>
           </a:p>
@@ -2379,7 +2379,7 @@
           <a:p>
             <a:r>
               <a:rPr lang="en-US" dirty="0"/>
-              <a:t>The third analysis is a use of the dataset, not a test of it: what must a catalog of clamps cover? Our paper's two-size catalog attaches 14.5 percent of the pipes, with an interval of 13 to 16, all one size, DN40. Load is never the limit, and trays, ducts and conduits aren't covered at all. On the right is what the dataset asks of any catalog: two well-placed sizes could attach 38 percent, six sizes 76, fifteen sizes every pipe. So 'what should the catalog contain' becomes a measurement. (6:45)</a:t>
+              <a:t>The third analysis is a use of the dataset, not a test of it: what must a catalog of clamps cover? Our paper's two-size catalog attaches 14.5 percent of the pipes, with an interval of 13 to 16, all one size, DN40. Load is never the limit, and trays, ducts and conduits aren't covered at all. On the right is what the dataset asks of any catalog: two well-placed sizes could attach 38 percent, six sizes 76, fifteen sizes every pipe. So 'what should the catalog contain' becomes a measurement. (6:50)</a:t>
             </a:r>
             <a:endParaRPr lang="en-US" dirty="0"/>
           </a:p>
@@ -2467,7 +2467,7 @@
           <a:p>
             <a:r>
               <a:rPr lang="en-US" dirty="0"/>
-              <a:t>Let me show it. This is the Generator Studio. I choose what crosses the hanger, a tier or an exact mix, and a seed. Out comes the section a support designer receives, drawn the way an engineer would issue it: every service at true size, its level below the slab, its load, the closest clear gap, and the same run in 3D. Every section is a stored output of the released generator, with the Python call that reproduces it. Scan the code to try it yourself. [Live: switch to the studio, click C3, then Generate another twice, then Exact mix with a duct. If the demo fails, stay on this slide; slide 18 shows two more sections. Before the talk: open the studio once with internet, set its link sharing to public, scan the QR from a phone not logged in.] (7:20)</a:t>
+              <a:t>Let me show it. This is the Generator Studio. I choose what crosses the hanger, a tier or an exact mix, and a seed. Out comes the section a support designer receives, drawn the way an engineer would issue it: every service at true size, its level below the slab, its load, the closest clear gap, and the same run in 3D. Every section is a stored output of the released generator, with the Python call that reproduces it. Scan the code to try it yourself. [Live: switch to the studio, click C3, then Generate another twice, then Exact mix with a duct. If the demo fails, stay on this slide; slide 18 shows two more sections. Before the talk: open the studio once with internet, set its link sharing to public, scan the QR from a phone not logged in.] (7:25)</a:t>
             </a:r>
             <a:endParaRPr lang="en-US" dirty="0"/>
           </a:p>
@@ -2555,7 +2555,7 @@
           <a:p>
             <a:r>
               <a:rPr lang="en-US" dirty="0"/>
-              <a:t>Using it takes a few lines: load a split, filter by composition, or generate your own mix. Because there are no labels, the same files serve reinforcement learning, constraint programming, and benchmarking people. We ship the scoring too. Train on the generator, from C1 up to C8. Evaluate on the benchmark, the same 125 contexts per tier for every method. Report per tier, with 95 percent intervals and paired tests. (8:35)</a:t>
+              <a:t>Using it takes a few lines: load a split, filter by composition, or generate your own mix. Because there are no labels, the same files serve reinforcement learning, constraint programming, and benchmarking people. We ship the scoring too. Train on the generator, from C1 up to C8. Evaluate on the benchmark, the same 125 contexts per tier for every method. Report per tier, with 95 percent intervals and paired tests. (8:40)</a:t>
             </a:r>
             <a:endParaRPr lang="en-US" dirty="0"/>
           </a:p>
@@ -2643,7 +2643,7 @@
           <a:p>
             <a:r>
               <a:rPr lang="en-US" dirty="0"/>
-              <a:t>A word on scope. CrossMEP is one section at one support. Pipe spacing was checked on two open buildings; the rest rests on practice and standards, and the trade mix is a design choice. It's not for structural design of real installations. Next: a public checker, with best-known costs, so we can compare methods on the answer; the catalog as an input; and a real test set from commercial projects, with supports designed by engineers. That's where I'd value your eye. (9:00)</a:t>
+              <a:t>A word on scope. CrossMEP is one section at one support. Pipe spacing was checked on two open buildings; the rest rests on practice and standards, and the trade mix is a design choice. It's not for structural design of real installations. Next: a public checker, with best-known costs, so we can compare methods on the answer; the catalog as an input; and a real test set from commercial projects, with supports designed by engineers. That's where I'd value your eye. (9:05)</a:t>
             </a:r>
             <a:endParaRPr lang="en-US" dirty="0"/>
           </a:p>
@@ -2731,7 +2731,7 @@
           <a:p>
             <a:r>
               <a:rPr lang="en-US" dirty="0"/>
-              <a:t>To sum up: CrossMEP is the brief, not the answer. Seven thousand support-design problems, every constant sourced or declared a design choice, pipe spacing checked on two open buildings, and all of it open. If you coordinate services or design supports, try the studio and tell me what looks wrong. Thank you. (9:35)</a:t>
+              <a:t>To sum up: CrossMEP is the brief, not the answer. Seven thousand support-design problems, every constant sourced or declared a design choice, pipe spacing checked on two open buildings, and all of it open. If you coordinate services or design supports, try the studio and tell me what looks wrong. Thank you. (9:40)</a:t>
             </a:r>
             <a:endParaRPr lang="en-US" dirty="0"/>
           </a:p>
@@ -3523,7 +3523,7 @@
           <a:p>
             <a:r>
               <a:rPr lang="en-US" dirty="0"/>
-              <a:t>Here is the idea behind CrossMEP. The real designs we had were few, and they sat in one corner of the design space: one kind of project, one trade mix. A method tuned to them measures fit to that project, and project models are proprietary anyway. So we generate. CrossMEP covers the space by construction: uniform over the tiers, or shaped to whatever mix you ask for. Seven thousand contexts in eight tiers, deliberately unlabeled, every constant sourced or declared, and all of it open. (2:20)</a:t>
+              <a:t>Here is the idea behind CrossMEP. The real designs we had were few, and they sat in one corner of the design space: one kind of project, one trade mix. A method tuned to them measures fit to that project. So we generate. CrossMEP covers the space by construction, and without limit: a new seed is a new set of problems, uniform over the tiers, or shaped to whatever mix you ask for. The seven thousand contexts in eight tiers are the release, not the ceiling: deliberately unlabeled, every constant sourced or declared, and all of it open. (2:20)</a:t>
             </a:r>
             <a:endParaRPr lang="en-US" dirty="0"/>
           </a:p>
@@ -3611,7 +3611,7 @@
           <a:p>
             <a:r>
               <a:rPr lang="en-US" dirty="0"/>
-              <a:t>Here's one context: a two-dimensional section at one support location. Each element has its kind, service and trade, its size, its insulation, and its load, which is weight per metre times the span it was sized at, plus its position. Add the surface, a slab or a wall, and that's all. What you won't find is the support: no channel, no rods, no anchors, and no correct answer, because a feasible support depends on the catalog you build from. The context is the brief. The assembly is the answer. (2:55)</a:t>
+              <a:t>Here's one context: a two-dimensional section at one support location. Each element has its kind, service and trade, its size, its insulation, and its load, which is weight per metre times the span it was sized at, plus its position. Add the surface, a slab or a wall, and that's all. What you won't find is the support: no channel, no rods, no anchors, and no correct answer, because a feasible support depends on the catalog you build from. The context is the brief. The assembly is the answer. (3:00)</a:t>
             </a:r>
             <a:endParaRPr lang="en-US" dirty="0"/>
           </a:p>
@@ -3699,7 +3699,7 @@
           <a:p>
             <a:r>
               <a:rPr lang="en-US" dirty="0"/>
-              <a:t>How do we make a context? Not by free randomness, but by rules an engineer would recognize. The tier fixes how many elements there are. We pick the surface and fill it the way trades really run services: hot and cold together, flow and return together, conduits in groups, bulky services nearest the slab. Gaps between neighbors are drawn from gaps measured on a built project, never below twenty-five millimeters. On walls, electrical stays above water. Every context is checked, and it's seeded: the same seed gives the same file, byte for byte. (3:35)</a:t>
+              <a:t>How do we make a context? Not by free randomness, but by rules an engineer would recognize. The tier fixes how many elements there are. We pick the surface and fill it the way trades really run services: hot and cold together, flow and return together, conduits in groups, bulky services nearest the slab. Gaps between neighbors are drawn from gaps measured on a built project, never below twenty-five millimeters. On walls, electrical stays above water. Every context is checked, and it's seeded: the same seed gives the same file, byte for byte. (3:40)</a:t>
             </a:r>
             <a:endParaRPr lang="en-US" dirty="0"/>
           </a:p>
@@ -3787,7 +3787,7 @@
           <a:p>
             <a:r>
               <a:rPr lang="en-US" dirty="0"/>
-              <a:t>Where do the numbers come from? Three places. Sizes, weights and spans come from standards: European steel pipe and duct standards, IEC for conduits and trays, ASME for spans, the German GEG for insulation. How close neighbors sit comes from measured open buildings. And a few things are simply our choices, like the trade mix, and we label them that way. Loads are computed in code from all of this. (4:10)</a:t>
+              <a:t>Where do the numbers come from? Three places. Sizes, weights and spans come from standards: European steel pipe and duct standards, IEC for conduits and trays, ASME for spans, the German GEG for insulation. How close neighbors sit comes from measured open buildings. And a few things are simply our choices, like the trade mix, and we label them that way. Loads are computed in code from all of this. (4:20)</a:t>
             </a:r>
             <a:endParaRPr lang="en-US" dirty="0"/>
           </a:p>
@@ -3875,7 +3875,7 @@
           <a:p>
             <a:r>
               <a:rPr lang="en-US" dirty="0"/>
-              <a:t>The release has four splits on disjoint seeds, so a method is never tested on what it trained on: five thousand contexts for training, five hundred each for validation and test, and a benchmark of one thousand, a hundred and twenty-five per tier. Everything is plain JSON with a schema and a datasheet. (4:40)</a:t>
+              <a:t>The release has four splits on disjoint seeds, so a method is never tested on what it trained on: five thousand contexts for training, five hundred each for validation and test, and a benchmark of one thousand, a hundred and twenty-five per tier. Everything is plain JSON with a schema and a datasheet. (4:45)</a:t>
             </a:r>
             <a:endParaRPr lang="en-US" dirty="0"/>
           </a:p>
@@ -23464,7 +23464,7 @@
                   <a:srgbClr val="52514E"/>
                 </a:solidFill>
               </a:rPr>
-              <a:t>the space filled by construction: uniform over the tiers, or any mix you ask for (generate_custom)</a:t>
+              <a:t>the space filled by construction, without limit: a new seed is a new set; uniform over the tiers, or any mix you ask for (generate_custom)</a:t>
             </a:r>
             <a:endParaRPr lang="en-US" sz="1400" dirty="0"/>
           </a:p>

--- a/docs/CrossMEP_CIBW78_talk.pptx
+++ b/docs/CrossMEP_CIBW78_talk.pptx
@@ -128,12 +128,12 @@
   <p:extLst>
     <p:ext uri="{521415D9-36F7-43E2-AB2F-B90AF26B5E84}">
       <p14:sectionLst xmlns:p14="http://schemas.microsoft.com/office/powerpoint/2010/main">
-        <p14:section name="Opening" id="{dfe1afe3-a823-4255-9608-39023fa2363f}">
+        <p14:section name="Opening" id="{cec6755c-285a-34b9-e910-83f32fa24f22}">
           <p14:sldIdLst>
             <p14:sldId id="256"/>
           </p14:sldIdLst>
         </p14:section>
-        <p14:section name="Motivation" id="{6e67dcb6-a399-d06d-1bd0-da367e61f274}">
+        <p14:section name="Motivation" id="{7cf64c2c-af39-2147-94c2-9ccf7f88dffa}">
           <p14:sldIdLst>
             <p14:sldId id="257"/>
             <p14:sldId id="258"/>
@@ -141,7 +141,7 @@
             <p14:sldId id="260"/>
           </p14:sldIdLst>
         </p14:section>
-        <p14:section name="The dataset" id="{6d75c548-553a-c7dd-bd8c-6056f11ca4b4}">
+        <p14:section name="The dataset" id="{970a061f-d158-c9b1-bd39-49c4c713c698}">
           <p14:sldIdLst>
             <p14:sldId id="261"/>
             <p14:sldId id="262"/>
@@ -150,14 +150,14 @@
             <p14:sldId id="265"/>
           </p14:sldIdLst>
         </p14:section>
-        <p14:section name="Experiments" id="{6d43f88d-be2f-835f-3355-424698a4ddb9}">
+        <p14:section name="Experiments" id="{30038198-7fda-66a7-9b81-4575a0d0781b}">
           <p14:sldIdLst>
             <p14:sldId id="266"/>
             <p14:sldId id="267"/>
             <p14:sldId id="268"/>
           </p14:sldIdLst>
         </p14:section>
-        <p14:section name="Use" id="{fea792df-5679-e342-e44a-203daf60c439}">
+        <p14:section name="Use" id="{41bea3ca-0fd5-9612-f129-51215dedda8f}">
           <p14:sldIdLst>
             <p14:sldId id="269"/>
             <p14:sldId id="270"/>
@@ -165,7 +165,7 @@
             <p14:sldId id="272"/>
           </p14:sldIdLst>
         </p14:section>
-        <p14:section name="Appendix" id="{f19ce314-4422-d3ab-a5cf-67ae5898172f}">
+        <p14:section name="Appendix" id="{ef06d59e-7076-9b44-c31e-cf7dcb0a1730}">
           <p14:sldIdLst>
             <p14:sldId id="273"/>
             <p14:sldId id="274"/>
@@ -2115,7 +2115,7 @@
           <a:p>
             <a:r>
               <a:rPr lang="en-US" dirty="0"/>
-              <a:t>Here's one benchmark context per tier. C1 is a single element, the most common support in any building. By C8 you have eight services on three rows. Within a tier everything else varies: kinds, trades, surfaces, stacking. So the element count is the one controlled axis of difficulty. And notice the walls: the section rotates, and electrical sits above water. (5:10)</a:t>
+              <a:t>Here's one benchmark context per tier. C1 is a single element, the most common support in any building. By C8 you have eight services on three rows. Within a tier everything else varies: kinds, trades, surfaces, stacking. So the element count is the one controlled axis of difficulty. And notice the walls: the section rotates, and electrical sits above water. (5:00)</a:t>
             </a:r>
             <a:endParaRPr lang="en-US" dirty="0"/>
           </a:p>
@@ -2203,7 +2203,7 @@
           <a:p>
             <a:r>
               <a:rPr lang="en-US" dirty="0"/>
-              <a:t>Now three analyses. The first is a design check, not a discovery: does difficulty grow with the tier? The count is fixed by construction, and load and congestion follow from the rules, so this shows the dataset behaves as designed. The load at the support rises with the tier, from about 0.3 to 2.0 kilonewtons. The closest gap narrows at every step, from 130 to about 51 millimeters. So: report methods tier by tier. (5:35)</a:t>
+              <a:t>Now three analyses. The first is a design check, not a discovery: does difficulty grow with the tier? The count is fixed by construction, and load and congestion follow from the rules, so this shows the dataset behaves as designed. The load at the support rises with the tier, from about 0.3 to 2.0 kilonewtons. The closest gap narrows at every step, from 130 to about 51 millimeters. So: report methods tier by tier. (5:25)</a:t>
             </a:r>
             <a:endParaRPr lang="en-US" dirty="0"/>
           </a:p>
@@ -2291,7 +2291,7 @@
           <a:p>
             <a:r>
               <a:rPr lang="en-US" dirty="0"/>
-              <a:t>The second analysis is the one the generator could fail. Is the spacing realistic in a building it has never seen? The gap distribution was fitted on a residential duplex. We kept a second open building aside, a medical-dental clinic, cut it into sections every 250 millimeters, the way a context is defined, and measured the gaps between pipes running side by side. On the right, the distances. Generator to clinic: 32 millimeters. That is above the 8 a perfect generator would show, so not a perfect match, but about as close as the duplex's own two models are to each other. A fixed 25-millimeter gap would be about 190 off. (6:05)</a:t>
+              <a:t>The second analysis is the one the generator could fail. Is the spacing realistic in a building it has never seen? The gap distribution was fitted on a residential duplex. We kept a second open building aside, a medical-dental clinic, cut it into sections every 250 millimeters, the way a context is defined, and measured the gaps between pipes running side by side. On the right, the distances. Generator to clinic: 32 millimeters. That is above the 8 a perfect generator would show, so not a perfect match, but about as close as the duplex's own two models are to each other. A fixed 25-millimeter gap would be about 190 off. (5:55)</a:t>
             </a:r>
             <a:endParaRPr lang="en-US" dirty="0"/>
           </a:p>
@@ -2379,7 +2379,7 @@
           <a:p>
             <a:r>
               <a:rPr lang="en-US" dirty="0"/>
-              <a:t>The third analysis is a use of the dataset, not a test of it: what must a catalog of clamps cover? Our paper's two-size catalog attaches 14.5 percent of the pipes, with an interval of 13 to 16, all one size, DN40. Load is never the limit, and trays, ducts and conduits aren't covered at all. On the right is what the dataset asks of any catalog: two well-placed sizes could attach 38 percent, six sizes 76, fifteen sizes every pipe. So 'what should the catalog contain' becomes a measurement. (6:50)</a:t>
+              <a:t>The third analysis is a use of the dataset, not a test of it: what must a catalog of clamps cover? Our paper's two-size catalog attaches 14.5 percent of the pipes, with an interval of 13 to 16, all one size, DN40. Load is never the limit, and trays, ducts and conduits aren't covered at all. On the right is what the dataset asks of any catalog: two well-placed sizes could attach 38 percent, six sizes 76, fifteen sizes every pipe. So 'what should the catalog contain' becomes a measurement. (6:45)</a:t>
             </a:r>
             <a:endParaRPr lang="en-US" dirty="0"/>
           </a:p>
@@ -2467,7 +2467,7 @@
           <a:p>
             <a:r>
               <a:rPr lang="en-US" dirty="0"/>
-              <a:t>Let me show it. This is the Generator Studio. I choose what crosses the hanger, a tier or an exact mix, and a seed. Out comes the section a support designer receives, drawn the way an engineer would issue it: every service at true size, its level below the slab, its load, the closest clear gap, and the same run in 3D. Every section is a stored output of the released generator, with the Python call that reproduces it. Scan the code to try it yourself. [Live: switch to the studio, click C3, then Generate another twice, then Exact mix with a duct. If the demo fails, stay on this slide; slide 18 shows two more sections. Before the talk: open the studio once with internet, set its link sharing to public, scan the QR from a phone not logged in.] (7:25)</a:t>
+              <a:t>Let me show it. This is the Generator Studio. I choose what crosses the hanger, a tier or an exact mix, and a seed. Out comes the section a support designer receives, drawn the way an engineer would issue it: every service at true size, its level below the slab, its load, the closest clear gap, and the same run in 3D. Every section is a stored output of the released generator, with the Python call that reproduces it. Scan the code to try it yourself. [Live: switch to the studio, click C3, then Generate another twice, then Exact mix with a duct. If the demo fails, stay on this slide; slide 18 shows two more sections. Before the talk: open the studio once with internet, set its link sharing to public, scan the QR from a phone not logged in.] (7:20)</a:t>
             </a:r>
             <a:endParaRPr lang="en-US" dirty="0"/>
           </a:p>
@@ -2555,7 +2555,7 @@
           <a:p>
             <a:r>
               <a:rPr lang="en-US" dirty="0"/>
-              <a:t>Using it takes a few lines: load a split, filter by composition, or generate your own mix. Because there are no labels, the same files serve reinforcement learning, constraint programming, and benchmarking people. We ship the scoring too. Train on the generator, from C1 up to C8. Evaluate on the benchmark, the same 125 contexts per tier for every method. Report per tier, with 95 percent intervals and paired tests. (8:40)</a:t>
+              <a:t>Using it takes a few lines: load a split, filter by composition, or generate your own mix. Because there are no labels, the same files serve reinforcement learning, constraint programming, and benchmarking people. We ship the scoring too. Train on the generator, from C1 up to C8. Evaluate on the benchmark, the same 125 contexts per tier for every method. Report per tier, with 95 percent intervals and paired tests. (8:30)</a:t>
             </a:r>
             <a:endParaRPr lang="en-US" dirty="0"/>
           </a:p>
@@ -2643,7 +2643,7 @@
           <a:p>
             <a:r>
               <a:rPr lang="en-US" dirty="0"/>
-              <a:t>A word on scope. CrossMEP is one section at one support. Pipe spacing was checked on two open buildings; the rest rests on practice and standards, and the trade mix is a design choice. It's not for structural design of real installations. Next: a public checker, with best-known costs, so we can compare methods on the answer; the catalog as an input; and a real test set from commercial projects, with supports designed by engineers. That's where I'd value your eye. (9:05)</a:t>
+              <a:t>A word on scope. CrossMEP is one section at one support. Pipe spacing was checked on two open buildings; the rest rests on practice and standards, and the trade mix is a design choice. It's not for structural design of real installations. Next: a public checker, with best-known costs, so we can compare methods on the answer; the catalog as an input; and a real test set from commercial projects, with supports designed by engineers. That's where I'd value your eye. (9:00)</a:t>
             </a:r>
             <a:endParaRPr lang="en-US" dirty="0"/>
           </a:p>
@@ -2731,7 +2731,7 @@
           <a:p>
             <a:r>
               <a:rPr lang="en-US" dirty="0"/>
-              <a:t>To sum up: CrossMEP is the brief, not the answer. Seven thousand support-design problems, every constant sourced or declared a design choice, pipe spacing checked on two open buildings, and all of it open. If you coordinate services or design supports, try the studio and tell me what looks wrong. Thank you. (9:40)</a:t>
+              <a:t>To sum up: CrossMEP is the brief, not the answer. Seven thousand support-design problems, every constant sourced or declared a design choice, pipe spacing checked on two open buildings, and all of it open. If you coordinate services or design supports, try the studio and tell me what looks wrong. Thank you. (9:35)</a:t>
             </a:r>
             <a:endParaRPr lang="en-US" dirty="0"/>
           </a:p>
@@ -3523,7 +3523,7 @@
           <a:p>
             <a:r>
               <a:rPr lang="en-US" dirty="0"/>
-              <a:t>Here is the idea behind CrossMEP. The real designs we had were few, and they sat in one corner of the design space: one kind of project, one trade mix. A method tuned to them measures fit to that project. So we generate. CrossMEP covers the space by construction, and without limit: a new seed is a new set of problems, uniform over the tiers, or shaped to whatever mix you ask for. The seven thousand contexts in eight tiers are the release, not the ceiling: deliberately unlabeled, every constant sourced or declared, and all of it open. (2:20)</a:t>
+              <a:t>The real designs we had were few, and they sat in one corner of the design space: one kind of project, one trade mix. A method tuned to them measures fit to that project. So we generate. CrossMEP covers the space by construction, and without limit: a new seed is a new set of problems, uniform over the tiers, or shaped to whatever mix you ask for. The seven thousand contexts in eight tiers are the release, not the ceiling: deliberately unlabeled, every constant sourced or declared, and all of it open. (2:20)</a:t>
             </a:r>
             <a:endParaRPr lang="en-US" dirty="0"/>
           </a:p>
@@ -3699,7 +3699,7 @@
           <a:p>
             <a:r>
               <a:rPr lang="en-US" dirty="0"/>
-              <a:t>How do we make a context? Not by free randomness, but by rules an engineer would recognize. The tier fixes how many elements there are. We pick the surface and fill it the way trades really run services: hot and cold together, flow and return together, conduits in groups, bulky services nearest the slab. Gaps between neighbors are drawn from gaps measured on a built project, never below twenty-five millimeters. On walls, electrical stays above water. Every context is checked, and it's seeded: the same seed gives the same file, byte for byte. (3:40)</a:t>
+              <a:t>How do we make a context? Not by free randomness, but by rules an engineer would recognize. The tier fixes how many elements there are. We pick the surface and fill it the way trades really run services: hot and cold together, flow and return together, conduits in groups, bulky services nearest the slab. Gaps between neighbors are drawn from gaps measured on a built project, never below twenty-five millimeters. On walls, electrical stays above water. Every context is checked, and the same seed gives the same file, byte for byte. (3:35)</a:t>
             </a:r>
             <a:endParaRPr lang="en-US" dirty="0"/>
           </a:p>
@@ -3787,7 +3787,7 @@
           <a:p>
             <a:r>
               <a:rPr lang="en-US" dirty="0"/>
-              <a:t>Where do the numbers come from? Three places. Sizes, weights and spans come from standards: European steel pipe and duct standards, IEC for conduits and trays, ASME for spans, the German GEG for insulation. How close neighbors sit comes from measured open buildings. And a few things are simply our choices, like the trade mix, and we label them that way. Loads are computed in code from all of this. (4:20)</a:t>
+              <a:t>Where do the numbers come from? Three places. Sizes, weights and spans come from standards: European steel pipe and duct standards, IEC for conduits and trays, ASME for spans, the German GEG for insulation. How close neighbors sit comes from measured open buildings. And a few things are simply our choices, like the trade mix, and we label them that way. (4:15)</a:t>
             </a:r>
             <a:endParaRPr lang="en-US" dirty="0"/>
           </a:p>
@@ -3875,7 +3875,7 @@
           <a:p>
             <a:r>
               <a:rPr lang="en-US" dirty="0"/>
-              <a:t>The release has four splits on disjoint seeds, so a method is never tested on what it trained on: five thousand contexts for training, five hundred each for validation and test, and a benchmark of one thousand, a hundred and twenty-five per tier. Everything is plain JSON with a schema and a datasheet. (4:45)</a:t>
+              <a:t>The release has four splits on disjoint seeds, so a method is never tested on what it trained on: five thousand contexts for training, five hundred each for validation and test, and a benchmark of one thousand, a hundred and twenty-five per tier. Everything is plain JSON with a schema and a datasheet. (4:40)</a:t>
             </a:r>
             <a:endParaRPr lang="en-US" dirty="0"/>
           </a:p>

--- a/docs/CrossMEP_CIBW78_talk.pptx
+++ b/docs/CrossMEP_CIBW78_talk.pptx
@@ -27,9 +27,10 @@
     <p:sldId id="275" r:id="rId21"/>
     <p:sldId id="276" r:id="rId22"/>
     <p:sldId id="277" r:id="rId23"/>
+    <p:sldId id="278" r:id="rId24"/>
   </p:sldIdLst>
   <p:notesMasterIdLst>
-    <p:notesMasterId r:id="rId24"/>
+    <p:notesMasterId r:id="rId25"/>
   </p:notesMasterIdLst>
   <p:sldSz cx="12192000" cy="6858000"/>
   <p:notesSz cx="6858000" cy="12192000"/>
@@ -128,50 +129,51 @@
   <p:extLst>
     <p:ext uri="{521415D9-36F7-43E2-AB2F-B90AF26B5E84}">
       <p14:sectionLst xmlns:p14="http://schemas.microsoft.com/office/powerpoint/2010/main">
-        <p14:section name="Opening" id="{cec6755c-285a-34b9-e910-83f32fa24f22}">
+        <p14:section name="Opening" id="{63ca1c73-4561-f43b-4b3e-9b0e0627a27d}">
           <p14:sldIdLst>
             <p14:sldId id="256"/>
           </p14:sldIdLst>
         </p14:section>
-        <p14:section name="Motivation" id="{7cf64c2c-af39-2147-94c2-9ccf7f88dffa}">
+        <p14:section name="Motivation" id="{2091e7c1-8bb5-8c96-e63f-8e0469fd5161}">
           <p14:sldIdLst>
             <p14:sldId id="257"/>
             <p14:sldId id="258"/>
             <p14:sldId id="259"/>
             <p14:sldId id="260"/>
+            <p14:sldId id="261"/>
           </p14:sldIdLst>
         </p14:section>
-        <p14:section name="The dataset" id="{970a061f-d158-c9b1-bd39-49c4c713c698}">
+        <p14:section name="The dataset" id="{ebbc53fc-170a-4888-0f45-7e266a3b3642}">
           <p14:sldIdLst>
-            <p14:sldId id="261"/>
             <p14:sldId id="262"/>
             <p14:sldId id="263"/>
             <p14:sldId id="264"/>
             <p14:sldId id="265"/>
+            <p14:sldId id="266"/>
           </p14:sldIdLst>
         </p14:section>
-        <p14:section name="Experiments" id="{30038198-7fda-66a7-9b81-4575a0d0781b}">
+        <p14:section name="Experiments" id="{e29de9b3-6966-ee5a-28ae-27b9a92f3964}">
           <p14:sldIdLst>
-            <p14:sldId id="266"/>
             <p14:sldId id="267"/>
             <p14:sldId id="268"/>
+            <p14:sldId id="269"/>
           </p14:sldIdLst>
         </p14:section>
-        <p14:section name="Use" id="{41bea3ca-0fd5-9612-f129-51215dedda8f}">
+        <p14:section name="Use" id="{e633a837-f26c-6528-7199-da554c7faccb}">
           <p14:sldIdLst>
-            <p14:sldId id="269"/>
             <p14:sldId id="270"/>
             <p14:sldId id="271"/>
             <p14:sldId id="272"/>
+            <p14:sldId id="273"/>
           </p14:sldIdLst>
         </p14:section>
-        <p14:section name="Appendix" id="{ef06d59e-7076-9b44-c31e-cf7dcb0a1730}">
+        <p14:section name="Appendix" id="{9e3b50b4-3f4a-8972-0c8e-9fbaaee74257}">
           <p14:sldIdLst>
-            <p14:sldId id="273"/>
             <p14:sldId id="274"/>
             <p14:sldId id="275"/>
             <p14:sldId id="276"/>
             <p14:sldId id="277"/>
+            <p14:sldId id="278"/>
           </p14:sldIdLst>
         </p14:section>
       </p14:sectionLst>
@@ -2115,7 +2117,7 @@
           <a:p>
             <a:r>
               <a:rPr lang="en-US" dirty="0"/>
-              <a:t>Here's one benchmark context per tier. C1 is a single element, the most common support in any building. By C8 you have eight services on three rows. Within a tier everything else varies: kinds, trades, surfaces, stacking. So the element count is the one controlled axis of difficulty. And notice the walls: the section rotates, and electrical sits above water. (5:00)</a:t>
+              <a:t>The release has four splits on disjoint seeds, so a method is never tested on what it trained on: five thousand contexts for training, five hundred each for validation and test, and a benchmark of one thousand, a hundred and twenty-five per tier. Everything is plain JSON with a schema and a datasheet. (4:55)</a:t>
             </a:r>
             <a:endParaRPr lang="en-US" dirty="0"/>
           </a:p>
@@ -2203,7 +2205,7 @@
           <a:p>
             <a:r>
               <a:rPr lang="en-US" dirty="0"/>
-              <a:t>Now three analyses. The first is a design check, not a discovery: does difficulty grow with the tier? The count is fixed by construction, and load and congestion follow from the rules, so this shows the dataset behaves as designed. The load at the support rises with the tier, from about 0.3 to 2.0 kilonewtons. The closest gap narrows at every step, from 130 to about 51 millimeters. So: report methods tier by tier. (5:25)</a:t>
+              <a:t>Here's one benchmark context per tier. C1 is a single element, the most common support in any building. By C8 you have eight services on three rows. Within a tier everything else varies, so the element count is the one controlled axis of difficulty. And notice the walls: the section rotates, and electrical sits above water. (5:20)</a:t>
             </a:r>
             <a:endParaRPr lang="en-US" dirty="0"/>
           </a:p>
@@ -2291,7 +2293,7 @@
           <a:p>
             <a:r>
               <a:rPr lang="en-US" dirty="0"/>
-              <a:t>The second analysis is the one the generator could fail. Is the spacing realistic in a building it has never seen? The gap distribution was fitted on a residential duplex. We kept a second open building aside, a medical-dental clinic, cut it into sections every 250 millimeters, the way a context is defined, and measured the gaps between pipes running side by side. On the right, the distances. Generator to clinic: 32 millimeters. That is above the 8 a perfect generator would show, so not a perfect match, but about as close as the duplex's own two models are to each other. A fixed 25-millimeter gap would be about 190 off. (5:55)</a:t>
+              <a:t>Now three analyses. The first is a design check, not a discovery: the count is fixed by construction, and load and congestion follow from the rules, so this shows the dataset behaves as designed. The load at the support rises with the tier, from about 0.3 to 2.0 kilonewtons. The closest gap narrows at every step, from 130 to about 51 millimeters. (5:40)</a:t>
             </a:r>
             <a:endParaRPr lang="en-US" dirty="0"/>
           </a:p>
@@ -2379,7 +2381,7 @@
           <a:p>
             <a:r>
               <a:rPr lang="en-US" dirty="0"/>
-              <a:t>The third analysis is a use of the dataset, not a test of it: what must a catalog of clamps cover? Our paper's two-size catalog attaches 14.5 percent of the pipes, with an interval of 13 to 16, all one size, DN40. Load is never the limit, and trays, ducts and conduits aren't covered at all. On the right is what the dataset asks of any catalog: two well-placed sizes could attach 38 percent, six sizes 76, fifteen sizes every pipe. So 'what should the catalog contain' becomes a measurement. (6:45)</a:t>
+              <a:t>The second analysis is the one the generator could fail. Is the spacing realistic in a building it has never seen? The gap distribution was fitted on a residential duplex. We kept a second open building aside, a medical-dental clinic, cut it into sections every 250 millimeters, and measured the gaps between pipes running side by side. Generator to clinic: 32 millimeters. Above the 8 a perfect generator would show, but about as close as the duplex's own two models are to each other. A fixed 25-millimeter gap would be about 190 off. (6:05)</a:t>
             </a:r>
             <a:endParaRPr lang="en-US" dirty="0"/>
           </a:p>
@@ -2467,7 +2469,7 @@
           <a:p>
             <a:r>
               <a:rPr lang="en-US" dirty="0"/>
-              <a:t>Let me show it. This is the Generator Studio. I choose what crosses the hanger, a tier or an exact mix, and a seed. Out comes the section a support designer receives, drawn the way an engineer would issue it: every service at true size, its level below the slab, its load, the closest clear gap, and the same run in 3D. Every section is a stored output of the released generator, with the Python call that reproduces it. Scan the code to try it yourself. [Live: switch to the studio, click C3, then Generate another twice, then Exact mix with a duct. If the demo fails, stay on this slide; slide 18 shows two more sections. Before the talk: open the studio once with internet, set its link sharing to public, scan the QR from a phone not logged in.] (7:20)</a:t>
+              <a:t>The third analysis is a use of the dataset, not a test of it: what must a catalog of clamps cover? Our paper's two-size catalog attaches 14.5 percent of the pipes, with an interval of 13 to 16, all one size, DN40. Load is never the limit, and trays, ducts and conduits aren't covered at all. On the right is what the dataset asks of any catalog: two well-placed sizes could attach 38 percent, six sizes 76, fifteen sizes every pipe. So 'what should the catalog contain' becomes a measurement. (6:45)</a:t>
             </a:r>
             <a:endParaRPr lang="en-US" dirty="0"/>
           </a:p>
@@ -2555,7 +2557,7 @@
           <a:p>
             <a:r>
               <a:rPr lang="en-US" dirty="0"/>
-              <a:t>Using it takes a few lines: load a split, filter by composition, or generate your own mix. Because there are no labels, the same files serve reinforcement learning, constraint programming, and benchmarking people. We ship the scoring too. Train on the generator, from C1 up to C8. Evaluate on the benchmark, the same 125 contexts per tier for every method. Report per tier, with 95 percent intervals and paired tests. (8:30)</a:t>
+              <a:t>Let me show it. This is the Generator Studio. I choose what crosses the hanger, a tier or an exact mix, and a seed. Out comes the section a support designer receives, drawn the way an engineer would issue it: every service at true size, its level below the slab, its load, the closest clear gap, and the same run in 3D. Every section is a stored output of the released generator, with the call that reproduces it. Scan the code to try it yourself. [Live: switch to the studio, click C3, then Generate another twice, then Exact mix with a duct. If the demo fails, stay on this slide; slide 19 shows two more sections. Before the talk: open the studio once with internet, set its link sharing to public, scan the QR from a phone not logged in.] (7:25)</a:t>
             </a:r>
             <a:endParaRPr lang="en-US" dirty="0"/>
           </a:p>
@@ -2643,7 +2645,7 @@
           <a:p>
             <a:r>
               <a:rPr lang="en-US" dirty="0"/>
-              <a:t>A word on scope. CrossMEP is one section at one support. Pipe spacing was checked on two open buildings; the rest rests on practice and standards, and the trade mix is a design choice. It's not for structural design of real installations. Next: a public checker, with best-known costs, so we can compare methods on the answer; the catalog as an input; and a real test set from commercial projects, with supports designed by engineers. That's where I'd value your eye. (9:00)</a:t>
+              <a:t>Using it takes a few lines: load a split, filter by composition, or generate your own mix. With no labels, the same files serve reinforcement learning, constraint programming, and benchmarking. We ship the scoring too. Train on the generator, from C1 up to C8. Evaluate on the benchmark, the same 125 contexts per tier for every method. Report per tier, with 95 percent intervals and paired tests. (8:35)</a:t>
             </a:r>
             <a:endParaRPr lang="en-US" dirty="0"/>
           </a:p>
@@ -2731,7 +2733,7 @@
           <a:p>
             <a:r>
               <a:rPr lang="en-US" dirty="0"/>
-              <a:t>To sum up: CrossMEP is the brief, not the answer. Seven thousand support-design problems, every constant sourced or declared a design choice, pipe spacing checked on two open buildings, and all of it open. If you coordinate services or design supports, try the studio and tell me what looks wrong. Thank you. (9:35)</a:t>
+              <a:t>A word on scope. CrossMEP is one section at one support. Pipe spacing was checked on two open buildings; the rest rests on practice and standards, and the trade mix is a design choice. It's not for structural design of real installations. Next: a public checker, so we can compare methods on the answer; the catalog as an input; and a real test set from commercial projects, with supports designed by engineers. That's where I'd value your eye. (9:00)</a:t>
             </a:r>
             <a:endParaRPr lang="en-US" dirty="0"/>
           </a:p>
@@ -2819,7 +2821,7 @@
           <a:p>
             <a:r>
               <a:rPr lang="en-US" dirty="0"/>
-              <a:t>Backup for the live demo. Left: a wall section, six pipes in two rows, each labelled with its size, trade, insulation, offset from the wall and load at the support. Right: an exact mix on a slab, with a duct, a tray, conduits and pipes, their levels below the soffit and the closest clear gap.</a:t>
+              <a:t>To sum up: CrossMEP is the brief, not the answer. Seven thousand support-design problems, every constant sourced or declared a design choice, pipe spacing checked on two open buildings, and all of it open. If you coordinate services or design supports, try the studio and tell me what looks wrong. Thank you. (9:35)</a:t>
             </a:r>
             <a:endParaRPr lang="en-US" dirty="0"/>
           </a:p>
@@ -2907,7 +2909,7 @@
           <a:p>
             <a:r>
               <a:rPr lang="en-US" dirty="0"/>
-              <a:t>Backup: per-tier medians on the benchmark split, the distance to the held-out building, and the trend statistics behind experiment 1.</a:t>
+              <a:t>Backup for the live demo. Left: a wall section, six pipes in two rows, each labelled with its size, trade, insulation, offset from the wall and load at the support. Right: an exact mix on a slab, with a duct, a tray, conduits and pipes, their levels below the soffit and the closest clear gap.</a:t>
             </a:r>
             <a:endParaRPr lang="en-US" dirty="0"/>
           </a:p>
@@ -2995,7 +2997,7 @@
           <a:p>
             <a:r>
               <a:rPr lang="en-US" dirty="0"/>
-              <a:t>Here's what that looks like. In this hospital, every red mark is a place where pipes, ducts or cable trays hang from the structure. A modular support system groups several services onto one prefabricated frame, installed as a single unit: a structural support assembly. A hospital of two hundred thousand square feet needs about ten thousand of them. Each takes twenty minutes to two hours to design by hand, roughly a quarter of the whole MEP design effort. These are practitioner estimates. (0:30)</a:t>
+              <a:t>Here is the scale of it. In this hospital, every red mark is a place where pipes, ducts or cable trays hang from the structure. A modular support system groups several services onto one prefabricated frame: a structural support assembly. A hospital of two hundred thousand square feet needs about ten thousand of them. Each takes twenty minutes to two hours to design by hand, roughly a quarter of the whole MEP design effort. These are practitioner estimates. (0:30)</a:t>
             </a:r>
             <a:endParaRPr lang="en-US" dirty="0"/>
           </a:p>
@@ -3083,7 +3085,7 @@
           <a:p>
             <a:r>
               <a:rPr lang="en-US" dirty="0"/>
-              <a:t>Backup for questions on experiment 2: sample sizes, both weightings, the noise floor and the sensitivity of the result to the way the sections are cut.</a:t>
+              <a:t>Backup: per-tier medians on the benchmark split, the distance to the held-out building, and the trend statistics behind experiment 1.</a:t>
             </a:r>
             <a:endParaRPr lang="en-US" dirty="0"/>
           </a:p>
@@ -3171,7 +3173,7 @@
           <a:p>
             <a:r>
               <a:rPr lang="en-US" dirty="0"/>
-              <a:t>Backup for questions on experiment 3. Per tier, the benchmark has only 125 contexts, so its intervals are wide; the population estimate from two thousand generated contexts per tier shows the tiers are about equal. The headline depends on the attach-diameter rule and on bin-edge tolerance because one nominal size, DN100, sits 0.3 millimetres outside a bin. Only size and capacity are tested - clearance, insert orientation and anchors are not - so the coverage is an upper bound on what can be installed.</a:t>
+              <a:t>Backup for questions on experiment 2: sample sizes, both weightings, the noise floor and the sensitivity of the result to the way the sections are cut.</a:t>
             </a:r>
             <a:endParaRPr lang="en-US" dirty="0"/>
           </a:p>
@@ -3259,7 +3261,7 @@
           <a:p>
             <a:r>
               <a:rPr lang="en-US" dirty="0"/>
-              <a:t>Backup: what one stored context looks like - plain JSON, one object per context.</a:t>
+              <a:t>Backup for questions on experiment 3. Per tier, the benchmark has only 125 contexts, so its intervals are wide; the population estimate from two thousand generated contexts per tier shows the tiers are about equal. The headline depends on the attach-diameter rule and on bin-edge tolerance because one nominal size, DN100, sits 0.3 millimetres outside a bin. Only size and capacity are tested - clearance, insert orientation and anchors are not - so the coverage is an upper bound on what can be installed.</a:t>
             </a:r>
             <a:endParaRPr lang="en-US" dirty="0"/>
           </a:p>
@@ -3283,6 +3285,94 @@
             <a:fld id="{F7021451-1387-4CA6-816F-3879F97B5CBC}" type="slidenum">
               <a:rPr lang="en-US"/>
               <a:t>22</a:t>
+            </a:fld>
+            <a:endParaRPr lang="en-US"/>
+          </a:p>
+        </p:txBody>
+      </p:sp>
+    </p:spTree>
+    <p:extLst>
+      <p:ext uri="{BB962C8B-B14F-4D97-AF65-F5344CB8AC3E}">
+        <p14:creationId xmlns:p14="http://schemas.microsoft.com/office/powerpoint/2010/main" val="1024086991"/>
+      </p:ext>
+    </p:extLst>
+  </p:cSld>
+  <p:clrMapOvr>
+    <a:masterClrMapping/>
+  </p:clrMapOvr>
+</p:notes>
+</file>
+
+<file path=ppt/notesSlides/notesSlide23.xml><?xml version="1.0" encoding="utf-8"?>
+<p:notes xmlns:a="http://schemas.openxmlformats.org/drawingml/2006/main" xmlns:r="http://schemas.openxmlformats.org/officeDocument/2006/relationships" xmlns:p="http://schemas.openxmlformats.org/presentationml/2006/main">
+  <p:cSld>
+    <p:spTree>
+      <p:nvGrpSpPr>
+        <p:cNvPr id="1" name=""/>
+        <p:cNvGrpSpPr/>
+        <p:nvPr/>
+      </p:nvGrpSpPr>
+      <p:grpSpPr>
+        <a:xfrm>
+          <a:off x="0" y="0"/>
+          <a:ext cx="0" cy="0"/>
+          <a:chOff x="0" y="0"/>
+          <a:chExt cx="0" cy="0"/>
+        </a:xfrm>
+      </p:grpSpPr>
+      <p:sp>
+        <p:nvSpPr>
+          <p:cNvPr id="2" name="Slide Image Placeholder 1"/>
+          <p:cNvSpPr>
+            <a:spLocks noGrp="1" noRot="1" noChangeAspect="1"/>
+          </p:cNvSpPr>
+          <p:nvPr>
+            <p:ph type="sldImg"/>
+          </p:nvPr>
+        </p:nvSpPr>
+        <p:spPr/>
+      </p:sp>
+      <p:sp>
+        <p:nvSpPr>
+          <p:cNvPr id="3" name="Notes Placeholder 2"/>
+          <p:cNvSpPr>
+            <a:spLocks noGrp="1"/>
+          </p:cNvSpPr>
+          <p:nvPr>
+            <p:ph type="body" idx="1"/>
+          </p:nvPr>
+        </p:nvSpPr>
+        <p:spPr/>
+        <p:txBody>
+          <a:bodyPr/>
+          <a:lstStyle/>
+          <a:p>
+            <a:r>
+              <a:rPr lang="en-US" dirty="0"/>
+              <a:t>Backup: what one stored context looks like - plain JSON, one object per context.</a:t>
+            </a:r>
+            <a:endParaRPr lang="en-US" dirty="0"/>
+          </a:p>
+        </p:txBody>
+      </p:sp>
+      <p:sp>
+        <p:nvSpPr>
+          <p:cNvPr id="4" name="Slide Number Placeholder 3"/>
+          <p:cNvSpPr>
+            <a:spLocks noGrp="1"/>
+          </p:cNvSpPr>
+          <p:nvPr>
+            <p:ph type="sldNum" sz="quarter" idx="10"/>
+          </p:nvPr>
+        </p:nvSpPr>
+        <p:spPr/>
+        <p:txBody>
+          <a:bodyPr/>
+          <a:lstStyle/>
+          <a:p>
+            <a:fld id="{F7021451-1387-4CA6-816F-3879F97B5CBC}" type="slidenum">
+              <a:rPr lang="en-US"/>
+              <a:t>23</a:t>
             </a:fld>
             <a:endParaRPr lang="en-US"/>
           </a:p>
@@ -3347,7 +3437,7 @@
           <a:p>
             <a:r>
               <a:rPr lang="en-US" dirty="0"/>
-              <a:t>So what is the task? At ISARC we defined it like this. You're given a fixed catalog of components and the context: which services cross the hanger, and what they hang from. You must find a feasible assembly that carries them to the structure. Designers don't work from the whole model. They work from one section at each hanger, like this one. Today's tools coordinate and check; choosing the layout and the parts is still manual. That section is the unit of this work, and the unit of our dataset. (1:05)</a:t>
+              <a:t>What exactly is designed, and from what? At ISARC we defined the task like this. In: one cross-section at a hanger. The structure it hangs from, with its anchor zones, and the services crossing it, each with trade, position, size and weight per metre. We call that a context: the brief. Out: assemblies of catalog parts that carry those services to the structure, each checked for statics, anchors, connectors and buildability, up to ten, ranked by cost. The assembly is the answer. Keep the two apart: CrossMEP is contexts. It contains no assemblies. (1:05)</a:t>
             </a:r>
             <a:endParaRPr lang="en-US" dirty="0"/>
           </a:p>
@@ -3435,7 +3525,7 @@
           <a:p>
             <a:r>
               <a:rPr lang="en-US" dirty="0"/>
-              <a:t>What would a method look like? On the left, the brief: the context, and a catalog of parts with prices. The rules say which actions are legal; each action adds parts. In the middle, a black box chooses the next action: a rule table, a search, or a learned policy. A verifier judges every finished design, statics, anchors, buildability, and feeds pass or fail back. Out come verified designs, ranked by cost. Whatever sits in that black box, it needs problems to learn from, a fixed set to compare on, and problems that look like practice. (1:40)</a:t>
+              <a:t>Why has this resisted automation? Designers don't work from the whole model: after coordination they work from one section at each hanger, like this one. Today's tools coordinate and check; choosing the layout and the parts is still manual. Three reasons. The topology comes from experience. Code, load and material rules interact across thousands of combinations. And catalogs change faster than rule systems can be rewritten. (1:40)</a:t>
             </a:r>
             <a:endParaRPr lang="en-US" dirty="0"/>
           </a:p>
@@ -3523,7 +3613,7 @@
           <a:p>
             <a:r>
               <a:rPr lang="en-US" dirty="0"/>
-              <a:t>The real designs we had were few, and they sat in one corner of the design space: one kind of project, one trade mix. A method tuned to them measures fit to that project. So we generate. CrossMEP covers the space by construction, and without limit: a new seed is a new set of problems, uniform over the tiers, or shaped to whatever mix you ask for. The seven thousand contexts in eight tiers are the release, not the ceiling: deliberately unlabeled, every constant sourced or declared, and all of it open. (2:20)</a:t>
+              <a:t>What would a method look like? On the left, the context and a catalog of parts with prices. The rules say which actions are legal; each action adds parts. In the middle, a black box chooses the next action: a rule table, a search, or a learned policy. A verifier judges every finished design, statics, anchors, buildability, and feeds pass or fail back. Whatever sits in that black box, it needs problems to learn from, a fixed set to compare on, and problems that look like practice. (2:10)</a:t>
             </a:r>
             <a:endParaRPr lang="en-US" dirty="0"/>
           </a:p>
@@ -3611,7 +3701,7 @@
           <a:p>
             <a:r>
               <a:rPr lang="en-US" dirty="0"/>
-              <a:t>Here's one context: a two-dimensional section at one support location. Each element has its kind, service and trade, its size, its insulation, and its load, which is weight per metre times the span it was sized at, plus its position. Add the surface, a slab or a wall, and that's all. What you won't find is the support: no channel, no rods, no anchors, and no correct answer, because a feasible support depends on the catalog you build from. The context is the brief. The assembly is the answer. (3:00)</a:t>
+              <a:t>The real designs we had were few, and they sat in one corner of the design space: one kind of project, one trade mix. A method tuned to them measures fit to that project. So we generate. CrossMEP covers the space by construction, and without limit: a new seed is a new set of problems, uniform over the tiers, or shaped to whatever mix you ask for. The seven thousand contexts in eight tiers are the release, not the ceiling: deliberately unlabeled, every constant sourced or declared, and all of it open. (2:45)</a:t>
             </a:r>
             <a:endParaRPr lang="en-US" dirty="0"/>
           </a:p>
@@ -3699,7 +3789,7 @@
           <a:p>
             <a:r>
               <a:rPr lang="en-US" dirty="0"/>
-              <a:t>How do we make a context? Not by free randomness, but by rules an engineer would recognize. The tier fixes how many elements there are. We pick the surface and fill it the way trades really run services: hot and cold together, flow and return together, conduits in groups, bulky services nearest the slab. Gaps between neighbors are drawn from gaps measured on a built project, never below twenty-five millimeters. On walls, electrical stays above water. Every context is checked, and the same seed gives the same file, byte for byte. (3:35)</a:t>
+              <a:t>Here's one context: a two-dimensional section at one support location. Each element has its kind, service and trade, its size, its insulation, and its load, which is weight per metre times the span it was sized at, plus its position. Add the surface, a slab or a wall, and that's all. What you won't find is the support: no channel, no rods, no anchors, and no correct answer, because a feasible support depends on the catalog you build from. (3:25)</a:t>
             </a:r>
             <a:endParaRPr lang="en-US" dirty="0"/>
           </a:p>
@@ -3787,7 +3877,7 @@
           <a:p>
             <a:r>
               <a:rPr lang="en-US" dirty="0"/>
-              <a:t>Where do the numbers come from? Three places. Sizes, weights and spans come from standards: European steel pipe and duct standards, IEC for conduits and trays, ASME for spans, the German GEG for insulation. How close neighbors sit comes from measured open buildings. And a few things are simply our choices, like the trade mix, and we label them that way. (4:15)</a:t>
+              <a:t>How do we make a context? By rules an engineer would recognize, not free randomness. The tier fixes how many elements there are. We pick the surface and fill it the way trades really run services: hot and cold together, flow and return together, conduits in groups, bulky services nearest the slab. Gaps between neighbors are drawn from gaps measured on a built project, never below twenty-five millimeters. On walls, electrical stays above water. Every context is checked; same seed, same file, byte for byte. (3:55)</a:t>
             </a:r>
             <a:endParaRPr lang="en-US" dirty="0"/>
           </a:p>
@@ -3875,7 +3965,7 @@
           <a:p>
             <a:r>
               <a:rPr lang="en-US" dirty="0"/>
-              <a:t>The release has four splits on disjoint seeds, so a method is never tested on what it trained on: five thousand contexts for training, five hundred each for validation and test, and a benchmark of one thousand, a hundred and twenty-five per tier. Everything is plain JSON with a schema and a datasheet. (4:40)</a:t>
+              <a:t>Where do the numbers come from? Three places. Sizes, weights and spans come from standards: European steel pipe and duct standards, IEC for conduits and trays, ASME for spans, the German GEG for insulation. How close neighbors sit comes from measured open buildings. And a few things are simply our choices, like the trade mix, and we label them that way. (4:30)</a:t>
             </a:r>
             <a:endParaRPr lang="en-US" dirty="0"/>
           </a:p>
@@ -5001,46 +5091,1627 @@
                   <a:schemeClr val="tx1"/>
                 </a:solidFill>
               </a:rPr>
-              <a:t>Difficulty is one number: tier Cn holds exactly n elements</a:t>
+              <a:t>7,000 contexts in four splits; the test seeds are never trained on</a:t>
             </a:r>
             <a:endParaRPr lang="en-US" sz="2600" dirty="0"/>
           </a:p>
         </p:txBody>
       </p:sp>
-      <p:pic>
-        <p:nvPicPr>
-          <p:cNvPr id="3" name="tier gallery" descr="/home/user/crossmep_dataset/docs/figures/02_tier_gallery.png">    </p:cNvPr>
-          <p:cNvPicPr>
-            <a:picLocks noChangeAspect="1"/>
-          </p:cNvPicPr>
-          <p:nvPr/>
-        </p:nvPicPr>
-        <p:blipFill>
-          <a:blip r:embed="rId1"/>
-          <a:stretch>
-            <a:fillRect/>
-          </a:stretch>
-        </p:blipFill>
-        <p:spPr>
-          <a:xfrm>
-            <a:off x="1244890" y="1280160"/>
-            <a:ext cx="9699171" cy="4526280"/>
-          </a:xfrm>
-          <a:prstGeom prst="rect">
-            <a:avLst/>
-          </a:prstGeom>
-        </p:spPr>
-      </p:pic>
-      <p:sp>
-        <p:nvSpPr>
-          <p:cNvPr id="4" name="gallery caption"/>
+      <p:graphicFrame>
+        <p:nvGraphicFramePr>
+          <p:cNvPr id="11" name="splits table"/>
+          <p:cNvGraphicFramePr>
+            <a:graphicFrameLocks noGrp="1"/>
+          </p:cNvGraphicFramePr>
+          <p:nvPr>
+            <p:extLst>
+              <p:ext uri="{D42A27DB-BD31-4B8C-83A1-F6EECF244321}">
+                <p14:modId xmlns:p14="http://schemas.microsoft.com/office/powerpoint/2010/main" val="1579011935"/>
+              </p:ext>
+            </p:extLst>
+          </p:nvPr>
+        </p:nvGraphicFramePr>
+        <p:xfrm>
+          <a:off x="548640" y="1417320"/>
+          <a:ext cx="5120640" cy="914400"/>
+        </p:xfrm>
+        <a:graphic>
+          <a:graphicData uri="http://schemas.openxmlformats.org/drawingml/2006/table">
+            <a:tbl>
+              <a:tblPr/>
+              <a:tblGrid>
+                <a:gridCol w="1554480"/>
+                <a:gridCol w="1188720"/>
+                <a:gridCol w="1280160"/>
+                <a:gridCol w="1097280"/>
+              </a:tblGrid>
+              <a:tr h="384048">
+                <a:tc>
+                  <a:txBody>
+                    <a:bodyPr/>
+                    <a:lstStyle/>
+                    <a:p>
+                      <a:pPr algn="l" indent="0" marL="0">
+                        <a:buNone/>
+                      </a:pPr>
+                      <a:r>
+                        <a:rPr lang="en-US" sz="1200" b="1" dirty="0">
+                          <a:solidFill>
+                            <a:srgbClr val="FFFFFF"/>
+                          </a:solidFill>
+                          <a:latin typeface="Calibri" pitchFamily="34" charset="0"/>
+                          <a:ea typeface="Calibri" pitchFamily="34" charset="-122"/>
+                          <a:cs typeface="Calibri" pitchFamily="34" charset="-120"/>
+                        </a:rPr>
+                        <a:t>split</a:t>
+                      </a:r>
+                      <a:endParaRPr lang="en-US" sz="1200" dirty="0">
+                        <a:latin typeface="Calibri" charset="0"/>
+                        <a:ea typeface="Calibri" charset="0"/>
+                        <a:cs typeface="Calibri" charset="0"/>
+                      </a:endParaRPr>
+                    </a:p>
+                  </a:txBody>
+                  <a:tcPr marL="73152" marR="73152" marT="73152" marB="73152" anchor="ctr">
+                    <a:lnL w="9525" cap="flat" cmpd="sng" algn="ctr">
+                      <a:solidFill>
+                        <a:srgbClr val="E1E0D9"/>
+                      </a:solidFill>
+                      <a:prstDash val="solid"/>
+                      <a:round/>
+                      <a:headEnd type="none" w="med" len="med"/>
+                      <a:tailEnd type="none" w="med" len="med"/>
+                    </a:lnL>
+                    <a:lnR w="9525" cap="flat" cmpd="sng" algn="ctr">
+                      <a:solidFill>
+                        <a:srgbClr val="E1E0D9"/>
+                      </a:solidFill>
+                      <a:prstDash val="solid"/>
+                      <a:round/>
+                      <a:headEnd type="none" w="med" len="med"/>
+                      <a:tailEnd type="none" w="med" len="med"/>
+                    </a:lnR>
+                    <a:lnT w="9525" cap="flat" cmpd="sng" algn="ctr">
+                      <a:solidFill>
+                        <a:srgbClr val="E1E0D9"/>
+                      </a:solidFill>
+                      <a:prstDash val="solid"/>
+                      <a:round/>
+                      <a:headEnd type="none" w="med" len="med"/>
+                      <a:tailEnd type="none" w="med" len="med"/>
+                    </a:lnT>
+                    <a:lnB w="9525" cap="flat" cmpd="sng" algn="ctr">
+                      <a:solidFill>
+                        <a:srgbClr val="E1E0D9"/>
+                      </a:solidFill>
+                      <a:prstDash val="solid"/>
+                      <a:round/>
+                      <a:headEnd type="none" w="med" len="med"/>
+                      <a:tailEnd type="none" w="med" len="med"/>
+                    </a:lnB>
+                    <a:solidFill>
+                      <a:srgbClr val="1F2933"/>
+                    </a:solidFill>
+                  </a:tcPr>
+                </a:tc>
+                <a:tc>
+                  <a:txBody>
+                    <a:bodyPr/>
+                    <a:lstStyle/>
+                    <a:p>
+                      <a:pPr algn="r" indent="0" marL="0">
+                        <a:buNone/>
+                      </a:pPr>
+                      <a:r>
+                        <a:rPr lang="en-US" sz="1200" b="1" dirty="0">
+                          <a:solidFill>
+                            <a:srgbClr val="FFFFFF"/>
+                          </a:solidFill>
+                          <a:latin typeface="Calibri" pitchFamily="34" charset="0"/>
+                          <a:ea typeface="Calibri" pitchFamily="34" charset="-122"/>
+                          <a:cs typeface="Calibri" pitchFamily="34" charset="-120"/>
+                        </a:rPr>
+                        <a:t>contexts</a:t>
+                      </a:r>
+                      <a:endParaRPr lang="en-US" sz="1200" dirty="0">
+                        <a:latin typeface="Calibri" charset="0"/>
+                        <a:ea typeface="Calibri" charset="0"/>
+                        <a:cs typeface="Calibri" charset="0"/>
+                      </a:endParaRPr>
+                    </a:p>
+                  </a:txBody>
+                  <a:tcPr marL="73152" marR="73152" marT="73152" marB="73152" anchor="ctr">
+                    <a:lnL w="9525" cap="flat" cmpd="sng" algn="ctr">
+                      <a:solidFill>
+                        <a:srgbClr val="E1E0D9"/>
+                      </a:solidFill>
+                      <a:prstDash val="solid"/>
+                      <a:round/>
+                      <a:headEnd type="none" w="med" len="med"/>
+                      <a:tailEnd type="none" w="med" len="med"/>
+                    </a:lnL>
+                    <a:lnR w="9525" cap="flat" cmpd="sng" algn="ctr">
+                      <a:solidFill>
+                        <a:srgbClr val="E1E0D9"/>
+                      </a:solidFill>
+                      <a:prstDash val="solid"/>
+                      <a:round/>
+                      <a:headEnd type="none" w="med" len="med"/>
+                      <a:tailEnd type="none" w="med" len="med"/>
+                    </a:lnR>
+                    <a:lnT w="9525" cap="flat" cmpd="sng" algn="ctr">
+                      <a:solidFill>
+                        <a:srgbClr val="E1E0D9"/>
+                      </a:solidFill>
+                      <a:prstDash val="solid"/>
+                      <a:round/>
+                      <a:headEnd type="none" w="med" len="med"/>
+                      <a:tailEnd type="none" w="med" len="med"/>
+                    </a:lnT>
+                    <a:lnB w="9525" cap="flat" cmpd="sng" algn="ctr">
+                      <a:solidFill>
+                        <a:srgbClr val="E1E0D9"/>
+                      </a:solidFill>
+                      <a:prstDash val="solid"/>
+                      <a:round/>
+                      <a:headEnd type="none" w="med" len="med"/>
+                      <a:tailEnd type="none" w="med" len="med"/>
+                    </a:lnB>
+                    <a:solidFill>
+                      <a:srgbClr val="1F2933"/>
+                    </a:solidFill>
+                  </a:tcPr>
+                </a:tc>
+                <a:tc>
+                  <a:txBody>
+                    <a:bodyPr/>
+                    <a:lstStyle/>
+                    <a:p>
+                      <a:pPr algn="r" indent="0" marL="0">
+                        <a:buNone/>
+                      </a:pPr>
+                      <a:r>
+                        <a:rPr lang="en-US" sz="1200" b="1" dirty="0">
+                          <a:solidFill>
+                            <a:srgbClr val="FFFFFF"/>
+                          </a:solidFill>
+                          <a:latin typeface="Calibri" pitchFamily="34" charset="0"/>
+                          <a:ea typeface="Calibri" pitchFamily="34" charset="-122"/>
+                          <a:cs typeface="Calibri" pitchFamily="34" charset="-120"/>
+                        </a:rPr>
+                        <a:t>elements</a:t>
+                      </a:r>
+                      <a:endParaRPr lang="en-US" sz="1200" dirty="0">
+                        <a:latin typeface="Calibri" charset="0"/>
+                        <a:ea typeface="Calibri" charset="0"/>
+                        <a:cs typeface="Calibri" charset="0"/>
+                      </a:endParaRPr>
+                    </a:p>
+                  </a:txBody>
+                  <a:tcPr marL="73152" marR="73152" marT="73152" marB="73152" anchor="ctr">
+                    <a:lnL w="9525" cap="flat" cmpd="sng" algn="ctr">
+                      <a:solidFill>
+                        <a:srgbClr val="E1E0D9"/>
+                      </a:solidFill>
+                      <a:prstDash val="solid"/>
+                      <a:round/>
+                      <a:headEnd type="none" w="med" len="med"/>
+                      <a:tailEnd type="none" w="med" len="med"/>
+                    </a:lnL>
+                    <a:lnR w="9525" cap="flat" cmpd="sng" algn="ctr">
+                      <a:solidFill>
+                        <a:srgbClr val="E1E0D9"/>
+                      </a:solidFill>
+                      <a:prstDash val="solid"/>
+                      <a:round/>
+                      <a:headEnd type="none" w="med" len="med"/>
+                      <a:tailEnd type="none" w="med" len="med"/>
+                    </a:lnR>
+                    <a:lnT w="9525" cap="flat" cmpd="sng" algn="ctr">
+                      <a:solidFill>
+                        <a:srgbClr val="E1E0D9"/>
+                      </a:solidFill>
+                      <a:prstDash val="solid"/>
+                      <a:round/>
+                      <a:headEnd type="none" w="med" len="med"/>
+                      <a:tailEnd type="none" w="med" len="med"/>
+                    </a:lnT>
+                    <a:lnB w="9525" cap="flat" cmpd="sng" algn="ctr">
+                      <a:solidFill>
+                        <a:srgbClr val="E1E0D9"/>
+                      </a:solidFill>
+                      <a:prstDash val="solid"/>
+                      <a:round/>
+                      <a:headEnd type="none" w="med" len="med"/>
+                      <a:tailEnd type="none" w="med" len="med"/>
+                    </a:lnB>
+                    <a:solidFill>
+                      <a:srgbClr val="1F2933"/>
+                    </a:solidFill>
+                  </a:tcPr>
+                </a:tc>
+                <a:tc>
+                  <a:txBody>
+                    <a:bodyPr/>
+                    <a:lstStyle/>
+                    <a:p>
+                      <a:pPr algn="r" indent="0" marL="0">
+                        <a:buNone/>
+                      </a:pPr>
+                      <a:r>
+                        <a:rPr lang="en-US" sz="1200" b="1" dirty="0">
+                          <a:solidFill>
+                            <a:srgbClr val="FFFFFF"/>
+                          </a:solidFill>
+                          <a:latin typeface="Calibri" pitchFamily="34" charset="0"/>
+                          <a:ea typeface="Calibri" pitchFamily="34" charset="-122"/>
+                          <a:cs typeface="Calibri" pitchFamily="34" charset="-120"/>
+                        </a:rPr>
+                        <a:t>seed</a:t>
+                      </a:r>
+                      <a:endParaRPr lang="en-US" sz="1200" dirty="0">
+                        <a:latin typeface="Calibri" charset="0"/>
+                        <a:ea typeface="Calibri" charset="0"/>
+                        <a:cs typeface="Calibri" charset="0"/>
+                      </a:endParaRPr>
+                    </a:p>
+                  </a:txBody>
+                  <a:tcPr marL="73152" marR="73152" marT="73152" marB="73152" anchor="ctr">
+                    <a:lnL w="9525" cap="flat" cmpd="sng" algn="ctr">
+                      <a:solidFill>
+                        <a:srgbClr val="E1E0D9"/>
+                      </a:solidFill>
+                      <a:prstDash val="solid"/>
+                      <a:round/>
+                      <a:headEnd type="none" w="med" len="med"/>
+                      <a:tailEnd type="none" w="med" len="med"/>
+                    </a:lnL>
+                    <a:lnR w="9525" cap="flat" cmpd="sng" algn="ctr">
+                      <a:solidFill>
+                        <a:srgbClr val="E1E0D9"/>
+                      </a:solidFill>
+                      <a:prstDash val="solid"/>
+                      <a:round/>
+                      <a:headEnd type="none" w="med" len="med"/>
+                      <a:tailEnd type="none" w="med" len="med"/>
+                    </a:lnR>
+                    <a:lnT w="9525" cap="flat" cmpd="sng" algn="ctr">
+                      <a:solidFill>
+                        <a:srgbClr val="E1E0D9"/>
+                      </a:solidFill>
+                      <a:prstDash val="solid"/>
+                      <a:round/>
+                      <a:headEnd type="none" w="med" len="med"/>
+                      <a:tailEnd type="none" w="med" len="med"/>
+                    </a:lnT>
+                    <a:lnB w="9525" cap="flat" cmpd="sng" algn="ctr">
+                      <a:solidFill>
+                        <a:srgbClr val="E1E0D9"/>
+                      </a:solidFill>
+                      <a:prstDash val="solid"/>
+                      <a:round/>
+                      <a:headEnd type="none" w="med" len="med"/>
+                      <a:tailEnd type="none" w="med" len="med"/>
+                    </a:lnB>
+                    <a:solidFill>
+                      <a:srgbClr val="1F2933"/>
+                    </a:solidFill>
+                  </a:tcPr>
+                </a:tc>
+              </a:tr>
+              <a:tr h="384048">
+                <a:tc>
+                  <a:txBody>
+                    <a:bodyPr/>
+                    <a:lstStyle/>
+                    <a:p>
+                      <a:pPr algn="l" indent="0" marL="0">
+                        <a:buNone/>
+                      </a:pPr>
+                      <a:r>
+                        <a:rPr lang="en-US" sz="1200" dirty="0">
+                          <a:solidFill>
+                            <a:srgbClr val="0B0B0B"/>
+                          </a:solidFill>
+                          <a:latin typeface="Calibri" pitchFamily="34" charset="0"/>
+                          <a:ea typeface="Calibri" pitchFamily="34" charset="-122"/>
+                          <a:cs typeface="Calibri" pitchFamily="34" charset="-120"/>
+                        </a:rPr>
+                        <a:t>train</a:t>
+                      </a:r>
+                      <a:endParaRPr lang="en-US" sz="1200" dirty="0">
+                        <a:latin typeface="Calibri" charset="0"/>
+                        <a:ea typeface="Calibri" charset="0"/>
+                        <a:cs typeface="Calibri" charset="0"/>
+                      </a:endParaRPr>
+                    </a:p>
+                  </a:txBody>
+                  <a:tcPr marL="73152" marR="73152" marT="73152" marB="73152" anchor="ctr">
+                    <a:lnL w="9525" cap="flat" cmpd="sng" algn="ctr">
+                      <a:solidFill>
+                        <a:srgbClr val="E1E0D9"/>
+                      </a:solidFill>
+                      <a:prstDash val="solid"/>
+                      <a:round/>
+                      <a:headEnd type="none" w="med" len="med"/>
+                      <a:tailEnd type="none" w="med" len="med"/>
+                    </a:lnL>
+                    <a:lnR w="9525" cap="flat" cmpd="sng" algn="ctr">
+                      <a:solidFill>
+                        <a:srgbClr val="E1E0D9"/>
+                      </a:solidFill>
+                      <a:prstDash val="solid"/>
+                      <a:round/>
+                      <a:headEnd type="none" w="med" len="med"/>
+                      <a:tailEnd type="none" w="med" len="med"/>
+                    </a:lnR>
+                    <a:lnT w="9525" cap="flat" cmpd="sng" algn="ctr">
+                      <a:solidFill>
+                        <a:srgbClr val="E1E0D9"/>
+                      </a:solidFill>
+                      <a:prstDash val="solid"/>
+                      <a:round/>
+                      <a:headEnd type="none" w="med" len="med"/>
+                      <a:tailEnd type="none" w="med" len="med"/>
+                    </a:lnT>
+                    <a:lnB w="9525" cap="flat" cmpd="sng" algn="ctr">
+                      <a:solidFill>
+                        <a:srgbClr val="E1E0D9"/>
+                      </a:solidFill>
+                      <a:prstDash val="solid"/>
+                      <a:round/>
+                      <a:headEnd type="none" w="med" len="med"/>
+                      <a:tailEnd type="none" w="med" len="med"/>
+                    </a:lnB>
+                  </a:tcPr>
+                </a:tc>
+                <a:tc>
+                  <a:txBody>
+                    <a:bodyPr/>
+                    <a:lstStyle/>
+                    <a:p>
+                      <a:pPr algn="r" indent="0" marL="0">
+                        <a:buNone/>
+                      </a:pPr>
+                      <a:r>
+                        <a:rPr lang="en-US" sz="1200" dirty="0">
+                          <a:solidFill>
+                            <a:srgbClr val="0B0B0B"/>
+                          </a:solidFill>
+                          <a:latin typeface="Calibri" pitchFamily="34" charset="0"/>
+                          <a:ea typeface="Calibri" pitchFamily="34" charset="-122"/>
+                          <a:cs typeface="Calibri" pitchFamily="34" charset="-120"/>
+                        </a:rPr>
+                        <a:t>5,000</a:t>
+                      </a:r>
+                      <a:endParaRPr lang="en-US" sz="1200" dirty="0">
+                        <a:latin typeface="Calibri" charset="0"/>
+                        <a:ea typeface="Calibri" charset="0"/>
+                        <a:cs typeface="Calibri" charset="0"/>
+                      </a:endParaRPr>
+                    </a:p>
+                  </a:txBody>
+                  <a:tcPr marL="73152" marR="73152" marT="73152" marB="73152" anchor="ctr">
+                    <a:lnL w="9525" cap="flat" cmpd="sng" algn="ctr">
+                      <a:solidFill>
+                        <a:srgbClr val="E1E0D9"/>
+                      </a:solidFill>
+                      <a:prstDash val="solid"/>
+                      <a:round/>
+                      <a:headEnd type="none" w="med" len="med"/>
+                      <a:tailEnd type="none" w="med" len="med"/>
+                    </a:lnL>
+                    <a:lnR w="9525" cap="flat" cmpd="sng" algn="ctr">
+                      <a:solidFill>
+                        <a:srgbClr val="E1E0D9"/>
+                      </a:solidFill>
+                      <a:prstDash val="solid"/>
+                      <a:round/>
+                      <a:headEnd type="none" w="med" len="med"/>
+                      <a:tailEnd type="none" w="med" len="med"/>
+                    </a:lnR>
+                    <a:lnT w="9525" cap="flat" cmpd="sng" algn="ctr">
+                      <a:solidFill>
+                        <a:srgbClr val="E1E0D9"/>
+                      </a:solidFill>
+                      <a:prstDash val="solid"/>
+                      <a:round/>
+                      <a:headEnd type="none" w="med" len="med"/>
+                      <a:tailEnd type="none" w="med" len="med"/>
+                    </a:lnT>
+                    <a:lnB w="9525" cap="flat" cmpd="sng" algn="ctr">
+                      <a:solidFill>
+                        <a:srgbClr val="E1E0D9"/>
+                      </a:solidFill>
+                      <a:prstDash val="solid"/>
+                      <a:round/>
+                      <a:headEnd type="none" w="med" len="med"/>
+                      <a:tailEnd type="none" w="med" len="med"/>
+                    </a:lnB>
+                  </a:tcPr>
+                </a:tc>
+                <a:tc>
+                  <a:txBody>
+                    <a:bodyPr/>
+                    <a:lstStyle/>
+                    <a:p>
+                      <a:pPr algn="r" indent="0" marL="0">
+                        <a:buNone/>
+                      </a:pPr>
+                      <a:r>
+                        <a:rPr lang="en-US" sz="1200" dirty="0">
+                          <a:solidFill>
+                            <a:srgbClr val="0B0B0B"/>
+                          </a:solidFill>
+                          <a:latin typeface="Calibri" pitchFamily="34" charset="0"/>
+                          <a:ea typeface="Calibri" pitchFamily="34" charset="-122"/>
+                          <a:cs typeface="Calibri" pitchFamily="34" charset="-120"/>
+                        </a:rPr>
+                        <a:t>22,500</a:t>
+                      </a:r>
+                      <a:endParaRPr lang="en-US" sz="1200" dirty="0">
+                        <a:latin typeface="Calibri" charset="0"/>
+                        <a:ea typeface="Calibri" charset="0"/>
+                        <a:cs typeface="Calibri" charset="0"/>
+                      </a:endParaRPr>
+                    </a:p>
+                  </a:txBody>
+                  <a:tcPr marL="73152" marR="73152" marT="73152" marB="73152" anchor="ctr">
+                    <a:lnL w="9525" cap="flat" cmpd="sng" algn="ctr">
+                      <a:solidFill>
+                        <a:srgbClr val="E1E0D9"/>
+                      </a:solidFill>
+                      <a:prstDash val="solid"/>
+                      <a:round/>
+                      <a:headEnd type="none" w="med" len="med"/>
+                      <a:tailEnd type="none" w="med" len="med"/>
+                    </a:lnL>
+                    <a:lnR w="9525" cap="flat" cmpd="sng" algn="ctr">
+                      <a:solidFill>
+                        <a:srgbClr val="E1E0D9"/>
+                      </a:solidFill>
+                      <a:prstDash val="solid"/>
+                      <a:round/>
+                      <a:headEnd type="none" w="med" len="med"/>
+                      <a:tailEnd type="none" w="med" len="med"/>
+                    </a:lnR>
+                    <a:lnT w="9525" cap="flat" cmpd="sng" algn="ctr">
+                      <a:solidFill>
+                        <a:srgbClr val="E1E0D9"/>
+                      </a:solidFill>
+                      <a:prstDash val="solid"/>
+                      <a:round/>
+                      <a:headEnd type="none" w="med" len="med"/>
+                      <a:tailEnd type="none" w="med" len="med"/>
+                    </a:lnT>
+                    <a:lnB w="9525" cap="flat" cmpd="sng" algn="ctr">
+                      <a:solidFill>
+                        <a:srgbClr val="E1E0D9"/>
+                      </a:solidFill>
+                      <a:prstDash val="solid"/>
+                      <a:round/>
+                      <a:headEnd type="none" w="med" len="med"/>
+                      <a:tailEnd type="none" w="med" len="med"/>
+                    </a:lnB>
+                  </a:tcPr>
+                </a:tc>
+                <a:tc>
+                  <a:txBody>
+                    <a:bodyPr/>
+                    <a:lstStyle/>
+                    <a:p>
+                      <a:pPr algn="r" indent="0" marL="0">
+                        <a:buNone/>
+                      </a:pPr>
+                      <a:r>
+                        <a:rPr lang="en-US" sz="1200" dirty="0">
+                          <a:solidFill>
+                            <a:srgbClr val="0B0B0B"/>
+                          </a:solidFill>
+                          <a:latin typeface="Calibri" pitchFamily="34" charset="0"/>
+                          <a:ea typeface="Calibri" pitchFamily="34" charset="-122"/>
+                          <a:cs typeface="Calibri" pitchFamily="34" charset="-120"/>
+                        </a:rPr>
+                        <a:t>1000</a:t>
+                      </a:r>
+                      <a:endParaRPr lang="en-US" sz="1200" dirty="0">
+                        <a:latin typeface="Calibri" charset="0"/>
+                        <a:ea typeface="Calibri" charset="0"/>
+                        <a:cs typeface="Calibri" charset="0"/>
+                      </a:endParaRPr>
+                    </a:p>
+                  </a:txBody>
+                  <a:tcPr marL="73152" marR="73152" marT="73152" marB="73152" anchor="ctr">
+                    <a:lnL w="9525" cap="flat" cmpd="sng" algn="ctr">
+                      <a:solidFill>
+                        <a:srgbClr val="E1E0D9"/>
+                      </a:solidFill>
+                      <a:prstDash val="solid"/>
+                      <a:round/>
+                      <a:headEnd type="none" w="med" len="med"/>
+                      <a:tailEnd type="none" w="med" len="med"/>
+                    </a:lnL>
+                    <a:lnR w="9525" cap="flat" cmpd="sng" algn="ctr">
+                      <a:solidFill>
+                        <a:srgbClr val="E1E0D9"/>
+                      </a:solidFill>
+                      <a:prstDash val="solid"/>
+                      <a:round/>
+                      <a:headEnd type="none" w="med" len="med"/>
+                      <a:tailEnd type="none" w="med" len="med"/>
+                    </a:lnR>
+                    <a:lnT w="9525" cap="flat" cmpd="sng" algn="ctr">
+                      <a:solidFill>
+                        <a:srgbClr val="E1E0D9"/>
+                      </a:solidFill>
+                      <a:prstDash val="solid"/>
+                      <a:round/>
+                      <a:headEnd type="none" w="med" len="med"/>
+                      <a:tailEnd type="none" w="med" len="med"/>
+                    </a:lnT>
+                    <a:lnB w="9525" cap="flat" cmpd="sng" algn="ctr">
+                      <a:solidFill>
+                        <a:srgbClr val="E1E0D9"/>
+                      </a:solidFill>
+                      <a:prstDash val="solid"/>
+                      <a:round/>
+                      <a:headEnd type="none" w="med" len="med"/>
+                      <a:tailEnd type="none" w="med" len="med"/>
+                    </a:lnB>
+                  </a:tcPr>
+                </a:tc>
+              </a:tr>
+              <a:tr h="384048">
+                <a:tc>
+                  <a:txBody>
+                    <a:bodyPr/>
+                    <a:lstStyle/>
+                    <a:p>
+                      <a:pPr algn="l" indent="0" marL="0">
+                        <a:buNone/>
+                      </a:pPr>
+                      <a:r>
+                        <a:rPr lang="en-US" sz="1200" dirty="0">
+                          <a:solidFill>
+                            <a:srgbClr val="0B0B0B"/>
+                          </a:solidFill>
+                          <a:latin typeface="Calibri" pitchFamily="34" charset="0"/>
+                          <a:ea typeface="Calibri" pitchFamily="34" charset="-122"/>
+                          <a:cs typeface="Calibri" pitchFamily="34" charset="-120"/>
+                        </a:rPr>
+                        <a:t>validation</a:t>
+                      </a:r>
+                      <a:endParaRPr lang="en-US" sz="1200" dirty="0">
+                        <a:latin typeface="Calibri" charset="0"/>
+                        <a:ea typeface="Calibri" charset="0"/>
+                        <a:cs typeface="Calibri" charset="0"/>
+                      </a:endParaRPr>
+                    </a:p>
+                  </a:txBody>
+                  <a:tcPr marL="73152" marR="73152" marT="73152" marB="73152" anchor="ctr">
+                    <a:lnL w="9525" cap="flat" cmpd="sng" algn="ctr">
+                      <a:solidFill>
+                        <a:srgbClr val="E1E0D9"/>
+                      </a:solidFill>
+                      <a:prstDash val="solid"/>
+                      <a:round/>
+                      <a:headEnd type="none" w="med" len="med"/>
+                      <a:tailEnd type="none" w="med" len="med"/>
+                    </a:lnL>
+                    <a:lnR w="9525" cap="flat" cmpd="sng" algn="ctr">
+                      <a:solidFill>
+                        <a:srgbClr val="E1E0D9"/>
+                      </a:solidFill>
+                      <a:prstDash val="solid"/>
+                      <a:round/>
+                      <a:headEnd type="none" w="med" len="med"/>
+                      <a:tailEnd type="none" w="med" len="med"/>
+                    </a:lnR>
+                    <a:lnT w="9525" cap="flat" cmpd="sng" algn="ctr">
+                      <a:solidFill>
+                        <a:srgbClr val="E1E0D9"/>
+                      </a:solidFill>
+                      <a:prstDash val="solid"/>
+                      <a:round/>
+                      <a:headEnd type="none" w="med" len="med"/>
+                      <a:tailEnd type="none" w="med" len="med"/>
+                    </a:lnT>
+                    <a:lnB w="9525" cap="flat" cmpd="sng" algn="ctr">
+                      <a:solidFill>
+                        <a:srgbClr val="E1E0D9"/>
+                      </a:solidFill>
+                      <a:prstDash val="solid"/>
+                      <a:round/>
+                      <a:headEnd type="none" w="med" len="med"/>
+                      <a:tailEnd type="none" w="med" len="med"/>
+                    </a:lnB>
+                  </a:tcPr>
+                </a:tc>
+                <a:tc>
+                  <a:txBody>
+                    <a:bodyPr/>
+                    <a:lstStyle/>
+                    <a:p>
+                      <a:pPr algn="r" indent="0" marL="0">
+                        <a:buNone/>
+                      </a:pPr>
+                      <a:r>
+                        <a:rPr lang="en-US" sz="1200" dirty="0">
+                          <a:solidFill>
+                            <a:srgbClr val="0B0B0B"/>
+                          </a:solidFill>
+                          <a:latin typeface="Calibri" pitchFamily="34" charset="0"/>
+                          <a:ea typeface="Calibri" pitchFamily="34" charset="-122"/>
+                          <a:cs typeface="Calibri" pitchFamily="34" charset="-120"/>
+                        </a:rPr>
+                        <a:t>500</a:t>
+                      </a:r>
+                      <a:endParaRPr lang="en-US" sz="1200" dirty="0">
+                        <a:latin typeface="Calibri" charset="0"/>
+                        <a:ea typeface="Calibri" charset="0"/>
+                        <a:cs typeface="Calibri" charset="0"/>
+                      </a:endParaRPr>
+                    </a:p>
+                  </a:txBody>
+                  <a:tcPr marL="73152" marR="73152" marT="73152" marB="73152" anchor="ctr">
+                    <a:lnL w="9525" cap="flat" cmpd="sng" algn="ctr">
+                      <a:solidFill>
+                        <a:srgbClr val="E1E0D9"/>
+                      </a:solidFill>
+                      <a:prstDash val="solid"/>
+                      <a:round/>
+                      <a:headEnd type="none" w="med" len="med"/>
+                      <a:tailEnd type="none" w="med" len="med"/>
+                    </a:lnL>
+                    <a:lnR w="9525" cap="flat" cmpd="sng" algn="ctr">
+                      <a:solidFill>
+                        <a:srgbClr val="E1E0D9"/>
+                      </a:solidFill>
+                      <a:prstDash val="solid"/>
+                      <a:round/>
+                      <a:headEnd type="none" w="med" len="med"/>
+                      <a:tailEnd type="none" w="med" len="med"/>
+                    </a:lnR>
+                    <a:lnT w="9525" cap="flat" cmpd="sng" algn="ctr">
+                      <a:solidFill>
+                        <a:srgbClr val="E1E0D9"/>
+                      </a:solidFill>
+                      <a:prstDash val="solid"/>
+                      <a:round/>
+                      <a:headEnd type="none" w="med" len="med"/>
+                      <a:tailEnd type="none" w="med" len="med"/>
+                    </a:lnT>
+                    <a:lnB w="9525" cap="flat" cmpd="sng" algn="ctr">
+                      <a:solidFill>
+                        <a:srgbClr val="E1E0D9"/>
+                      </a:solidFill>
+                      <a:prstDash val="solid"/>
+                      <a:round/>
+                      <a:headEnd type="none" w="med" len="med"/>
+                      <a:tailEnd type="none" w="med" len="med"/>
+                    </a:lnB>
+                  </a:tcPr>
+                </a:tc>
+                <a:tc>
+                  <a:txBody>
+                    <a:bodyPr/>
+                    <a:lstStyle/>
+                    <a:p>
+                      <a:pPr algn="r" indent="0" marL="0">
+                        <a:buNone/>
+                      </a:pPr>
+                      <a:r>
+                        <a:rPr lang="en-US" sz="1200" dirty="0">
+                          <a:solidFill>
+                            <a:srgbClr val="0B0B0B"/>
+                          </a:solidFill>
+                          <a:latin typeface="Calibri" pitchFamily="34" charset="0"/>
+                          <a:ea typeface="Calibri" pitchFamily="34" charset="-122"/>
+                          <a:cs typeface="Calibri" pitchFamily="34" charset="-120"/>
+                        </a:rPr>
+                        <a:t>2,242</a:t>
+                      </a:r>
+                      <a:endParaRPr lang="en-US" sz="1200" dirty="0">
+                        <a:latin typeface="Calibri" charset="0"/>
+                        <a:ea typeface="Calibri" charset="0"/>
+                        <a:cs typeface="Calibri" charset="0"/>
+                      </a:endParaRPr>
+                    </a:p>
+                  </a:txBody>
+                  <a:tcPr marL="73152" marR="73152" marT="73152" marB="73152" anchor="ctr">
+                    <a:lnL w="9525" cap="flat" cmpd="sng" algn="ctr">
+                      <a:solidFill>
+                        <a:srgbClr val="E1E0D9"/>
+                      </a:solidFill>
+                      <a:prstDash val="solid"/>
+                      <a:round/>
+                      <a:headEnd type="none" w="med" len="med"/>
+                      <a:tailEnd type="none" w="med" len="med"/>
+                    </a:lnL>
+                    <a:lnR w="9525" cap="flat" cmpd="sng" algn="ctr">
+                      <a:solidFill>
+                        <a:srgbClr val="E1E0D9"/>
+                      </a:solidFill>
+                      <a:prstDash val="solid"/>
+                      <a:round/>
+                      <a:headEnd type="none" w="med" len="med"/>
+                      <a:tailEnd type="none" w="med" len="med"/>
+                    </a:lnR>
+                    <a:lnT w="9525" cap="flat" cmpd="sng" algn="ctr">
+                      <a:solidFill>
+                        <a:srgbClr val="E1E0D9"/>
+                      </a:solidFill>
+                      <a:prstDash val="solid"/>
+                      <a:round/>
+                      <a:headEnd type="none" w="med" len="med"/>
+                      <a:tailEnd type="none" w="med" len="med"/>
+                    </a:lnT>
+                    <a:lnB w="9525" cap="flat" cmpd="sng" algn="ctr">
+                      <a:solidFill>
+                        <a:srgbClr val="E1E0D9"/>
+                      </a:solidFill>
+                      <a:prstDash val="solid"/>
+                      <a:round/>
+                      <a:headEnd type="none" w="med" len="med"/>
+                      <a:tailEnd type="none" w="med" len="med"/>
+                    </a:lnB>
+                  </a:tcPr>
+                </a:tc>
+                <a:tc>
+                  <a:txBody>
+                    <a:bodyPr/>
+                    <a:lstStyle/>
+                    <a:p>
+                      <a:pPr algn="r" indent="0" marL="0">
+                        <a:buNone/>
+                      </a:pPr>
+                      <a:r>
+                        <a:rPr lang="en-US" sz="1200" dirty="0">
+                          <a:solidFill>
+                            <a:srgbClr val="0B0B0B"/>
+                          </a:solidFill>
+                          <a:latin typeface="Calibri" pitchFamily="34" charset="0"/>
+                          <a:ea typeface="Calibri" pitchFamily="34" charset="-122"/>
+                          <a:cs typeface="Calibri" pitchFamily="34" charset="-120"/>
+                        </a:rPr>
+                        <a:t>2000</a:t>
+                      </a:r>
+                      <a:endParaRPr lang="en-US" sz="1200" dirty="0">
+                        <a:latin typeface="Calibri" charset="0"/>
+                        <a:ea typeface="Calibri" charset="0"/>
+                        <a:cs typeface="Calibri" charset="0"/>
+                      </a:endParaRPr>
+                    </a:p>
+                  </a:txBody>
+                  <a:tcPr marL="73152" marR="73152" marT="73152" marB="73152" anchor="ctr">
+                    <a:lnL w="9525" cap="flat" cmpd="sng" algn="ctr">
+                      <a:solidFill>
+                        <a:srgbClr val="E1E0D9"/>
+                      </a:solidFill>
+                      <a:prstDash val="solid"/>
+                      <a:round/>
+                      <a:headEnd type="none" w="med" len="med"/>
+                      <a:tailEnd type="none" w="med" len="med"/>
+                    </a:lnL>
+                    <a:lnR w="9525" cap="flat" cmpd="sng" algn="ctr">
+                      <a:solidFill>
+                        <a:srgbClr val="E1E0D9"/>
+                      </a:solidFill>
+                      <a:prstDash val="solid"/>
+                      <a:round/>
+                      <a:headEnd type="none" w="med" len="med"/>
+                      <a:tailEnd type="none" w="med" len="med"/>
+                    </a:lnR>
+                    <a:lnT w="9525" cap="flat" cmpd="sng" algn="ctr">
+                      <a:solidFill>
+                        <a:srgbClr val="E1E0D9"/>
+                      </a:solidFill>
+                      <a:prstDash val="solid"/>
+                      <a:round/>
+                      <a:headEnd type="none" w="med" len="med"/>
+                      <a:tailEnd type="none" w="med" len="med"/>
+                    </a:lnT>
+                    <a:lnB w="9525" cap="flat" cmpd="sng" algn="ctr">
+                      <a:solidFill>
+                        <a:srgbClr val="E1E0D9"/>
+                      </a:solidFill>
+                      <a:prstDash val="solid"/>
+                      <a:round/>
+                      <a:headEnd type="none" w="med" len="med"/>
+                      <a:tailEnd type="none" w="med" len="med"/>
+                    </a:lnB>
+                  </a:tcPr>
+                </a:tc>
+              </a:tr>
+              <a:tr h="384048">
+                <a:tc>
+                  <a:txBody>
+                    <a:bodyPr/>
+                    <a:lstStyle/>
+                    <a:p>
+                      <a:pPr algn="l" indent="0" marL="0">
+                        <a:buNone/>
+                      </a:pPr>
+                      <a:r>
+                        <a:rPr lang="en-US" sz="1200" dirty="0">
+                          <a:solidFill>
+                            <a:srgbClr val="0B0B0B"/>
+                          </a:solidFill>
+                          <a:latin typeface="Calibri" pitchFamily="34" charset="0"/>
+                          <a:ea typeface="Calibri" pitchFamily="34" charset="-122"/>
+                          <a:cs typeface="Calibri" pitchFamily="34" charset="-120"/>
+                        </a:rPr>
+                        <a:t>test</a:t>
+                      </a:r>
+                      <a:endParaRPr lang="en-US" sz="1200" dirty="0">
+                        <a:latin typeface="Calibri" charset="0"/>
+                        <a:ea typeface="Calibri" charset="0"/>
+                        <a:cs typeface="Calibri" charset="0"/>
+                      </a:endParaRPr>
+                    </a:p>
+                  </a:txBody>
+                  <a:tcPr marL="73152" marR="73152" marT="73152" marB="73152" anchor="ctr">
+                    <a:lnL w="9525" cap="flat" cmpd="sng" algn="ctr">
+                      <a:solidFill>
+                        <a:srgbClr val="E1E0D9"/>
+                      </a:solidFill>
+                      <a:prstDash val="solid"/>
+                      <a:round/>
+                      <a:headEnd type="none" w="med" len="med"/>
+                      <a:tailEnd type="none" w="med" len="med"/>
+                    </a:lnL>
+                    <a:lnR w="9525" cap="flat" cmpd="sng" algn="ctr">
+                      <a:solidFill>
+                        <a:srgbClr val="E1E0D9"/>
+                      </a:solidFill>
+                      <a:prstDash val="solid"/>
+                      <a:round/>
+                      <a:headEnd type="none" w="med" len="med"/>
+                      <a:tailEnd type="none" w="med" len="med"/>
+                    </a:lnR>
+                    <a:lnT w="9525" cap="flat" cmpd="sng" algn="ctr">
+                      <a:solidFill>
+                        <a:srgbClr val="E1E0D9"/>
+                      </a:solidFill>
+                      <a:prstDash val="solid"/>
+                      <a:round/>
+                      <a:headEnd type="none" w="med" len="med"/>
+                      <a:tailEnd type="none" w="med" len="med"/>
+                    </a:lnT>
+                    <a:lnB w="9525" cap="flat" cmpd="sng" algn="ctr">
+                      <a:solidFill>
+                        <a:srgbClr val="E1E0D9"/>
+                      </a:solidFill>
+                      <a:prstDash val="solid"/>
+                      <a:round/>
+                      <a:headEnd type="none" w="med" len="med"/>
+                      <a:tailEnd type="none" w="med" len="med"/>
+                    </a:lnB>
+                  </a:tcPr>
+                </a:tc>
+                <a:tc>
+                  <a:txBody>
+                    <a:bodyPr/>
+                    <a:lstStyle/>
+                    <a:p>
+                      <a:pPr algn="r" indent="0" marL="0">
+                        <a:buNone/>
+                      </a:pPr>
+                      <a:r>
+                        <a:rPr lang="en-US" sz="1200" dirty="0">
+                          <a:solidFill>
+                            <a:srgbClr val="0B0B0B"/>
+                          </a:solidFill>
+                          <a:latin typeface="Calibri" pitchFamily="34" charset="0"/>
+                          <a:ea typeface="Calibri" pitchFamily="34" charset="-122"/>
+                          <a:cs typeface="Calibri" pitchFamily="34" charset="-120"/>
+                        </a:rPr>
+                        <a:t>500</a:t>
+                      </a:r>
+                      <a:endParaRPr lang="en-US" sz="1200" dirty="0">
+                        <a:latin typeface="Calibri" charset="0"/>
+                        <a:ea typeface="Calibri" charset="0"/>
+                        <a:cs typeface="Calibri" charset="0"/>
+                      </a:endParaRPr>
+                    </a:p>
+                  </a:txBody>
+                  <a:tcPr marL="73152" marR="73152" marT="73152" marB="73152" anchor="ctr">
+                    <a:lnL w="9525" cap="flat" cmpd="sng" algn="ctr">
+                      <a:solidFill>
+                        <a:srgbClr val="E1E0D9"/>
+                      </a:solidFill>
+                      <a:prstDash val="solid"/>
+                      <a:round/>
+                      <a:headEnd type="none" w="med" len="med"/>
+                      <a:tailEnd type="none" w="med" len="med"/>
+                    </a:lnL>
+                    <a:lnR w="9525" cap="flat" cmpd="sng" algn="ctr">
+                      <a:solidFill>
+                        <a:srgbClr val="E1E0D9"/>
+                      </a:solidFill>
+                      <a:prstDash val="solid"/>
+                      <a:round/>
+                      <a:headEnd type="none" w="med" len="med"/>
+                      <a:tailEnd type="none" w="med" len="med"/>
+                    </a:lnR>
+                    <a:lnT w="9525" cap="flat" cmpd="sng" algn="ctr">
+                      <a:solidFill>
+                        <a:srgbClr val="E1E0D9"/>
+                      </a:solidFill>
+                      <a:prstDash val="solid"/>
+                      <a:round/>
+                      <a:headEnd type="none" w="med" len="med"/>
+                      <a:tailEnd type="none" w="med" len="med"/>
+                    </a:lnT>
+                    <a:lnB w="9525" cap="flat" cmpd="sng" algn="ctr">
+                      <a:solidFill>
+                        <a:srgbClr val="E1E0D9"/>
+                      </a:solidFill>
+                      <a:prstDash val="solid"/>
+                      <a:round/>
+                      <a:headEnd type="none" w="med" len="med"/>
+                      <a:tailEnd type="none" w="med" len="med"/>
+                    </a:lnB>
+                  </a:tcPr>
+                </a:tc>
+                <a:tc>
+                  <a:txBody>
+                    <a:bodyPr/>
+                    <a:lstStyle/>
+                    <a:p>
+                      <a:pPr algn="r" indent="0" marL="0">
+                        <a:buNone/>
+                      </a:pPr>
+                      <a:r>
+                        <a:rPr lang="en-US" sz="1200" dirty="0">
+                          <a:solidFill>
+                            <a:srgbClr val="0B0B0B"/>
+                          </a:solidFill>
+                          <a:latin typeface="Calibri" pitchFamily="34" charset="0"/>
+                          <a:ea typeface="Calibri" pitchFamily="34" charset="-122"/>
+                          <a:cs typeface="Calibri" pitchFamily="34" charset="-120"/>
+                        </a:rPr>
+                        <a:t>2,242</a:t>
+                      </a:r>
+                      <a:endParaRPr lang="en-US" sz="1200" dirty="0">
+                        <a:latin typeface="Calibri" charset="0"/>
+                        <a:ea typeface="Calibri" charset="0"/>
+                        <a:cs typeface="Calibri" charset="0"/>
+                      </a:endParaRPr>
+                    </a:p>
+                  </a:txBody>
+                  <a:tcPr marL="73152" marR="73152" marT="73152" marB="73152" anchor="ctr">
+                    <a:lnL w="9525" cap="flat" cmpd="sng" algn="ctr">
+                      <a:solidFill>
+                        <a:srgbClr val="E1E0D9"/>
+                      </a:solidFill>
+                      <a:prstDash val="solid"/>
+                      <a:round/>
+                      <a:headEnd type="none" w="med" len="med"/>
+                      <a:tailEnd type="none" w="med" len="med"/>
+                    </a:lnL>
+                    <a:lnR w="9525" cap="flat" cmpd="sng" algn="ctr">
+                      <a:solidFill>
+                        <a:srgbClr val="E1E0D9"/>
+                      </a:solidFill>
+                      <a:prstDash val="solid"/>
+                      <a:round/>
+                      <a:headEnd type="none" w="med" len="med"/>
+                      <a:tailEnd type="none" w="med" len="med"/>
+                    </a:lnR>
+                    <a:lnT w="9525" cap="flat" cmpd="sng" algn="ctr">
+                      <a:solidFill>
+                        <a:srgbClr val="E1E0D9"/>
+                      </a:solidFill>
+                      <a:prstDash val="solid"/>
+                      <a:round/>
+                      <a:headEnd type="none" w="med" len="med"/>
+                      <a:tailEnd type="none" w="med" len="med"/>
+                    </a:lnT>
+                    <a:lnB w="9525" cap="flat" cmpd="sng" algn="ctr">
+                      <a:solidFill>
+                        <a:srgbClr val="E1E0D9"/>
+                      </a:solidFill>
+                      <a:prstDash val="solid"/>
+                      <a:round/>
+                      <a:headEnd type="none" w="med" len="med"/>
+                      <a:tailEnd type="none" w="med" len="med"/>
+                    </a:lnB>
+                  </a:tcPr>
+                </a:tc>
+                <a:tc>
+                  <a:txBody>
+                    <a:bodyPr/>
+                    <a:lstStyle/>
+                    <a:p>
+                      <a:pPr algn="r" indent="0" marL="0">
+                        <a:buNone/>
+                      </a:pPr>
+                      <a:r>
+                        <a:rPr lang="en-US" sz="1200" dirty="0">
+                          <a:solidFill>
+                            <a:srgbClr val="0B0B0B"/>
+                          </a:solidFill>
+                          <a:latin typeface="Calibri" pitchFamily="34" charset="0"/>
+                          <a:ea typeface="Calibri" pitchFamily="34" charset="-122"/>
+                          <a:cs typeface="Calibri" pitchFamily="34" charset="-120"/>
+                        </a:rPr>
+                        <a:t>3000</a:t>
+                      </a:r>
+                      <a:endParaRPr lang="en-US" sz="1200" dirty="0">
+                        <a:latin typeface="Calibri" charset="0"/>
+                        <a:ea typeface="Calibri" charset="0"/>
+                        <a:cs typeface="Calibri" charset="0"/>
+                      </a:endParaRPr>
+                    </a:p>
+                  </a:txBody>
+                  <a:tcPr marL="73152" marR="73152" marT="73152" marB="73152" anchor="ctr">
+                    <a:lnL w="9525" cap="flat" cmpd="sng" algn="ctr">
+                      <a:solidFill>
+                        <a:srgbClr val="E1E0D9"/>
+                      </a:solidFill>
+                      <a:prstDash val="solid"/>
+                      <a:round/>
+                      <a:headEnd type="none" w="med" len="med"/>
+                      <a:tailEnd type="none" w="med" len="med"/>
+                    </a:lnL>
+                    <a:lnR w="9525" cap="flat" cmpd="sng" algn="ctr">
+                      <a:solidFill>
+                        <a:srgbClr val="E1E0D9"/>
+                      </a:solidFill>
+                      <a:prstDash val="solid"/>
+                      <a:round/>
+                      <a:headEnd type="none" w="med" len="med"/>
+                      <a:tailEnd type="none" w="med" len="med"/>
+                    </a:lnR>
+                    <a:lnT w="9525" cap="flat" cmpd="sng" algn="ctr">
+                      <a:solidFill>
+                        <a:srgbClr val="E1E0D9"/>
+                      </a:solidFill>
+                      <a:prstDash val="solid"/>
+                      <a:round/>
+                      <a:headEnd type="none" w="med" len="med"/>
+                      <a:tailEnd type="none" w="med" len="med"/>
+                    </a:lnT>
+                    <a:lnB w="9525" cap="flat" cmpd="sng" algn="ctr">
+                      <a:solidFill>
+                        <a:srgbClr val="E1E0D9"/>
+                      </a:solidFill>
+                      <a:prstDash val="solid"/>
+                      <a:round/>
+                      <a:headEnd type="none" w="med" len="med"/>
+                      <a:tailEnd type="none" w="med" len="med"/>
+                    </a:lnB>
+                  </a:tcPr>
+                </a:tc>
+              </a:tr>
+              <a:tr h="384048">
+                <a:tc>
+                  <a:txBody>
+                    <a:bodyPr/>
+                    <a:lstStyle/>
+                    <a:p>
+                      <a:pPr algn="l" indent="0" marL="0">
+                        <a:buNone/>
+                      </a:pPr>
+                      <a:r>
+                        <a:rPr lang="en-US" sz="1200" dirty="0">
+                          <a:solidFill>
+                            <a:srgbClr val="0B0B0B"/>
+                          </a:solidFill>
+                          <a:latin typeface="Calibri" pitchFamily="34" charset="0"/>
+                          <a:ea typeface="Calibri" pitchFamily="34" charset="-122"/>
+                          <a:cs typeface="Calibri" pitchFamily="34" charset="-120"/>
+                        </a:rPr>
+                        <a:t>benchmark</a:t>
+                      </a:r>
+                      <a:endParaRPr lang="en-US" sz="1200" dirty="0">
+                        <a:latin typeface="Calibri" charset="0"/>
+                        <a:ea typeface="Calibri" charset="0"/>
+                        <a:cs typeface="Calibri" charset="0"/>
+                      </a:endParaRPr>
+                    </a:p>
+                  </a:txBody>
+                  <a:tcPr marL="73152" marR="73152" marT="73152" marB="73152" anchor="ctr">
+                    <a:lnL w="9525" cap="flat" cmpd="sng" algn="ctr">
+                      <a:solidFill>
+                        <a:srgbClr val="E1E0D9"/>
+                      </a:solidFill>
+                      <a:prstDash val="solid"/>
+                      <a:round/>
+                      <a:headEnd type="none" w="med" len="med"/>
+                      <a:tailEnd type="none" w="med" len="med"/>
+                    </a:lnL>
+                    <a:lnR w="9525" cap="flat" cmpd="sng" algn="ctr">
+                      <a:solidFill>
+                        <a:srgbClr val="E1E0D9"/>
+                      </a:solidFill>
+                      <a:prstDash val="solid"/>
+                      <a:round/>
+                      <a:headEnd type="none" w="med" len="med"/>
+                      <a:tailEnd type="none" w="med" len="med"/>
+                    </a:lnR>
+                    <a:lnT w="9525" cap="flat" cmpd="sng" algn="ctr">
+                      <a:solidFill>
+                        <a:srgbClr val="E1E0D9"/>
+                      </a:solidFill>
+                      <a:prstDash val="solid"/>
+                      <a:round/>
+                      <a:headEnd type="none" w="med" len="med"/>
+                      <a:tailEnd type="none" w="med" len="med"/>
+                    </a:lnT>
+                    <a:lnB w="9525" cap="flat" cmpd="sng" algn="ctr">
+                      <a:solidFill>
+                        <a:srgbClr val="E1E0D9"/>
+                      </a:solidFill>
+                      <a:prstDash val="solid"/>
+                      <a:round/>
+                      <a:headEnd type="none" w="med" len="med"/>
+                      <a:tailEnd type="none" w="med" len="med"/>
+                    </a:lnB>
+                  </a:tcPr>
+                </a:tc>
+                <a:tc>
+                  <a:txBody>
+                    <a:bodyPr/>
+                    <a:lstStyle/>
+                    <a:p>
+                      <a:pPr algn="r" indent="0" marL="0">
+                        <a:buNone/>
+                      </a:pPr>
+                      <a:r>
+                        <a:rPr lang="en-US" sz="1200" dirty="0">
+                          <a:solidFill>
+                            <a:srgbClr val="0B0B0B"/>
+                          </a:solidFill>
+                          <a:latin typeface="Calibri" pitchFamily="34" charset="0"/>
+                          <a:ea typeface="Calibri" pitchFamily="34" charset="-122"/>
+                          <a:cs typeface="Calibri" pitchFamily="34" charset="-120"/>
+                        </a:rPr>
+                        <a:t>1,000</a:t>
+                      </a:r>
+                      <a:endParaRPr lang="en-US" sz="1200" dirty="0">
+                        <a:latin typeface="Calibri" charset="0"/>
+                        <a:ea typeface="Calibri" charset="0"/>
+                        <a:cs typeface="Calibri" charset="0"/>
+                      </a:endParaRPr>
+                    </a:p>
+                  </a:txBody>
+                  <a:tcPr marL="73152" marR="73152" marT="73152" marB="73152" anchor="ctr">
+                    <a:lnL w="9525" cap="flat" cmpd="sng" algn="ctr">
+                      <a:solidFill>
+                        <a:srgbClr val="E1E0D9"/>
+                      </a:solidFill>
+                      <a:prstDash val="solid"/>
+                      <a:round/>
+                      <a:headEnd type="none" w="med" len="med"/>
+                      <a:tailEnd type="none" w="med" len="med"/>
+                    </a:lnL>
+                    <a:lnR w="9525" cap="flat" cmpd="sng" algn="ctr">
+                      <a:solidFill>
+                        <a:srgbClr val="E1E0D9"/>
+                      </a:solidFill>
+                      <a:prstDash val="solid"/>
+                      <a:round/>
+                      <a:headEnd type="none" w="med" len="med"/>
+                      <a:tailEnd type="none" w="med" len="med"/>
+                    </a:lnR>
+                    <a:lnT w="9525" cap="flat" cmpd="sng" algn="ctr">
+                      <a:solidFill>
+                        <a:srgbClr val="E1E0D9"/>
+                      </a:solidFill>
+                      <a:prstDash val="solid"/>
+                      <a:round/>
+                      <a:headEnd type="none" w="med" len="med"/>
+                      <a:tailEnd type="none" w="med" len="med"/>
+                    </a:lnT>
+                    <a:lnB w="9525" cap="flat" cmpd="sng" algn="ctr">
+                      <a:solidFill>
+                        <a:srgbClr val="E1E0D9"/>
+                      </a:solidFill>
+                      <a:prstDash val="solid"/>
+                      <a:round/>
+                      <a:headEnd type="none" w="med" len="med"/>
+                      <a:tailEnd type="none" w="med" len="med"/>
+                    </a:lnB>
+                  </a:tcPr>
+                </a:tc>
+                <a:tc>
+                  <a:txBody>
+                    <a:bodyPr/>
+                    <a:lstStyle/>
+                    <a:p>
+                      <a:pPr algn="r" indent="0" marL="0">
+                        <a:buNone/>
+                      </a:pPr>
+                      <a:r>
+                        <a:rPr lang="en-US" sz="1200" dirty="0">
+                          <a:solidFill>
+                            <a:srgbClr val="0B0B0B"/>
+                          </a:solidFill>
+                          <a:latin typeface="Calibri" pitchFamily="34" charset="0"/>
+                          <a:ea typeface="Calibri" pitchFamily="34" charset="-122"/>
+                          <a:cs typeface="Calibri" pitchFamily="34" charset="-120"/>
+                        </a:rPr>
+                        <a:t>4,500</a:t>
+                      </a:r>
+                      <a:endParaRPr lang="en-US" sz="1200" dirty="0">
+                        <a:latin typeface="Calibri" charset="0"/>
+                        <a:ea typeface="Calibri" charset="0"/>
+                        <a:cs typeface="Calibri" charset="0"/>
+                      </a:endParaRPr>
+                    </a:p>
+                  </a:txBody>
+                  <a:tcPr marL="73152" marR="73152" marT="73152" marB="73152" anchor="ctr">
+                    <a:lnL w="9525" cap="flat" cmpd="sng" algn="ctr">
+                      <a:solidFill>
+                        <a:srgbClr val="E1E0D9"/>
+                      </a:solidFill>
+                      <a:prstDash val="solid"/>
+                      <a:round/>
+                      <a:headEnd type="none" w="med" len="med"/>
+                      <a:tailEnd type="none" w="med" len="med"/>
+                    </a:lnL>
+                    <a:lnR w="9525" cap="flat" cmpd="sng" algn="ctr">
+                      <a:solidFill>
+                        <a:srgbClr val="E1E0D9"/>
+                      </a:solidFill>
+                      <a:prstDash val="solid"/>
+                      <a:round/>
+                      <a:headEnd type="none" w="med" len="med"/>
+                      <a:tailEnd type="none" w="med" len="med"/>
+                    </a:lnR>
+                    <a:lnT w="9525" cap="flat" cmpd="sng" algn="ctr">
+                      <a:solidFill>
+                        <a:srgbClr val="E1E0D9"/>
+                      </a:solidFill>
+                      <a:prstDash val="solid"/>
+                      <a:round/>
+                      <a:headEnd type="none" w="med" len="med"/>
+                      <a:tailEnd type="none" w="med" len="med"/>
+                    </a:lnT>
+                    <a:lnB w="9525" cap="flat" cmpd="sng" algn="ctr">
+                      <a:solidFill>
+                        <a:srgbClr val="E1E0D9"/>
+                      </a:solidFill>
+                      <a:prstDash val="solid"/>
+                      <a:round/>
+                      <a:headEnd type="none" w="med" len="med"/>
+                      <a:tailEnd type="none" w="med" len="med"/>
+                    </a:lnB>
+                  </a:tcPr>
+                </a:tc>
+                <a:tc>
+                  <a:txBody>
+                    <a:bodyPr/>
+                    <a:lstStyle/>
+                    <a:p>
+                      <a:pPr algn="r" indent="0" marL="0">
+                        <a:buNone/>
+                      </a:pPr>
+                      <a:r>
+                        <a:rPr lang="en-US" sz="1200" dirty="0">
+                          <a:solidFill>
+                            <a:srgbClr val="0B0B0B"/>
+                          </a:solidFill>
+                          <a:latin typeface="Calibri" pitchFamily="34" charset="0"/>
+                          <a:ea typeface="Calibri" pitchFamily="34" charset="-122"/>
+                          <a:cs typeface="Calibri" pitchFamily="34" charset="-120"/>
+                        </a:rPr>
+                        <a:t>42</a:t>
+                      </a:r>
+                      <a:endParaRPr lang="en-US" sz="1200" dirty="0">
+                        <a:latin typeface="Calibri" charset="0"/>
+                        <a:ea typeface="Calibri" charset="0"/>
+                        <a:cs typeface="Calibri" charset="0"/>
+                      </a:endParaRPr>
+                    </a:p>
+                  </a:txBody>
+                  <a:tcPr marL="73152" marR="73152" marT="73152" marB="73152" anchor="ctr">
+                    <a:lnL w="9525" cap="flat" cmpd="sng" algn="ctr">
+                      <a:solidFill>
+                        <a:srgbClr val="E1E0D9"/>
+                      </a:solidFill>
+                      <a:prstDash val="solid"/>
+                      <a:round/>
+                      <a:headEnd type="none" w="med" len="med"/>
+                      <a:tailEnd type="none" w="med" len="med"/>
+                    </a:lnL>
+                    <a:lnR w="9525" cap="flat" cmpd="sng" algn="ctr">
+                      <a:solidFill>
+                        <a:srgbClr val="E1E0D9"/>
+                      </a:solidFill>
+                      <a:prstDash val="solid"/>
+                      <a:round/>
+                      <a:headEnd type="none" w="med" len="med"/>
+                      <a:tailEnd type="none" w="med" len="med"/>
+                    </a:lnR>
+                    <a:lnT w="9525" cap="flat" cmpd="sng" algn="ctr">
+                      <a:solidFill>
+                        <a:srgbClr val="E1E0D9"/>
+                      </a:solidFill>
+                      <a:prstDash val="solid"/>
+                      <a:round/>
+                      <a:headEnd type="none" w="med" len="med"/>
+                      <a:tailEnd type="none" w="med" len="med"/>
+                    </a:lnT>
+                    <a:lnB w="9525" cap="flat" cmpd="sng" algn="ctr">
+                      <a:solidFill>
+                        <a:srgbClr val="E1E0D9"/>
+                      </a:solidFill>
+                      <a:prstDash val="solid"/>
+                      <a:round/>
+                      <a:headEnd type="none" w="med" len="med"/>
+                      <a:tailEnd type="none" w="med" len="med"/>
+                    </a:lnB>
+                  </a:tcPr>
+                </a:tc>
+              </a:tr>
+              <a:tr h="384048">
+                <a:tc>
+                  <a:txBody>
+                    <a:bodyPr/>
+                    <a:lstStyle/>
+                    <a:p>
+                      <a:pPr algn="l" indent="0" marL="0">
+                        <a:buNone/>
+                      </a:pPr>
+                      <a:r>
+                        <a:rPr lang="en-US" sz="1200" b="1" dirty="0">
+                          <a:solidFill>
+                            <a:srgbClr val="0B0B0B"/>
+                          </a:solidFill>
+                          <a:latin typeface="Calibri" pitchFamily="34" charset="0"/>
+                          <a:ea typeface="Calibri" pitchFamily="34" charset="-122"/>
+                          <a:cs typeface="Calibri" pitchFamily="34" charset="-120"/>
+                        </a:rPr>
+                        <a:t>total</a:t>
+                      </a:r>
+                      <a:endParaRPr lang="en-US" sz="1200" dirty="0">
+                        <a:latin typeface="Calibri" charset="0"/>
+                        <a:ea typeface="Calibri" charset="0"/>
+                        <a:cs typeface="Calibri" charset="0"/>
+                      </a:endParaRPr>
+                    </a:p>
+                  </a:txBody>
+                  <a:tcPr marL="73152" marR="73152" marT="73152" marB="73152" anchor="ctr">
+                    <a:lnL w="9525" cap="flat" cmpd="sng" algn="ctr">
+                      <a:solidFill>
+                        <a:srgbClr val="E1E0D9"/>
+                      </a:solidFill>
+                      <a:prstDash val="solid"/>
+                      <a:round/>
+                      <a:headEnd type="none" w="med" len="med"/>
+                      <a:tailEnd type="none" w="med" len="med"/>
+                    </a:lnL>
+                    <a:lnR w="9525" cap="flat" cmpd="sng" algn="ctr">
+                      <a:solidFill>
+                        <a:srgbClr val="E1E0D9"/>
+                      </a:solidFill>
+                      <a:prstDash val="solid"/>
+                      <a:round/>
+                      <a:headEnd type="none" w="med" len="med"/>
+                      <a:tailEnd type="none" w="med" len="med"/>
+                    </a:lnR>
+                    <a:lnT w="9525" cap="flat" cmpd="sng" algn="ctr">
+                      <a:solidFill>
+                        <a:srgbClr val="E1E0D9"/>
+                      </a:solidFill>
+                      <a:prstDash val="solid"/>
+                      <a:round/>
+                      <a:headEnd type="none" w="med" len="med"/>
+                      <a:tailEnd type="none" w="med" len="med"/>
+                    </a:lnT>
+                    <a:lnB w="9525" cap="flat" cmpd="sng" algn="ctr">
+                      <a:solidFill>
+                        <a:srgbClr val="E1E0D9"/>
+                      </a:solidFill>
+                      <a:prstDash val="solid"/>
+                      <a:round/>
+                      <a:headEnd type="none" w="med" len="med"/>
+                      <a:tailEnd type="none" w="med" len="med"/>
+                    </a:lnB>
+                  </a:tcPr>
+                </a:tc>
+                <a:tc>
+                  <a:txBody>
+                    <a:bodyPr/>
+                    <a:lstStyle/>
+                    <a:p>
+                      <a:pPr algn="r" indent="0" marL="0">
+                        <a:buNone/>
+                      </a:pPr>
+                      <a:r>
+                        <a:rPr lang="en-US" sz="1200" b="1" dirty="0">
+                          <a:solidFill>
+                            <a:srgbClr val="0B0B0B"/>
+                          </a:solidFill>
+                          <a:latin typeface="Calibri" pitchFamily="34" charset="0"/>
+                          <a:ea typeface="Calibri" pitchFamily="34" charset="-122"/>
+                          <a:cs typeface="Calibri" pitchFamily="34" charset="-120"/>
+                        </a:rPr>
+                        <a:t>7,000</a:t>
+                      </a:r>
+                      <a:endParaRPr lang="en-US" sz="1200" dirty="0">
+                        <a:latin typeface="Calibri" charset="0"/>
+                        <a:ea typeface="Calibri" charset="0"/>
+                        <a:cs typeface="Calibri" charset="0"/>
+                      </a:endParaRPr>
+                    </a:p>
+                  </a:txBody>
+                  <a:tcPr marL="73152" marR="73152" marT="73152" marB="73152" anchor="ctr">
+                    <a:lnL w="9525" cap="flat" cmpd="sng" algn="ctr">
+                      <a:solidFill>
+                        <a:srgbClr val="E1E0D9"/>
+                      </a:solidFill>
+                      <a:prstDash val="solid"/>
+                      <a:round/>
+                      <a:headEnd type="none" w="med" len="med"/>
+                      <a:tailEnd type="none" w="med" len="med"/>
+                    </a:lnL>
+                    <a:lnR w="9525" cap="flat" cmpd="sng" algn="ctr">
+                      <a:solidFill>
+                        <a:srgbClr val="E1E0D9"/>
+                      </a:solidFill>
+                      <a:prstDash val="solid"/>
+                      <a:round/>
+                      <a:headEnd type="none" w="med" len="med"/>
+                      <a:tailEnd type="none" w="med" len="med"/>
+                    </a:lnR>
+                    <a:lnT w="9525" cap="flat" cmpd="sng" algn="ctr">
+                      <a:solidFill>
+                        <a:srgbClr val="E1E0D9"/>
+                      </a:solidFill>
+                      <a:prstDash val="solid"/>
+                      <a:round/>
+                      <a:headEnd type="none" w="med" len="med"/>
+                      <a:tailEnd type="none" w="med" len="med"/>
+                    </a:lnT>
+                    <a:lnB w="9525" cap="flat" cmpd="sng" algn="ctr">
+                      <a:solidFill>
+                        <a:srgbClr val="E1E0D9"/>
+                      </a:solidFill>
+                      <a:prstDash val="solid"/>
+                      <a:round/>
+                      <a:headEnd type="none" w="med" len="med"/>
+                      <a:tailEnd type="none" w="med" len="med"/>
+                    </a:lnB>
+                  </a:tcPr>
+                </a:tc>
+                <a:tc>
+                  <a:txBody>
+                    <a:bodyPr/>
+                    <a:lstStyle/>
+                    <a:p>
+                      <a:pPr algn="r" indent="0" marL="0">
+                        <a:buNone/>
+                      </a:pPr>
+                      <a:r>
+                        <a:rPr lang="en-US" sz="1200" b="1" dirty="0">
+                          <a:solidFill>
+                            <a:srgbClr val="0B0B0B"/>
+                          </a:solidFill>
+                          <a:latin typeface="Calibri" pitchFamily="34" charset="0"/>
+                          <a:ea typeface="Calibri" pitchFamily="34" charset="-122"/>
+                          <a:cs typeface="Calibri" pitchFamily="34" charset="-120"/>
+                        </a:rPr>
+                        <a:t>31,484</a:t>
+                      </a:r>
+                      <a:endParaRPr lang="en-US" sz="1200" dirty="0">
+                        <a:latin typeface="Calibri" charset="0"/>
+                        <a:ea typeface="Calibri" charset="0"/>
+                        <a:cs typeface="Calibri" charset="0"/>
+                      </a:endParaRPr>
+                    </a:p>
+                  </a:txBody>
+                  <a:tcPr marL="73152" marR="73152" marT="73152" marB="73152" anchor="ctr">
+                    <a:lnL w="9525" cap="flat" cmpd="sng" algn="ctr">
+                      <a:solidFill>
+                        <a:srgbClr val="E1E0D9"/>
+                      </a:solidFill>
+                      <a:prstDash val="solid"/>
+                      <a:round/>
+                      <a:headEnd type="none" w="med" len="med"/>
+                      <a:tailEnd type="none" w="med" len="med"/>
+                    </a:lnL>
+                    <a:lnR w="9525" cap="flat" cmpd="sng" algn="ctr">
+                      <a:solidFill>
+                        <a:srgbClr val="E1E0D9"/>
+                      </a:solidFill>
+                      <a:prstDash val="solid"/>
+                      <a:round/>
+                      <a:headEnd type="none" w="med" len="med"/>
+                      <a:tailEnd type="none" w="med" len="med"/>
+                    </a:lnR>
+                    <a:lnT w="9525" cap="flat" cmpd="sng" algn="ctr">
+                      <a:solidFill>
+                        <a:srgbClr val="E1E0D9"/>
+                      </a:solidFill>
+                      <a:prstDash val="solid"/>
+                      <a:round/>
+                      <a:headEnd type="none" w="med" len="med"/>
+                      <a:tailEnd type="none" w="med" len="med"/>
+                    </a:lnT>
+                    <a:lnB w="9525" cap="flat" cmpd="sng" algn="ctr">
+                      <a:solidFill>
+                        <a:srgbClr val="E1E0D9"/>
+                      </a:solidFill>
+                      <a:prstDash val="solid"/>
+                      <a:round/>
+                      <a:headEnd type="none" w="med" len="med"/>
+                      <a:tailEnd type="none" w="med" len="med"/>
+                    </a:lnB>
+                  </a:tcPr>
+                </a:tc>
+                <a:tc>
+                  <a:txBody>
+                    <a:bodyPr/>
+                    <a:lstStyle/>
+                    <a:p>
+                      <a:pPr algn="r" indent="0" marL="0">
+                        <a:buNone/>
+                      </a:pPr>
+                      <a:endParaRPr lang="en-US" sz="1200" dirty="0">
+                        <a:latin typeface="Calibri" charset="0"/>
+                        <a:ea typeface="Calibri" charset="0"/>
+                        <a:cs typeface="Calibri" charset="0"/>
+                      </a:endParaRPr>
+                    </a:p>
+                  </a:txBody>
+                  <a:tcPr marL="73152" marR="73152" marT="73152" marB="73152" anchor="ctr">
+                    <a:lnL w="9525" cap="flat" cmpd="sng" algn="ctr">
+                      <a:solidFill>
+                        <a:srgbClr val="E1E0D9"/>
+                      </a:solidFill>
+                      <a:prstDash val="solid"/>
+                      <a:round/>
+                      <a:headEnd type="none" w="med" len="med"/>
+                      <a:tailEnd type="none" w="med" len="med"/>
+                    </a:lnL>
+                    <a:lnR w="9525" cap="flat" cmpd="sng" algn="ctr">
+                      <a:solidFill>
+                        <a:srgbClr val="E1E0D9"/>
+                      </a:solidFill>
+                      <a:prstDash val="solid"/>
+                      <a:round/>
+                      <a:headEnd type="none" w="med" len="med"/>
+                      <a:tailEnd type="none" w="med" len="med"/>
+                    </a:lnR>
+                    <a:lnT w="9525" cap="flat" cmpd="sng" algn="ctr">
+                      <a:solidFill>
+                        <a:srgbClr val="E1E0D9"/>
+                      </a:solidFill>
+                      <a:prstDash val="solid"/>
+                      <a:round/>
+                      <a:headEnd type="none" w="med" len="med"/>
+                      <a:tailEnd type="none" w="med" len="med"/>
+                    </a:lnT>
+                    <a:lnB w="9525" cap="flat" cmpd="sng" algn="ctr">
+                      <a:solidFill>
+                        <a:srgbClr val="E1E0D9"/>
+                      </a:solidFill>
+                      <a:prstDash val="solid"/>
+                      <a:round/>
+                      <a:headEnd type="none" w="med" len="med"/>
+                      <a:tailEnd type="none" w="med" len="med"/>
+                    </a:lnB>
+                  </a:tcPr>
+                </a:tc>
+              </a:tr>
+            </a:tbl>
+          </a:graphicData>
+        </a:graphic>
+      </p:graphicFrame>
+      <p:sp>
+        <p:nvSpPr>
+          <p:cNvPr id="4" name="release facts"/>
           <p:cNvSpPr txBox="1"/>
           <p:nvPr/>
         </p:nvSpPr>
         <p:spPr>
           <a:xfrm>
-            <a:off x="548640" y="5897880"/>
-            <a:ext cx="11091672" cy="502920"/>
+            <a:off x="548640" y="3977640"/>
+            <a:ext cx="5120640" cy="2148840"/>
           </a:xfrm>
           <a:prstGeom prst="rect">
             <a:avLst/>
@@ -5052,21 +6723,111 @@
           <a:bodyPr wrap="square" lIns="0" tIns="0" rIns="0" bIns="0" rtlCol="0" anchor="t"/>
           <a:lstStyle/>
           <a:p>
-            <a:pPr indent="0" marL="0">
-              <a:buNone/>
+            <a:pPr marL="342900" indent="-342900">
+              <a:spcAft>
+                <a:spcPts val="600"/>
+              </a:spcAft>
+              <a:buSzPct val="100000"/>
+              <a:buChar char="•"/>
             </a:pPr>
             <a:r>
-              <a:rPr lang="en-US" sz="1100" dirty="0">
+              <a:rPr lang="en-US" sz="1300" dirty="0">
                 <a:solidFill>
-                  <a:srgbClr val="52514E"/>
+                  <a:schemeClr val="tx1"/>
                 </a:solidFill>
               </a:rPr>
-              <a:t>One benchmark context per tier; dashed rings are insulation. Within a tier, kinds, trades, services, surfaces and stacking all vary, so element count is the one controlled difficulty axis. C1 is the most common support in any building; C8 is a congested rack.</a:t>
+              <a:t>Tiers assigned round-robin: 625 per tier in train, 125 in the benchmark</a:t>
             </a:r>
-            <a:endParaRPr lang="en-US" sz="1100" dirty="0"/>
+            <a:endParaRPr lang="en-US" sz="1300" dirty="0"/>
+          </a:p>
+          <a:p>
+            <a:pPr marL="342900" indent="-342900">
+              <a:spcAft>
+                <a:spcPts val="600"/>
+              </a:spcAft>
+              <a:buSzPct val="100000"/>
+              <a:buChar char="•"/>
+            </a:pPr>
+            <a:r>
+              <a:rPr lang="en-US" sz="1300" dirty="0">
+                <a:solidFill>
+                  <a:schemeClr val="tx1"/>
+                </a:solidFill>
+              </a:rPr>
+              <a:t>Four in five contexts hang from a ceiling, one in five from a wall</a:t>
+            </a:r>
+            <a:endParaRPr lang="en-US" sz="1300" dirty="0"/>
+          </a:p>
+          <a:p>
+            <a:pPr marL="342900" indent="-342900">
+              <a:spcAft>
+                <a:spcPts val="600"/>
+              </a:spcAft>
+              <a:buSzPct val="100000"/>
+              <a:buChar char="•"/>
+            </a:pPr>
+            <a:r>
+              <a:rPr lang="en-US" sz="1300" dirty="0">
+                <a:solidFill>
+                  <a:schemeClr val="tx1"/>
+                </a:solidFill>
+              </a:rPr>
+              <a:t>Six trades: electrical 10,494, domestic water 5,725, heating 5,788, chilled water 3,987, sprinkler 2,073, ventilation 3,417 elements</a:t>
+            </a:r>
+            <a:endParaRPr lang="en-US" sz="1300" dirty="0"/>
+          </a:p>
+          <a:p>
+            <a:pPr marL="342900" indent="-342900">
+              <a:spcAft>
+                <a:spcPts val="600"/>
+              </a:spcAft>
+              <a:buSzPct val="100000"/>
+              <a:buChar char="•"/>
+            </a:pPr>
+            <a:r>
+              <a:rPr lang="en-US" sz="1300" dirty="0">
+                <a:solidFill>
+                  <a:schemeClr val="tx1"/>
+                </a:solidFill>
+              </a:rPr>
+              <a:t>Plain JSON, with a JSON Schema, Croissant metadata and a datasheet</a:t>
+            </a:r>
+            <a:endParaRPr lang="en-US" sz="1300" dirty="0"/>
           </a:p>
         </p:txBody>
       </p:sp>
+      <p:graphicFrame>
+        <p:nvGraphicFramePr>
+          <p:cNvPr id="5" name="kinds chart" descr=""/>
+          <p:cNvGraphicFramePr/>
+          <p:nvPr/>
+        </p:nvGraphicFramePr>
+        <p:xfrm>
+          <a:off x="5989320" y="1371600"/>
+          <a:ext cx="5650992" cy="2240280"/>
+        </p:xfrm>
+        <a:graphic xmlns:a="http://schemas.openxmlformats.org/drawingml/2006/main">
+          <a:graphicData uri="http://schemas.openxmlformats.org/drawingml/2006/chart">
+            <c:chart xmlns:c="http://schemas.openxmlformats.org/drawingml/2006/chart" r:id="rId1"/>
+          </a:graphicData>
+        </a:graphic>
+      </p:graphicFrame>
+      <p:graphicFrame>
+        <p:nvGraphicFramePr>
+          <p:cNvPr id="6" name="dn chart" descr=""/>
+          <p:cNvGraphicFramePr/>
+          <p:nvPr/>
+        </p:nvGraphicFramePr>
+        <p:xfrm>
+          <a:off x="5989320" y="3749040"/>
+          <a:ext cx="5650992" cy="2377440"/>
+        </p:xfrm>
+        <a:graphic xmlns:a="http://schemas.openxmlformats.org/drawingml/2006/main">
+          <a:graphicData uri="http://schemas.openxmlformats.org/drawingml/2006/chart">
+            <c:chart xmlns:c="http://schemas.openxmlformats.org/drawingml/2006/chart" r:id="rId2"/>
+          </a:graphicData>
+        </a:graphic>
+      </p:graphicFrame>
       <p:sp>
         <p:nvSpPr>
           <p:cNvPr id="25" name="Slide Number Placeholder 0"/>
@@ -5169,7 +6930,7 @@
                   <a:schemeClr val="tx1"/>
                 </a:solidFill>
               </a:rPr>
-              <a:t>Higher tiers are heavier and tighter, as designed</a:t>
+              <a:t>Difficulty is one number: tier Cn holds exactly n elements</a:t>
             </a:r>
             <a:endParaRPr lang="en-US" sz="2600" dirty="0"/>
           </a:p>
@@ -5177,7 +6938,7 @@
       </p:sp>
       <p:pic>
         <p:nvPicPr>
-          <p:cNvPr id="3" name="tier statistics" descr="preencoded.png">    </p:cNvPr>
+          <p:cNvPr id="3" name="tier gallery" descr="/home/user/crossmep_dataset/docs/figures/02_tier_gallery.png">    </p:cNvPr>
           <p:cNvPicPr>
             <a:picLocks noChangeAspect="1"/>
           </p:cNvPicPr>
@@ -5191,8 +6952,8 @@
         </p:blipFill>
         <p:spPr>
           <a:xfrm>
-            <a:off x="548640" y="1325880"/>
-            <a:ext cx="11091672" cy="3965273"/>
+            <a:off x="1244890" y="1280160"/>
+            <a:ext cx="9699171" cy="4526280"/>
           </a:xfrm>
           <a:prstGeom prst="rect">
             <a:avLst/>
@@ -5201,14 +6962,14 @@
       </p:pic>
       <p:sp>
         <p:nvSpPr>
-          <p:cNvPr id="4" name="experiment 1 caption"/>
+          <p:cNvPr id="4" name="gallery caption"/>
           <p:cNvSpPr txBox="1"/>
           <p:nvPr/>
         </p:nvSpPr>
         <p:spPr>
           <a:xfrm>
-            <a:off x="548640" y="5400881"/>
-            <a:ext cx="11091672" cy="731520"/>
+            <a:off x="548640" y="5897880"/>
+            <a:ext cx="11091672" cy="502920"/>
           </a:xfrm>
           <a:prstGeom prst="rect">
             <a:avLst/>
@@ -5224,14 +6985,14 @@
               <a:buNone/>
             </a:pPr>
             <a:r>
-              <a:rPr lang="en-US" sz="1250" dirty="0">
+              <a:rPr lang="en-US" sz="1100" dirty="0">
                 <a:solidFill>
                   <a:srgbClr val="52514E"/>
                 </a:solidFill>
               </a:rPr>
-              <a:t>A check that the dataset behaves as designed: the tier fixes the element count; load and congestion follow from the rules. Boxes: benchmark, 125 contexts per tier (IQR, whiskers 1.5 IQR); diamonds: medians of 2,000 generated contexts per tier. Load rises with the tier (rank correlation +0.46; the population medians rise at every step) and the closest gap narrows at every step (−0.38; 149 → 55 mm in the population).</a:t>
+              <a:t>One benchmark context per tier; dashed rings are insulation. Within a tier, kinds, trades, services, surfaces and stacking all vary, so element count is the one controlled difficulty axis. C1 is the most common support in any building; C8 is a congested rack.</a:t>
             </a:r>
-            <a:endParaRPr lang="en-US" sz="1250" dirty="0"/>
+            <a:endParaRPr lang="en-US" sz="1100" dirty="0"/>
           </a:p>
         </p:txBody>
       </p:sp>
@@ -5337,7 +7098,7 @@
                   <a:schemeClr val="tx1"/>
                 </a:solidFill>
               </a:rPr>
-              <a:t>Spacing holds up on a clinic the generator never saw</a:t>
+              <a:t>Higher tiers are heavier and tighter, as designed</a:t>
             </a:r>
             <a:endParaRPr lang="en-US" sz="2600" dirty="0"/>
           </a:p>
@@ -5345,7 +7106,7 @@
       </p:sp>
       <p:pic>
         <p:nvPicPr>
-          <p:cNvPr id="3" name="gap distributions" descr="preencoded.png">    </p:cNvPr>
+          <p:cNvPr id="3" name="tier statistics" descr="preencoded.png">    </p:cNvPr>
           <p:cNvPicPr>
             <a:picLocks noChangeAspect="1"/>
           </p:cNvPicPr>
@@ -5360,7 +7121,7 @@
         <p:spPr>
           <a:xfrm>
             <a:off x="548640" y="1325880"/>
-            <a:ext cx="11091672" cy="4133217"/>
+            <a:ext cx="11091672" cy="3965273"/>
           </a:xfrm>
           <a:prstGeom prst="rect">
             <a:avLst/>
@@ -5369,13 +7130,13 @@
       </p:pic>
       <p:sp>
         <p:nvSpPr>
-          <p:cNvPr id="4" name="experiment 2 caption"/>
+          <p:cNvPr id="4" name="experiment 1 caption"/>
           <p:cNvSpPr txBox="1"/>
           <p:nvPr/>
         </p:nvSpPr>
         <p:spPr>
           <a:xfrm>
-            <a:off x="548640" y="5568825"/>
+            <a:off x="548640" y="5400881"/>
             <a:ext cx="11091672" cy="731520"/>
           </a:xfrm>
           <a:prstGeom prst="rect">
@@ -5397,7 +7158,7 @@
                   <a:srgbClr val="52514E"/>
                 </a:solidFill>
               </a:rPr>
-              <a:t>The gap distribution was fitted on the duplex; the clinic was held out. Clear gaps between side-by-side pipes, on sections every 250 mm. Clinic (797 pipe pairs): 32 mm from the generated gaps (95 % CI 17–48), more than the 8 mm a perfect generator would show, and about as close as the duplex’s own two models are to each other (26 mm). Models: buildingSMART Duplex Apartment and Medical-Dental Clinic, CC BY 4.0.</a:t>
+              <a:t>A check that the dataset behaves as designed: the tier fixes the element count; load and congestion follow from the rules. Boxes: benchmark, 125 contexts per tier (IQR, whiskers 1.5 IQR); diamonds: medians of 2,000 generated contexts per tier. Load rises with the tier (rank correlation +0.46; the population medians rise at every step) and the closest gap narrows at every step (−0.38; 149 → 55 mm in the population).</a:t>
             </a:r>
             <a:endParaRPr lang="en-US" sz="1250" dirty="0"/>
           </a:p>
@@ -5459,6 +7220,174 @@
 <file path=ppt/slides/slide13.xml><?xml version="1.0" encoding="utf-8"?>
 <p:sld xmlns:a="http://schemas.openxmlformats.org/drawingml/2006/main" xmlns:r="http://schemas.openxmlformats.org/officeDocument/2006/relationships" xmlns:p="http://schemas.openxmlformats.org/presentationml/2006/main">
   <p:cSld name="Slide 13">
+    <p:spTree>
+      <p:nvGrpSpPr>
+        <p:cNvPr id="1" name=""/>
+        <p:cNvGrpSpPr/>
+        <p:nvPr/>
+      </p:nvGrpSpPr>
+      <p:grpSpPr>
+        <a:xfrm>
+          <a:off x="0" y="0"/>
+          <a:ext cx="0" cy="0"/>
+          <a:chOff x="0" y="0"/>
+          <a:chExt cx="0" cy="0"/>
+        </a:xfrm>
+      </p:grpSpPr>
+      <p:sp>
+        <p:nvSpPr>
+          <p:cNvPr id="2" name="Text 0"/>
+          <p:cNvSpPr/>
+          <p:nvPr>
+            <p:ph idx="100" type="title" hasCustomPrompt="1"/>
+          </p:nvPr>
+        </p:nvSpPr>
+        <p:spPr>
+          <a:xfrm>
+            <a:off x="548640" y="274320"/>
+            <a:ext cx="11091672" cy="960120"/>
+          </a:xfrm>
+          <a:prstGeom prst="rect">
+            <a:avLst/>
+          </a:prstGeom>
+          <a:noFill/>
+          <a:ln/>
+        </p:spPr>
+        <p:txBody>
+          <a:bodyPr wrap="square" lIns="0" tIns="0" rIns="0" bIns="0" rtlCol="0" anchor="ctr"/>
+          <a:lstStyle/>
+          <a:p>
+            <a:pPr algn="l" indent="0" marL="0">
+              <a:buNone/>
+            </a:pPr>
+            <a:r>
+              <a:rPr lang="en-US" sz="2600" b="1" dirty="0">
+                <a:solidFill>
+                  <a:schemeClr val="tx1"/>
+                </a:solidFill>
+              </a:rPr>
+              <a:t>Spacing holds up on a clinic the generator never saw</a:t>
+            </a:r>
+            <a:endParaRPr lang="en-US" sz="2600" dirty="0"/>
+          </a:p>
+        </p:txBody>
+      </p:sp>
+      <p:pic>
+        <p:nvPicPr>
+          <p:cNvPr id="3" name="gap distributions" descr="preencoded.png">    </p:cNvPr>
+          <p:cNvPicPr>
+            <a:picLocks noChangeAspect="1"/>
+          </p:cNvPicPr>
+          <p:nvPr/>
+        </p:nvPicPr>
+        <p:blipFill>
+          <a:blip r:embed="rId1"/>
+          <a:stretch>
+            <a:fillRect/>
+          </a:stretch>
+        </p:blipFill>
+        <p:spPr>
+          <a:xfrm>
+            <a:off x="548640" y="1325880"/>
+            <a:ext cx="11091672" cy="4133217"/>
+          </a:xfrm>
+          <a:prstGeom prst="rect">
+            <a:avLst/>
+          </a:prstGeom>
+        </p:spPr>
+      </p:pic>
+      <p:sp>
+        <p:nvSpPr>
+          <p:cNvPr id="4" name="experiment 2 caption"/>
+          <p:cNvSpPr txBox="1"/>
+          <p:nvPr/>
+        </p:nvSpPr>
+        <p:spPr>
+          <a:xfrm>
+            <a:off x="548640" y="5568825"/>
+            <a:ext cx="11091672" cy="731520"/>
+          </a:xfrm>
+          <a:prstGeom prst="rect">
+            <a:avLst/>
+          </a:prstGeom>
+          <a:noFill/>
+          <a:ln/>
+        </p:spPr>
+        <p:txBody>
+          <a:bodyPr wrap="square" lIns="0" tIns="0" rIns="0" bIns="0" rtlCol="0" anchor="t"/>
+          <a:lstStyle/>
+          <a:p>
+            <a:pPr indent="0" marL="0">
+              <a:buNone/>
+            </a:pPr>
+            <a:r>
+              <a:rPr lang="en-US" sz="1250" dirty="0">
+                <a:solidFill>
+                  <a:srgbClr val="52514E"/>
+                </a:solidFill>
+              </a:rPr>
+              <a:t>The gap distribution was fitted on the duplex; the clinic was held out. Clear gaps between side-by-side pipes, on sections every 250 mm. Clinic (797 pipe pairs): 32 mm from the generated gaps (95 % CI 17–48), more than the 8 mm a perfect generator would show, and about as close as the duplex’s own two models are to each other (26 mm). Models: buildingSMART Duplex Apartment and Medical-Dental Clinic, CC BY 4.0.</a:t>
+            </a:r>
+            <a:endParaRPr lang="en-US" sz="1250" dirty="0"/>
+          </a:p>
+        </p:txBody>
+      </p:sp>
+      <p:sp>
+        <p:nvSpPr>
+          <p:cNvPr id="25" name="Slide Number Placeholder 0"/>
+          <p:cNvSpPr>
+            <a:spLocks noGrp="1"/>
+          </p:cNvSpPr>
+          <p:nvPr>
+            <p:ph type="sldNum" sz="quarter" idx="4294967295"/>
+          </p:nvPr>
+        </p:nvSpPr>
+        <p:spPr>
+          <a:xfrm>
+            <a:off x="11064240" y="6419088"/>
+            <a:ext cx="594360" cy="274320"/>
+          </a:xfrm>
+          <a:prstGeom prst="rect">
+            <a:avLst/>
+          </a:prstGeom>
+          <a:extLst>
+            <a:ext uri="{C572A759-6A51-4108-AA02-DFA0A04FC94B}">
+              <ma14:wrappingTextBoxFlag xmlns:ma14="http://schemas.microsoft.com/office/mac/drawingml/2011/main" val="0"/>
+            </a:ext>
+          </a:extLst>
+        </p:spPr>
+        <p:txBody>
+          <a:bodyPr/>
+          <a:lstStyle>
+            <a:lvl1pPr>
+              <a:defRPr sz="900">
+                <a:solidFill>
+                  <a:srgbClr val="898781"/>
+                </a:solidFill>
+              </a:defRPr>
+            </a:lvl1pPr>
+          </a:lstStyle>
+          <a:p>
+            <a:pPr algn="r"/>
+            <a:fld id="{F7021451-1387-4CA6-816F-3879F97B5CBC}" type="slidenum">
+              <a:rPr b="0" lang="en-US"/>
+              <a:t>13</a:t>
+            </a:fld>
+            <a:endParaRPr lang="en-US"/>
+          </a:p>
+        </p:txBody>
+      </p:sp>
+    </p:spTree>
+  </p:cSld>
+  <p:clrMapOvr>
+    <a:masterClrMapping/>
+  </p:clrMapOvr>
+</p:sld>
+</file>
+
+<file path=ppt/slides/slide14.xml><?xml version="1.0" encoding="utf-8"?>
+<p:sld xmlns:a="http://schemas.openxmlformats.org/drawingml/2006/main" xmlns:r="http://schemas.openxmlformats.org/officeDocument/2006/relationships" xmlns:p="http://schemas.openxmlformats.org/presentationml/2006/main">
+  <p:cSld name="Slide 14">
     <p:spTree>
       <p:nvGrpSpPr>
         <p:cNvPr id="1" name=""/>
@@ -5864,7 +7793,7 @@
             <a:pPr algn="r"/>
             <a:fld id="{F7021451-1387-4CA6-816F-3879F97B5CBC}" type="slidenum">
               <a:rPr b="0" lang="en-US"/>
-              <a:t>13</a:t>
+              <a:t>14</a:t>
             </a:fld>
             <a:endParaRPr lang="en-US"/>
           </a:p>
@@ -5878,9 +7807,9 @@
 </p:sld>
 </file>
 
-<file path=ppt/slides/slide14.xml><?xml version="1.0" encoding="utf-8"?>
+<file path=ppt/slides/slide15.xml><?xml version="1.0" encoding="utf-8"?>
 <p:sld xmlns:a="http://schemas.openxmlformats.org/drawingml/2006/main" xmlns:r="http://schemas.openxmlformats.org/officeDocument/2006/relationships" xmlns:p="http://schemas.openxmlformats.org/presentationml/2006/main">
-  <p:cSld name="Slide 14">
+  <p:cSld name="Slide 15">
     <p:spTree>
       <p:nvGrpSpPr>
         <p:cNvPr id="1" name=""/>
@@ -6140,7 +8069,7 @@
             <a:pPr algn="r"/>
             <a:fld id="{F7021451-1387-4CA6-816F-3879F97B5CBC}" type="slidenum">
               <a:rPr b="0" lang="en-US"/>
-              <a:t>14</a:t>
+              <a:t>15</a:t>
             </a:fld>
             <a:endParaRPr lang="en-US"/>
           </a:p>
@@ -6154,9 +8083,9 @@
 </p:sld>
 </file>
 
-<file path=ppt/slides/slide15.xml><?xml version="1.0" encoding="utf-8"?>
+<file path=ppt/slides/slide16.xml><?xml version="1.0" encoding="utf-8"?>
 <p:sld xmlns:a="http://schemas.openxmlformats.org/drawingml/2006/main" xmlns:r="http://schemas.openxmlformats.org/officeDocument/2006/relationships" xmlns:p="http://schemas.openxmlformats.org/presentationml/2006/main">
-  <p:cSld name="Slide 15">
+  <p:cSld name="Slide 16">
     <p:spTree>
       <p:nvGrpSpPr>
         <p:cNvPr id="1" name=""/>
@@ -6831,7 +8760,7 @@
             <a:pPr algn="r"/>
             <a:fld id="{F7021451-1387-4CA6-816F-3879F97B5CBC}" type="slidenum">
               <a:rPr b="0" lang="en-US"/>
-              <a:t>15</a:t>
+              <a:t>16</a:t>
             </a:fld>
             <a:endParaRPr lang="en-US"/>
           </a:p>
@@ -6845,9 +8774,9 @@
 </p:sld>
 </file>
 
-<file path=ppt/slides/slide16.xml><?xml version="1.0" encoding="utf-8"?>
+<file path=ppt/slides/slide17.xml><?xml version="1.0" encoding="utf-8"?>
 <p:sld xmlns:a="http://schemas.openxmlformats.org/drawingml/2006/main" xmlns:r="http://schemas.openxmlformats.org/officeDocument/2006/relationships" xmlns:p="http://schemas.openxmlformats.org/presentationml/2006/main">
-  <p:cSld name="Slide 16">
+  <p:cSld name="Slide 17">
     <p:spTree>
       <p:nvGrpSpPr>
         <p:cNvPr id="1" name=""/>
@@ -7318,7 +9247,7 @@
             <a:pPr algn="r"/>
             <a:fld id="{F7021451-1387-4CA6-816F-3879F97B5CBC}" type="slidenum">
               <a:rPr b="0" lang="en-US"/>
-              <a:t>16</a:t>
+              <a:t>17</a:t>
             </a:fld>
             <a:endParaRPr lang="en-US"/>
           </a:p>
@@ -7332,9 +9261,9 @@
 </p:sld>
 </file>
 
-<file path=ppt/slides/slide17.xml><?xml version="1.0" encoding="utf-8"?>
+<file path=ppt/slides/slide18.xml><?xml version="1.0" encoding="utf-8"?>
 <p:sld xmlns:a="http://schemas.openxmlformats.org/drawingml/2006/main" xmlns:r="http://schemas.openxmlformats.org/officeDocument/2006/relationships" xmlns:p="http://schemas.openxmlformats.org/presentationml/2006/main">
-  <p:cSld name="Slide 17">
+  <p:cSld name="Slide 18">
     <p:spTree>
       <p:nvGrpSpPr>
         <p:cNvPr id="1" name=""/>
@@ -7549,9 +9478,9 @@
 </p:sld>
 </file>
 
-<file path=ppt/slides/slide18.xml><?xml version="1.0" encoding="utf-8"?>
+<file path=ppt/slides/slide19.xml><?xml version="1.0" encoding="utf-8"?>
 <p:sld xmlns:a="http://schemas.openxmlformats.org/drawingml/2006/main" xmlns:r="http://schemas.openxmlformats.org/officeDocument/2006/relationships" xmlns:p="http://schemas.openxmlformats.org/presentationml/2006/main">
-  <p:cSld name="Slide 18">
+  <p:cSld name="Slide 19">
     <p:spTree>
       <p:nvGrpSpPr>
         <p:cNvPr id="1" name=""/>
@@ -7763,7 +9692,7 @@
             <a:pPr algn="r"/>
             <a:fld id="{F7021451-1387-4CA6-816F-3879F97B5CBC}" type="slidenum">
               <a:rPr b="0" lang="en-US"/>
-              <a:t>18</a:t>
+              <a:t>19</a:t>
             </a:fld>
             <a:endParaRPr lang="en-US"/>
           </a:p>
@@ -7777,9 +9706,609 @@
 </p:sld>
 </file>
 
-<file path=ppt/slides/slide19.xml><?xml version="1.0" encoding="utf-8"?>
+<file path=ppt/slides/slide2.xml><?xml version="1.0" encoding="utf-8"?>
 <p:sld xmlns:a="http://schemas.openxmlformats.org/drawingml/2006/main" xmlns:r="http://schemas.openxmlformats.org/officeDocument/2006/relationships" xmlns:p="http://schemas.openxmlformats.org/presentationml/2006/main">
-  <p:cSld name="Slide 19">
+  <p:cSld name="Slide 2">
+    <p:spTree>
+      <p:nvGrpSpPr>
+        <p:cNvPr id="1" name=""/>
+        <p:cNvGrpSpPr/>
+        <p:nvPr/>
+      </p:nvGrpSpPr>
+      <p:grpSpPr>
+        <a:xfrm>
+          <a:off x="0" y="0"/>
+          <a:ext cx="0" cy="0"/>
+          <a:chOff x="0" y="0"/>
+          <a:chExt cx="0" cy="0"/>
+        </a:xfrm>
+      </p:grpSpPr>
+      <p:sp>
+        <p:nvSpPr>
+          <p:cNvPr id="2" name="Text 0"/>
+          <p:cNvSpPr/>
+          <p:nvPr>
+            <p:ph idx="100" type="title" hasCustomPrompt="1"/>
+          </p:nvPr>
+        </p:nvSpPr>
+        <p:spPr>
+          <a:xfrm>
+            <a:off x="548640" y="274320"/>
+            <a:ext cx="11091672" cy="960120"/>
+          </a:xfrm>
+          <a:prstGeom prst="rect">
+            <a:avLst/>
+          </a:prstGeom>
+          <a:noFill/>
+          <a:ln/>
+        </p:spPr>
+        <p:txBody>
+          <a:bodyPr wrap="square" lIns="0" tIns="0" rIns="0" bIns="0" rtlCol="0" anchor="ctr"/>
+          <a:lstStyle/>
+          <a:p>
+            <a:pPr algn="l" indent="0" marL="0">
+              <a:buNone/>
+            </a:pPr>
+            <a:r>
+              <a:rPr lang="en-US" sz="2600" b="1" dirty="0">
+                <a:solidFill>
+                  <a:schemeClr val="tx1"/>
+                </a:solidFill>
+              </a:rPr>
+              <a:t>A hospital needs about 10,000 support assemblies, each designed by hand</a:t>
+            </a:r>
+            <a:endParaRPr lang="en-US" sz="2600" dirty="0"/>
+          </a:p>
+        </p:txBody>
+      </p:sp>
+      <p:pic>
+        <p:nvPicPr>
+          <p:cNvPr id="3" name="hospital model" descr="/home/user/crossmep_dataset/docs/figures/isarc_building.jpg">    </p:cNvPr>
+          <p:cNvPicPr>
+            <a:picLocks noChangeAspect="1"/>
+          </p:cNvPicPr>
+          <p:nvPr/>
+        </p:nvPicPr>
+        <p:blipFill>
+          <a:blip r:embed="rId1"/>
+          <a:stretch>
+            <a:fillRect/>
+          </a:stretch>
+        </p:blipFill>
+        <p:spPr>
+          <a:xfrm>
+            <a:off x="548640" y="1325880"/>
+            <a:ext cx="6035040" cy="3394710"/>
+          </a:xfrm>
+          <a:prstGeom prst="rect">
+            <a:avLst/>
+          </a:prstGeom>
+        </p:spPr>
+      </p:pic>
+      <p:sp>
+        <p:nvSpPr>
+          <p:cNvPr id="4" name="zoom box"/>
+          <p:cNvSpPr/>
+          <p:nvPr/>
+        </p:nvSpPr>
+        <p:spPr>
+          <a:xfrm>
+            <a:off x="3304843" y="2791716"/>
+            <a:ext cx="592641" cy="473902"/>
+          </a:xfrm>
+          <a:prstGeom prst="rect">
+            <a:avLst/>
+          </a:prstGeom>
+          <a:ln w="19050">
+            <a:solidFill>
+              <a:srgbClr val="EB6834"/>
+            </a:solidFill>
+            <a:prstDash val="solid"/>
+          </a:ln>
+        </p:spPr>
+      </p:sp>
+      <p:sp>
+        <p:nvSpPr>
+          <p:cNvPr id="5" name="zoom line top"/>
+          <p:cNvSpPr/>
+          <p:nvPr/>
+        </p:nvSpPr>
+        <p:spPr>
+          <a:xfrm flipV="1">
+            <a:off x="3897484" y="2791716"/>
+            <a:ext cx="3051956" cy="-1008636"/>
+          </a:xfrm>
+          <a:prstGeom prst="line">
+            <a:avLst/>
+          </a:prstGeom>
+          <a:noFill/>
+          <a:ln w="19050">
+            <a:solidFill>
+              <a:srgbClr val="EB6834"/>
+            </a:solidFill>
+            <a:prstDash val="solid"/>
+          </a:ln>
+        </p:spPr>
+      </p:sp>
+      <p:sp>
+        <p:nvSpPr>
+          <p:cNvPr id="6" name="zoom line bottom"/>
+          <p:cNvSpPr/>
+          <p:nvPr/>
+        </p:nvSpPr>
+        <p:spPr>
+          <a:xfrm>
+            <a:off x="3897484" y="3265617"/>
+            <a:ext cx="3051956" cy="1210645"/>
+          </a:xfrm>
+          <a:prstGeom prst="line">
+            <a:avLst/>
+          </a:prstGeom>
+          <a:noFill/>
+          <a:ln w="19050">
+            <a:solidFill>
+              <a:srgbClr val="EB6834"/>
+            </a:solidFill>
+            <a:prstDash val="solid"/>
+          </a:ln>
+        </p:spPr>
+      </p:sp>
+      <p:pic>
+        <p:nvPicPr>
+          <p:cNvPr id="7" name="one assembly" descr="/home/user/crossmep_dataset/docs/figures/isarc_ssa.jpg">    </p:cNvPr>
+          <p:cNvPicPr>
+            <a:picLocks noChangeAspect="1"/>
+          </p:cNvPicPr>
+          <p:nvPr/>
+        </p:nvPicPr>
+        <p:blipFill>
+          <a:blip r:embed="rId2"/>
+          <a:stretch>
+            <a:fillRect/>
+          </a:stretch>
+        </p:blipFill>
+        <p:spPr>
+          <a:xfrm>
+            <a:off x="6949440" y="1783080"/>
+            <a:ext cx="4690872" cy="2693182"/>
+          </a:xfrm>
+          <a:prstGeom prst="rect">
+            <a:avLst/>
+          </a:prstGeom>
+        </p:spPr>
+      </p:pic>
+      <p:sp>
+        <p:nvSpPr>
+          <p:cNvPr id="8" name="inset frame"/>
+          <p:cNvSpPr/>
+          <p:nvPr/>
+        </p:nvSpPr>
+        <p:spPr>
+          <a:xfrm>
+            <a:off x="6949440" y="1783080"/>
+            <a:ext cx="4690872" cy="2693182"/>
+          </a:xfrm>
+          <a:prstGeom prst="rect">
+            <a:avLst/>
+          </a:prstGeom>
+          <a:ln w="19050">
+            <a:solidFill>
+              <a:srgbClr val="EB6834"/>
+            </a:solidFill>
+            <a:prstDash val="solid"/>
+          </a:ln>
+        </p:spPr>
+      </p:sp>
+      <p:sp>
+        <p:nvSpPr>
+          <p:cNvPr id="9" name="inset label"/>
+          <p:cNvSpPr txBox="1"/>
+          <p:nvPr/>
+        </p:nvSpPr>
+        <p:spPr>
+          <a:xfrm>
+            <a:off x="6949440" y="1325880"/>
+            <a:ext cx="4690872" cy="411480"/>
+          </a:xfrm>
+          <a:prstGeom prst="rect">
+            <a:avLst/>
+          </a:prstGeom>
+          <a:noFill/>
+          <a:ln/>
+        </p:spPr>
+        <p:txBody>
+          <a:bodyPr wrap="square" lIns="0" tIns="0" rIns="0" bIns="0" rtlCol="0" anchor="b"/>
+          <a:lstStyle/>
+          <a:p>
+            <a:pPr indent="0" marL="0">
+              <a:buNone/>
+            </a:pPr>
+            <a:r>
+              <a:rPr lang="en-US" sz="1500" b="1" dirty="0">
+                <a:solidFill>
+                  <a:schemeClr val="tx1"/>
+                </a:solidFill>
+              </a:rPr>
+              <a:t>1 unit = 1 structural support assembly (SSA)</a:t>
+            </a:r>
+            <a:endParaRPr lang="en-US" sz="1500" dirty="0"/>
+          </a:p>
+        </p:txBody>
+      </p:sp>
+      <p:sp>
+        <p:nvSpPr>
+          <p:cNvPr id="10" name="tile support assemblies in one 200,000 sq ft hospital"/>
+          <p:cNvSpPr/>
+          <p:nvPr/>
+        </p:nvSpPr>
+        <p:spPr>
+          <a:xfrm>
+            <a:off x="548640" y="4892040"/>
+            <a:ext cx="3575304" cy="1188720"/>
+          </a:xfrm>
+          <a:prstGeom prst="roundRect">
+            <a:avLst>
+              <a:gd name="adj" fmla="val 5385"/>
+            </a:avLst>
+          </a:prstGeom>
+          <a:solidFill>
+            <a:schemeClr val="bg2"/>
+          </a:solidFill>
+          <a:ln/>
+        </p:spPr>
+      </p:sp>
+      <p:sp>
+        <p:nvSpPr>
+          <p:cNvPr id="11" name="value support assemblies in one 200,000 sq ft hospital"/>
+          <p:cNvSpPr txBox="1"/>
+          <p:nvPr/>
+        </p:nvSpPr>
+        <p:spPr>
+          <a:xfrm>
+            <a:off x="749808" y="4983480"/>
+            <a:ext cx="3172968" cy="594360"/>
+          </a:xfrm>
+          <a:prstGeom prst="rect">
+            <a:avLst/>
+          </a:prstGeom>
+          <a:noFill/>
+          <a:ln/>
+        </p:spPr>
+        <p:txBody>
+          <a:bodyPr wrap="square" lIns="0" tIns="0" rIns="0" bIns="0" rtlCol="0" anchor="ctr"/>
+          <a:lstStyle/>
+          <a:p>
+            <a:pPr indent="0" marL="0">
+              <a:buNone/>
+            </a:pPr>
+            <a:r>
+              <a:rPr lang="en-US" sz="2800" b="1" dirty="0">
+                <a:solidFill>
+                  <a:schemeClr val="accent1"/>
+                </a:solidFill>
+              </a:rPr>
+              <a:t>≈ 10,000</a:t>
+            </a:r>
+            <a:endParaRPr lang="en-US" sz="2800" dirty="0"/>
+          </a:p>
+        </p:txBody>
+      </p:sp>
+      <p:sp>
+        <p:nvSpPr>
+          <p:cNvPr id="12" name="label support assemblies in one 200,000 sq ft hospital"/>
+          <p:cNvSpPr txBox="1"/>
+          <p:nvPr/>
+        </p:nvSpPr>
+        <p:spPr>
+          <a:xfrm>
+            <a:off x="749808" y="5581498"/>
+            <a:ext cx="3172968" cy="451714"/>
+          </a:xfrm>
+          <a:prstGeom prst="rect">
+            <a:avLst/>
+          </a:prstGeom>
+          <a:noFill/>
+          <a:ln/>
+        </p:spPr>
+        <p:txBody>
+          <a:bodyPr wrap="square" lIns="0" tIns="0" rIns="0" bIns="0" rtlCol="0" anchor="t"/>
+          <a:lstStyle/>
+          <a:p>
+            <a:pPr indent="0" marL="0">
+              <a:buNone/>
+            </a:pPr>
+            <a:r>
+              <a:rPr lang="en-US" sz="1200" dirty="0">
+                <a:solidFill>
+                  <a:srgbClr val="52514E"/>
+                </a:solidFill>
+              </a:rPr>
+              <a:t>support assemblies in one 200,000 sq ft hospital</a:t>
+            </a:r>
+            <a:endParaRPr lang="en-US" sz="1200" dirty="0"/>
+          </a:p>
+        </p:txBody>
+      </p:sp>
+      <p:sp>
+        <p:nvSpPr>
+          <p:cNvPr id="13" name="tile of engineering for each assembly, designed one by one"/>
+          <p:cNvSpPr/>
+          <p:nvPr/>
+        </p:nvSpPr>
+        <p:spPr>
+          <a:xfrm>
+            <a:off x="4306824" y="4892040"/>
+            <a:ext cx="3575304" cy="1188720"/>
+          </a:xfrm>
+          <a:prstGeom prst="roundRect">
+            <a:avLst>
+              <a:gd name="adj" fmla="val 5385"/>
+            </a:avLst>
+          </a:prstGeom>
+          <a:solidFill>
+            <a:schemeClr val="bg2"/>
+          </a:solidFill>
+          <a:ln/>
+        </p:spPr>
+      </p:sp>
+      <p:sp>
+        <p:nvSpPr>
+          <p:cNvPr id="14" name="value of engineering for each assembly, designed one by one"/>
+          <p:cNvSpPr txBox="1"/>
+          <p:nvPr/>
+        </p:nvSpPr>
+        <p:spPr>
+          <a:xfrm>
+            <a:off x="4507992" y="4983480"/>
+            <a:ext cx="3172968" cy="594360"/>
+          </a:xfrm>
+          <a:prstGeom prst="rect">
+            <a:avLst/>
+          </a:prstGeom>
+          <a:noFill/>
+          <a:ln/>
+        </p:spPr>
+        <p:txBody>
+          <a:bodyPr wrap="square" lIns="0" tIns="0" rIns="0" bIns="0" rtlCol="0" anchor="ctr"/>
+          <a:lstStyle/>
+          <a:p>
+            <a:pPr indent="0" marL="0">
+              <a:buNone/>
+            </a:pPr>
+            <a:r>
+              <a:rPr lang="en-US" sz="2800" b="1" dirty="0">
+                <a:solidFill>
+                  <a:schemeClr val="accent1"/>
+                </a:solidFill>
+              </a:rPr>
+              <a:t>20 min – 2 h</a:t>
+            </a:r>
+            <a:endParaRPr lang="en-US" sz="2800" dirty="0"/>
+          </a:p>
+        </p:txBody>
+      </p:sp>
+      <p:sp>
+        <p:nvSpPr>
+          <p:cNvPr id="15" name="label of engineering for each assembly, designed one by one"/>
+          <p:cNvSpPr txBox="1"/>
+          <p:nvPr/>
+        </p:nvSpPr>
+        <p:spPr>
+          <a:xfrm>
+            <a:off x="4507992" y="5581498"/>
+            <a:ext cx="3172968" cy="451714"/>
+          </a:xfrm>
+          <a:prstGeom prst="rect">
+            <a:avLst/>
+          </a:prstGeom>
+          <a:noFill/>
+          <a:ln/>
+        </p:spPr>
+        <p:txBody>
+          <a:bodyPr wrap="square" lIns="0" tIns="0" rIns="0" bIns="0" rtlCol="0" anchor="t"/>
+          <a:lstStyle/>
+          <a:p>
+            <a:pPr indent="0" marL="0">
+              <a:buNone/>
+            </a:pPr>
+            <a:r>
+              <a:rPr lang="en-US" sz="1200" dirty="0">
+                <a:solidFill>
+                  <a:srgbClr val="52514E"/>
+                </a:solidFill>
+              </a:rPr>
+              <a:t>of engineering for each assembly, designed one by one</a:t>
+            </a:r>
+            <a:endParaRPr lang="en-US" sz="1200" dirty="0"/>
+          </a:p>
+        </p:txBody>
+      </p:sp>
+      <p:sp>
+        <p:nvSpPr>
+          <p:cNvPr id="16" name="tile of MEP design effort; on the order of $600K per project"/>
+          <p:cNvSpPr/>
+          <p:nvPr/>
+        </p:nvSpPr>
+        <p:spPr>
+          <a:xfrm>
+            <a:off x="8065008" y="4892040"/>
+            <a:ext cx="3575304" cy="1188720"/>
+          </a:xfrm>
+          <a:prstGeom prst="roundRect">
+            <a:avLst>
+              <a:gd name="adj" fmla="val 5385"/>
+            </a:avLst>
+          </a:prstGeom>
+          <a:solidFill>
+            <a:schemeClr val="bg2"/>
+          </a:solidFill>
+          <a:ln/>
+        </p:spPr>
+      </p:sp>
+      <p:sp>
+        <p:nvSpPr>
+          <p:cNvPr id="17" name="value of MEP design effort; on the order of $600K per project"/>
+          <p:cNvSpPr txBox="1"/>
+          <p:nvPr/>
+        </p:nvSpPr>
+        <p:spPr>
+          <a:xfrm>
+            <a:off x="8266176" y="4983480"/>
+            <a:ext cx="3172968" cy="594360"/>
+          </a:xfrm>
+          <a:prstGeom prst="rect">
+            <a:avLst/>
+          </a:prstGeom>
+          <a:noFill/>
+          <a:ln/>
+        </p:spPr>
+        <p:txBody>
+          <a:bodyPr wrap="square" lIns="0" tIns="0" rIns="0" bIns="0" rtlCol="0" anchor="ctr"/>
+          <a:lstStyle/>
+          <a:p>
+            <a:pPr indent="0" marL="0">
+              <a:buNone/>
+            </a:pPr>
+            <a:r>
+              <a:rPr lang="en-US" sz="2800" b="1" dirty="0">
+                <a:solidFill>
+                  <a:schemeClr val="accent1"/>
+                </a:solidFill>
+              </a:rPr>
+              <a:t>≈ ¼</a:t>
+            </a:r>
+            <a:endParaRPr lang="en-US" sz="2800" dirty="0"/>
+          </a:p>
+        </p:txBody>
+      </p:sp>
+      <p:sp>
+        <p:nvSpPr>
+          <p:cNvPr id="18" name="label of MEP design effort; on the order of $600K per project"/>
+          <p:cNvSpPr txBox="1"/>
+          <p:nvPr/>
+        </p:nvSpPr>
+        <p:spPr>
+          <a:xfrm>
+            <a:off x="8266176" y="5581498"/>
+            <a:ext cx="3172968" cy="451714"/>
+          </a:xfrm>
+          <a:prstGeom prst="rect">
+            <a:avLst/>
+          </a:prstGeom>
+          <a:noFill/>
+          <a:ln/>
+        </p:spPr>
+        <p:txBody>
+          <a:bodyPr wrap="square" lIns="0" tIns="0" rIns="0" bIns="0" rtlCol="0" anchor="t"/>
+          <a:lstStyle/>
+          <a:p>
+            <a:pPr indent="0" marL="0">
+              <a:buNone/>
+            </a:pPr>
+            <a:r>
+              <a:rPr lang="en-US" sz="1200" dirty="0">
+                <a:solidFill>
+                  <a:srgbClr val="52514E"/>
+                </a:solidFill>
+              </a:rPr>
+              <a:t>of MEP design effort; on the order of $600K per project</a:t>
+            </a:r>
+            <a:endParaRPr lang="en-US" sz="1200" dirty="0"/>
+          </a:p>
+        </p:txBody>
+      </p:sp>
+      <p:sp>
+        <p:nvSpPr>
+          <p:cNvPr id="19" name="estimates note"/>
+          <p:cNvSpPr txBox="1"/>
+          <p:nvPr/>
+        </p:nvSpPr>
+        <p:spPr>
+          <a:xfrm>
+            <a:off x="548640" y="6126480"/>
+            <a:ext cx="5486400" cy="228600"/>
+          </a:xfrm>
+          <a:prstGeom prst="rect">
+            <a:avLst/>
+          </a:prstGeom>
+          <a:noFill/>
+          <a:ln/>
+        </p:spPr>
+        <p:txBody>
+          <a:bodyPr wrap="square" lIns="0" tIns="0" rIns="0" bIns="0" rtlCol="0" anchor="t"/>
+          <a:lstStyle/>
+          <a:p>
+            <a:pPr indent="0" marL="0">
+              <a:buNone/>
+            </a:pPr>
+            <a:r>
+              <a:rPr lang="en-US" sz="1100" dirty="0">
+                <a:solidFill>
+                  <a:srgbClr val="52514E"/>
+                </a:solidFill>
+              </a:rPr>
+              <a:t>Approximate practitioner estimates.</a:t>
+            </a:r>
+            <a:endParaRPr lang="en-US" sz="1100" dirty="0"/>
+          </a:p>
+        </p:txBody>
+      </p:sp>
+      <p:sp>
+        <p:nvSpPr>
+          <p:cNvPr id="25" name="Slide Number Placeholder 0"/>
+          <p:cNvSpPr>
+            <a:spLocks noGrp="1"/>
+          </p:cNvSpPr>
+          <p:nvPr>
+            <p:ph type="sldNum" sz="quarter" idx="4294967295"/>
+          </p:nvPr>
+        </p:nvSpPr>
+        <p:spPr>
+          <a:xfrm>
+            <a:off x="11064240" y="6419088"/>
+            <a:ext cx="594360" cy="274320"/>
+          </a:xfrm>
+          <a:prstGeom prst="rect">
+            <a:avLst/>
+          </a:prstGeom>
+          <a:extLst>
+            <a:ext uri="{C572A759-6A51-4108-AA02-DFA0A04FC94B}">
+              <ma14:wrappingTextBoxFlag xmlns:ma14="http://schemas.microsoft.com/office/mac/drawingml/2011/main" val="0"/>
+            </a:ext>
+          </a:extLst>
+        </p:spPr>
+        <p:txBody>
+          <a:bodyPr/>
+          <a:lstStyle>
+            <a:lvl1pPr>
+              <a:defRPr sz="900">
+                <a:solidFill>
+                  <a:srgbClr val="898781"/>
+                </a:solidFill>
+              </a:defRPr>
+            </a:lvl1pPr>
+          </a:lstStyle>
+          <a:p>
+            <a:pPr algn="r"/>
+            <a:fld id="{F7021451-1387-4CA6-816F-3879F97B5CBC}" type="slidenum">
+              <a:rPr b="0" lang="en-US"/>
+              <a:t>2</a:t>
+            </a:fld>
+            <a:endParaRPr lang="en-US"/>
+          </a:p>
+        </p:txBody>
+      </p:sp>
+    </p:spTree>
+  </p:cSld>
+  <p:clrMapOvr>
+    <a:masterClrMapping/>
+  </p:clrMapOvr>
+</p:sld>
+</file>
+
+<file path=ppt/slides/slide20.xml><?xml version="1.0" encoding="utf-8"?>
+<p:sld xmlns:a="http://schemas.openxmlformats.org/drawingml/2006/main" xmlns:r="http://schemas.openxmlformats.org/officeDocument/2006/relationships" xmlns:p="http://schemas.openxmlformats.org/presentationml/2006/main">
+  <p:cSld name="Slide 20">
     <p:spTree>
       <p:nvGrpSpPr>
         <p:cNvPr id="1" name=""/>
@@ -7834,7 +10363,7 @@
       </p:sp>
       <p:graphicFrame>
         <p:nvGraphicFramePr>
-          <p:cNvPr id="20" name="tier table"/>
+          <p:cNvPr id="21" name="tier table"/>
           <p:cNvGraphicFramePr>
             <a:graphicFrameLocks noGrp="1"/>
           </p:cNvGraphicFramePr>
@@ -11144,7 +13673,7 @@
             <a:pPr algn="r"/>
             <a:fld id="{F7021451-1387-4CA6-816F-3879F97B5CBC}" type="slidenum">
               <a:rPr b="0" lang="en-US"/>
-              <a:t>19</a:t>
+              <a:t>20</a:t>
             </a:fld>
             <a:endParaRPr lang="en-US"/>
           </a:p>
@@ -11158,609 +13687,9 @@
 </p:sld>
 </file>
 
-<file path=ppt/slides/slide2.xml><?xml version="1.0" encoding="utf-8"?>
+<file path=ppt/slides/slide21.xml><?xml version="1.0" encoding="utf-8"?>
 <p:sld xmlns:a="http://schemas.openxmlformats.org/drawingml/2006/main" xmlns:r="http://schemas.openxmlformats.org/officeDocument/2006/relationships" xmlns:p="http://schemas.openxmlformats.org/presentationml/2006/main">
-  <p:cSld name="Slide 2">
-    <p:spTree>
-      <p:nvGrpSpPr>
-        <p:cNvPr id="1" name=""/>
-        <p:cNvGrpSpPr/>
-        <p:nvPr/>
-      </p:nvGrpSpPr>
-      <p:grpSpPr>
-        <a:xfrm>
-          <a:off x="0" y="0"/>
-          <a:ext cx="0" cy="0"/>
-          <a:chOff x="0" y="0"/>
-          <a:chExt cx="0" cy="0"/>
-        </a:xfrm>
-      </p:grpSpPr>
-      <p:sp>
-        <p:nvSpPr>
-          <p:cNvPr id="2" name="Text 0"/>
-          <p:cNvSpPr/>
-          <p:nvPr>
-            <p:ph idx="100" type="title" hasCustomPrompt="1"/>
-          </p:nvPr>
-        </p:nvSpPr>
-        <p:spPr>
-          <a:xfrm>
-            <a:off x="548640" y="274320"/>
-            <a:ext cx="11091672" cy="960120"/>
-          </a:xfrm>
-          <a:prstGeom prst="rect">
-            <a:avLst/>
-          </a:prstGeom>
-          <a:noFill/>
-          <a:ln/>
-        </p:spPr>
-        <p:txBody>
-          <a:bodyPr wrap="square" lIns="0" tIns="0" rIns="0" bIns="0" rtlCol="0" anchor="ctr"/>
-          <a:lstStyle/>
-          <a:p>
-            <a:pPr algn="l" indent="0" marL="0">
-              <a:buNone/>
-            </a:pPr>
-            <a:r>
-              <a:rPr lang="en-US" sz="2600" b="1" dirty="0">
-                <a:solidFill>
-                  <a:schemeClr val="tx1"/>
-                </a:solidFill>
-              </a:rPr>
-              <a:t>A hospital needs about 10,000 support assemblies, each designed by hand</a:t>
-            </a:r>
-            <a:endParaRPr lang="en-US" sz="2600" dirty="0"/>
-          </a:p>
-        </p:txBody>
-      </p:sp>
-      <p:pic>
-        <p:nvPicPr>
-          <p:cNvPr id="3" name="hospital model" descr="/home/user/crossmep_dataset/docs/figures/isarc_building.jpg">    </p:cNvPr>
-          <p:cNvPicPr>
-            <a:picLocks noChangeAspect="1"/>
-          </p:cNvPicPr>
-          <p:nvPr/>
-        </p:nvPicPr>
-        <p:blipFill>
-          <a:blip r:embed="rId1"/>
-          <a:stretch>
-            <a:fillRect/>
-          </a:stretch>
-        </p:blipFill>
-        <p:spPr>
-          <a:xfrm>
-            <a:off x="548640" y="1325880"/>
-            <a:ext cx="6035040" cy="3394710"/>
-          </a:xfrm>
-          <a:prstGeom prst="rect">
-            <a:avLst/>
-          </a:prstGeom>
-        </p:spPr>
-      </p:pic>
-      <p:sp>
-        <p:nvSpPr>
-          <p:cNvPr id="4" name="zoom box"/>
-          <p:cNvSpPr/>
-          <p:nvPr/>
-        </p:nvSpPr>
-        <p:spPr>
-          <a:xfrm>
-            <a:off x="3304843" y="2791716"/>
-            <a:ext cx="592641" cy="473902"/>
-          </a:xfrm>
-          <a:prstGeom prst="rect">
-            <a:avLst/>
-          </a:prstGeom>
-          <a:ln w="19050">
-            <a:solidFill>
-              <a:srgbClr val="EB6834"/>
-            </a:solidFill>
-            <a:prstDash val="solid"/>
-          </a:ln>
-        </p:spPr>
-      </p:sp>
-      <p:sp>
-        <p:nvSpPr>
-          <p:cNvPr id="5" name="zoom line top"/>
-          <p:cNvSpPr/>
-          <p:nvPr/>
-        </p:nvSpPr>
-        <p:spPr>
-          <a:xfrm flipV="1">
-            <a:off x="3897484" y="2791716"/>
-            <a:ext cx="3051956" cy="-1008636"/>
-          </a:xfrm>
-          <a:prstGeom prst="line">
-            <a:avLst/>
-          </a:prstGeom>
-          <a:noFill/>
-          <a:ln w="19050">
-            <a:solidFill>
-              <a:srgbClr val="EB6834"/>
-            </a:solidFill>
-            <a:prstDash val="solid"/>
-          </a:ln>
-        </p:spPr>
-      </p:sp>
-      <p:sp>
-        <p:nvSpPr>
-          <p:cNvPr id="6" name="zoom line bottom"/>
-          <p:cNvSpPr/>
-          <p:nvPr/>
-        </p:nvSpPr>
-        <p:spPr>
-          <a:xfrm>
-            <a:off x="3897484" y="3265617"/>
-            <a:ext cx="3051956" cy="1210645"/>
-          </a:xfrm>
-          <a:prstGeom prst="line">
-            <a:avLst/>
-          </a:prstGeom>
-          <a:noFill/>
-          <a:ln w="19050">
-            <a:solidFill>
-              <a:srgbClr val="EB6834"/>
-            </a:solidFill>
-            <a:prstDash val="solid"/>
-          </a:ln>
-        </p:spPr>
-      </p:sp>
-      <p:pic>
-        <p:nvPicPr>
-          <p:cNvPr id="7" name="one assembly" descr="/home/user/crossmep_dataset/docs/figures/isarc_ssa.jpg">    </p:cNvPr>
-          <p:cNvPicPr>
-            <a:picLocks noChangeAspect="1"/>
-          </p:cNvPicPr>
-          <p:nvPr/>
-        </p:nvPicPr>
-        <p:blipFill>
-          <a:blip r:embed="rId2"/>
-          <a:stretch>
-            <a:fillRect/>
-          </a:stretch>
-        </p:blipFill>
-        <p:spPr>
-          <a:xfrm>
-            <a:off x="6949440" y="1783080"/>
-            <a:ext cx="4690872" cy="2693182"/>
-          </a:xfrm>
-          <a:prstGeom prst="rect">
-            <a:avLst/>
-          </a:prstGeom>
-        </p:spPr>
-      </p:pic>
-      <p:sp>
-        <p:nvSpPr>
-          <p:cNvPr id="8" name="inset frame"/>
-          <p:cNvSpPr/>
-          <p:nvPr/>
-        </p:nvSpPr>
-        <p:spPr>
-          <a:xfrm>
-            <a:off x="6949440" y="1783080"/>
-            <a:ext cx="4690872" cy="2693182"/>
-          </a:xfrm>
-          <a:prstGeom prst="rect">
-            <a:avLst/>
-          </a:prstGeom>
-          <a:ln w="19050">
-            <a:solidFill>
-              <a:srgbClr val="EB6834"/>
-            </a:solidFill>
-            <a:prstDash val="solid"/>
-          </a:ln>
-        </p:spPr>
-      </p:sp>
-      <p:sp>
-        <p:nvSpPr>
-          <p:cNvPr id="9" name="inset label"/>
-          <p:cNvSpPr txBox="1"/>
-          <p:nvPr/>
-        </p:nvSpPr>
-        <p:spPr>
-          <a:xfrm>
-            <a:off x="6949440" y="1325880"/>
-            <a:ext cx="4690872" cy="411480"/>
-          </a:xfrm>
-          <a:prstGeom prst="rect">
-            <a:avLst/>
-          </a:prstGeom>
-          <a:noFill/>
-          <a:ln/>
-        </p:spPr>
-        <p:txBody>
-          <a:bodyPr wrap="square" lIns="0" tIns="0" rIns="0" bIns="0" rtlCol="0" anchor="b"/>
-          <a:lstStyle/>
-          <a:p>
-            <a:pPr indent="0" marL="0">
-              <a:buNone/>
-            </a:pPr>
-            <a:r>
-              <a:rPr lang="en-US" sz="1500" b="1" dirty="0">
-                <a:solidFill>
-                  <a:schemeClr val="tx1"/>
-                </a:solidFill>
-              </a:rPr>
-              <a:t>1 unit = 1 structural support assembly (SSA)</a:t>
-            </a:r>
-            <a:endParaRPr lang="en-US" sz="1500" dirty="0"/>
-          </a:p>
-        </p:txBody>
-      </p:sp>
-      <p:sp>
-        <p:nvSpPr>
-          <p:cNvPr id="10" name="tile support assemblies in one 200,000 sq ft hospital"/>
-          <p:cNvSpPr/>
-          <p:nvPr/>
-        </p:nvSpPr>
-        <p:spPr>
-          <a:xfrm>
-            <a:off x="548640" y="4892040"/>
-            <a:ext cx="3575304" cy="1188720"/>
-          </a:xfrm>
-          <a:prstGeom prst="roundRect">
-            <a:avLst>
-              <a:gd name="adj" fmla="val 5385"/>
-            </a:avLst>
-          </a:prstGeom>
-          <a:solidFill>
-            <a:schemeClr val="bg2"/>
-          </a:solidFill>
-          <a:ln/>
-        </p:spPr>
-      </p:sp>
-      <p:sp>
-        <p:nvSpPr>
-          <p:cNvPr id="11" name="value support assemblies in one 200,000 sq ft hospital"/>
-          <p:cNvSpPr txBox="1"/>
-          <p:nvPr/>
-        </p:nvSpPr>
-        <p:spPr>
-          <a:xfrm>
-            <a:off x="749808" y="4983480"/>
-            <a:ext cx="3172968" cy="594360"/>
-          </a:xfrm>
-          <a:prstGeom prst="rect">
-            <a:avLst/>
-          </a:prstGeom>
-          <a:noFill/>
-          <a:ln/>
-        </p:spPr>
-        <p:txBody>
-          <a:bodyPr wrap="square" lIns="0" tIns="0" rIns="0" bIns="0" rtlCol="0" anchor="ctr"/>
-          <a:lstStyle/>
-          <a:p>
-            <a:pPr indent="0" marL="0">
-              <a:buNone/>
-            </a:pPr>
-            <a:r>
-              <a:rPr lang="en-US" sz="2800" b="1" dirty="0">
-                <a:solidFill>
-                  <a:schemeClr val="accent1"/>
-                </a:solidFill>
-              </a:rPr>
-              <a:t>≈ 10,000</a:t>
-            </a:r>
-            <a:endParaRPr lang="en-US" sz="2800" dirty="0"/>
-          </a:p>
-        </p:txBody>
-      </p:sp>
-      <p:sp>
-        <p:nvSpPr>
-          <p:cNvPr id="12" name="label support assemblies in one 200,000 sq ft hospital"/>
-          <p:cNvSpPr txBox="1"/>
-          <p:nvPr/>
-        </p:nvSpPr>
-        <p:spPr>
-          <a:xfrm>
-            <a:off x="749808" y="5581498"/>
-            <a:ext cx="3172968" cy="451714"/>
-          </a:xfrm>
-          <a:prstGeom prst="rect">
-            <a:avLst/>
-          </a:prstGeom>
-          <a:noFill/>
-          <a:ln/>
-        </p:spPr>
-        <p:txBody>
-          <a:bodyPr wrap="square" lIns="0" tIns="0" rIns="0" bIns="0" rtlCol="0" anchor="t"/>
-          <a:lstStyle/>
-          <a:p>
-            <a:pPr indent="0" marL="0">
-              <a:buNone/>
-            </a:pPr>
-            <a:r>
-              <a:rPr lang="en-US" sz="1200" dirty="0">
-                <a:solidFill>
-                  <a:srgbClr val="52514E"/>
-                </a:solidFill>
-              </a:rPr>
-              <a:t>support assemblies in one 200,000 sq ft hospital</a:t>
-            </a:r>
-            <a:endParaRPr lang="en-US" sz="1200" dirty="0"/>
-          </a:p>
-        </p:txBody>
-      </p:sp>
-      <p:sp>
-        <p:nvSpPr>
-          <p:cNvPr id="13" name="tile of engineering for each assembly, designed one by one"/>
-          <p:cNvSpPr/>
-          <p:nvPr/>
-        </p:nvSpPr>
-        <p:spPr>
-          <a:xfrm>
-            <a:off x="4306824" y="4892040"/>
-            <a:ext cx="3575304" cy="1188720"/>
-          </a:xfrm>
-          <a:prstGeom prst="roundRect">
-            <a:avLst>
-              <a:gd name="adj" fmla="val 5385"/>
-            </a:avLst>
-          </a:prstGeom>
-          <a:solidFill>
-            <a:schemeClr val="bg2"/>
-          </a:solidFill>
-          <a:ln/>
-        </p:spPr>
-      </p:sp>
-      <p:sp>
-        <p:nvSpPr>
-          <p:cNvPr id="14" name="value of engineering for each assembly, designed one by one"/>
-          <p:cNvSpPr txBox="1"/>
-          <p:nvPr/>
-        </p:nvSpPr>
-        <p:spPr>
-          <a:xfrm>
-            <a:off x="4507992" y="4983480"/>
-            <a:ext cx="3172968" cy="594360"/>
-          </a:xfrm>
-          <a:prstGeom prst="rect">
-            <a:avLst/>
-          </a:prstGeom>
-          <a:noFill/>
-          <a:ln/>
-        </p:spPr>
-        <p:txBody>
-          <a:bodyPr wrap="square" lIns="0" tIns="0" rIns="0" bIns="0" rtlCol="0" anchor="ctr"/>
-          <a:lstStyle/>
-          <a:p>
-            <a:pPr indent="0" marL="0">
-              <a:buNone/>
-            </a:pPr>
-            <a:r>
-              <a:rPr lang="en-US" sz="2800" b="1" dirty="0">
-                <a:solidFill>
-                  <a:schemeClr val="accent1"/>
-                </a:solidFill>
-              </a:rPr>
-              <a:t>20 min – 2 h</a:t>
-            </a:r>
-            <a:endParaRPr lang="en-US" sz="2800" dirty="0"/>
-          </a:p>
-        </p:txBody>
-      </p:sp>
-      <p:sp>
-        <p:nvSpPr>
-          <p:cNvPr id="15" name="label of engineering for each assembly, designed one by one"/>
-          <p:cNvSpPr txBox="1"/>
-          <p:nvPr/>
-        </p:nvSpPr>
-        <p:spPr>
-          <a:xfrm>
-            <a:off x="4507992" y="5581498"/>
-            <a:ext cx="3172968" cy="451714"/>
-          </a:xfrm>
-          <a:prstGeom prst="rect">
-            <a:avLst/>
-          </a:prstGeom>
-          <a:noFill/>
-          <a:ln/>
-        </p:spPr>
-        <p:txBody>
-          <a:bodyPr wrap="square" lIns="0" tIns="0" rIns="0" bIns="0" rtlCol="0" anchor="t"/>
-          <a:lstStyle/>
-          <a:p>
-            <a:pPr indent="0" marL="0">
-              <a:buNone/>
-            </a:pPr>
-            <a:r>
-              <a:rPr lang="en-US" sz="1200" dirty="0">
-                <a:solidFill>
-                  <a:srgbClr val="52514E"/>
-                </a:solidFill>
-              </a:rPr>
-              <a:t>of engineering for each assembly, designed one by one</a:t>
-            </a:r>
-            <a:endParaRPr lang="en-US" sz="1200" dirty="0"/>
-          </a:p>
-        </p:txBody>
-      </p:sp>
-      <p:sp>
-        <p:nvSpPr>
-          <p:cNvPr id="16" name="tile of MEP design effort; on the order of $600K per project"/>
-          <p:cNvSpPr/>
-          <p:nvPr/>
-        </p:nvSpPr>
-        <p:spPr>
-          <a:xfrm>
-            <a:off x="8065008" y="4892040"/>
-            <a:ext cx="3575304" cy="1188720"/>
-          </a:xfrm>
-          <a:prstGeom prst="roundRect">
-            <a:avLst>
-              <a:gd name="adj" fmla="val 5385"/>
-            </a:avLst>
-          </a:prstGeom>
-          <a:solidFill>
-            <a:schemeClr val="bg2"/>
-          </a:solidFill>
-          <a:ln/>
-        </p:spPr>
-      </p:sp>
-      <p:sp>
-        <p:nvSpPr>
-          <p:cNvPr id="17" name="value of MEP design effort; on the order of $600K per project"/>
-          <p:cNvSpPr txBox="1"/>
-          <p:nvPr/>
-        </p:nvSpPr>
-        <p:spPr>
-          <a:xfrm>
-            <a:off x="8266176" y="4983480"/>
-            <a:ext cx="3172968" cy="594360"/>
-          </a:xfrm>
-          <a:prstGeom prst="rect">
-            <a:avLst/>
-          </a:prstGeom>
-          <a:noFill/>
-          <a:ln/>
-        </p:spPr>
-        <p:txBody>
-          <a:bodyPr wrap="square" lIns="0" tIns="0" rIns="0" bIns="0" rtlCol="0" anchor="ctr"/>
-          <a:lstStyle/>
-          <a:p>
-            <a:pPr indent="0" marL="0">
-              <a:buNone/>
-            </a:pPr>
-            <a:r>
-              <a:rPr lang="en-US" sz="2800" b="1" dirty="0">
-                <a:solidFill>
-                  <a:schemeClr val="accent1"/>
-                </a:solidFill>
-              </a:rPr>
-              <a:t>≈ ¼</a:t>
-            </a:r>
-            <a:endParaRPr lang="en-US" sz="2800" dirty="0"/>
-          </a:p>
-        </p:txBody>
-      </p:sp>
-      <p:sp>
-        <p:nvSpPr>
-          <p:cNvPr id="18" name="label of MEP design effort; on the order of $600K per project"/>
-          <p:cNvSpPr txBox="1"/>
-          <p:nvPr/>
-        </p:nvSpPr>
-        <p:spPr>
-          <a:xfrm>
-            <a:off x="8266176" y="5581498"/>
-            <a:ext cx="3172968" cy="451714"/>
-          </a:xfrm>
-          <a:prstGeom prst="rect">
-            <a:avLst/>
-          </a:prstGeom>
-          <a:noFill/>
-          <a:ln/>
-        </p:spPr>
-        <p:txBody>
-          <a:bodyPr wrap="square" lIns="0" tIns="0" rIns="0" bIns="0" rtlCol="0" anchor="t"/>
-          <a:lstStyle/>
-          <a:p>
-            <a:pPr indent="0" marL="0">
-              <a:buNone/>
-            </a:pPr>
-            <a:r>
-              <a:rPr lang="en-US" sz="1200" dirty="0">
-                <a:solidFill>
-                  <a:srgbClr val="52514E"/>
-                </a:solidFill>
-              </a:rPr>
-              <a:t>of MEP design effort; on the order of $600K per project</a:t>
-            </a:r>
-            <a:endParaRPr lang="en-US" sz="1200" dirty="0"/>
-          </a:p>
-        </p:txBody>
-      </p:sp>
-      <p:sp>
-        <p:nvSpPr>
-          <p:cNvPr id="19" name="estimates note"/>
-          <p:cNvSpPr txBox="1"/>
-          <p:nvPr/>
-        </p:nvSpPr>
-        <p:spPr>
-          <a:xfrm>
-            <a:off x="548640" y="6126480"/>
-            <a:ext cx="5486400" cy="228600"/>
-          </a:xfrm>
-          <a:prstGeom prst="rect">
-            <a:avLst/>
-          </a:prstGeom>
-          <a:noFill/>
-          <a:ln/>
-        </p:spPr>
-        <p:txBody>
-          <a:bodyPr wrap="square" lIns="0" tIns="0" rIns="0" bIns="0" rtlCol="0" anchor="t"/>
-          <a:lstStyle/>
-          <a:p>
-            <a:pPr indent="0" marL="0">
-              <a:buNone/>
-            </a:pPr>
-            <a:r>
-              <a:rPr lang="en-US" sz="1100" dirty="0">
-                <a:solidFill>
-                  <a:srgbClr val="52514E"/>
-                </a:solidFill>
-              </a:rPr>
-              <a:t>Approximate practitioner estimates.</a:t>
-            </a:r>
-            <a:endParaRPr lang="en-US" sz="1100" dirty="0"/>
-          </a:p>
-        </p:txBody>
-      </p:sp>
-      <p:sp>
-        <p:nvSpPr>
-          <p:cNvPr id="25" name="Slide Number Placeholder 0"/>
-          <p:cNvSpPr>
-            <a:spLocks noGrp="1"/>
-          </p:cNvSpPr>
-          <p:nvPr>
-            <p:ph type="sldNum" sz="quarter" idx="4294967295"/>
-          </p:nvPr>
-        </p:nvSpPr>
-        <p:spPr>
-          <a:xfrm>
-            <a:off x="11064240" y="6419088"/>
-            <a:ext cx="594360" cy="274320"/>
-          </a:xfrm>
-          <a:prstGeom prst="rect">
-            <a:avLst/>
-          </a:prstGeom>
-          <a:extLst>
-            <a:ext uri="{C572A759-6A51-4108-AA02-DFA0A04FC94B}">
-              <ma14:wrappingTextBoxFlag xmlns:ma14="http://schemas.microsoft.com/office/mac/drawingml/2011/main" val="0"/>
-            </a:ext>
-          </a:extLst>
-        </p:spPr>
-        <p:txBody>
-          <a:bodyPr/>
-          <a:lstStyle>
-            <a:lvl1pPr>
-              <a:defRPr sz="900">
-                <a:solidFill>
-                  <a:srgbClr val="898781"/>
-                </a:solidFill>
-              </a:defRPr>
-            </a:lvl1pPr>
-          </a:lstStyle>
-          <a:p>
-            <a:pPr algn="r"/>
-            <a:fld id="{F7021451-1387-4CA6-816F-3879F97B5CBC}" type="slidenum">
-              <a:rPr b="0" lang="en-US"/>
-              <a:t>2</a:t>
-            </a:fld>
-            <a:endParaRPr lang="en-US"/>
-          </a:p>
-        </p:txBody>
-      </p:sp>
-    </p:spTree>
-  </p:cSld>
-  <p:clrMapOvr>
-    <a:masterClrMapping/>
-  </p:clrMapOvr>
-</p:sld>
-</file>
-
-<file path=ppt/slides/slide20.xml><?xml version="1.0" encoding="utf-8"?>
-<p:sld xmlns:a="http://schemas.openxmlformats.org/drawingml/2006/main" xmlns:r="http://schemas.openxmlformats.org/officeDocument/2006/relationships" xmlns:p="http://schemas.openxmlformats.org/presentationml/2006/main">
-  <p:cSld name="Slide 20">
+  <p:cSld name="Slide 21">
     <p:spTree>
       <p:nvGrpSpPr>
         <p:cNvPr id="1" name=""/>
@@ -11815,7 +13744,7 @@
       </p:sp>
       <p:graphicFrame>
         <p:nvGraphicFramePr>
-          <p:cNvPr id="21" name="samples table"/>
+          <p:cNvPr id="22" name="samples table"/>
           <p:cNvGraphicFramePr>
             <a:graphicFrameLocks noGrp="1"/>
           </p:cNvGraphicFramePr>
@@ -13498,7 +15427,7 @@
       </p:graphicFrame>
       <p:graphicFrame>
         <p:nvGraphicFramePr>
-          <p:cNvPr id="41" name="distances table"/>
+          <p:cNvPr id="43" name="distances table"/>
           <p:cNvGraphicFramePr>
             <a:graphicFrameLocks noGrp="1"/>
           </p:cNvGraphicFramePr>
@@ -15543,7 +17472,7 @@
             <a:pPr algn="r"/>
             <a:fld id="{F7021451-1387-4CA6-816F-3879F97B5CBC}" type="slidenum">
               <a:rPr b="0" lang="en-US"/>
-              <a:t>20</a:t>
+              <a:t>21</a:t>
             </a:fld>
             <a:endParaRPr lang="en-US"/>
           </a:p>
@@ -15557,9 +17486,9 @@
 </p:sld>
 </file>
 
-<file path=ppt/slides/slide21.xml><?xml version="1.0" encoding="utf-8"?>
+<file path=ppt/slides/slide22.xml><?xml version="1.0" encoding="utf-8"?>
 <p:sld xmlns:a="http://schemas.openxmlformats.org/drawingml/2006/main" xmlns:r="http://schemas.openxmlformats.org/officeDocument/2006/relationships" xmlns:p="http://schemas.openxmlformats.org/presentationml/2006/main">
-  <p:cSld name="Slide 21">
+  <p:cSld name="Slide 22">
     <p:spTree>
       <p:nvGrpSpPr>
         <p:cNvPr id="1" name=""/>
@@ -15614,7 +17543,7 @@
       </p:sp>
       <p:graphicFrame>
         <p:nvGraphicFramePr>
-          <p:cNvPr id="22" name="per tier catalog table"/>
+          <p:cNvPr id="23" name="per tier catalog table"/>
           <p:cNvGraphicFramePr>
             <a:graphicFrameLocks noGrp="1"/>
           </p:cNvGraphicFramePr>
@@ -18016,7 +19945,7 @@
       </p:graphicFrame>
       <p:graphicFrame>
         <p:nvGraphicFramePr>
-          <p:cNvPr id="43" name="sensitivity table"/>
+          <p:cNvPr id="45" name="sensitivity table"/>
           <p:cNvGraphicFramePr>
             <a:graphicFrameLocks noGrp="1"/>
           </p:cNvGraphicFramePr>
@@ -19144,7 +21073,7 @@
       </p:sp>
       <p:graphicFrame>
         <p:nvGraphicFramePr>
-          <p:cNvPr id="64" name="split catalog table"/>
+          <p:cNvPr id="67" name="split catalog table"/>
           <p:cNvGraphicFramePr>
             <a:graphicFrameLocks noGrp="1"/>
           </p:cNvGraphicFramePr>
@@ -20300,7 +22229,7 @@
             <a:pPr algn="r"/>
             <a:fld id="{F7021451-1387-4CA6-816F-3879F97B5CBC}" type="slidenum">
               <a:rPr b="0" lang="en-US"/>
-              <a:t>21</a:t>
+              <a:t>22</a:t>
             </a:fld>
             <a:endParaRPr lang="en-US"/>
           </a:p>
@@ -20314,9 +22243,9 @@
 </p:sld>
 </file>
 
-<file path=ppt/slides/slide22.xml><?xml version="1.0" encoding="utf-8"?>
+<file path=ppt/slides/slide23.xml><?xml version="1.0" encoding="utf-8"?>
 <p:sld xmlns:a="http://schemas.openxmlformats.org/drawingml/2006/main" xmlns:r="http://schemas.openxmlformats.org/officeDocument/2006/relationships" xmlns:p="http://schemas.openxmlformats.org/presentationml/2006/main">
-  <p:cSld name="Slide 22">
+  <p:cSld name="Slide 23">
     <p:spTree>
       <p:nvGrpSpPr>
         <p:cNvPr id="1" name=""/>
@@ -20785,7 +22714,7 @@
             <a:pPr algn="r"/>
             <a:fld id="{F7021451-1387-4CA6-816F-3879F97B5CBC}" type="slidenum">
               <a:rPr b="0" lang="en-US"/>
-              <a:t>22</a:t>
+              <a:t>23</a:t>
             </a:fld>
             <a:endParaRPr lang="en-US"/>
           </a:p>
@@ -20848,7 +22777,7 @@
                   <a:schemeClr val="tx1"/>
                 </a:solidFill>
               </a:rPr>
-              <a:t>Synthesizing an assembly from a catalog and a section has resisted automation</a:t>
+              <a:t>One cross-section in, verified support designs out</a:t>
             </a:r>
             <a:endParaRPr lang="en-US" sz="2600" dirty="0"/>
           </a:p>
@@ -20856,14 +22785,2074 @@
       </p:sp>
       <p:sp>
         <p:nvSpPr>
-          <p:cNvPr id="3" name="problem card"/>
+          <p:cNvPr id="3" name="head in"/>
+          <p:cNvSpPr txBox="1"/>
+          <p:nvPr/>
+        </p:nvSpPr>
+        <p:spPr>
+          <a:xfrm>
+            <a:off x="548640" y="1325880"/>
+            <a:ext cx="4846320" cy="274320"/>
+          </a:xfrm>
+          <a:prstGeom prst="rect">
+            <a:avLst/>
+          </a:prstGeom>
+          <a:noFill/>
+          <a:ln/>
+        </p:spPr>
+        <p:txBody>
+          <a:bodyPr wrap="square" lIns="0" tIns="0" rIns="0" bIns="0" rtlCol="0" anchor="ctr"/>
+          <a:lstStyle/>
+          <a:p>
+            <a:pPr indent="0" marL="0">
+              <a:buNone/>
+            </a:pPr>
+            <a:r>
+              <a:rPr lang="en-US" sz="1600" b="1" dirty="0">
+                <a:solidFill>
+                  <a:schemeClr val="tx1"/>
+                </a:solidFill>
+              </a:rPr>
+              <a:t>In: one cross-section = a context</a:t>
+            </a:r>
+            <a:endParaRPr lang="en-US" sz="1600" dirty="0"/>
+          </a:p>
+        </p:txBody>
+      </p:sp>
+      <p:sp>
+        <p:nvSpPr>
+          <p:cNvPr id="4" name="frame in"/>
           <p:cNvSpPr/>
           <p:nvPr/>
         </p:nvSpPr>
         <p:spPr>
           <a:xfrm>
-            <a:off x="548640" y="1371600"/>
-            <a:ext cx="5212080" cy="2606040"/>
+            <a:off x="548640" y="1828800"/>
+            <a:ext cx="4846320" cy="2743200"/>
+          </a:xfrm>
+          <a:prstGeom prst="roundRect">
+            <a:avLst>
+              <a:gd name="adj" fmla="val 2000"/>
+            </a:avLst>
+          </a:prstGeom>
+          <a:solidFill>
+            <a:srgbClr val="FFFFFF"/>
+          </a:solidFill>
+          <a:ln w="12700">
+            <a:solidFill>
+              <a:srgbClr val="E1E0D9"/>
+            </a:solidFill>
+            <a:prstDash val="solid"/>
+          </a:ln>
+        </p:spPr>
+      </p:sp>
+      <p:sp>
+        <p:nvSpPr>
+          <p:cNvPr id="5" name="ceiling in"/>
+          <p:cNvSpPr/>
+          <p:nvPr/>
+        </p:nvSpPr>
+        <p:spPr>
+          <a:xfrm>
+            <a:off x="731520" y="2011680"/>
+            <a:ext cx="4480560" cy="384048"/>
+          </a:xfrm>
+          <a:prstGeom prst="rect">
+            <a:avLst/>
+          </a:prstGeom>
+          <a:solidFill>
+            <a:srgbClr val="EEF1F4"/>
+          </a:solidFill>
+          <a:ln w="9525">
+            <a:solidFill>
+              <a:srgbClr val="52514E"/>
+            </a:solidFill>
+            <a:prstDash val="solid"/>
+          </a:ln>
+        </p:spPr>
+      </p:sp>
+      <p:sp>
+        <p:nvSpPr>
+          <p:cNvPr id="6" name="hatch in 0.8"/>
+          <p:cNvSpPr/>
+          <p:nvPr/>
+        </p:nvSpPr>
+        <p:spPr>
+          <a:xfrm flipV="1">
+            <a:off x="731520" y="2011680"/>
+            <a:ext cx="274320" cy="384048"/>
+          </a:xfrm>
+          <a:prstGeom prst="line">
+            <a:avLst/>
+          </a:prstGeom>
+          <a:noFill/>
+          <a:ln w="6350">
+            <a:solidFill>
+              <a:srgbClr val="898781"/>
+            </a:solidFill>
+            <a:prstDash val="solid"/>
+          </a:ln>
+        </p:spPr>
+      </p:sp>
+      <p:sp>
+        <p:nvSpPr>
+          <p:cNvPr id="7" name="hatch in 1.1"/>
+          <p:cNvSpPr/>
+          <p:nvPr/>
+        </p:nvSpPr>
+        <p:spPr>
+          <a:xfrm flipV="1">
+            <a:off x="1005840" y="2011680"/>
+            <a:ext cx="274320" cy="384048"/>
+          </a:xfrm>
+          <a:prstGeom prst="line">
+            <a:avLst/>
+          </a:prstGeom>
+          <a:noFill/>
+          <a:ln w="6350">
+            <a:solidFill>
+              <a:srgbClr val="898781"/>
+            </a:solidFill>
+            <a:prstDash val="solid"/>
+          </a:ln>
+        </p:spPr>
+      </p:sp>
+      <p:sp>
+        <p:nvSpPr>
+          <p:cNvPr id="8" name="hatch in 1.4"/>
+          <p:cNvSpPr/>
+          <p:nvPr/>
+        </p:nvSpPr>
+        <p:spPr>
+          <a:xfrm flipV="1">
+            <a:off x="1280160" y="2011680"/>
+            <a:ext cx="274320" cy="384048"/>
+          </a:xfrm>
+          <a:prstGeom prst="line">
+            <a:avLst/>
+          </a:prstGeom>
+          <a:noFill/>
+          <a:ln w="6350">
+            <a:solidFill>
+              <a:srgbClr val="898781"/>
+            </a:solidFill>
+            <a:prstDash val="solid"/>
+          </a:ln>
+        </p:spPr>
+      </p:sp>
+      <p:sp>
+        <p:nvSpPr>
+          <p:cNvPr id="9" name="hatch in 1.7"/>
+          <p:cNvSpPr/>
+          <p:nvPr/>
+        </p:nvSpPr>
+        <p:spPr>
+          <a:xfrm flipV="1">
+            <a:off x="1554480" y="2011680"/>
+            <a:ext cx="274320" cy="384048"/>
+          </a:xfrm>
+          <a:prstGeom prst="line">
+            <a:avLst/>
+          </a:prstGeom>
+          <a:noFill/>
+          <a:ln w="6350">
+            <a:solidFill>
+              <a:srgbClr val="898781"/>
+            </a:solidFill>
+            <a:prstDash val="solid"/>
+          </a:ln>
+        </p:spPr>
+      </p:sp>
+      <p:sp>
+        <p:nvSpPr>
+          <p:cNvPr id="10" name="hatch in 2.0"/>
+          <p:cNvSpPr/>
+          <p:nvPr/>
+        </p:nvSpPr>
+        <p:spPr>
+          <a:xfrm flipV="1">
+            <a:off x="1828800" y="2011680"/>
+            <a:ext cx="274320" cy="384048"/>
+          </a:xfrm>
+          <a:prstGeom prst="line">
+            <a:avLst/>
+          </a:prstGeom>
+          <a:noFill/>
+          <a:ln w="6350">
+            <a:solidFill>
+              <a:srgbClr val="898781"/>
+            </a:solidFill>
+            <a:prstDash val="solid"/>
+          </a:ln>
+        </p:spPr>
+      </p:sp>
+      <p:sp>
+        <p:nvSpPr>
+          <p:cNvPr id="11" name="hatch in 2.3"/>
+          <p:cNvSpPr/>
+          <p:nvPr/>
+        </p:nvSpPr>
+        <p:spPr>
+          <a:xfrm flipV="1">
+            <a:off x="2103120" y="2011680"/>
+            <a:ext cx="274320" cy="384048"/>
+          </a:xfrm>
+          <a:prstGeom prst="line">
+            <a:avLst/>
+          </a:prstGeom>
+          <a:noFill/>
+          <a:ln w="6350">
+            <a:solidFill>
+              <a:srgbClr val="898781"/>
+            </a:solidFill>
+            <a:prstDash val="solid"/>
+          </a:ln>
+        </p:spPr>
+      </p:sp>
+      <p:sp>
+        <p:nvSpPr>
+          <p:cNvPr id="12" name="hatch in 2.6"/>
+          <p:cNvSpPr/>
+          <p:nvPr/>
+        </p:nvSpPr>
+        <p:spPr>
+          <a:xfrm flipV="1">
+            <a:off x="2377440" y="2011680"/>
+            <a:ext cx="274320" cy="384048"/>
+          </a:xfrm>
+          <a:prstGeom prst="line">
+            <a:avLst/>
+          </a:prstGeom>
+          <a:noFill/>
+          <a:ln w="6350">
+            <a:solidFill>
+              <a:srgbClr val="898781"/>
+            </a:solidFill>
+            <a:prstDash val="solid"/>
+          </a:ln>
+        </p:spPr>
+      </p:sp>
+      <p:sp>
+        <p:nvSpPr>
+          <p:cNvPr id="13" name="hatch in 2.9"/>
+          <p:cNvSpPr/>
+          <p:nvPr/>
+        </p:nvSpPr>
+        <p:spPr>
+          <a:xfrm flipV="1">
+            <a:off x="2651760" y="2011680"/>
+            <a:ext cx="274320" cy="384048"/>
+          </a:xfrm>
+          <a:prstGeom prst="line">
+            <a:avLst/>
+          </a:prstGeom>
+          <a:noFill/>
+          <a:ln w="6350">
+            <a:solidFill>
+              <a:srgbClr val="898781"/>
+            </a:solidFill>
+            <a:prstDash val="solid"/>
+          </a:ln>
+        </p:spPr>
+      </p:sp>
+      <p:sp>
+        <p:nvSpPr>
+          <p:cNvPr id="14" name="hatch in 3.2"/>
+          <p:cNvSpPr/>
+          <p:nvPr/>
+        </p:nvSpPr>
+        <p:spPr>
+          <a:xfrm flipV="1">
+            <a:off x="2926080" y="2011680"/>
+            <a:ext cx="274320" cy="384048"/>
+          </a:xfrm>
+          <a:prstGeom prst="line">
+            <a:avLst/>
+          </a:prstGeom>
+          <a:noFill/>
+          <a:ln w="6350">
+            <a:solidFill>
+              <a:srgbClr val="898781"/>
+            </a:solidFill>
+            <a:prstDash val="solid"/>
+          </a:ln>
+        </p:spPr>
+      </p:sp>
+      <p:sp>
+        <p:nvSpPr>
+          <p:cNvPr id="15" name="hatch in 3.5"/>
+          <p:cNvSpPr/>
+          <p:nvPr/>
+        </p:nvSpPr>
+        <p:spPr>
+          <a:xfrm flipV="1">
+            <a:off x="3200400" y="2011680"/>
+            <a:ext cx="274320" cy="384048"/>
+          </a:xfrm>
+          <a:prstGeom prst="line">
+            <a:avLst/>
+          </a:prstGeom>
+          <a:noFill/>
+          <a:ln w="6350">
+            <a:solidFill>
+              <a:srgbClr val="898781"/>
+            </a:solidFill>
+            <a:prstDash val="solid"/>
+          </a:ln>
+        </p:spPr>
+      </p:sp>
+      <p:sp>
+        <p:nvSpPr>
+          <p:cNvPr id="16" name="hatch in 3.8"/>
+          <p:cNvSpPr/>
+          <p:nvPr/>
+        </p:nvSpPr>
+        <p:spPr>
+          <a:xfrm flipV="1">
+            <a:off x="3474720" y="2011680"/>
+            <a:ext cx="274320" cy="384048"/>
+          </a:xfrm>
+          <a:prstGeom prst="line">
+            <a:avLst/>
+          </a:prstGeom>
+          <a:noFill/>
+          <a:ln w="6350">
+            <a:solidFill>
+              <a:srgbClr val="898781"/>
+            </a:solidFill>
+            <a:prstDash val="solid"/>
+          </a:ln>
+        </p:spPr>
+      </p:sp>
+      <p:sp>
+        <p:nvSpPr>
+          <p:cNvPr id="17" name="hatch in 4.1"/>
+          <p:cNvSpPr/>
+          <p:nvPr/>
+        </p:nvSpPr>
+        <p:spPr>
+          <a:xfrm flipV="1">
+            <a:off x="3749040" y="2011680"/>
+            <a:ext cx="274320" cy="384048"/>
+          </a:xfrm>
+          <a:prstGeom prst="line">
+            <a:avLst/>
+          </a:prstGeom>
+          <a:noFill/>
+          <a:ln w="6350">
+            <a:solidFill>
+              <a:srgbClr val="898781"/>
+            </a:solidFill>
+            <a:prstDash val="solid"/>
+          </a:ln>
+        </p:spPr>
+      </p:sp>
+      <p:sp>
+        <p:nvSpPr>
+          <p:cNvPr id="18" name="hatch in 4.4"/>
+          <p:cNvSpPr/>
+          <p:nvPr/>
+        </p:nvSpPr>
+        <p:spPr>
+          <a:xfrm flipV="1">
+            <a:off x="4023360" y="2011680"/>
+            <a:ext cx="274320" cy="384048"/>
+          </a:xfrm>
+          <a:prstGeom prst="line">
+            <a:avLst/>
+          </a:prstGeom>
+          <a:noFill/>
+          <a:ln w="6350">
+            <a:solidFill>
+              <a:srgbClr val="898781"/>
+            </a:solidFill>
+            <a:prstDash val="solid"/>
+          </a:ln>
+        </p:spPr>
+      </p:sp>
+      <p:sp>
+        <p:nvSpPr>
+          <p:cNvPr id="19" name="hatch in 4.7"/>
+          <p:cNvSpPr/>
+          <p:nvPr/>
+        </p:nvSpPr>
+        <p:spPr>
+          <a:xfrm flipV="1">
+            <a:off x="4297680" y="2011680"/>
+            <a:ext cx="274320" cy="384048"/>
+          </a:xfrm>
+          <a:prstGeom prst="line">
+            <a:avLst/>
+          </a:prstGeom>
+          <a:noFill/>
+          <a:ln w="6350">
+            <a:solidFill>
+              <a:srgbClr val="898781"/>
+            </a:solidFill>
+            <a:prstDash val="solid"/>
+          </a:ln>
+        </p:spPr>
+      </p:sp>
+      <p:sp>
+        <p:nvSpPr>
+          <p:cNvPr id="20" name="hatch in 5.0"/>
+          <p:cNvSpPr/>
+          <p:nvPr/>
+        </p:nvSpPr>
+        <p:spPr>
+          <a:xfrm flipV="1">
+            <a:off x="4572000" y="2011680"/>
+            <a:ext cx="274320" cy="384048"/>
+          </a:xfrm>
+          <a:prstGeom prst="line">
+            <a:avLst/>
+          </a:prstGeom>
+          <a:noFill/>
+          <a:ln w="6350">
+            <a:solidFill>
+              <a:srgbClr val="898781"/>
+            </a:solidFill>
+            <a:prstDash val="solid"/>
+          </a:ln>
+        </p:spPr>
+      </p:sp>
+      <p:sp>
+        <p:nvSpPr>
+          <p:cNvPr id="21" name="hatch in 5.3"/>
+          <p:cNvSpPr/>
+          <p:nvPr/>
+        </p:nvSpPr>
+        <p:spPr>
+          <a:xfrm flipV="1">
+            <a:off x="4846320" y="2011680"/>
+            <a:ext cx="274320" cy="384048"/>
+          </a:xfrm>
+          <a:prstGeom prst="line">
+            <a:avLst/>
+          </a:prstGeom>
+          <a:noFill/>
+          <a:ln w="6350">
+            <a:solidFill>
+              <a:srgbClr val="898781"/>
+            </a:solidFill>
+            <a:prstDash val="solid"/>
+          </a:ln>
+        </p:spPr>
+      </p:sp>
+      <p:sp>
+        <p:nvSpPr>
+          <p:cNvPr id="22" name="ceiling label in"/>
+          <p:cNvSpPr txBox="1"/>
+          <p:nvPr/>
+        </p:nvSpPr>
+        <p:spPr>
+          <a:xfrm>
+            <a:off x="2194560" y="2075688"/>
+            <a:ext cx="1554480" cy="256032"/>
+          </a:xfrm>
+          <a:prstGeom prst="rect">
+            <a:avLst/>
+          </a:prstGeom>
+          <a:solidFill>
+            <a:srgbClr val="FFFFFF"/>
+          </a:solidFill>
+          <a:ln/>
+        </p:spPr>
+        <p:txBody>
+          <a:bodyPr wrap="square" lIns="0" tIns="0" rIns="0" bIns="0" rtlCol="0" anchor="ctr"/>
+          <a:lstStyle/>
+          <a:p>
+            <a:pPr algn="ctr" indent="0" marL="0">
+              <a:buNone/>
+            </a:pPr>
+            <a:r>
+              <a:rPr lang="en-US" sz="1100" dirty="0">
+                <a:solidFill>
+                  <a:schemeClr val="tx1"/>
+                </a:solidFill>
+              </a:rPr>
+              <a:t>Concrete ceiling</a:t>
+            </a:r>
+            <a:endParaRPr lang="en-US" sz="1100" dirty="0"/>
+          </a:p>
+        </p:txBody>
+      </p:sp>
+      <p:sp>
+        <p:nvSpPr>
+          <p:cNvPr id="23" name="duct in"/>
+          <p:cNvSpPr/>
+          <p:nvPr/>
+        </p:nvSpPr>
+        <p:spPr>
+          <a:xfrm>
+            <a:off x="960120" y="3017520"/>
+            <a:ext cx="1417320" cy="868680"/>
+          </a:xfrm>
+          <a:prstGeom prst="rect">
+            <a:avLst/>
+          </a:prstGeom>
+          <a:solidFill>
+            <a:srgbClr val="EEF1F4"/>
+          </a:solidFill>
+          <a:ln w="12700">
+            <a:solidFill>
+              <a:srgbClr val="52514E"/>
+            </a:solidFill>
+            <a:prstDash val="solid"/>
+          </a:ln>
+        </p:spPr>
+      </p:sp>
+      <p:sp>
+        <p:nvSpPr>
+          <p:cNvPr id="24" name="duct label in"/>
+          <p:cNvSpPr txBox="1"/>
+          <p:nvPr/>
+        </p:nvSpPr>
+        <p:spPr>
+          <a:xfrm>
+            <a:off x="960120" y="3017520"/>
+            <a:ext cx="1417320" cy="868680"/>
+          </a:xfrm>
+          <a:prstGeom prst="rect">
+            <a:avLst/>
+          </a:prstGeom>
+          <a:noFill/>
+          <a:ln/>
+        </p:spPr>
+        <p:txBody>
+          <a:bodyPr wrap="square" lIns="0" tIns="0" rIns="0" bIns="0" rtlCol="0" anchor="ctr"/>
+          <a:lstStyle/>
+          <a:p>
+            <a:pPr algn="ctr" indent="0" marL="0">
+              <a:buNone/>
+            </a:pPr>
+            <a:r>
+              <a:rPr lang="en-US" sz="1200" dirty="0">
+                <a:solidFill>
+                  <a:schemeClr val="tx1"/>
+                </a:solidFill>
+              </a:rPr>
+              <a:t>Duct</a:t>
+            </a:r>
+            <a:endParaRPr lang="en-US" sz="1200" dirty="0"/>
+          </a:p>
+        </p:txBody>
+      </p:sp>
+      <p:sp>
+        <p:nvSpPr>
+          <p:cNvPr id="25" name="pipe a in"/>
+          <p:cNvSpPr/>
+          <p:nvPr/>
+        </p:nvSpPr>
+        <p:spPr>
+          <a:xfrm>
+            <a:off x="2697480" y="3246120"/>
+            <a:ext cx="640080" cy="640080"/>
+          </a:xfrm>
+          <a:prstGeom prst="ellipse">
+            <a:avLst/>
+          </a:prstGeom>
+          <a:solidFill>
+            <a:srgbClr val="EEF1F4"/>
+          </a:solidFill>
+          <a:ln w="12700">
+            <a:solidFill>
+              <a:srgbClr val="52514E"/>
+            </a:solidFill>
+            <a:prstDash val="solid"/>
+          </a:ln>
+        </p:spPr>
+      </p:sp>
+      <p:sp>
+        <p:nvSpPr>
+          <p:cNvPr id="26" name="pipe b in"/>
+          <p:cNvSpPr/>
+          <p:nvPr/>
+        </p:nvSpPr>
+        <p:spPr>
+          <a:xfrm>
+            <a:off x="3474720" y="3474720"/>
+            <a:ext cx="411480" cy="411480"/>
+          </a:xfrm>
+          <a:prstGeom prst="ellipse">
+            <a:avLst/>
+          </a:prstGeom>
+          <a:solidFill>
+            <a:srgbClr val="EEF1F4"/>
+          </a:solidFill>
+          <a:ln w="12700">
+            <a:solidFill>
+              <a:srgbClr val="52514E"/>
+            </a:solidFill>
+            <a:prstDash val="solid"/>
+          </a:ln>
+        </p:spPr>
+      </p:sp>
+      <p:sp>
+        <p:nvSpPr>
+          <p:cNvPr id="27" name="tray in"/>
+          <p:cNvSpPr/>
+          <p:nvPr/>
+        </p:nvSpPr>
+        <p:spPr>
+          <a:xfrm>
+            <a:off x="3931920" y="3611880"/>
+            <a:ext cx="914400" cy="274320"/>
+          </a:xfrm>
+          <a:prstGeom prst="rect">
+            <a:avLst/>
+          </a:prstGeom>
+          <a:solidFill>
+            <a:srgbClr val="EEF1F4"/>
+          </a:solidFill>
+          <a:ln w="12700">
+            <a:solidFill>
+              <a:srgbClr val="52514E"/>
+            </a:solidFill>
+            <a:prstDash val="solid"/>
+          </a:ln>
+        </p:spPr>
+      </p:sp>
+      <p:sp>
+        <p:nvSpPr>
+          <p:cNvPr id="28" name="pipes label"/>
+          <p:cNvSpPr txBox="1"/>
+          <p:nvPr/>
+        </p:nvSpPr>
+        <p:spPr>
+          <a:xfrm>
+            <a:off x="2697480" y="3959352"/>
+            <a:ext cx="1188720" cy="274320"/>
+          </a:xfrm>
+          <a:prstGeom prst="rect">
+            <a:avLst/>
+          </a:prstGeom>
+          <a:noFill/>
+          <a:ln/>
+        </p:spPr>
+        <p:txBody>
+          <a:bodyPr wrap="square" lIns="0" tIns="0" rIns="0" bIns="0" rtlCol="0" anchor="ctr"/>
+          <a:lstStyle/>
+          <a:p>
+            <a:pPr algn="ctr" indent="0" marL="0">
+              <a:buNone/>
+            </a:pPr>
+            <a:r>
+              <a:rPr lang="en-US" sz="1200" dirty="0">
+                <a:solidFill>
+                  <a:schemeClr val="tx1"/>
+                </a:solidFill>
+              </a:rPr>
+              <a:t>Pipes</a:t>
+            </a:r>
+            <a:endParaRPr lang="en-US" sz="1200" dirty="0"/>
+          </a:p>
+        </p:txBody>
+      </p:sp>
+      <p:sp>
+        <p:nvSpPr>
+          <p:cNvPr id="29" name="tray label"/>
+          <p:cNvSpPr txBox="1"/>
+          <p:nvPr/>
+        </p:nvSpPr>
+        <p:spPr>
+          <a:xfrm>
+            <a:off x="3840480" y="3959352"/>
+            <a:ext cx="1097280" cy="274320"/>
+          </a:xfrm>
+          <a:prstGeom prst="rect">
+            <a:avLst/>
+          </a:prstGeom>
+          <a:noFill/>
+          <a:ln/>
+        </p:spPr>
+        <p:txBody>
+          <a:bodyPr wrap="square" lIns="0" tIns="0" rIns="0" bIns="0" rtlCol="0" anchor="ctr"/>
+          <a:lstStyle/>
+          <a:p>
+            <a:pPr algn="ctr" indent="0" marL="0">
+              <a:buNone/>
+            </a:pPr>
+            <a:r>
+              <a:rPr lang="en-US" sz="1200" dirty="0">
+                <a:solidFill>
+                  <a:schemeClr val="tx1"/>
+                </a:solidFill>
+              </a:rPr>
+              <a:t>Cable tray</a:t>
+            </a:r>
+            <a:endParaRPr lang="en-US" sz="1200" dirty="0"/>
+          </a:p>
+        </p:txBody>
+      </p:sp>
+      <p:sp>
+        <p:nvSpPr>
+          <p:cNvPr id="30" name="in caption"/>
+          <p:cNvSpPr txBox="1"/>
+          <p:nvPr/>
+        </p:nvSpPr>
+        <p:spPr>
+          <a:xfrm>
+            <a:off x="548640" y="4663440"/>
+            <a:ext cx="4846320" cy="502920"/>
+          </a:xfrm>
+          <a:prstGeom prst="rect">
+            <a:avLst/>
+          </a:prstGeom>
+          <a:noFill/>
+          <a:ln/>
+        </p:spPr>
+        <p:txBody>
+          <a:bodyPr wrap="square" lIns="0" tIns="0" rIns="0" bIns="0" rtlCol="0" anchor="t"/>
+          <a:lstStyle/>
+          <a:p>
+            <a:pPr indent="0" marL="0">
+              <a:buNone/>
+            </a:pPr>
+            <a:r>
+              <a:rPr lang="en-US" sz="1200" dirty="0">
+                <a:solidFill>
+                  <a:srgbClr val="52514E"/>
+                </a:solidFill>
+              </a:rPr>
+              <a:t>Structure: ceiling, floor or wall, with anchor zones</a:t>
+            </a:r>
+            <a:endParaRPr lang="en-US" sz="1200" dirty="0"/>
+          </a:p>
+          <a:p>
+            <a:pPr indent="0" marL="0">
+              <a:buNone/>
+            </a:pPr>
+            <a:r>
+              <a:rPr lang="en-US" sz="1200" dirty="0">
+                <a:solidFill>
+                  <a:srgbClr val="52514E"/>
+                </a:solidFill>
+              </a:rPr>
+              <a:t>Services: trade, position, size and weight per metre</a:t>
+            </a:r>
+            <a:endParaRPr lang="en-US" sz="1200" dirty="0"/>
+          </a:p>
+        </p:txBody>
+      </p:sp>
+      <p:sp>
+        <p:nvSpPr>
+          <p:cNvPr id="31" name="design arrow"/>
+          <p:cNvSpPr/>
+          <p:nvPr/>
+        </p:nvSpPr>
+        <p:spPr>
+          <a:xfrm>
+            <a:off x="5577840" y="3200400"/>
+            <a:ext cx="1033272" cy="0"/>
+          </a:xfrm>
+          <a:prstGeom prst="line">
+            <a:avLst/>
+          </a:prstGeom>
+          <a:noFill/>
+          <a:ln w="19050">
+            <a:solidFill>
+              <a:srgbClr val="52514E"/>
+            </a:solidFill>
+            <a:prstDash val="solid"/>
+            <a:tailEnd type="triangle"/>
+          </a:ln>
+        </p:spPr>
+      </p:sp>
+      <p:sp>
+        <p:nvSpPr>
+          <p:cNvPr id="32" name="design label"/>
+          <p:cNvSpPr txBox="1"/>
+          <p:nvPr/>
+        </p:nvSpPr>
+        <p:spPr>
+          <a:xfrm>
+            <a:off x="5394960" y="2834640"/>
+            <a:ext cx="1399032" cy="274320"/>
+          </a:xfrm>
+          <a:prstGeom prst="rect">
+            <a:avLst/>
+          </a:prstGeom>
+          <a:noFill/>
+          <a:ln/>
+        </p:spPr>
+        <p:txBody>
+          <a:bodyPr wrap="square" lIns="0" tIns="0" rIns="0" bIns="0" rtlCol="0" anchor="ctr"/>
+          <a:lstStyle/>
+          <a:p>
+            <a:pPr algn="ctr" indent="0" marL="0">
+              <a:buNone/>
+            </a:pPr>
+            <a:r>
+              <a:rPr lang="en-US" sz="1150" dirty="0">
+                <a:solidFill>
+                  <a:srgbClr val="52514E"/>
+                </a:solidFill>
+              </a:rPr>
+              <a:t>design</a:t>
+            </a:r>
+            <a:endParaRPr lang="en-US" sz="1150" dirty="0"/>
+          </a:p>
+        </p:txBody>
+      </p:sp>
+      <p:sp>
+        <p:nvSpPr>
+          <p:cNvPr id="33" name="head out"/>
+          <p:cNvSpPr txBox="1"/>
+          <p:nvPr/>
+        </p:nvSpPr>
+        <p:spPr>
+          <a:xfrm>
+            <a:off x="6793992" y="1325880"/>
+            <a:ext cx="4846320" cy="274320"/>
+          </a:xfrm>
+          <a:prstGeom prst="rect">
+            <a:avLst/>
+          </a:prstGeom>
+          <a:noFill/>
+          <a:ln/>
+        </p:spPr>
+        <p:txBody>
+          <a:bodyPr wrap="square" lIns="0" tIns="0" rIns="0" bIns="0" rtlCol="0" anchor="ctr"/>
+          <a:lstStyle/>
+          <a:p>
+            <a:pPr indent="0" marL="0">
+              <a:buNone/>
+            </a:pPr>
+            <a:r>
+              <a:rPr lang="en-US" sz="1600" b="1" dirty="0">
+                <a:solidFill>
+                  <a:schemeClr val="tx1"/>
+                </a:solidFill>
+              </a:rPr>
+              <a:t>Out: verified support designs = assemblies</a:t>
+            </a:r>
+            <a:endParaRPr lang="en-US" sz="1600" dirty="0"/>
+          </a:p>
+        </p:txBody>
+      </p:sp>
+      <p:sp>
+        <p:nvSpPr>
+          <p:cNvPr id="34" name="frame out back 0"/>
+          <p:cNvSpPr/>
+          <p:nvPr/>
+        </p:nvSpPr>
+        <p:spPr>
+          <a:xfrm>
+            <a:off x="6976872" y="1645920"/>
+            <a:ext cx="4846320" cy="2743200"/>
+          </a:xfrm>
+          <a:prstGeom prst="roundRect">
+            <a:avLst>
+              <a:gd name="adj" fmla="val 2000"/>
+            </a:avLst>
+          </a:prstGeom>
+          <a:solidFill>
+            <a:srgbClr val="FFFFFF"/>
+          </a:solidFill>
+          <a:ln w="12700">
+            <a:solidFill>
+              <a:srgbClr val="E1E0D9"/>
+            </a:solidFill>
+            <a:prstDash val="solid"/>
+          </a:ln>
+        </p:spPr>
+      </p:sp>
+      <p:sp>
+        <p:nvSpPr>
+          <p:cNvPr id="35" name="frame out back 1"/>
+          <p:cNvSpPr/>
+          <p:nvPr/>
+        </p:nvSpPr>
+        <p:spPr>
+          <a:xfrm>
+            <a:off x="6885432" y="1737360"/>
+            <a:ext cx="4846320" cy="2743200"/>
+          </a:xfrm>
+          <a:prstGeom prst="roundRect">
+            <a:avLst>
+              <a:gd name="adj" fmla="val 2000"/>
+            </a:avLst>
+          </a:prstGeom>
+          <a:solidFill>
+            <a:srgbClr val="FFFFFF"/>
+          </a:solidFill>
+          <a:ln w="12700">
+            <a:solidFill>
+              <a:srgbClr val="E1E0D9"/>
+            </a:solidFill>
+            <a:prstDash val="solid"/>
+          </a:ln>
+        </p:spPr>
+      </p:sp>
+      <p:sp>
+        <p:nvSpPr>
+          <p:cNvPr id="36" name="frame out"/>
+          <p:cNvSpPr/>
+          <p:nvPr/>
+        </p:nvSpPr>
+        <p:spPr>
+          <a:xfrm>
+            <a:off x="6793992" y="1828800"/>
+            <a:ext cx="4846320" cy="2743200"/>
+          </a:xfrm>
+          <a:prstGeom prst="roundRect">
+            <a:avLst>
+              <a:gd name="adj" fmla="val 2000"/>
+            </a:avLst>
+          </a:prstGeom>
+          <a:solidFill>
+            <a:srgbClr val="FFFFFF"/>
+          </a:solidFill>
+          <a:ln w="9525">
+            <a:solidFill>
+              <a:srgbClr val="52514E"/>
+            </a:solidFill>
+            <a:prstDash val="solid"/>
+          </a:ln>
+        </p:spPr>
+      </p:sp>
+      <p:sp>
+        <p:nvSpPr>
+          <p:cNvPr id="37" name="ceiling out"/>
+          <p:cNvSpPr/>
+          <p:nvPr/>
+        </p:nvSpPr>
+        <p:spPr>
+          <a:xfrm>
+            <a:off x="6976872" y="2011680"/>
+            <a:ext cx="4480560" cy="384048"/>
+          </a:xfrm>
+          <a:prstGeom prst="rect">
+            <a:avLst/>
+          </a:prstGeom>
+          <a:solidFill>
+            <a:srgbClr val="EEF1F4"/>
+          </a:solidFill>
+          <a:ln w="9525">
+            <a:solidFill>
+              <a:srgbClr val="52514E"/>
+            </a:solidFill>
+            <a:prstDash val="solid"/>
+          </a:ln>
+        </p:spPr>
+      </p:sp>
+      <p:sp>
+        <p:nvSpPr>
+          <p:cNvPr id="38" name="hatch out 7.6"/>
+          <p:cNvSpPr/>
+          <p:nvPr/>
+        </p:nvSpPr>
+        <p:spPr>
+          <a:xfrm flipV="1">
+            <a:off x="6976872" y="2011680"/>
+            <a:ext cx="274320" cy="384048"/>
+          </a:xfrm>
+          <a:prstGeom prst="line">
+            <a:avLst/>
+          </a:prstGeom>
+          <a:noFill/>
+          <a:ln w="6350">
+            <a:solidFill>
+              <a:srgbClr val="898781"/>
+            </a:solidFill>
+            <a:prstDash val="solid"/>
+          </a:ln>
+        </p:spPr>
+      </p:sp>
+      <p:sp>
+        <p:nvSpPr>
+          <p:cNvPr id="39" name="hatch out 7.9"/>
+          <p:cNvSpPr/>
+          <p:nvPr/>
+        </p:nvSpPr>
+        <p:spPr>
+          <a:xfrm flipV="1">
+            <a:off x="7251192" y="2011680"/>
+            <a:ext cx="274320" cy="384048"/>
+          </a:xfrm>
+          <a:prstGeom prst="line">
+            <a:avLst/>
+          </a:prstGeom>
+          <a:noFill/>
+          <a:ln w="6350">
+            <a:solidFill>
+              <a:srgbClr val="898781"/>
+            </a:solidFill>
+            <a:prstDash val="solid"/>
+          </a:ln>
+        </p:spPr>
+      </p:sp>
+      <p:sp>
+        <p:nvSpPr>
+          <p:cNvPr id="40" name="hatch out 8.2"/>
+          <p:cNvSpPr/>
+          <p:nvPr/>
+        </p:nvSpPr>
+        <p:spPr>
+          <a:xfrm flipV="1">
+            <a:off x="7525512" y="2011680"/>
+            <a:ext cx="274320" cy="384048"/>
+          </a:xfrm>
+          <a:prstGeom prst="line">
+            <a:avLst/>
+          </a:prstGeom>
+          <a:noFill/>
+          <a:ln w="6350">
+            <a:solidFill>
+              <a:srgbClr val="898781"/>
+            </a:solidFill>
+            <a:prstDash val="solid"/>
+          </a:ln>
+        </p:spPr>
+      </p:sp>
+      <p:sp>
+        <p:nvSpPr>
+          <p:cNvPr id="41" name="hatch out 8.5"/>
+          <p:cNvSpPr/>
+          <p:nvPr/>
+        </p:nvSpPr>
+        <p:spPr>
+          <a:xfrm flipV="1">
+            <a:off x="7799832" y="2011680"/>
+            <a:ext cx="274320" cy="384048"/>
+          </a:xfrm>
+          <a:prstGeom prst="line">
+            <a:avLst/>
+          </a:prstGeom>
+          <a:noFill/>
+          <a:ln w="6350">
+            <a:solidFill>
+              <a:srgbClr val="898781"/>
+            </a:solidFill>
+            <a:prstDash val="solid"/>
+          </a:ln>
+        </p:spPr>
+      </p:sp>
+      <p:sp>
+        <p:nvSpPr>
+          <p:cNvPr id="42" name="hatch out 8.8"/>
+          <p:cNvSpPr/>
+          <p:nvPr/>
+        </p:nvSpPr>
+        <p:spPr>
+          <a:xfrm flipV="1">
+            <a:off x="8074152" y="2011680"/>
+            <a:ext cx="274320" cy="384048"/>
+          </a:xfrm>
+          <a:prstGeom prst="line">
+            <a:avLst/>
+          </a:prstGeom>
+          <a:noFill/>
+          <a:ln w="6350">
+            <a:solidFill>
+              <a:srgbClr val="898781"/>
+            </a:solidFill>
+            <a:prstDash val="solid"/>
+          </a:ln>
+        </p:spPr>
+      </p:sp>
+      <p:sp>
+        <p:nvSpPr>
+          <p:cNvPr id="43" name="hatch out 9.1"/>
+          <p:cNvSpPr/>
+          <p:nvPr/>
+        </p:nvSpPr>
+        <p:spPr>
+          <a:xfrm flipV="1">
+            <a:off x="8348472" y="2011680"/>
+            <a:ext cx="274320" cy="384048"/>
+          </a:xfrm>
+          <a:prstGeom prst="line">
+            <a:avLst/>
+          </a:prstGeom>
+          <a:noFill/>
+          <a:ln w="6350">
+            <a:solidFill>
+              <a:srgbClr val="898781"/>
+            </a:solidFill>
+            <a:prstDash val="solid"/>
+          </a:ln>
+        </p:spPr>
+      </p:sp>
+      <p:sp>
+        <p:nvSpPr>
+          <p:cNvPr id="44" name="hatch out 9.4"/>
+          <p:cNvSpPr/>
+          <p:nvPr/>
+        </p:nvSpPr>
+        <p:spPr>
+          <a:xfrm flipV="1">
+            <a:off x="8622792" y="2011680"/>
+            <a:ext cx="274320" cy="384048"/>
+          </a:xfrm>
+          <a:prstGeom prst="line">
+            <a:avLst/>
+          </a:prstGeom>
+          <a:noFill/>
+          <a:ln w="6350">
+            <a:solidFill>
+              <a:srgbClr val="898781"/>
+            </a:solidFill>
+            <a:prstDash val="solid"/>
+          </a:ln>
+        </p:spPr>
+      </p:sp>
+      <p:sp>
+        <p:nvSpPr>
+          <p:cNvPr id="45" name="hatch out 9.7"/>
+          <p:cNvSpPr/>
+          <p:nvPr/>
+        </p:nvSpPr>
+        <p:spPr>
+          <a:xfrm flipV="1">
+            <a:off x="8897112" y="2011680"/>
+            <a:ext cx="274320" cy="384048"/>
+          </a:xfrm>
+          <a:prstGeom prst="line">
+            <a:avLst/>
+          </a:prstGeom>
+          <a:noFill/>
+          <a:ln w="6350">
+            <a:solidFill>
+              <a:srgbClr val="898781"/>
+            </a:solidFill>
+            <a:prstDash val="solid"/>
+          </a:ln>
+        </p:spPr>
+      </p:sp>
+      <p:sp>
+        <p:nvSpPr>
+          <p:cNvPr id="46" name="hatch out 10.0"/>
+          <p:cNvSpPr/>
+          <p:nvPr/>
+        </p:nvSpPr>
+        <p:spPr>
+          <a:xfrm flipV="1">
+            <a:off x="9171432" y="2011680"/>
+            <a:ext cx="274320" cy="384048"/>
+          </a:xfrm>
+          <a:prstGeom prst="line">
+            <a:avLst/>
+          </a:prstGeom>
+          <a:noFill/>
+          <a:ln w="6350">
+            <a:solidFill>
+              <a:srgbClr val="898781"/>
+            </a:solidFill>
+            <a:prstDash val="solid"/>
+          </a:ln>
+        </p:spPr>
+      </p:sp>
+      <p:sp>
+        <p:nvSpPr>
+          <p:cNvPr id="47" name="hatch out 10.3"/>
+          <p:cNvSpPr/>
+          <p:nvPr/>
+        </p:nvSpPr>
+        <p:spPr>
+          <a:xfrm flipV="1">
+            <a:off x="9445752" y="2011680"/>
+            <a:ext cx="274320" cy="384048"/>
+          </a:xfrm>
+          <a:prstGeom prst="line">
+            <a:avLst/>
+          </a:prstGeom>
+          <a:noFill/>
+          <a:ln w="6350">
+            <a:solidFill>
+              <a:srgbClr val="898781"/>
+            </a:solidFill>
+            <a:prstDash val="solid"/>
+          </a:ln>
+        </p:spPr>
+      </p:sp>
+      <p:sp>
+        <p:nvSpPr>
+          <p:cNvPr id="48" name="hatch out 10.6"/>
+          <p:cNvSpPr/>
+          <p:nvPr/>
+        </p:nvSpPr>
+        <p:spPr>
+          <a:xfrm flipV="1">
+            <a:off x="9720072" y="2011680"/>
+            <a:ext cx="274320" cy="384048"/>
+          </a:xfrm>
+          <a:prstGeom prst="line">
+            <a:avLst/>
+          </a:prstGeom>
+          <a:noFill/>
+          <a:ln w="6350">
+            <a:solidFill>
+              <a:srgbClr val="898781"/>
+            </a:solidFill>
+            <a:prstDash val="solid"/>
+          </a:ln>
+        </p:spPr>
+      </p:sp>
+      <p:sp>
+        <p:nvSpPr>
+          <p:cNvPr id="49" name="hatch out 10.9"/>
+          <p:cNvSpPr/>
+          <p:nvPr/>
+        </p:nvSpPr>
+        <p:spPr>
+          <a:xfrm flipV="1">
+            <a:off x="9994392" y="2011680"/>
+            <a:ext cx="274320" cy="384048"/>
+          </a:xfrm>
+          <a:prstGeom prst="line">
+            <a:avLst/>
+          </a:prstGeom>
+          <a:noFill/>
+          <a:ln w="6350">
+            <a:solidFill>
+              <a:srgbClr val="898781"/>
+            </a:solidFill>
+            <a:prstDash val="solid"/>
+          </a:ln>
+        </p:spPr>
+      </p:sp>
+      <p:sp>
+        <p:nvSpPr>
+          <p:cNvPr id="50" name="hatch out 11.2"/>
+          <p:cNvSpPr/>
+          <p:nvPr/>
+        </p:nvSpPr>
+        <p:spPr>
+          <a:xfrm flipV="1">
+            <a:off x="10268712" y="2011680"/>
+            <a:ext cx="274320" cy="384048"/>
+          </a:xfrm>
+          <a:prstGeom prst="line">
+            <a:avLst/>
+          </a:prstGeom>
+          <a:noFill/>
+          <a:ln w="6350">
+            <a:solidFill>
+              <a:srgbClr val="898781"/>
+            </a:solidFill>
+            <a:prstDash val="solid"/>
+          </a:ln>
+        </p:spPr>
+      </p:sp>
+      <p:sp>
+        <p:nvSpPr>
+          <p:cNvPr id="51" name="hatch out 11.5"/>
+          <p:cNvSpPr/>
+          <p:nvPr/>
+        </p:nvSpPr>
+        <p:spPr>
+          <a:xfrm flipV="1">
+            <a:off x="10543032" y="2011680"/>
+            <a:ext cx="274320" cy="384048"/>
+          </a:xfrm>
+          <a:prstGeom prst="line">
+            <a:avLst/>
+          </a:prstGeom>
+          <a:noFill/>
+          <a:ln w="6350">
+            <a:solidFill>
+              <a:srgbClr val="898781"/>
+            </a:solidFill>
+            <a:prstDash val="solid"/>
+          </a:ln>
+        </p:spPr>
+      </p:sp>
+      <p:sp>
+        <p:nvSpPr>
+          <p:cNvPr id="52" name="hatch out 11.8"/>
+          <p:cNvSpPr/>
+          <p:nvPr/>
+        </p:nvSpPr>
+        <p:spPr>
+          <a:xfrm flipV="1">
+            <a:off x="10817352" y="2011680"/>
+            <a:ext cx="274320" cy="384048"/>
+          </a:xfrm>
+          <a:prstGeom prst="line">
+            <a:avLst/>
+          </a:prstGeom>
+          <a:noFill/>
+          <a:ln w="6350">
+            <a:solidFill>
+              <a:srgbClr val="898781"/>
+            </a:solidFill>
+            <a:prstDash val="solid"/>
+          </a:ln>
+        </p:spPr>
+      </p:sp>
+      <p:sp>
+        <p:nvSpPr>
+          <p:cNvPr id="53" name="hatch out 12.1"/>
+          <p:cNvSpPr/>
+          <p:nvPr/>
+        </p:nvSpPr>
+        <p:spPr>
+          <a:xfrm flipV="1">
+            <a:off x="11091672" y="2011680"/>
+            <a:ext cx="274320" cy="384048"/>
+          </a:xfrm>
+          <a:prstGeom prst="line">
+            <a:avLst/>
+          </a:prstGeom>
+          <a:noFill/>
+          <a:ln w="6350">
+            <a:solidFill>
+              <a:srgbClr val="898781"/>
+            </a:solidFill>
+            <a:prstDash val="solid"/>
+          </a:ln>
+        </p:spPr>
+      </p:sp>
+      <p:sp>
+        <p:nvSpPr>
+          <p:cNvPr id="54" name="ceiling label out"/>
+          <p:cNvSpPr txBox="1"/>
+          <p:nvPr/>
+        </p:nvSpPr>
+        <p:spPr>
+          <a:xfrm>
+            <a:off x="8439912" y="2075688"/>
+            <a:ext cx="1554480" cy="256032"/>
+          </a:xfrm>
+          <a:prstGeom prst="rect">
+            <a:avLst/>
+          </a:prstGeom>
+          <a:solidFill>
+            <a:srgbClr val="FFFFFF"/>
+          </a:solidFill>
+          <a:ln/>
+        </p:spPr>
+        <p:txBody>
+          <a:bodyPr wrap="square" lIns="0" tIns="0" rIns="0" bIns="0" rtlCol="0" anchor="ctr"/>
+          <a:lstStyle/>
+          <a:p>
+            <a:pPr algn="ctr" indent="0" marL="0">
+              <a:buNone/>
+            </a:pPr>
+            <a:r>
+              <a:rPr lang="en-US" sz="1100" dirty="0">
+                <a:solidFill>
+                  <a:schemeClr val="tx1"/>
+                </a:solidFill>
+              </a:rPr>
+              <a:t>Concrete ceiling</a:t>
+            </a:r>
+            <a:endParaRPr lang="en-US" sz="1100" dirty="0"/>
+          </a:p>
+        </p:txBody>
+      </p:sp>
+      <p:sp>
+        <p:nvSpPr>
+          <p:cNvPr id="55" name="duct out"/>
+          <p:cNvSpPr/>
+          <p:nvPr/>
+        </p:nvSpPr>
+        <p:spPr>
+          <a:xfrm>
+            <a:off x="7205472" y="2880360"/>
+            <a:ext cx="1417320" cy="868680"/>
+          </a:xfrm>
+          <a:prstGeom prst="rect">
+            <a:avLst/>
+          </a:prstGeom>
+          <a:solidFill>
+            <a:srgbClr val="EEF1F4"/>
+          </a:solidFill>
+          <a:ln w="12700">
+            <a:solidFill>
+              <a:srgbClr val="52514E"/>
+            </a:solidFill>
+            <a:prstDash val="solid"/>
+          </a:ln>
+        </p:spPr>
+      </p:sp>
+      <p:sp>
+        <p:nvSpPr>
+          <p:cNvPr id="56" name="duct label out"/>
+          <p:cNvSpPr txBox="1"/>
+          <p:nvPr/>
+        </p:nvSpPr>
+        <p:spPr>
+          <a:xfrm>
+            <a:off x="7205472" y="2880360"/>
+            <a:ext cx="1417320" cy="868680"/>
+          </a:xfrm>
+          <a:prstGeom prst="rect">
+            <a:avLst/>
+          </a:prstGeom>
+          <a:noFill/>
+          <a:ln/>
+        </p:spPr>
+        <p:txBody>
+          <a:bodyPr wrap="square" lIns="0" tIns="0" rIns="0" bIns="0" rtlCol="0" anchor="ctr"/>
+          <a:lstStyle/>
+          <a:p>
+            <a:pPr algn="ctr" indent="0" marL="0">
+              <a:buNone/>
+            </a:pPr>
+            <a:r>
+              <a:rPr lang="en-US" sz="1200" dirty="0">
+                <a:solidFill>
+                  <a:schemeClr val="tx1"/>
+                </a:solidFill>
+              </a:rPr>
+              <a:t>Duct</a:t>
+            </a:r>
+            <a:endParaRPr lang="en-US" sz="1200" dirty="0"/>
+          </a:p>
+        </p:txBody>
+      </p:sp>
+      <p:sp>
+        <p:nvSpPr>
+          <p:cNvPr id="57" name="pipe a out"/>
+          <p:cNvSpPr/>
+          <p:nvPr/>
+        </p:nvSpPr>
+        <p:spPr>
+          <a:xfrm>
+            <a:off x="8942832" y="3108960"/>
+            <a:ext cx="640080" cy="640080"/>
+          </a:xfrm>
+          <a:prstGeom prst="ellipse">
+            <a:avLst/>
+          </a:prstGeom>
+          <a:solidFill>
+            <a:srgbClr val="EEF1F4"/>
+          </a:solidFill>
+          <a:ln w="12700">
+            <a:solidFill>
+              <a:srgbClr val="52514E"/>
+            </a:solidFill>
+            <a:prstDash val="solid"/>
+          </a:ln>
+        </p:spPr>
+      </p:sp>
+      <p:sp>
+        <p:nvSpPr>
+          <p:cNvPr id="58" name="pipe b out"/>
+          <p:cNvSpPr/>
+          <p:nvPr/>
+        </p:nvSpPr>
+        <p:spPr>
+          <a:xfrm>
+            <a:off x="9720072" y="3337560"/>
+            <a:ext cx="411480" cy="411480"/>
+          </a:xfrm>
+          <a:prstGeom prst="ellipse">
+            <a:avLst/>
+          </a:prstGeom>
+          <a:solidFill>
+            <a:srgbClr val="EEF1F4"/>
+          </a:solidFill>
+          <a:ln w="12700">
+            <a:solidFill>
+              <a:srgbClr val="52514E"/>
+            </a:solidFill>
+            <a:prstDash val="solid"/>
+          </a:ln>
+        </p:spPr>
+      </p:sp>
+      <p:sp>
+        <p:nvSpPr>
+          <p:cNvPr id="59" name="tray out"/>
+          <p:cNvSpPr/>
+          <p:nvPr/>
+        </p:nvSpPr>
+        <p:spPr>
+          <a:xfrm>
+            <a:off x="10177272" y="3474720"/>
+            <a:ext cx="914400" cy="274320"/>
+          </a:xfrm>
+          <a:prstGeom prst="rect">
+            <a:avLst/>
+          </a:prstGeom>
+          <a:solidFill>
+            <a:srgbClr val="EEF1F4"/>
+          </a:solidFill>
+          <a:ln w="12700">
+            <a:solidFill>
+              <a:srgbClr val="52514E"/>
+            </a:solidFill>
+            <a:prstDash val="solid"/>
+          </a:ln>
+        </p:spPr>
+      </p:sp>
+      <p:sp>
+        <p:nvSpPr>
+          <p:cNvPr id="60" name="anchor 0"/>
+          <p:cNvSpPr/>
+          <p:nvPr/>
+        </p:nvSpPr>
+        <p:spPr>
+          <a:xfrm>
+            <a:off x="7123176" y="2286000"/>
+            <a:ext cx="146304" cy="146304"/>
+          </a:xfrm>
+          <a:prstGeom prst="rect">
+            <a:avLst/>
+          </a:prstGeom>
+          <a:solidFill>
+            <a:srgbClr val="1F2933"/>
+          </a:solidFill>
+          <a:ln/>
+        </p:spPr>
+      </p:sp>
+      <p:sp>
+        <p:nvSpPr>
+          <p:cNvPr id="61" name="rod 0"/>
+          <p:cNvSpPr/>
+          <p:nvPr/>
+        </p:nvSpPr>
+        <p:spPr>
+          <a:xfrm>
+            <a:off x="7178040" y="2395728"/>
+            <a:ext cx="36576" cy="1353312"/>
+          </a:xfrm>
+          <a:prstGeom prst="rect">
+            <a:avLst/>
+          </a:prstGeom>
+          <a:solidFill>
+            <a:srgbClr val="1F2933"/>
+          </a:solidFill>
+          <a:ln/>
+        </p:spPr>
+      </p:sp>
+      <p:sp>
+        <p:nvSpPr>
+          <p:cNvPr id="62" name="anchor 1"/>
+          <p:cNvSpPr/>
+          <p:nvPr/>
+        </p:nvSpPr>
+        <p:spPr>
+          <a:xfrm>
+            <a:off x="11164824" y="2286000"/>
+            <a:ext cx="146304" cy="146304"/>
+          </a:xfrm>
+          <a:prstGeom prst="rect">
+            <a:avLst/>
+          </a:prstGeom>
+          <a:solidFill>
+            <a:srgbClr val="1F2933"/>
+          </a:solidFill>
+          <a:ln/>
+        </p:spPr>
+      </p:sp>
+      <p:sp>
+        <p:nvSpPr>
+          <p:cNvPr id="63" name="rod 1"/>
+          <p:cNvSpPr/>
+          <p:nvPr/>
+        </p:nvSpPr>
+        <p:spPr>
+          <a:xfrm>
+            <a:off x="11219688" y="2395728"/>
+            <a:ext cx="36576" cy="1353312"/>
+          </a:xfrm>
+          <a:prstGeom prst="rect">
+            <a:avLst/>
+          </a:prstGeom>
+          <a:solidFill>
+            <a:srgbClr val="1F2933"/>
+          </a:solidFill>
+          <a:ln/>
+        </p:spPr>
+      </p:sp>
+      <p:sp>
+        <p:nvSpPr>
+          <p:cNvPr id="64" name="trapeze bar"/>
+          <p:cNvSpPr/>
+          <p:nvPr/>
+        </p:nvSpPr>
+        <p:spPr>
+          <a:xfrm>
+            <a:off x="7068312" y="3749040"/>
+            <a:ext cx="4297680" cy="82296"/>
+          </a:xfrm>
+          <a:prstGeom prst="rect">
+            <a:avLst/>
+          </a:prstGeom>
+          <a:solidFill>
+            <a:srgbClr val="1F2933"/>
+          </a:solidFill>
+          <a:ln/>
+        </p:spPr>
+      </p:sp>
+      <p:sp>
+        <p:nvSpPr>
+          <p:cNvPr id="65" name="assembly name"/>
+          <p:cNvSpPr txBox="1"/>
+          <p:nvPr/>
+        </p:nvSpPr>
+        <p:spPr>
+          <a:xfrm>
+            <a:off x="7022592" y="4114800"/>
+            <a:ext cx="2286000" cy="320040"/>
+          </a:xfrm>
+          <a:prstGeom prst="rect">
+            <a:avLst/>
+          </a:prstGeom>
+          <a:noFill/>
+          <a:ln/>
+        </p:spPr>
+        <p:txBody>
+          <a:bodyPr wrap="square" lIns="0" tIns="0" rIns="0" bIns="0" rtlCol="0" anchor="ctr"/>
+          <a:lstStyle/>
+          <a:p>
+            <a:pPr indent="0" marL="0">
+              <a:buNone/>
+            </a:pPr>
+            <a:r>
+              <a:rPr lang="en-US" sz="1300" b="1" dirty="0">
+                <a:solidFill>
+                  <a:schemeClr val="tx1"/>
+                </a:solidFill>
+              </a:rPr>
+              <a:t>Rod trapeze</a:t>
+            </a:r>
+            <a:endParaRPr lang="en-US" sz="1300" dirty="0"/>
+          </a:p>
+        </p:txBody>
+      </p:sp>
+      <p:sp>
+        <p:nvSpPr>
+          <p:cNvPr id="66" name="verified"/>
+          <p:cNvSpPr txBox="1"/>
+          <p:nvPr/>
+        </p:nvSpPr>
+        <p:spPr>
+          <a:xfrm>
+            <a:off x="9811512" y="4114800"/>
+            <a:ext cx="1600200" cy="320040"/>
+          </a:xfrm>
+          <a:prstGeom prst="rect">
+            <a:avLst/>
+          </a:prstGeom>
+          <a:noFill/>
+          <a:ln/>
+        </p:spPr>
+        <p:txBody>
+          <a:bodyPr wrap="square" lIns="0" tIns="0" rIns="0" bIns="0" rtlCol="0" anchor="ctr"/>
+          <a:lstStyle/>
+          <a:p>
+            <a:pPr algn="r" indent="0" marL="0">
+              <a:buNone/>
+            </a:pPr>
+            <a:r>
+              <a:rPr lang="en-US" sz="1300" b="1" dirty="0">
+                <a:solidFill>
+                  <a:srgbClr val="008300"/>
+                </a:solidFill>
+              </a:rPr>
+              <a:t>✓ verified</a:t>
+            </a:r>
+            <a:endParaRPr lang="en-US" sz="1300" dirty="0"/>
+          </a:p>
+        </p:txBody>
+      </p:sp>
+      <p:sp>
+        <p:nvSpPr>
+          <p:cNvPr id="67" name="out caption"/>
+          <p:cNvSpPr txBox="1"/>
+          <p:nvPr/>
+        </p:nvSpPr>
+        <p:spPr>
+          <a:xfrm>
+            <a:off x="6793992" y="4663440"/>
+            <a:ext cx="4846320" cy="502920"/>
+          </a:xfrm>
+          <a:prstGeom prst="rect">
+            <a:avLst/>
+          </a:prstGeom>
+          <a:noFill/>
+          <a:ln/>
+        </p:spPr>
+        <p:txBody>
+          <a:bodyPr wrap="square" lIns="0" tIns="0" rIns="0" bIns="0" rtlCol="0" anchor="t"/>
+          <a:lstStyle/>
+          <a:p>
+            <a:pPr indent="0" marL="0">
+              <a:buNone/>
+            </a:pPr>
+            <a:r>
+              <a:rPr lang="en-US" sz="1200" dirty="0">
+                <a:solidFill>
+                  <a:srgbClr val="52514E"/>
+                </a:solidFill>
+              </a:rPr>
+              <a:t>Up to ten designs, ranked by installed cost</a:t>
+            </a:r>
+            <a:endParaRPr lang="en-US" sz="1200" dirty="0"/>
+          </a:p>
+          <a:p>
+            <a:pPr indent="0" marL="0">
+              <a:buNone/>
+            </a:pPr>
+            <a:r>
+              <a:rPr lang="en-US" sz="1200" dirty="0">
+                <a:solidFill>
+                  <a:srgbClr val="52514E"/>
+                </a:solidFill>
+              </a:rPr>
+              <a:t>Each checked: statics, anchors, connectors, buildability</a:t>
+            </a:r>
+            <a:endParaRPr lang="en-US" sz="1200" dirty="0"/>
+          </a:p>
+        </p:txBody>
+      </p:sp>
+      <p:sp>
+        <p:nvSpPr>
+          <p:cNvPr id="68" name="gloss context"/>
+          <p:cNvSpPr/>
+          <p:nvPr/>
+        </p:nvSpPr>
+        <p:spPr>
+          <a:xfrm>
+            <a:off x="548640" y="5257800"/>
+            <a:ext cx="5454396" cy="777240"/>
+          </a:xfrm>
+          <a:prstGeom prst="roundRect">
+            <a:avLst>
+              <a:gd name="adj" fmla="val 8235"/>
+            </a:avLst>
+          </a:prstGeom>
+          <a:solidFill>
+            <a:schemeClr val="bg2"/>
+          </a:solidFill>
+          <a:ln/>
+        </p:spPr>
+      </p:sp>
+      <p:sp>
+        <p:nvSpPr>
+          <p:cNvPr id="69" name="gloss text context"/>
+          <p:cNvSpPr txBox="1"/>
+          <p:nvPr/>
+        </p:nvSpPr>
+        <p:spPr>
+          <a:xfrm>
+            <a:off x="777240" y="5257800"/>
+            <a:ext cx="4997196" cy="777240"/>
+          </a:xfrm>
+          <a:prstGeom prst="rect">
+            <a:avLst/>
+          </a:prstGeom>
+          <a:noFill/>
+          <a:ln/>
+        </p:spPr>
+        <p:txBody>
+          <a:bodyPr wrap="square" lIns="0" tIns="0" rIns="0" bIns="0" rtlCol="0" anchor="ctr"/>
+          <a:lstStyle/>
+          <a:p>
+            <a:pPr indent="0" marL="0">
+              <a:buNone/>
+            </a:pPr>
+            <a:r>
+              <a:rPr lang="en-US" sz="1300" b="1" dirty="0">
+                <a:solidFill>
+                  <a:schemeClr val="accent1"/>
+                </a:solidFill>
+              </a:rPr>
+              <a:t>Context, the brief: </a:t>
+            </a:r>
+            <a:pPr indent="0" marL="0">
+              <a:buNone/>
+            </a:pPr>
+            <a:r>
+              <a:rPr lang="en-US" sz="1300" dirty="0">
+                <a:solidFill>
+                  <a:schemeClr val="tx1"/>
+                </a:solidFill>
+              </a:rPr>
+              <a:t>the section at one hanger, its structure and services. This is what CrossMEP contains.</a:t>
+            </a:r>
+            <a:endParaRPr lang="en-US" sz="1300" dirty="0"/>
+          </a:p>
+        </p:txBody>
+      </p:sp>
+      <p:sp>
+        <p:nvSpPr>
+          <p:cNvPr id="70" name="gloss assembly"/>
+          <p:cNvSpPr/>
+          <p:nvPr/>
+        </p:nvSpPr>
+        <p:spPr>
+          <a:xfrm>
+            <a:off x="6185916" y="5257800"/>
+            <a:ext cx="5454396" cy="777240"/>
+          </a:xfrm>
+          <a:prstGeom prst="roundRect">
+            <a:avLst>
+              <a:gd name="adj" fmla="val 8235"/>
+            </a:avLst>
+          </a:prstGeom>
+          <a:solidFill>
+            <a:schemeClr val="bg2"/>
+          </a:solidFill>
+          <a:ln/>
+        </p:spPr>
+      </p:sp>
+      <p:sp>
+        <p:nvSpPr>
+          <p:cNvPr id="71" name="gloss text assembly"/>
+          <p:cNvSpPr txBox="1"/>
+          <p:nvPr/>
+        </p:nvSpPr>
+        <p:spPr>
+          <a:xfrm>
+            <a:off x="6414516" y="5257800"/>
+            <a:ext cx="4997196" cy="777240"/>
+          </a:xfrm>
+          <a:prstGeom prst="rect">
+            <a:avLst/>
+          </a:prstGeom>
+          <a:noFill/>
+          <a:ln/>
+        </p:spPr>
+        <p:txBody>
+          <a:bodyPr wrap="square" lIns="0" tIns="0" rIns="0" bIns="0" rtlCol="0" anchor="ctr"/>
+          <a:lstStyle/>
+          <a:p>
+            <a:pPr indent="0" marL="0">
+              <a:buNone/>
+            </a:pPr>
+            <a:r>
+              <a:rPr lang="en-US" sz="1300" b="1" dirty="0">
+                <a:solidFill>
+                  <a:schemeClr val="accent1"/>
+                </a:solidFill>
+              </a:rPr>
+              <a:t>Assembly, the answer: </a:t>
+            </a:r>
+            <a:pPr indent="0" marL="0">
+              <a:buNone/>
+            </a:pPr>
+            <a:r>
+              <a:rPr lang="en-US" sz="1300" dirty="0">
+                <a:solidFill>
+                  <a:schemeClr val="tx1"/>
+                </a:solidFill>
+              </a:rPr>
+              <a:t>catalog parts that carry the services to the structure. Not in CrossMEP: a method produces it.</a:t>
+            </a:r>
+            <a:endParaRPr lang="en-US" sz="1300" dirty="0"/>
+          </a:p>
+        </p:txBody>
+      </p:sp>
+      <p:sp>
+        <p:nvSpPr>
+          <p:cNvPr id="72" name="isarc note"/>
+          <p:cNvSpPr txBox="1"/>
+          <p:nvPr/>
+        </p:nvSpPr>
+        <p:spPr>
+          <a:xfrm>
+            <a:off x="548640" y="6108192"/>
+            <a:ext cx="5486400" cy="228600"/>
+          </a:xfrm>
+          <a:prstGeom prst="rect">
+            <a:avLst/>
+          </a:prstGeom>
+          <a:noFill/>
+          <a:ln/>
+        </p:spPr>
+        <p:txBody>
+          <a:bodyPr wrap="square" lIns="0" tIns="0" rIns="0" bIns="0" rtlCol="0" anchor="t"/>
+          <a:lstStyle/>
+          <a:p>
+            <a:pPr indent="0" marL="0">
+              <a:buNone/>
+            </a:pPr>
+            <a:r>
+              <a:rPr lang="en-US" sz="1100" dirty="0">
+                <a:solidFill>
+                  <a:srgbClr val="52514E"/>
+                </a:solidFill>
+              </a:rPr>
+              <a:t>The synthesis problem as defined at ISARC 2026.</a:t>
+            </a:r>
+            <a:endParaRPr lang="en-US" sz="1100" dirty="0"/>
+          </a:p>
+        </p:txBody>
+      </p:sp>
+      <p:sp>
+        <p:nvSpPr>
+          <p:cNvPr id="25" name="Slide Number Placeholder 0"/>
+          <p:cNvSpPr>
+            <a:spLocks noGrp="1"/>
+          </p:cNvSpPr>
+          <p:nvPr>
+            <p:ph type="sldNum" sz="quarter" idx="4294967295"/>
+          </p:nvPr>
+        </p:nvSpPr>
+        <p:spPr>
+          <a:xfrm>
+            <a:off x="11064240" y="6419088"/>
+            <a:ext cx="594360" cy="274320"/>
+          </a:xfrm>
+          <a:prstGeom prst="rect">
+            <a:avLst/>
+          </a:prstGeom>
+          <a:extLst>
+            <a:ext uri="{C572A759-6A51-4108-AA02-DFA0A04FC94B}">
+              <ma14:wrappingTextBoxFlag xmlns:ma14="http://schemas.microsoft.com/office/mac/drawingml/2011/main" val="0"/>
+            </a:ext>
+          </a:extLst>
+        </p:spPr>
+        <p:txBody>
+          <a:bodyPr/>
+          <a:lstStyle>
+            <a:lvl1pPr>
+              <a:defRPr sz="900">
+                <a:solidFill>
+                  <a:srgbClr val="898781"/>
+                </a:solidFill>
+              </a:defRPr>
+            </a:lvl1pPr>
+          </a:lstStyle>
+          <a:p>
+            <a:pPr algn="r"/>
+            <a:fld id="{F7021451-1387-4CA6-816F-3879F97B5CBC}" type="slidenum">
+              <a:rPr b="0" lang="en-US"/>
+              <a:t>3</a:t>
+            </a:fld>
+            <a:endParaRPr lang="en-US"/>
+          </a:p>
+        </p:txBody>
+      </p:sp>
+    </p:spTree>
+  </p:cSld>
+  <p:clrMapOvr>
+    <a:masterClrMapping/>
+  </p:clrMapOvr>
+</p:sld>
+</file>
+
+<file path=ppt/slides/slide4.xml><?xml version="1.0" encoding="utf-8"?>
+<p:sld xmlns:a="http://schemas.openxmlformats.org/drawingml/2006/main" xmlns:r="http://schemas.openxmlformats.org/officeDocument/2006/relationships" xmlns:p="http://schemas.openxmlformats.org/presentationml/2006/main">
+  <p:cSld name="Slide 4">
+    <p:spTree>
+      <p:nvGrpSpPr>
+        <p:cNvPr id="1" name=""/>
+        <p:cNvGrpSpPr/>
+        <p:nvPr/>
+      </p:nvGrpSpPr>
+      <p:grpSpPr>
+        <a:xfrm>
+          <a:off x="0" y="0"/>
+          <a:ext cx="0" cy="0"/>
+          <a:chOff x="0" y="0"/>
+          <a:chExt cx="0" cy="0"/>
+        </a:xfrm>
+      </p:grpSpPr>
+      <p:sp>
+        <p:nvSpPr>
+          <p:cNvPr id="2" name="Text 0"/>
+          <p:cNvSpPr/>
+          <p:nvPr>
+            <p:ph idx="100" type="title" hasCustomPrompt="1"/>
+          </p:nvPr>
+        </p:nvSpPr>
+        <p:spPr>
+          <a:xfrm>
+            <a:off x="548640" y="274320"/>
+            <a:ext cx="11091672" cy="960120"/>
+          </a:xfrm>
+          <a:prstGeom prst="rect">
+            <a:avLst/>
+          </a:prstGeom>
+          <a:noFill/>
+          <a:ln/>
+        </p:spPr>
+        <p:txBody>
+          <a:bodyPr wrap="square" lIns="0" tIns="0" rIns="0" bIns="0" rtlCol="0" anchor="ctr"/>
+          <a:lstStyle/>
+          <a:p>
+            <a:pPr algn="l" indent="0" marL="0">
+              <a:buNone/>
+            </a:pPr>
+            <a:r>
+              <a:rPr lang="en-US" sz="2600" b="1" dirty="0">
+                <a:solidFill>
+                  <a:schemeClr val="tx1"/>
+                </a:solidFill>
+              </a:rPr>
+              <a:t>Synthesizing the assembly from a catalog and a context has resisted automation</a:t>
+            </a:r>
+            <a:endParaRPr lang="en-US" sz="2600" dirty="0"/>
+          </a:p>
+        </p:txBody>
+      </p:sp>
+      <p:pic>
+        <p:nvPicPr>
+          <p:cNvPr id="3" name="route to section" descr="/home/user/crossmep_dataset/docs/figures/paper_fig1_route_to_section.png">    </p:cNvPr>
+          <p:cNvPicPr>
+            <a:picLocks noChangeAspect="1"/>
+          </p:cNvPicPr>
+          <p:nvPr/>
+        </p:nvPicPr>
+        <p:blipFill>
+          <a:blip r:embed="rId1"/>
+          <a:stretch>
+            <a:fillRect/>
+          </a:stretch>
+        </p:blipFill>
+        <p:spPr>
+          <a:xfrm>
+            <a:off x="548640" y="1693919"/>
+            <a:ext cx="6766560" cy="1869961"/>
+          </a:xfrm>
+          <a:prstGeom prst="rect">
+            <a:avLst/>
+          </a:prstGeom>
+        </p:spPr>
+      </p:pic>
+      <p:sp>
+        <p:nvSpPr>
+          <p:cNvPr id="4" name="fig1 caption"/>
+          <p:cNvSpPr txBox="1"/>
+          <p:nvPr/>
+        </p:nvSpPr>
+        <p:spPr>
+          <a:xfrm>
+            <a:off x="548640" y="3655321"/>
+            <a:ext cx="6766560" cy="457200"/>
+          </a:xfrm>
+          <a:prstGeom prst="rect">
+            <a:avLst/>
+          </a:prstGeom>
+          <a:noFill/>
+          <a:ln/>
+        </p:spPr>
+        <p:txBody>
+          <a:bodyPr wrap="square" lIns="0" tIns="0" rIns="0" bIns="0" rtlCol="0" anchor="t"/>
+          <a:lstStyle/>
+          <a:p>
+            <a:pPr indent="0" marL="0">
+              <a:buNone/>
+            </a:pPr>
+            <a:r>
+              <a:rPr lang="en-US" sz="1100" dirty="0">
+                <a:solidFill>
+                  <a:srgbClr val="52514E"/>
+                </a:solidFill>
+              </a:rPr>
+              <a:t>Design starts after coordination: at each hanger the designer works from the section across the run, not from the whole model.</a:t>
+            </a:r>
+            <a:endParaRPr lang="en-US" sz="1100" dirty="0"/>
+          </a:p>
+        </p:txBody>
+      </p:sp>
+      <p:sp>
+        <p:nvSpPr>
+          <p:cNvPr id="5" name="practice card"/>
+          <p:cNvSpPr/>
+          <p:nvPr/>
+        </p:nvSpPr>
+        <p:spPr>
+          <a:xfrm>
+            <a:off x="7543800" y="1371600"/>
+            <a:ext cx="4096512" cy="2606040"/>
           </a:xfrm>
           <a:prstGeom prst="roundRect">
             <a:avLst>
@@ -20878,14 +24867,14 @@
       </p:sp>
       <p:sp>
         <p:nvSpPr>
-          <p:cNvPr id="4" name="problem"/>
+          <p:cNvPr id="6" name="practice"/>
           <p:cNvSpPr txBox="1"/>
           <p:nvPr/>
         </p:nvSpPr>
         <p:spPr>
           <a:xfrm>
-            <a:off x="777240" y="1508760"/>
-            <a:ext cx="4754880" cy="2377440"/>
+            <a:off x="7772400" y="1508760"/>
+            <a:ext cx="3657600" cy="2377440"/>
           </a:xfrm>
           <a:prstGeom prst="rect">
             <a:avLst/>
@@ -20906,7 +24895,7 @@
                   <a:schemeClr val="tx1"/>
                 </a:solidFill>
               </a:rPr>
-              <a:t>The synthesis problem</a:t>
+              <a:t>Where practice stands</a:t>
             </a:r>
             <a:endParaRPr lang="en-US" sz="1500" dirty="0"/>
           </a:p>
@@ -20929,23 +24918,12 @@
               <a:buNone/>
             </a:pPr>
             <a:r>
-              <a:rPr lang="en-US" sz="1500" b="1" dirty="0">
-                <a:solidFill>
-                  <a:schemeClr val="tx1"/>
-                </a:solidFill>
-              </a:rPr>
-              <a:t>Given </a:t>
-            </a:r>
-            <a:pPr indent="0" marL="0">
-              <a:buNone/>
-            </a:pPr>
-            <a:r>
               <a:rPr lang="en-US" sz="1500" dirty="0">
                 <a:solidFill>
                   <a:schemeClr val="tx1"/>
                 </a:solidFill>
               </a:rPr>
-              <a:t>a fixed catalog of components and the MEP context: the services crossing the hanger and the surface they hang from.</a:t>
+              <a:t>Tools coordinate the model and check a design.</a:t>
             </a:r>
             <a:endParaRPr lang="en-US" sz="1500" dirty="0"/>
           </a:p>
@@ -20968,113 +24946,14 @@
               <a:buNone/>
             </a:pPr>
             <a:r>
-              <a:rPr lang="en-US" sz="1500" b="1" dirty="0">
-                <a:solidFill>
-                  <a:schemeClr val="tx1"/>
-                </a:solidFill>
-              </a:rPr>
-              <a:t>Find </a:t>
-            </a:r>
-            <a:pPr indent="0" marL="0">
-              <a:buNone/>
-            </a:pPr>
-            <a:r>
               <a:rPr lang="en-US" sz="1500" dirty="0">
                 <a:solidFill>
                   <a:schemeClr val="tx1"/>
                 </a:solidFill>
               </a:rPr>
-              <a:t>a feasible assembly that carries the services to the structure.</a:t>
+              <a:t>Choosing the topology and the parts, from a fixed catalog, is still done by hand, one section at a time.</a:t>
             </a:r>
             <a:endParaRPr lang="en-US" sz="1500" dirty="0"/>
-          </a:p>
-          <a:p>
-            <a:pPr indent="0" marL="0">
-              <a:buNone/>
-            </a:pPr>
-            <a:r>
-              <a:rPr lang="en-US" sz="600" dirty="0">
-                <a:solidFill>
-                  <a:schemeClr val="tx1"/>
-                </a:solidFill>
-              </a:rPr>
-              <a:t> </a:t>
-            </a:r>
-            <a:endParaRPr lang="en-US" sz="1500" dirty="0"/>
-          </a:p>
-          <a:p>
-            <a:pPr indent="0" marL="0">
-              <a:buNone/>
-            </a:pPr>
-            <a:r>
-              <a:rPr lang="en-US" sz="1500" i="1" dirty="0">
-                <a:solidFill>
-                  <a:schemeClr val="tx1"/>
-                </a:solidFill>
-              </a:rPr>
-              <a:t>Tools coordinate the model and check a design; choosing the topology and the parts is still done by hand.</a:t>
-            </a:r>
-            <a:endParaRPr lang="en-US" sz="1500" dirty="0"/>
-          </a:p>
-        </p:txBody>
-      </p:sp>
-      <p:pic>
-        <p:nvPicPr>
-          <p:cNvPr id="5" name="route to section" descr="/home/user/crossmep_dataset/docs/figures/paper_fig1_route_to_section.png">    </p:cNvPr>
-          <p:cNvPicPr>
-            <a:picLocks noChangeAspect="1"/>
-          </p:cNvPicPr>
-          <p:nvPr/>
-        </p:nvPicPr>
-        <p:blipFill>
-          <a:blip r:embed="rId1"/>
-          <a:stretch>
-            <a:fillRect/>
-          </a:stretch>
-        </p:blipFill>
-        <p:spPr>
-          <a:xfrm>
-            <a:off x="5989320" y="1642325"/>
-            <a:ext cx="5650992" cy="1561670"/>
-          </a:xfrm>
-          <a:prstGeom prst="rect">
-            <a:avLst/>
-          </a:prstGeom>
-        </p:spPr>
-      </p:pic>
-      <p:sp>
-        <p:nvSpPr>
-          <p:cNvPr id="6" name="fig1 caption"/>
-          <p:cNvSpPr txBox="1"/>
-          <p:nvPr/>
-        </p:nvSpPr>
-        <p:spPr>
-          <a:xfrm>
-            <a:off x="5989320" y="3295435"/>
-            <a:ext cx="5650992" cy="457200"/>
-          </a:xfrm>
-          <a:prstGeom prst="rect">
-            <a:avLst/>
-          </a:prstGeom>
-          <a:noFill/>
-          <a:ln/>
-        </p:spPr>
-        <p:txBody>
-          <a:bodyPr wrap="square" lIns="0" tIns="0" rIns="0" bIns="0" rtlCol="0" anchor="t"/>
-          <a:lstStyle/>
-          <a:p>
-            <a:pPr indent="0" marL="0">
-              <a:buNone/>
-            </a:pPr>
-            <a:r>
-              <a:rPr lang="en-US" sz="1100" dirty="0">
-                <a:solidFill>
-                  <a:srgbClr val="52514E"/>
-                </a:solidFill>
-              </a:rPr>
-              <a:t>Design starts after coordination: at each hanger the designer works from the section across the run, not from the whole model.</a:t>
-            </a:r>
-            <a:endParaRPr lang="en-US" sz="1100" dirty="0"/>
           </a:p>
         </p:txBody>
       </p:sp>
@@ -21399,7 +25278,7 @@
             <a:pPr algn="r"/>
             <a:fld id="{F7021451-1387-4CA6-816F-3879F97B5CBC}" type="slidenum">
               <a:rPr b="0" lang="en-US"/>
-              <a:t>3</a:t>
+              <a:t>4</a:t>
             </a:fld>
             <a:endParaRPr lang="en-US"/>
           </a:p>
@@ -21413,9 +25292,9 @@
 </p:sld>
 </file>
 
-<file path=ppt/slides/slide4.xml><?xml version="1.0" encoding="utf-8"?>
+<file path=ppt/slides/slide5.xml><?xml version="1.0" encoding="utf-8"?>
 <p:sld xmlns:a="http://schemas.openxmlformats.org/drawingml/2006/main" xmlns:r="http://schemas.openxmlformats.org/officeDocument/2006/relationships" xmlns:p="http://schemas.openxmlformats.org/presentationml/2006/main">
-  <p:cSld name="Slide 4">
+  <p:cSld name="Slide 5">
     <p:spTree>
       <p:nvGrpSpPr>
         <p:cNvPr id="1" name=""/>
@@ -22779,7 +26658,7 @@
             <a:pPr algn="r"/>
             <a:fld id="{F7021451-1387-4CA6-816F-3879F97B5CBC}" type="slidenum">
               <a:rPr b="0" lang="en-US"/>
-              <a:t>4</a:t>
+              <a:t>5</a:t>
             </a:fld>
             <a:endParaRPr lang="en-US"/>
           </a:p>
@@ -22793,9 +26672,9 @@
 </p:sld>
 </file>
 
-<file path=ppt/slides/slide5.xml><?xml version="1.0" encoding="utf-8"?>
+<file path=ppt/slides/slide6.xml><?xml version="1.0" encoding="utf-8"?>
 <p:sld xmlns:a="http://schemas.openxmlformats.org/drawingml/2006/main" xmlns:r="http://schemas.openxmlformats.org/officeDocument/2006/relationships" xmlns:p="http://schemas.openxmlformats.org/presentationml/2006/main">
-  <p:cSld name="Slide 5">
+  <p:cSld name="Slide 6">
     <p:spTree>
       <p:nvGrpSpPr>
         <p:cNvPr id="1" name=""/>
@@ -25029,7 +28908,7 @@
             <a:pPr algn="r"/>
             <a:fld id="{F7021451-1387-4CA6-816F-3879F97B5CBC}" type="slidenum">
               <a:rPr b="0" lang="en-US"/>
-              <a:t>5</a:t>
+              <a:t>6</a:t>
             </a:fld>
             <a:endParaRPr lang="en-US"/>
           </a:p>
@@ -25043,9 +28922,9 @@
 </p:sld>
 </file>
 
-<file path=ppt/slides/slide6.xml><?xml version="1.0" encoding="utf-8"?>
+<file path=ppt/slides/slide7.xml><?xml version="1.0" encoding="utf-8"?>
 <p:sld xmlns:a="http://schemas.openxmlformats.org/drawingml/2006/main" xmlns:r="http://schemas.openxmlformats.org/officeDocument/2006/relationships" xmlns:p="http://schemas.openxmlformats.org/presentationml/2006/main">
-  <p:cSld name="Slide 6">
+  <p:cSld name="Slide 7">
     <p:spTree>
       <p:nvGrpSpPr>
         <p:cNvPr id="1" name=""/>
@@ -25197,7 +29076,7 @@
             <a:pPr algn="r"/>
             <a:fld id="{F7021451-1387-4CA6-816F-3879F97B5CBC}" type="slidenum">
               <a:rPr b="0" lang="en-US"/>
-              <a:t>6</a:t>
+              <a:t>7</a:t>
             </a:fld>
             <a:endParaRPr lang="en-US"/>
           </a:p>
@@ -25211,9 +29090,9 @@
 </p:sld>
 </file>
 
-<file path=ppt/slides/slide7.xml><?xml version="1.0" encoding="utf-8"?>
+<file path=ppt/slides/slide8.xml><?xml version="1.0" encoding="utf-8"?>
 <p:sld xmlns:a="http://schemas.openxmlformats.org/drawingml/2006/main" xmlns:r="http://schemas.openxmlformats.org/officeDocument/2006/relationships" xmlns:p="http://schemas.openxmlformats.org/presentationml/2006/main">
-  <p:cSld name="Slide 7">
+  <p:cSld name="Slide 8">
     <p:spTree>
       <p:nvGrpSpPr>
         <p:cNvPr id="1" name=""/>
@@ -25983,7 +29862,7 @@
             <a:pPr algn="r"/>
             <a:fld id="{F7021451-1387-4CA6-816F-3879F97B5CBC}" type="slidenum">
               <a:rPr b="0" lang="en-US"/>
-              <a:t>7</a:t>
+              <a:t>8</a:t>
             </a:fld>
             <a:endParaRPr lang="en-US"/>
           </a:p>
@@ -25997,9 +29876,9 @@
 </p:sld>
 </file>
 
-<file path=ppt/slides/slide8.xml><?xml version="1.0" encoding="utf-8"?>
+<file path=ppt/slides/slide9.xml><?xml version="1.0" encoding="utf-8"?>
 <p:sld xmlns:a="http://schemas.openxmlformats.org/drawingml/2006/main" xmlns:r="http://schemas.openxmlformats.org/officeDocument/2006/relationships" xmlns:p="http://schemas.openxmlformats.org/presentationml/2006/main">
-  <p:cSld name="Slide 8">
+  <p:cSld name="Slide 9">
     <p:spTree>
       <p:nvGrpSpPr>
         <p:cNvPr id="1" name=""/>
@@ -26054,7 +29933,7 @@
       </p:sp>
       <p:graphicFrame>
         <p:nvGraphicFramePr>
-          <p:cNvPr id="9" name="sources table"/>
+          <p:cNvPr id="10" name="sources table"/>
           <p:cNvGraphicFramePr>
             <a:graphicFrameLocks noGrp="1"/>
           </p:cNvGraphicFramePr>
@@ -27480,1845 +31359,6 @@
           </a:p>
         </p:txBody>
       </p:sp>
-      <p:sp>
-        <p:nvSpPr>
-          <p:cNvPr id="25" name="Slide Number Placeholder 0"/>
-          <p:cNvSpPr>
-            <a:spLocks noGrp="1"/>
-          </p:cNvSpPr>
-          <p:nvPr>
-            <p:ph type="sldNum" sz="quarter" idx="4294967295"/>
-          </p:nvPr>
-        </p:nvSpPr>
-        <p:spPr>
-          <a:xfrm>
-            <a:off x="11064240" y="6419088"/>
-            <a:ext cx="594360" cy="274320"/>
-          </a:xfrm>
-          <a:prstGeom prst="rect">
-            <a:avLst/>
-          </a:prstGeom>
-          <a:extLst>
-            <a:ext uri="{C572A759-6A51-4108-AA02-DFA0A04FC94B}">
-              <ma14:wrappingTextBoxFlag xmlns:ma14="http://schemas.microsoft.com/office/mac/drawingml/2011/main" val="0"/>
-            </a:ext>
-          </a:extLst>
-        </p:spPr>
-        <p:txBody>
-          <a:bodyPr/>
-          <a:lstStyle>
-            <a:lvl1pPr>
-              <a:defRPr sz="900">
-                <a:solidFill>
-                  <a:srgbClr val="898781"/>
-                </a:solidFill>
-              </a:defRPr>
-            </a:lvl1pPr>
-          </a:lstStyle>
-          <a:p>
-            <a:pPr algn="r"/>
-            <a:fld id="{F7021451-1387-4CA6-816F-3879F97B5CBC}" type="slidenum">
-              <a:rPr b="0" lang="en-US"/>
-              <a:t>8</a:t>
-            </a:fld>
-            <a:endParaRPr lang="en-US"/>
-          </a:p>
-        </p:txBody>
-      </p:sp>
-    </p:spTree>
-  </p:cSld>
-  <p:clrMapOvr>
-    <a:masterClrMapping/>
-  </p:clrMapOvr>
-</p:sld>
-</file>
-
-<file path=ppt/slides/slide9.xml><?xml version="1.0" encoding="utf-8"?>
-<p:sld xmlns:a="http://schemas.openxmlformats.org/drawingml/2006/main" xmlns:r="http://schemas.openxmlformats.org/officeDocument/2006/relationships" xmlns:p="http://schemas.openxmlformats.org/presentationml/2006/main">
-  <p:cSld name="Slide 9">
-    <p:spTree>
-      <p:nvGrpSpPr>
-        <p:cNvPr id="1" name=""/>
-        <p:cNvGrpSpPr/>
-        <p:nvPr/>
-      </p:nvGrpSpPr>
-      <p:grpSpPr>
-        <a:xfrm>
-          <a:off x="0" y="0"/>
-          <a:ext cx="0" cy="0"/>
-          <a:chOff x="0" y="0"/>
-          <a:chExt cx="0" cy="0"/>
-        </a:xfrm>
-      </p:grpSpPr>
-      <p:sp>
-        <p:nvSpPr>
-          <p:cNvPr id="2" name="Text 0"/>
-          <p:cNvSpPr/>
-          <p:nvPr>
-            <p:ph idx="100" type="title" hasCustomPrompt="1"/>
-          </p:nvPr>
-        </p:nvSpPr>
-        <p:spPr>
-          <a:xfrm>
-            <a:off x="548640" y="274320"/>
-            <a:ext cx="11091672" cy="960120"/>
-          </a:xfrm>
-          <a:prstGeom prst="rect">
-            <a:avLst/>
-          </a:prstGeom>
-          <a:noFill/>
-          <a:ln/>
-        </p:spPr>
-        <p:txBody>
-          <a:bodyPr wrap="square" lIns="0" tIns="0" rIns="0" bIns="0" rtlCol="0" anchor="ctr"/>
-          <a:lstStyle/>
-          <a:p>
-            <a:pPr algn="l" indent="0" marL="0">
-              <a:buNone/>
-            </a:pPr>
-            <a:r>
-              <a:rPr lang="en-US" sz="2600" b="1" dirty="0">
-                <a:solidFill>
-                  <a:schemeClr val="tx1"/>
-                </a:solidFill>
-              </a:rPr>
-              <a:t>7,000 contexts in four splits; the test seeds are never trained on</a:t>
-            </a:r>
-            <a:endParaRPr lang="en-US" sz="2600" dirty="0"/>
-          </a:p>
-        </p:txBody>
-      </p:sp>
-      <p:graphicFrame>
-        <p:nvGraphicFramePr>
-          <p:cNvPr id="10" name="splits table"/>
-          <p:cNvGraphicFramePr>
-            <a:graphicFrameLocks noGrp="1"/>
-          </p:cNvGraphicFramePr>
-          <p:nvPr>
-            <p:extLst>
-              <p:ext uri="{D42A27DB-BD31-4B8C-83A1-F6EECF244321}">
-                <p14:modId xmlns:p14="http://schemas.microsoft.com/office/powerpoint/2010/main" val="1579011935"/>
-              </p:ext>
-            </p:extLst>
-          </p:nvPr>
-        </p:nvGraphicFramePr>
-        <p:xfrm>
-          <a:off x="548640" y="1417320"/>
-          <a:ext cx="5120640" cy="914400"/>
-        </p:xfrm>
-        <a:graphic>
-          <a:graphicData uri="http://schemas.openxmlformats.org/drawingml/2006/table">
-            <a:tbl>
-              <a:tblPr/>
-              <a:tblGrid>
-                <a:gridCol w="1554480"/>
-                <a:gridCol w="1188720"/>
-                <a:gridCol w="1280160"/>
-                <a:gridCol w="1097280"/>
-              </a:tblGrid>
-              <a:tr h="384048">
-                <a:tc>
-                  <a:txBody>
-                    <a:bodyPr/>
-                    <a:lstStyle/>
-                    <a:p>
-                      <a:pPr algn="l" indent="0" marL="0">
-                        <a:buNone/>
-                      </a:pPr>
-                      <a:r>
-                        <a:rPr lang="en-US" sz="1200" b="1" dirty="0">
-                          <a:solidFill>
-                            <a:srgbClr val="FFFFFF"/>
-                          </a:solidFill>
-                          <a:latin typeface="Calibri" pitchFamily="34" charset="0"/>
-                          <a:ea typeface="Calibri" pitchFamily="34" charset="-122"/>
-                          <a:cs typeface="Calibri" pitchFamily="34" charset="-120"/>
-                        </a:rPr>
-                        <a:t>split</a:t>
-                      </a:r>
-                      <a:endParaRPr lang="en-US" sz="1200" dirty="0">
-                        <a:latin typeface="Calibri" charset="0"/>
-                        <a:ea typeface="Calibri" charset="0"/>
-                        <a:cs typeface="Calibri" charset="0"/>
-                      </a:endParaRPr>
-                    </a:p>
-                  </a:txBody>
-                  <a:tcPr marL="73152" marR="73152" marT="73152" marB="73152" anchor="ctr">
-                    <a:lnL w="9525" cap="flat" cmpd="sng" algn="ctr">
-                      <a:solidFill>
-                        <a:srgbClr val="E1E0D9"/>
-                      </a:solidFill>
-                      <a:prstDash val="solid"/>
-                      <a:round/>
-                      <a:headEnd type="none" w="med" len="med"/>
-                      <a:tailEnd type="none" w="med" len="med"/>
-                    </a:lnL>
-                    <a:lnR w="9525" cap="flat" cmpd="sng" algn="ctr">
-                      <a:solidFill>
-                        <a:srgbClr val="E1E0D9"/>
-                      </a:solidFill>
-                      <a:prstDash val="solid"/>
-                      <a:round/>
-                      <a:headEnd type="none" w="med" len="med"/>
-                      <a:tailEnd type="none" w="med" len="med"/>
-                    </a:lnR>
-                    <a:lnT w="9525" cap="flat" cmpd="sng" algn="ctr">
-                      <a:solidFill>
-                        <a:srgbClr val="E1E0D9"/>
-                      </a:solidFill>
-                      <a:prstDash val="solid"/>
-                      <a:round/>
-                      <a:headEnd type="none" w="med" len="med"/>
-                      <a:tailEnd type="none" w="med" len="med"/>
-                    </a:lnT>
-                    <a:lnB w="9525" cap="flat" cmpd="sng" algn="ctr">
-                      <a:solidFill>
-                        <a:srgbClr val="E1E0D9"/>
-                      </a:solidFill>
-                      <a:prstDash val="solid"/>
-                      <a:round/>
-                      <a:headEnd type="none" w="med" len="med"/>
-                      <a:tailEnd type="none" w="med" len="med"/>
-                    </a:lnB>
-                    <a:solidFill>
-                      <a:srgbClr val="1F2933"/>
-                    </a:solidFill>
-                  </a:tcPr>
-                </a:tc>
-                <a:tc>
-                  <a:txBody>
-                    <a:bodyPr/>
-                    <a:lstStyle/>
-                    <a:p>
-                      <a:pPr algn="r" indent="0" marL="0">
-                        <a:buNone/>
-                      </a:pPr>
-                      <a:r>
-                        <a:rPr lang="en-US" sz="1200" b="1" dirty="0">
-                          <a:solidFill>
-                            <a:srgbClr val="FFFFFF"/>
-                          </a:solidFill>
-                          <a:latin typeface="Calibri" pitchFamily="34" charset="0"/>
-                          <a:ea typeface="Calibri" pitchFamily="34" charset="-122"/>
-                          <a:cs typeface="Calibri" pitchFamily="34" charset="-120"/>
-                        </a:rPr>
-                        <a:t>contexts</a:t>
-                      </a:r>
-                      <a:endParaRPr lang="en-US" sz="1200" dirty="0">
-                        <a:latin typeface="Calibri" charset="0"/>
-                        <a:ea typeface="Calibri" charset="0"/>
-                        <a:cs typeface="Calibri" charset="0"/>
-                      </a:endParaRPr>
-                    </a:p>
-                  </a:txBody>
-                  <a:tcPr marL="73152" marR="73152" marT="73152" marB="73152" anchor="ctr">
-                    <a:lnL w="9525" cap="flat" cmpd="sng" algn="ctr">
-                      <a:solidFill>
-                        <a:srgbClr val="E1E0D9"/>
-                      </a:solidFill>
-                      <a:prstDash val="solid"/>
-                      <a:round/>
-                      <a:headEnd type="none" w="med" len="med"/>
-                      <a:tailEnd type="none" w="med" len="med"/>
-                    </a:lnL>
-                    <a:lnR w="9525" cap="flat" cmpd="sng" algn="ctr">
-                      <a:solidFill>
-                        <a:srgbClr val="E1E0D9"/>
-                      </a:solidFill>
-                      <a:prstDash val="solid"/>
-                      <a:round/>
-                      <a:headEnd type="none" w="med" len="med"/>
-                      <a:tailEnd type="none" w="med" len="med"/>
-                    </a:lnR>
-                    <a:lnT w="9525" cap="flat" cmpd="sng" algn="ctr">
-                      <a:solidFill>
-                        <a:srgbClr val="E1E0D9"/>
-                      </a:solidFill>
-                      <a:prstDash val="solid"/>
-                      <a:round/>
-                      <a:headEnd type="none" w="med" len="med"/>
-                      <a:tailEnd type="none" w="med" len="med"/>
-                    </a:lnT>
-                    <a:lnB w="9525" cap="flat" cmpd="sng" algn="ctr">
-                      <a:solidFill>
-                        <a:srgbClr val="E1E0D9"/>
-                      </a:solidFill>
-                      <a:prstDash val="solid"/>
-                      <a:round/>
-                      <a:headEnd type="none" w="med" len="med"/>
-                      <a:tailEnd type="none" w="med" len="med"/>
-                    </a:lnB>
-                    <a:solidFill>
-                      <a:srgbClr val="1F2933"/>
-                    </a:solidFill>
-                  </a:tcPr>
-                </a:tc>
-                <a:tc>
-                  <a:txBody>
-                    <a:bodyPr/>
-                    <a:lstStyle/>
-                    <a:p>
-                      <a:pPr algn="r" indent="0" marL="0">
-                        <a:buNone/>
-                      </a:pPr>
-                      <a:r>
-                        <a:rPr lang="en-US" sz="1200" b="1" dirty="0">
-                          <a:solidFill>
-                            <a:srgbClr val="FFFFFF"/>
-                          </a:solidFill>
-                          <a:latin typeface="Calibri" pitchFamily="34" charset="0"/>
-                          <a:ea typeface="Calibri" pitchFamily="34" charset="-122"/>
-                          <a:cs typeface="Calibri" pitchFamily="34" charset="-120"/>
-                        </a:rPr>
-                        <a:t>elements</a:t>
-                      </a:r>
-                      <a:endParaRPr lang="en-US" sz="1200" dirty="0">
-                        <a:latin typeface="Calibri" charset="0"/>
-                        <a:ea typeface="Calibri" charset="0"/>
-                        <a:cs typeface="Calibri" charset="0"/>
-                      </a:endParaRPr>
-                    </a:p>
-                  </a:txBody>
-                  <a:tcPr marL="73152" marR="73152" marT="73152" marB="73152" anchor="ctr">
-                    <a:lnL w="9525" cap="flat" cmpd="sng" algn="ctr">
-                      <a:solidFill>
-                        <a:srgbClr val="E1E0D9"/>
-                      </a:solidFill>
-                      <a:prstDash val="solid"/>
-                      <a:round/>
-                      <a:headEnd type="none" w="med" len="med"/>
-                      <a:tailEnd type="none" w="med" len="med"/>
-                    </a:lnL>
-                    <a:lnR w="9525" cap="flat" cmpd="sng" algn="ctr">
-                      <a:solidFill>
-                        <a:srgbClr val="E1E0D9"/>
-                      </a:solidFill>
-                      <a:prstDash val="solid"/>
-                      <a:round/>
-                      <a:headEnd type="none" w="med" len="med"/>
-                      <a:tailEnd type="none" w="med" len="med"/>
-                    </a:lnR>
-                    <a:lnT w="9525" cap="flat" cmpd="sng" algn="ctr">
-                      <a:solidFill>
-                        <a:srgbClr val="E1E0D9"/>
-                      </a:solidFill>
-                      <a:prstDash val="solid"/>
-                      <a:round/>
-                      <a:headEnd type="none" w="med" len="med"/>
-                      <a:tailEnd type="none" w="med" len="med"/>
-                    </a:lnT>
-                    <a:lnB w="9525" cap="flat" cmpd="sng" algn="ctr">
-                      <a:solidFill>
-                        <a:srgbClr val="E1E0D9"/>
-                      </a:solidFill>
-                      <a:prstDash val="solid"/>
-                      <a:round/>
-                      <a:headEnd type="none" w="med" len="med"/>
-                      <a:tailEnd type="none" w="med" len="med"/>
-                    </a:lnB>
-                    <a:solidFill>
-                      <a:srgbClr val="1F2933"/>
-                    </a:solidFill>
-                  </a:tcPr>
-                </a:tc>
-                <a:tc>
-                  <a:txBody>
-                    <a:bodyPr/>
-                    <a:lstStyle/>
-                    <a:p>
-                      <a:pPr algn="r" indent="0" marL="0">
-                        <a:buNone/>
-                      </a:pPr>
-                      <a:r>
-                        <a:rPr lang="en-US" sz="1200" b="1" dirty="0">
-                          <a:solidFill>
-                            <a:srgbClr val="FFFFFF"/>
-                          </a:solidFill>
-                          <a:latin typeface="Calibri" pitchFamily="34" charset="0"/>
-                          <a:ea typeface="Calibri" pitchFamily="34" charset="-122"/>
-                          <a:cs typeface="Calibri" pitchFamily="34" charset="-120"/>
-                        </a:rPr>
-                        <a:t>seed</a:t>
-                      </a:r>
-                      <a:endParaRPr lang="en-US" sz="1200" dirty="0">
-                        <a:latin typeface="Calibri" charset="0"/>
-                        <a:ea typeface="Calibri" charset="0"/>
-                        <a:cs typeface="Calibri" charset="0"/>
-                      </a:endParaRPr>
-                    </a:p>
-                  </a:txBody>
-                  <a:tcPr marL="73152" marR="73152" marT="73152" marB="73152" anchor="ctr">
-                    <a:lnL w="9525" cap="flat" cmpd="sng" algn="ctr">
-                      <a:solidFill>
-                        <a:srgbClr val="E1E0D9"/>
-                      </a:solidFill>
-                      <a:prstDash val="solid"/>
-                      <a:round/>
-                      <a:headEnd type="none" w="med" len="med"/>
-                      <a:tailEnd type="none" w="med" len="med"/>
-                    </a:lnL>
-                    <a:lnR w="9525" cap="flat" cmpd="sng" algn="ctr">
-                      <a:solidFill>
-                        <a:srgbClr val="E1E0D9"/>
-                      </a:solidFill>
-                      <a:prstDash val="solid"/>
-                      <a:round/>
-                      <a:headEnd type="none" w="med" len="med"/>
-                      <a:tailEnd type="none" w="med" len="med"/>
-                    </a:lnR>
-                    <a:lnT w="9525" cap="flat" cmpd="sng" algn="ctr">
-                      <a:solidFill>
-                        <a:srgbClr val="E1E0D9"/>
-                      </a:solidFill>
-                      <a:prstDash val="solid"/>
-                      <a:round/>
-                      <a:headEnd type="none" w="med" len="med"/>
-                      <a:tailEnd type="none" w="med" len="med"/>
-                    </a:lnT>
-                    <a:lnB w="9525" cap="flat" cmpd="sng" algn="ctr">
-                      <a:solidFill>
-                        <a:srgbClr val="E1E0D9"/>
-                      </a:solidFill>
-                      <a:prstDash val="solid"/>
-                      <a:round/>
-                      <a:headEnd type="none" w="med" len="med"/>
-                      <a:tailEnd type="none" w="med" len="med"/>
-                    </a:lnB>
-                    <a:solidFill>
-                      <a:srgbClr val="1F2933"/>
-                    </a:solidFill>
-                  </a:tcPr>
-                </a:tc>
-              </a:tr>
-              <a:tr h="384048">
-                <a:tc>
-                  <a:txBody>
-                    <a:bodyPr/>
-                    <a:lstStyle/>
-                    <a:p>
-                      <a:pPr algn="l" indent="0" marL="0">
-                        <a:buNone/>
-                      </a:pPr>
-                      <a:r>
-                        <a:rPr lang="en-US" sz="1200" dirty="0">
-                          <a:solidFill>
-                            <a:srgbClr val="0B0B0B"/>
-                          </a:solidFill>
-                          <a:latin typeface="Calibri" pitchFamily="34" charset="0"/>
-                          <a:ea typeface="Calibri" pitchFamily="34" charset="-122"/>
-                          <a:cs typeface="Calibri" pitchFamily="34" charset="-120"/>
-                        </a:rPr>
-                        <a:t>train</a:t>
-                      </a:r>
-                      <a:endParaRPr lang="en-US" sz="1200" dirty="0">
-                        <a:latin typeface="Calibri" charset="0"/>
-                        <a:ea typeface="Calibri" charset="0"/>
-                        <a:cs typeface="Calibri" charset="0"/>
-                      </a:endParaRPr>
-                    </a:p>
-                  </a:txBody>
-                  <a:tcPr marL="73152" marR="73152" marT="73152" marB="73152" anchor="ctr">
-                    <a:lnL w="9525" cap="flat" cmpd="sng" algn="ctr">
-                      <a:solidFill>
-                        <a:srgbClr val="E1E0D9"/>
-                      </a:solidFill>
-                      <a:prstDash val="solid"/>
-                      <a:round/>
-                      <a:headEnd type="none" w="med" len="med"/>
-                      <a:tailEnd type="none" w="med" len="med"/>
-                    </a:lnL>
-                    <a:lnR w="9525" cap="flat" cmpd="sng" algn="ctr">
-                      <a:solidFill>
-                        <a:srgbClr val="E1E0D9"/>
-                      </a:solidFill>
-                      <a:prstDash val="solid"/>
-                      <a:round/>
-                      <a:headEnd type="none" w="med" len="med"/>
-                      <a:tailEnd type="none" w="med" len="med"/>
-                    </a:lnR>
-                    <a:lnT w="9525" cap="flat" cmpd="sng" algn="ctr">
-                      <a:solidFill>
-                        <a:srgbClr val="E1E0D9"/>
-                      </a:solidFill>
-                      <a:prstDash val="solid"/>
-                      <a:round/>
-                      <a:headEnd type="none" w="med" len="med"/>
-                      <a:tailEnd type="none" w="med" len="med"/>
-                    </a:lnT>
-                    <a:lnB w="9525" cap="flat" cmpd="sng" algn="ctr">
-                      <a:solidFill>
-                        <a:srgbClr val="E1E0D9"/>
-                      </a:solidFill>
-                      <a:prstDash val="solid"/>
-                      <a:round/>
-                      <a:headEnd type="none" w="med" len="med"/>
-                      <a:tailEnd type="none" w="med" len="med"/>
-                    </a:lnB>
-                  </a:tcPr>
-                </a:tc>
-                <a:tc>
-                  <a:txBody>
-                    <a:bodyPr/>
-                    <a:lstStyle/>
-                    <a:p>
-                      <a:pPr algn="r" indent="0" marL="0">
-                        <a:buNone/>
-                      </a:pPr>
-                      <a:r>
-                        <a:rPr lang="en-US" sz="1200" dirty="0">
-                          <a:solidFill>
-                            <a:srgbClr val="0B0B0B"/>
-                          </a:solidFill>
-                          <a:latin typeface="Calibri" pitchFamily="34" charset="0"/>
-                          <a:ea typeface="Calibri" pitchFamily="34" charset="-122"/>
-                          <a:cs typeface="Calibri" pitchFamily="34" charset="-120"/>
-                        </a:rPr>
-                        <a:t>5,000</a:t>
-                      </a:r>
-                      <a:endParaRPr lang="en-US" sz="1200" dirty="0">
-                        <a:latin typeface="Calibri" charset="0"/>
-                        <a:ea typeface="Calibri" charset="0"/>
-                        <a:cs typeface="Calibri" charset="0"/>
-                      </a:endParaRPr>
-                    </a:p>
-                  </a:txBody>
-                  <a:tcPr marL="73152" marR="73152" marT="73152" marB="73152" anchor="ctr">
-                    <a:lnL w="9525" cap="flat" cmpd="sng" algn="ctr">
-                      <a:solidFill>
-                        <a:srgbClr val="E1E0D9"/>
-                      </a:solidFill>
-                      <a:prstDash val="solid"/>
-                      <a:round/>
-                      <a:headEnd type="none" w="med" len="med"/>
-                      <a:tailEnd type="none" w="med" len="med"/>
-                    </a:lnL>
-                    <a:lnR w="9525" cap="flat" cmpd="sng" algn="ctr">
-                      <a:solidFill>
-                        <a:srgbClr val="E1E0D9"/>
-                      </a:solidFill>
-                      <a:prstDash val="solid"/>
-                      <a:round/>
-                      <a:headEnd type="none" w="med" len="med"/>
-                      <a:tailEnd type="none" w="med" len="med"/>
-                    </a:lnR>
-                    <a:lnT w="9525" cap="flat" cmpd="sng" algn="ctr">
-                      <a:solidFill>
-                        <a:srgbClr val="E1E0D9"/>
-                      </a:solidFill>
-                      <a:prstDash val="solid"/>
-                      <a:round/>
-                      <a:headEnd type="none" w="med" len="med"/>
-                      <a:tailEnd type="none" w="med" len="med"/>
-                    </a:lnT>
-                    <a:lnB w="9525" cap="flat" cmpd="sng" algn="ctr">
-                      <a:solidFill>
-                        <a:srgbClr val="E1E0D9"/>
-                      </a:solidFill>
-                      <a:prstDash val="solid"/>
-                      <a:round/>
-                      <a:headEnd type="none" w="med" len="med"/>
-                      <a:tailEnd type="none" w="med" len="med"/>
-                    </a:lnB>
-                  </a:tcPr>
-                </a:tc>
-                <a:tc>
-                  <a:txBody>
-                    <a:bodyPr/>
-                    <a:lstStyle/>
-                    <a:p>
-                      <a:pPr algn="r" indent="0" marL="0">
-                        <a:buNone/>
-                      </a:pPr>
-                      <a:r>
-                        <a:rPr lang="en-US" sz="1200" dirty="0">
-                          <a:solidFill>
-                            <a:srgbClr val="0B0B0B"/>
-                          </a:solidFill>
-                          <a:latin typeface="Calibri" pitchFamily="34" charset="0"/>
-                          <a:ea typeface="Calibri" pitchFamily="34" charset="-122"/>
-                          <a:cs typeface="Calibri" pitchFamily="34" charset="-120"/>
-                        </a:rPr>
-                        <a:t>22,500</a:t>
-                      </a:r>
-                      <a:endParaRPr lang="en-US" sz="1200" dirty="0">
-                        <a:latin typeface="Calibri" charset="0"/>
-                        <a:ea typeface="Calibri" charset="0"/>
-                        <a:cs typeface="Calibri" charset="0"/>
-                      </a:endParaRPr>
-                    </a:p>
-                  </a:txBody>
-                  <a:tcPr marL="73152" marR="73152" marT="73152" marB="73152" anchor="ctr">
-                    <a:lnL w="9525" cap="flat" cmpd="sng" algn="ctr">
-                      <a:solidFill>
-                        <a:srgbClr val="E1E0D9"/>
-                      </a:solidFill>
-                      <a:prstDash val="solid"/>
-                      <a:round/>
-                      <a:headEnd type="none" w="med" len="med"/>
-                      <a:tailEnd type="none" w="med" len="med"/>
-                    </a:lnL>
-                    <a:lnR w="9525" cap="flat" cmpd="sng" algn="ctr">
-                      <a:solidFill>
-                        <a:srgbClr val="E1E0D9"/>
-                      </a:solidFill>
-                      <a:prstDash val="solid"/>
-                      <a:round/>
-                      <a:headEnd type="none" w="med" len="med"/>
-                      <a:tailEnd type="none" w="med" len="med"/>
-                    </a:lnR>
-                    <a:lnT w="9525" cap="flat" cmpd="sng" algn="ctr">
-                      <a:solidFill>
-                        <a:srgbClr val="E1E0D9"/>
-                      </a:solidFill>
-                      <a:prstDash val="solid"/>
-                      <a:round/>
-                      <a:headEnd type="none" w="med" len="med"/>
-                      <a:tailEnd type="none" w="med" len="med"/>
-                    </a:lnT>
-                    <a:lnB w="9525" cap="flat" cmpd="sng" algn="ctr">
-                      <a:solidFill>
-                        <a:srgbClr val="E1E0D9"/>
-                      </a:solidFill>
-                      <a:prstDash val="solid"/>
-                      <a:round/>
-                      <a:headEnd type="none" w="med" len="med"/>
-                      <a:tailEnd type="none" w="med" len="med"/>
-                    </a:lnB>
-                  </a:tcPr>
-                </a:tc>
-                <a:tc>
-                  <a:txBody>
-                    <a:bodyPr/>
-                    <a:lstStyle/>
-                    <a:p>
-                      <a:pPr algn="r" indent="0" marL="0">
-                        <a:buNone/>
-                      </a:pPr>
-                      <a:r>
-                        <a:rPr lang="en-US" sz="1200" dirty="0">
-                          <a:solidFill>
-                            <a:srgbClr val="0B0B0B"/>
-                          </a:solidFill>
-                          <a:latin typeface="Calibri" pitchFamily="34" charset="0"/>
-                          <a:ea typeface="Calibri" pitchFamily="34" charset="-122"/>
-                          <a:cs typeface="Calibri" pitchFamily="34" charset="-120"/>
-                        </a:rPr>
-                        <a:t>1000</a:t>
-                      </a:r>
-                      <a:endParaRPr lang="en-US" sz="1200" dirty="0">
-                        <a:latin typeface="Calibri" charset="0"/>
-                        <a:ea typeface="Calibri" charset="0"/>
-                        <a:cs typeface="Calibri" charset="0"/>
-                      </a:endParaRPr>
-                    </a:p>
-                  </a:txBody>
-                  <a:tcPr marL="73152" marR="73152" marT="73152" marB="73152" anchor="ctr">
-                    <a:lnL w="9525" cap="flat" cmpd="sng" algn="ctr">
-                      <a:solidFill>
-                        <a:srgbClr val="E1E0D9"/>
-                      </a:solidFill>
-                      <a:prstDash val="solid"/>
-                      <a:round/>
-                      <a:headEnd type="none" w="med" len="med"/>
-                      <a:tailEnd type="none" w="med" len="med"/>
-                    </a:lnL>
-                    <a:lnR w="9525" cap="flat" cmpd="sng" algn="ctr">
-                      <a:solidFill>
-                        <a:srgbClr val="E1E0D9"/>
-                      </a:solidFill>
-                      <a:prstDash val="solid"/>
-                      <a:round/>
-                      <a:headEnd type="none" w="med" len="med"/>
-                      <a:tailEnd type="none" w="med" len="med"/>
-                    </a:lnR>
-                    <a:lnT w="9525" cap="flat" cmpd="sng" algn="ctr">
-                      <a:solidFill>
-                        <a:srgbClr val="E1E0D9"/>
-                      </a:solidFill>
-                      <a:prstDash val="solid"/>
-                      <a:round/>
-                      <a:headEnd type="none" w="med" len="med"/>
-                      <a:tailEnd type="none" w="med" len="med"/>
-                    </a:lnT>
-                    <a:lnB w="9525" cap="flat" cmpd="sng" algn="ctr">
-                      <a:solidFill>
-                        <a:srgbClr val="E1E0D9"/>
-                      </a:solidFill>
-                      <a:prstDash val="solid"/>
-                      <a:round/>
-                      <a:headEnd type="none" w="med" len="med"/>
-                      <a:tailEnd type="none" w="med" len="med"/>
-                    </a:lnB>
-                  </a:tcPr>
-                </a:tc>
-              </a:tr>
-              <a:tr h="384048">
-                <a:tc>
-                  <a:txBody>
-                    <a:bodyPr/>
-                    <a:lstStyle/>
-                    <a:p>
-                      <a:pPr algn="l" indent="0" marL="0">
-                        <a:buNone/>
-                      </a:pPr>
-                      <a:r>
-                        <a:rPr lang="en-US" sz="1200" dirty="0">
-                          <a:solidFill>
-                            <a:srgbClr val="0B0B0B"/>
-                          </a:solidFill>
-                          <a:latin typeface="Calibri" pitchFamily="34" charset="0"/>
-                          <a:ea typeface="Calibri" pitchFamily="34" charset="-122"/>
-                          <a:cs typeface="Calibri" pitchFamily="34" charset="-120"/>
-                        </a:rPr>
-                        <a:t>validation</a:t>
-                      </a:r>
-                      <a:endParaRPr lang="en-US" sz="1200" dirty="0">
-                        <a:latin typeface="Calibri" charset="0"/>
-                        <a:ea typeface="Calibri" charset="0"/>
-                        <a:cs typeface="Calibri" charset="0"/>
-                      </a:endParaRPr>
-                    </a:p>
-                  </a:txBody>
-                  <a:tcPr marL="73152" marR="73152" marT="73152" marB="73152" anchor="ctr">
-                    <a:lnL w="9525" cap="flat" cmpd="sng" algn="ctr">
-                      <a:solidFill>
-                        <a:srgbClr val="E1E0D9"/>
-                      </a:solidFill>
-                      <a:prstDash val="solid"/>
-                      <a:round/>
-                      <a:headEnd type="none" w="med" len="med"/>
-                      <a:tailEnd type="none" w="med" len="med"/>
-                    </a:lnL>
-                    <a:lnR w="9525" cap="flat" cmpd="sng" algn="ctr">
-                      <a:solidFill>
-                        <a:srgbClr val="E1E0D9"/>
-                      </a:solidFill>
-                      <a:prstDash val="solid"/>
-                      <a:round/>
-                      <a:headEnd type="none" w="med" len="med"/>
-                      <a:tailEnd type="none" w="med" len="med"/>
-                    </a:lnR>
-                    <a:lnT w="9525" cap="flat" cmpd="sng" algn="ctr">
-                      <a:solidFill>
-                        <a:srgbClr val="E1E0D9"/>
-                      </a:solidFill>
-                      <a:prstDash val="solid"/>
-                      <a:round/>
-                      <a:headEnd type="none" w="med" len="med"/>
-                      <a:tailEnd type="none" w="med" len="med"/>
-                    </a:lnT>
-                    <a:lnB w="9525" cap="flat" cmpd="sng" algn="ctr">
-                      <a:solidFill>
-                        <a:srgbClr val="E1E0D9"/>
-                      </a:solidFill>
-                      <a:prstDash val="solid"/>
-                      <a:round/>
-                      <a:headEnd type="none" w="med" len="med"/>
-                      <a:tailEnd type="none" w="med" len="med"/>
-                    </a:lnB>
-                  </a:tcPr>
-                </a:tc>
-                <a:tc>
-                  <a:txBody>
-                    <a:bodyPr/>
-                    <a:lstStyle/>
-                    <a:p>
-                      <a:pPr algn="r" indent="0" marL="0">
-                        <a:buNone/>
-                      </a:pPr>
-                      <a:r>
-                        <a:rPr lang="en-US" sz="1200" dirty="0">
-                          <a:solidFill>
-                            <a:srgbClr val="0B0B0B"/>
-                          </a:solidFill>
-                          <a:latin typeface="Calibri" pitchFamily="34" charset="0"/>
-                          <a:ea typeface="Calibri" pitchFamily="34" charset="-122"/>
-                          <a:cs typeface="Calibri" pitchFamily="34" charset="-120"/>
-                        </a:rPr>
-                        <a:t>500</a:t>
-                      </a:r>
-                      <a:endParaRPr lang="en-US" sz="1200" dirty="0">
-                        <a:latin typeface="Calibri" charset="0"/>
-                        <a:ea typeface="Calibri" charset="0"/>
-                        <a:cs typeface="Calibri" charset="0"/>
-                      </a:endParaRPr>
-                    </a:p>
-                  </a:txBody>
-                  <a:tcPr marL="73152" marR="73152" marT="73152" marB="73152" anchor="ctr">
-                    <a:lnL w="9525" cap="flat" cmpd="sng" algn="ctr">
-                      <a:solidFill>
-                        <a:srgbClr val="E1E0D9"/>
-                      </a:solidFill>
-                      <a:prstDash val="solid"/>
-                      <a:round/>
-                      <a:headEnd type="none" w="med" len="med"/>
-                      <a:tailEnd type="none" w="med" len="med"/>
-                    </a:lnL>
-                    <a:lnR w="9525" cap="flat" cmpd="sng" algn="ctr">
-                      <a:solidFill>
-                        <a:srgbClr val="E1E0D9"/>
-                      </a:solidFill>
-                      <a:prstDash val="solid"/>
-                      <a:round/>
-                      <a:headEnd type="none" w="med" len="med"/>
-                      <a:tailEnd type="none" w="med" len="med"/>
-                    </a:lnR>
-                    <a:lnT w="9525" cap="flat" cmpd="sng" algn="ctr">
-                      <a:solidFill>
-                        <a:srgbClr val="E1E0D9"/>
-                      </a:solidFill>
-                      <a:prstDash val="solid"/>
-                      <a:round/>
-                      <a:headEnd type="none" w="med" len="med"/>
-                      <a:tailEnd type="none" w="med" len="med"/>
-                    </a:lnT>
-                    <a:lnB w="9525" cap="flat" cmpd="sng" algn="ctr">
-                      <a:solidFill>
-                        <a:srgbClr val="E1E0D9"/>
-                      </a:solidFill>
-                      <a:prstDash val="solid"/>
-                      <a:round/>
-                      <a:headEnd type="none" w="med" len="med"/>
-                      <a:tailEnd type="none" w="med" len="med"/>
-                    </a:lnB>
-                  </a:tcPr>
-                </a:tc>
-                <a:tc>
-                  <a:txBody>
-                    <a:bodyPr/>
-                    <a:lstStyle/>
-                    <a:p>
-                      <a:pPr algn="r" indent="0" marL="0">
-                        <a:buNone/>
-                      </a:pPr>
-                      <a:r>
-                        <a:rPr lang="en-US" sz="1200" dirty="0">
-                          <a:solidFill>
-                            <a:srgbClr val="0B0B0B"/>
-                          </a:solidFill>
-                          <a:latin typeface="Calibri" pitchFamily="34" charset="0"/>
-                          <a:ea typeface="Calibri" pitchFamily="34" charset="-122"/>
-                          <a:cs typeface="Calibri" pitchFamily="34" charset="-120"/>
-                        </a:rPr>
-                        <a:t>2,242</a:t>
-                      </a:r>
-                      <a:endParaRPr lang="en-US" sz="1200" dirty="0">
-                        <a:latin typeface="Calibri" charset="0"/>
-                        <a:ea typeface="Calibri" charset="0"/>
-                        <a:cs typeface="Calibri" charset="0"/>
-                      </a:endParaRPr>
-                    </a:p>
-                  </a:txBody>
-                  <a:tcPr marL="73152" marR="73152" marT="73152" marB="73152" anchor="ctr">
-                    <a:lnL w="9525" cap="flat" cmpd="sng" algn="ctr">
-                      <a:solidFill>
-                        <a:srgbClr val="E1E0D9"/>
-                      </a:solidFill>
-                      <a:prstDash val="solid"/>
-                      <a:round/>
-                      <a:headEnd type="none" w="med" len="med"/>
-                      <a:tailEnd type="none" w="med" len="med"/>
-                    </a:lnL>
-                    <a:lnR w="9525" cap="flat" cmpd="sng" algn="ctr">
-                      <a:solidFill>
-                        <a:srgbClr val="E1E0D9"/>
-                      </a:solidFill>
-                      <a:prstDash val="solid"/>
-                      <a:round/>
-                      <a:headEnd type="none" w="med" len="med"/>
-                      <a:tailEnd type="none" w="med" len="med"/>
-                    </a:lnR>
-                    <a:lnT w="9525" cap="flat" cmpd="sng" algn="ctr">
-                      <a:solidFill>
-                        <a:srgbClr val="E1E0D9"/>
-                      </a:solidFill>
-                      <a:prstDash val="solid"/>
-                      <a:round/>
-                      <a:headEnd type="none" w="med" len="med"/>
-                      <a:tailEnd type="none" w="med" len="med"/>
-                    </a:lnT>
-                    <a:lnB w="9525" cap="flat" cmpd="sng" algn="ctr">
-                      <a:solidFill>
-                        <a:srgbClr val="E1E0D9"/>
-                      </a:solidFill>
-                      <a:prstDash val="solid"/>
-                      <a:round/>
-                      <a:headEnd type="none" w="med" len="med"/>
-                      <a:tailEnd type="none" w="med" len="med"/>
-                    </a:lnB>
-                  </a:tcPr>
-                </a:tc>
-                <a:tc>
-                  <a:txBody>
-                    <a:bodyPr/>
-                    <a:lstStyle/>
-                    <a:p>
-                      <a:pPr algn="r" indent="0" marL="0">
-                        <a:buNone/>
-                      </a:pPr>
-                      <a:r>
-                        <a:rPr lang="en-US" sz="1200" dirty="0">
-                          <a:solidFill>
-                            <a:srgbClr val="0B0B0B"/>
-                          </a:solidFill>
-                          <a:latin typeface="Calibri" pitchFamily="34" charset="0"/>
-                          <a:ea typeface="Calibri" pitchFamily="34" charset="-122"/>
-                          <a:cs typeface="Calibri" pitchFamily="34" charset="-120"/>
-                        </a:rPr>
-                        <a:t>2000</a:t>
-                      </a:r>
-                      <a:endParaRPr lang="en-US" sz="1200" dirty="0">
-                        <a:latin typeface="Calibri" charset="0"/>
-                        <a:ea typeface="Calibri" charset="0"/>
-                        <a:cs typeface="Calibri" charset="0"/>
-                      </a:endParaRPr>
-                    </a:p>
-                  </a:txBody>
-                  <a:tcPr marL="73152" marR="73152" marT="73152" marB="73152" anchor="ctr">
-                    <a:lnL w="9525" cap="flat" cmpd="sng" algn="ctr">
-                      <a:solidFill>
-                        <a:srgbClr val="E1E0D9"/>
-                      </a:solidFill>
-                      <a:prstDash val="solid"/>
-                      <a:round/>
-                      <a:headEnd type="none" w="med" len="med"/>
-                      <a:tailEnd type="none" w="med" len="med"/>
-                    </a:lnL>
-                    <a:lnR w="9525" cap="flat" cmpd="sng" algn="ctr">
-                      <a:solidFill>
-                        <a:srgbClr val="E1E0D9"/>
-                      </a:solidFill>
-                      <a:prstDash val="solid"/>
-                      <a:round/>
-                      <a:headEnd type="none" w="med" len="med"/>
-                      <a:tailEnd type="none" w="med" len="med"/>
-                    </a:lnR>
-                    <a:lnT w="9525" cap="flat" cmpd="sng" algn="ctr">
-                      <a:solidFill>
-                        <a:srgbClr val="E1E0D9"/>
-                      </a:solidFill>
-                      <a:prstDash val="solid"/>
-                      <a:round/>
-                      <a:headEnd type="none" w="med" len="med"/>
-                      <a:tailEnd type="none" w="med" len="med"/>
-                    </a:lnT>
-                    <a:lnB w="9525" cap="flat" cmpd="sng" algn="ctr">
-                      <a:solidFill>
-                        <a:srgbClr val="E1E0D9"/>
-                      </a:solidFill>
-                      <a:prstDash val="solid"/>
-                      <a:round/>
-                      <a:headEnd type="none" w="med" len="med"/>
-                      <a:tailEnd type="none" w="med" len="med"/>
-                    </a:lnB>
-                  </a:tcPr>
-                </a:tc>
-              </a:tr>
-              <a:tr h="384048">
-                <a:tc>
-                  <a:txBody>
-                    <a:bodyPr/>
-                    <a:lstStyle/>
-                    <a:p>
-                      <a:pPr algn="l" indent="0" marL="0">
-                        <a:buNone/>
-                      </a:pPr>
-                      <a:r>
-                        <a:rPr lang="en-US" sz="1200" dirty="0">
-                          <a:solidFill>
-                            <a:srgbClr val="0B0B0B"/>
-                          </a:solidFill>
-                          <a:latin typeface="Calibri" pitchFamily="34" charset="0"/>
-                          <a:ea typeface="Calibri" pitchFamily="34" charset="-122"/>
-                          <a:cs typeface="Calibri" pitchFamily="34" charset="-120"/>
-                        </a:rPr>
-                        <a:t>test</a:t>
-                      </a:r>
-                      <a:endParaRPr lang="en-US" sz="1200" dirty="0">
-                        <a:latin typeface="Calibri" charset="0"/>
-                        <a:ea typeface="Calibri" charset="0"/>
-                        <a:cs typeface="Calibri" charset="0"/>
-                      </a:endParaRPr>
-                    </a:p>
-                  </a:txBody>
-                  <a:tcPr marL="73152" marR="73152" marT="73152" marB="73152" anchor="ctr">
-                    <a:lnL w="9525" cap="flat" cmpd="sng" algn="ctr">
-                      <a:solidFill>
-                        <a:srgbClr val="E1E0D9"/>
-                      </a:solidFill>
-                      <a:prstDash val="solid"/>
-                      <a:round/>
-                      <a:headEnd type="none" w="med" len="med"/>
-                      <a:tailEnd type="none" w="med" len="med"/>
-                    </a:lnL>
-                    <a:lnR w="9525" cap="flat" cmpd="sng" algn="ctr">
-                      <a:solidFill>
-                        <a:srgbClr val="E1E0D9"/>
-                      </a:solidFill>
-                      <a:prstDash val="solid"/>
-                      <a:round/>
-                      <a:headEnd type="none" w="med" len="med"/>
-                      <a:tailEnd type="none" w="med" len="med"/>
-                    </a:lnR>
-                    <a:lnT w="9525" cap="flat" cmpd="sng" algn="ctr">
-                      <a:solidFill>
-                        <a:srgbClr val="E1E0D9"/>
-                      </a:solidFill>
-                      <a:prstDash val="solid"/>
-                      <a:round/>
-                      <a:headEnd type="none" w="med" len="med"/>
-                      <a:tailEnd type="none" w="med" len="med"/>
-                    </a:lnT>
-                    <a:lnB w="9525" cap="flat" cmpd="sng" algn="ctr">
-                      <a:solidFill>
-                        <a:srgbClr val="E1E0D9"/>
-                      </a:solidFill>
-                      <a:prstDash val="solid"/>
-                      <a:round/>
-                      <a:headEnd type="none" w="med" len="med"/>
-                      <a:tailEnd type="none" w="med" len="med"/>
-                    </a:lnB>
-                  </a:tcPr>
-                </a:tc>
-                <a:tc>
-                  <a:txBody>
-                    <a:bodyPr/>
-                    <a:lstStyle/>
-                    <a:p>
-                      <a:pPr algn="r" indent="0" marL="0">
-                        <a:buNone/>
-                      </a:pPr>
-                      <a:r>
-                        <a:rPr lang="en-US" sz="1200" dirty="0">
-                          <a:solidFill>
-                            <a:srgbClr val="0B0B0B"/>
-                          </a:solidFill>
-                          <a:latin typeface="Calibri" pitchFamily="34" charset="0"/>
-                          <a:ea typeface="Calibri" pitchFamily="34" charset="-122"/>
-                          <a:cs typeface="Calibri" pitchFamily="34" charset="-120"/>
-                        </a:rPr>
-                        <a:t>500</a:t>
-                      </a:r>
-                      <a:endParaRPr lang="en-US" sz="1200" dirty="0">
-                        <a:latin typeface="Calibri" charset="0"/>
-                        <a:ea typeface="Calibri" charset="0"/>
-                        <a:cs typeface="Calibri" charset="0"/>
-                      </a:endParaRPr>
-                    </a:p>
-                  </a:txBody>
-                  <a:tcPr marL="73152" marR="73152" marT="73152" marB="73152" anchor="ctr">
-                    <a:lnL w="9525" cap="flat" cmpd="sng" algn="ctr">
-                      <a:solidFill>
-                        <a:srgbClr val="E1E0D9"/>
-                      </a:solidFill>
-                      <a:prstDash val="solid"/>
-                      <a:round/>
-                      <a:headEnd type="none" w="med" len="med"/>
-                      <a:tailEnd type="none" w="med" len="med"/>
-                    </a:lnL>
-                    <a:lnR w="9525" cap="flat" cmpd="sng" algn="ctr">
-                      <a:solidFill>
-                        <a:srgbClr val="E1E0D9"/>
-                      </a:solidFill>
-                      <a:prstDash val="solid"/>
-                      <a:round/>
-                      <a:headEnd type="none" w="med" len="med"/>
-                      <a:tailEnd type="none" w="med" len="med"/>
-                    </a:lnR>
-                    <a:lnT w="9525" cap="flat" cmpd="sng" algn="ctr">
-                      <a:solidFill>
-                        <a:srgbClr val="E1E0D9"/>
-                      </a:solidFill>
-                      <a:prstDash val="solid"/>
-                      <a:round/>
-                      <a:headEnd type="none" w="med" len="med"/>
-                      <a:tailEnd type="none" w="med" len="med"/>
-                    </a:lnT>
-                    <a:lnB w="9525" cap="flat" cmpd="sng" algn="ctr">
-                      <a:solidFill>
-                        <a:srgbClr val="E1E0D9"/>
-                      </a:solidFill>
-                      <a:prstDash val="solid"/>
-                      <a:round/>
-                      <a:headEnd type="none" w="med" len="med"/>
-                      <a:tailEnd type="none" w="med" len="med"/>
-                    </a:lnB>
-                  </a:tcPr>
-                </a:tc>
-                <a:tc>
-                  <a:txBody>
-                    <a:bodyPr/>
-                    <a:lstStyle/>
-                    <a:p>
-                      <a:pPr algn="r" indent="0" marL="0">
-                        <a:buNone/>
-                      </a:pPr>
-                      <a:r>
-                        <a:rPr lang="en-US" sz="1200" dirty="0">
-                          <a:solidFill>
-                            <a:srgbClr val="0B0B0B"/>
-                          </a:solidFill>
-                          <a:latin typeface="Calibri" pitchFamily="34" charset="0"/>
-                          <a:ea typeface="Calibri" pitchFamily="34" charset="-122"/>
-                          <a:cs typeface="Calibri" pitchFamily="34" charset="-120"/>
-                        </a:rPr>
-                        <a:t>2,242</a:t>
-                      </a:r>
-                      <a:endParaRPr lang="en-US" sz="1200" dirty="0">
-                        <a:latin typeface="Calibri" charset="0"/>
-                        <a:ea typeface="Calibri" charset="0"/>
-                        <a:cs typeface="Calibri" charset="0"/>
-                      </a:endParaRPr>
-                    </a:p>
-                  </a:txBody>
-                  <a:tcPr marL="73152" marR="73152" marT="73152" marB="73152" anchor="ctr">
-                    <a:lnL w="9525" cap="flat" cmpd="sng" algn="ctr">
-                      <a:solidFill>
-                        <a:srgbClr val="E1E0D9"/>
-                      </a:solidFill>
-                      <a:prstDash val="solid"/>
-                      <a:round/>
-                      <a:headEnd type="none" w="med" len="med"/>
-                      <a:tailEnd type="none" w="med" len="med"/>
-                    </a:lnL>
-                    <a:lnR w="9525" cap="flat" cmpd="sng" algn="ctr">
-                      <a:solidFill>
-                        <a:srgbClr val="E1E0D9"/>
-                      </a:solidFill>
-                      <a:prstDash val="solid"/>
-                      <a:round/>
-                      <a:headEnd type="none" w="med" len="med"/>
-                      <a:tailEnd type="none" w="med" len="med"/>
-                    </a:lnR>
-                    <a:lnT w="9525" cap="flat" cmpd="sng" algn="ctr">
-                      <a:solidFill>
-                        <a:srgbClr val="E1E0D9"/>
-                      </a:solidFill>
-                      <a:prstDash val="solid"/>
-                      <a:round/>
-                      <a:headEnd type="none" w="med" len="med"/>
-                      <a:tailEnd type="none" w="med" len="med"/>
-                    </a:lnT>
-                    <a:lnB w="9525" cap="flat" cmpd="sng" algn="ctr">
-                      <a:solidFill>
-                        <a:srgbClr val="E1E0D9"/>
-                      </a:solidFill>
-                      <a:prstDash val="solid"/>
-                      <a:round/>
-                      <a:headEnd type="none" w="med" len="med"/>
-                      <a:tailEnd type="none" w="med" len="med"/>
-                    </a:lnB>
-                  </a:tcPr>
-                </a:tc>
-                <a:tc>
-                  <a:txBody>
-                    <a:bodyPr/>
-                    <a:lstStyle/>
-                    <a:p>
-                      <a:pPr algn="r" indent="0" marL="0">
-                        <a:buNone/>
-                      </a:pPr>
-                      <a:r>
-                        <a:rPr lang="en-US" sz="1200" dirty="0">
-                          <a:solidFill>
-                            <a:srgbClr val="0B0B0B"/>
-                          </a:solidFill>
-                          <a:latin typeface="Calibri" pitchFamily="34" charset="0"/>
-                          <a:ea typeface="Calibri" pitchFamily="34" charset="-122"/>
-                          <a:cs typeface="Calibri" pitchFamily="34" charset="-120"/>
-                        </a:rPr>
-                        <a:t>3000</a:t>
-                      </a:r>
-                      <a:endParaRPr lang="en-US" sz="1200" dirty="0">
-                        <a:latin typeface="Calibri" charset="0"/>
-                        <a:ea typeface="Calibri" charset="0"/>
-                        <a:cs typeface="Calibri" charset="0"/>
-                      </a:endParaRPr>
-                    </a:p>
-                  </a:txBody>
-                  <a:tcPr marL="73152" marR="73152" marT="73152" marB="73152" anchor="ctr">
-                    <a:lnL w="9525" cap="flat" cmpd="sng" algn="ctr">
-                      <a:solidFill>
-                        <a:srgbClr val="E1E0D9"/>
-                      </a:solidFill>
-                      <a:prstDash val="solid"/>
-                      <a:round/>
-                      <a:headEnd type="none" w="med" len="med"/>
-                      <a:tailEnd type="none" w="med" len="med"/>
-                    </a:lnL>
-                    <a:lnR w="9525" cap="flat" cmpd="sng" algn="ctr">
-                      <a:solidFill>
-                        <a:srgbClr val="E1E0D9"/>
-                      </a:solidFill>
-                      <a:prstDash val="solid"/>
-                      <a:round/>
-                      <a:headEnd type="none" w="med" len="med"/>
-                      <a:tailEnd type="none" w="med" len="med"/>
-                    </a:lnR>
-                    <a:lnT w="9525" cap="flat" cmpd="sng" algn="ctr">
-                      <a:solidFill>
-                        <a:srgbClr val="E1E0D9"/>
-                      </a:solidFill>
-                      <a:prstDash val="solid"/>
-                      <a:round/>
-                      <a:headEnd type="none" w="med" len="med"/>
-                      <a:tailEnd type="none" w="med" len="med"/>
-                    </a:lnT>
-                    <a:lnB w="9525" cap="flat" cmpd="sng" algn="ctr">
-                      <a:solidFill>
-                        <a:srgbClr val="E1E0D9"/>
-                      </a:solidFill>
-                      <a:prstDash val="solid"/>
-                      <a:round/>
-                      <a:headEnd type="none" w="med" len="med"/>
-                      <a:tailEnd type="none" w="med" len="med"/>
-                    </a:lnB>
-                  </a:tcPr>
-                </a:tc>
-              </a:tr>
-              <a:tr h="384048">
-                <a:tc>
-                  <a:txBody>
-                    <a:bodyPr/>
-                    <a:lstStyle/>
-                    <a:p>
-                      <a:pPr algn="l" indent="0" marL="0">
-                        <a:buNone/>
-                      </a:pPr>
-                      <a:r>
-                        <a:rPr lang="en-US" sz="1200" dirty="0">
-                          <a:solidFill>
-                            <a:srgbClr val="0B0B0B"/>
-                          </a:solidFill>
-                          <a:latin typeface="Calibri" pitchFamily="34" charset="0"/>
-                          <a:ea typeface="Calibri" pitchFamily="34" charset="-122"/>
-                          <a:cs typeface="Calibri" pitchFamily="34" charset="-120"/>
-                        </a:rPr>
-                        <a:t>benchmark</a:t>
-                      </a:r>
-                      <a:endParaRPr lang="en-US" sz="1200" dirty="0">
-                        <a:latin typeface="Calibri" charset="0"/>
-                        <a:ea typeface="Calibri" charset="0"/>
-                        <a:cs typeface="Calibri" charset="0"/>
-                      </a:endParaRPr>
-                    </a:p>
-                  </a:txBody>
-                  <a:tcPr marL="73152" marR="73152" marT="73152" marB="73152" anchor="ctr">
-                    <a:lnL w="9525" cap="flat" cmpd="sng" algn="ctr">
-                      <a:solidFill>
-                        <a:srgbClr val="E1E0D9"/>
-                      </a:solidFill>
-                      <a:prstDash val="solid"/>
-                      <a:round/>
-                      <a:headEnd type="none" w="med" len="med"/>
-                      <a:tailEnd type="none" w="med" len="med"/>
-                    </a:lnL>
-                    <a:lnR w="9525" cap="flat" cmpd="sng" algn="ctr">
-                      <a:solidFill>
-                        <a:srgbClr val="E1E0D9"/>
-                      </a:solidFill>
-                      <a:prstDash val="solid"/>
-                      <a:round/>
-                      <a:headEnd type="none" w="med" len="med"/>
-                      <a:tailEnd type="none" w="med" len="med"/>
-                    </a:lnR>
-                    <a:lnT w="9525" cap="flat" cmpd="sng" algn="ctr">
-                      <a:solidFill>
-                        <a:srgbClr val="E1E0D9"/>
-                      </a:solidFill>
-                      <a:prstDash val="solid"/>
-                      <a:round/>
-                      <a:headEnd type="none" w="med" len="med"/>
-                      <a:tailEnd type="none" w="med" len="med"/>
-                    </a:lnT>
-                    <a:lnB w="9525" cap="flat" cmpd="sng" algn="ctr">
-                      <a:solidFill>
-                        <a:srgbClr val="E1E0D9"/>
-                      </a:solidFill>
-                      <a:prstDash val="solid"/>
-                      <a:round/>
-                      <a:headEnd type="none" w="med" len="med"/>
-                      <a:tailEnd type="none" w="med" len="med"/>
-                    </a:lnB>
-                  </a:tcPr>
-                </a:tc>
-                <a:tc>
-                  <a:txBody>
-                    <a:bodyPr/>
-                    <a:lstStyle/>
-                    <a:p>
-                      <a:pPr algn="r" indent="0" marL="0">
-                        <a:buNone/>
-                      </a:pPr>
-                      <a:r>
-                        <a:rPr lang="en-US" sz="1200" dirty="0">
-                          <a:solidFill>
-                            <a:srgbClr val="0B0B0B"/>
-                          </a:solidFill>
-                          <a:latin typeface="Calibri" pitchFamily="34" charset="0"/>
-                          <a:ea typeface="Calibri" pitchFamily="34" charset="-122"/>
-                          <a:cs typeface="Calibri" pitchFamily="34" charset="-120"/>
-                        </a:rPr>
-                        <a:t>1,000</a:t>
-                      </a:r>
-                      <a:endParaRPr lang="en-US" sz="1200" dirty="0">
-                        <a:latin typeface="Calibri" charset="0"/>
-                        <a:ea typeface="Calibri" charset="0"/>
-                        <a:cs typeface="Calibri" charset="0"/>
-                      </a:endParaRPr>
-                    </a:p>
-                  </a:txBody>
-                  <a:tcPr marL="73152" marR="73152" marT="73152" marB="73152" anchor="ctr">
-                    <a:lnL w="9525" cap="flat" cmpd="sng" algn="ctr">
-                      <a:solidFill>
-                        <a:srgbClr val="E1E0D9"/>
-                      </a:solidFill>
-                      <a:prstDash val="solid"/>
-                      <a:round/>
-                      <a:headEnd type="none" w="med" len="med"/>
-                      <a:tailEnd type="none" w="med" len="med"/>
-                    </a:lnL>
-                    <a:lnR w="9525" cap="flat" cmpd="sng" algn="ctr">
-                      <a:solidFill>
-                        <a:srgbClr val="E1E0D9"/>
-                      </a:solidFill>
-                      <a:prstDash val="solid"/>
-                      <a:round/>
-                      <a:headEnd type="none" w="med" len="med"/>
-                      <a:tailEnd type="none" w="med" len="med"/>
-                    </a:lnR>
-                    <a:lnT w="9525" cap="flat" cmpd="sng" algn="ctr">
-                      <a:solidFill>
-                        <a:srgbClr val="E1E0D9"/>
-                      </a:solidFill>
-                      <a:prstDash val="solid"/>
-                      <a:round/>
-                      <a:headEnd type="none" w="med" len="med"/>
-                      <a:tailEnd type="none" w="med" len="med"/>
-                    </a:lnT>
-                    <a:lnB w="9525" cap="flat" cmpd="sng" algn="ctr">
-                      <a:solidFill>
-                        <a:srgbClr val="E1E0D9"/>
-                      </a:solidFill>
-                      <a:prstDash val="solid"/>
-                      <a:round/>
-                      <a:headEnd type="none" w="med" len="med"/>
-                      <a:tailEnd type="none" w="med" len="med"/>
-                    </a:lnB>
-                  </a:tcPr>
-                </a:tc>
-                <a:tc>
-                  <a:txBody>
-                    <a:bodyPr/>
-                    <a:lstStyle/>
-                    <a:p>
-                      <a:pPr algn="r" indent="0" marL="0">
-                        <a:buNone/>
-                      </a:pPr>
-                      <a:r>
-                        <a:rPr lang="en-US" sz="1200" dirty="0">
-                          <a:solidFill>
-                            <a:srgbClr val="0B0B0B"/>
-                          </a:solidFill>
-                          <a:latin typeface="Calibri" pitchFamily="34" charset="0"/>
-                          <a:ea typeface="Calibri" pitchFamily="34" charset="-122"/>
-                          <a:cs typeface="Calibri" pitchFamily="34" charset="-120"/>
-                        </a:rPr>
-                        <a:t>4,500</a:t>
-                      </a:r>
-                      <a:endParaRPr lang="en-US" sz="1200" dirty="0">
-                        <a:latin typeface="Calibri" charset="0"/>
-                        <a:ea typeface="Calibri" charset="0"/>
-                        <a:cs typeface="Calibri" charset="0"/>
-                      </a:endParaRPr>
-                    </a:p>
-                  </a:txBody>
-                  <a:tcPr marL="73152" marR="73152" marT="73152" marB="73152" anchor="ctr">
-                    <a:lnL w="9525" cap="flat" cmpd="sng" algn="ctr">
-                      <a:solidFill>
-                        <a:srgbClr val="E1E0D9"/>
-                      </a:solidFill>
-                      <a:prstDash val="solid"/>
-                      <a:round/>
-                      <a:headEnd type="none" w="med" len="med"/>
-                      <a:tailEnd type="none" w="med" len="med"/>
-                    </a:lnL>
-                    <a:lnR w="9525" cap="flat" cmpd="sng" algn="ctr">
-                      <a:solidFill>
-                        <a:srgbClr val="E1E0D9"/>
-                      </a:solidFill>
-                      <a:prstDash val="solid"/>
-                      <a:round/>
-                      <a:headEnd type="none" w="med" len="med"/>
-                      <a:tailEnd type="none" w="med" len="med"/>
-                    </a:lnR>
-                    <a:lnT w="9525" cap="flat" cmpd="sng" algn="ctr">
-                      <a:solidFill>
-                        <a:srgbClr val="E1E0D9"/>
-                      </a:solidFill>
-                      <a:prstDash val="solid"/>
-                      <a:round/>
-                      <a:headEnd type="none" w="med" len="med"/>
-                      <a:tailEnd type="none" w="med" len="med"/>
-                    </a:lnT>
-                    <a:lnB w="9525" cap="flat" cmpd="sng" algn="ctr">
-                      <a:solidFill>
-                        <a:srgbClr val="E1E0D9"/>
-                      </a:solidFill>
-                      <a:prstDash val="solid"/>
-                      <a:round/>
-                      <a:headEnd type="none" w="med" len="med"/>
-                      <a:tailEnd type="none" w="med" len="med"/>
-                    </a:lnB>
-                  </a:tcPr>
-                </a:tc>
-                <a:tc>
-                  <a:txBody>
-                    <a:bodyPr/>
-                    <a:lstStyle/>
-                    <a:p>
-                      <a:pPr algn="r" indent="0" marL="0">
-                        <a:buNone/>
-                      </a:pPr>
-                      <a:r>
-                        <a:rPr lang="en-US" sz="1200" dirty="0">
-                          <a:solidFill>
-                            <a:srgbClr val="0B0B0B"/>
-                          </a:solidFill>
-                          <a:latin typeface="Calibri" pitchFamily="34" charset="0"/>
-                          <a:ea typeface="Calibri" pitchFamily="34" charset="-122"/>
-                          <a:cs typeface="Calibri" pitchFamily="34" charset="-120"/>
-                        </a:rPr>
-                        <a:t>42</a:t>
-                      </a:r>
-                      <a:endParaRPr lang="en-US" sz="1200" dirty="0">
-                        <a:latin typeface="Calibri" charset="0"/>
-                        <a:ea typeface="Calibri" charset="0"/>
-                        <a:cs typeface="Calibri" charset="0"/>
-                      </a:endParaRPr>
-                    </a:p>
-                  </a:txBody>
-                  <a:tcPr marL="73152" marR="73152" marT="73152" marB="73152" anchor="ctr">
-                    <a:lnL w="9525" cap="flat" cmpd="sng" algn="ctr">
-                      <a:solidFill>
-                        <a:srgbClr val="E1E0D9"/>
-                      </a:solidFill>
-                      <a:prstDash val="solid"/>
-                      <a:round/>
-                      <a:headEnd type="none" w="med" len="med"/>
-                      <a:tailEnd type="none" w="med" len="med"/>
-                    </a:lnL>
-                    <a:lnR w="9525" cap="flat" cmpd="sng" algn="ctr">
-                      <a:solidFill>
-                        <a:srgbClr val="E1E0D9"/>
-                      </a:solidFill>
-                      <a:prstDash val="solid"/>
-                      <a:round/>
-                      <a:headEnd type="none" w="med" len="med"/>
-                      <a:tailEnd type="none" w="med" len="med"/>
-                    </a:lnR>
-                    <a:lnT w="9525" cap="flat" cmpd="sng" algn="ctr">
-                      <a:solidFill>
-                        <a:srgbClr val="E1E0D9"/>
-                      </a:solidFill>
-                      <a:prstDash val="solid"/>
-                      <a:round/>
-                      <a:headEnd type="none" w="med" len="med"/>
-                      <a:tailEnd type="none" w="med" len="med"/>
-                    </a:lnT>
-                    <a:lnB w="9525" cap="flat" cmpd="sng" algn="ctr">
-                      <a:solidFill>
-                        <a:srgbClr val="E1E0D9"/>
-                      </a:solidFill>
-                      <a:prstDash val="solid"/>
-                      <a:round/>
-                      <a:headEnd type="none" w="med" len="med"/>
-                      <a:tailEnd type="none" w="med" len="med"/>
-                    </a:lnB>
-                  </a:tcPr>
-                </a:tc>
-              </a:tr>
-              <a:tr h="384048">
-                <a:tc>
-                  <a:txBody>
-                    <a:bodyPr/>
-                    <a:lstStyle/>
-                    <a:p>
-                      <a:pPr algn="l" indent="0" marL="0">
-                        <a:buNone/>
-                      </a:pPr>
-                      <a:r>
-                        <a:rPr lang="en-US" sz="1200" b="1" dirty="0">
-                          <a:solidFill>
-                            <a:srgbClr val="0B0B0B"/>
-                          </a:solidFill>
-                          <a:latin typeface="Calibri" pitchFamily="34" charset="0"/>
-                          <a:ea typeface="Calibri" pitchFamily="34" charset="-122"/>
-                          <a:cs typeface="Calibri" pitchFamily="34" charset="-120"/>
-                        </a:rPr>
-                        <a:t>total</a:t>
-                      </a:r>
-                      <a:endParaRPr lang="en-US" sz="1200" dirty="0">
-                        <a:latin typeface="Calibri" charset="0"/>
-                        <a:ea typeface="Calibri" charset="0"/>
-                        <a:cs typeface="Calibri" charset="0"/>
-                      </a:endParaRPr>
-                    </a:p>
-                  </a:txBody>
-                  <a:tcPr marL="73152" marR="73152" marT="73152" marB="73152" anchor="ctr">
-                    <a:lnL w="9525" cap="flat" cmpd="sng" algn="ctr">
-                      <a:solidFill>
-                        <a:srgbClr val="E1E0D9"/>
-                      </a:solidFill>
-                      <a:prstDash val="solid"/>
-                      <a:round/>
-                      <a:headEnd type="none" w="med" len="med"/>
-                      <a:tailEnd type="none" w="med" len="med"/>
-                    </a:lnL>
-                    <a:lnR w="9525" cap="flat" cmpd="sng" algn="ctr">
-                      <a:solidFill>
-                        <a:srgbClr val="E1E0D9"/>
-                      </a:solidFill>
-                      <a:prstDash val="solid"/>
-                      <a:round/>
-                      <a:headEnd type="none" w="med" len="med"/>
-                      <a:tailEnd type="none" w="med" len="med"/>
-                    </a:lnR>
-                    <a:lnT w="9525" cap="flat" cmpd="sng" algn="ctr">
-                      <a:solidFill>
-                        <a:srgbClr val="E1E0D9"/>
-                      </a:solidFill>
-                      <a:prstDash val="solid"/>
-                      <a:round/>
-                      <a:headEnd type="none" w="med" len="med"/>
-                      <a:tailEnd type="none" w="med" len="med"/>
-                    </a:lnT>
-                    <a:lnB w="9525" cap="flat" cmpd="sng" algn="ctr">
-                      <a:solidFill>
-                        <a:srgbClr val="E1E0D9"/>
-                      </a:solidFill>
-                      <a:prstDash val="solid"/>
-                      <a:round/>
-                      <a:headEnd type="none" w="med" len="med"/>
-                      <a:tailEnd type="none" w="med" len="med"/>
-                    </a:lnB>
-                  </a:tcPr>
-                </a:tc>
-                <a:tc>
-                  <a:txBody>
-                    <a:bodyPr/>
-                    <a:lstStyle/>
-                    <a:p>
-                      <a:pPr algn="r" indent="0" marL="0">
-                        <a:buNone/>
-                      </a:pPr>
-                      <a:r>
-                        <a:rPr lang="en-US" sz="1200" b="1" dirty="0">
-                          <a:solidFill>
-                            <a:srgbClr val="0B0B0B"/>
-                          </a:solidFill>
-                          <a:latin typeface="Calibri" pitchFamily="34" charset="0"/>
-                          <a:ea typeface="Calibri" pitchFamily="34" charset="-122"/>
-                          <a:cs typeface="Calibri" pitchFamily="34" charset="-120"/>
-                        </a:rPr>
-                        <a:t>7,000</a:t>
-                      </a:r>
-                      <a:endParaRPr lang="en-US" sz="1200" dirty="0">
-                        <a:latin typeface="Calibri" charset="0"/>
-                        <a:ea typeface="Calibri" charset="0"/>
-                        <a:cs typeface="Calibri" charset="0"/>
-                      </a:endParaRPr>
-                    </a:p>
-                  </a:txBody>
-                  <a:tcPr marL="73152" marR="73152" marT="73152" marB="73152" anchor="ctr">
-                    <a:lnL w="9525" cap="flat" cmpd="sng" algn="ctr">
-                      <a:solidFill>
-                        <a:srgbClr val="E1E0D9"/>
-                      </a:solidFill>
-                      <a:prstDash val="solid"/>
-                      <a:round/>
-                      <a:headEnd type="none" w="med" len="med"/>
-                      <a:tailEnd type="none" w="med" len="med"/>
-                    </a:lnL>
-                    <a:lnR w="9525" cap="flat" cmpd="sng" algn="ctr">
-                      <a:solidFill>
-                        <a:srgbClr val="E1E0D9"/>
-                      </a:solidFill>
-                      <a:prstDash val="solid"/>
-                      <a:round/>
-                      <a:headEnd type="none" w="med" len="med"/>
-                      <a:tailEnd type="none" w="med" len="med"/>
-                    </a:lnR>
-                    <a:lnT w="9525" cap="flat" cmpd="sng" algn="ctr">
-                      <a:solidFill>
-                        <a:srgbClr val="E1E0D9"/>
-                      </a:solidFill>
-                      <a:prstDash val="solid"/>
-                      <a:round/>
-                      <a:headEnd type="none" w="med" len="med"/>
-                      <a:tailEnd type="none" w="med" len="med"/>
-                    </a:lnT>
-                    <a:lnB w="9525" cap="flat" cmpd="sng" algn="ctr">
-                      <a:solidFill>
-                        <a:srgbClr val="E1E0D9"/>
-                      </a:solidFill>
-                      <a:prstDash val="solid"/>
-                      <a:round/>
-                      <a:headEnd type="none" w="med" len="med"/>
-                      <a:tailEnd type="none" w="med" len="med"/>
-                    </a:lnB>
-                  </a:tcPr>
-                </a:tc>
-                <a:tc>
-                  <a:txBody>
-                    <a:bodyPr/>
-                    <a:lstStyle/>
-                    <a:p>
-                      <a:pPr algn="r" indent="0" marL="0">
-                        <a:buNone/>
-                      </a:pPr>
-                      <a:r>
-                        <a:rPr lang="en-US" sz="1200" b="1" dirty="0">
-                          <a:solidFill>
-                            <a:srgbClr val="0B0B0B"/>
-                          </a:solidFill>
-                          <a:latin typeface="Calibri" pitchFamily="34" charset="0"/>
-                          <a:ea typeface="Calibri" pitchFamily="34" charset="-122"/>
-                          <a:cs typeface="Calibri" pitchFamily="34" charset="-120"/>
-                        </a:rPr>
-                        <a:t>31,484</a:t>
-                      </a:r>
-                      <a:endParaRPr lang="en-US" sz="1200" dirty="0">
-                        <a:latin typeface="Calibri" charset="0"/>
-                        <a:ea typeface="Calibri" charset="0"/>
-                        <a:cs typeface="Calibri" charset="0"/>
-                      </a:endParaRPr>
-                    </a:p>
-                  </a:txBody>
-                  <a:tcPr marL="73152" marR="73152" marT="73152" marB="73152" anchor="ctr">
-                    <a:lnL w="9525" cap="flat" cmpd="sng" algn="ctr">
-                      <a:solidFill>
-                        <a:srgbClr val="E1E0D9"/>
-                      </a:solidFill>
-                      <a:prstDash val="solid"/>
-                      <a:round/>
-                      <a:headEnd type="none" w="med" len="med"/>
-                      <a:tailEnd type="none" w="med" len="med"/>
-                    </a:lnL>
-                    <a:lnR w="9525" cap="flat" cmpd="sng" algn="ctr">
-                      <a:solidFill>
-                        <a:srgbClr val="E1E0D9"/>
-                      </a:solidFill>
-                      <a:prstDash val="solid"/>
-                      <a:round/>
-                      <a:headEnd type="none" w="med" len="med"/>
-                      <a:tailEnd type="none" w="med" len="med"/>
-                    </a:lnR>
-                    <a:lnT w="9525" cap="flat" cmpd="sng" algn="ctr">
-                      <a:solidFill>
-                        <a:srgbClr val="E1E0D9"/>
-                      </a:solidFill>
-                      <a:prstDash val="solid"/>
-                      <a:round/>
-                      <a:headEnd type="none" w="med" len="med"/>
-                      <a:tailEnd type="none" w="med" len="med"/>
-                    </a:lnT>
-                    <a:lnB w="9525" cap="flat" cmpd="sng" algn="ctr">
-                      <a:solidFill>
-                        <a:srgbClr val="E1E0D9"/>
-                      </a:solidFill>
-                      <a:prstDash val="solid"/>
-                      <a:round/>
-                      <a:headEnd type="none" w="med" len="med"/>
-                      <a:tailEnd type="none" w="med" len="med"/>
-                    </a:lnB>
-                  </a:tcPr>
-                </a:tc>
-                <a:tc>
-                  <a:txBody>
-                    <a:bodyPr/>
-                    <a:lstStyle/>
-                    <a:p>
-                      <a:pPr algn="r" indent="0" marL="0">
-                        <a:buNone/>
-                      </a:pPr>
-                      <a:endParaRPr lang="en-US" sz="1200" dirty="0">
-                        <a:latin typeface="Calibri" charset="0"/>
-                        <a:ea typeface="Calibri" charset="0"/>
-                        <a:cs typeface="Calibri" charset="0"/>
-                      </a:endParaRPr>
-                    </a:p>
-                  </a:txBody>
-                  <a:tcPr marL="73152" marR="73152" marT="73152" marB="73152" anchor="ctr">
-                    <a:lnL w="9525" cap="flat" cmpd="sng" algn="ctr">
-                      <a:solidFill>
-                        <a:srgbClr val="E1E0D9"/>
-                      </a:solidFill>
-                      <a:prstDash val="solid"/>
-                      <a:round/>
-                      <a:headEnd type="none" w="med" len="med"/>
-                      <a:tailEnd type="none" w="med" len="med"/>
-                    </a:lnL>
-                    <a:lnR w="9525" cap="flat" cmpd="sng" algn="ctr">
-                      <a:solidFill>
-                        <a:srgbClr val="E1E0D9"/>
-                      </a:solidFill>
-                      <a:prstDash val="solid"/>
-                      <a:round/>
-                      <a:headEnd type="none" w="med" len="med"/>
-                      <a:tailEnd type="none" w="med" len="med"/>
-                    </a:lnR>
-                    <a:lnT w="9525" cap="flat" cmpd="sng" algn="ctr">
-                      <a:solidFill>
-                        <a:srgbClr val="E1E0D9"/>
-                      </a:solidFill>
-                      <a:prstDash val="solid"/>
-                      <a:round/>
-                      <a:headEnd type="none" w="med" len="med"/>
-                      <a:tailEnd type="none" w="med" len="med"/>
-                    </a:lnT>
-                    <a:lnB w="9525" cap="flat" cmpd="sng" algn="ctr">
-                      <a:solidFill>
-                        <a:srgbClr val="E1E0D9"/>
-                      </a:solidFill>
-                      <a:prstDash val="solid"/>
-                      <a:round/>
-                      <a:headEnd type="none" w="med" len="med"/>
-                      <a:tailEnd type="none" w="med" len="med"/>
-                    </a:lnB>
-                  </a:tcPr>
-                </a:tc>
-              </a:tr>
-            </a:tbl>
-          </a:graphicData>
-        </a:graphic>
-      </p:graphicFrame>
-      <p:sp>
-        <p:nvSpPr>
-          <p:cNvPr id="4" name="release facts"/>
-          <p:cNvSpPr txBox="1"/>
-          <p:nvPr/>
-        </p:nvSpPr>
-        <p:spPr>
-          <a:xfrm>
-            <a:off x="548640" y="3977640"/>
-            <a:ext cx="5120640" cy="2148840"/>
-          </a:xfrm>
-          <a:prstGeom prst="rect">
-            <a:avLst/>
-          </a:prstGeom>
-          <a:noFill/>
-          <a:ln/>
-        </p:spPr>
-        <p:txBody>
-          <a:bodyPr wrap="square" lIns="0" tIns="0" rIns="0" bIns="0" rtlCol="0" anchor="t"/>
-          <a:lstStyle/>
-          <a:p>
-            <a:pPr marL="342900" indent="-342900">
-              <a:spcAft>
-                <a:spcPts val="600"/>
-              </a:spcAft>
-              <a:buSzPct val="100000"/>
-              <a:buChar char="•"/>
-            </a:pPr>
-            <a:r>
-              <a:rPr lang="en-US" sz="1300" dirty="0">
-                <a:solidFill>
-                  <a:schemeClr val="tx1"/>
-                </a:solidFill>
-              </a:rPr>
-              <a:t>Tiers assigned round-robin: 625 per tier in train, 125 in the benchmark</a:t>
-            </a:r>
-            <a:endParaRPr lang="en-US" sz="1300" dirty="0"/>
-          </a:p>
-          <a:p>
-            <a:pPr marL="342900" indent="-342900">
-              <a:spcAft>
-                <a:spcPts val="600"/>
-              </a:spcAft>
-              <a:buSzPct val="100000"/>
-              <a:buChar char="•"/>
-            </a:pPr>
-            <a:r>
-              <a:rPr lang="en-US" sz="1300" dirty="0">
-                <a:solidFill>
-                  <a:schemeClr val="tx1"/>
-                </a:solidFill>
-              </a:rPr>
-              <a:t>Four in five contexts hang from a ceiling, one in five from a wall</a:t>
-            </a:r>
-            <a:endParaRPr lang="en-US" sz="1300" dirty="0"/>
-          </a:p>
-          <a:p>
-            <a:pPr marL="342900" indent="-342900">
-              <a:spcAft>
-                <a:spcPts val="600"/>
-              </a:spcAft>
-              <a:buSzPct val="100000"/>
-              <a:buChar char="•"/>
-            </a:pPr>
-            <a:r>
-              <a:rPr lang="en-US" sz="1300" dirty="0">
-                <a:solidFill>
-                  <a:schemeClr val="tx1"/>
-                </a:solidFill>
-              </a:rPr>
-              <a:t>Six trades: electrical 10,494, domestic water 5,725, heating 5,788, chilled water 3,987, sprinkler 2,073, ventilation 3,417 elements</a:t>
-            </a:r>
-            <a:endParaRPr lang="en-US" sz="1300" dirty="0"/>
-          </a:p>
-          <a:p>
-            <a:pPr marL="342900" indent="-342900">
-              <a:spcAft>
-                <a:spcPts val="600"/>
-              </a:spcAft>
-              <a:buSzPct val="100000"/>
-              <a:buChar char="•"/>
-            </a:pPr>
-            <a:r>
-              <a:rPr lang="en-US" sz="1300" dirty="0">
-                <a:solidFill>
-                  <a:schemeClr val="tx1"/>
-                </a:solidFill>
-              </a:rPr>
-              <a:t>Plain JSON, with a JSON Schema, Croissant metadata and a datasheet</a:t>
-            </a:r>
-            <a:endParaRPr lang="en-US" sz="1300" dirty="0"/>
-          </a:p>
-        </p:txBody>
-      </p:sp>
-      <p:graphicFrame>
-        <p:nvGraphicFramePr>
-          <p:cNvPr id="5" name="kinds chart" descr=""/>
-          <p:cNvGraphicFramePr/>
-          <p:nvPr/>
-        </p:nvGraphicFramePr>
-        <p:xfrm>
-          <a:off x="5989320" y="1371600"/>
-          <a:ext cx="5650992" cy="2240280"/>
-        </p:xfrm>
-        <a:graphic xmlns:a="http://schemas.openxmlformats.org/drawingml/2006/main">
-          <a:graphicData uri="http://schemas.openxmlformats.org/drawingml/2006/chart">
-            <c:chart xmlns:c="http://schemas.openxmlformats.org/drawingml/2006/chart" r:id="rId1"/>
-          </a:graphicData>
-        </a:graphic>
-      </p:graphicFrame>
-      <p:graphicFrame>
-        <p:nvGraphicFramePr>
-          <p:cNvPr id="6" name="dn chart" descr=""/>
-          <p:cNvGraphicFramePr/>
-          <p:nvPr/>
-        </p:nvGraphicFramePr>
-        <p:xfrm>
-          <a:off x="5989320" y="3749040"/>
-          <a:ext cx="5650992" cy="2377440"/>
-        </p:xfrm>
-        <a:graphic xmlns:a="http://schemas.openxmlformats.org/drawingml/2006/main">
-          <a:graphicData uri="http://schemas.openxmlformats.org/drawingml/2006/chart">
-            <c:chart xmlns:c="http://schemas.openxmlformats.org/drawingml/2006/chart" r:id="rId2"/>
-          </a:graphicData>
-        </a:graphic>
-      </p:graphicFrame>
       <p:sp>
         <p:nvSpPr>
           <p:cNvPr id="25" name="Slide Number Placeholder 0"/>

--- a/docs/CrossMEP_CIBW78_talk.pptx
+++ b/docs/CrossMEP_CIBW78_talk.pptx
@@ -129,12 +129,12 @@
   <p:extLst>
     <p:ext uri="{521415D9-36F7-43E2-AB2F-B90AF26B5E84}">
       <p14:sectionLst xmlns:p14="http://schemas.microsoft.com/office/powerpoint/2010/main">
-        <p14:section name="Opening" id="{63ca1c73-4561-f43b-4b3e-9b0e0627a27d}">
+        <p14:section name="Opening" id="{9a97ff16-487b-8c73-c28a-55b990e7fe9f}">
           <p14:sldIdLst>
             <p14:sldId id="256"/>
           </p14:sldIdLst>
         </p14:section>
-        <p14:section name="Motivation" id="{2091e7c1-8bb5-8c96-e63f-8e0469fd5161}">
+        <p14:section name="Motivation" id="{e23ae679-a5cf-5866-75cb-6c834f3b4f19}">
           <p14:sldIdLst>
             <p14:sldId id="257"/>
             <p14:sldId id="258"/>
@@ -143,7 +143,7 @@
             <p14:sldId id="261"/>
           </p14:sldIdLst>
         </p14:section>
-        <p14:section name="The dataset" id="{ebbc53fc-170a-4888-0f45-7e266a3b3642}">
+        <p14:section name="The dataset" id="{f46f1102-e59b-b27e-533b-c1c7358d77af}">
           <p14:sldIdLst>
             <p14:sldId id="262"/>
             <p14:sldId id="263"/>
@@ -152,14 +152,14 @@
             <p14:sldId id="266"/>
           </p14:sldIdLst>
         </p14:section>
-        <p14:section name="Experiments" id="{e29de9b3-6966-ee5a-28ae-27b9a92f3964}">
+        <p14:section name="Experiments" id="{c53eeb9d-7a87-ce88-4263-cac04369345c}">
           <p14:sldIdLst>
             <p14:sldId id="267"/>
             <p14:sldId id="268"/>
             <p14:sldId id="269"/>
           </p14:sldIdLst>
         </p14:section>
-        <p14:section name="Use" id="{e633a837-f26c-6528-7199-da554c7faccb}">
+        <p14:section name="Use" id="{a7cf815c-2601-a6eb-fe75-77b8f8b837a9}">
           <p14:sldIdLst>
             <p14:sldId id="270"/>
             <p14:sldId id="271"/>
@@ -167,7 +167,7 @@
             <p14:sldId id="273"/>
           </p14:sldIdLst>
         </p14:section>
-        <p14:section name="Appendix" id="{9e3b50b4-3f4a-8972-0c8e-9fbaaee74257}">
+        <p14:section name="Appendix" id="{204b50c4-6711-3c38-807d-f903fb4e4ea5}">
           <p14:sldIdLst>
             <p14:sldId id="274"/>
             <p14:sldId id="275"/>
@@ -22777,7 +22777,7 @@
                   <a:schemeClr val="tx1"/>
                 </a:solidFill>
               </a:rPr>
-              <a:t>One cross-section in, verified support designs out</a:t>
+              <a:t>A designer turns one cross-section into verified support assemblies</a:t>
             </a:r>
             <a:endParaRPr lang="en-US" sz="2600" dirty="0"/>
           </a:p>
@@ -25341,7 +25341,7 @@
                   <a:schemeClr val="tx1"/>
                 </a:solidFill>
               </a:rPr>
-              <a:t>One section in, verified supports out: learnable, given problems to learn from</a:t>
+              <a:t>Whatever the method, it needs problems to learn from and a fixed set to compare on</a:t>
             </a:r>
             <a:endParaRPr lang="en-US" sz="2600" dirty="0"/>
           </a:p>

--- a/docs/CrossMEP_CIBW78_talk.pptx
+++ b/docs/CrossMEP_CIBW78_talk.pptx
@@ -129,12 +129,12 @@
   <p:extLst>
     <p:ext uri="{521415D9-36F7-43E2-AB2F-B90AF26B5E84}">
       <p14:sectionLst xmlns:p14="http://schemas.microsoft.com/office/powerpoint/2010/main">
-        <p14:section name="Opening" id="{9a97ff16-487b-8c73-c28a-55b990e7fe9f}">
+        <p14:section name="Opening" id="{0dfe272f-d792-88b8-9614-e4abfb1d46e9}">
           <p14:sldIdLst>
             <p14:sldId id="256"/>
           </p14:sldIdLst>
         </p14:section>
-        <p14:section name="Motivation" id="{e23ae679-a5cf-5866-75cb-6c834f3b4f19}">
+        <p14:section name="Motivation" id="{e7404278-e84d-6b24-d25e-6fc5205cc32b}">
           <p14:sldIdLst>
             <p14:sldId id="257"/>
             <p14:sldId id="258"/>
@@ -143,7 +143,7 @@
             <p14:sldId id="261"/>
           </p14:sldIdLst>
         </p14:section>
-        <p14:section name="The dataset" id="{f46f1102-e59b-b27e-533b-c1c7358d77af}">
+        <p14:section name="The dataset" id="{3f3781ff-ded6-a46f-0411-33bd0136dc1f}">
           <p14:sldIdLst>
             <p14:sldId id="262"/>
             <p14:sldId id="263"/>
@@ -152,14 +152,14 @@
             <p14:sldId id="266"/>
           </p14:sldIdLst>
         </p14:section>
-        <p14:section name="Experiments" id="{c53eeb9d-7a87-ce88-4263-cac04369345c}">
+        <p14:section name="Experiments" id="{5c444600-9395-9fce-1fff-73e332459cb8}">
           <p14:sldIdLst>
             <p14:sldId id="267"/>
             <p14:sldId id="268"/>
             <p14:sldId id="269"/>
           </p14:sldIdLst>
         </p14:section>
-        <p14:section name="Use" id="{a7cf815c-2601-a6eb-fe75-77b8f8b837a9}">
+        <p14:section name="Use" id="{01dbfdb5-0bcd-3491-d6ed-4ea0a5fbce10}">
           <p14:sldIdLst>
             <p14:sldId id="270"/>
             <p14:sldId id="271"/>
@@ -167,7 +167,7 @@
             <p14:sldId id="273"/>
           </p14:sldIdLst>
         </p14:section>
-        <p14:section name="Appendix" id="{204b50c4-6711-3c38-807d-f903fb4e4ea5}">
+        <p14:section name="Appendix" id="{4e017b5a-212e-1064-2654-016c3caac2f3}">
           <p14:sldIdLst>
             <p14:sldId id="274"/>
             <p14:sldId id="275"/>
@@ -25356,11 +25356,11 @@
         <p:spPr>
           <a:xfrm>
             <a:off x="548640" y="1554480"/>
-            <a:ext cx="1737360" cy="960120"/>
+            <a:ext cx="1737360" cy="1097280"/>
           </a:xfrm>
           <a:prstGeom prst="roundRect">
             <a:avLst>
-              <a:gd name="adj" fmla="val 5714"/>
+              <a:gd name="adj" fmla="val 5000"/>
             </a:avLst>
           </a:prstGeom>
           <a:solidFill>
@@ -25376,14 +25376,139 @@
       </p:sp>
       <p:sp>
         <p:nvSpPr>
-          <p:cNvPr id="4" name="text context"/>
+          <p:cNvPr id="4" name="mini slab"/>
+          <p:cNvSpPr/>
+          <p:nvPr/>
+        </p:nvSpPr>
+        <p:spPr>
+          <a:xfrm>
+            <a:off x="777240" y="1664208"/>
+            <a:ext cx="1280160" cy="91440"/>
+          </a:xfrm>
+          <a:prstGeom prst="rect">
+            <a:avLst/>
+          </a:prstGeom>
+          <a:solidFill>
+            <a:srgbClr val="EEF1F4"/>
+          </a:solidFill>
+          <a:ln w="6350">
+            <a:solidFill>
+              <a:srgbClr val="52514E"/>
+            </a:solidFill>
+            <a:prstDash val="solid"/>
+          </a:ln>
+        </p:spPr>
+      </p:sp>
+      <p:sp>
+        <p:nvSpPr>
+          <p:cNvPr id="5" name="mini duct"/>
+          <p:cNvSpPr/>
+          <p:nvPr/>
+        </p:nvSpPr>
+        <p:spPr>
+          <a:xfrm>
+            <a:off x="868680" y="1828800"/>
+            <a:ext cx="384048" cy="219456"/>
+          </a:xfrm>
+          <a:prstGeom prst="rect">
+            <a:avLst/>
+          </a:prstGeom>
+          <a:solidFill>
+            <a:srgbClr val="FFFFFF"/>
+          </a:solidFill>
+          <a:ln w="9525">
+            <a:solidFill>
+              <a:srgbClr val="52514E"/>
+            </a:solidFill>
+            <a:prstDash val="solid"/>
+          </a:ln>
+        </p:spPr>
+      </p:sp>
+      <p:sp>
+        <p:nvSpPr>
+          <p:cNvPr id="6" name="mini pipe a"/>
+          <p:cNvSpPr/>
+          <p:nvPr/>
+        </p:nvSpPr>
+        <p:spPr>
+          <a:xfrm>
+            <a:off x="1371600" y="1856232"/>
+            <a:ext cx="192024" cy="192024"/>
+          </a:xfrm>
+          <a:prstGeom prst="ellipse">
+            <a:avLst/>
+          </a:prstGeom>
+          <a:solidFill>
+            <a:srgbClr val="FFFFFF"/>
+          </a:solidFill>
+          <a:ln w="9525">
+            <a:solidFill>
+              <a:srgbClr val="52514E"/>
+            </a:solidFill>
+            <a:prstDash val="solid"/>
+          </a:ln>
+        </p:spPr>
+      </p:sp>
+      <p:sp>
+        <p:nvSpPr>
+          <p:cNvPr id="7" name="mini pipe b"/>
+          <p:cNvSpPr/>
+          <p:nvPr/>
+        </p:nvSpPr>
+        <p:spPr>
+          <a:xfrm>
+            <a:off x="1618488" y="1911096"/>
+            <a:ext cx="137160" cy="137160"/>
+          </a:xfrm>
+          <a:prstGeom prst="ellipse">
+            <a:avLst/>
+          </a:prstGeom>
+          <a:solidFill>
+            <a:srgbClr val="FFFFFF"/>
+          </a:solidFill>
+          <a:ln w="9525">
+            <a:solidFill>
+              <a:srgbClr val="52514E"/>
+            </a:solidFill>
+            <a:prstDash val="solid"/>
+          </a:ln>
+        </p:spPr>
+      </p:sp>
+      <p:sp>
+        <p:nvSpPr>
+          <p:cNvPr id="8" name="mini tray"/>
+          <p:cNvSpPr/>
+          <p:nvPr/>
+        </p:nvSpPr>
+        <p:spPr>
+          <a:xfrm>
+            <a:off x="1828800" y="1965960"/>
+            <a:ext cx="237744" cy="82296"/>
+          </a:xfrm>
+          <a:prstGeom prst="rect">
+            <a:avLst/>
+          </a:prstGeom>
+          <a:solidFill>
+            <a:srgbClr val="FFFFFF"/>
+          </a:solidFill>
+          <a:ln w="9525">
+            <a:solidFill>
+              <a:srgbClr val="52514E"/>
+            </a:solidFill>
+            <a:prstDash val="solid"/>
+          </a:ln>
+        </p:spPr>
+      </p:sp>
+      <p:sp>
+        <p:nvSpPr>
+          <p:cNvPr id="9" name="text context"/>
           <p:cNvSpPr txBox="1"/>
           <p:nvPr/>
         </p:nvSpPr>
         <p:spPr>
           <a:xfrm>
-            <a:off x="548640" y="1554480"/>
-            <a:ext cx="1737360" cy="960120"/>
+            <a:off x="548640" y="2084832"/>
+            <a:ext cx="1737360" cy="548640"/>
           </a:xfrm>
           <a:prstGeom prst="rect">
             <a:avLst/>
@@ -25426,7 +25551,7 @@
       </p:sp>
       <p:sp>
         <p:nvSpPr>
-          <p:cNvPr id="5" name="box catalog"/>
+          <p:cNvPr id="10" name="box catalog"/>
           <p:cNvSpPr/>
           <p:nvPr/>
         </p:nvSpPr>
@@ -25451,7 +25576,7 @@
       </p:sp>
       <p:sp>
         <p:nvSpPr>
-          <p:cNvPr id="6" name="text catalog"/>
+          <p:cNvPr id="11" name="text catalog"/>
           <p:cNvSpPr txBox="1"/>
           <p:nvPr/>
         </p:nvSpPr>
@@ -25501,7 +25626,7 @@
       </p:sp>
       <p:sp>
         <p:nvSpPr>
-          <p:cNvPr id="7" name="box rules"/>
+          <p:cNvPr id="12" name="box rules"/>
           <p:cNvSpPr/>
           <p:nvPr/>
         </p:nvSpPr>
@@ -25526,16 +25651,40 @@
           </a:ln>
         </p:spPr>
       </p:sp>
-      <p:sp>
-        <p:nvSpPr>
-          <p:cNvPr id="8" name="text rules"/>
+      <p:pic>
+        <p:nvPicPr>
+          <p:cNvPr id="13" name="icon rules" descr="preencoded.png">    </p:cNvPr>
+          <p:cNvPicPr>
+            <a:picLocks noChangeAspect="1"/>
+          </p:cNvPicPr>
+          <p:nvPr/>
+        </p:nvPicPr>
+        <p:blipFill>
+          <a:blip r:embed="rId1"/>
+          <a:stretch>
+            <a:fillRect/>
+          </a:stretch>
+        </p:blipFill>
+        <p:spPr>
+          <a:xfrm>
+            <a:off x="3429000" y="1828800"/>
+            <a:ext cx="457200" cy="457200"/>
+          </a:xfrm>
+          <a:prstGeom prst="rect">
+            <a:avLst/>
+          </a:prstGeom>
+        </p:spPr>
+      </p:pic>
+      <p:sp>
+        <p:nvSpPr>
+          <p:cNvPr id="14" name="text rules"/>
           <p:cNvSpPr txBox="1"/>
           <p:nvPr/>
         </p:nvSpPr>
         <p:spPr>
           <a:xfrm>
-            <a:off x="2743200" y="1554480"/>
-            <a:ext cx="1828800" cy="2240280"/>
+            <a:off x="2743200" y="2331720"/>
+            <a:ext cx="1828800" cy="1371600"/>
           </a:xfrm>
           <a:prstGeom prst="rect">
             <a:avLst/>
@@ -25578,13 +25727,13 @@
       </p:sp>
       <p:sp>
         <p:nvSpPr>
-          <p:cNvPr id="9" name="arrow context to rules"/>
+          <p:cNvPr id="15" name="arrow context to rules"/>
           <p:cNvSpPr/>
           <p:nvPr/>
         </p:nvSpPr>
         <p:spPr>
           <a:xfrm>
-            <a:off x="2286000" y="2029968"/>
+            <a:off x="2286000" y="2103120"/>
             <a:ext cx="457200" cy="0"/>
           </a:xfrm>
           <a:prstGeom prst="line">
@@ -25602,7 +25751,7 @@
       </p:sp>
       <p:sp>
         <p:nvSpPr>
-          <p:cNvPr id="10" name="arrow catalog to rules"/>
+          <p:cNvPr id="16" name="arrow catalog to rules"/>
           <p:cNvSpPr/>
           <p:nvPr/>
         </p:nvSpPr>
@@ -25626,7 +25775,7 @@
       </p:sp>
       <p:sp>
         <p:nvSpPr>
-          <p:cNvPr id="11" name="black box approach"/>
+          <p:cNvPr id="17" name="black box approach"/>
           <p:cNvSpPr/>
           <p:nvPr/>
         </p:nvSpPr>
@@ -25646,16 +25795,40 @@
           <a:ln/>
         </p:spPr>
       </p:sp>
-      <p:sp>
-        <p:nvSpPr>
-          <p:cNvPr id="12" name="text approach"/>
+      <p:pic>
+        <p:nvPicPr>
+          <p:cNvPr id="18" name="icon approach" descr="preencoded.png">    </p:cNvPr>
+          <p:cNvPicPr>
+            <a:picLocks noChangeAspect="1"/>
+          </p:cNvPicPr>
+          <p:nvPr/>
+        </p:nvPicPr>
+        <p:blipFill>
+          <a:blip r:embed="rId2"/>
+          <a:stretch>
+            <a:fillRect/>
+          </a:stretch>
+        </p:blipFill>
+        <p:spPr>
+          <a:xfrm>
+            <a:off x="5989320" y="1828800"/>
+            <a:ext cx="457200" cy="457200"/>
+          </a:xfrm>
+          <a:prstGeom prst="rect">
+            <a:avLst/>
+          </a:prstGeom>
+        </p:spPr>
+      </p:pic>
+      <p:sp>
+        <p:nvSpPr>
+          <p:cNvPr id="19" name="text approach"/>
           <p:cNvSpPr txBox="1"/>
           <p:nvPr/>
         </p:nvSpPr>
         <p:spPr>
           <a:xfrm>
-            <a:off x="5120640" y="1554480"/>
-            <a:ext cx="2194560" cy="2240280"/>
+            <a:off x="5120640" y="2331720"/>
+            <a:ext cx="2194560" cy="1371600"/>
           </a:xfrm>
           <a:prstGeom prst="rect">
             <a:avLst/>
@@ -25718,7 +25891,7 @@
       </p:sp>
       <p:sp>
         <p:nvSpPr>
-          <p:cNvPr id="13" name="arrow legal actions"/>
+          <p:cNvPr id="20" name="arrow legal actions"/>
           <p:cNvSpPr/>
           <p:nvPr/>
         </p:nvSpPr>
@@ -25742,7 +25915,7 @@
       </p:sp>
       <p:sp>
         <p:nvSpPr>
-          <p:cNvPr id="14" name="label legal actions"/>
+          <p:cNvPr id="21" name="label legal actions"/>
           <p:cNvSpPr txBox="1"/>
           <p:nvPr/>
         </p:nvSpPr>
@@ -25778,7 +25951,7 @@
       </p:sp>
       <p:sp>
         <p:nvSpPr>
-          <p:cNvPr id="15" name="arrow chosen action"/>
+          <p:cNvPr id="22" name="arrow chosen action"/>
           <p:cNvSpPr/>
           <p:nvPr/>
         </p:nvSpPr>
@@ -25802,7 +25975,7 @@
       </p:sp>
       <p:sp>
         <p:nvSpPr>
-          <p:cNvPr id="16" name="label chosen action"/>
+          <p:cNvPr id="23" name="label chosen action"/>
           <p:cNvSpPr txBox="1"/>
           <p:nvPr/>
         </p:nvSpPr>
@@ -25838,7 +26011,7 @@
       </p:sp>
       <p:sp>
         <p:nvSpPr>
-          <p:cNvPr id="17" name="box verifier"/>
+          <p:cNvPr id="24" name="box verifier"/>
           <p:cNvSpPr/>
           <p:nvPr/>
         </p:nvSpPr>
@@ -25863,16 +26036,40 @@
           </a:ln>
         </p:spPr>
       </p:sp>
-      <p:sp>
-        <p:nvSpPr>
-          <p:cNvPr id="18" name="text verifier"/>
+      <p:pic>
+        <p:nvPicPr>
+          <p:cNvPr id="25" name="icon verifier" descr="preencoded.png">    </p:cNvPr>
+          <p:cNvPicPr>
+            <a:picLocks noChangeAspect="1"/>
+          </p:cNvPicPr>
+          <p:nvPr/>
+        </p:nvPicPr>
+        <p:blipFill>
+          <a:blip r:embed="rId3"/>
+          <a:stretch>
+            <a:fillRect/>
+          </a:stretch>
+        </p:blipFill>
+        <p:spPr>
+          <a:xfrm>
+            <a:off x="8549640" y="1828800"/>
+            <a:ext cx="457200" cy="457200"/>
+          </a:xfrm>
+          <a:prstGeom prst="rect">
+            <a:avLst/>
+          </a:prstGeom>
+        </p:spPr>
+      </p:pic>
+      <p:sp>
+        <p:nvSpPr>
+          <p:cNvPr id="26" name="text verifier"/>
           <p:cNvSpPr txBox="1"/>
           <p:nvPr/>
         </p:nvSpPr>
         <p:spPr>
           <a:xfrm>
-            <a:off x="7863840" y="1554480"/>
-            <a:ext cx="1828800" cy="2240280"/>
+            <a:off x="7863840" y="2331720"/>
+            <a:ext cx="1828800" cy="1371600"/>
           </a:xfrm>
           <a:prstGeom prst="rect">
             <a:avLst/>
@@ -25915,7 +26112,7 @@
       </p:sp>
       <p:sp>
         <p:nvSpPr>
-          <p:cNvPr id="19" name="arrow finished design"/>
+          <p:cNvPr id="27" name="arrow finished design"/>
           <p:cNvSpPr/>
           <p:nvPr/>
         </p:nvSpPr>
@@ -25939,7 +26136,7 @@
       </p:sp>
       <p:sp>
         <p:nvSpPr>
-          <p:cNvPr id="20" name="label finished design"/>
+          <p:cNvPr id="28" name="label finished design"/>
           <p:cNvSpPr txBox="1"/>
           <p:nvPr/>
         </p:nvSpPr>
@@ -25975,7 +26172,7 @@
       </p:sp>
       <p:sp>
         <p:nvSpPr>
-          <p:cNvPr id="21" name="box output"/>
+          <p:cNvPr id="29" name="box output"/>
           <p:cNvSpPr/>
           <p:nvPr/>
         </p:nvSpPr>
@@ -26002,14 +26199,149 @@
       </p:sp>
       <p:sp>
         <p:nvSpPr>
-          <p:cNvPr id="22" name="text output"/>
+          <p:cNvPr id="30" name="mini out slab"/>
+          <p:cNvSpPr/>
+          <p:nvPr/>
+        </p:nvSpPr>
+        <p:spPr>
+          <a:xfrm>
+            <a:off x="10287000" y="1719072"/>
+            <a:ext cx="1170432" cy="91440"/>
+          </a:xfrm>
+          <a:prstGeom prst="rect">
+            <a:avLst/>
+          </a:prstGeom>
+          <a:solidFill>
+            <a:srgbClr val="EEF1F4"/>
+          </a:solidFill>
+          <a:ln w="6350">
+            <a:solidFill>
+              <a:srgbClr val="52514E"/>
+            </a:solidFill>
+            <a:prstDash val="solid"/>
+          </a:ln>
+        </p:spPr>
+      </p:sp>
+      <p:sp>
+        <p:nvSpPr>
+          <p:cNvPr id="31" name="mini rod 0"/>
+          <p:cNvSpPr/>
+          <p:nvPr/>
+        </p:nvSpPr>
+        <p:spPr>
+          <a:xfrm>
+            <a:off x="10378440" y="1810512"/>
+            <a:ext cx="27432" cy="429768"/>
+          </a:xfrm>
+          <a:prstGeom prst="rect">
+            <a:avLst/>
+          </a:prstGeom>
+          <a:solidFill>
+            <a:srgbClr val="1F2933"/>
+          </a:solidFill>
+          <a:ln/>
+        </p:spPr>
+      </p:sp>
+      <p:sp>
+        <p:nvSpPr>
+          <p:cNvPr id="32" name="mini rod 1"/>
+          <p:cNvSpPr/>
+          <p:nvPr/>
+        </p:nvSpPr>
+        <p:spPr>
+          <a:xfrm>
+            <a:off x="11338560" y="1810512"/>
+            <a:ext cx="27432" cy="429768"/>
+          </a:xfrm>
+          <a:prstGeom prst="rect">
+            <a:avLst/>
+          </a:prstGeom>
+          <a:solidFill>
+            <a:srgbClr val="1F2933"/>
+          </a:solidFill>
+          <a:ln/>
+        </p:spPr>
+      </p:sp>
+      <p:sp>
+        <p:nvSpPr>
+          <p:cNvPr id="33" name="mini bar"/>
+          <p:cNvSpPr/>
+          <p:nvPr/>
+        </p:nvSpPr>
+        <p:spPr>
+          <a:xfrm>
+            <a:off x="10305288" y="2240280"/>
+            <a:ext cx="1133856" cy="36576"/>
+          </a:xfrm>
+          <a:prstGeom prst="rect">
+            <a:avLst/>
+          </a:prstGeom>
+          <a:solidFill>
+            <a:srgbClr val="1F2933"/>
+          </a:solidFill>
+          <a:ln/>
+        </p:spPr>
+      </p:sp>
+      <p:sp>
+        <p:nvSpPr>
+          <p:cNvPr id="34" name="mini out pipe a"/>
+          <p:cNvSpPr/>
+          <p:nvPr/>
+        </p:nvSpPr>
+        <p:spPr>
+          <a:xfrm>
+            <a:off x="10543032" y="2029968"/>
+            <a:ext cx="210312" cy="210312"/>
+          </a:xfrm>
+          <a:prstGeom prst="ellipse">
+            <a:avLst/>
+          </a:prstGeom>
+          <a:solidFill>
+            <a:srgbClr val="FFFFFF"/>
+          </a:solidFill>
+          <a:ln w="9525">
+            <a:solidFill>
+              <a:srgbClr val="52514E"/>
+            </a:solidFill>
+            <a:prstDash val="solid"/>
+          </a:ln>
+        </p:spPr>
+      </p:sp>
+      <p:sp>
+        <p:nvSpPr>
+          <p:cNvPr id="35" name="mini out pipe b"/>
+          <p:cNvSpPr/>
+          <p:nvPr/>
+        </p:nvSpPr>
+        <p:spPr>
+          <a:xfrm>
+            <a:off x="10890504" y="2084832"/>
+            <a:ext cx="155448" cy="155448"/>
+          </a:xfrm>
+          <a:prstGeom prst="ellipse">
+            <a:avLst/>
+          </a:prstGeom>
+          <a:solidFill>
+            <a:srgbClr val="FFFFFF"/>
+          </a:solidFill>
+          <a:ln w="9525">
+            <a:solidFill>
+              <a:srgbClr val="52514E"/>
+            </a:solidFill>
+            <a:prstDash val="solid"/>
+          </a:ln>
+        </p:spPr>
+      </p:sp>
+      <p:sp>
+        <p:nvSpPr>
+          <p:cNvPr id="36" name="text output"/>
           <p:cNvSpPr txBox="1"/>
           <p:nvPr/>
         </p:nvSpPr>
         <p:spPr>
           <a:xfrm>
-            <a:off x="10104120" y="1554480"/>
-            <a:ext cx="1536192" cy="2240280"/>
+            <a:off x="10104120" y="2331720"/>
+            <a:ext cx="1536192" cy="1371600"/>
           </a:xfrm>
           <a:prstGeom prst="rect">
             <a:avLst/>
@@ -26052,7 +26384,7 @@
       </p:sp>
       <p:sp>
         <p:nvSpPr>
-          <p:cNvPr id="23" name="arrow to output"/>
+          <p:cNvPr id="37" name="arrow to output"/>
           <p:cNvSpPr/>
           <p:nvPr/>
         </p:nvSpPr>
@@ -26076,7 +26408,7 @@
       </p:sp>
       <p:sp>
         <p:nvSpPr>
-          <p:cNvPr id="24" name="feedback down"/>
+          <p:cNvPr id="38" name="feedback down"/>
           <p:cNvSpPr/>
           <p:nvPr/>
         </p:nvSpPr>
@@ -26099,7 +26431,7 @@
       </p:sp>
       <p:sp>
         <p:nvSpPr>
-          <p:cNvPr id="25" name="feedback across"/>
+          <p:cNvPr id="39" name="feedback across"/>
           <p:cNvSpPr/>
           <p:nvPr/>
         </p:nvSpPr>
@@ -26122,7 +26454,7 @@
       </p:sp>
       <p:sp>
         <p:nvSpPr>
-          <p:cNvPr id="26" name="feedback up"/>
+          <p:cNvPr id="40" name="feedback up"/>
           <p:cNvSpPr/>
           <p:nvPr/>
         </p:nvSpPr>
@@ -26146,7 +26478,7 @@
       </p:sp>
       <p:sp>
         <p:nvSpPr>
-          <p:cNvPr id="27" name="label feedback"/>
+          <p:cNvPr id="41" name="label feedback"/>
           <p:cNvSpPr txBox="1"/>
           <p:nvPr/>
         </p:nvSpPr>
@@ -26182,7 +26514,7 @@
       </p:sp>
       <p:sp>
         <p:nvSpPr>
-          <p:cNvPr id="28" name="legend swatch Input"/>
+          <p:cNvPr id="42" name="legend swatch Input"/>
           <p:cNvSpPr/>
           <p:nvPr/>
         </p:nvSpPr>
@@ -26209,7 +26541,7 @@
       </p:sp>
       <p:sp>
         <p:nvSpPr>
-          <p:cNvPr id="29" name="legend Input"/>
+          <p:cNvPr id="43" name="legend Input"/>
           <p:cNvSpPr txBox="1"/>
           <p:nvPr/>
         </p:nvSpPr>
@@ -26245,7 +26577,7 @@
       </p:sp>
       <p:sp>
         <p:nvSpPr>
-          <p:cNvPr id="30" name="legend swatch Rules"/>
+          <p:cNvPr id="44" name="legend swatch Rules"/>
           <p:cNvSpPr/>
           <p:nvPr/>
         </p:nvSpPr>
@@ -26272,7 +26604,7 @@
       </p:sp>
       <p:sp>
         <p:nvSpPr>
-          <p:cNvPr id="31" name="legend Rules"/>
+          <p:cNvPr id="45" name="legend Rules"/>
           <p:cNvSpPr txBox="1"/>
           <p:nvPr/>
         </p:nvSpPr>
@@ -26308,7 +26640,7 @@
       </p:sp>
       <p:sp>
         <p:nvSpPr>
-          <p:cNvPr id="32" name="legend swatch Approach (black box)"/>
+          <p:cNvPr id="46" name="legend swatch Approach (black box)"/>
           <p:cNvSpPr/>
           <p:nvPr/>
         </p:nvSpPr>
@@ -26335,7 +26667,7 @@
       </p:sp>
       <p:sp>
         <p:nvSpPr>
-          <p:cNvPr id="33" name="legend Approach (black box)"/>
+          <p:cNvPr id="47" name="legend Approach (black box)"/>
           <p:cNvSpPr txBox="1"/>
           <p:nvPr/>
         </p:nvSpPr>
@@ -26371,7 +26703,7 @@
       </p:sp>
       <p:sp>
         <p:nvSpPr>
-          <p:cNvPr id="34" name="legend swatch Verifier"/>
+          <p:cNvPr id="48" name="legend swatch Verifier"/>
           <p:cNvSpPr/>
           <p:nvPr/>
         </p:nvSpPr>
@@ -26398,7 +26730,7 @@
       </p:sp>
       <p:sp>
         <p:nvSpPr>
-          <p:cNvPr id="35" name="legend Verifier"/>
+          <p:cNvPr id="49" name="legend Verifier"/>
           <p:cNvSpPr txBox="1"/>
           <p:nvPr/>
         </p:nvSpPr>
@@ -26434,7 +26766,7 @@
       </p:sp>
       <p:sp>
         <p:nvSpPr>
-          <p:cNvPr id="36" name="legend swatch Output"/>
+          <p:cNvPr id="50" name="legend swatch Output"/>
           <p:cNvSpPr/>
           <p:nvPr/>
         </p:nvSpPr>
@@ -26461,7 +26793,7 @@
       </p:sp>
       <p:sp>
         <p:nvSpPr>
-          <p:cNvPr id="37" name="legend Output"/>
+          <p:cNvPr id="51" name="legend Output"/>
           <p:cNvSpPr txBox="1"/>
           <p:nvPr/>
         </p:nvSpPr>
@@ -26497,7 +26829,7 @@
       </p:sp>
       <p:sp>
         <p:nvSpPr>
-          <p:cNvPr id="38" name="needs band"/>
+          <p:cNvPr id="52" name="needs band"/>
           <p:cNvSpPr/>
           <p:nvPr/>
         </p:nvSpPr>
@@ -26519,7 +26851,7 @@
       </p:sp>
       <p:sp>
         <p:nvSpPr>
-          <p:cNvPr id="39" name="needs text"/>
+          <p:cNvPr id="53" name="needs text"/>
           <p:cNvSpPr txBox="1"/>
           <p:nvPr/>
         </p:nvSpPr>

--- a/docs/CrossMEP_CIBW78_talk.pptx
+++ b/docs/CrossMEP_CIBW78_talk.pptx
@@ -129,12 +129,12 @@
   <p:extLst>
     <p:ext uri="{521415D9-36F7-43E2-AB2F-B90AF26B5E84}">
       <p14:sectionLst xmlns:p14="http://schemas.microsoft.com/office/powerpoint/2010/main">
-        <p14:section name="Opening" id="{0dfe272f-d792-88b8-9614-e4abfb1d46e9}">
+        <p14:section name="Opening" id="{577ccaca-a128-3039-2740-110de3c36e44}">
           <p14:sldIdLst>
             <p14:sldId id="256"/>
           </p14:sldIdLst>
         </p14:section>
-        <p14:section name="Motivation" id="{e7404278-e84d-6b24-d25e-6fc5205cc32b}">
+        <p14:section name="Motivation" id="{b2a9495c-5e40-332c-1c49-f43c9ad592cb}">
           <p14:sldIdLst>
             <p14:sldId id="257"/>
             <p14:sldId id="258"/>
@@ -143,7 +143,7 @@
             <p14:sldId id="261"/>
           </p14:sldIdLst>
         </p14:section>
-        <p14:section name="The dataset" id="{3f3781ff-ded6-a46f-0411-33bd0136dc1f}">
+        <p14:section name="The dataset" id="{752d7ec6-ffe9-1f43-7463-df86752d50df}">
           <p14:sldIdLst>
             <p14:sldId id="262"/>
             <p14:sldId id="263"/>
@@ -152,14 +152,14 @@
             <p14:sldId id="266"/>
           </p14:sldIdLst>
         </p14:section>
-        <p14:section name="Experiments" id="{5c444600-9395-9fce-1fff-73e332459cb8}">
+        <p14:section name="Experiments" id="{a7b575e1-56dd-5f33-be0d-b63d15a3cc3b}">
           <p14:sldIdLst>
             <p14:sldId id="267"/>
             <p14:sldId id="268"/>
             <p14:sldId id="269"/>
           </p14:sldIdLst>
         </p14:section>
-        <p14:section name="Use" id="{01dbfdb5-0bcd-3491-d6ed-4ea0a5fbce10}">
+        <p14:section name="Use" id="{dbaa0df0-091f-0e2e-9174-a506d3fb19e6}">
           <p14:sldIdLst>
             <p14:sldId id="270"/>
             <p14:sldId id="271"/>
@@ -167,7 +167,7 @@
             <p14:sldId id="273"/>
           </p14:sldIdLst>
         </p14:section>
-        <p14:section name="Appendix" id="{4e017b5a-212e-1064-2654-016c3caac2f3}">
+        <p14:section name="Appendix" id="{afbba0d5-91f7-ed0d-ffb9-2dcd0351f685}">
           <p14:sldIdLst>
             <p14:sldId id="274"/>
             <p14:sldId id="275"/>
@@ -2029,7 +2029,7 @@
           <a:p>
             <a:r>
               <a:rPr lang="en-US" dirty="0"/>
-              <a:t>Hello everyone, I'm Lavinia Pedrollo, from Stanford. Every pipe, duct and cable tray in a building hangs from a support that an engineer designs by hand, from the section at that spot. We want to teach machines to do some of that work, and the first thing we found missing was data: there was no public set of support-design problems. So, with David Gvadzabia, Torben Graeber and Martin Fischer, we built one. It's called CrossMEP. (0:00)</a:t>
+              <a:t>I'm Lavinia Pedrollo, from Stanford. Every pipe, duct and cable tray in a building hangs from a support that an engineer designs by hand. We want machines to do some of that, and the first thing missing was data: no public set of support-design problems existed. So we built one, CrossMEP, with David Gvadzabia, Torben Graeber and Martin Fischer. (0:00)</a:t>
             </a:r>
             <a:endParaRPr lang="en-US" dirty="0"/>
           </a:p>
@@ -2117,7 +2117,7 @@
           <a:p>
             <a:r>
               <a:rPr lang="en-US" dirty="0"/>
-              <a:t>The release has four splits on disjoint seeds, so a method is never tested on what it trained on: five thousand contexts for training, five hundred each for validation and test, and a benchmark of one thousand, a hundred and twenty-five per tier. Everything is plain JSON with a schema and a datasheet. (4:55)</a:t>
+              <a:t>Four splits on disjoint seeds: five thousand for training, five hundred each for validation and test, and a benchmark of a thousand, a hundred and twenty-five per tier. Plain JSON, with a schema and a datasheet. (4:00)</a:t>
             </a:r>
             <a:endParaRPr lang="en-US" dirty="0"/>
           </a:p>
@@ -2205,7 +2205,7 @@
           <a:p>
             <a:r>
               <a:rPr lang="en-US" dirty="0"/>
-              <a:t>Here's one benchmark context per tier. C1 is a single element, the most common support in any building. By C8 you have eigh